--- a/docs/decks/L07.pptx
+++ b/docs/decks/L07.pptx
@@ -29,9 +29,10 @@
     <p:sldId id="277" r:id="rId23"/>
     <p:sldId id="278" r:id="rId24"/>
     <p:sldId id="279" r:id="rId25"/>
+    <p:sldId id="280" r:id="rId26"/>
   </p:sldIdLst>
   <p:notesMasterIdLst>
-    <p:notesMasterId r:id="rId26"/>
+    <p:notesMasterId r:id="rId27"/>
   </p:notesMasterIdLst>
   <p:sldSz cx="12192000" cy="6858000"/>
   <p:notesSz cx="6858000" cy="12192000"/>
@@ -1957,6 +1958,94 @@
             <a:fld id="{F7021451-1387-4CA6-816F-3879F97B5CBC}" type="slidenum">
               <a:rPr lang="en-US"/>
               <a:t>24</a:t>
+            </a:fld>
+            <a:endParaRPr lang="en-US"/>
+          </a:p>
+        </p:txBody>
+      </p:sp>
+    </p:spTree>
+    <p:extLst>
+      <p:ext uri="{BB962C8B-B14F-4D97-AF65-F5344CB8AC3E}">
+        <p14:creationId xmlns:p14="http://schemas.microsoft.com/office/powerpoint/2010/main" val="1024086991"/>
+      </p:ext>
+    </p:extLst>
+  </p:cSld>
+  <p:clrMapOvr>
+    <a:masterClrMapping/>
+  </p:clrMapOvr>
+</p:notes>
+</file>
+
+<file path=ppt/notesSlides/notesSlide25.xml><?xml version="1.0" encoding="utf-8"?>
+<p:notes xmlns:a="http://schemas.openxmlformats.org/drawingml/2006/main" xmlns:r="http://schemas.openxmlformats.org/officeDocument/2006/relationships" xmlns:p="http://schemas.openxmlformats.org/presentationml/2006/main">
+  <p:cSld>
+    <p:spTree>
+      <p:nvGrpSpPr>
+        <p:cNvPr id="1" name=""/>
+        <p:cNvGrpSpPr/>
+        <p:nvPr/>
+      </p:nvGrpSpPr>
+      <p:grpSpPr>
+        <a:xfrm>
+          <a:off x="0" y="0"/>
+          <a:ext cx="0" cy="0"/>
+          <a:chOff x="0" y="0"/>
+          <a:chExt cx="0" cy="0"/>
+        </a:xfrm>
+      </p:grpSpPr>
+      <p:sp>
+        <p:nvSpPr>
+          <p:cNvPr id="2" name="Slide Image Placeholder 1"/>
+          <p:cNvSpPr>
+            <a:spLocks noGrp="1" noRot="1" noChangeAspect="1"/>
+          </p:cNvSpPr>
+          <p:nvPr>
+            <p:ph type="sldImg"/>
+          </p:nvPr>
+        </p:nvSpPr>
+        <p:spPr/>
+      </p:sp>
+      <p:sp>
+        <p:nvSpPr>
+          <p:cNvPr id="3" name="Notes Placeholder 2"/>
+          <p:cNvSpPr>
+            <a:spLocks noGrp="1"/>
+          </p:cNvSpPr>
+          <p:nvPr>
+            <p:ph type="body" idx="1"/>
+          </p:nvPr>
+        </p:nvSpPr>
+        <p:spPr/>
+        <p:txBody>
+          <a:bodyPr/>
+          <a:lstStyle/>
+          <a:p>
+            <a:r>
+              <a:rPr lang="en-US" dirty="0"/>
+              <a:t/>
+            </a:r>
+            <a:endParaRPr lang="en-US" dirty="0"/>
+          </a:p>
+        </p:txBody>
+      </p:sp>
+      <p:sp>
+        <p:nvSpPr>
+          <p:cNvPr id="4" name="Slide Number Placeholder 3"/>
+          <p:cNvSpPr>
+            <a:spLocks noGrp="1"/>
+          </p:cNvSpPr>
+          <p:nvPr>
+            <p:ph type="sldNum" sz="quarter" idx="10"/>
+          </p:nvPr>
+        </p:nvSpPr>
+        <p:spPr/>
+        <p:txBody>
+          <a:bodyPr/>
+          <a:lstStyle/>
+          <a:p>
+            <a:fld id="{F7021451-1387-4CA6-816F-3879F97B5CBC}" type="slidenum">
+              <a:rPr lang="en-US"/>
+              <a:t>25</a:t>
             </a:fld>
             <a:endParaRPr lang="en-US"/>
           </a:p>
@@ -8053,11 +8142,11 @@
         <p:spPr>
           <a:xfrm>
             <a:off x="566928" y="1737360"/>
-            <a:ext cx="11064240" cy="1600200"/>
+            <a:ext cx="11064240" cy="1874520"/>
           </a:xfrm>
           <a:prstGeom prst="roundRect">
             <a:avLst>
-              <a:gd name="adj" fmla="val 6857"/>
+              <a:gd name="adj" fmla="val 5854"/>
             </a:avLst>
           </a:prstGeom>
           <a:solidFill>
@@ -8075,7 +8164,7 @@
         <p:spPr>
           <a:xfrm>
             <a:off x="786384" y="1883664"/>
-            <a:ext cx="10625328" cy="1307592"/>
+            <a:ext cx="10625328" cy="1581912"/>
           </a:xfrm>
           <a:prstGeom prst="rect">
             <a:avLst/>
@@ -9336,11 +9425,11 @@
         <p:spPr>
           <a:xfrm>
             <a:off x="566928" y="1737360"/>
-            <a:ext cx="11064240" cy="1600200"/>
+            <a:ext cx="11064240" cy="1874520"/>
           </a:xfrm>
           <a:prstGeom prst="roundRect">
             <a:avLst>
-              <a:gd name="adj" fmla="val 6857"/>
+              <a:gd name="adj" fmla="val 5854"/>
             </a:avLst>
           </a:prstGeom>
           <a:solidFill>
@@ -9358,7 +9447,7 @@
         <p:spPr>
           <a:xfrm>
             <a:off x="786384" y="1883664"/>
-            <a:ext cx="10625328" cy="1307592"/>
+            <a:ext cx="10625328" cy="1581912"/>
           </a:xfrm>
           <a:prstGeom prst="rect">
             <a:avLst/>
@@ -9405,7 +9494,7 @@
                 <a:ea typeface="Courier New" pitchFamily="34" charset="-122"/>
                 <a:cs typeface="Courier New" pitchFamily="34" charset="-120"/>
               </a:rPr>
-              <a:t>if (failures &gt;= 3 &amp;&amp; DateTime.UtcNow &lt; openUntil)</a:t>
+              <a:t>var br = breakers.GetOrAdd(chain[i], _ =&gt; new Breaker());</a:t>
             </a:r>
             <a:endParaRPr lang="en-US" sz="1200" dirty="0"/>
           </a:p>
@@ -9419,13 +9508,33 @@
             <a:r>
               <a:rPr lang="en-US" sz="1200" dirty="0">
                 <a:solidFill>
-                  <a:srgbClr val="F78C6C"/>
+                  <a:srgbClr val="82AAFF"/>
                 </a:solidFill>
                 <a:latin typeface="Courier New" pitchFamily="34" charset="0"/>
                 <a:ea typeface="Courier New" pitchFamily="34" charset="-122"/>
                 <a:cs typeface="Courier New" pitchFamily="34" charset="-120"/>
               </a:rPr>
-              <a:t>    return Degraded();   </a:t>
+              <a:t>if (br.OpenUntil &gt; now)</a:t>
+            </a:r>
+            <a:endParaRPr lang="en-US" sz="1200" dirty="0"/>
+          </a:p>
+          <a:p>
+            <a:pPr indent="0" marL="0">
+              <a:lnSpc>
+                <a:spcPct val="130000"/>
+              </a:lnSpc>
+              <a:buNone/>
+            </a:pPr>
+            <a:r>
+              <a:rPr lang="en-US" sz="1200" dirty="0">
+                <a:solidFill>
+                  <a:srgbClr val="F78C6C"/>
+                </a:solidFill>
+                <a:latin typeface="Courier New" pitchFamily="34" charset="0"/>
+                <a:ea typeface="Courier New" pitchFamily="34" charset="-122"/>
+                <a:cs typeface="Courier New" pitchFamily="34" charset="-120"/>
+              </a:rPr>
+              <a:t>    continue;            </a:t>
             </a:r>
             <a:pPr indent="0" marL="0">
               <a:lnSpc>
@@ -11440,8 +11549,47 @@
         </p:nvSpPr>
         <p:spPr>
           <a:xfrm>
-            <a:off x="566928" y="365760"/>
-            <a:ext cx="8881567" cy="603504"/>
+            <a:off x="566928" y="384048"/>
+            <a:ext cx="566928" cy="566928"/>
+          </a:xfrm>
+          <a:prstGeom prst="rect">
+            <a:avLst/>
+          </a:prstGeom>
+          <a:noFill/>
+          <a:ln/>
+        </p:spPr>
+        <p:txBody>
+          <a:bodyPr wrap="square" lIns="0" tIns="0" rIns="0" bIns="0" rtlCol="0" anchor="ctr"/>
+          <a:lstStyle/>
+          <a:p>
+            <a:pPr algn="l" indent="0" marL="0">
+              <a:buNone/>
+            </a:pPr>
+            <a:r>
+              <a:rPr lang="en-US" sz="2600" b="1" dirty="0">
+                <a:solidFill>
+                  <a:srgbClr val="C9C5F2"/>
+                </a:solidFill>
+                <a:latin typeface="Courier New" pitchFamily="34" charset="0"/>
+                <a:ea typeface="Courier New" pitchFamily="34" charset="-122"/>
+                <a:cs typeface="Courier New" pitchFamily="34" charset="-120"/>
+              </a:rPr>
+              <a:t>09</a:t>
+            </a:r>
+            <a:endParaRPr lang="en-US" sz="2600" dirty="0"/>
+          </a:p>
+        </p:txBody>
+      </p:sp>
+      <p:sp>
+        <p:nvSpPr>
+          <p:cNvPr id="3" name="Text 1"/>
+          <p:cNvSpPr/>
+          <p:nvPr/>
+        </p:nvSpPr>
+        <p:spPr>
+          <a:xfrm>
+            <a:off x="1225296" y="365760"/>
+            <a:ext cx="8223199" cy="603504"/>
           </a:xfrm>
           <a:prstGeom prst="rect">
             <a:avLst/>
@@ -11465,7 +11613,7 @@
                 <a:ea typeface="Calibri" pitchFamily="34" charset="-122"/>
                 <a:cs typeface="Calibri" pitchFamily="34" charset="-120"/>
               </a:rPr>
-              <a:t>Зараз ви побачите — і навіщо</a:t>
+              <a:t>Дві сучасні поправки до бюджету часу</a:t>
             </a:r>
             <a:endParaRPr lang="en-US" sz="2500" dirty="0"/>
           </a:p>
@@ -11473,7 +11621,46 @@
       </p:sp>
       <p:sp>
         <p:nvSpPr>
-          <p:cNvPr id="3" name="Shape 1"/>
+          <p:cNvPr id="4" name="Text 2"/>
+          <p:cNvSpPr/>
+          <p:nvPr/>
+        </p:nvSpPr>
+        <p:spPr>
+          <a:xfrm>
+            <a:off x="1225296" y="1005840"/>
+            <a:ext cx="8223199" cy="292608"/>
+          </a:xfrm>
+          <a:prstGeom prst="rect">
+            <a:avLst/>
+          </a:prstGeom>
+          <a:noFill/>
+          <a:ln/>
+        </p:spPr>
+        <p:txBody>
+          <a:bodyPr wrap="square" lIns="0" tIns="0" rIns="0" bIns="0" rtlCol="0" anchor="t"/>
+          <a:lstStyle/>
+          <a:p>
+            <a:pPr indent="0" marL="0">
+              <a:buNone/>
+            </a:pPr>
+            <a:r>
+              <a:rPr lang="en-US" sz="1300" dirty="0">
+                <a:solidFill>
+                  <a:srgbClr val="565C6B"/>
+                </a:solidFill>
+                <a:latin typeface="Calibri" pitchFamily="34" charset="0"/>
+                <a:ea typeface="Calibri" pitchFamily="34" charset="-122"/>
+                <a:cs typeface="Calibri" pitchFamily="34" charset="-120"/>
+              </a:rPr>
+              <a:t>Яких не було в епоху «одна модель — одна відповідь»</a:t>
+            </a:r>
+            <a:endParaRPr lang="en-US" sz="1300" dirty="0"/>
+          </a:p>
+        </p:txBody>
+      </p:sp>
+      <p:sp>
+        <p:nvSpPr>
+          <p:cNvPr id="5" name="Shape 3"/>
           <p:cNvSpPr/>
           <p:nvPr/>
         </p:nvSpPr>
@@ -11488,14 +11675,14 @@
             </a:avLst>
           </a:prstGeom>
           <a:solidFill>
-            <a:srgbClr val="E9F3EE"/>
+            <a:srgbClr val="ECEBFB"/>
           </a:solidFill>
           <a:ln/>
         </p:spPr>
       </p:sp>
       <p:sp>
         <p:nvSpPr>
-          <p:cNvPr id="4" name="Text 2"/>
+          <p:cNvPr id="6" name="Text 4"/>
           <p:cNvSpPr/>
           <p:nvPr/>
         </p:nvSpPr>
@@ -11520,13 +11707,13 @@
             <a:r>
               <a:rPr lang="en-US" sz="900" b="1" spc="100" kern="0" dirty="0">
                 <a:solidFill>
-                  <a:srgbClr val="177245"/>
+                  <a:srgbClr val="4038C4"/>
                 </a:solidFill>
                 <a:latin typeface="Courier New" pitchFamily="34" charset="0"/>
                 <a:ea typeface="Courier New" pitchFamily="34" charset="-122"/>
                 <a:cs typeface="Courier New" pitchFamily="34" charset="-120"/>
               </a:rPr>
-              <a:t>ПРАКТИКА</a:t>
+              <a:t>ТЕОРІЯ</a:t>
             </a:r>
             <a:endParaRPr lang="en-US" sz="900" dirty="0"/>
           </a:p>
@@ -11534,7 +11721,7 @@
       </p:sp>
       <p:sp>
         <p:nvSpPr>
-          <p:cNvPr id="5" name="Text 3"/>
+          <p:cNvPr id="7" name="Text 5"/>
           <p:cNvSpPr/>
           <p:nvPr/>
         </p:nvSpPr>
@@ -11573,18 +11760,397 @@
       </p:sp>
       <p:sp>
         <p:nvSpPr>
-          <p:cNvPr id="6" name="Shape 4"/>
-          <p:cNvSpPr/>
-          <p:nvPr/>
-        </p:nvSpPr>
-        <p:spPr>
-          <a:xfrm>
-            <a:off x="566928" y="1691640"/>
-            <a:ext cx="3520440" cy="1417320"/>
+          <p:cNvPr id="8" name="Shape 6"/>
+          <p:cNvSpPr/>
+          <p:nvPr/>
+        </p:nvSpPr>
+        <p:spPr>
+          <a:xfrm>
+            <a:off x="566928" y="1965960"/>
+            <a:ext cx="5349240" cy="1783080"/>
           </a:xfrm>
           <a:prstGeom prst="roundRect">
             <a:avLst>
-              <a:gd name="adj" fmla="val 7742"/>
+              <a:gd name="adj" fmla="val 6154"/>
+            </a:avLst>
+          </a:prstGeom>
+          <a:solidFill>
+            <a:srgbClr val="F8F0E2"/>
+          </a:solidFill>
+          <a:ln/>
+        </p:spPr>
+      </p:sp>
+      <p:sp>
+        <p:nvSpPr>
+          <p:cNvPr id="9" name="Shape 7"/>
+          <p:cNvSpPr/>
+          <p:nvPr/>
+        </p:nvSpPr>
+        <p:spPr>
+          <a:xfrm>
+            <a:off x="768096" y="2148840"/>
+            <a:ext cx="384048" cy="384048"/>
+          </a:xfrm>
+          <a:prstGeom prst="ellipse">
+            <a:avLst/>
+          </a:prstGeom>
+          <a:solidFill>
+            <a:srgbClr val="9A5B12"/>
+          </a:solidFill>
+          <a:ln/>
+        </p:spPr>
+      </p:sp>
+      <p:sp>
+        <p:nvSpPr>
+          <p:cNvPr id="10" name="Text 8"/>
+          <p:cNvSpPr/>
+          <p:nvPr/>
+        </p:nvSpPr>
+        <p:spPr>
+          <a:xfrm>
+            <a:off x="768096" y="2148840"/>
+            <a:ext cx="384048" cy="384048"/>
+          </a:xfrm>
+          <a:prstGeom prst="rect">
+            <a:avLst/>
+          </a:prstGeom>
+          <a:noFill/>
+          <a:ln/>
+        </p:spPr>
+        <p:txBody>
+          <a:bodyPr wrap="square" lIns="0" tIns="0" rIns="0" bIns="0" rtlCol="0" anchor="ctr"/>
+          <a:lstStyle/>
+          <a:p>
+            <a:pPr algn="ctr" indent="0" marL="0">
+              <a:buNone/>
+            </a:pPr>
+            <a:r>
+              <a:rPr lang="en-US" sz="1200" b="1" dirty="0">
+                <a:solidFill>
+                  <a:srgbClr val="F8F0E2"/>
+                </a:solidFill>
+                <a:latin typeface="Courier New" pitchFamily="34" charset="0"/>
+                <a:ea typeface="Courier New" pitchFamily="34" charset="-122"/>
+                <a:cs typeface="Courier New" pitchFamily="34" charset="-120"/>
+              </a:rPr>
+              <a:t>1</a:t>
+            </a:r>
+            <a:endParaRPr lang="en-US" sz="1200" dirty="0"/>
+          </a:p>
+        </p:txBody>
+      </p:sp>
+      <p:sp>
+        <p:nvSpPr>
+          <p:cNvPr id="11" name="Text 9"/>
+          <p:cNvSpPr/>
+          <p:nvPr/>
+        </p:nvSpPr>
+        <p:spPr>
+          <a:xfrm>
+            <a:off x="1280160" y="2121408"/>
+            <a:ext cx="4434840" cy="438912"/>
+          </a:xfrm>
+          <a:prstGeom prst="rect">
+            <a:avLst/>
+          </a:prstGeom>
+          <a:noFill/>
+          <a:ln/>
+        </p:spPr>
+        <p:txBody>
+          <a:bodyPr wrap="square" lIns="0" tIns="0" rIns="0" bIns="0" rtlCol="0" anchor="ctr"/>
+          <a:lstStyle/>
+          <a:p>
+            <a:pPr indent="0" marL="0">
+              <a:buNone/>
+            </a:pPr>
+            <a:r>
+              <a:rPr lang="en-US" sz="1450" b="1" dirty="0">
+                <a:solidFill>
+                  <a:srgbClr val="9A5B12"/>
+                </a:solidFill>
+                <a:latin typeface="Calibri" pitchFamily="34" charset="0"/>
+                <a:ea typeface="Calibri" pitchFamily="34" charset="-122"/>
+                <a:cs typeface="Calibri" pitchFamily="34" charset="-120"/>
+              </a:rPr>
+              <a:t>Режим мислення — інший порядок часу</a:t>
+            </a:r>
+            <a:endParaRPr lang="en-US" sz="1450" dirty="0"/>
+          </a:p>
+        </p:txBody>
+      </p:sp>
+      <p:sp>
+        <p:nvSpPr>
+          <p:cNvPr id="12" name="Text 10"/>
+          <p:cNvSpPr/>
+          <p:nvPr/>
+        </p:nvSpPr>
+        <p:spPr>
+          <a:xfrm>
+            <a:off x="768096" y="2651760"/>
+            <a:ext cx="4946904" cy="941832"/>
+          </a:xfrm>
+          <a:prstGeom prst="rect">
+            <a:avLst/>
+          </a:prstGeom>
+          <a:noFill/>
+          <a:ln/>
+        </p:spPr>
+        <p:txBody>
+          <a:bodyPr wrap="square" lIns="0" tIns="0" rIns="0" bIns="0" rtlCol="0" anchor="t"/>
+          <a:lstStyle/>
+          <a:p>
+            <a:pPr indent="0" marL="0">
+              <a:buNone/>
+            </a:pPr>
+            <a:r>
+              <a:rPr lang="en-US" sz="1200" dirty="0">
+                <a:solidFill>
+                  <a:srgbClr val="1B1D23"/>
+                </a:solidFill>
+                <a:latin typeface="Calibri" pitchFamily="34" charset="0"/>
+                <a:ea typeface="Calibri" pitchFamily="34" charset="-122"/>
+                <a:cs typeface="Calibri" pitchFamily="34" charset="-120"/>
+              </a:rPr>
+              <a:t>секунди замість сотень мілісекунд: таймаут під швидкий режим «падає» на легітимно повільній відповіді</a:t>
+            </a:r>
+            <a:endParaRPr lang="en-US" sz="1200" dirty="0"/>
+          </a:p>
+        </p:txBody>
+      </p:sp>
+      <p:sp>
+        <p:nvSpPr>
+          <p:cNvPr id="13" name="Shape 11"/>
+          <p:cNvSpPr/>
+          <p:nvPr/>
+        </p:nvSpPr>
+        <p:spPr>
+          <a:xfrm>
+            <a:off x="6281928" y="1965960"/>
+            <a:ext cx="5349240" cy="1783080"/>
+          </a:xfrm>
+          <a:prstGeom prst="roundRect">
+            <a:avLst>
+              <a:gd name="adj" fmla="val 6154"/>
+            </a:avLst>
+          </a:prstGeom>
+          <a:solidFill>
+            <a:srgbClr val="F8F0E2"/>
+          </a:solidFill>
+          <a:ln/>
+        </p:spPr>
+      </p:sp>
+      <p:sp>
+        <p:nvSpPr>
+          <p:cNvPr id="14" name="Shape 12"/>
+          <p:cNvSpPr/>
+          <p:nvPr/>
+        </p:nvSpPr>
+        <p:spPr>
+          <a:xfrm>
+            <a:off x="6483096" y="2148840"/>
+            <a:ext cx="384048" cy="384048"/>
+          </a:xfrm>
+          <a:prstGeom prst="ellipse">
+            <a:avLst/>
+          </a:prstGeom>
+          <a:solidFill>
+            <a:srgbClr val="9A5B12"/>
+          </a:solidFill>
+          <a:ln/>
+        </p:spPr>
+      </p:sp>
+      <p:sp>
+        <p:nvSpPr>
+          <p:cNvPr id="15" name="Text 13"/>
+          <p:cNvSpPr/>
+          <p:nvPr/>
+        </p:nvSpPr>
+        <p:spPr>
+          <a:xfrm>
+            <a:off x="6483096" y="2148840"/>
+            <a:ext cx="384048" cy="384048"/>
+          </a:xfrm>
+          <a:prstGeom prst="rect">
+            <a:avLst/>
+          </a:prstGeom>
+          <a:noFill/>
+          <a:ln/>
+        </p:spPr>
+        <p:txBody>
+          <a:bodyPr wrap="square" lIns="0" tIns="0" rIns="0" bIns="0" rtlCol="0" anchor="ctr"/>
+          <a:lstStyle/>
+          <a:p>
+            <a:pPr algn="ctr" indent="0" marL="0">
+              <a:buNone/>
+            </a:pPr>
+            <a:r>
+              <a:rPr lang="en-US" sz="1200" b="1" dirty="0">
+                <a:solidFill>
+                  <a:srgbClr val="F8F0E2"/>
+                </a:solidFill>
+                <a:latin typeface="Courier New" pitchFamily="34" charset="0"/>
+                <a:ea typeface="Courier New" pitchFamily="34" charset="-122"/>
+                <a:cs typeface="Courier New" pitchFamily="34" charset="-120"/>
+              </a:rPr>
+              <a:t>2</a:t>
+            </a:r>
+            <a:endParaRPr lang="en-US" sz="1200" dirty="0"/>
+          </a:p>
+        </p:txBody>
+      </p:sp>
+      <p:sp>
+        <p:nvSpPr>
+          <p:cNvPr id="16" name="Text 14"/>
+          <p:cNvSpPr/>
+          <p:nvPr/>
+        </p:nvSpPr>
+        <p:spPr>
+          <a:xfrm>
+            <a:off x="6995160" y="2121408"/>
+            <a:ext cx="4434840" cy="438912"/>
+          </a:xfrm>
+          <a:prstGeom prst="rect">
+            <a:avLst/>
+          </a:prstGeom>
+          <a:noFill/>
+          <a:ln/>
+        </p:spPr>
+        <p:txBody>
+          <a:bodyPr wrap="square" lIns="0" tIns="0" rIns="0" bIns="0" rtlCol="0" anchor="ctr"/>
+          <a:lstStyle/>
+          <a:p>
+            <a:pPr indent="0" marL="0">
+              <a:buNone/>
+            </a:pPr>
+            <a:r>
+              <a:rPr lang="en-US" sz="1450" b="1" dirty="0">
+                <a:solidFill>
+                  <a:srgbClr val="9A5B12"/>
+                </a:solidFill>
+                <a:latin typeface="Calibri" pitchFamily="34" charset="0"/>
+                <a:ea typeface="Calibri" pitchFamily="34" charset="-122"/>
+                <a:cs typeface="Calibri" pitchFamily="34" charset="-120"/>
+              </a:rPr>
+              <a:t>Ліміти стали багатовимірними</a:t>
+            </a:r>
+            <a:endParaRPr lang="en-US" sz="1450" dirty="0"/>
+          </a:p>
+        </p:txBody>
+      </p:sp>
+      <p:sp>
+        <p:nvSpPr>
+          <p:cNvPr id="17" name="Text 15"/>
+          <p:cNvSpPr/>
+          <p:nvPr/>
+        </p:nvSpPr>
+        <p:spPr>
+          <a:xfrm>
+            <a:off x="6483096" y="2651760"/>
+            <a:ext cx="4946904" cy="941832"/>
+          </a:xfrm>
+          <a:prstGeom prst="rect">
+            <a:avLst/>
+          </a:prstGeom>
+          <a:noFill/>
+          <a:ln/>
+        </p:spPr>
+        <p:txBody>
+          <a:bodyPr wrap="square" lIns="0" tIns="0" rIns="0" bIns="0" rtlCol="0" anchor="t"/>
+          <a:lstStyle/>
+          <a:p>
+            <a:pPr indent="0" marL="0">
+              <a:buNone/>
+            </a:pPr>
+            <a:r>
+              <a:rPr lang="en-US" sz="1200" dirty="0">
+                <a:solidFill>
+                  <a:srgbClr val="1B1D23"/>
+                </a:solidFill>
+                <a:latin typeface="Calibri" pitchFamily="34" charset="0"/>
+                <a:ea typeface="Calibri" pitchFamily="34" charset="-122"/>
+                <a:cs typeface="Calibri" pitchFamily="34" charset="-120"/>
+              </a:rPr>
+              <a:t>не лише запити на хвилину: токени на хвилину, окремі квоти на «думаючі» моделі й кешовані токени</a:t>
+            </a:r>
+            <a:endParaRPr lang="en-US" sz="1200" dirty="0"/>
+          </a:p>
+        </p:txBody>
+      </p:sp>
+      <p:sp>
+        <p:nvSpPr>
+          <p:cNvPr id="18" name="Shape 16"/>
+          <p:cNvSpPr/>
+          <p:nvPr/>
+        </p:nvSpPr>
+        <p:spPr>
+          <a:xfrm>
+            <a:off x="566928" y="4023360"/>
+            <a:ext cx="11064240" cy="960120"/>
+          </a:xfrm>
+          <a:prstGeom prst="roundRect">
+            <a:avLst>
+              <a:gd name="adj" fmla="val 11429"/>
+            </a:avLst>
+          </a:prstGeom>
+          <a:solidFill>
+            <a:srgbClr val="F9E9E8"/>
+          </a:solidFill>
+          <a:ln/>
+        </p:spPr>
+      </p:sp>
+      <p:sp>
+        <p:nvSpPr>
+          <p:cNvPr id="19" name="Text 17"/>
+          <p:cNvSpPr/>
+          <p:nvPr/>
+        </p:nvSpPr>
+        <p:spPr>
+          <a:xfrm>
+            <a:off x="786384" y="4169664"/>
+            <a:ext cx="10625328" cy="667512"/>
+          </a:xfrm>
+          <a:prstGeom prst="rect">
+            <a:avLst/>
+          </a:prstGeom>
+          <a:noFill/>
+          <a:ln/>
+        </p:spPr>
+        <p:txBody>
+          <a:bodyPr wrap="square" lIns="0" tIns="0" rIns="0" bIns="0" rtlCol="0" anchor="ctr"/>
+          <a:lstStyle/>
+          <a:p>
+            <a:pPr indent="0" marL="0">
+              <a:buNone/>
+            </a:pPr>
+            <a:r>
+              <a:rPr lang="en-US" sz="1300" dirty="0">
+                <a:solidFill>
+                  <a:srgbClr val="1B1D23"/>
+                </a:solidFill>
+                <a:latin typeface="Calibri" pitchFamily="34" charset="0"/>
+                <a:ea typeface="Calibri" pitchFamily="34" charset="-122"/>
+                <a:cs typeface="Calibri" pitchFamily="34" charset="-120"/>
+              </a:rPr>
+              <a:t>429 приходить не тому, що «багато запитів», а тому, що ви вибрали токен-квоту.</a:t>
+            </a:r>
+            <a:endParaRPr lang="en-US" sz="1300" dirty="0"/>
+          </a:p>
+        </p:txBody>
+      </p:sp>
+      <p:sp>
+        <p:nvSpPr>
+          <p:cNvPr id="20" name="Shape 18"/>
+          <p:cNvSpPr/>
+          <p:nvPr/>
+        </p:nvSpPr>
+        <p:spPr>
+          <a:xfrm>
+            <a:off x="566928" y="5166360"/>
+            <a:ext cx="11064240" cy="914400"/>
+          </a:xfrm>
+          <a:prstGeom prst="roundRect">
+            <a:avLst>
+              <a:gd name="adj" fmla="val 12000"/>
             </a:avLst>
           </a:prstGeom>
           <a:solidFill>
@@ -11595,73 +12161,53 @@
       </p:sp>
       <p:sp>
         <p:nvSpPr>
-          <p:cNvPr id="7" name="Shape 5"/>
-          <p:cNvSpPr/>
-          <p:nvPr/>
-        </p:nvSpPr>
-        <p:spPr>
-          <a:xfrm>
-            <a:off x="768096" y="1874520"/>
-            <a:ext cx="384048" cy="384048"/>
-          </a:xfrm>
-          <a:prstGeom prst="ellipse">
-            <a:avLst/>
-          </a:prstGeom>
-          <a:solidFill>
-            <a:srgbClr val="177245"/>
-          </a:solidFill>
-          <a:ln/>
-        </p:spPr>
-      </p:sp>
-      <p:sp>
-        <p:nvSpPr>
-          <p:cNvPr id="8" name="Text 6"/>
-          <p:cNvSpPr/>
-          <p:nvPr/>
-        </p:nvSpPr>
-        <p:spPr>
-          <a:xfrm>
-            <a:off x="768096" y="1874520"/>
-            <a:ext cx="384048" cy="384048"/>
-          </a:xfrm>
-          <a:prstGeom prst="rect">
-            <a:avLst/>
-          </a:prstGeom>
-          <a:noFill/>
-          <a:ln/>
-        </p:spPr>
-        <p:txBody>
-          <a:bodyPr wrap="square" lIns="0" tIns="0" rIns="0" bIns="0" rtlCol="0" anchor="ctr"/>
-          <a:lstStyle/>
-          <a:p>
-            <a:pPr algn="ctr" indent="0" marL="0">
-              <a:buNone/>
-            </a:pPr>
-            <a:r>
-              <a:rPr lang="en-US" sz="1200" b="1" dirty="0">
-                <a:solidFill>
-                  <a:srgbClr val="E9F3EE"/>
+          <p:cNvPr id="21" name="Text 19"/>
+          <p:cNvSpPr/>
+          <p:nvPr/>
+        </p:nvSpPr>
+        <p:spPr>
+          <a:xfrm>
+            <a:off x="786384" y="5294376"/>
+            <a:ext cx="10625328" cy="219456"/>
+          </a:xfrm>
+          <a:prstGeom prst="rect">
+            <a:avLst/>
+          </a:prstGeom>
+          <a:noFill/>
+          <a:ln/>
+        </p:spPr>
+        <p:txBody>
+          <a:bodyPr wrap="square" lIns="0" tIns="0" rIns="0" bIns="0" rtlCol="0" anchor="ctr"/>
+          <a:lstStyle/>
+          <a:p>
+            <a:pPr indent="0" marL="0">
+              <a:buNone/>
+            </a:pPr>
+            <a:r>
+              <a:rPr lang="en-US" sz="950" b="1" spc="150" kern="0" dirty="0">
+                <a:solidFill>
+                  <a:srgbClr val="177245"/>
                 </a:solidFill>
                 <a:latin typeface="Courier New" pitchFamily="34" charset="0"/>
                 <a:ea typeface="Courier New" pitchFamily="34" charset="-122"/>
                 <a:cs typeface="Courier New" pitchFamily="34" charset="-120"/>
               </a:rPr>
-              <a:t>1</a:t>
-            </a:r>
-            <a:endParaRPr lang="en-US" sz="1200" dirty="0"/>
-          </a:p>
-        </p:txBody>
-      </p:sp>
-      <p:sp>
-        <p:nvSpPr>
-          <p:cNvPr id="9" name="Text 7"/>
-          <p:cNvSpPr/>
-          <p:nvPr/>
-        </p:nvSpPr>
-        <p:spPr>
-          <a:xfrm>
-            <a:off x="1280160" y="1847088"/>
-            <a:ext cx="2606040" cy="438912"/>
+              <a:t>ВИСНОВОК</a:t>
+            </a:r>
+            <a:endParaRPr lang="en-US" sz="950" dirty="0"/>
+          </a:p>
+        </p:txBody>
+      </p:sp>
+      <p:sp>
+        <p:nvSpPr>
+          <p:cNvPr id="22" name="Text 20"/>
+          <p:cNvSpPr/>
+          <p:nvPr/>
+        </p:nvSpPr>
+        <p:spPr>
+          <a:xfrm>
+            <a:off x="786384" y="5550408"/>
+            <a:ext cx="10625328" cy="402336"/>
           </a:xfrm>
           <a:prstGeom prst="rect">
             <a:avLst/>
@@ -11677,790 +12223,15 @@
               <a:buNone/>
             </a:pPr>
             <a:r>
-              <a:rPr lang="en-US" sz="1450" b="1" dirty="0">
-                <a:solidFill>
-                  <a:srgbClr val="177245"/>
+              <a:rPr lang="en-US" sz="1300" dirty="0">
+                <a:solidFill>
+                  <a:srgbClr val="1B1D23"/>
                 </a:solidFill>
                 <a:latin typeface="Calibri" pitchFamily="34" charset="0"/>
                 <a:ea typeface="Calibri" pitchFamily="34" charset="-122"/>
                 <a:cs typeface="Calibri" pitchFamily="34" charset="-120"/>
               </a:rPr>
-              <a:t>__fail_503 → заглушка</a:t>
-            </a:r>
-            <a:endParaRPr lang="en-US" sz="1450" dirty="0"/>
-          </a:p>
-        </p:txBody>
-      </p:sp>
-      <p:sp>
-        <p:nvSpPr>
-          <p:cNvPr id="10" name="Text 8"/>
-          <p:cNvSpPr/>
-          <p:nvPr/>
-        </p:nvSpPr>
-        <p:spPr>
-          <a:xfrm>
-            <a:off x="768096" y="2377440"/>
-            <a:ext cx="3118104" cy="576072"/>
-          </a:xfrm>
-          <a:prstGeom prst="rect">
-            <a:avLst/>
-          </a:prstGeom>
-          <a:noFill/>
-          <a:ln/>
-        </p:spPr>
-        <p:txBody>
-          <a:bodyPr wrap="square" lIns="0" tIns="0" rIns="0" bIns="0" rtlCol="0" anchor="t"/>
-          <a:lstStyle/>
-          <a:p>
-            <a:pPr indent="0" marL="0">
-              <a:buNone/>
-            </a:pPr>
-            <a:r>
-              <a:rPr lang="en-US" sz="1200" dirty="0">
-                <a:solidFill>
-                  <a:srgbClr val="1B1D23"/>
-                </a:solidFill>
-                <a:latin typeface="Calibri" pitchFamily="34" charset="0"/>
-                <a:ea typeface="Calibri" pitchFamily="34" charset="-122"/>
-                <a:cs typeface="Calibri" pitchFamily="34" charset="-120"/>
-              </a:rPr>
-              <a:t>ввічлива відмова замість 500-ки</a:t>
-            </a:r>
-            <a:endParaRPr lang="en-US" sz="1200" dirty="0"/>
-          </a:p>
-        </p:txBody>
-      </p:sp>
-      <p:sp>
-        <p:nvSpPr>
-          <p:cNvPr id="11" name="Shape 9"/>
-          <p:cNvSpPr/>
-          <p:nvPr/>
-        </p:nvSpPr>
-        <p:spPr>
-          <a:xfrm>
-            <a:off x="4270248" y="1691640"/>
-            <a:ext cx="3520440" cy="1417320"/>
-          </a:xfrm>
-          <a:prstGeom prst="roundRect">
-            <a:avLst>
-              <a:gd name="adj" fmla="val 7742"/>
-            </a:avLst>
-          </a:prstGeom>
-          <a:solidFill>
-            <a:srgbClr val="E9F3EE"/>
-          </a:solidFill>
-          <a:ln/>
-        </p:spPr>
-      </p:sp>
-      <p:sp>
-        <p:nvSpPr>
-          <p:cNvPr id="12" name="Shape 10"/>
-          <p:cNvSpPr/>
-          <p:nvPr/>
-        </p:nvSpPr>
-        <p:spPr>
-          <a:xfrm>
-            <a:off x="4471416" y="1874520"/>
-            <a:ext cx="384048" cy="384048"/>
-          </a:xfrm>
-          <a:prstGeom prst="ellipse">
-            <a:avLst/>
-          </a:prstGeom>
-          <a:solidFill>
-            <a:srgbClr val="177245"/>
-          </a:solidFill>
-          <a:ln/>
-        </p:spPr>
-      </p:sp>
-      <p:sp>
-        <p:nvSpPr>
-          <p:cNvPr id="13" name="Text 11"/>
-          <p:cNvSpPr/>
-          <p:nvPr/>
-        </p:nvSpPr>
-        <p:spPr>
-          <a:xfrm>
-            <a:off x="4471416" y="1874520"/>
-            <a:ext cx="384048" cy="384048"/>
-          </a:xfrm>
-          <a:prstGeom prst="rect">
-            <a:avLst/>
-          </a:prstGeom>
-          <a:noFill/>
-          <a:ln/>
-        </p:spPr>
-        <p:txBody>
-          <a:bodyPr wrap="square" lIns="0" tIns="0" rIns="0" bIns="0" rtlCol="0" anchor="ctr"/>
-          <a:lstStyle/>
-          <a:p>
-            <a:pPr algn="ctr" indent="0" marL="0">
-              <a:buNone/>
-            </a:pPr>
-            <a:r>
-              <a:rPr lang="en-US" sz="1200" b="1" dirty="0">
-                <a:solidFill>
-                  <a:srgbClr val="E9F3EE"/>
-                </a:solidFill>
-                <a:latin typeface="Courier New" pitchFamily="34" charset="0"/>
-                <a:ea typeface="Courier New" pitchFamily="34" charset="-122"/>
-                <a:cs typeface="Courier New" pitchFamily="34" charset="-120"/>
-              </a:rPr>
-              <a:t>2</a:t>
-            </a:r>
-            <a:endParaRPr lang="en-US" sz="1200" dirty="0"/>
-          </a:p>
-        </p:txBody>
-      </p:sp>
-      <p:sp>
-        <p:nvSpPr>
-          <p:cNvPr id="14" name="Text 12"/>
-          <p:cNvSpPr/>
-          <p:nvPr/>
-        </p:nvSpPr>
-        <p:spPr>
-          <a:xfrm>
-            <a:off x="4983480" y="1847088"/>
-            <a:ext cx="2606040" cy="438912"/>
-          </a:xfrm>
-          <a:prstGeom prst="rect">
-            <a:avLst/>
-          </a:prstGeom>
-          <a:noFill/>
-          <a:ln/>
-        </p:spPr>
-        <p:txBody>
-          <a:bodyPr wrap="square" lIns="0" tIns="0" rIns="0" bIns="0" rtlCol="0" anchor="ctr"/>
-          <a:lstStyle/>
-          <a:p>
-            <a:pPr indent="0" marL="0">
-              <a:buNone/>
-            </a:pPr>
-            <a:r>
-              <a:rPr lang="en-US" sz="1450" b="1" dirty="0">
-                <a:solidFill>
-                  <a:srgbClr val="177245"/>
-                </a:solidFill>
-                <a:latin typeface="Calibri" pitchFamily="34" charset="0"/>
-                <a:ea typeface="Calibri" pitchFamily="34" charset="-122"/>
-                <a:cs typeface="Calibri" pitchFamily="34" charset="-120"/>
-              </a:rPr>
-              <a:t>той самий маркер удруге</a:t>
-            </a:r>
-            <a:endParaRPr lang="en-US" sz="1450" dirty="0"/>
-          </a:p>
-        </p:txBody>
-      </p:sp>
-      <p:sp>
-        <p:nvSpPr>
-          <p:cNvPr id="15" name="Text 13"/>
-          <p:cNvSpPr/>
-          <p:nvPr/>
-        </p:nvSpPr>
-        <p:spPr>
-          <a:xfrm>
-            <a:off x="4471416" y="2377440"/>
-            <a:ext cx="3118104" cy="576072"/>
-          </a:xfrm>
-          <a:prstGeom prst="rect">
-            <a:avLst/>
-          </a:prstGeom>
-          <a:noFill/>
-          <a:ln/>
-        </p:spPr>
-        <p:txBody>
-          <a:bodyPr wrap="square" lIns="0" tIns="0" rIns="0" bIns="0" rtlCol="0" anchor="t"/>
-          <a:lstStyle/>
-          <a:p>
-            <a:pPr indent="0" marL="0">
-              <a:buNone/>
-            </a:pPr>
-            <a:r>
-              <a:rPr lang="en-US" sz="1200" dirty="0">
-                <a:solidFill>
-                  <a:srgbClr val="1B1D23"/>
-                </a:solidFill>
-                <a:latin typeface="Calibri" pitchFamily="34" charset="0"/>
-                <a:ea typeface="Calibri" pitchFamily="34" charset="-122"/>
-                <a:cs typeface="Calibri" pitchFamily="34" charset="-120"/>
-              </a:rPr>
-              <a:t>збій коштує мілісекунди</a:t>
-            </a:r>
-            <a:endParaRPr lang="en-US" sz="1200" dirty="0"/>
-          </a:p>
-        </p:txBody>
-      </p:sp>
-      <p:sp>
-        <p:nvSpPr>
-          <p:cNvPr id="16" name="Shape 14"/>
-          <p:cNvSpPr/>
-          <p:nvPr/>
-        </p:nvSpPr>
-        <p:spPr>
-          <a:xfrm>
-            <a:off x="7973568" y="1691640"/>
-            <a:ext cx="3520440" cy="1417320"/>
-          </a:xfrm>
-          <a:prstGeom prst="roundRect">
-            <a:avLst>
-              <a:gd name="adj" fmla="val 7742"/>
-            </a:avLst>
-          </a:prstGeom>
-          <a:solidFill>
-            <a:srgbClr val="F8F0E2"/>
-          </a:solidFill>
-          <a:ln/>
-        </p:spPr>
-      </p:sp>
-      <p:sp>
-        <p:nvSpPr>
-          <p:cNvPr id="17" name="Shape 15"/>
-          <p:cNvSpPr/>
-          <p:nvPr/>
-        </p:nvSpPr>
-        <p:spPr>
-          <a:xfrm>
-            <a:off x="8174736" y="1874520"/>
-            <a:ext cx="384048" cy="384048"/>
-          </a:xfrm>
-          <a:prstGeom prst="ellipse">
-            <a:avLst/>
-          </a:prstGeom>
-          <a:solidFill>
-            <a:srgbClr val="9A5B12"/>
-          </a:solidFill>
-          <a:ln/>
-        </p:spPr>
-      </p:sp>
-      <p:sp>
-        <p:nvSpPr>
-          <p:cNvPr id="18" name="Text 16"/>
-          <p:cNvSpPr/>
-          <p:nvPr/>
-        </p:nvSpPr>
-        <p:spPr>
-          <a:xfrm>
-            <a:off x="8174736" y="1874520"/>
-            <a:ext cx="384048" cy="384048"/>
-          </a:xfrm>
-          <a:prstGeom prst="rect">
-            <a:avLst/>
-          </a:prstGeom>
-          <a:noFill/>
-          <a:ln/>
-        </p:spPr>
-        <p:txBody>
-          <a:bodyPr wrap="square" lIns="0" tIns="0" rIns="0" bIns="0" rtlCol="0" anchor="ctr"/>
-          <a:lstStyle/>
-          <a:p>
-            <a:pPr algn="ctr" indent="0" marL="0">
-              <a:buNone/>
-            </a:pPr>
-            <a:r>
-              <a:rPr lang="en-US" sz="1200" b="1" dirty="0">
-                <a:solidFill>
-                  <a:srgbClr val="F8F0E2"/>
-                </a:solidFill>
-                <a:latin typeface="Courier New" pitchFamily="34" charset="0"/>
-                <a:ea typeface="Courier New" pitchFamily="34" charset="-122"/>
-                <a:cs typeface="Courier New" pitchFamily="34" charset="-120"/>
-              </a:rPr>
-              <a:t>3</a:t>
-            </a:r>
-            <a:endParaRPr lang="en-US" sz="1200" dirty="0"/>
-          </a:p>
-        </p:txBody>
-      </p:sp>
-      <p:sp>
-        <p:nvSpPr>
-          <p:cNvPr id="19" name="Text 17"/>
-          <p:cNvSpPr/>
-          <p:nvPr/>
-        </p:nvSpPr>
-        <p:spPr>
-          <a:xfrm>
-            <a:off x="8686800" y="1847088"/>
-            <a:ext cx="2606040" cy="438912"/>
-          </a:xfrm>
-          <a:prstGeom prst="rect">
-            <a:avLst/>
-          </a:prstGeom>
-          <a:noFill/>
-          <a:ln/>
-        </p:spPr>
-        <p:txBody>
-          <a:bodyPr wrap="square" lIns="0" tIns="0" rIns="0" bIns="0" rtlCol="0" anchor="ctr"/>
-          <a:lstStyle/>
-          <a:p>
-            <a:pPr indent="0" marL="0">
-              <a:buNone/>
-            </a:pPr>
-            <a:r>
-              <a:rPr lang="en-US" sz="1450" b="1" dirty="0">
-                <a:solidFill>
-                  <a:srgbClr val="9A5B12"/>
-                </a:solidFill>
-                <a:latin typeface="Calibri" pitchFamily="34" charset="0"/>
-                <a:ea typeface="Calibri" pitchFamily="34" charset="-122"/>
-                <a:cs typeface="Calibri" pitchFamily="34" charset="-120"/>
-              </a:rPr>
-              <a:t>перехід fallback — у діфі коду</a:t>
-            </a:r>
-            <a:endParaRPr lang="en-US" sz="1450" dirty="0"/>
-          </a:p>
-        </p:txBody>
-      </p:sp>
-      <p:sp>
-        <p:nvSpPr>
-          <p:cNvPr id="20" name="Text 18"/>
-          <p:cNvSpPr/>
-          <p:nvPr/>
-        </p:nvSpPr>
-        <p:spPr>
-          <a:xfrm>
-            <a:off x="8174736" y="2377440"/>
-            <a:ext cx="3118104" cy="576072"/>
-          </a:xfrm>
-          <a:prstGeom prst="rect">
-            <a:avLst/>
-          </a:prstGeom>
-          <a:noFill/>
-          <a:ln/>
-        </p:spPr>
-        <p:txBody>
-          <a:bodyPr wrap="square" lIns="0" tIns="0" rIns="0" bIns="0" rtlCol="0" anchor="t"/>
-          <a:lstStyle/>
-          <a:p>
-            <a:pPr indent="0" marL="0">
-              <a:buNone/>
-            </a:pPr>
-            <a:r>
-              <a:rPr lang="en-US" sz="1200" dirty="0">
-                <a:solidFill>
-                  <a:srgbClr val="1B1D23"/>
-                </a:solidFill>
-                <a:latin typeface="Calibri" pitchFamily="34" charset="0"/>
-                <a:ea typeface="Calibri" pitchFamily="34" charset="-122"/>
-                <a:cs typeface="Calibri" pitchFamily="34" charset="-120"/>
-              </a:rPr>
-              <a:t>лічильник на цьому тижні не віддається нічим</a:t>
-            </a:r>
-            <a:endParaRPr lang="en-US" sz="1200" dirty="0"/>
-          </a:p>
-        </p:txBody>
-      </p:sp>
-      <p:sp>
-        <p:nvSpPr>
-          <p:cNvPr id="21" name="Shape 19"/>
-          <p:cNvSpPr/>
-          <p:nvPr/>
-        </p:nvSpPr>
-        <p:spPr>
-          <a:xfrm>
-            <a:off x="566928" y="3291840"/>
-            <a:ext cx="3520440" cy="1417320"/>
-          </a:xfrm>
-          <a:prstGeom prst="roundRect">
-            <a:avLst>
-              <a:gd name="adj" fmla="val 7742"/>
-            </a:avLst>
-          </a:prstGeom>
-          <a:solidFill>
-            <a:srgbClr val="F9E9E8"/>
-          </a:solidFill>
-          <a:ln/>
-        </p:spPr>
-      </p:sp>
-      <p:sp>
-        <p:nvSpPr>
-          <p:cNvPr id="22" name="Shape 20"/>
-          <p:cNvSpPr/>
-          <p:nvPr/>
-        </p:nvSpPr>
-        <p:spPr>
-          <a:xfrm>
-            <a:off x="768096" y="3474720"/>
-            <a:ext cx="384048" cy="384048"/>
-          </a:xfrm>
-          <a:prstGeom prst="ellipse">
-            <a:avLst/>
-          </a:prstGeom>
-          <a:solidFill>
-            <a:srgbClr val="B3261E"/>
-          </a:solidFill>
-          <a:ln/>
-        </p:spPr>
-      </p:sp>
-      <p:sp>
-        <p:nvSpPr>
-          <p:cNvPr id="23" name="Text 21"/>
-          <p:cNvSpPr/>
-          <p:nvPr/>
-        </p:nvSpPr>
-        <p:spPr>
-          <a:xfrm>
-            <a:off x="768096" y="3474720"/>
-            <a:ext cx="384048" cy="384048"/>
-          </a:xfrm>
-          <a:prstGeom prst="rect">
-            <a:avLst/>
-          </a:prstGeom>
-          <a:noFill/>
-          <a:ln/>
-        </p:spPr>
-        <p:txBody>
-          <a:bodyPr wrap="square" lIns="0" tIns="0" rIns="0" bIns="0" rtlCol="0" anchor="ctr"/>
-          <a:lstStyle/>
-          <a:p>
-            <a:pPr algn="ctr" indent="0" marL="0">
-              <a:buNone/>
-            </a:pPr>
-            <a:r>
-              <a:rPr lang="en-US" sz="1200" b="1" dirty="0">
-                <a:solidFill>
-                  <a:srgbClr val="F9E9E8"/>
-                </a:solidFill>
-                <a:latin typeface="Courier New" pitchFamily="34" charset="0"/>
-                <a:ea typeface="Courier New" pitchFamily="34" charset="-122"/>
-                <a:cs typeface="Courier New" pitchFamily="34" charset="-120"/>
-              </a:rPr>
-              <a:t>4</a:t>
-            </a:r>
-            <a:endParaRPr lang="en-US" sz="1200" dirty="0"/>
-          </a:p>
-        </p:txBody>
-      </p:sp>
-      <p:sp>
-        <p:nvSpPr>
-          <p:cNvPr id="24" name="Text 22"/>
-          <p:cNvSpPr/>
-          <p:nvPr/>
-        </p:nvSpPr>
-        <p:spPr>
-          <a:xfrm>
-            <a:off x="1280160" y="3447288"/>
-            <a:ext cx="2606040" cy="438912"/>
-          </a:xfrm>
-          <a:prstGeom prst="rect">
-            <a:avLst/>
-          </a:prstGeom>
-          <a:noFill/>
-          <a:ln/>
-        </p:spPr>
-        <p:txBody>
-          <a:bodyPr wrap="square" lIns="0" tIns="0" rIns="0" bIns="0" rtlCol="0" anchor="ctr"/>
-          <a:lstStyle/>
-          <a:p>
-            <a:pPr indent="0" marL="0">
-              <a:buNone/>
-            </a:pPr>
-            <a:r>
-              <a:rPr lang="en-US" sz="1450" b="1" dirty="0">
-                <a:solidFill>
-                  <a:srgbClr val="B3261E"/>
-                </a:solidFill>
-                <a:latin typeface="Calibri" pitchFamily="34" charset="0"/>
-                <a:ea typeface="Calibri" pitchFamily="34" charset="-122"/>
-                <a:cs typeface="Calibri" pitchFamily="34" charset="-120"/>
-              </a:rPr>
-              <a:t>опц.: 3 × __fail_503 → open</a:t>
-            </a:r>
-            <a:endParaRPr lang="en-US" sz="1450" dirty="0"/>
-          </a:p>
-        </p:txBody>
-      </p:sp>
-      <p:sp>
-        <p:nvSpPr>
-          <p:cNvPr id="25" name="Text 23"/>
-          <p:cNvSpPr/>
-          <p:nvPr/>
-        </p:nvSpPr>
-        <p:spPr>
-          <a:xfrm>
-            <a:off x="768096" y="3977640"/>
-            <a:ext cx="3118104" cy="576072"/>
-          </a:xfrm>
-          <a:prstGeom prst="rect">
-            <a:avLst/>
-          </a:prstGeom>
-          <a:noFill/>
-          <a:ln/>
-        </p:spPr>
-        <p:txBody>
-          <a:bodyPr wrap="square" lIns="0" tIns="0" rIns="0" bIns="0" rtlCol="0" anchor="t"/>
-          <a:lstStyle/>
-          <a:p>
-            <a:pPr indent="0" marL="0">
-              <a:buNone/>
-            </a:pPr>
-            <a:r>
-              <a:rPr lang="en-US" sz="1200" dirty="0">
-                <a:solidFill>
-                  <a:srgbClr val="1B1D23"/>
-                </a:solidFill>
-                <a:latin typeface="Calibri" pitchFamily="34" charset="0"/>
-                <a:ea typeface="Calibri" pitchFamily="34" charset="-122"/>
-                <a:cs typeface="Calibri" pitchFamily="34" charset="-120"/>
-              </a:rPr>
-              <a:t>здорове питання миттєво отримує заглушку</a:t>
-            </a:r>
-            <a:endParaRPr lang="en-US" sz="1200" dirty="0"/>
-          </a:p>
-        </p:txBody>
-      </p:sp>
-      <p:sp>
-        <p:nvSpPr>
-          <p:cNvPr id="26" name="Shape 24"/>
-          <p:cNvSpPr/>
-          <p:nvPr/>
-        </p:nvSpPr>
-        <p:spPr>
-          <a:xfrm>
-            <a:off x="4270248" y="3291840"/>
-            <a:ext cx="3520440" cy="1417320"/>
-          </a:xfrm>
-          <a:prstGeom prst="roundRect">
-            <a:avLst>
-              <a:gd name="adj" fmla="val 7742"/>
-            </a:avLst>
-          </a:prstGeom>
-          <a:solidFill>
-            <a:srgbClr val="F8F0E2"/>
-          </a:solidFill>
-          <a:ln/>
-        </p:spPr>
-      </p:sp>
-      <p:sp>
-        <p:nvSpPr>
-          <p:cNvPr id="27" name="Shape 25"/>
-          <p:cNvSpPr/>
-          <p:nvPr/>
-        </p:nvSpPr>
-        <p:spPr>
-          <a:xfrm>
-            <a:off x="4471416" y="3474720"/>
-            <a:ext cx="384048" cy="384048"/>
-          </a:xfrm>
-          <a:prstGeom prst="ellipse">
-            <a:avLst/>
-          </a:prstGeom>
-          <a:solidFill>
-            <a:srgbClr val="9A5B12"/>
-          </a:solidFill>
-          <a:ln/>
-        </p:spPr>
-      </p:sp>
-      <p:sp>
-        <p:nvSpPr>
-          <p:cNvPr id="28" name="Text 26"/>
-          <p:cNvSpPr/>
-          <p:nvPr/>
-        </p:nvSpPr>
-        <p:spPr>
-          <a:xfrm>
-            <a:off x="4471416" y="3474720"/>
-            <a:ext cx="384048" cy="384048"/>
-          </a:xfrm>
-          <a:prstGeom prst="rect">
-            <a:avLst/>
-          </a:prstGeom>
-          <a:noFill/>
-          <a:ln/>
-        </p:spPr>
-        <p:txBody>
-          <a:bodyPr wrap="square" lIns="0" tIns="0" rIns="0" bIns="0" rtlCol="0" anchor="ctr"/>
-          <a:lstStyle/>
-          <a:p>
-            <a:pPr algn="ctr" indent="0" marL="0">
-              <a:buNone/>
-            </a:pPr>
-            <a:r>
-              <a:rPr lang="en-US" sz="1200" b="1" dirty="0">
-                <a:solidFill>
-                  <a:srgbClr val="F8F0E2"/>
-                </a:solidFill>
-                <a:latin typeface="Courier New" pitchFamily="34" charset="0"/>
-                <a:ea typeface="Courier New" pitchFamily="34" charset="-122"/>
-                <a:cs typeface="Courier New" pitchFamily="34" charset="-120"/>
-              </a:rPr>
-              <a:t>5</a:t>
-            </a:r>
-            <a:endParaRPr lang="en-US" sz="1200" dirty="0"/>
-          </a:p>
-        </p:txBody>
-      </p:sp>
-      <p:sp>
-        <p:nvSpPr>
-          <p:cNvPr id="29" name="Text 27"/>
-          <p:cNvSpPr/>
-          <p:nvPr/>
-        </p:nvSpPr>
-        <p:spPr>
-          <a:xfrm>
-            <a:off x="4983480" y="3447288"/>
-            <a:ext cx="2606040" cy="438912"/>
-          </a:xfrm>
-          <a:prstGeom prst="rect">
-            <a:avLst/>
-          </a:prstGeom>
-          <a:noFill/>
-          <a:ln/>
-        </p:spPr>
-        <p:txBody>
-          <a:bodyPr wrap="square" lIns="0" tIns="0" rIns="0" bIns="0" rtlCol="0" anchor="ctr"/>
-          <a:lstStyle/>
-          <a:p>
-            <a:pPr indent="0" marL="0">
-              <a:buNone/>
-            </a:pPr>
-            <a:r>
-              <a:rPr lang="en-US" sz="1450" b="1" dirty="0">
-                <a:solidFill>
-                  <a:srgbClr val="9A5B12"/>
-                </a:solidFill>
-                <a:latin typeface="Calibri" pitchFamily="34" charset="0"/>
-                <a:ea typeface="Calibri" pitchFamily="34" charset="-122"/>
-                <a:cs typeface="Calibri" pitchFamily="34" charset="-120"/>
-              </a:rPr>
-              <a:t>опц.: пауза ~5 с → probe</a:t>
-            </a:r>
-            <a:endParaRPr lang="en-US" sz="1450" dirty="0"/>
-          </a:p>
-        </p:txBody>
-      </p:sp>
-      <p:sp>
-        <p:nvSpPr>
-          <p:cNvPr id="30" name="Text 28"/>
-          <p:cNvSpPr/>
-          <p:nvPr/>
-        </p:nvSpPr>
-        <p:spPr>
-          <a:xfrm>
-            <a:off x="4471416" y="3977640"/>
-            <a:ext cx="3118104" cy="576072"/>
-          </a:xfrm>
-          <a:prstGeom prst="rect">
-            <a:avLst/>
-          </a:prstGeom>
-          <a:noFill/>
-          <a:ln/>
-        </p:spPr>
-        <p:txBody>
-          <a:bodyPr wrap="square" lIns="0" tIns="0" rIns="0" bIns="0" rtlCol="0" anchor="t"/>
-          <a:lstStyle/>
-          <a:p>
-            <a:pPr indent="0" marL="0">
-              <a:buNone/>
-            </a:pPr>
-            <a:r>
-              <a:rPr lang="en-US" sz="1200" dirty="0">
-                <a:solidFill>
-                  <a:srgbClr val="1B1D23"/>
-                </a:solidFill>
-                <a:latin typeface="Calibri" pitchFamily="34" charset="0"/>
-                <a:ea typeface="Calibri" pitchFamily="34" charset="-122"/>
-                <a:cs typeface="Calibri" pitchFamily="34" charset="-120"/>
-              </a:rPr>
-              <a:t>звичайне питання закриває circuit</a:t>
-            </a:r>
-            <a:endParaRPr lang="en-US" sz="1200" dirty="0"/>
-          </a:p>
-        </p:txBody>
-      </p:sp>
-      <p:sp>
-        <p:nvSpPr>
-          <p:cNvPr id="31" name="Shape 29"/>
-          <p:cNvSpPr/>
-          <p:nvPr/>
-        </p:nvSpPr>
-        <p:spPr>
-          <a:xfrm>
-            <a:off x="566928" y="5029200"/>
-            <a:ext cx="11064240" cy="1051560"/>
-          </a:xfrm>
-          <a:prstGeom prst="roundRect">
-            <a:avLst>
-              <a:gd name="adj" fmla="val 10435"/>
-            </a:avLst>
-          </a:prstGeom>
-          <a:solidFill>
-            <a:srgbClr val="ECEBFB"/>
-          </a:solidFill>
-          <a:ln/>
-        </p:spPr>
-      </p:sp>
-      <p:sp>
-        <p:nvSpPr>
-          <p:cNvPr id="32" name="Text 30"/>
-          <p:cNvSpPr/>
-          <p:nvPr/>
-        </p:nvSpPr>
-        <p:spPr>
-          <a:xfrm>
-            <a:off x="786384" y="5157216"/>
-            <a:ext cx="10625328" cy="219456"/>
-          </a:xfrm>
-          <a:prstGeom prst="rect">
-            <a:avLst/>
-          </a:prstGeom>
-          <a:noFill/>
-          <a:ln/>
-        </p:spPr>
-        <p:txBody>
-          <a:bodyPr wrap="square" lIns="0" tIns="0" rIns="0" bIns="0" rtlCol="0" anchor="ctr"/>
-          <a:lstStyle/>
-          <a:p>
-            <a:pPr indent="0" marL="0">
-              <a:buNone/>
-            </a:pPr>
-            <a:r>
-              <a:rPr lang="en-US" sz="950" b="1" spc="150" kern="0" dirty="0">
-                <a:solidFill>
-                  <a:srgbClr val="4038C4"/>
-                </a:solidFill>
-                <a:latin typeface="Courier New" pitchFamily="34" charset="0"/>
-                <a:ea typeface="Courier New" pitchFamily="34" charset="-122"/>
-                <a:cs typeface="Courier New" pitchFamily="34" charset="-120"/>
-              </a:rPr>
-              <a:t>НАВІЩО</a:t>
-            </a:r>
-            <a:endParaRPr lang="en-US" sz="950" dirty="0"/>
-          </a:p>
-        </p:txBody>
-      </p:sp>
-      <p:sp>
-        <p:nvSpPr>
-          <p:cNvPr id="33" name="Text 31"/>
-          <p:cNvSpPr/>
-          <p:nvPr/>
-        </p:nvSpPr>
-        <p:spPr>
-          <a:xfrm>
-            <a:off x="786384" y="5413248"/>
-            <a:ext cx="10625328" cy="539496"/>
-          </a:xfrm>
-          <a:prstGeom prst="rect">
-            <a:avLst/>
-          </a:prstGeom>
-          <a:noFill/>
-          <a:ln/>
-        </p:spPr>
-        <p:txBody>
-          <a:bodyPr wrap="square" lIns="0" tIns="0" rIns="0" bIns="0" rtlCol="0" anchor="ctr"/>
-          <a:lstStyle/>
-          <a:p>
-            <a:pPr indent="0" marL="0">
-              <a:buNone/>
-            </a:pPr>
-            <a:r>
-              <a:rPr lang="en-US" sz="1300" dirty="0">
-                <a:solidFill>
-                  <a:srgbClr val="1B1D23"/>
-                </a:solidFill>
-                <a:latin typeface="Calibri" pitchFamily="34" charset="0"/>
-                <a:ea typeface="Calibri" pitchFamily="34" charset="-122"/>
-                <a:cs typeface="Calibri" pitchFamily="34" charset="-120"/>
-              </a:rPr>
-              <a:t>Побачити спроєктовану відмову наживо: збій — не 500 і не вісім секунд, а швидка ввічлива заглушка зі слідом у лозі. І ціну відкритого circuit — деградацію навіть здорових питань.</a:t>
+              <a:t>Бюджет часу — властивість маршруту, а не константа сервісу: ставиться там само, де ухвалюється рішення про модель.</a:t>
             </a:r>
             <a:endParaRPr lang="en-US" sz="1300" dirty="0"/>
           </a:p>
@@ -12579,7 +12350,7 @@
                 <a:ea typeface="Calibri" pitchFamily="34" charset="-122"/>
                 <a:cs typeface="Calibri" pitchFamily="34" charset="-120"/>
               </a:rPr>
-              <a:t>Лабораторна: три кроки + опційний</a:t>
+              <a:t>Зараз ви побачите — і навіщо</a:t>
             </a:r>
             <a:endParaRPr lang="en-US" sz="2500" dirty="0"/>
           </a:p>
@@ -12693,28 +12464,50 @@
         </p:nvSpPr>
         <p:spPr>
           <a:xfrm>
-            <a:off x="566928" y="1920240"/>
-            <a:ext cx="457200" cy="457200"/>
+            <a:off x="566928" y="1691640"/>
+            <a:ext cx="3520440" cy="1417320"/>
+          </a:xfrm>
+          <a:prstGeom prst="roundRect">
+            <a:avLst>
+              <a:gd name="adj" fmla="val 7742"/>
+            </a:avLst>
+          </a:prstGeom>
+          <a:solidFill>
+            <a:srgbClr val="E9F3EE"/>
+          </a:solidFill>
+          <a:ln/>
+        </p:spPr>
+      </p:sp>
+      <p:sp>
+        <p:nvSpPr>
+          <p:cNvPr id="7" name="Shape 5"/>
+          <p:cNvSpPr/>
+          <p:nvPr/>
+        </p:nvSpPr>
+        <p:spPr>
+          <a:xfrm>
+            <a:off x="768096" y="1874520"/>
+            <a:ext cx="384048" cy="384048"/>
           </a:xfrm>
           <a:prstGeom prst="ellipse">
             <a:avLst/>
           </a:prstGeom>
           <a:solidFill>
-            <a:srgbClr val="4038C4"/>
+            <a:srgbClr val="177245"/>
           </a:solidFill>
           <a:ln/>
         </p:spPr>
       </p:sp>
       <p:sp>
         <p:nvSpPr>
-          <p:cNvPr id="7" name="Text 5"/>
-          <p:cNvSpPr/>
-          <p:nvPr/>
-        </p:nvSpPr>
-        <p:spPr>
-          <a:xfrm>
-            <a:off x="566928" y="1920240"/>
-            <a:ext cx="457200" cy="457200"/>
+          <p:cNvPr id="8" name="Text 6"/>
+          <p:cNvSpPr/>
+          <p:nvPr/>
+        </p:nvSpPr>
+        <p:spPr>
+          <a:xfrm>
+            <a:off x="768096" y="1874520"/>
+            <a:ext cx="384048" cy="384048"/>
           </a:xfrm>
           <a:prstGeom prst="rect">
             <a:avLst/>
@@ -12730,9 +12523,9 @@
               <a:buNone/>
             </a:pPr>
             <a:r>
-              <a:rPr lang="en-US" sz="1300" b="1" dirty="0">
-                <a:solidFill>
-                  <a:srgbClr val="FFFFFF"/>
+              <a:rPr lang="en-US" sz="1200" b="1" dirty="0">
+                <a:solidFill>
+                  <a:srgbClr val="E9F3EE"/>
                 </a:solidFill>
                 <a:latin typeface="Courier New" pitchFamily="34" charset="0"/>
                 <a:ea typeface="Courier New" pitchFamily="34" charset="-122"/>
@@ -12740,20 +12533,20 @@
               </a:rPr>
               <a:t>1</a:t>
             </a:r>
-            <a:endParaRPr lang="en-US" sz="1300" dirty="0"/>
-          </a:p>
-        </p:txBody>
-      </p:sp>
-      <p:sp>
-        <p:nvSpPr>
-          <p:cNvPr id="8" name="Text 6"/>
-          <p:cNvSpPr/>
-          <p:nvPr/>
-        </p:nvSpPr>
-        <p:spPr>
-          <a:xfrm>
-            <a:off x="1188720" y="1920240"/>
-            <a:ext cx="10424160" cy="457200"/>
+            <a:endParaRPr lang="en-US" sz="1200" dirty="0"/>
+          </a:p>
+        </p:txBody>
+      </p:sp>
+      <p:sp>
+        <p:nvSpPr>
+          <p:cNvPr id="9" name="Text 7"/>
+          <p:cNvSpPr/>
+          <p:nvPr/>
+        </p:nvSpPr>
+        <p:spPr>
+          <a:xfrm>
+            <a:off x="1280160" y="1847088"/>
+            <a:ext cx="2606040" cy="438912"/>
           </a:xfrm>
           <a:prstGeom prst="rect">
             <a:avLst/>
@@ -12769,64 +12562,111 @@
               <a:buNone/>
             </a:pPr>
             <a:r>
-              <a:rPr lang="en-US" sz="1400" b="1" dirty="0">
-                <a:solidFill>
-                  <a:srgbClr val="1B1D23"/>
+              <a:rPr lang="en-US" sz="1450" b="1" dirty="0">
+                <a:solidFill>
+                  <a:srgbClr val="177245"/>
                 </a:solidFill>
                 <a:latin typeface="Calibri" pitchFamily="34" charset="0"/>
                 <a:ea typeface="Calibri" pitchFamily="34" charset="-122"/>
                 <a:cs typeface="Calibri" pitchFamily="34" charset="-120"/>
               </a:rPr>
-              <a:t>Побудувати ланцюг  </a:t>
-            </a:r>
+              <a:t>__fail_503 → заглушка</a:t>
+            </a:r>
+            <a:endParaRPr lang="en-US" sz="1450" dirty="0"/>
+          </a:p>
+        </p:txBody>
+      </p:sp>
+      <p:sp>
+        <p:nvSpPr>
+          <p:cNvPr id="10" name="Text 8"/>
+          <p:cNvSpPr/>
+          <p:nvPr/>
+        </p:nvSpPr>
+        <p:spPr>
+          <a:xfrm>
+            <a:off x="768096" y="2377440"/>
+            <a:ext cx="3118104" cy="576072"/>
+          </a:xfrm>
+          <a:prstGeom prst="rect">
+            <a:avLst/>
+          </a:prstGeom>
+          <a:noFill/>
+          <a:ln/>
+        </p:spPr>
+        <p:txBody>
+          <a:bodyPr wrap="square" lIns="0" tIns="0" rIns="0" bIns="0" rtlCol="0" anchor="t"/>
+          <a:lstStyle/>
+          <a:p>
             <a:pPr indent="0" marL="0">
               <a:buNone/>
             </a:pPr>
             <a:r>
               <a:rPr lang="en-US" sz="1200" dirty="0">
                 <a:solidFill>
-                  <a:srgbClr val="565C6B"/>
+                  <a:srgbClr val="1B1D23"/>
                 </a:solidFill>
                 <a:latin typeface="Calibri" pitchFamily="34" charset="0"/>
                 <a:ea typeface="Calibri" pitchFamily="34" charset="-122"/>
                 <a:cs typeface="Calibri" pitchFamily="34" charset="-120"/>
               </a:rPr>
-              <a:t>CallGateway + цикл по chain + лічильник переходів</a:t>
-            </a:r>
-            <a:endParaRPr lang="en-US" sz="1400" dirty="0"/>
-          </a:p>
-        </p:txBody>
-      </p:sp>
-      <p:sp>
-        <p:nvSpPr>
-          <p:cNvPr id="9" name="Shape 7"/>
-          <p:cNvSpPr/>
-          <p:nvPr/>
-        </p:nvSpPr>
-        <p:spPr>
-          <a:xfrm>
-            <a:off x="566928" y="2834640"/>
-            <a:ext cx="457200" cy="457200"/>
+              <a:t>ввічлива відмова замість 500-ки</a:t>
+            </a:r>
+            <a:endParaRPr lang="en-US" sz="1200" dirty="0"/>
+          </a:p>
+        </p:txBody>
+      </p:sp>
+      <p:sp>
+        <p:nvSpPr>
+          <p:cNvPr id="11" name="Shape 9"/>
+          <p:cNvSpPr/>
+          <p:nvPr/>
+        </p:nvSpPr>
+        <p:spPr>
+          <a:xfrm>
+            <a:off x="4270248" y="1691640"/>
+            <a:ext cx="3520440" cy="1417320"/>
+          </a:xfrm>
+          <a:prstGeom prst="roundRect">
+            <a:avLst>
+              <a:gd name="adj" fmla="val 7742"/>
+            </a:avLst>
+          </a:prstGeom>
+          <a:solidFill>
+            <a:srgbClr val="E9F3EE"/>
+          </a:solidFill>
+          <a:ln/>
+        </p:spPr>
+      </p:sp>
+      <p:sp>
+        <p:nvSpPr>
+          <p:cNvPr id="12" name="Shape 10"/>
+          <p:cNvSpPr/>
+          <p:nvPr/>
+        </p:nvSpPr>
+        <p:spPr>
+          <a:xfrm>
+            <a:off x="4471416" y="1874520"/>
+            <a:ext cx="384048" cy="384048"/>
           </a:xfrm>
           <a:prstGeom prst="ellipse">
             <a:avLst/>
           </a:prstGeom>
           <a:solidFill>
-            <a:srgbClr val="4038C4"/>
+            <a:srgbClr val="177245"/>
           </a:solidFill>
           <a:ln/>
         </p:spPr>
       </p:sp>
       <p:sp>
         <p:nvSpPr>
-          <p:cNvPr id="10" name="Text 8"/>
-          <p:cNvSpPr/>
-          <p:nvPr/>
-        </p:nvSpPr>
-        <p:spPr>
-          <a:xfrm>
-            <a:off x="566928" y="2834640"/>
-            <a:ext cx="457200" cy="457200"/>
+          <p:cNvPr id="13" name="Text 11"/>
+          <p:cNvSpPr/>
+          <p:nvPr/>
+        </p:nvSpPr>
+        <p:spPr>
+          <a:xfrm>
+            <a:off x="4471416" y="1874520"/>
+            <a:ext cx="384048" cy="384048"/>
           </a:xfrm>
           <a:prstGeom prst="rect">
             <a:avLst/>
@@ -12842,9 +12682,9 @@
               <a:buNone/>
             </a:pPr>
             <a:r>
-              <a:rPr lang="en-US" sz="1300" b="1" dirty="0">
-                <a:solidFill>
-                  <a:srgbClr val="FFFFFF"/>
+              <a:rPr lang="en-US" sz="1200" b="1" dirty="0">
+                <a:solidFill>
+                  <a:srgbClr val="E9F3EE"/>
                 </a:solidFill>
                 <a:latin typeface="Courier New" pitchFamily="34" charset="0"/>
                 <a:ea typeface="Courier New" pitchFamily="34" charset="-122"/>
@@ -12852,20 +12692,20 @@
               </a:rPr>
               <a:t>2</a:t>
             </a:r>
-            <a:endParaRPr lang="en-US" sz="1300" dirty="0"/>
-          </a:p>
-        </p:txBody>
-      </p:sp>
-      <p:sp>
-        <p:nvSpPr>
-          <p:cNvPr id="11" name="Text 9"/>
-          <p:cNvSpPr/>
-          <p:nvPr/>
-        </p:nvSpPr>
-        <p:spPr>
-          <a:xfrm>
-            <a:off x="1188720" y="2834640"/>
-            <a:ext cx="10424160" cy="457200"/>
+            <a:endParaRPr lang="en-US" sz="1200" dirty="0"/>
+          </a:p>
+        </p:txBody>
+      </p:sp>
+      <p:sp>
+        <p:nvSpPr>
+          <p:cNvPr id="14" name="Text 12"/>
+          <p:cNvSpPr/>
+          <p:nvPr/>
+        </p:nvSpPr>
+        <p:spPr>
+          <a:xfrm>
+            <a:off x="4983480" y="1847088"/>
+            <a:ext cx="2606040" cy="438912"/>
           </a:xfrm>
           <a:prstGeom prst="rect">
             <a:avLst/>
@@ -12881,64 +12721,111 @@
               <a:buNone/>
             </a:pPr>
             <a:r>
-              <a:rPr lang="en-US" sz="1400" b="1" dirty="0">
-                <a:solidFill>
-                  <a:srgbClr val="1B1D23"/>
+              <a:rPr lang="en-US" sz="1450" b="1" dirty="0">
+                <a:solidFill>
+                  <a:srgbClr val="177245"/>
                 </a:solidFill>
                 <a:latin typeface="Calibri" pitchFamily="34" charset="0"/>
                 <a:ea typeface="Calibri" pitchFamily="34" charset="-122"/>
                 <a:cs typeface="Calibri" pitchFamily="34" charset="-120"/>
               </a:rPr>
-              <a:t>Довести інцидент до дна  </a:t>
-            </a:r>
+              <a:t>той самий маркер удруге</a:t>
+            </a:r>
+            <a:endParaRPr lang="en-US" sz="1450" dirty="0"/>
+          </a:p>
+        </p:txBody>
+      </p:sp>
+      <p:sp>
+        <p:nvSpPr>
+          <p:cNvPr id="15" name="Text 13"/>
+          <p:cNvSpPr/>
+          <p:nvPr/>
+        </p:nvSpPr>
+        <p:spPr>
+          <a:xfrm>
+            <a:off x="4471416" y="2377440"/>
+            <a:ext cx="3118104" cy="576072"/>
+          </a:xfrm>
+          <a:prstGeom prst="rect">
+            <a:avLst/>
+          </a:prstGeom>
+          <a:noFill/>
+          <a:ln/>
+        </p:spPr>
+        <p:txBody>
+          <a:bodyPr wrap="square" lIns="0" tIns="0" rIns="0" bIns="0" rtlCol="0" anchor="t"/>
+          <a:lstStyle/>
+          <a:p>
             <a:pPr indent="0" marL="0">
               <a:buNone/>
             </a:pPr>
             <a:r>
               <a:rPr lang="en-US" sz="1200" dirty="0">
                 <a:solidFill>
-                  <a:srgbClr val="565C6B"/>
+                  <a:srgbClr val="1B1D23"/>
                 </a:solidFill>
                 <a:latin typeface="Calibri" pitchFamily="34" charset="0"/>
                 <a:ea typeface="Calibri" pitchFamily="34" charset="-122"/>
                 <a:cs typeface="Calibri" pitchFamily="34" charset="-120"/>
               </a:rPr>
-              <a:t>__fail_503 → заглушка з 503 у лозі, а не 500 користувачу</a:t>
-            </a:r>
-            <a:endParaRPr lang="en-US" sz="1400" dirty="0"/>
-          </a:p>
-        </p:txBody>
-      </p:sp>
-      <p:sp>
-        <p:nvSpPr>
-          <p:cNvPr id="12" name="Shape 10"/>
-          <p:cNvSpPr/>
-          <p:nvPr/>
-        </p:nvSpPr>
-        <p:spPr>
-          <a:xfrm>
-            <a:off x="566928" y="3749040"/>
-            <a:ext cx="457200" cy="457200"/>
+              <a:t>збій коштує мілісекунди</a:t>
+            </a:r>
+            <a:endParaRPr lang="en-US" sz="1200" dirty="0"/>
+          </a:p>
+        </p:txBody>
+      </p:sp>
+      <p:sp>
+        <p:nvSpPr>
+          <p:cNvPr id="16" name="Shape 14"/>
+          <p:cNvSpPr/>
+          <p:nvPr/>
+        </p:nvSpPr>
+        <p:spPr>
+          <a:xfrm>
+            <a:off x="7973568" y="1691640"/>
+            <a:ext cx="3520440" cy="1417320"/>
+          </a:xfrm>
+          <a:prstGeom prst="roundRect">
+            <a:avLst>
+              <a:gd name="adj" fmla="val 7742"/>
+            </a:avLst>
+          </a:prstGeom>
+          <a:solidFill>
+            <a:srgbClr val="F8F0E2"/>
+          </a:solidFill>
+          <a:ln/>
+        </p:spPr>
+      </p:sp>
+      <p:sp>
+        <p:nvSpPr>
+          <p:cNvPr id="17" name="Shape 15"/>
+          <p:cNvSpPr/>
+          <p:nvPr/>
+        </p:nvSpPr>
+        <p:spPr>
+          <a:xfrm>
+            <a:off x="8174736" y="1874520"/>
+            <a:ext cx="384048" cy="384048"/>
           </a:xfrm>
           <a:prstGeom prst="ellipse">
             <a:avLst/>
           </a:prstGeom>
           <a:solidFill>
-            <a:srgbClr val="4038C4"/>
+            <a:srgbClr val="9A5B12"/>
           </a:solidFill>
           <a:ln/>
         </p:spPr>
       </p:sp>
       <p:sp>
         <p:nvSpPr>
-          <p:cNvPr id="13" name="Text 11"/>
-          <p:cNvSpPr/>
-          <p:nvPr/>
-        </p:nvSpPr>
-        <p:spPr>
-          <a:xfrm>
-            <a:off x="566928" y="3749040"/>
-            <a:ext cx="457200" cy="457200"/>
+          <p:cNvPr id="18" name="Text 16"/>
+          <p:cNvSpPr/>
+          <p:nvPr/>
+        </p:nvSpPr>
+        <p:spPr>
+          <a:xfrm>
+            <a:off x="8174736" y="1874520"/>
+            <a:ext cx="384048" cy="384048"/>
           </a:xfrm>
           <a:prstGeom prst="rect">
             <a:avLst/>
@@ -12954,9 +12841,9 @@
               <a:buNone/>
             </a:pPr>
             <a:r>
-              <a:rPr lang="en-US" sz="1300" b="1" dirty="0">
-                <a:solidFill>
-                  <a:srgbClr val="FFFFFF"/>
+              <a:rPr lang="en-US" sz="1200" b="1" dirty="0">
+                <a:solidFill>
+                  <a:srgbClr val="F8F0E2"/>
                 </a:solidFill>
                 <a:latin typeface="Courier New" pitchFamily="34" charset="0"/>
                 <a:ea typeface="Courier New" pitchFamily="34" charset="-122"/>
@@ -12964,20 +12851,20 @@
               </a:rPr>
               <a:t>3</a:t>
             </a:r>
-            <a:endParaRPr lang="en-US" sz="1300" dirty="0"/>
-          </a:p>
-        </p:txBody>
-      </p:sp>
-      <p:sp>
-        <p:nvSpPr>
-          <p:cNvPr id="14" name="Text 12"/>
-          <p:cNvSpPr/>
-          <p:nvPr/>
-        </p:nvSpPr>
-        <p:spPr>
-          <a:xfrm>
-            <a:off x="1188720" y="3749040"/>
-            <a:ext cx="10424160" cy="457200"/>
+            <a:endParaRPr lang="en-US" sz="1200" dirty="0"/>
+          </a:p>
+        </p:txBody>
+      </p:sp>
+      <p:sp>
+        <p:nvSpPr>
+          <p:cNvPr id="19" name="Text 17"/>
+          <p:cNvSpPr/>
+          <p:nvPr/>
+        </p:nvSpPr>
+        <p:spPr>
+          <a:xfrm>
+            <a:off x="8686800" y="1847088"/>
+            <a:ext cx="2606040" cy="438912"/>
           </a:xfrm>
           <a:prstGeom prst="rect">
             <a:avLst/>
@@ -12993,44 +12880,250 @@
               <a:buNone/>
             </a:pPr>
             <a:r>
-              <a:rPr lang="en-US" sz="1400" b="1" dirty="0">
-                <a:solidFill>
-                  <a:srgbClr val="1B1D23"/>
+              <a:rPr lang="en-US" sz="1450" b="1" dirty="0">
+                <a:solidFill>
+                  <a:srgbClr val="9A5B12"/>
                 </a:solidFill>
                 <a:latin typeface="Calibri" pitchFamily="34" charset="0"/>
                 <a:ea typeface="Calibri" pitchFamily="34" charset="-122"/>
                 <a:cs typeface="Calibri" pitchFamily="34" charset="-120"/>
               </a:rPr>
-              <a:t>Перевірити слід  </a:t>
-            </a:r>
+              <a:t>перехід fallback — у діфі коду</a:t>
+            </a:r>
+            <a:endParaRPr lang="en-US" sz="1450" dirty="0"/>
+          </a:p>
+        </p:txBody>
+      </p:sp>
+      <p:sp>
+        <p:nvSpPr>
+          <p:cNvPr id="20" name="Text 18"/>
+          <p:cNvSpPr/>
+          <p:nvPr/>
+        </p:nvSpPr>
+        <p:spPr>
+          <a:xfrm>
+            <a:off x="8174736" y="2377440"/>
+            <a:ext cx="3118104" cy="576072"/>
+          </a:xfrm>
+          <a:prstGeom prst="rect">
+            <a:avLst/>
+          </a:prstGeom>
+          <a:noFill/>
+          <a:ln/>
+        </p:spPr>
+        <p:txBody>
+          <a:bodyPr wrap="square" lIns="0" tIns="0" rIns="0" bIns="0" rtlCol="0" anchor="t"/>
+          <a:lstStyle/>
+          <a:p>
             <a:pPr indent="0" marL="0">
               <a:buNone/>
             </a:pPr>
             <a:r>
               <a:rPr lang="en-US" sz="1200" dirty="0">
                 <a:solidFill>
-                  <a:srgbClr val="565C6B"/>
+                  <a:srgbClr val="1B1D23"/>
                 </a:solidFill>
                 <a:latin typeface="Calibri" pitchFamily="34" charset="0"/>
                 <a:ea typeface="Calibri" pitchFamily="34" charset="-122"/>
                 <a:cs typeface="Calibri" pitchFamily="34" charset="-120"/>
               </a:rPr>
-              <a:t>статуси і лічильник fallback ростуть правильно</a:t>
-            </a:r>
-            <a:endParaRPr lang="en-US" sz="1400" dirty="0"/>
-          </a:p>
-        </p:txBody>
-      </p:sp>
-      <p:sp>
-        <p:nvSpPr>
-          <p:cNvPr id="15" name="Shape 13"/>
-          <p:cNvSpPr/>
-          <p:nvPr/>
-        </p:nvSpPr>
-        <p:spPr>
-          <a:xfrm>
-            <a:off x="566928" y="4663440"/>
-            <a:ext cx="457200" cy="457200"/>
+              <a:t>лічильник на цьому тижні не віддається нічим</a:t>
+            </a:r>
+            <a:endParaRPr lang="en-US" sz="1200" dirty="0"/>
+          </a:p>
+        </p:txBody>
+      </p:sp>
+      <p:sp>
+        <p:nvSpPr>
+          <p:cNvPr id="21" name="Shape 19"/>
+          <p:cNvSpPr/>
+          <p:nvPr/>
+        </p:nvSpPr>
+        <p:spPr>
+          <a:xfrm>
+            <a:off x="566928" y="3291840"/>
+            <a:ext cx="3520440" cy="1417320"/>
+          </a:xfrm>
+          <a:prstGeom prst="roundRect">
+            <a:avLst>
+              <a:gd name="adj" fmla="val 7742"/>
+            </a:avLst>
+          </a:prstGeom>
+          <a:solidFill>
+            <a:srgbClr val="F9E9E8"/>
+          </a:solidFill>
+          <a:ln/>
+        </p:spPr>
+      </p:sp>
+      <p:sp>
+        <p:nvSpPr>
+          <p:cNvPr id="22" name="Shape 20"/>
+          <p:cNvSpPr/>
+          <p:nvPr/>
+        </p:nvSpPr>
+        <p:spPr>
+          <a:xfrm>
+            <a:off x="768096" y="3474720"/>
+            <a:ext cx="384048" cy="384048"/>
+          </a:xfrm>
+          <a:prstGeom prst="ellipse">
+            <a:avLst/>
+          </a:prstGeom>
+          <a:solidFill>
+            <a:srgbClr val="B3261E"/>
+          </a:solidFill>
+          <a:ln/>
+        </p:spPr>
+      </p:sp>
+      <p:sp>
+        <p:nvSpPr>
+          <p:cNvPr id="23" name="Text 21"/>
+          <p:cNvSpPr/>
+          <p:nvPr/>
+        </p:nvSpPr>
+        <p:spPr>
+          <a:xfrm>
+            <a:off x="768096" y="3474720"/>
+            <a:ext cx="384048" cy="384048"/>
+          </a:xfrm>
+          <a:prstGeom prst="rect">
+            <a:avLst/>
+          </a:prstGeom>
+          <a:noFill/>
+          <a:ln/>
+        </p:spPr>
+        <p:txBody>
+          <a:bodyPr wrap="square" lIns="0" tIns="0" rIns="0" bIns="0" rtlCol="0" anchor="ctr"/>
+          <a:lstStyle/>
+          <a:p>
+            <a:pPr algn="ctr" indent="0" marL="0">
+              <a:buNone/>
+            </a:pPr>
+            <a:r>
+              <a:rPr lang="en-US" sz="1200" b="1" dirty="0">
+                <a:solidFill>
+                  <a:srgbClr val="F9E9E8"/>
+                </a:solidFill>
+                <a:latin typeface="Courier New" pitchFamily="34" charset="0"/>
+                <a:ea typeface="Courier New" pitchFamily="34" charset="-122"/>
+                <a:cs typeface="Courier New" pitchFamily="34" charset="-120"/>
+              </a:rPr>
+              <a:t>4</a:t>
+            </a:r>
+            <a:endParaRPr lang="en-US" sz="1200" dirty="0"/>
+          </a:p>
+        </p:txBody>
+      </p:sp>
+      <p:sp>
+        <p:nvSpPr>
+          <p:cNvPr id="24" name="Text 22"/>
+          <p:cNvSpPr/>
+          <p:nvPr/>
+        </p:nvSpPr>
+        <p:spPr>
+          <a:xfrm>
+            <a:off x="1280160" y="3447288"/>
+            <a:ext cx="2606040" cy="438912"/>
+          </a:xfrm>
+          <a:prstGeom prst="rect">
+            <a:avLst/>
+          </a:prstGeom>
+          <a:noFill/>
+          <a:ln/>
+        </p:spPr>
+        <p:txBody>
+          <a:bodyPr wrap="square" lIns="0" tIns="0" rIns="0" bIns="0" rtlCol="0" anchor="ctr"/>
+          <a:lstStyle/>
+          <a:p>
+            <a:pPr indent="0" marL="0">
+              <a:buNone/>
+            </a:pPr>
+            <a:r>
+              <a:rPr lang="en-US" sz="1450" b="1" dirty="0">
+                <a:solidFill>
+                  <a:srgbClr val="B3261E"/>
+                </a:solidFill>
+                <a:latin typeface="Calibri" pitchFamily="34" charset="0"/>
+                <a:ea typeface="Calibri" pitchFamily="34" charset="-122"/>
+                <a:cs typeface="Calibri" pitchFamily="34" charset="-120"/>
+              </a:rPr>
+              <a:t>опц.: 3 × __fail_503 → open</a:t>
+            </a:r>
+            <a:endParaRPr lang="en-US" sz="1450" dirty="0"/>
+          </a:p>
+        </p:txBody>
+      </p:sp>
+      <p:sp>
+        <p:nvSpPr>
+          <p:cNvPr id="25" name="Text 23"/>
+          <p:cNvSpPr/>
+          <p:nvPr/>
+        </p:nvSpPr>
+        <p:spPr>
+          <a:xfrm>
+            <a:off x="768096" y="3977640"/>
+            <a:ext cx="3118104" cy="576072"/>
+          </a:xfrm>
+          <a:prstGeom prst="rect">
+            <a:avLst/>
+          </a:prstGeom>
+          <a:noFill/>
+          <a:ln/>
+        </p:spPr>
+        <p:txBody>
+          <a:bodyPr wrap="square" lIns="0" tIns="0" rIns="0" bIns="0" rtlCol="0" anchor="t"/>
+          <a:lstStyle/>
+          <a:p>
+            <a:pPr indent="0" marL="0">
+              <a:buNone/>
+            </a:pPr>
+            <a:r>
+              <a:rPr lang="en-US" sz="1200" dirty="0">
+                <a:solidFill>
+                  <a:srgbClr val="1B1D23"/>
+                </a:solidFill>
+                <a:latin typeface="Calibri" pitchFamily="34" charset="0"/>
+                <a:ea typeface="Calibri" pitchFamily="34" charset="-122"/>
+                <a:cs typeface="Calibri" pitchFamily="34" charset="-120"/>
+              </a:rPr>
+              <a:t>здорове питання миттєво отримує заглушку</a:t>
+            </a:r>
+            <a:endParaRPr lang="en-US" sz="1200" dirty="0"/>
+          </a:p>
+        </p:txBody>
+      </p:sp>
+      <p:sp>
+        <p:nvSpPr>
+          <p:cNvPr id="26" name="Shape 24"/>
+          <p:cNvSpPr/>
+          <p:nvPr/>
+        </p:nvSpPr>
+        <p:spPr>
+          <a:xfrm>
+            <a:off x="4270248" y="3291840"/>
+            <a:ext cx="3520440" cy="1417320"/>
+          </a:xfrm>
+          <a:prstGeom prst="roundRect">
+            <a:avLst>
+              <a:gd name="adj" fmla="val 7742"/>
+            </a:avLst>
+          </a:prstGeom>
+          <a:solidFill>
+            <a:srgbClr val="F8F0E2"/>
+          </a:solidFill>
+          <a:ln/>
+        </p:spPr>
+      </p:sp>
+      <p:sp>
+        <p:nvSpPr>
+          <p:cNvPr id="27" name="Shape 25"/>
+          <p:cNvSpPr/>
+          <p:nvPr/>
+        </p:nvSpPr>
+        <p:spPr>
+          <a:xfrm>
+            <a:off x="4471416" y="3474720"/>
+            <a:ext cx="384048" cy="384048"/>
           </a:xfrm>
           <a:prstGeom prst="ellipse">
             <a:avLst/>
@@ -13043,14 +13136,14 @@
       </p:sp>
       <p:sp>
         <p:nvSpPr>
-          <p:cNvPr id="16" name="Text 14"/>
-          <p:cNvSpPr/>
-          <p:nvPr/>
-        </p:nvSpPr>
-        <p:spPr>
-          <a:xfrm>
-            <a:off x="566928" y="4663440"/>
-            <a:ext cx="457200" cy="457200"/>
+          <p:cNvPr id="28" name="Text 26"/>
+          <p:cNvSpPr/>
+          <p:nvPr/>
+        </p:nvSpPr>
+        <p:spPr>
+          <a:xfrm>
+            <a:off x="4471416" y="3474720"/>
+            <a:ext cx="384048" cy="384048"/>
           </a:xfrm>
           <a:prstGeom prst="rect">
             <a:avLst/>
@@ -13066,30 +13159,30 @@
               <a:buNone/>
             </a:pPr>
             <a:r>
-              <a:rPr lang="en-US" sz="1300" b="1" dirty="0">
-                <a:solidFill>
-                  <a:srgbClr val="FFFFFF"/>
+              <a:rPr lang="en-US" sz="1200" b="1" dirty="0">
+                <a:solidFill>
+                  <a:srgbClr val="F8F0E2"/>
                 </a:solidFill>
                 <a:latin typeface="Courier New" pitchFamily="34" charset="0"/>
                 <a:ea typeface="Courier New" pitchFamily="34" charset="-122"/>
                 <a:cs typeface="Courier New" pitchFamily="34" charset="-120"/>
               </a:rPr>
-              <a:t>4</a:t>
-            </a:r>
-            <a:endParaRPr lang="en-US" sz="1300" dirty="0"/>
-          </a:p>
-        </p:txBody>
-      </p:sp>
-      <p:sp>
-        <p:nvSpPr>
-          <p:cNvPr id="17" name="Text 15"/>
-          <p:cNvSpPr/>
-          <p:nvPr/>
-        </p:nvSpPr>
-        <p:spPr>
-          <a:xfrm>
-            <a:off x="1188720" y="4663440"/>
-            <a:ext cx="10424160" cy="457200"/>
+              <a:t>5</a:t>
+            </a:r>
+            <a:endParaRPr lang="en-US" sz="1200" dirty="0"/>
+          </a:p>
+        </p:txBody>
+      </p:sp>
+      <p:sp>
+        <p:nvSpPr>
+          <p:cNvPr id="29" name="Text 27"/>
+          <p:cNvSpPr/>
+          <p:nvPr/>
+        </p:nvSpPr>
+        <p:spPr>
+          <a:xfrm>
+            <a:off x="4983480" y="3447288"/>
+            <a:ext cx="2606040" cy="438912"/>
           </a:xfrm>
           <a:prstGeom prst="rect">
             <a:avLst/>
@@ -13105,7 +13198,7 @@
               <a:buNone/>
             </a:pPr>
             <a:r>
-              <a:rPr lang="en-US" sz="1400" b="1" dirty="0">
+              <a:rPr lang="en-US" sz="1450" b="1" dirty="0">
                 <a:solidFill>
                   <a:srgbClr val="9A5B12"/>
                 </a:solidFill>
@@ -13113,23 +13206,148 @@
                 <a:ea typeface="Calibri" pitchFamily="34" charset="-122"/>
                 <a:cs typeface="Calibri" pitchFamily="34" charset="-120"/>
               </a:rPr>
-              <a:t>Circuit breaker · опційно  </a:t>
-            </a:r>
+              <a:t>опц.: пауза ~5 с → probe</a:t>
+            </a:r>
+            <a:endParaRPr lang="en-US" sz="1450" dirty="0"/>
+          </a:p>
+        </p:txBody>
+      </p:sp>
+      <p:sp>
+        <p:nvSpPr>
+          <p:cNvPr id="30" name="Text 28"/>
+          <p:cNvSpPr/>
+          <p:nvPr/>
+        </p:nvSpPr>
+        <p:spPr>
+          <a:xfrm>
+            <a:off x="4471416" y="3977640"/>
+            <a:ext cx="3118104" cy="576072"/>
+          </a:xfrm>
+          <a:prstGeom prst="rect">
+            <a:avLst/>
+          </a:prstGeom>
+          <a:noFill/>
+          <a:ln/>
+        </p:spPr>
+        <p:txBody>
+          <a:bodyPr wrap="square" lIns="0" tIns="0" rIns="0" bIns="0" rtlCol="0" anchor="t"/>
+          <a:lstStyle/>
+          <a:p>
             <a:pPr indent="0" marL="0">
               <a:buNone/>
             </a:pPr>
             <a:r>
               <a:rPr lang="en-US" sz="1200" dirty="0">
                 <a:solidFill>
-                  <a:srgbClr val="565C6B"/>
+                  <a:srgbClr val="1B1D23"/>
                 </a:solidFill>
                 <a:latin typeface="Calibri" pitchFamily="34" charset="0"/>
                 <a:ea typeface="Calibri" pitchFamily="34" charset="-122"/>
                 <a:cs typeface="Calibri" pitchFamily="34" charset="-120"/>
               </a:rPr>
-              <a:t>3 збої → open на 30 с, обов'язково з half-open</a:t>
-            </a:r>
-            <a:endParaRPr lang="en-US" sz="1400" dirty="0"/>
+              <a:t>звичайне питання закриває circuit</a:t>
+            </a:r>
+            <a:endParaRPr lang="en-US" sz="1200" dirty="0"/>
+          </a:p>
+        </p:txBody>
+      </p:sp>
+      <p:sp>
+        <p:nvSpPr>
+          <p:cNvPr id="31" name="Shape 29"/>
+          <p:cNvSpPr/>
+          <p:nvPr/>
+        </p:nvSpPr>
+        <p:spPr>
+          <a:xfrm>
+            <a:off x="566928" y="5029200"/>
+            <a:ext cx="11064240" cy="1051560"/>
+          </a:xfrm>
+          <a:prstGeom prst="roundRect">
+            <a:avLst>
+              <a:gd name="adj" fmla="val 10435"/>
+            </a:avLst>
+          </a:prstGeom>
+          <a:solidFill>
+            <a:srgbClr val="ECEBFB"/>
+          </a:solidFill>
+          <a:ln/>
+        </p:spPr>
+      </p:sp>
+      <p:sp>
+        <p:nvSpPr>
+          <p:cNvPr id="32" name="Text 30"/>
+          <p:cNvSpPr/>
+          <p:nvPr/>
+        </p:nvSpPr>
+        <p:spPr>
+          <a:xfrm>
+            <a:off x="786384" y="5157216"/>
+            <a:ext cx="10625328" cy="219456"/>
+          </a:xfrm>
+          <a:prstGeom prst="rect">
+            <a:avLst/>
+          </a:prstGeom>
+          <a:noFill/>
+          <a:ln/>
+        </p:spPr>
+        <p:txBody>
+          <a:bodyPr wrap="square" lIns="0" tIns="0" rIns="0" bIns="0" rtlCol="0" anchor="ctr"/>
+          <a:lstStyle/>
+          <a:p>
+            <a:pPr indent="0" marL="0">
+              <a:buNone/>
+            </a:pPr>
+            <a:r>
+              <a:rPr lang="en-US" sz="950" b="1" spc="150" kern="0" dirty="0">
+                <a:solidFill>
+                  <a:srgbClr val="4038C4"/>
+                </a:solidFill>
+                <a:latin typeface="Courier New" pitchFamily="34" charset="0"/>
+                <a:ea typeface="Courier New" pitchFamily="34" charset="-122"/>
+                <a:cs typeface="Courier New" pitchFamily="34" charset="-120"/>
+              </a:rPr>
+              <a:t>НАВІЩО</a:t>
+            </a:r>
+            <a:endParaRPr lang="en-US" sz="950" dirty="0"/>
+          </a:p>
+        </p:txBody>
+      </p:sp>
+      <p:sp>
+        <p:nvSpPr>
+          <p:cNvPr id="33" name="Text 31"/>
+          <p:cNvSpPr/>
+          <p:nvPr/>
+        </p:nvSpPr>
+        <p:spPr>
+          <a:xfrm>
+            <a:off x="786384" y="5413248"/>
+            <a:ext cx="10625328" cy="539496"/>
+          </a:xfrm>
+          <a:prstGeom prst="rect">
+            <a:avLst/>
+          </a:prstGeom>
+          <a:noFill/>
+          <a:ln/>
+        </p:spPr>
+        <p:txBody>
+          <a:bodyPr wrap="square" lIns="0" tIns="0" rIns="0" bIns="0" rtlCol="0" anchor="ctr"/>
+          <a:lstStyle/>
+          <a:p>
+            <a:pPr indent="0" marL="0">
+              <a:buNone/>
+            </a:pPr>
+            <a:r>
+              <a:rPr lang="en-US" sz="1300" dirty="0">
+                <a:solidFill>
+                  <a:srgbClr val="1B1D23"/>
+                </a:solidFill>
+                <a:latin typeface="Calibri" pitchFamily="34" charset="0"/>
+                <a:ea typeface="Calibri" pitchFamily="34" charset="-122"/>
+                <a:cs typeface="Calibri" pitchFamily="34" charset="-120"/>
+              </a:rPr>
+              <a:t>Побачити спроєктовану відмову наживо: збій — не 500 і не вісім секунд, а швидка ввічлива заглушка зі слідом у лозі. І ціну відкритого circuit — деградацію навіть здорових питань.</a:t>
+            </a:r>
+            <a:endParaRPr lang="en-US" sz="1300" dirty="0"/>
           </a:p>
         </p:txBody>
       </p:sp>
@@ -14319,7 +14537,7 @@
                 <a:ea typeface="Calibri" pitchFamily="34" charset="-122"/>
                 <a:cs typeface="Calibri" pitchFamily="34" charset="-120"/>
               </a:rPr>
-              <a:t>Що це довело</a:t>
+              <a:t>Лабораторна: три кроки + опційний</a:t>
             </a:r>
             <a:endParaRPr lang="en-US" sz="2500" dirty="0"/>
           </a:p>
@@ -14342,7 +14560,7 @@
             </a:avLst>
           </a:prstGeom>
           <a:solidFill>
-            <a:srgbClr val="ECEBFB"/>
+            <a:srgbClr val="E9F3EE"/>
           </a:solidFill>
           <a:ln/>
         </p:spPr>
@@ -14374,13 +14592,13 @@
             <a:r>
               <a:rPr lang="en-US" sz="900" b="1" spc="100" kern="0" dirty="0">
                 <a:solidFill>
-                  <a:srgbClr val="4038C4"/>
+                  <a:srgbClr val="177245"/>
                 </a:solidFill>
                 <a:latin typeface="Courier New" pitchFamily="34" charset="0"/>
                 <a:ea typeface="Courier New" pitchFamily="34" charset="-122"/>
                 <a:cs typeface="Courier New" pitchFamily="34" charset="-120"/>
               </a:rPr>
-              <a:t>ТЕОРІЯ</a:t>
+              <a:t>ПРАКТИКА</a:t>
             </a:r>
             <a:endParaRPr lang="en-US" sz="900" dirty="0"/>
           </a:p>
@@ -14433,16 +14651,14 @@
         </p:nvSpPr>
         <p:spPr>
           <a:xfrm>
-            <a:off x="566928" y="1737360"/>
-            <a:ext cx="3566160" cy="1828800"/>
-          </a:xfrm>
-          <a:prstGeom prst="roundRect">
-            <a:avLst>
-              <a:gd name="adj" fmla="val 6000"/>
-            </a:avLst>
+            <a:off x="566928" y="1920240"/>
+            <a:ext cx="457200" cy="457200"/>
+          </a:xfrm>
+          <a:prstGeom prst="ellipse">
+            <a:avLst/>
           </a:prstGeom>
           <a:solidFill>
-            <a:srgbClr val="E9F3EE"/>
+            <a:srgbClr val="4038C4"/>
           </a:solidFill>
           <a:ln/>
         </p:spPr>
@@ -14455,8 +14671,47 @@
         </p:nvSpPr>
         <p:spPr>
           <a:xfrm>
-            <a:off x="768096" y="1892808"/>
-            <a:ext cx="3163824" cy="438912"/>
+            <a:off x="566928" y="1920240"/>
+            <a:ext cx="457200" cy="457200"/>
+          </a:xfrm>
+          <a:prstGeom prst="rect">
+            <a:avLst/>
+          </a:prstGeom>
+          <a:noFill/>
+          <a:ln/>
+        </p:spPr>
+        <p:txBody>
+          <a:bodyPr wrap="square" lIns="0" tIns="0" rIns="0" bIns="0" rtlCol="0" anchor="ctr"/>
+          <a:lstStyle/>
+          <a:p>
+            <a:pPr algn="ctr" indent="0" marL="0">
+              <a:buNone/>
+            </a:pPr>
+            <a:r>
+              <a:rPr lang="en-US" sz="1300" b="1" dirty="0">
+                <a:solidFill>
+                  <a:srgbClr val="FFFFFF"/>
+                </a:solidFill>
+                <a:latin typeface="Courier New" pitchFamily="34" charset="0"/>
+                <a:ea typeface="Courier New" pitchFamily="34" charset="-122"/>
+                <a:cs typeface="Courier New" pitchFamily="34" charset="-120"/>
+              </a:rPr>
+              <a:t>1</a:t>
+            </a:r>
+            <a:endParaRPr lang="en-US" sz="1300" dirty="0"/>
+          </a:p>
+        </p:txBody>
+      </p:sp>
+      <p:sp>
+        <p:nvSpPr>
+          <p:cNvPr id="8" name="Text 6"/>
+          <p:cNvSpPr/>
+          <p:nvPr/>
+        </p:nvSpPr>
+        <p:spPr>
+          <a:xfrm>
+            <a:off x="1188720" y="1920240"/>
+            <a:ext cx="10424160" cy="457200"/>
           </a:xfrm>
           <a:prstGeom prst="rect">
             <a:avLst/>
@@ -14472,56 +14727,31 @@
               <a:buNone/>
             </a:pPr>
             <a:r>
-              <a:rPr lang="en-US" sz="1450" b="1" dirty="0">
-                <a:solidFill>
-                  <a:srgbClr val="177245"/>
+              <a:rPr lang="en-US" sz="1400" b="1" dirty="0">
+                <a:solidFill>
+                  <a:srgbClr val="1B1D23"/>
                 </a:solidFill>
                 <a:latin typeface="Calibri" pitchFamily="34" charset="0"/>
                 <a:ea typeface="Calibri" pitchFamily="34" charset="-122"/>
                 <a:cs typeface="Calibri" pitchFamily="34" charset="-120"/>
               </a:rPr>
-              <a:t>Збій швидкий</a:t>
-            </a:r>
-            <a:endParaRPr lang="en-US" sz="1450" dirty="0"/>
-          </a:p>
-        </p:txBody>
-      </p:sp>
-      <p:sp>
-        <p:nvSpPr>
-          <p:cNvPr id="8" name="Text 6"/>
-          <p:cNvSpPr/>
-          <p:nvPr/>
-        </p:nvSpPr>
-        <p:spPr>
-          <a:xfrm>
-            <a:off x="768096" y="2423160"/>
-            <a:ext cx="3163824" cy="987552"/>
-          </a:xfrm>
-          <a:prstGeom prst="rect">
-            <a:avLst/>
-          </a:prstGeom>
-          <a:noFill/>
-          <a:ln/>
-        </p:spPr>
-        <p:txBody>
-          <a:bodyPr wrap="square" lIns="0" tIns="0" rIns="0" bIns="0" rtlCol="0" anchor="t"/>
-          <a:lstStyle/>
-          <a:p>
+              <a:t>Побудувати ланцюг  </a:t>
+            </a:r>
             <a:pPr indent="0" marL="0">
               <a:buNone/>
             </a:pPr>
             <a:r>
               <a:rPr lang="en-US" sz="1200" dirty="0">
                 <a:solidFill>
-                  <a:srgbClr val="1B1D23"/>
+                  <a:srgbClr val="565C6B"/>
                 </a:solidFill>
                 <a:latin typeface="Calibri" pitchFamily="34" charset="0"/>
                 <a:ea typeface="Calibri" pitchFamily="34" charset="-122"/>
                 <a:cs typeface="Calibri" pitchFamily="34" charset="-120"/>
               </a:rPr>
-              <a:t>мілісекунди замість восьми секунд прихованих ретраїв</a:t>
-            </a:r>
-            <a:endParaRPr lang="en-US" sz="1200" dirty="0"/>
+              <a:t>CallGateway + цикл по chain + лічильник переходів</a:t>
+            </a:r>
+            <a:endParaRPr lang="en-US" sz="1400" dirty="0"/>
           </a:p>
         </p:txBody>
       </p:sp>
@@ -14533,16 +14763,14 @@
         </p:nvSpPr>
         <p:spPr>
           <a:xfrm>
-            <a:off x="4315968" y="1737360"/>
-            <a:ext cx="3566160" cy="1828800"/>
-          </a:xfrm>
-          <a:prstGeom prst="roundRect">
-            <a:avLst>
-              <a:gd name="adj" fmla="val 6000"/>
-            </a:avLst>
+            <a:off x="566928" y="2834640"/>
+            <a:ext cx="457200" cy="457200"/>
+          </a:xfrm>
+          <a:prstGeom prst="ellipse">
+            <a:avLst/>
           </a:prstGeom>
           <a:solidFill>
-            <a:srgbClr val="ECEBFB"/>
+            <a:srgbClr val="4038C4"/>
           </a:solidFill>
           <a:ln/>
         </p:spPr>
@@ -14555,8 +14783,47 @@
         </p:nvSpPr>
         <p:spPr>
           <a:xfrm>
-            <a:off x="4517136" y="1892808"/>
-            <a:ext cx="3163824" cy="438912"/>
+            <a:off x="566928" y="2834640"/>
+            <a:ext cx="457200" cy="457200"/>
+          </a:xfrm>
+          <a:prstGeom prst="rect">
+            <a:avLst/>
+          </a:prstGeom>
+          <a:noFill/>
+          <a:ln/>
+        </p:spPr>
+        <p:txBody>
+          <a:bodyPr wrap="square" lIns="0" tIns="0" rIns="0" bIns="0" rtlCol="0" anchor="ctr"/>
+          <a:lstStyle/>
+          <a:p>
+            <a:pPr algn="ctr" indent="0" marL="0">
+              <a:buNone/>
+            </a:pPr>
+            <a:r>
+              <a:rPr lang="en-US" sz="1300" b="1" dirty="0">
+                <a:solidFill>
+                  <a:srgbClr val="FFFFFF"/>
+                </a:solidFill>
+                <a:latin typeface="Courier New" pitchFamily="34" charset="0"/>
+                <a:ea typeface="Courier New" pitchFamily="34" charset="-122"/>
+                <a:cs typeface="Courier New" pitchFamily="34" charset="-120"/>
+              </a:rPr>
+              <a:t>2</a:t>
+            </a:r>
+            <a:endParaRPr lang="en-US" sz="1300" dirty="0"/>
+          </a:p>
+        </p:txBody>
+      </p:sp>
+      <p:sp>
+        <p:nvSpPr>
+          <p:cNvPr id="11" name="Text 9"/>
+          <p:cNvSpPr/>
+          <p:nvPr/>
+        </p:nvSpPr>
+        <p:spPr>
+          <a:xfrm>
+            <a:off x="1188720" y="2834640"/>
+            <a:ext cx="10424160" cy="457200"/>
           </a:xfrm>
           <a:prstGeom prst="rect">
             <a:avLst/>
@@ -14572,56 +14839,31 @@
               <a:buNone/>
             </a:pPr>
             <a:r>
-              <a:rPr lang="en-US" sz="1450" b="1" dirty="0">
-                <a:solidFill>
-                  <a:srgbClr val="4038C4"/>
+              <a:rPr lang="en-US" sz="1400" b="1" dirty="0">
+                <a:solidFill>
+                  <a:srgbClr val="1B1D23"/>
                 </a:solidFill>
                 <a:latin typeface="Calibri" pitchFamily="34" charset="0"/>
                 <a:ea typeface="Calibri" pitchFamily="34" charset="-122"/>
                 <a:cs typeface="Calibri" pitchFamily="34" charset="-120"/>
               </a:rPr>
-              <a:t>Користувач бачить ввічливість</a:t>
-            </a:r>
-            <a:endParaRPr lang="en-US" sz="1450" dirty="0"/>
-          </a:p>
-        </p:txBody>
-      </p:sp>
-      <p:sp>
-        <p:nvSpPr>
-          <p:cNvPr id="11" name="Text 9"/>
-          <p:cNvSpPr/>
-          <p:nvPr/>
-        </p:nvSpPr>
-        <p:spPr>
-          <a:xfrm>
-            <a:off x="4517136" y="2423160"/>
-            <a:ext cx="3163824" cy="987552"/>
-          </a:xfrm>
-          <a:prstGeom prst="rect">
-            <a:avLst/>
-          </a:prstGeom>
-          <a:noFill/>
-          <a:ln/>
-        </p:spPr>
-        <p:txBody>
-          <a:bodyPr wrap="square" lIns="0" tIns="0" rIns="0" bIns="0" rtlCol="0" anchor="t"/>
-          <a:lstStyle/>
-          <a:p>
+              <a:t>Довести інцидент до дна  </a:t>
+            </a:r>
             <a:pPr indent="0" marL="0">
               <a:buNone/>
             </a:pPr>
             <a:r>
               <a:rPr lang="en-US" sz="1200" dirty="0">
                 <a:solidFill>
-                  <a:srgbClr val="1B1D23"/>
+                  <a:srgbClr val="565C6B"/>
                 </a:solidFill>
                 <a:latin typeface="Calibri" pitchFamily="34" charset="0"/>
                 <a:ea typeface="Calibri" pitchFamily="34" charset="-122"/>
                 <a:cs typeface="Calibri" pitchFamily="34" charset="-120"/>
               </a:rPr>
-              <a:t>заглушка замість 500-ки — чат живий</a:t>
-            </a:r>
-            <a:endParaRPr lang="en-US" sz="1200" dirty="0"/>
+              <a:t>__fail_503 → заглушка з 503 у лозі, а не 500 користувачу</a:t>
+            </a:r>
+            <a:endParaRPr lang="en-US" sz="1400" dirty="0"/>
           </a:p>
         </p:txBody>
       </p:sp>
@@ -14633,23 +14875,16 @@
         </p:nvSpPr>
         <p:spPr>
           <a:xfrm>
-            <a:off x="8065008" y="1737360"/>
-            <a:ext cx="3566160" cy="1828800"/>
-          </a:xfrm>
-          <a:prstGeom prst="roundRect">
-            <a:avLst>
-              <a:gd name="adj" fmla="val 6000"/>
-            </a:avLst>
+            <a:off x="566928" y="3749040"/>
+            <a:ext cx="457200" cy="457200"/>
+          </a:xfrm>
+          <a:prstGeom prst="ellipse">
+            <a:avLst/>
           </a:prstGeom>
           <a:solidFill>
-            <a:srgbClr val="FFFFFF"/>
+            <a:srgbClr val="4038C4"/>
           </a:solidFill>
-          <a:ln w="12700">
-            <a:solidFill>
-              <a:srgbClr val="E4E6EC"/>
-            </a:solidFill>
-            <a:prstDash val="solid"/>
-          </a:ln>
+          <a:ln/>
         </p:spPr>
       </p:sp>
       <p:sp>
@@ -14660,8 +14895,47 @@
         </p:nvSpPr>
         <p:spPr>
           <a:xfrm>
-            <a:off x="8266176" y="1892808"/>
-            <a:ext cx="3163824" cy="438912"/>
+            <a:off x="566928" y="3749040"/>
+            <a:ext cx="457200" cy="457200"/>
+          </a:xfrm>
+          <a:prstGeom prst="rect">
+            <a:avLst/>
+          </a:prstGeom>
+          <a:noFill/>
+          <a:ln/>
+        </p:spPr>
+        <p:txBody>
+          <a:bodyPr wrap="square" lIns="0" tIns="0" rIns="0" bIns="0" rtlCol="0" anchor="ctr"/>
+          <a:lstStyle/>
+          <a:p>
+            <a:pPr algn="ctr" indent="0" marL="0">
+              <a:buNone/>
+            </a:pPr>
+            <a:r>
+              <a:rPr lang="en-US" sz="1300" b="1" dirty="0">
+                <a:solidFill>
+                  <a:srgbClr val="FFFFFF"/>
+                </a:solidFill>
+                <a:latin typeface="Courier New" pitchFamily="34" charset="0"/>
+                <a:ea typeface="Courier New" pitchFamily="34" charset="-122"/>
+                <a:cs typeface="Courier New" pitchFamily="34" charset="-120"/>
+              </a:rPr>
+              <a:t>3</a:t>
+            </a:r>
+            <a:endParaRPr lang="en-US" sz="1300" dirty="0"/>
+          </a:p>
+        </p:txBody>
+      </p:sp>
+      <p:sp>
+        <p:nvSpPr>
+          <p:cNvPr id="14" name="Text 12"/>
+          <p:cNvSpPr/>
+          <p:nvPr/>
+        </p:nvSpPr>
+        <p:spPr>
+          <a:xfrm>
+            <a:off x="1188720" y="3749040"/>
+            <a:ext cx="10424160" cy="457200"/>
           </a:xfrm>
           <a:prstGeom prst="rect">
             <a:avLst/>
@@ -14677,7 +14951,7 @@
               <a:buNone/>
             </a:pPr>
             <a:r>
-              <a:rPr lang="en-US" sz="1450" b="1" dirty="0">
+              <a:rPr lang="en-US" sz="1400" b="1" dirty="0">
                 <a:solidFill>
                   <a:srgbClr val="1B1D23"/>
                 </a:solidFill>
@@ -14685,33 +14959,8 @@
                 <a:ea typeface="Calibri" pitchFamily="34" charset="-122"/>
                 <a:cs typeface="Calibri" pitchFamily="34" charset="-120"/>
               </a:rPr>
-              <a:t>Система бачить правду</a:t>
-            </a:r>
-            <a:endParaRPr lang="en-US" sz="1450" dirty="0"/>
-          </a:p>
-        </p:txBody>
-      </p:sp>
-      <p:sp>
-        <p:nvSpPr>
-          <p:cNvPr id="14" name="Text 12"/>
-          <p:cNvSpPr/>
-          <p:nvPr/>
-        </p:nvSpPr>
-        <p:spPr>
-          <a:xfrm>
-            <a:off x="8266176" y="2423160"/>
-            <a:ext cx="3163824" cy="987552"/>
-          </a:xfrm>
-          <a:prstGeom prst="rect">
-            <a:avLst/>
-          </a:prstGeom>
-          <a:noFill/>
-          <a:ln/>
-        </p:spPr>
-        <p:txBody>
-          <a:bodyPr wrap="square" lIns="0" tIns="0" rIns="0" bIns="0" rtlCol="0" anchor="t"/>
-          <a:lstStyle/>
-          <a:p>
+              <a:t>Перевірити слід  </a:t>
+            </a:r>
             <a:pPr indent="0" marL="0">
               <a:buNone/>
             </a:pPr>
@@ -14724,9 +14973,9 @@
                 <a:ea typeface="Calibri" pitchFamily="34" charset="-122"/>
                 <a:cs typeface="Calibri" pitchFamily="34" charset="-120"/>
               </a:rPr>
-              <a:t>503 у лозі й лічильник переходів, а не «все добре»</a:t>
-            </a:r>
-            <a:endParaRPr lang="en-US" sz="1200" dirty="0"/>
+              <a:t>статуси і лічильник fallback ростуть правильно</a:t>
+            </a:r>
+            <a:endParaRPr lang="en-US" sz="1400" dirty="0"/>
           </a:p>
         </p:txBody>
       </p:sp>
@@ -14738,16 +14987,14 @@
         </p:nvSpPr>
         <p:spPr>
           <a:xfrm>
-            <a:off x="566928" y="3977640"/>
-            <a:ext cx="11064240" cy="1234440"/>
-          </a:xfrm>
-          <a:prstGeom prst="roundRect">
-            <a:avLst>
-              <a:gd name="adj" fmla="val 8889"/>
-            </a:avLst>
+            <a:off x="566928" y="4663440"/>
+            <a:ext cx="457200" cy="457200"/>
+          </a:xfrm>
+          <a:prstGeom prst="ellipse">
+            <a:avLst/>
           </a:prstGeom>
           <a:solidFill>
-            <a:srgbClr val="F8F0E2"/>
+            <a:srgbClr val="9A5B12"/>
           </a:solidFill>
           <a:ln/>
         </p:spPr>
@@ -14760,34 +15007,34 @@
         </p:nvSpPr>
         <p:spPr>
           <a:xfrm>
-            <a:off x="786384" y="4105656"/>
-            <a:ext cx="10625328" cy="219456"/>
-          </a:xfrm>
-          <a:prstGeom prst="rect">
-            <a:avLst/>
-          </a:prstGeom>
-          <a:noFill/>
-          <a:ln/>
-        </p:spPr>
-        <p:txBody>
-          <a:bodyPr wrap="square" lIns="0" tIns="0" rIns="0" bIns="0" rtlCol="0" anchor="ctr"/>
-          <a:lstStyle/>
-          <a:p>
-            <a:pPr indent="0" marL="0">
-              <a:buNone/>
-            </a:pPr>
-            <a:r>
-              <a:rPr lang="en-US" sz="950" b="1" spc="150" kern="0" dirty="0">
-                <a:solidFill>
-                  <a:srgbClr val="9A5B12"/>
+            <a:off x="566928" y="4663440"/>
+            <a:ext cx="457200" cy="457200"/>
+          </a:xfrm>
+          <a:prstGeom prst="rect">
+            <a:avLst/>
+          </a:prstGeom>
+          <a:noFill/>
+          <a:ln/>
+        </p:spPr>
+        <p:txBody>
+          <a:bodyPr wrap="square" lIns="0" tIns="0" rIns="0" bIns="0" rtlCol="0" anchor="ctr"/>
+          <a:lstStyle/>
+          <a:p>
+            <a:pPr algn="ctr" indent="0" marL="0">
+              <a:buNone/>
+            </a:pPr>
+            <a:r>
+              <a:rPr lang="en-US" sz="1300" b="1" dirty="0">
+                <a:solidFill>
+                  <a:srgbClr val="FFFFFF"/>
                 </a:solidFill>
                 <a:latin typeface="Courier New" pitchFamily="34" charset="0"/>
                 <a:ea typeface="Courier New" pitchFamily="34" charset="-122"/>
                 <a:cs typeface="Courier New" pitchFamily="34" charset="-120"/>
               </a:rPr>
-              <a:t>МЕЖА СТЕНДА — ЧЕСНА</a:t>
-            </a:r>
-            <a:endParaRPr lang="en-US" sz="950" dirty="0"/>
+              <a:t>4</a:t>
+            </a:r>
+            <a:endParaRPr lang="en-US" sz="1300" dirty="0"/>
           </a:p>
         </p:txBody>
       </p:sp>
@@ -14799,8 +15046,8 @@
         </p:nvSpPr>
         <p:spPr>
           <a:xfrm>
-            <a:off x="786384" y="4361688"/>
-            <a:ext cx="10625328" cy="722376"/>
+            <a:off x="1188720" y="4663440"/>
+            <a:ext cx="10424160" cy="457200"/>
           </a:xfrm>
           <a:prstGeom prst="rect">
             <a:avLst/>
@@ -14816,17 +15063,31 @@
               <a:buNone/>
             </a:pPr>
             <a:r>
-              <a:rPr lang="en-US" sz="1300" dirty="0">
-                <a:solidFill>
-                  <a:srgbClr val="1B1D23"/>
+              <a:rPr lang="en-US" sz="1400" b="1" dirty="0">
+                <a:solidFill>
+                  <a:srgbClr val="9A5B12"/>
                 </a:solidFill>
                 <a:latin typeface="Calibri" pitchFamily="34" charset="0"/>
                 <a:ea typeface="Calibri" pitchFamily="34" charset="-122"/>
                 <a:cs typeface="Calibri" pitchFamily="34" charset="-120"/>
               </a:rPr>
-              <a:t>Успішний fallback «основна впала — резерв відповів» на mock показати неможливо: обидва елементи ланцюга — той самий mock. Перехід дивимось у діфі коду.</a:t>
-            </a:r>
-            <a:endParaRPr lang="en-US" sz="1300" dirty="0"/>
+              <a:t>Circuit breaker · опційно  </a:t>
+            </a:r>
+            <a:pPr indent="0" marL="0">
+              <a:buNone/>
+            </a:pPr>
+            <a:r>
+              <a:rPr lang="en-US" sz="1200" dirty="0">
+                <a:solidFill>
+                  <a:srgbClr val="565C6B"/>
+                </a:solidFill>
+                <a:latin typeface="Calibri" pitchFamily="34" charset="0"/>
+                <a:ea typeface="Calibri" pitchFamily="34" charset="-122"/>
+                <a:cs typeface="Calibri" pitchFamily="34" charset="-120"/>
+              </a:rPr>
+              <a:t>3 збої → open на 30 с, обов'язково з half-open</a:t>
+            </a:r>
+            <a:endParaRPr lang="en-US" sz="1400" dirty="0"/>
           </a:p>
         </p:txBody>
       </p:sp>
@@ -14943,7 +15204,7 @@
                 <a:ea typeface="Calibri" pitchFamily="34" charset="-122"/>
                 <a:cs typeface="Calibri" pitchFamily="34" charset="-120"/>
               </a:rPr>
-              <a:t>Перевір себе</a:t>
+              <a:t>Що це довело</a:t>
             </a:r>
             <a:endParaRPr lang="en-US" sz="2500" dirty="0"/>
           </a:p>
@@ -15057,12 +15318,212 @@
         </p:nvSpPr>
         <p:spPr>
           <a:xfrm>
-            <a:off x="566928" y="1783080"/>
-            <a:ext cx="11064240" cy="1874520"/>
+            <a:off x="566928" y="1737360"/>
+            <a:ext cx="3566160" cy="1828800"/>
           </a:xfrm>
           <a:prstGeom prst="roundRect">
             <a:avLst>
-              <a:gd name="adj" fmla="val 5854"/>
+              <a:gd name="adj" fmla="val 6000"/>
+            </a:avLst>
+          </a:prstGeom>
+          <a:solidFill>
+            <a:srgbClr val="E9F3EE"/>
+          </a:solidFill>
+          <a:ln/>
+        </p:spPr>
+      </p:sp>
+      <p:sp>
+        <p:nvSpPr>
+          <p:cNvPr id="7" name="Text 5"/>
+          <p:cNvSpPr/>
+          <p:nvPr/>
+        </p:nvSpPr>
+        <p:spPr>
+          <a:xfrm>
+            <a:off x="768096" y="1892808"/>
+            <a:ext cx="3163824" cy="438912"/>
+          </a:xfrm>
+          <a:prstGeom prst="rect">
+            <a:avLst/>
+          </a:prstGeom>
+          <a:noFill/>
+          <a:ln/>
+        </p:spPr>
+        <p:txBody>
+          <a:bodyPr wrap="square" lIns="0" tIns="0" rIns="0" bIns="0" rtlCol="0" anchor="ctr"/>
+          <a:lstStyle/>
+          <a:p>
+            <a:pPr indent="0" marL="0">
+              <a:buNone/>
+            </a:pPr>
+            <a:r>
+              <a:rPr lang="en-US" sz="1450" b="1" dirty="0">
+                <a:solidFill>
+                  <a:srgbClr val="177245"/>
+                </a:solidFill>
+                <a:latin typeface="Calibri" pitchFamily="34" charset="0"/>
+                <a:ea typeface="Calibri" pitchFamily="34" charset="-122"/>
+                <a:cs typeface="Calibri" pitchFamily="34" charset="-120"/>
+              </a:rPr>
+              <a:t>Збій швидкий</a:t>
+            </a:r>
+            <a:endParaRPr lang="en-US" sz="1450" dirty="0"/>
+          </a:p>
+        </p:txBody>
+      </p:sp>
+      <p:sp>
+        <p:nvSpPr>
+          <p:cNvPr id="8" name="Text 6"/>
+          <p:cNvSpPr/>
+          <p:nvPr/>
+        </p:nvSpPr>
+        <p:spPr>
+          <a:xfrm>
+            <a:off x="768096" y="2423160"/>
+            <a:ext cx="3163824" cy="987552"/>
+          </a:xfrm>
+          <a:prstGeom prst="rect">
+            <a:avLst/>
+          </a:prstGeom>
+          <a:noFill/>
+          <a:ln/>
+        </p:spPr>
+        <p:txBody>
+          <a:bodyPr wrap="square" lIns="0" tIns="0" rIns="0" bIns="0" rtlCol="0" anchor="t"/>
+          <a:lstStyle/>
+          <a:p>
+            <a:pPr indent="0" marL="0">
+              <a:buNone/>
+            </a:pPr>
+            <a:r>
+              <a:rPr lang="en-US" sz="1200" dirty="0">
+                <a:solidFill>
+                  <a:srgbClr val="1B1D23"/>
+                </a:solidFill>
+                <a:latin typeface="Calibri" pitchFamily="34" charset="0"/>
+                <a:ea typeface="Calibri" pitchFamily="34" charset="-122"/>
+                <a:cs typeface="Calibri" pitchFamily="34" charset="-120"/>
+              </a:rPr>
+              <a:t>мілісекунди замість восьми секунд прихованих ретраїв</a:t>
+            </a:r>
+            <a:endParaRPr lang="en-US" sz="1200" dirty="0"/>
+          </a:p>
+        </p:txBody>
+      </p:sp>
+      <p:sp>
+        <p:nvSpPr>
+          <p:cNvPr id="9" name="Shape 7"/>
+          <p:cNvSpPr/>
+          <p:nvPr/>
+        </p:nvSpPr>
+        <p:spPr>
+          <a:xfrm>
+            <a:off x="4315968" y="1737360"/>
+            <a:ext cx="3566160" cy="1828800"/>
+          </a:xfrm>
+          <a:prstGeom prst="roundRect">
+            <a:avLst>
+              <a:gd name="adj" fmla="val 6000"/>
+            </a:avLst>
+          </a:prstGeom>
+          <a:solidFill>
+            <a:srgbClr val="ECEBFB"/>
+          </a:solidFill>
+          <a:ln/>
+        </p:spPr>
+      </p:sp>
+      <p:sp>
+        <p:nvSpPr>
+          <p:cNvPr id="10" name="Text 8"/>
+          <p:cNvSpPr/>
+          <p:nvPr/>
+        </p:nvSpPr>
+        <p:spPr>
+          <a:xfrm>
+            <a:off x="4517136" y="1892808"/>
+            <a:ext cx="3163824" cy="438912"/>
+          </a:xfrm>
+          <a:prstGeom prst="rect">
+            <a:avLst/>
+          </a:prstGeom>
+          <a:noFill/>
+          <a:ln/>
+        </p:spPr>
+        <p:txBody>
+          <a:bodyPr wrap="square" lIns="0" tIns="0" rIns="0" bIns="0" rtlCol="0" anchor="ctr"/>
+          <a:lstStyle/>
+          <a:p>
+            <a:pPr indent="0" marL="0">
+              <a:buNone/>
+            </a:pPr>
+            <a:r>
+              <a:rPr lang="en-US" sz="1450" b="1" dirty="0">
+                <a:solidFill>
+                  <a:srgbClr val="4038C4"/>
+                </a:solidFill>
+                <a:latin typeface="Calibri" pitchFamily="34" charset="0"/>
+                <a:ea typeface="Calibri" pitchFamily="34" charset="-122"/>
+                <a:cs typeface="Calibri" pitchFamily="34" charset="-120"/>
+              </a:rPr>
+              <a:t>Користувач бачить ввічливість</a:t>
+            </a:r>
+            <a:endParaRPr lang="en-US" sz="1450" dirty="0"/>
+          </a:p>
+        </p:txBody>
+      </p:sp>
+      <p:sp>
+        <p:nvSpPr>
+          <p:cNvPr id="11" name="Text 9"/>
+          <p:cNvSpPr/>
+          <p:nvPr/>
+        </p:nvSpPr>
+        <p:spPr>
+          <a:xfrm>
+            <a:off x="4517136" y="2423160"/>
+            <a:ext cx="3163824" cy="987552"/>
+          </a:xfrm>
+          <a:prstGeom prst="rect">
+            <a:avLst/>
+          </a:prstGeom>
+          <a:noFill/>
+          <a:ln/>
+        </p:spPr>
+        <p:txBody>
+          <a:bodyPr wrap="square" lIns="0" tIns="0" rIns="0" bIns="0" rtlCol="0" anchor="t"/>
+          <a:lstStyle/>
+          <a:p>
+            <a:pPr indent="0" marL="0">
+              <a:buNone/>
+            </a:pPr>
+            <a:r>
+              <a:rPr lang="en-US" sz="1200" dirty="0">
+                <a:solidFill>
+                  <a:srgbClr val="1B1D23"/>
+                </a:solidFill>
+                <a:latin typeface="Calibri" pitchFamily="34" charset="0"/>
+                <a:ea typeface="Calibri" pitchFamily="34" charset="-122"/>
+                <a:cs typeface="Calibri" pitchFamily="34" charset="-120"/>
+              </a:rPr>
+              <a:t>заглушка замість 500-ки — чат живий</a:t>
+            </a:r>
+            <a:endParaRPr lang="en-US" sz="1200" dirty="0"/>
+          </a:p>
+        </p:txBody>
+      </p:sp>
+      <p:sp>
+        <p:nvSpPr>
+          <p:cNvPr id="12" name="Shape 10"/>
+          <p:cNvSpPr/>
+          <p:nvPr/>
+        </p:nvSpPr>
+        <p:spPr>
+          <a:xfrm>
+            <a:off x="8065008" y="1737360"/>
+            <a:ext cx="3566160" cy="1828800"/>
+          </a:xfrm>
+          <a:prstGeom prst="roundRect">
+            <a:avLst>
+              <a:gd name="adj" fmla="val 6000"/>
             </a:avLst>
           </a:prstGeom>
           <a:solidFill>
@@ -15078,460 +15539,179 @@
       </p:sp>
       <p:sp>
         <p:nvSpPr>
-          <p:cNvPr id="7" name="Shape 5"/>
-          <p:cNvSpPr/>
-          <p:nvPr/>
-        </p:nvSpPr>
-        <p:spPr>
-          <a:xfrm>
-            <a:off x="978408" y="2157984"/>
-            <a:ext cx="256032" cy="256032"/>
-          </a:xfrm>
-          <a:prstGeom prst="roundRect">
-            <a:avLst>
-              <a:gd name="adj" fmla="val 21429"/>
-            </a:avLst>
-          </a:prstGeom>
-          <a:solidFill>
-            <a:srgbClr val="E9F3EE"/>
-          </a:solidFill>
-          <a:ln w="12700">
-            <a:solidFill>
-              <a:srgbClr val="177245"/>
-            </a:solidFill>
-            <a:prstDash val="solid"/>
-          </a:ln>
-        </p:spPr>
-      </p:sp>
-      <p:sp>
-        <p:nvSpPr>
-          <p:cNvPr id="8" name="Text 6"/>
-          <p:cNvSpPr/>
-          <p:nvPr/>
-        </p:nvSpPr>
-        <p:spPr>
-          <a:xfrm>
-            <a:off x="978408" y="2157984"/>
-            <a:ext cx="256032" cy="256032"/>
-          </a:xfrm>
-          <a:prstGeom prst="rect">
-            <a:avLst/>
-          </a:prstGeom>
-          <a:noFill/>
-          <a:ln/>
-        </p:spPr>
-        <p:txBody>
-          <a:bodyPr wrap="square" lIns="0" tIns="0" rIns="0" bIns="0" rtlCol="0" anchor="ctr"/>
-          <a:lstStyle/>
-          <a:p>
-            <a:pPr algn="ctr" indent="0" marL="0">
-              <a:buNone/>
-            </a:pPr>
-            <a:r>
-              <a:rPr lang="en-US" sz="1000" b="1" dirty="0">
-                <a:solidFill>
-                  <a:srgbClr val="177245"/>
+          <p:cNvPr id="13" name="Text 11"/>
+          <p:cNvSpPr/>
+          <p:nvPr/>
+        </p:nvSpPr>
+        <p:spPr>
+          <a:xfrm>
+            <a:off x="8266176" y="1892808"/>
+            <a:ext cx="3163824" cy="438912"/>
+          </a:xfrm>
+          <a:prstGeom prst="rect">
+            <a:avLst/>
+          </a:prstGeom>
+          <a:noFill/>
+          <a:ln/>
+        </p:spPr>
+        <p:txBody>
+          <a:bodyPr wrap="square" lIns="0" tIns="0" rIns="0" bIns="0" rtlCol="0" anchor="ctr"/>
+          <a:lstStyle/>
+          <a:p>
+            <a:pPr indent="0" marL="0">
+              <a:buNone/>
+            </a:pPr>
+            <a:r>
+              <a:rPr lang="en-US" sz="1450" b="1" dirty="0">
+                <a:solidFill>
+                  <a:srgbClr val="1B1D23"/>
                 </a:solidFill>
                 <a:latin typeface="Calibri" pitchFamily="34" charset="0"/>
                 <a:ea typeface="Calibri" pitchFamily="34" charset="-122"/>
                 <a:cs typeface="Calibri" pitchFamily="34" charset="-120"/>
               </a:rPr>
-              <a:t>✓</a:t>
-            </a:r>
-            <a:endParaRPr lang="en-US" sz="1000" dirty="0"/>
-          </a:p>
-        </p:txBody>
-      </p:sp>
-      <p:sp>
-        <p:nvSpPr>
-          <p:cNvPr id="9" name="Text 7"/>
-          <p:cNvSpPr/>
-          <p:nvPr/>
-        </p:nvSpPr>
-        <p:spPr>
-          <a:xfrm>
-            <a:off x="1362456" y="2103120"/>
-            <a:ext cx="4617720" cy="384048"/>
-          </a:xfrm>
-          <a:prstGeom prst="rect">
-            <a:avLst/>
-          </a:prstGeom>
-          <a:noFill/>
-          <a:ln/>
-        </p:spPr>
-        <p:txBody>
-          <a:bodyPr wrap="square" lIns="0" tIns="0" rIns="0" bIns="0" rtlCol="0" anchor="ctr"/>
+              <a:t>Система бачить правду</a:t>
+            </a:r>
+            <a:endParaRPr lang="en-US" sz="1450" dirty="0"/>
+          </a:p>
+        </p:txBody>
+      </p:sp>
+      <p:sp>
+        <p:nvSpPr>
+          <p:cNvPr id="14" name="Text 12"/>
+          <p:cNvSpPr/>
+          <p:nvPr/>
+        </p:nvSpPr>
+        <p:spPr>
+          <a:xfrm>
+            <a:off x="8266176" y="2423160"/>
+            <a:ext cx="3163824" cy="987552"/>
+          </a:xfrm>
+          <a:prstGeom prst="rect">
+            <a:avLst/>
+          </a:prstGeom>
+          <a:noFill/>
+          <a:ln/>
+        </p:spPr>
+        <p:txBody>
+          <a:bodyPr wrap="square" lIns="0" tIns="0" rIns="0" bIns="0" rtlCol="0" anchor="t"/>
           <a:lstStyle/>
           <a:p>
             <a:pPr indent="0" marL="0">
               <a:buNone/>
             </a:pPr>
             <a:r>
-              <a:rPr lang="en-US" sz="1250" dirty="0">
-                <a:solidFill>
-                  <a:srgbClr val="1B1D23"/>
+              <a:rPr lang="en-US" sz="1200" dirty="0">
+                <a:solidFill>
+                  <a:srgbClr val="565C6B"/>
                 </a:solidFill>
                 <a:latin typeface="Calibri" pitchFamily="34" charset="0"/>
                 <a:ea typeface="Calibri" pitchFamily="34" charset="-122"/>
                 <a:cs typeface="Calibri" pitchFamily="34" charset="-120"/>
               </a:rPr>
-              <a:t>__fail_503 дає ввічливу заглушку, не 500</a:t>
-            </a:r>
-            <a:endParaRPr lang="en-US" sz="1250" dirty="0"/>
-          </a:p>
-        </p:txBody>
-      </p:sp>
-      <p:sp>
-        <p:nvSpPr>
-          <p:cNvPr id="10" name="Shape 8"/>
-          <p:cNvSpPr/>
-          <p:nvPr/>
-        </p:nvSpPr>
-        <p:spPr>
-          <a:xfrm>
-            <a:off x="978408" y="2724912"/>
-            <a:ext cx="256032" cy="256032"/>
+              <a:t>503 у лозі й лічильник переходів, а не «все добре»</a:t>
+            </a:r>
+            <a:endParaRPr lang="en-US" sz="1200" dirty="0"/>
+          </a:p>
+        </p:txBody>
+      </p:sp>
+      <p:sp>
+        <p:nvSpPr>
+          <p:cNvPr id="15" name="Shape 13"/>
+          <p:cNvSpPr/>
+          <p:nvPr/>
+        </p:nvSpPr>
+        <p:spPr>
+          <a:xfrm>
+            <a:off x="566928" y="3977640"/>
+            <a:ext cx="11064240" cy="1234440"/>
           </a:xfrm>
           <a:prstGeom prst="roundRect">
             <a:avLst>
-              <a:gd name="adj" fmla="val 21429"/>
+              <a:gd name="adj" fmla="val 8889"/>
             </a:avLst>
           </a:prstGeom>
           <a:solidFill>
-            <a:srgbClr val="E9F3EE"/>
+            <a:srgbClr val="F8F0E2"/>
           </a:solidFill>
-          <a:ln w="12700">
-            <a:solidFill>
-              <a:srgbClr val="177245"/>
-            </a:solidFill>
-            <a:prstDash val="solid"/>
-          </a:ln>
-        </p:spPr>
-      </p:sp>
-      <p:sp>
-        <p:nvSpPr>
-          <p:cNvPr id="11" name="Text 9"/>
-          <p:cNvSpPr/>
-          <p:nvPr/>
-        </p:nvSpPr>
-        <p:spPr>
-          <a:xfrm>
-            <a:off x="978408" y="2724912"/>
-            <a:ext cx="256032" cy="256032"/>
-          </a:xfrm>
-          <a:prstGeom prst="rect">
-            <a:avLst/>
-          </a:prstGeom>
-          <a:noFill/>
-          <a:ln/>
-        </p:spPr>
-        <p:txBody>
-          <a:bodyPr wrap="square" lIns="0" tIns="0" rIns="0" bIns="0" rtlCol="0" anchor="ctr"/>
-          <a:lstStyle/>
-          <a:p>
-            <a:pPr algn="ctr" indent="0" marL="0">
-              <a:buNone/>
-            </a:pPr>
-            <a:r>
-              <a:rPr lang="en-US" sz="1000" b="1" dirty="0">
-                <a:solidFill>
-                  <a:srgbClr val="177245"/>
+          <a:ln/>
+        </p:spPr>
+      </p:sp>
+      <p:sp>
+        <p:nvSpPr>
+          <p:cNvPr id="16" name="Text 14"/>
+          <p:cNvSpPr/>
+          <p:nvPr/>
+        </p:nvSpPr>
+        <p:spPr>
+          <a:xfrm>
+            <a:off x="786384" y="4105656"/>
+            <a:ext cx="10625328" cy="219456"/>
+          </a:xfrm>
+          <a:prstGeom prst="rect">
+            <a:avLst/>
+          </a:prstGeom>
+          <a:noFill/>
+          <a:ln/>
+        </p:spPr>
+        <p:txBody>
+          <a:bodyPr wrap="square" lIns="0" tIns="0" rIns="0" bIns="0" rtlCol="0" anchor="ctr"/>
+          <a:lstStyle/>
+          <a:p>
+            <a:pPr indent="0" marL="0">
+              <a:buNone/>
+            </a:pPr>
+            <a:r>
+              <a:rPr lang="en-US" sz="950" b="1" spc="150" kern="0" dirty="0">
+                <a:solidFill>
+                  <a:srgbClr val="9A5B12"/>
+                </a:solidFill>
+                <a:latin typeface="Courier New" pitchFamily="34" charset="0"/>
+                <a:ea typeface="Courier New" pitchFamily="34" charset="-122"/>
+                <a:cs typeface="Courier New" pitchFamily="34" charset="-120"/>
+              </a:rPr>
+              <a:t>МЕЖА СТЕНДА — ЧЕСНА</a:t>
+            </a:r>
+            <a:endParaRPr lang="en-US" sz="950" dirty="0"/>
+          </a:p>
+        </p:txBody>
+      </p:sp>
+      <p:sp>
+        <p:nvSpPr>
+          <p:cNvPr id="17" name="Text 15"/>
+          <p:cNvSpPr/>
+          <p:nvPr/>
+        </p:nvSpPr>
+        <p:spPr>
+          <a:xfrm>
+            <a:off x="786384" y="4361688"/>
+            <a:ext cx="10625328" cy="722376"/>
+          </a:xfrm>
+          <a:prstGeom prst="rect">
+            <a:avLst/>
+          </a:prstGeom>
+          <a:noFill/>
+          <a:ln/>
+        </p:spPr>
+        <p:txBody>
+          <a:bodyPr wrap="square" lIns="0" tIns="0" rIns="0" bIns="0" rtlCol="0" anchor="ctr"/>
+          <a:lstStyle/>
+          <a:p>
+            <a:pPr indent="0" marL="0">
+              <a:buNone/>
+            </a:pPr>
+            <a:r>
+              <a:rPr lang="en-US" sz="1300" dirty="0">
+                <a:solidFill>
+                  <a:srgbClr val="1B1D23"/>
                 </a:solidFill>
                 <a:latin typeface="Calibri" pitchFamily="34" charset="0"/>
                 <a:ea typeface="Calibri" pitchFamily="34" charset="-122"/>
                 <a:cs typeface="Calibri" pitchFamily="34" charset="-120"/>
               </a:rPr>
-              <a:t>✓</a:t>
-            </a:r>
-            <a:endParaRPr lang="en-US" sz="1000" dirty="0"/>
-          </a:p>
-        </p:txBody>
-      </p:sp>
-      <p:sp>
-        <p:nvSpPr>
-          <p:cNvPr id="12" name="Text 10"/>
-          <p:cNvSpPr/>
-          <p:nvPr/>
-        </p:nvSpPr>
-        <p:spPr>
-          <a:xfrm>
-            <a:off x="1362456" y="2670048"/>
-            <a:ext cx="4617720" cy="384048"/>
-          </a:xfrm>
-          <a:prstGeom prst="rect">
-            <a:avLst/>
-          </a:prstGeom>
-          <a:noFill/>
-          <a:ln/>
-        </p:spPr>
-        <p:txBody>
-          <a:bodyPr wrap="square" lIns="0" tIns="0" rIns="0" bIns="0" rtlCol="0" anchor="ctr"/>
-          <a:lstStyle/>
-          <a:p>
-            <a:pPr indent="0" marL="0">
-              <a:buNone/>
-            </a:pPr>
-            <a:r>
-              <a:rPr lang="en-US" sz="1250" dirty="0">
-                <a:solidFill>
-                  <a:srgbClr val="1B1D23"/>
-                </a:solidFill>
-                <a:latin typeface="Calibri" pitchFamily="34" charset="0"/>
-                <a:ea typeface="Calibri" pitchFamily="34" charset="-122"/>
-                <a:cs typeface="Calibri" pitchFamily="34" charset="-120"/>
-              </a:rPr>
-              <a:t>збій швидкий — мілісекунди, а не секунди</a:t>
-            </a:r>
-            <a:endParaRPr lang="en-US" sz="1250" dirty="0"/>
-          </a:p>
-        </p:txBody>
-      </p:sp>
-      <p:sp>
-        <p:nvSpPr>
-          <p:cNvPr id="13" name="Shape 11"/>
-          <p:cNvSpPr/>
-          <p:nvPr/>
-        </p:nvSpPr>
-        <p:spPr>
-          <a:xfrm>
-            <a:off x="6144768" y="2157984"/>
-            <a:ext cx="256032" cy="256032"/>
-          </a:xfrm>
-          <a:prstGeom prst="roundRect">
-            <a:avLst>
-              <a:gd name="adj" fmla="val 21429"/>
-            </a:avLst>
-          </a:prstGeom>
-          <a:solidFill>
-            <a:srgbClr val="E9F3EE"/>
-          </a:solidFill>
-          <a:ln w="12700">
-            <a:solidFill>
-              <a:srgbClr val="177245"/>
-            </a:solidFill>
-            <a:prstDash val="solid"/>
-          </a:ln>
-        </p:spPr>
-      </p:sp>
-      <p:sp>
-        <p:nvSpPr>
-          <p:cNvPr id="14" name="Text 12"/>
-          <p:cNvSpPr/>
-          <p:nvPr/>
-        </p:nvSpPr>
-        <p:spPr>
-          <a:xfrm>
-            <a:off x="6144768" y="2157984"/>
-            <a:ext cx="256032" cy="256032"/>
-          </a:xfrm>
-          <a:prstGeom prst="rect">
-            <a:avLst/>
-          </a:prstGeom>
-          <a:noFill/>
-          <a:ln/>
-        </p:spPr>
-        <p:txBody>
-          <a:bodyPr wrap="square" lIns="0" tIns="0" rIns="0" bIns="0" rtlCol="0" anchor="ctr"/>
-          <a:lstStyle/>
-          <a:p>
-            <a:pPr algn="ctr" indent="0" marL="0">
-              <a:buNone/>
-            </a:pPr>
-            <a:r>
-              <a:rPr lang="en-US" sz="1000" b="1" dirty="0">
-                <a:solidFill>
-                  <a:srgbClr val="177245"/>
-                </a:solidFill>
-                <a:latin typeface="Calibri" pitchFamily="34" charset="0"/>
-                <a:ea typeface="Calibri" pitchFamily="34" charset="-122"/>
-                <a:cs typeface="Calibri" pitchFamily="34" charset="-120"/>
-              </a:rPr>
-              <a:t>✓</a:t>
-            </a:r>
-            <a:endParaRPr lang="en-US" sz="1000" dirty="0"/>
-          </a:p>
-        </p:txBody>
-      </p:sp>
-      <p:sp>
-        <p:nvSpPr>
-          <p:cNvPr id="15" name="Text 13"/>
-          <p:cNvSpPr/>
-          <p:nvPr/>
-        </p:nvSpPr>
-        <p:spPr>
-          <a:xfrm>
-            <a:off x="6528816" y="2103120"/>
-            <a:ext cx="4617720" cy="384048"/>
-          </a:xfrm>
-          <a:prstGeom prst="rect">
-            <a:avLst/>
-          </a:prstGeom>
-          <a:noFill/>
-          <a:ln/>
-        </p:spPr>
-        <p:txBody>
-          <a:bodyPr wrap="square" lIns="0" tIns="0" rIns="0" bIns="0" rtlCol="0" anchor="ctr"/>
-          <a:lstStyle/>
-          <a:p>
-            <a:pPr indent="0" marL="0">
-              <a:buNone/>
-            </a:pPr>
-            <a:r>
-              <a:rPr lang="en-US" sz="1250" dirty="0">
-                <a:solidFill>
-                  <a:srgbClr val="1B1D23"/>
-                </a:solidFill>
-                <a:latin typeface="Calibri" pitchFamily="34" charset="0"/>
-                <a:ea typeface="Calibri" pitchFamily="34" charset="-122"/>
-                <a:cs typeface="Calibri" pitchFamily="34" charset="-120"/>
-              </a:rPr>
-              <a:t>у лозі чесний 503 і лічильник переходів</a:t>
-            </a:r>
-            <a:endParaRPr lang="en-US" sz="1250" dirty="0"/>
-          </a:p>
-        </p:txBody>
-      </p:sp>
-      <p:sp>
-        <p:nvSpPr>
-          <p:cNvPr id="16" name="Shape 14"/>
-          <p:cNvSpPr/>
-          <p:nvPr/>
-        </p:nvSpPr>
-        <p:spPr>
-          <a:xfrm>
-            <a:off x="6144768" y="2724912"/>
-            <a:ext cx="256032" cy="256032"/>
-          </a:xfrm>
-          <a:prstGeom prst="roundRect">
-            <a:avLst>
-              <a:gd name="adj" fmla="val 21429"/>
-            </a:avLst>
-          </a:prstGeom>
-          <a:solidFill>
-            <a:srgbClr val="E9F3EE"/>
-          </a:solidFill>
-          <a:ln w="12700">
-            <a:solidFill>
-              <a:srgbClr val="177245"/>
-            </a:solidFill>
-            <a:prstDash val="solid"/>
-          </a:ln>
-        </p:spPr>
-      </p:sp>
-      <p:sp>
-        <p:nvSpPr>
-          <p:cNvPr id="17" name="Text 15"/>
-          <p:cNvSpPr/>
-          <p:nvPr/>
-        </p:nvSpPr>
-        <p:spPr>
-          <a:xfrm>
-            <a:off x="6144768" y="2724912"/>
-            <a:ext cx="256032" cy="256032"/>
-          </a:xfrm>
-          <a:prstGeom prst="rect">
-            <a:avLst/>
-          </a:prstGeom>
-          <a:noFill/>
-          <a:ln/>
-        </p:spPr>
-        <p:txBody>
-          <a:bodyPr wrap="square" lIns="0" tIns="0" rIns="0" bIns="0" rtlCol="0" anchor="ctr"/>
-          <a:lstStyle/>
-          <a:p>
-            <a:pPr algn="ctr" indent="0" marL="0">
-              <a:buNone/>
-            </a:pPr>
-            <a:r>
-              <a:rPr lang="en-US" sz="1000" b="1" dirty="0">
-                <a:solidFill>
-                  <a:srgbClr val="177245"/>
-                </a:solidFill>
-                <a:latin typeface="Calibri" pitchFamily="34" charset="0"/>
-                <a:ea typeface="Calibri" pitchFamily="34" charset="-122"/>
-                <a:cs typeface="Calibri" pitchFamily="34" charset="-120"/>
-              </a:rPr>
-              <a:t>✓</a:t>
-            </a:r>
-            <a:endParaRPr lang="en-US" sz="1000" dirty="0"/>
-          </a:p>
-        </p:txBody>
-      </p:sp>
-      <p:sp>
-        <p:nvSpPr>
-          <p:cNvPr id="18" name="Text 16"/>
-          <p:cNvSpPr/>
-          <p:nvPr/>
-        </p:nvSpPr>
-        <p:spPr>
-          <a:xfrm>
-            <a:off x="6528816" y="2670048"/>
-            <a:ext cx="4617720" cy="384048"/>
-          </a:xfrm>
-          <a:prstGeom prst="rect">
-            <a:avLst/>
-          </a:prstGeom>
-          <a:noFill/>
-          <a:ln/>
-        </p:spPr>
-        <p:txBody>
-          <a:bodyPr wrap="square" lIns="0" tIns="0" rIns="0" bIns="0" rtlCol="0" anchor="ctr"/>
-          <a:lstStyle/>
-          <a:p>
-            <a:pPr indent="0" marL="0">
-              <a:buNone/>
-            </a:pPr>
-            <a:r>
-              <a:rPr lang="en-US" sz="1250" dirty="0">
-                <a:solidFill>
-                  <a:srgbClr val="1B1D23"/>
-                </a:solidFill>
-                <a:latin typeface="Calibri" pitchFamily="34" charset="0"/>
-                <a:ea typeface="Calibri" pitchFamily="34" charset="-122"/>
-                <a:cs typeface="Calibri" pitchFamily="34" charset="-120"/>
-              </a:rPr>
-              <a:t>поясню retry, fallback і breaker одним реченням</a:t>
-            </a:r>
-            <a:endParaRPr lang="en-US" sz="1250" dirty="0"/>
-          </a:p>
-        </p:txBody>
-      </p:sp>
-      <p:sp>
-        <p:nvSpPr>
-          <p:cNvPr id="19" name="Text 17"/>
-          <p:cNvSpPr/>
-          <p:nvPr/>
-        </p:nvSpPr>
-        <p:spPr>
-          <a:xfrm>
-            <a:off x="566928" y="3886200"/>
-            <a:ext cx="10972800" cy="320040"/>
-          </a:xfrm>
-          <a:prstGeom prst="rect">
-            <a:avLst/>
-          </a:prstGeom>
-          <a:noFill/>
-          <a:ln/>
-        </p:spPr>
-        <p:txBody>
-          <a:bodyPr wrap="square" lIns="0" tIns="0" rIns="0" bIns="0" rtlCol="0" anchor="ctr"/>
-          <a:lstStyle/>
-          <a:p>
-            <a:pPr indent="0" marL="0">
-              <a:buNone/>
-            </a:pPr>
-            <a:r>
-              <a:rPr lang="en-US" sz="1200" i="1" dirty="0">
-                <a:solidFill>
-                  <a:srgbClr val="8A90A0"/>
-                </a:solidFill>
-                <a:latin typeface="Calibri" pitchFamily="34" charset="0"/>
-                <a:ea typeface="Calibri" pitchFamily="34" charset="-122"/>
-                <a:cs typeface="Calibri" pitchFamily="34" charset="-120"/>
-              </a:rPr>
-              <a:t>Де завагалися — туди і повертайтеся. Питання — у канал потоку або на Q&amp;A.</a:t>
-            </a:r>
-            <a:endParaRPr lang="en-US" sz="1200" dirty="0"/>
+              <a:t>Успішний fallback «основна впала — резерв відповів» на mock показати неможливо: обидва елементи ланцюга — той самий mock. Перехід дивимось у діфі коду.</a:t>
+            </a:r>
+            <a:endParaRPr lang="en-US" sz="1300" dirty="0"/>
           </a:p>
         </p:txBody>
       </p:sp>
@@ -15648,7 +15828,7 @@
                 <a:ea typeface="Calibri" pitchFamily="34" charset="-122"/>
                 <a:cs typeface="Calibri" pitchFamily="34" charset="-120"/>
               </a:rPr>
-              <a:t>Антипатерни тижня</a:t>
+              <a:t>Перевір себе</a:t>
             </a:r>
             <a:endParaRPr lang="en-US" sz="2500" dirty="0"/>
           </a:p>
@@ -15671,7 +15851,7 @@
             </a:avLst>
           </a:prstGeom>
           <a:solidFill>
-            <a:srgbClr val="ECEBFB"/>
+            <a:srgbClr val="F8F0E2"/>
           </a:solidFill>
           <a:ln/>
         </p:spPr>
@@ -15703,13 +15883,13 @@
             <a:r>
               <a:rPr lang="en-US" sz="900" b="1" spc="100" kern="0" dirty="0">
                 <a:solidFill>
-                  <a:srgbClr val="4038C4"/>
+                  <a:srgbClr val="9A5B12"/>
                 </a:solidFill>
                 <a:latin typeface="Courier New" pitchFamily="34" charset="0"/>
                 <a:ea typeface="Courier New" pitchFamily="34" charset="-122"/>
                 <a:cs typeface="Courier New" pitchFamily="34" charset="-120"/>
               </a:rPr>
-              <a:t>ТЕОРІЯ</a:t>
+              <a:t>РЕФЛЕКСІЯ</a:t>
             </a:r>
             <a:endParaRPr lang="en-US" sz="900" dirty="0"/>
           </a:p>
@@ -15763,11 +15943,11 @@
         <p:spPr>
           <a:xfrm>
             <a:off x="566928" y="1783080"/>
-            <a:ext cx="11064240" cy="731520"/>
+            <a:ext cx="11064240" cy="1874520"/>
           </a:xfrm>
           <a:prstGeom prst="roundRect">
             <a:avLst>
-              <a:gd name="adj" fmla="val 12500"/>
+              <a:gd name="adj" fmla="val 5854"/>
             </a:avLst>
           </a:prstGeom>
           <a:solidFill>
@@ -15789,16 +15969,23 @@
         </p:nvSpPr>
         <p:spPr>
           <a:xfrm>
-            <a:off x="768096" y="1956816"/>
-            <a:ext cx="384048" cy="384048"/>
-          </a:xfrm>
-          <a:prstGeom prst="ellipse">
-            <a:avLst/>
+            <a:off x="978408" y="2157984"/>
+            <a:ext cx="256032" cy="256032"/>
+          </a:xfrm>
+          <a:prstGeom prst="roundRect">
+            <a:avLst>
+              <a:gd name="adj" fmla="val 21429"/>
+            </a:avLst>
           </a:prstGeom>
           <a:solidFill>
-            <a:srgbClr val="F9E9E8"/>
+            <a:srgbClr val="E9F3EE"/>
           </a:solidFill>
-          <a:ln/>
+          <a:ln w="12700">
+            <a:solidFill>
+              <a:srgbClr val="177245"/>
+            </a:solidFill>
+            <a:prstDash val="solid"/>
+          </a:ln>
         </p:spPr>
       </p:sp>
       <p:sp>
@@ -15809,8 +15996,8 @@
         </p:nvSpPr>
         <p:spPr>
           <a:xfrm>
-            <a:off x="768096" y="1956816"/>
-            <a:ext cx="384048" cy="384048"/>
+            <a:off x="978408" y="2157984"/>
+            <a:ext cx="256032" cy="256032"/>
           </a:xfrm>
           <a:prstGeom prst="rect">
             <a:avLst/>
@@ -15826,17 +16013,17 @@
               <a:buNone/>
             </a:pPr>
             <a:r>
-              <a:rPr lang="en-US" sz="1300" b="1" dirty="0">
-                <a:solidFill>
-                  <a:srgbClr val="B3261E"/>
+              <a:rPr lang="en-US" sz="1000" b="1" dirty="0">
+                <a:solidFill>
+                  <a:srgbClr val="177245"/>
                 </a:solidFill>
                 <a:latin typeface="Calibri" pitchFamily="34" charset="0"/>
                 <a:ea typeface="Calibri" pitchFamily="34" charset="-122"/>
                 <a:cs typeface="Calibri" pitchFamily="34" charset="-120"/>
               </a:rPr>
-              <a:t>✕</a:t>
-            </a:r>
-            <a:endParaRPr lang="en-US" sz="1300" dirty="0"/>
+              <a:t>✓</a:t>
+            </a:r>
+            <a:endParaRPr lang="en-US" sz="1000" dirty="0"/>
           </a:p>
         </p:txBody>
       </p:sp>
@@ -15848,8 +16035,8 @@
         </p:nvSpPr>
         <p:spPr>
           <a:xfrm>
-            <a:off x="1298448" y="1783080"/>
-            <a:ext cx="10149840" cy="731520"/>
+            <a:off x="1362456" y="2103120"/>
+            <a:ext cx="4617720" cy="384048"/>
           </a:xfrm>
           <a:prstGeom prst="rect">
             <a:avLst/>
@@ -15865,7 +16052,7 @@
               <a:buNone/>
             </a:pPr>
             <a:r>
-              <a:rPr lang="en-US" sz="1300" b="1" dirty="0">
+              <a:rPr lang="en-US" sz="1250" dirty="0">
                 <a:solidFill>
                   <a:srgbClr val="1B1D23"/>
                 </a:solidFill>
@@ -15873,48 +16060,139 @@
                 <a:ea typeface="Calibri" pitchFamily="34" charset="-122"/>
                 <a:cs typeface="Calibri" pitchFamily="34" charset="-120"/>
               </a:rPr>
-              <a:t>Retry без паузи і без стелі   </a:t>
-            </a:r>
-            <a:pPr indent="0" marL="0">
-              <a:buNone/>
-            </a:pPr>
-            <a:r>
-              <a:rPr lang="en-US" sz="1150" dirty="0">
-                <a:solidFill>
-                  <a:srgbClr val="565C6B"/>
+              <a:t>__fail_503 дає ввічливу заглушку, не 500</a:t>
+            </a:r>
+            <a:endParaRPr lang="en-US" sz="1250" dirty="0"/>
+          </a:p>
+        </p:txBody>
+      </p:sp>
+      <p:sp>
+        <p:nvSpPr>
+          <p:cNvPr id="10" name="Shape 8"/>
+          <p:cNvSpPr/>
+          <p:nvPr/>
+        </p:nvSpPr>
+        <p:spPr>
+          <a:xfrm>
+            <a:off x="978408" y="2724912"/>
+            <a:ext cx="256032" cy="256032"/>
+          </a:xfrm>
+          <a:prstGeom prst="roundRect">
+            <a:avLst>
+              <a:gd name="adj" fmla="val 21429"/>
+            </a:avLst>
+          </a:prstGeom>
+          <a:solidFill>
+            <a:srgbClr val="E9F3EE"/>
+          </a:solidFill>
+          <a:ln w="12700">
+            <a:solidFill>
+              <a:srgbClr val="177245"/>
+            </a:solidFill>
+            <a:prstDash val="solid"/>
+          </a:ln>
+        </p:spPr>
+      </p:sp>
+      <p:sp>
+        <p:nvSpPr>
+          <p:cNvPr id="11" name="Text 9"/>
+          <p:cNvSpPr/>
+          <p:nvPr/>
+        </p:nvSpPr>
+        <p:spPr>
+          <a:xfrm>
+            <a:off x="978408" y="2724912"/>
+            <a:ext cx="256032" cy="256032"/>
+          </a:xfrm>
+          <a:prstGeom prst="rect">
+            <a:avLst/>
+          </a:prstGeom>
+          <a:noFill/>
+          <a:ln/>
+        </p:spPr>
+        <p:txBody>
+          <a:bodyPr wrap="square" lIns="0" tIns="0" rIns="0" bIns="0" rtlCol="0" anchor="ctr"/>
+          <a:lstStyle/>
+          <a:p>
+            <a:pPr algn="ctr" indent="0" marL="0">
+              <a:buNone/>
+            </a:pPr>
+            <a:r>
+              <a:rPr lang="en-US" sz="1000" b="1" dirty="0">
+                <a:solidFill>
+                  <a:srgbClr val="177245"/>
                 </a:solidFill>
                 <a:latin typeface="Calibri" pitchFamily="34" charset="0"/>
                 <a:ea typeface="Calibri" pitchFamily="34" charset="-122"/>
                 <a:cs typeface="Calibri" pitchFamily="34" charset="-120"/>
               </a:rPr>
-              <a:t>ваш код стає другою половиною інциденту</a:t>
-            </a:r>
-            <a:endParaRPr lang="en-US" sz="1300" dirty="0"/>
-          </a:p>
-        </p:txBody>
-      </p:sp>
-      <p:sp>
-        <p:nvSpPr>
-          <p:cNvPr id="10" name="Shape 8"/>
-          <p:cNvSpPr/>
-          <p:nvPr/>
-        </p:nvSpPr>
-        <p:spPr>
-          <a:xfrm>
-            <a:off x="566928" y="2651760"/>
-            <a:ext cx="11064240" cy="731520"/>
+              <a:t>✓</a:t>
+            </a:r>
+            <a:endParaRPr lang="en-US" sz="1000" dirty="0"/>
+          </a:p>
+        </p:txBody>
+      </p:sp>
+      <p:sp>
+        <p:nvSpPr>
+          <p:cNvPr id="12" name="Text 10"/>
+          <p:cNvSpPr/>
+          <p:nvPr/>
+        </p:nvSpPr>
+        <p:spPr>
+          <a:xfrm>
+            <a:off x="1362456" y="2670048"/>
+            <a:ext cx="4617720" cy="384048"/>
+          </a:xfrm>
+          <a:prstGeom prst="rect">
+            <a:avLst/>
+          </a:prstGeom>
+          <a:noFill/>
+          <a:ln/>
+        </p:spPr>
+        <p:txBody>
+          <a:bodyPr wrap="square" lIns="0" tIns="0" rIns="0" bIns="0" rtlCol="0" anchor="ctr"/>
+          <a:lstStyle/>
+          <a:p>
+            <a:pPr indent="0" marL="0">
+              <a:buNone/>
+            </a:pPr>
+            <a:r>
+              <a:rPr lang="en-US" sz="1250" dirty="0">
+                <a:solidFill>
+                  <a:srgbClr val="1B1D23"/>
+                </a:solidFill>
+                <a:latin typeface="Calibri" pitchFamily="34" charset="0"/>
+                <a:ea typeface="Calibri" pitchFamily="34" charset="-122"/>
+                <a:cs typeface="Calibri" pitchFamily="34" charset="-120"/>
+              </a:rPr>
+              <a:t>збій швидкий — мілісекунди, а не секунди</a:t>
+            </a:r>
+            <a:endParaRPr lang="en-US" sz="1250" dirty="0"/>
+          </a:p>
+        </p:txBody>
+      </p:sp>
+      <p:sp>
+        <p:nvSpPr>
+          <p:cNvPr id="13" name="Shape 11"/>
+          <p:cNvSpPr/>
+          <p:nvPr/>
+        </p:nvSpPr>
+        <p:spPr>
+          <a:xfrm>
+            <a:off x="6144768" y="2157984"/>
+            <a:ext cx="256032" cy="256032"/>
           </a:xfrm>
           <a:prstGeom prst="roundRect">
             <a:avLst>
-              <a:gd name="adj" fmla="val 12500"/>
+              <a:gd name="adj" fmla="val 21429"/>
             </a:avLst>
           </a:prstGeom>
           <a:solidFill>
-            <a:srgbClr val="FFFFFF"/>
+            <a:srgbClr val="E9F3EE"/>
           </a:solidFill>
           <a:ln w="12700">
             <a:solidFill>
-              <a:srgbClr val="E4E6EC"/>
+              <a:srgbClr val="177245"/>
             </a:solidFill>
             <a:prstDash val="solid"/>
           </a:ln>
@@ -15922,34 +16200,14 @@
       </p:sp>
       <p:sp>
         <p:nvSpPr>
-          <p:cNvPr id="11" name="Shape 9"/>
-          <p:cNvSpPr/>
-          <p:nvPr/>
-        </p:nvSpPr>
-        <p:spPr>
-          <a:xfrm>
-            <a:off x="768096" y="2825496"/>
-            <a:ext cx="384048" cy="384048"/>
-          </a:xfrm>
-          <a:prstGeom prst="ellipse">
-            <a:avLst/>
-          </a:prstGeom>
-          <a:solidFill>
-            <a:srgbClr val="F9E9E8"/>
-          </a:solidFill>
-          <a:ln/>
-        </p:spPr>
-      </p:sp>
-      <p:sp>
-        <p:nvSpPr>
-          <p:cNvPr id="12" name="Text 10"/>
-          <p:cNvSpPr/>
-          <p:nvPr/>
-        </p:nvSpPr>
-        <p:spPr>
-          <a:xfrm>
-            <a:off x="768096" y="2825496"/>
-            <a:ext cx="384048" cy="384048"/>
+          <p:cNvPr id="14" name="Text 12"/>
+          <p:cNvSpPr/>
+          <p:nvPr/>
+        </p:nvSpPr>
+        <p:spPr>
+          <a:xfrm>
+            <a:off x="6144768" y="2157984"/>
+            <a:ext cx="256032" cy="256032"/>
           </a:xfrm>
           <a:prstGeom prst="rect">
             <a:avLst/>
@@ -15965,30 +16223,30 @@
               <a:buNone/>
             </a:pPr>
             <a:r>
-              <a:rPr lang="en-US" sz="1300" b="1" dirty="0">
-                <a:solidFill>
-                  <a:srgbClr val="B3261E"/>
+              <a:rPr lang="en-US" sz="1000" b="1" dirty="0">
+                <a:solidFill>
+                  <a:srgbClr val="177245"/>
                 </a:solidFill>
                 <a:latin typeface="Calibri" pitchFamily="34" charset="0"/>
                 <a:ea typeface="Calibri" pitchFamily="34" charset="-122"/>
                 <a:cs typeface="Calibri" pitchFamily="34" charset="-120"/>
               </a:rPr>
-              <a:t>✕</a:t>
-            </a:r>
-            <a:endParaRPr lang="en-US" sz="1300" dirty="0"/>
-          </a:p>
-        </p:txBody>
-      </p:sp>
-      <p:sp>
-        <p:nvSpPr>
-          <p:cNvPr id="13" name="Text 11"/>
-          <p:cNvSpPr/>
-          <p:nvPr/>
-        </p:nvSpPr>
-        <p:spPr>
-          <a:xfrm>
-            <a:off x="1298448" y="2651760"/>
-            <a:ext cx="10149840" cy="731520"/>
+              <a:t>✓</a:t>
+            </a:r>
+            <a:endParaRPr lang="en-US" sz="1000" dirty="0"/>
+          </a:p>
+        </p:txBody>
+      </p:sp>
+      <p:sp>
+        <p:nvSpPr>
+          <p:cNvPr id="15" name="Text 13"/>
+          <p:cNvSpPr/>
+          <p:nvPr/>
+        </p:nvSpPr>
+        <p:spPr>
+          <a:xfrm>
+            <a:off x="6528816" y="2103120"/>
+            <a:ext cx="4617720" cy="384048"/>
           </a:xfrm>
           <a:prstGeom prst="rect">
             <a:avLst/>
@@ -16004,7 +16262,7 @@
               <a:buNone/>
             </a:pPr>
             <a:r>
-              <a:rPr lang="en-US" sz="1300" b="1" dirty="0">
+              <a:rPr lang="en-US" sz="1250" dirty="0">
                 <a:solidFill>
                   <a:srgbClr val="1B1D23"/>
                 </a:solidFill>
@@ -16012,122 +16270,127 @@
                 <a:ea typeface="Calibri" pitchFamily="34" charset="-122"/>
                 <a:cs typeface="Calibri" pitchFamily="34" charset="-120"/>
               </a:rPr>
-              <a:t>Заглушка зі статусом 200   </a:t>
-            </a:r>
-            <a:pPr indent="0" marL="0">
-              <a:buNone/>
-            </a:pPr>
-            <a:r>
-              <a:rPr lang="en-US" sz="1150" dirty="0">
-                <a:solidFill>
-                  <a:srgbClr val="565C6B"/>
+              <a:t>у лозі чесний 503 і лічильник переходів</a:t>
+            </a:r>
+            <a:endParaRPr lang="en-US" sz="1250" dirty="0"/>
+          </a:p>
+        </p:txBody>
+      </p:sp>
+      <p:sp>
+        <p:nvSpPr>
+          <p:cNvPr id="16" name="Shape 14"/>
+          <p:cNvSpPr/>
+          <p:nvPr/>
+        </p:nvSpPr>
+        <p:spPr>
+          <a:xfrm>
+            <a:off x="6144768" y="2724912"/>
+            <a:ext cx="256032" cy="256032"/>
+          </a:xfrm>
+          <a:prstGeom prst="roundRect">
+            <a:avLst>
+              <a:gd name="adj" fmla="val 21429"/>
+            </a:avLst>
+          </a:prstGeom>
+          <a:solidFill>
+            <a:srgbClr val="E9F3EE"/>
+          </a:solidFill>
+          <a:ln w="12700">
+            <a:solidFill>
+              <a:srgbClr val="177245"/>
+            </a:solidFill>
+            <a:prstDash val="solid"/>
+          </a:ln>
+        </p:spPr>
+      </p:sp>
+      <p:sp>
+        <p:nvSpPr>
+          <p:cNvPr id="17" name="Text 15"/>
+          <p:cNvSpPr/>
+          <p:nvPr/>
+        </p:nvSpPr>
+        <p:spPr>
+          <a:xfrm>
+            <a:off x="6144768" y="2724912"/>
+            <a:ext cx="256032" cy="256032"/>
+          </a:xfrm>
+          <a:prstGeom prst="rect">
+            <a:avLst/>
+          </a:prstGeom>
+          <a:noFill/>
+          <a:ln/>
+        </p:spPr>
+        <p:txBody>
+          <a:bodyPr wrap="square" lIns="0" tIns="0" rIns="0" bIns="0" rtlCol="0" anchor="ctr"/>
+          <a:lstStyle/>
+          <a:p>
+            <a:pPr algn="ctr" indent="0" marL="0">
+              <a:buNone/>
+            </a:pPr>
+            <a:r>
+              <a:rPr lang="en-US" sz="1000" b="1" dirty="0">
+                <a:solidFill>
+                  <a:srgbClr val="177245"/>
                 </a:solidFill>
                 <a:latin typeface="Calibri" pitchFamily="34" charset="0"/>
                 <a:ea typeface="Calibri" pitchFamily="34" charset="-122"/>
                 <a:cs typeface="Calibri" pitchFamily="34" charset="-120"/>
               </a:rPr>
-              <a:t>моніторинг бачить здорову систему, коли всі бачать вибачення</a:t>
-            </a:r>
-            <a:endParaRPr lang="en-US" sz="1300" dirty="0"/>
-          </a:p>
-        </p:txBody>
-      </p:sp>
-      <p:sp>
-        <p:nvSpPr>
-          <p:cNvPr id="14" name="Shape 12"/>
-          <p:cNvSpPr/>
-          <p:nvPr/>
-        </p:nvSpPr>
-        <p:spPr>
-          <a:xfrm>
-            <a:off x="566928" y="3520440"/>
-            <a:ext cx="11064240" cy="731520"/>
-          </a:xfrm>
-          <a:prstGeom prst="roundRect">
-            <a:avLst>
-              <a:gd name="adj" fmla="val 12500"/>
-            </a:avLst>
-          </a:prstGeom>
-          <a:solidFill>
-            <a:srgbClr val="FFFFFF"/>
-          </a:solidFill>
-          <a:ln w="12700">
-            <a:solidFill>
-              <a:srgbClr val="E4E6EC"/>
-            </a:solidFill>
-            <a:prstDash val="solid"/>
-          </a:ln>
-        </p:spPr>
-      </p:sp>
-      <p:sp>
-        <p:nvSpPr>
-          <p:cNvPr id="15" name="Shape 13"/>
-          <p:cNvSpPr/>
-          <p:nvPr/>
-        </p:nvSpPr>
-        <p:spPr>
-          <a:xfrm>
-            <a:off x="768096" y="3694176"/>
-            <a:ext cx="384048" cy="384048"/>
-          </a:xfrm>
-          <a:prstGeom prst="ellipse">
-            <a:avLst/>
-          </a:prstGeom>
-          <a:solidFill>
-            <a:srgbClr val="F9E9E8"/>
-          </a:solidFill>
-          <a:ln/>
-        </p:spPr>
-      </p:sp>
-      <p:sp>
-        <p:nvSpPr>
-          <p:cNvPr id="16" name="Text 14"/>
-          <p:cNvSpPr/>
-          <p:nvPr/>
-        </p:nvSpPr>
-        <p:spPr>
-          <a:xfrm>
-            <a:off x="768096" y="3694176"/>
-            <a:ext cx="384048" cy="384048"/>
-          </a:xfrm>
-          <a:prstGeom prst="rect">
-            <a:avLst/>
-          </a:prstGeom>
-          <a:noFill/>
-          <a:ln/>
-        </p:spPr>
-        <p:txBody>
-          <a:bodyPr wrap="square" lIns="0" tIns="0" rIns="0" bIns="0" rtlCol="0" anchor="ctr"/>
-          <a:lstStyle/>
-          <a:p>
-            <a:pPr algn="ctr" indent="0" marL="0">
-              <a:buNone/>
-            </a:pPr>
-            <a:r>
-              <a:rPr lang="en-US" sz="1300" b="1" dirty="0">
-                <a:solidFill>
-                  <a:srgbClr val="B3261E"/>
+              <a:t>✓</a:t>
+            </a:r>
+            <a:endParaRPr lang="en-US" sz="1000" dirty="0"/>
+          </a:p>
+        </p:txBody>
+      </p:sp>
+      <p:sp>
+        <p:nvSpPr>
+          <p:cNvPr id="18" name="Text 16"/>
+          <p:cNvSpPr/>
+          <p:nvPr/>
+        </p:nvSpPr>
+        <p:spPr>
+          <a:xfrm>
+            <a:off x="6528816" y="2670048"/>
+            <a:ext cx="4617720" cy="384048"/>
+          </a:xfrm>
+          <a:prstGeom prst="rect">
+            <a:avLst/>
+          </a:prstGeom>
+          <a:noFill/>
+          <a:ln/>
+        </p:spPr>
+        <p:txBody>
+          <a:bodyPr wrap="square" lIns="0" tIns="0" rIns="0" bIns="0" rtlCol="0" anchor="ctr"/>
+          <a:lstStyle/>
+          <a:p>
+            <a:pPr indent="0" marL="0">
+              <a:buNone/>
+            </a:pPr>
+            <a:r>
+              <a:rPr lang="en-US" sz="1250" dirty="0">
+                <a:solidFill>
+                  <a:srgbClr val="1B1D23"/>
                 </a:solidFill>
                 <a:latin typeface="Calibri" pitchFamily="34" charset="0"/>
                 <a:ea typeface="Calibri" pitchFamily="34" charset="-122"/>
                 <a:cs typeface="Calibri" pitchFamily="34" charset="-120"/>
               </a:rPr>
-              <a:t>✕</a:t>
-            </a:r>
-            <a:endParaRPr lang="en-US" sz="1300" dirty="0"/>
-          </a:p>
-        </p:txBody>
-      </p:sp>
-      <p:sp>
-        <p:nvSpPr>
-          <p:cNvPr id="17" name="Text 15"/>
-          <p:cNvSpPr/>
-          <p:nvPr/>
-        </p:nvSpPr>
-        <p:spPr>
-          <a:xfrm>
-            <a:off x="1298448" y="3520440"/>
-            <a:ext cx="10149840" cy="731520"/>
+              <a:t>поясню retry, fallback і breaker одним реченням</a:t>
+            </a:r>
+            <a:endParaRPr lang="en-US" sz="1250" dirty="0"/>
+          </a:p>
+        </p:txBody>
+      </p:sp>
+      <p:sp>
+        <p:nvSpPr>
+          <p:cNvPr id="19" name="Text 17"/>
+          <p:cNvSpPr/>
+          <p:nvPr/>
+        </p:nvSpPr>
+        <p:spPr>
+          <a:xfrm>
+            <a:off x="566928" y="3886200"/>
+            <a:ext cx="10972800" cy="320040"/>
           </a:xfrm>
           <a:prstGeom prst="rect">
             <a:avLst/>
@@ -16143,309 +16406,17 @@
               <a:buNone/>
             </a:pPr>
             <a:r>
-              <a:rPr lang="en-US" sz="1300" b="1" dirty="0">
-                <a:solidFill>
-                  <a:srgbClr val="1B1D23"/>
+              <a:rPr lang="en-US" sz="1200" i="1" dirty="0">
+                <a:solidFill>
+                  <a:srgbClr val="8A90A0"/>
                 </a:solidFill>
                 <a:latin typeface="Calibri" pitchFamily="34" charset="0"/>
                 <a:ea typeface="Calibri" pitchFamily="34" charset="-122"/>
                 <a:cs typeface="Calibri" pitchFamily="34" charset="-120"/>
               </a:rPr>
-              <a:t>Ретраї в кількох шарах одразу   </a:t>
-            </a:r>
-            <a:pPr indent="0" marL="0">
-              <a:buNone/>
-            </a:pPr>
-            <a:r>
-              <a:rPr lang="en-US" sz="1150" dirty="0">
-                <a:solidFill>
-                  <a:srgbClr val="565C6B"/>
-                </a:solidFill>
-                <a:latin typeface="Calibri" pitchFamily="34" charset="0"/>
-                <a:ea typeface="Calibri" pitchFamily="34" charset="-122"/>
-                <a:cs typeface="Calibri" pitchFamily="34" charset="-120"/>
-              </a:rPr>
-              <a:t>бюджети часу перемножуються — «швидка відмова» на пів хвилини</a:t>
-            </a:r>
-            <a:endParaRPr lang="en-US" sz="1300" dirty="0"/>
-          </a:p>
-        </p:txBody>
-      </p:sp>
-      <p:sp>
-        <p:nvSpPr>
-          <p:cNvPr id="18" name="Shape 16"/>
-          <p:cNvSpPr/>
-          <p:nvPr/>
-        </p:nvSpPr>
-        <p:spPr>
-          <a:xfrm>
-            <a:off x="566928" y="4389120"/>
-            <a:ext cx="11064240" cy="731520"/>
-          </a:xfrm>
-          <a:prstGeom prst="roundRect">
-            <a:avLst>
-              <a:gd name="adj" fmla="val 12500"/>
-            </a:avLst>
-          </a:prstGeom>
-          <a:solidFill>
-            <a:srgbClr val="FFFFFF"/>
-          </a:solidFill>
-          <a:ln w="12700">
-            <a:solidFill>
-              <a:srgbClr val="E4E6EC"/>
-            </a:solidFill>
-            <a:prstDash val="solid"/>
-          </a:ln>
-        </p:spPr>
-      </p:sp>
-      <p:sp>
-        <p:nvSpPr>
-          <p:cNvPr id="19" name="Shape 17"/>
-          <p:cNvSpPr/>
-          <p:nvPr/>
-        </p:nvSpPr>
-        <p:spPr>
-          <a:xfrm>
-            <a:off x="768096" y="4562856"/>
-            <a:ext cx="384048" cy="384048"/>
-          </a:xfrm>
-          <a:prstGeom prst="ellipse">
-            <a:avLst/>
-          </a:prstGeom>
-          <a:solidFill>
-            <a:srgbClr val="F9E9E8"/>
-          </a:solidFill>
-          <a:ln/>
-        </p:spPr>
-      </p:sp>
-      <p:sp>
-        <p:nvSpPr>
-          <p:cNvPr id="20" name="Text 18"/>
-          <p:cNvSpPr/>
-          <p:nvPr/>
-        </p:nvSpPr>
-        <p:spPr>
-          <a:xfrm>
-            <a:off x="768096" y="4562856"/>
-            <a:ext cx="384048" cy="384048"/>
-          </a:xfrm>
-          <a:prstGeom prst="rect">
-            <a:avLst/>
-          </a:prstGeom>
-          <a:noFill/>
-          <a:ln/>
-        </p:spPr>
-        <p:txBody>
-          <a:bodyPr wrap="square" lIns="0" tIns="0" rIns="0" bIns="0" rtlCol="0" anchor="ctr"/>
-          <a:lstStyle/>
-          <a:p>
-            <a:pPr algn="ctr" indent="0" marL="0">
-              <a:buNone/>
-            </a:pPr>
-            <a:r>
-              <a:rPr lang="en-US" sz="1300" b="1" dirty="0">
-                <a:solidFill>
-                  <a:srgbClr val="B3261E"/>
-                </a:solidFill>
-                <a:latin typeface="Calibri" pitchFamily="34" charset="0"/>
-                <a:ea typeface="Calibri" pitchFamily="34" charset="-122"/>
-                <a:cs typeface="Calibri" pitchFamily="34" charset="-120"/>
-              </a:rPr>
-              <a:t>✕</a:t>
-            </a:r>
-            <a:endParaRPr lang="en-US" sz="1300" dirty="0"/>
-          </a:p>
-        </p:txBody>
-      </p:sp>
-      <p:sp>
-        <p:nvSpPr>
-          <p:cNvPr id="21" name="Text 19"/>
-          <p:cNvSpPr/>
-          <p:nvPr/>
-        </p:nvSpPr>
-        <p:spPr>
-          <a:xfrm>
-            <a:off x="1298448" y="4389120"/>
-            <a:ext cx="10149840" cy="731520"/>
-          </a:xfrm>
-          <a:prstGeom prst="rect">
-            <a:avLst/>
-          </a:prstGeom>
-          <a:noFill/>
-          <a:ln/>
-        </p:spPr>
-        <p:txBody>
-          <a:bodyPr wrap="square" lIns="0" tIns="0" rIns="0" bIns="0" rtlCol="0" anchor="ctr"/>
-          <a:lstStyle/>
-          <a:p>
-            <a:pPr indent="0" marL="0">
-              <a:buNone/>
-            </a:pPr>
-            <a:r>
-              <a:rPr lang="en-US" sz="1300" b="1" dirty="0">
-                <a:solidFill>
-                  <a:srgbClr val="1B1D23"/>
-                </a:solidFill>
-                <a:latin typeface="Calibri" pitchFamily="34" charset="0"/>
-                <a:ea typeface="Calibri" pitchFamily="34" charset="-122"/>
-                <a:cs typeface="Calibri" pitchFamily="34" charset="-120"/>
-              </a:rPr>
-              <a:t>Breaker без half-open   </a:t>
-            </a:r>
-            <a:pPr indent="0" marL="0">
-              <a:buNone/>
-            </a:pPr>
-            <a:r>
-              <a:rPr lang="en-US" sz="1150" dirty="0">
-                <a:solidFill>
-                  <a:srgbClr val="565C6B"/>
-                </a:solidFill>
-                <a:latin typeface="Calibri" pitchFamily="34" charset="0"/>
-                <a:ea typeface="Calibri" pitchFamily="34" charset="-122"/>
-                <a:cs typeface="Calibri" pitchFamily="34" charset="-120"/>
-              </a:rPr>
-              <a:t>система лишається деградованою після того, як усе полагодилося</a:t>
-            </a:r>
-            <a:endParaRPr lang="en-US" sz="1300" dirty="0"/>
-          </a:p>
-        </p:txBody>
-      </p:sp>
-      <p:sp>
-        <p:nvSpPr>
-          <p:cNvPr id="22" name="Shape 20"/>
-          <p:cNvSpPr/>
-          <p:nvPr/>
-        </p:nvSpPr>
-        <p:spPr>
-          <a:xfrm>
-            <a:off x="566928" y="5257800"/>
-            <a:ext cx="11064240" cy="731520"/>
-          </a:xfrm>
-          <a:prstGeom prst="roundRect">
-            <a:avLst>
-              <a:gd name="adj" fmla="val 12500"/>
-            </a:avLst>
-          </a:prstGeom>
-          <a:solidFill>
-            <a:srgbClr val="FFFFFF"/>
-          </a:solidFill>
-          <a:ln w="12700">
-            <a:solidFill>
-              <a:srgbClr val="E4E6EC"/>
-            </a:solidFill>
-            <a:prstDash val="solid"/>
-          </a:ln>
-        </p:spPr>
-      </p:sp>
-      <p:sp>
-        <p:nvSpPr>
-          <p:cNvPr id="23" name="Shape 21"/>
-          <p:cNvSpPr/>
-          <p:nvPr/>
-        </p:nvSpPr>
-        <p:spPr>
-          <a:xfrm>
-            <a:off x="768096" y="5431536"/>
-            <a:ext cx="384048" cy="384048"/>
-          </a:xfrm>
-          <a:prstGeom prst="ellipse">
-            <a:avLst/>
-          </a:prstGeom>
-          <a:solidFill>
-            <a:srgbClr val="F9E9E8"/>
-          </a:solidFill>
-          <a:ln/>
-        </p:spPr>
-      </p:sp>
-      <p:sp>
-        <p:nvSpPr>
-          <p:cNvPr id="24" name="Text 22"/>
-          <p:cNvSpPr/>
-          <p:nvPr/>
-        </p:nvSpPr>
-        <p:spPr>
-          <a:xfrm>
-            <a:off x="768096" y="5431536"/>
-            <a:ext cx="384048" cy="384048"/>
-          </a:xfrm>
-          <a:prstGeom prst="rect">
-            <a:avLst/>
-          </a:prstGeom>
-          <a:noFill/>
-          <a:ln/>
-        </p:spPr>
-        <p:txBody>
-          <a:bodyPr wrap="square" lIns="0" tIns="0" rIns="0" bIns="0" rtlCol="0" anchor="ctr"/>
-          <a:lstStyle/>
-          <a:p>
-            <a:pPr algn="ctr" indent="0" marL="0">
-              <a:buNone/>
-            </a:pPr>
-            <a:r>
-              <a:rPr lang="en-US" sz="1300" b="1" dirty="0">
-                <a:solidFill>
-                  <a:srgbClr val="B3261E"/>
-                </a:solidFill>
-                <a:latin typeface="Calibri" pitchFamily="34" charset="0"/>
-                <a:ea typeface="Calibri" pitchFamily="34" charset="-122"/>
-                <a:cs typeface="Calibri" pitchFamily="34" charset="-120"/>
-              </a:rPr>
-              <a:t>✕</a:t>
-            </a:r>
-            <a:endParaRPr lang="en-US" sz="1300" dirty="0"/>
-          </a:p>
-        </p:txBody>
-      </p:sp>
-      <p:sp>
-        <p:nvSpPr>
-          <p:cNvPr id="25" name="Text 23"/>
-          <p:cNvSpPr/>
-          <p:nvPr/>
-        </p:nvSpPr>
-        <p:spPr>
-          <a:xfrm>
-            <a:off x="1298448" y="5257800"/>
-            <a:ext cx="10149840" cy="731520"/>
-          </a:xfrm>
-          <a:prstGeom prst="rect">
-            <a:avLst/>
-          </a:prstGeom>
-          <a:noFill/>
-          <a:ln/>
-        </p:spPr>
-        <p:txBody>
-          <a:bodyPr wrap="square" lIns="0" tIns="0" rIns="0" bIns="0" rtlCol="0" anchor="ctr"/>
-          <a:lstStyle/>
-          <a:p>
-            <a:pPr indent="0" marL="0">
-              <a:buNone/>
-            </a:pPr>
-            <a:r>
-              <a:rPr lang="en-US" sz="1300" b="1" dirty="0">
-                <a:solidFill>
-                  <a:srgbClr val="1B1D23"/>
-                </a:solidFill>
-                <a:latin typeface="Calibri" pitchFamily="34" charset="0"/>
-                <a:ea typeface="Calibri" pitchFamily="34" charset="-122"/>
-                <a:cs typeface="Calibri" pitchFamily="34" charset="-120"/>
-              </a:rPr>
-              <a:t>Fallback без лічильника   </a:t>
-            </a:r>
-            <a:pPr indent="0" marL="0">
-              <a:buNone/>
-            </a:pPr>
-            <a:r>
-              <a:rPr lang="en-US" sz="1150" dirty="0">
-                <a:solidFill>
-                  <a:srgbClr val="565C6B"/>
-                </a:solidFill>
-                <a:latin typeface="Calibri" pitchFamily="34" charset="0"/>
-                <a:ea typeface="Calibri" pitchFamily="34" charset="-122"/>
-                <a:cs typeface="Calibri" pitchFamily="34" charset="-120"/>
-              </a:rPr>
-              <a:t>проблема, що спрацювала непомітно, повертається більшою</a:t>
-            </a:r>
-            <a:endParaRPr lang="en-US" sz="1300" dirty="0"/>
+              <a:t>Де завагалися — туди і повертайтеся. Питання — у канал потоку або на Q&amp;A.</a:t>
+            </a:r>
+            <a:endParaRPr lang="en-US" sz="1200" dirty="0"/>
           </a:p>
         </p:txBody>
       </p:sp>
@@ -16562,7 +16533,7 @@
                 <a:ea typeface="Calibri" pitchFamily="34" charset="-122"/>
                 <a:cs typeface="Calibri" pitchFamily="34" charset="-120"/>
               </a:rPr>
-              <a:t>Домашнє завдання</a:t>
+              <a:t>Антипатерни тижня</a:t>
             </a:r>
             <a:endParaRPr lang="en-US" sz="2500" dirty="0"/>
           </a:p>
@@ -16585,7 +16556,7 @@
             </a:avLst>
           </a:prstGeom>
           <a:solidFill>
-            <a:srgbClr val="E9F3EE"/>
+            <a:srgbClr val="F8F0E2"/>
           </a:solidFill>
           <a:ln/>
         </p:spPr>
@@ -16617,13 +16588,13 @@
             <a:r>
               <a:rPr lang="en-US" sz="900" b="1" spc="100" kern="0" dirty="0">
                 <a:solidFill>
-                  <a:srgbClr val="177245"/>
+                  <a:srgbClr val="9A5B12"/>
                 </a:solidFill>
                 <a:latin typeface="Courier New" pitchFamily="34" charset="0"/>
                 <a:ea typeface="Courier New" pitchFamily="34" charset="-122"/>
                 <a:cs typeface="Courier New" pitchFamily="34" charset="-120"/>
               </a:rPr>
-              <a:t>ПРАКТИКА</a:t>
+              <a:t>РЕФЛЕКСІЯ</a:t>
             </a:r>
             <a:endParaRPr lang="en-US" sz="900" dirty="0"/>
           </a:p>
@@ -16676,12 +16647,12 @@
         </p:nvSpPr>
         <p:spPr>
           <a:xfrm>
-            <a:off x="566928" y="1737360"/>
-            <a:ext cx="5349240" cy="2194560"/>
+            <a:off x="566928" y="1783080"/>
+            <a:ext cx="11064240" cy="731520"/>
           </a:xfrm>
           <a:prstGeom prst="roundRect">
             <a:avLst>
-              <a:gd name="adj" fmla="val 5000"/>
+              <a:gd name="adj" fmla="val 12500"/>
             </a:avLst>
           </a:prstGeom>
           <a:solidFill>
@@ -16697,92 +16668,103 @@
       </p:sp>
       <p:sp>
         <p:nvSpPr>
-          <p:cNvPr id="7" name="Text 5"/>
-          <p:cNvSpPr/>
-          <p:nvPr/>
-        </p:nvSpPr>
-        <p:spPr>
-          <a:xfrm>
-            <a:off x="768096" y="1892808"/>
-            <a:ext cx="4946904" cy="438912"/>
-          </a:xfrm>
-          <a:prstGeom prst="rect">
-            <a:avLst/>
-          </a:prstGeom>
-          <a:noFill/>
-          <a:ln/>
-        </p:spPr>
-        <p:txBody>
-          <a:bodyPr wrap="square" lIns="0" tIns="0" rIns="0" bIns="0" rtlCol="0" anchor="ctr"/>
-          <a:lstStyle/>
-          <a:p>
-            <a:pPr indent="0" marL="0">
-              <a:buNone/>
-            </a:pPr>
-            <a:r>
-              <a:rPr lang="en-US" sz="1450" b="1" dirty="0">
-                <a:solidFill>
-                  <a:srgbClr val="1B1D23"/>
+          <p:cNvPr id="7" name="Shape 5"/>
+          <p:cNvSpPr/>
+          <p:nvPr/>
+        </p:nvSpPr>
+        <p:spPr>
+          <a:xfrm>
+            <a:off x="768096" y="1956816"/>
+            <a:ext cx="384048" cy="384048"/>
+          </a:xfrm>
+          <a:prstGeom prst="ellipse">
+            <a:avLst/>
+          </a:prstGeom>
+          <a:solidFill>
+            <a:srgbClr val="F9E9E8"/>
+          </a:solidFill>
+          <a:ln/>
+        </p:spPr>
+      </p:sp>
+      <p:sp>
+        <p:nvSpPr>
+          <p:cNvPr id="8" name="Text 6"/>
+          <p:cNvSpPr/>
+          <p:nvPr/>
+        </p:nvSpPr>
+        <p:spPr>
+          <a:xfrm>
+            <a:off x="768096" y="1956816"/>
+            <a:ext cx="384048" cy="384048"/>
+          </a:xfrm>
+          <a:prstGeom prst="rect">
+            <a:avLst/>
+          </a:prstGeom>
+          <a:noFill/>
+          <a:ln/>
+        </p:spPr>
+        <p:txBody>
+          <a:bodyPr wrap="square" lIns="0" tIns="0" rIns="0" bIns="0" rtlCol="0" anchor="ctr"/>
+          <a:lstStyle/>
+          <a:p>
+            <a:pPr algn="ctr" indent="0" marL="0">
+              <a:buNone/>
+            </a:pPr>
+            <a:r>
+              <a:rPr lang="en-US" sz="1300" b="1" dirty="0">
+                <a:solidFill>
+                  <a:srgbClr val="B3261E"/>
                 </a:solidFill>
                 <a:latin typeface="Calibri" pitchFamily="34" charset="0"/>
                 <a:ea typeface="Calibri" pitchFamily="34" charset="-122"/>
                 <a:cs typeface="Calibri" pitchFamily="34" charset="-120"/>
               </a:rPr>
-              <a:t>Обов'язково — без здачі</a:t>
-            </a:r>
-            <a:endParaRPr lang="en-US" sz="1450" dirty="0"/>
-          </a:p>
-        </p:txBody>
-      </p:sp>
-      <p:sp>
-        <p:nvSpPr>
-          <p:cNvPr id="8" name="Text 6"/>
-          <p:cNvSpPr/>
-          <p:nvPr/>
-        </p:nvSpPr>
-        <p:spPr>
-          <a:xfrm>
-            <a:off x="768096" y="2423160"/>
-            <a:ext cx="4946904" cy="1353312"/>
-          </a:xfrm>
-          <a:prstGeom prst="rect">
-            <a:avLst/>
-          </a:prstGeom>
-          <a:noFill/>
-          <a:ln/>
-        </p:spPr>
-        <p:txBody>
-          <a:bodyPr wrap="square" lIns="0" tIns="0" rIns="0" bIns="0" rtlCol="0" anchor="t"/>
+              <a:t>✕</a:t>
+            </a:r>
+            <a:endParaRPr lang="en-US" sz="1300" dirty="0"/>
+          </a:p>
+        </p:txBody>
+      </p:sp>
+      <p:sp>
+        <p:nvSpPr>
+          <p:cNvPr id="9" name="Text 7"/>
+          <p:cNvSpPr/>
+          <p:nvPr/>
+        </p:nvSpPr>
+        <p:spPr>
+          <a:xfrm>
+            <a:off x="1298448" y="1783080"/>
+            <a:ext cx="10149840" cy="731520"/>
+          </a:xfrm>
+          <a:prstGeom prst="rect">
+            <a:avLst/>
+          </a:prstGeom>
+          <a:noFill/>
+          <a:ln/>
+        </p:spPr>
+        <p:txBody>
+          <a:bodyPr wrap="square" lIns="0" tIns="0" rIns="0" bIns="0" rtlCol="0" anchor="ctr"/>
           <a:lstStyle/>
           <a:p>
             <a:pPr indent="0" marL="0">
               <a:buNone/>
             </a:pPr>
             <a:r>
-              <a:rPr lang="en-US" sz="1200" dirty="0">
-                <a:solidFill>
-                  <a:srgbClr val="565C6B"/>
+              <a:rPr lang="en-US" sz="1300" b="1" dirty="0">
+                <a:solidFill>
+                  <a:srgbClr val="1B1D23"/>
                 </a:solidFill>
                 <a:latin typeface="Calibri" pitchFamily="34" charset="0"/>
                 <a:ea typeface="Calibri" pitchFamily="34" charset="-122"/>
                 <a:cs typeface="Calibri" pitchFamily="34" charset="-120"/>
               </a:rPr>
-              <a:t>• закріпити лабу: __fail_503 → fallback → ввічлива заглушка</a:t>
-            </a:r>
-            <a:endParaRPr lang="en-US" sz="1200" dirty="0"/>
-          </a:p>
-          <a:p>
+              <a:t>Retry без паузи і без стелі   </a:t>
+            </a:r>
             <a:pPr indent="0" marL="0">
               <a:buNone/>
             </a:pPr>
-            <a:endParaRPr lang="en-US" sz="1200" dirty="0"/>
-          </a:p>
-          <a:p>
-            <a:pPr indent="0" marL="0">
-              <a:buNone/>
-            </a:pPr>
-            <a:r>
-              <a:rPr lang="en-US" sz="1200" dirty="0">
+            <a:r>
+              <a:rPr lang="en-US" sz="1150" dirty="0">
                 <a:solidFill>
                   <a:srgbClr val="565C6B"/>
                 </a:solidFill>
@@ -16790,67 +16772,108 @@
                 <a:ea typeface="Calibri" pitchFamily="34" charset="-122"/>
                 <a:cs typeface="Calibri" pitchFamily="34" charset="-120"/>
               </a:rPr>
-              <a:t>• переконатися, що збій швидкий і лишає чесний статус у лозі</a:t>
-            </a:r>
-            <a:endParaRPr lang="en-US" sz="1200" dirty="0"/>
-          </a:p>
-          <a:p>
-            <a:pPr indent="0" marL="0">
-              <a:buNone/>
-            </a:pPr>
-            <a:endParaRPr lang="en-US" sz="1200" dirty="0"/>
-          </a:p>
-          <a:p>
-            <a:pPr indent="0" marL="0">
-              <a:buNone/>
-            </a:pPr>
-            <a:r>
-              <a:rPr lang="en-US" sz="1200" dirty="0">
-                <a:solidFill>
-                  <a:srgbClr val="565C6B"/>
+              <a:t>ваш код стає другою половиною інциденту</a:t>
+            </a:r>
+            <a:endParaRPr lang="en-US" sz="1300" dirty="0"/>
+          </a:p>
+        </p:txBody>
+      </p:sp>
+      <p:sp>
+        <p:nvSpPr>
+          <p:cNvPr id="10" name="Shape 8"/>
+          <p:cNvSpPr/>
+          <p:nvPr/>
+        </p:nvSpPr>
+        <p:spPr>
+          <a:xfrm>
+            <a:off x="566928" y="2651760"/>
+            <a:ext cx="11064240" cy="731520"/>
+          </a:xfrm>
+          <a:prstGeom prst="roundRect">
+            <a:avLst>
+              <a:gd name="adj" fmla="val 12500"/>
+            </a:avLst>
+          </a:prstGeom>
+          <a:solidFill>
+            <a:srgbClr val="FFFFFF"/>
+          </a:solidFill>
+          <a:ln w="12700">
+            <a:solidFill>
+              <a:srgbClr val="E4E6EC"/>
+            </a:solidFill>
+            <a:prstDash val="solid"/>
+          </a:ln>
+        </p:spPr>
+      </p:sp>
+      <p:sp>
+        <p:nvSpPr>
+          <p:cNvPr id="11" name="Shape 9"/>
+          <p:cNvSpPr/>
+          <p:nvPr/>
+        </p:nvSpPr>
+        <p:spPr>
+          <a:xfrm>
+            <a:off x="768096" y="2825496"/>
+            <a:ext cx="384048" cy="384048"/>
+          </a:xfrm>
+          <a:prstGeom prst="ellipse">
+            <a:avLst/>
+          </a:prstGeom>
+          <a:solidFill>
+            <a:srgbClr val="F9E9E8"/>
+          </a:solidFill>
+          <a:ln/>
+        </p:spPr>
+      </p:sp>
+      <p:sp>
+        <p:nvSpPr>
+          <p:cNvPr id="12" name="Text 10"/>
+          <p:cNvSpPr/>
+          <p:nvPr/>
+        </p:nvSpPr>
+        <p:spPr>
+          <a:xfrm>
+            <a:off x="768096" y="2825496"/>
+            <a:ext cx="384048" cy="384048"/>
+          </a:xfrm>
+          <a:prstGeom prst="rect">
+            <a:avLst/>
+          </a:prstGeom>
+          <a:noFill/>
+          <a:ln/>
+        </p:spPr>
+        <p:txBody>
+          <a:bodyPr wrap="square" lIns="0" tIns="0" rIns="0" bIns="0" rtlCol="0" anchor="ctr"/>
+          <a:lstStyle/>
+          <a:p>
+            <a:pPr algn="ctr" indent="0" marL="0">
+              <a:buNone/>
+            </a:pPr>
+            <a:r>
+              <a:rPr lang="en-US" sz="1300" b="1" dirty="0">
+                <a:solidFill>
+                  <a:srgbClr val="B3261E"/>
                 </a:solidFill>
                 <a:latin typeface="Calibri" pitchFamily="34" charset="0"/>
                 <a:ea typeface="Calibri" pitchFamily="34" charset="-122"/>
                 <a:cs typeface="Calibri" pitchFamily="34" charset="-120"/>
               </a:rPr>
-              <a:t>• проговорити свою драбину деградації</a:t>
-            </a:r>
-            <a:endParaRPr lang="en-US" sz="1200" dirty="0"/>
-          </a:p>
-        </p:txBody>
-      </p:sp>
-      <p:sp>
-        <p:nvSpPr>
-          <p:cNvPr id="9" name="Shape 7"/>
-          <p:cNvSpPr/>
-          <p:nvPr/>
-        </p:nvSpPr>
-        <p:spPr>
-          <a:xfrm>
-            <a:off x="6281928" y="1737360"/>
-            <a:ext cx="5349240" cy="2194560"/>
-          </a:xfrm>
-          <a:prstGeom prst="roundRect">
-            <a:avLst>
-              <a:gd name="adj" fmla="val 5000"/>
-            </a:avLst>
-          </a:prstGeom>
-          <a:solidFill>
-            <a:srgbClr val="F8F0E2"/>
-          </a:solidFill>
-          <a:ln/>
-        </p:spPr>
-      </p:sp>
-      <p:sp>
-        <p:nvSpPr>
-          <p:cNvPr id="10" name="Text 8"/>
-          <p:cNvSpPr/>
-          <p:nvPr/>
-        </p:nvSpPr>
-        <p:spPr>
-          <a:xfrm>
-            <a:off x="6483096" y="1892808"/>
-            <a:ext cx="4946904" cy="438912"/>
+              <a:t>✕</a:t>
+            </a:r>
+            <a:endParaRPr lang="en-US" sz="1300" dirty="0"/>
+          </a:p>
+        </p:txBody>
+      </p:sp>
+      <p:sp>
+        <p:nvSpPr>
+          <p:cNvPr id="13" name="Text 11"/>
+          <p:cNvSpPr/>
+          <p:nvPr/>
+        </p:nvSpPr>
+        <p:spPr>
+          <a:xfrm>
+            <a:off x="1298448" y="2651760"/>
+            <a:ext cx="10149840" cy="731520"/>
           </a:xfrm>
           <a:prstGeom prst="rect">
             <a:avLst/>
@@ -16866,81 +16889,56 @@
               <a:buNone/>
             </a:pPr>
             <a:r>
-              <a:rPr lang="en-US" sz="1450" b="1" dirty="0">
-                <a:solidFill>
-                  <a:srgbClr val="9A5B12"/>
+              <a:rPr lang="en-US" sz="1300" b="1" dirty="0">
+                <a:solidFill>
+                  <a:srgbClr val="1B1D23"/>
                 </a:solidFill>
                 <a:latin typeface="Calibri" pitchFamily="34" charset="0"/>
                 <a:ea typeface="Calibri" pitchFamily="34" charset="-122"/>
                 <a:cs typeface="Calibri" pitchFamily="34" charset="-120"/>
               </a:rPr>
-              <a:t>Опційно</a:t>
-            </a:r>
-            <a:endParaRPr lang="en-US" sz="1450" dirty="0"/>
-          </a:p>
-        </p:txBody>
-      </p:sp>
-      <p:sp>
-        <p:nvSpPr>
-          <p:cNvPr id="11" name="Text 9"/>
-          <p:cNvSpPr/>
-          <p:nvPr/>
-        </p:nvSpPr>
-        <p:spPr>
-          <a:xfrm>
-            <a:off x="6483096" y="2423160"/>
-            <a:ext cx="4946904" cy="1353312"/>
-          </a:xfrm>
-          <a:prstGeom prst="rect">
-            <a:avLst/>
-          </a:prstGeom>
-          <a:noFill/>
-          <a:ln/>
-        </p:spPr>
-        <p:txBody>
-          <a:bodyPr wrap="square" lIns="0" tIns="0" rIns="0" bIns="0" rtlCol="0" anchor="t"/>
-          <a:lstStyle/>
-          <a:p>
+              <a:t>Заглушка зі статусом 200   </a:t>
+            </a:r>
             <a:pPr indent="0" marL="0">
               <a:buNone/>
             </a:pPr>
             <a:r>
-              <a:rPr lang="en-US" sz="1200" dirty="0">
-                <a:solidFill>
-                  <a:srgbClr val="1B1D23"/>
+              <a:rPr lang="en-US" sz="1150" dirty="0">
+                <a:solidFill>
+                  <a:srgbClr val="565C6B"/>
                 </a:solidFill>
                 <a:latin typeface="Calibri" pitchFamily="34" charset="0"/>
                 <a:ea typeface="Calibri" pitchFamily="34" charset="-122"/>
                 <a:cs typeface="Calibri" pitchFamily="34" charset="-120"/>
               </a:rPr>
-              <a:t>• circuit breaker: 3 збої → open на 30 с, обов'язково з half-open (пробний запит раз на ~5 с) — інакше сам собі влаштуєш outage</a:t>
-            </a:r>
-            <a:endParaRPr lang="en-US" sz="1200" dirty="0"/>
-          </a:p>
-        </p:txBody>
-      </p:sp>
-      <p:sp>
-        <p:nvSpPr>
-          <p:cNvPr id="12" name="Shape 10"/>
-          <p:cNvSpPr/>
-          <p:nvPr/>
-        </p:nvSpPr>
-        <p:spPr>
-          <a:xfrm>
-            <a:off x="566928" y="4206240"/>
-            <a:ext cx="11064240" cy="1463040"/>
+              <a:t>моніторинг бачить здорову систему, коли всі бачать вибачення</a:t>
+            </a:r>
+            <a:endParaRPr lang="en-US" sz="1300" dirty="0"/>
+          </a:p>
+        </p:txBody>
+      </p:sp>
+      <p:sp>
+        <p:nvSpPr>
+          <p:cNvPr id="14" name="Shape 12"/>
+          <p:cNvSpPr/>
+          <p:nvPr/>
+        </p:nvSpPr>
+        <p:spPr>
+          <a:xfrm>
+            <a:off x="566928" y="3520440"/>
+            <a:ext cx="11064240" cy="731520"/>
           </a:xfrm>
           <a:prstGeom prst="roundRect">
             <a:avLst>
-              <a:gd name="adj" fmla="val 8750"/>
+              <a:gd name="adj" fmla="val 12500"/>
             </a:avLst>
           </a:prstGeom>
           <a:solidFill>
             <a:srgbClr val="FFFFFF"/>
           </a:solidFill>
-          <a:ln w="19050">
+          <a:ln w="12700">
             <a:solidFill>
-              <a:srgbClr val="4038C4"/>
+              <a:srgbClr val="E4E6EC"/>
             </a:solidFill>
             <a:prstDash val="solid"/>
           </a:ln>
@@ -16948,69 +16946,89 @@
       </p:sp>
       <p:sp>
         <p:nvSpPr>
-          <p:cNvPr id="13" name="Text 11"/>
-          <p:cNvSpPr/>
-          <p:nvPr/>
-        </p:nvSpPr>
-        <p:spPr>
-          <a:xfrm>
-            <a:off x="841248" y="4389120"/>
-            <a:ext cx="10515600" cy="365760"/>
-          </a:xfrm>
-          <a:prstGeom prst="rect">
-            <a:avLst/>
-          </a:prstGeom>
-          <a:noFill/>
-          <a:ln/>
-        </p:spPr>
-        <p:txBody>
-          <a:bodyPr wrap="square" lIns="0" tIns="0" rIns="0" bIns="0" rtlCol="0" anchor="ctr"/>
-          <a:lstStyle/>
-          <a:p>
-            <a:pPr indent="0" marL="0">
-              <a:buNone/>
-            </a:pPr>
-            <a:r>
-              <a:rPr lang="en-US" sz="1500" b="1" dirty="0">
-                <a:solidFill>
-                  <a:srgbClr val="4038C4"/>
+          <p:cNvPr id="15" name="Shape 13"/>
+          <p:cNvSpPr/>
+          <p:nvPr/>
+        </p:nvSpPr>
+        <p:spPr>
+          <a:xfrm>
+            <a:off x="768096" y="3694176"/>
+            <a:ext cx="384048" cy="384048"/>
+          </a:xfrm>
+          <a:prstGeom prst="ellipse">
+            <a:avLst/>
+          </a:prstGeom>
+          <a:solidFill>
+            <a:srgbClr val="F9E9E8"/>
+          </a:solidFill>
+          <a:ln/>
+        </p:spPr>
+      </p:sp>
+      <p:sp>
+        <p:nvSpPr>
+          <p:cNvPr id="16" name="Text 14"/>
+          <p:cNvSpPr/>
+          <p:nvPr/>
+        </p:nvSpPr>
+        <p:spPr>
+          <a:xfrm>
+            <a:off x="768096" y="3694176"/>
+            <a:ext cx="384048" cy="384048"/>
+          </a:xfrm>
+          <a:prstGeom prst="rect">
+            <a:avLst/>
+          </a:prstGeom>
+          <a:noFill/>
+          <a:ln/>
+        </p:spPr>
+        <p:txBody>
+          <a:bodyPr wrap="square" lIns="0" tIns="0" rIns="0" bIns="0" rtlCol="0" anchor="ctr"/>
+          <a:lstStyle/>
+          <a:p>
+            <a:pPr algn="ctr" indent="0" marL="0">
+              <a:buNone/>
+            </a:pPr>
+            <a:r>
+              <a:rPr lang="en-US" sz="1300" b="1" dirty="0">
+                <a:solidFill>
+                  <a:srgbClr val="B3261E"/>
                 </a:solidFill>
                 <a:latin typeface="Calibri" pitchFamily="34" charset="0"/>
                 <a:ea typeface="Calibri" pitchFamily="34" charset="-122"/>
                 <a:cs typeface="Calibri" pitchFamily="34" charset="-120"/>
               </a:rPr>
-              <a:t>ДЗ тижня 4 — після наступного уроку</a:t>
-            </a:r>
-            <a:endParaRPr lang="en-US" sz="1500" dirty="0"/>
-          </a:p>
-        </p:txBody>
-      </p:sp>
-      <p:sp>
-        <p:nvSpPr>
-          <p:cNvPr id="14" name="Text 12"/>
-          <p:cNvSpPr/>
-          <p:nvPr/>
-        </p:nvSpPr>
-        <p:spPr>
-          <a:xfrm>
-            <a:off x="841248" y="4800600"/>
-            <a:ext cx="10515600" cy="731520"/>
-          </a:xfrm>
-          <a:prstGeom prst="rect">
-            <a:avLst/>
-          </a:prstGeom>
-          <a:noFill/>
-          <a:ln/>
-        </p:spPr>
-        <p:txBody>
-          <a:bodyPr wrap="square" lIns="0" tIns="0" rIns="0" bIns="0" rtlCol="0" anchor="t"/>
+              <a:t>✕</a:t>
+            </a:r>
+            <a:endParaRPr lang="en-US" sz="1300" dirty="0"/>
+          </a:p>
+        </p:txBody>
+      </p:sp>
+      <p:sp>
+        <p:nvSpPr>
+          <p:cNvPr id="17" name="Text 15"/>
+          <p:cNvSpPr/>
+          <p:nvPr/>
+        </p:nvSpPr>
+        <p:spPr>
+          <a:xfrm>
+            <a:off x="1298448" y="3520440"/>
+            <a:ext cx="10149840" cy="731520"/>
+          </a:xfrm>
+          <a:prstGeom prst="rect">
+            <a:avLst/>
+          </a:prstGeom>
+          <a:noFill/>
+          <a:ln/>
+        </p:spPr>
+        <p:txBody>
+          <a:bodyPr wrap="square" lIns="0" tIns="0" rIns="0" bIns="0" rtlCol="0" anchor="ctr"/>
           <a:lstStyle/>
           <a:p>
             <a:pPr indent="0" marL="0">
               <a:buNone/>
             </a:pPr>
             <a:r>
-              <a:rPr lang="en-US" sz="1250" dirty="0">
+              <a:rPr lang="en-US" sz="1300" b="1" dirty="0">
                 <a:solidFill>
                   <a:srgbClr val="1B1D23"/>
                 </a:solidFill>
@@ -17018,9 +17036,301 @@
                 <a:ea typeface="Calibri" pitchFamily="34" charset="-122"/>
                 <a:cs typeface="Calibri" pitchFamily="34" charset="-120"/>
               </a:rPr>
-              <a:t>Тиждень об'єднує надійність і безпеку: сьогоднішній fallback із деградацією вже у вас в руках, після наступного уроку додасться черга підтверджень для незворотних дій — і тиждень здається одним PR.</a:t>
-            </a:r>
-            <a:endParaRPr lang="en-US" sz="1250" dirty="0"/>
+              <a:t>Ретраї в кількох шарах одразу   </a:t>
+            </a:r>
+            <a:pPr indent="0" marL="0">
+              <a:buNone/>
+            </a:pPr>
+            <a:r>
+              <a:rPr lang="en-US" sz="1150" dirty="0">
+                <a:solidFill>
+                  <a:srgbClr val="565C6B"/>
+                </a:solidFill>
+                <a:latin typeface="Calibri" pitchFamily="34" charset="0"/>
+                <a:ea typeface="Calibri" pitchFamily="34" charset="-122"/>
+                <a:cs typeface="Calibri" pitchFamily="34" charset="-120"/>
+              </a:rPr>
+              <a:t>бюджети часу перемножуються — «швидка відмова» на пів хвилини</a:t>
+            </a:r>
+            <a:endParaRPr lang="en-US" sz="1300" dirty="0"/>
+          </a:p>
+        </p:txBody>
+      </p:sp>
+      <p:sp>
+        <p:nvSpPr>
+          <p:cNvPr id="18" name="Shape 16"/>
+          <p:cNvSpPr/>
+          <p:nvPr/>
+        </p:nvSpPr>
+        <p:spPr>
+          <a:xfrm>
+            <a:off x="566928" y="4389120"/>
+            <a:ext cx="11064240" cy="731520"/>
+          </a:xfrm>
+          <a:prstGeom prst="roundRect">
+            <a:avLst>
+              <a:gd name="adj" fmla="val 12500"/>
+            </a:avLst>
+          </a:prstGeom>
+          <a:solidFill>
+            <a:srgbClr val="FFFFFF"/>
+          </a:solidFill>
+          <a:ln w="12700">
+            <a:solidFill>
+              <a:srgbClr val="E4E6EC"/>
+            </a:solidFill>
+            <a:prstDash val="solid"/>
+          </a:ln>
+        </p:spPr>
+      </p:sp>
+      <p:sp>
+        <p:nvSpPr>
+          <p:cNvPr id="19" name="Shape 17"/>
+          <p:cNvSpPr/>
+          <p:nvPr/>
+        </p:nvSpPr>
+        <p:spPr>
+          <a:xfrm>
+            <a:off x="768096" y="4562856"/>
+            <a:ext cx="384048" cy="384048"/>
+          </a:xfrm>
+          <a:prstGeom prst="ellipse">
+            <a:avLst/>
+          </a:prstGeom>
+          <a:solidFill>
+            <a:srgbClr val="F9E9E8"/>
+          </a:solidFill>
+          <a:ln/>
+        </p:spPr>
+      </p:sp>
+      <p:sp>
+        <p:nvSpPr>
+          <p:cNvPr id="20" name="Text 18"/>
+          <p:cNvSpPr/>
+          <p:nvPr/>
+        </p:nvSpPr>
+        <p:spPr>
+          <a:xfrm>
+            <a:off x="768096" y="4562856"/>
+            <a:ext cx="384048" cy="384048"/>
+          </a:xfrm>
+          <a:prstGeom prst="rect">
+            <a:avLst/>
+          </a:prstGeom>
+          <a:noFill/>
+          <a:ln/>
+        </p:spPr>
+        <p:txBody>
+          <a:bodyPr wrap="square" lIns="0" tIns="0" rIns="0" bIns="0" rtlCol="0" anchor="ctr"/>
+          <a:lstStyle/>
+          <a:p>
+            <a:pPr algn="ctr" indent="0" marL="0">
+              <a:buNone/>
+            </a:pPr>
+            <a:r>
+              <a:rPr lang="en-US" sz="1300" b="1" dirty="0">
+                <a:solidFill>
+                  <a:srgbClr val="B3261E"/>
+                </a:solidFill>
+                <a:latin typeface="Calibri" pitchFamily="34" charset="0"/>
+                <a:ea typeface="Calibri" pitchFamily="34" charset="-122"/>
+                <a:cs typeface="Calibri" pitchFamily="34" charset="-120"/>
+              </a:rPr>
+              <a:t>✕</a:t>
+            </a:r>
+            <a:endParaRPr lang="en-US" sz="1300" dirty="0"/>
+          </a:p>
+        </p:txBody>
+      </p:sp>
+      <p:sp>
+        <p:nvSpPr>
+          <p:cNvPr id="21" name="Text 19"/>
+          <p:cNvSpPr/>
+          <p:nvPr/>
+        </p:nvSpPr>
+        <p:spPr>
+          <a:xfrm>
+            <a:off x="1298448" y="4389120"/>
+            <a:ext cx="10149840" cy="731520"/>
+          </a:xfrm>
+          <a:prstGeom prst="rect">
+            <a:avLst/>
+          </a:prstGeom>
+          <a:noFill/>
+          <a:ln/>
+        </p:spPr>
+        <p:txBody>
+          <a:bodyPr wrap="square" lIns="0" tIns="0" rIns="0" bIns="0" rtlCol="0" anchor="ctr"/>
+          <a:lstStyle/>
+          <a:p>
+            <a:pPr indent="0" marL="0">
+              <a:buNone/>
+            </a:pPr>
+            <a:r>
+              <a:rPr lang="en-US" sz="1300" b="1" dirty="0">
+                <a:solidFill>
+                  <a:srgbClr val="1B1D23"/>
+                </a:solidFill>
+                <a:latin typeface="Calibri" pitchFamily="34" charset="0"/>
+                <a:ea typeface="Calibri" pitchFamily="34" charset="-122"/>
+                <a:cs typeface="Calibri" pitchFamily="34" charset="-120"/>
+              </a:rPr>
+              <a:t>Breaker без half-open   </a:t>
+            </a:r>
+            <a:pPr indent="0" marL="0">
+              <a:buNone/>
+            </a:pPr>
+            <a:r>
+              <a:rPr lang="en-US" sz="1150" dirty="0">
+                <a:solidFill>
+                  <a:srgbClr val="565C6B"/>
+                </a:solidFill>
+                <a:latin typeface="Calibri" pitchFamily="34" charset="0"/>
+                <a:ea typeface="Calibri" pitchFamily="34" charset="-122"/>
+                <a:cs typeface="Calibri" pitchFamily="34" charset="-120"/>
+              </a:rPr>
+              <a:t>система лишається деградованою після того, як усе полагодилося</a:t>
+            </a:r>
+            <a:endParaRPr lang="en-US" sz="1300" dirty="0"/>
+          </a:p>
+        </p:txBody>
+      </p:sp>
+      <p:sp>
+        <p:nvSpPr>
+          <p:cNvPr id="22" name="Shape 20"/>
+          <p:cNvSpPr/>
+          <p:nvPr/>
+        </p:nvSpPr>
+        <p:spPr>
+          <a:xfrm>
+            <a:off x="566928" y="5257800"/>
+            <a:ext cx="11064240" cy="731520"/>
+          </a:xfrm>
+          <a:prstGeom prst="roundRect">
+            <a:avLst>
+              <a:gd name="adj" fmla="val 12500"/>
+            </a:avLst>
+          </a:prstGeom>
+          <a:solidFill>
+            <a:srgbClr val="FFFFFF"/>
+          </a:solidFill>
+          <a:ln w="12700">
+            <a:solidFill>
+              <a:srgbClr val="E4E6EC"/>
+            </a:solidFill>
+            <a:prstDash val="solid"/>
+          </a:ln>
+        </p:spPr>
+      </p:sp>
+      <p:sp>
+        <p:nvSpPr>
+          <p:cNvPr id="23" name="Shape 21"/>
+          <p:cNvSpPr/>
+          <p:nvPr/>
+        </p:nvSpPr>
+        <p:spPr>
+          <a:xfrm>
+            <a:off x="768096" y="5431536"/>
+            <a:ext cx="384048" cy="384048"/>
+          </a:xfrm>
+          <a:prstGeom prst="ellipse">
+            <a:avLst/>
+          </a:prstGeom>
+          <a:solidFill>
+            <a:srgbClr val="F9E9E8"/>
+          </a:solidFill>
+          <a:ln/>
+        </p:spPr>
+      </p:sp>
+      <p:sp>
+        <p:nvSpPr>
+          <p:cNvPr id="24" name="Text 22"/>
+          <p:cNvSpPr/>
+          <p:nvPr/>
+        </p:nvSpPr>
+        <p:spPr>
+          <a:xfrm>
+            <a:off x="768096" y="5431536"/>
+            <a:ext cx="384048" cy="384048"/>
+          </a:xfrm>
+          <a:prstGeom prst="rect">
+            <a:avLst/>
+          </a:prstGeom>
+          <a:noFill/>
+          <a:ln/>
+        </p:spPr>
+        <p:txBody>
+          <a:bodyPr wrap="square" lIns="0" tIns="0" rIns="0" bIns="0" rtlCol="0" anchor="ctr"/>
+          <a:lstStyle/>
+          <a:p>
+            <a:pPr algn="ctr" indent="0" marL="0">
+              <a:buNone/>
+            </a:pPr>
+            <a:r>
+              <a:rPr lang="en-US" sz="1300" b="1" dirty="0">
+                <a:solidFill>
+                  <a:srgbClr val="B3261E"/>
+                </a:solidFill>
+                <a:latin typeface="Calibri" pitchFamily="34" charset="0"/>
+                <a:ea typeface="Calibri" pitchFamily="34" charset="-122"/>
+                <a:cs typeface="Calibri" pitchFamily="34" charset="-120"/>
+              </a:rPr>
+              <a:t>✕</a:t>
+            </a:r>
+            <a:endParaRPr lang="en-US" sz="1300" dirty="0"/>
+          </a:p>
+        </p:txBody>
+      </p:sp>
+      <p:sp>
+        <p:nvSpPr>
+          <p:cNvPr id="25" name="Text 23"/>
+          <p:cNvSpPr/>
+          <p:nvPr/>
+        </p:nvSpPr>
+        <p:spPr>
+          <a:xfrm>
+            <a:off x="1298448" y="5257800"/>
+            <a:ext cx="10149840" cy="731520"/>
+          </a:xfrm>
+          <a:prstGeom prst="rect">
+            <a:avLst/>
+          </a:prstGeom>
+          <a:noFill/>
+          <a:ln/>
+        </p:spPr>
+        <p:txBody>
+          <a:bodyPr wrap="square" lIns="0" tIns="0" rIns="0" bIns="0" rtlCol="0" anchor="ctr"/>
+          <a:lstStyle/>
+          <a:p>
+            <a:pPr indent="0" marL="0">
+              <a:buNone/>
+            </a:pPr>
+            <a:r>
+              <a:rPr lang="en-US" sz="1300" b="1" dirty="0">
+                <a:solidFill>
+                  <a:srgbClr val="1B1D23"/>
+                </a:solidFill>
+                <a:latin typeface="Calibri" pitchFamily="34" charset="0"/>
+                <a:ea typeface="Calibri" pitchFamily="34" charset="-122"/>
+                <a:cs typeface="Calibri" pitchFamily="34" charset="-120"/>
+              </a:rPr>
+              <a:t>Fallback без лічильника   </a:t>
+            </a:r>
+            <a:pPr indent="0" marL="0">
+              <a:buNone/>
+            </a:pPr>
+            <a:r>
+              <a:rPr lang="en-US" sz="1150" dirty="0">
+                <a:solidFill>
+                  <a:srgbClr val="565C6B"/>
+                </a:solidFill>
+                <a:latin typeface="Calibri" pitchFamily="34" charset="0"/>
+                <a:ea typeface="Calibri" pitchFamily="34" charset="-122"/>
+                <a:cs typeface="Calibri" pitchFamily="34" charset="-120"/>
+              </a:rPr>
+              <a:t>проблема, що спрацювала непомітно, повертається більшою</a:t>
+            </a:r>
+            <a:endParaRPr lang="en-US" sz="1300" dirty="0"/>
           </a:p>
         </p:txBody>
       </p:sp>
@@ -17083,6 +17393,581 @@
 <file path=ppt/slides/slide24.xml><?xml version="1.0" encoding="utf-8"?>
 <p:sld xmlns:a="http://schemas.openxmlformats.org/drawingml/2006/main" xmlns:r="http://schemas.openxmlformats.org/officeDocument/2006/relationships" xmlns:p="http://schemas.openxmlformats.org/presentationml/2006/main">
   <p:cSld name="Slide 24">
+    <p:bg>
+      <p:bgPr>
+        <a:solidFill>
+          <a:srgbClr val="F6F7F9"/>
+        </a:solidFill>
+      </p:bgPr>
+    </p:bg>
+    <p:spTree>
+      <p:nvGrpSpPr>
+        <p:cNvPr id="1" name=""/>
+        <p:cNvGrpSpPr/>
+        <p:nvPr/>
+      </p:nvGrpSpPr>
+      <p:grpSpPr>
+        <a:xfrm>
+          <a:off x="0" y="0"/>
+          <a:ext cx="0" cy="0"/>
+          <a:chOff x="0" y="0"/>
+          <a:chExt cx="0" cy="0"/>
+        </a:xfrm>
+      </p:grpSpPr>
+      <p:sp>
+        <p:nvSpPr>
+          <p:cNvPr id="2" name="Text 0"/>
+          <p:cNvSpPr/>
+          <p:nvPr/>
+        </p:nvSpPr>
+        <p:spPr>
+          <a:xfrm>
+            <a:off x="566928" y="365760"/>
+            <a:ext cx="8881567" cy="603504"/>
+          </a:xfrm>
+          <a:prstGeom prst="rect">
+            <a:avLst/>
+          </a:prstGeom>
+          <a:noFill/>
+          <a:ln/>
+        </p:spPr>
+        <p:txBody>
+          <a:bodyPr wrap="square" lIns="0" tIns="0" rIns="0" bIns="0" rtlCol="0" anchor="ctr"/>
+          <a:lstStyle/>
+          <a:p>
+            <a:pPr indent="0" marL="0">
+              <a:buNone/>
+            </a:pPr>
+            <a:r>
+              <a:rPr lang="en-US" sz="2500" b="1" dirty="0">
+                <a:solidFill>
+                  <a:srgbClr val="1B1D23"/>
+                </a:solidFill>
+                <a:latin typeface="Calibri" pitchFamily="34" charset="0"/>
+                <a:ea typeface="Calibri" pitchFamily="34" charset="-122"/>
+                <a:cs typeface="Calibri" pitchFamily="34" charset="-120"/>
+              </a:rPr>
+              <a:t>Домашнє завдання</a:t>
+            </a:r>
+            <a:endParaRPr lang="en-US" sz="2500" dirty="0"/>
+          </a:p>
+        </p:txBody>
+      </p:sp>
+      <p:sp>
+        <p:nvSpPr>
+          <p:cNvPr id="3" name="Shape 1"/>
+          <p:cNvSpPr/>
+          <p:nvPr/>
+        </p:nvSpPr>
+        <p:spPr>
+          <a:xfrm>
+            <a:off x="10481767" y="530352"/>
+            <a:ext cx="1143000" cy="274320"/>
+          </a:xfrm>
+          <a:prstGeom prst="roundRect">
+            <a:avLst>
+              <a:gd name="adj" fmla="val 50000"/>
+            </a:avLst>
+          </a:prstGeom>
+          <a:solidFill>
+            <a:srgbClr val="E9F3EE"/>
+          </a:solidFill>
+          <a:ln/>
+        </p:spPr>
+      </p:sp>
+      <p:sp>
+        <p:nvSpPr>
+          <p:cNvPr id="4" name="Text 2"/>
+          <p:cNvSpPr/>
+          <p:nvPr/>
+        </p:nvSpPr>
+        <p:spPr>
+          <a:xfrm>
+            <a:off x="10481767" y="530352"/>
+            <a:ext cx="1143000" cy="274320"/>
+          </a:xfrm>
+          <a:prstGeom prst="rect">
+            <a:avLst/>
+          </a:prstGeom>
+          <a:noFill/>
+          <a:ln/>
+        </p:spPr>
+        <p:txBody>
+          <a:bodyPr wrap="square" lIns="0" tIns="0" rIns="0" bIns="0" rtlCol="0" anchor="ctr"/>
+          <a:lstStyle/>
+          <a:p>
+            <a:pPr algn="ctr" indent="0" marL="0">
+              <a:buNone/>
+            </a:pPr>
+            <a:r>
+              <a:rPr lang="en-US" sz="900" b="1" spc="100" kern="0" dirty="0">
+                <a:solidFill>
+                  <a:srgbClr val="177245"/>
+                </a:solidFill>
+                <a:latin typeface="Courier New" pitchFamily="34" charset="0"/>
+                <a:ea typeface="Courier New" pitchFamily="34" charset="-122"/>
+                <a:cs typeface="Courier New" pitchFamily="34" charset="-120"/>
+              </a:rPr>
+              <a:t>ПРАКТИКА</a:t>
+            </a:r>
+            <a:endParaRPr lang="en-US" sz="900" dirty="0"/>
+          </a:p>
+        </p:txBody>
+      </p:sp>
+      <p:sp>
+        <p:nvSpPr>
+          <p:cNvPr id="5" name="Text 3"/>
+          <p:cNvSpPr/>
+          <p:nvPr/>
+        </p:nvSpPr>
+        <p:spPr>
+          <a:xfrm>
+            <a:off x="566928" y="6455664"/>
+            <a:ext cx="5486400" cy="274320"/>
+          </a:xfrm>
+          <a:prstGeom prst="rect">
+            <a:avLst/>
+          </a:prstGeom>
+          <a:noFill/>
+          <a:ln/>
+        </p:spPr>
+        <p:txBody>
+          <a:bodyPr wrap="square" lIns="0" tIns="0" rIns="0" bIns="0" rtlCol="0" anchor="ctr"/>
+          <a:lstStyle/>
+          <a:p>
+            <a:pPr indent="0" marL="0">
+              <a:buNone/>
+            </a:pPr>
+            <a:r>
+              <a:rPr lang="en-US" sz="850" dirty="0">
+                <a:solidFill>
+                  <a:srgbClr val="8A90A0"/>
+                </a:solidFill>
+                <a:latin typeface="Courier New" pitchFamily="34" charset="0"/>
+                <a:ea typeface="Courier New" pitchFamily="34" charset="-122"/>
+                <a:cs typeface="Courier New" pitchFamily="34" charset="-120"/>
+              </a:rPr>
+              <a:t>SupportGW · LLMOps Bootcamp · Урок 7 з 12</a:t>
+            </a:r>
+            <a:endParaRPr lang="en-US" sz="850" dirty="0"/>
+          </a:p>
+        </p:txBody>
+      </p:sp>
+      <p:sp>
+        <p:nvSpPr>
+          <p:cNvPr id="6" name="Shape 4"/>
+          <p:cNvSpPr/>
+          <p:nvPr/>
+        </p:nvSpPr>
+        <p:spPr>
+          <a:xfrm>
+            <a:off x="566928" y="1737360"/>
+            <a:ext cx="5349240" cy="2194560"/>
+          </a:xfrm>
+          <a:prstGeom prst="roundRect">
+            <a:avLst>
+              <a:gd name="adj" fmla="val 5000"/>
+            </a:avLst>
+          </a:prstGeom>
+          <a:solidFill>
+            <a:srgbClr val="FFFFFF"/>
+          </a:solidFill>
+          <a:ln w="12700">
+            <a:solidFill>
+              <a:srgbClr val="E4E6EC"/>
+            </a:solidFill>
+            <a:prstDash val="solid"/>
+          </a:ln>
+        </p:spPr>
+      </p:sp>
+      <p:sp>
+        <p:nvSpPr>
+          <p:cNvPr id="7" name="Text 5"/>
+          <p:cNvSpPr/>
+          <p:nvPr/>
+        </p:nvSpPr>
+        <p:spPr>
+          <a:xfrm>
+            <a:off x="768096" y="1892808"/>
+            <a:ext cx="4946904" cy="438912"/>
+          </a:xfrm>
+          <a:prstGeom prst="rect">
+            <a:avLst/>
+          </a:prstGeom>
+          <a:noFill/>
+          <a:ln/>
+        </p:spPr>
+        <p:txBody>
+          <a:bodyPr wrap="square" lIns="0" tIns="0" rIns="0" bIns="0" rtlCol="0" anchor="ctr"/>
+          <a:lstStyle/>
+          <a:p>
+            <a:pPr indent="0" marL="0">
+              <a:buNone/>
+            </a:pPr>
+            <a:r>
+              <a:rPr lang="en-US" sz="1450" b="1" dirty="0">
+                <a:solidFill>
+                  <a:srgbClr val="1B1D23"/>
+                </a:solidFill>
+                <a:latin typeface="Calibri" pitchFamily="34" charset="0"/>
+                <a:ea typeface="Calibri" pitchFamily="34" charset="-122"/>
+                <a:cs typeface="Calibri" pitchFamily="34" charset="-120"/>
+              </a:rPr>
+              <a:t>Обов'язково — без здачі</a:t>
+            </a:r>
+            <a:endParaRPr lang="en-US" sz="1450" dirty="0"/>
+          </a:p>
+        </p:txBody>
+      </p:sp>
+      <p:sp>
+        <p:nvSpPr>
+          <p:cNvPr id="8" name="Text 6"/>
+          <p:cNvSpPr/>
+          <p:nvPr/>
+        </p:nvSpPr>
+        <p:spPr>
+          <a:xfrm>
+            <a:off x="768096" y="2423160"/>
+            <a:ext cx="4946904" cy="1353312"/>
+          </a:xfrm>
+          <a:prstGeom prst="rect">
+            <a:avLst/>
+          </a:prstGeom>
+          <a:noFill/>
+          <a:ln/>
+        </p:spPr>
+        <p:txBody>
+          <a:bodyPr wrap="square" lIns="0" tIns="0" rIns="0" bIns="0" rtlCol="0" anchor="t"/>
+          <a:lstStyle/>
+          <a:p>
+            <a:pPr indent="0" marL="0">
+              <a:buNone/>
+            </a:pPr>
+            <a:r>
+              <a:rPr lang="en-US" sz="1200" dirty="0">
+                <a:solidFill>
+                  <a:srgbClr val="565C6B"/>
+                </a:solidFill>
+                <a:latin typeface="Calibri" pitchFamily="34" charset="0"/>
+                <a:ea typeface="Calibri" pitchFamily="34" charset="-122"/>
+                <a:cs typeface="Calibri" pitchFamily="34" charset="-120"/>
+              </a:rPr>
+              <a:t>• закріпити лабу: __fail_503 → fallback → ввічлива заглушка</a:t>
+            </a:r>
+            <a:endParaRPr lang="en-US" sz="1200" dirty="0"/>
+          </a:p>
+          <a:p>
+            <a:pPr indent="0" marL="0">
+              <a:buNone/>
+            </a:pPr>
+            <a:endParaRPr lang="en-US" sz="1200" dirty="0"/>
+          </a:p>
+          <a:p>
+            <a:pPr indent="0" marL="0">
+              <a:buNone/>
+            </a:pPr>
+            <a:r>
+              <a:rPr lang="en-US" sz="1200" dirty="0">
+                <a:solidFill>
+                  <a:srgbClr val="565C6B"/>
+                </a:solidFill>
+                <a:latin typeface="Calibri" pitchFamily="34" charset="0"/>
+                <a:ea typeface="Calibri" pitchFamily="34" charset="-122"/>
+                <a:cs typeface="Calibri" pitchFamily="34" charset="-120"/>
+              </a:rPr>
+              <a:t>• переконатися, що збій швидкий і лишає чесний статус у лозі</a:t>
+            </a:r>
+            <a:endParaRPr lang="en-US" sz="1200" dirty="0"/>
+          </a:p>
+          <a:p>
+            <a:pPr indent="0" marL="0">
+              <a:buNone/>
+            </a:pPr>
+            <a:endParaRPr lang="en-US" sz="1200" dirty="0"/>
+          </a:p>
+          <a:p>
+            <a:pPr indent="0" marL="0">
+              <a:buNone/>
+            </a:pPr>
+            <a:r>
+              <a:rPr lang="en-US" sz="1200" dirty="0">
+                <a:solidFill>
+                  <a:srgbClr val="565C6B"/>
+                </a:solidFill>
+                <a:latin typeface="Calibri" pitchFamily="34" charset="0"/>
+                <a:ea typeface="Calibri" pitchFamily="34" charset="-122"/>
+                <a:cs typeface="Calibri" pitchFamily="34" charset="-120"/>
+              </a:rPr>
+              <a:t>• проговорити свою драбину деградації</a:t>
+            </a:r>
+            <a:endParaRPr lang="en-US" sz="1200" dirty="0"/>
+          </a:p>
+        </p:txBody>
+      </p:sp>
+      <p:sp>
+        <p:nvSpPr>
+          <p:cNvPr id="9" name="Shape 7"/>
+          <p:cNvSpPr/>
+          <p:nvPr/>
+        </p:nvSpPr>
+        <p:spPr>
+          <a:xfrm>
+            <a:off x="6281928" y="1737360"/>
+            <a:ext cx="5349240" cy="2194560"/>
+          </a:xfrm>
+          <a:prstGeom prst="roundRect">
+            <a:avLst>
+              <a:gd name="adj" fmla="val 5000"/>
+            </a:avLst>
+          </a:prstGeom>
+          <a:solidFill>
+            <a:srgbClr val="F8F0E2"/>
+          </a:solidFill>
+          <a:ln/>
+        </p:spPr>
+      </p:sp>
+      <p:sp>
+        <p:nvSpPr>
+          <p:cNvPr id="10" name="Text 8"/>
+          <p:cNvSpPr/>
+          <p:nvPr/>
+        </p:nvSpPr>
+        <p:spPr>
+          <a:xfrm>
+            <a:off x="6483096" y="1892808"/>
+            <a:ext cx="4946904" cy="438912"/>
+          </a:xfrm>
+          <a:prstGeom prst="rect">
+            <a:avLst/>
+          </a:prstGeom>
+          <a:noFill/>
+          <a:ln/>
+        </p:spPr>
+        <p:txBody>
+          <a:bodyPr wrap="square" lIns="0" tIns="0" rIns="0" bIns="0" rtlCol="0" anchor="ctr"/>
+          <a:lstStyle/>
+          <a:p>
+            <a:pPr indent="0" marL="0">
+              <a:buNone/>
+            </a:pPr>
+            <a:r>
+              <a:rPr lang="en-US" sz="1450" b="1" dirty="0">
+                <a:solidFill>
+                  <a:srgbClr val="9A5B12"/>
+                </a:solidFill>
+                <a:latin typeface="Calibri" pitchFamily="34" charset="0"/>
+                <a:ea typeface="Calibri" pitchFamily="34" charset="-122"/>
+                <a:cs typeface="Calibri" pitchFamily="34" charset="-120"/>
+              </a:rPr>
+              <a:t>Опційно</a:t>
+            </a:r>
+            <a:endParaRPr lang="en-US" sz="1450" dirty="0"/>
+          </a:p>
+        </p:txBody>
+      </p:sp>
+      <p:sp>
+        <p:nvSpPr>
+          <p:cNvPr id="11" name="Text 9"/>
+          <p:cNvSpPr/>
+          <p:nvPr/>
+        </p:nvSpPr>
+        <p:spPr>
+          <a:xfrm>
+            <a:off x="6483096" y="2423160"/>
+            <a:ext cx="4946904" cy="1353312"/>
+          </a:xfrm>
+          <a:prstGeom prst="rect">
+            <a:avLst/>
+          </a:prstGeom>
+          <a:noFill/>
+          <a:ln/>
+        </p:spPr>
+        <p:txBody>
+          <a:bodyPr wrap="square" lIns="0" tIns="0" rIns="0" bIns="0" rtlCol="0" anchor="t"/>
+          <a:lstStyle/>
+          <a:p>
+            <a:pPr indent="0" marL="0">
+              <a:buNone/>
+            </a:pPr>
+            <a:r>
+              <a:rPr lang="en-US" sz="1200" dirty="0">
+                <a:solidFill>
+                  <a:srgbClr val="1B1D23"/>
+                </a:solidFill>
+                <a:latin typeface="Calibri" pitchFamily="34" charset="0"/>
+                <a:ea typeface="Calibri" pitchFamily="34" charset="-122"/>
+                <a:cs typeface="Calibri" pitchFamily="34" charset="-120"/>
+              </a:rPr>
+              <a:t>• circuit breaker: 3 збої → open на 30 с, обов'язково з half-open (пробний запит раз на ~5 с) — інакше сам собі влаштуєш outage</a:t>
+            </a:r>
+            <a:endParaRPr lang="en-US" sz="1200" dirty="0"/>
+          </a:p>
+        </p:txBody>
+      </p:sp>
+      <p:sp>
+        <p:nvSpPr>
+          <p:cNvPr id="12" name="Shape 10"/>
+          <p:cNvSpPr/>
+          <p:nvPr/>
+        </p:nvSpPr>
+        <p:spPr>
+          <a:xfrm>
+            <a:off x="566928" y="4206240"/>
+            <a:ext cx="11064240" cy="1463040"/>
+          </a:xfrm>
+          <a:prstGeom prst="roundRect">
+            <a:avLst>
+              <a:gd name="adj" fmla="val 8750"/>
+            </a:avLst>
+          </a:prstGeom>
+          <a:solidFill>
+            <a:srgbClr val="FFFFFF"/>
+          </a:solidFill>
+          <a:ln w="19050">
+            <a:solidFill>
+              <a:srgbClr val="4038C4"/>
+            </a:solidFill>
+            <a:prstDash val="solid"/>
+          </a:ln>
+        </p:spPr>
+      </p:sp>
+      <p:sp>
+        <p:nvSpPr>
+          <p:cNvPr id="13" name="Text 11"/>
+          <p:cNvSpPr/>
+          <p:nvPr/>
+        </p:nvSpPr>
+        <p:spPr>
+          <a:xfrm>
+            <a:off x="841248" y="4389120"/>
+            <a:ext cx="10515600" cy="365760"/>
+          </a:xfrm>
+          <a:prstGeom prst="rect">
+            <a:avLst/>
+          </a:prstGeom>
+          <a:noFill/>
+          <a:ln/>
+        </p:spPr>
+        <p:txBody>
+          <a:bodyPr wrap="square" lIns="0" tIns="0" rIns="0" bIns="0" rtlCol="0" anchor="ctr"/>
+          <a:lstStyle/>
+          <a:p>
+            <a:pPr indent="0" marL="0">
+              <a:buNone/>
+            </a:pPr>
+            <a:r>
+              <a:rPr lang="en-US" sz="1500" b="1" dirty="0">
+                <a:solidFill>
+                  <a:srgbClr val="4038C4"/>
+                </a:solidFill>
+                <a:latin typeface="Calibri" pitchFamily="34" charset="0"/>
+                <a:ea typeface="Calibri" pitchFamily="34" charset="-122"/>
+                <a:cs typeface="Calibri" pitchFamily="34" charset="-120"/>
+              </a:rPr>
+              <a:t>ДЗ тижня 4 — після наступного уроку</a:t>
+            </a:r>
+            <a:endParaRPr lang="en-US" sz="1500" dirty="0"/>
+          </a:p>
+        </p:txBody>
+      </p:sp>
+      <p:sp>
+        <p:nvSpPr>
+          <p:cNvPr id="14" name="Text 12"/>
+          <p:cNvSpPr/>
+          <p:nvPr/>
+        </p:nvSpPr>
+        <p:spPr>
+          <a:xfrm>
+            <a:off x="841248" y="4800600"/>
+            <a:ext cx="10515600" cy="731520"/>
+          </a:xfrm>
+          <a:prstGeom prst="rect">
+            <a:avLst/>
+          </a:prstGeom>
+          <a:noFill/>
+          <a:ln/>
+        </p:spPr>
+        <p:txBody>
+          <a:bodyPr wrap="square" lIns="0" tIns="0" rIns="0" bIns="0" rtlCol="0" anchor="t"/>
+          <a:lstStyle/>
+          <a:p>
+            <a:pPr indent="0" marL="0">
+              <a:buNone/>
+            </a:pPr>
+            <a:r>
+              <a:rPr lang="en-US" sz="1250" dirty="0">
+                <a:solidFill>
+                  <a:srgbClr val="1B1D23"/>
+                </a:solidFill>
+                <a:latin typeface="Calibri" pitchFamily="34" charset="0"/>
+                <a:ea typeface="Calibri" pitchFamily="34" charset="-122"/>
+                <a:cs typeface="Calibri" pitchFamily="34" charset="-120"/>
+              </a:rPr>
+              <a:t>Тиждень об'єднує надійність і безпеку: сьогоднішній fallback із деградацією вже у вас в руках, після наступного уроку додасться черга підтверджень для незворотних дій — і тиждень здається одним PR.</a:t>
+            </a:r>
+            <a:endParaRPr lang="en-US" sz="1250" dirty="0"/>
+          </a:p>
+        </p:txBody>
+      </p:sp>
+      <p:sp>
+        <p:nvSpPr>
+          <p:cNvPr id="25" name="Slide Number Placeholder 0"/>
+          <p:cNvSpPr>
+            <a:spLocks noGrp="1"/>
+          </p:cNvSpPr>
+          <p:nvPr>
+            <p:ph type="sldNum" sz="quarter" idx="4294967295"/>
+          </p:nvPr>
+        </p:nvSpPr>
+        <p:spPr>
+          <a:xfrm>
+            <a:off x="11323015" y="6455664"/>
+            <a:ext cx="365760" cy="274320"/>
+          </a:xfrm>
+          <a:prstGeom prst="rect">
+            <a:avLst/>
+          </a:prstGeom>
+          <a:extLst>
+            <a:ext uri="{C572A759-6A51-4108-AA02-DFA0A04FC94B}">
+              <ma14:wrappingTextBoxFlag xmlns:ma14="http://schemas.microsoft.com/office/mac/drawingml/2011/main" val="0"/>
+            </a:ext>
+          </a:extLst>
+        </p:spPr>
+        <p:txBody>
+          <a:bodyPr/>
+          <a:lstStyle>
+            <a:lvl1pPr>
+              <a:defRPr sz="850">
+                <a:solidFill>
+                  <a:srgbClr val="8A90A0"/>
+                </a:solidFill>
+                <a:latin typeface="Courier New"/>
+                <a:ea typeface="Courier New"/>
+                <a:cs typeface="Courier New"/>
+              </a:defRPr>
+            </a:lvl1pPr>
+          </a:lstStyle>
+          <a:p>
+            <a:pPr algn="l"/>
+            <a:fld id="{F7021451-1387-4CA6-816F-3879F97B5CBC}" type="slidenum">
+              <a:rPr b="0" lang="en-US"/>
+              <a:t>24</a:t>
+            </a:fld>
+            <a:endParaRPr lang="en-US"/>
+          </a:p>
+        </p:txBody>
+      </p:sp>
+    </p:spTree>
+  </p:cSld>
+  <p:clrMapOvr>
+    <a:masterClrMapping/>
+  </p:clrMapOvr>
+</p:sld>
+</file>
+
+<file path=ppt/slides/slide25.xml><?xml version="1.0" encoding="utf-8"?>
+<p:sld xmlns:a="http://schemas.openxmlformats.org/drawingml/2006/main" xmlns:r="http://schemas.openxmlformats.org/officeDocument/2006/relationships" xmlns:p="http://schemas.openxmlformats.org/presentationml/2006/main">
+  <p:cSld name="Slide 25">
     <p:bg>
       <p:bgPr>
         <a:solidFill>

--- a/docs/decks/L07.pptx
+++ b/docs/decks/L07.pptx
@@ -18650,9 +18650,14 @@
             </a:avLst>
           </a:prstGeom>
           <a:solidFill>
-            <a:srgbClr val="ECEBFB"/>
+            <a:srgbClr val="FFFFFF"/>
           </a:solidFill>
-          <a:ln/>
+          <a:ln w="12700">
+            <a:solidFill>
+              <a:srgbClr val="E4E6EC"/>
+            </a:solidFill>
+            <a:prstDash val="solid"/>
+          </a:ln>
         </p:spPr>
       </p:sp>
       <p:sp>
@@ -18670,7 +18675,7 @@
             <a:avLst/>
           </a:prstGeom>
           <a:solidFill>
-            <a:srgbClr val="4038C4"/>
+            <a:srgbClr val="1B1D23"/>
           </a:solidFill>
           <a:ln/>
         </p:spPr>
@@ -18702,7 +18707,7 @@
             <a:r>
               <a:rPr lang="en-US" sz="1200" b="1" dirty="0">
                 <a:solidFill>
-                  <a:srgbClr val="ECEBFB"/>
+                  <a:srgbClr val="FFFFFF"/>
                 </a:solidFill>
                 <a:latin typeface="Courier New" pitchFamily="34" charset="0"/>
                 <a:ea typeface="Courier New" pitchFamily="34" charset="-122"/>
@@ -18741,7 +18746,7 @@
             <a:r>
               <a:rPr lang="en-US" sz="1450" b="1" dirty="0">
                 <a:solidFill>
-                  <a:srgbClr val="4038C4"/>
+                  <a:srgbClr val="1B1D23"/>
                 </a:solidFill>
                 <a:latin typeface="Calibri" pitchFamily="34" charset="0"/>
                 <a:ea typeface="Calibri" pitchFamily="34" charset="-122"/>
@@ -18770,9 +18775,14 @@
             </a:avLst>
           </a:prstGeom>
           <a:solidFill>
-            <a:srgbClr val="ECEBFB"/>
+            <a:srgbClr val="FFFFFF"/>
           </a:solidFill>
-          <a:ln/>
+          <a:ln w="12700">
+            <a:solidFill>
+              <a:srgbClr val="E4E6EC"/>
+            </a:solidFill>
+            <a:prstDash val="solid"/>
+          </a:ln>
         </p:spPr>
       </p:sp>
       <p:sp>
@@ -18790,7 +18800,7 @@
             <a:avLst/>
           </a:prstGeom>
           <a:solidFill>
-            <a:srgbClr val="4038C4"/>
+            <a:srgbClr val="1B1D23"/>
           </a:solidFill>
           <a:ln/>
         </p:spPr>
@@ -18822,7 +18832,7 @@
             <a:r>
               <a:rPr lang="en-US" sz="1200" b="1" dirty="0">
                 <a:solidFill>
-                  <a:srgbClr val="ECEBFB"/>
+                  <a:srgbClr val="FFFFFF"/>
                 </a:solidFill>
                 <a:latin typeface="Courier New" pitchFamily="34" charset="0"/>
                 <a:ea typeface="Courier New" pitchFamily="34" charset="-122"/>
@@ -18861,7 +18871,7 @@
             <a:r>
               <a:rPr lang="en-US" sz="1450" b="1" dirty="0">
                 <a:solidFill>
-                  <a:srgbClr val="4038C4"/>
+                  <a:srgbClr val="1B1D23"/>
                 </a:solidFill>
                 <a:latin typeface="Calibri" pitchFamily="34" charset="0"/>
                 <a:ea typeface="Calibri" pitchFamily="34" charset="-122"/>
@@ -18890,9 +18900,14 @@
             </a:avLst>
           </a:prstGeom>
           <a:solidFill>
-            <a:srgbClr val="ECEBFB"/>
+            <a:srgbClr val="FFFFFF"/>
           </a:solidFill>
-          <a:ln/>
+          <a:ln w="12700">
+            <a:solidFill>
+              <a:srgbClr val="E4E6EC"/>
+            </a:solidFill>
+            <a:prstDash val="solid"/>
+          </a:ln>
         </p:spPr>
       </p:sp>
       <p:sp>
@@ -18910,7 +18925,7 @@
             <a:avLst/>
           </a:prstGeom>
           <a:solidFill>
-            <a:srgbClr val="4038C4"/>
+            <a:srgbClr val="1B1D23"/>
           </a:solidFill>
           <a:ln/>
         </p:spPr>
@@ -18942,7 +18957,7 @@
             <a:r>
               <a:rPr lang="en-US" sz="1200" b="1" dirty="0">
                 <a:solidFill>
-                  <a:srgbClr val="ECEBFB"/>
+                  <a:srgbClr val="FFFFFF"/>
                 </a:solidFill>
                 <a:latin typeface="Courier New" pitchFamily="34" charset="0"/>
                 <a:ea typeface="Courier New" pitchFamily="34" charset="-122"/>
@@ -18981,7 +18996,7 @@
             <a:r>
               <a:rPr lang="en-US" sz="1450" b="1" dirty="0">
                 <a:solidFill>
-                  <a:srgbClr val="4038C4"/>
+                  <a:srgbClr val="1B1D23"/>
                 </a:solidFill>
                 <a:latin typeface="Calibri" pitchFamily="34" charset="0"/>
                 <a:ea typeface="Calibri" pitchFamily="34" charset="-122"/>
@@ -19010,9 +19025,14 @@
             </a:avLst>
           </a:prstGeom>
           <a:solidFill>
-            <a:srgbClr val="ECEBFB"/>
+            <a:srgbClr val="FFFFFF"/>
           </a:solidFill>
-          <a:ln/>
+          <a:ln w="12700">
+            <a:solidFill>
+              <a:srgbClr val="E4E6EC"/>
+            </a:solidFill>
+            <a:prstDash val="solid"/>
+          </a:ln>
         </p:spPr>
       </p:sp>
       <p:sp>
@@ -19030,7 +19050,7 @@
             <a:avLst/>
           </a:prstGeom>
           <a:solidFill>
-            <a:srgbClr val="4038C4"/>
+            <a:srgbClr val="1B1D23"/>
           </a:solidFill>
           <a:ln/>
         </p:spPr>
@@ -19062,7 +19082,7 @@
             <a:r>
               <a:rPr lang="en-US" sz="1200" b="1" dirty="0">
                 <a:solidFill>
-                  <a:srgbClr val="ECEBFB"/>
+                  <a:srgbClr val="FFFFFF"/>
                 </a:solidFill>
                 <a:latin typeface="Courier New" pitchFamily="34" charset="0"/>
                 <a:ea typeface="Courier New" pitchFamily="34" charset="-122"/>
@@ -19101,7 +19121,7 @@
             <a:r>
               <a:rPr lang="en-US" sz="1450" b="1" dirty="0">
                 <a:solidFill>
-                  <a:srgbClr val="4038C4"/>
+                  <a:srgbClr val="1B1D23"/>
                 </a:solidFill>
                 <a:latin typeface="Calibri" pitchFamily="34" charset="0"/>
                 <a:ea typeface="Calibri" pitchFamily="34" charset="-122"/>
@@ -19130,9 +19150,14 @@
             </a:avLst>
           </a:prstGeom>
           <a:solidFill>
-            <a:srgbClr val="ECEBFB"/>
+            <a:srgbClr val="FFFFFF"/>
           </a:solidFill>
-          <a:ln/>
+          <a:ln w="12700">
+            <a:solidFill>
+              <a:srgbClr val="E4E6EC"/>
+            </a:solidFill>
+            <a:prstDash val="solid"/>
+          </a:ln>
         </p:spPr>
       </p:sp>
       <p:sp>
@@ -19150,7 +19175,7 @@
             <a:avLst/>
           </a:prstGeom>
           <a:solidFill>
-            <a:srgbClr val="4038C4"/>
+            <a:srgbClr val="1B1D23"/>
           </a:solidFill>
           <a:ln/>
         </p:spPr>
@@ -19182,7 +19207,7 @@
             <a:r>
               <a:rPr lang="en-US" sz="1200" b="1" dirty="0">
                 <a:solidFill>
-                  <a:srgbClr val="ECEBFB"/>
+                  <a:srgbClr val="FFFFFF"/>
                 </a:solidFill>
                 <a:latin typeface="Courier New" pitchFamily="34" charset="0"/>
                 <a:ea typeface="Courier New" pitchFamily="34" charset="-122"/>
@@ -19221,7 +19246,7 @@
             <a:r>
               <a:rPr lang="en-US" sz="1450" b="1" dirty="0">
                 <a:solidFill>
-                  <a:srgbClr val="4038C4"/>
+                  <a:srgbClr val="1B1D23"/>
                 </a:solidFill>
                 <a:latin typeface="Calibri" pitchFamily="34" charset="0"/>
                 <a:ea typeface="Calibri" pitchFamily="34" charset="-122"/>

--- a/docs/decks/L07.pptx
+++ b/docs/decks/L07.pptx
@@ -8151,9 +8151,14 @@
             </a:avLst>
           </a:prstGeom>
           <a:solidFill>
-            <a:srgbClr val="141018"/>
+            <a:srgbClr val="F5F4FA"/>
           </a:solidFill>
-          <a:ln/>
+          <a:ln w="12700">
+            <a:solidFill>
+              <a:srgbClr val="E6E7EC"/>
+            </a:solidFill>
+            <a:prstDash val="solid"/>
+          </a:ln>
         </p:spPr>
       </p:sp>
       <p:sp>
@@ -8186,7 +8191,7 @@
             <a:r>
               <a:rPr lang="en-US" sz="1200" dirty="0">
                 <a:solidFill>
-                  <a:srgbClr val="82AAFF"/>
+                  <a:srgbClr val="5A05F4"/>
                 </a:solidFill>
                 <a:latin typeface="Courier New" pitchFamily="34" charset="0"/>
                 <a:ea typeface="Courier New" pitchFamily="34" charset="-122"/>
@@ -8206,7 +8211,7 @@
             <a:r>
               <a:rPr lang="en-US" sz="1200" dirty="0">
                 <a:solidFill>
-                  <a:srgbClr val="C3E88D"/>
+                  <a:srgbClr val="177245"/>
                 </a:solidFill>
                 <a:latin typeface="Courier New" pitchFamily="34" charset="0"/>
                 <a:ea typeface="Courier New" pitchFamily="34" charset="-122"/>
@@ -8226,7 +8231,7 @@
             <a:r>
               <a:rPr lang="en-US" sz="1200" dirty="0">
                 <a:solidFill>
-                  <a:srgbClr val="C3E88D"/>
+                  <a:srgbClr val="177245"/>
                 </a:solidFill>
                 <a:latin typeface="Courier New" pitchFamily="34" charset="0"/>
                 <a:ea typeface="Courier New" pitchFamily="34" charset="-122"/>
@@ -8246,7 +8251,7 @@
             <a:r>
               <a:rPr lang="en-US" sz="1200" dirty="0">
                 <a:solidFill>
-                  <a:srgbClr val="F78C6C"/>
+                  <a:srgbClr val="B45309"/>
                 </a:solidFill>
                 <a:latin typeface="Courier New" pitchFamily="34" charset="0"/>
                 <a:ea typeface="Courier New" pitchFamily="34" charset="-122"/>
@@ -8266,7 +8271,7 @@
             <a:r>
               <a:rPr lang="en-US" sz="1200" dirty="0">
                 <a:solidFill>
-                  <a:srgbClr val="82AAFF"/>
+                  <a:srgbClr val="5A05F4"/>
                 </a:solidFill>
                 <a:latin typeface="Courier New" pitchFamily="34" charset="0"/>
                 <a:ea typeface="Courier New" pitchFamily="34" charset="-122"/>
@@ -8808,9 +8813,14 @@
             </a:avLst>
           </a:prstGeom>
           <a:solidFill>
-            <a:srgbClr val="141018"/>
+            <a:srgbClr val="F5F4FA"/>
           </a:solidFill>
-          <a:ln/>
+          <a:ln w="12700">
+            <a:solidFill>
+              <a:srgbClr val="E6E7EC"/>
+            </a:solidFill>
+            <a:prstDash val="solid"/>
+          </a:ln>
         </p:spPr>
       </p:sp>
       <p:sp>
@@ -8843,7 +8853,7 @@
             <a:r>
               <a:rPr lang="en-US" sz="1300" dirty="0">
                 <a:solidFill>
-                  <a:srgbClr val="6A7385"/>
+                  <a:srgbClr val="8A7FA6"/>
                 </a:solidFill>
                 <a:latin typeface="Courier New" pitchFamily="34" charset="0"/>
                 <a:ea typeface="Courier New" pitchFamily="34" charset="-122"/>
@@ -8863,7 +8873,7 @@
             <a:r>
               <a:rPr lang="en-US" sz="1300" dirty="0">
                 <a:solidFill>
-                  <a:srgbClr val="C3E88D"/>
+                  <a:srgbClr val="177245"/>
                 </a:solidFill>
                 <a:latin typeface="Courier New" pitchFamily="34" charset="0"/>
                 <a:ea typeface="Courier New" pitchFamily="34" charset="-122"/>
@@ -8880,7 +8890,7 @@
             <a:r>
               <a:rPr lang="en-US" sz="1300" dirty="0">
                 <a:solidFill>
-                  <a:srgbClr val="6A7385"/>
+                  <a:srgbClr val="8A7FA6"/>
                 </a:solidFill>
                 <a:latin typeface="Courier New" pitchFamily="34" charset="0"/>
                 <a:ea typeface="Courier New" pitchFamily="34" charset="-122"/>
@@ -9419,9 +9429,14 @@
             </a:avLst>
           </a:prstGeom>
           <a:solidFill>
-            <a:srgbClr val="141018"/>
+            <a:srgbClr val="F5F4FA"/>
           </a:solidFill>
-          <a:ln/>
+          <a:ln w="12700">
+            <a:solidFill>
+              <a:srgbClr val="E6E7EC"/>
+            </a:solidFill>
+            <a:prstDash val="solid"/>
+          </a:ln>
         </p:spPr>
       </p:sp>
       <p:sp>
@@ -9454,7 +9469,7 @@
             <a:r>
               <a:rPr lang="en-US" sz="1200" dirty="0">
                 <a:solidFill>
-                  <a:srgbClr val="6A7385"/>
+                  <a:srgbClr val="8A7FA6"/>
                 </a:solidFill>
                 <a:latin typeface="Courier New" pitchFamily="34" charset="0"/>
                 <a:ea typeface="Courier New" pitchFamily="34" charset="-122"/>
@@ -9474,7 +9489,7 @@
             <a:r>
               <a:rPr lang="en-US" sz="1200" dirty="0">
                 <a:solidFill>
-                  <a:srgbClr val="82AAFF"/>
+                  <a:srgbClr val="5A05F4"/>
                 </a:solidFill>
                 <a:latin typeface="Courier New" pitchFamily="34" charset="0"/>
                 <a:ea typeface="Courier New" pitchFamily="34" charset="-122"/>
@@ -9494,7 +9509,7 @@
             <a:r>
               <a:rPr lang="en-US" sz="1200" dirty="0">
                 <a:solidFill>
-                  <a:srgbClr val="82AAFF"/>
+                  <a:srgbClr val="5A05F4"/>
                 </a:solidFill>
                 <a:latin typeface="Courier New" pitchFamily="34" charset="0"/>
                 <a:ea typeface="Courier New" pitchFamily="34" charset="-122"/>
@@ -9514,7 +9529,7 @@
             <a:r>
               <a:rPr lang="en-US" sz="1200" dirty="0">
                 <a:solidFill>
-                  <a:srgbClr val="F78C6C"/>
+                  <a:srgbClr val="B45309"/>
                 </a:solidFill>
                 <a:latin typeface="Courier New" pitchFamily="34" charset="0"/>
                 <a:ea typeface="Courier New" pitchFamily="34" charset="-122"/>
@@ -9531,7 +9546,7 @@
             <a:r>
               <a:rPr lang="en-US" sz="1200" dirty="0">
                 <a:solidFill>
-                  <a:srgbClr val="6A7385"/>
+                  <a:srgbClr val="8A7FA6"/>
                 </a:solidFill>
                 <a:latin typeface="Courier New" pitchFamily="34" charset="0"/>
                 <a:ea typeface="Courier New" pitchFamily="34" charset="-122"/>
@@ -24223,9 +24238,14 @@
             </a:avLst>
           </a:prstGeom>
           <a:solidFill>
-            <a:srgbClr val="141018"/>
+            <a:srgbClr val="F5F4FA"/>
           </a:solidFill>
-          <a:ln/>
+          <a:ln w="12700">
+            <a:solidFill>
+              <a:srgbClr val="E6E7EC"/>
+            </a:solidFill>
+            <a:prstDash val="solid"/>
+          </a:ln>
         </p:spPr>
       </p:sp>
       <p:sp>
@@ -24258,7 +24278,7 @@
             <a:r>
               <a:rPr lang="en-US" sz="1150" dirty="0">
                 <a:solidFill>
-                  <a:srgbClr val="6A7385"/>
+                  <a:srgbClr val="8A7FA6"/>
                 </a:solidFill>
                 <a:latin typeface="Courier New" pitchFamily="34" charset="0"/>
                 <a:ea typeface="Courier New" pitchFamily="34" charset="-122"/>
@@ -24278,7 +24298,7 @@
             <a:r>
               <a:rPr lang="en-US" sz="1150" dirty="0">
                 <a:solidFill>
-                  <a:srgbClr val="82AAFF"/>
+                  <a:srgbClr val="5A05F4"/>
                 </a:solidFill>
                 <a:latin typeface="Courier New" pitchFamily="34" charset="0"/>
                 <a:ea typeface="Courier New" pitchFamily="34" charset="-122"/>
@@ -24298,7 +24318,7 @@
             <a:r>
               <a:rPr lang="en-US" sz="1150" dirty="0">
                 <a:solidFill>
-                  <a:srgbClr val="82AAFF"/>
+                  <a:srgbClr val="5A05F4"/>
                 </a:solidFill>
                 <a:latin typeface="Courier New" pitchFamily="34" charset="0"/>
                 <a:ea typeface="Courier New" pitchFamily="34" charset="-122"/>
@@ -24318,7 +24338,7 @@
             <a:r>
               <a:rPr lang="en-US" sz="1150" dirty="0">
                 <a:solidFill>
-                  <a:srgbClr val="ECE8F6"/>
+                  <a:srgbClr val="23262F"/>
                 </a:solidFill>
                 <a:latin typeface="Courier New" pitchFamily="34" charset="0"/>
                 <a:ea typeface="Courier New" pitchFamily="34" charset="-122"/>
@@ -24338,7 +24358,7 @@
             <a:r>
               <a:rPr lang="en-US" sz="1150" dirty="0">
                 <a:solidFill>
-                  <a:srgbClr val="ECE8F6"/>
+                  <a:srgbClr val="23262F"/>
                 </a:solidFill>
                 <a:latin typeface="Courier New" pitchFamily="34" charset="0"/>
                 <a:ea typeface="Courier New" pitchFamily="34" charset="-122"/>
@@ -24358,7 +24378,7 @@
             <a:r>
               <a:rPr lang="en-US" sz="1150" dirty="0">
                 <a:solidFill>
-                  <a:srgbClr val="F78C6C"/>
+                  <a:srgbClr val="B45309"/>
                 </a:solidFill>
                 <a:latin typeface="Courier New" pitchFamily="34" charset="0"/>
                 <a:ea typeface="Courier New" pitchFamily="34" charset="-122"/>
@@ -24378,7 +24398,7 @@
             <a:r>
               <a:rPr lang="en-US" sz="1150" dirty="0">
                 <a:solidFill>
-                  <a:srgbClr val="C3E88D"/>
+                  <a:srgbClr val="177245"/>
                 </a:solidFill>
                 <a:latin typeface="Courier New" pitchFamily="34" charset="0"/>
                 <a:ea typeface="Courier New" pitchFamily="34" charset="-122"/>
@@ -24398,7 +24418,7 @@
             <a:r>
               <a:rPr lang="en-US" sz="1150" dirty="0">
                 <a:solidFill>
-                  <a:srgbClr val="F78C6C"/>
+                  <a:srgbClr val="B45309"/>
                 </a:solidFill>
                 <a:latin typeface="Courier New" pitchFamily="34" charset="0"/>
                 <a:ea typeface="Courier New" pitchFamily="34" charset="-122"/>
@@ -24418,7 +24438,7 @@
             <a:r>
               <a:rPr lang="en-US" sz="1150" dirty="0">
                 <a:solidFill>
-                  <a:srgbClr val="ECE8F6"/>
+                  <a:srgbClr val="23262F"/>
                 </a:solidFill>
                 <a:latin typeface="Courier New" pitchFamily="34" charset="0"/>
                 <a:ea typeface="Courier New" pitchFamily="34" charset="-122"/>
@@ -25176,9 +25196,14 @@
             </a:avLst>
           </a:prstGeom>
           <a:solidFill>
-            <a:srgbClr val="141018"/>
+            <a:srgbClr val="F5F4FA"/>
           </a:solidFill>
-          <a:ln/>
+          <a:ln w="12700">
+            <a:solidFill>
+              <a:srgbClr val="E6E7EC"/>
+            </a:solidFill>
+            <a:prstDash val="solid"/>
+          </a:ln>
         </p:spPr>
       </p:sp>
       <p:sp>
@@ -25211,7 +25236,7 @@
             <a:r>
               <a:rPr lang="en-US" sz="1150" dirty="0">
                 <a:solidFill>
-                  <a:srgbClr val="6A7385"/>
+                  <a:srgbClr val="8A7FA6"/>
                 </a:solidFill>
                 <a:latin typeface="Courier New" pitchFamily="34" charset="0"/>
                 <a:ea typeface="Courier New" pitchFamily="34" charset="-122"/>
@@ -25231,7 +25256,7 @@
             <a:r>
               <a:rPr lang="en-US" sz="1150" dirty="0">
                 <a:solidFill>
-                  <a:srgbClr val="82AAFF"/>
+                  <a:srgbClr val="5A05F4"/>
                 </a:solidFill>
                 <a:latin typeface="Courier New" pitchFamily="34" charset="0"/>
                 <a:ea typeface="Courier New" pitchFamily="34" charset="-122"/>
@@ -25251,7 +25276,7 @@
             <a:r>
               <a:rPr lang="en-US" sz="1150" dirty="0">
                 <a:solidFill>
-                  <a:srgbClr val="82AAFF"/>
+                  <a:srgbClr val="5A05F4"/>
                 </a:solidFill>
                 <a:latin typeface="Courier New" pitchFamily="34" charset="0"/>
                 <a:ea typeface="Courier New" pitchFamily="34" charset="-122"/>
@@ -25271,7 +25296,7 @@
             <a:r>
               <a:rPr lang="en-US" sz="1150" dirty="0">
                 <a:solidFill>
-                  <a:srgbClr val="ECE8F6"/>
+                  <a:srgbClr val="23262F"/>
                 </a:solidFill>
                 <a:latin typeface="Courier New" pitchFamily="34" charset="0"/>
                 <a:ea typeface="Courier New" pitchFamily="34" charset="-122"/>
@@ -25291,7 +25316,7 @@
             <a:r>
               <a:rPr lang="en-US" sz="1150" dirty="0">
                 <a:solidFill>
-                  <a:srgbClr val="F78C6C"/>
+                  <a:srgbClr val="B45309"/>
                 </a:solidFill>
                 <a:latin typeface="Courier New" pitchFamily="34" charset="0"/>
                 <a:ea typeface="Courier New" pitchFamily="34" charset="-122"/>
@@ -25311,7 +25336,7 @@
             <a:r>
               <a:rPr lang="en-US" sz="1150" dirty="0">
                 <a:solidFill>
-                  <a:srgbClr val="ECE8F6"/>
+                  <a:srgbClr val="23262F"/>
                 </a:solidFill>
                 <a:latin typeface="Courier New" pitchFamily="34" charset="0"/>
                 <a:ea typeface="Courier New" pitchFamily="34" charset="-122"/>
@@ -25331,7 +25356,7 @@
             <a:r>
               <a:rPr lang="en-US" sz="1150" dirty="0">
                 <a:solidFill>
-                  <a:srgbClr val="C3E88D"/>
+                  <a:srgbClr val="177245"/>
                 </a:solidFill>
                 <a:latin typeface="Courier New" pitchFamily="34" charset="0"/>
                 <a:ea typeface="Courier New" pitchFamily="34" charset="-122"/>
@@ -25351,7 +25376,7 @@
             <a:r>
               <a:rPr lang="en-US" sz="1150" dirty="0">
                 <a:solidFill>
-                  <a:srgbClr val="ECE8F6"/>
+                  <a:srgbClr val="23262F"/>
                 </a:solidFill>
                 <a:latin typeface="Courier New" pitchFamily="34" charset="0"/>
                 <a:ea typeface="Courier New" pitchFamily="34" charset="-122"/>

--- a/docs/decks/L07.pptx
+++ b/docs/decks/L07.pptx
@@ -526,7 +526,7 @@
           <a:p>
             <a:r>
               <a:rPr lang="en-US" dirty="0"/>
-              <a:t/>
+              <a:t>Вітаю на сьомому уроці — першому з тижня «Надійність + безпека». Провайдер ляже; питання не «чи», а «що побачить користувач, коли це станеться». До сьогодні відповідь була чесною катастрофою: «Сервіс тимчасово недоступний» і нуль плану Б — ви бачили це ще в лабі уроку 1. Сьогодні будуємо план Б: виносимо виклик моделі у функцію, де збій — значення, а не виняток; будуємо fallback-ланцюг з лічильником переходів; вчимо систему віддавати ввічливу заглушку замість 500-ки — з чесним статусом у лозі. А потім влаштовуємо власний інцидент, бо наш mock уміє падати на замовлення. Для охочих — circuit breaker з обов'язковим half-open, разом з чесною історією, як я сам собі влаштував outage під час підготовки курсу. Все — руками, все — відтворювано.</a:t>
             </a:r>
             <a:endParaRPr lang="en-US" dirty="0"/>
           </a:p>
@@ -614,7 +614,7 @@
           <a:p>
             <a:r>
               <a:rPr lang="en-US" dirty="0"/>
-              <a:t/>
+              <a:t>Ми вже маємо ланцюг спроб. Тепер питання, яке відрізняє робочу надійність від надійності «на папері»: що саме ви маєте право повторювати. Виклик моделі повторювати безпечно: він нічого не змінює у світі, максимум — витрачає токени. Читання через інструмент, як-от lookup_order, — read-only за визначенням, теж безпечно. Але щойно в ланцюг заходить дія, що змінює стан, — «повторити» перестає бути безневинним: повтор створення заявки — це дві заявки, повтор списання — це два списання. Причому найпідліший випадок — не помилка, а таймаут: ви не знаєте, чи операція виконалася. Відповіді немає, а тікет, можливо, вже створений. Тому дію, що змінює стан, повторюють тільки з ключем ідемпотентності; без ключа повтор — це дубль, а не наполегливість. А дію без ідемпотентності краще чесно віддати помилкою людині, ніж вгадувати. Принцип: право на ретрай визначає не тип помилки, а властивість операції. Питання «чи ретраїмо 503?» неповне; повне звучить так: «чи ця операція ідемпотентна?». Якщо так — ретрай безпечний навіть після таймаута. Якщо ні — ретрай перетворює одну проблему (немає відповіді) на дві: немає відповіді плюс невідома кількість побічних ефектів.</a:t>
             </a:r>
             <a:endParaRPr lang="en-US" dirty="0"/>
           </a:p>
@@ -702,7 +702,7 @@
           <a:p>
             <a:r>
               <a:rPr lang="en-US" dirty="0"/>
-              <a:t/>
+              <a:t>Друге питання — про ввічливість. Провайдер віддав 429 або 5xx, бо йому важко. Ваша система, як і сотні інших клієнтів, негайно повторює запит. Усі повторюють одночасно, бо всі отримали помилку одночасно — і провайдер, який майже підвівся, отримує другу хвилю, більшу за першу. Це retry storm: механізм, придуманий для стійкості, добиває систему, від якої ви залежите. Три речі цьому запобігають, і всі три мають бути разом. Експоненційна пауза між спробами замість «одразу ще раз»: кожна наступна спроба чекає довше. Випадковий розкид, джитер, у паузі: без нього всі ваші екземпляри сервісу повторюють у ті самі мілісекунди й самі створюють пік. І обмежена кількість спроб плюс circuit breaker: після кількох поспіль ви перестаєте стукати. Це не лише береже вас від очікування — це дає провайдеру шанс піднятися. Половина сенсу breaker'а спрямована не на вас, а назовні. Типова помилка: ретрай без паузи, «бо швидко треба». Я бачив конфігурацію, де на 429 стояло три негайні спроби: система в момент піку генерувала втричі більше трафіку саме тоді, коли її просили пригальмувати. Формально retry-політика була; фактично вона працювала як підсилювач інциденту. Якщо провайдер прислав 429 — він уже сказав, що робити: почекати. Читайте заголовки з підказкою про час очікування, коли вони є, і не вважайте себе розумнішими за них.</a:t>
             </a:r>
             <a:endParaRPr lang="en-US" dirty="0"/>
           </a:p>
@@ -790,7 +790,7 @@
           <a:p>
             <a:r>
               <a:rPr lang="en-US" dirty="0"/>
-              <a:t/>
+              <a:t>І третє, що майже завжди пропускають: між «нормальна відповідь» і «ввічлива заглушка» є не прірва, а кілька сходинок. Заглушка — остання з них, а не єдина. Сходинка перша — норма: відповідь основної моделі з інструментами, користувач не втрачає нічого. Друга — резервна модель з уроку 3: втрачається хіба трохи інша манера. Третя — без інструментів: модель відповідає, але без звернень до зовнішніх систем — втрачаються актуальні дані: «статус замовлення уточніть у…». Четверта — з кешу, з уроку 5: раніше згенерована відповідь на схоже питання; втрачається свіжість і персоналізація. І п'ята — заглушка: ввічливе «спробуйте згодом» плюс шлях до людини. Сходинки 3 і 4 варті окремої уваги, бо вони найдешевші й найчастіше забуті. Якщо ліг інструмент, а не модель, — не треба віддавати заглушку на весь запит: модель цілком може відповісти на загальне питання, чесно сказавши, що конкретних даних зараз не бачить. А якщо ліг провайдер моделі, але у вас є кеш — застаріла відповідь на типове питання майже завжди краща за «нічого». Принцип: деградація — це продуктове рішення, а не технічний виняток. Для кожної сходинки має бути домовленість: що саме віддаємо, як повідомляємо користувачу про обмеження і як це видно в метриках. У нашому контурі будуємо сходинки 2 і 5 — це core тижня; 3 і 4 проговорюємо як наступний крок. І в лозі має бути видно, якою сходинкою обслужено запит — інакше «система працює» перестає щось означати.</a:t>
             </a:r>
             <a:endParaRPr lang="en-US" dirty="0"/>
           </a:p>
@@ -878,7 +878,7 @@
           <a:p>
             <a:r>
               <a:rPr lang="en-US" dirty="0"/>
-              <a:t/>
+              <a:t>Що, як увесь ланцюг вичерпано? Лишаються два варіанти, і обидва погані: збрехати — віддати щось із кешу під виглядом свіжої відповіді, або впасти — 500. Правильний третій: ввічлива заглушка. Це не «здалися», це спроєктована відмова: користувач отримує чесне людське повідомлення замість технічної помилки, чат живий, а в лозі при цьому — справжній статус збою. Придивіться до другого рядка коду: статус у лог їде чесний — 503, а не 200 з ввічливим текстом. Це легко зіпсувати ненавмисно: заглушка «виглядає як відповідь», і спокусливо повернути її з кодом успіху, щоб «не лякати клієнтський код». Наслідок — моніторинг тижня 5 бачитиме здорову систему рівно тоді, коли всі користувачі бачать вибачення. Розділяйте канали: текст — для людини, статус — для машин, і жоден не бреше своїй аудиторії. Умова покриває і status == 0 — випадок «відповіді не було взагалі», коли gateway недоступний і CallGateway повернула нуль: це теж деградація, і в лог має їхати чесний 503, а не 0. І пам'ятайте: деградація — це драбина, у різних сходинок різні правила. Для довідкових питань можна деградувати м'якше: дешевша модель, відповідь із кешу з позначкою свіжості. Для дій — тільки чесна відмова: «створити тікет зараз не можу» краще за тікет, створений наосліп під час інциденту. Головне, щоб кожна сходинка була рішенням, ухваленим у спокійний четвер, а не імпровізацією о третій ночі.</a:t>
             </a:r>
             <a:endParaRPr lang="en-US" dirty="0"/>
           </a:p>
@@ -966,7 +966,7 @@
           <a:p>
             <a:r>
               <a:rPr lang="en-US" dirty="0"/>
-              <a:t/>
+              <a:t>Дрібниця, яка кусається. Перша версія нашого стека мала дивну властивість: симульований збій «коштував» вісім секунд. Користувач чекав, чекав — і лише потім отримував заглушку. Розслідування привело в несподіване місце: gateway за замовчуванням тихо ретраїв збої всередині себе. Наш сервіс чекав не на модель — на чужі приховані спроби. Тому в конфізі адаптера з уроку 3 стоїть num_retries: 0 — і тепер ви знаєте, навіщо. Reliability-логіка має жити в одному місці — у вашому сервісі, де вона видима, залогована і керована. Коли ретраять кілька шарів одночасно, бюджети часу перемножуються: два ретраї в адаптері, два в сервісі, помножити на таймаут — і ваша «швидка відмова» триває пів хвилини. Перевірте це сьогодні в лабі: збій має коштувати мілісекунди. Швидка помилка — це теж різновид надійності: що швидше система зрозуміла «не вийшло», то швидше спрацював план Б. [Ведучому: це і є передумова демо — перед показом переконайся, що в конфізі gateway стоїть num_retries: 0, інакше «швидкий збій» на екрані триватиме ті самі 8 секунд.]</a:t>
             </a:r>
             <a:endParaRPr lang="en-US" dirty="0"/>
           </a:p>
@@ -1054,7 +1054,7 @@
           <a:p>
             <a:r>
               <a:rPr lang="en-US" dirty="0"/>
-              <a:t/>
+              <a:t>Опційний блок для охочих. Fallback-ланцюг має слабке місце: якщо основна модель лежить довго, кожен запит все одно спершу йде до неї — і платить повним таймаутом за право дізнатися те, що ви вже знаєте. Circuit breaker прибирає цей податок: після трьох збоїв поспіль модель «відкривається», і запити одразу йдуть у fallback, без очікування. Зверніть увагу: це захист вашої latency, а не покарання провайдера. Придивіться до першого рядка коду: breakers — це словник, і breaker у ньому — окремий на кожну модель, а не один глобальний. Це важливе рішення: якщо лежить mock-strong, а mock-mini здорова, глобальний breaker покарав би обох — і система відбивала б живу модель за гріхи мертвої. Стан відмови завжди має ту саму гранулярність, що й одиниця відмови: падають моделі поодинці — і breaker'и мають бути поодинці. Про half-open — третій стан у цьому коді — окремо на наступному слайді: без нього breaker перетворюється на самостріл.</a:t>
             </a:r>
             <a:endParaRPr lang="en-US" dirty="0"/>
           </a:p>
@@ -1142,7 +1142,7 @@
           <a:p>
             <a:r>
               <a:rPr lang="en-US" dirty="0"/>
-              <a:t/>
+              <a:t>Чесна історія з підготовки цього курсу. Мій перший breaker був простий: «3 збої → open на 30 секунд». На демо після симульованого інциденту бот продовжив відбивати вже здорового провайдера ще пів хвилини — інцидент закінчився, а система вперто жила за планом Б, і eval-прогін почервонів. Circuit breaker без half-open — це самостріл: ви власноруч влаштовуєте собі outage, довший за реальний. Правильна машина станів має три положення. Closed — усе штатно, лічимо збої. Open — запити оминають модель, одразу fallback. І half-open — раз на кілька секунд пропускаємо один пробний запит: успіх — закриваємо circuit, збій — лишаємось open. Пробний запит — це і є механізм «помічання одужання»; без нього open перетворюється на вирок із фіксованим терміном, який не зважає на реальність. [Ведучому: на демо ціну відкритого circuit проговорюй вголос — здорове питання отримує заглушку миттєво, бо система вже здорова, а breaker ще ні; probe — це звичайне повідомлення, не маркер.]</a:t>
             </a:r>
             <a:endParaRPr lang="en-US" dirty="0"/>
           </a:p>
@@ -1230,7 +1230,7 @@
           <a:p>
             <a:r>
               <a:rPr lang="en-US" dirty="0"/>
-              <a:t/>
+              <a:t>Останній шматок — переконатися, що вся сьогоднішня драма лишає докази. Лічильник fallback_events росте з кожним переходом за ланцюгом; статуси збоїв — 503, 429, 0 — лежать у лозі поруч зі звичайними 200; заглушка деградації пише чесний статус. На тижні 5 усе це стане плитками консолі — сьогодні достатньо, що цифри існують і ростуть правильно. Чому це не бюрократія: інцидент, що не лишив сліду, — це інцидент, який неможливо розслідувати, а отже, він повториться. «Скільки запитів пішло через fallback минулої п'ятниці?» — питання, з якого починається і постмортем, і розмова з провайдером про SLA, і рішення про другого провайдера. Відповідь має бути в даних. І чесно про наш контур: стан breaker'а, як і кеш з уроку 5, живе в пам'яті процесу — у кожного інстансу свій. На відміну від черги підтверджень незворотних дій, яку ви збудуєте наступного уроку, тут це не дефект, а нормальна практика: кожен процес сам спостерігає власні збої і сам вирішує, коли перестати стукати — один «отруєний» інстанс не відкриває breaker усім. Знати про це варто з іншої причини: при десятьох інстансах провайдер отримає до десяти пробних запитів у half-open замість одного. Тоді стан переносять у спільне сховище — і платять за це залежністю від нього в найгірший момент. Компроміс свідомий: рішення не «правильне/неправильне», а «яку ціну ви обрали». [Ведучому: лічильник на w4 не віддається нічим — перехід показуй у діфі коду; плитки оживуть на тижні 5.]</a:t>
             </a:r>
             <a:endParaRPr lang="en-US" dirty="0"/>
           </a:p>
@@ -1318,7 +1318,7 @@
           <a:p>
             <a:r>
               <a:rPr lang="en-US" dirty="0"/>
-              <a:t/>
+              <a:t>Дві сучасні поправки до бюджету часу, яких не було в епоху «одна модель — одна відповідь». Перша: моделі з режимом мислення відповідають значно довше за швидкі — той самий запит може займати секунди замість сотень мілісекунд, і ваш таймаут, налаштований на швидкий режим, почне «падати» на легітимно повільних відповідях. Друга: провайдерські ліміти сьогодні багатовимірні — не лише запити на хвилину, а й токени на хвилину, окремі квоти на «думаючі» моделі й на кешовані токени. 429 приходить не тому, що «багато запитів», а тому, що ви вибрали токен-квоту. Практичний висновок: таймаут і поріг ретраїв мають бути різні для різних маршрутів, а причину 429 треба логувати з тілом відповіді — інакше ви лікуєте не той ліміт. І лайфхак наостанок: надійність, яку тестують лише реальними інцидентами, — це надія, а не інженерія. Mock дає вам збої на замовлення: __fail_503, __fail_429, __delay. Прогін «інцидентного сценарію» після кожної зміни reliability-коду коштує хвилину — зробіть його звичкою, а на тижні 6 він стане частиною CI.</a:t>
             </a:r>
             <a:endParaRPr lang="en-US" dirty="0"/>
           </a:p>
@@ -1406,7 +1406,7 @@
           <a:p>
             <a:r>
               <a:rPr lang="en-US" dirty="0"/>
-              <a:t/>
+              <a:t>Перш ніж перейти до екрана — що саме ви зараз побачите і навіщо. Пишу в чат __fail_503 — і замість 500-ки приходить ввічлива заглушка. Той самий маркер удруге — збій уже коштує мілісекунди. Потім показую перехід fallback у діфі коду: лічильник інкрементиться на кожному переході, а плитки для нього оживуть на тижні 5. Далі опційна частина: три __fail_503 поспіль відкривають circuit — і тепер навіть здорове питання миттєво отримує заглушку. Система вже здорова, а breaker ще ні — це ціна відкритого circuit, проговорюю її вголос. Пауза секунд п'ять — звичайне питання спрацьовує як probe, і circuit закривається. Навіщо це все: побачити спроєктовану відмову наживо — збій не 500 і не 8 секунд, а швидка ввічлива заглушка зі слідом у лозі. [Ведучому: заміряй латентність збою на екрані. Перший збій після підняття — холодний шлях, ~сотні мс, не «мілісекунди»: прогрів іде успішним шляхом, шлях збою лишається холодним — прожени __fail_503 двічі, другий буде ~50–60 мс. Передумова — num_retries: 0 у конфізі gateway, інакше «швидкий збій» триватиме 8 секунд. Probe — звичайне повідомлення, не маркер. Лічильник на w4 не віддається нічим — показуй діф коду. Успішний fallback «основна впала — резерв відповів» на mock показати неможливо: маркер їде в тексті — падають обидва елементи ланцюга; проговори як межу стенда. Retry у курсі свідомо не реалізований.]</a:t>
             </a:r>
             <a:endParaRPr lang="en-US" dirty="0"/>
           </a:p>
@@ -1494,7 +1494,7 @@
           <a:p>
             <a:r>
               <a:rPr lang="en-US" dirty="0"/>
-              <a:t/>
+              <a:t>Домовимось про результат уроку конкретними діями. Після сьогоднішнього ви зможете: винести виклик моделі у функцію, яка повертає успіх або невдачу, — збій стане значенням, з яким працює логіка, а не аварією, що летить крізь стек. Побудувати fallback-ланцюг, де кожен перехід лічиться, а в лог їде модель, яка реально відповіла. Віддати користувачу ввічливу заглушку замість 500-ки — і чесний 503 у лог, щоб моніторинг не осліп під час інциденту. Влаштувати керований інцидент через __fail_503 і переконатися, що збій коштує мілісекунди, а не секунди прихованих ретраїв. Пояснити одним реченням різницю між retry, fallback і circuit breaker. А для охочих — зібрати circuit breaker з half-open і на власні очі побачити, чому без half-open він перетворюється на самостріл. Кожен пункт перевіримо руками ще сьогодні — у лабораторній.</a:t>
             </a:r>
             <a:endParaRPr lang="en-US" dirty="0"/>
           </a:p>
@@ -1582,7 +1582,7 @@
           <a:p>
             <a:r>
               <a:rPr lang="en-US" dirty="0"/>
-              <a:t/>
+              <a:t>Лабораторна — інцидент на замовлення: три обов'язкові кроки і один опційний. Крок перший: побудувати ланцюг — винести виклик моделі в CallGateway, щоб ok і fail були значеннями, додати цикл по ланцюгу і лічильник fallback-переходів. Крок другий: влаштувати інцидент — __fail_503 у чат. Обидві спроби ланцюга падають: маркер їде в тексті користувача, а обидва елементи — той самий mock, це межа стенда. Користувач отримує ввічливу заглушку за мілісекунди, а не 500 після 8 секунд; перехід порахований — лічильник видно в діфі коду, плитка оживе на тижні 5. Успішний сценарій «основна впала — резерв відповів» на mock не відтворюється — тож переконайтеся по коду, що при ok від другого елемента в лог їде саме модель, яка реально відповіла. Крок третій: перевірити слід — статуси збоїв у лозі, лічильник росте. Проговоріть: які три питання ви поставите цим даним на постмортемі. І опційний четвертий: circuit breaker — 3 збої → open, запити оминають модель без очікування; почекати кілька секунд → пробний запит → circuit закрився. Обов'язково відтворіть самостріл: закоментуйте half-open і подивіться, як «одужалий» провайдер лишається заблокованим. [Ведучому: перед показом — num_retries: 0 у конфізі gateway; латентність збою заміряй на екрані; probe — звичайне повідомлення, не маркер.]</a:t>
             </a:r>
             <a:endParaRPr lang="en-US" dirty="0"/>
           </a:p>
@@ -1670,7 +1670,7 @@
           <a:p>
             <a:r>
               <a:rPr lang="en-US" dirty="0"/>
-              <a:t/>
+              <a:t>Зафіксуємо, що демо довело. Перше: збій — більше не 500-ка. На __fail_503 користувач отримав ввічливу заглушку, чат лишився живим, а відмова стала спроєктованою, а не випадковою. Друге: збій швидкий — мілісекунди, а не вісім секунд прихованих ретраїв. Reliability-логіка живе в одному місці, у сервісі, а в конфізі gateway стоїть num_retries: 0. Третє: інцидент лишив слід — чесний 503 у лозі, а не 200 з ввічливим текстом, і лічильник переходів, який видно в коді. Разом це і є керованість падіння: план Б, спроєктована відмова, докази в даних. І чесна межа стенда: успішний fallback — «основна впала, резерв відповів» — на mock не показати, бо маркер їде в тексті і валить обидва елементи ланцюга. Механіка переходу при цьому справжня і видима в коді — з реальним ключем вона запрацює без змін.</a:t>
             </a:r>
             <a:endParaRPr lang="en-US" dirty="0"/>
           </a:p>
@@ -1758,7 +1758,7 @@
           <a:p>
             <a:r>
               <a:rPr lang="en-US" dirty="0"/>
-              <a:t/>
+              <a:t>Перш ніж розійтися — чесна перевірка без оцінок. Обов'язкова доріжка: __fail_503 не дає 500 — дає ввічливу заглушку. Fallback-перехід відбувається і лічиться — лічильник у діфі коду, а по коду перевірено, що при ok від резерву в лог їде модель, яка реально відповіла. Збій коштує мілісекунди, а не секунди прихованих ретраїв. І можете пояснити retry, fallback і circuit breaker одним реченням кожен. Якщо десь завагалися — повертайтеся у відповідний блок уроку. І пригадайте з минулих тижнів, без підглядання: чому промпт — частина ключа кешу і який баг це прибирає — це урок 5; що дає атрибуція вартості, чого не дає загальна сума — урок 4; чому активну версію промпта ніколи не редагують на місці — урок 2. Питання, які лишилися, — несіть у канал потоку або на Q&amp;A.</a:t>
             </a:r>
             <a:endParaRPr lang="en-US" dirty="0"/>
           </a:p>
@@ -1846,7 +1846,7 @@
           <a:p>
             <a:r>
               <a:rPr lang="en-US" dirty="0"/>
-              <a:t/>
+              <a:t>П'ять способів зіпсувати собі тиждень надійності — усі перевірені. Retry без backoff і бюджету — це DDoS власного провайдера в найгірший момент: 429 означає «пригальмуйте», а не «стукайте частіше». Circuit breaker без half-open — самостріл: outage довший за реальний, перевірено на собі — система відбиває вже здорового провайдера до кінця таймера. Приховані ретраї в кількох шарах одночасно: бюджети часу перемножуються, і «швидка відмова» триває пів хвилини — reliability-логіка має жити в одному місці, у вашому сервісі. 500 користувачу як «стратегія» деградації: відмова — це теж інтерфейс, її проєктують, а не залишають на волю стек-трейса. І тестувати reliability лише на реальних інцидентах: керований збій у mock коштує хвилину і відтворюється в CI. Надійність, яку не можна відтворити на замовлення, — це надія, а не інженерія.</a:t>
             </a:r>
             <a:endParaRPr lang="en-US" dirty="0"/>
           </a:p>
@@ -1934,7 +1934,7 @@
           <a:p>
             <a:r>
               <a:rPr lang="en-US" dirty="0"/>
-              <a:t/>
+              <a:t>Домашнє завдання. Обов'язково, до наступного уроку, без здачі: закріпити лабу — __fail_503, fallback, у найгіршому разі ввічлива заглушка; переконатися, що збій швидкий — мілісекунди — і залишає чесний статус у лозі; і проговорити свою драбину деградації: що можна віддати з кешу, де чесно відмовити. Опційно — circuit breaker: 3 збої → open на 30 секунд, обов'язково з half-open — пробний запит раз на приблизно 5 секунд, — інакше сам собі влаштуєш outage. І про ДЗ тижня: воно здається після наступного уроку. ДЗ тижня 4 об'єднує надійність і безпеку: сьогоднішній fallback із деградацією — вже у вас в руках, після наступного уроку додасться черга підтверджень для незворотних дій — і тиждень здається одним PR. Критерії — у файлі ДЗ після наступного уроку.</a:t>
             </a:r>
             <a:endParaRPr lang="en-US" dirty="0"/>
           </a:p>
@@ -2022,7 +2022,7 @@
           <a:p>
             <a:r>
               <a:rPr lang="en-US" dirty="0"/>
-              <a:t/>
+              <a:t>Підсумуємо. Reliability — не про те, «щоб не падало». Падатиме: чужа інфраструктура дає стрибки latency, 429 у пік і 5xx, і це нормальний режим роботи інтернету, а не аномалія. Питання лише в тому, чи падіння кероване. Перший крок до керованості — зробити збій значенням, а не винятком: CallGateway повертає ok замість того, щоб кидати, і саме тому з викликів стало можливо будувати ланцюги. Retry і fallback вирішують різні задачі: ще раз туди само — на минущих збоях, обов'язково з паузою і бюджетом; в інше місце — коли провайдер лежить. Порядок у нас однозначний: спершу fallback, і бюджет часу — на все разом. Деградація має сходинки, і ввічлива заглушка — остання з них, а не єдина; вона ж єдине місце сьогоднішнього уроку, де рішення ухвалює не інженер, а продукт: що чесніше сказати користувачу. Але статус усередину завжди чесний — заглушка з кодом 200 робить моніторинг сліпим рівно тоді, коли він потрібен. І останнє: інцидент без сліду в метриках повториться, тому лічильник переходів і чесні статуси збоїв — частина механізму, а не звітності. Наступний урок — safety, guardrails і human-in-the-loop. Система переживає збій провайдера; далі — збої іншого роду, коли шкоду завдає не інфраструктура, а зміст. Injection, витік даних і незворотні дії, які мусить підтвердити людина — та сама «дірка», яку ми свідомо лишили відкритою на уроці 6. До зустрічі.</a:t>
             </a:r>
             <a:endParaRPr lang="en-US" dirty="0"/>
           </a:p>
@@ -2110,7 +2110,7 @@
           <a:p>
             <a:r>
               <a:rPr lang="en-US" dirty="0"/>
-              <a:t/>
+              <a:t>Маршрут такий. Спершу проблема: наша фіча залежить від чужої інфраструктури, і падіння — це нормальний режим, а не аномалія. Далі словник рішень: retry проти fallback, правильний порядок і бюджет часу згори вниз. Потім три шматки коду: CallGateway, де збій стає значенням; fallback-ланцюг з лічильником переходів; і ввічлива деградація з чесним статусом у лозі. Окремий блок — про право на повтор, лавину ретраїв і сходинки деградації: між нормою і заглушкою є проміжні варіанти. Блок про num_retries: 0 пояснює, чому помилки мають бути швидкими і чому reliability-логіка живе в одному місці. Опційний блок — circuit breaker з обов'язковим half-open. Далі слід у метриках, місток до демо, лабораторна з інцидентом на замовлення, антипатерни і домашнє завдання. [Ведучому: §02 теорії стискай до ~3 хвилин — backoff по реченню, історію з практики — до формули.]</a:t>
             </a:r>
             <a:endParaRPr lang="en-US" dirty="0"/>
           </a:p>
@@ -2198,7 +2198,7 @@
           <a:p>
             <a:r>
               <a:rPr lang="en-US" dirty="0"/>
-              <a:t/>
+              <a:t>Домовимось про шість слів. Retry — повторити ще раз туди само; доречний на минущих збоях і обов'язково з паузою. Fallback — піти в інше місце: на іншу модель або провайдера, за явно оголошеним порядком. Backoff — та сама пауза перед повтором: фіксована, експоненційна або з джитером, тобто випадковим зсувом. Graceful degradation — ввічлива деградація: замість помилки користувач отримує чесну відповідь нижчої якості. Circuit breaker — запобіжник, який після кількох збоїв перестає стукати в мертвий сервіс; він має три стани, і сьогодні ми їх побачимо. Half-open — стан пробного запиту: breaker пускає один запит подивитися, чи ожив провайдер. Без half-open запобіжник перетворюється на самостріл — і це ми теж розберемо.</a:t>
             </a:r>
             <a:endParaRPr lang="en-US" dirty="0"/>
           </a:p>
@@ -2286,7 +2286,7 @@
           <a:p>
             <a:r>
               <a:rPr lang="en-US" dirty="0"/>
-              <a:t/>
+              <a:t>Ваша LLM-фіча залежить від інфраструктури, якою ви не керуєте, — це четверта властивість з уроку 1, і сьогодні її черга. 429 у пік трафіку, 5xx під час інциденту провайдера, стрибки latency — це не аномалії, це нормальний режим роботи інтернету. Ненормальним є те, як більшість систем на це реагує: гола 500-ка користувачу і тиша в логах. Окрема підступна категорія — тихі смерті: найгірші збої не дають 5xx. Я розбирав інцидент, де голосовий агент просто замовкав на другій хвилині розмови — жодної помилки, жодного алерту: з'єднання тихо вмирало десь по дорозі, бо ніхто не слав keepalive частіше, ніж мережа встигала «прибрати» неактивний конект. Схема «запит-відповідь» такі речі не ловить у принципі — для довгих і стрімінгових сесій потрібен heartbeat, а не надія. У нашому контурі сесії короткі, тож сьогодні ця категорія лишається згадкою, але тримайте її в голові, щойно з'явиться streaming. І головне переформулювання уроку: reliability — це не «щоб не падало». Падатиме. Reliability — це щоб падіння було керованим: з планом Б, з ввічливою відмовою в найгіршому разі і зі слідами в метриках. До сьогодні збій провайдера означав чесну катастрофу — ви бачили це в лабі уроку 1. Сьогодні між збоєм і користувачем з'являються два шари: спроба піти в інше місце і спроєктована відмова, якщо не вийшло.</a:t>
             </a:r>
             <a:endParaRPr lang="en-US" dirty="0"/>
           </a:p>
@@ -2374,7 +2374,7 @@
           <a:p>
             <a:r>
               <a:rPr lang="en-US" dirty="0"/>
-              <a:t/>
+              <a:t>Два слова, які часто змішують, — а це різні механізми з різною механікою відмови. Retry — ще раз туди само; доречний на минущих збоях: мережевий глюк, 429. Обов'язкові атрибути — backoff і бюджет спроб; головний ризик — DDoS власного провайдера. Fallback — в інше місце, до іншої моделі чи провайдера; доречний, коли провайдер лежить або деградує; вимагає явного порядку ланцюга; ризик — непомітна різниця якості моделей. Правильний порядок теж має значення: спершу короткий retry — раптом глюк; потім fallback — схоже, надовго; і на все разом бюджет часу, бо користувач чекає відповіді, а не вашої боротьби за неї. Бюджет згори вниз, як із таймаутами інструментів минулого уроку: спершу «скільки чекає користувач», потім — скільки з цього можна витратити на спроби. І чесне уточнення про наш контур: retry в коді курсу свідомо не будуємо — на mock він нічого не додає, бо «ще раз туди само» і «в інше місце» ведуть в один процес. Тому будуємо fallback, а retry тримаємо в голові поруч: у проді порядок саме такий. З практики, як виглядає доросла форма цього рішення — з реального фіксу на голосовій платформі, яку я супроводжую: звіт про результат дзвінка йшов у зовнішню систему, і мережа інколи його губила. Фінальна політика — три частини, кожна обов'язкова: обмежений retry з backoff, а після вичерпання спроб — durable термінальний стан: чесний запис «помилка, спроби вичерпано», який видно і людині, і метрикам. Найгірша альтернатива — не відсутність ретраїв, а нескінченні: операція, що вічно «ще пробує», не з'являється в жодному звіті як проблема. І дотична знахідка: кожна термінальна гілка — успіх, помилка, таймаут, скасування — має звільняти захоплені ресурси.</a:t>
             </a:r>
             <a:endParaRPr lang="en-US" dirty="0"/>
           </a:p>
@@ -2462,7 +2462,7 @@
           <a:p>
             <a:r>
               <a:rPr lang="en-US" dirty="0"/>
-              <a:t/>
+              <a:t>Про сам backoff — паузу між спробами — варто знати три класичні форми. Фіксований: «чекай секунду» — найпростіший, але на масовому збої всі клієнти ретраять синхронно, хвилями. Експоненційний: секунда, дві, чотири — дає системі, що задихається, дедалі більше повітря. І jitter — випадковий зсув до паузи, який розсинхронізовує натовп: без нього тисяча клієнтів, що впали одночасно, повернеться теж одночасно, і друга хвиля доб'є те, що вижило після першої. Для нашого стека з одним користувачем це теорія; для будь-якого проду — перше, про що питають на розборі ретрай-шторму. І типова помилка, яка з цього випливає: retry без backoff і без бюджету. Провайдер повернув 429 «пригальмуйте» — а ви у відповідь потроїли трафік ретраями. Тепер ліміти вичерпуються ще швидше, і ваш власний код став другою половиною інциденту. Кожен retry має чекати перед спробою і мати стелю кількості. [Ведучому: §02 стискай до ~3 хвилин — по реченню на кожну форму backoff.]</a:t>
             </a:r>
             <a:endParaRPr lang="en-US" dirty="0"/>
           </a:p>
@@ -2550,7 +2550,7 @@
           <a:p>
             <a:r>
               <a:rPr lang="en-US" dirty="0"/>
-              <a:t/>
+              <a:t>Перший крок сьогоднішньої роботи непомітний, але він робить можливим усе інше: виклик моделі виноситься у функцію, яка повертає успіх або невдачу, а не кидає виняток. CallGateway робить один POST на /v1/chat/completions через gateway і віддає кортеж: ok, відповідь, інструмент, токени, статус. Якщо статус чотириста і вище — ok дорівнює false; якщо мережа впала або gateway лежить — теж false, зі статусом нуль. Чому це важливо: збій перестає бути аварією, що летить крізь стек, і стає звичайним значенням, з яким працює логіка. «Не вийшло» — це legitimate результат виклику, один із двох очікуваних. Саме навколо такої функції можна будувати ланцюги, лічити переходи і ухвалювати рішення — з винятком у польоті нічого цього зробити не можна. І зверніть увагу на status: 0 у гілці catch: «відповіді не було взагалі» відрізняється від «відповідь була, але 5xx» — і в лозі ці випадки теж мають розрізнятися.</a:t>
             </a:r>
             <a:endParaRPr lang="en-US" dirty="0"/>
           </a:p>
@@ -2638,7 +2638,7 @@
           <a:p>
             <a:r>
               <a:rPr lang="en-US" dirty="0"/>
-              <a:t/>
+              <a:t>Тепер сам ланцюг — цикл по черзі кандидатів. Політика з уроку 3 — «у разі збою вниз, до дешевшої моделі» — набуває робочої форми: перший елемент — модель, обрана роутером, другий — резерв. На mock резервного провайдера немає, тож роль резерву в коді чесно грає той самий mock; з реальним ключем на друге місце стає інша модель чи провайдер — і ваш записаний на уроці 3 порядок вставляється сюди без змін. Три операційні рішення. Перше: кожен перехід далі за ланцюгом — інкремент лічильника Fallbacks. Fallback, що спрацював непомітно, — це замаскована проблема: користувачі вже обслуговуються резервом, а ви про це не знаєте. Друге: model = chain[i] — у лог їде та модель, яка реально відповіла, а не та, яку обрав роутер. Інакше вся аналітика вартості й якості тижня 2 почне брехати рівно в найцікавіші моменти. Уточнення для читача лога: коли впали всі елементи ланцюга, у рядку лишається модель, обрана роутером, зі статусом 503 — «хто реально відповів» на повному падінні просто не існує. Третє: на mock другий елемент ланцюга — той самий mock, і це чесне навчальне обмеження: механіка переходу справжня, а «резервного дата-центру» в компоузі немає. [Ведучому: успішний fallback «основна впала — резерв відповів» на mock показати неможливо — маркер їде в тексті користувача, тож падають обидва елементи; показуй перехід у діфі коду і проговорюй як межу стенда.]</a:t>
             </a:r>
             <a:endParaRPr lang="en-US" dirty="0"/>
           </a:p>
@@ -3871,7 +3871,7 @@
         </p:nvSpPr>
         <p:spPr>
           <a:xfrm>
-            <a:off x="1280160" y="1024128"/>
+            <a:off x="1280160" y="1193140"/>
             <a:ext cx="777240" cy="256032"/>
           </a:xfrm>
           <a:prstGeom prst="roundRect">
@@ -3893,7 +3893,7 @@
         </p:nvSpPr>
         <p:spPr>
           <a:xfrm>
-            <a:off x="1280160" y="1024128"/>
+            <a:off x="1280160" y="1193140"/>
             <a:ext cx="777240" cy="256032"/>
           </a:xfrm>
           <a:prstGeom prst="rect">
@@ -5011,13 +5011,13 @@
       </p:graphicFrame>
       <p:sp>
         <p:nvSpPr>
-          <p:cNvPr id="8" name="Shape 4"/>
-          <p:cNvSpPr/>
-          <p:nvPr/>
-        </p:nvSpPr>
-        <p:spPr>
-          <a:xfrm>
-            <a:off x="566928" y="4434840"/>
+          <p:cNvPr id="9" name="Shape 4"/>
+          <p:cNvSpPr/>
+          <p:nvPr/>
+        </p:nvSpPr>
+        <p:spPr>
+          <a:xfrm>
+            <a:off x="566928" y="4754880"/>
             <a:ext cx="11064240" cy="1325880"/>
           </a:xfrm>
           <a:prstGeom prst="roundRect">
@@ -5033,13 +5033,13 @@
       </p:sp>
       <p:sp>
         <p:nvSpPr>
-          <p:cNvPr id="9" name="Text 5"/>
-          <p:cNvSpPr/>
-          <p:nvPr/>
-        </p:nvSpPr>
-        <p:spPr>
-          <a:xfrm>
-            <a:off x="786384" y="4562856"/>
+          <p:cNvPr id="10" name="Text 5"/>
+          <p:cNvSpPr/>
+          <p:nvPr/>
+        </p:nvSpPr>
+        <p:spPr>
+          <a:xfrm>
+            <a:off x="786384" y="4882896"/>
             <a:ext cx="10625328" cy="219456"/>
           </a:xfrm>
           <a:prstGeom prst="rect">
@@ -5072,13 +5072,13 @@
       </p:sp>
       <p:sp>
         <p:nvSpPr>
-          <p:cNvPr id="10" name="Text 6"/>
-          <p:cNvSpPr/>
-          <p:nvPr/>
-        </p:nvSpPr>
-        <p:spPr>
-          <a:xfrm>
-            <a:off x="786384" y="4818888"/>
+          <p:cNvPr id="11" name="Text 6"/>
+          <p:cNvSpPr/>
+          <p:nvPr/>
+        </p:nvSpPr>
+        <p:spPr>
+          <a:xfrm>
+            <a:off x="786384" y="5138928"/>
             <a:ext cx="10625328" cy="813816"/>
           </a:xfrm>
           <a:prstGeom prst="rect">
@@ -5278,7 +5278,7 @@
         </p:nvSpPr>
         <p:spPr>
           <a:xfrm>
-            <a:off x="1280160" y="1024128"/>
+            <a:off x="1280160" y="1193140"/>
             <a:ext cx="777240" cy="256032"/>
           </a:xfrm>
           <a:prstGeom prst="roundRect">
@@ -5300,7 +5300,7 @@
         </p:nvSpPr>
         <p:spPr>
           <a:xfrm>
-            <a:off x="1280160" y="1024128"/>
+            <a:off x="1280160" y="1193140"/>
             <a:ext cx="777240" cy="256032"/>
           </a:xfrm>
           <a:prstGeom prst="rect">
@@ -5357,7 +5357,7 @@
       </p:pic>
       <p:sp>
         <p:nvSpPr>
-          <p:cNvPr id="7" name="Shape 4"/>
+          <p:cNvPr id="8" name="Shape 4"/>
           <p:cNvSpPr/>
           <p:nvPr/>
         </p:nvSpPr>
@@ -5379,7 +5379,7 @@
       </p:sp>
       <p:sp>
         <p:nvSpPr>
-          <p:cNvPr id="8" name="Text 5"/>
+          <p:cNvPr id="9" name="Text 5"/>
           <p:cNvSpPr/>
           <p:nvPr/>
         </p:nvSpPr>
@@ -5418,7 +5418,7 @@
       </p:sp>
       <p:sp>
         <p:nvSpPr>
-          <p:cNvPr id="9" name="Shape 6"/>
+          <p:cNvPr id="10" name="Shape 6"/>
           <p:cNvSpPr/>
           <p:nvPr/>
         </p:nvSpPr>
@@ -5441,7 +5441,7 @@
       </p:sp>
       <p:sp>
         <p:nvSpPr>
-          <p:cNvPr id="10" name="Shape 7"/>
+          <p:cNvPr id="11" name="Shape 7"/>
           <p:cNvSpPr/>
           <p:nvPr/>
         </p:nvSpPr>
@@ -5461,7 +5461,7 @@
       </p:sp>
       <p:sp>
         <p:nvSpPr>
-          <p:cNvPr id="11" name="Shape 8"/>
+          <p:cNvPr id="12" name="Shape 8"/>
           <p:cNvSpPr/>
           <p:nvPr/>
         </p:nvSpPr>
@@ -5483,7 +5483,7 @@
       </p:sp>
       <p:sp>
         <p:nvSpPr>
-          <p:cNvPr id="12" name="Text 9"/>
+          <p:cNvPr id="13" name="Text 9"/>
           <p:cNvSpPr/>
           <p:nvPr/>
         </p:nvSpPr>
@@ -5522,7 +5522,7 @@
       </p:sp>
       <p:sp>
         <p:nvSpPr>
-          <p:cNvPr id="13" name="Shape 10"/>
+          <p:cNvPr id="14" name="Shape 10"/>
           <p:cNvSpPr/>
           <p:nvPr/>
         </p:nvSpPr>
@@ -5545,7 +5545,7 @@
       </p:sp>
       <p:sp>
         <p:nvSpPr>
-          <p:cNvPr id="14" name="Shape 11"/>
+          <p:cNvPr id="15" name="Shape 11"/>
           <p:cNvSpPr/>
           <p:nvPr/>
         </p:nvSpPr>
@@ -5565,7 +5565,7 @@
       </p:sp>
       <p:sp>
         <p:nvSpPr>
-          <p:cNvPr id="15" name="Shape 12"/>
+          <p:cNvPr id="16" name="Shape 12"/>
           <p:cNvSpPr/>
           <p:nvPr/>
         </p:nvSpPr>
@@ -5587,7 +5587,7 @@
       </p:sp>
       <p:sp>
         <p:nvSpPr>
-          <p:cNvPr id="16" name="Text 13"/>
+          <p:cNvPr id="17" name="Text 13"/>
           <p:cNvSpPr/>
           <p:nvPr/>
         </p:nvSpPr>
@@ -5626,7 +5626,7 @@
       </p:sp>
       <p:sp>
         <p:nvSpPr>
-          <p:cNvPr id="17" name="Shape 14"/>
+          <p:cNvPr id="18" name="Shape 14"/>
           <p:cNvSpPr/>
           <p:nvPr/>
         </p:nvSpPr>
@@ -5649,7 +5649,7 @@
       </p:sp>
       <p:sp>
         <p:nvSpPr>
-          <p:cNvPr id="18" name="Shape 15"/>
+          <p:cNvPr id="19" name="Shape 15"/>
           <p:cNvSpPr/>
           <p:nvPr/>
         </p:nvSpPr>
@@ -5669,7 +5669,7 @@
       </p:sp>
       <p:sp>
         <p:nvSpPr>
-          <p:cNvPr id="19" name="Shape 16"/>
+          <p:cNvPr id="20" name="Shape 16"/>
           <p:cNvSpPr/>
           <p:nvPr/>
         </p:nvSpPr>
@@ -5691,7 +5691,7 @@
       </p:sp>
       <p:sp>
         <p:nvSpPr>
-          <p:cNvPr id="20" name="Text 17"/>
+          <p:cNvPr id="21" name="Text 17"/>
           <p:cNvSpPr/>
           <p:nvPr/>
         </p:nvSpPr>
@@ -5730,7 +5730,7 @@
       </p:sp>
       <p:sp>
         <p:nvSpPr>
-          <p:cNvPr id="21" name="Shape 18"/>
+          <p:cNvPr id="22" name="Shape 18"/>
           <p:cNvSpPr/>
           <p:nvPr/>
         </p:nvSpPr>
@@ -5752,7 +5752,7 @@
       </p:sp>
       <p:sp>
         <p:nvSpPr>
-          <p:cNvPr id="22" name="Shape 19"/>
+          <p:cNvPr id="23" name="Shape 19"/>
           <p:cNvSpPr/>
           <p:nvPr/>
         </p:nvSpPr>
@@ -5772,7 +5772,7 @@
       </p:sp>
       <p:sp>
         <p:nvSpPr>
-          <p:cNvPr id="23" name="Text 20"/>
+          <p:cNvPr id="24" name="Text 20"/>
           <p:cNvSpPr/>
           <p:nvPr/>
         </p:nvSpPr>
@@ -5811,7 +5811,7 @@
       </p:sp>
       <p:sp>
         <p:nvSpPr>
-          <p:cNvPr id="24" name="Text 21"/>
+          <p:cNvPr id="25" name="Text 21"/>
           <p:cNvSpPr/>
           <p:nvPr/>
         </p:nvSpPr>
@@ -5850,7 +5850,7 @@
       </p:sp>
       <p:sp>
         <p:nvSpPr>
-          <p:cNvPr id="25" name="Text 22"/>
+          <p:cNvPr id="26" name="Text 22"/>
           <p:cNvSpPr/>
           <p:nvPr/>
         </p:nvSpPr>
@@ -5892,7 +5892,7 @@
       </p:sp>
       <p:sp>
         <p:nvSpPr>
-          <p:cNvPr id="26" name="Shape 23"/>
+          <p:cNvPr id="27" name="Shape 23"/>
           <p:cNvSpPr/>
           <p:nvPr/>
         </p:nvSpPr>
@@ -5914,7 +5914,7 @@
       </p:sp>
       <p:sp>
         <p:nvSpPr>
-          <p:cNvPr id="27" name="Shape 24"/>
+          <p:cNvPr id="28" name="Shape 24"/>
           <p:cNvSpPr/>
           <p:nvPr/>
         </p:nvSpPr>
@@ -5934,7 +5934,7 @@
       </p:sp>
       <p:sp>
         <p:nvSpPr>
-          <p:cNvPr id="28" name="Text 25"/>
+          <p:cNvPr id="29" name="Text 25"/>
           <p:cNvSpPr/>
           <p:nvPr/>
         </p:nvSpPr>
@@ -5973,7 +5973,7 @@
       </p:sp>
       <p:sp>
         <p:nvSpPr>
-          <p:cNvPr id="29" name="Text 26"/>
+          <p:cNvPr id="30" name="Text 26"/>
           <p:cNvSpPr/>
           <p:nvPr/>
         </p:nvSpPr>
@@ -6012,7 +6012,7 @@
       </p:sp>
       <p:sp>
         <p:nvSpPr>
-          <p:cNvPr id="30" name="Text 27"/>
+          <p:cNvPr id="31" name="Text 27"/>
           <p:cNvSpPr/>
           <p:nvPr/>
         </p:nvSpPr>
@@ -6054,7 +6054,7 @@
       </p:sp>
       <p:sp>
         <p:nvSpPr>
-          <p:cNvPr id="31" name="Shape 28"/>
+          <p:cNvPr id="32" name="Shape 28"/>
           <p:cNvSpPr/>
           <p:nvPr/>
         </p:nvSpPr>
@@ -6076,7 +6076,7 @@
       </p:sp>
       <p:sp>
         <p:nvSpPr>
-          <p:cNvPr id="32" name="Shape 29"/>
+          <p:cNvPr id="33" name="Shape 29"/>
           <p:cNvSpPr/>
           <p:nvPr/>
         </p:nvSpPr>
@@ -6096,7 +6096,7 @@
       </p:sp>
       <p:sp>
         <p:nvSpPr>
-          <p:cNvPr id="33" name="Text 30"/>
+          <p:cNvPr id="34" name="Text 30"/>
           <p:cNvSpPr/>
           <p:nvPr/>
         </p:nvSpPr>
@@ -6135,7 +6135,7 @@
       </p:sp>
       <p:sp>
         <p:nvSpPr>
-          <p:cNvPr id="34" name="Text 31"/>
+          <p:cNvPr id="35" name="Text 31"/>
           <p:cNvSpPr/>
           <p:nvPr/>
         </p:nvSpPr>
@@ -6174,7 +6174,7 @@
       </p:sp>
       <p:sp>
         <p:nvSpPr>
-          <p:cNvPr id="35" name="Text 32"/>
+          <p:cNvPr id="36" name="Text 32"/>
           <p:cNvSpPr/>
           <p:nvPr/>
         </p:nvSpPr>
@@ -6216,7 +6216,7 @@
       </p:sp>
       <p:sp>
         <p:nvSpPr>
-          <p:cNvPr id="36" name="Shape 33"/>
+          <p:cNvPr id="37" name="Shape 33"/>
           <p:cNvSpPr/>
           <p:nvPr/>
         </p:nvSpPr>
@@ -6238,7 +6238,7 @@
       </p:sp>
       <p:sp>
         <p:nvSpPr>
-          <p:cNvPr id="37" name="Text 34"/>
+          <p:cNvPr id="38" name="Text 34"/>
           <p:cNvSpPr/>
           <p:nvPr/>
         </p:nvSpPr>
@@ -6277,7 +6277,7 @@
       </p:sp>
       <p:sp>
         <p:nvSpPr>
-          <p:cNvPr id="38" name="Text 35"/>
+          <p:cNvPr id="39" name="Text 35"/>
           <p:cNvSpPr/>
           <p:nvPr/>
         </p:nvSpPr>
@@ -7829,7 +7829,7 @@
       </p:graphicFrame>
       <p:sp>
         <p:nvSpPr>
-          <p:cNvPr id="8" name="Shape 4"/>
+          <p:cNvPr id="9" name="Shape 4"/>
           <p:cNvSpPr/>
           <p:nvPr/>
         </p:nvSpPr>
@@ -7851,7 +7851,7 @@
       </p:sp>
       <p:sp>
         <p:nvSpPr>
-          <p:cNvPr id="9" name="Text 5"/>
+          <p:cNvPr id="10" name="Text 5"/>
           <p:cNvSpPr/>
           <p:nvPr/>
         </p:nvSpPr>
@@ -8136,7 +8136,7 @@
       </p:pic>
       <p:sp>
         <p:nvSpPr>
-          <p:cNvPr id="7" name="Shape 4"/>
+          <p:cNvPr id="8" name="Shape 4"/>
           <p:cNvSpPr/>
           <p:nvPr/>
         </p:nvSpPr>
@@ -8163,7 +8163,7 @@
       </p:sp>
       <p:sp>
         <p:nvSpPr>
-          <p:cNvPr id="8" name="Text 5"/>
+          <p:cNvPr id="9" name="Text 5"/>
           <p:cNvSpPr/>
           <p:nvPr/>
         </p:nvSpPr>
@@ -8285,7 +8285,7 @@
       </p:sp>
       <p:sp>
         <p:nvSpPr>
-          <p:cNvPr id="9" name="Shape 6"/>
+          <p:cNvPr id="10" name="Shape 6"/>
           <p:cNvSpPr/>
           <p:nvPr/>
         </p:nvSpPr>
@@ -8307,7 +8307,7 @@
       </p:sp>
       <p:sp>
         <p:nvSpPr>
-          <p:cNvPr id="10" name="Text 7"/>
+          <p:cNvPr id="11" name="Text 7"/>
           <p:cNvSpPr/>
           <p:nvPr/>
         </p:nvSpPr>
@@ -8346,7 +8346,7 @@
       </p:sp>
       <p:sp>
         <p:nvSpPr>
-          <p:cNvPr id="11" name="Text 8"/>
+          <p:cNvPr id="12" name="Text 8"/>
           <p:cNvSpPr/>
           <p:nvPr/>
         </p:nvSpPr>
@@ -8388,7 +8388,7 @@
       </p:sp>
       <p:sp>
         <p:nvSpPr>
-          <p:cNvPr id="12" name="Shape 9"/>
+          <p:cNvPr id="13" name="Shape 9"/>
           <p:cNvSpPr/>
           <p:nvPr/>
         </p:nvSpPr>
@@ -8410,7 +8410,7 @@
       </p:sp>
       <p:sp>
         <p:nvSpPr>
-          <p:cNvPr id="13" name="Text 10"/>
+          <p:cNvPr id="14" name="Text 10"/>
           <p:cNvSpPr/>
           <p:nvPr/>
         </p:nvSpPr>
@@ -8449,7 +8449,7 @@
       </p:sp>
       <p:sp>
         <p:nvSpPr>
-          <p:cNvPr id="14" name="Text 11"/>
+          <p:cNvPr id="15" name="Text 11"/>
           <p:cNvSpPr/>
           <p:nvPr/>
         </p:nvSpPr>
@@ -8491,7 +8491,7 @@
       </p:sp>
       <p:sp>
         <p:nvSpPr>
-          <p:cNvPr id="15" name="Shape 12"/>
+          <p:cNvPr id="16" name="Shape 12"/>
           <p:cNvSpPr/>
           <p:nvPr/>
         </p:nvSpPr>
@@ -8513,7 +8513,7 @@
       </p:sp>
       <p:sp>
         <p:nvSpPr>
-          <p:cNvPr id="16" name="Text 13"/>
+          <p:cNvPr id="17" name="Text 13"/>
           <p:cNvSpPr/>
           <p:nvPr/>
         </p:nvSpPr>
@@ -8798,7 +8798,7 @@
       </p:pic>
       <p:sp>
         <p:nvSpPr>
-          <p:cNvPr id="7" name="Shape 4"/>
+          <p:cNvPr id="8" name="Shape 4"/>
           <p:cNvSpPr/>
           <p:nvPr/>
         </p:nvSpPr>
@@ -8825,7 +8825,7 @@
       </p:sp>
       <p:sp>
         <p:nvSpPr>
-          <p:cNvPr id="8" name="Text 5"/>
+          <p:cNvPr id="9" name="Text 5"/>
           <p:cNvSpPr/>
           <p:nvPr/>
         </p:nvSpPr>
@@ -8904,7 +8904,7 @@
       </p:sp>
       <p:sp>
         <p:nvSpPr>
-          <p:cNvPr id="9" name="Shape 6"/>
+          <p:cNvPr id="10" name="Shape 6"/>
           <p:cNvSpPr/>
           <p:nvPr/>
         </p:nvSpPr>
@@ -8926,7 +8926,7 @@
       </p:sp>
       <p:sp>
         <p:nvSpPr>
-          <p:cNvPr id="10" name="Text 7"/>
+          <p:cNvPr id="11" name="Text 7"/>
           <p:cNvSpPr/>
           <p:nvPr/>
         </p:nvSpPr>
@@ -8965,7 +8965,7 @@
       </p:sp>
       <p:sp>
         <p:nvSpPr>
-          <p:cNvPr id="11" name="Text 8"/>
+          <p:cNvPr id="12" name="Text 8"/>
           <p:cNvSpPr/>
           <p:nvPr/>
         </p:nvSpPr>
@@ -9007,7 +9007,7 @@
       </p:sp>
       <p:sp>
         <p:nvSpPr>
-          <p:cNvPr id="12" name="Shape 9"/>
+          <p:cNvPr id="13" name="Shape 9"/>
           <p:cNvSpPr/>
           <p:nvPr/>
         </p:nvSpPr>
@@ -9029,7 +9029,7 @@
       </p:sp>
       <p:sp>
         <p:nvSpPr>
-          <p:cNvPr id="13" name="Text 10"/>
+          <p:cNvPr id="14" name="Text 10"/>
           <p:cNvSpPr/>
           <p:nvPr/>
         </p:nvSpPr>
@@ -9071,7 +9071,7 @@
       </p:sp>
       <p:sp>
         <p:nvSpPr>
-          <p:cNvPr id="14" name="Text 11"/>
+          <p:cNvPr id="15" name="Text 11"/>
           <p:cNvSpPr/>
           <p:nvPr/>
         </p:nvSpPr>
@@ -9274,7 +9274,7 @@
         </p:nvSpPr>
         <p:spPr>
           <a:xfrm>
-            <a:off x="1280160" y="1024128"/>
+            <a:off x="1280160" y="1193140"/>
             <a:ext cx="777240" cy="256032"/>
           </a:xfrm>
           <a:prstGeom prst="roundRect">
@@ -9296,7 +9296,7 @@
         </p:nvSpPr>
         <p:spPr>
           <a:xfrm>
-            <a:off x="1280160" y="1024128"/>
+            <a:off x="1280160" y="1193140"/>
             <a:ext cx="777240" cy="256032"/>
           </a:xfrm>
           <a:prstGeom prst="rect">
@@ -9335,7 +9335,7 @@
         </p:nvSpPr>
         <p:spPr>
           <a:xfrm>
-            <a:off x="2167128" y="1024128"/>
+            <a:off x="2167128" y="1193140"/>
             <a:ext cx="864108" cy="256032"/>
           </a:xfrm>
           <a:prstGeom prst="roundRect">
@@ -9357,7 +9357,7 @@
         </p:nvSpPr>
         <p:spPr>
           <a:xfrm>
-            <a:off x="2167128" y="1024128"/>
+            <a:off x="2167128" y="1193140"/>
             <a:ext cx="864108" cy="256032"/>
           </a:xfrm>
           <a:prstGeom prst="rect">
@@ -9414,7 +9414,7 @@
       </p:pic>
       <p:sp>
         <p:nvSpPr>
-          <p:cNvPr id="9" name="Shape 6"/>
+          <p:cNvPr id="10" name="Shape 6"/>
           <p:cNvSpPr/>
           <p:nvPr/>
         </p:nvSpPr>
@@ -9441,7 +9441,7 @@
       </p:sp>
       <p:sp>
         <p:nvSpPr>
-          <p:cNvPr id="10" name="Text 7"/>
+          <p:cNvPr id="11" name="Text 7"/>
           <p:cNvSpPr/>
           <p:nvPr/>
         </p:nvSpPr>
@@ -9560,7 +9560,7 @@
       </p:sp>
       <p:sp>
         <p:nvSpPr>
-          <p:cNvPr id="11" name="Shape 8"/>
+          <p:cNvPr id="12" name="Shape 8"/>
           <p:cNvSpPr/>
           <p:nvPr/>
         </p:nvSpPr>
@@ -9582,7 +9582,7 @@
       </p:sp>
       <p:sp>
         <p:nvSpPr>
-          <p:cNvPr id="12" name="Text 9"/>
+          <p:cNvPr id="13" name="Text 9"/>
           <p:cNvSpPr/>
           <p:nvPr/>
         </p:nvSpPr>
@@ -9621,7 +9621,7 @@
       </p:sp>
       <p:sp>
         <p:nvSpPr>
-          <p:cNvPr id="13" name="Text 10"/>
+          <p:cNvPr id="14" name="Text 10"/>
           <p:cNvSpPr/>
           <p:nvPr/>
         </p:nvSpPr>
@@ -9663,7 +9663,7 @@
       </p:sp>
       <p:sp>
         <p:nvSpPr>
-          <p:cNvPr id="14" name="Shape 11"/>
+          <p:cNvPr id="15" name="Shape 11"/>
           <p:cNvSpPr/>
           <p:nvPr/>
         </p:nvSpPr>
@@ -9685,7 +9685,7 @@
       </p:sp>
       <p:sp>
         <p:nvSpPr>
-          <p:cNvPr id="15" name="Text 12"/>
+          <p:cNvPr id="16" name="Text 12"/>
           <p:cNvSpPr/>
           <p:nvPr/>
         </p:nvSpPr>
@@ -9724,7 +9724,7 @@
       </p:sp>
       <p:sp>
         <p:nvSpPr>
-          <p:cNvPr id="16" name="Text 13"/>
+          <p:cNvPr id="17" name="Text 13"/>
           <p:cNvSpPr/>
           <p:nvPr/>
         </p:nvSpPr>
@@ -9766,7 +9766,7 @@
       </p:sp>
       <p:sp>
         <p:nvSpPr>
-          <p:cNvPr id="17" name="Shape 14"/>
+          <p:cNvPr id="18" name="Shape 14"/>
           <p:cNvSpPr/>
           <p:nvPr/>
         </p:nvSpPr>
@@ -9788,7 +9788,7 @@
       </p:sp>
       <p:sp>
         <p:nvSpPr>
-          <p:cNvPr id="18" name="Text 15"/>
+          <p:cNvPr id="19" name="Text 15"/>
           <p:cNvSpPr/>
           <p:nvPr/>
         </p:nvSpPr>
@@ -9994,7 +9994,7 @@
         </p:nvSpPr>
         <p:spPr>
           <a:xfrm>
-            <a:off x="1280160" y="1024128"/>
+            <a:off x="1280160" y="1193140"/>
             <a:ext cx="777240" cy="256032"/>
           </a:xfrm>
           <a:prstGeom prst="roundRect">
@@ -10016,7 +10016,7 @@
         </p:nvSpPr>
         <p:spPr>
           <a:xfrm>
-            <a:off x="1280160" y="1024128"/>
+            <a:off x="1280160" y="1193140"/>
             <a:ext cx="777240" cy="256032"/>
           </a:xfrm>
           <a:prstGeom prst="rect">
@@ -10055,7 +10055,7 @@
         </p:nvSpPr>
         <p:spPr>
           <a:xfrm>
-            <a:off x="2167128" y="1024128"/>
+            <a:off x="2167128" y="1193140"/>
             <a:ext cx="864108" cy="256032"/>
           </a:xfrm>
           <a:prstGeom prst="roundRect">
@@ -10077,7 +10077,7 @@
         </p:nvSpPr>
         <p:spPr>
           <a:xfrm>
-            <a:off x="2167128" y="1024128"/>
+            <a:off x="2167128" y="1193140"/>
             <a:ext cx="864108" cy="256032"/>
           </a:xfrm>
           <a:prstGeom prst="rect">
@@ -10134,7 +10134,7 @@
       </p:pic>
       <p:sp>
         <p:nvSpPr>
-          <p:cNvPr id="9" name="Shape 6"/>
+          <p:cNvPr id="10" name="Shape 6"/>
           <p:cNvSpPr/>
           <p:nvPr/>
         </p:nvSpPr>
@@ -10159,7 +10159,7 @@
       </p:sp>
       <p:sp>
         <p:nvSpPr>
-          <p:cNvPr id="10" name="Text 7"/>
+          <p:cNvPr id="11" name="Text 7"/>
           <p:cNvSpPr/>
           <p:nvPr/>
         </p:nvSpPr>
@@ -10198,7 +10198,7 @@
       </p:sp>
       <p:sp>
         <p:nvSpPr>
-          <p:cNvPr id="11" name="Text 8"/>
+          <p:cNvPr id="12" name="Text 8"/>
           <p:cNvSpPr/>
           <p:nvPr/>
         </p:nvSpPr>
@@ -10237,7 +10237,7 @@
       </p:sp>
       <p:sp>
         <p:nvSpPr>
-          <p:cNvPr id="12" name="Shape 9"/>
+          <p:cNvPr id="13" name="Shape 9"/>
           <p:cNvSpPr/>
           <p:nvPr/>
         </p:nvSpPr>
@@ -10260,7 +10260,7 @@
       </p:sp>
       <p:sp>
         <p:nvSpPr>
-          <p:cNvPr id="13" name="Shape 10"/>
+          <p:cNvPr id="14" name="Shape 10"/>
           <p:cNvSpPr/>
           <p:nvPr/>
         </p:nvSpPr>
@@ -10280,7 +10280,7 @@
       </p:sp>
       <p:sp>
         <p:nvSpPr>
-          <p:cNvPr id="14" name="Text 11"/>
+          <p:cNvPr id="15" name="Text 11"/>
           <p:cNvSpPr/>
           <p:nvPr/>
         </p:nvSpPr>
@@ -10319,7 +10319,7 @@
       </p:sp>
       <p:sp>
         <p:nvSpPr>
-          <p:cNvPr id="15" name="Shape 12"/>
+          <p:cNvPr id="16" name="Shape 12"/>
           <p:cNvSpPr/>
           <p:nvPr/>
         </p:nvSpPr>
@@ -10344,7 +10344,7 @@
       </p:sp>
       <p:sp>
         <p:nvSpPr>
-          <p:cNvPr id="16" name="Text 13"/>
+          <p:cNvPr id="17" name="Text 13"/>
           <p:cNvSpPr/>
           <p:nvPr/>
         </p:nvSpPr>
@@ -10383,7 +10383,7 @@
       </p:sp>
       <p:sp>
         <p:nvSpPr>
-          <p:cNvPr id="17" name="Text 14"/>
+          <p:cNvPr id="18" name="Text 14"/>
           <p:cNvSpPr/>
           <p:nvPr/>
         </p:nvSpPr>
@@ -10422,7 +10422,7 @@
       </p:sp>
       <p:sp>
         <p:nvSpPr>
-          <p:cNvPr id="18" name="Shape 15"/>
+          <p:cNvPr id="19" name="Shape 15"/>
           <p:cNvSpPr/>
           <p:nvPr/>
         </p:nvSpPr>
@@ -10445,7 +10445,7 @@
       </p:sp>
       <p:sp>
         <p:nvSpPr>
-          <p:cNvPr id="19" name="Shape 16"/>
+          <p:cNvPr id="20" name="Shape 16"/>
           <p:cNvSpPr/>
           <p:nvPr/>
         </p:nvSpPr>
@@ -10465,7 +10465,7 @@
       </p:sp>
       <p:sp>
         <p:nvSpPr>
-          <p:cNvPr id="20" name="Text 17"/>
+          <p:cNvPr id="21" name="Text 17"/>
           <p:cNvSpPr/>
           <p:nvPr/>
         </p:nvSpPr>
@@ -10504,7 +10504,7 @@
       </p:sp>
       <p:sp>
         <p:nvSpPr>
-          <p:cNvPr id="21" name="Shape 18"/>
+          <p:cNvPr id="22" name="Shape 18"/>
           <p:cNvSpPr/>
           <p:nvPr/>
         </p:nvSpPr>
@@ -10529,7 +10529,7 @@
       </p:sp>
       <p:sp>
         <p:nvSpPr>
-          <p:cNvPr id="22" name="Text 19"/>
+          <p:cNvPr id="23" name="Text 19"/>
           <p:cNvSpPr/>
           <p:nvPr/>
         </p:nvSpPr>
@@ -10568,7 +10568,7 @@
       </p:sp>
       <p:sp>
         <p:nvSpPr>
-          <p:cNvPr id="23" name="Text 20"/>
+          <p:cNvPr id="24" name="Text 20"/>
           <p:cNvSpPr/>
           <p:nvPr/>
         </p:nvSpPr>
@@ -10607,7 +10607,7 @@
       </p:sp>
       <p:sp>
         <p:nvSpPr>
-          <p:cNvPr id="24" name="Shape 21"/>
+          <p:cNvPr id="25" name="Shape 21"/>
           <p:cNvSpPr/>
           <p:nvPr/>
         </p:nvSpPr>
@@ -10629,7 +10629,7 @@
       </p:sp>
       <p:sp>
         <p:nvSpPr>
-          <p:cNvPr id="25" name="Text 22"/>
+          <p:cNvPr id="26" name="Text 22"/>
           <p:cNvSpPr/>
           <p:nvPr/>
         </p:nvSpPr>
@@ -10668,7 +10668,7 @@
       </p:sp>
       <p:sp>
         <p:nvSpPr>
-          <p:cNvPr id="26" name="Text 23"/>
+          <p:cNvPr id="27" name="Text 23"/>
           <p:cNvSpPr/>
           <p:nvPr/>
         </p:nvSpPr>
@@ -10710,7 +10710,7 @@
       </p:sp>
       <p:sp>
         <p:nvSpPr>
-          <p:cNvPr id="27" name="Shape 24"/>
+          <p:cNvPr id="28" name="Shape 24"/>
           <p:cNvSpPr/>
           <p:nvPr/>
         </p:nvSpPr>
@@ -10732,7 +10732,7 @@
       </p:sp>
       <p:sp>
         <p:nvSpPr>
-          <p:cNvPr id="28" name="Text 25"/>
+          <p:cNvPr id="29" name="Text 25"/>
           <p:cNvSpPr/>
           <p:nvPr/>
         </p:nvSpPr>
@@ -10938,7 +10938,7 @@
         </p:nvSpPr>
         <p:spPr>
           <a:xfrm>
-            <a:off x="1280160" y="1024128"/>
+            <a:off x="1280160" y="1193140"/>
             <a:ext cx="777240" cy="256032"/>
           </a:xfrm>
           <a:prstGeom prst="roundRect">
@@ -10960,7 +10960,7 @@
         </p:nvSpPr>
         <p:spPr>
           <a:xfrm>
-            <a:off x="1280160" y="1024128"/>
+            <a:off x="1280160" y="1193140"/>
             <a:ext cx="777240" cy="256032"/>
           </a:xfrm>
           <a:prstGeom prst="rect">
@@ -11017,7 +11017,7 @@
       </p:pic>
       <p:sp>
         <p:nvSpPr>
-          <p:cNvPr id="7" name="Shape 4"/>
+          <p:cNvPr id="8" name="Shape 4"/>
           <p:cNvSpPr/>
           <p:nvPr/>
         </p:nvSpPr>
@@ -11039,7 +11039,7 @@
       </p:sp>
       <p:sp>
         <p:nvSpPr>
-          <p:cNvPr id="8" name="Text 5"/>
+          <p:cNvPr id="9" name="Text 5"/>
           <p:cNvSpPr/>
           <p:nvPr/>
         </p:nvSpPr>
@@ -11078,7 +11078,7 @@
       </p:sp>
       <p:sp>
         <p:nvSpPr>
-          <p:cNvPr id="9" name="Text 6"/>
+          <p:cNvPr id="10" name="Text 6"/>
           <p:cNvSpPr/>
           <p:nvPr/>
         </p:nvSpPr>
@@ -11117,7 +11117,7 @@
       </p:sp>
       <p:sp>
         <p:nvSpPr>
-          <p:cNvPr id="10" name="Shape 7"/>
+          <p:cNvPr id="11" name="Shape 7"/>
           <p:cNvSpPr/>
           <p:nvPr/>
         </p:nvSpPr>
@@ -11144,7 +11144,7 @@
       </p:sp>
       <p:sp>
         <p:nvSpPr>
-          <p:cNvPr id="11" name="Text 8"/>
+          <p:cNvPr id="12" name="Text 8"/>
           <p:cNvSpPr/>
           <p:nvPr/>
         </p:nvSpPr>
@@ -11183,7 +11183,7 @@
       </p:sp>
       <p:sp>
         <p:nvSpPr>
-          <p:cNvPr id="12" name="Text 9"/>
+          <p:cNvPr id="13" name="Text 9"/>
           <p:cNvSpPr/>
           <p:nvPr/>
         </p:nvSpPr>
@@ -11222,7 +11222,7 @@
       </p:sp>
       <p:sp>
         <p:nvSpPr>
-          <p:cNvPr id="13" name="Shape 10"/>
+          <p:cNvPr id="14" name="Shape 10"/>
           <p:cNvSpPr/>
           <p:nvPr/>
         </p:nvSpPr>
@@ -11249,7 +11249,7 @@
       </p:sp>
       <p:sp>
         <p:nvSpPr>
-          <p:cNvPr id="14" name="Text 11"/>
+          <p:cNvPr id="15" name="Text 11"/>
           <p:cNvSpPr/>
           <p:nvPr/>
         </p:nvSpPr>
@@ -11288,7 +11288,7 @@
       </p:sp>
       <p:sp>
         <p:nvSpPr>
-          <p:cNvPr id="15" name="Text 12"/>
+          <p:cNvPr id="16" name="Text 12"/>
           <p:cNvSpPr/>
           <p:nvPr/>
         </p:nvSpPr>
@@ -11327,7 +11327,7 @@
       </p:sp>
       <p:sp>
         <p:nvSpPr>
-          <p:cNvPr id="16" name="Shape 13"/>
+          <p:cNvPr id="17" name="Shape 13"/>
           <p:cNvSpPr/>
           <p:nvPr/>
         </p:nvSpPr>
@@ -11349,7 +11349,7 @@
       </p:sp>
       <p:sp>
         <p:nvSpPr>
-          <p:cNvPr id="17" name="Text 14"/>
+          <p:cNvPr id="18" name="Text 14"/>
           <p:cNvSpPr/>
           <p:nvPr/>
         </p:nvSpPr>
@@ -11383,7 +11383,7 @@
                 <a:ea typeface="Montserrat" pitchFamily="34" charset="-122"/>
                 <a:cs typeface="Montserrat" pitchFamily="34" charset="-120"/>
               </a:rPr>
-              <a:t>«Скільки запитів пішло через fallback минулої п'ятниці?» — питання, з якого починається і постмортем, і розмова з провайдером про SLA.</a:t>
+              <a:t>«Скільки запитів пішло через fallback у п'ятницю?» — з цього починається постмортем.</a:t>
             </a:r>
             <a:endParaRPr lang="en-US" sz="1300" dirty="0"/>
           </a:p>
@@ -11391,7 +11391,7 @@
       </p:sp>
       <p:sp>
         <p:nvSpPr>
-          <p:cNvPr id="18" name="Shape 15"/>
+          <p:cNvPr id="19" name="Shape 15"/>
           <p:cNvSpPr/>
           <p:nvPr/>
         </p:nvSpPr>
@@ -11418,7 +11418,7 @@
       </p:sp>
       <p:sp>
         <p:nvSpPr>
-          <p:cNvPr id="19" name="Text 16"/>
+          <p:cNvPr id="20" name="Text 16"/>
           <p:cNvSpPr/>
           <p:nvPr/>
         </p:nvSpPr>
@@ -11452,7 +11452,7 @@
                 <a:ea typeface="Montserrat" pitchFamily="34" charset="-122"/>
                 <a:cs typeface="Montserrat" pitchFamily="34" charset="-120"/>
               </a:rPr>
-              <a:t>На тижні 5 усе це стане плитками консолі — сьогодні досить, що цифри існують і ростуть правильно.</a:t>
+              <a:t>На тижні 5 це стане плитками консолі — сьогодні досить, що цифри є.</a:t>
             </a:r>
             <a:endParaRPr lang="en-US" sz="1300" dirty="0"/>
           </a:p>
@@ -11624,7 +11624,7 @@
         </p:nvSpPr>
         <p:spPr>
           <a:xfrm>
-            <a:off x="1280160" y="1005840"/>
+            <a:off x="1280160" y="1174852"/>
             <a:ext cx="6126480" cy="256032"/>
           </a:xfrm>
           <a:prstGeom prst="rect">
@@ -11666,7 +11666,7 @@
         </p:nvSpPr>
         <p:spPr>
           <a:xfrm>
-            <a:off x="1280160" y="1271016"/>
+            <a:off x="1280160" y="1440028"/>
             <a:ext cx="777240" cy="256032"/>
           </a:xfrm>
           <a:prstGeom prst="roundRect">
@@ -11688,7 +11688,7 @@
         </p:nvSpPr>
         <p:spPr>
           <a:xfrm>
-            <a:off x="1280160" y="1271016"/>
+            <a:off x="1280160" y="1440028"/>
             <a:ext cx="777240" cy="256032"/>
           </a:xfrm>
           <a:prstGeom prst="rect">
@@ -11745,7 +11745,7 @@
       </p:pic>
       <p:sp>
         <p:nvSpPr>
-          <p:cNvPr id="8" name="Shape 5"/>
+          <p:cNvPr id="9" name="Shape 5"/>
           <p:cNvSpPr/>
           <p:nvPr/>
         </p:nvSpPr>
@@ -11767,7 +11767,7 @@
       </p:sp>
       <p:sp>
         <p:nvSpPr>
-          <p:cNvPr id="9" name="Shape 6"/>
+          <p:cNvPr id="10" name="Shape 6"/>
           <p:cNvSpPr/>
           <p:nvPr/>
         </p:nvSpPr>
@@ -11787,7 +11787,7 @@
       </p:sp>
       <p:sp>
         <p:nvSpPr>
-          <p:cNvPr id="10" name="Text 7"/>
+          <p:cNvPr id="11" name="Text 7"/>
           <p:cNvSpPr/>
           <p:nvPr/>
         </p:nvSpPr>
@@ -11826,7 +11826,7 @@
       </p:sp>
       <p:sp>
         <p:nvSpPr>
-          <p:cNvPr id="11" name="Text 8"/>
+          <p:cNvPr id="12" name="Text 8"/>
           <p:cNvSpPr/>
           <p:nvPr/>
         </p:nvSpPr>
@@ -11865,7 +11865,7 @@
       </p:sp>
       <p:sp>
         <p:nvSpPr>
-          <p:cNvPr id="12" name="Text 9"/>
+          <p:cNvPr id="13" name="Text 9"/>
           <p:cNvSpPr/>
           <p:nvPr/>
         </p:nvSpPr>
@@ -11899,7 +11899,7 @@
                 <a:ea typeface="Montserrat" pitchFamily="34" charset="-122"/>
                 <a:cs typeface="Montserrat" pitchFamily="34" charset="-120"/>
               </a:rPr>
-              <a:t>секунди замість сотень мілісекунд: таймаут під швидкий режим «падає» на легітимно повільній відповіді</a:t>
+              <a:t>таймаут під швидкий режим падає на легітимно повільній відповіді</a:t>
             </a:r>
             <a:endParaRPr lang="en-US" sz="1200" dirty="0"/>
           </a:p>
@@ -11907,7 +11907,7 @@
       </p:sp>
       <p:sp>
         <p:nvSpPr>
-          <p:cNvPr id="13" name="Shape 10"/>
+          <p:cNvPr id="14" name="Shape 10"/>
           <p:cNvSpPr/>
           <p:nvPr/>
         </p:nvSpPr>
@@ -11929,7 +11929,7 @@
       </p:sp>
       <p:sp>
         <p:nvSpPr>
-          <p:cNvPr id="14" name="Shape 11"/>
+          <p:cNvPr id="15" name="Shape 11"/>
           <p:cNvSpPr/>
           <p:nvPr/>
         </p:nvSpPr>
@@ -11949,7 +11949,7 @@
       </p:sp>
       <p:sp>
         <p:nvSpPr>
-          <p:cNvPr id="15" name="Text 12"/>
+          <p:cNvPr id="16" name="Text 12"/>
           <p:cNvSpPr/>
           <p:nvPr/>
         </p:nvSpPr>
@@ -11988,7 +11988,7 @@
       </p:sp>
       <p:sp>
         <p:nvSpPr>
-          <p:cNvPr id="16" name="Text 13"/>
+          <p:cNvPr id="17" name="Text 13"/>
           <p:cNvSpPr/>
           <p:nvPr/>
         </p:nvSpPr>
@@ -12027,7 +12027,7 @@
       </p:sp>
       <p:sp>
         <p:nvSpPr>
-          <p:cNvPr id="17" name="Text 14"/>
+          <p:cNvPr id="18" name="Text 14"/>
           <p:cNvSpPr/>
           <p:nvPr/>
         </p:nvSpPr>
@@ -12061,7 +12061,7 @@
                 <a:ea typeface="Montserrat" pitchFamily="34" charset="-122"/>
                 <a:cs typeface="Montserrat" pitchFamily="34" charset="-120"/>
               </a:rPr>
-              <a:t>не лише запити на хвилину: токени на хвилину, окремі квоти на «думаючі» моделі й кешовані токени</a:t>
+              <a:t>не лише запити на хвилину: токени, окремі квоти на «думаючі» моделі</a:t>
             </a:r>
             <a:endParaRPr lang="en-US" sz="1200" dirty="0"/>
           </a:p>
@@ -12069,7 +12069,7 @@
       </p:sp>
       <p:sp>
         <p:nvSpPr>
-          <p:cNvPr id="18" name="Shape 15"/>
+          <p:cNvPr id="19" name="Shape 15"/>
           <p:cNvSpPr/>
           <p:nvPr/>
         </p:nvSpPr>
@@ -12091,7 +12091,7 @@
       </p:sp>
       <p:sp>
         <p:nvSpPr>
-          <p:cNvPr id="19" name="Text 16"/>
+          <p:cNvPr id="20" name="Text 16"/>
           <p:cNvSpPr/>
           <p:nvPr/>
         </p:nvSpPr>
@@ -12133,7 +12133,7 @@
       </p:sp>
       <p:sp>
         <p:nvSpPr>
-          <p:cNvPr id="20" name="Shape 17"/>
+          <p:cNvPr id="21" name="Shape 17"/>
           <p:cNvSpPr/>
           <p:nvPr/>
         </p:nvSpPr>
@@ -12155,7 +12155,7 @@
       </p:sp>
       <p:sp>
         <p:nvSpPr>
-          <p:cNvPr id="21" name="Text 18"/>
+          <p:cNvPr id="22" name="Text 18"/>
           <p:cNvSpPr/>
           <p:nvPr/>
         </p:nvSpPr>
@@ -12194,7 +12194,7 @@
       </p:sp>
       <p:sp>
         <p:nvSpPr>
-          <p:cNvPr id="22" name="Text 19"/>
+          <p:cNvPr id="23" name="Text 19"/>
           <p:cNvSpPr/>
           <p:nvPr/>
         </p:nvSpPr>
@@ -12228,7 +12228,7 @@
                 <a:ea typeface="Montserrat" pitchFamily="34" charset="-122"/>
                 <a:cs typeface="Montserrat" pitchFamily="34" charset="-120"/>
               </a:rPr>
-              <a:t>Бюджет часу — властивість маршруту, а не константа сервісу: ставиться там само, де ухвалюється рішення про модель.</a:t>
+              <a:t>Бюджет часу — властивість маршруту, а не константа сервісу.</a:t>
             </a:r>
             <a:endParaRPr lang="en-US" sz="1300" dirty="0"/>
           </a:p>
@@ -12440,7 +12440,7 @@
       </p:pic>
       <p:sp>
         <p:nvSpPr>
-          <p:cNvPr id="6" name="Shape 3"/>
+          <p:cNvPr id="7" name="Shape 3"/>
           <p:cNvSpPr/>
           <p:nvPr/>
         </p:nvSpPr>
@@ -12462,7 +12462,7 @@
       </p:sp>
       <p:sp>
         <p:nvSpPr>
-          <p:cNvPr id="7" name="Shape 4"/>
+          <p:cNvPr id="8" name="Shape 4"/>
           <p:cNvSpPr/>
           <p:nvPr/>
         </p:nvSpPr>
@@ -12482,7 +12482,7 @@
       </p:sp>
       <p:sp>
         <p:nvSpPr>
-          <p:cNvPr id="8" name="Text 5"/>
+          <p:cNvPr id="9" name="Text 5"/>
           <p:cNvSpPr/>
           <p:nvPr/>
         </p:nvSpPr>
@@ -12521,7 +12521,7 @@
       </p:sp>
       <p:sp>
         <p:nvSpPr>
-          <p:cNvPr id="9" name="Text 6"/>
+          <p:cNvPr id="10" name="Text 6"/>
           <p:cNvSpPr/>
           <p:nvPr/>
         </p:nvSpPr>
@@ -12560,7 +12560,7 @@
       </p:sp>
       <p:sp>
         <p:nvSpPr>
-          <p:cNvPr id="10" name="Text 7"/>
+          <p:cNvPr id="11" name="Text 7"/>
           <p:cNvSpPr/>
           <p:nvPr/>
         </p:nvSpPr>
@@ -12602,7 +12602,7 @@
       </p:sp>
       <p:sp>
         <p:nvSpPr>
-          <p:cNvPr id="11" name="Shape 8"/>
+          <p:cNvPr id="12" name="Shape 8"/>
           <p:cNvSpPr/>
           <p:nvPr/>
         </p:nvSpPr>
@@ -12624,7 +12624,7 @@
       </p:sp>
       <p:sp>
         <p:nvSpPr>
-          <p:cNvPr id="12" name="Shape 9"/>
+          <p:cNvPr id="13" name="Shape 9"/>
           <p:cNvSpPr/>
           <p:nvPr/>
         </p:nvSpPr>
@@ -12644,7 +12644,7 @@
       </p:sp>
       <p:sp>
         <p:nvSpPr>
-          <p:cNvPr id="13" name="Text 10"/>
+          <p:cNvPr id="14" name="Text 10"/>
           <p:cNvSpPr/>
           <p:nvPr/>
         </p:nvSpPr>
@@ -12683,7 +12683,7 @@
       </p:sp>
       <p:sp>
         <p:nvSpPr>
-          <p:cNvPr id="14" name="Text 11"/>
+          <p:cNvPr id="15" name="Text 11"/>
           <p:cNvSpPr/>
           <p:nvPr/>
         </p:nvSpPr>
@@ -12722,7 +12722,7 @@
       </p:sp>
       <p:sp>
         <p:nvSpPr>
-          <p:cNvPr id="15" name="Text 12"/>
+          <p:cNvPr id="16" name="Text 12"/>
           <p:cNvSpPr/>
           <p:nvPr/>
         </p:nvSpPr>
@@ -12764,7 +12764,7 @@
       </p:sp>
       <p:sp>
         <p:nvSpPr>
-          <p:cNvPr id="16" name="Shape 13"/>
+          <p:cNvPr id="17" name="Shape 13"/>
           <p:cNvSpPr/>
           <p:nvPr/>
         </p:nvSpPr>
@@ -12786,7 +12786,7 @@
       </p:sp>
       <p:sp>
         <p:nvSpPr>
-          <p:cNvPr id="17" name="Shape 14"/>
+          <p:cNvPr id="18" name="Shape 14"/>
           <p:cNvSpPr/>
           <p:nvPr/>
         </p:nvSpPr>
@@ -12806,7 +12806,7 @@
       </p:sp>
       <p:sp>
         <p:nvSpPr>
-          <p:cNvPr id="18" name="Text 15"/>
+          <p:cNvPr id="19" name="Text 15"/>
           <p:cNvSpPr/>
           <p:nvPr/>
         </p:nvSpPr>
@@ -12845,7 +12845,7 @@
       </p:sp>
       <p:sp>
         <p:nvSpPr>
-          <p:cNvPr id="19" name="Text 16"/>
+          <p:cNvPr id="20" name="Text 16"/>
           <p:cNvSpPr/>
           <p:nvPr/>
         </p:nvSpPr>
@@ -12884,7 +12884,7 @@
       </p:sp>
       <p:sp>
         <p:nvSpPr>
-          <p:cNvPr id="20" name="Text 17"/>
+          <p:cNvPr id="21" name="Text 17"/>
           <p:cNvSpPr/>
           <p:nvPr/>
         </p:nvSpPr>
@@ -12926,7 +12926,7 @@
       </p:sp>
       <p:sp>
         <p:nvSpPr>
-          <p:cNvPr id="21" name="Shape 18"/>
+          <p:cNvPr id="22" name="Shape 18"/>
           <p:cNvSpPr/>
           <p:nvPr/>
         </p:nvSpPr>
@@ -12948,7 +12948,7 @@
       </p:sp>
       <p:sp>
         <p:nvSpPr>
-          <p:cNvPr id="22" name="Shape 19"/>
+          <p:cNvPr id="23" name="Shape 19"/>
           <p:cNvSpPr/>
           <p:nvPr/>
         </p:nvSpPr>
@@ -12968,7 +12968,7 @@
       </p:sp>
       <p:sp>
         <p:nvSpPr>
-          <p:cNvPr id="23" name="Text 20"/>
+          <p:cNvPr id="24" name="Text 20"/>
           <p:cNvSpPr/>
           <p:nvPr/>
         </p:nvSpPr>
@@ -13007,7 +13007,7 @@
       </p:sp>
       <p:sp>
         <p:nvSpPr>
-          <p:cNvPr id="24" name="Text 21"/>
+          <p:cNvPr id="25" name="Text 21"/>
           <p:cNvSpPr/>
           <p:nvPr/>
         </p:nvSpPr>
@@ -13046,7 +13046,7 @@
       </p:sp>
       <p:sp>
         <p:nvSpPr>
-          <p:cNvPr id="25" name="Text 22"/>
+          <p:cNvPr id="26" name="Text 22"/>
           <p:cNvSpPr/>
           <p:nvPr/>
         </p:nvSpPr>
@@ -13088,7 +13088,7 @@
       </p:sp>
       <p:sp>
         <p:nvSpPr>
-          <p:cNvPr id="26" name="Shape 23"/>
+          <p:cNvPr id="27" name="Shape 23"/>
           <p:cNvSpPr/>
           <p:nvPr/>
         </p:nvSpPr>
@@ -13110,7 +13110,7 @@
       </p:sp>
       <p:sp>
         <p:nvSpPr>
-          <p:cNvPr id="27" name="Shape 24"/>
+          <p:cNvPr id="28" name="Shape 24"/>
           <p:cNvSpPr/>
           <p:nvPr/>
         </p:nvSpPr>
@@ -13130,7 +13130,7 @@
       </p:sp>
       <p:sp>
         <p:nvSpPr>
-          <p:cNvPr id="28" name="Text 25"/>
+          <p:cNvPr id="29" name="Text 25"/>
           <p:cNvSpPr/>
           <p:nvPr/>
         </p:nvSpPr>
@@ -13169,7 +13169,7 @@
       </p:sp>
       <p:sp>
         <p:nvSpPr>
-          <p:cNvPr id="29" name="Text 26"/>
+          <p:cNvPr id="30" name="Text 26"/>
           <p:cNvSpPr/>
           <p:nvPr/>
         </p:nvSpPr>
@@ -13208,7 +13208,7 @@
       </p:sp>
       <p:sp>
         <p:nvSpPr>
-          <p:cNvPr id="30" name="Text 27"/>
+          <p:cNvPr id="31" name="Text 27"/>
           <p:cNvSpPr/>
           <p:nvPr/>
         </p:nvSpPr>
@@ -13250,7 +13250,7 @@
       </p:sp>
       <p:sp>
         <p:nvSpPr>
-          <p:cNvPr id="31" name="Shape 28"/>
+          <p:cNvPr id="32" name="Shape 28"/>
           <p:cNvSpPr/>
           <p:nvPr/>
         </p:nvSpPr>
@@ -13272,7 +13272,7 @@
       </p:sp>
       <p:sp>
         <p:nvSpPr>
-          <p:cNvPr id="32" name="Text 29"/>
+          <p:cNvPr id="33" name="Text 29"/>
           <p:cNvSpPr/>
           <p:nvPr/>
         </p:nvSpPr>
@@ -13311,7 +13311,7 @@
       </p:sp>
       <p:sp>
         <p:nvSpPr>
-          <p:cNvPr id="33" name="Text 30"/>
+          <p:cNvPr id="34" name="Text 30"/>
           <p:cNvSpPr/>
           <p:nvPr/>
         </p:nvSpPr>
@@ -13599,7 +13599,7 @@
       </p:pic>
       <p:sp>
         <p:nvSpPr>
-          <p:cNvPr id="7" name="Shape 4"/>
+          <p:cNvPr id="8" name="Shape 4"/>
           <p:cNvSpPr/>
           <p:nvPr/>
         </p:nvSpPr>
@@ -13626,7 +13626,7 @@
       </p:sp>
       <p:sp>
         <p:nvSpPr>
-          <p:cNvPr id="8" name="Shape 5"/>
+          <p:cNvPr id="9" name="Shape 5"/>
           <p:cNvSpPr/>
           <p:nvPr/>
         </p:nvSpPr>
@@ -13646,7 +13646,7 @@
       </p:sp>
       <p:sp>
         <p:nvSpPr>
-          <p:cNvPr id="9" name="Text 6"/>
+          <p:cNvPr id="10" name="Text 6"/>
           <p:cNvSpPr/>
           <p:nvPr/>
         </p:nvSpPr>
@@ -13685,7 +13685,7 @@
       </p:sp>
       <p:sp>
         <p:nvSpPr>
-          <p:cNvPr id="10" name="Text 7"/>
+          <p:cNvPr id="11" name="Text 7"/>
           <p:cNvSpPr/>
           <p:nvPr/>
         </p:nvSpPr>
@@ -13724,7 +13724,7 @@
       </p:sp>
       <p:sp>
         <p:nvSpPr>
-          <p:cNvPr id="11" name="Text 8"/>
+          <p:cNvPr id="12" name="Text 8"/>
           <p:cNvSpPr/>
           <p:nvPr/>
         </p:nvSpPr>
@@ -13766,7 +13766,7 @@
       </p:sp>
       <p:sp>
         <p:nvSpPr>
-          <p:cNvPr id="12" name="Shape 9"/>
+          <p:cNvPr id="13" name="Shape 9"/>
           <p:cNvSpPr/>
           <p:nvPr/>
         </p:nvSpPr>
@@ -13793,7 +13793,7 @@
       </p:sp>
       <p:sp>
         <p:nvSpPr>
-          <p:cNvPr id="13" name="Shape 10"/>
+          <p:cNvPr id="14" name="Shape 10"/>
           <p:cNvSpPr/>
           <p:nvPr/>
         </p:nvSpPr>
@@ -13813,7 +13813,7 @@
       </p:sp>
       <p:sp>
         <p:nvSpPr>
-          <p:cNvPr id="14" name="Text 11"/>
+          <p:cNvPr id="15" name="Text 11"/>
           <p:cNvSpPr/>
           <p:nvPr/>
         </p:nvSpPr>
@@ -13852,7 +13852,7 @@
       </p:sp>
       <p:sp>
         <p:nvSpPr>
-          <p:cNvPr id="15" name="Text 12"/>
+          <p:cNvPr id="16" name="Text 12"/>
           <p:cNvSpPr/>
           <p:nvPr/>
         </p:nvSpPr>
@@ -13891,7 +13891,7 @@
       </p:sp>
       <p:sp>
         <p:nvSpPr>
-          <p:cNvPr id="16" name="Text 13"/>
+          <p:cNvPr id="17" name="Text 13"/>
           <p:cNvSpPr/>
           <p:nvPr/>
         </p:nvSpPr>
@@ -13933,7 +13933,7 @@
       </p:sp>
       <p:sp>
         <p:nvSpPr>
-          <p:cNvPr id="17" name="Shape 14"/>
+          <p:cNvPr id="18" name="Shape 14"/>
           <p:cNvSpPr/>
           <p:nvPr/>
         </p:nvSpPr>
@@ -13960,7 +13960,7 @@
       </p:sp>
       <p:sp>
         <p:nvSpPr>
-          <p:cNvPr id="18" name="Shape 15"/>
+          <p:cNvPr id="19" name="Shape 15"/>
           <p:cNvSpPr/>
           <p:nvPr/>
         </p:nvSpPr>
@@ -13980,7 +13980,7 @@
       </p:sp>
       <p:sp>
         <p:nvSpPr>
-          <p:cNvPr id="19" name="Text 16"/>
+          <p:cNvPr id="20" name="Text 16"/>
           <p:cNvSpPr/>
           <p:nvPr/>
         </p:nvSpPr>
@@ -14019,7 +14019,7 @@
       </p:sp>
       <p:sp>
         <p:nvSpPr>
-          <p:cNvPr id="20" name="Text 17"/>
+          <p:cNvPr id="21" name="Text 17"/>
           <p:cNvSpPr/>
           <p:nvPr/>
         </p:nvSpPr>
@@ -14058,7 +14058,7 @@
       </p:sp>
       <p:sp>
         <p:nvSpPr>
-          <p:cNvPr id="21" name="Text 18"/>
+          <p:cNvPr id="22" name="Text 18"/>
           <p:cNvSpPr/>
           <p:nvPr/>
         </p:nvSpPr>
@@ -14100,7 +14100,7 @@
       </p:sp>
       <p:sp>
         <p:nvSpPr>
-          <p:cNvPr id="22" name="Shape 19"/>
+          <p:cNvPr id="23" name="Shape 19"/>
           <p:cNvSpPr/>
           <p:nvPr/>
         </p:nvSpPr>
@@ -14127,7 +14127,7 @@
       </p:sp>
       <p:sp>
         <p:nvSpPr>
-          <p:cNvPr id="23" name="Shape 20"/>
+          <p:cNvPr id="24" name="Shape 20"/>
           <p:cNvSpPr/>
           <p:nvPr/>
         </p:nvSpPr>
@@ -14147,7 +14147,7 @@
       </p:sp>
       <p:sp>
         <p:nvSpPr>
-          <p:cNvPr id="24" name="Text 21"/>
+          <p:cNvPr id="25" name="Text 21"/>
           <p:cNvSpPr/>
           <p:nvPr/>
         </p:nvSpPr>
@@ -14186,7 +14186,7 @@
       </p:sp>
       <p:sp>
         <p:nvSpPr>
-          <p:cNvPr id="25" name="Text 22"/>
+          <p:cNvPr id="26" name="Text 22"/>
           <p:cNvSpPr/>
           <p:nvPr/>
         </p:nvSpPr>
@@ -14225,7 +14225,7 @@
       </p:sp>
       <p:sp>
         <p:nvSpPr>
-          <p:cNvPr id="26" name="Text 23"/>
+          <p:cNvPr id="27" name="Text 23"/>
           <p:cNvSpPr/>
           <p:nvPr/>
         </p:nvSpPr>
@@ -14267,7 +14267,7 @@
       </p:sp>
       <p:sp>
         <p:nvSpPr>
-          <p:cNvPr id="27" name="Shape 24"/>
+          <p:cNvPr id="28" name="Shape 24"/>
           <p:cNvSpPr/>
           <p:nvPr/>
         </p:nvSpPr>
@@ -14289,7 +14289,7 @@
       </p:sp>
       <p:sp>
         <p:nvSpPr>
-          <p:cNvPr id="28" name="Shape 25"/>
+          <p:cNvPr id="29" name="Shape 25"/>
           <p:cNvSpPr/>
           <p:nvPr/>
         </p:nvSpPr>
@@ -14309,7 +14309,7 @@
       </p:sp>
       <p:sp>
         <p:nvSpPr>
-          <p:cNvPr id="29" name="Text 26"/>
+          <p:cNvPr id="30" name="Text 26"/>
           <p:cNvSpPr/>
           <p:nvPr/>
         </p:nvSpPr>
@@ -14348,7 +14348,7 @@
       </p:sp>
       <p:sp>
         <p:nvSpPr>
-          <p:cNvPr id="30" name="Text 27"/>
+          <p:cNvPr id="31" name="Text 27"/>
           <p:cNvSpPr/>
           <p:nvPr/>
         </p:nvSpPr>
@@ -14387,7 +14387,7 @@
       </p:sp>
       <p:sp>
         <p:nvSpPr>
-          <p:cNvPr id="31" name="Text 28"/>
+          <p:cNvPr id="32" name="Text 28"/>
           <p:cNvSpPr/>
           <p:nvPr/>
         </p:nvSpPr>
@@ -14633,7 +14633,7 @@
       </p:pic>
       <p:sp>
         <p:nvSpPr>
-          <p:cNvPr id="6" name="Shape 3"/>
+          <p:cNvPr id="7" name="Shape 3"/>
           <p:cNvSpPr/>
           <p:nvPr/>
         </p:nvSpPr>
@@ -14653,7 +14653,7 @@
       </p:sp>
       <p:sp>
         <p:nvSpPr>
-          <p:cNvPr id="7" name="Text 4"/>
+          <p:cNvPr id="8" name="Text 4"/>
           <p:cNvSpPr/>
           <p:nvPr/>
         </p:nvSpPr>
@@ -14692,7 +14692,7 @@
       </p:sp>
       <p:sp>
         <p:nvSpPr>
-          <p:cNvPr id="8" name="Text 5"/>
+          <p:cNvPr id="9" name="Text 5"/>
           <p:cNvSpPr/>
           <p:nvPr/>
         </p:nvSpPr>
@@ -14745,7 +14745,7 @@
       </p:sp>
       <p:sp>
         <p:nvSpPr>
-          <p:cNvPr id="9" name="Shape 6"/>
+          <p:cNvPr id="10" name="Shape 6"/>
           <p:cNvSpPr/>
           <p:nvPr/>
         </p:nvSpPr>
@@ -14765,7 +14765,7 @@
       </p:sp>
       <p:sp>
         <p:nvSpPr>
-          <p:cNvPr id="10" name="Text 7"/>
+          <p:cNvPr id="11" name="Text 7"/>
           <p:cNvSpPr/>
           <p:nvPr/>
         </p:nvSpPr>
@@ -14804,7 +14804,7 @@
       </p:sp>
       <p:sp>
         <p:nvSpPr>
-          <p:cNvPr id="11" name="Text 8"/>
+          <p:cNvPr id="12" name="Text 8"/>
           <p:cNvSpPr/>
           <p:nvPr/>
         </p:nvSpPr>
@@ -14857,7 +14857,7 @@
       </p:sp>
       <p:sp>
         <p:nvSpPr>
-          <p:cNvPr id="12" name="Shape 9"/>
+          <p:cNvPr id="13" name="Shape 9"/>
           <p:cNvSpPr/>
           <p:nvPr/>
         </p:nvSpPr>
@@ -14877,7 +14877,7 @@
       </p:sp>
       <p:sp>
         <p:nvSpPr>
-          <p:cNvPr id="13" name="Text 10"/>
+          <p:cNvPr id="14" name="Text 10"/>
           <p:cNvSpPr/>
           <p:nvPr/>
         </p:nvSpPr>
@@ -14916,7 +14916,7 @@
       </p:sp>
       <p:sp>
         <p:nvSpPr>
-          <p:cNvPr id="14" name="Text 11"/>
+          <p:cNvPr id="15" name="Text 11"/>
           <p:cNvSpPr/>
           <p:nvPr/>
         </p:nvSpPr>
@@ -14969,7 +14969,7 @@
       </p:sp>
       <p:sp>
         <p:nvSpPr>
-          <p:cNvPr id="15" name="Shape 12"/>
+          <p:cNvPr id="16" name="Shape 12"/>
           <p:cNvSpPr/>
           <p:nvPr/>
         </p:nvSpPr>
@@ -14989,7 +14989,7 @@
       </p:sp>
       <p:sp>
         <p:nvSpPr>
-          <p:cNvPr id="16" name="Text 13"/>
+          <p:cNvPr id="17" name="Text 13"/>
           <p:cNvSpPr/>
           <p:nvPr/>
         </p:nvSpPr>
@@ -15028,7 +15028,7 @@
       </p:sp>
       <p:sp>
         <p:nvSpPr>
-          <p:cNvPr id="17" name="Text 14"/>
+          <p:cNvPr id="18" name="Text 14"/>
           <p:cNvSpPr/>
           <p:nvPr/>
         </p:nvSpPr>
@@ -15285,7 +15285,7 @@
       </p:pic>
       <p:sp>
         <p:nvSpPr>
-          <p:cNvPr id="6" name="Shape 3"/>
+          <p:cNvPr id="7" name="Shape 3"/>
           <p:cNvSpPr/>
           <p:nvPr/>
         </p:nvSpPr>
@@ -15307,7 +15307,7 @@
       </p:sp>
       <p:sp>
         <p:nvSpPr>
-          <p:cNvPr id="7" name="Text 4"/>
+          <p:cNvPr id="8" name="Text 4"/>
           <p:cNvSpPr/>
           <p:nvPr/>
         </p:nvSpPr>
@@ -15346,7 +15346,7 @@
       </p:sp>
       <p:sp>
         <p:nvSpPr>
-          <p:cNvPr id="8" name="Text 5"/>
+          <p:cNvPr id="9" name="Text 5"/>
           <p:cNvSpPr/>
           <p:nvPr/>
         </p:nvSpPr>
@@ -15388,7 +15388,7 @@
       </p:sp>
       <p:sp>
         <p:nvSpPr>
-          <p:cNvPr id="9" name="Shape 6"/>
+          <p:cNvPr id="10" name="Shape 6"/>
           <p:cNvSpPr/>
           <p:nvPr/>
         </p:nvSpPr>
@@ -15410,7 +15410,7 @@
       </p:sp>
       <p:sp>
         <p:nvSpPr>
-          <p:cNvPr id="10" name="Text 7"/>
+          <p:cNvPr id="11" name="Text 7"/>
           <p:cNvSpPr/>
           <p:nvPr/>
         </p:nvSpPr>
@@ -15449,7 +15449,7 @@
       </p:sp>
       <p:sp>
         <p:nvSpPr>
-          <p:cNvPr id="11" name="Text 8"/>
+          <p:cNvPr id="12" name="Text 8"/>
           <p:cNvSpPr/>
           <p:nvPr/>
         </p:nvSpPr>
@@ -15491,7 +15491,7 @@
       </p:sp>
       <p:sp>
         <p:nvSpPr>
-          <p:cNvPr id="12" name="Shape 9"/>
+          <p:cNvPr id="13" name="Shape 9"/>
           <p:cNvSpPr/>
           <p:nvPr/>
         </p:nvSpPr>
@@ -15518,7 +15518,7 @@
       </p:sp>
       <p:sp>
         <p:nvSpPr>
-          <p:cNvPr id="13" name="Text 10"/>
+          <p:cNvPr id="14" name="Text 10"/>
           <p:cNvSpPr/>
           <p:nvPr/>
         </p:nvSpPr>
@@ -15557,7 +15557,7 @@
       </p:sp>
       <p:sp>
         <p:nvSpPr>
-          <p:cNvPr id="14" name="Text 11"/>
+          <p:cNvPr id="15" name="Text 11"/>
           <p:cNvSpPr/>
           <p:nvPr/>
         </p:nvSpPr>
@@ -15599,7 +15599,7 @@
       </p:sp>
       <p:sp>
         <p:nvSpPr>
-          <p:cNvPr id="15" name="Shape 12"/>
+          <p:cNvPr id="16" name="Shape 12"/>
           <p:cNvSpPr/>
           <p:nvPr/>
         </p:nvSpPr>
@@ -15621,7 +15621,7 @@
       </p:sp>
       <p:sp>
         <p:nvSpPr>
-          <p:cNvPr id="16" name="Text 13"/>
+          <p:cNvPr id="17" name="Text 13"/>
           <p:cNvSpPr/>
           <p:nvPr/>
         </p:nvSpPr>
@@ -15660,7 +15660,7 @@
       </p:sp>
       <p:sp>
         <p:nvSpPr>
-          <p:cNvPr id="17" name="Text 14"/>
+          <p:cNvPr id="18" name="Text 14"/>
           <p:cNvSpPr/>
           <p:nvPr/>
         </p:nvSpPr>
@@ -15906,7 +15906,7 @@
       </p:pic>
       <p:sp>
         <p:nvSpPr>
-          <p:cNvPr id="6" name="Shape 3"/>
+          <p:cNvPr id="7" name="Shape 3"/>
           <p:cNvSpPr/>
           <p:nvPr/>
         </p:nvSpPr>
@@ -15933,7 +15933,7 @@
       </p:sp>
       <p:sp>
         <p:nvSpPr>
-          <p:cNvPr id="7" name="Shape 4"/>
+          <p:cNvPr id="8" name="Shape 4"/>
           <p:cNvSpPr/>
           <p:nvPr/>
         </p:nvSpPr>
@@ -15960,14 +15960,54 @@
       </p:sp>
       <p:sp>
         <p:nvSpPr>
-          <p:cNvPr id="8" name="Text 5"/>
-          <p:cNvSpPr/>
-          <p:nvPr/>
-        </p:nvSpPr>
-        <p:spPr>
-          <a:xfrm>
-            <a:off x="978408" y="2157984"/>
-            <a:ext cx="256032" cy="256032"/>
+          <p:cNvPr id="9" name="Shape 5"/>
+          <p:cNvSpPr/>
+          <p:nvPr/>
+        </p:nvSpPr>
+        <p:spPr>
+          <a:xfrm rot="2700000">
+            <a:off x="1041227" y="2297430"/>
+            <a:ext cx="58156" cy="27432"/>
+          </a:xfrm>
+          <a:prstGeom prst="rect">
+            <a:avLst/>
+          </a:prstGeom>
+          <a:solidFill>
+            <a:srgbClr val="5A05F4"/>
+          </a:solidFill>
+          <a:ln/>
+        </p:spPr>
+      </p:sp>
+      <p:sp>
+        <p:nvSpPr>
+          <p:cNvPr id="10" name="Shape 6"/>
+          <p:cNvSpPr/>
+          <p:nvPr/>
+        </p:nvSpPr>
+        <p:spPr>
+          <a:xfrm rot="-3000000">
+            <a:off x="1069025" y="2271370"/>
+            <a:ext cx="121432" cy="27432"/>
+          </a:xfrm>
+          <a:prstGeom prst="rect">
+            <a:avLst/>
+          </a:prstGeom>
+          <a:solidFill>
+            <a:srgbClr val="5A05F4"/>
+          </a:solidFill>
+          <a:ln/>
+        </p:spPr>
+      </p:sp>
+      <p:sp>
+        <p:nvSpPr>
+          <p:cNvPr id="11" name="Text 7"/>
+          <p:cNvSpPr/>
+          <p:nvPr/>
+        </p:nvSpPr>
+        <p:spPr>
+          <a:xfrm>
+            <a:off x="1362456" y="2103120"/>
+            <a:ext cx="4617720" cy="384048"/>
           </a:xfrm>
           <a:prstGeom prst="rect">
             <a:avLst/>
@@ -15979,57 +16019,18 @@
           <a:bodyPr wrap="square" lIns="0" tIns="0" rIns="0" bIns="0" rtlCol="0" anchor="ctr"/>
           <a:lstStyle/>
           <a:p>
-            <a:pPr algn="ctr" indent="0" marL="0">
-              <a:buNone/>
-            </a:pPr>
-            <a:r>
-              <a:rPr lang="en-US" sz="1000" b="1" dirty="0">
-                <a:solidFill>
-                  <a:srgbClr val="5A05F4"/>
+            <a:pPr indent="0" marL="0">
+              <a:buNone/>
+            </a:pPr>
+            <a:r>
+              <a:rPr lang="en-US" sz="1250" dirty="0">
+                <a:solidFill>
+                  <a:srgbClr val="111318"/>
                 </a:solidFill>
                 <a:latin typeface="Montserrat" pitchFamily="34" charset="0"/>
                 <a:ea typeface="Montserrat" pitchFamily="34" charset="-122"/>
                 <a:cs typeface="Montserrat" pitchFamily="34" charset="-120"/>
               </a:rPr>
-              <a:t>✓</a:t>
-            </a:r>
-            <a:endParaRPr lang="en-US" sz="1000" dirty="0"/>
-          </a:p>
-        </p:txBody>
-      </p:sp>
-      <p:sp>
-        <p:nvSpPr>
-          <p:cNvPr id="9" name="Text 6"/>
-          <p:cNvSpPr/>
-          <p:nvPr/>
-        </p:nvSpPr>
-        <p:spPr>
-          <a:xfrm>
-            <a:off x="1362456" y="2103120"/>
-            <a:ext cx="4617720" cy="384048"/>
-          </a:xfrm>
-          <a:prstGeom prst="rect">
-            <a:avLst/>
-          </a:prstGeom>
-          <a:noFill/>
-          <a:ln/>
-        </p:spPr>
-        <p:txBody>
-          <a:bodyPr wrap="square" lIns="0" tIns="0" rIns="0" bIns="0" rtlCol="0" anchor="ctr"/>
-          <a:lstStyle/>
-          <a:p>
-            <a:pPr indent="0" marL="0">
-              <a:buNone/>
-            </a:pPr>
-            <a:r>
-              <a:rPr lang="en-US" sz="1250" dirty="0">
-                <a:solidFill>
-                  <a:srgbClr val="111318"/>
-                </a:solidFill>
-                <a:latin typeface="Montserrat" pitchFamily="34" charset="0"/>
-                <a:ea typeface="Montserrat" pitchFamily="34" charset="-122"/>
-                <a:cs typeface="Montserrat" pitchFamily="34" charset="-120"/>
-              </a:rPr>
               <a:t>__fail_503 дає ввічливу заглушку, не 500</a:t>
             </a:r>
             <a:endParaRPr lang="en-US" sz="1250" dirty="0"/>
@@ -16038,7 +16039,7 @@
       </p:sp>
       <p:sp>
         <p:nvSpPr>
-          <p:cNvPr id="10" name="Shape 7"/>
+          <p:cNvPr id="12" name="Shape 8"/>
           <p:cNvSpPr/>
           <p:nvPr/>
         </p:nvSpPr>
@@ -16065,14 +16066,54 @@
       </p:sp>
       <p:sp>
         <p:nvSpPr>
-          <p:cNvPr id="11" name="Text 8"/>
-          <p:cNvSpPr/>
-          <p:nvPr/>
-        </p:nvSpPr>
-        <p:spPr>
-          <a:xfrm>
-            <a:off x="978408" y="2724912"/>
-            <a:ext cx="256032" cy="256032"/>
+          <p:cNvPr id="13" name="Shape 9"/>
+          <p:cNvSpPr/>
+          <p:nvPr/>
+        </p:nvSpPr>
+        <p:spPr>
+          <a:xfrm rot="2700000">
+            <a:off x="1041227" y="2864358"/>
+            <a:ext cx="58156" cy="27432"/>
+          </a:xfrm>
+          <a:prstGeom prst="rect">
+            <a:avLst/>
+          </a:prstGeom>
+          <a:solidFill>
+            <a:srgbClr val="5A05F4"/>
+          </a:solidFill>
+          <a:ln/>
+        </p:spPr>
+      </p:sp>
+      <p:sp>
+        <p:nvSpPr>
+          <p:cNvPr id="14" name="Shape 10"/>
+          <p:cNvSpPr/>
+          <p:nvPr/>
+        </p:nvSpPr>
+        <p:spPr>
+          <a:xfrm rot="-3000000">
+            <a:off x="1069025" y="2838298"/>
+            <a:ext cx="121432" cy="27432"/>
+          </a:xfrm>
+          <a:prstGeom prst="rect">
+            <a:avLst/>
+          </a:prstGeom>
+          <a:solidFill>
+            <a:srgbClr val="5A05F4"/>
+          </a:solidFill>
+          <a:ln/>
+        </p:spPr>
+      </p:sp>
+      <p:sp>
+        <p:nvSpPr>
+          <p:cNvPr id="15" name="Text 11"/>
+          <p:cNvSpPr/>
+          <p:nvPr/>
+        </p:nvSpPr>
+        <p:spPr>
+          <a:xfrm>
+            <a:off x="1362456" y="2670048"/>
+            <a:ext cx="4617720" cy="384048"/>
           </a:xfrm>
           <a:prstGeom prst="rect">
             <a:avLst/>
@@ -16084,57 +16125,18 @@
           <a:bodyPr wrap="square" lIns="0" tIns="0" rIns="0" bIns="0" rtlCol="0" anchor="ctr"/>
           <a:lstStyle/>
           <a:p>
-            <a:pPr algn="ctr" indent="0" marL="0">
-              <a:buNone/>
-            </a:pPr>
-            <a:r>
-              <a:rPr lang="en-US" sz="1000" b="1" dirty="0">
-                <a:solidFill>
-                  <a:srgbClr val="5A05F4"/>
+            <a:pPr indent="0" marL="0">
+              <a:buNone/>
+            </a:pPr>
+            <a:r>
+              <a:rPr lang="en-US" sz="1250" dirty="0">
+                <a:solidFill>
+                  <a:srgbClr val="111318"/>
                 </a:solidFill>
                 <a:latin typeface="Montserrat" pitchFamily="34" charset="0"/>
                 <a:ea typeface="Montserrat" pitchFamily="34" charset="-122"/>
                 <a:cs typeface="Montserrat" pitchFamily="34" charset="-120"/>
               </a:rPr>
-              <a:t>✓</a:t>
-            </a:r>
-            <a:endParaRPr lang="en-US" sz="1000" dirty="0"/>
-          </a:p>
-        </p:txBody>
-      </p:sp>
-      <p:sp>
-        <p:nvSpPr>
-          <p:cNvPr id="12" name="Text 9"/>
-          <p:cNvSpPr/>
-          <p:nvPr/>
-        </p:nvSpPr>
-        <p:spPr>
-          <a:xfrm>
-            <a:off x="1362456" y="2670048"/>
-            <a:ext cx="4617720" cy="384048"/>
-          </a:xfrm>
-          <a:prstGeom prst="rect">
-            <a:avLst/>
-          </a:prstGeom>
-          <a:noFill/>
-          <a:ln/>
-        </p:spPr>
-        <p:txBody>
-          <a:bodyPr wrap="square" lIns="0" tIns="0" rIns="0" bIns="0" rtlCol="0" anchor="ctr"/>
-          <a:lstStyle/>
-          <a:p>
-            <a:pPr indent="0" marL="0">
-              <a:buNone/>
-            </a:pPr>
-            <a:r>
-              <a:rPr lang="en-US" sz="1250" dirty="0">
-                <a:solidFill>
-                  <a:srgbClr val="111318"/>
-                </a:solidFill>
-                <a:latin typeface="Montserrat" pitchFamily="34" charset="0"/>
-                <a:ea typeface="Montserrat" pitchFamily="34" charset="-122"/>
-                <a:cs typeface="Montserrat" pitchFamily="34" charset="-120"/>
-              </a:rPr>
               <a:t>збій швидкий — мілісекунди, а не секунди</a:t>
             </a:r>
             <a:endParaRPr lang="en-US" sz="1250" dirty="0"/>
@@ -16143,7 +16145,7 @@
       </p:sp>
       <p:sp>
         <p:nvSpPr>
-          <p:cNvPr id="13" name="Shape 10"/>
+          <p:cNvPr id="16" name="Shape 12"/>
           <p:cNvSpPr/>
           <p:nvPr/>
         </p:nvSpPr>
@@ -16170,14 +16172,54 @@
       </p:sp>
       <p:sp>
         <p:nvSpPr>
-          <p:cNvPr id="14" name="Text 11"/>
-          <p:cNvSpPr/>
-          <p:nvPr/>
-        </p:nvSpPr>
-        <p:spPr>
-          <a:xfrm>
-            <a:off x="6144768" y="2157984"/>
-            <a:ext cx="256032" cy="256032"/>
+          <p:cNvPr id="17" name="Shape 13"/>
+          <p:cNvSpPr/>
+          <p:nvPr/>
+        </p:nvSpPr>
+        <p:spPr>
+          <a:xfrm rot="2700000">
+            <a:off x="6207587" y="2297430"/>
+            <a:ext cx="58156" cy="27432"/>
+          </a:xfrm>
+          <a:prstGeom prst="rect">
+            <a:avLst/>
+          </a:prstGeom>
+          <a:solidFill>
+            <a:srgbClr val="5A05F4"/>
+          </a:solidFill>
+          <a:ln/>
+        </p:spPr>
+      </p:sp>
+      <p:sp>
+        <p:nvSpPr>
+          <p:cNvPr id="18" name="Shape 14"/>
+          <p:cNvSpPr/>
+          <p:nvPr/>
+        </p:nvSpPr>
+        <p:spPr>
+          <a:xfrm rot="-3000000">
+            <a:off x="6235385" y="2271370"/>
+            <a:ext cx="121432" cy="27432"/>
+          </a:xfrm>
+          <a:prstGeom prst="rect">
+            <a:avLst/>
+          </a:prstGeom>
+          <a:solidFill>
+            <a:srgbClr val="5A05F4"/>
+          </a:solidFill>
+          <a:ln/>
+        </p:spPr>
+      </p:sp>
+      <p:sp>
+        <p:nvSpPr>
+          <p:cNvPr id="19" name="Text 15"/>
+          <p:cNvSpPr/>
+          <p:nvPr/>
+        </p:nvSpPr>
+        <p:spPr>
+          <a:xfrm>
+            <a:off x="6528816" y="2103120"/>
+            <a:ext cx="4617720" cy="384048"/>
           </a:xfrm>
           <a:prstGeom prst="rect">
             <a:avLst/>
@@ -16189,57 +16231,18 @@
           <a:bodyPr wrap="square" lIns="0" tIns="0" rIns="0" bIns="0" rtlCol="0" anchor="ctr"/>
           <a:lstStyle/>
           <a:p>
-            <a:pPr algn="ctr" indent="0" marL="0">
-              <a:buNone/>
-            </a:pPr>
-            <a:r>
-              <a:rPr lang="en-US" sz="1000" b="1" dirty="0">
-                <a:solidFill>
-                  <a:srgbClr val="5A05F4"/>
+            <a:pPr indent="0" marL="0">
+              <a:buNone/>
+            </a:pPr>
+            <a:r>
+              <a:rPr lang="en-US" sz="1250" dirty="0">
+                <a:solidFill>
+                  <a:srgbClr val="111318"/>
                 </a:solidFill>
                 <a:latin typeface="Montserrat" pitchFamily="34" charset="0"/>
                 <a:ea typeface="Montserrat" pitchFamily="34" charset="-122"/>
                 <a:cs typeface="Montserrat" pitchFamily="34" charset="-120"/>
               </a:rPr>
-              <a:t>✓</a:t>
-            </a:r>
-            <a:endParaRPr lang="en-US" sz="1000" dirty="0"/>
-          </a:p>
-        </p:txBody>
-      </p:sp>
-      <p:sp>
-        <p:nvSpPr>
-          <p:cNvPr id="15" name="Text 12"/>
-          <p:cNvSpPr/>
-          <p:nvPr/>
-        </p:nvSpPr>
-        <p:spPr>
-          <a:xfrm>
-            <a:off x="6528816" y="2103120"/>
-            <a:ext cx="4617720" cy="384048"/>
-          </a:xfrm>
-          <a:prstGeom prst="rect">
-            <a:avLst/>
-          </a:prstGeom>
-          <a:noFill/>
-          <a:ln/>
-        </p:spPr>
-        <p:txBody>
-          <a:bodyPr wrap="square" lIns="0" tIns="0" rIns="0" bIns="0" rtlCol="0" anchor="ctr"/>
-          <a:lstStyle/>
-          <a:p>
-            <a:pPr indent="0" marL="0">
-              <a:buNone/>
-            </a:pPr>
-            <a:r>
-              <a:rPr lang="en-US" sz="1250" dirty="0">
-                <a:solidFill>
-                  <a:srgbClr val="111318"/>
-                </a:solidFill>
-                <a:latin typeface="Montserrat" pitchFamily="34" charset="0"/>
-                <a:ea typeface="Montserrat" pitchFamily="34" charset="-122"/>
-                <a:cs typeface="Montserrat" pitchFamily="34" charset="-120"/>
-              </a:rPr>
               <a:t>у лозі чесний 503 і лічильник переходів</a:t>
             </a:r>
             <a:endParaRPr lang="en-US" sz="1250" dirty="0"/>
@@ -16248,7 +16251,7 @@
       </p:sp>
       <p:sp>
         <p:nvSpPr>
-          <p:cNvPr id="16" name="Shape 13"/>
+          <p:cNvPr id="20" name="Shape 16"/>
           <p:cNvSpPr/>
           <p:nvPr/>
         </p:nvSpPr>
@@ -16275,14 +16278,54 @@
       </p:sp>
       <p:sp>
         <p:nvSpPr>
-          <p:cNvPr id="17" name="Text 14"/>
-          <p:cNvSpPr/>
-          <p:nvPr/>
-        </p:nvSpPr>
-        <p:spPr>
-          <a:xfrm>
-            <a:off x="6144768" y="2724912"/>
-            <a:ext cx="256032" cy="256032"/>
+          <p:cNvPr id="21" name="Shape 17"/>
+          <p:cNvSpPr/>
+          <p:nvPr/>
+        </p:nvSpPr>
+        <p:spPr>
+          <a:xfrm rot="2700000">
+            <a:off x="6207587" y="2864358"/>
+            <a:ext cx="58156" cy="27432"/>
+          </a:xfrm>
+          <a:prstGeom prst="rect">
+            <a:avLst/>
+          </a:prstGeom>
+          <a:solidFill>
+            <a:srgbClr val="5A05F4"/>
+          </a:solidFill>
+          <a:ln/>
+        </p:spPr>
+      </p:sp>
+      <p:sp>
+        <p:nvSpPr>
+          <p:cNvPr id="22" name="Shape 18"/>
+          <p:cNvSpPr/>
+          <p:nvPr/>
+        </p:nvSpPr>
+        <p:spPr>
+          <a:xfrm rot="-3000000">
+            <a:off x="6235385" y="2838298"/>
+            <a:ext cx="121432" cy="27432"/>
+          </a:xfrm>
+          <a:prstGeom prst="rect">
+            <a:avLst/>
+          </a:prstGeom>
+          <a:solidFill>
+            <a:srgbClr val="5A05F4"/>
+          </a:solidFill>
+          <a:ln/>
+        </p:spPr>
+      </p:sp>
+      <p:sp>
+        <p:nvSpPr>
+          <p:cNvPr id="23" name="Text 19"/>
+          <p:cNvSpPr/>
+          <p:nvPr/>
+        </p:nvSpPr>
+        <p:spPr>
+          <a:xfrm>
+            <a:off x="6528816" y="2670048"/>
+            <a:ext cx="4617720" cy="384048"/>
           </a:xfrm>
           <a:prstGeom prst="rect">
             <a:avLst/>
@@ -16294,57 +16337,18 @@
           <a:bodyPr wrap="square" lIns="0" tIns="0" rIns="0" bIns="0" rtlCol="0" anchor="ctr"/>
           <a:lstStyle/>
           <a:p>
-            <a:pPr algn="ctr" indent="0" marL="0">
-              <a:buNone/>
-            </a:pPr>
-            <a:r>
-              <a:rPr lang="en-US" sz="1000" b="1" dirty="0">
-                <a:solidFill>
-                  <a:srgbClr val="5A05F4"/>
+            <a:pPr indent="0" marL="0">
+              <a:buNone/>
+            </a:pPr>
+            <a:r>
+              <a:rPr lang="en-US" sz="1250" dirty="0">
+                <a:solidFill>
+                  <a:srgbClr val="111318"/>
                 </a:solidFill>
                 <a:latin typeface="Montserrat" pitchFamily="34" charset="0"/>
                 <a:ea typeface="Montserrat" pitchFamily="34" charset="-122"/>
                 <a:cs typeface="Montserrat" pitchFamily="34" charset="-120"/>
               </a:rPr>
-              <a:t>✓</a:t>
-            </a:r>
-            <a:endParaRPr lang="en-US" sz="1000" dirty="0"/>
-          </a:p>
-        </p:txBody>
-      </p:sp>
-      <p:sp>
-        <p:nvSpPr>
-          <p:cNvPr id="18" name="Text 15"/>
-          <p:cNvSpPr/>
-          <p:nvPr/>
-        </p:nvSpPr>
-        <p:spPr>
-          <a:xfrm>
-            <a:off x="6528816" y="2670048"/>
-            <a:ext cx="4617720" cy="384048"/>
-          </a:xfrm>
-          <a:prstGeom prst="rect">
-            <a:avLst/>
-          </a:prstGeom>
-          <a:noFill/>
-          <a:ln/>
-        </p:spPr>
-        <p:txBody>
-          <a:bodyPr wrap="square" lIns="0" tIns="0" rIns="0" bIns="0" rtlCol="0" anchor="ctr"/>
-          <a:lstStyle/>
-          <a:p>
-            <a:pPr indent="0" marL="0">
-              <a:buNone/>
-            </a:pPr>
-            <a:r>
-              <a:rPr lang="en-US" sz="1250" dirty="0">
-                <a:solidFill>
-                  <a:srgbClr val="111318"/>
-                </a:solidFill>
-                <a:latin typeface="Montserrat" pitchFamily="34" charset="0"/>
-                <a:ea typeface="Montserrat" pitchFamily="34" charset="-122"/>
-                <a:cs typeface="Montserrat" pitchFamily="34" charset="-120"/>
-              </a:rPr>
               <a:t>поясню retry, fallback і breaker одним реченням</a:t>
             </a:r>
             <a:endParaRPr lang="en-US" sz="1250" dirty="0"/>
@@ -16353,7 +16357,7 @@
       </p:sp>
       <p:sp>
         <p:nvSpPr>
-          <p:cNvPr id="19" name="Text 16"/>
+          <p:cNvPr id="24" name="Text 20"/>
           <p:cNvSpPr/>
           <p:nvPr/>
         </p:nvSpPr>
@@ -16596,7 +16600,7 @@
       </p:pic>
       <p:sp>
         <p:nvSpPr>
-          <p:cNvPr id="6" name="Shape 3"/>
+          <p:cNvPr id="7" name="Shape 3"/>
           <p:cNvSpPr/>
           <p:nvPr/>
         </p:nvSpPr>
@@ -16623,7 +16627,7 @@
       </p:sp>
       <p:sp>
         <p:nvSpPr>
-          <p:cNvPr id="7" name="Shape 4"/>
+          <p:cNvPr id="8" name="Shape 4"/>
           <p:cNvSpPr/>
           <p:nvPr/>
         </p:nvSpPr>
@@ -16643,14 +16647,54 @@
       </p:sp>
       <p:sp>
         <p:nvSpPr>
-          <p:cNvPr id="8" name="Text 5"/>
-          <p:cNvSpPr/>
-          <p:nvPr/>
-        </p:nvSpPr>
-        <p:spPr>
-          <a:xfrm>
-            <a:off x="768096" y="1956816"/>
-            <a:ext cx="384048" cy="384048"/>
+          <p:cNvPr id="9" name="Shape 5"/>
+          <p:cNvSpPr/>
+          <p:nvPr/>
+        </p:nvSpPr>
+        <p:spPr>
+          <a:xfrm rot="2700000">
+            <a:off x="871789" y="2133094"/>
+            <a:ext cx="176662" cy="31492"/>
+          </a:xfrm>
+          <a:prstGeom prst="rect">
+            <a:avLst/>
+          </a:prstGeom>
+          <a:solidFill>
+            <a:srgbClr val="C62A2A"/>
+          </a:solidFill>
+          <a:ln/>
+        </p:spPr>
+      </p:sp>
+      <p:sp>
+        <p:nvSpPr>
+          <p:cNvPr id="10" name="Shape 6"/>
+          <p:cNvSpPr/>
+          <p:nvPr/>
+        </p:nvSpPr>
+        <p:spPr>
+          <a:xfrm rot="-2700000">
+            <a:off x="871789" y="2133094"/>
+            <a:ext cx="176662" cy="31492"/>
+          </a:xfrm>
+          <a:prstGeom prst="rect">
+            <a:avLst/>
+          </a:prstGeom>
+          <a:solidFill>
+            <a:srgbClr val="C62A2A"/>
+          </a:solidFill>
+          <a:ln/>
+        </p:spPr>
+      </p:sp>
+      <p:sp>
+        <p:nvSpPr>
+          <p:cNvPr id="11" name="Text 7"/>
+          <p:cNvSpPr/>
+          <p:nvPr/>
+        </p:nvSpPr>
+        <p:spPr>
+          <a:xfrm>
+            <a:off x="1298448" y="1783080"/>
+            <a:ext cx="10149840" cy="731520"/>
           </a:xfrm>
           <a:prstGeom prst="rect">
             <a:avLst/>
@@ -16662,71 +16706,32 @@
           <a:bodyPr wrap="square" lIns="0" tIns="0" rIns="0" bIns="0" rtlCol="0" anchor="ctr"/>
           <a:lstStyle/>
           <a:p>
-            <a:pPr algn="ctr" indent="0" marL="0">
+            <a:pPr indent="0" marL="0">
               <a:buNone/>
             </a:pPr>
             <a:r>
               <a:rPr lang="en-US" sz="1300" b="1" dirty="0">
                 <a:solidFill>
-                  <a:srgbClr val="C62A2A"/>
+                  <a:srgbClr val="111318"/>
                 </a:solidFill>
                 <a:latin typeface="Montserrat" pitchFamily="34" charset="0"/>
                 <a:ea typeface="Montserrat" pitchFamily="34" charset="-122"/>
                 <a:cs typeface="Montserrat" pitchFamily="34" charset="-120"/>
               </a:rPr>
-              <a:t>✕</a:t>
-            </a:r>
-            <a:endParaRPr lang="en-US" sz="1300" dirty="0"/>
-          </a:p>
-        </p:txBody>
-      </p:sp>
-      <p:sp>
-        <p:nvSpPr>
-          <p:cNvPr id="9" name="Text 6"/>
-          <p:cNvSpPr/>
-          <p:nvPr/>
-        </p:nvSpPr>
-        <p:spPr>
-          <a:xfrm>
-            <a:off x="1298448" y="1783080"/>
-            <a:ext cx="10149840" cy="731520"/>
-          </a:xfrm>
-          <a:prstGeom prst="rect">
-            <a:avLst/>
-          </a:prstGeom>
-          <a:noFill/>
-          <a:ln/>
-        </p:spPr>
-        <p:txBody>
-          <a:bodyPr wrap="square" lIns="0" tIns="0" rIns="0" bIns="0" rtlCol="0" anchor="ctr"/>
-          <a:lstStyle/>
-          <a:p>
+              <a:t>Retry без паузи і без стелі   </a:t>
+            </a:r>
             <a:pPr indent="0" marL="0">
               <a:buNone/>
             </a:pPr>
             <a:r>
-              <a:rPr lang="en-US" sz="1300" b="1" dirty="0">
-                <a:solidFill>
-                  <a:srgbClr val="111318"/>
+              <a:rPr lang="en-US" sz="1150" dirty="0">
+                <a:solidFill>
+                  <a:srgbClr val="555B66"/>
                 </a:solidFill>
                 <a:latin typeface="Montserrat" pitchFamily="34" charset="0"/>
                 <a:ea typeface="Montserrat" pitchFamily="34" charset="-122"/>
                 <a:cs typeface="Montserrat" pitchFamily="34" charset="-120"/>
               </a:rPr>
-              <a:t>Retry без паузи і без стелі   </a:t>
-            </a:r>
-            <a:pPr indent="0" marL="0">
-              <a:buNone/>
-            </a:pPr>
-            <a:r>
-              <a:rPr lang="en-US" sz="1150" dirty="0">
-                <a:solidFill>
-                  <a:srgbClr val="555B66"/>
-                </a:solidFill>
-                <a:latin typeface="Montserrat" pitchFamily="34" charset="0"/>
-                <a:ea typeface="Montserrat" pitchFamily="34" charset="-122"/>
-                <a:cs typeface="Montserrat" pitchFamily="34" charset="-120"/>
-              </a:rPr>
               <a:t>ваш код стає другою половиною інциденту</a:t>
             </a:r>
             <a:endParaRPr lang="en-US" sz="1300" dirty="0"/>
@@ -16735,7 +16740,7 @@
       </p:sp>
       <p:sp>
         <p:nvSpPr>
-          <p:cNvPr id="10" name="Shape 7"/>
+          <p:cNvPr id="12" name="Shape 8"/>
           <p:cNvSpPr/>
           <p:nvPr/>
         </p:nvSpPr>
@@ -16762,7 +16767,7 @@
       </p:sp>
       <p:sp>
         <p:nvSpPr>
-          <p:cNvPr id="11" name="Shape 8"/>
+          <p:cNvPr id="13" name="Shape 9"/>
           <p:cNvSpPr/>
           <p:nvPr/>
         </p:nvSpPr>
@@ -16782,14 +16787,54 @@
       </p:sp>
       <p:sp>
         <p:nvSpPr>
-          <p:cNvPr id="12" name="Text 9"/>
-          <p:cNvSpPr/>
-          <p:nvPr/>
-        </p:nvSpPr>
-        <p:spPr>
-          <a:xfrm>
-            <a:off x="768096" y="2825496"/>
-            <a:ext cx="384048" cy="384048"/>
+          <p:cNvPr id="14" name="Shape 10"/>
+          <p:cNvSpPr/>
+          <p:nvPr/>
+        </p:nvSpPr>
+        <p:spPr>
+          <a:xfrm rot="2700000">
+            <a:off x="871789" y="3001774"/>
+            <a:ext cx="176662" cy="31492"/>
+          </a:xfrm>
+          <a:prstGeom prst="rect">
+            <a:avLst/>
+          </a:prstGeom>
+          <a:solidFill>
+            <a:srgbClr val="C62A2A"/>
+          </a:solidFill>
+          <a:ln/>
+        </p:spPr>
+      </p:sp>
+      <p:sp>
+        <p:nvSpPr>
+          <p:cNvPr id="15" name="Shape 11"/>
+          <p:cNvSpPr/>
+          <p:nvPr/>
+        </p:nvSpPr>
+        <p:spPr>
+          <a:xfrm rot="-2700000">
+            <a:off x="871789" y="3001774"/>
+            <a:ext cx="176662" cy="31492"/>
+          </a:xfrm>
+          <a:prstGeom prst="rect">
+            <a:avLst/>
+          </a:prstGeom>
+          <a:solidFill>
+            <a:srgbClr val="C62A2A"/>
+          </a:solidFill>
+          <a:ln/>
+        </p:spPr>
+      </p:sp>
+      <p:sp>
+        <p:nvSpPr>
+          <p:cNvPr id="16" name="Text 12"/>
+          <p:cNvSpPr/>
+          <p:nvPr/>
+        </p:nvSpPr>
+        <p:spPr>
+          <a:xfrm>
+            <a:off x="1298448" y="2651760"/>
+            <a:ext cx="10149840" cy="731520"/>
           </a:xfrm>
           <a:prstGeom prst="rect">
             <a:avLst/>
@@ -16801,71 +16846,32 @@
           <a:bodyPr wrap="square" lIns="0" tIns="0" rIns="0" bIns="0" rtlCol="0" anchor="ctr"/>
           <a:lstStyle/>
           <a:p>
-            <a:pPr algn="ctr" indent="0" marL="0">
+            <a:pPr indent="0" marL="0">
               <a:buNone/>
             </a:pPr>
             <a:r>
               <a:rPr lang="en-US" sz="1300" b="1" dirty="0">
                 <a:solidFill>
-                  <a:srgbClr val="C62A2A"/>
+                  <a:srgbClr val="111318"/>
                 </a:solidFill>
                 <a:latin typeface="Montserrat" pitchFamily="34" charset="0"/>
                 <a:ea typeface="Montserrat" pitchFamily="34" charset="-122"/>
                 <a:cs typeface="Montserrat" pitchFamily="34" charset="-120"/>
               </a:rPr>
-              <a:t>✕</a:t>
-            </a:r>
-            <a:endParaRPr lang="en-US" sz="1300" dirty="0"/>
-          </a:p>
-        </p:txBody>
-      </p:sp>
-      <p:sp>
-        <p:nvSpPr>
-          <p:cNvPr id="13" name="Text 10"/>
-          <p:cNvSpPr/>
-          <p:nvPr/>
-        </p:nvSpPr>
-        <p:spPr>
-          <a:xfrm>
-            <a:off x="1298448" y="2651760"/>
-            <a:ext cx="10149840" cy="731520"/>
-          </a:xfrm>
-          <a:prstGeom prst="rect">
-            <a:avLst/>
-          </a:prstGeom>
-          <a:noFill/>
-          <a:ln/>
-        </p:spPr>
-        <p:txBody>
-          <a:bodyPr wrap="square" lIns="0" tIns="0" rIns="0" bIns="0" rtlCol="0" anchor="ctr"/>
-          <a:lstStyle/>
-          <a:p>
+              <a:t>Заглушка зі статусом 200   </a:t>
+            </a:r>
             <a:pPr indent="0" marL="0">
               <a:buNone/>
             </a:pPr>
             <a:r>
-              <a:rPr lang="en-US" sz="1300" b="1" dirty="0">
-                <a:solidFill>
-                  <a:srgbClr val="111318"/>
+              <a:rPr lang="en-US" sz="1150" dirty="0">
+                <a:solidFill>
+                  <a:srgbClr val="555B66"/>
                 </a:solidFill>
                 <a:latin typeface="Montserrat" pitchFamily="34" charset="0"/>
                 <a:ea typeface="Montserrat" pitchFamily="34" charset="-122"/>
                 <a:cs typeface="Montserrat" pitchFamily="34" charset="-120"/>
               </a:rPr>
-              <a:t>Заглушка зі статусом 200   </a:t>
-            </a:r>
-            <a:pPr indent="0" marL="0">
-              <a:buNone/>
-            </a:pPr>
-            <a:r>
-              <a:rPr lang="en-US" sz="1150" dirty="0">
-                <a:solidFill>
-                  <a:srgbClr val="555B66"/>
-                </a:solidFill>
-                <a:latin typeface="Montserrat" pitchFamily="34" charset="0"/>
-                <a:ea typeface="Montserrat" pitchFamily="34" charset="-122"/>
-                <a:cs typeface="Montserrat" pitchFamily="34" charset="-120"/>
-              </a:rPr>
               <a:t>моніторинг бачить здорову систему, коли всі бачать вибачення</a:t>
             </a:r>
             <a:endParaRPr lang="en-US" sz="1300" dirty="0"/>
@@ -16874,7 +16880,7 @@
       </p:sp>
       <p:sp>
         <p:nvSpPr>
-          <p:cNvPr id="14" name="Shape 11"/>
+          <p:cNvPr id="17" name="Shape 13"/>
           <p:cNvSpPr/>
           <p:nvPr/>
         </p:nvSpPr>
@@ -16901,7 +16907,7 @@
       </p:sp>
       <p:sp>
         <p:nvSpPr>
-          <p:cNvPr id="15" name="Shape 12"/>
+          <p:cNvPr id="18" name="Shape 14"/>
           <p:cNvSpPr/>
           <p:nvPr/>
         </p:nvSpPr>
@@ -16921,14 +16927,54 @@
       </p:sp>
       <p:sp>
         <p:nvSpPr>
-          <p:cNvPr id="16" name="Text 13"/>
-          <p:cNvSpPr/>
-          <p:nvPr/>
-        </p:nvSpPr>
-        <p:spPr>
-          <a:xfrm>
-            <a:off x="768096" y="3694176"/>
-            <a:ext cx="384048" cy="384048"/>
+          <p:cNvPr id="19" name="Shape 15"/>
+          <p:cNvSpPr/>
+          <p:nvPr/>
+        </p:nvSpPr>
+        <p:spPr>
+          <a:xfrm rot="2700000">
+            <a:off x="871789" y="3870454"/>
+            <a:ext cx="176662" cy="31492"/>
+          </a:xfrm>
+          <a:prstGeom prst="rect">
+            <a:avLst/>
+          </a:prstGeom>
+          <a:solidFill>
+            <a:srgbClr val="C62A2A"/>
+          </a:solidFill>
+          <a:ln/>
+        </p:spPr>
+      </p:sp>
+      <p:sp>
+        <p:nvSpPr>
+          <p:cNvPr id="20" name="Shape 16"/>
+          <p:cNvSpPr/>
+          <p:nvPr/>
+        </p:nvSpPr>
+        <p:spPr>
+          <a:xfrm rot="-2700000">
+            <a:off x="871789" y="3870454"/>
+            <a:ext cx="176662" cy="31492"/>
+          </a:xfrm>
+          <a:prstGeom prst="rect">
+            <a:avLst/>
+          </a:prstGeom>
+          <a:solidFill>
+            <a:srgbClr val="C62A2A"/>
+          </a:solidFill>
+          <a:ln/>
+        </p:spPr>
+      </p:sp>
+      <p:sp>
+        <p:nvSpPr>
+          <p:cNvPr id="21" name="Text 17"/>
+          <p:cNvSpPr/>
+          <p:nvPr/>
+        </p:nvSpPr>
+        <p:spPr>
+          <a:xfrm>
+            <a:off x="1298448" y="3520440"/>
+            <a:ext cx="10149840" cy="731520"/>
           </a:xfrm>
           <a:prstGeom prst="rect">
             <a:avLst/>
@@ -16940,71 +16986,32 @@
           <a:bodyPr wrap="square" lIns="0" tIns="0" rIns="0" bIns="0" rtlCol="0" anchor="ctr"/>
           <a:lstStyle/>
           <a:p>
-            <a:pPr algn="ctr" indent="0" marL="0">
+            <a:pPr indent="0" marL="0">
               <a:buNone/>
             </a:pPr>
             <a:r>
               <a:rPr lang="en-US" sz="1300" b="1" dirty="0">
                 <a:solidFill>
-                  <a:srgbClr val="C62A2A"/>
+                  <a:srgbClr val="111318"/>
                 </a:solidFill>
                 <a:latin typeface="Montserrat" pitchFamily="34" charset="0"/>
                 <a:ea typeface="Montserrat" pitchFamily="34" charset="-122"/>
                 <a:cs typeface="Montserrat" pitchFamily="34" charset="-120"/>
               </a:rPr>
-              <a:t>✕</a:t>
-            </a:r>
-            <a:endParaRPr lang="en-US" sz="1300" dirty="0"/>
-          </a:p>
-        </p:txBody>
-      </p:sp>
-      <p:sp>
-        <p:nvSpPr>
-          <p:cNvPr id="17" name="Text 14"/>
-          <p:cNvSpPr/>
-          <p:nvPr/>
-        </p:nvSpPr>
-        <p:spPr>
-          <a:xfrm>
-            <a:off x="1298448" y="3520440"/>
-            <a:ext cx="10149840" cy="731520"/>
-          </a:xfrm>
-          <a:prstGeom prst="rect">
-            <a:avLst/>
-          </a:prstGeom>
-          <a:noFill/>
-          <a:ln/>
-        </p:spPr>
-        <p:txBody>
-          <a:bodyPr wrap="square" lIns="0" tIns="0" rIns="0" bIns="0" rtlCol="0" anchor="ctr"/>
-          <a:lstStyle/>
-          <a:p>
+              <a:t>Ретраї в кількох шарах одразу   </a:t>
+            </a:r>
             <a:pPr indent="0" marL="0">
               <a:buNone/>
             </a:pPr>
             <a:r>
-              <a:rPr lang="en-US" sz="1300" b="1" dirty="0">
-                <a:solidFill>
-                  <a:srgbClr val="111318"/>
+              <a:rPr lang="en-US" sz="1150" dirty="0">
+                <a:solidFill>
+                  <a:srgbClr val="555B66"/>
                 </a:solidFill>
                 <a:latin typeface="Montserrat" pitchFamily="34" charset="0"/>
                 <a:ea typeface="Montserrat" pitchFamily="34" charset="-122"/>
                 <a:cs typeface="Montserrat" pitchFamily="34" charset="-120"/>
               </a:rPr>
-              <a:t>Ретраї в кількох шарах одразу   </a:t>
-            </a:r>
-            <a:pPr indent="0" marL="0">
-              <a:buNone/>
-            </a:pPr>
-            <a:r>
-              <a:rPr lang="en-US" sz="1150" dirty="0">
-                <a:solidFill>
-                  <a:srgbClr val="555B66"/>
-                </a:solidFill>
-                <a:latin typeface="Montserrat" pitchFamily="34" charset="0"/>
-                <a:ea typeface="Montserrat" pitchFamily="34" charset="-122"/>
-                <a:cs typeface="Montserrat" pitchFamily="34" charset="-120"/>
-              </a:rPr>
               <a:t>бюджети часу перемножуються — «швидка відмова» на пів хвилини</a:t>
             </a:r>
             <a:endParaRPr lang="en-US" sz="1300" dirty="0"/>
@@ -17013,7 +17020,7 @@
       </p:sp>
       <p:sp>
         <p:nvSpPr>
-          <p:cNvPr id="18" name="Shape 15"/>
+          <p:cNvPr id="22" name="Shape 18"/>
           <p:cNvSpPr/>
           <p:nvPr/>
         </p:nvSpPr>
@@ -17040,7 +17047,7 @@
       </p:sp>
       <p:sp>
         <p:nvSpPr>
-          <p:cNvPr id="19" name="Shape 16"/>
+          <p:cNvPr id="23" name="Shape 19"/>
           <p:cNvSpPr/>
           <p:nvPr/>
         </p:nvSpPr>
@@ -17060,14 +17067,54 @@
       </p:sp>
       <p:sp>
         <p:nvSpPr>
-          <p:cNvPr id="20" name="Text 17"/>
-          <p:cNvSpPr/>
-          <p:nvPr/>
-        </p:nvSpPr>
-        <p:spPr>
-          <a:xfrm>
-            <a:off x="768096" y="4562856"/>
-            <a:ext cx="384048" cy="384048"/>
+          <p:cNvPr id="24" name="Shape 20"/>
+          <p:cNvSpPr/>
+          <p:nvPr/>
+        </p:nvSpPr>
+        <p:spPr>
+          <a:xfrm rot="2700000">
+            <a:off x="871789" y="4739134"/>
+            <a:ext cx="176662" cy="31492"/>
+          </a:xfrm>
+          <a:prstGeom prst="rect">
+            <a:avLst/>
+          </a:prstGeom>
+          <a:solidFill>
+            <a:srgbClr val="C62A2A"/>
+          </a:solidFill>
+          <a:ln/>
+        </p:spPr>
+      </p:sp>
+      <p:sp>
+        <p:nvSpPr>
+          <p:cNvPr id="25" name="Shape 21"/>
+          <p:cNvSpPr/>
+          <p:nvPr/>
+        </p:nvSpPr>
+        <p:spPr>
+          <a:xfrm rot="-2700000">
+            <a:off x="871789" y="4739134"/>
+            <a:ext cx="176662" cy="31492"/>
+          </a:xfrm>
+          <a:prstGeom prst="rect">
+            <a:avLst/>
+          </a:prstGeom>
+          <a:solidFill>
+            <a:srgbClr val="C62A2A"/>
+          </a:solidFill>
+          <a:ln/>
+        </p:spPr>
+      </p:sp>
+      <p:sp>
+        <p:nvSpPr>
+          <p:cNvPr id="26" name="Text 22"/>
+          <p:cNvSpPr/>
+          <p:nvPr/>
+        </p:nvSpPr>
+        <p:spPr>
+          <a:xfrm>
+            <a:off x="1298448" y="4389120"/>
+            <a:ext cx="10149840" cy="731520"/>
           </a:xfrm>
           <a:prstGeom prst="rect">
             <a:avLst/>
@@ -17079,71 +17126,32 @@
           <a:bodyPr wrap="square" lIns="0" tIns="0" rIns="0" bIns="0" rtlCol="0" anchor="ctr"/>
           <a:lstStyle/>
           <a:p>
-            <a:pPr algn="ctr" indent="0" marL="0">
+            <a:pPr indent="0" marL="0">
               <a:buNone/>
             </a:pPr>
             <a:r>
               <a:rPr lang="en-US" sz="1300" b="1" dirty="0">
                 <a:solidFill>
-                  <a:srgbClr val="C62A2A"/>
+                  <a:srgbClr val="111318"/>
                 </a:solidFill>
                 <a:latin typeface="Montserrat" pitchFamily="34" charset="0"/>
                 <a:ea typeface="Montserrat" pitchFamily="34" charset="-122"/>
                 <a:cs typeface="Montserrat" pitchFamily="34" charset="-120"/>
               </a:rPr>
-              <a:t>✕</a:t>
-            </a:r>
-            <a:endParaRPr lang="en-US" sz="1300" dirty="0"/>
-          </a:p>
-        </p:txBody>
-      </p:sp>
-      <p:sp>
-        <p:nvSpPr>
-          <p:cNvPr id="21" name="Text 18"/>
-          <p:cNvSpPr/>
-          <p:nvPr/>
-        </p:nvSpPr>
-        <p:spPr>
-          <a:xfrm>
-            <a:off x="1298448" y="4389120"/>
-            <a:ext cx="10149840" cy="731520"/>
-          </a:xfrm>
-          <a:prstGeom prst="rect">
-            <a:avLst/>
-          </a:prstGeom>
-          <a:noFill/>
-          <a:ln/>
-        </p:spPr>
-        <p:txBody>
-          <a:bodyPr wrap="square" lIns="0" tIns="0" rIns="0" bIns="0" rtlCol="0" anchor="ctr"/>
-          <a:lstStyle/>
-          <a:p>
+              <a:t>Breaker без half-open   </a:t>
+            </a:r>
             <a:pPr indent="0" marL="0">
               <a:buNone/>
             </a:pPr>
             <a:r>
-              <a:rPr lang="en-US" sz="1300" b="1" dirty="0">
-                <a:solidFill>
-                  <a:srgbClr val="111318"/>
+              <a:rPr lang="en-US" sz="1150" dirty="0">
+                <a:solidFill>
+                  <a:srgbClr val="555B66"/>
                 </a:solidFill>
                 <a:latin typeface="Montserrat" pitchFamily="34" charset="0"/>
                 <a:ea typeface="Montserrat" pitchFamily="34" charset="-122"/>
                 <a:cs typeface="Montserrat" pitchFamily="34" charset="-120"/>
               </a:rPr>
-              <a:t>Breaker без half-open   </a:t>
-            </a:r>
-            <a:pPr indent="0" marL="0">
-              <a:buNone/>
-            </a:pPr>
-            <a:r>
-              <a:rPr lang="en-US" sz="1150" dirty="0">
-                <a:solidFill>
-                  <a:srgbClr val="555B66"/>
-                </a:solidFill>
-                <a:latin typeface="Montserrat" pitchFamily="34" charset="0"/>
-                <a:ea typeface="Montserrat" pitchFamily="34" charset="-122"/>
-                <a:cs typeface="Montserrat" pitchFamily="34" charset="-120"/>
-              </a:rPr>
               <a:t>система лишається деградованою після того, як усе полагодилося</a:t>
             </a:r>
             <a:endParaRPr lang="en-US" sz="1300" dirty="0"/>
@@ -17152,7 +17160,7 @@
       </p:sp>
       <p:sp>
         <p:nvSpPr>
-          <p:cNvPr id="22" name="Shape 19"/>
+          <p:cNvPr id="27" name="Shape 23"/>
           <p:cNvSpPr/>
           <p:nvPr/>
         </p:nvSpPr>
@@ -17179,7 +17187,7 @@
       </p:sp>
       <p:sp>
         <p:nvSpPr>
-          <p:cNvPr id="23" name="Shape 20"/>
+          <p:cNvPr id="28" name="Shape 24"/>
           <p:cNvSpPr/>
           <p:nvPr/>
         </p:nvSpPr>
@@ -17199,46 +17207,47 @@
       </p:sp>
       <p:sp>
         <p:nvSpPr>
-          <p:cNvPr id="24" name="Text 21"/>
-          <p:cNvSpPr/>
-          <p:nvPr/>
-        </p:nvSpPr>
-        <p:spPr>
-          <a:xfrm>
-            <a:off x="768096" y="5431536"/>
-            <a:ext cx="384048" cy="384048"/>
-          </a:xfrm>
-          <a:prstGeom prst="rect">
-            <a:avLst/>
-          </a:prstGeom>
-          <a:noFill/>
-          <a:ln/>
-        </p:spPr>
-        <p:txBody>
-          <a:bodyPr wrap="square" lIns="0" tIns="0" rIns="0" bIns="0" rtlCol="0" anchor="ctr"/>
-          <a:lstStyle/>
-          <a:p>
-            <a:pPr algn="ctr" indent="0" marL="0">
-              <a:buNone/>
-            </a:pPr>
-            <a:r>
-              <a:rPr lang="en-US" sz="1300" b="1" dirty="0">
-                <a:solidFill>
-                  <a:srgbClr val="C62A2A"/>
-                </a:solidFill>
-                <a:latin typeface="Montserrat" pitchFamily="34" charset="0"/>
-                <a:ea typeface="Montserrat" pitchFamily="34" charset="-122"/>
-                <a:cs typeface="Montserrat" pitchFamily="34" charset="-120"/>
-              </a:rPr>
-              <a:t>✕</a:t>
-            </a:r>
-            <a:endParaRPr lang="en-US" sz="1300" dirty="0"/>
-          </a:p>
-        </p:txBody>
-      </p:sp>
-      <p:sp>
-        <p:nvSpPr>
-          <p:cNvPr id="25" name="Text 22"/>
+          <p:cNvPr id="29" name="Shape 25"/>
+          <p:cNvSpPr/>
+          <p:nvPr/>
+        </p:nvSpPr>
+        <p:spPr>
+          <a:xfrm rot="2700000">
+            <a:off x="871789" y="5607814"/>
+            <a:ext cx="176662" cy="31492"/>
+          </a:xfrm>
+          <a:prstGeom prst="rect">
+            <a:avLst/>
+          </a:prstGeom>
+          <a:solidFill>
+            <a:srgbClr val="C62A2A"/>
+          </a:solidFill>
+          <a:ln/>
+        </p:spPr>
+      </p:sp>
+      <p:sp>
+        <p:nvSpPr>
+          <p:cNvPr id="30" name="Shape 26"/>
+          <p:cNvSpPr/>
+          <p:nvPr/>
+        </p:nvSpPr>
+        <p:spPr>
+          <a:xfrm rot="-2700000">
+            <a:off x="871789" y="5607814"/>
+            <a:ext cx="176662" cy="31492"/>
+          </a:xfrm>
+          <a:prstGeom prst="rect">
+            <a:avLst/>
+          </a:prstGeom>
+          <a:solidFill>
+            <a:srgbClr val="C62A2A"/>
+          </a:solidFill>
+          <a:ln/>
+        </p:spPr>
+      </p:sp>
+      <p:sp>
+        <p:nvSpPr>
+          <p:cNvPr id="31" name="Text 27"/>
           <p:cNvSpPr/>
           <p:nvPr/>
         </p:nvSpPr>
@@ -17495,7 +17504,7 @@
       </p:pic>
       <p:sp>
         <p:nvSpPr>
-          <p:cNvPr id="6" name="Shape 3"/>
+          <p:cNvPr id="7" name="Shape 3"/>
           <p:cNvSpPr/>
           <p:nvPr/>
         </p:nvSpPr>
@@ -17522,7 +17531,7 @@
       </p:sp>
       <p:sp>
         <p:nvSpPr>
-          <p:cNvPr id="7" name="Text 4"/>
+          <p:cNvPr id="8" name="Text 4"/>
           <p:cNvSpPr/>
           <p:nvPr/>
         </p:nvSpPr>
@@ -17561,7 +17570,7 @@
       </p:sp>
       <p:sp>
         <p:nvSpPr>
-          <p:cNvPr id="8" name="Text 5"/>
+          <p:cNvPr id="9" name="Text 5"/>
           <p:cNvSpPr/>
           <p:nvPr/>
         </p:nvSpPr>
@@ -17661,7 +17670,7 @@
       </p:sp>
       <p:sp>
         <p:nvSpPr>
-          <p:cNvPr id="9" name="Shape 6"/>
+          <p:cNvPr id="10" name="Shape 6"/>
           <p:cNvSpPr/>
           <p:nvPr/>
         </p:nvSpPr>
@@ -17683,7 +17692,7 @@
       </p:sp>
       <p:sp>
         <p:nvSpPr>
-          <p:cNvPr id="10" name="Text 7"/>
+          <p:cNvPr id="11" name="Text 7"/>
           <p:cNvSpPr/>
           <p:nvPr/>
         </p:nvSpPr>
@@ -17722,7 +17731,7 @@
       </p:sp>
       <p:sp>
         <p:nvSpPr>
-          <p:cNvPr id="11" name="Text 8"/>
+          <p:cNvPr id="12" name="Text 8"/>
           <p:cNvSpPr/>
           <p:nvPr/>
         </p:nvSpPr>
@@ -17764,7 +17773,7 @@
       </p:sp>
       <p:sp>
         <p:nvSpPr>
-          <p:cNvPr id="12" name="Shape 9"/>
+          <p:cNvPr id="13" name="Shape 9"/>
           <p:cNvSpPr/>
           <p:nvPr/>
         </p:nvSpPr>
@@ -17791,7 +17800,7 @@
       </p:sp>
       <p:sp>
         <p:nvSpPr>
-          <p:cNvPr id="13" name="Text 10"/>
+          <p:cNvPr id="14" name="Text 10"/>
           <p:cNvSpPr/>
           <p:nvPr/>
         </p:nvSpPr>
@@ -17830,7 +17839,7 @@
       </p:sp>
       <p:sp>
         <p:nvSpPr>
-          <p:cNvPr id="14" name="Text 11"/>
+          <p:cNvPr id="15" name="Text 11"/>
           <p:cNvSpPr/>
           <p:nvPr/>
         </p:nvSpPr>
@@ -18596,7 +18605,7 @@
       </p:pic>
       <p:sp>
         <p:nvSpPr>
-          <p:cNvPr id="6" name="Shape 3"/>
+          <p:cNvPr id="7" name="Shape 3"/>
           <p:cNvSpPr/>
           <p:nvPr/>
         </p:nvSpPr>
@@ -18623,7 +18632,7 @@
       </p:sp>
       <p:sp>
         <p:nvSpPr>
-          <p:cNvPr id="7" name="Shape 4"/>
+          <p:cNvPr id="8" name="Shape 4"/>
           <p:cNvSpPr/>
           <p:nvPr/>
         </p:nvSpPr>
@@ -18643,7 +18652,7 @@
       </p:sp>
       <p:sp>
         <p:nvSpPr>
-          <p:cNvPr id="8" name="Text 5"/>
+          <p:cNvPr id="9" name="Text 5"/>
           <p:cNvSpPr/>
           <p:nvPr/>
         </p:nvSpPr>
@@ -18682,7 +18691,7 @@
       </p:sp>
       <p:sp>
         <p:nvSpPr>
-          <p:cNvPr id="9" name="Text 6"/>
+          <p:cNvPr id="10" name="Text 6"/>
           <p:cNvSpPr/>
           <p:nvPr/>
         </p:nvSpPr>
@@ -18721,7 +18730,7 @@
       </p:sp>
       <p:sp>
         <p:nvSpPr>
-          <p:cNvPr id="10" name="Shape 7"/>
+          <p:cNvPr id="11" name="Shape 7"/>
           <p:cNvSpPr/>
           <p:nvPr/>
         </p:nvSpPr>
@@ -18748,7 +18757,7 @@
       </p:sp>
       <p:sp>
         <p:nvSpPr>
-          <p:cNvPr id="11" name="Shape 8"/>
+          <p:cNvPr id="12" name="Shape 8"/>
           <p:cNvSpPr/>
           <p:nvPr/>
         </p:nvSpPr>
@@ -18768,7 +18777,7 @@
       </p:sp>
       <p:sp>
         <p:nvSpPr>
-          <p:cNvPr id="12" name="Text 9"/>
+          <p:cNvPr id="13" name="Text 9"/>
           <p:cNvSpPr/>
           <p:nvPr/>
         </p:nvSpPr>
@@ -18807,7 +18816,7 @@
       </p:sp>
       <p:sp>
         <p:nvSpPr>
-          <p:cNvPr id="13" name="Text 10"/>
+          <p:cNvPr id="14" name="Text 10"/>
           <p:cNvSpPr/>
           <p:nvPr/>
         </p:nvSpPr>
@@ -18846,7 +18855,7 @@
       </p:sp>
       <p:sp>
         <p:nvSpPr>
-          <p:cNvPr id="14" name="Shape 11"/>
+          <p:cNvPr id="15" name="Shape 11"/>
           <p:cNvSpPr/>
           <p:nvPr/>
         </p:nvSpPr>
@@ -18873,7 +18882,7 @@
       </p:sp>
       <p:sp>
         <p:nvSpPr>
-          <p:cNvPr id="15" name="Shape 12"/>
+          <p:cNvPr id="16" name="Shape 12"/>
           <p:cNvSpPr/>
           <p:nvPr/>
         </p:nvSpPr>
@@ -18893,7 +18902,7 @@
       </p:sp>
       <p:sp>
         <p:nvSpPr>
-          <p:cNvPr id="16" name="Text 13"/>
+          <p:cNvPr id="17" name="Text 13"/>
           <p:cNvSpPr/>
           <p:nvPr/>
         </p:nvSpPr>
@@ -18932,7 +18941,7 @@
       </p:sp>
       <p:sp>
         <p:nvSpPr>
-          <p:cNvPr id="17" name="Text 14"/>
+          <p:cNvPr id="18" name="Text 14"/>
           <p:cNvSpPr/>
           <p:nvPr/>
         </p:nvSpPr>
@@ -18971,7 +18980,7 @@
       </p:sp>
       <p:sp>
         <p:nvSpPr>
-          <p:cNvPr id="18" name="Shape 15"/>
+          <p:cNvPr id="19" name="Shape 15"/>
           <p:cNvSpPr/>
           <p:nvPr/>
         </p:nvSpPr>
@@ -18998,7 +19007,7 @@
       </p:sp>
       <p:sp>
         <p:nvSpPr>
-          <p:cNvPr id="19" name="Shape 16"/>
+          <p:cNvPr id="20" name="Shape 16"/>
           <p:cNvSpPr/>
           <p:nvPr/>
         </p:nvSpPr>
@@ -19018,7 +19027,7 @@
       </p:sp>
       <p:sp>
         <p:nvSpPr>
-          <p:cNvPr id="20" name="Text 17"/>
+          <p:cNvPr id="21" name="Text 17"/>
           <p:cNvSpPr/>
           <p:nvPr/>
         </p:nvSpPr>
@@ -19057,7 +19066,7 @@
       </p:sp>
       <p:sp>
         <p:nvSpPr>
-          <p:cNvPr id="21" name="Text 18"/>
+          <p:cNvPr id="22" name="Text 18"/>
           <p:cNvSpPr/>
           <p:nvPr/>
         </p:nvSpPr>
@@ -19096,7 +19105,7 @@
       </p:sp>
       <p:sp>
         <p:nvSpPr>
-          <p:cNvPr id="22" name="Shape 19"/>
+          <p:cNvPr id="23" name="Shape 19"/>
           <p:cNvSpPr/>
           <p:nvPr/>
         </p:nvSpPr>
@@ -19123,7 +19132,7 @@
       </p:sp>
       <p:sp>
         <p:nvSpPr>
-          <p:cNvPr id="23" name="Shape 20"/>
+          <p:cNvPr id="24" name="Shape 20"/>
           <p:cNvSpPr/>
           <p:nvPr/>
         </p:nvSpPr>
@@ -19143,7 +19152,7 @@
       </p:sp>
       <p:sp>
         <p:nvSpPr>
-          <p:cNvPr id="24" name="Text 21"/>
+          <p:cNvPr id="25" name="Text 21"/>
           <p:cNvSpPr/>
           <p:nvPr/>
         </p:nvSpPr>
@@ -19182,7 +19191,7 @@
       </p:sp>
       <p:sp>
         <p:nvSpPr>
-          <p:cNvPr id="25" name="Text 22"/>
+          <p:cNvPr id="26" name="Text 22"/>
           <p:cNvSpPr/>
           <p:nvPr/>
         </p:nvSpPr>
@@ -19221,7 +19230,7 @@
       </p:sp>
       <p:sp>
         <p:nvSpPr>
-          <p:cNvPr id="26" name="Shape 23"/>
+          <p:cNvPr id="27" name="Shape 23"/>
           <p:cNvSpPr/>
           <p:nvPr/>
         </p:nvSpPr>
@@ -19248,7 +19257,7 @@
       </p:sp>
       <p:sp>
         <p:nvSpPr>
-          <p:cNvPr id="27" name="Shape 24"/>
+          <p:cNvPr id="28" name="Shape 24"/>
           <p:cNvSpPr/>
           <p:nvPr/>
         </p:nvSpPr>
@@ -19268,7 +19277,7 @@
       </p:sp>
       <p:sp>
         <p:nvSpPr>
-          <p:cNvPr id="28" name="Text 25"/>
+          <p:cNvPr id="29" name="Text 25"/>
           <p:cNvSpPr/>
           <p:nvPr/>
         </p:nvSpPr>
@@ -19307,7 +19316,7 @@
       </p:sp>
       <p:sp>
         <p:nvSpPr>
-          <p:cNvPr id="29" name="Text 26"/>
+          <p:cNvPr id="30" name="Text 26"/>
           <p:cNvSpPr/>
           <p:nvPr/>
         </p:nvSpPr>
@@ -19346,7 +19355,7 @@
       </p:sp>
       <p:sp>
         <p:nvSpPr>
-          <p:cNvPr id="30" name="Shape 27"/>
+          <p:cNvPr id="31" name="Shape 27"/>
           <p:cNvSpPr/>
           <p:nvPr/>
         </p:nvSpPr>
@@ -19373,7 +19382,7 @@
       </p:sp>
       <p:sp>
         <p:nvSpPr>
-          <p:cNvPr id="31" name="Shape 28"/>
+          <p:cNvPr id="32" name="Shape 28"/>
           <p:cNvSpPr/>
           <p:nvPr/>
         </p:nvSpPr>
@@ -19393,7 +19402,7 @@
       </p:sp>
       <p:sp>
         <p:nvSpPr>
-          <p:cNvPr id="32" name="Text 29"/>
+          <p:cNvPr id="33" name="Text 29"/>
           <p:cNvSpPr/>
           <p:nvPr/>
         </p:nvSpPr>
@@ -19432,7 +19441,7 @@
       </p:sp>
       <p:sp>
         <p:nvSpPr>
-          <p:cNvPr id="33" name="Text 30"/>
+          <p:cNvPr id="34" name="Text 30"/>
           <p:cNvSpPr/>
           <p:nvPr/>
         </p:nvSpPr>
@@ -19471,7 +19480,7 @@
       </p:sp>
       <p:sp>
         <p:nvSpPr>
-          <p:cNvPr id="34" name="Shape 31"/>
+          <p:cNvPr id="35" name="Shape 31"/>
           <p:cNvSpPr/>
           <p:nvPr/>
         </p:nvSpPr>
@@ -19493,7 +19502,7 @@
       </p:sp>
       <p:sp>
         <p:nvSpPr>
-          <p:cNvPr id="35" name="Shape 32"/>
+          <p:cNvPr id="36" name="Shape 32"/>
           <p:cNvSpPr/>
           <p:nvPr/>
         </p:nvSpPr>
@@ -19513,7 +19522,7 @@
       </p:sp>
       <p:sp>
         <p:nvSpPr>
-          <p:cNvPr id="36" name="Text 33"/>
+          <p:cNvPr id="37" name="Text 33"/>
           <p:cNvSpPr/>
           <p:nvPr/>
         </p:nvSpPr>
@@ -19552,7 +19561,7 @@
       </p:sp>
       <p:sp>
         <p:nvSpPr>
-          <p:cNvPr id="37" name="Text 34"/>
+          <p:cNvPr id="38" name="Text 34"/>
           <p:cNvSpPr/>
           <p:nvPr/>
         </p:nvSpPr>
@@ -19591,7 +19600,7 @@
       </p:sp>
       <p:sp>
         <p:nvSpPr>
-          <p:cNvPr id="38" name="Shape 35"/>
+          <p:cNvPr id="39" name="Shape 35"/>
           <p:cNvSpPr/>
           <p:nvPr/>
         </p:nvSpPr>
@@ -19618,7 +19627,7 @@
       </p:sp>
       <p:sp>
         <p:nvSpPr>
-          <p:cNvPr id="39" name="Shape 36"/>
+          <p:cNvPr id="40" name="Shape 36"/>
           <p:cNvSpPr/>
           <p:nvPr/>
         </p:nvSpPr>
@@ -19638,7 +19647,7 @@
       </p:sp>
       <p:sp>
         <p:nvSpPr>
-          <p:cNvPr id="40" name="Text 37"/>
+          <p:cNvPr id="41" name="Text 37"/>
           <p:cNvSpPr/>
           <p:nvPr/>
         </p:nvSpPr>
@@ -19677,7 +19686,7 @@
       </p:sp>
       <p:sp>
         <p:nvSpPr>
-          <p:cNvPr id="41" name="Text 38"/>
+          <p:cNvPr id="42" name="Text 38"/>
           <p:cNvSpPr/>
           <p:nvPr/>
         </p:nvSpPr>
@@ -19716,7 +19725,7 @@
       </p:sp>
       <p:sp>
         <p:nvSpPr>
-          <p:cNvPr id="42" name="Shape 39"/>
+          <p:cNvPr id="43" name="Shape 39"/>
           <p:cNvSpPr/>
           <p:nvPr/>
         </p:nvSpPr>
@@ -19743,7 +19752,7 @@
       </p:sp>
       <p:sp>
         <p:nvSpPr>
-          <p:cNvPr id="43" name="Shape 40"/>
+          <p:cNvPr id="44" name="Shape 40"/>
           <p:cNvSpPr/>
           <p:nvPr/>
         </p:nvSpPr>
@@ -19763,7 +19772,7 @@
       </p:sp>
       <p:sp>
         <p:nvSpPr>
-          <p:cNvPr id="44" name="Text 41"/>
+          <p:cNvPr id="45" name="Text 41"/>
           <p:cNvSpPr/>
           <p:nvPr/>
         </p:nvSpPr>
@@ -19802,7 +19811,7 @@
       </p:sp>
       <p:sp>
         <p:nvSpPr>
-          <p:cNvPr id="45" name="Text 42"/>
+          <p:cNvPr id="46" name="Text 42"/>
           <p:cNvSpPr/>
           <p:nvPr/>
         </p:nvSpPr>
@@ -19841,7 +19850,7 @@
       </p:sp>
       <p:sp>
         <p:nvSpPr>
-          <p:cNvPr id="46" name="Shape 43"/>
+          <p:cNvPr id="47" name="Shape 43"/>
           <p:cNvSpPr/>
           <p:nvPr/>
         </p:nvSpPr>
@@ -19868,7 +19877,7 @@
       </p:sp>
       <p:sp>
         <p:nvSpPr>
-          <p:cNvPr id="47" name="Shape 44"/>
+          <p:cNvPr id="48" name="Shape 44"/>
           <p:cNvSpPr/>
           <p:nvPr/>
         </p:nvSpPr>
@@ -19888,7 +19897,7 @@
       </p:sp>
       <p:sp>
         <p:nvSpPr>
-          <p:cNvPr id="48" name="Text 45"/>
+          <p:cNvPr id="49" name="Text 45"/>
           <p:cNvSpPr/>
           <p:nvPr/>
         </p:nvSpPr>
@@ -19927,7 +19936,7 @@
       </p:sp>
       <p:sp>
         <p:nvSpPr>
-          <p:cNvPr id="49" name="Text 46"/>
+          <p:cNvPr id="50" name="Text 46"/>
           <p:cNvSpPr/>
           <p:nvPr/>
         </p:nvSpPr>
@@ -19966,7 +19975,7 @@
       </p:sp>
       <p:sp>
         <p:nvSpPr>
-          <p:cNvPr id="50" name="Shape 47"/>
+          <p:cNvPr id="51" name="Shape 47"/>
           <p:cNvSpPr/>
           <p:nvPr/>
         </p:nvSpPr>
@@ -19993,7 +20002,7 @@
       </p:sp>
       <p:sp>
         <p:nvSpPr>
-          <p:cNvPr id="51" name="Text 48"/>
+          <p:cNvPr id="52" name="Text 48"/>
           <p:cNvSpPr/>
           <p:nvPr/>
         </p:nvSpPr>
@@ -20281,7 +20290,7 @@
       </p:pic>
       <p:sp>
         <p:nvSpPr>
-          <p:cNvPr id="7" name="Shape 4"/>
+          <p:cNvPr id="8" name="Shape 4"/>
           <p:cNvSpPr/>
           <p:nvPr/>
         </p:nvSpPr>
@@ -20308,7 +20317,7 @@
       </p:sp>
       <p:sp>
         <p:nvSpPr>
-          <p:cNvPr id="8" name="Text 5"/>
+          <p:cNvPr id="9" name="Text 5"/>
           <p:cNvSpPr/>
           <p:nvPr/>
         </p:nvSpPr>
@@ -20347,7 +20356,7 @@
       </p:sp>
       <p:sp>
         <p:nvSpPr>
-          <p:cNvPr id="9" name="Text 6"/>
+          <p:cNvPr id="10" name="Text 6"/>
           <p:cNvSpPr/>
           <p:nvPr/>
         </p:nvSpPr>
@@ -20389,7 +20398,7 @@
       </p:sp>
       <p:sp>
         <p:nvSpPr>
-          <p:cNvPr id="10" name="Shape 7"/>
+          <p:cNvPr id="11" name="Shape 7"/>
           <p:cNvSpPr/>
           <p:nvPr/>
         </p:nvSpPr>
@@ -20416,7 +20425,7 @@
       </p:sp>
       <p:sp>
         <p:nvSpPr>
-          <p:cNvPr id="11" name="Text 8"/>
+          <p:cNvPr id="12" name="Text 8"/>
           <p:cNvSpPr/>
           <p:nvPr/>
         </p:nvSpPr>
@@ -20455,7 +20464,7 @@
       </p:sp>
       <p:sp>
         <p:nvSpPr>
-          <p:cNvPr id="12" name="Text 9"/>
+          <p:cNvPr id="13" name="Text 9"/>
           <p:cNvSpPr/>
           <p:nvPr/>
         </p:nvSpPr>
@@ -20497,7 +20506,7 @@
       </p:sp>
       <p:sp>
         <p:nvSpPr>
-          <p:cNvPr id="13" name="Shape 10"/>
+          <p:cNvPr id="14" name="Shape 10"/>
           <p:cNvSpPr/>
           <p:nvPr/>
         </p:nvSpPr>
@@ -20524,7 +20533,7 @@
       </p:sp>
       <p:sp>
         <p:nvSpPr>
-          <p:cNvPr id="14" name="Text 11"/>
+          <p:cNvPr id="15" name="Text 11"/>
           <p:cNvSpPr/>
           <p:nvPr/>
         </p:nvSpPr>
@@ -20563,7 +20572,7 @@
       </p:sp>
       <p:sp>
         <p:nvSpPr>
-          <p:cNvPr id="15" name="Text 12"/>
+          <p:cNvPr id="16" name="Text 12"/>
           <p:cNvSpPr/>
           <p:nvPr/>
         </p:nvSpPr>
@@ -20605,7 +20614,7 @@
       </p:sp>
       <p:sp>
         <p:nvSpPr>
-          <p:cNvPr id="16" name="Shape 13"/>
+          <p:cNvPr id="17" name="Shape 13"/>
           <p:cNvSpPr/>
           <p:nvPr/>
         </p:nvSpPr>
@@ -20632,7 +20641,7 @@
       </p:sp>
       <p:sp>
         <p:nvSpPr>
-          <p:cNvPr id="17" name="Text 14"/>
+          <p:cNvPr id="18" name="Text 14"/>
           <p:cNvSpPr/>
           <p:nvPr/>
         </p:nvSpPr>
@@ -20671,7 +20680,7 @@
       </p:sp>
       <p:sp>
         <p:nvSpPr>
-          <p:cNvPr id="18" name="Text 15"/>
+          <p:cNvPr id="19" name="Text 15"/>
           <p:cNvSpPr/>
           <p:nvPr/>
         </p:nvSpPr>
@@ -20713,7 +20722,7 @@
       </p:sp>
       <p:sp>
         <p:nvSpPr>
-          <p:cNvPr id="19" name="Shape 16"/>
+          <p:cNvPr id="20" name="Shape 16"/>
           <p:cNvSpPr/>
           <p:nvPr/>
         </p:nvSpPr>
@@ -20740,7 +20749,7 @@
       </p:sp>
       <p:sp>
         <p:nvSpPr>
-          <p:cNvPr id="20" name="Text 17"/>
+          <p:cNvPr id="21" name="Text 17"/>
           <p:cNvSpPr/>
           <p:nvPr/>
         </p:nvSpPr>
@@ -20779,7 +20788,7 @@
       </p:sp>
       <p:sp>
         <p:nvSpPr>
-          <p:cNvPr id="21" name="Text 18"/>
+          <p:cNvPr id="22" name="Text 18"/>
           <p:cNvSpPr/>
           <p:nvPr/>
         </p:nvSpPr>
@@ -20821,7 +20830,7 @@
       </p:sp>
       <p:sp>
         <p:nvSpPr>
-          <p:cNvPr id="22" name="Shape 19"/>
+          <p:cNvPr id="23" name="Shape 19"/>
           <p:cNvSpPr/>
           <p:nvPr/>
         </p:nvSpPr>
@@ -20848,7 +20857,7 @@
       </p:sp>
       <p:sp>
         <p:nvSpPr>
-          <p:cNvPr id="23" name="Text 20"/>
+          <p:cNvPr id="24" name="Text 20"/>
           <p:cNvSpPr/>
           <p:nvPr/>
         </p:nvSpPr>
@@ -20887,7 +20896,7 @@
       </p:sp>
       <p:sp>
         <p:nvSpPr>
-          <p:cNvPr id="24" name="Text 21"/>
+          <p:cNvPr id="25" name="Text 21"/>
           <p:cNvSpPr/>
           <p:nvPr/>
         </p:nvSpPr>
@@ -20929,7 +20938,7 @@
       </p:sp>
       <p:sp>
         <p:nvSpPr>
-          <p:cNvPr id="25" name="Shape 22"/>
+          <p:cNvPr id="26" name="Shape 22"/>
           <p:cNvSpPr/>
           <p:nvPr/>
         </p:nvSpPr>
@@ -20956,7 +20965,7 @@
       </p:sp>
       <p:sp>
         <p:nvSpPr>
-          <p:cNvPr id="26" name="Text 23"/>
+          <p:cNvPr id="27" name="Text 23"/>
           <p:cNvSpPr/>
           <p:nvPr/>
         </p:nvSpPr>
@@ -21162,7 +21171,7 @@
         </p:nvSpPr>
         <p:spPr>
           <a:xfrm>
-            <a:off x="1280160" y="1024128"/>
+            <a:off x="1280160" y="1193140"/>
             <a:ext cx="777240" cy="256032"/>
           </a:xfrm>
           <a:prstGeom prst="roundRect">
@@ -21184,7 +21193,7 @@
         </p:nvSpPr>
         <p:spPr>
           <a:xfrm>
-            <a:off x="1280160" y="1024128"/>
+            <a:off x="1280160" y="1193140"/>
             <a:ext cx="777240" cy="256032"/>
           </a:xfrm>
           <a:prstGeom prst="rect">
@@ -21241,7 +21250,7 @@
       </p:pic>
       <p:sp>
         <p:nvSpPr>
-          <p:cNvPr id="7" name="Shape 4"/>
+          <p:cNvPr id="8" name="Shape 4"/>
           <p:cNvSpPr/>
           <p:nvPr/>
         </p:nvSpPr>
@@ -21268,7 +21277,7 @@
       </p:sp>
       <p:sp>
         <p:nvSpPr>
-          <p:cNvPr id="8" name="Text 5"/>
+          <p:cNvPr id="9" name="Text 5"/>
           <p:cNvSpPr/>
           <p:nvPr/>
         </p:nvSpPr>
@@ -21307,7 +21316,7 @@
       </p:sp>
       <p:sp>
         <p:nvSpPr>
-          <p:cNvPr id="9" name="Shape 6"/>
+          <p:cNvPr id="10" name="Shape 6"/>
           <p:cNvSpPr/>
           <p:nvPr/>
         </p:nvSpPr>
@@ -21330,7 +21339,7 @@
       </p:sp>
       <p:sp>
         <p:nvSpPr>
-          <p:cNvPr id="10" name="Shape 7"/>
+          <p:cNvPr id="11" name="Shape 7"/>
           <p:cNvSpPr/>
           <p:nvPr/>
         </p:nvSpPr>
@@ -21350,7 +21359,7 @@
       </p:sp>
       <p:sp>
         <p:nvSpPr>
-          <p:cNvPr id="11" name="Shape 8"/>
+          <p:cNvPr id="12" name="Shape 8"/>
           <p:cNvSpPr/>
           <p:nvPr/>
         </p:nvSpPr>
@@ -21372,7 +21381,7 @@
       </p:sp>
       <p:sp>
         <p:nvSpPr>
-          <p:cNvPr id="12" name="Text 9"/>
+          <p:cNvPr id="13" name="Text 9"/>
           <p:cNvSpPr/>
           <p:nvPr/>
         </p:nvSpPr>
@@ -21411,7 +21420,7 @@
       </p:sp>
       <p:sp>
         <p:nvSpPr>
-          <p:cNvPr id="13" name="Shape 10"/>
+          <p:cNvPr id="14" name="Shape 10"/>
           <p:cNvSpPr/>
           <p:nvPr/>
         </p:nvSpPr>
@@ -21434,7 +21443,7 @@
       </p:sp>
       <p:sp>
         <p:nvSpPr>
-          <p:cNvPr id="14" name="Shape 11"/>
+          <p:cNvPr id="15" name="Shape 11"/>
           <p:cNvSpPr/>
           <p:nvPr/>
         </p:nvSpPr>
@@ -21454,7 +21463,7 @@
       </p:sp>
       <p:sp>
         <p:nvSpPr>
-          <p:cNvPr id="15" name="Shape 12"/>
+          <p:cNvPr id="16" name="Shape 12"/>
           <p:cNvSpPr/>
           <p:nvPr/>
         </p:nvSpPr>
@@ -21476,7 +21485,7 @@
       </p:sp>
       <p:sp>
         <p:nvSpPr>
-          <p:cNvPr id="16" name="Text 13"/>
+          <p:cNvPr id="17" name="Text 13"/>
           <p:cNvSpPr/>
           <p:nvPr/>
         </p:nvSpPr>
@@ -21515,7 +21524,7 @@
       </p:sp>
       <p:sp>
         <p:nvSpPr>
-          <p:cNvPr id="17" name="Shape 14"/>
+          <p:cNvPr id="18" name="Shape 14"/>
           <p:cNvSpPr/>
           <p:nvPr/>
         </p:nvSpPr>
@@ -21538,7 +21547,7 @@
       </p:sp>
       <p:sp>
         <p:nvSpPr>
-          <p:cNvPr id="18" name="Shape 15"/>
+          <p:cNvPr id="19" name="Shape 15"/>
           <p:cNvSpPr/>
           <p:nvPr/>
         </p:nvSpPr>
@@ -21558,7 +21567,7 @@
       </p:sp>
       <p:sp>
         <p:nvSpPr>
-          <p:cNvPr id="19" name="Shape 16"/>
+          <p:cNvPr id="20" name="Shape 16"/>
           <p:cNvSpPr/>
           <p:nvPr/>
         </p:nvSpPr>
@@ -21585,7 +21594,7 @@
       </p:sp>
       <p:sp>
         <p:nvSpPr>
-          <p:cNvPr id="20" name="Text 17"/>
+          <p:cNvPr id="21" name="Text 17"/>
           <p:cNvSpPr/>
           <p:nvPr/>
         </p:nvSpPr>
@@ -21624,7 +21633,7 @@
       </p:sp>
       <p:sp>
         <p:nvSpPr>
-          <p:cNvPr id="21" name="Text 18"/>
+          <p:cNvPr id="22" name="Text 18"/>
           <p:cNvSpPr/>
           <p:nvPr/>
         </p:nvSpPr>
@@ -21663,7 +21672,7 @@
       </p:sp>
       <p:sp>
         <p:nvSpPr>
-          <p:cNvPr id="22" name="Shape 19"/>
+          <p:cNvPr id="23" name="Shape 19"/>
           <p:cNvSpPr/>
           <p:nvPr/>
         </p:nvSpPr>
@@ -21685,7 +21694,7 @@
       </p:sp>
       <p:sp>
         <p:nvSpPr>
-          <p:cNvPr id="23" name="Text 20"/>
+          <p:cNvPr id="24" name="Text 20"/>
           <p:cNvSpPr/>
           <p:nvPr/>
         </p:nvSpPr>
@@ -21724,7 +21733,7 @@
       </p:sp>
       <p:sp>
         <p:nvSpPr>
-          <p:cNvPr id="24" name="Text 21"/>
+          <p:cNvPr id="25" name="Text 21"/>
           <p:cNvSpPr/>
           <p:nvPr/>
         </p:nvSpPr>
@@ -21766,7 +21775,7 @@
       </p:sp>
       <p:sp>
         <p:nvSpPr>
-          <p:cNvPr id="25" name="Shape 22"/>
+          <p:cNvPr id="26" name="Shape 22"/>
           <p:cNvSpPr/>
           <p:nvPr/>
         </p:nvSpPr>
@@ -21788,7 +21797,7 @@
       </p:sp>
       <p:sp>
         <p:nvSpPr>
-          <p:cNvPr id="26" name="Text 23"/>
+          <p:cNvPr id="27" name="Text 23"/>
           <p:cNvSpPr/>
           <p:nvPr/>
         </p:nvSpPr>
@@ -21827,7 +21836,7 @@
       </p:sp>
       <p:sp>
         <p:nvSpPr>
-          <p:cNvPr id="27" name="Text 24"/>
+          <p:cNvPr id="28" name="Text 24"/>
           <p:cNvSpPr/>
           <p:nvPr/>
         </p:nvSpPr>
@@ -21869,7 +21878,7 @@
       </p:sp>
       <p:sp>
         <p:nvSpPr>
-          <p:cNvPr id="28" name="Shape 25"/>
+          <p:cNvPr id="29" name="Shape 25"/>
           <p:cNvSpPr/>
           <p:nvPr/>
         </p:nvSpPr>
@@ -21891,7 +21900,7 @@
       </p:sp>
       <p:sp>
         <p:nvSpPr>
-          <p:cNvPr id="29" name="Text 26"/>
+          <p:cNvPr id="30" name="Text 26"/>
           <p:cNvSpPr/>
           <p:nvPr/>
         </p:nvSpPr>
@@ -21930,7 +21939,7 @@
       </p:sp>
       <p:sp>
         <p:nvSpPr>
-          <p:cNvPr id="30" name="Text 27"/>
+          <p:cNvPr id="31" name="Text 27"/>
           <p:cNvSpPr/>
           <p:nvPr/>
         </p:nvSpPr>
@@ -23265,7 +23274,7 @@
       </p:graphicFrame>
       <p:sp>
         <p:nvSpPr>
-          <p:cNvPr id="8" name="Shape 4"/>
+          <p:cNvPr id="9" name="Shape 4"/>
           <p:cNvSpPr/>
           <p:nvPr/>
         </p:nvSpPr>
@@ -23287,7 +23296,7 @@
       </p:sp>
       <p:sp>
         <p:nvSpPr>
-          <p:cNvPr id="9" name="Text 5"/>
+          <p:cNvPr id="10" name="Text 5"/>
           <p:cNvSpPr/>
           <p:nvPr/>
         </p:nvSpPr>
@@ -23493,7 +23502,7 @@
         </p:nvSpPr>
         <p:spPr>
           <a:xfrm>
-            <a:off x="1280160" y="1024128"/>
+            <a:off x="1280160" y="1193140"/>
             <a:ext cx="777240" cy="256032"/>
           </a:xfrm>
           <a:prstGeom prst="roundRect">
@@ -23515,7 +23524,7 @@
         </p:nvSpPr>
         <p:spPr>
           <a:xfrm>
-            <a:off x="1280160" y="1024128"/>
+            <a:off x="1280160" y="1193140"/>
             <a:ext cx="777240" cy="256032"/>
           </a:xfrm>
           <a:prstGeom prst="rect">
@@ -23572,7 +23581,7 @@
       </p:pic>
       <p:sp>
         <p:nvSpPr>
-          <p:cNvPr id="7" name="Shape 4"/>
+          <p:cNvPr id="8" name="Shape 4"/>
           <p:cNvSpPr/>
           <p:nvPr/>
         </p:nvSpPr>
@@ -23594,7 +23603,7 @@
       </p:sp>
       <p:sp>
         <p:nvSpPr>
-          <p:cNvPr id="8" name="Text 5"/>
+          <p:cNvPr id="9" name="Text 5"/>
           <p:cNvSpPr/>
           <p:nvPr/>
         </p:nvSpPr>
@@ -23633,7 +23642,7 @@
       </p:sp>
       <p:sp>
         <p:nvSpPr>
-          <p:cNvPr id="9" name="Text 6"/>
+          <p:cNvPr id="10" name="Text 6"/>
           <p:cNvSpPr/>
           <p:nvPr/>
         </p:nvSpPr>
@@ -23672,7 +23681,7 @@
       </p:sp>
       <p:sp>
         <p:nvSpPr>
-          <p:cNvPr id="10" name="Shape 7"/>
+          <p:cNvPr id="11" name="Shape 7"/>
           <p:cNvSpPr/>
           <p:nvPr/>
         </p:nvSpPr>
@@ -23699,7 +23708,7 @@
       </p:sp>
       <p:sp>
         <p:nvSpPr>
-          <p:cNvPr id="11" name="Text 8"/>
+          <p:cNvPr id="12" name="Text 8"/>
           <p:cNvSpPr/>
           <p:nvPr/>
         </p:nvSpPr>
@@ -23738,7 +23747,7 @@
       </p:sp>
       <p:sp>
         <p:nvSpPr>
-          <p:cNvPr id="12" name="Text 9"/>
+          <p:cNvPr id="13" name="Text 9"/>
           <p:cNvSpPr/>
           <p:nvPr/>
         </p:nvSpPr>
@@ -23777,7 +23786,7 @@
       </p:sp>
       <p:sp>
         <p:nvSpPr>
-          <p:cNvPr id="13" name="Shape 10"/>
+          <p:cNvPr id="14" name="Shape 10"/>
           <p:cNvSpPr/>
           <p:nvPr/>
         </p:nvSpPr>
@@ -23799,7 +23808,7 @@
       </p:sp>
       <p:sp>
         <p:nvSpPr>
-          <p:cNvPr id="14" name="Text 11"/>
+          <p:cNvPr id="15" name="Text 11"/>
           <p:cNvSpPr/>
           <p:nvPr/>
         </p:nvSpPr>
@@ -23838,7 +23847,7 @@
       </p:sp>
       <p:sp>
         <p:nvSpPr>
-          <p:cNvPr id="15" name="Text 12"/>
+          <p:cNvPr id="16" name="Text 12"/>
           <p:cNvSpPr/>
           <p:nvPr/>
         </p:nvSpPr>
@@ -23877,7 +23886,7 @@
       </p:sp>
       <p:sp>
         <p:nvSpPr>
-          <p:cNvPr id="16" name="Shape 13"/>
+          <p:cNvPr id="17" name="Shape 13"/>
           <p:cNvSpPr/>
           <p:nvPr/>
         </p:nvSpPr>
@@ -23899,7 +23908,7 @@
       </p:sp>
       <p:sp>
         <p:nvSpPr>
-          <p:cNvPr id="17" name="Text 14"/>
+          <p:cNvPr id="18" name="Text 14"/>
           <p:cNvSpPr/>
           <p:nvPr/>
         </p:nvSpPr>
@@ -23938,7 +23947,7 @@
       </p:sp>
       <p:sp>
         <p:nvSpPr>
-          <p:cNvPr id="18" name="Text 15"/>
+          <p:cNvPr id="19" name="Text 15"/>
           <p:cNvSpPr/>
           <p:nvPr/>
         </p:nvSpPr>
@@ -24144,7 +24153,7 @@
         </p:nvSpPr>
         <p:spPr>
           <a:xfrm>
-            <a:off x="1280160" y="1024128"/>
+            <a:off x="1280160" y="1193140"/>
             <a:ext cx="777240" cy="256032"/>
           </a:xfrm>
           <a:prstGeom prst="roundRect">
@@ -24166,7 +24175,7 @@
         </p:nvSpPr>
         <p:spPr>
           <a:xfrm>
-            <a:off x="1280160" y="1024128"/>
+            <a:off x="1280160" y="1193140"/>
             <a:ext cx="777240" cy="256032"/>
           </a:xfrm>
           <a:prstGeom prst="rect">
@@ -24223,7 +24232,7 @@
       </p:pic>
       <p:sp>
         <p:nvSpPr>
-          <p:cNvPr id="7" name="Shape 4"/>
+          <p:cNvPr id="8" name="Shape 4"/>
           <p:cNvSpPr/>
           <p:nvPr/>
         </p:nvSpPr>
@@ -24250,7 +24259,7 @@
       </p:sp>
       <p:sp>
         <p:nvSpPr>
-          <p:cNvPr id="8" name="Text 5"/>
+          <p:cNvPr id="9" name="Text 5"/>
           <p:cNvSpPr/>
           <p:nvPr/>
         </p:nvSpPr>
@@ -24452,7 +24461,7 @@
       </p:sp>
       <p:sp>
         <p:nvSpPr>
-          <p:cNvPr id="9" name="Shape 6"/>
+          <p:cNvPr id="10" name="Shape 6"/>
           <p:cNvSpPr/>
           <p:nvPr/>
         </p:nvSpPr>
@@ -24474,7 +24483,7 @@
       </p:sp>
       <p:sp>
         <p:nvSpPr>
-          <p:cNvPr id="10" name="Shape 7"/>
+          <p:cNvPr id="11" name="Shape 7"/>
           <p:cNvSpPr/>
           <p:nvPr/>
         </p:nvSpPr>
@@ -24494,7 +24503,7 @@
       </p:sp>
       <p:sp>
         <p:nvSpPr>
-          <p:cNvPr id="11" name="Text 8"/>
+          <p:cNvPr id="12" name="Text 8"/>
           <p:cNvSpPr/>
           <p:nvPr/>
         </p:nvSpPr>
@@ -24533,7 +24542,7 @@
       </p:sp>
       <p:sp>
         <p:nvSpPr>
-          <p:cNvPr id="12" name="Text 9"/>
+          <p:cNvPr id="13" name="Text 9"/>
           <p:cNvSpPr/>
           <p:nvPr/>
         </p:nvSpPr>
@@ -24572,7 +24581,7 @@
       </p:sp>
       <p:sp>
         <p:nvSpPr>
-          <p:cNvPr id="13" name="Text 10"/>
+          <p:cNvPr id="14" name="Text 10"/>
           <p:cNvSpPr/>
           <p:nvPr/>
         </p:nvSpPr>
@@ -24614,7 +24623,7 @@
       </p:sp>
       <p:sp>
         <p:nvSpPr>
-          <p:cNvPr id="14" name="Shape 11"/>
+          <p:cNvPr id="15" name="Shape 11"/>
           <p:cNvSpPr/>
           <p:nvPr/>
         </p:nvSpPr>
@@ -24636,7 +24645,7 @@
       </p:sp>
       <p:sp>
         <p:nvSpPr>
-          <p:cNvPr id="15" name="Shape 12"/>
+          <p:cNvPr id="16" name="Shape 12"/>
           <p:cNvSpPr/>
           <p:nvPr/>
         </p:nvSpPr>
@@ -24656,7 +24665,7 @@
       </p:sp>
       <p:sp>
         <p:nvSpPr>
-          <p:cNvPr id="16" name="Text 13"/>
+          <p:cNvPr id="17" name="Text 13"/>
           <p:cNvSpPr/>
           <p:nvPr/>
         </p:nvSpPr>
@@ -24695,7 +24704,7 @@
       </p:sp>
       <p:sp>
         <p:nvSpPr>
-          <p:cNvPr id="17" name="Text 14"/>
+          <p:cNvPr id="18" name="Text 14"/>
           <p:cNvSpPr/>
           <p:nvPr/>
         </p:nvSpPr>
@@ -24734,7 +24743,7 @@
       </p:sp>
       <p:sp>
         <p:nvSpPr>
-          <p:cNvPr id="18" name="Text 15"/>
+          <p:cNvPr id="19" name="Text 15"/>
           <p:cNvSpPr/>
           <p:nvPr/>
         </p:nvSpPr>
@@ -24776,7 +24785,7 @@
       </p:sp>
       <p:sp>
         <p:nvSpPr>
-          <p:cNvPr id="19" name="Shape 16"/>
+          <p:cNvPr id="20" name="Shape 16"/>
           <p:cNvSpPr/>
           <p:nvPr/>
         </p:nvSpPr>
@@ -24798,7 +24807,7 @@
       </p:sp>
       <p:sp>
         <p:nvSpPr>
-          <p:cNvPr id="20" name="Shape 17"/>
+          <p:cNvPr id="21" name="Shape 17"/>
           <p:cNvSpPr/>
           <p:nvPr/>
         </p:nvSpPr>
@@ -24818,7 +24827,7 @@
       </p:sp>
       <p:sp>
         <p:nvSpPr>
-          <p:cNvPr id="21" name="Text 18"/>
+          <p:cNvPr id="22" name="Text 18"/>
           <p:cNvSpPr/>
           <p:nvPr/>
         </p:nvSpPr>
@@ -24857,7 +24866,7 @@
       </p:sp>
       <p:sp>
         <p:nvSpPr>
-          <p:cNvPr id="22" name="Text 19"/>
+          <p:cNvPr id="23" name="Text 19"/>
           <p:cNvSpPr/>
           <p:nvPr/>
         </p:nvSpPr>
@@ -24896,7 +24905,7 @@
       </p:sp>
       <p:sp>
         <p:nvSpPr>
-          <p:cNvPr id="23" name="Text 20"/>
+          <p:cNvPr id="24" name="Text 20"/>
           <p:cNvSpPr/>
           <p:nvPr/>
         </p:nvSpPr>
@@ -25102,7 +25111,7 @@
         </p:nvSpPr>
         <p:spPr>
           <a:xfrm>
-            <a:off x="1280160" y="1024128"/>
+            <a:off x="1280160" y="1193140"/>
             <a:ext cx="777240" cy="256032"/>
           </a:xfrm>
           <a:prstGeom prst="roundRect">
@@ -25124,7 +25133,7 @@
         </p:nvSpPr>
         <p:spPr>
           <a:xfrm>
-            <a:off x="1280160" y="1024128"/>
+            <a:off x="1280160" y="1193140"/>
             <a:ext cx="777240" cy="256032"/>
           </a:xfrm>
           <a:prstGeom prst="rect">
@@ -25181,7 +25190,7 @@
       </p:pic>
       <p:sp>
         <p:nvSpPr>
-          <p:cNvPr id="7" name="Shape 4"/>
+          <p:cNvPr id="8" name="Shape 4"/>
           <p:cNvSpPr/>
           <p:nvPr/>
         </p:nvSpPr>
@@ -25208,7 +25217,7 @@
       </p:sp>
       <p:sp>
         <p:nvSpPr>
-          <p:cNvPr id="8" name="Text 5"/>
+          <p:cNvPr id="9" name="Text 5"/>
           <p:cNvSpPr/>
           <p:nvPr/>
         </p:nvSpPr>
@@ -25390,7 +25399,7 @@
       </p:sp>
       <p:sp>
         <p:nvSpPr>
-          <p:cNvPr id="9" name="Shape 6"/>
+          <p:cNvPr id="10" name="Shape 6"/>
           <p:cNvSpPr/>
           <p:nvPr/>
         </p:nvSpPr>
@@ -25417,7 +25426,7 @@
       </p:sp>
       <p:sp>
         <p:nvSpPr>
-          <p:cNvPr id="10" name="Shape 7"/>
+          <p:cNvPr id="11" name="Shape 7"/>
           <p:cNvSpPr/>
           <p:nvPr/>
         </p:nvSpPr>
@@ -25437,7 +25446,7 @@
       </p:sp>
       <p:sp>
         <p:nvSpPr>
-          <p:cNvPr id="11" name="Text 8"/>
+          <p:cNvPr id="12" name="Text 8"/>
           <p:cNvSpPr/>
           <p:nvPr/>
         </p:nvSpPr>
@@ -25476,7 +25485,7 @@
       </p:sp>
       <p:sp>
         <p:nvSpPr>
-          <p:cNvPr id="12" name="Text 9"/>
+          <p:cNvPr id="13" name="Text 9"/>
           <p:cNvSpPr/>
           <p:nvPr/>
         </p:nvSpPr>
@@ -25515,7 +25524,7 @@
       </p:sp>
       <p:sp>
         <p:nvSpPr>
-          <p:cNvPr id="13" name="Text 10"/>
+          <p:cNvPr id="14" name="Text 10"/>
           <p:cNvSpPr/>
           <p:nvPr/>
         </p:nvSpPr>
@@ -25557,7 +25566,7 @@
       </p:sp>
       <p:sp>
         <p:nvSpPr>
-          <p:cNvPr id="14" name="Shape 11"/>
+          <p:cNvPr id="15" name="Shape 11"/>
           <p:cNvSpPr/>
           <p:nvPr/>
         </p:nvSpPr>
@@ -25584,7 +25593,7 @@
       </p:sp>
       <p:sp>
         <p:nvSpPr>
-          <p:cNvPr id="15" name="Shape 12"/>
+          <p:cNvPr id="16" name="Shape 12"/>
           <p:cNvSpPr/>
           <p:nvPr/>
         </p:nvSpPr>
@@ -25604,7 +25613,7 @@
       </p:sp>
       <p:sp>
         <p:nvSpPr>
-          <p:cNvPr id="16" name="Text 13"/>
+          <p:cNvPr id="17" name="Text 13"/>
           <p:cNvSpPr/>
           <p:nvPr/>
         </p:nvSpPr>
@@ -25643,7 +25652,7 @@
       </p:sp>
       <p:sp>
         <p:nvSpPr>
-          <p:cNvPr id="17" name="Text 14"/>
+          <p:cNvPr id="18" name="Text 14"/>
           <p:cNvSpPr/>
           <p:nvPr/>
         </p:nvSpPr>
@@ -25682,7 +25691,7 @@
       </p:sp>
       <p:sp>
         <p:nvSpPr>
-          <p:cNvPr id="18" name="Text 15"/>
+          <p:cNvPr id="19" name="Text 15"/>
           <p:cNvSpPr/>
           <p:nvPr/>
         </p:nvSpPr>
@@ -25724,7 +25733,7 @@
       </p:sp>
       <p:sp>
         <p:nvSpPr>
-          <p:cNvPr id="19" name="Shape 16"/>
+          <p:cNvPr id="20" name="Shape 16"/>
           <p:cNvSpPr/>
           <p:nvPr/>
         </p:nvSpPr>
@@ -25746,7 +25755,7 @@
       </p:sp>
       <p:sp>
         <p:nvSpPr>
-          <p:cNvPr id="20" name="Shape 17"/>
+          <p:cNvPr id="21" name="Shape 17"/>
           <p:cNvSpPr/>
           <p:nvPr/>
         </p:nvSpPr>
@@ -25766,7 +25775,7 @@
       </p:sp>
       <p:sp>
         <p:nvSpPr>
-          <p:cNvPr id="21" name="Text 18"/>
+          <p:cNvPr id="22" name="Text 18"/>
           <p:cNvSpPr/>
           <p:nvPr/>
         </p:nvSpPr>
@@ -25805,7 +25814,7 @@
       </p:sp>
       <p:sp>
         <p:nvSpPr>
-          <p:cNvPr id="22" name="Text 19"/>
+          <p:cNvPr id="23" name="Text 19"/>
           <p:cNvSpPr/>
           <p:nvPr/>
         </p:nvSpPr>
@@ -25844,7 +25853,7 @@
       </p:sp>
       <p:sp>
         <p:nvSpPr>
-          <p:cNvPr id="23" name="Text 20"/>
+          <p:cNvPr id="24" name="Text 20"/>
           <p:cNvSpPr/>
           <p:nvPr/>
         </p:nvSpPr>

--- a/docs/decks/L07.pptx
+++ b/docs/decks/L07.pptx
@@ -526,7 +526,7 @@
           <a:p>
             <a:r>
               <a:rPr lang="en-US" dirty="0"/>
-              <a:t>Вітаю на сьомому уроці — першому з тижня «Надійність + безпека». Провайдер ляже; питання не «чи», а «що побачить користувач, коли це станеться». До сьогодні відповідь була чесною катастрофою: «Сервіс тимчасово недоступний» і нуль плану Б — ви бачили це ще в лабі уроку 1. Сьогодні будуємо план Б: виносимо виклик моделі у функцію, де збій — значення, а не виняток; будуємо fallback-ланцюг з лічильником переходів; вчимо систему віддавати ввічливу заглушку замість 500-ки — з чесним статусом у лозі. А потім влаштовуємо власний інцидент, бо наш mock уміє падати на замовлення. Для охочих — circuit breaker з обов'язковим half-open, разом з чесною історією, як я сам собі влаштував outage під час підготовки курсу. Все — руками, все — відтворювано.</a:t>
+              <a:t/>
             </a:r>
             <a:endParaRPr lang="en-US" dirty="0"/>
           </a:p>
@@ -614,7 +614,7 @@
           <a:p>
             <a:r>
               <a:rPr lang="en-US" dirty="0"/>
-              <a:t>Ми вже маємо ланцюг спроб. Тепер питання, яке відрізняє робочу надійність від надійності «на папері»: що саме ви маєте право повторювати. Виклик моделі повторювати безпечно: він нічого не змінює у світі, максимум — витрачає токени. Читання через інструмент, як-от lookup_order, — read-only за визначенням, теж безпечно. Але щойно в ланцюг заходить дія, що змінює стан, — «повторити» перестає бути безневинним: повтор створення заявки — це дві заявки, повтор списання — це два списання. Причому найпідліший випадок — не помилка, а таймаут: ви не знаєте, чи операція виконалася. Відповіді немає, а тікет, можливо, вже створений. Тому дію, що змінює стан, повторюють тільки з ключем ідемпотентності; без ключа повтор — це дубль, а не наполегливість. А дію без ідемпотентності краще чесно віддати помилкою людині, ніж вгадувати. Принцип: право на ретрай визначає не тип помилки, а властивість операції. Питання «чи ретраїмо 503?» неповне; повне звучить так: «чи ця операція ідемпотентна?». Якщо так — ретрай безпечний навіть після таймаута. Якщо ні — ретрай перетворює одну проблему (немає відповіді) на дві: немає відповіді плюс невідома кількість побічних ефектів.</a:t>
+              <a:t/>
             </a:r>
             <a:endParaRPr lang="en-US" dirty="0"/>
           </a:p>
@@ -702,7 +702,7 @@
           <a:p>
             <a:r>
               <a:rPr lang="en-US" dirty="0"/>
-              <a:t>Друге питання — про ввічливість. Провайдер віддав 429 або 5xx, бо йому важко. Ваша система, як і сотні інших клієнтів, негайно повторює запит. Усі повторюють одночасно, бо всі отримали помилку одночасно — і провайдер, який майже підвівся, отримує другу хвилю, більшу за першу. Це retry storm: механізм, придуманий для стійкості, добиває систему, від якої ви залежите. Три речі цьому запобігають, і всі три мають бути разом. Експоненційна пауза між спробами замість «одразу ще раз»: кожна наступна спроба чекає довше. Випадковий розкид, джитер, у паузі: без нього всі ваші екземпляри сервісу повторюють у ті самі мілісекунди й самі створюють пік. І обмежена кількість спроб плюс circuit breaker: після кількох поспіль ви перестаєте стукати. Це не лише береже вас від очікування — це дає провайдеру шанс піднятися. Половина сенсу breaker'а спрямована не на вас, а назовні. Типова помилка: ретрай без паузи, «бо швидко треба». Я бачив конфігурацію, де на 429 стояло три негайні спроби: система в момент піку генерувала втричі більше трафіку саме тоді, коли її просили пригальмувати. Формально retry-політика була; фактично вона працювала як підсилювач інциденту. Якщо провайдер прислав 429 — він уже сказав, що робити: почекати. Читайте заголовки з підказкою про час очікування, коли вони є, і не вважайте себе розумнішими за них.</a:t>
+              <a:t/>
             </a:r>
             <a:endParaRPr lang="en-US" dirty="0"/>
           </a:p>
@@ -790,7 +790,7 @@
           <a:p>
             <a:r>
               <a:rPr lang="en-US" dirty="0"/>
-              <a:t>І третє, що майже завжди пропускають: між «нормальна відповідь» і «ввічлива заглушка» є не прірва, а кілька сходинок. Заглушка — остання з них, а не єдина. Сходинка перша — норма: відповідь основної моделі з інструментами, користувач не втрачає нічого. Друга — резервна модель з уроку 3: втрачається хіба трохи інша манера. Третя — без інструментів: модель відповідає, але без звернень до зовнішніх систем — втрачаються актуальні дані: «статус замовлення уточніть у…». Четверта — з кешу, з уроку 5: раніше згенерована відповідь на схоже питання; втрачається свіжість і персоналізація. І п'ята — заглушка: ввічливе «спробуйте згодом» плюс шлях до людини. Сходинки 3 і 4 варті окремої уваги, бо вони найдешевші й найчастіше забуті. Якщо ліг інструмент, а не модель, — не треба віддавати заглушку на весь запит: модель цілком може відповісти на загальне питання, чесно сказавши, що конкретних даних зараз не бачить. А якщо ліг провайдер моделі, але у вас є кеш — застаріла відповідь на типове питання майже завжди краща за «нічого». Принцип: деградація — це продуктове рішення, а не технічний виняток. Для кожної сходинки має бути домовленість: що саме віддаємо, як повідомляємо користувачу про обмеження і як це видно в метриках. У нашому контурі будуємо сходинки 2 і 5 — це core тижня; 3 і 4 проговорюємо як наступний крок. І в лозі має бути видно, якою сходинкою обслужено запит — інакше «система працює» перестає щось означати.</a:t>
+              <a:t/>
             </a:r>
             <a:endParaRPr lang="en-US" dirty="0"/>
           </a:p>
@@ -878,7 +878,7 @@
           <a:p>
             <a:r>
               <a:rPr lang="en-US" dirty="0"/>
-              <a:t>Що, як увесь ланцюг вичерпано? Лишаються два варіанти, і обидва погані: збрехати — віддати щось із кешу під виглядом свіжої відповіді, або впасти — 500. Правильний третій: ввічлива заглушка. Це не «здалися», це спроєктована відмова: користувач отримує чесне людське повідомлення замість технічної помилки, чат живий, а в лозі при цьому — справжній статус збою. Придивіться до другого рядка коду: статус у лог їде чесний — 503, а не 200 з ввічливим текстом. Це легко зіпсувати ненавмисно: заглушка «виглядає як відповідь», і спокусливо повернути її з кодом успіху, щоб «не лякати клієнтський код». Наслідок — моніторинг тижня 5 бачитиме здорову систему рівно тоді, коли всі користувачі бачать вибачення. Розділяйте канали: текст — для людини, статус — для машин, і жоден не бреше своїй аудиторії. Умова покриває і status == 0 — випадок «відповіді не було взагалі», коли gateway недоступний і CallGateway повернула нуль: це теж деградація, і в лог має їхати чесний 503, а не 0. І пам'ятайте: деградація — це драбина, у різних сходинок різні правила. Для довідкових питань можна деградувати м'якше: дешевша модель, відповідь із кешу з позначкою свіжості. Для дій — тільки чесна відмова: «створити тікет зараз не можу» краще за тікет, створений наосліп під час інциденту. Головне, щоб кожна сходинка була рішенням, ухваленим у спокійний четвер, а не імпровізацією о третій ночі.</a:t>
+              <a:t/>
             </a:r>
             <a:endParaRPr lang="en-US" dirty="0"/>
           </a:p>
@@ -966,7 +966,7 @@
           <a:p>
             <a:r>
               <a:rPr lang="en-US" dirty="0"/>
-              <a:t>Дрібниця, яка кусається. Перша версія нашого стека мала дивну властивість: симульований збій «коштував» вісім секунд. Користувач чекав, чекав — і лише потім отримував заглушку. Розслідування привело в несподіване місце: gateway за замовчуванням тихо ретраїв збої всередині себе. Наш сервіс чекав не на модель — на чужі приховані спроби. Тому в конфізі адаптера з уроку 3 стоїть num_retries: 0 — і тепер ви знаєте, навіщо. Reliability-логіка має жити в одному місці — у вашому сервісі, де вона видима, залогована і керована. Коли ретраять кілька шарів одночасно, бюджети часу перемножуються: два ретраї в адаптері, два в сервісі, помножити на таймаут — і ваша «швидка відмова» триває пів хвилини. Перевірте це сьогодні в лабі: збій має коштувати мілісекунди. Швидка помилка — це теж різновид надійності: що швидше система зрозуміла «не вийшло», то швидше спрацював план Б. [Ведучому: це і є передумова демо — перед показом переконайся, що в конфізі gateway стоїть num_retries: 0, інакше «швидкий збій» на екрані триватиме ті самі 8 секунд.]</a:t>
+              <a:t/>
             </a:r>
             <a:endParaRPr lang="en-US" dirty="0"/>
           </a:p>
@@ -1054,7 +1054,7 @@
           <a:p>
             <a:r>
               <a:rPr lang="en-US" dirty="0"/>
-              <a:t>Опційний блок для охочих. Fallback-ланцюг має слабке місце: якщо основна модель лежить довго, кожен запит все одно спершу йде до неї — і платить повним таймаутом за право дізнатися те, що ви вже знаєте. Circuit breaker прибирає цей податок: після трьох збоїв поспіль модель «відкривається», і запити одразу йдуть у fallback, без очікування. Зверніть увагу: це захист вашої latency, а не покарання провайдера. Придивіться до першого рядка коду: breakers — це словник, і breaker у ньому — окремий на кожну модель, а не один глобальний. Це важливе рішення: якщо лежить mock-strong, а mock-mini здорова, глобальний breaker покарав би обох — і система відбивала б живу модель за гріхи мертвої. Стан відмови завжди має ту саму гранулярність, що й одиниця відмови: падають моделі поодинці — і breaker'и мають бути поодинці. Про half-open — третій стан у цьому коді — окремо на наступному слайді: без нього breaker перетворюється на самостріл.</a:t>
+              <a:t/>
             </a:r>
             <a:endParaRPr lang="en-US" dirty="0"/>
           </a:p>
@@ -1142,7 +1142,7 @@
           <a:p>
             <a:r>
               <a:rPr lang="en-US" dirty="0"/>
-              <a:t>Чесна історія з підготовки цього курсу. Мій перший breaker був простий: «3 збої → open на 30 секунд». На демо після симульованого інциденту бот продовжив відбивати вже здорового провайдера ще пів хвилини — інцидент закінчився, а система вперто жила за планом Б, і eval-прогін почервонів. Circuit breaker без half-open — це самостріл: ви власноруч влаштовуєте собі outage, довший за реальний. Правильна машина станів має три положення. Closed — усе штатно, лічимо збої. Open — запити оминають модель, одразу fallback. І half-open — раз на кілька секунд пропускаємо один пробний запит: успіх — закриваємо circuit, збій — лишаємось open. Пробний запит — це і є механізм «помічання одужання»; без нього open перетворюється на вирок із фіксованим терміном, який не зважає на реальність. [Ведучому: на демо ціну відкритого circuit проговорюй вголос — здорове питання отримує заглушку миттєво, бо система вже здорова, а breaker ще ні; probe — це звичайне повідомлення, не маркер.]</a:t>
+              <a:t/>
             </a:r>
             <a:endParaRPr lang="en-US" dirty="0"/>
           </a:p>
@@ -1230,7 +1230,7 @@
           <a:p>
             <a:r>
               <a:rPr lang="en-US" dirty="0"/>
-              <a:t>Останній шматок — переконатися, що вся сьогоднішня драма лишає докази. Лічильник fallback_events росте з кожним переходом за ланцюгом; статуси збоїв — 503, 429, 0 — лежать у лозі поруч зі звичайними 200; заглушка деградації пише чесний статус. На тижні 5 усе це стане плитками консолі — сьогодні достатньо, що цифри існують і ростуть правильно. Чому це не бюрократія: інцидент, що не лишив сліду, — це інцидент, який неможливо розслідувати, а отже, він повториться. «Скільки запитів пішло через fallback минулої п'ятниці?» — питання, з якого починається і постмортем, і розмова з провайдером про SLA, і рішення про другого провайдера. Відповідь має бути в даних. І чесно про наш контур: стан breaker'а, як і кеш з уроку 5, живе в пам'яті процесу — у кожного інстансу свій. На відміну від черги підтверджень незворотних дій, яку ви збудуєте наступного уроку, тут це не дефект, а нормальна практика: кожен процес сам спостерігає власні збої і сам вирішує, коли перестати стукати — один «отруєний» інстанс не відкриває breaker усім. Знати про це варто з іншої причини: при десятьох інстансах провайдер отримає до десяти пробних запитів у half-open замість одного. Тоді стан переносять у спільне сховище — і платять за це залежністю від нього в найгірший момент. Компроміс свідомий: рішення не «правильне/неправильне», а «яку ціну ви обрали». [Ведучому: лічильник на w4 не віддається нічим — перехід показуй у діфі коду; плитки оживуть на тижні 5.]</a:t>
+              <a:t/>
             </a:r>
             <a:endParaRPr lang="en-US" dirty="0"/>
           </a:p>
@@ -1318,7 +1318,7 @@
           <a:p>
             <a:r>
               <a:rPr lang="en-US" dirty="0"/>
-              <a:t>Дві сучасні поправки до бюджету часу, яких не було в епоху «одна модель — одна відповідь». Перша: моделі з режимом мислення відповідають значно довше за швидкі — той самий запит може займати секунди замість сотень мілісекунд, і ваш таймаут, налаштований на швидкий режим, почне «падати» на легітимно повільних відповідях. Друга: провайдерські ліміти сьогодні багатовимірні — не лише запити на хвилину, а й токени на хвилину, окремі квоти на «думаючі» моделі й на кешовані токени. 429 приходить не тому, що «багато запитів», а тому, що ви вибрали токен-квоту. Практичний висновок: таймаут і поріг ретраїв мають бути різні для різних маршрутів, а причину 429 треба логувати з тілом відповіді — інакше ви лікуєте не той ліміт. І лайфхак наостанок: надійність, яку тестують лише реальними інцидентами, — це надія, а не інженерія. Mock дає вам збої на замовлення: __fail_503, __fail_429, __delay. Прогін «інцидентного сценарію» після кожної зміни reliability-коду коштує хвилину — зробіть його звичкою, а на тижні 6 він стане частиною CI.</a:t>
+              <a:t/>
             </a:r>
             <a:endParaRPr lang="en-US" dirty="0"/>
           </a:p>
@@ -1406,7 +1406,7 @@
           <a:p>
             <a:r>
               <a:rPr lang="en-US" dirty="0"/>
-              <a:t>Перш ніж перейти до екрана — що саме ви зараз побачите і навіщо. Пишу в чат __fail_503 — і замість 500-ки приходить ввічлива заглушка. Той самий маркер удруге — збій уже коштує мілісекунди. Потім показую перехід fallback у діфі коду: лічильник інкрементиться на кожному переході, а плитки для нього оживуть на тижні 5. Далі опційна частина: три __fail_503 поспіль відкривають circuit — і тепер навіть здорове питання миттєво отримує заглушку. Система вже здорова, а breaker ще ні — це ціна відкритого circuit, проговорюю її вголос. Пауза секунд п'ять — звичайне питання спрацьовує як probe, і circuit закривається. Навіщо це все: побачити спроєктовану відмову наживо — збій не 500 і не 8 секунд, а швидка ввічлива заглушка зі слідом у лозі. [Ведучому: заміряй латентність збою на екрані. Перший збій після підняття — холодний шлях, ~сотні мс, не «мілісекунди»: прогрів іде успішним шляхом, шлях збою лишається холодним — прожени __fail_503 двічі, другий буде ~50–60 мс. Передумова — num_retries: 0 у конфізі gateway, інакше «швидкий збій» триватиме 8 секунд. Probe — звичайне повідомлення, не маркер. Лічильник на w4 не віддається нічим — показуй діф коду. Успішний fallback «основна впала — резерв відповів» на mock показати неможливо: маркер їде в тексті — падають обидва елементи ланцюга; проговори як межу стенда. Retry у курсі свідомо не реалізований.]</a:t>
+              <a:t/>
             </a:r>
             <a:endParaRPr lang="en-US" dirty="0"/>
           </a:p>
@@ -1494,7 +1494,7 @@
           <a:p>
             <a:r>
               <a:rPr lang="en-US" dirty="0"/>
-              <a:t>Домовимось про результат уроку конкретними діями. Після сьогоднішнього ви зможете: винести виклик моделі у функцію, яка повертає успіх або невдачу, — збій стане значенням, з яким працює логіка, а не аварією, що летить крізь стек. Побудувати fallback-ланцюг, де кожен перехід лічиться, а в лог їде модель, яка реально відповіла. Віддати користувачу ввічливу заглушку замість 500-ки — і чесний 503 у лог, щоб моніторинг не осліп під час інциденту. Влаштувати керований інцидент через __fail_503 і переконатися, що збій коштує мілісекунди, а не секунди прихованих ретраїв. Пояснити одним реченням різницю між retry, fallback і circuit breaker. А для охочих — зібрати circuit breaker з half-open і на власні очі побачити, чому без half-open він перетворюється на самостріл. Кожен пункт перевіримо руками ще сьогодні — у лабораторній.</a:t>
+              <a:t/>
             </a:r>
             <a:endParaRPr lang="en-US" dirty="0"/>
           </a:p>
@@ -1582,7 +1582,7 @@
           <a:p>
             <a:r>
               <a:rPr lang="en-US" dirty="0"/>
-              <a:t>Лабораторна — інцидент на замовлення: три обов'язкові кроки і один опційний. Крок перший: побудувати ланцюг — винести виклик моделі в CallGateway, щоб ok і fail були значеннями, додати цикл по ланцюгу і лічильник fallback-переходів. Крок другий: влаштувати інцидент — __fail_503 у чат. Обидві спроби ланцюга падають: маркер їде в тексті користувача, а обидва елементи — той самий mock, це межа стенда. Користувач отримує ввічливу заглушку за мілісекунди, а не 500 після 8 секунд; перехід порахований — лічильник видно в діфі коду, плитка оживе на тижні 5. Успішний сценарій «основна впала — резерв відповів» на mock не відтворюється — тож переконайтеся по коду, що при ok від другого елемента в лог їде саме модель, яка реально відповіла. Крок третій: перевірити слід — статуси збоїв у лозі, лічильник росте. Проговоріть: які три питання ви поставите цим даним на постмортемі. І опційний четвертий: circuit breaker — 3 збої → open, запити оминають модель без очікування; почекати кілька секунд → пробний запит → circuit закрився. Обов'язково відтворіть самостріл: закоментуйте half-open і подивіться, як «одужалий» провайдер лишається заблокованим. [Ведучому: перед показом — num_retries: 0 у конфізі gateway; латентність збою заміряй на екрані; probe — звичайне повідомлення, не маркер.]</a:t>
+              <a:t/>
             </a:r>
             <a:endParaRPr lang="en-US" dirty="0"/>
           </a:p>
@@ -1670,7 +1670,7 @@
           <a:p>
             <a:r>
               <a:rPr lang="en-US" dirty="0"/>
-              <a:t>Зафіксуємо, що демо довело. Перше: збій — більше не 500-ка. На __fail_503 користувач отримав ввічливу заглушку, чат лишився живим, а відмова стала спроєктованою, а не випадковою. Друге: збій швидкий — мілісекунди, а не вісім секунд прихованих ретраїв. Reliability-логіка живе в одному місці, у сервісі, а в конфізі gateway стоїть num_retries: 0. Третє: інцидент лишив слід — чесний 503 у лозі, а не 200 з ввічливим текстом, і лічильник переходів, який видно в коді. Разом це і є керованість падіння: план Б, спроєктована відмова, докази в даних. І чесна межа стенда: успішний fallback — «основна впала, резерв відповів» — на mock не показати, бо маркер їде в тексті і валить обидва елементи ланцюга. Механіка переходу при цьому справжня і видима в коді — з реальним ключем вона запрацює без змін.</a:t>
+              <a:t/>
             </a:r>
             <a:endParaRPr lang="en-US" dirty="0"/>
           </a:p>
@@ -1758,7 +1758,7 @@
           <a:p>
             <a:r>
               <a:rPr lang="en-US" dirty="0"/>
-              <a:t>Перш ніж розійтися — чесна перевірка без оцінок. Обов'язкова доріжка: __fail_503 не дає 500 — дає ввічливу заглушку. Fallback-перехід відбувається і лічиться — лічильник у діфі коду, а по коду перевірено, що при ok від резерву в лог їде модель, яка реально відповіла. Збій коштує мілісекунди, а не секунди прихованих ретраїв. І можете пояснити retry, fallback і circuit breaker одним реченням кожен. Якщо десь завагалися — повертайтеся у відповідний блок уроку. І пригадайте з минулих тижнів, без підглядання: чому промпт — частина ключа кешу і який баг це прибирає — це урок 5; що дає атрибуція вартості, чого не дає загальна сума — урок 4; чому активну версію промпта ніколи не редагують на місці — урок 2. Питання, які лишилися, — несіть у канал потоку або на Q&amp;A.</a:t>
+              <a:t/>
             </a:r>
             <a:endParaRPr lang="en-US" dirty="0"/>
           </a:p>
@@ -1846,7 +1846,7 @@
           <a:p>
             <a:r>
               <a:rPr lang="en-US" dirty="0"/>
-              <a:t>П'ять способів зіпсувати собі тиждень надійності — усі перевірені. Retry без backoff і бюджету — це DDoS власного провайдера в найгірший момент: 429 означає «пригальмуйте», а не «стукайте частіше». Circuit breaker без half-open — самостріл: outage довший за реальний, перевірено на собі — система відбиває вже здорового провайдера до кінця таймера. Приховані ретраї в кількох шарах одночасно: бюджети часу перемножуються, і «швидка відмова» триває пів хвилини — reliability-логіка має жити в одному місці, у вашому сервісі. 500 користувачу як «стратегія» деградації: відмова — це теж інтерфейс, її проєктують, а не залишають на волю стек-трейса. І тестувати reliability лише на реальних інцидентах: керований збій у mock коштує хвилину і відтворюється в CI. Надійність, яку не можна відтворити на замовлення, — це надія, а не інженерія.</a:t>
+              <a:t/>
             </a:r>
             <a:endParaRPr lang="en-US" dirty="0"/>
           </a:p>
@@ -1934,7 +1934,7 @@
           <a:p>
             <a:r>
               <a:rPr lang="en-US" dirty="0"/>
-              <a:t>Домашнє завдання. Обов'язково, до наступного уроку, без здачі: закріпити лабу — __fail_503, fallback, у найгіршому разі ввічлива заглушка; переконатися, що збій швидкий — мілісекунди — і залишає чесний статус у лозі; і проговорити свою драбину деградації: що можна віддати з кешу, де чесно відмовити. Опційно — circuit breaker: 3 збої → open на 30 секунд, обов'язково з half-open — пробний запит раз на приблизно 5 секунд, — інакше сам собі влаштуєш outage. І про ДЗ тижня: воно здається після наступного уроку. ДЗ тижня 4 об'єднує надійність і безпеку: сьогоднішній fallback із деградацією — вже у вас в руках, після наступного уроку додасться черга підтверджень для незворотних дій — і тиждень здається одним PR. Критерії — у файлі ДЗ після наступного уроку.</a:t>
+              <a:t/>
             </a:r>
             <a:endParaRPr lang="en-US" dirty="0"/>
           </a:p>
@@ -2022,7 +2022,7 @@
           <a:p>
             <a:r>
               <a:rPr lang="en-US" dirty="0"/>
-              <a:t>Підсумуємо. Reliability — не про те, «щоб не падало». Падатиме: чужа інфраструктура дає стрибки latency, 429 у пік і 5xx, і це нормальний режим роботи інтернету, а не аномалія. Питання лише в тому, чи падіння кероване. Перший крок до керованості — зробити збій значенням, а не винятком: CallGateway повертає ok замість того, щоб кидати, і саме тому з викликів стало можливо будувати ланцюги. Retry і fallback вирішують різні задачі: ще раз туди само — на минущих збоях, обов'язково з паузою і бюджетом; в інше місце — коли провайдер лежить. Порядок у нас однозначний: спершу fallback, і бюджет часу — на все разом. Деградація має сходинки, і ввічлива заглушка — остання з них, а не єдина; вона ж єдине місце сьогоднішнього уроку, де рішення ухвалює не інженер, а продукт: що чесніше сказати користувачу. Але статус усередину завжди чесний — заглушка з кодом 200 робить моніторинг сліпим рівно тоді, коли він потрібен. І останнє: інцидент без сліду в метриках повториться, тому лічильник переходів і чесні статуси збоїв — частина механізму, а не звітності. Наступний урок — safety, guardrails і human-in-the-loop. Система переживає збій провайдера; далі — збої іншого роду, коли шкоду завдає не інфраструктура, а зміст. Injection, витік даних і незворотні дії, які мусить підтвердити людина — та сама «дірка», яку ми свідомо лишили відкритою на уроці 6. До зустрічі.</a:t>
+              <a:t/>
             </a:r>
             <a:endParaRPr lang="en-US" dirty="0"/>
           </a:p>
@@ -2110,7 +2110,7 @@
           <a:p>
             <a:r>
               <a:rPr lang="en-US" dirty="0"/>
-              <a:t>Маршрут такий. Спершу проблема: наша фіча залежить від чужої інфраструктури, і падіння — це нормальний режим, а не аномалія. Далі словник рішень: retry проти fallback, правильний порядок і бюджет часу згори вниз. Потім три шматки коду: CallGateway, де збій стає значенням; fallback-ланцюг з лічильником переходів; і ввічлива деградація з чесним статусом у лозі. Окремий блок — про право на повтор, лавину ретраїв і сходинки деградації: між нормою і заглушкою є проміжні варіанти. Блок про num_retries: 0 пояснює, чому помилки мають бути швидкими і чому reliability-логіка живе в одному місці. Опційний блок — circuit breaker з обов'язковим half-open. Далі слід у метриках, місток до демо, лабораторна з інцидентом на замовлення, антипатерни і домашнє завдання. [Ведучому: §02 теорії стискай до ~3 хвилин — backoff по реченню, історію з практики — до формули.]</a:t>
+              <a:t/>
             </a:r>
             <a:endParaRPr lang="en-US" dirty="0"/>
           </a:p>
@@ -2198,7 +2198,7 @@
           <a:p>
             <a:r>
               <a:rPr lang="en-US" dirty="0"/>
-              <a:t>Домовимось про шість слів. Retry — повторити ще раз туди само; доречний на минущих збоях і обов'язково з паузою. Fallback — піти в інше місце: на іншу модель або провайдера, за явно оголошеним порядком. Backoff — та сама пауза перед повтором: фіксована, експоненційна або з джитером, тобто випадковим зсувом. Graceful degradation — ввічлива деградація: замість помилки користувач отримує чесну відповідь нижчої якості. Circuit breaker — запобіжник, який після кількох збоїв перестає стукати в мертвий сервіс; він має три стани, і сьогодні ми їх побачимо. Half-open — стан пробного запиту: breaker пускає один запит подивитися, чи ожив провайдер. Без half-open запобіжник перетворюється на самостріл — і це ми теж розберемо.</a:t>
+              <a:t/>
             </a:r>
             <a:endParaRPr lang="en-US" dirty="0"/>
           </a:p>
@@ -2286,7 +2286,7 @@
           <a:p>
             <a:r>
               <a:rPr lang="en-US" dirty="0"/>
-              <a:t>Ваша LLM-фіча залежить від інфраструктури, якою ви не керуєте, — це четверта властивість з уроку 1, і сьогодні її черга. 429 у пік трафіку, 5xx під час інциденту провайдера, стрибки latency — це не аномалії, це нормальний режим роботи інтернету. Ненормальним є те, як більшість систем на це реагує: гола 500-ка користувачу і тиша в логах. Окрема підступна категорія — тихі смерті: найгірші збої не дають 5xx. Я розбирав інцидент, де голосовий агент просто замовкав на другій хвилині розмови — жодної помилки, жодного алерту: з'єднання тихо вмирало десь по дорозі, бо ніхто не слав keepalive частіше, ніж мережа встигала «прибрати» неактивний конект. Схема «запит-відповідь» такі речі не ловить у принципі — для довгих і стрімінгових сесій потрібен heartbeat, а не надія. У нашому контурі сесії короткі, тож сьогодні ця категорія лишається згадкою, але тримайте її в голові, щойно з'явиться streaming. І головне переформулювання уроку: reliability — це не «щоб не падало». Падатиме. Reliability — це щоб падіння було керованим: з планом Б, з ввічливою відмовою в найгіршому разі і зі слідами в метриках. До сьогодні збій провайдера означав чесну катастрофу — ви бачили це в лабі уроку 1. Сьогодні між збоєм і користувачем з'являються два шари: спроба піти в інше місце і спроєктована відмова, якщо не вийшло.</a:t>
+              <a:t/>
             </a:r>
             <a:endParaRPr lang="en-US" dirty="0"/>
           </a:p>
@@ -2374,7 +2374,7 @@
           <a:p>
             <a:r>
               <a:rPr lang="en-US" dirty="0"/>
-              <a:t>Два слова, які часто змішують, — а це різні механізми з різною механікою відмови. Retry — ще раз туди само; доречний на минущих збоях: мережевий глюк, 429. Обов'язкові атрибути — backoff і бюджет спроб; головний ризик — DDoS власного провайдера. Fallback — в інше місце, до іншої моделі чи провайдера; доречний, коли провайдер лежить або деградує; вимагає явного порядку ланцюга; ризик — непомітна різниця якості моделей. Правильний порядок теж має значення: спершу короткий retry — раптом глюк; потім fallback — схоже, надовго; і на все разом бюджет часу, бо користувач чекає відповіді, а не вашої боротьби за неї. Бюджет згори вниз, як із таймаутами інструментів минулого уроку: спершу «скільки чекає користувач», потім — скільки з цього можна витратити на спроби. І чесне уточнення про наш контур: retry в коді курсу свідомо не будуємо — на mock він нічого не додає, бо «ще раз туди само» і «в інше місце» ведуть в один процес. Тому будуємо fallback, а retry тримаємо в голові поруч: у проді порядок саме такий. З практики, як виглядає доросла форма цього рішення — з реального фіксу на голосовій платформі, яку я супроводжую: звіт про результат дзвінка йшов у зовнішню систему, і мережа інколи його губила. Фінальна політика — три частини, кожна обов'язкова: обмежений retry з backoff, а після вичерпання спроб — durable термінальний стан: чесний запис «помилка, спроби вичерпано», який видно і людині, і метрикам. Найгірша альтернатива — не відсутність ретраїв, а нескінченні: операція, що вічно «ще пробує», не з'являється в жодному звіті як проблема. І дотична знахідка: кожна термінальна гілка — успіх, помилка, таймаут, скасування — має звільняти захоплені ресурси.</a:t>
+              <a:t/>
             </a:r>
             <a:endParaRPr lang="en-US" dirty="0"/>
           </a:p>
@@ -2462,7 +2462,7 @@
           <a:p>
             <a:r>
               <a:rPr lang="en-US" dirty="0"/>
-              <a:t>Про сам backoff — паузу між спробами — варто знати три класичні форми. Фіксований: «чекай секунду» — найпростіший, але на масовому збої всі клієнти ретраять синхронно, хвилями. Експоненційний: секунда, дві, чотири — дає системі, що задихається, дедалі більше повітря. І jitter — випадковий зсув до паузи, який розсинхронізовує натовп: без нього тисяча клієнтів, що впали одночасно, повернеться теж одночасно, і друга хвиля доб'є те, що вижило після першої. Для нашого стека з одним користувачем це теорія; для будь-якого проду — перше, про що питають на розборі ретрай-шторму. І типова помилка, яка з цього випливає: retry без backoff і без бюджету. Провайдер повернув 429 «пригальмуйте» — а ви у відповідь потроїли трафік ретраями. Тепер ліміти вичерпуються ще швидше, і ваш власний код став другою половиною інциденту. Кожен retry має чекати перед спробою і мати стелю кількості. [Ведучому: §02 стискай до ~3 хвилин — по реченню на кожну форму backoff.]</a:t>
+              <a:t/>
             </a:r>
             <a:endParaRPr lang="en-US" dirty="0"/>
           </a:p>
@@ -2550,7 +2550,7 @@
           <a:p>
             <a:r>
               <a:rPr lang="en-US" dirty="0"/>
-              <a:t>Перший крок сьогоднішньої роботи непомітний, але він робить можливим усе інше: виклик моделі виноситься у функцію, яка повертає успіх або невдачу, а не кидає виняток. CallGateway робить один POST на /v1/chat/completions через gateway і віддає кортеж: ok, відповідь, інструмент, токени, статус. Якщо статус чотириста і вище — ok дорівнює false; якщо мережа впала або gateway лежить — теж false, зі статусом нуль. Чому це важливо: збій перестає бути аварією, що летить крізь стек, і стає звичайним значенням, з яким працює логіка. «Не вийшло» — це legitimate результат виклику, один із двох очікуваних. Саме навколо такої функції можна будувати ланцюги, лічити переходи і ухвалювати рішення — з винятком у польоті нічого цього зробити не можна. І зверніть увагу на status: 0 у гілці catch: «відповіді не було взагалі» відрізняється від «відповідь була, але 5xx» — і в лозі ці випадки теж мають розрізнятися.</a:t>
+              <a:t/>
             </a:r>
             <a:endParaRPr lang="en-US" dirty="0"/>
           </a:p>
@@ -2638,7 +2638,7 @@
           <a:p>
             <a:r>
               <a:rPr lang="en-US" dirty="0"/>
-              <a:t>Тепер сам ланцюг — цикл по черзі кандидатів. Політика з уроку 3 — «у разі збою вниз, до дешевшої моделі» — набуває робочої форми: перший елемент — модель, обрана роутером, другий — резерв. На mock резервного провайдера немає, тож роль резерву в коді чесно грає той самий mock; з реальним ключем на друге місце стає інша модель чи провайдер — і ваш записаний на уроці 3 порядок вставляється сюди без змін. Три операційні рішення. Перше: кожен перехід далі за ланцюгом — інкремент лічильника Fallbacks. Fallback, що спрацював непомітно, — це замаскована проблема: користувачі вже обслуговуються резервом, а ви про це не знаєте. Друге: model = chain[i] — у лог їде та модель, яка реально відповіла, а не та, яку обрав роутер. Інакше вся аналітика вартості й якості тижня 2 почне брехати рівно в найцікавіші моменти. Уточнення для читача лога: коли впали всі елементи ланцюга, у рядку лишається модель, обрана роутером, зі статусом 503 — «хто реально відповів» на повному падінні просто не існує. Третє: на mock другий елемент ланцюга — той самий mock, і це чесне навчальне обмеження: механіка переходу справжня, а «резервного дата-центру» в компоузі немає. [Ведучому: успішний fallback «основна впала — резерв відповів» на mock показати неможливо — маркер їде в тексті користувача, тож падають обидва елементи; показуй перехід у діфі коду і проговорюй як межу стенда.]</a:t>
+              <a:t/>
             </a:r>
             <a:endParaRPr lang="en-US" dirty="0"/>
           </a:p>
@@ -5011,7 +5011,7 @@
       </p:graphicFrame>
       <p:sp>
         <p:nvSpPr>
-          <p:cNvPr id="9" name="Shape 4"/>
+          <p:cNvPr id="8" name="Shape 4"/>
           <p:cNvSpPr/>
           <p:nvPr/>
         </p:nvSpPr>
@@ -5033,7 +5033,7 @@
       </p:sp>
       <p:sp>
         <p:nvSpPr>
-          <p:cNvPr id="10" name="Text 5"/>
+          <p:cNvPr id="9" name="Text 5"/>
           <p:cNvSpPr/>
           <p:nvPr/>
         </p:nvSpPr>
@@ -5072,7 +5072,7 @@
       </p:sp>
       <p:sp>
         <p:nvSpPr>
-          <p:cNvPr id="11" name="Text 6"/>
+          <p:cNvPr id="10" name="Text 6"/>
           <p:cNvSpPr/>
           <p:nvPr/>
         </p:nvSpPr>
@@ -5357,7 +5357,7 @@
       </p:pic>
       <p:sp>
         <p:nvSpPr>
-          <p:cNvPr id="8" name="Shape 4"/>
+          <p:cNvPr id="7" name="Shape 4"/>
           <p:cNvSpPr/>
           <p:nvPr/>
         </p:nvSpPr>
@@ -5379,7 +5379,7 @@
       </p:sp>
       <p:sp>
         <p:nvSpPr>
-          <p:cNvPr id="9" name="Text 5"/>
+          <p:cNvPr id="8" name="Text 5"/>
           <p:cNvSpPr/>
           <p:nvPr/>
         </p:nvSpPr>
@@ -5418,7 +5418,7 @@
       </p:sp>
       <p:sp>
         <p:nvSpPr>
-          <p:cNvPr id="10" name="Shape 6"/>
+          <p:cNvPr id="9" name="Shape 6"/>
           <p:cNvSpPr/>
           <p:nvPr/>
         </p:nvSpPr>
@@ -5441,7 +5441,7 @@
       </p:sp>
       <p:sp>
         <p:nvSpPr>
-          <p:cNvPr id="11" name="Shape 7"/>
+          <p:cNvPr id="10" name="Shape 7"/>
           <p:cNvSpPr/>
           <p:nvPr/>
         </p:nvSpPr>
@@ -5461,7 +5461,7 @@
       </p:sp>
       <p:sp>
         <p:nvSpPr>
-          <p:cNvPr id="12" name="Shape 8"/>
+          <p:cNvPr id="11" name="Shape 8"/>
           <p:cNvSpPr/>
           <p:nvPr/>
         </p:nvSpPr>
@@ -5483,7 +5483,7 @@
       </p:sp>
       <p:sp>
         <p:nvSpPr>
-          <p:cNvPr id="13" name="Text 9"/>
+          <p:cNvPr id="12" name="Text 9"/>
           <p:cNvSpPr/>
           <p:nvPr/>
         </p:nvSpPr>
@@ -5522,7 +5522,7 @@
       </p:sp>
       <p:sp>
         <p:nvSpPr>
-          <p:cNvPr id="14" name="Shape 10"/>
+          <p:cNvPr id="13" name="Shape 10"/>
           <p:cNvSpPr/>
           <p:nvPr/>
         </p:nvSpPr>
@@ -5545,7 +5545,7 @@
       </p:sp>
       <p:sp>
         <p:nvSpPr>
-          <p:cNvPr id="15" name="Shape 11"/>
+          <p:cNvPr id="14" name="Shape 11"/>
           <p:cNvSpPr/>
           <p:nvPr/>
         </p:nvSpPr>
@@ -5565,7 +5565,7 @@
       </p:sp>
       <p:sp>
         <p:nvSpPr>
-          <p:cNvPr id="16" name="Shape 12"/>
+          <p:cNvPr id="15" name="Shape 12"/>
           <p:cNvSpPr/>
           <p:nvPr/>
         </p:nvSpPr>
@@ -5587,7 +5587,7 @@
       </p:sp>
       <p:sp>
         <p:nvSpPr>
-          <p:cNvPr id="17" name="Text 13"/>
+          <p:cNvPr id="16" name="Text 13"/>
           <p:cNvSpPr/>
           <p:nvPr/>
         </p:nvSpPr>
@@ -5626,7 +5626,7 @@
       </p:sp>
       <p:sp>
         <p:nvSpPr>
-          <p:cNvPr id="18" name="Shape 14"/>
+          <p:cNvPr id="17" name="Shape 14"/>
           <p:cNvSpPr/>
           <p:nvPr/>
         </p:nvSpPr>
@@ -5649,7 +5649,7 @@
       </p:sp>
       <p:sp>
         <p:nvSpPr>
-          <p:cNvPr id="19" name="Shape 15"/>
+          <p:cNvPr id="18" name="Shape 15"/>
           <p:cNvSpPr/>
           <p:nvPr/>
         </p:nvSpPr>
@@ -5669,7 +5669,7 @@
       </p:sp>
       <p:sp>
         <p:nvSpPr>
-          <p:cNvPr id="20" name="Shape 16"/>
+          <p:cNvPr id="19" name="Shape 16"/>
           <p:cNvSpPr/>
           <p:nvPr/>
         </p:nvSpPr>
@@ -5691,7 +5691,7 @@
       </p:sp>
       <p:sp>
         <p:nvSpPr>
-          <p:cNvPr id="21" name="Text 17"/>
+          <p:cNvPr id="20" name="Text 17"/>
           <p:cNvSpPr/>
           <p:nvPr/>
         </p:nvSpPr>
@@ -5730,7 +5730,7 @@
       </p:sp>
       <p:sp>
         <p:nvSpPr>
-          <p:cNvPr id="22" name="Shape 18"/>
+          <p:cNvPr id="21" name="Shape 18"/>
           <p:cNvSpPr/>
           <p:nvPr/>
         </p:nvSpPr>
@@ -5752,7 +5752,7 @@
       </p:sp>
       <p:sp>
         <p:nvSpPr>
-          <p:cNvPr id="23" name="Shape 19"/>
+          <p:cNvPr id="22" name="Shape 19"/>
           <p:cNvSpPr/>
           <p:nvPr/>
         </p:nvSpPr>
@@ -5772,7 +5772,7 @@
       </p:sp>
       <p:sp>
         <p:nvSpPr>
-          <p:cNvPr id="24" name="Text 20"/>
+          <p:cNvPr id="23" name="Text 20"/>
           <p:cNvSpPr/>
           <p:nvPr/>
         </p:nvSpPr>
@@ -5811,7 +5811,7 @@
       </p:sp>
       <p:sp>
         <p:nvSpPr>
-          <p:cNvPr id="25" name="Text 21"/>
+          <p:cNvPr id="24" name="Text 21"/>
           <p:cNvSpPr/>
           <p:nvPr/>
         </p:nvSpPr>
@@ -5850,7 +5850,7 @@
       </p:sp>
       <p:sp>
         <p:nvSpPr>
-          <p:cNvPr id="26" name="Text 22"/>
+          <p:cNvPr id="25" name="Text 22"/>
           <p:cNvSpPr/>
           <p:nvPr/>
         </p:nvSpPr>
@@ -5892,7 +5892,7 @@
       </p:sp>
       <p:sp>
         <p:nvSpPr>
-          <p:cNvPr id="27" name="Shape 23"/>
+          <p:cNvPr id="26" name="Shape 23"/>
           <p:cNvSpPr/>
           <p:nvPr/>
         </p:nvSpPr>
@@ -5914,7 +5914,7 @@
       </p:sp>
       <p:sp>
         <p:nvSpPr>
-          <p:cNvPr id="28" name="Shape 24"/>
+          <p:cNvPr id="27" name="Shape 24"/>
           <p:cNvSpPr/>
           <p:nvPr/>
         </p:nvSpPr>
@@ -5934,7 +5934,7 @@
       </p:sp>
       <p:sp>
         <p:nvSpPr>
-          <p:cNvPr id="29" name="Text 25"/>
+          <p:cNvPr id="28" name="Text 25"/>
           <p:cNvSpPr/>
           <p:nvPr/>
         </p:nvSpPr>
@@ -5973,7 +5973,7 @@
       </p:sp>
       <p:sp>
         <p:nvSpPr>
-          <p:cNvPr id="30" name="Text 26"/>
+          <p:cNvPr id="29" name="Text 26"/>
           <p:cNvSpPr/>
           <p:nvPr/>
         </p:nvSpPr>
@@ -6012,7 +6012,7 @@
       </p:sp>
       <p:sp>
         <p:nvSpPr>
-          <p:cNvPr id="31" name="Text 27"/>
+          <p:cNvPr id="30" name="Text 27"/>
           <p:cNvSpPr/>
           <p:nvPr/>
         </p:nvSpPr>
@@ -6054,7 +6054,7 @@
       </p:sp>
       <p:sp>
         <p:nvSpPr>
-          <p:cNvPr id="32" name="Shape 28"/>
+          <p:cNvPr id="31" name="Shape 28"/>
           <p:cNvSpPr/>
           <p:nvPr/>
         </p:nvSpPr>
@@ -6076,7 +6076,7 @@
       </p:sp>
       <p:sp>
         <p:nvSpPr>
-          <p:cNvPr id="33" name="Shape 29"/>
+          <p:cNvPr id="32" name="Shape 29"/>
           <p:cNvSpPr/>
           <p:nvPr/>
         </p:nvSpPr>
@@ -6096,7 +6096,7 @@
       </p:sp>
       <p:sp>
         <p:nvSpPr>
-          <p:cNvPr id="34" name="Text 30"/>
+          <p:cNvPr id="33" name="Text 30"/>
           <p:cNvSpPr/>
           <p:nvPr/>
         </p:nvSpPr>
@@ -6135,7 +6135,7 @@
       </p:sp>
       <p:sp>
         <p:nvSpPr>
-          <p:cNvPr id="35" name="Text 31"/>
+          <p:cNvPr id="34" name="Text 31"/>
           <p:cNvSpPr/>
           <p:nvPr/>
         </p:nvSpPr>
@@ -6174,7 +6174,7 @@
       </p:sp>
       <p:sp>
         <p:nvSpPr>
-          <p:cNvPr id="36" name="Text 32"/>
+          <p:cNvPr id="35" name="Text 32"/>
           <p:cNvSpPr/>
           <p:nvPr/>
         </p:nvSpPr>
@@ -6216,7 +6216,7 @@
       </p:sp>
       <p:sp>
         <p:nvSpPr>
-          <p:cNvPr id="37" name="Shape 33"/>
+          <p:cNvPr id="36" name="Shape 33"/>
           <p:cNvSpPr/>
           <p:nvPr/>
         </p:nvSpPr>
@@ -6238,7 +6238,7 @@
       </p:sp>
       <p:sp>
         <p:nvSpPr>
-          <p:cNvPr id="38" name="Text 34"/>
+          <p:cNvPr id="37" name="Text 34"/>
           <p:cNvSpPr/>
           <p:nvPr/>
         </p:nvSpPr>
@@ -6277,7 +6277,7 @@
       </p:sp>
       <p:sp>
         <p:nvSpPr>
-          <p:cNvPr id="39" name="Text 35"/>
+          <p:cNvPr id="38" name="Text 35"/>
           <p:cNvSpPr/>
           <p:nvPr/>
         </p:nvSpPr>
@@ -7829,7 +7829,7 @@
       </p:graphicFrame>
       <p:sp>
         <p:nvSpPr>
-          <p:cNvPr id="9" name="Shape 4"/>
+          <p:cNvPr id="8" name="Shape 4"/>
           <p:cNvSpPr/>
           <p:nvPr/>
         </p:nvSpPr>
@@ -7851,7 +7851,7 @@
       </p:sp>
       <p:sp>
         <p:nvSpPr>
-          <p:cNvPr id="10" name="Text 5"/>
+          <p:cNvPr id="9" name="Text 5"/>
           <p:cNvSpPr/>
           <p:nvPr/>
         </p:nvSpPr>
@@ -8136,7 +8136,7 @@
       </p:pic>
       <p:sp>
         <p:nvSpPr>
-          <p:cNvPr id="8" name="Shape 4"/>
+          <p:cNvPr id="7" name="Shape 4"/>
           <p:cNvSpPr/>
           <p:nvPr/>
         </p:nvSpPr>
@@ -8163,7 +8163,7 @@
       </p:sp>
       <p:sp>
         <p:nvSpPr>
-          <p:cNvPr id="9" name="Text 5"/>
+          <p:cNvPr id="8" name="Text 5"/>
           <p:cNvSpPr/>
           <p:nvPr/>
         </p:nvSpPr>
@@ -8285,7 +8285,7 @@
       </p:sp>
       <p:sp>
         <p:nvSpPr>
-          <p:cNvPr id="10" name="Shape 6"/>
+          <p:cNvPr id="9" name="Shape 6"/>
           <p:cNvSpPr/>
           <p:nvPr/>
         </p:nvSpPr>
@@ -8307,7 +8307,7 @@
       </p:sp>
       <p:sp>
         <p:nvSpPr>
-          <p:cNvPr id="11" name="Text 7"/>
+          <p:cNvPr id="10" name="Text 7"/>
           <p:cNvSpPr/>
           <p:nvPr/>
         </p:nvSpPr>
@@ -8346,7 +8346,7 @@
       </p:sp>
       <p:sp>
         <p:nvSpPr>
-          <p:cNvPr id="12" name="Text 8"/>
+          <p:cNvPr id="11" name="Text 8"/>
           <p:cNvSpPr/>
           <p:nvPr/>
         </p:nvSpPr>
@@ -8388,7 +8388,7 @@
       </p:sp>
       <p:sp>
         <p:nvSpPr>
-          <p:cNvPr id="13" name="Shape 9"/>
+          <p:cNvPr id="12" name="Shape 9"/>
           <p:cNvSpPr/>
           <p:nvPr/>
         </p:nvSpPr>
@@ -8410,7 +8410,7 @@
       </p:sp>
       <p:sp>
         <p:nvSpPr>
-          <p:cNvPr id="14" name="Text 10"/>
+          <p:cNvPr id="13" name="Text 10"/>
           <p:cNvSpPr/>
           <p:nvPr/>
         </p:nvSpPr>
@@ -8449,7 +8449,7 @@
       </p:sp>
       <p:sp>
         <p:nvSpPr>
-          <p:cNvPr id="15" name="Text 11"/>
+          <p:cNvPr id="14" name="Text 11"/>
           <p:cNvSpPr/>
           <p:nvPr/>
         </p:nvSpPr>
@@ -8491,7 +8491,7 @@
       </p:sp>
       <p:sp>
         <p:nvSpPr>
-          <p:cNvPr id="16" name="Shape 12"/>
+          <p:cNvPr id="15" name="Shape 12"/>
           <p:cNvSpPr/>
           <p:nvPr/>
         </p:nvSpPr>
@@ -8513,7 +8513,7 @@
       </p:sp>
       <p:sp>
         <p:nvSpPr>
-          <p:cNvPr id="17" name="Text 13"/>
+          <p:cNvPr id="16" name="Text 13"/>
           <p:cNvSpPr/>
           <p:nvPr/>
         </p:nvSpPr>
@@ -8798,7 +8798,7 @@
       </p:pic>
       <p:sp>
         <p:nvSpPr>
-          <p:cNvPr id="8" name="Shape 4"/>
+          <p:cNvPr id="7" name="Shape 4"/>
           <p:cNvSpPr/>
           <p:nvPr/>
         </p:nvSpPr>
@@ -8825,7 +8825,7 @@
       </p:sp>
       <p:sp>
         <p:nvSpPr>
-          <p:cNvPr id="9" name="Text 5"/>
+          <p:cNvPr id="8" name="Text 5"/>
           <p:cNvSpPr/>
           <p:nvPr/>
         </p:nvSpPr>
@@ -8904,7 +8904,7 @@
       </p:sp>
       <p:sp>
         <p:nvSpPr>
-          <p:cNvPr id="10" name="Shape 6"/>
+          <p:cNvPr id="9" name="Shape 6"/>
           <p:cNvSpPr/>
           <p:nvPr/>
         </p:nvSpPr>
@@ -8926,7 +8926,7 @@
       </p:sp>
       <p:sp>
         <p:nvSpPr>
-          <p:cNvPr id="11" name="Text 7"/>
+          <p:cNvPr id="10" name="Text 7"/>
           <p:cNvSpPr/>
           <p:nvPr/>
         </p:nvSpPr>
@@ -8965,7 +8965,7 @@
       </p:sp>
       <p:sp>
         <p:nvSpPr>
-          <p:cNvPr id="12" name="Text 8"/>
+          <p:cNvPr id="11" name="Text 8"/>
           <p:cNvSpPr/>
           <p:nvPr/>
         </p:nvSpPr>
@@ -9007,7 +9007,7 @@
       </p:sp>
       <p:sp>
         <p:nvSpPr>
-          <p:cNvPr id="13" name="Shape 9"/>
+          <p:cNvPr id="12" name="Shape 9"/>
           <p:cNvSpPr/>
           <p:nvPr/>
         </p:nvSpPr>
@@ -9029,7 +9029,7 @@
       </p:sp>
       <p:sp>
         <p:nvSpPr>
-          <p:cNvPr id="14" name="Text 10"/>
+          <p:cNvPr id="13" name="Text 10"/>
           <p:cNvSpPr/>
           <p:nvPr/>
         </p:nvSpPr>
@@ -9071,7 +9071,7 @@
       </p:sp>
       <p:sp>
         <p:nvSpPr>
-          <p:cNvPr id="15" name="Text 11"/>
+          <p:cNvPr id="14" name="Text 11"/>
           <p:cNvSpPr/>
           <p:nvPr/>
         </p:nvSpPr>
@@ -9414,7 +9414,7 @@
       </p:pic>
       <p:sp>
         <p:nvSpPr>
-          <p:cNvPr id="10" name="Shape 6"/>
+          <p:cNvPr id="9" name="Shape 6"/>
           <p:cNvSpPr/>
           <p:nvPr/>
         </p:nvSpPr>
@@ -9441,7 +9441,7 @@
       </p:sp>
       <p:sp>
         <p:nvSpPr>
-          <p:cNvPr id="11" name="Text 7"/>
+          <p:cNvPr id="10" name="Text 7"/>
           <p:cNvSpPr/>
           <p:nvPr/>
         </p:nvSpPr>
@@ -9560,7 +9560,7 @@
       </p:sp>
       <p:sp>
         <p:nvSpPr>
-          <p:cNvPr id="12" name="Shape 8"/>
+          <p:cNvPr id="11" name="Shape 8"/>
           <p:cNvSpPr/>
           <p:nvPr/>
         </p:nvSpPr>
@@ -9582,7 +9582,7 @@
       </p:sp>
       <p:sp>
         <p:nvSpPr>
-          <p:cNvPr id="13" name="Text 9"/>
+          <p:cNvPr id="12" name="Text 9"/>
           <p:cNvSpPr/>
           <p:nvPr/>
         </p:nvSpPr>
@@ -9621,7 +9621,7 @@
       </p:sp>
       <p:sp>
         <p:nvSpPr>
-          <p:cNvPr id="14" name="Text 10"/>
+          <p:cNvPr id="13" name="Text 10"/>
           <p:cNvSpPr/>
           <p:nvPr/>
         </p:nvSpPr>
@@ -9663,7 +9663,7 @@
       </p:sp>
       <p:sp>
         <p:nvSpPr>
-          <p:cNvPr id="15" name="Shape 11"/>
+          <p:cNvPr id="14" name="Shape 11"/>
           <p:cNvSpPr/>
           <p:nvPr/>
         </p:nvSpPr>
@@ -9685,7 +9685,7 @@
       </p:sp>
       <p:sp>
         <p:nvSpPr>
-          <p:cNvPr id="16" name="Text 12"/>
+          <p:cNvPr id="15" name="Text 12"/>
           <p:cNvSpPr/>
           <p:nvPr/>
         </p:nvSpPr>
@@ -9724,7 +9724,7 @@
       </p:sp>
       <p:sp>
         <p:nvSpPr>
-          <p:cNvPr id="17" name="Text 13"/>
+          <p:cNvPr id="16" name="Text 13"/>
           <p:cNvSpPr/>
           <p:nvPr/>
         </p:nvSpPr>
@@ -9766,7 +9766,7 @@
       </p:sp>
       <p:sp>
         <p:nvSpPr>
-          <p:cNvPr id="18" name="Shape 14"/>
+          <p:cNvPr id="17" name="Shape 14"/>
           <p:cNvSpPr/>
           <p:nvPr/>
         </p:nvSpPr>
@@ -9788,7 +9788,7 @@
       </p:sp>
       <p:sp>
         <p:nvSpPr>
-          <p:cNvPr id="19" name="Text 15"/>
+          <p:cNvPr id="18" name="Text 15"/>
           <p:cNvSpPr/>
           <p:nvPr/>
         </p:nvSpPr>
@@ -10134,7 +10134,7 @@
       </p:pic>
       <p:sp>
         <p:nvSpPr>
-          <p:cNvPr id="10" name="Shape 6"/>
+          <p:cNvPr id="9" name="Shape 6"/>
           <p:cNvSpPr/>
           <p:nvPr/>
         </p:nvSpPr>
@@ -10159,7 +10159,7 @@
       </p:sp>
       <p:sp>
         <p:nvSpPr>
-          <p:cNvPr id="11" name="Text 7"/>
+          <p:cNvPr id="10" name="Text 7"/>
           <p:cNvSpPr/>
           <p:nvPr/>
         </p:nvSpPr>
@@ -10198,7 +10198,7 @@
       </p:sp>
       <p:sp>
         <p:nvSpPr>
-          <p:cNvPr id="12" name="Text 8"/>
+          <p:cNvPr id="11" name="Text 8"/>
           <p:cNvSpPr/>
           <p:nvPr/>
         </p:nvSpPr>
@@ -10237,7 +10237,7 @@
       </p:sp>
       <p:sp>
         <p:nvSpPr>
-          <p:cNvPr id="13" name="Shape 9"/>
+          <p:cNvPr id="12" name="Shape 9"/>
           <p:cNvSpPr/>
           <p:nvPr/>
         </p:nvSpPr>
@@ -10260,7 +10260,7 @@
       </p:sp>
       <p:sp>
         <p:nvSpPr>
-          <p:cNvPr id="14" name="Shape 10"/>
+          <p:cNvPr id="13" name="Shape 10"/>
           <p:cNvSpPr/>
           <p:nvPr/>
         </p:nvSpPr>
@@ -10280,7 +10280,7 @@
       </p:sp>
       <p:sp>
         <p:nvSpPr>
-          <p:cNvPr id="15" name="Text 11"/>
+          <p:cNvPr id="14" name="Text 11"/>
           <p:cNvSpPr/>
           <p:nvPr/>
         </p:nvSpPr>
@@ -10319,7 +10319,7 @@
       </p:sp>
       <p:sp>
         <p:nvSpPr>
-          <p:cNvPr id="16" name="Shape 12"/>
+          <p:cNvPr id="15" name="Shape 12"/>
           <p:cNvSpPr/>
           <p:nvPr/>
         </p:nvSpPr>
@@ -10344,7 +10344,7 @@
       </p:sp>
       <p:sp>
         <p:nvSpPr>
-          <p:cNvPr id="17" name="Text 13"/>
+          <p:cNvPr id="16" name="Text 13"/>
           <p:cNvSpPr/>
           <p:nvPr/>
         </p:nvSpPr>
@@ -10383,7 +10383,7 @@
       </p:sp>
       <p:sp>
         <p:nvSpPr>
-          <p:cNvPr id="18" name="Text 14"/>
+          <p:cNvPr id="17" name="Text 14"/>
           <p:cNvSpPr/>
           <p:nvPr/>
         </p:nvSpPr>
@@ -10422,7 +10422,7 @@
       </p:sp>
       <p:sp>
         <p:nvSpPr>
-          <p:cNvPr id="19" name="Shape 15"/>
+          <p:cNvPr id="18" name="Shape 15"/>
           <p:cNvSpPr/>
           <p:nvPr/>
         </p:nvSpPr>
@@ -10445,7 +10445,7 @@
       </p:sp>
       <p:sp>
         <p:nvSpPr>
-          <p:cNvPr id="20" name="Shape 16"/>
+          <p:cNvPr id="19" name="Shape 16"/>
           <p:cNvSpPr/>
           <p:nvPr/>
         </p:nvSpPr>
@@ -10465,7 +10465,7 @@
       </p:sp>
       <p:sp>
         <p:nvSpPr>
-          <p:cNvPr id="21" name="Text 17"/>
+          <p:cNvPr id="20" name="Text 17"/>
           <p:cNvSpPr/>
           <p:nvPr/>
         </p:nvSpPr>
@@ -10504,7 +10504,7 @@
       </p:sp>
       <p:sp>
         <p:nvSpPr>
-          <p:cNvPr id="22" name="Shape 18"/>
+          <p:cNvPr id="21" name="Shape 18"/>
           <p:cNvSpPr/>
           <p:nvPr/>
         </p:nvSpPr>
@@ -10529,7 +10529,7 @@
       </p:sp>
       <p:sp>
         <p:nvSpPr>
-          <p:cNvPr id="23" name="Text 19"/>
+          <p:cNvPr id="22" name="Text 19"/>
           <p:cNvSpPr/>
           <p:nvPr/>
         </p:nvSpPr>
@@ -10568,7 +10568,7 @@
       </p:sp>
       <p:sp>
         <p:nvSpPr>
-          <p:cNvPr id="24" name="Text 20"/>
+          <p:cNvPr id="23" name="Text 20"/>
           <p:cNvSpPr/>
           <p:nvPr/>
         </p:nvSpPr>
@@ -10607,7 +10607,7 @@
       </p:sp>
       <p:sp>
         <p:nvSpPr>
-          <p:cNvPr id="25" name="Shape 21"/>
+          <p:cNvPr id="24" name="Shape 21"/>
           <p:cNvSpPr/>
           <p:nvPr/>
         </p:nvSpPr>
@@ -10629,7 +10629,7 @@
       </p:sp>
       <p:sp>
         <p:nvSpPr>
-          <p:cNvPr id="26" name="Text 22"/>
+          <p:cNvPr id="25" name="Text 22"/>
           <p:cNvSpPr/>
           <p:nvPr/>
         </p:nvSpPr>
@@ -10668,7 +10668,7 @@
       </p:sp>
       <p:sp>
         <p:nvSpPr>
-          <p:cNvPr id="27" name="Text 23"/>
+          <p:cNvPr id="26" name="Text 23"/>
           <p:cNvSpPr/>
           <p:nvPr/>
         </p:nvSpPr>
@@ -10710,7 +10710,7 @@
       </p:sp>
       <p:sp>
         <p:nvSpPr>
-          <p:cNvPr id="28" name="Shape 24"/>
+          <p:cNvPr id="27" name="Shape 24"/>
           <p:cNvSpPr/>
           <p:nvPr/>
         </p:nvSpPr>
@@ -10732,7 +10732,7 @@
       </p:sp>
       <p:sp>
         <p:nvSpPr>
-          <p:cNvPr id="29" name="Text 25"/>
+          <p:cNvPr id="28" name="Text 25"/>
           <p:cNvSpPr/>
           <p:nvPr/>
         </p:nvSpPr>
@@ -11017,7 +11017,7 @@
       </p:pic>
       <p:sp>
         <p:nvSpPr>
-          <p:cNvPr id="8" name="Shape 4"/>
+          <p:cNvPr id="7" name="Shape 4"/>
           <p:cNvSpPr/>
           <p:nvPr/>
         </p:nvSpPr>
@@ -11039,7 +11039,7 @@
       </p:sp>
       <p:sp>
         <p:nvSpPr>
-          <p:cNvPr id="9" name="Text 5"/>
+          <p:cNvPr id="8" name="Text 5"/>
           <p:cNvSpPr/>
           <p:nvPr/>
         </p:nvSpPr>
@@ -11078,7 +11078,7 @@
       </p:sp>
       <p:sp>
         <p:nvSpPr>
-          <p:cNvPr id="10" name="Text 6"/>
+          <p:cNvPr id="9" name="Text 6"/>
           <p:cNvSpPr/>
           <p:nvPr/>
         </p:nvSpPr>
@@ -11117,7 +11117,7 @@
       </p:sp>
       <p:sp>
         <p:nvSpPr>
-          <p:cNvPr id="11" name="Shape 7"/>
+          <p:cNvPr id="10" name="Shape 7"/>
           <p:cNvSpPr/>
           <p:nvPr/>
         </p:nvSpPr>
@@ -11144,7 +11144,7 @@
       </p:sp>
       <p:sp>
         <p:nvSpPr>
-          <p:cNvPr id="12" name="Text 8"/>
+          <p:cNvPr id="11" name="Text 8"/>
           <p:cNvSpPr/>
           <p:nvPr/>
         </p:nvSpPr>
@@ -11183,7 +11183,7 @@
       </p:sp>
       <p:sp>
         <p:nvSpPr>
-          <p:cNvPr id="13" name="Text 9"/>
+          <p:cNvPr id="12" name="Text 9"/>
           <p:cNvSpPr/>
           <p:nvPr/>
         </p:nvSpPr>
@@ -11222,7 +11222,7 @@
       </p:sp>
       <p:sp>
         <p:nvSpPr>
-          <p:cNvPr id="14" name="Shape 10"/>
+          <p:cNvPr id="13" name="Shape 10"/>
           <p:cNvSpPr/>
           <p:nvPr/>
         </p:nvSpPr>
@@ -11249,7 +11249,7 @@
       </p:sp>
       <p:sp>
         <p:nvSpPr>
-          <p:cNvPr id="15" name="Text 11"/>
+          <p:cNvPr id="14" name="Text 11"/>
           <p:cNvSpPr/>
           <p:nvPr/>
         </p:nvSpPr>
@@ -11288,7 +11288,7 @@
       </p:sp>
       <p:sp>
         <p:nvSpPr>
-          <p:cNvPr id="16" name="Text 12"/>
+          <p:cNvPr id="15" name="Text 12"/>
           <p:cNvSpPr/>
           <p:nvPr/>
         </p:nvSpPr>
@@ -11327,7 +11327,7 @@
       </p:sp>
       <p:sp>
         <p:nvSpPr>
-          <p:cNvPr id="17" name="Shape 13"/>
+          <p:cNvPr id="16" name="Shape 13"/>
           <p:cNvSpPr/>
           <p:nvPr/>
         </p:nvSpPr>
@@ -11349,7 +11349,7 @@
       </p:sp>
       <p:sp>
         <p:nvSpPr>
-          <p:cNvPr id="18" name="Text 14"/>
+          <p:cNvPr id="17" name="Text 14"/>
           <p:cNvSpPr/>
           <p:nvPr/>
         </p:nvSpPr>
@@ -11391,7 +11391,7 @@
       </p:sp>
       <p:sp>
         <p:nvSpPr>
-          <p:cNvPr id="19" name="Shape 15"/>
+          <p:cNvPr id="18" name="Shape 15"/>
           <p:cNvSpPr/>
           <p:nvPr/>
         </p:nvSpPr>
@@ -11418,7 +11418,7 @@
       </p:sp>
       <p:sp>
         <p:nvSpPr>
-          <p:cNvPr id="20" name="Text 16"/>
+          <p:cNvPr id="19" name="Text 16"/>
           <p:cNvSpPr/>
           <p:nvPr/>
         </p:nvSpPr>
@@ -11745,7 +11745,7 @@
       </p:pic>
       <p:sp>
         <p:nvSpPr>
-          <p:cNvPr id="9" name="Shape 5"/>
+          <p:cNvPr id="8" name="Shape 5"/>
           <p:cNvSpPr/>
           <p:nvPr/>
         </p:nvSpPr>
@@ -11767,7 +11767,7 @@
       </p:sp>
       <p:sp>
         <p:nvSpPr>
-          <p:cNvPr id="10" name="Shape 6"/>
+          <p:cNvPr id="9" name="Shape 6"/>
           <p:cNvSpPr/>
           <p:nvPr/>
         </p:nvSpPr>
@@ -11787,7 +11787,7 @@
       </p:sp>
       <p:sp>
         <p:nvSpPr>
-          <p:cNvPr id="11" name="Text 7"/>
+          <p:cNvPr id="10" name="Text 7"/>
           <p:cNvSpPr/>
           <p:nvPr/>
         </p:nvSpPr>
@@ -11826,7 +11826,7 @@
       </p:sp>
       <p:sp>
         <p:nvSpPr>
-          <p:cNvPr id="12" name="Text 8"/>
+          <p:cNvPr id="11" name="Text 8"/>
           <p:cNvSpPr/>
           <p:nvPr/>
         </p:nvSpPr>
@@ -11865,7 +11865,7 @@
       </p:sp>
       <p:sp>
         <p:nvSpPr>
-          <p:cNvPr id="13" name="Text 9"/>
+          <p:cNvPr id="12" name="Text 9"/>
           <p:cNvSpPr/>
           <p:nvPr/>
         </p:nvSpPr>
@@ -11907,7 +11907,7 @@
       </p:sp>
       <p:sp>
         <p:nvSpPr>
-          <p:cNvPr id="14" name="Shape 10"/>
+          <p:cNvPr id="13" name="Shape 10"/>
           <p:cNvSpPr/>
           <p:nvPr/>
         </p:nvSpPr>
@@ -11929,7 +11929,7 @@
       </p:sp>
       <p:sp>
         <p:nvSpPr>
-          <p:cNvPr id="15" name="Shape 11"/>
+          <p:cNvPr id="14" name="Shape 11"/>
           <p:cNvSpPr/>
           <p:nvPr/>
         </p:nvSpPr>
@@ -11949,7 +11949,7 @@
       </p:sp>
       <p:sp>
         <p:nvSpPr>
-          <p:cNvPr id="16" name="Text 12"/>
+          <p:cNvPr id="15" name="Text 12"/>
           <p:cNvSpPr/>
           <p:nvPr/>
         </p:nvSpPr>
@@ -11988,7 +11988,7 @@
       </p:sp>
       <p:sp>
         <p:nvSpPr>
-          <p:cNvPr id="17" name="Text 13"/>
+          <p:cNvPr id="16" name="Text 13"/>
           <p:cNvSpPr/>
           <p:nvPr/>
         </p:nvSpPr>
@@ -12027,7 +12027,7 @@
       </p:sp>
       <p:sp>
         <p:nvSpPr>
-          <p:cNvPr id="18" name="Text 14"/>
+          <p:cNvPr id="17" name="Text 14"/>
           <p:cNvSpPr/>
           <p:nvPr/>
         </p:nvSpPr>
@@ -12069,7 +12069,7 @@
       </p:sp>
       <p:sp>
         <p:nvSpPr>
-          <p:cNvPr id="19" name="Shape 15"/>
+          <p:cNvPr id="18" name="Shape 15"/>
           <p:cNvSpPr/>
           <p:nvPr/>
         </p:nvSpPr>
@@ -12091,7 +12091,7 @@
       </p:sp>
       <p:sp>
         <p:nvSpPr>
-          <p:cNvPr id="20" name="Text 16"/>
+          <p:cNvPr id="19" name="Text 16"/>
           <p:cNvSpPr/>
           <p:nvPr/>
         </p:nvSpPr>
@@ -12133,7 +12133,7 @@
       </p:sp>
       <p:sp>
         <p:nvSpPr>
-          <p:cNvPr id="21" name="Shape 17"/>
+          <p:cNvPr id="20" name="Shape 17"/>
           <p:cNvSpPr/>
           <p:nvPr/>
         </p:nvSpPr>
@@ -12155,7 +12155,7 @@
       </p:sp>
       <p:sp>
         <p:nvSpPr>
-          <p:cNvPr id="22" name="Text 18"/>
+          <p:cNvPr id="21" name="Text 18"/>
           <p:cNvSpPr/>
           <p:nvPr/>
         </p:nvSpPr>
@@ -12194,7 +12194,7 @@
       </p:sp>
       <p:sp>
         <p:nvSpPr>
-          <p:cNvPr id="23" name="Text 19"/>
+          <p:cNvPr id="22" name="Text 19"/>
           <p:cNvSpPr/>
           <p:nvPr/>
         </p:nvSpPr>
@@ -12440,7 +12440,7 @@
       </p:pic>
       <p:sp>
         <p:nvSpPr>
-          <p:cNvPr id="7" name="Shape 3"/>
+          <p:cNvPr id="6" name="Shape 3"/>
           <p:cNvSpPr/>
           <p:nvPr/>
         </p:nvSpPr>
@@ -12462,7 +12462,7 @@
       </p:sp>
       <p:sp>
         <p:nvSpPr>
-          <p:cNvPr id="8" name="Shape 4"/>
+          <p:cNvPr id="7" name="Shape 4"/>
           <p:cNvSpPr/>
           <p:nvPr/>
         </p:nvSpPr>
@@ -12482,7 +12482,7 @@
       </p:sp>
       <p:sp>
         <p:nvSpPr>
-          <p:cNvPr id="9" name="Text 5"/>
+          <p:cNvPr id="8" name="Text 5"/>
           <p:cNvSpPr/>
           <p:nvPr/>
         </p:nvSpPr>
@@ -12521,7 +12521,7 @@
       </p:sp>
       <p:sp>
         <p:nvSpPr>
-          <p:cNvPr id="10" name="Text 6"/>
+          <p:cNvPr id="9" name="Text 6"/>
           <p:cNvSpPr/>
           <p:nvPr/>
         </p:nvSpPr>
@@ -12560,7 +12560,7 @@
       </p:sp>
       <p:sp>
         <p:nvSpPr>
-          <p:cNvPr id="11" name="Text 7"/>
+          <p:cNvPr id="10" name="Text 7"/>
           <p:cNvSpPr/>
           <p:nvPr/>
         </p:nvSpPr>
@@ -12602,7 +12602,7 @@
       </p:sp>
       <p:sp>
         <p:nvSpPr>
-          <p:cNvPr id="12" name="Shape 8"/>
+          <p:cNvPr id="11" name="Shape 8"/>
           <p:cNvSpPr/>
           <p:nvPr/>
         </p:nvSpPr>
@@ -12624,7 +12624,7 @@
       </p:sp>
       <p:sp>
         <p:nvSpPr>
-          <p:cNvPr id="13" name="Shape 9"/>
+          <p:cNvPr id="12" name="Shape 9"/>
           <p:cNvSpPr/>
           <p:nvPr/>
         </p:nvSpPr>
@@ -12644,7 +12644,7 @@
       </p:sp>
       <p:sp>
         <p:nvSpPr>
-          <p:cNvPr id="14" name="Text 10"/>
+          <p:cNvPr id="13" name="Text 10"/>
           <p:cNvSpPr/>
           <p:nvPr/>
         </p:nvSpPr>
@@ -12683,7 +12683,7 @@
       </p:sp>
       <p:sp>
         <p:nvSpPr>
-          <p:cNvPr id="15" name="Text 11"/>
+          <p:cNvPr id="14" name="Text 11"/>
           <p:cNvSpPr/>
           <p:nvPr/>
         </p:nvSpPr>
@@ -12722,7 +12722,7 @@
       </p:sp>
       <p:sp>
         <p:nvSpPr>
-          <p:cNvPr id="16" name="Text 12"/>
+          <p:cNvPr id="15" name="Text 12"/>
           <p:cNvSpPr/>
           <p:nvPr/>
         </p:nvSpPr>
@@ -12764,7 +12764,7 @@
       </p:sp>
       <p:sp>
         <p:nvSpPr>
-          <p:cNvPr id="17" name="Shape 13"/>
+          <p:cNvPr id="16" name="Shape 13"/>
           <p:cNvSpPr/>
           <p:nvPr/>
         </p:nvSpPr>
@@ -12786,7 +12786,7 @@
       </p:sp>
       <p:sp>
         <p:nvSpPr>
-          <p:cNvPr id="18" name="Shape 14"/>
+          <p:cNvPr id="17" name="Shape 14"/>
           <p:cNvSpPr/>
           <p:nvPr/>
         </p:nvSpPr>
@@ -12806,7 +12806,7 @@
       </p:sp>
       <p:sp>
         <p:nvSpPr>
-          <p:cNvPr id="19" name="Text 15"/>
+          <p:cNvPr id="18" name="Text 15"/>
           <p:cNvSpPr/>
           <p:nvPr/>
         </p:nvSpPr>
@@ -12845,7 +12845,7 @@
       </p:sp>
       <p:sp>
         <p:nvSpPr>
-          <p:cNvPr id="20" name="Text 16"/>
+          <p:cNvPr id="19" name="Text 16"/>
           <p:cNvSpPr/>
           <p:nvPr/>
         </p:nvSpPr>
@@ -12884,7 +12884,7 @@
       </p:sp>
       <p:sp>
         <p:nvSpPr>
-          <p:cNvPr id="21" name="Text 17"/>
+          <p:cNvPr id="20" name="Text 17"/>
           <p:cNvSpPr/>
           <p:nvPr/>
         </p:nvSpPr>
@@ -12926,7 +12926,7 @@
       </p:sp>
       <p:sp>
         <p:nvSpPr>
-          <p:cNvPr id="22" name="Shape 18"/>
+          <p:cNvPr id="21" name="Shape 18"/>
           <p:cNvSpPr/>
           <p:nvPr/>
         </p:nvSpPr>
@@ -12948,7 +12948,7 @@
       </p:sp>
       <p:sp>
         <p:nvSpPr>
-          <p:cNvPr id="23" name="Shape 19"/>
+          <p:cNvPr id="22" name="Shape 19"/>
           <p:cNvSpPr/>
           <p:nvPr/>
         </p:nvSpPr>
@@ -12968,7 +12968,7 @@
       </p:sp>
       <p:sp>
         <p:nvSpPr>
-          <p:cNvPr id="24" name="Text 20"/>
+          <p:cNvPr id="23" name="Text 20"/>
           <p:cNvSpPr/>
           <p:nvPr/>
         </p:nvSpPr>
@@ -13007,7 +13007,7 @@
       </p:sp>
       <p:sp>
         <p:nvSpPr>
-          <p:cNvPr id="25" name="Text 21"/>
+          <p:cNvPr id="24" name="Text 21"/>
           <p:cNvSpPr/>
           <p:nvPr/>
         </p:nvSpPr>
@@ -13046,7 +13046,7 @@
       </p:sp>
       <p:sp>
         <p:nvSpPr>
-          <p:cNvPr id="26" name="Text 22"/>
+          <p:cNvPr id="25" name="Text 22"/>
           <p:cNvSpPr/>
           <p:nvPr/>
         </p:nvSpPr>
@@ -13088,7 +13088,7 @@
       </p:sp>
       <p:sp>
         <p:nvSpPr>
-          <p:cNvPr id="27" name="Shape 23"/>
+          <p:cNvPr id="26" name="Shape 23"/>
           <p:cNvSpPr/>
           <p:nvPr/>
         </p:nvSpPr>
@@ -13110,7 +13110,7 @@
       </p:sp>
       <p:sp>
         <p:nvSpPr>
-          <p:cNvPr id="28" name="Shape 24"/>
+          <p:cNvPr id="27" name="Shape 24"/>
           <p:cNvSpPr/>
           <p:nvPr/>
         </p:nvSpPr>
@@ -13130,7 +13130,7 @@
       </p:sp>
       <p:sp>
         <p:nvSpPr>
-          <p:cNvPr id="29" name="Text 25"/>
+          <p:cNvPr id="28" name="Text 25"/>
           <p:cNvSpPr/>
           <p:nvPr/>
         </p:nvSpPr>
@@ -13169,7 +13169,7 @@
       </p:sp>
       <p:sp>
         <p:nvSpPr>
-          <p:cNvPr id="30" name="Text 26"/>
+          <p:cNvPr id="29" name="Text 26"/>
           <p:cNvSpPr/>
           <p:nvPr/>
         </p:nvSpPr>
@@ -13208,7 +13208,7 @@
       </p:sp>
       <p:sp>
         <p:nvSpPr>
-          <p:cNvPr id="31" name="Text 27"/>
+          <p:cNvPr id="30" name="Text 27"/>
           <p:cNvSpPr/>
           <p:nvPr/>
         </p:nvSpPr>
@@ -13250,7 +13250,7 @@
       </p:sp>
       <p:sp>
         <p:nvSpPr>
-          <p:cNvPr id="32" name="Shape 28"/>
+          <p:cNvPr id="31" name="Shape 28"/>
           <p:cNvSpPr/>
           <p:nvPr/>
         </p:nvSpPr>
@@ -13272,7 +13272,7 @@
       </p:sp>
       <p:sp>
         <p:nvSpPr>
-          <p:cNvPr id="33" name="Text 29"/>
+          <p:cNvPr id="32" name="Text 29"/>
           <p:cNvSpPr/>
           <p:nvPr/>
         </p:nvSpPr>
@@ -13311,7 +13311,7 @@
       </p:sp>
       <p:sp>
         <p:nvSpPr>
-          <p:cNvPr id="34" name="Text 30"/>
+          <p:cNvPr id="33" name="Text 30"/>
           <p:cNvSpPr/>
           <p:nvPr/>
         </p:nvSpPr>
@@ -13599,7 +13599,7 @@
       </p:pic>
       <p:sp>
         <p:nvSpPr>
-          <p:cNvPr id="8" name="Shape 4"/>
+          <p:cNvPr id="7" name="Shape 4"/>
           <p:cNvSpPr/>
           <p:nvPr/>
         </p:nvSpPr>
@@ -13626,7 +13626,7 @@
       </p:sp>
       <p:sp>
         <p:nvSpPr>
-          <p:cNvPr id="9" name="Shape 5"/>
+          <p:cNvPr id="8" name="Shape 5"/>
           <p:cNvSpPr/>
           <p:nvPr/>
         </p:nvSpPr>
@@ -13646,7 +13646,7 @@
       </p:sp>
       <p:sp>
         <p:nvSpPr>
-          <p:cNvPr id="10" name="Text 6"/>
+          <p:cNvPr id="9" name="Text 6"/>
           <p:cNvSpPr/>
           <p:nvPr/>
         </p:nvSpPr>
@@ -13685,7 +13685,7 @@
       </p:sp>
       <p:sp>
         <p:nvSpPr>
-          <p:cNvPr id="11" name="Text 7"/>
+          <p:cNvPr id="10" name="Text 7"/>
           <p:cNvSpPr/>
           <p:nvPr/>
         </p:nvSpPr>
@@ -13724,7 +13724,7 @@
       </p:sp>
       <p:sp>
         <p:nvSpPr>
-          <p:cNvPr id="12" name="Text 8"/>
+          <p:cNvPr id="11" name="Text 8"/>
           <p:cNvSpPr/>
           <p:nvPr/>
         </p:nvSpPr>
@@ -13766,7 +13766,7 @@
       </p:sp>
       <p:sp>
         <p:nvSpPr>
-          <p:cNvPr id="13" name="Shape 9"/>
+          <p:cNvPr id="12" name="Shape 9"/>
           <p:cNvSpPr/>
           <p:nvPr/>
         </p:nvSpPr>
@@ -13793,7 +13793,7 @@
       </p:sp>
       <p:sp>
         <p:nvSpPr>
-          <p:cNvPr id="14" name="Shape 10"/>
+          <p:cNvPr id="13" name="Shape 10"/>
           <p:cNvSpPr/>
           <p:nvPr/>
         </p:nvSpPr>
@@ -13813,7 +13813,7 @@
       </p:sp>
       <p:sp>
         <p:nvSpPr>
-          <p:cNvPr id="15" name="Text 11"/>
+          <p:cNvPr id="14" name="Text 11"/>
           <p:cNvSpPr/>
           <p:nvPr/>
         </p:nvSpPr>
@@ -13852,7 +13852,7 @@
       </p:sp>
       <p:sp>
         <p:nvSpPr>
-          <p:cNvPr id="16" name="Text 12"/>
+          <p:cNvPr id="15" name="Text 12"/>
           <p:cNvSpPr/>
           <p:nvPr/>
         </p:nvSpPr>
@@ -13891,7 +13891,7 @@
       </p:sp>
       <p:sp>
         <p:nvSpPr>
-          <p:cNvPr id="17" name="Text 13"/>
+          <p:cNvPr id="16" name="Text 13"/>
           <p:cNvSpPr/>
           <p:nvPr/>
         </p:nvSpPr>
@@ -13933,7 +13933,7 @@
       </p:sp>
       <p:sp>
         <p:nvSpPr>
-          <p:cNvPr id="18" name="Shape 14"/>
+          <p:cNvPr id="17" name="Shape 14"/>
           <p:cNvSpPr/>
           <p:nvPr/>
         </p:nvSpPr>
@@ -13960,7 +13960,7 @@
       </p:sp>
       <p:sp>
         <p:nvSpPr>
-          <p:cNvPr id="19" name="Shape 15"/>
+          <p:cNvPr id="18" name="Shape 15"/>
           <p:cNvSpPr/>
           <p:nvPr/>
         </p:nvSpPr>
@@ -13980,7 +13980,7 @@
       </p:sp>
       <p:sp>
         <p:nvSpPr>
-          <p:cNvPr id="20" name="Text 16"/>
+          <p:cNvPr id="19" name="Text 16"/>
           <p:cNvSpPr/>
           <p:nvPr/>
         </p:nvSpPr>
@@ -14019,7 +14019,7 @@
       </p:sp>
       <p:sp>
         <p:nvSpPr>
-          <p:cNvPr id="21" name="Text 17"/>
+          <p:cNvPr id="20" name="Text 17"/>
           <p:cNvSpPr/>
           <p:nvPr/>
         </p:nvSpPr>
@@ -14058,7 +14058,7 @@
       </p:sp>
       <p:sp>
         <p:nvSpPr>
-          <p:cNvPr id="22" name="Text 18"/>
+          <p:cNvPr id="21" name="Text 18"/>
           <p:cNvSpPr/>
           <p:nvPr/>
         </p:nvSpPr>
@@ -14100,7 +14100,7 @@
       </p:sp>
       <p:sp>
         <p:nvSpPr>
-          <p:cNvPr id="23" name="Shape 19"/>
+          <p:cNvPr id="22" name="Shape 19"/>
           <p:cNvSpPr/>
           <p:nvPr/>
         </p:nvSpPr>
@@ -14127,7 +14127,7 @@
       </p:sp>
       <p:sp>
         <p:nvSpPr>
-          <p:cNvPr id="24" name="Shape 20"/>
+          <p:cNvPr id="23" name="Shape 20"/>
           <p:cNvSpPr/>
           <p:nvPr/>
         </p:nvSpPr>
@@ -14147,7 +14147,7 @@
       </p:sp>
       <p:sp>
         <p:nvSpPr>
-          <p:cNvPr id="25" name="Text 21"/>
+          <p:cNvPr id="24" name="Text 21"/>
           <p:cNvSpPr/>
           <p:nvPr/>
         </p:nvSpPr>
@@ -14186,7 +14186,7 @@
       </p:sp>
       <p:sp>
         <p:nvSpPr>
-          <p:cNvPr id="26" name="Text 22"/>
+          <p:cNvPr id="25" name="Text 22"/>
           <p:cNvSpPr/>
           <p:nvPr/>
         </p:nvSpPr>
@@ -14225,7 +14225,7 @@
       </p:sp>
       <p:sp>
         <p:nvSpPr>
-          <p:cNvPr id="27" name="Text 23"/>
+          <p:cNvPr id="26" name="Text 23"/>
           <p:cNvSpPr/>
           <p:nvPr/>
         </p:nvSpPr>
@@ -14267,7 +14267,7 @@
       </p:sp>
       <p:sp>
         <p:nvSpPr>
-          <p:cNvPr id="28" name="Shape 24"/>
+          <p:cNvPr id="27" name="Shape 24"/>
           <p:cNvSpPr/>
           <p:nvPr/>
         </p:nvSpPr>
@@ -14289,7 +14289,7 @@
       </p:sp>
       <p:sp>
         <p:nvSpPr>
-          <p:cNvPr id="29" name="Shape 25"/>
+          <p:cNvPr id="28" name="Shape 25"/>
           <p:cNvSpPr/>
           <p:nvPr/>
         </p:nvSpPr>
@@ -14309,7 +14309,7 @@
       </p:sp>
       <p:sp>
         <p:nvSpPr>
-          <p:cNvPr id="30" name="Text 26"/>
+          <p:cNvPr id="29" name="Text 26"/>
           <p:cNvSpPr/>
           <p:nvPr/>
         </p:nvSpPr>
@@ -14348,7 +14348,7 @@
       </p:sp>
       <p:sp>
         <p:nvSpPr>
-          <p:cNvPr id="31" name="Text 27"/>
+          <p:cNvPr id="30" name="Text 27"/>
           <p:cNvSpPr/>
           <p:nvPr/>
         </p:nvSpPr>
@@ -14387,7 +14387,7 @@
       </p:sp>
       <p:sp>
         <p:nvSpPr>
-          <p:cNvPr id="32" name="Text 28"/>
+          <p:cNvPr id="31" name="Text 28"/>
           <p:cNvSpPr/>
           <p:nvPr/>
         </p:nvSpPr>
@@ -14633,7 +14633,7 @@
       </p:pic>
       <p:sp>
         <p:nvSpPr>
-          <p:cNvPr id="7" name="Shape 3"/>
+          <p:cNvPr id="6" name="Shape 3"/>
           <p:cNvSpPr/>
           <p:nvPr/>
         </p:nvSpPr>
@@ -14653,7 +14653,7 @@
       </p:sp>
       <p:sp>
         <p:nvSpPr>
-          <p:cNvPr id="8" name="Text 4"/>
+          <p:cNvPr id="7" name="Text 4"/>
           <p:cNvSpPr/>
           <p:nvPr/>
         </p:nvSpPr>
@@ -14692,7 +14692,7 @@
       </p:sp>
       <p:sp>
         <p:nvSpPr>
-          <p:cNvPr id="9" name="Text 5"/>
+          <p:cNvPr id="8" name="Text 5"/>
           <p:cNvSpPr/>
           <p:nvPr/>
         </p:nvSpPr>
@@ -14745,7 +14745,7 @@
       </p:sp>
       <p:sp>
         <p:nvSpPr>
-          <p:cNvPr id="10" name="Shape 6"/>
+          <p:cNvPr id="9" name="Shape 6"/>
           <p:cNvSpPr/>
           <p:nvPr/>
         </p:nvSpPr>
@@ -14765,7 +14765,7 @@
       </p:sp>
       <p:sp>
         <p:nvSpPr>
-          <p:cNvPr id="11" name="Text 7"/>
+          <p:cNvPr id="10" name="Text 7"/>
           <p:cNvSpPr/>
           <p:nvPr/>
         </p:nvSpPr>
@@ -14804,7 +14804,7 @@
       </p:sp>
       <p:sp>
         <p:nvSpPr>
-          <p:cNvPr id="12" name="Text 8"/>
+          <p:cNvPr id="11" name="Text 8"/>
           <p:cNvSpPr/>
           <p:nvPr/>
         </p:nvSpPr>
@@ -14857,7 +14857,7 @@
       </p:sp>
       <p:sp>
         <p:nvSpPr>
-          <p:cNvPr id="13" name="Shape 9"/>
+          <p:cNvPr id="12" name="Shape 9"/>
           <p:cNvSpPr/>
           <p:nvPr/>
         </p:nvSpPr>
@@ -14877,7 +14877,7 @@
       </p:sp>
       <p:sp>
         <p:nvSpPr>
-          <p:cNvPr id="14" name="Text 10"/>
+          <p:cNvPr id="13" name="Text 10"/>
           <p:cNvSpPr/>
           <p:nvPr/>
         </p:nvSpPr>
@@ -14916,7 +14916,7 @@
       </p:sp>
       <p:sp>
         <p:nvSpPr>
-          <p:cNvPr id="15" name="Text 11"/>
+          <p:cNvPr id="14" name="Text 11"/>
           <p:cNvSpPr/>
           <p:nvPr/>
         </p:nvSpPr>
@@ -14969,7 +14969,7 @@
       </p:sp>
       <p:sp>
         <p:nvSpPr>
-          <p:cNvPr id="16" name="Shape 12"/>
+          <p:cNvPr id="15" name="Shape 12"/>
           <p:cNvSpPr/>
           <p:nvPr/>
         </p:nvSpPr>
@@ -14989,7 +14989,7 @@
       </p:sp>
       <p:sp>
         <p:nvSpPr>
-          <p:cNvPr id="17" name="Text 13"/>
+          <p:cNvPr id="16" name="Text 13"/>
           <p:cNvSpPr/>
           <p:nvPr/>
         </p:nvSpPr>
@@ -15028,7 +15028,7 @@
       </p:sp>
       <p:sp>
         <p:nvSpPr>
-          <p:cNvPr id="18" name="Text 14"/>
+          <p:cNvPr id="17" name="Text 14"/>
           <p:cNvSpPr/>
           <p:nvPr/>
         </p:nvSpPr>
@@ -15285,7 +15285,7 @@
       </p:pic>
       <p:sp>
         <p:nvSpPr>
-          <p:cNvPr id="7" name="Shape 3"/>
+          <p:cNvPr id="6" name="Shape 3"/>
           <p:cNvSpPr/>
           <p:nvPr/>
         </p:nvSpPr>
@@ -15307,7 +15307,7 @@
       </p:sp>
       <p:sp>
         <p:nvSpPr>
-          <p:cNvPr id="8" name="Text 4"/>
+          <p:cNvPr id="7" name="Text 4"/>
           <p:cNvSpPr/>
           <p:nvPr/>
         </p:nvSpPr>
@@ -15346,7 +15346,7 @@
       </p:sp>
       <p:sp>
         <p:nvSpPr>
-          <p:cNvPr id="9" name="Text 5"/>
+          <p:cNvPr id="8" name="Text 5"/>
           <p:cNvSpPr/>
           <p:nvPr/>
         </p:nvSpPr>
@@ -15388,7 +15388,7 @@
       </p:sp>
       <p:sp>
         <p:nvSpPr>
-          <p:cNvPr id="10" name="Shape 6"/>
+          <p:cNvPr id="9" name="Shape 6"/>
           <p:cNvSpPr/>
           <p:nvPr/>
         </p:nvSpPr>
@@ -15410,7 +15410,7 @@
       </p:sp>
       <p:sp>
         <p:nvSpPr>
-          <p:cNvPr id="11" name="Text 7"/>
+          <p:cNvPr id="10" name="Text 7"/>
           <p:cNvSpPr/>
           <p:nvPr/>
         </p:nvSpPr>
@@ -15449,7 +15449,7 @@
       </p:sp>
       <p:sp>
         <p:nvSpPr>
-          <p:cNvPr id="12" name="Text 8"/>
+          <p:cNvPr id="11" name="Text 8"/>
           <p:cNvSpPr/>
           <p:nvPr/>
         </p:nvSpPr>
@@ -15491,7 +15491,7 @@
       </p:sp>
       <p:sp>
         <p:nvSpPr>
-          <p:cNvPr id="13" name="Shape 9"/>
+          <p:cNvPr id="12" name="Shape 9"/>
           <p:cNvSpPr/>
           <p:nvPr/>
         </p:nvSpPr>
@@ -15518,7 +15518,7 @@
       </p:sp>
       <p:sp>
         <p:nvSpPr>
-          <p:cNvPr id="14" name="Text 10"/>
+          <p:cNvPr id="13" name="Text 10"/>
           <p:cNvSpPr/>
           <p:nvPr/>
         </p:nvSpPr>
@@ -15557,7 +15557,7 @@
       </p:sp>
       <p:sp>
         <p:nvSpPr>
-          <p:cNvPr id="15" name="Text 11"/>
+          <p:cNvPr id="14" name="Text 11"/>
           <p:cNvSpPr/>
           <p:nvPr/>
         </p:nvSpPr>
@@ -15599,7 +15599,7 @@
       </p:sp>
       <p:sp>
         <p:nvSpPr>
-          <p:cNvPr id="16" name="Shape 12"/>
+          <p:cNvPr id="15" name="Shape 12"/>
           <p:cNvSpPr/>
           <p:nvPr/>
         </p:nvSpPr>
@@ -15621,7 +15621,7 @@
       </p:sp>
       <p:sp>
         <p:nvSpPr>
-          <p:cNvPr id="17" name="Text 13"/>
+          <p:cNvPr id="16" name="Text 13"/>
           <p:cNvSpPr/>
           <p:nvPr/>
         </p:nvSpPr>
@@ -15660,7 +15660,7 @@
       </p:sp>
       <p:sp>
         <p:nvSpPr>
-          <p:cNvPr id="18" name="Text 14"/>
+          <p:cNvPr id="17" name="Text 14"/>
           <p:cNvSpPr/>
           <p:nvPr/>
         </p:nvSpPr>
@@ -15906,7 +15906,7 @@
       </p:pic>
       <p:sp>
         <p:nvSpPr>
-          <p:cNvPr id="7" name="Shape 3"/>
+          <p:cNvPr id="6" name="Shape 3"/>
           <p:cNvSpPr/>
           <p:nvPr/>
         </p:nvSpPr>
@@ -15933,7 +15933,7 @@
       </p:sp>
       <p:sp>
         <p:nvSpPr>
-          <p:cNvPr id="8" name="Shape 4"/>
+          <p:cNvPr id="7" name="Shape 4"/>
           <p:cNvSpPr/>
           <p:nvPr/>
         </p:nvSpPr>
@@ -15960,7 +15960,7 @@
       </p:sp>
       <p:sp>
         <p:nvSpPr>
-          <p:cNvPr id="9" name="Shape 5"/>
+          <p:cNvPr id="8" name="Shape 5"/>
           <p:cNvSpPr/>
           <p:nvPr/>
         </p:nvSpPr>
@@ -15980,7 +15980,7 @@
       </p:sp>
       <p:sp>
         <p:nvSpPr>
-          <p:cNvPr id="10" name="Shape 6"/>
+          <p:cNvPr id="9" name="Shape 6"/>
           <p:cNvSpPr/>
           <p:nvPr/>
         </p:nvSpPr>
@@ -16000,7 +16000,7 @@
       </p:sp>
       <p:sp>
         <p:nvSpPr>
-          <p:cNvPr id="11" name="Text 7"/>
+          <p:cNvPr id="10" name="Text 7"/>
           <p:cNvSpPr/>
           <p:nvPr/>
         </p:nvSpPr>
@@ -16039,7 +16039,7 @@
       </p:sp>
       <p:sp>
         <p:nvSpPr>
-          <p:cNvPr id="12" name="Shape 8"/>
+          <p:cNvPr id="11" name="Shape 8"/>
           <p:cNvSpPr/>
           <p:nvPr/>
         </p:nvSpPr>
@@ -16066,7 +16066,7 @@
       </p:sp>
       <p:sp>
         <p:nvSpPr>
-          <p:cNvPr id="13" name="Shape 9"/>
+          <p:cNvPr id="12" name="Shape 9"/>
           <p:cNvSpPr/>
           <p:nvPr/>
         </p:nvSpPr>
@@ -16086,7 +16086,7 @@
       </p:sp>
       <p:sp>
         <p:nvSpPr>
-          <p:cNvPr id="14" name="Shape 10"/>
+          <p:cNvPr id="13" name="Shape 10"/>
           <p:cNvSpPr/>
           <p:nvPr/>
         </p:nvSpPr>
@@ -16106,7 +16106,7 @@
       </p:sp>
       <p:sp>
         <p:nvSpPr>
-          <p:cNvPr id="15" name="Text 11"/>
+          <p:cNvPr id="14" name="Text 11"/>
           <p:cNvSpPr/>
           <p:nvPr/>
         </p:nvSpPr>
@@ -16145,7 +16145,7 @@
       </p:sp>
       <p:sp>
         <p:nvSpPr>
-          <p:cNvPr id="16" name="Shape 12"/>
+          <p:cNvPr id="15" name="Shape 12"/>
           <p:cNvSpPr/>
           <p:nvPr/>
         </p:nvSpPr>
@@ -16172,7 +16172,7 @@
       </p:sp>
       <p:sp>
         <p:nvSpPr>
-          <p:cNvPr id="17" name="Shape 13"/>
+          <p:cNvPr id="16" name="Shape 13"/>
           <p:cNvSpPr/>
           <p:nvPr/>
         </p:nvSpPr>
@@ -16192,7 +16192,7 @@
       </p:sp>
       <p:sp>
         <p:nvSpPr>
-          <p:cNvPr id="18" name="Shape 14"/>
+          <p:cNvPr id="17" name="Shape 14"/>
           <p:cNvSpPr/>
           <p:nvPr/>
         </p:nvSpPr>
@@ -16212,7 +16212,7 @@
       </p:sp>
       <p:sp>
         <p:nvSpPr>
-          <p:cNvPr id="19" name="Text 15"/>
+          <p:cNvPr id="18" name="Text 15"/>
           <p:cNvSpPr/>
           <p:nvPr/>
         </p:nvSpPr>
@@ -16251,7 +16251,7 @@
       </p:sp>
       <p:sp>
         <p:nvSpPr>
-          <p:cNvPr id="20" name="Shape 16"/>
+          <p:cNvPr id="19" name="Shape 16"/>
           <p:cNvSpPr/>
           <p:nvPr/>
         </p:nvSpPr>
@@ -16278,7 +16278,7 @@
       </p:sp>
       <p:sp>
         <p:nvSpPr>
-          <p:cNvPr id="21" name="Shape 17"/>
+          <p:cNvPr id="20" name="Shape 17"/>
           <p:cNvSpPr/>
           <p:nvPr/>
         </p:nvSpPr>
@@ -16298,7 +16298,7 @@
       </p:sp>
       <p:sp>
         <p:nvSpPr>
-          <p:cNvPr id="22" name="Shape 18"/>
+          <p:cNvPr id="21" name="Shape 18"/>
           <p:cNvSpPr/>
           <p:nvPr/>
         </p:nvSpPr>
@@ -16318,7 +16318,7 @@
       </p:sp>
       <p:sp>
         <p:nvSpPr>
-          <p:cNvPr id="23" name="Text 19"/>
+          <p:cNvPr id="22" name="Text 19"/>
           <p:cNvSpPr/>
           <p:nvPr/>
         </p:nvSpPr>
@@ -16357,7 +16357,7 @@
       </p:sp>
       <p:sp>
         <p:nvSpPr>
-          <p:cNvPr id="24" name="Text 20"/>
+          <p:cNvPr id="23" name="Text 20"/>
           <p:cNvSpPr/>
           <p:nvPr/>
         </p:nvSpPr>
@@ -16600,7 +16600,7 @@
       </p:pic>
       <p:sp>
         <p:nvSpPr>
-          <p:cNvPr id="7" name="Shape 3"/>
+          <p:cNvPr id="6" name="Shape 3"/>
           <p:cNvSpPr/>
           <p:nvPr/>
         </p:nvSpPr>
@@ -16627,7 +16627,7 @@
       </p:sp>
       <p:sp>
         <p:nvSpPr>
-          <p:cNvPr id="8" name="Shape 4"/>
+          <p:cNvPr id="7" name="Shape 4"/>
           <p:cNvSpPr/>
           <p:nvPr/>
         </p:nvSpPr>
@@ -16647,7 +16647,7 @@
       </p:sp>
       <p:sp>
         <p:nvSpPr>
-          <p:cNvPr id="9" name="Shape 5"/>
+          <p:cNvPr id="8" name="Shape 5"/>
           <p:cNvSpPr/>
           <p:nvPr/>
         </p:nvSpPr>
@@ -16667,7 +16667,7 @@
       </p:sp>
       <p:sp>
         <p:nvSpPr>
-          <p:cNvPr id="10" name="Shape 6"/>
+          <p:cNvPr id="9" name="Shape 6"/>
           <p:cNvSpPr/>
           <p:nvPr/>
         </p:nvSpPr>
@@ -16687,7 +16687,7 @@
       </p:sp>
       <p:sp>
         <p:nvSpPr>
-          <p:cNvPr id="11" name="Text 7"/>
+          <p:cNvPr id="10" name="Text 7"/>
           <p:cNvSpPr/>
           <p:nvPr/>
         </p:nvSpPr>
@@ -16740,7 +16740,7 @@
       </p:sp>
       <p:sp>
         <p:nvSpPr>
-          <p:cNvPr id="12" name="Shape 8"/>
+          <p:cNvPr id="11" name="Shape 8"/>
           <p:cNvSpPr/>
           <p:nvPr/>
         </p:nvSpPr>
@@ -16767,7 +16767,7 @@
       </p:sp>
       <p:sp>
         <p:nvSpPr>
-          <p:cNvPr id="13" name="Shape 9"/>
+          <p:cNvPr id="12" name="Shape 9"/>
           <p:cNvSpPr/>
           <p:nvPr/>
         </p:nvSpPr>
@@ -16787,7 +16787,7 @@
       </p:sp>
       <p:sp>
         <p:nvSpPr>
-          <p:cNvPr id="14" name="Shape 10"/>
+          <p:cNvPr id="13" name="Shape 10"/>
           <p:cNvSpPr/>
           <p:nvPr/>
         </p:nvSpPr>
@@ -16807,7 +16807,7 @@
       </p:sp>
       <p:sp>
         <p:nvSpPr>
-          <p:cNvPr id="15" name="Shape 11"/>
+          <p:cNvPr id="14" name="Shape 11"/>
           <p:cNvSpPr/>
           <p:nvPr/>
         </p:nvSpPr>
@@ -16827,7 +16827,7 @@
       </p:sp>
       <p:sp>
         <p:nvSpPr>
-          <p:cNvPr id="16" name="Text 12"/>
+          <p:cNvPr id="15" name="Text 12"/>
           <p:cNvSpPr/>
           <p:nvPr/>
         </p:nvSpPr>
@@ -16880,7 +16880,7 @@
       </p:sp>
       <p:sp>
         <p:nvSpPr>
-          <p:cNvPr id="17" name="Shape 13"/>
+          <p:cNvPr id="16" name="Shape 13"/>
           <p:cNvSpPr/>
           <p:nvPr/>
         </p:nvSpPr>
@@ -16907,7 +16907,7 @@
       </p:sp>
       <p:sp>
         <p:nvSpPr>
-          <p:cNvPr id="18" name="Shape 14"/>
+          <p:cNvPr id="17" name="Shape 14"/>
           <p:cNvSpPr/>
           <p:nvPr/>
         </p:nvSpPr>
@@ -16927,7 +16927,7 @@
       </p:sp>
       <p:sp>
         <p:nvSpPr>
-          <p:cNvPr id="19" name="Shape 15"/>
+          <p:cNvPr id="18" name="Shape 15"/>
           <p:cNvSpPr/>
           <p:nvPr/>
         </p:nvSpPr>
@@ -16947,7 +16947,7 @@
       </p:sp>
       <p:sp>
         <p:nvSpPr>
-          <p:cNvPr id="20" name="Shape 16"/>
+          <p:cNvPr id="19" name="Shape 16"/>
           <p:cNvSpPr/>
           <p:nvPr/>
         </p:nvSpPr>
@@ -16967,7 +16967,7 @@
       </p:sp>
       <p:sp>
         <p:nvSpPr>
-          <p:cNvPr id="21" name="Text 17"/>
+          <p:cNvPr id="20" name="Text 17"/>
           <p:cNvSpPr/>
           <p:nvPr/>
         </p:nvSpPr>
@@ -17020,7 +17020,7 @@
       </p:sp>
       <p:sp>
         <p:nvSpPr>
-          <p:cNvPr id="22" name="Shape 18"/>
+          <p:cNvPr id="21" name="Shape 18"/>
           <p:cNvSpPr/>
           <p:nvPr/>
         </p:nvSpPr>
@@ -17047,7 +17047,7 @@
       </p:sp>
       <p:sp>
         <p:nvSpPr>
-          <p:cNvPr id="23" name="Shape 19"/>
+          <p:cNvPr id="22" name="Shape 19"/>
           <p:cNvSpPr/>
           <p:nvPr/>
         </p:nvSpPr>
@@ -17067,7 +17067,7 @@
       </p:sp>
       <p:sp>
         <p:nvSpPr>
-          <p:cNvPr id="24" name="Shape 20"/>
+          <p:cNvPr id="23" name="Shape 20"/>
           <p:cNvSpPr/>
           <p:nvPr/>
         </p:nvSpPr>
@@ -17087,7 +17087,7 @@
       </p:sp>
       <p:sp>
         <p:nvSpPr>
-          <p:cNvPr id="25" name="Shape 21"/>
+          <p:cNvPr id="24" name="Shape 21"/>
           <p:cNvSpPr/>
           <p:nvPr/>
         </p:nvSpPr>
@@ -17107,7 +17107,7 @@
       </p:sp>
       <p:sp>
         <p:nvSpPr>
-          <p:cNvPr id="26" name="Text 22"/>
+          <p:cNvPr id="25" name="Text 22"/>
           <p:cNvSpPr/>
           <p:nvPr/>
         </p:nvSpPr>
@@ -17160,7 +17160,7 @@
       </p:sp>
       <p:sp>
         <p:nvSpPr>
-          <p:cNvPr id="27" name="Shape 23"/>
+          <p:cNvPr id="26" name="Shape 23"/>
           <p:cNvSpPr/>
           <p:nvPr/>
         </p:nvSpPr>
@@ -17187,7 +17187,7 @@
       </p:sp>
       <p:sp>
         <p:nvSpPr>
-          <p:cNvPr id="28" name="Shape 24"/>
+          <p:cNvPr id="27" name="Shape 24"/>
           <p:cNvSpPr/>
           <p:nvPr/>
         </p:nvSpPr>
@@ -17207,7 +17207,7 @@
       </p:sp>
       <p:sp>
         <p:nvSpPr>
-          <p:cNvPr id="29" name="Shape 25"/>
+          <p:cNvPr id="28" name="Shape 25"/>
           <p:cNvSpPr/>
           <p:nvPr/>
         </p:nvSpPr>
@@ -17227,7 +17227,7 @@
       </p:sp>
       <p:sp>
         <p:nvSpPr>
-          <p:cNvPr id="30" name="Shape 26"/>
+          <p:cNvPr id="29" name="Shape 26"/>
           <p:cNvSpPr/>
           <p:nvPr/>
         </p:nvSpPr>
@@ -17247,7 +17247,7 @@
       </p:sp>
       <p:sp>
         <p:nvSpPr>
-          <p:cNvPr id="31" name="Text 27"/>
+          <p:cNvPr id="30" name="Text 27"/>
           <p:cNvSpPr/>
           <p:nvPr/>
         </p:nvSpPr>
@@ -17504,7 +17504,7 @@
       </p:pic>
       <p:sp>
         <p:nvSpPr>
-          <p:cNvPr id="7" name="Shape 3"/>
+          <p:cNvPr id="6" name="Shape 3"/>
           <p:cNvSpPr/>
           <p:nvPr/>
         </p:nvSpPr>
@@ -17531,7 +17531,7 @@
       </p:sp>
       <p:sp>
         <p:nvSpPr>
-          <p:cNvPr id="8" name="Text 4"/>
+          <p:cNvPr id="7" name="Text 4"/>
           <p:cNvSpPr/>
           <p:nvPr/>
         </p:nvSpPr>
@@ -17570,7 +17570,7 @@
       </p:sp>
       <p:sp>
         <p:nvSpPr>
-          <p:cNvPr id="9" name="Text 5"/>
+          <p:cNvPr id="8" name="Text 5"/>
           <p:cNvSpPr/>
           <p:nvPr/>
         </p:nvSpPr>
@@ -17670,7 +17670,7 @@
       </p:sp>
       <p:sp>
         <p:nvSpPr>
-          <p:cNvPr id="10" name="Shape 6"/>
+          <p:cNvPr id="9" name="Shape 6"/>
           <p:cNvSpPr/>
           <p:nvPr/>
         </p:nvSpPr>
@@ -17692,7 +17692,7 @@
       </p:sp>
       <p:sp>
         <p:nvSpPr>
-          <p:cNvPr id="11" name="Text 7"/>
+          <p:cNvPr id="10" name="Text 7"/>
           <p:cNvSpPr/>
           <p:nvPr/>
         </p:nvSpPr>
@@ -17731,7 +17731,7 @@
       </p:sp>
       <p:sp>
         <p:nvSpPr>
-          <p:cNvPr id="12" name="Text 8"/>
+          <p:cNvPr id="11" name="Text 8"/>
           <p:cNvSpPr/>
           <p:nvPr/>
         </p:nvSpPr>
@@ -17773,7 +17773,7 @@
       </p:sp>
       <p:sp>
         <p:nvSpPr>
-          <p:cNvPr id="13" name="Shape 9"/>
+          <p:cNvPr id="12" name="Shape 9"/>
           <p:cNvSpPr/>
           <p:nvPr/>
         </p:nvSpPr>
@@ -17800,7 +17800,7 @@
       </p:sp>
       <p:sp>
         <p:nvSpPr>
-          <p:cNvPr id="14" name="Text 10"/>
+          <p:cNvPr id="13" name="Text 10"/>
           <p:cNvSpPr/>
           <p:nvPr/>
         </p:nvSpPr>
@@ -17839,7 +17839,7 @@
       </p:sp>
       <p:sp>
         <p:nvSpPr>
-          <p:cNvPr id="15" name="Text 11"/>
+          <p:cNvPr id="14" name="Text 11"/>
           <p:cNvSpPr/>
           <p:nvPr/>
         </p:nvSpPr>
@@ -18605,7 +18605,7 @@
       </p:pic>
       <p:sp>
         <p:nvSpPr>
-          <p:cNvPr id="7" name="Shape 3"/>
+          <p:cNvPr id="6" name="Shape 3"/>
           <p:cNvSpPr/>
           <p:nvPr/>
         </p:nvSpPr>
@@ -18632,7 +18632,7 @@
       </p:sp>
       <p:sp>
         <p:nvSpPr>
-          <p:cNvPr id="8" name="Shape 4"/>
+          <p:cNvPr id="7" name="Shape 4"/>
           <p:cNvSpPr/>
           <p:nvPr/>
         </p:nvSpPr>
@@ -18652,7 +18652,7 @@
       </p:sp>
       <p:sp>
         <p:nvSpPr>
-          <p:cNvPr id="9" name="Text 5"/>
+          <p:cNvPr id="8" name="Text 5"/>
           <p:cNvSpPr/>
           <p:nvPr/>
         </p:nvSpPr>
@@ -18691,7 +18691,7 @@
       </p:sp>
       <p:sp>
         <p:nvSpPr>
-          <p:cNvPr id="10" name="Text 6"/>
+          <p:cNvPr id="9" name="Text 6"/>
           <p:cNvSpPr/>
           <p:nvPr/>
         </p:nvSpPr>
@@ -18730,7 +18730,7 @@
       </p:sp>
       <p:sp>
         <p:nvSpPr>
-          <p:cNvPr id="11" name="Shape 7"/>
+          <p:cNvPr id="10" name="Shape 7"/>
           <p:cNvSpPr/>
           <p:nvPr/>
         </p:nvSpPr>
@@ -18757,7 +18757,7 @@
       </p:sp>
       <p:sp>
         <p:nvSpPr>
-          <p:cNvPr id="12" name="Shape 8"/>
+          <p:cNvPr id="11" name="Shape 8"/>
           <p:cNvSpPr/>
           <p:nvPr/>
         </p:nvSpPr>
@@ -18777,7 +18777,7 @@
       </p:sp>
       <p:sp>
         <p:nvSpPr>
-          <p:cNvPr id="13" name="Text 9"/>
+          <p:cNvPr id="12" name="Text 9"/>
           <p:cNvSpPr/>
           <p:nvPr/>
         </p:nvSpPr>
@@ -18816,7 +18816,7 @@
       </p:sp>
       <p:sp>
         <p:nvSpPr>
-          <p:cNvPr id="14" name="Text 10"/>
+          <p:cNvPr id="13" name="Text 10"/>
           <p:cNvSpPr/>
           <p:nvPr/>
         </p:nvSpPr>
@@ -18855,7 +18855,7 @@
       </p:sp>
       <p:sp>
         <p:nvSpPr>
-          <p:cNvPr id="15" name="Shape 11"/>
+          <p:cNvPr id="14" name="Shape 11"/>
           <p:cNvSpPr/>
           <p:nvPr/>
         </p:nvSpPr>
@@ -18882,7 +18882,7 @@
       </p:sp>
       <p:sp>
         <p:nvSpPr>
-          <p:cNvPr id="16" name="Shape 12"/>
+          <p:cNvPr id="15" name="Shape 12"/>
           <p:cNvSpPr/>
           <p:nvPr/>
         </p:nvSpPr>
@@ -18902,7 +18902,7 @@
       </p:sp>
       <p:sp>
         <p:nvSpPr>
-          <p:cNvPr id="17" name="Text 13"/>
+          <p:cNvPr id="16" name="Text 13"/>
           <p:cNvSpPr/>
           <p:nvPr/>
         </p:nvSpPr>
@@ -18941,7 +18941,7 @@
       </p:sp>
       <p:sp>
         <p:nvSpPr>
-          <p:cNvPr id="18" name="Text 14"/>
+          <p:cNvPr id="17" name="Text 14"/>
           <p:cNvSpPr/>
           <p:nvPr/>
         </p:nvSpPr>
@@ -18980,7 +18980,7 @@
       </p:sp>
       <p:sp>
         <p:nvSpPr>
-          <p:cNvPr id="19" name="Shape 15"/>
+          <p:cNvPr id="18" name="Shape 15"/>
           <p:cNvSpPr/>
           <p:nvPr/>
         </p:nvSpPr>
@@ -19007,7 +19007,7 @@
       </p:sp>
       <p:sp>
         <p:nvSpPr>
-          <p:cNvPr id="20" name="Shape 16"/>
+          <p:cNvPr id="19" name="Shape 16"/>
           <p:cNvSpPr/>
           <p:nvPr/>
         </p:nvSpPr>
@@ -19027,7 +19027,7 @@
       </p:sp>
       <p:sp>
         <p:nvSpPr>
-          <p:cNvPr id="21" name="Text 17"/>
+          <p:cNvPr id="20" name="Text 17"/>
           <p:cNvSpPr/>
           <p:nvPr/>
         </p:nvSpPr>
@@ -19066,7 +19066,7 @@
       </p:sp>
       <p:sp>
         <p:nvSpPr>
-          <p:cNvPr id="22" name="Text 18"/>
+          <p:cNvPr id="21" name="Text 18"/>
           <p:cNvSpPr/>
           <p:nvPr/>
         </p:nvSpPr>
@@ -19105,7 +19105,7 @@
       </p:sp>
       <p:sp>
         <p:nvSpPr>
-          <p:cNvPr id="23" name="Shape 19"/>
+          <p:cNvPr id="22" name="Shape 19"/>
           <p:cNvSpPr/>
           <p:nvPr/>
         </p:nvSpPr>
@@ -19132,7 +19132,7 @@
       </p:sp>
       <p:sp>
         <p:nvSpPr>
-          <p:cNvPr id="24" name="Shape 20"/>
+          <p:cNvPr id="23" name="Shape 20"/>
           <p:cNvSpPr/>
           <p:nvPr/>
         </p:nvSpPr>
@@ -19152,7 +19152,7 @@
       </p:sp>
       <p:sp>
         <p:nvSpPr>
-          <p:cNvPr id="25" name="Text 21"/>
+          <p:cNvPr id="24" name="Text 21"/>
           <p:cNvSpPr/>
           <p:nvPr/>
         </p:nvSpPr>
@@ -19191,7 +19191,7 @@
       </p:sp>
       <p:sp>
         <p:nvSpPr>
-          <p:cNvPr id="26" name="Text 22"/>
+          <p:cNvPr id="25" name="Text 22"/>
           <p:cNvSpPr/>
           <p:nvPr/>
         </p:nvSpPr>
@@ -19230,7 +19230,7 @@
       </p:sp>
       <p:sp>
         <p:nvSpPr>
-          <p:cNvPr id="27" name="Shape 23"/>
+          <p:cNvPr id="26" name="Shape 23"/>
           <p:cNvSpPr/>
           <p:nvPr/>
         </p:nvSpPr>
@@ -19257,7 +19257,7 @@
       </p:sp>
       <p:sp>
         <p:nvSpPr>
-          <p:cNvPr id="28" name="Shape 24"/>
+          <p:cNvPr id="27" name="Shape 24"/>
           <p:cNvSpPr/>
           <p:nvPr/>
         </p:nvSpPr>
@@ -19277,7 +19277,7 @@
       </p:sp>
       <p:sp>
         <p:nvSpPr>
-          <p:cNvPr id="29" name="Text 25"/>
+          <p:cNvPr id="28" name="Text 25"/>
           <p:cNvSpPr/>
           <p:nvPr/>
         </p:nvSpPr>
@@ -19316,7 +19316,7 @@
       </p:sp>
       <p:sp>
         <p:nvSpPr>
-          <p:cNvPr id="30" name="Text 26"/>
+          <p:cNvPr id="29" name="Text 26"/>
           <p:cNvSpPr/>
           <p:nvPr/>
         </p:nvSpPr>
@@ -19355,7 +19355,7 @@
       </p:sp>
       <p:sp>
         <p:nvSpPr>
-          <p:cNvPr id="31" name="Shape 27"/>
+          <p:cNvPr id="30" name="Shape 27"/>
           <p:cNvSpPr/>
           <p:nvPr/>
         </p:nvSpPr>
@@ -19382,7 +19382,7 @@
       </p:sp>
       <p:sp>
         <p:nvSpPr>
-          <p:cNvPr id="32" name="Shape 28"/>
+          <p:cNvPr id="31" name="Shape 28"/>
           <p:cNvSpPr/>
           <p:nvPr/>
         </p:nvSpPr>
@@ -19402,7 +19402,7 @@
       </p:sp>
       <p:sp>
         <p:nvSpPr>
-          <p:cNvPr id="33" name="Text 29"/>
+          <p:cNvPr id="32" name="Text 29"/>
           <p:cNvSpPr/>
           <p:nvPr/>
         </p:nvSpPr>
@@ -19441,7 +19441,7 @@
       </p:sp>
       <p:sp>
         <p:nvSpPr>
-          <p:cNvPr id="34" name="Text 30"/>
+          <p:cNvPr id="33" name="Text 30"/>
           <p:cNvSpPr/>
           <p:nvPr/>
         </p:nvSpPr>
@@ -19480,7 +19480,7 @@
       </p:sp>
       <p:sp>
         <p:nvSpPr>
-          <p:cNvPr id="35" name="Shape 31"/>
+          <p:cNvPr id="34" name="Shape 31"/>
           <p:cNvSpPr/>
           <p:nvPr/>
         </p:nvSpPr>
@@ -19502,7 +19502,7 @@
       </p:sp>
       <p:sp>
         <p:nvSpPr>
-          <p:cNvPr id="36" name="Shape 32"/>
+          <p:cNvPr id="35" name="Shape 32"/>
           <p:cNvSpPr/>
           <p:nvPr/>
         </p:nvSpPr>
@@ -19522,7 +19522,7 @@
       </p:sp>
       <p:sp>
         <p:nvSpPr>
-          <p:cNvPr id="37" name="Text 33"/>
+          <p:cNvPr id="36" name="Text 33"/>
           <p:cNvSpPr/>
           <p:nvPr/>
         </p:nvSpPr>
@@ -19561,7 +19561,7 @@
       </p:sp>
       <p:sp>
         <p:nvSpPr>
-          <p:cNvPr id="38" name="Text 34"/>
+          <p:cNvPr id="37" name="Text 34"/>
           <p:cNvSpPr/>
           <p:nvPr/>
         </p:nvSpPr>
@@ -19600,7 +19600,7 @@
       </p:sp>
       <p:sp>
         <p:nvSpPr>
-          <p:cNvPr id="39" name="Shape 35"/>
+          <p:cNvPr id="38" name="Shape 35"/>
           <p:cNvSpPr/>
           <p:nvPr/>
         </p:nvSpPr>
@@ -19627,7 +19627,7 @@
       </p:sp>
       <p:sp>
         <p:nvSpPr>
-          <p:cNvPr id="40" name="Shape 36"/>
+          <p:cNvPr id="39" name="Shape 36"/>
           <p:cNvSpPr/>
           <p:nvPr/>
         </p:nvSpPr>
@@ -19647,7 +19647,7 @@
       </p:sp>
       <p:sp>
         <p:nvSpPr>
-          <p:cNvPr id="41" name="Text 37"/>
+          <p:cNvPr id="40" name="Text 37"/>
           <p:cNvSpPr/>
           <p:nvPr/>
         </p:nvSpPr>
@@ -19686,7 +19686,7 @@
       </p:sp>
       <p:sp>
         <p:nvSpPr>
-          <p:cNvPr id="42" name="Text 38"/>
+          <p:cNvPr id="41" name="Text 38"/>
           <p:cNvSpPr/>
           <p:nvPr/>
         </p:nvSpPr>
@@ -19725,7 +19725,7 @@
       </p:sp>
       <p:sp>
         <p:nvSpPr>
-          <p:cNvPr id="43" name="Shape 39"/>
+          <p:cNvPr id="42" name="Shape 39"/>
           <p:cNvSpPr/>
           <p:nvPr/>
         </p:nvSpPr>
@@ -19752,7 +19752,7 @@
       </p:sp>
       <p:sp>
         <p:nvSpPr>
-          <p:cNvPr id="44" name="Shape 40"/>
+          <p:cNvPr id="43" name="Shape 40"/>
           <p:cNvSpPr/>
           <p:nvPr/>
         </p:nvSpPr>
@@ -19772,7 +19772,7 @@
       </p:sp>
       <p:sp>
         <p:nvSpPr>
-          <p:cNvPr id="45" name="Text 41"/>
+          <p:cNvPr id="44" name="Text 41"/>
           <p:cNvSpPr/>
           <p:nvPr/>
         </p:nvSpPr>
@@ -19811,7 +19811,7 @@
       </p:sp>
       <p:sp>
         <p:nvSpPr>
-          <p:cNvPr id="46" name="Text 42"/>
+          <p:cNvPr id="45" name="Text 42"/>
           <p:cNvSpPr/>
           <p:nvPr/>
         </p:nvSpPr>
@@ -19850,7 +19850,7 @@
       </p:sp>
       <p:sp>
         <p:nvSpPr>
-          <p:cNvPr id="47" name="Shape 43"/>
+          <p:cNvPr id="46" name="Shape 43"/>
           <p:cNvSpPr/>
           <p:nvPr/>
         </p:nvSpPr>
@@ -19877,7 +19877,7 @@
       </p:sp>
       <p:sp>
         <p:nvSpPr>
-          <p:cNvPr id="48" name="Shape 44"/>
+          <p:cNvPr id="47" name="Shape 44"/>
           <p:cNvSpPr/>
           <p:nvPr/>
         </p:nvSpPr>
@@ -19897,7 +19897,7 @@
       </p:sp>
       <p:sp>
         <p:nvSpPr>
-          <p:cNvPr id="49" name="Text 45"/>
+          <p:cNvPr id="48" name="Text 45"/>
           <p:cNvSpPr/>
           <p:nvPr/>
         </p:nvSpPr>
@@ -19936,7 +19936,7 @@
       </p:sp>
       <p:sp>
         <p:nvSpPr>
-          <p:cNvPr id="50" name="Text 46"/>
+          <p:cNvPr id="49" name="Text 46"/>
           <p:cNvSpPr/>
           <p:nvPr/>
         </p:nvSpPr>
@@ -19975,7 +19975,7 @@
       </p:sp>
       <p:sp>
         <p:nvSpPr>
-          <p:cNvPr id="51" name="Shape 47"/>
+          <p:cNvPr id="50" name="Shape 47"/>
           <p:cNvSpPr/>
           <p:nvPr/>
         </p:nvSpPr>
@@ -20002,7 +20002,7 @@
       </p:sp>
       <p:sp>
         <p:nvSpPr>
-          <p:cNvPr id="52" name="Text 48"/>
+          <p:cNvPr id="51" name="Text 48"/>
           <p:cNvSpPr/>
           <p:nvPr/>
         </p:nvSpPr>
@@ -20290,7 +20290,7 @@
       </p:pic>
       <p:sp>
         <p:nvSpPr>
-          <p:cNvPr id="8" name="Shape 4"/>
+          <p:cNvPr id="7" name="Shape 4"/>
           <p:cNvSpPr/>
           <p:nvPr/>
         </p:nvSpPr>
@@ -20317,7 +20317,7 @@
       </p:sp>
       <p:sp>
         <p:nvSpPr>
-          <p:cNvPr id="9" name="Text 5"/>
+          <p:cNvPr id="8" name="Text 5"/>
           <p:cNvSpPr/>
           <p:nvPr/>
         </p:nvSpPr>
@@ -20356,7 +20356,7 @@
       </p:sp>
       <p:sp>
         <p:nvSpPr>
-          <p:cNvPr id="10" name="Text 6"/>
+          <p:cNvPr id="9" name="Text 6"/>
           <p:cNvSpPr/>
           <p:nvPr/>
         </p:nvSpPr>
@@ -20398,7 +20398,7 @@
       </p:sp>
       <p:sp>
         <p:nvSpPr>
-          <p:cNvPr id="11" name="Shape 7"/>
+          <p:cNvPr id="10" name="Shape 7"/>
           <p:cNvSpPr/>
           <p:nvPr/>
         </p:nvSpPr>
@@ -20425,7 +20425,7 @@
       </p:sp>
       <p:sp>
         <p:nvSpPr>
-          <p:cNvPr id="12" name="Text 8"/>
+          <p:cNvPr id="11" name="Text 8"/>
           <p:cNvSpPr/>
           <p:nvPr/>
         </p:nvSpPr>
@@ -20464,7 +20464,7 @@
       </p:sp>
       <p:sp>
         <p:nvSpPr>
-          <p:cNvPr id="13" name="Text 9"/>
+          <p:cNvPr id="12" name="Text 9"/>
           <p:cNvSpPr/>
           <p:nvPr/>
         </p:nvSpPr>
@@ -20506,7 +20506,7 @@
       </p:sp>
       <p:sp>
         <p:nvSpPr>
-          <p:cNvPr id="14" name="Shape 10"/>
+          <p:cNvPr id="13" name="Shape 10"/>
           <p:cNvSpPr/>
           <p:nvPr/>
         </p:nvSpPr>
@@ -20533,7 +20533,7 @@
       </p:sp>
       <p:sp>
         <p:nvSpPr>
-          <p:cNvPr id="15" name="Text 11"/>
+          <p:cNvPr id="14" name="Text 11"/>
           <p:cNvSpPr/>
           <p:nvPr/>
         </p:nvSpPr>
@@ -20572,7 +20572,7 @@
       </p:sp>
       <p:sp>
         <p:nvSpPr>
-          <p:cNvPr id="16" name="Text 12"/>
+          <p:cNvPr id="15" name="Text 12"/>
           <p:cNvSpPr/>
           <p:nvPr/>
         </p:nvSpPr>
@@ -20614,7 +20614,7 @@
       </p:sp>
       <p:sp>
         <p:nvSpPr>
-          <p:cNvPr id="17" name="Shape 13"/>
+          <p:cNvPr id="16" name="Shape 13"/>
           <p:cNvSpPr/>
           <p:nvPr/>
         </p:nvSpPr>
@@ -20641,7 +20641,7 @@
       </p:sp>
       <p:sp>
         <p:nvSpPr>
-          <p:cNvPr id="18" name="Text 14"/>
+          <p:cNvPr id="17" name="Text 14"/>
           <p:cNvSpPr/>
           <p:nvPr/>
         </p:nvSpPr>
@@ -20680,7 +20680,7 @@
       </p:sp>
       <p:sp>
         <p:nvSpPr>
-          <p:cNvPr id="19" name="Text 15"/>
+          <p:cNvPr id="18" name="Text 15"/>
           <p:cNvSpPr/>
           <p:nvPr/>
         </p:nvSpPr>
@@ -20722,7 +20722,7 @@
       </p:sp>
       <p:sp>
         <p:nvSpPr>
-          <p:cNvPr id="20" name="Shape 16"/>
+          <p:cNvPr id="19" name="Shape 16"/>
           <p:cNvSpPr/>
           <p:nvPr/>
         </p:nvSpPr>
@@ -20749,7 +20749,7 @@
       </p:sp>
       <p:sp>
         <p:nvSpPr>
-          <p:cNvPr id="21" name="Text 17"/>
+          <p:cNvPr id="20" name="Text 17"/>
           <p:cNvSpPr/>
           <p:nvPr/>
         </p:nvSpPr>
@@ -20788,7 +20788,7 @@
       </p:sp>
       <p:sp>
         <p:nvSpPr>
-          <p:cNvPr id="22" name="Text 18"/>
+          <p:cNvPr id="21" name="Text 18"/>
           <p:cNvSpPr/>
           <p:nvPr/>
         </p:nvSpPr>
@@ -20830,7 +20830,7 @@
       </p:sp>
       <p:sp>
         <p:nvSpPr>
-          <p:cNvPr id="23" name="Shape 19"/>
+          <p:cNvPr id="22" name="Shape 19"/>
           <p:cNvSpPr/>
           <p:nvPr/>
         </p:nvSpPr>
@@ -20857,7 +20857,7 @@
       </p:sp>
       <p:sp>
         <p:nvSpPr>
-          <p:cNvPr id="24" name="Text 20"/>
+          <p:cNvPr id="23" name="Text 20"/>
           <p:cNvSpPr/>
           <p:nvPr/>
         </p:nvSpPr>
@@ -20896,7 +20896,7 @@
       </p:sp>
       <p:sp>
         <p:nvSpPr>
-          <p:cNvPr id="25" name="Text 21"/>
+          <p:cNvPr id="24" name="Text 21"/>
           <p:cNvSpPr/>
           <p:nvPr/>
         </p:nvSpPr>
@@ -20938,7 +20938,7 @@
       </p:sp>
       <p:sp>
         <p:nvSpPr>
-          <p:cNvPr id="26" name="Shape 22"/>
+          <p:cNvPr id="25" name="Shape 22"/>
           <p:cNvSpPr/>
           <p:nvPr/>
         </p:nvSpPr>
@@ -20965,7 +20965,7 @@
       </p:sp>
       <p:sp>
         <p:nvSpPr>
-          <p:cNvPr id="27" name="Text 23"/>
+          <p:cNvPr id="26" name="Text 23"/>
           <p:cNvSpPr/>
           <p:nvPr/>
         </p:nvSpPr>
@@ -21250,7 +21250,7 @@
       </p:pic>
       <p:sp>
         <p:nvSpPr>
-          <p:cNvPr id="8" name="Shape 4"/>
+          <p:cNvPr id="7" name="Shape 4"/>
           <p:cNvSpPr/>
           <p:nvPr/>
         </p:nvSpPr>
@@ -21277,7 +21277,7 @@
       </p:sp>
       <p:sp>
         <p:nvSpPr>
-          <p:cNvPr id="9" name="Text 5"/>
+          <p:cNvPr id="8" name="Text 5"/>
           <p:cNvSpPr/>
           <p:nvPr/>
         </p:nvSpPr>
@@ -21316,7 +21316,7 @@
       </p:sp>
       <p:sp>
         <p:nvSpPr>
-          <p:cNvPr id="10" name="Shape 6"/>
+          <p:cNvPr id="9" name="Shape 6"/>
           <p:cNvSpPr/>
           <p:nvPr/>
         </p:nvSpPr>
@@ -21339,7 +21339,7 @@
       </p:sp>
       <p:sp>
         <p:nvSpPr>
-          <p:cNvPr id="11" name="Shape 7"/>
+          <p:cNvPr id="10" name="Shape 7"/>
           <p:cNvSpPr/>
           <p:nvPr/>
         </p:nvSpPr>
@@ -21359,7 +21359,7 @@
       </p:sp>
       <p:sp>
         <p:nvSpPr>
-          <p:cNvPr id="12" name="Shape 8"/>
+          <p:cNvPr id="11" name="Shape 8"/>
           <p:cNvSpPr/>
           <p:nvPr/>
         </p:nvSpPr>
@@ -21381,7 +21381,7 @@
       </p:sp>
       <p:sp>
         <p:nvSpPr>
-          <p:cNvPr id="13" name="Text 9"/>
+          <p:cNvPr id="12" name="Text 9"/>
           <p:cNvSpPr/>
           <p:nvPr/>
         </p:nvSpPr>
@@ -21420,7 +21420,7 @@
       </p:sp>
       <p:sp>
         <p:nvSpPr>
-          <p:cNvPr id="14" name="Shape 10"/>
+          <p:cNvPr id="13" name="Shape 10"/>
           <p:cNvSpPr/>
           <p:nvPr/>
         </p:nvSpPr>
@@ -21443,7 +21443,7 @@
       </p:sp>
       <p:sp>
         <p:nvSpPr>
-          <p:cNvPr id="15" name="Shape 11"/>
+          <p:cNvPr id="14" name="Shape 11"/>
           <p:cNvSpPr/>
           <p:nvPr/>
         </p:nvSpPr>
@@ -21463,7 +21463,7 @@
       </p:sp>
       <p:sp>
         <p:nvSpPr>
-          <p:cNvPr id="16" name="Shape 12"/>
+          <p:cNvPr id="15" name="Shape 12"/>
           <p:cNvSpPr/>
           <p:nvPr/>
         </p:nvSpPr>
@@ -21485,7 +21485,7 @@
       </p:sp>
       <p:sp>
         <p:nvSpPr>
-          <p:cNvPr id="17" name="Text 13"/>
+          <p:cNvPr id="16" name="Text 13"/>
           <p:cNvSpPr/>
           <p:nvPr/>
         </p:nvSpPr>
@@ -21524,7 +21524,7 @@
       </p:sp>
       <p:sp>
         <p:nvSpPr>
-          <p:cNvPr id="18" name="Shape 14"/>
+          <p:cNvPr id="17" name="Shape 14"/>
           <p:cNvSpPr/>
           <p:nvPr/>
         </p:nvSpPr>
@@ -21547,7 +21547,7 @@
       </p:sp>
       <p:sp>
         <p:nvSpPr>
-          <p:cNvPr id="19" name="Shape 15"/>
+          <p:cNvPr id="18" name="Shape 15"/>
           <p:cNvSpPr/>
           <p:nvPr/>
         </p:nvSpPr>
@@ -21567,7 +21567,7 @@
       </p:sp>
       <p:sp>
         <p:nvSpPr>
-          <p:cNvPr id="20" name="Shape 16"/>
+          <p:cNvPr id="19" name="Shape 16"/>
           <p:cNvSpPr/>
           <p:nvPr/>
         </p:nvSpPr>
@@ -21594,7 +21594,7 @@
       </p:sp>
       <p:sp>
         <p:nvSpPr>
-          <p:cNvPr id="21" name="Text 17"/>
+          <p:cNvPr id="20" name="Text 17"/>
           <p:cNvSpPr/>
           <p:nvPr/>
         </p:nvSpPr>
@@ -21633,7 +21633,7 @@
       </p:sp>
       <p:sp>
         <p:nvSpPr>
-          <p:cNvPr id="22" name="Text 18"/>
+          <p:cNvPr id="21" name="Text 18"/>
           <p:cNvSpPr/>
           <p:nvPr/>
         </p:nvSpPr>
@@ -21672,7 +21672,7 @@
       </p:sp>
       <p:sp>
         <p:nvSpPr>
-          <p:cNvPr id="23" name="Shape 19"/>
+          <p:cNvPr id="22" name="Shape 19"/>
           <p:cNvSpPr/>
           <p:nvPr/>
         </p:nvSpPr>
@@ -21694,7 +21694,7 @@
       </p:sp>
       <p:sp>
         <p:nvSpPr>
-          <p:cNvPr id="24" name="Text 20"/>
+          <p:cNvPr id="23" name="Text 20"/>
           <p:cNvSpPr/>
           <p:nvPr/>
         </p:nvSpPr>
@@ -21733,7 +21733,7 @@
       </p:sp>
       <p:sp>
         <p:nvSpPr>
-          <p:cNvPr id="25" name="Text 21"/>
+          <p:cNvPr id="24" name="Text 21"/>
           <p:cNvSpPr/>
           <p:nvPr/>
         </p:nvSpPr>
@@ -21775,7 +21775,7 @@
       </p:sp>
       <p:sp>
         <p:nvSpPr>
-          <p:cNvPr id="26" name="Shape 22"/>
+          <p:cNvPr id="25" name="Shape 22"/>
           <p:cNvSpPr/>
           <p:nvPr/>
         </p:nvSpPr>
@@ -21797,7 +21797,7 @@
       </p:sp>
       <p:sp>
         <p:nvSpPr>
-          <p:cNvPr id="27" name="Text 23"/>
+          <p:cNvPr id="26" name="Text 23"/>
           <p:cNvSpPr/>
           <p:nvPr/>
         </p:nvSpPr>
@@ -21836,7 +21836,7 @@
       </p:sp>
       <p:sp>
         <p:nvSpPr>
-          <p:cNvPr id="28" name="Text 24"/>
+          <p:cNvPr id="27" name="Text 24"/>
           <p:cNvSpPr/>
           <p:nvPr/>
         </p:nvSpPr>
@@ -21878,7 +21878,7 @@
       </p:sp>
       <p:sp>
         <p:nvSpPr>
-          <p:cNvPr id="29" name="Shape 25"/>
+          <p:cNvPr id="28" name="Shape 25"/>
           <p:cNvSpPr/>
           <p:nvPr/>
         </p:nvSpPr>
@@ -21900,7 +21900,7 @@
       </p:sp>
       <p:sp>
         <p:nvSpPr>
-          <p:cNvPr id="30" name="Text 26"/>
+          <p:cNvPr id="29" name="Text 26"/>
           <p:cNvSpPr/>
           <p:nvPr/>
         </p:nvSpPr>
@@ -21939,7 +21939,7 @@
       </p:sp>
       <p:sp>
         <p:nvSpPr>
-          <p:cNvPr id="31" name="Text 27"/>
+          <p:cNvPr id="30" name="Text 27"/>
           <p:cNvSpPr/>
           <p:nvPr/>
         </p:nvSpPr>
@@ -23274,7 +23274,7 @@
       </p:graphicFrame>
       <p:sp>
         <p:nvSpPr>
-          <p:cNvPr id="9" name="Shape 4"/>
+          <p:cNvPr id="8" name="Shape 4"/>
           <p:cNvSpPr/>
           <p:nvPr/>
         </p:nvSpPr>
@@ -23296,7 +23296,7 @@
       </p:sp>
       <p:sp>
         <p:nvSpPr>
-          <p:cNvPr id="10" name="Text 5"/>
+          <p:cNvPr id="9" name="Text 5"/>
           <p:cNvSpPr/>
           <p:nvPr/>
         </p:nvSpPr>
@@ -23581,7 +23581,7 @@
       </p:pic>
       <p:sp>
         <p:nvSpPr>
-          <p:cNvPr id="8" name="Shape 4"/>
+          <p:cNvPr id="7" name="Shape 4"/>
           <p:cNvSpPr/>
           <p:nvPr/>
         </p:nvSpPr>
@@ -23603,7 +23603,7 @@
       </p:sp>
       <p:sp>
         <p:nvSpPr>
-          <p:cNvPr id="9" name="Text 5"/>
+          <p:cNvPr id="8" name="Text 5"/>
           <p:cNvSpPr/>
           <p:nvPr/>
         </p:nvSpPr>
@@ -23642,7 +23642,7 @@
       </p:sp>
       <p:sp>
         <p:nvSpPr>
-          <p:cNvPr id="10" name="Text 6"/>
+          <p:cNvPr id="9" name="Text 6"/>
           <p:cNvSpPr/>
           <p:nvPr/>
         </p:nvSpPr>
@@ -23681,7 +23681,7 @@
       </p:sp>
       <p:sp>
         <p:nvSpPr>
-          <p:cNvPr id="11" name="Shape 7"/>
+          <p:cNvPr id="10" name="Shape 7"/>
           <p:cNvSpPr/>
           <p:nvPr/>
         </p:nvSpPr>
@@ -23708,7 +23708,7 @@
       </p:sp>
       <p:sp>
         <p:nvSpPr>
-          <p:cNvPr id="12" name="Text 8"/>
+          <p:cNvPr id="11" name="Text 8"/>
           <p:cNvSpPr/>
           <p:nvPr/>
         </p:nvSpPr>
@@ -23747,7 +23747,7 @@
       </p:sp>
       <p:sp>
         <p:nvSpPr>
-          <p:cNvPr id="13" name="Text 9"/>
+          <p:cNvPr id="12" name="Text 9"/>
           <p:cNvSpPr/>
           <p:nvPr/>
         </p:nvSpPr>
@@ -23786,7 +23786,7 @@
       </p:sp>
       <p:sp>
         <p:nvSpPr>
-          <p:cNvPr id="14" name="Shape 10"/>
+          <p:cNvPr id="13" name="Shape 10"/>
           <p:cNvSpPr/>
           <p:nvPr/>
         </p:nvSpPr>
@@ -23808,7 +23808,7 @@
       </p:sp>
       <p:sp>
         <p:nvSpPr>
-          <p:cNvPr id="15" name="Text 11"/>
+          <p:cNvPr id="14" name="Text 11"/>
           <p:cNvSpPr/>
           <p:nvPr/>
         </p:nvSpPr>
@@ -23847,7 +23847,7 @@
       </p:sp>
       <p:sp>
         <p:nvSpPr>
-          <p:cNvPr id="16" name="Text 12"/>
+          <p:cNvPr id="15" name="Text 12"/>
           <p:cNvSpPr/>
           <p:nvPr/>
         </p:nvSpPr>
@@ -23886,7 +23886,7 @@
       </p:sp>
       <p:sp>
         <p:nvSpPr>
-          <p:cNvPr id="17" name="Shape 13"/>
+          <p:cNvPr id="16" name="Shape 13"/>
           <p:cNvSpPr/>
           <p:nvPr/>
         </p:nvSpPr>
@@ -23908,7 +23908,7 @@
       </p:sp>
       <p:sp>
         <p:nvSpPr>
-          <p:cNvPr id="18" name="Text 14"/>
+          <p:cNvPr id="17" name="Text 14"/>
           <p:cNvSpPr/>
           <p:nvPr/>
         </p:nvSpPr>
@@ -23947,7 +23947,7 @@
       </p:sp>
       <p:sp>
         <p:nvSpPr>
-          <p:cNvPr id="19" name="Text 15"/>
+          <p:cNvPr id="18" name="Text 15"/>
           <p:cNvSpPr/>
           <p:nvPr/>
         </p:nvSpPr>
@@ -24232,7 +24232,7 @@
       </p:pic>
       <p:sp>
         <p:nvSpPr>
-          <p:cNvPr id="8" name="Shape 4"/>
+          <p:cNvPr id="7" name="Shape 4"/>
           <p:cNvSpPr/>
           <p:nvPr/>
         </p:nvSpPr>
@@ -24259,7 +24259,7 @@
       </p:sp>
       <p:sp>
         <p:nvSpPr>
-          <p:cNvPr id="9" name="Text 5"/>
+          <p:cNvPr id="8" name="Text 5"/>
           <p:cNvSpPr/>
           <p:nvPr/>
         </p:nvSpPr>
@@ -24461,7 +24461,7 @@
       </p:sp>
       <p:sp>
         <p:nvSpPr>
-          <p:cNvPr id="10" name="Shape 6"/>
+          <p:cNvPr id="9" name="Shape 6"/>
           <p:cNvSpPr/>
           <p:nvPr/>
         </p:nvSpPr>
@@ -24483,7 +24483,7 @@
       </p:sp>
       <p:sp>
         <p:nvSpPr>
-          <p:cNvPr id="11" name="Shape 7"/>
+          <p:cNvPr id="10" name="Shape 7"/>
           <p:cNvSpPr/>
           <p:nvPr/>
         </p:nvSpPr>
@@ -24503,7 +24503,7 @@
       </p:sp>
       <p:sp>
         <p:nvSpPr>
-          <p:cNvPr id="12" name="Text 8"/>
+          <p:cNvPr id="11" name="Text 8"/>
           <p:cNvSpPr/>
           <p:nvPr/>
         </p:nvSpPr>
@@ -24542,7 +24542,7 @@
       </p:sp>
       <p:sp>
         <p:nvSpPr>
-          <p:cNvPr id="13" name="Text 9"/>
+          <p:cNvPr id="12" name="Text 9"/>
           <p:cNvSpPr/>
           <p:nvPr/>
         </p:nvSpPr>
@@ -24581,7 +24581,7 @@
       </p:sp>
       <p:sp>
         <p:nvSpPr>
-          <p:cNvPr id="14" name="Text 10"/>
+          <p:cNvPr id="13" name="Text 10"/>
           <p:cNvSpPr/>
           <p:nvPr/>
         </p:nvSpPr>
@@ -24623,7 +24623,7 @@
       </p:sp>
       <p:sp>
         <p:nvSpPr>
-          <p:cNvPr id="15" name="Shape 11"/>
+          <p:cNvPr id="14" name="Shape 11"/>
           <p:cNvSpPr/>
           <p:nvPr/>
         </p:nvSpPr>
@@ -24645,7 +24645,7 @@
       </p:sp>
       <p:sp>
         <p:nvSpPr>
-          <p:cNvPr id="16" name="Shape 12"/>
+          <p:cNvPr id="15" name="Shape 12"/>
           <p:cNvSpPr/>
           <p:nvPr/>
         </p:nvSpPr>
@@ -24665,7 +24665,7 @@
       </p:sp>
       <p:sp>
         <p:nvSpPr>
-          <p:cNvPr id="17" name="Text 13"/>
+          <p:cNvPr id="16" name="Text 13"/>
           <p:cNvSpPr/>
           <p:nvPr/>
         </p:nvSpPr>
@@ -24704,7 +24704,7 @@
       </p:sp>
       <p:sp>
         <p:nvSpPr>
-          <p:cNvPr id="18" name="Text 14"/>
+          <p:cNvPr id="17" name="Text 14"/>
           <p:cNvSpPr/>
           <p:nvPr/>
         </p:nvSpPr>
@@ -24743,7 +24743,7 @@
       </p:sp>
       <p:sp>
         <p:nvSpPr>
-          <p:cNvPr id="19" name="Text 15"/>
+          <p:cNvPr id="18" name="Text 15"/>
           <p:cNvSpPr/>
           <p:nvPr/>
         </p:nvSpPr>
@@ -24785,7 +24785,7 @@
       </p:sp>
       <p:sp>
         <p:nvSpPr>
-          <p:cNvPr id="20" name="Shape 16"/>
+          <p:cNvPr id="19" name="Shape 16"/>
           <p:cNvSpPr/>
           <p:nvPr/>
         </p:nvSpPr>
@@ -24807,7 +24807,7 @@
       </p:sp>
       <p:sp>
         <p:nvSpPr>
-          <p:cNvPr id="21" name="Shape 17"/>
+          <p:cNvPr id="20" name="Shape 17"/>
           <p:cNvSpPr/>
           <p:nvPr/>
         </p:nvSpPr>
@@ -24827,7 +24827,7 @@
       </p:sp>
       <p:sp>
         <p:nvSpPr>
-          <p:cNvPr id="22" name="Text 18"/>
+          <p:cNvPr id="21" name="Text 18"/>
           <p:cNvSpPr/>
           <p:nvPr/>
         </p:nvSpPr>
@@ -24866,7 +24866,7 @@
       </p:sp>
       <p:sp>
         <p:nvSpPr>
-          <p:cNvPr id="23" name="Text 19"/>
+          <p:cNvPr id="22" name="Text 19"/>
           <p:cNvSpPr/>
           <p:nvPr/>
         </p:nvSpPr>
@@ -24905,7 +24905,7 @@
       </p:sp>
       <p:sp>
         <p:nvSpPr>
-          <p:cNvPr id="24" name="Text 20"/>
+          <p:cNvPr id="23" name="Text 20"/>
           <p:cNvSpPr/>
           <p:nvPr/>
         </p:nvSpPr>
@@ -25190,7 +25190,7 @@
       </p:pic>
       <p:sp>
         <p:nvSpPr>
-          <p:cNvPr id="8" name="Shape 4"/>
+          <p:cNvPr id="7" name="Shape 4"/>
           <p:cNvSpPr/>
           <p:nvPr/>
         </p:nvSpPr>
@@ -25217,7 +25217,7 @@
       </p:sp>
       <p:sp>
         <p:nvSpPr>
-          <p:cNvPr id="9" name="Text 5"/>
+          <p:cNvPr id="8" name="Text 5"/>
           <p:cNvSpPr/>
           <p:nvPr/>
         </p:nvSpPr>
@@ -25399,7 +25399,7 @@
       </p:sp>
       <p:sp>
         <p:nvSpPr>
-          <p:cNvPr id="10" name="Shape 6"/>
+          <p:cNvPr id="9" name="Shape 6"/>
           <p:cNvSpPr/>
           <p:nvPr/>
         </p:nvSpPr>
@@ -25426,7 +25426,7 @@
       </p:sp>
       <p:sp>
         <p:nvSpPr>
-          <p:cNvPr id="11" name="Shape 7"/>
+          <p:cNvPr id="10" name="Shape 7"/>
           <p:cNvSpPr/>
           <p:nvPr/>
         </p:nvSpPr>
@@ -25446,7 +25446,7 @@
       </p:sp>
       <p:sp>
         <p:nvSpPr>
-          <p:cNvPr id="12" name="Text 8"/>
+          <p:cNvPr id="11" name="Text 8"/>
           <p:cNvSpPr/>
           <p:nvPr/>
         </p:nvSpPr>
@@ -25485,7 +25485,7 @@
       </p:sp>
       <p:sp>
         <p:nvSpPr>
-          <p:cNvPr id="13" name="Text 9"/>
+          <p:cNvPr id="12" name="Text 9"/>
           <p:cNvSpPr/>
           <p:nvPr/>
         </p:nvSpPr>
@@ -25524,7 +25524,7 @@
       </p:sp>
       <p:sp>
         <p:nvSpPr>
-          <p:cNvPr id="14" name="Text 10"/>
+          <p:cNvPr id="13" name="Text 10"/>
           <p:cNvSpPr/>
           <p:nvPr/>
         </p:nvSpPr>
@@ -25566,7 +25566,7 @@
       </p:sp>
       <p:sp>
         <p:nvSpPr>
-          <p:cNvPr id="15" name="Shape 11"/>
+          <p:cNvPr id="14" name="Shape 11"/>
           <p:cNvSpPr/>
           <p:nvPr/>
         </p:nvSpPr>
@@ -25593,7 +25593,7 @@
       </p:sp>
       <p:sp>
         <p:nvSpPr>
-          <p:cNvPr id="16" name="Shape 12"/>
+          <p:cNvPr id="15" name="Shape 12"/>
           <p:cNvSpPr/>
           <p:nvPr/>
         </p:nvSpPr>
@@ -25613,7 +25613,7 @@
       </p:sp>
       <p:sp>
         <p:nvSpPr>
-          <p:cNvPr id="17" name="Text 13"/>
+          <p:cNvPr id="16" name="Text 13"/>
           <p:cNvSpPr/>
           <p:nvPr/>
         </p:nvSpPr>
@@ -25652,7 +25652,7 @@
       </p:sp>
       <p:sp>
         <p:nvSpPr>
-          <p:cNvPr id="18" name="Text 14"/>
+          <p:cNvPr id="17" name="Text 14"/>
           <p:cNvSpPr/>
           <p:nvPr/>
         </p:nvSpPr>
@@ -25691,7 +25691,7 @@
       </p:sp>
       <p:sp>
         <p:nvSpPr>
-          <p:cNvPr id="19" name="Text 15"/>
+          <p:cNvPr id="18" name="Text 15"/>
           <p:cNvSpPr/>
           <p:nvPr/>
         </p:nvSpPr>
@@ -25733,7 +25733,7 @@
       </p:sp>
       <p:sp>
         <p:nvSpPr>
-          <p:cNvPr id="20" name="Shape 16"/>
+          <p:cNvPr id="19" name="Shape 16"/>
           <p:cNvSpPr/>
           <p:nvPr/>
         </p:nvSpPr>
@@ -25755,7 +25755,7 @@
       </p:sp>
       <p:sp>
         <p:nvSpPr>
-          <p:cNvPr id="21" name="Shape 17"/>
+          <p:cNvPr id="20" name="Shape 17"/>
           <p:cNvSpPr/>
           <p:nvPr/>
         </p:nvSpPr>
@@ -25775,7 +25775,7 @@
       </p:sp>
       <p:sp>
         <p:nvSpPr>
-          <p:cNvPr id="22" name="Text 18"/>
+          <p:cNvPr id="21" name="Text 18"/>
           <p:cNvSpPr/>
           <p:nvPr/>
         </p:nvSpPr>
@@ -25814,7 +25814,7 @@
       </p:sp>
       <p:sp>
         <p:nvSpPr>
-          <p:cNvPr id="23" name="Text 19"/>
+          <p:cNvPr id="22" name="Text 19"/>
           <p:cNvSpPr/>
           <p:nvPr/>
         </p:nvSpPr>
@@ -25853,7 +25853,7 @@
       </p:sp>
       <p:sp>
         <p:nvSpPr>
-          <p:cNvPr id="24" name="Text 20"/>
+          <p:cNvPr id="23" name="Text 20"/>
           <p:cNvSpPr/>
           <p:nvPr/>
         </p:nvSpPr>

--- a/docs/decks/L07.pptx
+++ b/docs/decks/L07.pptx
@@ -23588,11 +23588,11 @@
         <p:spPr>
           <a:xfrm>
             <a:off x="566928" y="1783080"/>
-            <a:ext cx="11064240" cy="777240"/>
+            <a:ext cx="11064240" cy="640080"/>
           </a:xfrm>
           <a:prstGeom prst="roundRect">
             <a:avLst>
-              <a:gd name="adj" fmla="val 11765"/>
+              <a:gd name="adj" fmla="val 14286"/>
             </a:avLst>
           </a:prstGeom>
           <a:solidFill>
@@ -23610,7 +23610,7 @@
         <p:spPr>
           <a:xfrm>
             <a:off x="786384" y="1783080"/>
-            <a:ext cx="3761842" cy="777240"/>
+            <a:ext cx="3761842" cy="640080"/>
           </a:xfrm>
           <a:prstGeom prst="rect">
             <a:avLst/>
@@ -23649,7 +23649,7 @@
         <p:spPr>
           <a:xfrm>
             <a:off x="4548226" y="1783080"/>
-            <a:ext cx="6640373" cy="777240"/>
+            <a:ext cx="6640373" cy="640080"/>
           </a:xfrm>
           <a:prstGeom prst="rect">
             <a:avLst/>
@@ -23687,12 +23687,12 @@
         </p:nvSpPr>
         <p:spPr>
           <a:xfrm>
-            <a:off x="566928" y="2688336"/>
-            <a:ext cx="11064240" cy="777240"/>
+            <a:off x="566928" y="2532888"/>
+            <a:ext cx="11064240" cy="640080"/>
           </a:xfrm>
           <a:prstGeom prst="roundRect">
             <a:avLst>
-              <a:gd name="adj" fmla="val 11765"/>
+              <a:gd name="adj" fmla="val 14286"/>
             </a:avLst>
           </a:prstGeom>
           <a:solidFill>
@@ -23714,8 +23714,8 @@
         </p:nvSpPr>
         <p:spPr>
           <a:xfrm>
-            <a:off x="786384" y="2688336"/>
-            <a:ext cx="3761842" cy="777240"/>
+            <a:off x="786384" y="2532888"/>
+            <a:ext cx="3761842" cy="640080"/>
           </a:xfrm>
           <a:prstGeom prst="rect">
             <a:avLst/>
@@ -23753,8 +23753,8 @@
         </p:nvSpPr>
         <p:spPr>
           <a:xfrm>
-            <a:off x="4548226" y="2688336"/>
-            <a:ext cx="6640373" cy="777240"/>
+            <a:off x="4548226" y="2532888"/>
+            <a:ext cx="6640373" cy="640080"/>
           </a:xfrm>
           <a:prstGeom prst="rect">
             <a:avLst/>
@@ -23792,12 +23792,12 @@
         </p:nvSpPr>
         <p:spPr>
           <a:xfrm>
-            <a:off x="566928" y="3593592"/>
-            <a:ext cx="11064240" cy="777240"/>
+            <a:off x="566928" y="3282696"/>
+            <a:ext cx="11064240" cy="640080"/>
           </a:xfrm>
           <a:prstGeom prst="roundRect">
             <a:avLst>
-              <a:gd name="adj" fmla="val 11765"/>
+              <a:gd name="adj" fmla="val 14286"/>
             </a:avLst>
           </a:prstGeom>
           <a:solidFill>
@@ -23814,8 +23814,8 @@
         </p:nvSpPr>
         <p:spPr>
           <a:xfrm>
-            <a:off x="786384" y="3593592"/>
-            <a:ext cx="3761842" cy="777240"/>
+            <a:off x="786384" y="3282696"/>
+            <a:ext cx="3761842" cy="640080"/>
           </a:xfrm>
           <a:prstGeom prst="rect">
             <a:avLst/>
@@ -23853,8 +23853,8 @@
         </p:nvSpPr>
         <p:spPr>
           <a:xfrm>
-            <a:off x="4548226" y="3593592"/>
-            <a:ext cx="6640373" cy="777240"/>
+            <a:off x="4548226" y="3282696"/>
+            <a:ext cx="6640373" cy="640080"/>
           </a:xfrm>
           <a:prstGeom prst="rect">
             <a:avLst/>
@@ -23886,18 +23886,484 @@
       </p:sp>
       <p:sp>
         <p:nvSpPr>
-          <p:cNvPr id="16" name="Shape 13"/>
-          <p:cNvSpPr/>
-          <p:nvPr/>
-        </p:nvSpPr>
-        <p:spPr>
-          <a:xfrm>
-            <a:off x="566928" y="4663440"/>
-            <a:ext cx="11064240" cy="1188720"/>
+          <p:cNvPr id="16" name="Text 13"/>
+          <p:cNvSpPr/>
+          <p:nvPr/>
+        </p:nvSpPr>
+        <p:spPr>
+          <a:xfrm>
+            <a:off x="566928" y="4050792"/>
+            <a:ext cx="1554480" cy="237744"/>
+          </a:xfrm>
+          <a:prstGeom prst="rect">
+            <a:avLst/>
+          </a:prstGeom>
+          <a:noFill/>
+          <a:ln/>
+        </p:spPr>
+        <p:txBody>
+          <a:bodyPr wrap="square" lIns="0" tIns="0" rIns="0" bIns="0" rtlCol="0" anchor="ctr"/>
+          <a:lstStyle/>
+          <a:p>
+            <a:pPr algn="r" indent="0" marL="0">
+              <a:buNone/>
+            </a:pPr>
+            <a:r>
+              <a:rPr lang="en-US" sz="1050" dirty="0">
+                <a:solidFill>
+                  <a:srgbClr val="111318"/>
+                </a:solidFill>
+                <a:latin typeface="Montserrat" pitchFamily="34" charset="0"/>
+                <a:ea typeface="Montserrat" pitchFamily="34" charset="-122"/>
+                <a:cs typeface="Montserrat" pitchFamily="34" charset="-120"/>
+              </a:rPr>
+              <a:t>Фіксований</a:t>
+            </a:r>
+            <a:endParaRPr lang="en-US" sz="1050" dirty="0"/>
+          </a:p>
+        </p:txBody>
+      </p:sp>
+      <p:sp>
+        <p:nvSpPr>
+          <p:cNvPr id="17" name="Shape 14"/>
+          <p:cNvSpPr/>
+          <p:nvPr/>
+        </p:nvSpPr>
+        <p:spPr>
+          <a:xfrm>
+            <a:off x="2258568" y="4169664"/>
+            <a:ext cx="8595360" cy="0"/>
+          </a:xfrm>
+          <a:prstGeom prst="line">
+            <a:avLst/>
+          </a:prstGeom>
+          <a:noFill/>
+          <a:ln w="12700">
+            <a:solidFill>
+              <a:srgbClr val="E6E7EC"/>
+            </a:solidFill>
+            <a:prstDash val="solid"/>
+          </a:ln>
+        </p:spPr>
+      </p:sp>
+      <p:sp>
+        <p:nvSpPr>
+          <p:cNvPr id="18" name="Shape 15"/>
+          <p:cNvSpPr/>
+          <p:nvPr/>
+        </p:nvSpPr>
+        <p:spPr>
+          <a:xfrm>
+            <a:off x="3067812" y="4119372"/>
+            <a:ext cx="100584" cy="100584"/>
+          </a:xfrm>
+          <a:prstGeom prst="ellipse">
+            <a:avLst/>
+          </a:prstGeom>
+          <a:solidFill>
+            <a:srgbClr val="9A5B12"/>
+          </a:solidFill>
+          <a:ln/>
+        </p:spPr>
+      </p:sp>
+      <p:sp>
+        <p:nvSpPr>
+          <p:cNvPr id="19" name="Shape 16"/>
+          <p:cNvSpPr/>
+          <p:nvPr/>
+        </p:nvSpPr>
+        <p:spPr>
+          <a:xfrm>
+            <a:off x="4614977" y="4119372"/>
+            <a:ext cx="100584" cy="100584"/>
+          </a:xfrm>
+          <a:prstGeom prst="ellipse">
+            <a:avLst/>
+          </a:prstGeom>
+          <a:solidFill>
+            <a:srgbClr val="9A5B12"/>
+          </a:solidFill>
+          <a:ln/>
+        </p:spPr>
+      </p:sp>
+      <p:sp>
+        <p:nvSpPr>
+          <p:cNvPr id="20" name="Shape 17"/>
+          <p:cNvSpPr/>
+          <p:nvPr/>
+        </p:nvSpPr>
+        <p:spPr>
+          <a:xfrm>
+            <a:off x="6162142" y="4119372"/>
+            <a:ext cx="100584" cy="100584"/>
+          </a:xfrm>
+          <a:prstGeom prst="ellipse">
+            <a:avLst/>
+          </a:prstGeom>
+          <a:solidFill>
+            <a:srgbClr val="9A5B12"/>
+          </a:solidFill>
+          <a:ln/>
+        </p:spPr>
+      </p:sp>
+      <p:sp>
+        <p:nvSpPr>
+          <p:cNvPr id="21" name="Shape 18"/>
+          <p:cNvSpPr/>
+          <p:nvPr/>
+        </p:nvSpPr>
+        <p:spPr>
+          <a:xfrm>
+            <a:off x="7709306" y="4119372"/>
+            <a:ext cx="100584" cy="100584"/>
+          </a:xfrm>
+          <a:prstGeom prst="ellipse">
+            <a:avLst/>
+          </a:prstGeom>
+          <a:solidFill>
+            <a:srgbClr val="9A5B12"/>
+          </a:solidFill>
+          <a:ln/>
+        </p:spPr>
+      </p:sp>
+      <p:sp>
+        <p:nvSpPr>
+          <p:cNvPr id="22" name="Shape 19"/>
+          <p:cNvSpPr/>
+          <p:nvPr/>
+        </p:nvSpPr>
+        <p:spPr>
+          <a:xfrm>
+            <a:off x="9256471" y="4119372"/>
+            <a:ext cx="100584" cy="100584"/>
+          </a:xfrm>
+          <a:prstGeom prst="ellipse">
+            <a:avLst/>
+          </a:prstGeom>
+          <a:solidFill>
+            <a:srgbClr val="9A5B12"/>
+          </a:solidFill>
+          <a:ln/>
+        </p:spPr>
+      </p:sp>
+      <p:sp>
+        <p:nvSpPr>
+          <p:cNvPr id="23" name="Text 20"/>
+          <p:cNvSpPr/>
+          <p:nvPr/>
+        </p:nvSpPr>
+        <p:spPr>
+          <a:xfrm>
+            <a:off x="566928" y="4325112"/>
+            <a:ext cx="1554480" cy="237744"/>
+          </a:xfrm>
+          <a:prstGeom prst="rect">
+            <a:avLst/>
+          </a:prstGeom>
+          <a:noFill/>
+          <a:ln/>
+        </p:spPr>
+        <p:txBody>
+          <a:bodyPr wrap="square" lIns="0" tIns="0" rIns="0" bIns="0" rtlCol="0" anchor="ctr"/>
+          <a:lstStyle/>
+          <a:p>
+            <a:pPr algn="r" indent="0" marL="0">
+              <a:buNone/>
+            </a:pPr>
+            <a:r>
+              <a:rPr lang="en-US" sz="1050" dirty="0">
+                <a:solidFill>
+                  <a:srgbClr val="111318"/>
+                </a:solidFill>
+                <a:latin typeface="Montserrat" pitchFamily="34" charset="0"/>
+                <a:ea typeface="Montserrat" pitchFamily="34" charset="-122"/>
+                <a:cs typeface="Montserrat" pitchFamily="34" charset="-120"/>
+              </a:rPr>
+              <a:t>Експоненційний</a:t>
+            </a:r>
+            <a:endParaRPr lang="en-US" sz="1050" dirty="0"/>
+          </a:p>
+        </p:txBody>
+      </p:sp>
+      <p:sp>
+        <p:nvSpPr>
+          <p:cNvPr id="24" name="Shape 21"/>
+          <p:cNvSpPr/>
+          <p:nvPr/>
+        </p:nvSpPr>
+        <p:spPr>
+          <a:xfrm>
+            <a:off x="2258568" y="4443984"/>
+            <a:ext cx="8595360" cy="0"/>
+          </a:xfrm>
+          <a:prstGeom prst="line">
+            <a:avLst/>
+          </a:prstGeom>
+          <a:noFill/>
+          <a:ln w="12700">
+            <a:solidFill>
+              <a:srgbClr val="E6E7EC"/>
+            </a:solidFill>
+            <a:prstDash val="solid"/>
+          </a:ln>
+        </p:spPr>
+      </p:sp>
+      <p:sp>
+        <p:nvSpPr>
+          <p:cNvPr id="25" name="Shape 22"/>
+          <p:cNvSpPr/>
+          <p:nvPr/>
+        </p:nvSpPr>
+        <p:spPr>
+          <a:xfrm>
+            <a:off x="2723998" y="4393692"/>
+            <a:ext cx="100584" cy="100584"/>
+          </a:xfrm>
+          <a:prstGeom prst="ellipse">
+            <a:avLst/>
+          </a:prstGeom>
+          <a:solidFill>
+            <a:srgbClr val="5A05F4"/>
+          </a:solidFill>
+          <a:ln/>
+        </p:spPr>
+      </p:sp>
+      <p:sp>
+        <p:nvSpPr>
+          <p:cNvPr id="26" name="Shape 23"/>
+          <p:cNvSpPr/>
+          <p:nvPr/>
+        </p:nvSpPr>
+        <p:spPr>
+          <a:xfrm>
+            <a:off x="3411626" y="4393692"/>
+            <a:ext cx="100584" cy="100584"/>
+          </a:xfrm>
+          <a:prstGeom prst="ellipse">
+            <a:avLst/>
+          </a:prstGeom>
+          <a:solidFill>
+            <a:srgbClr val="5A05F4"/>
+          </a:solidFill>
+          <a:ln/>
+        </p:spPr>
+      </p:sp>
+      <p:sp>
+        <p:nvSpPr>
+          <p:cNvPr id="27" name="Shape 24"/>
+          <p:cNvSpPr/>
+          <p:nvPr/>
+        </p:nvSpPr>
+        <p:spPr>
+          <a:xfrm>
+            <a:off x="4786884" y="4393692"/>
+            <a:ext cx="100584" cy="100584"/>
+          </a:xfrm>
+          <a:prstGeom prst="ellipse">
+            <a:avLst/>
+          </a:prstGeom>
+          <a:solidFill>
+            <a:srgbClr val="5A05F4"/>
+          </a:solidFill>
+          <a:ln/>
+        </p:spPr>
+      </p:sp>
+      <p:sp>
+        <p:nvSpPr>
+          <p:cNvPr id="28" name="Shape 25"/>
+          <p:cNvSpPr/>
+          <p:nvPr/>
+        </p:nvSpPr>
+        <p:spPr>
+          <a:xfrm>
+            <a:off x="7537399" y="4393692"/>
+            <a:ext cx="100584" cy="100584"/>
+          </a:xfrm>
+          <a:prstGeom prst="ellipse">
+            <a:avLst/>
+          </a:prstGeom>
+          <a:solidFill>
+            <a:srgbClr val="5A05F4"/>
+          </a:solidFill>
+          <a:ln/>
+        </p:spPr>
+      </p:sp>
+      <p:sp>
+        <p:nvSpPr>
+          <p:cNvPr id="29" name="Text 26"/>
+          <p:cNvSpPr/>
+          <p:nvPr/>
+        </p:nvSpPr>
+        <p:spPr>
+          <a:xfrm>
+            <a:off x="566928" y="4599432"/>
+            <a:ext cx="1554480" cy="237744"/>
+          </a:xfrm>
+          <a:prstGeom prst="rect">
+            <a:avLst/>
+          </a:prstGeom>
+          <a:noFill/>
+          <a:ln/>
+        </p:spPr>
+        <p:txBody>
+          <a:bodyPr wrap="square" lIns="0" tIns="0" rIns="0" bIns="0" rtlCol="0" anchor="ctr"/>
+          <a:lstStyle/>
+          <a:p>
+            <a:pPr algn="r" indent="0" marL="0">
+              <a:buNone/>
+            </a:pPr>
+            <a:r>
+              <a:rPr lang="en-US" sz="1050" dirty="0">
+                <a:solidFill>
+                  <a:srgbClr val="111318"/>
+                </a:solidFill>
+                <a:latin typeface="Montserrat" pitchFamily="34" charset="0"/>
+                <a:ea typeface="Montserrat" pitchFamily="34" charset="-122"/>
+                <a:cs typeface="Montserrat" pitchFamily="34" charset="-120"/>
+              </a:rPr>
+              <a:t>Jitter</a:t>
+            </a:r>
+            <a:endParaRPr lang="en-US" sz="1050" dirty="0"/>
+          </a:p>
+        </p:txBody>
+      </p:sp>
+      <p:sp>
+        <p:nvSpPr>
+          <p:cNvPr id="30" name="Shape 27"/>
+          <p:cNvSpPr/>
+          <p:nvPr/>
+        </p:nvSpPr>
+        <p:spPr>
+          <a:xfrm>
+            <a:off x="2258568" y="4718304"/>
+            <a:ext cx="8595360" cy="0"/>
+          </a:xfrm>
+          <a:prstGeom prst="line">
+            <a:avLst/>
+          </a:prstGeom>
+          <a:noFill/>
+          <a:ln w="12700">
+            <a:solidFill>
+              <a:srgbClr val="E6E7EC"/>
+            </a:solidFill>
+            <a:prstDash val="solid"/>
+          </a:ln>
+        </p:spPr>
+      </p:sp>
+      <p:sp>
+        <p:nvSpPr>
+          <p:cNvPr id="31" name="Shape 28"/>
+          <p:cNvSpPr/>
+          <p:nvPr/>
+        </p:nvSpPr>
+        <p:spPr>
+          <a:xfrm>
+            <a:off x="2981858" y="4668012"/>
+            <a:ext cx="100584" cy="100584"/>
+          </a:xfrm>
+          <a:prstGeom prst="ellipse">
+            <a:avLst/>
+          </a:prstGeom>
+          <a:solidFill>
+            <a:srgbClr val="1B8A5A"/>
+          </a:solidFill>
+          <a:ln/>
+        </p:spPr>
+      </p:sp>
+      <p:sp>
+        <p:nvSpPr>
+          <p:cNvPr id="32" name="Shape 29"/>
+          <p:cNvSpPr/>
+          <p:nvPr/>
+        </p:nvSpPr>
+        <p:spPr>
+          <a:xfrm>
+            <a:off x="3841394" y="4668012"/>
+            <a:ext cx="100584" cy="100584"/>
+          </a:xfrm>
+          <a:prstGeom prst="ellipse">
+            <a:avLst/>
+          </a:prstGeom>
+          <a:solidFill>
+            <a:srgbClr val="1B8A5A"/>
+          </a:solidFill>
+          <a:ln/>
+        </p:spPr>
+      </p:sp>
+      <p:sp>
+        <p:nvSpPr>
+          <p:cNvPr id="33" name="Shape 30"/>
+          <p:cNvSpPr/>
+          <p:nvPr/>
+        </p:nvSpPr>
+        <p:spPr>
+          <a:xfrm>
+            <a:off x="5388559" y="4668012"/>
+            <a:ext cx="100584" cy="100584"/>
+          </a:xfrm>
+          <a:prstGeom prst="ellipse">
+            <a:avLst/>
+          </a:prstGeom>
+          <a:solidFill>
+            <a:srgbClr val="1B8A5A"/>
+          </a:solidFill>
+          <a:ln/>
+        </p:spPr>
+      </p:sp>
+      <p:sp>
+        <p:nvSpPr>
+          <p:cNvPr id="34" name="Shape 31"/>
+          <p:cNvSpPr/>
+          <p:nvPr/>
+        </p:nvSpPr>
+        <p:spPr>
+          <a:xfrm>
+            <a:off x="6935724" y="4668012"/>
+            <a:ext cx="100584" cy="100584"/>
+          </a:xfrm>
+          <a:prstGeom prst="ellipse">
+            <a:avLst/>
+          </a:prstGeom>
+          <a:solidFill>
+            <a:srgbClr val="1B8A5A"/>
+          </a:solidFill>
+          <a:ln/>
+        </p:spPr>
+      </p:sp>
+      <p:sp>
+        <p:nvSpPr>
+          <p:cNvPr id="35" name="Shape 32"/>
+          <p:cNvSpPr/>
+          <p:nvPr/>
+        </p:nvSpPr>
+        <p:spPr>
+          <a:xfrm>
+            <a:off x="9772193" y="4668012"/>
+            <a:ext cx="100584" cy="100584"/>
+          </a:xfrm>
+          <a:prstGeom prst="ellipse">
+            <a:avLst/>
+          </a:prstGeom>
+          <a:solidFill>
+            <a:srgbClr val="1B8A5A"/>
+          </a:solidFill>
+          <a:ln/>
+        </p:spPr>
+      </p:sp>
+      <p:sp>
+        <p:nvSpPr>
+          <p:cNvPr id="36" name="Shape 33"/>
+          <p:cNvSpPr/>
+          <p:nvPr/>
+        </p:nvSpPr>
+        <p:spPr>
+          <a:xfrm>
+            <a:off x="566928" y="5029200"/>
+            <a:ext cx="11064240" cy="1051560"/>
           </a:xfrm>
           <a:prstGeom prst="roundRect">
             <a:avLst>
-              <a:gd name="adj" fmla="val 9231"/>
+              <a:gd name="adj" fmla="val 10435"/>
             </a:avLst>
           </a:prstGeom>
           <a:solidFill>
@@ -23908,13 +24374,13 @@
       </p:sp>
       <p:sp>
         <p:nvSpPr>
-          <p:cNvPr id="17" name="Text 14"/>
-          <p:cNvSpPr/>
-          <p:nvPr/>
-        </p:nvSpPr>
-        <p:spPr>
-          <a:xfrm>
-            <a:off x="786384" y="4791456"/>
+          <p:cNvPr id="37" name="Text 34"/>
+          <p:cNvSpPr/>
+          <p:nvPr/>
+        </p:nvSpPr>
+        <p:spPr>
+          <a:xfrm>
+            <a:off x="786384" y="5157216"/>
             <a:ext cx="10625328" cy="219456"/>
           </a:xfrm>
           <a:prstGeom prst="rect">
@@ -23947,14 +24413,14 @@
       </p:sp>
       <p:sp>
         <p:nvSpPr>
-          <p:cNvPr id="18" name="Text 15"/>
-          <p:cNvSpPr/>
-          <p:nvPr/>
-        </p:nvSpPr>
-        <p:spPr>
-          <a:xfrm>
-            <a:off x="786384" y="5047488"/>
-            <a:ext cx="10625328" cy="676656"/>
+          <p:cNvPr id="38" name="Text 35"/>
+          <p:cNvSpPr/>
+          <p:nvPr/>
+        </p:nvSpPr>
+        <p:spPr>
+          <a:xfrm>
+            <a:off x="786384" y="5413248"/>
+            <a:ext cx="10625328" cy="539496"/>
           </a:xfrm>
           <a:prstGeom prst="rect">
             <a:avLst/>

--- a/docs/decks/L07.pptx
+++ b/docs/decks/L07.pptx
@@ -2714,7 +2714,7 @@
         </p:nvSpPr>
         <p:spPr>
           <a:xfrm>
-            <a:off x="11368735" y="6437376"/>
+            <a:off x="11368735" y="6327648"/>
             <a:ext cx="365760" cy="274320"/>
           </a:xfrm>
           <a:prstGeom prst="rect">
@@ -2750,6 +2750,62 @@
           </a:p>
         </p:txBody>
       </p:sp>
+    </p:spTree>
+  </p:cSld>
+  <p:clrMapOvr>
+    <a:masterClrMapping/>
+  </p:clrMapOvr>
+</p:sldLayout>
+</file>
+
+<file path=ppt/slideLayouts/slideLayout2.xml><?xml version="1.0" encoding="utf-8"?>
+<p:sldLayout xmlns:a="http://schemas.openxmlformats.org/drawingml/2006/main" xmlns:r="http://schemas.openxmlformats.org/officeDocument/2006/relationships" xmlns:p="http://schemas.openxmlformats.org/presentationml/2006/main" preserve="1">
+  <p:cSld name="NEO">
+    <p:bg>
+      <p:bgPr>
+        <a:solidFill>
+          <a:srgbClr val="000000"/>
+        </a:solidFill>
+      </p:bgPr>
+    </p:bg>
+    <p:spTree>
+      <p:nvGrpSpPr>
+        <p:cNvPr id="1" name=""/>
+        <p:cNvGrpSpPr/>
+        <p:nvPr/>
+      </p:nvGrpSpPr>
+      <p:grpSpPr>
+        <a:xfrm>
+          <a:off x="0" y="0"/>
+          <a:ext cx="0" cy="0"/>
+          <a:chOff x="0" y="0"/>
+          <a:chExt cx="0" cy="0"/>
+        </a:xfrm>
+      </p:grpSpPr>
+      <p:pic>
+        <p:nvPicPr>
+          <p:cNvPr id="2" name="Image 0" descr="preencoded.png">    </p:cNvPr>
+          <p:cNvPicPr>
+            <a:picLocks noChangeAspect="1"/>
+          </p:cNvPicPr>
+          <p:nvPr/>
+        </p:nvPicPr>
+        <p:blipFill>
+          <a:blip r:embed="rId1"/>
+          <a:stretch>
+            <a:fillRect/>
+          </a:stretch>
+        </p:blipFill>
+        <p:spPr>
+          <a:xfrm>
+            <a:off x="0" y="0"/>
+            <a:ext cx="12191695" cy="6858000"/>
+          </a:xfrm>
+          <a:prstGeom prst="rect">
+            <a:avLst/>
+          </a:prstGeom>
+        </p:spPr>
+      </p:pic>
     </p:spTree>
   </p:cSld>
   <p:clrMapOvr>
@@ -2787,7 +2843,7 @@
         </p:nvSpPr>
         <p:spPr>
           <a:xfrm>
-            <a:off x="11368735" y="6437376"/>
+            <a:off x="11368735" y="6327648"/>
             <a:ext cx="365760" cy="274320"/>
           </a:xfrm>
           <a:prstGeom prst="rect">
@@ -2828,6 +2884,7 @@
   <p:clrMap bg1="lt1" tx1="dk1" bg2="lt2" tx2="dk2" accent1="accent1" accent2="accent2" accent3="accent3" accent4="accent4" accent5="accent5" accent6="accent6" hlink="hlink" folHlink="folHlink"/>
   <p:sldLayoutIdLst>
     <p:sldLayoutId id="2147483649" r:id="rId1"/>
+    <p:sldLayoutId id="2147483650" r:id="rId2"/>
   </p:sldLayoutIdLst>
   <p:hf sldNum="0" hdr="0" ftr="0" dt="0"/>
   <p:txStyles>
@@ -3086,13 +3143,6 @@
 <file path=ppt/slides/slide1.xml><?xml version="1.0" encoding="utf-8"?>
 <p:sld xmlns:a="http://schemas.openxmlformats.org/drawingml/2006/main" xmlns:r="http://schemas.openxmlformats.org/officeDocument/2006/relationships" xmlns:p="http://schemas.openxmlformats.org/presentationml/2006/main">
   <p:cSld name="Slide 1">
-    <p:bg>
-      <p:bgPr>
-        <a:solidFill>
-          <a:srgbClr val="1B0942"/>
-        </a:solidFill>
-      </p:bgPr>
-    </p:bg>
     <p:spTree>
       <p:nvGrpSpPr>
         <p:cNvPr id="1" name=""/>
@@ -3764,13 +3814,6 @@
 <file path=ppt/slides/slide10.xml><?xml version="1.0" encoding="utf-8"?>
 <p:sld xmlns:a="http://schemas.openxmlformats.org/drawingml/2006/main" xmlns:r="http://schemas.openxmlformats.org/officeDocument/2006/relationships" xmlns:p="http://schemas.openxmlformats.org/presentationml/2006/main">
   <p:cSld name="Slide 10">
-    <p:bg>
-      <p:bgPr>
-        <a:solidFill>
-          <a:srgbClr val="FFFFFF"/>
-        </a:solidFill>
-      </p:bgPr>
-    </p:bg>
     <p:spTree>
       <p:nvGrpSpPr>
         <p:cNvPr id="1" name=""/>
@@ -3787,7 +3830,29 @@
       </p:grpSpPr>
       <p:sp>
         <p:nvSpPr>
-          <p:cNvPr id="2" name="Text 0"/>
+          <p:cNvPr id="2" name="Shape 0"/>
+          <p:cNvSpPr/>
+          <p:nvPr/>
+        </p:nvSpPr>
+        <p:spPr>
+          <a:xfrm>
+            <a:off x="231343" y="194767"/>
+            <a:ext cx="11716207" cy="6473952"/>
+          </a:xfrm>
+          <a:prstGeom prst="roundRect">
+            <a:avLst>
+              <a:gd name="adj" fmla="val 3107"/>
+            </a:avLst>
+          </a:prstGeom>
+          <a:solidFill>
+            <a:srgbClr val="FFFFFF"/>
+          </a:solidFill>
+          <a:ln/>
+        </p:spPr>
+      </p:sp>
+      <p:sp>
+        <p:nvSpPr>
+          <p:cNvPr id="3" name="Text 1"/>
           <p:cNvSpPr/>
           <p:nvPr/>
         </p:nvSpPr>
@@ -3826,7 +3891,7 @@
       </p:sp>
       <p:sp>
         <p:nvSpPr>
-          <p:cNvPr id="3" name="Text 1"/>
+          <p:cNvPr id="4" name="Text 2"/>
           <p:cNvSpPr/>
           <p:nvPr/>
         </p:nvSpPr>
@@ -3865,7 +3930,7 @@
       </p:sp>
       <p:sp>
         <p:nvSpPr>
-          <p:cNvPr id="4" name="Shape 2"/>
+          <p:cNvPr id="5" name="Shape 3"/>
           <p:cNvSpPr/>
           <p:nvPr/>
         </p:nvSpPr>
@@ -3887,7 +3952,7 @@
       </p:sp>
       <p:sp>
         <p:nvSpPr>
-          <p:cNvPr id="5" name="Text 3"/>
+          <p:cNvPr id="6" name="Text 4"/>
           <p:cNvSpPr/>
           <p:nvPr/>
         </p:nvSpPr>
@@ -3926,7 +3991,7 @@
       </p:sp>
       <p:pic>
         <p:nvPicPr>
-          <p:cNvPr id="6" name="Image 0" descr="preencoded.png">    </p:cNvPr>
+          <p:cNvPr id="7" name="Image 0" descr="preencoded.png">    </p:cNvPr>
           <p:cNvPicPr>
             <a:picLocks noChangeAspect="1"/>
           </p:cNvPicPr>
@@ -3940,7 +4005,7 @@
         </p:blipFill>
         <p:spPr>
           <a:xfrm>
-            <a:off x="566928" y="6254496"/>
+            <a:off x="566928" y="6126480"/>
             <a:ext cx="1481328" cy="457200"/>
           </a:xfrm>
           <a:prstGeom prst="rect">
@@ -5011,7 +5076,7 @@
       </p:graphicFrame>
       <p:sp>
         <p:nvSpPr>
-          <p:cNvPr id="8" name="Shape 4"/>
+          <p:cNvPr id="9" name="Shape 5"/>
           <p:cNvSpPr/>
           <p:nvPr/>
         </p:nvSpPr>
@@ -5033,7 +5098,7 @@
       </p:sp>
       <p:sp>
         <p:nvSpPr>
-          <p:cNvPr id="9" name="Text 5"/>
+          <p:cNvPr id="10" name="Text 6"/>
           <p:cNvSpPr/>
           <p:nvPr/>
         </p:nvSpPr>
@@ -5072,7 +5137,7 @@
       </p:sp>
       <p:sp>
         <p:nvSpPr>
-          <p:cNvPr id="10" name="Text 6"/>
+          <p:cNvPr id="11" name="Text 7"/>
           <p:cNvSpPr/>
           <p:nvPr/>
         </p:nvSpPr>
@@ -5124,7 +5189,7 @@
         </p:nvSpPr>
         <p:spPr>
           <a:xfrm>
-            <a:off x="11368735" y="6437376"/>
+            <a:off x="11368735" y="6327648"/>
             <a:ext cx="365760" cy="274320"/>
           </a:xfrm>
           <a:prstGeom prst="rect">
@@ -5171,13 +5236,6 @@
 <file path=ppt/slides/slide11.xml><?xml version="1.0" encoding="utf-8"?>
 <p:sld xmlns:a="http://schemas.openxmlformats.org/drawingml/2006/main" xmlns:r="http://schemas.openxmlformats.org/officeDocument/2006/relationships" xmlns:p="http://schemas.openxmlformats.org/presentationml/2006/main">
   <p:cSld name="Slide 11">
-    <p:bg>
-      <p:bgPr>
-        <a:solidFill>
-          <a:srgbClr val="FFFFFF"/>
-        </a:solidFill>
-      </p:bgPr>
-    </p:bg>
     <p:spTree>
       <p:nvGrpSpPr>
         <p:cNvPr id="1" name=""/>
@@ -5194,7 +5252,29 @@
       </p:grpSpPr>
       <p:sp>
         <p:nvSpPr>
-          <p:cNvPr id="2" name="Text 0"/>
+          <p:cNvPr id="2" name="Shape 0"/>
+          <p:cNvSpPr/>
+          <p:nvPr/>
+        </p:nvSpPr>
+        <p:spPr>
+          <a:xfrm>
+            <a:off x="231343" y="194767"/>
+            <a:ext cx="11716207" cy="6473952"/>
+          </a:xfrm>
+          <a:prstGeom prst="roundRect">
+            <a:avLst>
+              <a:gd name="adj" fmla="val 3107"/>
+            </a:avLst>
+          </a:prstGeom>
+          <a:solidFill>
+            <a:srgbClr val="FFFFFF"/>
+          </a:solidFill>
+          <a:ln/>
+        </p:spPr>
+      </p:sp>
+      <p:sp>
+        <p:nvSpPr>
+          <p:cNvPr id="3" name="Text 1"/>
           <p:cNvSpPr/>
           <p:nvPr/>
         </p:nvSpPr>
@@ -5233,7 +5313,7 @@
       </p:sp>
       <p:sp>
         <p:nvSpPr>
-          <p:cNvPr id="3" name="Text 1"/>
+          <p:cNvPr id="4" name="Text 2"/>
           <p:cNvSpPr/>
           <p:nvPr/>
         </p:nvSpPr>
@@ -5272,7 +5352,7 @@
       </p:sp>
       <p:sp>
         <p:nvSpPr>
-          <p:cNvPr id="4" name="Shape 2"/>
+          <p:cNvPr id="5" name="Shape 3"/>
           <p:cNvSpPr/>
           <p:nvPr/>
         </p:nvSpPr>
@@ -5294,7 +5374,7 @@
       </p:sp>
       <p:sp>
         <p:nvSpPr>
-          <p:cNvPr id="5" name="Text 3"/>
+          <p:cNvPr id="6" name="Text 4"/>
           <p:cNvSpPr/>
           <p:nvPr/>
         </p:nvSpPr>
@@ -5333,7 +5413,7 @@
       </p:sp>
       <p:pic>
         <p:nvPicPr>
-          <p:cNvPr id="6" name="Image 0" descr="preencoded.png">    </p:cNvPr>
+          <p:cNvPr id="7" name="Image 0" descr="preencoded.png">    </p:cNvPr>
           <p:cNvPicPr>
             <a:picLocks noChangeAspect="1"/>
           </p:cNvPicPr>
@@ -5347,7 +5427,7 @@
         </p:blipFill>
         <p:spPr>
           <a:xfrm>
-            <a:off x="566928" y="6254496"/>
+            <a:off x="566928" y="6126480"/>
             <a:ext cx="1481328" cy="457200"/>
           </a:xfrm>
           <a:prstGeom prst="rect">
@@ -5357,7 +5437,7 @@
       </p:pic>
       <p:sp>
         <p:nvSpPr>
-          <p:cNvPr id="7" name="Shape 4"/>
+          <p:cNvPr id="8" name="Shape 5"/>
           <p:cNvSpPr/>
           <p:nvPr/>
         </p:nvSpPr>
@@ -5379,7 +5459,7 @@
       </p:sp>
       <p:sp>
         <p:nvSpPr>
-          <p:cNvPr id="8" name="Text 5"/>
+          <p:cNvPr id="9" name="Text 6"/>
           <p:cNvSpPr/>
           <p:nvPr/>
         </p:nvSpPr>
@@ -5418,7 +5498,7 @@
       </p:sp>
       <p:sp>
         <p:nvSpPr>
-          <p:cNvPr id="9" name="Shape 6"/>
+          <p:cNvPr id="10" name="Shape 7"/>
           <p:cNvSpPr/>
           <p:nvPr/>
         </p:nvSpPr>
@@ -5441,7 +5521,7 @@
       </p:sp>
       <p:sp>
         <p:nvSpPr>
-          <p:cNvPr id="10" name="Shape 7"/>
+          <p:cNvPr id="11" name="Shape 8"/>
           <p:cNvSpPr/>
           <p:nvPr/>
         </p:nvSpPr>
@@ -5461,7 +5541,7 @@
       </p:sp>
       <p:sp>
         <p:nvSpPr>
-          <p:cNvPr id="11" name="Shape 8"/>
+          <p:cNvPr id="12" name="Shape 9"/>
           <p:cNvSpPr/>
           <p:nvPr/>
         </p:nvSpPr>
@@ -5483,7 +5563,7 @@
       </p:sp>
       <p:sp>
         <p:nvSpPr>
-          <p:cNvPr id="12" name="Text 9"/>
+          <p:cNvPr id="13" name="Text 10"/>
           <p:cNvSpPr/>
           <p:nvPr/>
         </p:nvSpPr>
@@ -5522,7 +5602,7 @@
       </p:sp>
       <p:sp>
         <p:nvSpPr>
-          <p:cNvPr id="13" name="Shape 10"/>
+          <p:cNvPr id="14" name="Shape 11"/>
           <p:cNvSpPr/>
           <p:nvPr/>
         </p:nvSpPr>
@@ -5545,7 +5625,7 @@
       </p:sp>
       <p:sp>
         <p:nvSpPr>
-          <p:cNvPr id="14" name="Shape 11"/>
+          <p:cNvPr id="15" name="Shape 12"/>
           <p:cNvSpPr/>
           <p:nvPr/>
         </p:nvSpPr>
@@ -5565,7 +5645,7 @@
       </p:sp>
       <p:sp>
         <p:nvSpPr>
-          <p:cNvPr id="15" name="Shape 12"/>
+          <p:cNvPr id="16" name="Shape 13"/>
           <p:cNvSpPr/>
           <p:nvPr/>
         </p:nvSpPr>
@@ -5587,7 +5667,7 @@
       </p:sp>
       <p:sp>
         <p:nvSpPr>
-          <p:cNvPr id="16" name="Text 13"/>
+          <p:cNvPr id="17" name="Text 14"/>
           <p:cNvSpPr/>
           <p:nvPr/>
         </p:nvSpPr>
@@ -5626,7 +5706,7 @@
       </p:sp>
       <p:sp>
         <p:nvSpPr>
-          <p:cNvPr id="17" name="Shape 14"/>
+          <p:cNvPr id="18" name="Shape 15"/>
           <p:cNvSpPr/>
           <p:nvPr/>
         </p:nvSpPr>
@@ -5649,7 +5729,7 @@
       </p:sp>
       <p:sp>
         <p:nvSpPr>
-          <p:cNvPr id="18" name="Shape 15"/>
+          <p:cNvPr id="19" name="Shape 16"/>
           <p:cNvSpPr/>
           <p:nvPr/>
         </p:nvSpPr>
@@ -5669,7 +5749,7 @@
       </p:sp>
       <p:sp>
         <p:nvSpPr>
-          <p:cNvPr id="19" name="Shape 16"/>
+          <p:cNvPr id="20" name="Shape 17"/>
           <p:cNvSpPr/>
           <p:nvPr/>
         </p:nvSpPr>
@@ -5691,7 +5771,7 @@
       </p:sp>
       <p:sp>
         <p:nvSpPr>
-          <p:cNvPr id="20" name="Text 17"/>
+          <p:cNvPr id="21" name="Text 18"/>
           <p:cNvSpPr/>
           <p:nvPr/>
         </p:nvSpPr>
@@ -5730,7 +5810,7 @@
       </p:sp>
       <p:sp>
         <p:nvSpPr>
-          <p:cNvPr id="21" name="Shape 18"/>
+          <p:cNvPr id="22" name="Shape 19"/>
           <p:cNvSpPr/>
           <p:nvPr/>
         </p:nvSpPr>
@@ -5752,7 +5832,7 @@
       </p:sp>
       <p:sp>
         <p:nvSpPr>
-          <p:cNvPr id="22" name="Shape 19"/>
+          <p:cNvPr id="23" name="Shape 20"/>
           <p:cNvSpPr/>
           <p:nvPr/>
         </p:nvSpPr>
@@ -5772,7 +5852,7 @@
       </p:sp>
       <p:sp>
         <p:nvSpPr>
-          <p:cNvPr id="23" name="Text 20"/>
+          <p:cNvPr id="24" name="Text 21"/>
           <p:cNvSpPr/>
           <p:nvPr/>
         </p:nvSpPr>
@@ -5811,7 +5891,7 @@
       </p:sp>
       <p:sp>
         <p:nvSpPr>
-          <p:cNvPr id="24" name="Text 21"/>
+          <p:cNvPr id="25" name="Text 22"/>
           <p:cNvSpPr/>
           <p:nvPr/>
         </p:nvSpPr>
@@ -5850,7 +5930,7 @@
       </p:sp>
       <p:sp>
         <p:nvSpPr>
-          <p:cNvPr id="25" name="Text 22"/>
+          <p:cNvPr id="26" name="Text 23"/>
           <p:cNvSpPr/>
           <p:nvPr/>
         </p:nvSpPr>
@@ -5892,7 +5972,7 @@
       </p:sp>
       <p:sp>
         <p:nvSpPr>
-          <p:cNvPr id="26" name="Shape 23"/>
+          <p:cNvPr id="27" name="Shape 24"/>
           <p:cNvSpPr/>
           <p:nvPr/>
         </p:nvSpPr>
@@ -5914,7 +5994,7 @@
       </p:sp>
       <p:sp>
         <p:nvSpPr>
-          <p:cNvPr id="27" name="Shape 24"/>
+          <p:cNvPr id="28" name="Shape 25"/>
           <p:cNvSpPr/>
           <p:nvPr/>
         </p:nvSpPr>
@@ -5934,7 +6014,7 @@
       </p:sp>
       <p:sp>
         <p:nvSpPr>
-          <p:cNvPr id="28" name="Text 25"/>
+          <p:cNvPr id="29" name="Text 26"/>
           <p:cNvSpPr/>
           <p:nvPr/>
         </p:nvSpPr>
@@ -5973,7 +6053,7 @@
       </p:sp>
       <p:sp>
         <p:nvSpPr>
-          <p:cNvPr id="29" name="Text 26"/>
+          <p:cNvPr id="30" name="Text 27"/>
           <p:cNvSpPr/>
           <p:nvPr/>
         </p:nvSpPr>
@@ -6012,7 +6092,7 @@
       </p:sp>
       <p:sp>
         <p:nvSpPr>
-          <p:cNvPr id="30" name="Text 27"/>
+          <p:cNvPr id="31" name="Text 28"/>
           <p:cNvSpPr/>
           <p:nvPr/>
         </p:nvSpPr>
@@ -6054,7 +6134,7 @@
       </p:sp>
       <p:sp>
         <p:nvSpPr>
-          <p:cNvPr id="31" name="Shape 28"/>
+          <p:cNvPr id="32" name="Shape 29"/>
           <p:cNvSpPr/>
           <p:nvPr/>
         </p:nvSpPr>
@@ -6076,7 +6156,7 @@
       </p:sp>
       <p:sp>
         <p:nvSpPr>
-          <p:cNvPr id="32" name="Shape 29"/>
+          <p:cNvPr id="33" name="Shape 30"/>
           <p:cNvSpPr/>
           <p:nvPr/>
         </p:nvSpPr>
@@ -6096,7 +6176,7 @@
       </p:sp>
       <p:sp>
         <p:nvSpPr>
-          <p:cNvPr id="33" name="Text 30"/>
+          <p:cNvPr id="34" name="Text 31"/>
           <p:cNvSpPr/>
           <p:nvPr/>
         </p:nvSpPr>
@@ -6135,7 +6215,7 @@
       </p:sp>
       <p:sp>
         <p:nvSpPr>
-          <p:cNvPr id="34" name="Text 31"/>
+          <p:cNvPr id="35" name="Text 32"/>
           <p:cNvSpPr/>
           <p:nvPr/>
         </p:nvSpPr>
@@ -6174,7 +6254,7 @@
       </p:sp>
       <p:sp>
         <p:nvSpPr>
-          <p:cNvPr id="35" name="Text 32"/>
+          <p:cNvPr id="36" name="Text 33"/>
           <p:cNvSpPr/>
           <p:nvPr/>
         </p:nvSpPr>
@@ -6216,7 +6296,7 @@
       </p:sp>
       <p:sp>
         <p:nvSpPr>
-          <p:cNvPr id="36" name="Shape 33"/>
+          <p:cNvPr id="37" name="Shape 34"/>
           <p:cNvSpPr/>
           <p:nvPr/>
         </p:nvSpPr>
@@ -6238,7 +6318,7 @@
       </p:sp>
       <p:sp>
         <p:nvSpPr>
-          <p:cNvPr id="37" name="Text 34"/>
+          <p:cNvPr id="38" name="Text 35"/>
           <p:cNvSpPr/>
           <p:nvPr/>
         </p:nvSpPr>
@@ -6277,7 +6357,7 @@
       </p:sp>
       <p:sp>
         <p:nvSpPr>
-          <p:cNvPr id="38" name="Text 35"/>
+          <p:cNvPr id="39" name="Text 36"/>
           <p:cNvSpPr/>
           <p:nvPr/>
         </p:nvSpPr>
@@ -6329,7 +6409,7 @@
         </p:nvSpPr>
         <p:spPr>
           <a:xfrm>
-            <a:off x="11368735" y="6437376"/>
+            <a:off x="11368735" y="6327648"/>
             <a:ext cx="365760" cy="274320"/>
           </a:xfrm>
           <a:prstGeom prst="rect">
@@ -6376,13 +6456,6 @@
 <file path=ppt/slides/slide12.xml><?xml version="1.0" encoding="utf-8"?>
 <p:sld xmlns:a="http://schemas.openxmlformats.org/drawingml/2006/main" xmlns:r="http://schemas.openxmlformats.org/officeDocument/2006/relationships" xmlns:p="http://schemas.openxmlformats.org/presentationml/2006/main">
   <p:cSld name="Slide 12">
-    <p:bg>
-      <p:bgPr>
-        <a:solidFill>
-          <a:srgbClr val="FFFFFF"/>
-        </a:solidFill>
-      </p:bgPr>
-    </p:bg>
     <p:spTree>
       <p:nvGrpSpPr>
         <p:cNvPr id="1" name=""/>
@@ -6399,7 +6472,29 @@
       </p:grpSpPr>
       <p:sp>
         <p:nvSpPr>
-          <p:cNvPr id="2" name="Text 0"/>
+          <p:cNvPr id="2" name="Shape 0"/>
+          <p:cNvSpPr/>
+          <p:nvPr/>
+        </p:nvSpPr>
+        <p:spPr>
+          <a:xfrm>
+            <a:off x="231343" y="194767"/>
+            <a:ext cx="11716207" cy="6473952"/>
+          </a:xfrm>
+          <a:prstGeom prst="roundRect">
+            <a:avLst>
+              <a:gd name="adj" fmla="val 3107"/>
+            </a:avLst>
+          </a:prstGeom>
+          <a:solidFill>
+            <a:srgbClr val="FFFFFF"/>
+          </a:solidFill>
+          <a:ln/>
+        </p:spPr>
+      </p:sp>
+      <p:sp>
+        <p:nvSpPr>
+          <p:cNvPr id="3" name="Text 1"/>
           <p:cNvSpPr/>
           <p:nvPr/>
         </p:nvSpPr>
@@ -6438,7 +6533,7 @@
       </p:sp>
       <p:sp>
         <p:nvSpPr>
-          <p:cNvPr id="3" name="Text 1"/>
+          <p:cNvPr id="4" name="Text 2"/>
           <p:cNvSpPr/>
           <p:nvPr/>
         </p:nvSpPr>
@@ -6477,7 +6572,7 @@
       </p:sp>
       <p:sp>
         <p:nvSpPr>
-          <p:cNvPr id="4" name="Shape 2"/>
+          <p:cNvPr id="5" name="Shape 3"/>
           <p:cNvSpPr/>
           <p:nvPr/>
         </p:nvSpPr>
@@ -6499,7 +6594,7 @@
       </p:sp>
       <p:sp>
         <p:nvSpPr>
-          <p:cNvPr id="5" name="Text 3"/>
+          <p:cNvPr id="6" name="Text 4"/>
           <p:cNvSpPr/>
           <p:nvPr/>
         </p:nvSpPr>
@@ -6538,7 +6633,7 @@
       </p:sp>
       <p:pic>
         <p:nvPicPr>
-          <p:cNvPr id="6" name="Image 0" descr="preencoded.png">    </p:cNvPr>
+          <p:cNvPr id="7" name="Image 0" descr="preencoded.png">    </p:cNvPr>
           <p:cNvPicPr>
             <a:picLocks noChangeAspect="1"/>
           </p:cNvPicPr>
@@ -6552,7 +6647,7 @@
         </p:blipFill>
         <p:spPr>
           <a:xfrm>
-            <a:off x="566928" y="6254496"/>
+            <a:off x="566928" y="6126480"/>
             <a:ext cx="1481328" cy="457200"/>
           </a:xfrm>
           <a:prstGeom prst="rect">
@@ -7829,7 +7924,7 @@
       </p:graphicFrame>
       <p:sp>
         <p:nvSpPr>
-          <p:cNvPr id="8" name="Shape 4"/>
+          <p:cNvPr id="9" name="Shape 5"/>
           <p:cNvSpPr/>
           <p:nvPr/>
         </p:nvSpPr>
@@ -7851,7 +7946,7 @@
       </p:sp>
       <p:sp>
         <p:nvSpPr>
-          <p:cNvPr id="9" name="Text 5"/>
+          <p:cNvPr id="10" name="Text 6"/>
           <p:cNvSpPr/>
           <p:nvPr/>
         </p:nvSpPr>
@@ -7903,7 +7998,7 @@
         </p:nvSpPr>
         <p:spPr>
           <a:xfrm>
-            <a:off x="11368735" y="6437376"/>
+            <a:off x="11368735" y="6327648"/>
             <a:ext cx="365760" cy="274320"/>
           </a:xfrm>
           <a:prstGeom prst="rect">
@@ -7950,13 +8045,6 @@
 <file path=ppt/slides/slide13.xml><?xml version="1.0" encoding="utf-8"?>
 <p:sld xmlns:a="http://schemas.openxmlformats.org/drawingml/2006/main" xmlns:r="http://schemas.openxmlformats.org/officeDocument/2006/relationships" xmlns:p="http://schemas.openxmlformats.org/presentationml/2006/main">
   <p:cSld name="Slide 13">
-    <p:bg>
-      <p:bgPr>
-        <a:solidFill>
-          <a:srgbClr val="FFFFFF"/>
-        </a:solidFill>
-      </p:bgPr>
-    </p:bg>
     <p:spTree>
       <p:nvGrpSpPr>
         <p:cNvPr id="1" name=""/>
@@ -7973,7 +8061,29 @@
       </p:grpSpPr>
       <p:sp>
         <p:nvSpPr>
-          <p:cNvPr id="2" name="Text 0"/>
+          <p:cNvPr id="2" name="Shape 0"/>
+          <p:cNvSpPr/>
+          <p:nvPr/>
+        </p:nvSpPr>
+        <p:spPr>
+          <a:xfrm>
+            <a:off x="231343" y="194767"/>
+            <a:ext cx="11716207" cy="6473952"/>
+          </a:xfrm>
+          <a:prstGeom prst="roundRect">
+            <a:avLst>
+              <a:gd name="adj" fmla="val 3107"/>
+            </a:avLst>
+          </a:prstGeom>
+          <a:solidFill>
+            <a:srgbClr val="FFFFFF"/>
+          </a:solidFill>
+          <a:ln/>
+        </p:spPr>
+      </p:sp>
+      <p:sp>
+        <p:nvSpPr>
+          <p:cNvPr id="3" name="Text 1"/>
           <p:cNvSpPr/>
           <p:nvPr/>
         </p:nvSpPr>
@@ -8012,7 +8122,7 @@
       </p:sp>
       <p:sp>
         <p:nvSpPr>
-          <p:cNvPr id="3" name="Text 1"/>
+          <p:cNvPr id="4" name="Text 2"/>
           <p:cNvSpPr/>
           <p:nvPr/>
         </p:nvSpPr>
@@ -8051,7 +8161,7 @@
       </p:sp>
       <p:sp>
         <p:nvSpPr>
-          <p:cNvPr id="4" name="Shape 2"/>
+          <p:cNvPr id="5" name="Shape 3"/>
           <p:cNvSpPr/>
           <p:nvPr/>
         </p:nvSpPr>
@@ -8073,7 +8183,7 @@
       </p:sp>
       <p:sp>
         <p:nvSpPr>
-          <p:cNvPr id="5" name="Text 3"/>
+          <p:cNvPr id="6" name="Text 4"/>
           <p:cNvSpPr/>
           <p:nvPr/>
         </p:nvSpPr>
@@ -8112,7 +8222,7 @@
       </p:sp>
       <p:pic>
         <p:nvPicPr>
-          <p:cNvPr id="6" name="Image 0" descr="preencoded.png">    </p:cNvPr>
+          <p:cNvPr id="7" name="Image 0" descr="preencoded.png">    </p:cNvPr>
           <p:cNvPicPr>
             <a:picLocks noChangeAspect="1"/>
           </p:cNvPicPr>
@@ -8126,7 +8236,7 @@
         </p:blipFill>
         <p:spPr>
           <a:xfrm>
-            <a:off x="566928" y="6254496"/>
+            <a:off x="566928" y="6126480"/>
             <a:ext cx="1481328" cy="457200"/>
           </a:xfrm>
           <a:prstGeom prst="rect">
@@ -8136,7 +8246,7 @@
       </p:pic>
       <p:sp>
         <p:nvSpPr>
-          <p:cNvPr id="7" name="Shape 4"/>
+          <p:cNvPr id="8" name="Shape 5"/>
           <p:cNvSpPr/>
           <p:nvPr/>
         </p:nvSpPr>
@@ -8163,7 +8273,7 @@
       </p:sp>
       <p:sp>
         <p:nvSpPr>
-          <p:cNvPr id="8" name="Text 5"/>
+          <p:cNvPr id="9" name="Text 6"/>
           <p:cNvSpPr/>
           <p:nvPr/>
         </p:nvSpPr>
@@ -8285,7 +8395,7 @@
       </p:sp>
       <p:sp>
         <p:nvSpPr>
-          <p:cNvPr id="9" name="Shape 6"/>
+          <p:cNvPr id="10" name="Shape 7"/>
           <p:cNvSpPr/>
           <p:nvPr/>
         </p:nvSpPr>
@@ -8307,7 +8417,7 @@
       </p:sp>
       <p:sp>
         <p:nvSpPr>
-          <p:cNvPr id="10" name="Text 7"/>
+          <p:cNvPr id="11" name="Text 8"/>
           <p:cNvSpPr/>
           <p:nvPr/>
         </p:nvSpPr>
@@ -8346,7 +8456,7 @@
       </p:sp>
       <p:sp>
         <p:nvSpPr>
-          <p:cNvPr id="11" name="Text 8"/>
+          <p:cNvPr id="12" name="Text 9"/>
           <p:cNvSpPr/>
           <p:nvPr/>
         </p:nvSpPr>
@@ -8388,7 +8498,7 @@
       </p:sp>
       <p:sp>
         <p:nvSpPr>
-          <p:cNvPr id="12" name="Shape 9"/>
+          <p:cNvPr id="13" name="Shape 10"/>
           <p:cNvSpPr/>
           <p:nvPr/>
         </p:nvSpPr>
@@ -8410,7 +8520,7 @@
       </p:sp>
       <p:sp>
         <p:nvSpPr>
-          <p:cNvPr id="13" name="Text 10"/>
+          <p:cNvPr id="14" name="Text 11"/>
           <p:cNvSpPr/>
           <p:nvPr/>
         </p:nvSpPr>
@@ -8449,7 +8559,7 @@
       </p:sp>
       <p:sp>
         <p:nvSpPr>
-          <p:cNvPr id="14" name="Text 11"/>
+          <p:cNvPr id="15" name="Text 12"/>
           <p:cNvSpPr/>
           <p:nvPr/>
         </p:nvSpPr>
@@ -8491,7 +8601,7 @@
       </p:sp>
       <p:sp>
         <p:nvSpPr>
-          <p:cNvPr id="15" name="Shape 12"/>
+          <p:cNvPr id="16" name="Shape 13"/>
           <p:cNvSpPr/>
           <p:nvPr/>
         </p:nvSpPr>
@@ -8513,7 +8623,7 @@
       </p:sp>
       <p:sp>
         <p:nvSpPr>
-          <p:cNvPr id="16" name="Text 13"/>
+          <p:cNvPr id="17" name="Text 14"/>
           <p:cNvSpPr/>
           <p:nvPr/>
         </p:nvSpPr>
@@ -8565,7 +8675,7 @@
         </p:nvSpPr>
         <p:spPr>
           <a:xfrm>
-            <a:off x="11368735" y="6437376"/>
+            <a:off x="11368735" y="6327648"/>
             <a:ext cx="365760" cy="274320"/>
           </a:xfrm>
           <a:prstGeom prst="rect">
@@ -8612,13 +8722,6 @@
 <file path=ppt/slides/slide14.xml><?xml version="1.0" encoding="utf-8"?>
 <p:sld xmlns:a="http://schemas.openxmlformats.org/drawingml/2006/main" xmlns:r="http://schemas.openxmlformats.org/officeDocument/2006/relationships" xmlns:p="http://schemas.openxmlformats.org/presentationml/2006/main">
   <p:cSld name="Slide 14">
-    <p:bg>
-      <p:bgPr>
-        <a:solidFill>
-          <a:srgbClr val="FFFFFF"/>
-        </a:solidFill>
-      </p:bgPr>
-    </p:bg>
     <p:spTree>
       <p:nvGrpSpPr>
         <p:cNvPr id="1" name=""/>
@@ -8635,7 +8738,29 @@
       </p:grpSpPr>
       <p:sp>
         <p:nvSpPr>
-          <p:cNvPr id="2" name="Text 0"/>
+          <p:cNvPr id="2" name="Shape 0"/>
+          <p:cNvSpPr/>
+          <p:nvPr/>
+        </p:nvSpPr>
+        <p:spPr>
+          <a:xfrm>
+            <a:off x="231343" y="194767"/>
+            <a:ext cx="11716207" cy="6473952"/>
+          </a:xfrm>
+          <a:prstGeom prst="roundRect">
+            <a:avLst>
+              <a:gd name="adj" fmla="val 3107"/>
+            </a:avLst>
+          </a:prstGeom>
+          <a:solidFill>
+            <a:srgbClr val="FFFFFF"/>
+          </a:solidFill>
+          <a:ln/>
+        </p:spPr>
+      </p:sp>
+      <p:sp>
+        <p:nvSpPr>
+          <p:cNvPr id="3" name="Text 1"/>
           <p:cNvSpPr/>
           <p:nvPr/>
         </p:nvSpPr>
@@ -8674,7 +8799,7 @@
       </p:sp>
       <p:sp>
         <p:nvSpPr>
-          <p:cNvPr id="3" name="Text 1"/>
+          <p:cNvPr id="4" name="Text 2"/>
           <p:cNvSpPr/>
           <p:nvPr/>
         </p:nvSpPr>
@@ -8713,7 +8838,7 @@
       </p:sp>
       <p:sp>
         <p:nvSpPr>
-          <p:cNvPr id="4" name="Shape 2"/>
+          <p:cNvPr id="5" name="Shape 3"/>
           <p:cNvSpPr/>
           <p:nvPr/>
         </p:nvSpPr>
@@ -8735,7 +8860,7 @@
       </p:sp>
       <p:sp>
         <p:nvSpPr>
-          <p:cNvPr id="5" name="Text 3"/>
+          <p:cNvPr id="6" name="Text 4"/>
           <p:cNvSpPr/>
           <p:nvPr/>
         </p:nvSpPr>
@@ -8774,7 +8899,7 @@
       </p:sp>
       <p:pic>
         <p:nvPicPr>
-          <p:cNvPr id="6" name="Image 0" descr="preencoded.png">    </p:cNvPr>
+          <p:cNvPr id="7" name="Image 0" descr="preencoded.png">    </p:cNvPr>
           <p:cNvPicPr>
             <a:picLocks noChangeAspect="1"/>
           </p:cNvPicPr>
@@ -8788,7 +8913,7 @@
         </p:blipFill>
         <p:spPr>
           <a:xfrm>
-            <a:off x="566928" y="6254496"/>
+            <a:off x="566928" y="6126480"/>
             <a:ext cx="1481328" cy="457200"/>
           </a:xfrm>
           <a:prstGeom prst="rect">
@@ -8798,7 +8923,7 @@
       </p:pic>
       <p:sp>
         <p:nvSpPr>
-          <p:cNvPr id="7" name="Shape 4"/>
+          <p:cNvPr id="8" name="Shape 5"/>
           <p:cNvSpPr/>
           <p:nvPr/>
         </p:nvSpPr>
@@ -8825,7 +8950,7 @@
       </p:sp>
       <p:sp>
         <p:nvSpPr>
-          <p:cNvPr id="8" name="Text 5"/>
+          <p:cNvPr id="9" name="Text 6"/>
           <p:cNvSpPr/>
           <p:nvPr/>
         </p:nvSpPr>
@@ -8904,7 +9029,7 @@
       </p:sp>
       <p:sp>
         <p:nvSpPr>
-          <p:cNvPr id="9" name="Shape 6"/>
+          <p:cNvPr id="10" name="Shape 7"/>
           <p:cNvSpPr/>
           <p:nvPr/>
         </p:nvSpPr>
@@ -8926,7 +9051,7 @@
       </p:sp>
       <p:sp>
         <p:nvSpPr>
-          <p:cNvPr id="10" name="Text 7"/>
+          <p:cNvPr id="11" name="Text 8"/>
           <p:cNvSpPr/>
           <p:nvPr/>
         </p:nvSpPr>
@@ -8965,7 +9090,7 @@
       </p:sp>
       <p:sp>
         <p:nvSpPr>
-          <p:cNvPr id="11" name="Text 8"/>
+          <p:cNvPr id="12" name="Text 9"/>
           <p:cNvSpPr/>
           <p:nvPr/>
         </p:nvSpPr>
@@ -9007,7 +9132,7 @@
       </p:sp>
       <p:sp>
         <p:nvSpPr>
-          <p:cNvPr id="12" name="Shape 9"/>
+          <p:cNvPr id="13" name="Shape 10"/>
           <p:cNvSpPr/>
           <p:nvPr/>
         </p:nvSpPr>
@@ -9029,7 +9154,7 @@
       </p:sp>
       <p:sp>
         <p:nvSpPr>
-          <p:cNvPr id="13" name="Text 10"/>
+          <p:cNvPr id="14" name="Text 11"/>
           <p:cNvSpPr/>
           <p:nvPr/>
         </p:nvSpPr>
@@ -9071,7 +9196,7 @@
       </p:sp>
       <p:sp>
         <p:nvSpPr>
-          <p:cNvPr id="14" name="Text 11"/>
+          <p:cNvPr id="15" name="Text 12"/>
           <p:cNvSpPr/>
           <p:nvPr/>
         </p:nvSpPr>
@@ -9120,7 +9245,7 @@
         </p:nvSpPr>
         <p:spPr>
           <a:xfrm>
-            <a:off x="11368735" y="6437376"/>
+            <a:off x="11368735" y="6327648"/>
             <a:ext cx="365760" cy="274320"/>
           </a:xfrm>
           <a:prstGeom prst="rect">
@@ -9167,13 +9292,6 @@
 <file path=ppt/slides/slide15.xml><?xml version="1.0" encoding="utf-8"?>
 <p:sld xmlns:a="http://schemas.openxmlformats.org/drawingml/2006/main" xmlns:r="http://schemas.openxmlformats.org/officeDocument/2006/relationships" xmlns:p="http://schemas.openxmlformats.org/presentationml/2006/main">
   <p:cSld name="Slide 15">
-    <p:bg>
-      <p:bgPr>
-        <a:solidFill>
-          <a:srgbClr val="FFFFFF"/>
-        </a:solidFill>
-      </p:bgPr>
-    </p:bg>
     <p:spTree>
       <p:nvGrpSpPr>
         <p:cNvPr id="1" name=""/>
@@ -9190,7 +9308,29 @@
       </p:grpSpPr>
       <p:sp>
         <p:nvSpPr>
-          <p:cNvPr id="2" name="Text 0"/>
+          <p:cNvPr id="2" name="Shape 0"/>
+          <p:cNvSpPr/>
+          <p:nvPr/>
+        </p:nvSpPr>
+        <p:spPr>
+          <a:xfrm>
+            <a:off x="231343" y="194767"/>
+            <a:ext cx="11716207" cy="6473952"/>
+          </a:xfrm>
+          <a:prstGeom prst="roundRect">
+            <a:avLst>
+              <a:gd name="adj" fmla="val 3107"/>
+            </a:avLst>
+          </a:prstGeom>
+          <a:solidFill>
+            <a:srgbClr val="FFFFFF"/>
+          </a:solidFill>
+          <a:ln/>
+        </p:spPr>
+      </p:sp>
+      <p:sp>
+        <p:nvSpPr>
+          <p:cNvPr id="3" name="Text 1"/>
           <p:cNvSpPr/>
           <p:nvPr/>
         </p:nvSpPr>
@@ -9229,7 +9369,7 @@
       </p:sp>
       <p:sp>
         <p:nvSpPr>
-          <p:cNvPr id="3" name="Text 1"/>
+          <p:cNvPr id="4" name="Text 2"/>
           <p:cNvSpPr/>
           <p:nvPr/>
         </p:nvSpPr>
@@ -9268,7 +9408,7 @@
       </p:sp>
       <p:sp>
         <p:nvSpPr>
-          <p:cNvPr id="4" name="Shape 2"/>
+          <p:cNvPr id="5" name="Shape 3"/>
           <p:cNvSpPr/>
           <p:nvPr/>
         </p:nvSpPr>
@@ -9290,7 +9430,7 @@
       </p:sp>
       <p:sp>
         <p:nvSpPr>
-          <p:cNvPr id="5" name="Text 3"/>
+          <p:cNvPr id="6" name="Text 4"/>
           <p:cNvSpPr/>
           <p:nvPr/>
         </p:nvSpPr>
@@ -9329,7 +9469,7 @@
       </p:sp>
       <p:sp>
         <p:nvSpPr>
-          <p:cNvPr id="6" name="Shape 4"/>
+          <p:cNvPr id="7" name="Shape 5"/>
           <p:cNvSpPr/>
           <p:nvPr/>
         </p:nvSpPr>
@@ -9351,7 +9491,7 @@
       </p:sp>
       <p:sp>
         <p:nvSpPr>
-          <p:cNvPr id="7" name="Text 5"/>
+          <p:cNvPr id="8" name="Text 6"/>
           <p:cNvSpPr/>
           <p:nvPr/>
         </p:nvSpPr>
@@ -9390,7 +9530,7 @@
       </p:sp>
       <p:pic>
         <p:nvPicPr>
-          <p:cNvPr id="8" name="Image 0" descr="preencoded.png">    </p:cNvPr>
+          <p:cNvPr id="9" name="Image 0" descr="preencoded.png">    </p:cNvPr>
           <p:cNvPicPr>
             <a:picLocks noChangeAspect="1"/>
           </p:cNvPicPr>
@@ -9404,7 +9544,7 @@
         </p:blipFill>
         <p:spPr>
           <a:xfrm>
-            <a:off x="566928" y="6254496"/>
+            <a:off x="566928" y="6126480"/>
             <a:ext cx="1481328" cy="457200"/>
           </a:xfrm>
           <a:prstGeom prst="rect">
@@ -9414,7 +9554,7 @@
       </p:pic>
       <p:sp>
         <p:nvSpPr>
-          <p:cNvPr id="9" name="Shape 6"/>
+          <p:cNvPr id="10" name="Shape 7"/>
           <p:cNvSpPr/>
           <p:nvPr/>
         </p:nvSpPr>
@@ -9441,7 +9581,7 @@
       </p:sp>
       <p:sp>
         <p:nvSpPr>
-          <p:cNvPr id="10" name="Text 7"/>
+          <p:cNvPr id="11" name="Text 8"/>
           <p:cNvSpPr/>
           <p:nvPr/>
         </p:nvSpPr>
@@ -9560,7 +9700,7 @@
       </p:sp>
       <p:sp>
         <p:nvSpPr>
-          <p:cNvPr id="11" name="Shape 8"/>
+          <p:cNvPr id="12" name="Shape 9"/>
           <p:cNvSpPr/>
           <p:nvPr/>
         </p:nvSpPr>
@@ -9582,7 +9722,7 @@
       </p:sp>
       <p:sp>
         <p:nvSpPr>
-          <p:cNvPr id="12" name="Text 9"/>
+          <p:cNvPr id="13" name="Text 10"/>
           <p:cNvSpPr/>
           <p:nvPr/>
         </p:nvSpPr>
@@ -9621,7 +9761,7 @@
       </p:sp>
       <p:sp>
         <p:nvSpPr>
-          <p:cNvPr id="13" name="Text 10"/>
+          <p:cNvPr id="14" name="Text 11"/>
           <p:cNvSpPr/>
           <p:nvPr/>
         </p:nvSpPr>
@@ -9663,7 +9803,7 @@
       </p:sp>
       <p:sp>
         <p:nvSpPr>
-          <p:cNvPr id="14" name="Shape 11"/>
+          <p:cNvPr id="15" name="Shape 12"/>
           <p:cNvSpPr/>
           <p:nvPr/>
         </p:nvSpPr>
@@ -9685,7 +9825,7 @@
       </p:sp>
       <p:sp>
         <p:nvSpPr>
-          <p:cNvPr id="15" name="Text 12"/>
+          <p:cNvPr id="16" name="Text 13"/>
           <p:cNvSpPr/>
           <p:nvPr/>
         </p:nvSpPr>
@@ -9724,7 +9864,7 @@
       </p:sp>
       <p:sp>
         <p:nvSpPr>
-          <p:cNvPr id="16" name="Text 13"/>
+          <p:cNvPr id="17" name="Text 14"/>
           <p:cNvSpPr/>
           <p:nvPr/>
         </p:nvSpPr>
@@ -9766,7 +9906,7 @@
       </p:sp>
       <p:sp>
         <p:nvSpPr>
-          <p:cNvPr id="17" name="Shape 14"/>
+          <p:cNvPr id="18" name="Shape 15"/>
           <p:cNvSpPr/>
           <p:nvPr/>
         </p:nvSpPr>
@@ -9788,7 +9928,7 @@
       </p:sp>
       <p:sp>
         <p:nvSpPr>
-          <p:cNvPr id="18" name="Text 15"/>
+          <p:cNvPr id="19" name="Text 16"/>
           <p:cNvSpPr/>
           <p:nvPr/>
         </p:nvSpPr>
@@ -9840,7 +9980,7 @@
         </p:nvSpPr>
         <p:spPr>
           <a:xfrm>
-            <a:off x="11368735" y="6437376"/>
+            <a:off x="11368735" y="6327648"/>
             <a:ext cx="365760" cy="274320"/>
           </a:xfrm>
           <a:prstGeom prst="rect">
@@ -9887,13 +10027,6 @@
 <file path=ppt/slides/slide16.xml><?xml version="1.0" encoding="utf-8"?>
 <p:sld xmlns:a="http://schemas.openxmlformats.org/drawingml/2006/main" xmlns:r="http://schemas.openxmlformats.org/officeDocument/2006/relationships" xmlns:p="http://schemas.openxmlformats.org/presentationml/2006/main">
   <p:cSld name="Slide 16">
-    <p:bg>
-      <p:bgPr>
-        <a:solidFill>
-          <a:srgbClr val="FFFFFF"/>
-        </a:solidFill>
-      </p:bgPr>
-    </p:bg>
     <p:spTree>
       <p:nvGrpSpPr>
         <p:cNvPr id="1" name=""/>
@@ -9910,7 +10043,29 @@
       </p:grpSpPr>
       <p:sp>
         <p:nvSpPr>
-          <p:cNvPr id="2" name="Text 0"/>
+          <p:cNvPr id="2" name="Shape 0"/>
+          <p:cNvSpPr/>
+          <p:nvPr/>
+        </p:nvSpPr>
+        <p:spPr>
+          <a:xfrm>
+            <a:off x="231343" y="194767"/>
+            <a:ext cx="11716207" cy="6473952"/>
+          </a:xfrm>
+          <a:prstGeom prst="roundRect">
+            <a:avLst>
+              <a:gd name="adj" fmla="val 3107"/>
+            </a:avLst>
+          </a:prstGeom>
+          <a:solidFill>
+            <a:srgbClr val="FFFFFF"/>
+          </a:solidFill>
+          <a:ln/>
+        </p:spPr>
+      </p:sp>
+      <p:sp>
+        <p:nvSpPr>
+          <p:cNvPr id="3" name="Text 1"/>
           <p:cNvSpPr/>
           <p:nvPr/>
         </p:nvSpPr>
@@ -9949,7 +10104,7 @@
       </p:sp>
       <p:sp>
         <p:nvSpPr>
-          <p:cNvPr id="3" name="Text 1"/>
+          <p:cNvPr id="4" name="Text 2"/>
           <p:cNvSpPr/>
           <p:nvPr/>
         </p:nvSpPr>
@@ -9988,7 +10143,7 @@
       </p:sp>
       <p:sp>
         <p:nvSpPr>
-          <p:cNvPr id="4" name="Shape 2"/>
+          <p:cNvPr id="5" name="Shape 3"/>
           <p:cNvSpPr/>
           <p:nvPr/>
         </p:nvSpPr>
@@ -10010,7 +10165,7 @@
       </p:sp>
       <p:sp>
         <p:nvSpPr>
-          <p:cNvPr id="5" name="Text 3"/>
+          <p:cNvPr id="6" name="Text 4"/>
           <p:cNvSpPr/>
           <p:nvPr/>
         </p:nvSpPr>
@@ -10049,7 +10204,7 @@
       </p:sp>
       <p:sp>
         <p:nvSpPr>
-          <p:cNvPr id="6" name="Shape 4"/>
+          <p:cNvPr id="7" name="Shape 5"/>
           <p:cNvSpPr/>
           <p:nvPr/>
         </p:nvSpPr>
@@ -10071,7 +10226,7 @@
       </p:sp>
       <p:sp>
         <p:nvSpPr>
-          <p:cNvPr id="7" name="Text 5"/>
+          <p:cNvPr id="8" name="Text 6"/>
           <p:cNvSpPr/>
           <p:nvPr/>
         </p:nvSpPr>
@@ -10110,7 +10265,7 @@
       </p:sp>
       <p:pic>
         <p:nvPicPr>
-          <p:cNvPr id="8" name="Image 0" descr="preencoded.png">    </p:cNvPr>
+          <p:cNvPr id="9" name="Image 0" descr="preencoded.png">    </p:cNvPr>
           <p:cNvPicPr>
             <a:picLocks noChangeAspect="1"/>
           </p:cNvPicPr>
@@ -10124,7 +10279,7 @@
         </p:blipFill>
         <p:spPr>
           <a:xfrm>
-            <a:off x="566928" y="6254496"/>
+            <a:off x="566928" y="6126480"/>
             <a:ext cx="1481328" cy="457200"/>
           </a:xfrm>
           <a:prstGeom prst="rect">
@@ -10134,7 +10289,7 @@
       </p:pic>
       <p:sp>
         <p:nvSpPr>
-          <p:cNvPr id="9" name="Shape 6"/>
+          <p:cNvPr id="10" name="Shape 7"/>
           <p:cNvSpPr/>
           <p:nvPr/>
         </p:nvSpPr>
@@ -10159,7 +10314,7 @@
       </p:sp>
       <p:sp>
         <p:nvSpPr>
-          <p:cNvPr id="10" name="Text 7"/>
+          <p:cNvPr id="11" name="Text 8"/>
           <p:cNvSpPr/>
           <p:nvPr/>
         </p:nvSpPr>
@@ -10198,7 +10353,7 @@
       </p:sp>
       <p:sp>
         <p:nvSpPr>
-          <p:cNvPr id="11" name="Text 8"/>
+          <p:cNvPr id="12" name="Text 9"/>
           <p:cNvSpPr/>
           <p:nvPr/>
         </p:nvSpPr>
@@ -10237,7 +10392,7 @@
       </p:sp>
       <p:sp>
         <p:nvSpPr>
-          <p:cNvPr id="12" name="Shape 9"/>
+          <p:cNvPr id="13" name="Shape 10"/>
           <p:cNvSpPr/>
           <p:nvPr/>
         </p:nvSpPr>
@@ -10260,7 +10415,7 @@
       </p:sp>
       <p:sp>
         <p:nvSpPr>
-          <p:cNvPr id="13" name="Shape 10"/>
+          <p:cNvPr id="14" name="Shape 11"/>
           <p:cNvSpPr/>
           <p:nvPr/>
         </p:nvSpPr>
@@ -10280,7 +10435,7 @@
       </p:sp>
       <p:sp>
         <p:nvSpPr>
-          <p:cNvPr id="14" name="Text 11"/>
+          <p:cNvPr id="15" name="Text 12"/>
           <p:cNvSpPr/>
           <p:nvPr/>
         </p:nvSpPr>
@@ -10319,7 +10474,7 @@
       </p:sp>
       <p:sp>
         <p:nvSpPr>
-          <p:cNvPr id="15" name="Shape 12"/>
+          <p:cNvPr id="16" name="Shape 13"/>
           <p:cNvSpPr/>
           <p:nvPr/>
         </p:nvSpPr>
@@ -10344,7 +10499,7 @@
       </p:sp>
       <p:sp>
         <p:nvSpPr>
-          <p:cNvPr id="16" name="Text 13"/>
+          <p:cNvPr id="17" name="Text 14"/>
           <p:cNvSpPr/>
           <p:nvPr/>
         </p:nvSpPr>
@@ -10383,7 +10538,7 @@
       </p:sp>
       <p:sp>
         <p:nvSpPr>
-          <p:cNvPr id="17" name="Text 14"/>
+          <p:cNvPr id="18" name="Text 15"/>
           <p:cNvSpPr/>
           <p:nvPr/>
         </p:nvSpPr>
@@ -10422,7 +10577,7 @@
       </p:sp>
       <p:sp>
         <p:nvSpPr>
-          <p:cNvPr id="18" name="Shape 15"/>
+          <p:cNvPr id="19" name="Shape 16"/>
           <p:cNvSpPr/>
           <p:nvPr/>
         </p:nvSpPr>
@@ -10445,7 +10600,7 @@
       </p:sp>
       <p:sp>
         <p:nvSpPr>
-          <p:cNvPr id="19" name="Shape 16"/>
+          <p:cNvPr id="20" name="Shape 17"/>
           <p:cNvSpPr/>
           <p:nvPr/>
         </p:nvSpPr>
@@ -10465,7 +10620,7 @@
       </p:sp>
       <p:sp>
         <p:nvSpPr>
-          <p:cNvPr id="20" name="Text 17"/>
+          <p:cNvPr id="21" name="Text 18"/>
           <p:cNvSpPr/>
           <p:nvPr/>
         </p:nvSpPr>
@@ -10504,7 +10659,7 @@
       </p:sp>
       <p:sp>
         <p:nvSpPr>
-          <p:cNvPr id="21" name="Shape 18"/>
+          <p:cNvPr id="22" name="Shape 19"/>
           <p:cNvSpPr/>
           <p:nvPr/>
         </p:nvSpPr>
@@ -10529,7 +10684,7 @@
       </p:sp>
       <p:sp>
         <p:nvSpPr>
-          <p:cNvPr id="22" name="Text 19"/>
+          <p:cNvPr id="23" name="Text 20"/>
           <p:cNvSpPr/>
           <p:nvPr/>
         </p:nvSpPr>
@@ -10568,7 +10723,7 @@
       </p:sp>
       <p:sp>
         <p:nvSpPr>
-          <p:cNvPr id="23" name="Text 20"/>
+          <p:cNvPr id="24" name="Text 21"/>
           <p:cNvSpPr/>
           <p:nvPr/>
         </p:nvSpPr>
@@ -10607,7 +10762,7 @@
       </p:sp>
       <p:sp>
         <p:nvSpPr>
-          <p:cNvPr id="24" name="Shape 21"/>
+          <p:cNvPr id="25" name="Shape 22"/>
           <p:cNvSpPr/>
           <p:nvPr/>
         </p:nvSpPr>
@@ -10629,7 +10784,7 @@
       </p:sp>
       <p:sp>
         <p:nvSpPr>
-          <p:cNvPr id="25" name="Text 22"/>
+          <p:cNvPr id="26" name="Text 23"/>
           <p:cNvSpPr/>
           <p:nvPr/>
         </p:nvSpPr>
@@ -10668,7 +10823,7 @@
       </p:sp>
       <p:sp>
         <p:nvSpPr>
-          <p:cNvPr id="26" name="Text 23"/>
+          <p:cNvPr id="27" name="Text 24"/>
           <p:cNvSpPr/>
           <p:nvPr/>
         </p:nvSpPr>
@@ -10710,7 +10865,7 @@
       </p:sp>
       <p:sp>
         <p:nvSpPr>
-          <p:cNvPr id="27" name="Shape 24"/>
+          <p:cNvPr id="28" name="Shape 25"/>
           <p:cNvSpPr/>
           <p:nvPr/>
         </p:nvSpPr>
@@ -10732,7 +10887,7 @@
       </p:sp>
       <p:sp>
         <p:nvSpPr>
-          <p:cNvPr id="28" name="Text 25"/>
+          <p:cNvPr id="29" name="Text 26"/>
           <p:cNvSpPr/>
           <p:nvPr/>
         </p:nvSpPr>
@@ -10784,7 +10939,7 @@
         </p:nvSpPr>
         <p:spPr>
           <a:xfrm>
-            <a:off x="11368735" y="6437376"/>
+            <a:off x="11368735" y="6327648"/>
             <a:ext cx="365760" cy="274320"/>
           </a:xfrm>
           <a:prstGeom prst="rect">
@@ -10831,13 +10986,6 @@
 <file path=ppt/slides/slide17.xml><?xml version="1.0" encoding="utf-8"?>
 <p:sld xmlns:a="http://schemas.openxmlformats.org/drawingml/2006/main" xmlns:r="http://schemas.openxmlformats.org/officeDocument/2006/relationships" xmlns:p="http://schemas.openxmlformats.org/presentationml/2006/main">
   <p:cSld name="Slide 17">
-    <p:bg>
-      <p:bgPr>
-        <a:solidFill>
-          <a:srgbClr val="FFFFFF"/>
-        </a:solidFill>
-      </p:bgPr>
-    </p:bg>
     <p:spTree>
       <p:nvGrpSpPr>
         <p:cNvPr id="1" name=""/>
@@ -10854,7 +11002,29 @@
       </p:grpSpPr>
       <p:sp>
         <p:nvSpPr>
-          <p:cNvPr id="2" name="Text 0"/>
+          <p:cNvPr id="2" name="Shape 0"/>
+          <p:cNvSpPr/>
+          <p:nvPr/>
+        </p:nvSpPr>
+        <p:spPr>
+          <a:xfrm>
+            <a:off x="231343" y="194767"/>
+            <a:ext cx="11716207" cy="6473952"/>
+          </a:xfrm>
+          <a:prstGeom prst="roundRect">
+            <a:avLst>
+              <a:gd name="adj" fmla="val 3107"/>
+            </a:avLst>
+          </a:prstGeom>
+          <a:solidFill>
+            <a:srgbClr val="FFFFFF"/>
+          </a:solidFill>
+          <a:ln/>
+        </p:spPr>
+      </p:sp>
+      <p:sp>
+        <p:nvSpPr>
+          <p:cNvPr id="3" name="Text 1"/>
           <p:cNvSpPr/>
           <p:nvPr/>
         </p:nvSpPr>
@@ -10893,7 +11063,7 @@
       </p:sp>
       <p:sp>
         <p:nvSpPr>
-          <p:cNvPr id="3" name="Text 1"/>
+          <p:cNvPr id="4" name="Text 2"/>
           <p:cNvSpPr/>
           <p:nvPr/>
         </p:nvSpPr>
@@ -10932,7 +11102,7 @@
       </p:sp>
       <p:sp>
         <p:nvSpPr>
-          <p:cNvPr id="4" name="Shape 2"/>
+          <p:cNvPr id="5" name="Shape 3"/>
           <p:cNvSpPr/>
           <p:nvPr/>
         </p:nvSpPr>
@@ -10954,7 +11124,7 @@
       </p:sp>
       <p:sp>
         <p:nvSpPr>
-          <p:cNvPr id="5" name="Text 3"/>
+          <p:cNvPr id="6" name="Text 4"/>
           <p:cNvSpPr/>
           <p:nvPr/>
         </p:nvSpPr>
@@ -10993,7 +11163,7 @@
       </p:sp>
       <p:pic>
         <p:nvPicPr>
-          <p:cNvPr id="6" name="Image 0" descr="preencoded.png">    </p:cNvPr>
+          <p:cNvPr id="7" name="Image 0" descr="preencoded.png">    </p:cNvPr>
           <p:cNvPicPr>
             <a:picLocks noChangeAspect="1"/>
           </p:cNvPicPr>
@@ -11007,7 +11177,7 @@
         </p:blipFill>
         <p:spPr>
           <a:xfrm>
-            <a:off x="566928" y="6254496"/>
+            <a:off x="566928" y="6126480"/>
             <a:ext cx="1481328" cy="457200"/>
           </a:xfrm>
           <a:prstGeom prst="rect">
@@ -11017,7 +11187,7 @@
       </p:pic>
       <p:sp>
         <p:nvSpPr>
-          <p:cNvPr id="7" name="Shape 4"/>
+          <p:cNvPr id="8" name="Shape 5"/>
           <p:cNvSpPr/>
           <p:nvPr/>
         </p:nvSpPr>
@@ -11039,7 +11209,7 @@
       </p:sp>
       <p:sp>
         <p:nvSpPr>
-          <p:cNvPr id="8" name="Text 5"/>
+          <p:cNvPr id="9" name="Text 6"/>
           <p:cNvSpPr/>
           <p:nvPr/>
         </p:nvSpPr>
@@ -11078,7 +11248,7 @@
       </p:sp>
       <p:sp>
         <p:nvSpPr>
-          <p:cNvPr id="9" name="Text 6"/>
+          <p:cNvPr id="10" name="Text 7"/>
           <p:cNvSpPr/>
           <p:nvPr/>
         </p:nvSpPr>
@@ -11117,7 +11287,7 @@
       </p:sp>
       <p:sp>
         <p:nvSpPr>
-          <p:cNvPr id="10" name="Shape 7"/>
+          <p:cNvPr id="11" name="Shape 8"/>
           <p:cNvSpPr/>
           <p:nvPr/>
         </p:nvSpPr>
@@ -11144,7 +11314,7 @@
       </p:sp>
       <p:sp>
         <p:nvSpPr>
-          <p:cNvPr id="11" name="Text 8"/>
+          <p:cNvPr id="12" name="Text 9"/>
           <p:cNvSpPr/>
           <p:nvPr/>
         </p:nvSpPr>
@@ -11183,7 +11353,7 @@
       </p:sp>
       <p:sp>
         <p:nvSpPr>
-          <p:cNvPr id="12" name="Text 9"/>
+          <p:cNvPr id="13" name="Text 10"/>
           <p:cNvSpPr/>
           <p:nvPr/>
         </p:nvSpPr>
@@ -11222,7 +11392,7 @@
       </p:sp>
       <p:sp>
         <p:nvSpPr>
-          <p:cNvPr id="13" name="Shape 10"/>
+          <p:cNvPr id="14" name="Shape 11"/>
           <p:cNvSpPr/>
           <p:nvPr/>
         </p:nvSpPr>
@@ -11249,7 +11419,7 @@
       </p:sp>
       <p:sp>
         <p:nvSpPr>
-          <p:cNvPr id="14" name="Text 11"/>
+          <p:cNvPr id="15" name="Text 12"/>
           <p:cNvSpPr/>
           <p:nvPr/>
         </p:nvSpPr>
@@ -11288,7 +11458,7 @@
       </p:sp>
       <p:sp>
         <p:nvSpPr>
-          <p:cNvPr id="15" name="Text 12"/>
+          <p:cNvPr id="16" name="Text 13"/>
           <p:cNvSpPr/>
           <p:nvPr/>
         </p:nvSpPr>
@@ -11327,7 +11497,7 @@
       </p:sp>
       <p:sp>
         <p:nvSpPr>
-          <p:cNvPr id="16" name="Shape 13"/>
+          <p:cNvPr id="17" name="Shape 14"/>
           <p:cNvSpPr/>
           <p:nvPr/>
         </p:nvSpPr>
@@ -11349,7 +11519,7 @@
       </p:sp>
       <p:sp>
         <p:nvSpPr>
-          <p:cNvPr id="17" name="Text 14"/>
+          <p:cNvPr id="18" name="Text 15"/>
           <p:cNvSpPr/>
           <p:nvPr/>
         </p:nvSpPr>
@@ -11391,7 +11561,7 @@
       </p:sp>
       <p:sp>
         <p:nvSpPr>
-          <p:cNvPr id="18" name="Shape 15"/>
+          <p:cNvPr id="19" name="Shape 16"/>
           <p:cNvSpPr/>
           <p:nvPr/>
         </p:nvSpPr>
@@ -11418,7 +11588,7 @@
       </p:sp>
       <p:sp>
         <p:nvSpPr>
-          <p:cNvPr id="19" name="Text 16"/>
+          <p:cNvPr id="20" name="Text 17"/>
           <p:cNvSpPr/>
           <p:nvPr/>
         </p:nvSpPr>
@@ -11470,7 +11640,7 @@
         </p:nvSpPr>
         <p:spPr>
           <a:xfrm>
-            <a:off x="11368735" y="6437376"/>
+            <a:off x="11368735" y="6327648"/>
             <a:ext cx="365760" cy="274320"/>
           </a:xfrm>
           <a:prstGeom prst="rect">
@@ -11517,13 +11687,6 @@
 <file path=ppt/slides/slide18.xml><?xml version="1.0" encoding="utf-8"?>
 <p:sld xmlns:a="http://schemas.openxmlformats.org/drawingml/2006/main" xmlns:r="http://schemas.openxmlformats.org/officeDocument/2006/relationships" xmlns:p="http://schemas.openxmlformats.org/presentationml/2006/main">
   <p:cSld name="Slide 18">
-    <p:bg>
-      <p:bgPr>
-        <a:solidFill>
-          <a:srgbClr val="FFFFFF"/>
-        </a:solidFill>
-      </p:bgPr>
-    </p:bg>
     <p:spTree>
       <p:nvGrpSpPr>
         <p:cNvPr id="1" name=""/>
@@ -11540,7 +11703,29 @@
       </p:grpSpPr>
       <p:sp>
         <p:nvSpPr>
-          <p:cNvPr id="2" name="Text 0"/>
+          <p:cNvPr id="2" name="Shape 0"/>
+          <p:cNvSpPr/>
+          <p:nvPr/>
+        </p:nvSpPr>
+        <p:spPr>
+          <a:xfrm>
+            <a:off x="231343" y="194767"/>
+            <a:ext cx="11716207" cy="6473952"/>
+          </a:xfrm>
+          <a:prstGeom prst="roundRect">
+            <a:avLst>
+              <a:gd name="adj" fmla="val 3107"/>
+            </a:avLst>
+          </a:prstGeom>
+          <a:solidFill>
+            <a:srgbClr val="FFFFFF"/>
+          </a:solidFill>
+          <a:ln/>
+        </p:spPr>
+      </p:sp>
+      <p:sp>
+        <p:nvSpPr>
+          <p:cNvPr id="3" name="Text 1"/>
           <p:cNvSpPr/>
           <p:nvPr/>
         </p:nvSpPr>
@@ -11579,7 +11764,7 @@
       </p:sp>
       <p:sp>
         <p:nvSpPr>
-          <p:cNvPr id="3" name="Text 1"/>
+          <p:cNvPr id="4" name="Text 2"/>
           <p:cNvSpPr/>
           <p:nvPr/>
         </p:nvSpPr>
@@ -11618,7 +11803,7 @@
       </p:sp>
       <p:sp>
         <p:nvSpPr>
-          <p:cNvPr id="4" name="Text 2"/>
+          <p:cNvPr id="5" name="Text 3"/>
           <p:cNvSpPr/>
           <p:nvPr/>
         </p:nvSpPr>
@@ -11660,7 +11845,7 @@
       </p:sp>
       <p:sp>
         <p:nvSpPr>
-          <p:cNvPr id="5" name="Shape 3"/>
+          <p:cNvPr id="6" name="Shape 4"/>
           <p:cNvSpPr/>
           <p:nvPr/>
         </p:nvSpPr>
@@ -11682,7 +11867,7 @@
       </p:sp>
       <p:sp>
         <p:nvSpPr>
-          <p:cNvPr id="6" name="Text 4"/>
+          <p:cNvPr id="7" name="Text 5"/>
           <p:cNvSpPr/>
           <p:nvPr/>
         </p:nvSpPr>
@@ -11721,7 +11906,7 @@
       </p:sp>
       <p:pic>
         <p:nvPicPr>
-          <p:cNvPr id="7" name="Image 0" descr="preencoded.png">    </p:cNvPr>
+          <p:cNvPr id="8" name="Image 0" descr="preencoded.png">    </p:cNvPr>
           <p:cNvPicPr>
             <a:picLocks noChangeAspect="1"/>
           </p:cNvPicPr>
@@ -11735,7 +11920,7 @@
         </p:blipFill>
         <p:spPr>
           <a:xfrm>
-            <a:off x="566928" y="6254496"/>
+            <a:off x="566928" y="6126480"/>
             <a:ext cx="1481328" cy="457200"/>
           </a:xfrm>
           <a:prstGeom prst="rect">
@@ -11745,7 +11930,7 @@
       </p:pic>
       <p:sp>
         <p:nvSpPr>
-          <p:cNvPr id="8" name="Shape 5"/>
+          <p:cNvPr id="9" name="Shape 6"/>
           <p:cNvSpPr/>
           <p:nvPr/>
         </p:nvSpPr>
@@ -11767,7 +11952,7 @@
       </p:sp>
       <p:sp>
         <p:nvSpPr>
-          <p:cNvPr id="9" name="Shape 6"/>
+          <p:cNvPr id="10" name="Shape 7"/>
           <p:cNvSpPr/>
           <p:nvPr/>
         </p:nvSpPr>
@@ -11787,7 +11972,7 @@
       </p:sp>
       <p:sp>
         <p:nvSpPr>
-          <p:cNvPr id="10" name="Text 7"/>
+          <p:cNvPr id="11" name="Text 8"/>
           <p:cNvSpPr/>
           <p:nvPr/>
         </p:nvSpPr>
@@ -11826,7 +12011,7 @@
       </p:sp>
       <p:sp>
         <p:nvSpPr>
-          <p:cNvPr id="11" name="Text 8"/>
+          <p:cNvPr id="12" name="Text 9"/>
           <p:cNvSpPr/>
           <p:nvPr/>
         </p:nvSpPr>
@@ -11865,7 +12050,7 @@
       </p:sp>
       <p:sp>
         <p:nvSpPr>
-          <p:cNvPr id="12" name="Text 9"/>
+          <p:cNvPr id="13" name="Text 10"/>
           <p:cNvSpPr/>
           <p:nvPr/>
         </p:nvSpPr>
@@ -11907,7 +12092,7 @@
       </p:sp>
       <p:sp>
         <p:nvSpPr>
-          <p:cNvPr id="13" name="Shape 10"/>
+          <p:cNvPr id="14" name="Shape 11"/>
           <p:cNvSpPr/>
           <p:nvPr/>
         </p:nvSpPr>
@@ -11929,7 +12114,7 @@
       </p:sp>
       <p:sp>
         <p:nvSpPr>
-          <p:cNvPr id="14" name="Shape 11"/>
+          <p:cNvPr id="15" name="Shape 12"/>
           <p:cNvSpPr/>
           <p:nvPr/>
         </p:nvSpPr>
@@ -11949,7 +12134,7 @@
       </p:sp>
       <p:sp>
         <p:nvSpPr>
-          <p:cNvPr id="15" name="Text 12"/>
+          <p:cNvPr id="16" name="Text 13"/>
           <p:cNvSpPr/>
           <p:nvPr/>
         </p:nvSpPr>
@@ -11988,7 +12173,7 @@
       </p:sp>
       <p:sp>
         <p:nvSpPr>
-          <p:cNvPr id="16" name="Text 13"/>
+          <p:cNvPr id="17" name="Text 14"/>
           <p:cNvSpPr/>
           <p:nvPr/>
         </p:nvSpPr>
@@ -12027,7 +12212,7 @@
       </p:sp>
       <p:sp>
         <p:nvSpPr>
-          <p:cNvPr id="17" name="Text 14"/>
+          <p:cNvPr id="18" name="Text 15"/>
           <p:cNvSpPr/>
           <p:nvPr/>
         </p:nvSpPr>
@@ -12069,7 +12254,7 @@
       </p:sp>
       <p:sp>
         <p:nvSpPr>
-          <p:cNvPr id="18" name="Shape 15"/>
+          <p:cNvPr id="19" name="Shape 16"/>
           <p:cNvSpPr/>
           <p:nvPr/>
         </p:nvSpPr>
@@ -12091,7 +12276,7 @@
       </p:sp>
       <p:sp>
         <p:nvSpPr>
-          <p:cNvPr id="19" name="Text 16"/>
+          <p:cNvPr id="20" name="Text 17"/>
           <p:cNvSpPr/>
           <p:nvPr/>
         </p:nvSpPr>
@@ -12133,7 +12318,7 @@
       </p:sp>
       <p:sp>
         <p:nvSpPr>
-          <p:cNvPr id="20" name="Shape 17"/>
+          <p:cNvPr id="21" name="Shape 18"/>
           <p:cNvSpPr/>
           <p:nvPr/>
         </p:nvSpPr>
@@ -12155,7 +12340,7 @@
       </p:sp>
       <p:sp>
         <p:nvSpPr>
-          <p:cNvPr id="21" name="Text 18"/>
+          <p:cNvPr id="22" name="Text 19"/>
           <p:cNvSpPr/>
           <p:nvPr/>
         </p:nvSpPr>
@@ -12194,7 +12379,7 @@
       </p:sp>
       <p:sp>
         <p:nvSpPr>
-          <p:cNvPr id="22" name="Text 19"/>
+          <p:cNvPr id="23" name="Text 20"/>
           <p:cNvSpPr/>
           <p:nvPr/>
         </p:nvSpPr>
@@ -12246,7 +12431,7 @@
         </p:nvSpPr>
         <p:spPr>
           <a:xfrm>
-            <a:off x="11368735" y="6437376"/>
+            <a:off x="11368735" y="6327648"/>
             <a:ext cx="365760" cy="274320"/>
           </a:xfrm>
           <a:prstGeom prst="rect">
@@ -12293,13 +12478,6 @@
 <file path=ppt/slides/slide19.xml><?xml version="1.0" encoding="utf-8"?>
 <p:sld xmlns:a="http://schemas.openxmlformats.org/drawingml/2006/main" xmlns:r="http://schemas.openxmlformats.org/officeDocument/2006/relationships" xmlns:p="http://schemas.openxmlformats.org/presentationml/2006/main">
   <p:cSld name="Slide 19">
-    <p:bg>
-      <p:bgPr>
-        <a:solidFill>
-          <a:srgbClr val="FFFFFF"/>
-        </a:solidFill>
-      </p:bgPr>
-    </p:bg>
     <p:spTree>
       <p:nvGrpSpPr>
         <p:cNvPr id="1" name=""/>
@@ -12316,7 +12494,29 @@
       </p:grpSpPr>
       <p:sp>
         <p:nvSpPr>
-          <p:cNvPr id="2" name="Text 0"/>
+          <p:cNvPr id="2" name="Shape 0"/>
+          <p:cNvSpPr/>
+          <p:nvPr/>
+        </p:nvSpPr>
+        <p:spPr>
+          <a:xfrm>
+            <a:off x="231343" y="194767"/>
+            <a:ext cx="11716207" cy="6473952"/>
+          </a:xfrm>
+          <a:prstGeom prst="roundRect">
+            <a:avLst>
+              <a:gd name="adj" fmla="val 3107"/>
+            </a:avLst>
+          </a:prstGeom>
+          <a:solidFill>
+            <a:srgbClr val="FFFFFF"/>
+          </a:solidFill>
+          <a:ln/>
+        </p:spPr>
+      </p:sp>
+      <p:sp>
+        <p:nvSpPr>
+          <p:cNvPr id="3" name="Text 1"/>
           <p:cNvSpPr/>
           <p:nvPr/>
         </p:nvSpPr>
@@ -12355,7 +12555,7 @@
       </p:sp>
       <p:sp>
         <p:nvSpPr>
-          <p:cNvPr id="3" name="Shape 1"/>
+          <p:cNvPr id="4" name="Shape 2"/>
           <p:cNvSpPr/>
           <p:nvPr/>
         </p:nvSpPr>
@@ -12377,7 +12577,7 @@
       </p:sp>
       <p:sp>
         <p:nvSpPr>
-          <p:cNvPr id="4" name="Text 2"/>
+          <p:cNvPr id="5" name="Text 3"/>
           <p:cNvSpPr/>
           <p:nvPr/>
         </p:nvSpPr>
@@ -12416,7 +12616,7 @@
       </p:sp>
       <p:pic>
         <p:nvPicPr>
-          <p:cNvPr id="5" name="Image 0" descr="preencoded.png">    </p:cNvPr>
+          <p:cNvPr id="6" name="Image 0" descr="preencoded.png">    </p:cNvPr>
           <p:cNvPicPr>
             <a:picLocks noChangeAspect="1"/>
           </p:cNvPicPr>
@@ -12430,7 +12630,7 @@
         </p:blipFill>
         <p:spPr>
           <a:xfrm>
-            <a:off x="566928" y="6254496"/>
+            <a:off x="566928" y="6126480"/>
             <a:ext cx="1481328" cy="457200"/>
           </a:xfrm>
           <a:prstGeom prst="rect">
@@ -12440,7 +12640,7 @@
       </p:pic>
       <p:sp>
         <p:nvSpPr>
-          <p:cNvPr id="6" name="Shape 3"/>
+          <p:cNvPr id="7" name="Shape 4"/>
           <p:cNvSpPr/>
           <p:nvPr/>
         </p:nvSpPr>
@@ -12462,7 +12662,7 @@
       </p:sp>
       <p:sp>
         <p:nvSpPr>
-          <p:cNvPr id="7" name="Shape 4"/>
+          <p:cNvPr id="8" name="Shape 5"/>
           <p:cNvSpPr/>
           <p:nvPr/>
         </p:nvSpPr>
@@ -12482,7 +12682,7 @@
       </p:sp>
       <p:sp>
         <p:nvSpPr>
-          <p:cNvPr id="8" name="Text 5"/>
+          <p:cNvPr id="9" name="Text 6"/>
           <p:cNvSpPr/>
           <p:nvPr/>
         </p:nvSpPr>
@@ -12521,7 +12721,7 @@
       </p:sp>
       <p:sp>
         <p:nvSpPr>
-          <p:cNvPr id="9" name="Text 6"/>
+          <p:cNvPr id="10" name="Text 7"/>
           <p:cNvSpPr/>
           <p:nvPr/>
         </p:nvSpPr>
@@ -12560,7 +12760,7 @@
       </p:sp>
       <p:sp>
         <p:nvSpPr>
-          <p:cNvPr id="10" name="Text 7"/>
+          <p:cNvPr id="11" name="Text 8"/>
           <p:cNvSpPr/>
           <p:nvPr/>
         </p:nvSpPr>
@@ -12602,7 +12802,7 @@
       </p:sp>
       <p:sp>
         <p:nvSpPr>
-          <p:cNvPr id="11" name="Shape 8"/>
+          <p:cNvPr id="12" name="Shape 9"/>
           <p:cNvSpPr/>
           <p:nvPr/>
         </p:nvSpPr>
@@ -12624,7 +12824,7 @@
       </p:sp>
       <p:sp>
         <p:nvSpPr>
-          <p:cNvPr id="12" name="Shape 9"/>
+          <p:cNvPr id="13" name="Shape 10"/>
           <p:cNvSpPr/>
           <p:nvPr/>
         </p:nvSpPr>
@@ -12644,7 +12844,7 @@
       </p:sp>
       <p:sp>
         <p:nvSpPr>
-          <p:cNvPr id="13" name="Text 10"/>
+          <p:cNvPr id="14" name="Text 11"/>
           <p:cNvSpPr/>
           <p:nvPr/>
         </p:nvSpPr>
@@ -12683,7 +12883,7 @@
       </p:sp>
       <p:sp>
         <p:nvSpPr>
-          <p:cNvPr id="14" name="Text 11"/>
+          <p:cNvPr id="15" name="Text 12"/>
           <p:cNvSpPr/>
           <p:nvPr/>
         </p:nvSpPr>
@@ -12722,7 +12922,7 @@
       </p:sp>
       <p:sp>
         <p:nvSpPr>
-          <p:cNvPr id="15" name="Text 12"/>
+          <p:cNvPr id="16" name="Text 13"/>
           <p:cNvSpPr/>
           <p:nvPr/>
         </p:nvSpPr>
@@ -12764,7 +12964,7 @@
       </p:sp>
       <p:sp>
         <p:nvSpPr>
-          <p:cNvPr id="16" name="Shape 13"/>
+          <p:cNvPr id="17" name="Shape 14"/>
           <p:cNvSpPr/>
           <p:nvPr/>
         </p:nvSpPr>
@@ -12786,7 +12986,7 @@
       </p:sp>
       <p:sp>
         <p:nvSpPr>
-          <p:cNvPr id="17" name="Shape 14"/>
+          <p:cNvPr id="18" name="Shape 15"/>
           <p:cNvSpPr/>
           <p:nvPr/>
         </p:nvSpPr>
@@ -12806,7 +13006,7 @@
       </p:sp>
       <p:sp>
         <p:nvSpPr>
-          <p:cNvPr id="18" name="Text 15"/>
+          <p:cNvPr id="19" name="Text 16"/>
           <p:cNvSpPr/>
           <p:nvPr/>
         </p:nvSpPr>
@@ -12845,7 +13045,7 @@
       </p:sp>
       <p:sp>
         <p:nvSpPr>
-          <p:cNvPr id="19" name="Text 16"/>
+          <p:cNvPr id="20" name="Text 17"/>
           <p:cNvSpPr/>
           <p:nvPr/>
         </p:nvSpPr>
@@ -12884,7 +13084,7 @@
       </p:sp>
       <p:sp>
         <p:nvSpPr>
-          <p:cNvPr id="20" name="Text 17"/>
+          <p:cNvPr id="21" name="Text 18"/>
           <p:cNvSpPr/>
           <p:nvPr/>
         </p:nvSpPr>
@@ -12926,7 +13126,7 @@
       </p:sp>
       <p:sp>
         <p:nvSpPr>
-          <p:cNvPr id="21" name="Shape 18"/>
+          <p:cNvPr id="22" name="Shape 19"/>
           <p:cNvSpPr/>
           <p:nvPr/>
         </p:nvSpPr>
@@ -12948,7 +13148,7 @@
       </p:sp>
       <p:sp>
         <p:nvSpPr>
-          <p:cNvPr id="22" name="Shape 19"/>
+          <p:cNvPr id="23" name="Shape 20"/>
           <p:cNvSpPr/>
           <p:nvPr/>
         </p:nvSpPr>
@@ -12968,7 +13168,7 @@
       </p:sp>
       <p:sp>
         <p:nvSpPr>
-          <p:cNvPr id="23" name="Text 20"/>
+          <p:cNvPr id="24" name="Text 21"/>
           <p:cNvSpPr/>
           <p:nvPr/>
         </p:nvSpPr>
@@ -13007,7 +13207,7 @@
       </p:sp>
       <p:sp>
         <p:nvSpPr>
-          <p:cNvPr id="24" name="Text 21"/>
+          <p:cNvPr id="25" name="Text 22"/>
           <p:cNvSpPr/>
           <p:nvPr/>
         </p:nvSpPr>
@@ -13046,7 +13246,7 @@
       </p:sp>
       <p:sp>
         <p:nvSpPr>
-          <p:cNvPr id="25" name="Text 22"/>
+          <p:cNvPr id="26" name="Text 23"/>
           <p:cNvSpPr/>
           <p:nvPr/>
         </p:nvSpPr>
@@ -13088,7 +13288,7 @@
       </p:sp>
       <p:sp>
         <p:nvSpPr>
-          <p:cNvPr id="26" name="Shape 23"/>
+          <p:cNvPr id="27" name="Shape 24"/>
           <p:cNvSpPr/>
           <p:nvPr/>
         </p:nvSpPr>
@@ -13110,7 +13310,7 @@
       </p:sp>
       <p:sp>
         <p:nvSpPr>
-          <p:cNvPr id="27" name="Shape 24"/>
+          <p:cNvPr id="28" name="Shape 25"/>
           <p:cNvSpPr/>
           <p:nvPr/>
         </p:nvSpPr>
@@ -13130,7 +13330,7 @@
       </p:sp>
       <p:sp>
         <p:nvSpPr>
-          <p:cNvPr id="28" name="Text 25"/>
+          <p:cNvPr id="29" name="Text 26"/>
           <p:cNvSpPr/>
           <p:nvPr/>
         </p:nvSpPr>
@@ -13169,7 +13369,7 @@
       </p:sp>
       <p:sp>
         <p:nvSpPr>
-          <p:cNvPr id="29" name="Text 26"/>
+          <p:cNvPr id="30" name="Text 27"/>
           <p:cNvSpPr/>
           <p:nvPr/>
         </p:nvSpPr>
@@ -13208,7 +13408,7 @@
       </p:sp>
       <p:sp>
         <p:nvSpPr>
-          <p:cNvPr id="30" name="Text 27"/>
+          <p:cNvPr id="31" name="Text 28"/>
           <p:cNvSpPr/>
           <p:nvPr/>
         </p:nvSpPr>
@@ -13250,7 +13450,7 @@
       </p:sp>
       <p:sp>
         <p:nvSpPr>
-          <p:cNvPr id="31" name="Shape 28"/>
+          <p:cNvPr id="32" name="Shape 29"/>
           <p:cNvSpPr/>
           <p:nvPr/>
         </p:nvSpPr>
@@ -13272,7 +13472,7 @@
       </p:sp>
       <p:sp>
         <p:nvSpPr>
-          <p:cNvPr id="32" name="Text 29"/>
+          <p:cNvPr id="33" name="Text 30"/>
           <p:cNvSpPr/>
           <p:nvPr/>
         </p:nvSpPr>
@@ -13311,7 +13511,7 @@
       </p:sp>
       <p:sp>
         <p:nvSpPr>
-          <p:cNvPr id="33" name="Text 30"/>
+          <p:cNvPr id="34" name="Text 31"/>
           <p:cNvSpPr/>
           <p:nvPr/>
         </p:nvSpPr>
@@ -13363,7 +13563,7 @@
         </p:nvSpPr>
         <p:spPr>
           <a:xfrm>
-            <a:off x="11368735" y="6437376"/>
+            <a:off x="11368735" y="6327648"/>
             <a:ext cx="365760" cy="274320"/>
           </a:xfrm>
           <a:prstGeom prst="rect">
@@ -13410,13 +13610,6 @@
 <file path=ppt/slides/slide2.xml><?xml version="1.0" encoding="utf-8"?>
 <p:sld xmlns:a="http://schemas.openxmlformats.org/drawingml/2006/main" xmlns:r="http://schemas.openxmlformats.org/officeDocument/2006/relationships" xmlns:p="http://schemas.openxmlformats.org/presentationml/2006/main">
   <p:cSld name="Slide 2">
-    <p:bg>
-      <p:bgPr>
-        <a:solidFill>
-          <a:srgbClr val="FFFFFF"/>
-        </a:solidFill>
-      </p:bgPr>
-    </p:bg>
     <p:spTree>
       <p:nvGrpSpPr>
         <p:cNvPr id="1" name=""/>
@@ -13433,7 +13626,29 @@
       </p:grpSpPr>
       <p:sp>
         <p:nvSpPr>
-          <p:cNvPr id="2" name="Text 0"/>
+          <p:cNvPr id="2" name="Shape 0"/>
+          <p:cNvSpPr/>
+          <p:nvPr/>
+        </p:nvSpPr>
+        <p:spPr>
+          <a:xfrm>
+            <a:off x="231343" y="194767"/>
+            <a:ext cx="11716207" cy="6473952"/>
+          </a:xfrm>
+          <a:prstGeom prst="roundRect">
+            <a:avLst>
+              <a:gd name="adj" fmla="val 3107"/>
+            </a:avLst>
+          </a:prstGeom>
+          <a:solidFill>
+            <a:srgbClr val="FFFFFF"/>
+          </a:solidFill>
+          <a:ln/>
+        </p:spPr>
+      </p:sp>
+      <p:sp>
+        <p:nvSpPr>
+          <p:cNvPr id="3" name="Text 1"/>
           <p:cNvSpPr/>
           <p:nvPr/>
         </p:nvSpPr>
@@ -13472,7 +13687,7 @@
       </p:sp>
       <p:sp>
         <p:nvSpPr>
-          <p:cNvPr id="3" name="Text 1"/>
+          <p:cNvPr id="4" name="Text 2"/>
           <p:cNvSpPr/>
           <p:nvPr/>
         </p:nvSpPr>
@@ -13514,7 +13729,7 @@
       </p:sp>
       <p:sp>
         <p:nvSpPr>
-          <p:cNvPr id="4" name="Shape 2"/>
+          <p:cNvPr id="5" name="Shape 3"/>
           <p:cNvSpPr/>
           <p:nvPr/>
         </p:nvSpPr>
@@ -13536,7 +13751,7 @@
       </p:sp>
       <p:sp>
         <p:nvSpPr>
-          <p:cNvPr id="5" name="Text 3"/>
+          <p:cNvPr id="6" name="Text 4"/>
           <p:cNvSpPr/>
           <p:nvPr/>
         </p:nvSpPr>
@@ -13575,7 +13790,7 @@
       </p:sp>
       <p:pic>
         <p:nvPicPr>
-          <p:cNvPr id="6" name="Image 0" descr="preencoded.png">    </p:cNvPr>
+          <p:cNvPr id="7" name="Image 0" descr="preencoded.png">    </p:cNvPr>
           <p:cNvPicPr>
             <a:picLocks noChangeAspect="1"/>
           </p:cNvPicPr>
@@ -13589,7 +13804,7 @@
         </p:blipFill>
         <p:spPr>
           <a:xfrm>
-            <a:off x="566928" y="6254496"/>
+            <a:off x="566928" y="6126480"/>
             <a:ext cx="1481328" cy="457200"/>
           </a:xfrm>
           <a:prstGeom prst="rect">
@@ -13599,7 +13814,7 @@
       </p:pic>
       <p:sp>
         <p:nvSpPr>
-          <p:cNvPr id="7" name="Shape 4"/>
+          <p:cNvPr id="8" name="Shape 5"/>
           <p:cNvSpPr/>
           <p:nvPr/>
         </p:nvSpPr>
@@ -13626,7 +13841,7 @@
       </p:sp>
       <p:sp>
         <p:nvSpPr>
-          <p:cNvPr id="8" name="Shape 5"/>
+          <p:cNvPr id="9" name="Shape 6"/>
           <p:cNvSpPr/>
           <p:nvPr/>
         </p:nvSpPr>
@@ -13646,7 +13861,7 @@
       </p:sp>
       <p:sp>
         <p:nvSpPr>
-          <p:cNvPr id="9" name="Text 6"/>
+          <p:cNvPr id="10" name="Text 7"/>
           <p:cNvSpPr/>
           <p:nvPr/>
         </p:nvSpPr>
@@ -13685,7 +13900,7 @@
       </p:sp>
       <p:sp>
         <p:nvSpPr>
-          <p:cNvPr id="10" name="Text 7"/>
+          <p:cNvPr id="11" name="Text 8"/>
           <p:cNvSpPr/>
           <p:nvPr/>
         </p:nvSpPr>
@@ -13724,7 +13939,7 @@
       </p:sp>
       <p:sp>
         <p:nvSpPr>
-          <p:cNvPr id="11" name="Text 8"/>
+          <p:cNvPr id="12" name="Text 9"/>
           <p:cNvSpPr/>
           <p:nvPr/>
         </p:nvSpPr>
@@ -13766,7 +13981,7 @@
       </p:sp>
       <p:sp>
         <p:nvSpPr>
-          <p:cNvPr id="12" name="Shape 9"/>
+          <p:cNvPr id="13" name="Shape 10"/>
           <p:cNvSpPr/>
           <p:nvPr/>
         </p:nvSpPr>
@@ -13793,7 +14008,7 @@
       </p:sp>
       <p:sp>
         <p:nvSpPr>
-          <p:cNvPr id="13" name="Shape 10"/>
+          <p:cNvPr id="14" name="Shape 11"/>
           <p:cNvSpPr/>
           <p:nvPr/>
         </p:nvSpPr>
@@ -13813,7 +14028,7 @@
       </p:sp>
       <p:sp>
         <p:nvSpPr>
-          <p:cNvPr id="14" name="Text 11"/>
+          <p:cNvPr id="15" name="Text 12"/>
           <p:cNvSpPr/>
           <p:nvPr/>
         </p:nvSpPr>
@@ -13852,7 +14067,7 @@
       </p:sp>
       <p:sp>
         <p:nvSpPr>
-          <p:cNvPr id="15" name="Text 12"/>
+          <p:cNvPr id="16" name="Text 13"/>
           <p:cNvSpPr/>
           <p:nvPr/>
         </p:nvSpPr>
@@ -13891,7 +14106,7 @@
       </p:sp>
       <p:sp>
         <p:nvSpPr>
-          <p:cNvPr id="16" name="Text 13"/>
+          <p:cNvPr id="17" name="Text 14"/>
           <p:cNvSpPr/>
           <p:nvPr/>
         </p:nvSpPr>
@@ -13933,7 +14148,7 @@
       </p:sp>
       <p:sp>
         <p:nvSpPr>
-          <p:cNvPr id="17" name="Shape 14"/>
+          <p:cNvPr id="18" name="Shape 15"/>
           <p:cNvSpPr/>
           <p:nvPr/>
         </p:nvSpPr>
@@ -13960,7 +14175,7 @@
       </p:sp>
       <p:sp>
         <p:nvSpPr>
-          <p:cNvPr id="18" name="Shape 15"/>
+          <p:cNvPr id="19" name="Shape 16"/>
           <p:cNvSpPr/>
           <p:nvPr/>
         </p:nvSpPr>
@@ -13980,7 +14195,7 @@
       </p:sp>
       <p:sp>
         <p:nvSpPr>
-          <p:cNvPr id="19" name="Text 16"/>
+          <p:cNvPr id="20" name="Text 17"/>
           <p:cNvSpPr/>
           <p:nvPr/>
         </p:nvSpPr>
@@ -14019,7 +14234,7 @@
       </p:sp>
       <p:sp>
         <p:nvSpPr>
-          <p:cNvPr id="20" name="Text 17"/>
+          <p:cNvPr id="21" name="Text 18"/>
           <p:cNvSpPr/>
           <p:nvPr/>
         </p:nvSpPr>
@@ -14058,7 +14273,7 @@
       </p:sp>
       <p:sp>
         <p:nvSpPr>
-          <p:cNvPr id="21" name="Text 18"/>
+          <p:cNvPr id="22" name="Text 19"/>
           <p:cNvSpPr/>
           <p:nvPr/>
         </p:nvSpPr>
@@ -14100,7 +14315,7 @@
       </p:sp>
       <p:sp>
         <p:nvSpPr>
-          <p:cNvPr id="22" name="Shape 19"/>
+          <p:cNvPr id="23" name="Shape 20"/>
           <p:cNvSpPr/>
           <p:nvPr/>
         </p:nvSpPr>
@@ -14127,7 +14342,7 @@
       </p:sp>
       <p:sp>
         <p:nvSpPr>
-          <p:cNvPr id="23" name="Shape 20"/>
+          <p:cNvPr id="24" name="Shape 21"/>
           <p:cNvSpPr/>
           <p:nvPr/>
         </p:nvSpPr>
@@ -14147,7 +14362,7 @@
       </p:sp>
       <p:sp>
         <p:nvSpPr>
-          <p:cNvPr id="24" name="Text 21"/>
+          <p:cNvPr id="25" name="Text 22"/>
           <p:cNvSpPr/>
           <p:nvPr/>
         </p:nvSpPr>
@@ -14186,7 +14401,7 @@
       </p:sp>
       <p:sp>
         <p:nvSpPr>
-          <p:cNvPr id="25" name="Text 22"/>
+          <p:cNvPr id="26" name="Text 23"/>
           <p:cNvSpPr/>
           <p:nvPr/>
         </p:nvSpPr>
@@ -14225,7 +14440,7 @@
       </p:sp>
       <p:sp>
         <p:nvSpPr>
-          <p:cNvPr id="26" name="Text 23"/>
+          <p:cNvPr id="27" name="Text 24"/>
           <p:cNvSpPr/>
           <p:nvPr/>
         </p:nvSpPr>
@@ -14267,7 +14482,7 @@
       </p:sp>
       <p:sp>
         <p:nvSpPr>
-          <p:cNvPr id="27" name="Shape 24"/>
+          <p:cNvPr id="28" name="Shape 25"/>
           <p:cNvSpPr/>
           <p:nvPr/>
         </p:nvSpPr>
@@ -14289,7 +14504,7 @@
       </p:sp>
       <p:sp>
         <p:nvSpPr>
-          <p:cNvPr id="28" name="Shape 25"/>
+          <p:cNvPr id="29" name="Shape 26"/>
           <p:cNvSpPr/>
           <p:nvPr/>
         </p:nvSpPr>
@@ -14309,7 +14524,7 @@
       </p:sp>
       <p:sp>
         <p:nvSpPr>
-          <p:cNvPr id="29" name="Text 26"/>
+          <p:cNvPr id="30" name="Text 27"/>
           <p:cNvSpPr/>
           <p:nvPr/>
         </p:nvSpPr>
@@ -14348,7 +14563,7 @@
       </p:sp>
       <p:sp>
         <p:nvSpPr>
-          <p:cNvPr id="30" name="Text 27"/>
+          <p:cNvPr id="31" name="Text 28"/>
           <p:cNvSpPr/>
           <p:nvPr/>
         </p:nvSpPr>
@@ -14387,7 +14602,7 @@
       </p:sp>
       <p:sp>
         <p:nvSpPr>
-          <p:cNvPr id="31" name="Text 28"/>
+          <p:cNvPr id="32" name="Text 29"/>
           <p:cNvSpPr/>
           <p:nvPr/>
         </p:nvSpPr>
@@ -14439,7 +14654,7 @@
         </p:nvSpPr>
         <p:spPr>
           <a:xfrm>
-            <a:off x="11368735" y="6437376"/>
+            <a:off x="11368735" y="6327648"/>
             <a:ext cx="365760" cy="274320"/>
           </a:xfrm>
           <a:prstGeom prst="rect">
@@ -14486,13 +14701,6 @@
 <file path=ppt/slides/slide20.xml><?xml version="1.0" encoding="utf-8"?>
 <p:sld xmlns:a="http://schemas.openxmlformats.org/drawingml/2006/main" xmlns:r="http://schemas.openxmlformats.org/officeDocument/2006/relationships" xmlns:p="http://schemas.openxmlformats.org/presentationml/2006/main">
   <p:cSld name="Slide 20">
-    <p:bg>
-      <p:bgPr>
-        <a:solidFill>
-          <a:srgbClr val="FFFFFF"/>
-        </a:solidFill>
-      </p:bgPr>
-    </p:bg>
     <p:spTree>
       <p:nvGrpSpPr>
         <p:cNvPr id="1" name=""/>
@@ -14509,7 +14717,29 @@
       </p:grpSpPr>
       <p:sp>
         <p:nvSpPr>
-          <p:cNvPr id="2" name="Text 0"/>
+          <p:cNvPr id="2" name="Shape 0"/>
+          <p:cNvSpPr/>
+          <p:nvPr/>
+        </p:nvSpPr>
+        <p:spPr>
+          <a:xfrm>
+            <a:off x="231343" y="194767"/>
+            <a:ext cx="11716207" cy="6473952"/>
+          </a:xfrm>
+          <a:prstGeom prst="roundRect">
+            <a:avLst>
+              <a:gd name="adj" fmla="val 3107"/>
+            </a:avLst>
+          </a:prstGeom>
+          <a:solidFill>
+            <a:srgbClr val="FFFFFF"/>
+          </a:solidFill>
+          <a:ln/>
+        </p:spPr>
+      </p:sp>
+      <p:sp>
+        <p:nvSpPr>
+          <p:cNvPr id="3" name="Text 1"/>
           <p:cNvSpPr/>
           <p:nvPr/>
         </p:nvSpPr>
@@ -14548,7 +14778,7 @@
       </p:sp>
       <p:sp>
         <p:nvSpPr>
-          <p:cNvPr id="3" name="Shape 1"/>
+          <p:cNvPr id="4" name="Shape 2"/>
           <p:cNvSpPr/>
           <p:nvPr/>
         </p:nvSpPr>
@@ -14570,7 +14800,7 @@
       </p:sp>
       <p:sp>
         <p:nvSpPr>
-          <p:cNvPr id="4" name="Text 2"/>
+          <p:cNvPr id="5" name="Text 3"/>
           <p:cNvSpPr/>
           <p:nvPr/>
         </p:nvSpPr>
@@ -14609,7 +14839,7 @@
       </p:sp>
       <p:pic>
         <p:nvPicPr>
-          <p:cNvPr id="5" name="Image 0" descr="preencoded.png">    </p:cNvPr>
+          <p:cNvPr id="6" name="Image 0" descr="preencoded.png">    </p:cNvPr>
           <p:cNvPicPr>
             <a:picLocks noChangeAspect="1"/>
           </p:cNvPicPr>
@@ -14623,7 +14853,7 @@
         </p:blipFill>
         <p:spPr>
           <a:xfrm>
-            <a:off x="566928" y="6254496"/>
+            <a:off x="566928" y="6126480"/>
             <a:ext cx="1481328" cy="457200"/>
           </a:xfrm>
           <a:prstGeom prst="rect">
@@ -14633,7 +14863,7 @@
       </p:pic>
       <p:sp>
         <p:nvSpPr>
-          <p:cNvPr id="6" name="Shape 3"/>
+          <p:cNvPr id="7" name="Shape 4"/>
           <p:cNvSpPr/>
           <p:nvPr/>
         </p:nvSpPr>
@@ -14653,7 +14883,7 @@
       </p:sp>
       <p:sp>
         <p:nvSpPr>
-          <p:cNvPr id="7" name="Text 4"/>
+          <p:cNvPr id="8" name="Text 5"/>
           <p:cNvSpPr/>
           <p:nvPr/>
         </p:nvSpPr>
@@ -14692,7 +14922,7 @@
       </p:sp>
       <p:sp>
         <p:nvSpPr>
-          <p:cNvPr id="8" name="Text 5"/>
+          <p:cNvPr id="9" name="Text 6"/>
           <p:cNvSpPr/>
           <p:nvPr/>
         </p:nvSpPr>
@@ -14745,7 +14975,7 @@
       </p:sp>
       <p:sp>
         <p:nvSpPr>
-          <p:cNvPr id="9" name="Shape 6"/>
+          <p:cNvPr id="10" name="Shape 7"/>
           <p:cNvSpPr/>
           <p:nvPr/>
         </p:nvSpPr>
@@ -14765,7 +14995,7 @@
       </p:sp>
       <p:sp>
         <p:nvSpPr>
-          <p:cNvPr id="10" name="Text 7"/>
+          <p:cNvPr id="11" name="Text 8"/>
           <p:cNvSpPr/>
           <p:nvPr/>
         </p:nvSpPr>
@@ -14804,7 +15034,7 @@
       </p:sp>
       <p:sp>
         <p:nvSpPr>
-          <p:cNvPr id="11" name="Text 8"/>
+          <p:cNvPr id="12" name="Text 9"/>
           <p:cNvSpPr/>
           <p:nvPr/>
         </p:nvSpPr>
@@ -14857,7 +15087,7 @@
       </p:sp>
       <p:sp>
         <p:nvSpPr>
-          <p:cNvPr id="12" name="Shape 9"/>
+          <p:cNvPr id="13" name="Shape 10"/>
           <p:cNvSpPr/>
           <p:nvPr/>
         </p:nvSpPr>
@@ -14877,7 +15107,7 @@
       </p:sp>
       <p:sp>
         <p:nvSpPr>
-          <p:cNvPr id="13" name="Text 10"/>
+          <p:cNvPr id="14" name="Text 11"/>
           <p:cNvSpPr/>
           <p:nvPr/>
         </p:nvSpPr>
@@ -14916,7 +15146,7 @@
       </p:sp>
       <p:sp>
         <p:nvSpPr>
-          <p:cNvPr id="14" name="Text 11"/>
+          <p:cNvPr id="15" name="Text 12"/>
           <p:cNvSpPr/>
           <p:nvPr/>
         </p:nvSpPr>
@@ -14969,7 +15199,7 @@
       </p:sp>
       <p:sp>
         <p:nvSpPr>
-          <p:cNvPr id="15" name="Shape 12"/>
+          <p:cNvPr id="16" name="Shape 13"/>
           <p:cNvSpPr/>
           <p:nvPr/>
         </p:nvSpPr>
@@ -14989,7 +15219,7 @@
       </p:sp>
       <p:sp>
         <p:nvSpPr>
-          <p:cNvPr id="16" name="Text 13"/>
+          <p:cNvPr id="17" name="Text 14"/>
           <p:cNvSpPr/>
           <p:nvPr/>
         </p:nvSpPr>
@@ -15028,7 +15258,7 @@
       </p:sp>
       <p:sp>
         <p:nvSpPr>
-          <p:cNvPr id="17" name="Text 14"/>
+          <p:cNvPr id="18" name="Text 15"/>
           <p:cNvSpPr/>
           <p:nvPr/>
         </p:nvSpPr>
@@ -15091,7 +15321,7 @@
         </p:nvSpPr>
         <p:spPr>
           <a:xfrm>
-            <a:off x="11368735" y="6437376"/>
+            <a:off x="11368735" y="6327648"/>
             <a:ext cx="365760" cy="274320"/>
           </a:xfrm>
           <a:prstGeom prst="rect">
@@ -15138,13 +15368,6 @@
 <file path=ppt/slides/slide21.xml><?xml version="1.0" encoding="utf-8"?>
 <p:sld xmlns:a="http://schemas.openxmlformats.org/drawingml/2006/main" xmlns:r="http://schemas.openxmlformats.org/officeDocument/2006/relationships" xmlns:p="http://schemas.openxmlformats.org/presentationml/2006/main">
   <p:cSld name="Slide 21">
-    <p:bg>
-      <p:bgPr>
-        <a:solidFill>
-          <a:srgbClr val="FFFFFF"/>
-        </a:solidFill>
-      </p:bgPr>
-    </p:bg>
     <p:spTree>
       <p:nvGrpSpPr>
         <p:cNvPr id="1" name=""/>
@@ -15161,7 +15384,29 @@
       </p:grpSpPr>
       <p:sp>
         <p:nvSpPr>
-          <p:cNvPr id="2" name="Text 0"/>
+          <p:cNvPr id="2" name="Shape 0"/>
+          <p:cNvSpPr/>
+          <p:nvPr/>
+        </p:nvSpPr>
+        <p:spPr>
+          <a:xfrm>
+            <a:off x="231343" y="194767"/>
+            <a:ext cx="11716207" cy="6473952"/>
+          </a:xfrm>
+          <a:prstGeom prst="roundRect">
+            <a:avLst>
+              <a:gd name="adj" fmla="val 3107"/>
+            </a:avLst>
+          </a:prstGeom>
+          <a:solidFill>
+            <a:srgbClr val="FFFFFF"/>
+          </a:solidFill>
+          <a:ln/>
+        </p:spPr>
+      </p:sp>
+      <p:sp>
+        <p:nvSpPr>
+          <p:cNvPr id="3" name="Text 1"/>
           <p:cNvSpPr/>
           <p:nvPr/>
         </p:nvSpPr>
@@ -15200,7 +15445,7 @@
       </p:sp>
       <p:sp>
         <p:nvSpPr>
-          <p:cNvPr id="3" name="Shape 1"/>
+          <p:cNvPr id="4" name="Shape 2"/>
           <p:cNvSpPr/>
           <p:nvPr/>
         </p:nvSpPr>
@@ -15222,7 +15467,7 @@
       </p:sp>
       <p:sp>
         <p:nvSpPr>
-          <p:cNvPr id="4" name="Text 2"/>
+          <p:cNvPr id="5" name="Text 3"/>
           <p:cNvSpPr/>
           <p:nvPr/>
         </p:nvSpPr>
@@ -15261,7 +15506,7 @@
       </p:sp>
       <p:pic>
         <p:nvPicPr>
-          <p:cNvPr id="5" name="Image 0" descr="preencoded.png">    </p:cNvPr>
+          <p:cNvPr id="6" name="Image 0" descr="preencoded.png">    </p:cNvPr>
           <p:cNvPicPr>
             <a:picLocks noChangeAspect="1"/>
           </p:cNvPicPr>
@@ -15275,7 +15520,7 @@
         </p:blipFill>
         <p:spPr>
           <a:xfrm>
-            <a:off x="566928" y="6254496"/>
+            <a:off x="566928" y="6126480"/>
             <a:ext cx="1481328" cy="457200"/>
           </a:xfrm>
           <a:prstGeom prst="rect">
@@ -15285,7 +15530,7 @@
       </p:pic>
       <p:sp>
         <p:nvSpPr>
-          <p:cNvPr id="6" name="Shape 3"/>
+          <p:cNvPr id="7" name="Shape 4"/>
           <p:cNvSpPr/>
           <p:nvPr/>
         </p:nvSpPr>
@@ -15307,7 +15552,7 @@
       </p:sp>
       <p:sp>
         <p:nvSpPr>
-          <p:cNvPr id="7" name="Text 4"/>
+          <p:cNvPr id="8" name="Text 5"/>
           <p:cNvSpPr/>
           <p:nvPr/>
         </p:nvSpPr>
@@ -15346,7 +15591,7 @@
       </p:sp>
       <p:sp>
         <p:nvSpPr>
-          <p:cNvPr id="8" name="Text 5"/>
+          <p:cNvPr id="9" name="Text 6"/>
           <p:cNvSpPr/>
           <p:nvPr/>
         </p:nvSpPr>
@@ -15388,7 +15633,7 @@
       </p:sp>
       <p:sp>
         <p:nvSpPr>
-          <p:cNvPr id="9" name="Shape 6"/>
+          <p:cNvPr id="10" name="Shape 7"/>
           <p:cNvSpPr/>
           <p:nvPr/>
         </p:nvSpPr>
@@ -15410,7 +15655,7 @@
       </p:sp>
       <p:sp>
         <p:nvSpPr>
-          <p:cNvPr id="10" name="Text 7"/>
+          <p:cNvPr id="11" name="Text 8"/>
           <p:cNvSpPr/>
           <p:nvPr/>
         </p:nvSpPr>
@@ -15449,7 +15694,7 @@
       </p:sp>
       <p:sp>
         <p:nvSpPr>
-          <p:cNvPr id="11" name="Text 8"/>
+          <p:cNvPr id="12" name="Text 9"/>
           <p:cNvSpPr/>
           <p:nvPr/>
         </p:nvSpPr>
@@ -15491,7 +15736,7 @@
       </p:sp>
       <p:sp>
         <p:nvSpPr>
-          <p:cNvPr id="12" name="Shape 9"/>
+          <p:cNvPr id="13" name="Shape 10"/>
           <p:cNvSpPr/>
           <p:nvPr/>
         </p:nvSpPr>
@@ -15518,7 +15763,7 @@
       </p:sp>
       <p:sp>
         <p:nvSpPr>
-          <p:cNvPr id="13" name="Text 10"/>
+          <p:cNvPr id="14" name="Text 11"/>
           <p:cNvSpPr/>
           <p:nvPr/>
         </p:nvSpPr>
@@ -15557,7 +15802,7 @@
       </p:sp>
       <p:sp>
         <p:nvSpPr>
-          <p:cNvPr id="14" name="Text 11"/>
+          <p:cNvPr id="15" name="Text 12"/>
           <p:cNvSpPr/>
           <p:nvPr/>
         </p:nvSpPr>
@@ -15599,7 +15844,7 @@
       </p:sp>
       <p:sp>
         <p:nvSpPr>
-          <p:cNvPr id="15" name="Shape 12"/>
+          <p:cNvPr id="16" name="Shape 13"/>
           <p:cNvSpPr/>
           <p:nvPr/>
         </p:nvSpPr>
@@ -15621,7 +15866,7 @@
       </p:sp>
       <p:sp>
         <p:nvSpPr>
-          <p:cNvPr id="16" name="Text 13"/>
+          <p:cNvPr id="17" name="Text 14"/>
           <p:cNvSpPr/>
           <p:nvPr/>
         </p:nvSpPr>
@@ -15660,7 +15905,7 @@
       </p:sp>
       <p:sp>
         <p:nvSpPr>
-          <p:cNvPr id="17" name="Text 14"/>
+          <p:cNvPr id="18" name="Text 15"/>
           <p:cNvSpPr/>
           <p:nvPr/>
         </p:nvSpPr>
@@ -15712,7 +15957,7 @@
         </p:nvSpPr>
         <p:spPr>
           <a:xfrm>
-            <a:off x="11368735" y="6437376"/>
+            <a:off x="11368735" y="6327648"/>
             <a:ext cx="365760" cy="274320"/>
           </a:xfrm>
           <a:prstGeom prst="rect">
@@ -15759,13 +16004,6 @@
 <file path=ppt/slides/slide22.xml><?xml version="1.0" encoding="utf-8"?>
 <p:sld xmlns:a="http://schemas.openxmlformats.org/drawingml/2006/main" xmlns:r="http://schemas.openxmlformats.org/officeDocument/2006/relationships" xmlns:p="http://schemas.openxmlformats.org/presentationml/2006/main">
   <p:cSld name="Slide 22">
-    <p:bg>
-      <p:bgPr>
-        <a:solidFill>
-          <a:srgbClr val="FFFFFF"/>
-        </a:solidFill>
-      </p:bgPr>
-    </p:bg>
     <p:spTree>
       <p:nvGrpSpPr>
         <p:cNvPr id="1" name=""/>
@@ -15782,7 +16020,29 @@
       </p:grpSpPr>
       <p:sp>
         <p:nvSpPr>
-          <p:cNvPr id="2" name="Text 0"/>
+          <p:cNvPr id="2" name="Shape 0"/>
+          <p:cNvSpPr/>
+          <p:nvPr/>
+        </p:nvSpPr>
+        <p:spPr>
+          <a:xfrm>
+            <a:off x="231343" y="194767"/>
+            <a:ext cx="11716207" cy="6473952"/>
+          </a:xfrm>
+          <a:prstGeom prst="roundRect">
+            <a:avLst>
+              <a:gd name="adj" fmla="val 3107"/>
+            </a:avLst>
+          </a:prstGeom>
+          <a:solidFill>
+            <a:srgbClr val="FFFFFF"/>
+          </a:solidFill>
+          <a:ln/>
+        </p:spPr>
+      </p:sp>
+      <p:sp>
+        <p:nvSpPr>
+          <p:cNvPr id="3" name="Text 1"/>
           <p:cNvSpPr/>
           <p:nvPr/>
         </p:nvSpPr>
@@ -15821,7 +16081,7 @@
       </p:sp>
       <p:sp>
         <p:nvSpPr>
-          <p:cNvPr id="3" name="Shape 1"/>
+          <p:cNvPr id="4" name="Shape 2"/>
           <p:cNvSpPr/>
           <p:nvPr/>
         </p:nvSpPr>
@@ -15843,7 +16103,7 @@
       </p:sp>
       <p:sp>
         <p:nvSpPr>
-          <p:cNvPr id="4" name="Text 2"/>
+          <p:cNvPr id="5" name="Text 3"/>
           <p:cNvSpPr/>
           <p:nvPr/>
         </p:nvSpPr>
@@ -15882,7 +16142,7 @@
       </p:sp>
       <p:pic>
         <p:nvPicPr>
-          <p:cNvPr id="5" name="Image 0" descr="preencoded.png">    </p:cNvPr>
+          <p:cNvPr id="6" name="Image 0" descr="preencoded.png">    </p:cNvPr>
           <p:cNvPicPr>
             <a:picLocks noChangeAspect="1"/>
           </p:cNvPicPr>
@@ -15896,7 +16156,7 @@
         </p:blipFill>
         <p:spPr>
           <a:xfrm>
-            <a:off x="566928" y="6254496"/>
+            <a:off x="566928" y="6126480"/>
             <a:ext cx="1481328" cy="457200"/>
           </a:xfrm>
           <a:prstGeom prst="rect">
@@ -15906,7 +16166,7 @@
       </p:pic>
       <p:sp>
         <p:nvSpPr>
-          <p:cNvPr id="6" name="Shape 3"/>
+          <p:cNvPr id="7" name="Shape 4"/>
           <p:cNvSpPr/>
           <p:nvPr/>
         </p:nvSpPr>
@@ -15933,7 +16193,7 @@
       </p:sp>
       <p:sp>
         <p:nvSpPr>
-          <p:cNvPr id="7" name="Shape 4"/>
+          <p:cNvPr id="8" name="Shape 5"/>
           <p:cNvSpPr/>
           <p:nvPr/>
         </p:nvSpPr>
@@ -15960,7 +16220,7 @@
       </p:sp>
       <p:sp>
         <p:nvSpPr>
-          <p:cNvPr id="8" name="Shape 5"/>
+          <p:cNvPr id="9" name="Shape 6"/>
           <p:cNvSpPr/>
           <p:nvPr/>
         </p:nvSpPr>
@@ -15980,7 +16240,7 @@
       </p:sp>
       <p:sp>
         <p:nvSpPr>
-          <p:cNvPr id="9" name="Shape 6"/>
+          <p:cNvPr id="10" name="Shape 7"/>
           <p:cNvSpPr/>
           <p:nvPr/>
         </p:nvSpPr>
@@ -16000,7 +16260,7 @@
       </p:sp>
       <p:sp>
         <p:nvSpPr>
-          <p:cNvPr id="10" name="Text 7"/>
+          <p:cNvPr id="11" name="Text 8"/>
           <p:cNvSpPr/>
           <p:nvPr/>
         </p:nvSpPr>
@@ -16039,7 +16299,7 @@
       </p:sp>
       <p:sp>
         <p:nvSpPr>
-          <p:cNvPr id="11" name="Shape 8"/>
+          <p:cNvPr id="12" name="Shape 9"/>
           <p:cNvSpPr/>
           <p:nvPr/>
         </p:nvSpPr>
@@ -16066,7 +16326,7 @@
       </p:sp>
       <p:sp>
         <p:nvSpPr>
-          <p:cNvPr id="12" name="Shape 9"/>
+          <p:cNvPr id="13" name="Shape 10"/>
           <p:cNvSpPr/>
           <p:nvPr/>
         </p:nvSpPr>
@@ -16086,7 +16346,7 @@
       </p:sp>
       <p:sp>
         <p:nvSpPr>
-          <p:cNvPr id="13" name="Shape 10"/>
+          <p:cNvPr id="14" name="Shape 11"/>
           <p:cNvSpPr/>
           <p:nvPr/>
         </p:nvSpPr>
@@ -16106,7 +16366,7 @@
       </p:sp>
       <p:sp>
         <p:nvSpPr>
-          <p:cNvPr id="14" name="Text 11"/>
+          <p:cNvPr id="15" name="Text 12"/>
           <p:cNvSpPr/>
           <p:nvPr/>
         </p:nvSpPr>
@@ -16145,7 +16405,7 @@
       </p:sp>
       <p:sp>
         <p:nvSpPr>
-          <p:cNvPr id="15" name="Shape 12"/>
+          <p:cNvPr id="16" name="Shape 13"/>
           <p:cNvSpPr/>
           <p:nvPr/>
         </p:nvSpPr>
@@ -16172,7 +16432,7 @@
       </p:sp>
       <p:sp>
         <p:nvSpPr>
-          <p:cNvPr id="16" name="Shape 13"/>
+          <p:cNvPr id="17" name="Shape 14"/>
           <p:cNvSpPr/>
           <p:nvPr/>
         </p:nvSpPr>
@@ -16192,7 +16452,7 @@
       </p:sp>
       <p:sp>
         <p:nvSpPr>
-          <p:cNvPr id="17" name="Shape 14"/>
+          <p:cNvPr id="18" name="Shape 15"/>
           <p:cNvSpPr/>
           <p:nvPr/>
         </p:nvSpPr>
@@ -16212,7 +16472,7 @@
       </p:sp>
       <p:sp>
         <p:nvSpPr>
-          <p:cNvPr id="18" name="Text 15"/>
+          <p:cNvPr id="19" name="Text 16"/>
           <p:cNvSpPr/>
           <p:nvPr/>
         </p:nvSpPr>
@@ -16251,7 +16511,7 @@
       </p:sp>
       <p:sp>
         <p:nvSpPr>
-          <p:cNvPr id="19" name="Shape 16"/>
+          <p:cNvPr id="20" name="Shape 17"/>
           <p:cNvSpPr/>
           <p:nvPr/>
         </p:nvSpPr>
@@ -16278,7 +16538,7 @@
       </p:sp>
       <p:sp>
         <p:nvSpPr>
-          <p:cNvPr id="20" name="Shape 17"/>
+          <p:cNvPr id="21" name="Shape 18"/>
           <p:cNvSpPr/>
           <p:nvPr/>
         </p:nvSpPr>
@@ -16298,7 +16558,7 @@
       </p:sp>
       <p:sp>
         <p:nvSpPr>
-          <p:cNvPr id="21" name="Shape 18"/>
+          <p:cNvPr id="22" name="Shape 19"/>
           <p:cNvSpPr/>
           <p:nvPr/>
         </p:nvSpPr>
@@ -16318,7 +16578,7 @@
       </p:sp>
       <p:sp>
         <p:nvSpPr>
-          <p:cNvPr id="22" name="Text 19"/>
+          <p:cNvPr id="23" name="Text 20"/>
           <p:cNvSpPr/>
           <p:nvPr/>
         </p:nvSpPr>
@@ -16357,7 +16617,7 @@
       </p:sp>
       <p:sp>
         <p:nvSpPr>
-          <p:cNvPr id="23" name="Text 20"/>
+          <p:cNvPr id="24" name="Text 21"/>
           <p:cNvSpPr/>
           <p:nvPr/>
         </p:nvSpPr>
@@ -16406,7 +16666,7 @@
         </p:nvSpPr>
         <p:spPr>
           <a:xfrm>
-            <a:off x="11368735" y="6437376"/>
+            <a:off x="11368735" y="6327648"/>
             <a:ext cx="365760" cy="274320"/>
           </a:xfrm>
           <a:prstGeom prst="rect">
@@ -16453,13 +16713,6 @@
 <file path=ppt/slides/slide23.xml><?xml version="1.0" encoding="utf-8"?>
 <p:sld xmlns:a="http://schemas.openxmlformats.org/drawingml/2006/main" xmlns:r="http://schemas.openxmlformats.org/officeDocument/2006/relationships" xmlns:p="http://schemas.openxmlformats.org/presentationml/2006/main">
   <p:cSld name="Slide 23">
-    <p:bg>
-      <p:bgPr>
-        <a:solidFill>
-          <a:srgbClr val="FFFFFF"/>
-        </a:solidFill>
-      </p:bgPr>
-    </p:bg>
     <p:spTree>
       <p:nvGrpSpPr>
         <p:cNvPr id="1" name=""/>
@@ -16476,7 +16729,29 @@
       </p:grpSpPr>
       <p:sp>
         <p:nvSpPr>
-          <p:cNvPr id="2" name="Text 0"/>
+          <p:cNvPr id="2" name="Shape 0"/>
+          <p:cNvSpPr/>
+          <p:nvPr/>
+        </p:nvSpPr>
+        <p:spPr>
+          <a:xfrm>
+            <a:off x="231343" y="194767"/>
+            <a:ext cx="11716207" cy="6473952"/>
+          </a:xfrm>
+          <a:prstGeom prst="roundRect">
+            <a:avLst>
+              <a:gd name="adj" fmla="val 3107"/>
+            </a:avLst>
+          </a:prstGeom>
+          <a:solidFill>
+            <a:srgbClr val="FFFFFF"/>
+          </a:solidFill>
+          <a:ln/>
+        </p:spPr>
+      </p:sp>
+      <p:sp>
+        <p:nvSpPr>
+          <p:cNvPr id="3" name="Text 1"/>
           <p:cNvSpPr/>
           <p:nvPr/>
         </p:nvSpPr>
@@ -16515,7 +16790,7 @@
       </p:sp>
       <p:sp>
         <p:nvSpPr>
-          <p:cNvPr id="3" name="Shape 1"/>
+          <p:cNvPr id="4" name="Shape 2"/>
           <p:cNvSpPr/>
           <p:nvPr/>
         </p:nvSpPr>
@@ -16537,7 +16812,7 @@
       </p:sp>
       <p:sp>
         <p:nvSpPr>
-          <p:cNvPr id="4" name="Text 2"/>
+          <p:cNvPr id="5" name="Text 3"/>
           <p:cNvSpPr/>
           <p:nvPr/>
         </p:nvSpPr>
@@ -16576,7 +16851,7 @@
       </p:sp>
       <p:pic>
         <p:nvPicPr>
-          <p:cNvPr id="5" name="Image 0" descr="preencoded.png">    </p:cNvPr>
+          <p:cNvPr id="6" name="Image 0" descr="preencoded.png">    </p:cNvPr>
           <p:cNvPicPr>
             <a:picLocks noChangeAspect="1"/>
           </p:cNvPicPr>
@@ -16590,7 +16865,7 @@
         </p:blipFill>
         <p:spPr>
           <a:xfrm>
-            <a:off x="566928" y="6254496"/>
+            <a:off x="566928" y="6126480"/>
             <a:ext cx="1481328" cy="457200"/>
           </a:xfrm>
           <a:prstGeom prst="rect">
@@ -16600,7 +16875,7 @@
       </p:pic>
       <p:sp>
         <p:nvSpPr>
-          <p:cNvPr id="6" name="Shape 3"/>
+          <p:cNvPr id="7" name="Shape 4"/>
           <p:cNvSpPr/>
           <p:nvPr/>
         </p:nvSpPr>
@@ -16627,7 +16902,7 @@
       </p:sp>
       <p:sp>
         <p:nvSpPr>
-          <p:cNvPr id="7" name="Shape 4"/>
+          <p:cNvPr id="8" name="Shape 5"/>
           <p:cNvSpPr/>
           <p:nvPr/>
         </p:nvSpPr>
@@ -16647,7 +16922,7 @@
       </p:sp>
       <p:sp>
         <p:nvSpPr>
-          <p:cNvPr id="8" name="Shape 5"/>
+          <p:cNvPr id="9" name="Shape 6"/>
           <p:cNvSpPr/>
           <p:nvPr/>
         </p:nvSpPr>
@@ -16667,7 +16942,7 @@
       </p:sp>
       <p:sp>
         <p:nvSpPr>
-          <p:cNvPr id="9" name="Shape 6"/>
+          <p:cNvPr id="10" name="Shape 7"/>
           <p:cNvSpPr/>
           <p:nvPr/>
         </p:nvSpPr>
@@ -16687,7 +16962,7 @@
       </p:sp>
       <p:sp>
         <p:nvSpPr>
-          <p:cNvPr id="10" name="Text 7"/>
+          <p:cNvPr id="11" name="Text 8"/>
           <p:cNvSpPr/>
           <p:nvPr/>
         </p:nvSpPr>
@@ -16740,7 +17015,7 @@
       </p:sp>
       <p:sp>
         <p:nvSpPr>
-          <p:cNvPr id="11" name="Shape 8"/>
+          <p:cNvPr id="12" name="Shape 9"/>
           <p:cNvSpPr/>
           <p:nvPr/>
         </p:nvSpPr>
@@ -16767,7 +17042,7 @@
       </p:sp>
       <p:sp>
         <p:nvSpPr>
-          <p:cNvPr id="12" name="Shape 9"/>
+          <p:cNvPr id="13" name="Shape 10"/>
           <p:cNvSpPr/>
           <p:nvPr/>
         </p:nvSpPr>
@@ -16787,7 +17062,7 @@
       </p:sp>
       <p:sp>
         <p:nvSpPr>
-          <p:cNvPr id="13" name="Shape 10"/>
+          <p:cNvPr id="14" name="Shape 11"/>
           <p:cNvSpPr/>
           <p:nvPr/>
         </p:nvSpPr>
@@ -16807,7 +17082,7 @@
       </p:sp>
       <p:sp>
         <p:nvSpPr>
-          <p:cNvPr id="14" name="Shape 11"/>
+          <p:cNvPr id="15" name="Shape 12"/>
           <p:cNvSpPr/>
           <p:nvPr/>
         </p:nvSpPr>
@@ -16827,7 +17102,7 @@
       </p:sp>
       <p:sp>
         <p:nvSpPr>
-          <p:cNvPr id="15" name="Text 12"/>
+          <p:cNvPr id="16" name="Text 13"/>
           <p:cNvSpPr/>
           <p:nvPr/>
         </p:nvSpPr>
@@ -16880,7 +17155,7 @@
       </p:sp>
       <p:sp>
         <p:nvSpPr>
-          <p:cNvPr id="16" name="Shape 13"/>
+          <p:cNvPr id="17" name="Shape 14"/>
           <p:cNvSpPr/>
           <p:nvPr/>
         </p:nvSpPr>
@@ -16907,7 +17182,7 @@
       </p:sp>
       <p:sp>
         <p:nvSpPr>
-          <p:cNvPr id="17" name="Shape 14"/>
+          <p:cNvPr id="18" name="Shape 15"/>
           <p:cNvSpPr/>
           <p:nvPr/>
         </p:nvSpPr>
@@ -16927,7 +17202,7 @@
       </p:sp>
       <p:sp>
         <p:nvSpPr>
-          <p:cNvPr id="18" name="Shape 15"/>
+          <p:cNvPr id="19" name="Shape 16"/>
           <p:cNvSpPr/>
           <p:nvPr/>
         </p:nvSpPr>
@@ -16947,7 +17222,7 @@
       </p:sp>
       <p:sp>
         <p:nvSpPr>
-          <p:cNvPr id="19" name="Shape 16"/>
+          <p:cNvPr id="20" name="Shape 17"/>
           <p:cNvSpPr/>
           <p:nvPr/>
         </p:nvSpPr>
@@ -16967,7 +17242,7 @@
       </p:sp>
       <p:sp>
         <p:nvSpPr>
-          <p:cNvPr id="20" name="Text 17"/>
+          <p:cNvPr id="21" name="Text 18"/>
           <p:cNvSpPr/>
           <p:nvPr/>
         </p:nvSpPr>
@@ -17020,7 +17295,7 @@
       </p:sp>
       <p:sp>
         <p:nvSpPr>
-          <p:cNvPr id="21" name="Shape 18"/>
+          <p:cNvPr id="22" name="Shape 19"/>
           <p:cNvSpPr/>
           <p:nvPr/>
         </p:nvSpPr>
@@ -17047,7 +17322,7 @@
       </p:sp>
       <p:sp>
         <p:nvSpPr>
-          <p:cNvPr id="22" name="Shape 19"/>
+          <p:cNvPr id="23" name="Shape 20"/>
           <p:cNvSpPr/>
           <p:nvPr/>
         </p:nvSpPr>
@@ -17067,7 +17342,7 @@
       </p:sp>
       <p:sp>
         <p:nvSpPr>
-          <p:cNvPr id="23" name="Shape 20"/>
+          <p:cNvPr id="24" name="Shape 21"/>
           <p:cNvSpPr/>
           <p:nvPr/>
         </p:nvSpPr>
@@ -17087,7 +17362,7 @@
       </p:sp>
       <p:sp>
         <p:nvSpPr>
-          <p:cNvPr id="24" name="Shape 21"/>
+          <p:cNvPr id="25" name="Shape 22"/>
           <p:cNvSpPr/>
           <p:nvPr/>
         </p:nvSpPr>
@@ -17107,7 +17382,7 @@
       </p:sp>
       <p:sp>
         <p:nvSpPr>
-          <p:cNvPr id="25" name="Text 22"/>
+          <p:cNvPr id="26" name="Text 23"/>
           <p:cNvSpPr/>
           <p:nvPr/>
         </p:nvSpPr>
@@ -17160,7 +17435,7 @@
       </p:sp>
       <p:sp>
         <p:nvSpPr>
-          <p:cNvPr id="26" name="Shape 23"/>
+          <p:cNvPr id="27" name="Shape 24"/>
           <p:cNvSpPr/>
           <p:nvPr/>
         </p:nvSpPr>
@@ -17187,7 +17462,7 @@
       </p:sp>
       <p:sp>
         <p:nvSpPr>
-          <p:cNvPr id="27" name="Shape 24"/>
+          <p:cNvPr id="28" name="Shape 25"/>
           <p:cNvSpPr/>
           <p:nvPr/>
         </p:nvSpPr>
@@ -17207,7 +17482,7 @@
       </p:sp>
       <p:sp>
         <p:nvSpPr>
-          <p:cNvPr id="28" name="Shape 25"/>
+          <p:cNvPr id="29" name="Shape 26"/>
           <p:cNvSpPr/>
           <p:nvPr/>
         </p:nvSpPr>
@@ -17227,7 +17502,7 @@
       </p:sp>
       <p:sp>
         <p:nvSpPr>
-          <p:cNvPr id="29" name="Shape 26"/>
+          <p:cNvPr id="30" name="Shape 27"/>
           <p:cNvSpPr/>
           <p:nvPr/>
         </p:nvSpPr>
@@ -17247,7 +17522,7 @@
       </p:sp>
       <p:sp>
         <p:nvSpPr>
-          <p:cNvPr id="30" name="Text 27"/>
+          <p:cNvPr id="31" name="Text 28"/>
           <p:cNvSpPr/>
           <p:nvPr/>
         </p:nvSpPr>
@@ -17310,7 +17585,7 @@
         </p:nvSpPr>
         <p:spPr>
           <a:xfrm>
-            <a:off x="11368735" y="6437376"/>
+            <a:off x="11368735" y="6327648"/>
             <a:ext cx="365760" cy="274320"/>
           </a:xfrm>
           <a:prstGeom prst="rect">
@@ -17357,13 +17632,6 @@
 <file path=ppt/slides/slide24.xml><?xml version="1.0" encoding="utf-8"?>
 <p:sld xmlns:a="http://schemas.openxmlformats.org/drawingml/2006/main" xmlns:r="http://schemas.openxmlformats.org/officeDocument/2006/relationships" xmlns:p="http://schemas.openxmlformats.org/presentationml/2006/main">
   <p:cSld name="Slide 24">
-    <p:bg>
-      <p:bgPr>
-        <a:solidFill>
-          <a:srgbClr val="FFFFFF"/>
-        </a:solidFill>
-      </p:bgPr>
-    </p:bg>
     <p:spTree>
       <p:nvGrpSpPr>
         <p:cNvPr id="1" name=""/>
@@ -17380,7 +17648,29 @@
       </p:grpSpPr>
       <p:sp>
         <p:nvSpPr>
-          <p:cNvPr id="2" name="Text 0"/>
+          <p:cNvPr id="2" name="Shape 0"/>
+          <p:cNvSpPr/>
+          <p:nvPr/>
+        </p:nvSpPr>
+        <p:spPr>
+          <a:xfrm>
+            <a:off x="231343" y="194767"/>
+            <a:ext cx="11716207" cy="6473952"/>
+          </a:xfrm>
+          <a:prstGeom prst="roundRect">
+            <a:avLst>
+              <a:gd name="adj" fmla="val 3107"/>
+            </a:avLst>
+          </a:prstGeom>
+          <a:solidFill>
+            <a:srgbClr val="FFFFFF"/>
+          </a:solidFill>
+          <a:ln/>
+        </p:spPr>
+      </p:sp>
+      <p:sp>
+        <p:nvSpPr>
+          <p:cNvPr id="3" name="Text 1"/>
           <p:cNvSpPr/>
           <p:nvPr/>
         </p:nvSpPr>
@@ -17419,7 +17709,7 @@
       </p:sp>
       <p:sp>
         <p:nvSpPr>
-          <p:cNvPr id="3" name="Shape 1"/>
+          <p:cNvPr id="4" name="Shape 2"/>
           <p:cNvSpPr/>
           <p:nvPr/>
         </p:nvSpPr>
@@ -17441,7 +17731,7 @@
       </p:sp>
       <p:sp>
         <p:nvSpPr>
-          <p:cNvPr id="4" name="Text 2"/>
+          <p:cNvPr id="5" name="Text 3"/>
           <p:cNvSpPr/>
           <p:nvPr/>
         </p:nvSpPr>
@@ -17480,7 +17770,7 @@
       </p:sp>
       <p:pic>
         <p:nvPicPr>
-          <p:cNvPr id="5" name="Image 0" descr="preencoded.png">    </p:cNvPr>
+          <p:cNvPr id="6" name="Image 0" descr="preencoded.png">    </p:cNvPr>
           <p:cNvPicPr>
             <a:picLocks noChangeAspect="1"/>
           </p:cNvPicPr>
@@ -17494,7 +17784,7 @@
         </p:blipFill>
         <p:spPr>
           <a:xfrm>
-            <a:off x="566928" y="6254496"/>
+            <a:off x="566928" y="6126480"/>
             <a:ext cx="1481328" cy="457200"/>
           </a:xfrm>
           <a:prstGeom prst="rect">
@@ -17504,7 +17794,7 @@
       </p:pic>
       <p:sp>
         <p:nvSpPr>
-          <p:cNvPr id="6" name="Shape 3"/>
+          <p:cNvPr id="7" name="Shape 4"/>
           <p:cNvSpPr/>
           <p:nvPr/>
         </p:nvSpPr>
@@ -17531,7 +17821,7 @@
       </p:sp>
       <p:sp>
         <p:nvSpPr>
-          <p:cNvPr id="7" name="Text 4"/>
+          <p:cNvPr id="8" name="Text 5"/>
           <p:cNvSpPr/>
           <p:nvPr/>
         </p:nvSpPr>
@@ -17570,7 +17860,7 @@
       </p:sp>
       <p:sp>
         <p:nvSpPr>
-          <p:cNvPr id="8" name="Text 5"/>
+          <p:cNvPr id="9" name="Text 6"/>
           <p:cNvSpPr/>
           <p:nvPr/>
         </p:nvSpPr>
@@ -17670,7 +17960,7 @@
       </p:sp>
       <p:sp>
         <p:nvSpPr>
-          <p:cNvPr id="9" name="Shape 6"/>
+          <p:cNvPr id="10" name="Shape 7"/>
           <p:cNvSpPr/>
           <p:nvPr/>
         </p:nvSpPr>
@@ -17692,7 +17982,7 @@
       </p:sp>
       <p:sp>
         <p:nvSpPr>
-          <p:cNvPr id="10" name="Text 7"/>
+          <p:cNvPr id="11" name="Text 8"/>
           <p:cNvSpPr/>
           <p:nvPr/>
         </p:nvSpPr>
@@ -17731,7 +18021,7 @@
       </p:sp>
       <p:sp>
         <p:nvSpPr>
-          <p:cNvPr id="11" name="Text 8"/>
+          <p:cNvPr id="12" name="Text 9"/>
           <p:cNvSpPr/>
           <p:nvPr/>
         </p:nvSpPr>
@@ -17773,7 +18063,7 @@
       </p:sp>
       <p:sp>
         <p:nvSpPr>
-          <p:cNvPr id="12" name="Shape 9"/>
+          <p:cNvPr id="13" name="Shape 10"/>
           <p:cNvSpPr/>
           <p:nvPr/>
         </p:nvSpPr>
@@ -17800,7 +18090,7 @@
       </p:sp>
       <p:sp>
         <p:nvSpPr>
-          <p:cNvPr id="13" name="Text 10"/>
+          <p:cNvPr id="14" name="Text 11"/>
           <p:cNvSpPr/>
           <p:nvPr/>
         </p:nvSpPr>
@@ -17839,7 +18129,7 @@
       </p:sp>
       <p:sp>
         <p:nvSpPr>
-          <p:cNvPr id="14" name="Text 11"/>
+          <p:cNvPr id="15" name="Text 12"/>
           <p:cNvSpPr/>
           <p:nvPr/>
         </p:nvSpPr>
@@ -17888,7 +18178,7 @@
         </p:nvSpPr>
         <p:spPr>
           <a:xfrm>
-            <a:off x="11368735" y="6437376"/>
+            <a:off x="11368735" y="6327648"/>
             <a:ext cx="365760" cy="274320"/>
           </a:xfrm>
           <a:prstGeom prst="rect">
@@ -17935,13 +18225,6 @@
 <file path=ppt/slides/slide25.xml><?xml version="1.0" encoding="utf-8"?>
 <p:sld xmlns:a="http://schemas.openxmlformats.org/drawingml/2006/main" xmlns:r="http://schemas.openxmlformats.org/officeDocument/2006/relationships" xmlns:p="http://schemas.openxmlformats.org/presentationml/2006/main">
   <p:cSld name="Slide 25">
-    <p:bg>
-      <p:bgPr>
-        <a:solidFill>
-          <a:srgbClr val="1B0942"/>
-        </a:solidFill>
-      </p:bgPr>
-    </p:bg>
     <p:spTree>
       <p:nvGrpSpPr>
         <p:cNvPr id="1" name=""/>
@@ -18458,13 +18741,6 @@
 <file path=ppt/slides/slide3.xml><?xml version="1.0" encoding="utf-8"?>
 <p:sld xmlns:a="http://schemas.openxmlformats.org/drawingml/2006/main" xmlns:r="http://schemas.openxmlformats.org/officeDocument/2006/relationships" xmlns:p="http://schemas.openxmlformats.org/presentationml/2006/main">
   <p:cSld name="Slide 3">
-    <p:bg>
-      <p:bgPr>
-        <a:solidFill>
-          <a:srgbClr val="FFFFFF"/>
-        </a:solidFill>
-      </p:bgPr>
-    </p:bg>
     <p:spTree>
       <p:nvGrpSpPr>
         <p:cNvPr id="1" name=""/>
@@ -18481,7 +18757,29 @@
       </p:grpSpPr>
       <p:sp>
         <p:nvSpPr>
-          <p:cNvPr id="2" name="Text 0"/>
+          <p:cNvPr id="2" name="Shape 0"/>
+          <p:cNvSpPr/>
+          <p:nvPr/>
+        </p:nvSpPr>
+        <p:spPr>
+          <a:xfrm>
+            <a:off x="231343" y="194767"/>
+            <a:ext cx="11716207" cy="6473952"/>
+          </a:xfrm>
+          <a:prstGeom prst="roundRect">
+            <a:avLst>
+              <a:gd name="adj" fmla="val 3107"/>
+            </a:avLst>
+          </a:prstGeom>
+          <a:solidFill>
+            <a:srgbClr val="FFFFFF"/>
+          </a:solidFill>
+          <a:ln/>
+        </p:spPr>
+      </p:sp>
+      <p:sp>
+        <p:nvSpPr>
+          <p:cNvPr id="3" name="Text 1"/>
           <p:cNvSpPr/>
           <p:nvPr/>
         </p:nvSpPr>
@@ -18520,7 +18818,7 @@
       </p:sp>
       <p:sp>
         <p:nvSpPr>
-          <p:cNvPr id="3" name="Shape 1"/>
+          <p:cNvPr id="4" name="Shape 2"/>
           <p:cNvSpPr/>
           <p:nvPr/>
         </p:nvSpPr>
@@ -18542,7 +18840,7 @@
       </p:sp>
       <p:sp>
         <p:nvSpPr>
-          <p:cNvPr id="4" name="Text 2"/>
+          <p:cNvPr id="5" name="Text 3"/>
           <p:cNvSpPr/>
           <p:nvPr/>
         </p:nvSpPr>
@@ -18581,7 +18879,7 @@
       </p:sp>
       <p:pic>
         <p:nvPicPr>
-          <p:cNvPr id="5" name="Image 0" descr="preencoded.png">    </p:cNvPr>
+          <p:cNvPr id="6" name="Image 0" descr="preencoded.png">    </p:cNvPr>
           <p:cNvPicPr>
             <a:picLocks noChangeAspect="1"/>
           </p:cNvPicPr>
@@ -18595,7 +18893,7 @@
         </p:blipFill>
         <p:spPr>
           <a:xfrm>
-            <a:off x="566928" y="6254496"/>
+            <a:off x="566928" y="6126480"/>
             <a:ext cx="1481328" cy="457200"/>
           </a:xfrm>
           <a:prstGeom prst="rect">
@@ -18605,7 +18903,7 @@
       </p:pic>
       <p:sp>
         <p:nvSpPr>
-          <p:cNvPr id="6" name="Shape 3"/>
+          <p:cNvPr id="7" name="Shape 4"/>
           <p:cNvSpPr/>
           <p:nvPr/>
         </p:nvSpPr>
@@ -18632,7 +18930,7 @@
       </p:sp>
       <p:sp>
         <p:nvSpPr>
-          <p:cNvPr id="7" name="Shape 4"/>
+          <p:cNvPr id="8" name="Shape 5"/>
           <p:cNvSpPr/>
           <p:nvPr/>
         </p:nvSpPr>
@@ -18652,7 +18950,7 @@
       </p:sp>
       <p:sp>
         <p:nvSpPr>
-          <p:cNvPr id="8" name="Text 5"/>
+          <p:cNvPr id="9" name="Text 6"/>
           <p:cNvSpPr/>
           <p:nvPr/>
         </p:nvSpPr>
@@ -18691,7 +18989,7 @@
       </p:sp>
       <p:sp>
         <p:nvSpPr>
-          <p:cNvPr id="9" name="Text 6"/>
+          <p:cNvPr id="10" name="Text 7"/>
           <p:cNvSpPr/>
           <p:nvPr/>
         </p:nvSpPr>
@@ -18730,7 +19028,7 @@
       </p:sp>
       <p:sp>
         <p:nvSpPr>
-          <p:cNvPr id="10" name="Shape 7"/>
+          <p:cNvPr id="11" name="Shape 8"/>
           <p:cNvSpPr/>
           <p:nvPr/>
         </p:nvSpPr>
@@ -18757,7 +19055,7 @@
       </p:sp>
       <p:sp>
         <p:nvSpPr>
-          <p:cNvPr id="11" name="Shape 8"/>
+          <p:cNvPr id="12" name="Shape 9"/>
           <p:cNvSpPr/>
           <p:nvPr/>
         </p:nvSpPr>
@@ -18777,7 +19075,7 @@
       </p:sp>
       <p:sp>
         <p:nvSpPr>
-          <p:cNvPr id="12" name="Text 9"/>
+          <p:cNvPr id="13" name="Text 10"/>
           <p:cNvSpPr/>
           <p:nvPr/>
         </p:nvSpPr>
@@ -18816,7 +19114,7 @@
       </p:sp>
       <p:sp>
         <p:nvSpPr>
-          <p:cNvPr id="13" name="Text 10"/>
+          <p:cNvPr id="14" name="Text 11"/>
           <p:cNvSpPr/>
           <p:nvPr/>
         </p:nvSpPr>
@@ -18855,7 +19153,7 @@
       </p:sp>
       <p:sp>
         <p:nvSpPr>
-          <p:cNvPr id="14" name="Shape 11"/>
+          <p:cNvPr id="15" name="Shape 12"/>
           <p:cNvSpPr/>
           <p:nvPr/>
         </p:nvSpPr>
@@ -18882,7 +19180,7 @@
       </p:sp>
       <p:sp>
         <p:nvSpPr>
-          <p:cNvPr id="15" name="Shape 12"/>
+          <p:cNvPr id="16" name="Shape 13"/>
           <p:cNvSpPr/>
           <p:nvPr/>
         </p:nvSpPr>
@@ -18902,7 +19200,7 @@
       </p:sp>
       <p:sp>
         <p:nvSpPr>
-          <p:cNvPr id="16" name="Text 13"/>
+          <p:cNvPr id="17" name="Text 14"/>
           <p:cNvSpPr/>
           <p:nvPr/>
         </p:nvSpPr>
@@ -18941,7 +19239,7 @@
       </p:sp>
       <p:sp>
         <p:nvSpPr>
-          <p:cNvPr id="17" name="Text 14"/>
+          <p:cNvPr id="18" name="Text 15"/>
           <p:cNvSpPr/>
           <p:nvPr/>
         </p:nvSpPr>
@@ -18980,7 +19278,7 @@
       </p:sp>
       <p:sp>
         <p:nvSpPr>
-          <p:cNvPr id="18" name="Shape 15"/>
+          <p:cNvPr id="19" name="Shape 16"/>
           <p:cNvSpPr/>
           <p:nvPr/>
         </p:nvSpPr>
@@ -19007,7 +19305,7 @@
       </p:sp>
       <p:sp>
         <p:nvSpPr>
-          <p:cNvPr id="19" name="Shape 16"/>
+          <p:cNvPr id="20" name="Shape 17"/>
           <p:cNvSpPr/>
           <p:nvPr/>
         </p:nvSpPr>
@@ -19027,7 +19325,7 @@
       </p:sp>
       <p:sp>
         <p:nvSpPr>
-          <p:cNvPr id="20" name="Text 17"/>
+          <p:cNvPr id="21" name="Text 18"/>
           <p:cNvSpPr/>
           <p:nvPr/>
         </p:nvSpPr>
@@ -19066,7 +19364,7 @@
       </p:sp>
       <p:sp>
         <p:nvSpPr>
-          <p:cNvPr id="21" name="Text 18"/>
+          <p:cNvPr id="22" name="Text 19"/>
           <p:cNvSpPr/>
           <p:nvPr/>
         </p:nvSpPr>
@@ -19105,7 +19403,7 @@
       </p:sp>
       <p:sp>
         <p:nvSpPr>
-          <p:cNvPr id="22" name="Shape 19"/>
+          <p:cNvPr id="23" name="Shape 20"/>
           <p:cNvSpPr/>
           <p:nvPr/>
         </p:nvSpPr>
@@ -19132,7 +19430,7 @@
       </p:sp>
       <p:sp>
         <p:nvSpPr>
-          <p:cNvPr id="23" name="Shape 20"/>
+          <p:cNvPr id="24" name="Shape 21"/>
           <p:cNvSpPr/>
           <p:nvPr/>
         </p:nvSpPr>
@@ -19152,7 +19450,7 @@
       </p:sp>
       <p:sp>
         <p:nvSpPr>
-          <p:cNvPr id="24" name="Text 21"/>
+          <p:cNvPr id="25" name="Text 22"/>
           <p:cNvSpPr/>
           <p:nvPr/>
         </p:nvSpPr>
@@ -19191,7 +19489,7 @@
       </p:sp>
       <p:sp>
         <p:nvSpPr>
-          <p:cNvPr id="25" name="Text 22"/>
+          <p:cNvPr id="26" name="Text 23"/>
           <p:cNvSpPr/>
           <p:nvPr/>
         </p:nvSpPr>
@@ -19230,7 +19528,7 @@
       </p:sp>
       <p:sp>
         <p:nvSpPr>
-          <p:cNvPr id="26" name="Shape 23"/>
+          <p:cNvPr id="27" name="Shape 24"/>
           <p:cNvSpPr/>
           <p:nvPr/>
         </p:nvSpPr>
@@ -19257,7 +19555,7 @@
       </p:sp>
       <p:sp>
         <p:nvSpPr>
-          <p:cNvPr id="27" name="Shape 24"/>
+          <p:cNvPr id="28" name="Shape 25"/>
           <p:cNvSpPr/>
           <p:nvPr/>
         </p:nvSpPr>
@@ -19277,7 +19575,7 @@
       </p:sp>
       <p:sp>
         <p:nvSpPr>
-          <p:cNvPr id="28" name="Text 25"/>
+          <p:cNvPr id="29" name="Text 26"/>
           <p:cNvSpPr/>
           <p:nvPr/>
         </p:nvSpPr>
@@ -19316,7 +19614,7 @@
       </p:sp>
       <p:sp>
         <p:nvSpPr>
-          <p:cNvPr id="29" name="Text 26"/>
+          <p:cNvPr id="30" name="Text 27"/>
           <p:cNvSpPr/>
           <p:nvPr/>
         </p:nvSpPr>
@@ -19355,7 +19653,7 @@
       </p:sp>
       <p:sp>
         <p:nvSpPr>
-          <p:cNvPr id="30" name="Shape 27"/>
+          <p:cNvPr id="31" name="Shape 28"/>
           <p:cNvSpPr/>
           <p:nvPr/>
         </p:nvSpPr>
@@ -19382,7 +19680,7 @@
       </p:sp>
       <p:sp>
         <p:nvSpPr>
-          <p:cNvPr id="31" name="Shape 28"/>
+          <p:cNvPr id="32" name="Shape 29"/>
           <p:cNvSpPr/>
           <p:nvPr/>
         </p:nvSpPr>
@@ -19402,7 +19700,7 @@
       </p:sp>
       <p:sp>
         <p:nvSpPr>
-          <p:cNvPr id="32" name="Text 29"/>
+          <p:cNvPr id="33" name="Text 30"/>
           <p:cNvSpPr/>
           <p:nvPr/>
         </p:nvSpPr>
@@ -19441,7 +19739,7 @@
       </p:sp>
       <p:sp>
         <p:nvSpPr>
-          <p:cNvPr id="33" name="Text 30"/>
+          <p:cNvPr id="34" name="Text 31"/>
           <p:cNvSpPr/>
           <p:nvPr/>
         </p:nvSpPr>
@@ -19480,7 +19778,7 @@
       </p:sp>
       <p:sp>
         <p:nvSpPr>
-          <p:cNvPr id="34" name="Shape 31"/>
+          <p:cNvPr id="35" name="Shape 32"/>
           <p:cNvSpPr/>
           <p:nvPr/>
         </p:nvSpPr>
@@ -19502,7 +19800,7 @@
       </p:sp>
       <p:sp>
         <p:nvSpPr>
-          <p:cNvPr id="35" name="Shape 32"/>
+          <p:cNvPr id="36" name="Shape 33"/>
           <p:cNvSpPr/>
           <p:nvPr/>
         </p:nvSpPr>
@@ -19522,7 +19820,7 @@
       </p:sp>
       <p:sp>
         <p:nvSpPr>
-          <p:cNvPr id="36" name="Text 33"/>
+          <p:cNvPr id="37" name="Text 34"/>
           <p:cNvSpPr/>
           <p:nvPr/>
         </p:nvSpPr>
@@ -19561,7 +19859,7 @@
       </p:sp>
       <p:sp>
         <p:nvSpPr>
-          <p:cNvPr id="37" name="Text 34"/>
+          <p:cNvPr id="38" name="Text 35"/>
           <p:cNvSpPr/>
           <p:nvPr/>
         </p:nvSpPr>
@@ -19600,7 +19898,7 @@
       </p:sp>
       <p:sp>
         <p:nvSpPr>
-          <p:cNvPr id="38" name="Shape 35"/>
+          <p:cNvPr id="39" name="Shape 36"/>
           <p:cNvSpPr/>
           <p:nvPr/>
         </p:nvSpPr>
@@ -19627,7 +19925,7 @@
       </p:sp>
       <p:sp>
         <p:nvSpPr>
-          <p:cNvPr id="39" name="Shape 36"/>
+          <p:cNvPr id="40" name="Shape 37"/>
           <p:cNvSpPr/>
           <p:nvPr/>
         </p:nvSpPr>
@@ -19647,7 +19945,7 @@
       </p:sp>
       <p:sp>
         <p:nvSpPr>
-          <p:cNvPr id="40" name="Text 37"/>
+          <p:cNvPr id="41" name="Text 38"/>
           <p:cNvSpPr/>
           <p:nvPr/>
         </p:nvSpPr>
@@ -19686,7 +19984,7 @@
       </p:sp>
       <p:sp>
         <p:nvSpPr>
-          <p:cNvPr id="41" name="Text 38"/>
+          <p:cNvPr id="42" name="Text 39"/>
           <p:cNvSpPr/>
           <p:nvPr/>
         </p:nvSpPr>
@@ -19725,7 +20023,7 @@
       </p:sp>
       <p:sp>
         <p:nvSpPr>
-          <p:cNvPr id="42" name="Shape 39"/>
+          <p:cNvPr id="43" name="Shape 40"/>
           <p:cNvSpPr/>
           <p:nvPr/>
         </p:nvSpPr>
@@ -19752,7 +20050,7 @@
       </p:sp>
       <p:sp>
         <p:nvSpPr>
-          <p:cNvPr id="43" name="Shape 40"/>
+          <p:cNvPr id="44" name="Shape 41"/>
           <p:cNvSpPr/>
           <p:nvPr/>
         </p:nvSpPr>
@@ -19772,7 +20070,7 @@
       </p:sp>
       <p:sp>
         <p:nvSpPr>
-          <p:cNvPr id="44" name="Text 41"/>
+          <p:cNvPr id="45" name="Text 42"/>
           <p:cNvSpPr/>
           <p:nvPr/>
         </p:nvSpPr>
@@ -19811,7 +20109,7 @@
       </p:sp>
       <p:sp>
         <p:nvSpPr>
-          <p:cNvPr id="45" name="Text 42"/>
+          <p:cNvPr id="46" name="Text 43"/>
           <p:cNvSpPr/>
           <p:nvPr/>
         </p:nvSpPr>
@@ -19850,7 +20148,7 @@
       </p:sp>
       <p:sp>
         <p:nvSpPr>
-          <p:cNvPr id="46" name="Shape 43"/>
+          <p:cNvPr id="47" name="Shape 44"/>
           <p:cNvSpPr/>
           <p:nvPr/>
         </p:nvSpPr>
@@ -19877,7 +20175,7 @@
       </p:sp>
       <p:sp>
         <p:nvSpPr>
-          <p:cNvPr id="47" name="Shape 44"/>
+          <p:cNvPr id="48" name="Shape 45"/>
           <p:cNvSpPr/>
           <p:nvPr/>
         </p:nvSpPr>
@@ -19897,7 +20195,7 @@
       </p:sp>
       <p:sp>
         <p:nvSpPr>
-          <p:cNvPr id="48" name="Text 45"/>
+          <p:cNvPr id="49" name="Text 46"/>
           <p:cNvSpPr/>
           <p:nvPr/>
         </p:nvSpPr>
@@ -19936,7 +20234,7 @@
       </p:sp>
       <p:sp>
         <p:nvSpPr>
-          <p:cNvPr id="49" name="Text 46"/>
+          <p:cNvPr id="50" name="Text 47"/>
           <p:cNvSpPr/>
           <p:nvPr/>
         </p:nvSpPr>
@@ -19975,7 +20273,7 @@
       </p:sp>
       <p:sp>
         <p:nvSpPr>
-          <p:cNvPr id="50" name="Shape 47"/>
+          <p:cNvPr id="51" name="Shape 48"/>
           <p:cNvSpPr/>
           <p:nvPr/>
         </p:nvSpPr>
@@ -20002,7 +20300,7 @@
       </p:sp>
       <p:sp>
         <p:nvSpPr>
-          <p:cNvPr id="51" name="Text 48"/>
+          <p:cNvPr id="52" name="Text 49"/>
           <p:cNvSpPr/>
           <p:nvPr/>
         </p:nvSpPr>
@@ -20054,7 +20352,7 @@
         </p:nvSpPr>
         <p:spPr>
           <a:xfrm>
-            <a:off x="11368735" y="6437376"/>
+            <a:off x="11368735" y="6327648"/>
             <a:ext cx="365760" cy="274320"/>
           </a:xfrm>
           <a:prstGeom prst="rect">
@@ -20101,13 +20399,6 @@
 <file path=ppt/slides/slide4.xml><?xml version="1.0" encoding="utf-8"?>
 <p:sld xmlns:a="http://schemas.openxmlformats.org/drawingml/2006/main" xmlns:r="http://schemas.openxmlformats.org/officeDocument/2006/relationships" xmlns:p="http://schemas.openxmlformats.org/presentationml/2006/main">
   <p:cSld name="Slide 4">
-    <p:bg>
-      <p:bgPr>
-        <a:solidFill>
-          <a:srgbClr val="FFFFFF"/>
-        </a:solidFill>
-      </p:bgPr>
-    </p:bg>
     <p:spTree>
       <p:nvGrpSpPr>
         <p:cNvPr id="1" name=""/>
@@ -20124,7 +20415,29 @@
       </p:grpSpPr>
       <p:sp>
         <p:nvSpPr>
-          <p:cNvPr id="2" name="Text 0"/>
+          <p:cNvPr id="2" name="Shape 0"/>
+          <p:cNvSpPr/>
+          <p:nvPr/>
+        </p:nvSpPr>
+        <p:spPr>
+          <a:xfrm>
+            <a:off x="231343" y="194767"/>
+            <a:ext cx="11716207" cy="6473952"/>
+          </a:xfrm>
+          <a:prstGeom prst="roundRect">
+            <a:avLst>
+              <a:gd name="adj" fmla="val 3107"/>
+            </a:avLst>
+          </a:prstGeom>
+          <a:solidFill>
+            <a:srgbClr val="FFFFFF"/>
+          </a:solidFill>
+          <a:ln/>
+        </p:spPr>
+      </p:sp>
+      <p:sp>
+        <p:nvSpPr>
+          <p:cNvPr id="3" name="Text 1"/>
           <p:cNvSpPr/>
           <p:nvPr/>
         </p:nvSpPr>
@@ -20163,7 +20476,7 @@
       </p:sp>
       <p:sp>
         <p:nvSpPr>
-          <p:cNvPr id="3" name="Text 1"/>
+          <p:cNvPr id="4" name="Text 2"/>
           <p:cNvSpPr/>
           <p:nvPr/>
         </p:nvSpPr>
@@ -20205,7 +20518,7 @@
       </p:sp>
       <p:sp>
         <p:nvSpPr>
-          <p:cNvPr id="4" name="Shape 2"/>
+          <p:cNvPr id="5" name="Shape 3"/>
           <p:cNvSpPr/>
           <p:nvPr/>
         </p:nvSpPr>
@@ -20227,7 +20540,7 @@
       </p:sp>
       <p:sp>
         <p:nvSpPr>
-          <p:cNvPr id="5" name="Text 3"/>
+          <p:cNvPr id="6" name="Text 4"/>
           <p:cNvSpPr/>
           <p:nvPr/>
         </p:nvSpPr>
@@ -20266,7 +20579,7 @@
       </p:sp>
       <p:pic>
         <p:nvPicPr>
-          <p:cNvPr id="6" name="Image 0" descr="preencoded.png">    </p:cNvPr>
+          <p:cNvPr id="7" name="Image 0" descr="preencoded.png">    </p:cNvPr>
           <p:cNvPicPr>
             <a:picLocks noChangeAspect="1"/>
           </p:cNvPicPr>
@@ -20280,7 +20593,7 @@
         </p:blipFill>
         <p:spPr>
           <a:xfrm>
-            <a:off x="566928" y="6254496"/>
+            <a:off x="566928" y="6126480"/>
             <a:ext cx="1481328" cy="457200"/>
           </a:xfrm>
           <a:prstGeom prst="rect">
@@ -20290,7 +20603,7 @@
       </p:pic>
       <p:sp>
         <p:nvSpPr>
-          <p:cNvPr id="7" name="Shape 4"/>
+          <p:cNvPr id="8" name="Shape 5"/>
           <p:cNvSpPr/>
           <p:nvPr/>
         </p:nvSpPr>
@@ -20317,7 +20630,7 @@
       </p:sp>
       <p:sp>
         <p:nvSpPr>
-          <p:cNvPr id="8" name="Text 5"/>
+          <p:cNvPr id="9" name="Text 6"/>
           <p:cNvSpPr/>
           <p:nvPr/>
         </p:nvSpPr>
@@ -20356,7 +20669,7 @@
       </p:sp>
       <p:sp>
         <p:nvSpPr>
-          <p:cNvPr id="9" name="Text 6"/>
+          <p:cNvPr id="10" name="Text 7"/>
           <p:cNvSpPr/>
           <p:nvPr/>
         </p:nvSpPr>
@@ -20398,7 +20711,7 @@
       </p:sp>
       <p:sp>
         <p:nvSpPr>
-          <p:cNvPr id="10" name="Shape 7"/>
+          <p:cNvPr id="11" name="Shape 8"/>
           <p:cNvSpPr/>
           <p:nvPr/>
         </p:nvSpPr>
@@ -20425,7 +20738,7 @@
       </p:sp>
       <p:sp>
         <p:nvSpPr>
-          <p:cNvPr id="11" name="Text 8"/>
+          <p:cNvPr id="12" name="Text 9"/>
           <p:cNvSpPr/>
           <p:nvPr/>
         </p:nvSpPr>
@@ -20464,7 +20777,7 @@
       </p:sp>
       <p:sp>
         <p:nvSpPr>
-          <p:cNvPr id="12" name="Text 9"/>
+          <p:cNvPr id="13" name="Text 10"/>
           <p:cNvSpPr/>
           <p:nvPr/>
         </p:nvSpPr>
@@ -20506,7 +20819,7 @@
       </p:sp>
       <p:sp>
         <p:nvSpPr>
-          <p:cNvPr id="13" name="Shape 10"/>
+          <p:cNvPr id="14" name="Shape 11"/>
           <p:cNvSpPr/>
           <p:nvPr/>
         </p:nvSpPr>
@@ -20533,7 +20846,7 @@
       </p:sp>
       <p:sp>
         <p:nvSpPr>
-          <p:cNvPr id="14" name="Text 11"/>
+          <p:cNvPr id="15" name="Text 12"/>
           <p:cNvSpPr/>
           <p:nvPr/>
         </p:nvSpPr>
@@ -20572,7 +20885,7 @@
       </p:sp>
       <p:sp>
         <p:nvSpPr>
-          <p:cNvPr id="15" name="Text 12"/>
+          <p:cNvPr id="16" name="Text 13"/>
           <p:cNvSpPr/>
           <p:nvPr/>
         </p:nvSpPr>
@@ -20614,7 +20927,7 @@
       </p:sp>
       <p:sp>
         <p:nvSpPr>
-          <p:cNvPr id="16" name="Shape 13"/>
+          <p:cNvPr id="17" name="Shape 14"/>
           <p:cNvSpPr/>
           <p:nvPr/>
         </p:nvSpPr>
@@ -20641,7 +20954,7 @@
       </p:sp>
       <p:sp>
         <p:nvSpPr>
-          <p:cNvPr id="17" name="Text 14"/>
+          <p:cNvPr id="18" name="Text 15"/>
           <p:cNvSpPr/>
           <p:nvPr/>
         </p:nvSpPr>
@@ -20680,7 +20993,7 @@
       </p:sp>
       <p:sp>
         <p:nvSpPr>
-          <p:cNvPr id="18" name="Text 15"/>
+          <p:cNvPr id="19" name="Text 16"/>
           <p:cNvSpPr/>
           <p:nvPr/>
         </p:nvSpPr>
@@ -20722,7 +21035,7 @@
       </p:sp>
       <p:sp>
         <p:nvSpPr>
-          <p:cNvPr id="19" name="Shape 16"/>
+          <p:cNvPr id="20" name="Shape 17"/>
           <p:cNvSpPr/>
           <p:nvPr/>
         </p:nvSpPr>
@@ -20749,7 +21062,7 @@
       </p:sp>
       <p:sp>
         <p:nvSpPr>
-          <p:cNvPr id="20" name="Text 17"/>
+          <p:cNvPr id="21" name="Text 18"/>
           <p:cNvSpPr/>
           <p:nvPr/>
         </p:nvSpPr>
@@ -20788,7 +21101,7 @@
       </p:sp>
       <p:sp>
         <p:nvSpPr>
-          <p:cNvPr id="21" name="Text 18"/>
+          <p:cNvPr id="22" name="Text 19"/>
           <p:cNvSpPr/>
           <p:nvPr/>
         </p:nvSpPr>
@@ -20830,7 +21143,7 @@
       </p:sp>
       <p:sp>
         <p:nvSpPr>
-          <p:cNvPr id="22" name="Shape 19"/>
+          <p:cNvPr id="23" name="Shape 20"/>
           <p:cNvSpPr/>
           <p:nvPr/>
         </p:nvSpPr>
@@ -20857,7 +21170,7 @@
       </p:sp>
       <p:sp>
         <p:nvSpPr>
-          <p:cNvPr id="23" name="Text 20"/>
+          <p:cNvPr id="24" name="Text 21"/>
           <p:cNvSpPr/>
           <p:nvPr/>
         </p:nvSpPr>
@@ -20896,7 +21209,7 @@
       </p:sp>
       <p:sp>
         <p:nvSpPr>
-          <p:cNvPr id="24" name="Text 21"/>
+          <p:cNvPr id="25" name="Text 22"/>
           <p:cNvSpPr/>
           <p:nvPr/>
         </p:nvSpPr>
@@ -20938,7 +21251,7 @@
       </p:sp>
       <p:sp>
         <p:nvSpPr>
-          <p:cNvPr id="25" name="Shape 22"/>
+          <p:cNvPr id="26" name="Shape 23"/>
           <p:cNvSpPr/>
           <p:nvPr/>
         </p:nvSpPr>
@@ -20965,7 +21278,7 @@
       </p:sp>
       <p:sp>
         <p:nvSpPr>
-          <p:cNvPr id="26" name="Text 23"/>
+          <p:cNvPr id="27" name="Text 24"/>
           <p:cNvSpPr/>
           <p:nvPr/>
         </p:nvSpPr>
@@ -21017,7 +21330,7 @@
         </p:nvSpPr>
         <p:spPr>
           <a:xfrm>
-            <a:off x="11368735" y="6437376"/>
+            <a:off x="11368735" y="6327648"/>
             <a:ext cx="365760" cy="274320"/>
           </a:xfrm>
           <a:prstGeom prst="rect">
@@ -21064,13 +21377,6 @@
 <file path=ppt/slides/slide5.xml><?xml version="1.0" encoding="utf-8"?>
 <p:sld xmlns:a="http://schemas.openxmlformats.org/drawingml/2006/main" xmlns:r="http://schemas.openxmlformats.org/officeDocument/2006/relationships" xmlns:p="http://schemas.openxmlformats.org/presentationml/2006/main">
   <p:cSld name="Slide 5">
-    <p:bg>
-      <p:bgPr>
-        <a:solidFill>
-          <a:srgbClr val="FFFFFF"/>
-        </a:solidFill>
-      </p:bgPr>
-    </p:bg>
     <p:spTree>
       <p:nvGrpSpPr>
         <p:cNvPr id="1" name=""/>
@@ -21087,7 +21393,29 @@
       </p:grpSpPr>
       <p:sp>
         <p:nvSpPr>
-          <p:cNvPr id="2" name="Text 0"/>
+          <p:cNvPr id="2" name="Shape 0"/>
+          <p:cNvSpPr/>
+          <p:nvPr/>
+        </p:nvSpPr>
+        <p:spPr>
+          <a:xfrm>
+            <a:off x="231343" y="194767"/>
+            <a:ext cx="11716207" cy="6473952"/>
+          </a:xfrm>
+          <a:prstGeom prst="roundRect">
+            <a:avLst>
+              <a:gd name="adj" fmla="val 3107"/>
+            </a:avLst>
+          </a:prstGeom>
+          <a:solidFill>
+            <a:srgbClr val="FFFFFF"/>
+          </a:solidFill>
+          <a:ln/>
+        </p:spPr>
+      </p:sp>
+      <p:sp>
+        <p:nvSpPr>
+          <p:cNvPr id="3" name="Text 1"/>
           <p:cNvSpPr/>
           <p:nvPr/>
         </p:nvSpPr>
@@ -21126,7 +21454,7 @@
       </p:sp>
       <p:sp>
         <p:nvSpPr>
-          <p:cNvPr id="3" name="Text 1"/>
+          <p:cNvPr id="4" name="Text 2"/>
           <p:cNvSpPr/>
           <p:nvPr/>
         </p:nvSpPr>
@@ -21165,7 +21493,7 @@
       </p:sp>
       <p:sp>
         <p:nvSpPr>
-          <p:cNvPr id="4" name="Shape 2"/>
+          <p:cNvPr id="5" name="Shape 3"/>
           <p:cNvSpPr/>
           <p:nvPr/>
         </p:nvSpPr>
@@ -21187,7 +21515,7 @@
       </p:sp>
       <p:sp>
         <p:nvSpPr>
-          <p:cNvPr id="5" name="Text 3"/>
+          <p:cNvPr id="6" name="Text 4"/>
           <p:cNvSpPr/>
           <p:nvPr/>
         </p:nvSpPr>
@@ -21226,7 +21554,7 @@
       </p:sp>
       <p:pic>
         <p:nvPicPr>
-          <p:cNvPr id="6" name="Image 0" descr="preencoded.png">    </p:cNvPr>
+          <p:cNvPr id="7" name="Image 0" descr="preencoded.png">    </p:cNvPr>
           <p:cNvPicPr>
             <a:picLocks noChangeAspect="1"/>
           </p:cNvPicPr>
@@ -21240,7 +21568,7 @@
         </p:blipFill>
         <p:spPr>
           <a:xfrm>
-            <a:off x="566928" y="6254496"/>
+            <a:off x="566928" y="6126480"/>
             <a:ext cx="1481328" cy="457200"/>
           </a:xfrm>
           <a:prstGeom prst="rect">
@@ -21250,7 +21578,7 @@
       </p:pic>
       <p:sp>
         <p:nvSpPr>
-          <p:cNvPr id="7" name="Shape 4"/>
+          <p:cNvPr id="8" name="Shape 5"/>
           <p:cNvSpPr/>
           <p:nvPr/>
         </p:nvSpPr>
@@ -21277,7 +21605,7 @@
       </p:sp>
       <p:sp>
         <p:nvSpPr>
-          <p:cNvPr id="8" name="Text 5"/>
+          <p:cNvPr id="9" name="Text 6"/>
           <p:cNvSpPr/>
           <p:nvPr/>
         </p:nvSpPr>
@@ -21316,7 +21644,7 @@
       </p:sp>
       <p:sp>
         <p:nvSpPr>
-          <p:cNvPr id="9" name="Shape 6"/>
+          <p:cNvPr id="10" name="Shape 7"/>
           <p:cNvSpPr/>
           <p:nvPr/>
         </p:nvSpPr>
@@ -21339,7 +21667,7 @@
       </p:sp>
       <p:sp>
         <p:nvSpPr>
-          <p:cNvPr id="10" name="Shape 7"/>
+          <p:cNvPr id="11" name="Shape 8"/>
           <p:cNvSpPr/>
           <p:nvPr/>
         </p:nvSpPr>
@@ -21359,7 +21687,7 @@
       </p:sp>
       <p:sp>
         <p:nvSpPr>
-          <p:cNvPr id="11" name="Shape 8"/>
+          <p:cNvPr id="12" name="Shape 9"/>
           <p:cNvSpPr/>
           <p:nvPr/>
         </p:nvSpPr>
@@ -21381,7 +21709,7 @@
       </p:sp>
       <p:sp>
         <p:nvSpPr>
-          <p:cNvPr id="12" name="Text 9"/>
+          <p:cNvPr id="13" name="Text 10"/>
           <p:cNvSpPr/>
           <p:nvPr/>
         </p:nvSpPr>
@@ -21420,7 +21748,7 @@
       </p:sp>
       <p:sp>
         <p:nvSpPr>
-          <p:cNvPr id="13" name="Shape 10"/>
+          <p:cNvPr id="14" name="Shape 11"/>
           <p:cNvSpPr/>
           <p:nvPr/>
         </p:nvSpPr>
@@ -21443,7 +21771,7 @@
       </p:sp>
       <p:sp>
         <p:nvSpPr>
-          <p:cNvPr id="14" name="Shape 11"/>
+          <p:cNvPr id="15" name="Shape 12"/>
           <p:cNvSpPr/>
           <p:nvPr/>
         </p:nvSpPr>
@@ -21463,7 +21791,7 @@
       </p:sp>
       <p:sp>
         <p:nvSpPr>
-          <p:cNvPr id="15" name="Shape 12"/>
+          <p:cNvPr id="16" name="Shape 13"/>
           <p:cNvSpPr/>
           <p:nvPr/>
         </p:nvSpPr>
@@ -21485,7 +21813,7 @@
       </p:sp>
       <p:sp>
         <p:nvSpPr>
-          <p:cNvPr id="16" name="Text 13"/>
+          <p:cNvPr id="17" name="Text 14"/>
           <p:cNvSpPr/>
           <p:nvPr/>
         </p:nvSpPr>
@@ -21524,7 +21852,7 @@
       </p:sp>
       <p:sp>
         <p:nvSpPr>
-          <p:cNvPr id="17" name="Shape 14"/>
+          <p:cNvPr id="18" name="Shape 15"/>
           <p:cNvSpPr/>
           <p:nvPr/>
         </p:nvSpPr>
@@ -21547,7 +21875,7 @@
       </p:sp>
       <p:sp>
         <p:nvSpPr>
-          <p:cNvPr id="18" name="Shape 15"/>
+          <p:cNvPr id="19" name="Shape 16"/>
           <p:cNvSpPr/>
           <p:nvPr/>
         </p:nvSpPr>
@@ -21567,7 +21895,7 @@
       </p:sp>
       <p:sp>
         <p:nvSpPr>
-          <p:cNvPr id="19" name="Shape 16"/>
+          <p:cNvPr id="20" name="Shape 17"/>
           <p:cNvSpPr/>
           <p:nvPr/>
         </p:nvSpPr>
@@ -21594,7 +21922,7 @@
       </p:sp>
       <p:sp>
         <p:nvSpPr>
-          <p:cNvPr id="20" name="Text 17"/>
+          <p:cNvPr id="21" name="Text 18"/>
           <p:cNvSpPr/>
           <p:nvPr/>
         </p:nvSpPr>
@@ -21633,7 +21961,7 @@
       </p:sp>
       <p:sp>
         <p:nvSpPr>
-          <p:cNvPr id="21" name="Text 18"/>
+          <p:cNvPr id="22" name="Text 19"/>
           <p:cNvSpPr/>
           <p:nvPr/>
         </p:nvSpPr>
@@ -21672,7 +22000,7 @@
       </p:sp>
       <p:sp>
         <p:nvSpPr>
-          <p:cNvPr id="22" name="Shape 19"/>
+          <p:cNvPr id="23" name="Shape 20"/>
           <p:cNvSpPr/>
           <p:nvPr/>
         </p:nvSpPr>
@@ -21694,7 +22022,7 @@
       </p:sp>
       <p:sp>
         <p:nvSpPr>
-          <p:cNvPr id="23" name="Text 20"/>
+          <p:cNvPr id="24" name="Text 21"/>
           <p:cNvSpPr/>
           <p:nvPr/>
         </p:nvSpPr>
@@ -21733,7 +22061,7 @@
       </p:sp>
       <p:sp>
         <p:nvSpPr>
-          <p:cNvPr id="24" name="Text 21"/>
+          <p:cNvPr id="25" name="Text 22"/>
           <p:cNvSpPr/>
           <p:nvPr/>
         </p:nvSpPr>
@@ -21775,7 +22103,7 @@
       </p:sp>
       <p:sp>
         <p:nvSpPr>
-          <p:cNvPr id="25" name="Shape 22"/>
+          <p:cNvPr id="26" name="Shape 23"/>
           <p:cNvSpPr/>
           <p:nvPr/>
         </p:nvSpPr>
@@ -21797,7 +22125,7 @@
       </p:sp>
       <p:sp>
         <p:nvSpPr>
-          <p:cNvPr id="26" name="Text 23"/>
+          <p:cNvPr id="27" name="Text 24"/>
           <p:cNvSpPr/>
           <p:nvPr/>
         </p:nvSpPr>
@@ -21836,7 +22164,7 @@
       </p:sp>
       <p:sp>
         <p:nvSpPr>
-          <p:cNvPr id="27" name="Text 24"/>
+          <p:cNvPr id="28" name="Text 25"/>
           <p:cNvSpPr/>
           <p:nvPr/>
         </p:nvSpPr>
@@ -21878,7 +22206,7 @@
       </p:sp>
       <p:sp>
         <p:nvSpPr>
-          <p:cNvPr id="28" name="Shape 25"/>
+          <p:cNvPr id="29" name="Shape 26"/>
           <p:cNvSpPr/>
           <p:nvPr/>
         </p:nvSpPr>
@@ -21900,7 +22228,7 @@
       </p:sp>
       <p:sp>
         <p:nvSpPr>
-          <p:cNvPr id="29" name="Text 26"/>
+          <p:cNvPr id="30" name="Text 27"/>
           <p:cNvSpPr/>
           <p:nvPr/>
         </p:nvSpPr>
@@ -21939,7 +22267,7 @@
       </p:sp>
       <p:sp>
         <p:nvSpPr>
-          <p:cNvPr id="30" name="Text 27"/>
+          <p:cNvPr id="31" name="Text 28"/>
           <p:cNvSpPr/>
           <p:nvPr/>
         </p:nvSpPr>
@@ -21991,7 +22319,7 @@
         </p:nvSpPr>
         <p:spPr>
           <a:xfrm>
-            <a:off x="11368735" y="6437376"/>
+            <a:off x="11368735" y="6327648"/>
             <a:ext cx="365760" cy="274320"/>
           </a:xfrm>
           <a:prstGeom prst="rect">
@@ -22038,13 +22366,6 @@
 <file path=ppt/slides/slide6.xml><?xml version="1.0" encoding="utf-8"?>
 <p:sld xmlns:a="http://schemas.openxmlformats.org/drawingml/2006/main" xmlns:r="http://schemas.openxmlformats.org/officeDocument/2006/relationships" xmlns:p="http://schemas.openxmlformats.org/presentationml/2006/main">
   <p:cSld name="Slide 6">
-    <p:bg>
-      <p:bgPr>
-        <a:solidFill>
-          <a:srgbClr val="FFFFFF"/>
-        </a:solidFill>
-      </p:bgPr>
-    </p:bg>
     <p:spTree>
       <p:nvGrpSpPr>
         <p:cNvPr id="1" name=""/>
@@ -22061,7 +22382,29 @@
       </p:grpSpPr>
       <p:sp>
         <p:nvSpPr>
-          <p:cNvPr id="2" name="Text 0"/>
+          <p:cNvPr id="2" name="Shape 0"/>
+          <p:cNvSpPr/>
+          <p:nvPr/>
+        </p:nvSpPr>
+        <p:spPr>
+          <a:xfrm>
+            <a:off x="231343" y="194767"/>
+            <a:ext cx="11716207" cy="6473952"/>
+          </a:xfrm>
+          <a:prstGeom prst="roundRect">
+            <a:avLst>
+              <a:gd name="adj" fmla="val 3107"/>
+            </a:avLst>
+          </a:prstGeom>
+          <a:solidFill>
+            <a:srgbClr val="FFFFFF"/>
+          </a:solidFill>
+          <a:ln/>
+        </p:spPr>
+      </p:sp>
+      <p:sp>
+        <p:nvSpPr>
+          <p:cNvPr id="3" name="Text 1"/>
           <p:cNvSpPr/>
           <p:nvPr/>
         </p:nvSpPr>
@@ -22100,7 +22443,7 @@
       </p:sp>
       <p:sp>
         <p:nvSpPr>
-          <p:cNvPr id="3" name="Text 1"/>
+          <p:cNvPr id="4" name="Text 2"/>
           <p:cNvSpPr/>
           <p:nvPr/>
         </p:nvSpPr>
@@ -22139,7 +22482,7 @@
       </p:sp>
       <p:sp>
         <p:nvSpPr>
-          <p:cNvPr id="4" name="Shape 2"/>
+          <p:cNvPr id="5" name="Shape 3"/>
           <p:cNvSpPr/>
           <p:nvPr/>
         </p:nvSpPr>
@@ -22161,7 +22504,7 @@
       </p:sp>
       <p:sp>
         <p:nvSpPr>
-          <p:cNvPr id="5" name="Text 3"/>
+          <p:cNvPr id="6" name="Text 4"/>
           <p:cNvSpPr/>
           <p:nvPr/>
         </p:nvSpPr>
@@ -22200,7 +22543,7 @@
       </p:sp>
       <p:pic>
         <p:nvPicPr>
-          <p:cNvPr id="6" name="Image 0" descr="preencoded.png">    </p:cNvPr>
+          <p:cNvPr id="7" name="Image 0" descr="preencoded.png">    </p:cNvPr>
           <p:cNvPicPr>
             <a:picLocks noChangeAspect="1"/>
           </p:cNvPicPr>
@@ -22214,7 +22557,7 @@
         </p:blipFill>
         <p:spPr>
           <a:xfrm>
-            <a:off x="566928" y="6254496"/>
+            <a:off x="566928" y="6126480"/>
             <a:ext cx="1481328" cy="457200"/>
           </a:xfrm>
           <a:prstGeom prst="rect">
@@ -23274,7 +23617,7 @@
       </p:graphicFrame>
       <p:sp>
         <p:nvSpPr>
-          <p:cNvPr id="8" name="Shape 4"/>
+          <p:cNvPr id="9" name="Shape 5"/>
           <p:cNvSpPr/>
           <p:nvPr/>
         </p:nvSpPr>
@@ -23296,7 +23639,7 @@
       </p:sp>
       <p:sp>
         <p:nvSpPr>
-          <p:cNvPr id="9" name="Text 5"/>
+          <p:cNvPr id="10" name="Text 6"/>
           <p:cNvSpPr/>
           <p:nvPr/>
         </p:nvSpPr>
@@ -23348,7 +23691,7 @@
         </p:nvSpPr>
         <p:spPr>
           <a:xfrm>
-            <a:off x="11368735" y="6437376"/>
+            <a:off x="11368735" y="6327648"/>
             <a:ext cx="365760" cy="274320"/>
           </a:xfrm>
           <a:prstGeom prst="rect">
@@ -23395,13 +23738,6 @@
 <file path=ppt/slides/slide7.xml><?xml version="1.0" encoding="utf-8"?>
 <p:sld xmlns:a="http://schemas.openxmlformats.org/drawingml/2006/main" xmlns:r="http://schemas.openxmlformats.org/officeDocument/2006/relationships" xmlns:p="http://schemas.openxmlformats.org/presentationml/2006/main">
   <p:cSld name="Slide 7">
-    <p:bg>
-      <p:bgPr>
-        <a:solidFill>
-          <a:srgbClr val="FFFFFF"/>
-        </a:solidFill>
-      </p:bgPr>
-    </p:bg>
     <p:spTree>
       <p:nvGrpSpPr>
         <p:cNvPr id="1" name=""/>
@@ -23418,7 +23754,29 @@
       </p:grpSpPr>
       <p:sp>
         <p:nvSpPr>
-          <p:cNvPr id="2" name="Text 0"/>
+          <p:cNvPr id="2" name="Shape 0"/>
+          <p:cNvSpPr/>
+          <p:nvPr/>
+        </p:nvSpPr>
+        <p:spPr>
+          <a:xfrm>
+            <a:off x="231343" y="194767"/>
+            <a:ext cx="11716207" cy="6473952"/>
+          </a:xfrm>
+          <a:prstGeom prst="roundRect">
+            <a:avLst>
+              <a:gd name="adj" fmla="val 3107"/>
+            </a:avLst>
+          </a:prstGeom>
+          <a:solidFill>
+            <a:srgbClr val="FFFFFF"/>
+          </a:solidFill>
+          <a:ln/>
+        </p:spPr>
+      </p:sp>
+      <p:sp>
+        <p:nvSpPr>
+          <p:cNvPr id="3" name="Text 1"/>
           <p:cNvSpPr/>
           <p:nvPr/>
         </p:nvSpPr>
@@ -23457,7 +23815,7 @@
       </p:sp>
       <p:sp>
         <p:nvSpPr>
-          <p:cNvPr id="3" name="Text 1"/>
+          <p:cNvPr id="4" name="Text 2"/>
           <p:cNvSpPr/>
           <p:nvPr/>
         </p:nvSpPr>
@@ -23496,7 +23854,7 @@
       </p:sp>
       <p:sp>
         <p:nvSpPr>
-          <p:cNvPr id="4" name="Shape 2"/>
+          <p:cNvPr id="5" name="Shape 3"/>
           <p:cNvSpPr/>
           <p:nvPr/>
         </p:nvSpPr>
@@ -23518,7 +23876,7 @@
       </p:sp>
       <p:sp>
         <p:nvSpPr>
-          <p:cNvPr id="5" name="Text 3"/>
+          <p:cNvPr id="6" name="Text 4"/>
           <p:cNvSpPr/>
           <p:nvPr/>
         </p:nvSpPr>
@@ -23557,7 +23915,7 @@
       </p:sp>
       <p:pic>
         <p:nvPicPr>
-          <p:cNvPr id="6" name="Image 0" descr="preencoded.png">    </p:cNvPr>
+          <p:cNvPr id="7" name="Image 0" descr="preencoded.png">    </p:cNvPr>
           <p:cNvPicPr>
             <a:picLocks noChangeAspect="1"/>
           </p:cNvPicPr>
@@ -23571,7 +23929,7 @@
         </p:blipFill>
         <p:spPr>
           <a:xfrm>
-            <a:off x="566928" y="6254496"/>
+            <a:off x="566928" y="6126480"/>
             <a:ext cx="1481328" cy="457200"/>
           </a:xfrm>
           <a:prstGeom prst="rect">
@@ -23581,7 +23939,7 @@
       </p:pic>
       <p:sp>
         <p:nvSpPr>
-          <p:cNvPr id="7" name="Shape 4"/>
+          <p:cNvPr id="8" name="Shape 5"/>
           <p:cNvSpPr/>
           <p:nvPr/>
         </p:nvSpPr>
@@ -23603,7 +23961,7 @@
       </p:sp>
       <p:sp>
         <p:nvSpPr>
-          <p:cNvPr id="8" name="Text 5"/>
+          <p:cNvPr id="9" name="Text 6"/>
           <p:cNvSpPr/>
           <p:nvPr/>
         </p:nvSpPr>
@@ -23642,7 +24000,7 @@
       </p:sp>
       <p:sp>
         <p:nvSpPr>
-          <p:cNvPr id="9" name="Text 6"/>
+          <p:cNvPr id="10" name="Text 7"/>
           <p:cNvSpPr/>
           <p:nvPr/>
         </p:nvSpPr>
@@ -23681,7 +24039,7 @@
       </p:sp>
       <p:sp>
         <p:nvSpPr>
-          <p:cNvPr id="10" name="Shape 7"/>
+          <p:cNvPr id="11" name="Shape 8"/>
           <p:cNvSpPr/>
           <p:nvPr/>
         </p:nvSpPr>
@@ -23708,7 +24066,7 @@
       </p:sp>
       <p:sp>
         <p:nvSpPr>
-          <p:cNvPr id="11" name="Text 8"/>
+          <p:cNvPr id="12" name="Text 9"/>
           <p:cNvSpPr/>
           <p:nvPr/>
         </p:nvSpPr>
@@ -23747,7 +24105,7 @@
       </p:sp>
       <p:sp>
         <p:nvSpPr>
-          <p:cNvPr id="12" name="Text 9"/>
+          <p:cNvPr id="13" name="Text 10"/>
           <p:cNvSpPr/>
           <p:nvPr/>
         </p:nvSpPr>
@@ -23786,7 +24144,7 @@
       </p:sp>
       <p:sp>
         <p:nvSpPr>
-          <p:cNvPr id="13" name="Shape 10"/>
+          <p:cNvPr id="14" name="Shape 11"/>
           <p:cNvSpPr/>
           <p:nvPr/>
         </p:nvSpPr>
@@ -23808,7 +24166,7 @@
       </p:sp>
       <p:sp>
         <p:nvSpPr>
-          <p:cNvPr id="14" name="Text 11"/>
+          <p:cNvPr id="15" name="Text 12"/>
           <p:cNvSpPr/>
           <p:nvPr/>
         </p:nvSpPr>
@@ -23847,7 +24205,7 @@
       </p:sp>
       <p:sp>
         <p:nvSpPr>
-          <p:cNvPr id="15" name="Text 12"/>
+          <p:cNvPr id="16" name="Text 13"/>
           <p:cNvSpPr/>
           <p:nvPr/>
         </p:nvSpPr>
@@ -23886,7 +24244,7 @@
       </p:sp>
       <p:sp>
         <p:nvSpPr>
-          <p:cNvPr id="16" name="Text 13"/>
+          <p:cNvPr id="17" name="Text 14"/>
           <p:cNvSpPr/>
           <p:nvPr/>
         </p:nvSpPr>
@@ -23925,7 +24283,7 @@
       </p:sp>
       <p:sp>
         <p:nvSpPr>
-          <p:cNvPr id="17" name="Shape 14"/>
+          <p:cNvPr id="18" name="Shape 15"/>
           <p:cNvSpPr/>
           <p:nvPr/>
         </p:nvSpPr>
@@ -23948,7 +24306,7 @@
       </p:sp>
       <p:sp>
         <p:nvSpPr>
-          <p:cNvPr id="18" name="Shape 15"/>
+          <p:cNvPr id="19" name="Shape 16"/>
           <p:cNvSpPr/>
           <p:nvPr/>
         </p:nvSpPr>
@@ -23968,7 +24326,7 @@
       </p:sp>
       <p:sp>
         <p:nvSpPr>
-          <p:cNvPr id="19" name="Shape 16"/>
+          <p:cNvPr id="20" name="Shape 17"/>
           <p:cNvSpPr/>
           <p:nvPr/>
         </p:nvSpPr>
@@ -23988,7 +24346,7 @@
       </p:sp>
       <p:sp>
         <p:nvSpPr>
-          <p:cNvPr id="20" name="Shape 17"/>
+          <p:cNvPr id="21" name="Shape 18"/>
           <p:cNvSpPr/>
           <p:nvPr/>
         </p:nvSpPr>
@@ -24008,7 +24366,7 @@
       </p:sp>
       <p:sp>
         <p:nvSpPr>
-          <p:cNvPr id="21" name="Shape 18"/>
+          <p:cNvPr id="22" name="Shape 19"/>
           <p:cNvSpPr/>
           <p:nvPr/>
         </p:nvSpPr>
@@ -24028,7 +24386,7 @@
       </p:sp>
       <p:sp>
         <p:nvSpPr>
-          <p:cNvPr id="22" name="Shape 19"/>
+          <p:cNvPr id="23" name="Shape 20"/>
           <p:cNvSpPr/>
           <p:nvPr/>
         </p:nvSpPr>
@@ -24048,7 +24406,7 @@
       </p:sp>
       <p:sp>
         <p:nvSpPr>
-          <p:cNvPr id="23" name="Text 20"/>
+          <p:cNvPr id="24" name="Text 21"/>
           <p:cNvSpPr/>
           <p:nvPr/>
         </p:nvSpPr>
@@ -24087,7 +24445,7 @@
       </p:sp>
       <p:sp>
         <p:nvSpPr>
-          <p:cNvPr id="24" name="Shape 21"/>
+          <p:cNvPr id="25" name="Shape 22"/>
           <p:cNvSpPr/>
           <p:nvPr/>
         </p:nvSpPr>
@@ -24110,7 +24468,7 @@
       </p:sp>
       <p:sp>
         <p:nvSpPr>
-          <p:cNvPr id="25" name="Shape 22"/>
+          <p:cNvPr id="26" name="Shape 23"/>
           <p:cNvSpPr/>
           <p:nvPr/>
         </p:nvSpPr>
@@ -24130,7 +24488,7 @@
       </p:sp>
       <p:sp>
         <p:nvSpPr>
-          <p:cNvPr id="26" name="Shape 23"/>
+          <p:cNvPr id="27" name="Shape 24"/>
           <p:cNvSpPr/>
           <p:nvPr/>
         </p:nvSpPr>
@@ -24150,7 +24508,7 @@
       </p:sp>
       <p:sp>
         <p:nvSpPr>
-          <p:cNvPr id="27" name="Shape 24"/>
+          <p:cNvPr id="28" name="Shape 25"/>
           <p:cNvSpPr/>
           <p:nvPr/>
         </p:nvSpPr>
@@ -24170,7 +24528,7 @@
       </p:sp>
       <p:sp>
         <p:nvSpPr>
-          <p:cNvPr id="28" name="Shape 25"/>
+          <p:cNvPr id="29" name="Shape 26"/>
           <p:cNvSpPr/>
           <p:nvPr/>
         </p:nvSpPr>
@@ -24190,7 +24548,7 @@
       </p:sp>
       <p:sp>
         <p:nvSpPr>
-          <p:cNvPr id="29" name="Text 26"/>
+          <p:cNvPr id="30" name="Text 27"/>
           <p:cNvSpPr/>
           <p:nvPr/>
         </p:nvSpPr>
@@ -24229,7 +24587,7 @@
       </p:sp>
       <p:sp>
         <p:nvSpPr>
-          <p:cNvPr id="30" name="Shape 27"/>
+          <p:cNvPr id="31" name="Shape 28"/>
           <p:cNvSpPr/>
           <p:nvPr/>
         </p:nvSpPr>
@@ -24252,7 +24610,7 @@
       </p:sp>
       <p:sp>
         <p:nvSpPr>
-          <p:cNvPr id="31" name="Shape 28"/>
+          <p:cNvPr id="32" name="Shape 29"/>
           <p:cNvSpPr/>
           <p:nvPr/>
         </p:nvSpPr>
@@ -24272,7 +24630,7 @@
       </p:sp>
       <p:sp>
         <p:nvSpPr>
-          <p:cNvPr id="32" name="Shape 29"/>
+          <p:cNvPr id="33" name="Shape 30"/>
           <p:cNvSpPr/>
           <p:nvPr/>
         </p:nvSpPr>
@@ -24292,7 +24650,7 @@
       </p:sp>
       <p:sp>
         <p:nvSpPr>
-          <p:cNvPr id="33" name="Shape 30"/>
+          <p:cNvPr id="34" name="Shape 31"/>
           <p:cNvSpPr/>
           <p:nvPr/>
         </p:nvSpPr>
@@ -24312,7 +24670,7 @@
       </p:sp>
       <p:sp>
         <p:nvSpPr>
-          <p:cNvPr id="34" name="Shape 31"/>
+          <p:cNvPr id="35" name="Shape 32"/>
           <p:cNvSpPr/>
           <p:nvPr/>
         </p:nvSpPr>
@@ -24332,7 +24690,7 @@
       </p:sp>
       <p:sp>
         <p:nvSpPr>
-          <p:cNvPr id="35" name="Shape 32"/>
+          <p:cNvPr id="36" name="Shape 33"/>
           <p:cNvSpPr/>
           <p:nvPr/>
         </p:nvSpPr>
@@ -24352,7 +24710,7 @@
       </p:sp>
       <p:sp>
         <p:nvSpPr>
-          <p:cNvPr id="36" name="Shape 33"/>
+          <p:cNvPr id="37" name="Shape 34"/>
           <p:cNvSpPr/>
           <p:nvPr/>
         </p:nvSpPr>
@@ -24374,7 +24732,7 @@
       </p:sp>
       <p:sp>
         <p:nvSpPr>
-          <p:cNvPr id="37" name="Text 34"/>
+          <p:cNvPr id="38" name="Text 35"/>
           <p:cNvSpPr/>
           <p:nvPr/>
         </p:nvSpPr>
@@ -24413,7 +24771,7 @@
       </p:sp>
       <p:sp>
         <p:nvSpPr>
-          <p:cNvPr id="38" name="Text 35"/>
+          <p:cNvPr id="39" name="Text 36"/>
           <p:cNvSpPr/>
           <p:nvPr/>
         </p:nvSpPr>
@@ -24465,7 +24823,7 @@
         </p:nvSpPr>
         <p:spPr>
           <a:xfrm>
-            <a:off x="11368735" y="6437376"/>
+            <a:off x="11368735" y="6327648"/>
             <a:ext cx="365760" cy="274320"/>
           </a:xfrm>
           <a:prstGeom prst="rect">
@@ -24512,13 +24870,6 @@
 <file path=ppt/slides/slide8.xml><?xml version="1.0" encoding="utf-8"?>
 <p:sld xmlns:a="http://schemas.openxmlformats.org/drawingml/2006/main" xmlns:r="http://schemas.openxmlformats.org/officeDocument/2006/relationships" xmlns:p="http://schemas.openxmlformats.org/presentationml/2006/main">
   <p:cSld name="Slide 8">
-    <p:bg>
-      <p:bgPr>
-        <a:solidFill>
-          <a:srgbClr val="FFFFFF"/>
-        </a:solidFill>
-      </p:bgPr>
-    </p:bg>
     <p:spTree>
       <p:nvGrpSpPr>
         <p:cNvPr id="1" name=""/>
@@ -24535,7 +24886,29 @@
       </p:grpSpPr>
       <p:sp>
         <p:nvSpPr>
-          <p:cNvPr id="2" name="Text 0"/>
+          <p:cNvPr id="2" name="Shape 0"/>
+          <p:cNvSpPr/>
+          <p:nvPr/>
+        </p:nvSpPr>
+        <p:spPr>
+          <a:xfrm>
+            <a:off x="231343" y="194767"/>
+            <a:ext cx="11716207" cy="6473952"/>
+          </a:xfrm>
+          <a:prstGeom prst="roundRect">
+            <a:avLst>
+              <a:gd name="adj" fmla="val 3107"/>
+            </a:avLst>
+          </a:prstGeom>
+          <a:solidFill>
+            <a:srgbClr val="FFFFFF"/>
+          </a:solidFill>
+          <a:ln/>
+        </p:spPr>
+      </p:sp>
+      <p:sp>
+        <p:nvSpPr>
+          <p:cNvPr id="3" name="Text 1"/>
           <p:cNvSpPr/>
           <p:nvPr/>
         </p:nvSpPr>
@@ -24574,7 +24947,7 @@
       </p:sp>
       <p:sp>
         <p:nvSpPr>
-          <p:cNvPr id="3" name="Text 1"/>
+          <p:cNvPr id="4" name="Text 2"/>
           <p:cNvSpPr/>
           <p:nvPr/>
         </p:nvSpPr>
@@ -24613,7 +24986,7 @@
       </p:sp>
       <p:sp>
         <p:nvSpPr>
-          <p:cNvPr id="4" name="Shape 2"/>
+          <p:cNvPr id="5" name="Shape 3"/>
           <p:cNvSpPr/>
           <p:nvPr/>
         </p:nvSpPr>
@@ -24635,7 +25008,7 @@
       </p:sp>
       <p:sp>
         <p:nvSpPr>
-          <p:cNvPr id="5" name="Text 3"/>
+          <p:cNvPr id="6" name="Text 4"/>
           <p:cNvSpPr/>
           <p:nvPr/>
         </p:nvSpPr>
@@ -24674,7 +25047,7 @@
       </p:sp>
       <p:pic>
         <p:nvPicPr>
-          <p:cNvPr id="6" name="Image 0" descr="preencoded.png">    </p:cNvPr>
+          <p:cNvPr id="7" name="Image 0" descr="preencoded.png">    </p:cNvPr>
           <p:cNvPicPr>
             <a:picLocks noChangeAspect="1"/>
           </p:cNvPicPr>
@@ -24688,7 +25061,7 @@
         </p:blipFill>
         <p:spPr>
           <a:xfrm>
-            <a:off x="566928" y="6254496"/>
+            <a:off x="566928" y="6126480"/>
             <a:ext cx="1481328" cy="457200"/>
           </a:xfrm>
           <a:prstGeom prst="rect">
@@ -24698,7 +25071,7 @@
       </p:pic>
       <p:sp>
         <p:nvSpPr>
-          <p:cNvPr id="7" name="Shape 4"/>
+          <p:cNvPr id="8" name="Shape 5"/>
           <p:cNvSpPr/>
           <p:nvPr/>
         </p:nvSpPr>
@@ -24725,7 +25098,7 @@
       </p:sp>
       <p:sp>
         <p:nvSpPr>
-          <p:cNvPr id="8" name="Text 5"/>
+          <p:cNvPr id="9" name="Text 6"/>
           <p:cNvSpPr/>
           <p:nvPr/>
         </p:nvSpPr>
@@ -24927,7 +25300,7 @@
       </p:sp>
       <p:sp>
         <p:nvSpPr>
-          <p:cNvPr id="9" name="Shape 6"/>
+          <p:cNvPr id="10" name="Shape 7"/>
           <p:cNvSpPr/>
           <p:nvPr/>
         </p:nvSpPr>
@@ -24949,7 +25322,7 @@
       </p:sp>
       <p:sp>
         <p:nvSpPr>
-          <p:cNvPr id="10" name="Shape 7"/>
+          <p:cNvPr id="11" name="Shape 8"/>
           <p:cNvSpPr/>
           <p:nvPr/>
         </p:nvSpPr>
@@ -24969,7 +25342,7 @@
       </p:sp>
       <p:sp>
         <p:nvSpPr>
-          <p:cNvPr id="11" name="Text 8"/>
+          <p:cNvPr id="12" name="Text 9"/>
           <p:cNvSpPr/>
           <p:nvPr/>
         </p:nvSpPr>
@@ -25008,7 +25381,7 @@
       </p:sp>
       <p:sp>
         <p:nvSpPr>
-          <p:cNvPr id="12" name="Text 9"/>
+          <p:cNvPr id="13" name="Text 10"/>
           <p:cNvSpPr/>
           <p:nvPr/>
         </p:nvSpPr>
@@ -25047,7 +25420,7 @@
       </p:sp>
       <p:sp>
         <p:nvSpPr>
-          <p:cNvPr id="13" name="Text 10"/>
+          <p:cNvPr id="14" name="Text 11"/>
           <p:cNvSpPr/>
           <p:nvPr/>
         </p:nvSpPr>
@@ -25089,7 +25462,7 @@
       </p:sp>
       <p:sp>
         <p:nvSpPr>
-          <p:cNvPr id="14" name="Shape 11"/>
+          <p:cNvPr id="15" name="Shape 12"/>
           <p:cNvSpPr/>
           <p:nvPr/>
         </p:nvSpPr>
@@ -25111,7 +25484,7 @@
       </p:sp>
       <p:sp>
         <p:nvSpPr>
-          <p:cNvPr id="15" name="Shape 12"/>
+          <p:cNvPr id="16" name="Shape 13"/>
           <p:cNvSpPr/>
           <p:nvPr/>
         </p:nvSpPr>
@@ -25131,7 +25504,7 @@
       </p:sp>
       <p:sp>
         <p:nvSpPr>
-          <p:cNvPr id="16" name="Text 13"/>
+          <p:cNvPr id="17" name="Text 14"/>
           <p:cNvSpPr/>
           <p:nvPr/>
         </p:nvSpPr>
@@ -25170,7 +25543,7 @@
       </p:sp>
       <p:sp>
         <p:nvSpPr>
-          <p:cNvPr id="17" name="Text 14"/>
+          <p:cNvPr id="18" name="Text 15"/>
           <p:cNvSpPr/>
           <p:nvPr/>
         </p:nvSpPr>
@@ -25209,7 +25582,7 @@
       </p:sp>
       <p:sp>
         <p:nvSpPr>
-          <p:cNvPr id="18" name="Text 15"/>
+          <p:cNvPr id="19" name="Text 16"/>
           <p:cNvSpPr/>
           <p:nvPr/>
         </p:nvSpPr>
@@ -25251,7 +25624,7 @@
       </p:sp>
       <p:sp>
         <p:nvSpPr>
-          <p:cNvPr id="19" name="Shape 16"/>
+          <p:cNvPr id="20" name="Shape 17"/>
           <p:cNvSpPr/>
           <p:nvPr/>
         </p:nvSpPr>
@@ -25273,7 +25646,7 @@
       </p:sp>
       <p:sp>
         <p:nvSpPr>
-          <p:cNvPr id="20" name="Shape 17"/>
+          <p:cNvPr id="21" name="Shape 18"/>
           <p:cNvSpPr/>
           <p:nvPr/>
         </p:nvSpPr>
@@ -25293,7 +25666,7 @@
       </p:sp>
       <p:sp>
         <p:nvSpPr>
-          <p:cNvPr id="21" name="Text 18"/>
+          <p:cNvPr id="22" name="Text 19"/>
           <p:cNvSpPr/>
           <p:nvPr/>
         </p:nvSpPr>
@@ -25332,7 +25705,7 @@
       </p:sp>
       <p:sp>
         <p:nvSpPr>
-          <p:cNvPr id="22" name="Text 19"/>
+          <p:cNvPr id="23" name="Text 20"/>
           <p:cNvSpPr/>
           <p:nvPr/>
         </p:nvSpPr>
@@ -25371,7 +25744,7 @@
       </p:sp>
       <p:sp>
         <p:nvSpPr>
-          <p:cNvPr id="23" name="Text 20"/>
+          <p:cNvPr id="24" name="Text 21"/>
           <p:cNvSpPr/>
           <p:nvPr/>
         </p:nvSpPr>
@@ -25423,7 +25796,7 @@
         </p:nvSpPr>
         <p:spPr>
           <a:xfrm>
-            <a:off x="11368735" y="6437376"/>
+            <a:off x="11368735" y="6327648"/>
             <a:ext cx="365760" cy="274320"/>
           </a:xfrm>
           <a:prstGeom prst="rect">
@@ -25470,13 +25843,6 @@
 <file path=ppt/slides/slide9.xml><?xml version="1.0" encoding="utf-8"?>
 <p:sld xmlns:a="http://schemas.openxmlformats.org/drawingml/2006/main" xmlns:r="http://schemas.openxmlformats.org/officeDocument/2006/relationships" xmlns:p="http://schemas.openxmlformats.org/presentationml/2006/main">
   <p:cSld name="Slide 9">
-    <p:bg>
-      <p:bgPr>
-        <a:solidFill>
-          <a:srgbClr val="FFFFFF"/>
-        </a:solidFill>
-      </p:bgPr>
-    </p:bg>
     <p:spTree>
       <p:nvGrpSpPr>
         <p:cNvPr id="1" name=""/>
@@ -25493,7 +25859,29 @@
       </p:grpSpPr>
       <p:sp>
         <p:nvSpPr>
-          <p:cNvPr id="2" name="Text 0"/>
+          <p:cNvPr id="2" name="Shape 0"/>
+          <p:cNvSpPr/>
+          <p:nvPr/>
+        </p:nvSpPr>
+        <p:spPr>
+          <a:xfrm>
+            <a:off x="231343" y="194767"/>
+            <a:ext cx="11716207" cy="6473952"/>
+          </a:xfrm>
+          <a:prstGeom prst="roundRect">
+            <a:avLst>
+              <a:gd name="adj" fmla="val 3107"/>
+            </a:avLst>
+          </a:prstGeom>
+          <a:solidFill>
+            <a:srgbClr val="FFFFFF"/>
+          </a:solidFill>
+          <a:ln/>
+        </p:spPr>
+      </p:sp>
+      <p:sp>
+        <p:nvSpPr>
+          <p:cNvPr id="3" name="Text 1"/>
           <p:cNvSpPr/>
           <p:nvPr/>
         </p:nvSpPr>
@@ -25532,7 +25920,7 @@
       </p:sp>
       <p:sp>
         <p:nvSpPr>
-          <p:cNvPr id="3" name="Text 1"/>
+          <p:cNvPr id="4" name="Text 2"/>
           <p:cNvSpPr/>
           <p:nvPr/>
         </p:nvSpPr>
@@ -25571,7 +25959,7 @@
       </p:sp>
       <p:sp>
         <p:nvSpPr>
-          <p:cNvPr id="4" name="Shape 2"/>
+          <p:cNvPr id="5" name="Shape 3"/>
           <p:cNvSpPr/>
           <p:nvPr/>
         </p:nvSpPr>
@@ -25593,7 +25981,7 @@
       </p:sp>
       <p:sp>
         <p:nvSpPr>
-          <p:cNvPr id="5" name="Text 3"/>
+          <p:cNvPr id="6" name="Text 4"/>
           <p:cNvSpPr/>
           <p:nvPr/>
         </p:nvSpPr>
@@ -25632,7 +26020,7 @@
       </p:sp>
       <p:pic>
         <p:nvPicPr>
-          <p:cNvPr id="6" name="Image 0" descr="preencoded.png">    </p:cNvPr>
+          <p:cNvPr id="7" name="Image 0" descr="preencoded.png">    </p:cNvPr>
           <p:cNvPicPr>
             <a:picLocks noChangeAspect="1"/>
           </p:cNvPicPr>
@@ -25646,7 +26034,7 @@
         </p:blipFill>
         <p:spPr>
           <a:xfrm>
-            <a:off x="566928" y="6254496"/>
+            <a:off x="566928" y="6126480"/>
             <a:ext cx="1481328" cy="457200"/>
           </a:xfrm>
           <a:prstGeom prst="rect">
@@ -25656,7 +26044,7 @@
       </p:pic>
       <p:sp>
         <p:nvSpPr>
-          <p:cNvPr id="7" name="Shape 4"/>
+          <p:cNvPr id="8" name="Shape 5"/>
           <p:cNvSpPr/>
           <p:nvPr/>
         </p:nvSpPr>
@@ -25683,7 +26071,7 @@
       </p:sp>
       <p:sp>
         <p:nvSpPr>
-          <p:cNvPr id="8" name="Text 5"/>
+          <p:cNvPr id="9" name="Text 6"/>
           <p:cNvSpPr/>
           <p:nvPr/>
         </p:nvSpPr>
@@ -25865,7 +26253,7 @@
       </p:sp>
       <p:sp>
         <p:nvSpPr>
-          <p:cNvPr id="9" name="Shape 6"/>
+          <p:cNvPr id="10" name="Shape 7"/>
           <p:cNvSpPr/>
           <p:nvPr/>
         </p:nvSpPr>
@@ -25892,7 +26280,7 @@
       </p:sp>
       <p:sp>
         <p:nvSpPr>
-          <p:cNvPr id="10" name="Shape 7"/>
+          <p:cNvPr id="11" name="Shape 8"/>
           <p:cNvSpPr/>
           <p:nvPr/>
         </p:nvSpPr>
@@ -25912,7 +26300,7 @@
       </p:sp>
       <p:sp>
         <p:nvSpPr>
-          <p:cNvPr id="11" name="Text 8"/>
+          <p:cNvPr id="12" name="Text 9"/>
           <p:cNvSpPr/>
           <p:nvPr/>
         </p:nvSpPr>
@@ -25951,7 +26339,7 @@
       </p:sp>
       <p:sp>
         <p:nvSpPr>
-          <p:cNvPr id="12" name="Text 9"/>
+          <p:cNvPr id="13" name="Text 10"/>
           <p:cNvSpPr/>
           <p:nvPr/>
         </p:nvSpPr>
@@ -25990,7 +26378,7 @@
       </p:sp>
       <p:sp>
         <p:nvSpPr>
-          <p:cNvPr id="13" name="Text 10"/>
+          <p:cNvPr id="14" name="Text 11"/>
           <p:cNvSpPr/>
           <p:nvPr/>
         </p:nvSpPr>
@@ -26032,7 +26420,7 @@
       </p:sp>
       <p:sp>
         <p:nvSpPr>
-          <p:cNvPr id="14" name="Shape 11"/>
+          <p:cNvPr id="15" name="Shape 12"/>
           <p:cNvSpPr/>
           <p:nvPr/>
         </p:nvSpPr>
@@ -26059,7 +26447,7 @@
       </p:sp>
       <p:sp>
         <p:nvSpPr>
-          <p:cNvPr id="15" name="Shape 12"/>
+          <p:cNvPr id="16" name="Shape 13"/>
           <p:cNvSpPr/>
           <p:nvPr/>
         </p:nvSpPr>
@@ -26079,7 +26467,7 @@
       </p:sp>
       <p:sp>
         <p:nvSpPr>
-          <p:cNvPr id="16" name="Text 13"/>
+          <p:cNvPr id="17" name="Text 14"/>
           <p:cNvSpPr/>
           <p:nvPr/>
         </p:nvSpPr>
@@ -26118,7 +26506,7 @@
       </p:sp>
       <p:sp>
         <p:nvSpPr>
-          <p:cNvPr id="17" name="Text 14"/>
+          <p:cNvPr id="18" name="Text 15"/>
           <p:cNvSpPr/>
           <p:nvPr/>
         </p:nvSpPr>
@@ -26157,7 +26545,7 @@
       </p:sp>
       <p:sp>
         <p:nvSpPr>
-          <p:cNvPr id="18" name="Text 15"/>
+          <p:cNvPr id="19" name="Text 16"/>
           <p:cNvSpPr/>
           <p:nvPr/>
         </p:nvSpPr>
@@ -26199,7 +26587,7 @@
       </p:sp>
       <p:sp>
         <p:nvSpPr>
-          <p:cNvPr id="19" name="Shape 16"/>
+          <p:cNvPr id="20" name="Shape 17"/>
           <p:cNvSpPr/>
           <p:nvPr/>
         </p:nvSpPr>
@@ -26221,7 +26609,7 @@
       </p:sp>
       <p:sp>
         <p:nvSpPr>
-          <p:cNvPr id="20" name="Shape 17"/>
+          <p:cNvPr id="21" name="Shape 18"/>
           <p:cNvSpPr/>
           <p:nvPr/>
         </p:nvSpPr>
@@ -26241,7 +26629,7 @@
       </p:sp>
       <p:sp>
         <p:nvSpPr>
-          <p:cNvPr id="21" name="Text 18"/>
+          <p:cNvPr id="22" name="Text 19"/>
           <p:cNvSpPr/>
           <p:nvPr/>
         </p:nvSpPr>
@@ -26280,7 +26668,7 @@
       </p:sp>
       <p:sp>
         <p:nvSpPr>
-          <p:cNvPr id="22" name="Text 19"/>
+          <p:cNvPr id="23" name="Text 20"/>
           <p:cNvSpPr/>
           <p:nvPr/>
         </p:nvSpPr>
@@ -26319,7 +26707,7 @@
       </p:sp>
       <p:sp>
         <p:nvSpPr>
-          <p:cNvPr id="23" name="Text 20"/>
+          <p:cNvPr id="24" name="Text 21"/>
           <p:cNvSpPr/>
           <p:nvPr/>
         </p:nvSpPr>
@@ -26371,7 +26759,7 @@
         </p:nvSpPr>
         <p:spPr>
           <a:xfrm>
-            <a:off x="11368735" y="6437376"/>
+            <a:off x="11368735" y="6327648"/>
             <a:ext cx="365760" cy="274320"/>
           </a:xfrm>
           <a:prstGeom prst="rect">

--- a/docs/decks/L07.pptx
+++ b/docs/decks/L07.pptx
@@ -2714,7 +2714,7 @@
         </p:nvSpPr>
         <p:spPr>
           <a:xfrm>
-            <a:off x="11368735" y="6327648"/>
+            <a:off x="11368735" y="6437376"/>
             <a:ext cx="365760" cy="274320"/>
           </a:xfrm>
           <a:prstGeom prst="rect">
@@ -2843,7 +2843,7 @@
         </p:nvSpPr>
         <p:spPr>
           <a:xfrm>
-            <a:off x="11368735" y="6327648"/>
+            <a:off x="11368735" y="6437376"/>
             <a:ext cx="365760" cy="274320"/>
           </a:xfrm>
           <a:prstGeom prst="rect">
@@ -3983,7 +3983,7 @@
         </p:blipFill>
         <p:spPr>
           <a:xfrm>
-            <a:off x="566928" y="6126480"/>
+            <a:off x="566928" y="6254496"/>
             <a:ext cx="1481328" cy="457200"/>
           </a:xfrm>
           <a:prstGeom prst="rect">
@@ -5167,7 +5167,7 @@
         </p:nvSpPr>
         <p:spPr>
           <a:xfrm>
-            <a:off x="11368735" y="6327648"/>
+            <a:off x="11368735" y="6437376"/>
             <a:ext cx="365760" cy="274320"/>
           </a:xfrm>
           <a:prstGeom prst="rect">
@@ -5383,7 +5383,7 @@
         </p:blipFill>
         <p:spPr>
           <a:xfrm>
-            <a:off x="566928" y="6126480"/>
+            <a:off x="566928" y="6254496"/>
             <a:ext cx="1481328" cy="457200"/>
           </a:xfrm>
           <a:prstGeom prst="rect">
@@ -6365,7 +6365,7 @@
         </p:nvSpPr>
         <p:spPr>
           <a:xfrm>
-            <a:off x="11368735" y="6327648"/>
+            <a:off x="11368735" y="6437376"/>
             <a:ext cx="365760" cy="274320"/>
           </a:xfrm>
           <a:prstGeom prst="rect">
@@ -6581,7 +6581,7 @@
         </p:blipFill>
         <p:spPr>
           <a:xfrm>
-            <a:off x="566928" y="6126480"/>
+            <a:off x="566928" y="6254496"/>
             <a:ext cx="1481328" cy="457200"/>
           </a:xfrm>
           <a:prstGeom prst="rect">
@@ -7932,7 +7932,7 @@
         </p:nvSpPr>
         <p:spPr>
           <a:xfrm>
-            <a:off x="11368735" y="6327648"/>
+            <a:off x="11368735" y="6437376"/>
             <a:ext cx="365760" cy="274320"/>
           </a:xfrm>
           <a:prstGeom prst="rect">
@@ -8148,7 +8148,7 @@
         </p:blipFill>
         <p:spPr>
           <a:xfrm>
-            <a:off x="566928" y="6126480"/>
+            <a:off x="566928" y="6254496"/>
             <a:ext cx="1481328" cy="457200"/>
           </a:xfrm>
           <a:prstGeom prst="rect">
@@ -8587,7 +8587,7 @@
         </p:nvSpPr>
         <p:spPr>
           <a:xfrm>
-            <a:off x="11368735" y="6327648"/>
+            <a:off x="11368735" y="6437376"/>
             <a:ext cx="365760" cy="274320"/>
           </a:xfrm>
           <a:prstGeom prst="rect">
@@ -8803,7 +8803,7 @@
         </p:blipFill>
         <p:spPr>
           <a:xfrm>
-            <a:off x="566928" y="6126480"/>
+            <a:off x="566928" y="6254496"/>
             <a:ext cx="1481328" cy="457200"/>
           </a:xfrm>
           <a:prstGeom prst="rect">
@@ -9135,7 +9135,7 @@
         </p:nvSpPr>
         <p:spPr>
           <a:xfrm>
-            <a:off x="11368735" y="6327648"/>
+            <a:off x="11368735" y="6437376"/>
             <a:ext cx="365760" cy="274320"/>
           </a:xfrm>
           <a:prstGeom prst="rect">
@@ -9412,7 +9412,7 @@
         </p:blipFill>
         <p:spPr>
           <a:xfrm>
-            <a:off x="566928" y="6126480"/>
+            <a:off x="566928" y="6254496"/>
             <a:ext cx="1481328" cy="457200"/>
           </a:xfrm>
           <a:prstGeom prst="rect">
@@ -9848,7 +9848,7 @@
         </p:nvSpPr>
         <p:spPr>
           <a:xfrm>
-            <a:off x="11368735" y="6327648"/>
+            <a:off x="11368735" y="6437376"/>
             <a:ext cx="365760" cy="274320"/>
           </a:xfrm>
           <a:prstGeom prst="rect">
@@ -10125,7 +10125,7 @@
         </p:blipFill>
         <p:spPr>
           <a:xfrm>
-            <a:off x="566928" y="6126480"/>
+            <a:off x="566928" y="6254496"/>
             <a:ext cx="1481328" cy="457200"/>
           </a:xfrm>
           <a:prstGeom prst="rect">
@@ -10785,7 +10785,7 @@
         </p:nvSpPr>
         <p:spPr>
           <a:xfrm>
-            <a:off x="11368735" y="6327648"/>
+            <a:off x="11368735" y="6437376"/>
             <a:ext cx="365760" cy="274320"/>
           </a:xfrm>
           <a:prstGeom prst="rect">
@@ -11001,7 +11001,7 @@
         </p:blipFill>
         <p:spPr>
           <a:xfrm>
-            <a:off x="566928" y="6126480"/>
+            <a:off x="566928" y="6254496"/>
             <a:ext cx="1481328" cy="457200"/>
           </a:xfrm>
           <a:prstGeom prst="rect">
@@ -11464,7 +11464,7 @@
         </p:nvSpPr>
         <p:spPr>
           <a:xfrm>
-            <a:off x="11368735" y="6327648"/>
+            <a:off x="11368735" y="6437376"/>
             <a:ext cx="365760" cy="274320"/>
           </a:xfrm>
           <a:prstGeom prst="rect">
@@ -11722,7 +11722,7 @@
         </p:blipFill>
         <p:spPr>
           <a:xfrm>
-            <a:off x="566928" y="6126480"/>
+            <a:off x="566928" y="6254496"/>
             <a:ext cx="1481328" cy="457200"/>
           </a:xfrm>
           <a:prstGeom prst="rect">
@@ -12233,7 +12233,7 @@
         </p:nvSpPr>
         <p:spPr>
           <a:xfrm>
-            <a:off x="11368735" y="6327648"/>
+            <a:off x="11368735" y="6437376"/>
             <a:ext cx="365760" cy="274320"/>
           </a:xfrm>
           <a:prstGeom prst="rect">
@@ -12410,7 +12410,7 @@
         </p:blipFill>
         <p:spPr>
           <a:xfrm>
-            <a:off x="566928" y="6126480"/>
+            <a:off x="566928" y="6254496"/>
             <a:ext cx="1481328" cy="457200"/>
           </a:xfrm>
           <a:prstGeom prst="rect">
@@ -13343,7 +13343,7 @@
         </p:nvSpPr>
         <p:spPr>
           <a:xfrm>
-            <a:off x="11368735" y="6327648"/>
+            <a:off x="11368735" y="6437376"/>
             <a:ext cx="365760" cy="274320"/>
           </a:xfrm>
           <a:prstGeom prst="rect">
@@ -13562,7 +13562,7 @@
         </p:blipFill>
         <p:spPr>
           <a:xfrm>
-            <a:off x="566928" y="6126480"/>
+            <a:off x="566928" y="6254496"/>
             <a:ext cx="1481328" cy="457200"/>
           </a:xfrm>
           <a:prstGeom prst="rect">
@@ -14412,7 +14412,7 @@
         </p:nvSpPr>
         <p:spPr>
           <a:xfrm>
-            <a:off x="11368735" y="6327648"/>
+            <a:off x="11368735" y="6437376"/>
             <a:ext cx="365760" cy="274320"/>
           </a:xfrm>
           <a:prstGeom prst="rect">
@@ -14589,7 +14589,7 @@
         </p:blipFill>
         <p:spPr>
           <a:xfrm>
-            <a:off x="566928" y="6126480"/>
+            <a:off x="566928" y="6254496"/>
             <a:ext cx="1481328" cy="457200"/>
           </a:xfrm>
           <a:prstGeom prst="rect">
@@ -15057,7 +15057,7 @@
         </p:nvSpPr>
         <p:spPr>
           <a:xfrm>
-            <a:off x="11368735" y="6327648"/>
+            <a:off x="11368735" y="6437376"/>
             <a:ext cx="365760" cy="274320"/>
           </a:xfrm>
           <a:prstGeom prst="rect">
@@ -15234,7 +15234,7 @@
         </p:blipFill>
         <p:spPr>
           <a:xfrm>
-            <a:off x="566928" y="6126480"/>
+            <a:off x="566928" y="6254496"/>
             <a:ext cx="1481328" cy="457200"/>
           </a:xfrm>
           <a:prstGeom prst="rect">
@@ -15671,7 +15671,7 @@
         </p:nvSpPr>
         <p:spPr>
           <a:xfrm>
-            <a:off x="11368735" y="6327648"/>
+            <a:off x="11368735" y="6437376"/>
             <a:ext cx="365760" cy="274320"/>
           </a:xfrm>
           <a:prstGeom prst="rect">
@@ -15848,7 +15848,7 @@
         </p:blipFill>
         <p:spPr>
           <a:xfrm>
-            <a:off x="566928" y="6126480"/>
+            <a:off x="566928" y="6254496"/>
             <a:ext cx="1481328" cy="457200"/>
           </a:xfrm>
           <a:prstGeom prst="rect">
@@ -16358,7 +16358,7 @@
         </p:nvSpPr>
         <p:spPr>
           <a:xfrm>
-            <a:off x="11368735" y="6327648"/>
+            <a:off x="11368735" y="6437376"/>
             <a:ext cx="365760" cy="274320"/>
           </a:xfrm>
           <a:prstGeom prst="rect">
@@ -16535,7 +16535,7 @@
         </p:blipFill>
         <p:spPr>
           <a:xfrm>
-            <a:off x="566928" y="6126480"/>
+            <a:off x="566928" y="6254496"/>
             <a:ext cx="1481328" cy="457200"/>
           </a:xfrm>
           <a:prstGeom prst="rect">
@@ -17255,7 +17255,7 @@
         </p:nvSpPr>
         <p:spPr>
           <a:xfrm>
-            <a:off x="11368735" y="6327648"/>
+            <a:off x="11368735" y="6437376"/>
             <a:ext cx="365760" cy="274320"/>
           </a:xfrm>
           <a:prstGeom prst="rect">
@@ -17432,7 +17432,7 @@
         </p:blipFill>
         <p:spPr>
           <a:xfrm>
-            <a:off x="566928" y="6126480"/>
+            <a:off x="566928" y="6254496"/>
             <a:ext cx="1481328" cy="457200"/>
           </a:xfrm>
           <a:prstGeom prst="rect">
@@ -17826,7 +17826,7 @@
         </p:nvSpPr>
         <p:spPr>
           <a:xfrm>
-            <a:off x="11368735" y="6327648"/>
+            <a:off x="11368735" y="6437376"/>
             <a:ext cx="365760" cy="274320"/>
           </a:xfrm>
           <a:prstGeom prst="rect">
@@ -18524,7 +18524,7 @@
         </p:blipFill>
         <p:spPr>
           <a:xfrm>
-            <a:off x="566928" y="6126480"/>
+            <a:off x="566928" y="6254496"/>
             <a:ext cx="1481328" cy="457200"/>
           </a:xfrm>
           <a:prstGeom prst="rect">
@@ -19983,7 +19983,7 @@
         </p:nvSpPr>
         <p:spPr>
           <a:xfrm>
-            <a:off x="11368735" y="6327648"/>
+            <a:off x="11368735" y="6437376"/>
             <a:ext cx="365760" cy="274320"/>
           </a:xfrm>
           <a:prstGeom prst="rect">
@@ -20202,7 +20202,7 @@
         </p:blipFill>
         <p:spPr>
           <a:xfrm>
-            <a:off x="566928" y="6126480"/>
+            <a:off x="566928" y="6254496"/>
             <a:ext cx="1481328" cy="457200"/>
           </a:xfrm>
           <a:prstGeom prst="rect">
@@ -20939,7 +20939,7 @@
         </p:nvSpPr>
         <p:spPr>
           <a:xfrm>
-            <a:off x="11368735" y="6327648"/>
+            <a:off x="11368735" y="6437376"/>
             <a:ext cx="365760" cy="274320"/>
           </a:xfrm>
           <a:prstGeom prst="rect">
@@ -21155,7 +21155,7 @@
         </p:blipFill>
         <p:spPr>
           <a:xfrm>
-            <a:off x="566928" y="6126480"/>
+            <a:off x="566928" y="6254496"/>
             <a:ext cx="1481328" cy="457200"/>
           </a:xfrm>
           <a:prstGeom prst="rect">
@@ -21906,7 +21906,7 @@
         </p:nvSpPr>
         <p:spPr>
           <a:xfrm>
-            <a:off x="11368735" y="6327648"/>
+            <a:off x="11368735" y="6437376"/>
             <a:ext cx="365760" cy="274320"/>
           </a:xfrm>
           <a:prstGeom prst="rect">
@@ -22122,7 +22122,7 @@
         </p:blipFill>
         <p:spPr>
           <a:xfrm>
-            <a:off x="566928" y="6126480"/>
+            <a:off x="566928" y="6254496"/>
             <a:ext cx="1481328" cy="457200"/>
           </a:xfrm>
           <a:prstGeom prst="rect">
@@ -23256,7 +23256,7 @@
         </p:nvSpPr>
         <p:spPr>
           <a:xfrm>
-            <a:off x="11368735" y="6327648"/>
+            <a:off x="11368735" y="6437376"/>
             <a:ext cx="365760" cy="274320"/>
           </a:xfrm>
           <a:prstGeom prst="rect">
@@ -23472,7 +23472,7 @@
         </p:blipFill>
         <p:spPr>
           <a:xfrm>
-            <a:off x="566928" y="6126480"/>
+            <a:off x="566928" y="6254496"/>
             <a:ext cx="1481328" cy="457200"/>
           </a:xfrm>
           <a:prstGeom prst="rect">
@@ -24366,7 +24366,7 @@
         </p:nvSpPr>
         <p:spPr>
           <a:xfrm>
-            <a:off x="11368735" y="6327648"/>
+            <a:off x="11368735" y="6437376"/>
             <a:ext cx="365760" cy="274320"/>
           </a:xfrm>
           <a:prstGeom prst="rect">
@@ -24582,7 +24582,7 @@
         </p:blipFill>
         <p:spPr>
           <a:xfrm>
-            <a:off x="566928" y="6126480"/>
+            <a:off x="566928" y="6254496"/>
             <a:ext cx="1481328" cy="457200"/>
           </a:xfrm>
           <a:prstGeom prst="rect">
@@ -25317,7 +25317,7 @@
         </p:nvSpPr>
         <p:spPr>
           <a:xfrm>
-            <a:off x="11368735" y="6327648"/>
+            <a:off x="11368735" y="6437376"/>
             <a:ext cx="365760" cy="274320"/>
           </a:xfrm>
           <a:prstGeom prst="rect">
@@ -25533,7 +25533,7 @@
         </p:blipFill>
         <p:spPr>
           <a:xfrm>
-            <a:off x="566928" y="6126480"/>
+            <a:off x="566928" y="6254496"/>
             <a:ext cx="1481328" cy="457200"/>
           </a:xfrm>
           <a:prstGeom prst="rect">
@@ -26258,7 +26258,7 @@
         </p:nvSpPr>
         <p:spPr>
           <a:xfrm>
-            <a:off x="11368735" y="6327648"/>
+            <a:off x="11368735" y="6437376"/>
             <a:ext cx="365760" cy="274320"/>
           </a:xfrm>
           <a:prstGeom prst="rect">

--- a/docs/decks/L07.pptx
+++ b/docs/decks/L07.pptx
@@ -3341,17 +3341,17 @@
               <a:buNone/>
             </a:pPr>
             <a:r>
-              <a:rPr lang="en-US" sz="4000" b="1" dirty="0">
+              <a:rPr lang="en-US" sz="3600" dirty="0">
                 <a:solidFill>
                   <a:srgbClr val="FFFFFF"/>
                 </a:solidFill>
-                <a:latin typeface="Montserrat" pitchFamily="34" charset="0"/>
-                <a:ea typeface="Montserrat" pitchFamily="34" charset="-122"/>
-                <a:cs typeface="Montserrat" pitchFamily="34" charset="-120"/>
+                <a:latin typeface="Unbounded" pitchFamily="34" charset="0"/>
+                <a:ea typeface="Unbounded" pitchFamily="34" charset="-122"/>
+                <a:cs typeface="Unbounded" pitchFamily="34" charset="-120"/>
               </a:rPr>
               <a:t>Reliability: fallback,</a:t>
             </a:r>
-            <a:endParaRPr lang="en-US" sz="4000" dirty="0"/>
+            <a:endParaRPr lang="en-US" sz="3600" dirty="0"/>
           </a:p>
           <a:p>
             <a:pPr indent="0" marL="0">
@@ -3361,17 +3361,17 @@
               <a:buNone/>
             </a:pPr>
             <a:r>
-              <a:rPr lang="en-US" sz="4000" b="1" dirty="0">
+              <a:rPr lang="en-US" sz="3600" dirty="0">
                 <a:solidFill>
                   <a:srgbClr val="FFFFFF"/>
                 </a:solidFill>
-                <a:latin typeface="Montserrat" pitchFamily="34" charset="0"/>
-                <a:ea typeface="Montserrat" pitchFamily="34" charset="-122"/>
-                <a:cs typeface="Montserrat" pitchFamily="34" charset="-120"/>
+                <a:latin typeface="Unbounded" pitchFamily="34" charset="0"/>
+                <a:ea typeface="Unbounded" pitchFamily="34" charset="-122"/>
+                <a:cs typeface="Unbounded" pitchFamily="34" charset="-120"/>
               </a:rPr>
               <a:t>деградація і circuit breaker</a:t>
             </a:r>
-            <a:endParaRPr lang="en-US" sz="4000" dirty="0"/>
+            <a:endParaRPr lang="en-US" sz="3600" dirty="0"/>
           </a:p>
         </p:txBody>
       </p:sp>
@@ -3892,13 +3892,13 @@
               <a:buNone/>
             </a:pPr>
             <a:r>
-              <a:rPr lang="en-US" sz="2400" b="1" dirty="0">
+              <a:rPr lang="en-US" sz="2400" dirty="0">
                 <a:solidFill>
                   <a:srgbClr val="FFFFFF"/>
                 </a:solidFill>
-                <a:latin typeface="Montserrat" pitchFamily="34" charset="0"/>
-                <a:ea typeface="Montserrat" pitchFamily="34" charset="-122"/>
-                <a:cs typeface="Montserrat" pitchFamily="34" charset="-120"/>
+                <a:latin typeface="Unbounded" pitchFamily="34" charset="0"/>
+                <a:ea typeface="Unbounded" pitchFamily="34" charset="-122"/>
+                <a:cs typeface="Unbounded" pitchFamily="34" charset="-120"/>
               </a:rPr>
               <a:t>Право на повтор: не кожну операцію можна ретраїти</a:t>
             </a:r>
@@ -3914,7 +3914,7 @@
         </p:nvSpPr>
         <p:spPr>
           <a:xfrm>
-            <a:off x="1280160" y="1193140"/>
+            <a:off x="1280160" y="1218895"/>
             <a:ext cx="777240" cy="256032"/>
           </a:xfrm>
           <a:prstGeom prst="roundRect">
@@ -3936,7 +3936,7 @@
         </p:nvSpPr>
         <p:spPr>
           <a:xfrm>
-            <a:off x="1280160" y="1193140"/>
+            <a:off x="1280160" y="1218895"/>
             <a:ext cx="777240" cy="256032"/>
           </a:xfrm>
           <a:prstGeom prst="rect">
@@ -5292,13 +5292,13 @@
               <a:buNone/>
             </a:pPr>
             <a:r>
-              <a:rPr lang="en-US" sz="2400" b="1" dirty="0">
+              <a:rPr lang="en-US" sz="2400" dirty="0">
                 <a:solidFill>
                   <a:srgbClr val="FFFFFF"/>
                 </a:solidFill>
-                <a:latin typeface="Montserrat" pitchFamily="34" charset="0"/>
-                <a:ea typeface="Montserrat" pitchFamily="34" charset="-122"/>
-                <a:cs typeface="Montserrat" pitchFamily="34" charset="-120"/>
+                <a:latin typeface="Unbounded" pitchFamily="34" charset="0"/>
+                <a:ea typeface="Unbounded" pitchFamily="34" charset="-122"/>
+                <a:cs typeface="Unbounded" pitchFamily="34" charset="-120"/>
               </a:rPr>
               <a:t>Retry storm: ваша стійкість добиває провайдера</a:t>
             </a:r>
@@ -5314,7 +5314,7 @@
         </p:nvSpPr>
         <p:spPr>
           <a:xfrm>
-            <a:off x="1280160" y="1193140"/>
+            <a:off x="1280160" y="1218895"/>
             <a:ext cx="777240" cy="256032"/>
           </a:xfrm>
           <a:prstGeom prst="roundRect">
@@ -5336,7 +5336,7 @@
         </p:nvSpPr>
         <p:spPr>
           <a:xfrm>
-            <a:off x="1280160" y="1193140"/>
+            <a:off x="1280160" y="1218895"/>
             <a:ext cx="777240" cy="256032"/>
           </a:xfrm>
           <a:prstGeom prst="rect">
@@ -6490,13 +6490,13 @@
               <a:buNone/>
             </a:pPr>
             <a:r>
-              <a:rPr lang="en-US" sz="2400" b="1" dirty="0">
+              <a:rPr lang="en-US" sz="2400" dirty="0">
                 <a:solidFill>
                   <a:srgbClr val="FFFFFF"/>
                 </a:solidFill>
-                <a:latin typeface="Montserrat" pitchFamily="34" charset="0"/>
-                <a:ea typeface="Montserrat" pitchFamily="34" charset="-122"/>
-                <a:cs typeface="Montserrat" pitchFamily="34" charset="-120"/>
+                <a:latin typeface="Unbounded" pitchFamily="34" charset="0"/>
+                <a:ea typeface="Unbounded" pitchFamily="34" charset="-122"/>
+                <a:cs typeface="Unbounded" pitchFamily="34" charset="-120"/>
               </a:rPr>
               <a:t>Деградація має сходинки</a:t>
             </a:r>
@@ -8057,13 +8057,13 @@
               <a:buNone/>
             </a:pPr>
             <a:r>
-              <a:rPr lang="en-US" sz="2400" b="1" dirty="0">
+              <a:rPr lang="en-US" sz="2400" dirty="0">
                 <a:solidFill>
                   <a:srgbClr val="FFFFFF"/>
                 </a:solidFill>
-                <a:latin typeface="Montserrat" pitchFamily="34" charset="0"/>
-                <a:ea typeface="Montserrat" pitchFamily="34" charset="-122"/>
-                <a:cs typeface="Montserrat" pitchFamily="34" charset="-120"/>
+                <a:latin typeface="Unbounded" pitchFamily="34" charset="0"/>
+                <a:ea typeface="Unbounded" pitchFamily="34" charset="-122"/>
+                <a:cs typeface="Unbounded" pitchFamily="34" charset="-120"/>
               </a:rPr>
               <a:t>Остання лінія — це UX-рішення</a:t>
             </a:r>
@@ -8712,13 +8712,13 @@
               <a:buNone/>
             </a:pPr>
             <a:r>
-              <a:rPr lang="en-US" sz="2400" b="1" dirty="0">
+              <a:rPr lang="en-US" sz="2400" dirty="0">
                 <a:solidFill>
                   <a:srgbClr val="FFFFFF"/>
                 </a:solidFill>
-                <a:latin typeface="Montserrat" pitchFamily="34" charset="0"/>
-                <a:ea typeface="Montserrat" pitchFamily="34" charset="-122"/>
-                <a:cs typeface="Montserrat" pitchFamily="34" charset="-120"/>
+                <a:latin typeface="Unbounded" pitchFamily="34" charset="0"/>
+                <a:ea typeface="Unbounded" pitchFamily="34" charset="-122"/>
+                <a:cs typeface="Unbounded" pitchFamily="34" charset="-120"/>
               </a:rPr>
               <a:t>Помилки мають бути швидкими</a:t>
             </a:r>
@@ -9260,13 +9260,13 @@
               <a:buNone/>
             </a:pPr>
             <a:r>
-              <a:rPr lang="en-US" sz="2400" b="1" dirty="0">
+              <a:rPr lang="en-US" sz="2400" dirty="0">
                 <a:solidFill>
                   <a:srgbClr val="FFFFFF"/>
                 </a:solidFill>
-                <a:latin typeface="Montserrat" pitchFamily="34" charset="0"/>
-                <a:ea typeface="Montserrat" pitchFamily="34" charset="-122"/>
-                <a:cs typeface="Montserrat" pitchFamily="34" charset="-120"/>
+                <a:latin typeface="Unbounded" pitchFamily="34" charset="0"/>
+                <a:ea typeface="Unbounded" pitchFamily="34" charset="-122"/>
+                <a:cs typeface="Unbounded" pitchFamily="34" charset="-120"/>
               </a:rPr>
               <a:t>Circuit breaker: перестати стукати в мертве</a:t>
             </a:r>
@@ -9282,7 +9282,7 @@
         </p:nvSpPr>
         <p:spPr>
           <a:xfrm>
-            <a:off x="1280160" y="1193140"/>
+            <a:off x="1280160" y="1218895"/>
             <a:ext cx="777240" cy="256032"/>
           </a:xfrm>
           <a:prstGeom prst="roundRect">
@@ -9304,7 +9304,7 @@
         </p:nvSpPr>
         <p:spPr>
           <a:xfrm>
-            <a:off x="1280160" y="1193140"/>
+            <a:off x="1280160" y="1218895"/>
             <a:ext cx="777240" cy="256032"/>
           </a:xfrm>
           <a:prstGeom prst="rect">
@@ -9343,7 +9343,7 @@
         </p:nvSpPr>
         <p:spPr>
           <a:xfrm>
-            <a:off x="2167128" y="1193140"/>
+            <a:off x="2167128" y="1218895"/>
             <a:ext cx="864108" cy="256032"/>
           </a:xfrm>
           <a:prstGeom prst="roundRect">
@@ -9365,7 +9365,7 @@
         </p:nvSpPr>
         <p:spPr>
           <a:xfrm>
-            <a:off x="2167128" y="1193140"/>
+            <a:off x="2167128" y="1218895"/>
             <a:ext cx="864108" cy="256032"/>
           </a:xfrm>
           <a:prstGeom prst="rect">
@@ -9973,13 +9973,13 @@
               <a:buNone/>
             </a:pPr>
             <a:r>
-              <a:rPr lang="en-US" sz="2400" b="1" dirty="0">
+              <a:rPr lang="en-US" sz="2400" dirty="0">
                 <a:solidFill>
                   <a:srgbClr val="FFFFFF"/>
                 </a:solidFill>
-                <a:latin typeface="Montserrat" pitchFamily="34" charset="0"/>
-                <a:ea typeface="Montserrat" pitchFamily="34" charset="-122"/>
-                <a:cs typeface="Montserrat" pitchFamily="34" charset="-120"/>
+                <a:latin typeface="Unbounded" pitchFamily="34" charset="0"/>
+                <a:ea typeface="Unbounded" pitchFamily="34" charset="-122"/>
+                <a:cs typeface="Unbounded" pitchFamily="34" charset="-120"/>
               </a:rPr>
               <a:t>Три стани — і чому half-open обов'язковий</a:t>
             </a:r>
@@ -9995,7 +9995,7 @@
         </p:nvSpPr>
         <p:spPr>
           <a:xfrm>
-            <a:off x="1280160" y="1193140"/>
+            <a:off x="1280160" y="1218895"/>
             <a:ext cx="777240" cy="256032"/>
           </a:xfrm>
           <a:prstGeom prst="roundRect">
@@ -10017,7 +10017,7 @@
         </p:nvSpPr>
         <p:spPr>
           <a:xfrm>
-            <a:off x="1280160" y="1193140"/>
+            <a:off x="1280160" y="1218895"/>
             <a:ext cx="777240" cy="256032"/>
           </a:xfrm>
           <a:prstGeom prst="rect">
@@ -10056,7 +10056,7 @@
         </p:nvSpPr>
         <p:spPr>
           <a:xfrm>
-            <a:off x="2167128" y="1193140"/>
+            <a:off x="2167128" y="1218895"/>
             <a:ext cx="864108" cy="256032"/>
           </a:xfrm>
           <a:prstGeom prst="roundRect">
@@ -10078,7 +10078,7 @@
         </p:nvSpPr>
         <p:spPr>
           <a:xfrm>
-            <a:off x="2167128" y="1193140"/>
+            <a:off x="2167128" y="1218895"/>
             <a:ext cx="864108" cy="256032"/>
           </a:xfrm>
           <a:prstGeom prst="rect">
@@ -10910,13 +10910,13 @@
               <a:buNone/>
             </a:pPr>
             <a:r>
-              <a:rPr lang="en-US" sz="2400" b="1" dirty="0">
+              <a:rPr lang="en-US" sz="2400" dirty="0">
                 <a:solidFill>
                   <a:srgbClr val="FFFFFF"/>
                 </a:solidFill>
-                <a:latin typeface="Montserrat" pitchFamily="34" charset="0"/>
-                <a:ea typeface="Montserrat" pitchFamily="34" charset="-122"/>
-                <a:cs typeface="Montserrat" pitchFamily="34" charset="-120"/>
+                <a:latin typeface="Unbounded" pitchFamily="34" charset="0"/>
+                <a:ea typeface="Unbounded" pitchFamily="34" charset="-122"/>
+                <a:cs typeface="Unbounded" pitchFamily="34" charset="-120"/>
               </a:rPr>
               <a:t>Слід у метриках: інцидент без сліду повториться</a:t>
             </a:r>
@@ -10932,7 +10932,7 @@
         </p:nvSpPr>
         <p:spPr>
           <a:xfrm>
-            <a:off x="1280160" y="1193140"/>
+            <a:off x="1280160" y="1218895"/>
             <a:ext cx="777240" cy="256032"/>
           </a:xfrm>
           <a:prstGeom prst="roundRect">
@@ -10954,7 +10954,7 @@
         </p:nvSpPr>
         <p:spPr>
           <a:xfrm>
-            <a:off x="1280160" y="1193140"/>
+            <a:off x="1280160" y="1218895"/>
             <a:ext cx="777240" cy="256032"/>
           </a:xfrm>
           <a:prstGeom prst="rect">
@@ -11589,13 +11589,13 @@
               <a:buNone/>
             </a:pPr>
             <a:r>
-              <a:rPr lang="en-US" sz="2400" b="1" dirty="0">
+              <a:rPr lang="en-US" sz="2400" dirty="0">
                 <a:solidFill>
                   <a:srgbClr val="FFFFFF"/>
                 </a:solidFill>
-                <a:latin typeface="Montserrat" pitchFamily="34" charset="0"/>
-                <a:ea typeface="Montserrat" pitchFamily="34" charset="-122"/>
-                <a:cs typeface="Montserrat" pitchFamily="34" charset="-120"/>
+                <a:latin typeface="Unbounded" pitchFamily="34" charset="0"/>
+                <a:ea typeface="Unbounded" pitchFamily="34" charset="-122"/>
+                <a:cs typeface="Unbounded" pitchFamily="34" charset="-120"/>
               </a:rPr>
               <a:t>Дві сучасні поправки до бюджету часу</a:t>
             </a:r>
@@ -11611,7 +11611,7 @@
         </p:nvSpPr>
         <p:spPr>
           <a:xfrm>
-            <a:off x="1280160" y="1174852"/>
+            <a:off x="1280160" y="1200607"/>
             <a:ext cx="6126480" cy="256032"/>
           </a:xfrm>
           <a:prstGeom prst="rect">
@@ -11653,7 +11653,7 @@
         </p:nvSpPr>
         <p:spPr>
           <a:xfrm>
-            <a:off x="1280160" y="1440028"/>
+            <a:off x="1280160" y="1465783"/>
             <a:ext cx="777240" cy="256032"/>
           </a:xfrm>
           <a:prstGeom prst="roundRect">
@@ -11675,7 +11675,7 @@
         </p:nvSpPr>
         <p:spPr>
           <a:xfrm>
-            <a:off x="1280160" y="1440028"/>
+            <a:off x="1280160" y="1465783"/>
             <a:ext cx="777240" cy="256032"/>
           </a:xfrm>
           <a:prstGeom prst="rect">
@@ -12319,13 +12319,13 @@
               <a:buNone/>
             </a:pPr>
             <a:r>
-              <a:rPr lang="en-US" sz="2400" b="1" dirty="0">
+              <a:rPr lang="en-US" sz="2400" dirty="0">
                 <a:solidFill>
                   <a:srgbClr val="FFFFFF"/>
                 </a:solidFill>
-                <a:latin typeface="Montserrat" pitchFamily="34" charset="0"/>
-                <a:ea typeface="Montserrat" pitchFamily="34" charset="-122"/>
-                <a:cs typeface="Montserrat" pitchFamily="34" charset="-120"/>
+                <a:latin typeface="Unbounded" pitchFamily="34" charset="0"/>
+                <a:ea typeface="Unbounded" pitchFamily="34" charset="-122"/>
+                <a:cs typeface="Unbounded" pitchFamily="34" charset="-120"/>
               </a:rPr>
               <a:t>Зараз ви побачите — і навіщо</a:t>
             </a:r>
@@ -13429,13 +13429,13 @@
               <a:buNone/>
             </a:pPr>
             <a:r>
-              <a:rPr lang="en-US" sz="2400" b="1" dirty="0">
+              <a:rPr lang="en-US" sz="2400" dirty="0">
                 <a:solidFill>
                   <a:srgbClr val="FFFFFF"/>
                 </a:solidFill>
-                <a:latin typeface="Montserrat" pitchFamily="34" charset="0"/>
-                <a:ea typeface="Montserrat" pitchFamily="34" charset="-122"/>
-                <a:cs typeface="Montserrat" pitchFamily="34" charset="-120"/>
+                <a:latin typeface="Unbounded" pitchFamily="34" charset="0"/>
+                <a:ea typeface="Unbounded" pitchFamily="34" charset="-122"/>
+                <a:cs typeface="Unbounded" pitchFamily="34" charset="-120"/>
               </a:rPr>
               <a:t>Що ви зможете після уроку</a:t>
             </a:r>
@@ -14498,13 +14498,13 @@
               <a:buNone/>
             </a:pPr>
             <a:r>
-              <a:rPr lang="en-US" sz="2400" b="1" dirty="0">
+              <a:rPr lang="en-US" sz="2400" dirty="0">
                 <a:solidFill>
                   <a:srgbClr val="FFFFFF"/>
                 </a:solidFill>
-                <a:latin typeface="Montserrat" pitchFamily="34" charset="0"/>
-                <a:ea typeface="Montserrat" pitchFamily="34" charset="-122"/>
-                <a:cs typeface="Montserrat" pitchFamily="34" charset="-120"/>
+                <a:latin typeface="Unbounded" pitchFamily="34" charset="0"/>
+                <a:ea typeface="Unbounded" pitchFamily="34" charset="-122"/>
+                <a:cs typeface="Unbounded" pitchFamily="34" charset="-120"/>
               </a:rPr>
               <a:t>Лабораторна: три кроки + опційний</a:t>
             </a:r>
@@ -15143,13 +15143,13 @@
               <a:buNone/>
             </a:pPr>
             <a:r>
-              <a:rPr lang="en-US" sz="2400" b="1" dirty="0">
+              <a:rPr lang="en-US" sz="2400" dirty="0">
                 <a:solidFill>
                   <a:srgbClr val="FFFFFF"/>
                 </a:solidFill>
-                <a:latin typeface="Montserrat" pitchFamily="34" charset="0"/>
-                <a:ea typeface="Montserrat" pitchFamily="34" charset="-122"/>
-                <a:cs typeface="Montserrat" pitchFamily="34" charset="-120"/>
+                <a:latin typeface="Unbounded" pitchFamily="34" charset="0"/>
+                <a:ea typeface="Unbounded" pitchFamily="34" charset="-122"/>
+                <a:cs typeface="Unbounded" pitchFamily="34" charset="-120"/>
               </a:rPr>
               <a:t>Що це довело</a:t>
             </a:r>
@@ -15757,13 +15757,13 @@
               <a:buNone/>
             </a:pPr>
             <a:r>
-              <a:rPr lang="en-US" sz="2400" b="1" dirty="0">
+              <a:rPr lang="en-US" sz="2400" dirty="0">
                 <a:solidFill>
                   <a:srgbClr val="FFFFFF"/>
                 </a:solidFill>
-                <a:latin typeface="Montserrat" pitchFamily="34" charset="0"/>
-                <a:ea typeface="Montserrat" pitchFamily="34" charset="-122"/>
-                <a:cs typeface="Montserrat" pitchFamily="34" charset="-120"/>
+                <a:latin typeface="Unbounded" pitchFamily="34" charset="0"/>
+                <a:ea typeface="Unbounded" pitchFamily="34" charset="-122"/>
+                <a:cs typeface="Unbounded" pitchFamily="34" charset="-120"/>
               </a:rPr>
               <a:t>Перевір себе</a:t>
             </a:r>
@@ -16444,13 +16444,13 @@
               <a:buNone/>
             </a:pPr>
             <a:r>
-              <a:rPr lang="en-US" sz="2400" b="1" dirty="0">
+              <a:rPr lang="en-US" sz="2400" dirty="0">
                 <a:solidFill>
                   <a:srgbClr val="FFFFFF"/>
                 </a:solidFill>
-                <a:latin typeface="Montserrat" pitchFamily="34" charset="0"/>
-                <a:ea typeface="Montserrat" pitchFamily="34" charset="-122"/>
-                <a:cs typeface="Montserrat" pitchFamily="34" charset="-120"/>
+                <a:latin typeface="Unbounded" pitchFamily="34" charset="0"/>
+                <a:ea typeface="Unbounded" pitchFamily="34" charset="-122"/>
+                <a:cs typeface="Unbounded" pitchFamily="34" charset="-120"/>
               </a:rPr>
               <a:t>Антипатерни тижня</a:t>
             </a:r>
@@ -17341,13 +17341,13 @@
               <a:buNone/>
             </a:pPr>
             <a:r>
-              <a:rPr lang="en-US" sz="2400" b="1" dirty="0">
+              <a:rPr lang="en-US" sz="2400" dirty="0">
                 <a:solidFill>
                   <a:srgbClr val="FFFFFF"/>
                 </a:solidFill>
-                <a:latin typeface="Montserrat" pitchFamily="34" charset="0"/>
-                <a:ea typeface="Montserrat" pitchFamily="34" charset="-122"/>
-                <a:cs typeface="Montserrat" pitchFamily="34" charset="-120"/>
+                <a:latin typeface="Unbounded" pitchFamily="34" charset="0"/>
+                <a:ea typeface="Unbounded" pitchFamily="34" charset="-122"/>
+                <a:cs typeface="Unbounded" pitchFamily="34" charset="-120"/>
               </a:rPr>
               <a:t>Домашнє завдання</a:t>
             </a:r>
@@ -18433,13 +18433,13 @@
               <a:buNone/>
             </a:pPr>
             <a:r>
-              <a:rPr lang="en-US" sz="2400" b="1" dirty="0">
+              <a:rPr lang="en-US" sz="2400" dirty="0">
                 <a:solidFill>
                   <a:srgbClr val="FFFFFF"/>
                 </a:solidFill>
-                <a:latin typeface="Montserrat" pitchFamily="34" charset="0"/>
-                <a:ea typeface="Montserrat" pitchFamily="34" charset="-122"/>
-                <a:cs typeface="Montserrat" pitchFamily="34" charset="-120"/>
+                <a:latin typeface="Unbounded" pitchFamily="34" charset="0"/>
+                <a:ea typeface="Unbounded" pitchFamily="34" charset="-122"/>
+                <a:cs typeface="Unbounded" pitchFamily="34" charset="-120"/>
               </a:rPr>
               <a:t>Маршрут на сьогодні</a:t>
             </a:r>
@@ -20069,13 +20069,13 @@
               <a:buNone/>
             </a:pPr>
             <a:r>
-              <a:rPr lang="en-US" sz="2400" b="1" dirty="0">
+              <a:rPr lang="en-US" sz="2400" dirty="0">
                 <a:solidFill>
                   <a:srgbClr val="FFFFFF"/>
                 </a:solidFill>
-                <a:latin typeface="Montserrat" pitchFamily="34" charset="0"/>
-                <a:ea typeface="Montserrat" pitchFamily="34" charset="-122"/>
-                <a:cs typeface="Montserrat" pitchFamily="34" charset="-120"/>
+                <a:latin typeface="Unbounded" pitchFamily="34" charset="0"/>
+                <a:ea typeface="Unbounded" pitchFamily="34" charset="-122"/>
+                <a:cs typeface="Unbounded" pitchFamily="34" charset="-120"/>
               </a:rPr>
               <a:t>Терміни, якими користуватимемось</a:t>
             </a:r>
@@ -20091,7 +20091,7 @@
         </p:nvSpPr>
         <p:spPr>
           <a:xfrm>
-            <a:off x="566928" y="1005840"/>
+            <a:off x="566928" y="1200607"/>
             <a:ext cx="6839712" cy="256032"/>
           </a:xfrm>
           <a:prstGeom prst="rect">
@@ -20133,7 +20133,7 @@
         </p:nvSpPr>
         <p:spPr>
           <a:xfrm>
-            <a:off x="566928" y="1271016"/>
+            <a:off x="566928" y="1465783"/>
             <a:ext cx="777240" cy="256032"/>
           </a:xfrm>
           <a:prstGeom prst="roundRect">
@@ -20155,7 +20155,7 @@
         </p:nvSpPr>
         <p:spPr>
           <a:xfrm>
-            <a:off x="566928" y="1271016"/>
+            <a:off x="566928" y="1465783"/>
             <a:ext cx="777240" cy="256032"/>
           </a:xfrm>
           <a:prstGeom prst="rect">
@@ -21064,13 +21064,13 @@
               <a:buNone/>
             </a:pPr>
             <a:r>
-              <a:rPr lang="en-US" sz="2400" b="1" dirty="0">
+              <a:rPr lang="en-US" sz="2400" dirty="0">
                 <a:solidFill>
                   <a:srgbClr val="FFFFFF"/>
                 </a:solidFill>
-                <a:latin typeface="Montserrat" pitchFamily="34" charset="0"/>
-                <a:ea typeface="Montserrat" pitchFamily="34" charset="-122"/>
-                <a:cs typeface="Montserrat" pitchFamily="34" charset="-120"/>
+                <a:latin typeface="Unbounded" pitchFamily="34" charset="0"/>
+                <a:ea typeface="Unbounded" pitchFamily="34" charset="-122"/>
+                <a:cs typeface="Unbounded" pitchFamily="34" charset="-120"/>
               </a:rPr>
               <a:t>Чужа інфраструктура: падіння має бути керованим</a:t>
             </a:r>
@@ -21086,7 +21086,7 @@
         </p:nvSpPr>
         <p:spPr>
           <a:xfrm>
-            <a:off x="1280160" y="1193140"/>
+            <a:off x="1280160" y="1218895"/>
             <a:ext cx="777240" cy="256032"/>
           </a:xfrm>
           <a:prstGeom prst="roundRect">
@@ -21108,7 +21108,7 @@
         </p:nvSpPr>
         <p:spPr>
           <a:xfrm>
-            <a:off x="1280160" y="1193140"/>
+            <a:off x="1280160" y="1218895"/>
             <a:ext cx="777240" cy="256032"/>
           </a:xfrm>
           <a:prstGeom prst="rect">
@@ -22031,13 +22031,13 @@
               <a:buNone/>
             </a:pPr>
             <a:r>
-              <a:rPr lang="en-US" sz="2400" b="1" dirty="0">
+              <a:rPr lang="en-US" sz="2400" dirty="0">
                 <a:solidFill>
                   <a:srgbClr val="FFFFFF"/>
                 </a:solidFill>
-                <a:latin typeface="Montserrat" pitchFamily="34" charset="0"/>
-                <a:ea typeface="Montserrat" pitchFamily="34" charset="-122"/>
-                <a:cs typeface="Montserrat" pitchFamily="34" charset="-120"/>
+                <a:latin typeface="Unbounded" pitchFamily="34" charset="0"/>
+                <a:ea typeface="Unbounded" pitchFamily="34" charset="-122"/>
+                <a:cs typeface="Unbounded" pitchFamily="34" charset="-120"/>
               </a:rPr>
               <a:t>Retry ≠ fallback: словник рішень</a:t>
             </a:r>
@@ -23381,13 +23381,13 @@
               <a:buNone/>
             </a:pPr>
             <a:r>
-              <a:rPr lang="en-US" sz="2400" b="1" dirty="0">
+              <a:rPr lang="en-US" sz="2400" dirty="0">
                 <a:solidFill>
                   <a:srgbClr val="FFFFFF"/>
                 </a:solidFill>
-                <a:latin typeface="Montserrat" pitchFamily="34" charset="0"/>
-                <a:ea typeface="Montserrat" pitchFamily="34" charset="-122"/>
-                <a:cs typeface="Montserrat" pitchFamily="34" charset="-120"/>
+                <a:latin typeface="Unbounded" pitchFamily="34" charset="0"/>
+                <a:ea typeface="Unbounded" pitchFamily="34" charset="-122"/>
+                <a:cs typeface="Unbounded" pitchFamily="34" charset="-120"/>
               </a:rPr>
               <a:t>Backoff: фіксований, експоненційний, jitter</a:t>
             </a:r>
@@ -23403,7 +23403,7 @@
         </p:nvSpPr>
         <p:spPr>
           <a:xfrm>
-            <a:off x="1280160" y="1193140"/>
+            <a:off x="1280160" y="1218895"/>
             <a:ext cx="777240" cy="256032"/>
           </a:xfrm>
           <a:prstGeom prst="roundRect">
@@ -23425,7 +23425,7 @@
         </p:nvSpPr>
         <p:spPr>
           <a:xfrm>
-            <a:off x="1280160" y="1193140"/>
+            <a:off x="1280160" y="1218895"/>
             <a:ext cx="777240" cy="256032"/>
           </a:xfrm>
           <a:prstGeom prst="rect">
@@ -24491,13 +24491,13 @@
               <a:buNone/>
             </a:pPr>
             <a:r>
-              <a:rPr lang="en-US" sz="2400" b="1" dirty="0">
+              <a:rPr lang="en-US" sz="2400" dirty="0">
                 <a:solidFill>
                   <a:srgbClr val="FFFFFF"/>
                 </a:solidFill>
-                <a:latin typeface="Montserrat" pitchFamily="34" charset="0"/>
-                <a:ea typeface="Montserrat" pitchFamily="34" charset="-122"/>
-                <a:cs typeface="Montserrat" pitchFamily="34" charset="-120"/>
+                <a:latin typeface="Unbounded" pitchFamily="34" charset="0"/>
+                <a:ea typeface="Unbounded" pitchFamily="34" charset="-122"/>
+                <a:cs typeface="Unbounded" pitchFamily="34" charset="-120"/>
               </a:rPr>
               <a:t>Розтин: збій стає значенням, а не винятком</a:t>
             </a:r>
@@ -24513,7 +24513,7 @@
         </p:nvSpPr>
         <p:spPr>
           <a:xfrm>
-            <a:off x="1280160" y="1193140"/>
+            <a:off x="1280160" y="1218895"/>
             <a:ext cx="777240" cy="256032"/>
           </a:xfrm>
           <a:prstGeom prst="roundRect">
@@ -24535,7 +24535,7 @@
         </p:nvSpPr>
         <p:spPr>
           <a:xfrm>
-            <a:off x="1280160" y="1193140"/>
+            <a:off x="1280160" y="1218895"/>
             <a:ext cx="777240" cy="256032"/>
           </a:xfrm>
           <a:prstGeom prst="rect">
@@ -25442,13 +25442,13 @@
               <a:buNone/>
             </a:pPr>
             <a:r>
-              <a:rPr lang="en-US" sz="2400" b="1" dirty="0">
+              <a:rPr lang="en-US" sz="2400" dirty="0">
                 <a:solidFill>
                   <a:srgbClr val="FFFFFF"/>
                 </a:solidFill>
-                <a:latin typeface="Montserrat" pitchFamily="34" charset="0"/>
-                <a:ea typeface="Montserrat" pitchFamily="34" charset="-122"/>
-                <a:cs typeface="Montserrat" pitchFamily="34" charset="-120"/>
+                <a:latin typeface="Unbounded" pitchFamily="34" charset="0"/>
+                <a:ea typeface="Unbounded" pitchFamily="34" charset="-122"/>
+                <a:cs typeface="Unbounded" pitchFamily="34" charset="-120"/>
               </a:rPr>
               <a:t>Fallback-ланцюг: спробуй наступного</a:t>
             </a:r>
@@ -25464,7 +25464,7 @@
         </p:nvSpPr>
         <p:spPr>
           <a:xfrm>
-            <a:off x="1280160" y="1193140"/>
+            <a:off x="1280160" y="1218895"/>
             <a:ext cx="777240" cy="256032"/>
           </a:xfrm>
           <a:prstGeom prst="roundRect">
@@ -25486,7 +25486,7 @@
         </p:nvSpPr>
         <p:spPr>
           <a:xfrm>
-            <a:off x="1280160" y="1193140"/>
+            <a:off x="1280160" y="1218895"/>
             <a:ext cx="777240" cy="256032"/>
           </a:xfrm>
           <a:prstGeom prst="rect">

--- a/docs/decks/L07.pptx
+++ b/docs/decks/L07.pptx
@@ -2732,7 +2732,7 @@
             <a:lvl1pPr>
               <a:defRPr sz="850">
                 <a:solidFill>
-                  <a:srgbClr val="8A82A0"/>
+                  <a:srgbClr val="9A94AA"/>
                 </a:solidFill>
                 <a:latin typeface="Courier New"/>
                 <a:ea typeface="Courier New"/>
@@ -2814,6 +2814,62 @@
 </p:sldLayout>
 </file>
 
+<file path=ppt/slideLayouts/slideLayout3.xml><?xml version="1.0" encoding="utf-8"?>
+<p:sldLayout xmlns:a="http://schemas.openxmlformats.org/drawingml/2006/main" xmlns:r="http://schemas.openxmlformats.org/officeDocument/2006/relationships" xmlns:p="http://schemas.openxmlformats.org/presentationml/2006/main" preserve="1">
+  <p:cSld name="NEO_COVER">
+    <p:bg>
+      <p:bgPr>
+        <a:solidFill>
+          <a:srgbClr val="000000"/>
+        </a:solidFill>
+      </p:bgPr>
+    </p:bg>
+    <p:spTree>
+      <p:nvGrpSpPr>
+        <p:cNvPr id="1" name=""/>
+        <p:cNvGrpSpPr/>
+        <p:nvPr/>
+      </p:nvGrpSpPr>
+      <p:grpSpPr>
+        <a:xfrm>
+          <a:off x="0" y="0"/>
+          <a:ext cx="0" cy="0"/>
+          <a:chOff x="0" y="0"/>
+          <a:chExt cx="0" cy="0"/>
+        </a:xfrm>
+      </p:grpSpPr>
+      <p:pic>
+        <p:nvPicPr>
+          <p:cNvPr id="2" name="Image 0" descr="preencoded.png">    </p:cNvPr>
+          <p:cNvPicPr>
+            <a:picLocks noChangeAspect="1"/>
+          </p:cNvPicPr>
+          <p:nvPr/>
+        </p:nvPicPr>
+        <p:blipFill>
+          <a:blip r:embed="rId1"/>
+          <a:stretch>
+            <a:fillRect/>
+          </a:stretch>
+        </p:blipFill>
+        <p:spPr>
+          <a:xfrm>
+            <a:off x="0" y="0"/>
+            <a:ext cx="12191695" cy="6858000"/>
+          </a:xfrm>
+          <a:prstGeom prst="rect">
+            <a:avLst/>
+          </a:prstGeom>
+        </p:spPr>
+      </p:pic>
+    </p:spTree>
+  </p:cSld>
+  <p:clrMapOvr>
+    <a:masterClrMapping/>
+  </p:clrMapOvr>
+</p:sldLayout>
+</file>
+
 <file path=ppt/slideMasters/slideMaster1.xml><?xml version="1.0" encoding="utf-8"?>
 <p:sldMaster xmlns:a="http://schemas.openxmlformats.org/drawingml/2006/main" xmlns:r="http://schemas.openxmlformats.org/officeDocument/2006/relationships" xmlns:p="http://schemas.openxmlformats.org/presentationml/2006/main">
   <p:cSld>
@@ -2861,7 +2917,7 @@
             <a:lvl1pPr>
               <a:defRPr sz="850">
                 <a:solidFill>
-                  <a:srgbClr val="8A82A0"/>
+                  <a:srgbClr val="9A94AA"/>
                 </a:solidFill>
                 <a:latin typeface="Courier New"/>
                 <a:ea typeface="Courier New"/>
@@ -2885,6 +2941,7 @@
   <p:sldLayoutIdLst>
     <p:sldLayoutId id="2147483649" r:id="rId1"/>
     <p:sldLayoutId id="2147483650" r:id="rId2"/>
+    <p:sldLayoutId id="2147483651" r:id="rId3"/>
   </p:sldLayoutIdLst>
   <p:hf sldNum="0" hdr="0" ftr="0" dt="0"/>
   <p:txStyles>
@@ -3214,7 +3271,7 @@
           </a:prstGeom>
           <a:ln w="12700">
             <a:solidFill>
-              <a:srgbClr val="9B7BE8">
+              <a:srgbClr val="8F72E6">
                 <a:alpha val="24000"/>
               </a:srgbClr>
             </a:solidFill>
@@ -3240,7 +3297,7 @@
           </a:prstGeom>
           <a:ln w="12700">
             <a:solidFill>
-              <a:srgbClr val="9B7BE8">
+              <a:srgbClr val="8F72E6">
                 <a:alpha val="42000"/>
               </a:srgbClr>
             </a:solidFill>
@@ -3266,7 +3323,7 @@
           </a:prstGeom>
           <a:ln w="12700">
             <a:solidFill>
-              <a:srgbClr val="9B7BE8">
+              <a:srgbClr val="8F72E6">
                 <a:alpha val="66000"/>
               </a:srgbClr>
             </a:solidFill>
@@ -3301,7 +3358,7 @@
             <a:r>
               <a:rPr lang="en-US" sz="1200" b="1" spc="300" kern="0" dirty="0">
                 <a:solidFill>
-                  <a:srgbClr val="C9B8FB"/>
+                  <a:srgbClr val="C4B3F5"/>
                 </a:solidFill>
                 <a:latin typeface="Courier New" pitchFamily="34" charset="0"/>
                 <a:ea typeface="Courier New" pitchFamily="34" charset="-122"/>
@@ -3405,7 +3462,7 @@
             <a:r>
               <a:rPr lang="en-US" sz="1500" dirty="0">
                 <a:solidFill>
-                  <a:srgbClr val="C9B8FB"/>
+                  <a:srgbClr val="C4B3F5"/>
                 </a:solidFill>
                 <a:latin typeface="Montserrat" pitchFamily="34" charset="0"/>
                 <a:ea typeface="Montserrat" pitchFamily="34" charset="-122"/>
@@ -3435,7 +3492,7 @@
           </a:prstGeom>
           <a:ln w="12700">
             <a:solidFill>
-              <a:srgbClr val="9B7BE8">
+              <a:srgbClr val="8F72E6">
                 <a:alpha val="60000"/>
               </a:srgbClr>
             </a:solidFill>
@@ -3470,7 +3527,7 @@
             <a:r>
               <a:rPr lang="en-US" sz="900" dirty="0">
                 <a:solidFill>
-                  <a:srgbClr val="C9B8FB"/>
+                  <a:srgbClr val="C4B3F5"/>
                 </a:solidFill>
                 <a:latin typeface="Courier New" pitchFamily="34" charset="0"/>
                 <a:ea typeface="Courier New" pitchFamily="34" charset="-122"/>
@@ -3500,7 +3557,7 @@
           </a:prstGeom>
           <a:ln w="12700">
             <a:solidFill>
-              <a:srgbClr val="9B7BE8">
+              <a:srgbClr val="8F72E6">
                 <a:alpha val="60000"/>
               </a:srgbClr>
             </a:solidFill>
@@ -3535,7 +3592,7 @@
             <a:r>
               <a:rPr lang="en-US" sz="900" dirty="0">
                 <a:solidFill>
-                  <a:srgbClr val="C9B8FB"/>
+                  <a:srgbClr val="C4B3F5"/>
                 </a:solidFill>
                 <a:latin typeface="Courier New" pitchFamily="34" charset="0"/>
                 <a:ea typeface="Courier New" pitchFamily="34" charset="-122"/>
@@ -3565,7 +3622,7 @@
           </a:prstGeom>
           <a:ln w="12700">
             <a:solidFill>
-              <a:srgbClr val="9B7BE8">
+              <a:srgbClr val="8F72E6">
                 <a:alpha val="60000"/>
               </a:srgbClr>
             </a:solidFill>
@@ -3600,7 +3657,7 @@
             <a:r>
               <a:rPr lang="en-US" sz="900" dirty="0">
                 <a:solidFill>
-                  <a:srgbClr val="C9B8FB"/>
+                  <a:srgbClr val="C4B3F5"/>
                 </a:solidFill>
                 <a:latin typeface="Courier New" pitchFamily="34" charset="0"/>
                 <a:ea typeface="Courier New" pitchFamily="34" charset="-122"/>
@@ -3691,7 +3748,7 @@
           </a:prstGeom>
           <a:ln w="12700">
             <a:solidFill>
-              <a:srgbClr val="9B7BE8">
+              <a:srgbClr val="8F72E6">
                 <a:alpha val="60000"/>
               </a:srgbClr>
             </a:solidFill>
@@ -3726,7 +3783,7 @@
             <a:r>
               <a:rPr lang="en-US" sz="900" dirty="0">
                 <a:solidFill>
-                  <a:srgbClr val="C9B8FB"/>
+                  <a:srgbClr val="C4B3F5"/>
                 </a:solidFill>
                 <a:latin typeface="Courier New" pitchFamily="34" charset="0"/>
                 <a:ea typeface="Courier New" pitchFamily="34" charset="-122"/>
@@ -3756,7 +3813,7 @@
           </a:prstGeom>
           <a:ln w="12700">
             <a:solidFill>
-              <a:srgbClr val="9B7BE8">
+              <a:srgbClr val="8F72E6">
                 <a:alpha val="60000"/>
               </a:srgbClr>
             </a:solidFill>
@@ -3791,7 +3848,7 @@
             <a:r>
               <a:rPr lang="en-US" sz="900" dirty="0">
                 <a:solidFill>
-                  <a:srgbClr val="C9B8FB"/>
+                  <a:srgbClr val="C4B3F5"/>
                 </a:solidFill>
                 <a:latin typeface="Courier New" pitchFamily="34" charset="0"/>
                 <a:ea typeface="Courier New" pitchFamily="34" charset="-122"/>
@@ -3855,7 +3912,7 @@
             <a:r>
               <a:rPr lang="en-US" sz="2600" b="1" dirty="0">
                 <a:solidFill>
-                  <a:srgbClr val="C9A6FF"/>
+                  <a:srgbClr val="A98BFF"/>
                 </a:solidFill>
                 <a:latin typeface="Courier New" pitchFamily="34" charset="0"/>
                 <a:ea typeface="Courier New" pitchFamily="34" charset="-122"/>
@@ -3923,9 +3980,14 @@
             </a:avLst>
           </a:prstGeom>
           <a:solidFill>
-            <a:srgbClr val="C9A6FF"/>
+            <a:srgbClr val="1A0B3D"/>
           </a:solidFill>
-          <a:ln/>
+          <a:ln w="12700">
+            <a:solidFill>
+              <a:srgbClr val="5A05F4"/>
+            </a:solidFill>
+            <a:prstDash val="solid"/>
+          </a:ln>
         </p:spPr>
       </p:sp>
       <p:sp>
@@ -3955,7 +4017,7 @@
             <a:r>
               <a:rPr lang="en-US" sz="900" b="1" spc="100" kern="0" dirty="0">
                 <a:solidFill>
-                  <a:srgbClr val="1C1140"/>
+                  <a:srgbClr val="A98BFF"/>
                 </a:solidFill>
                 <a:latin typeface="Courier New" pitchFamily="34" charset="0"/>
                 <a:ea typeface="Courier New" pitchFamily="34" charset="-122"/>
@@ -4030,7 +4092,7 @@
                       <a:r>
                         <a:rPr lang="en-US" sz="900" b="1" spc="100" kern="0" dirty="0">
                           <a:solidFill>
-                            <a:srgbClr val="AFA9BE"/>
+                            <a:srgbClr val="C9C4D6"/>
                           </a:solidFill>
                           <a:latin typeface="Courier New" pitchFamily="34" charset="0"/>
                           <a:ea typeface="Courier New" pitchFamily="34" charset="-122"/>
@@ -4048,7 +4110,7 @@
                   <a:tcPr marL="73152" marR="73152" marT="73152" marB="73152" anchor="ctr">
                     <a:lnL w="6350" cap="flat" cmpd="sng" algn="ctr">
                       <a:solidFill>
-                        <a:srgbClr val="2E2A3A"/>
+                        <a:srgbClr val="5E4F85"/>
                       </a:solidFill>
                       <a:prstDash val="solid"/>
                       <a:round/>
@@ -4057,7 +4119,7 @@
                     </a:lnL>
                     <a:lnR w="6350" cap="flat" cmpd="sng" algn="ctr">
                       <a:solidFill>
-                        <a:srgbClr val="2E2A3A"/>
+                        <a:srgbClr val="5E4F85"/>
                       </a:solidFill>
                       <a:prstDash val="solid"/>
                       <a:round/>
@@ -4066,7 +4128,7 @@
                     </a:lnR>
                     <a:lnT w="6350" cap="flat" cmpd="sng" algn="ctr">
                       <a:solidFill>
-                        <a:srgbClr val="2E2A3A"/>
+                        <a:srgbClr val="5E4F85"/>
                       </a:solidFill>
                       <a:prstDash val="solid"/>
                       <a:round/>
@@ -4075,7 +4137,7 @@
                     </a:lnT>
                     <a:lnB w="6350" cap="flat" cmpd="sng" algn="ctr">
                       <a:solidFill>
-                        <a:srgbClr val="2E2A3A"/>
+                        <a:srgbClr val="5E4F85"/>
                       </a:solidFill>
                       <a:prstDash val="solid"/>
                       <a:round/>
@@ -4083,7 +4145,7 @@
                       <a:tailEnd type="none" w="med" len="med"/>
                     </a:lnB>
                     <a:solidFill>
-                      <a:srgbClr val="1F1B2A"/>
+                      <a:srgbClr val="1A0B3D"/>
                     </a:solidFill>
                   </a:tcPr>
                 </a:tc>
@@ -4098,7 +4160,7 @@
                       <a:r>
                         <a:rPr lang="en-US" sz="900" b="1" spc="100" kern="0" dirty="0">
                           <a:solidFill>
-                            <a:srgbClr val="AFA9BE"/>
+                            <a:srgbClr val="C9C4D6"/>
                           </a:solidFill>
                           <a:latin typeface="Courier New" pitchFamily="34" charset="0"/>
                           <a:ea typeface="Courier New" pitchFamily="34" charset="-122"/>
@@ -4116,7 +4178,7 @@
                   <a:tcPr marL="73152" marR="73152" marT="73152" marB="73152" anchor="ctr">
                     <a:lnL w="6350" cap="flat" cmpd="sng" algn="ctr">
                       <a:solidFill>
-                        <a:srgbClr val="2E2A3A"/>
+                        <a:srgbClr val="5E4F85"/>
                       </a:solidFill>
                       <a:prstDash val="solid"/>
                       <a:round/>
@@ -4125,7 +4187,7 @@
                     </a:lnL>
                     <a:lnR w="6350" cap="flat" cmpd="sng" algn="ctr">
                       <a:solidFill>
-                        <a:srgbClr val="2E2A3A"/>
+                        <a:srgbClr val="5E4F85"/>
                       </a:solidFill>
                       <a:prstDash val="solid"/>
                       <a:round/>
@@ -4134,7 +4196,7 @@
                     </a:lnR>
                     <a:lnT w="6350" cap="flat" cmpd="sng" algn="ctr">
                       <a:solidFill>
-                        <a:srgbClr val="2E2A3A"/>
+                        <a:srgbClr val="5E4F85"/>
                       </a:solidFill>
                       <a:prstDash val="solid"/>
                       <a:round/>
@@ -4143,7 +4205,7 @@
                     </a:lnT>
                     <a:lnB w="6350" cap="flat" cmpd="sng" algn="ctr">
                       <a:solidFill>
-                        <a:srgbClr val="2E2A3A"/>
+                        <a:srgbClr val="5E4F85"/>
                       </a:solidFill>
                       <a:prstDash val="solid"/>
                       <a:round/>
@@ -4151,7 +4213,7 @@
                       <a:tailEnd type="none" w="med" len="med"/>
                     </a:lnB>
                     <a:solidFill>
-                      <a:srgbClr val="1F1B2A"/>
+                      <a:srgbClr val="1A0B3D"/>
                     </a:solidFill>
                   </a:tcPr>
                 </a:tc>
@@ -4166,7 +4228,7 @@
                       <a:r>
                         <a:rPr lang="en-US" sz="900" b="1" spc="100" kern="0" dirty="0">
                           <a:solidFill>
-                            <a:srgbClr val="AFA9BE"/>
+                            <a:srgbClr val="C9C4D6"/>
                           </a:solidFill>
                           <a:latin typeface="Courier New" pitchFamily="34" charset="0"/>
                           <a:ea typeface="Courier New" pitchFamily="34" charset="-122"/>
@@ -4184,7 +4246,7 @@
                   <a:tcPr marL="73152" marR="73152" marT="73152" marB="73152" anchor="ctr">
                     <a:lnL w="6350" cap="flat" cmpd="sng" algn="ctr">
                       <a:solidFill>
-                        <a:srgbClr val="2E2A3A"/>
+                        <a:srgbClr val="5E4F85"/>
                       </a:solidFill>
                       <a:prstDash val="solid"/>
                       <a:round/>
@@ -4193,7 +4255,7 @@
                     </a:lnL>
                     <a:lnR w="6350" cap="flat" cmpd="sng" algn="ctr">
                       <a:solidFill>
-                        <a:srgbClr val="2E2A3A"/>
+                        <a:srgbClr val="5E4F85"/>
                       </a:solidFill>
                       <a:prstDash val="solid"/>
                       <a:round/>
@@ -4202,7 +4264,7 @@
                     </a:lnR>
                     <a:lnT w="6350" cap="flat" cmpd="sng" algn="ctr">
                       <a:solidFill>
-                        <a:srgbClr val="2E2A3A"/>
+                        <a:srgbClr val="5E4F85"/>
                       </a:solidFill>
                       <a:prstDash val="solid"/>
                       <a:round/>
@@ -4211,7 +4273,7 @@
                     </a:lnT>
                     <a:lnB w="6350" cap="flat" cmpd="sng" algn="ctr">
                       <a:solidFill>
-                        <a:srgbClr val="2E2A3A"/>
+                        <a:srgbClr val="5E4F85"/>
                       </a:solidFill>
                       <a:prstDash val="solid"/>
                       <a:round/>
@@ -4219,7 +4281,7 @@
                       <a:tailEnd type="none" w="med" len="med"/>
                     </a:lnB>
                     <a:solidFill>
-                      <a:srgbClr val="1F1B2A"/>
+                      <a:srgbClr val="1A0B3D"/>
                     </a:solidFill>
                   </a:tcPr>
                 </a:tc>
@@ -4236,7 +4298,7 @@
                       <a:r>
                         <a:rPr lang="en-US" sz="1150" b="1" dirty="0">
                           <a:solidFill>
-                            <a:srgbClr val="5FD6A0"/>
+                            <a:srgbClr val="3FCF8E"/>
                           </a:solidFill>
                           <a:latin typeface="Montserrat" pitchFamily="34" charset="0"/>
                           <a:ea typeface="Montserrat" pitchFamily="34" charset="-122"/>
@@ -4254,7 +4316,7 @@
                   <a:tcPr marL="73152" marR="73152" marT="73152" marB="73152" anchor="ctr">
                     <a:lnL w="6350" cap="flat" cmpd="sng" algn="ctr">
                       <a:solidFill>
-                        <a:srgbClr val="2E2A3A"/>
+                        <a:srgbClr val="5E4F85"/>
                       </a:solidFill>
                       <a:prstDash val="solid"/>
                       <a:round/>
@@ -4263,7 +4325,7 @@
                     </a:lnL>
                     <a:lnR w="6350" cap="flat" cmpd="sng" algn="ctr">
                       <a:solidFill>
-                        <a:srgbClr val="2E2A3A"/>
+                        <a:srgbClr val="5E4F85"/>
                       </a:solidFill>
                       <a:prstDash val="solid"/>
                       <a:round/>
@@ -4272,7 +4334,7 @@
                     </a:lnR>
                     <a:lnT w="6350" cap="flat" cmpd="sng" algn="ctr">
                       <a:solidFill>
-                        <a:srgbClr val="2E2A3A"/>
+                        <a:srgbClr val="5E4F85"/>
                       </a:solidFill>
                       <a:prstDash val="solid"/>
                       <a:round/>
@@ -4281,7 +4343,7 @@
                     </a:lnT>
                     <a:lnB w="6350" cap="flat" cmpd="sng" algn="ctr">
                       <a:solidFill>
-                        <a:srgbClr val="2E2A3A"/>
+                        <a:srgbClr val="5E4F85"/>
                       </a:solidFill>
                       <a:prstDash val="solid"/>
                       <a:round/>
@@ -4289,7 +4351,7 @@
                       <a:tailEnd type="none" w="med" len="med"/>
                     </a:lnB>
                     <a:solidFill>
-                      <a:srgbClr val="102A20"/>
+                      <a:srgbClr val="06180F"/>
                     </a:solidFill>
                   </a:tcPr>
                 </a:tc>
@@ -4322,7 +4384,7 @@
                   <a:tcPr marL="73152" marR="73152" marT="73152" marB="73152" anchor="ctr">
                     <a:lnL w="6350" cap="flat" cmpd="sng" algn="ctr">
                       <a:solidFill>
-                        <a:srgbClr val="2E2A3A"/>
+                        <a:srgbClr val="5E4F85"/>
                       </a:solidFill>
                       <a:prstDash val="solid"/>
                       <a:round/>
@@ -4331,7 +4393,7 @@
                     </a:lnL>
                     <a:lnR w="6350" cap="flat" cmpd="sng" algn="ctr">
                       <a:solidFill>
-                        <a:srgbClr val="2E2A3A"/>
+                        <a:srgbClr val="5E4F85"/>
                       </a:solidFill>
                       <a:prstDash val="solid"/>
                       <a:round/>
@@ -4340,7 +4402,7 @@
                     </a:lnR>
                     <a:lnT w="6350" cap="flat" cmpd="sng" algn="ctr">
                       <a:solidFill>
-                        <a:srgbClr val="2E2A3A"/>
+                        <a:srgbClr val="5E4F85"/>
                       </a:solidFill>
                       <a:prstDash val="solid"/>
                       <a:round/>
@@ -4349,7 +4411,7 @@
                     </a:lnT>
                     <a:lnB w="6350" cap="flat" cmpd="sng" algn="ctr">
                       <a:solidFill>
-                        <a:srgbClr val="2E2A3A"/>
+                        <a:srgbClr val="5E4F85"/>
                       </a:solidFill>
                       <a:prstDash val="solid"/>
                       <a:round/>
@@ -4357,7 +4419,7 @@
                       <a:tailEnd type="none" w="med" len="med"/>
                     </a:lnB>
                     <a:solidFill>
-                      <a:srgbClr val="102A20"/>
+                      <a:srgbClr val="06180F"/>
                     </a:solidFill>
                   </a:tcPr>
                 </a:tc>
@@ -4390,7 +4452,7 @@
                   <a:tcPr marL="73152" marR="73152" marT="73152" marB="73152" anchor="ctr">
                     <a:lnL w="6350" cap="flat" cmpd="sng" algn="ctr">
                       <a:solidFill>
-                        <a:srgbClr val="2E2A3A"/>
+                        <a:srgbClr val="5E4F85"/>
                       </a:solidFill>
                       <a:prstDash val="solid"/>
                       <a:round/>
@@ -4399,7 +4461,7 @@
                     </a:lnL>
                     <a:lnR w="6350" cap="flat" cmpd="sng" algn="ctr">
                       <a:solidFill>
-                        <a:srgbClr val="2E2A3A"/>
+                        <a:srgbClr val="5E4F85"/>
                       </a:solidFill>
                       <a:prstDash val="solid"/>
                       <a:round/>
@@ -4408,7 +4470,7 @@
                     </a:lnR>
                     <a:lnT w="6350" cap="flat" cmpd="sng" algn="ctr">
                       <a:solidFill>
-                        <a:srgbClr val="2E2A3A"/>
+                        <a:srgbClr val="5E4F85"/>
                       </a:solidFill>
                       <a:prstDash val="solid"/>
                       <a:round/>
@@ -4417,7 +4479,7 @@
                     </a:lnT>
                     <a:lnB w="6350" cap="flat" cmpd="sng" algn="ctr">
                       <a:solidFill>
-                        <a:srgbClr val="2E2A3A"/>
+                        <a:srgbClr val="5E4F85"/>
                       </a:solidFill>
                       <a:prstDash val="solid"/>
                       <a:round/>
@@ -4425,7 +4487,7 @@
                       <a:tailEnd type="none" w="med" len="med"/>
                     </a:lnB>
                     <a:solidFill>
-                      <a:srgbClr val="102A20"/>
+                      <a:srgbClr val="06180F"/>
                     </a:solidFill>
                   </a:tcPr>
                 </a:tc>
@@ -4442,7 +4504,7 @@
                       <a:r>
                         <a:rPr lang="en-US" sz="1150" b="1" dirty="0">
                           <a:solidFill>
-                            <a:srgbClr val="5FD6A0"/>
+                            <a:srgbClr val="3FCF8E"/>
                           </a:solidFill>
                           <a:latin typeface="Montserrat" pitchFamily="34" charset="0"/>
                           <a:ea typeface="Montserrat" pitchFamily="34" charset="-122"/>
@@ -4460,7 +4522,7 @@
                   <a:tcPr marL="73152" marR="73152" marT="73152" marB="73152" anchor="ctr">
                     <a:lnL w="6350" cap="flat" cmpd="sng" algn="ctr">
                       <a:solidFill>
-                        <a:srgbClr val="2E2A3A"/>
+                        <a:srgbClr val="5E4F85"/>
                       </a:solidFill>
                       <a:prstDash val="solid"/>
                       <a:round/>
@@ -4469,7 +4531,7 @@
                     </a:lnL>
                     <a:lnR w="6350" cap="flat" cmpd="sng" algn="ctr">
                       <a:solidFill>
-                        <a:srgbClr val="2E2A3A"/>
+                        <a:srgbClr val="5E4F85"/>
                       </a:solidFill>
                       <a:prstDash val="solid"/>
                       <a:round/>
@@ -4478,7 +4540,7 @@
                     </a:lnR>
                     <a:lnT w="6350" cap="flat" cmpd="sng" algn="ctr">
                       <a:solidFill>
-                        <a:srgbClr val="2E2A3A"/>
+                        <a:srgbClr val="5E4F85"/>
                       </a:solidFill>
                       <a:prstDash val="solid"/>
                       <a:round/>
@@ -4487,7 +4549,7 @@
                     </a:lnT>
                     <a:lnB w="6350" cap="flat" cmpd="sng" algn="ctr">
                       <a:solidFill>
-                        <a:srgbClr val="2E2A3A"/>
+                        <a:srgbClr val="5E4F85"/>
                       </a:solidFill>
                       <a:prstDash val="solid"/>
                       <a:round/>
@@ -4495,7 +4557,7 @@
                       <a:tailEnd type="none" w="med" len="med"/>
                     </a:lnB>
                     <a:solidFill>
-                      <a:srgbClr val="102A20"/>
+                      <a:srgbClr val="06180F"/>
                     </a:solidFill>
                   </a:tcPr>
                 </a:tc>
@@ -4528,7 +4590,7 @@
                   <a:tcPr marL="73152" marR="73152" marT="73152" marB="73152" anchor="ctr">
                     <a:lnL w="6350" cap="flat" cmpd="sng" algn="ctr">
                       <a:solidFill>
-                        <a:srgbClr val="2E2A3A"/>
+                        <a:srgbClr val="5E4F85"/>
                       </a:solidFill>
                       <a:prstDash val="solid"/>
                       <a:round/>
@@ -4537,7 +4599,7 @@
                     </a:lnL>
                     <a:lnR w="6350" cap="flat" cmpd="sng" algn="ctr">
                       <a:solidFill>
-                        <a:srgbClr val="2E2A3A"/>
+                        <a:srgbClr val="5E4F85"/>
                       </a:solidFill>
                       <a:prstDash val="solid"/>
                       <a:round/>
@@ -4546,7 +4608,7 @@
                     </a:lnR>
                     <a:lnT w="6350" cap="flat" cmpd="sng" algn="ctr">
                       <a:solidFill>
-                        <a:srgbClr val="2E2A3A"/>
+                        <a:srgbClr val="5E4F85"/>
                       </a:solidFill>
                       <a:prstDash val="solid"/>
                       <a:round/>
@@ -4555,7 +4617,7 @@
                     </a:lnT>
                     <a:lnB w="6350" cap="flat" cmpd="sng" algn="ctr">
                       <a:solidFill>
-                        <a:srgbClr val="2E2A3A"/>
+                        <a:srgbClr val="5E4F85"/>
                       </a:solidFill>
                       <a:prstDash val="solid"/>
                       <a:round/>
@@ -4563,7 +4625,7 @@
                       <a:tailEnd type="none" w="med" len="med"/>
                     </a:lnB>
                     <a:solidFill>
-                      <a:srgbClr val="102A20"/>
+                      <a:srgbClr val="06180F"/>
                     </a:solidFill>
                   </a:tcPr>
                 </a:tc>
@@ -4596,7 +4658,7 @@
                   <a:tcPr marL="73152" marR="73152" marT="73152" marB="73152" anchor="ctr">
                     <a:lnL w="6350" cap="flat" cmpd="sng" algn="ctr">
                       <a:solidFill>
-                        <a:srgbClr val="2E2A3A"/>
+                        <a:srgbClr val="5E4F85"/>
                       </a:solidFill>
                       <a:prstDash val="solid"/>
                       <a:round/>
@@ -4605,7 +4667,7 @@
                     </a:lnL>
                     <a:lnR w="6350" cap="flat" cmpd="sng" algn="ctr">
                       <a:solidFill>
-                        <a:srgbClr val="2E2A3A"/>
+                        <a:srgbClr val="5E4F85"/>
                       </a:solidFill>
                       <a:prstDash val="solid"/>
                       <a:round/>
@@ -4614,7 +4676,7 @@
                     </a:lnR>
                     <a:lnT w="6350" cap="flat" cmpd="sng" algn="ctr">
                       <a:solidFill>
-                        <a:srgbClr val="2E2A3A"/>
+                        <a:srgbClr val="5E4F85"/>
                       </a:solidFill>
                       <a:prstDash val="solid"/>
                       <a:round/>
@@ -4623,7 +4685,7 @@
                     </a:lnT>
                     <a:lnB w="6350" cap="flat" cmpd="sng" algn="ctr">
                       <a:solidFill>
-                        <a:srgbClr val="2E2A3A"/>
+                        <a:srgbClr val="5E4F85"/>
                       </a:solidFill>
                       <a:prstDash val="solid"/>
                       <a:round/>
@@ -4631,7 +4693,7 @@
                       <a:tailEnd type="none" w="med" len="med"/>
                     </a:lnB>
                     <a:solidFill>
-                      <a:srgbClr val="102A20"/>
+                      <a:srgbClr val="06180F"/>
                     </a:solidFill>
                   </a:tcPr>
                 </a:tc>
@@ -4648,7 +4710,7 @@
                       <a:r>
                         <a:rPr lang="en-US" sz="1150" b="1" dirty="0">
                           <a:solidFill>
-                            <a:srgbClr val="E8A857"/>
+                            <a:srgbClr val="6BA0F8"/>
                           </a:solidFill>
                           <a:latin typeface="Montserrat" pitchFamily="34" charset="0"/>
                           <a:ea typeface="Montserrat" pitchFamily="34" charset="-122"/>
@@ -4666,7 +4728,7 @@
                   <a:tcPr marL="73152" marR="73152" marT="73152" marB="73152" anchor="ctr">
                     <a:lnL w="6350" cap="flat" cmpd="sng" algn="ctr">
                       <a:solidFill>
-                        <a:srgbClr val="2E2A3A"/>
+                        <a:srgbClr val="5E4F85"/>
                       </a:solidFill>
                       <a:prstDash val="solid"/>
                       <a:round/>
@@ -4675,7 +4737,7 @@
                     </a:lnL>
                     <a:lnR w="6350" cap="flat" cmpd="sng" algn="ctr">
                       <a:solidFill>
-                        <a:srgbClr val="2E2A3A"/>
+                        <a:srgbClr val="5E4F85"/>
                       </a:solidFill>
                       <a:prstDash val="solid"/>
                       <a:round/>
@@ -4684,7 +4746,7 @@
                     </a:lnR>
                     <a:lnT w="6350" cap="flat" cmpd="sng" algn="ctr">
                       <a:solidFill>
-                        <a:srgbClr val="2E2A3A"/>
+                        <a:srgbClr val="5E4F85"/>
                       </a:solidFill>
                       <a:prstDash val="solid"/>
                       <a:round/>
@@ -4693,7 +4755,7 @@
                     </a:lnT>
                     <a:lnB w="6350" cap="flat" cmpd="sng" algn="ctr">
                       <a:solidFill>
-                        <a:srgbClr val="2E2A3A"/>
+                        <a:srgbClr val="5E4F85"/>
                       </a:solidFill>
                       <a:prstDash val="solid"/>
                       <a:round/>
@@ -4701,7 +4763,7 @@
                       <a:tailEnd type="none" w="med" len="med"/>
                     </a:lnB>
                     <a:solidFill>
-                      <a:srgbClr val="2A2010"/>
+                      <a:srgbClr val="0B1A38"/>
                     </a:solidFill>
                   </a:tcPr>
                 </a:tc>
@@ -4734,7 +4796,7 @@
                   <a:tcPr marL="73152" marR="73152" marT="73152" marB="73152" anchor="ctr">
                     <a:lnL w="6350" cap="flat" cmpd="sng" algn="ctr">
                       <a:solidFill>
-                        <a:srgbClr val="2E2A3A"/>
+                        <a:srgbClr val="5E4F85"/>
                       </a:solidFill>
                       <a:prstDash val="solid"/>
                       <a:round/>
@@ -4743,7 +4805,7 @@
                     </a:lnL>
                     <a:lnR w="6350" cap="flat" cmpd="sng" algn="ctr">
                       <a:solidFill>
-                        <a:srgbClr val="2E2A3A"/>
+                        <a:srgbClr val="5E4F85"/>
                       </a:solidFill>
                       <a:prstDash val="solid"/>
                       <a:round/>
@@ -4752,7 +4814,7 @@
                     </a:lnR>
                     <a:lnT w="6350" cap="flat" cmpd="sng" algn="ctr">
                       <a:solidFill>
-                        <a:srgbClr val="2E2A3A"/>
+                        <a:srgbClr val="5E4F85"/>
                       </a:solidFill>
                       <a:prstDash val="solid"/>
                       <a:round/>
@@ -4761,7 +4823,7 @@
                     </a:lnT>
                     <a:lnB w="6350" cap="flat" cmpd="sng" algn="ctr">
                       <a:solidFill>
-                        <a:srgbClr val="2E2A3A"/>
+                        <a:srgbClr val="5E4F85"/>
                       </a:solidFill>
                       <a:prstDash val="solid"/>
                       <a:round/>
@@ -4769,7 +4831,7 @@
                       <a:tailEnd type="none" w="med" len="med"/>
                     </a:lnB>
                     <a:solidFill>
-                      <a:srgbClr val="2A2010"/>
+                      <a:srgbClr val="0B1A38"/>
                     </a:solidFill>
                   </a:tcPr>
                 </a:tc>
@@ -4802,7 +4864,7 @@
                   <a:tcPr marL="73152" marR="73152" marT="73152" marB="73152" anchor="ctr">
                     <a:lnL w="6350" cap="flat" cmpd="sng" algn="ctr">
                       <a:solidFill>
-                        <a:srgbClr val="2E2A3A"/>
+                        <a:srgbClr val="5E4F85"/>
                       </a:solidFill>
                       <a:prstDash val="solid"/>
                       <a:round/>
@@ -4811,7 +4873,7 @@
                     </a:lnL>
                     <a:lnR w="6350" cap="flat" cmpd="sng" algn="ctr">
                       <a:solidFill>
-                        <a:srgbClr val="2E2A3A"/>
+                        <a:srgbClr val="5E4F85"/>
                       </a:solidFill>
                       <a:prstDash val="solid"/>
                       <a:round/>
@@ -4820,7 +4882,7 @@
                     </a:lnR>
                     <a:lnT w="6350" cap="flat" cmpd="sng" algn="ctr">
                       <a:solidFill>
-                        <a:srgbClr val="2E2A3A"/>
+                        <a:srgbClr val="5E4F85"/>
                       </a:solidFill>
                       <a:prstDash val="solid"/>
                       <a:round/>
@@ -4829,7 +4891,7 @@
                     </a:lnT>
                     <a:lnB w="6350" cap="flat" cmpd="sng" algn="ctr">
                       <a:solidFill>
-                        <a:srgbClr val="2E2A3A"/>
+                        <a:srgbClr val="5E4F85"/>
                       </a:solidFill>
                       <a:prstDash val="solid"/>
                       <a:round/>
@@ -4837,7 +4899,7 @@
                       <a:tailEnd type="none" w="med" len="med"/>
                     </a:lnB>
                     <a:solidFill>
-                      <a:srgbClr val="2A2010"/>
+                      <a:srgbClr val="0B1A38"/>
                     </a:solidFill>
                   </a:tcPr>
                 </a:tc>
@@ -4854,7 +4916,7 @@
                       <a:r>
                         <a:rPr lang="en-US" sz="1150" b="1" dirty="0">
                           <a:solidFill>
-                            <a:srgbClr val="FF7B7B"/>
+                            <a:srgbClr val="FF6B6B"/>
                           </a:solidFill>
                           <a:latin typeface="Montserrat" pitchFamily="34" charset="0"/>
                           <a:ea typeface="Montserrat" pitchFamily="34" charset="-122"/>
@@ -4872,7 +4934,7 @@
                   <a:tcPr marL="73152" marR="73152" marT="73152" marB="73152" anchor="ctr">
                     <a:lnL w="6350" cap="flat" cmpd="sng" algn="ctr">
                       <a:solidFill>
-                        <a:srgbClr val="2E2A3A"/>
+                        <a:srgbClr val="5E4F85"/>
                       </a:solidFill>
                       <a:prstDash val="solid"/>
                       <a:round/>
@@ -4881,7 +4943,7 @@
                     </a:lnL>
                     <a:lnR w="6350" cap="flat" cmpd="sng" algn="ctr">
                       <a:solidFill>
-                        <a:srgbClr val="2E2A3A"/>
+                        <a:srgbClr val="5E4F85"/>
                       </a:solidFill>
                       <a:prstDash val="solid"/>
                       <a:round/>
@@ -4890,7 +4952,7 @@
                     </a:lnR>
                     <a:lnT w="6350" cap="flat" cmpd="sng" algn="ctr">
                       <a:solidFill>
-                        <a:srgbClr val="2E2A3A"/>
+                        <a:srgbClr val="5E4F85"/>
                       </a:solidFill>
                       <a:prstDash val="solid"/>
                       <a:round/>
@@ -4899,7 +4961,7 @@
                     </a:lnT>
                     <a:lnB w="6350" cap="flat" cmpd="sng" algn="ctr">
                       <a:solidFill>
-                        <a:srgbClr val="2E2A3A"/>
+                        <a:srgbClr val="5E4F85"/>
                       </a:solidFill>
                       <a:prstDash val="solid"/>
                       <a:round/>
@@ -4907,7 +4969,7 @@
                       <a:tailEnd type="none" w="med" len="med"/>
                     </a:lnB>
                     <a:solidFill>
-                      <a:srgbClr val="2E1418"/>
+                      <a:srgbClr val="1A0808"/>
                     </a:solidFill>
                   </a:tcPr>
                 </a:tc>
@@ -4940,7 +5002,7 @@
                   <a:tcPr marL="73152" marR="73152" marT="73152" marB="73152" anchor="ctr">
                     <a:lnL w="6350" cap="flat" cmpd="sng" algn="ctr">
                       <a:solidFill>
-                        <a:srgbClr val="2E2A3A"/>
+                        <a:srgbClr val="5E4F85"/>
                       </a:solidFill>
                       <a:prstDash val="solid"/>
                       <a:round/>
@@ -4949,7 +5011,7 @@
                     </a:lnL>
                     <a:lnR w="6350" cap="flat" cmpd="sng" algn="ctr">
                       <a:solidFill>
-                        <a:srgbClr val="2E2A3A"/>
+                        <a:srgbClr val="5E4F85"/>
                       </a:solidFill>
                       <a:prstDash val="solid"/>
                       <a:round/>
@@ -4958,7 +5020,7 @@
                     </a:lnR>
                     <a:lnT w="6350" cap="flat" cmpd="sng" algn="ctr">
                       <a:solidFill>
-                        <a:srgbClr val="2E2A3A"/>
+                        <a:srgbClr val="5E4F85"/>
                       </a:solidFill>
                       <a:prstDash val="solid"/>
                       <a:round/>
@@ -4967,7 +5029,7 @@
                     </a:lnT>
                     <a:lnB w="6350" cap="flat" cmpd="sng" algn="ctr">
                       <a:solidFill>
-                        <a:srgbClr val="2E2A3A"/>
+                        <a:srgbClr val="5E4F85"/>
                       </a:solidFill>
                       <a:prstDash val="solid"/>
                       <a:round/>
@@ -4975,7 +5037,7 @@
                       <a:tailEnd type="none" w="med" len="med"/>
                     </a:lnB>
                     <a:solidFill>
-                      <a:srgbClr val="2E1418"/>
+                      <a:srgbClr val="1A0808"/>
                     </a:solidFill>
                   </a:tcPr>
                 </a:tc>
@@ -5008,7 +5070,7 @@
                   <a:tcPr marL="73152" marR="73152" marT="73152" marB="73152" anchor="ctr">
                     <a:lnL w="6350" cap="flat" cmpd="sng" algn="ctr">
                       <a:solidFill>
-                        <a:srgbClr val="2E2A3A"/>
+                        <a:srgbClr val="5E4F85"/>
                       </a:solidFill>
                       <a:prstDash val="solid"/>
                       <a:round/>
@@ -5017,7 +5079,7 @@
                     </a:lnL>
                     <a:lnR w="6350" cap="flat" cmpd="sng" algn="ctr">
                       <a:solidFill>
-                        <a:srgbClr val="2E2A3A"/>
+                        <a:srgbClr val="5E4F85"/>
                       </a:solidFill>
                       <a:prstDash val="solid"/>
                       <a:round/>
@@ -5026,7 +5088,7 @@
                     </a:lnR>
                     <a:lnT w="6350" cap="flat" cmpd="sng" algn="ctr">
                       <a:solidFill>
-                        <a:srgbClr val="2E2A3A"/>
+                        <a:srgbClr val="5E4F85"/>
                       </a:solidFill>
                       <a:prstDash val="solid"/>
                       <a:round/>
@@ -5035,7 +5097,7 @@
                     </a:lnT>
                     <a:lnB w="6350" cap="flat" cmpd="sng" algn="ctr">
                       <a:solidFill>
-                        <a:srgbClr val="2E2A3A"/>
+                        <a:srgbClr val="5E4F85"/>
                       </a:solidFill>
                       <a:prstDash val="solid"/>
                       <a:round/>
@@ -5043,7 +5105,7 @@
                       <a:tailEnd type="none" w="med" len="med"/>
                     </a:lnB>
                     <a:solidFill>
-                      <a:srgbClr val="2E1418"/>
+                      <a:srgbClr val="1A0808"/>
                     </a:solidFill>
                   </a:tcPr>
                 </a:tc>
@@ -5069,9 +5131,14 @@
             </a:avLst>
           </a:prstGeom>
           <a:solidFill>
-            <a:srgbClr val="102A20"/>
+            <a:srgbClr val="06180F"/>
           </a:solidFill>
-          <a:ln/>
+          <a:ln w="12700">
+            <a:solidFill>
+              <a:srgbClr val="3FCF8E"/>
+            </a:solidFill>
+            <a:prstDash val="solid"/>
+          </a:ln>
         </p:spPr>
       </p:sp>
       <p:sp>
@@ -5101,7 +5168,7 @@
             <a:r>
               <a:rPr lang="en-US" sz="950" b="1" spc="150" kern="0" dirty="0">
                 <a:solidFill>
-                  <a:srgbClr val="5FD6A0"/>
+                  <a:srgbClr val="3FCF8E"/>
                 </a:solidFill>
                 <a:latin typeface="Courier New" pitchFamily="34" charset="0"/>
                 <a:ea typeface="Courier New" pitchFamily="34" charset="-122"/>
@@ -5185,7 +5252,7 @@
             <a:lvl1pPr>
               <a:defRPr sz="850">
                 <a:solidFill>
-                  <a:srgbClr val="8A82A0"/>
+                  <a:srgbClr val="9A94AA"/>
                 </a:solidFill>
                 <a:latin typeface="Courier New"/>
                 <a:ea typeface="Courier New"/>
@@ -5255,7 +5322,7 @@
             <a:r>
               <a:rPr lang="en-US" sz="2600" b="1" dirty="0">
                 <a:solidFill>
-                  <a:srgbClr val="C9A6FF"/>
+                  <a:srgbClr val="A98BFF"/>
                 </a:solidFill>
                 <a:latin typeface="Courier New" pitchFamily="34" charset="0"/>
                 <a:ea typeface="Courier New" pitchFamily="34" charset="-122"/>
@@ -5323,9 +5390,14 @@
             </a:avLst>
           </a:prstGeom>
           <a:solidFill>
-            <a:srgbClr val="C9A6FF"/>
+            <a:srgbClr val="1A0B3D"/>
           </a:solidFill>
-          <a:ln/>
+          <a:ln w="12700">
+            <a:solidFill>
+              <a:srgbClr val="5A05F4"/>
+            </a:solidFill>
+            <a:prstDash val="solid"/>
+          </a:ln>
         </p:spPr>
       </p:sp>
       <p:sp>
@@ -5355,7 +5427,7 @@
             <a:r>
               <a:rPr lang="en-US" sz="900" b="1" spc="100" kern="0" dirty="0">
                 <a:solidFill>
-                  <a:srgbClr val="1C1140"/>
+                  <a:srgbClr val="A98BFF"/>
                 </a:solidFill>
                 <a:latin typeface="Courier New" pitchFamily="34" charset="0"/>
                 <a:ea typeface="Courier New" pitchFamily="34" charset="-122"/>
@@ -5408,9 +5480,14 @@
             </a:avLst>
           </a:prstGeom>
           <a:solidFill>
-            <a:srgbClr val="2A2010"/>
+            <a:srgbClr val="0B1A38"/>
           </a:solidFill>
-          <a:ln/>
+          <a:ln w="12700">
+            <a:solidFill>
+              <a:srgbClr val="6BA0F8"/>
+            </a:solidFill>
+            <a:prstDash val="solid"/>
+          </a:ln>
         </p:spPr>
       </p:sp>
       <p:sp>
@@ -5440,7 +5517,7 @@
             <a:r>
               <a:rPr lang="en-US" sz="1050" b="1" dirty="0">
                 <a:solidFill>
-                  <a:srgbClr val="E8A857"/>
+                  <a:srgbClr val="6BA0F8"/>
                 </a:solidFill>
                 <a:latin typeface="Courier New" pitchFamily="34" charset="0"/>
                 <a:ea typeface="Courier New" pitchFamily="34" charset="-122"/>
@@ -5469,7 +5546,7 @@
           <a:noFill/>
           <a:ln w="15875">
             <a:solidFill>
-              <a:srgbClr val="9B7BE8"/>
+              <a:srgbClr val="8F72E6"/>
             </a:solidFill>
             <a:prstDash val="solid"/>
           </a:ln>
@@ -5490,7 +5567,7 @@
             <a:avLst/>
           </a:prstGeom>
           <a:solidFill>
-            <a:srgbClr val="9B7BE8"/>
+            <a:srgbClr val="8F72E6"/>
           </a:solidFill>
           <a:ln/>
         </p:spPr>
@@ -5512,9 +5589,14 @@
             </a:avLst>
           </a:prstGeom>
           <a:solidFill>
-            <a:srgbClr val="2E1418"/>
+            <a:srgbClr val="1A0808"/>
           </a:solidFill>
-          <a:ln/>
+          <a:ln w="12700">
+            <a:solidFill>
+              <a:srgbClr val="FF6B6B"/>
+            </a:solidFill>
+            <a:prstDash val="solid"/>
+          </a:ln>
         </p:spPr>
       </p:sp>
       <p:sp>
@@ -5544,7 +5626,7 @@
             <a:r>
               <a:rPr lang="en-US" sz="1050" b="1" dirty="0">
                 <a:solidFill>
-                  <a:srgbClr val="FF7B7B"/>
+                  <a:srgbClr val="FF6B6B"/>
                 </a:solidFill>
                 <a:latin typeface="Courier New" pitchFamily="34" charset="0"/>
                 <a:ea typeface="Courier New" pitchFamily="34" charset="-122"/>
@@ -5573,7 +5655,7 @@
           <a:noFill/>
           <a:ln w="15875">
             <a:solidFill>
-              <a:srgbClr val="9B7BE8"/>
+              <a:srgbClr val="8F72E6"/>
             </a:solidFill>
             <a:prstDash val="solid"/>
           </a:ln>
@@ -5594,7 +5676,7 @@
             <a:avLst/>
           </a:prstGeom>
           <a:solidFill>
-            <a:srgbClr val="9B7BE8"/>
+            <a:srgbClr val="8F72E6"/>
           </a:solidFill>
           <a:ln/>
         </p:spPr>
@@ -5616,9 +5698,14 @@
             </a:avLst>
           </a:prstGeom>
           <a:solidFill>
-            <a:srgbClr val="2E1418"/>
+            <a:srgbClr val="1A0808"/>
           </a:solidFill>
-          <a:ln/>
+          <a:ln w="12700">
+            <a:solidFill>
+              <a:srgbClr val="FF6B6B"/>
+            </a:solidFill>
+            <a:prstDash val="solid"/>
+          </a:ln>
         </p:spPr>
       </p:sp>
       <p:sp>
@@ -5648,7 +5735,7 @@
             <a:r>
               <a:rPr lang="en-US" sz="1050" b="1" dirty="0">
                 <a:solidFill>
-                  <a:srgbClr val="FF7B7B"/>
+                  <a:srgbClr val="FF6B6B"/>
                 </a:solidFill>
                 <a:latin typeface="Courier New" pitchFamily="34" charset="0"/>
                 <a:ea typeface="Courier New" pitchFamily="34" charset="-122"/>
@@ -5677,7 +5764,7 @@
           <a:noFill/>
           <a:ln w="15875">
             <a:solidFill>
-              <a:srgbClr val="9B7BE8"/>
+              <a:srgbClr val="8F72E6"/>
             </a:solidFill>
             <a:prstDash val="solid"/>
           </a:ln>
@@ -5698,7 +5785,7 @@
             <a:avLst/>
           </a:prstGeom>
           <a:solidFill>
-            <a:srgbClr val="9B7BE8"/>
+            <a:srgbClr val="8F72E6"/>
           </a:solidFill>
           <a:ln/>
         </p:spPr>
@@ -5720,9 +5807,14 @@
             </a:avLst>
           </a:prstGeom>
           <a:solidFill>
-            <a:srgbClr val="2E1418"/>
+            <a:srgbClr val="1A0808"/>
           </a:solidFill>
-          <a:ln/>
+          <a:ln w="12700">
+            <a:solidFill>
+              <a:srgbClr val="FF6B6B"/>
+            </a:solidFill>
+            <a:prstDash val="solid"/>
+          </a:ln>
         </p:spPr>
       </p:sp>
       <p:sp>
@@ -5752,7 +5844,7 @@
             <a:r>
               <a:rPr lang="en-US" sz="1050" b="1" dirty="0">
                 <a:solidFill>
-                  <a:srgbClr val="FF7B7B"/>
+                  <a:srgbClr val="FF6B6B"/>
                 </a:solidFill>
                 <a:latin typeface="Courier New" pitchFamily="34" charset="0"/>
                 <a:ea typeface="Courier New" pitchFamily="34" charset="-122"/>
@@ -5781,9 +5873,14 @@
             </a:avLst>
           </a:prstGeom>
           <a:solidFill>
-            <a:srgbClr val="102A20"/>
+            <a:srgbClr val="06180F"/>
           </a:solidFill>
-          <a:ln/>
+          <a:ln w="12700">
+            <a:solidFill>
+              <a:srgbClr val="3FCF8E"/>
+            </a:solidFill>
+            <a:prstDash val="solid"/>
+          </a:ln>
         </p:spPr>
       </p:sp>
       <p:sp>
@@ -5801,7 +5898,7 @@
             <a:avLst/>
           </a:prstGeom>
           <a:solidFill>
-            <a:srgbClr val="5FD6A0"/>
+            <a:srgbClr val="5A05F4"/>
           </a:solidFill>
           <a:ln/>
         </p:spPr>
@@ -5833,7 +5930,7 @@
             <a:r>
               <a:rPr lang="en-US" sz="1200" b="1" dirty="0">
                 <a:solidFill>
-                  <a:srgbClr val="102A20"/>
+                  <a:srgbClr val="FFFFFF"/>
                 </a:solidFill>
                 <a:latin typeface="Courier New" pitchFamily="34" charset="0"/>
                 <a:ea typeface="Courier New" pitchFamily="34" charset="-122"/>
@@ -5872,7 +5969,7 @@
             <a:r>
               <a:rPr lang="en-US" sz="1450" b="1" dirty="0">
                 <a:solidFill>
-                  <a:srgbClr val="5FD6A0"/>
+                  <a:srgbClr val="3FCF8E"/>
                 </a:solidFill>
                 <a:latin typeface="Montserrat" pitchFamily="34" charset="0"/>
                 <a:ea typeface="Montserrat" pitchFamily="34" charset="-122"/>
@@ -5914,7 +6011,7 @@
             <a:r>
               <a:rPr lang="en-US" sz="1200" dirty="0">
                 <a:solidFill>
-                  <a:srgbClr val="FFFFFF"/>
+                  <a:srgbClr val="C9C4D6"/>
                 </a:solidFill>
                 <a:latin typeface="Montserrat" pitchFamily="34" charset="0"/>
                 <a:ea typeface="Montserrat" pitchFamily="34" charset="-122"/>
@@ -5943,9 +6040,14 @@
             </a:avLst>
           </a:prstGeom>
           <a:solidFill>
-            <a:srgbClr val="102A20"/>
+            <a:srgbClr val="06180F"/>
           </a:solidFill>
-          <a:ln/>
+          <a:ln w="12700">
+            <a:solidFill>
+              <a:srgbClr val="3FCF8E"/>
+            </a:solidFill>
+            <a:prstDash val="solid"/>
+          </a:ln>
         </p:spPr>
       </p:sp>
       <p:sp>
@@ -5963,7 +6065,7 @@
             <a:avLst/>
           </a:prstGeom>
           <a:solidFill>
-            <a:srgbClr val="5FD6A0"/>
+            <a:srgbClr val="5A05F4"/>
           </a:solidFill>
           <a:ln/>
         </p:spPr>
@@ -5995,7 +6097,7 @@
             <a:r>
               <a:rPr lang="en-US" sz="1200" b="1" dirty="0">
                 <a:solidFill>
-                  <a:srgbClr val="102A20"/>
+                  <a:srgbClr val="FFFFFF"/>
                 </a:solidFill>
                 <a:latin typeface="Courier New" pitchFamily="34" charset="0"/>
                 <a:ea typeface="Courier New" pitchFamily="34" charset="-122"/>
@@ -6034,7 +6136,7 @@
             <a:r>
               <a:rPr lang="en-US" sz="1450" b="1" dirty="0">
                 <a:solidFill>
-                  <a:srgbClr val="5FD6A0"/>
+                  <a:srgbClr val="3FCF8E"/>
                 </a:solidFill>
                 <a:latin typeface="Montserrat" pitchFamily="34" charset="0"/>
                 <a:ea typeface="Montserrat" pitchFamily="34" charset="-122"/>
@@ -6076,7 +6178,7 @@
             <a:r>
               <a:rPr lang="en-US" sz="1200" dirty="0">
                 <a:solidFill>
-                  <a:srgbClr val="FFFFFF"/>
+                  <a:srgbClr val="C9C4D6"/>
                 </a:solidFill>
                 <a:latin typeface="Montserrat" pitchFamily="34" charset="0"/>
                 <a:ea typeface="Montserrat" pitchFamily="34" charset="-122"/>
@@ -6105,9 +6207,14 @@
             </a:avLst>
           </a:prstGeom>
           <a:solidFill>
-            <a:srgbClr val="102A20"/>
+            <a:srgbClr val="06180F"/>
           </a:solidFill>
-          <a:ln/>
+          <a:ln w="12700">
+            <a:solidFill>
+              <a:srgbClr val="3FCF8E"/>
+            </a:solidFill>
+            <a:prstDash val="solid"/>
+          </a:ln>
         </p:spPr>
       </p:sp>
       <p:sp>
@@ -6125,7 +6232,7 @@
             <a:avLst/>
           </a:prstGeom>
           <a:solidFill>
-            <a:srgbClr val="5FD6A0"/>
+            <a:srgbClr val="5A05F4"/>
           </a:solidFill>
           <a:ln/>
         </p:spPr>
@@ -6157,7 +6264,7 @@
             <a:r>
               <a:rPr lang="en-US" sz="1200" b="1" dirty="0">
                 <a:solidFill>
-                  <a:srgbClr val="102A20"/>
+                  <a:srgbClr val="FFFFFF"/>
                 </a:solidFill>
                 <a:latin typeface="Courier New" pitchFamily="34" charset="0"/>
                 <a:ea typeface="Courier New" pitchFamily="34" charset="-122"/>
@@ -6196,7 +6303,7 @@
             <a:r>
               <a:rPr lang="en-US" sz="1450" b="1" dirty="0">
                 <a:solidFill>
-                  <a:srgbClr val="5FD6A0"/>
+                  <a:srgbClr val="3FCF8E"/>
                 </a:solidFill>
                 <a:latin typeface="Montserrat" pitchFamily="34" charset="0"/>
                 <a:ea typeface="Montserrat" pitchFamily="34" charset="-122"/>
@@ -6238,7 +6345,7 @@
             <a:r>
               <a:rPr lang="en-US" sz="1200" dirty="0">
                 <a:solidFill>
-                  <a:srgbClr val="FFFFFF"/>
+                  <a:srgbClr val="C9C4D6"/>
                 </a:solidFill>
                 <a:latin typeface="Montserrat" pitchFamily="34" charset="0"/>
                 <a:ea typeface="Montserrat" pitchFamily="34" charset="-122"/>
@@ -6267,9 +6374,14 @@
             </a:avLst>
           </a:prstGeom>
           <a:solidFill>
-            <a:srgbClr val="2E1418"/>
+            <a:srgbClr val="1A0808"/>
           </a:solidFill>
-          <a:ln/>
+          <a:ln w="12700">
+            <a:solidFill>
+              <a:srgbClr val="FF6B6B"/>
+            </a:solidFill>
+            <a:prstDash val="solid"/>
+          </a:ln>
         </p:spPr>
       </p:sp>
       <p:sp>
@@ -6299,7 +6411,7 @@
             <a:r>
               <a:rPr lang="en-US" sz="950" b="1" spc="150" kern="0" dirty="0">
                 <a:solidFill>
-                  <a:srgbClr val="FF7B7B"/>
+                  <a:srgbClr val="FF6B6B"/>
                 </a:solidFill>
                 <a:latin typeface="Courier New" pitchFamily="34" charset="0"/>
                 <a:ea typeface="Courier New" pitchFamily="34" charset="-122"/>
@@ -6383,7 +6495,7 @@
             <a:lvl1pPr>
               <a:defRPr sz="850">
                 <a:solidFill>
-                  <a:srgbClr val="8A82A0"/>
+                  <a:srgbClr val="9A94AA"/>
                 </a:solidFill>
                 <a:latin typeface="Courier New"/>
                 <a:ea typeface="Courier New"/>
@@ -6453,7 +6565,7 @@
             <a:r>
               <a:rPr lang="en-US" sz="2600" b="1" dirty="0">
                 <a:solidFill>
-                  <a:srgbClr val="C9A6FF"/>
+                  <a:srgbClr val="A98BFF"/>
                 </a:solidFill>
                 <a:latin typeface="Courier New" pitchFamily="34" charset="0"/>
                 <a:ea typeface="Courier New" pitchFamily="34" charset="-122"/>
@@ -6521,9 +6633,14 @@
             </a:avLst>
           </a:prstGeom>
           <a:solidFill>
-            <a:srgbClr val="C9A6FF"/>
+            <a:srgbClr val="1A0B3D"/>
           </a:solidFill>
-          <a:ln/>
+          <a:ln w="12700">
+            <a:solidFill>
+              <a:srgbClr val="5A05F4"/>
+            </a:solidFill>
+            <a:prstDash val="solid"/>
+          </a:ln>
         </p:spPr>
       </p:sp>
       <p:sp>
@@ -6553,7 +6670,7 @@
             <a:r>
               <a:rPr lang="en-US" sz="900" b="1" spc="100" kern="0" dirty="0">
                 <a:solidFill>
-                  <a:srgbClr val="1C1140"/>
+                  <a:srgbClr val="A98BFF"/>
                 </a:solidFill>
                 <a:latin typeface="Courier New" pitchFamily="34" charset="0"/>
                 <a:ea typeface="Courier New" pitchFamily="34" charset="-122"/>
@@ -6628,7 +6745,7 @@
                       <a:r>
                         <a:rPr lang="en-US" sz="900" b="1" spc="100" kern="0" dirty="0">
                           <a:solidFill>
-                            <a:srgbClr val="AFA9BE"/>
+                            <a:srgbClr val="C9C4D6"/>
                           </a:solidFill>
                           <a:latin typeface="Courier New" pitchFamily="34" charset="0"/>
                           <a:ea typeface="Courier New" pitchFamily="34" charset="-122"/>
@@ -6646,7 +6763,7 @@
                   <a:tcPr marL="73152" marR="73152" marT="73152" marB="73152" anchor="ctr">
                     <a:lnL w="6350" cap="flat" cmpd="sng" algn="ctr">
                       <a:solidFill>
-                        <a:srgbClr val="2E2A3A"/>
+                        <a:srgbClr val="5E4F85"/>
                       </a:solidFill>
                       <a:prstDash val="solid"/>
                       <a:round/>
@@ -6655,7 +6772,7 @@
                     </a:lnL>
                     <a:lnR w="6350" cap="flat" cmpd="sng" algn="ctr">
                       <a:solidFill>
-                        <a:srgbClr val="2E2A3A"/>
+                        <a:srgbClr val="5E4F85"/>
                       </a:solidFill>
                       <a:prstDash val="solid"/>
                       <a:round/>
@@ -6664,7 +6781,7 @@
                     </a:lnR>
                     <a:lnT w="6350" cap="flat" cmpd="sng" algn="ctr">
                       <a:solidFill>
-                        <a:srgbClr val="2E2A3A"/>
+                        <a:srgbClr val="5E4F85"/>
                       </a:solidFill>
                       <a:prstDash val="solid"/>
                       <a:round/>
@@ -6673,7 +6790,7 @@
                     </a:lnT>
                     <a:lnB w="6350" cap="flat" cmpd="sng" algn="ctr">
                       <a:solidFill>
-                        <a:srgbClr val="2E2A3A"/>
+                        <a:srgbClr val="5E4F85"/>
                       </a:solidFill>
                       <a:prstDash val="solid"/>
                       <a:round/>
@@ -6681,7 +6798,7 @@
                       <a:tailEnd type="none" w="med" len="med"/>
                     </a:lnB>
                     <a:solidFill>
-                      <a:srgbClr val="1F1B2A"/>
+                      <a:srgbClr val="1A0B3D"/>
                     </a:solidFill>
                   </a:tcPr>
                 </a:tc>
@@ -6696,7 +6813,7 @@
                       <a:r>
                         <a:rPr lang="en-US" sz="900" b="1" spc="100" kern="0" dirty="0">
                           <a:solidFill>
-                            <a:srgbClr val="AFA9BE"/>
+                            <a:srgbClr val="C9C4D6"/>
                           </a:solidFill>
                           <a:latin typeface="Courier New" pitchFamily="34" charset="0"/>
                           <a:ea typeface="Courier New" pitchFamily="34" charset="-122"/>
@@ -6714,7 +6831,7 @@
                   <a:tcPr marL="73152" marR="73152" marT="73152" marB="73152" anchor="ctr">
                     <a:lnL w="6350" cap="flat" cmpd="sng" algn="ctr">
                       <a:solidFill>
-                        <a:srgbClr val="2E2A3A"/>
+                        <a:srgbClr val="5E4F85"/>
                       </a:solidFill>
                       <a:prstDash val="solid"/>
                       <a:round/>
@@ -6723,7 +6840,7 @@
                     </a:lnL>
                     <a:lnR w="6350" cap="flat" cmpd="sng" algn="ctr">
                       <a:solidFill>
-                        <a:srgbClr val="2E2A3A"/>
+                        <a:srgbClr val="5E4F85"/>
                       </a:solidFill>
                       <a:prstDash val="solid"/>
                       <a:round/>
@@ -6732,7 +6849,7 @@
                     </a:lnR>
                     <a:lnT w="6350" cap="flat" cmpd="sng" algn="ctr">
                       <a:solidFill>
-                        <a:srgbClr val="2E2A3A"/>
+                        <a:srgbClr val="5E4F85"/>
                       </a:solidFill>
                       <a:prstDash val="solid"/>
                       <a:round/>
@@ -6741,7 +6858,7 @@
                     </a:lnT>
                     <a:lnB w="6350" cap="flat" cmpd="sng" algn="ctr">
                       <a:solidFill>
-                        <a:srgbClr val="2E2A3A"/>
+                        <a:srgbClr val="5E4F85"/>
                       </a:solidFill>
                       <a:prstDash val="solid"/>
                       <a:round/>
@@ -6749,7 +6866,7 @@
                       <a:tailEnd type="none" w="med" len="med"/>
                     </a:lnB>
                     <a:solidFill>
-                      <a:srgbClr val="1F1B2A"/>
+                      <a:srgbClr val="1A0B3D"/>
                     </a:solidFill>
                   </a:tcPr>
                 </a:tc>
@@ -6764,7 +6881,7 @@
                       <a:r>
                         <a:rPr lang="en-US" sz="900" b="1" spc="100" kern="0" dirty="0">
                           <a:solidFill>
-                            <a:srgbClr val="AFA9BE"/>
+                            <a:srgbClr val="C9C4D6"/>
                           </a:solidFill>
                           <a:latin typeface="Courier New" pitchFamily="34" charset="0"/>
                           <a:ea typeface="Courier New" pitchFamily="34" charset="-122"/>
@@ -6782,7 +6899,7 @@
                   <a:tcPr marL="73152" marR="73152" marT="73152" marB="73152" anchor="ctr">
                     <a:lnL w="6350" cap="flat" cmpd="sng" algn="ctr">
                       <a:solidFill>
-                        <a:srgbClr val="2E2A3A"/>
+                        <a:srgbClr val="5E4F85"/>
                       </a:solidFill>
                       <a:prstDash val="solid"/>
                       <a:round/>
@@ -6791,7 +6908,7 @@
                     </a:lnL>
                     <a:lnR w="6350" cap="flat" cmpd="sng" algn="ctr">
                       <a:solidFill>
-                        <a:srgbClr val="2E2A3A"/>
+                        <a:srgbClr val="5E4F85"/>
                       </a:solidFill>
                       <a:prstDash val="solid"/>
                       <a:round/>
@@ -6800,7 +6917,7 @@
                     </a:lnR>
                     <a:lnT w="6350" cap="flat" cmpd="sng" algn="ctr">
                       <a:solidFill>
-                        <a:srgbClr val="2E2A3A"/>
+                        <a:srgbClr val="5E4F85"/>
                       </a:solidFill>
                       <a:prstDash val="solid"/>
                       <a:round/>
@@ -6809,7 +6926,7 @@
                     </a:lnT>
                     <a:lnB w="6350" cap="flat" cmpd="sng" algn="ctr">
                       <a:solidFill>
-                        <a:srgbClr val="2E2A3A"/>
+                        <a:srgbClr val="5E4F85"/>
                       </a:solidFill>
                       <a:prstDash val="solid"/>
                       <a:round/>
@@ -6817,7 +6934,7 @@
                       <a:tailEnd type="none" w="med" len="med"/>
                     </a:lnB>
                     <a:solidFill>
-                      <a:srgbClr val="1F1B2A"/>
+                      <a:srgbClr val="1A0B3D"/>
                     </a:solidFill>
                   </a:tcPr>
                 </a:tc>
@@ -6852,7 +6969,7 @@
                   <a:tcPr marL="73152" marR="73152" marT="73152" marB="73152" anchor="ctr">
                     <a:lnL w="6350" cap="flat" cmpd="sng" algn="ctr">
                       <a:solidFill>
-                        <a:srgbClr val="2E2A3A"/>
+                        <a:srgbClr val="5E4F85"/>
                       </a:solidFill>
                       <a:prstDash val="solid"/>
                       <a:round/>
@@ -6861,7 +6978,7 @@
                     </a:lnL>
                     <a:lnR w="6350" cap="flat" cmpd="sng" algn="ctr">
                       <a:solidFill>
-                        <a:srgbClr val="2E2A3A"/>
+                        <a:srgbClr val="5E4F85"/>
                       </a:solidFill>
                       <a:prstDash val="solid"/>
                       <a:round/>
@@ -6870,7 +6987,7 @@
                     </a:lnR>
                     <a:lnT w="6350" cap="flat" cmpd="sng" algn="ctr">
                       <a:solidFill>
-                        <a:srgbClr val="2E2A3A"/>
+                        <a:srgbClr val="5E4F85"/>
                       </a:solidFill>
                       <a:prstDash val="solid"/>
                       <a:round/>
@@ -6879,7 +6996,7 @@
                     </a:lnT>
                     <a:lnB w="6350" cap="flat" cmpd="sng" algn="ctr">
                       <a:solidFill>
-                        <a:srgbClr val="2E2A3A"/>
+                        <a:srgbClr val="5E4F85"/>
                       </a:solidFill>
                       <a:prstDash val="solid"/>
                       <a:round/>
@@ -6887,7 +7004,7 @@
                       <a:tailEnd type="none" w="med" len="med"/>
                     </a:lnB>
                     <a:solidFill>
-                      <a:srgbClr val="17141F"/>
+                      <a:srgbClr val="000000"/>
                     </a:solidFill>
                   </a:tcPr>
                 </a:tc>
@@ -6920,7 +7037,7 @@
                   <a:tcPr marL="73152" marR="73152" marT="73152" marB="73152" anchor="ctr">
                     <a:lnL w="6350" cap="flat" cmpd="sng" algn="ctr">
                       <a:solidFill>
-                        <a:srgbClr val="2E2A3A"/>
+                        <a:srgbClr val="5E4F85"/>
                       </a:solidFill>
                       <a:prstDash val="solid"/>
                       <a:round/>
@@ -6929,7 +7046,7 @@
                     </a:lnL>
                     <a:lnR w="6350" cap="flat" cmpd="sng" algn="ctr">
                       <a:solidFill>
-                        <a:srgbClr val="2E2A3A"/>
+                        <a:srgbClr val="5E4F85"/>
                       </a:solidFill>
                       <a:prstDash val="solid"/>
                       <a:round/>
@@ -6938,7 +7055,7 @@
                     </a:lnR>
                     <a:lnT w="6350" cap="flat" cmpd="sng" algn="ctr">
                       <a:solidFill>
-                        <a:srgbClr val="2E2A3A"/>
+                        <a:srgbClr val="5E4F85"/>
                       </a:solidFill>
                       <a:prstDash val="solid"/>
                       <a:round/>
@@ -6947,7 +7064,7 @@
                     </a:lnT>
                     <a:lnB w="6350" cap="flat" cmpd="sng" algn="ctr">
                       <a:solidFill>
-                        <a:srgbClr val="2E2A3A"/>
+                        <a:srgbClr val="5E4F85"/>
                       </a:solidFill>
                       <a:prstDash val="solid"/>
                       <a:round/>
@@ -6955,7 +7072,7 @@
                       <a:tailEnd type="none" w="med" len="med"/>
                     </a:lnB>
                     <a:solidFill>
-                      <a:srgbClr val="17141F"/>
+                      <a:srgbClr val="000000"/>
                     </a:solidFill>
                   </a:tcPr>
                 </a:tc>
@@ -6988,7 +7105,7 @@
                   <a:tcPr marL="73152" marR="73152" marT="73152" marB="73152" anchor="ctr">
                     <a:lnL w="6350" cap="flat" cmpd="sng" algn="ctr">
                       <a:solidFill>
-                        <a:srgbClr val="2E2A3A"/>
+                        <a:srgbClr val="5E4F85"/>
                       </a:solidFill>
                       <a:prstDash val="solid"/>
                       <a:round/>
@@ -6997,7 +7114,7 @@
                     </a:lnL>
                     <a:lnR w="6350" cap="flat" cmpd="sng" algn="ctr">
                       <a:solidFill>
-                        <a:srgbClr val="2E2A3A"/>
+                        <a:srgbClr val="5E4F85"/>
                       </a:solidFill>
                       <a:prstDash val="solid"/>
                       <a:round/>
@@ -7006,7 +7123,7 @@
                     </a:lnR>
                     <a:lnT w="6350" cap="flat" cmpd="sng" algn="ctr">
                       <a:solidFill>
-                        <a:srgbClr val="2E2A3A"/>
+                        <a:srgbClr val="5E4F85"/>
                       </a:solidFill>
                       <a:prstDash val="solid"/>
                       <a:round/>
@@ -7015,7 +7132,7 @@
                     </a:lnT>
                     <a:lnB w="6350" cap="flat" cmpd="sng" algn="ctr">
                       <a:solidFill>
-                        <a:srgbClr val="2E2A3A"/>
+                        <a:srgbClr val="5E4F85"/>
                       </a:solidFill>
                       <a:prstDash val="solid"/>
                       <a:round/>
@@ -7023,7 +7140,7 @@
                       <a:tailEnd type="none" w="med" len="med"/>
                     </a:lnB>
                     <a:solidFill>
-                      <a:srgbClr val="17141F"/>
+                      <a:srgbClr val="000000"/>
                     </a:solidFill>
                   </a:tcPr>
                 </a:tc>
@@ -7040,7 +7157,7 @@
                       <a:r>
                         <a:rPr lang="en-US" sz="1150" b="1" dirty="0">
                           <a:solidFill>
-                            <a:srgbClr val="C9A6FF"/>
+                            <a:srgbClr val="A98BFF"/>
                           </a:solidFill>
                           <a:latin typeface="Montserrat" pitchFamily="34" charset="0"/>
                           <a:ea typeface="Montserrat" pitchFamily="34" charset="-122"/>
@@ -7058,7 +7175,7 @@
                   <a:tcPr marL="73152" marR="73152" marT="73152" marB="73152" anchor="ctr">
                     <a:lnL w="6350" cap="flat" cmpd="sng" algn="ctr">
                       <a:solidFill>
-                        <a:srgbClr val="2E2A3A"/>
+                        <a:srgbClr val="5E4F85"/>
                       </a:solidFill>
                       <a:prstDash val="solid"/>
                       <a:round/>
@@ -7067,7 +7184,7 @@
                     </a:lnL>
                     <a:lnR w="6350" cap="flat" cmpd="sng" algn="ctr">
                       <a:solidFill>
-                        <a:srgbClr val="2E2A3A"/>
+                        <a:srgbClr val="5E4F85"/>
                       </a:solidFill>
                       <a:prstDash val="solid"/>
                       <a:round/>
@@ -7076,7 +7193,7 @@
                     </a:lnR>
                     <a:lnT w="6350" cap="flat" cmpd="sng" algn="ctr">
                       <a:solidFill>
-                        <a:srgbClr val="2E2A3A"/>
+                        <a:srgbClr val="5E4F85"/>
                       </a:solidFill>
                       <a:prstDash val="solid"/>
                       <a:round/>
@@ -7085,7 +7202,7 @@
                     </a:lnT>
                     <a:lnB w="6350" cap="flat" cmpd="sng" algn="ctr">
                       <a:solidFill>
-                        <a:srgbClr val="2E2A3A"/>
+                        <a:srgbClr val="5E4F85"/>
                       </a:solidFill>
                       <a:prstDash val="solid"/>
                       <a:round/>
@@ -7093,7 +7210,7 @@
                       <a:tailEnd type="none" w="med" len="med"/>
                     </a:lnB>
                     <a:solidFill>
-                      <a:srgbClr val="1C1140"/>
+                      <a:srgbClr val="1A0B3D"/>
                     </a:solidFill>
                   </a:tcPr>
                 </a:tc>
@@ -7126,7 +7243,7 @@
                   <a:tcPr marL="73152" marR="73152" marT="73152" marB="73152" anchor="ctr">
                     <a:lnL w="6350" cap="flat" cmpd="sng" algn="ctr">
                       <a:solidFill>
-                        <a:srgbClr val="2E2A3A"/>
+                        <a:srgbClr val="5E4F85"/>
                       </a:solidFill>
                       <a:prstDash val="solid"/>
                       <a:round/>
@@ -7135,7 +7252,7 @@
                     </a:lnL>
                     <a:lnR w="6350" cap="flat" cmpd="sng" algn="ctr">
                       <a:solidFill>
-                        <a:srgbClr val="2E2A3A"/>
+                        <a:srgbClr val="5E4F85"/>
                       </a:solidFill>
                       <a:prstDash val="solid"/>
                       <a:round/>
@@ -7144,7 +7261,7 @@
                     </a:lnR>
                     <a:lnT w="6350" cap="flat" cmpd="sng" algn="ctr">
                       <a:solidFill>
-                        <a:srgbClr val="2E2A3A"/>
+                        <a:srgbClr val="5E4F85"/>
                       </a:solidFill>
                       <a:prstDash val="solid"/>
                       <a:round/>
@@ -7153,7 +7270,7 @@
                     </a:lnT>
                     <a:lnB w="6350" cap="flat" cmpd="sng" algn="ctr">
                       <a:solidFill>
-                        <a:srgbClr val="2E2A3A"/>
+                        <a:srgbClr val="5E4F85"/>
                       </a:solidFill>
                       <a:prstDash val="solid"/>
                       <a:round/>
@@ -7161,7 +7278,7 @@
                       <a:tailEnd type="none" w="med" len="med"/>
                     </a:lnB>
                     <a:solidFill>
-                      <a:srgbClr val="1C1140"/>
+                      <a:srgbClr val="1A0B3D"/>
                     </a:solidFill>
                   </a:tcPr>
                 </a:tc>
@@ -7194,7 +7311,7 @@
                   <a:tcPr marL="73152" marR="73152" marT="73152" marB="73152" anchor="ctr">
                     <a:lnL w="6350" cap="flat" cmpd="sng" algn="ctr">
                       <a:solidFill>
-                        <a:srgbClr val="2E2A3A"/>
+                        <a:srgbClr val="5E4F85"/>
                       </a:solidFill>
                       <a:prstDash val="solid"/>
                       <a:round/>
@@ -7203,7 +7320,7 @@
                     </a:lnL>
                     <a:lnR w="6350" cap="flat" cmpd="sng" algn="ctr">
                       <a:solidFill>
-                        <a:srgbClr val="2E2A3A"/>
+                        <a:srgbClr val="5E4F85"/>
                       </a:solidFill>
                       <a:prstDash val="solid"/>
                       <a:round/>
@@ -7212,7 +7329,7 @@
                     </a:lnR>
                     <a:lnT w="6350" cap="flat" cmpd="sng" algn="ctr">
                       <a:solidFill>
-                        <a:srgbClr val="2E2A3A"/>
+                        <a:srgbClr val="5E4F85"/>
                       </a:solidFill>
                       <a:prstDash val="solid"/>
                       <a:round/>
@@ -7221,7 +7338,7 @@
                     </a:lnT>
                     <a:lnB w="6350" cap="flat" cmpd="sng" algn="ctr">
                       <a:solidFill>
-                        <a:srgbClr val="2E2A3A"/>
+                        <a:srgbClr val="5E4F85"/>
                       </a:solidFill>
                       <a:prstDash val="solid"/>
                       <a:round/>
@@ -7229,7 +7346,7 @@
                       <a:tailEnd type="none" w="med" len="med"/>
                     </a:lnB>
                     <a:solidFill>
-                      <a:srgbClr val="1C1140"/>
+                      <a:srgbClr val="1A0B3D"/>
                     </a:solidFill>
                   </a:tcPr>
                 </a:tc>
@@ -7264,7 +7381,7 @@
                   <a:tcPr marL="73152" marR="73152" marT="73152" marB="73152" anchor="ctr">
                     <a:lnL w="6350" cap="flat" cmpd="sng" algn="ctr">
                       <a:solidFill>
-                        <a:srgbClr val="2E2A3A"/>
+                        <a:srgbClr val="5E4F85"/>
                       </a:solidFill>
                       <a:prstDash val="solid"/>
                       <a:round/>
@@ -7273,7 +7390,7 @@
                     </a:lnL>
                     <a:lnR w="6350" cap="flat" cmpd="sng" algn="ctr">
                       <a:solidFill>
-                        <a:srgbClr val="2E2A3A"/>
+                        <a:srgbClr val="5E4F85"/>
                       </a:solidFill>
                       <a:prstDash val="solid"/>
                       <a:round/>
@@ -7282,7 +7399,7 @@
                     </a:lnR>
                     <a:lnT w="6350" cap="flat" cmpd="sng" algn="ctr">
                       <a:solidFill>
-                        <a:srgbClr val="2E2A3A"/>
+                        <a:srgbClr val="5E4F85"/>
                       </a:solidFill>
                       <a:prstDash val="solid"/>
                       <a:round/>
@@ -7291,7 +7408,7 @@
                     </a:lnT>
                     <a:lnB w="6350" cap="flat" cmpd="sng" algn="ctr">
                       <a:solidFill>
-                        <a:srgbClr val="2E2A3A"/>
+                        <a:srgbClr val="5E4F85"/>
                       </a:solidFill>
                       <a:prstDash val="solid"/>
                       <a:round/>
@@ -7299,7 +7416,7 @@
                       <a:tailEnd type="none" w="med" len="med"/>
                     </a:lnB>
                     <a:solidFill>
-                      <a:srgbClr val="17141F"/>
+                      <a:srgbClr val="000000"/>
                     </a:solidFill>
                   </a:tcPr>
                 </a:tc>
@@ -7332,7 +7449,7 @@
                   <a:tcPr marL="73152" marR="73152" marT="73152" marB="73152" anchor="ctr">
                     <a:lnL w="6350" cap="flat" cmpd="sng" algn="ctr">
                       <a:solidFill>
-                        <a:srgbClr val="2E2A3A"/>
+                        <a:srgbClr val="5E4F85"/>
                       </a:solidFill>
                       <a:prstDash val="solid"/>
                       <a:round/>
@@ -7341,7 +7458,7 @@
                     </a:lnL>
                     <a:lnR w="6350" cap="flat" cmpd="sng" algn="ctr">
                       <a:solidFill>
-                        <a:srgbClr val="2E2A3A"/>
+                        <a:srgbClr val="5E4F85"/>
                       </a:solidFill>
                       <a:prstDash val="solid"/>
                       <a:round/>
@@ -7350,7 +7467,7 @@
                     </a:lnR>
                     <a:lnT w="6350" cap="flat" cmpd="sng" algn="ctr">
                       <a:solidFill>
-                        <a:srgbClr val="2E2A3A"/>
+                        <a:srgbClr val="5E4F85"/>
                       </a:solidFill>
                       <a:prstDash val="solid"/>
                       <a:round/>
@@ -7359,7 +7476,7 @@
                     </a:lnT>
                     <a:lnB w="6350" cap="flat" cmpd="sng" algn="ctr">
                       <a:solidFill>
-                        <a:srgbClr val="2E2A3A"/>
+                        <a:srgbClr val="5E4F85"/>
                       </a:solidFill>
                       <a:prstDash val="solid"/>
                       <a:round/>
@@ -7367,7 +7484,7 @@
                       <a:tailEnd type="none" w="med" len="med"/>
                     </a:lnB>
                     <a:solidFill>
-                      <a:srgbClr val="17141F"/>
+                      <a:srgbClr val="000000"/>
                     </a:solidFill>
                   </a:tcPr>
                 </a:tc>
@@ -7400,7 +7517,7 @@
                   <a:tcPr marL="73152" marR="73152" marT="73152" marB="73152" anchor="ctr">
                     <a:lnL w="6350" cap="flat" cmpd="sng" algn="ctr">
                       <a:solidFill>
-                        <a:srgbClr val="2E2A3A"/>
+                        <a:srgbClr val="5E4F85"/>
                       </a:solidFill>
                       <a:prstDash val="solid"/>
                       <a:round/>
@@ -7409,7 +7526,7 @@
                     </a:lnL>
                     <a:lnR w="6350" cap="flat" cmpd="sng" algn="ctr">
                       <a:solidFill>
-                        <a:srgbClr val="2E2A3A"/>
+                        <a:srgbClr val="5E4F85"/>
                       </a:solidFill>
                       <a:prstDash val="solid"/>
                       <a:round/>
@@ -7418,7 +7535,7 @@
                     </a:lnR>
                     <a:lnT w="6350" cap="flat" cmpd="sng" algn="ctr">
                       <a:solidFill>
-                        <a:srgbClr val="2E2A3A"/>
+                        <a:srgbClr val="5E4F85"/>
                       </a:solidFill>
                       <a:prstDash val="solid"/>
                       <a:round/>
@@ -7427,7 +7544,7 @@
                     </a:lnT>
                     <a:lnB w="6350" cap="flat" cmpd="sng" algn="ctr">
                       <a:solidFill>
-                        <a:srgbClr val="2E2A3A"/>
+                        <a:srgbClr val="5E4F85"/>
                       </a:solidFill>
                       <a:prstDash val="solid"/>
                       <a:round/>
@@ -7435,7 +7552,7 @@
                       <a:tailEnd type="none" w="med" len="med"/>
                     </a:lnB>
                     <a:solidFill>
-                      <a:srgbClr val="17141F"/>
+                      <a:srgbClr val="000000"/>
                     </a:solidFill>
                   </a:tcPr>
                 </a:tc>
@@ -7470,7 +7587,7 @@
                   <a:tcPr marL="73152" marR="73152" marT="73152" marB="73152" anchor="ctr">
                     <a:lnL w="6350" cap="flat" cmpd="sng" algn="ctr">
                       <a:solidFill>
-                        <a:srgbClr val="2E2A3A"/>
+                        <a:srgbClr val="5E4F85"/>
                       </a:solidFill>
                       <a:prstDash val="solid"/>
                       <a:round/>
@@ -7479,7 +7596,7 @@
                     </a:lnL>
                     <a:lnR w="6350" cap="flat" cmpd="sng" algn="ctr">
                       <a:solidFill>
-                        <a:srgbClr val="2E2A3A"/>
+                        <a:srgbClr val="5E4F85"/>
                       </a:solidFill>
                       <a:prstDash val="solid"/>
                       <a:round/>
@@ -7488,7 +7605,7 @@
                     </a:lnR>
                     <a:lnT w="6350" cap="flat" cmpd="sng" algn="ctr">
                       <a:solidFill>
-                        <a:srgbClr val="2E2A3A"/>
+                        <a:srgbClr val="5E4F85"/>
                       </a:solidFill>
                       <a:prstDash val="solid"/>
                       <a:round/>
@@ -7497,7 +7614,7 @@
                     </a:lnT>
                     <a:lnB w="6350" cap="flat" cmpd="sng" algn="ctr">
                       <a:solidFill>
-                        <a:srgbClr val="2E2A3A"/>
+                        <a:srgbClr val="5E4F85"/>
                       </a:solidFill>
                       <a:prstDash val="solid"/>
                       <a:round/>
@@ -7505,7 +7622,7 @@
                       <a:tailEnd type="none" w="med" len="med"/>
                     </a:lnB>
                     <a:solidFill>
-                      <a:srgbClr val="17141F"/>
+                      <a:srgbClr val="000000"/>
                     </a:solidFill>
                   </a:tcPr>
                 </a:tc>
@@ -7538,7 +7655,7 @@
                   <a:tcPr marL="73152" marR="73152" marT="73152" marB="73152" anchor="ctr">
                     <a:lnL w="6350" cap="flat" cmpd="sng" algn="ctr">
                       <a:solidFill>
-                        <a:srgbClr val="2E2A3A"/>
+                        <a:srgbClr val="5E4F85"/>
                       </a:solidFill>
                       <a:prstDash val="solid"/>
                       <a:round/>
@@ -7547,7 +7664,7 @@
                     </a:lnL>
                     <a:lnR w="6350" cap="flat" cmpd="sng" algn="ctr">
                       <a:solidFill>
-                        <a:srgbClr val="2E2A3A"/>
+                        <a:srgbClr val="5E4F85"/>
                       </a:solidFill>
                       <a:prstDash val="solid"/>
                       <a:round/>
@@ -7556,7 +7673,7 @@
                     </a:lnR>
                     <a:lnT w="6350" cap="flat" cmpd="sng" algn="ctr">
                       <a:solidFill>
-                        <a:srgbClr val="2E2A3A"/>
+                        <a:srgbClr val="5E4F85"/>
                       </a:solidFill>
                       <a:prstDash val="solid"/>
                       <a:round/>
@@ -7565,7 +7682,7 @@
                     </a:lnT>
                     <a:lnB w="6350" cap="flat" cmpd="sng" algn="ctr">
                       <a:solidFill>
-                        <a:srgbClr val="2E2A3A"/>
+                        <a:srgbClr val="5E4F85"/>
                       </a:solidFill>
                       <a:prstDash val="solid"/>
                       <a:round/>
@@ -7573,7 +7690,7 @@
                       <a:tailEnd type="none" w="med" len="med"/>
                     </a:lnB>
                     <a:solidFill>
-                      <a:srgbClr val="17141F"/>
+                      <a:srgbClr val="000000"/>
                     </a:solidFill>
                   </a:tcPr>
                 </a:tc>
@@ -7606,7 +7723,7 @@
                   <a:tcPr marL="73152" marR="73152" marT="73152" marB="73152" anchor="ctr">
                     <a:lnL w="6350" cap="flat" cmpd="sng" algn="ctr">
                       <a:solidFill>
-                        <a:srgbClr val="2E2A3A"/>
+                        <a:srgbClr val="5E4F85"/>
                       </a:solidFill>
                       <a:prstDash val="solid"/>
                       <a:round/>
@@ -7615,7 +7732,7 @@
                     </a:lnL>
                     <a:lnR w="6350" cap="flat" cmpd="sng" algn="ctr">
                       <a:solidFill>
-                        <a:srgbClr val="2E2A3A"/>
+                        <a:srgbClr val="5E4F85"/>
                       </a:solidFill>
                       <a:prstDash val="solid"/>
                       <a:round/>
@@ -7624,7 +7741,7 @@
                     </a:lnR>
                     <a:lnT w="6350" cap="flat" cmpd="sng" algn="ctr">
                       <a:solidFill>
-                        <a:srgbClr val="2E2A3A"/>
+                        <a:srgbClr val="5E4F85"/>
                       </a:solidFill>
                       <a:prstDash val="solid"/>
                       <a:round/>
@@ -7633,7 +7750,7 @@
                     </a:lnT>
                     <a:lnB w="6350" cap="flat" cmpd="sng" algn="ctr">
                       <a:solidFill>
-                        <a:srgbClr val="2E2A3A"/>
+                        <a:srgbClr val="5E4F85"/>
                       </a:solidFill>
                       <a:prstDash val="solid"/>
                       <a:round/>
@@ -7641,7 +7758,7 @@
                       <a:tailEnd type="none" w="med" len="med"/>
                     </a:lnB>
                     <a:solidFill>
-                      <a:srgbClr val="17141F"/>
+                      <a:srgbClr val="000000"/>
                     </a:solidFill>
                   </a:tcPr>
                 </a:tc>
@@ -7658,7 +7775,7 @@
                       <a:r>
                         <a:rPr lang="en-US" sz="1150" b="1" dirty="0">
                           <a:solidFill>
-                            <a:srgbClr val="C9A6FF"/>
+                            <a:srgbClr val="A98BFF"/>
                           </a:solidFill>
                           <a:latin typeface="Montserrat" pitchFamily="34" charset="0"/>
                           <a:ea typeface="Montserrat" pitchFamily="34" charset="-122"/>
@@ -7676,7 +7793,7 @@
                   <a:tcPr marL="73152" marR="73152" marT="73152" marB="73152" anchor="ctr">
                     <a:lnL w="6350" cap="flat" cmpd="sng" algn="ctr">
                       <a:solidFill>
-                        <a:srgbClr val="2E2A3A"/>
+                        <a:srgbClr val="5E4F85"/>
                       </a:solidFill>
                       <a:prstDash val="solid"/>
                       <a:round/>
@@ -7685,7 +7802,7 @@
                     </a:lnL>
                     <a:lnR w="6350" cap="flat" cmpd="sng" algn="ctr">
                       <a:solidFill>
-                        <a:srgbClr val="2E2A3A"/>
+                        <a:srgbClr val="5E4F85"/>
                       </a:solidFill>
                       <a:prstDash val="solid"/>
                       <a:round/>
@@ -7694,7 +7811,7 @@
                     </a:lnR>
                     <a:lnT w="6350" cap="flat" cmpd="sng" algn="ctr">
                       <a:solidFill>
-                        <a:srgbClr val="2E2A3A"/>
+                        <a:srgbClr val="5E4F85"/>
                       </a:solidFill>
                       <a:prstDash val="solid"/>
                       <a:round/>
@@ -7703,7 +7820,7 @@
                     </a:lnT>
                     <a:lnB w="6350" cap="flat" cmpd="sng" algn="ctr">
                       <a:solidFill>
-                        <a:srgbClr val="2E2A3A"/>
+                        <a:srgbClr val="5E4F85"/>
                       </a:solidFill>
                       <a:prstDash val="solid"/>
                       <a:round/>
@@ -7711,7 +7828,7 @@
                       <a:tailEnd type="none" w="med" len="med"/>
                     </a:lnB>
                     <a:solidFill>
-                      <a:srgbClr val="1C1140"/>
+                      <a:srgbClr val="1A0B3D"/>
                     </a:solidFill>
                   </a:tcPr>
                 </a:tc>
@@ -7744,7 +7861,7 @@
                   <a:tcPr marL="73152" marR="73152" marT="73152" marB="73152" anchor="ctr">
                     <a:lnL w="6350" cap="flat" cmpd="sng" algn="ctr">
                       <a:solidFill>
-                        <a:srgbClr val="2E2A3A"/>
+                        <a:srgbClr val="5E4F85"/>
                       </a:solidFill>
                       <a:prstDash val="solid"/>
                       <a:round/>
@@ -7753,7 +7870,7 @@
                     </a:lnL>
                     <a:lnR w="6350" cap="flat" cmpd="sng" algn="ctr">
                       <a:solidFill>
-                        <a:srgbClr val="2E2A3A"/>
+                        <a:srgbClr val="5E4F85"/>
                       </a:solidFill>
                       <a:prstDash val="solid"/>
                       <a:round/>
@@ -7762,7 +7879,7 @@
                     </a:lnR>
                     <a:lnT w="6350" cap="flat" cmpd="sng" algn="ctr">
                       <a:solidFill>
-                        <a:srgbClr val="2E2A3A"/>
+                        <a:srgbClr val="5E4F85"/>
                       </a:solidFill>
                       <a:prstDash val="solid"/>
                       <a:round/>
@@ -7771,7 +7888,7 @@
                     </a:lnT>
                     <a:lnB w="6350" cap="flat" cmpd="sng" algn="ctr">
                       <a:solidFill>
-                        <a:srgbClr val="2E2A3A"/>
+                        <a:srgbClr val="5E4F85"/>
                       </a:solidFill>
                       <a:prstDash val="solid"/>
                       <a:round/>
@@ -7779,7 +7896,7 @@
                       <a:tailEnd type="none" w="med" len="med"/>
                     </a:lnB>
                     <a:solidFill>
-                      <a:srgbClr val="1C1140"/>
+                      <a:srgbClr val="1A0B3D"/>
                     </a:solidFill>
                   </a:tcPr>
                 </a:tc>
@@ -7812,7 +7929,7 @@
                   <a:tcPr marL="73152" marR="73152" marT="73152" marB="73152" anchor="ctr">
                     <a:lnL w="6350" cap="flat" cmpd="sng" algn="ctr">
                       <a:solidFill>
-                        <a:srgbClr val="2E2A3A"/>
+                        <a:srgbClr val="5E4F85"/>
                       </a:solidFill>
                       <a:prstDash val="solid"/>
                       <a:round/>
@@ -7821,7 +7938,7 @@
                     </a:lnL>
                     <a:lnR w="6350" cap="flat" cmpd="sng" algn="ctr">
                       <a:solidFill>
-                        <a:srgbClr val="2E2A3A"/>
+                        <a:srgbClr val="5E4F85"/>
                       </a:solidFill>
                       <a:prstDash val="solid"/>
                       <a:round/>
@@ -7830,7 +7947,7 @@
                     </a:lnR>
                     <a:lnT w="6350" cap="flat" cmpd="sng" algn="ctr">
                       <a:solidFill>
-                        <a:srgbClr val="2E2A3A"/>
+                        <a:srgbClr val="5E4F85"/>
                       </a:solidFill>
                       <a:prstDash val="solid"/>
                       <a:round/>
@@ -7839,7 +7956,7 @@
                     </a:lnT>
                     <a:lnB w="6350" cap="flat" cmpd="sng" algn="ctr">
                       <a:solidFill>
-                        <a:srgbClr val="2E2A3A"/>
+                        <a:srgbClr val="5E4F85"/>
                       </a:solidFill>
                       <a:prstDash val="solid"/>
                       <a:round/>
@@ -7847,7 +7964,7 @@
                       <a:tailEnd type="none" w="med" len="med"/>
                     </a:lnB>
                     <a:solidFill>
-                      <a:srgbClr val="1C1140"/>
+                      <a:srgbClr val="1A0B3D"/>
                     </a:solidFill>
                   </a:tcPr>
                 </a:tc>
@@ -7873,9 +7990,14 @@
             </a:avLst>
           </a:prstGeom>
           <a:solidFill>
-            <a:srgbClr val="102A20"/>
+            <a:srgbClr val="06180F"/>
           </a:solidFill>
-          <a:ln/>
+          <a:ln w="12700">
+            <a:solidFill>
+              <a:srgbClr val="3FCF8E"/>
+            </a:solidFill>
+            <a:prstDash val="solid"/>
+          </a:ln>
         </p:spPr>
       </p:sp>
       <p:sp>
@@ -7950,7 +8072,7 @@
             <a:lvl1pPr>
               <a:defRPr sz="850">
                 <a:solidFill>
-                  <a:srgbClr val="8A82A0"/>
+                  <a:srgbClr val="9A94AA"/>
                 </a:solidFill>
                 <a:latin typeface="Courier New"/>
                 <a:ea typeface="Courier New"/>
@@ -8020,7 +8142,7 @@
             <a:r>
               <a:rPr lang="en-US" sz="2600" b="1" dirty="0">
                 <a:solidFill>
-                  <a:srgbClr val="C9A6FF"/>
+                  <a:srgbClr val="A98BFF"/>
                 </a:solidFill>
                 <a:latin typeface="Courier New" pitchFamily="34" charset="0"/>
                 <a:ea typeface="Courier New" pitchFamily="34" charset="-122"/>
@@ -8088,9 +8210,14 @@
             </a:avLst>
           </a:prstGeom>
           <a:solidFill>
-            <a:srgbClr val="C9A6FF"/>
+            <a:srgbClr val="1A0B3D"/>
           </a:solidFill>
-          <a:ln/>
+          <a:ln w="12700">
+            <a:solidFill>
+              <a:srgbClr val="5A05F4"/>
+            </a:solidFill>
+            <a:prstDash val="solid"/>
+          </a:ln>
         </p:spPr>
       </p:sp>
       <p:sp>
@@ -8120,7 +8247,7 @@
             <a:r>
               <a:rPr lang="en-US" sz="900" b="1" spc="100" kern="0" dirty="0">
                 <a:solidFill>
-                  <a:srgbClr val="1C1140"/>
+                  <a:srgbClr val="A98BFF"/>
                 </a:solidFill>
                 <a:latin typeface="Courier New" pitchFamily="34" charset="0"/>
                 <a:ea typeface="Courier New" pitchFamily="34" charset="-122"/>
@@ -8173,11 +8300,11 @@
             </a:avLst>
           </a:prstGeom>
           <a:solidFill>
-            <a:srgbClr val="12101A"/>
+            <a:srgbClr val="07060C"/>
           </a:solidFill>
           <a:ln w="12700">
             <a:solidFill>
-              <a:srgbClr val="2E2A3A"/>
+              <a:srgbClr val="5E4F85"/>
             </a:solidFill>
             <a:prstDash val="solid"/>
           </a:ln>
@@ -8213,7 +8340,7 @@
             <a:r>
               <a:rPr lang="en-US" sz="1200" dirty="0">
                 <a:solidFill>
-                  <a:srgbClr val="C9A6FF"/>
+                  <a:srgbClr val="A98BFF"/>
                 </a:solidFill>
                 <a:latin typeface="Courier New" pitchFamily="34" charset="0"/>
                 <a:ea typeface="Courier New" pitchFamily="34" charset="-122"/>
@@ -8233,7 +8360,7 @@
             <a:r>
               <a:rPr lang="en-US" sz="1200" dirty="0">
                 <a:solidFill>
-                  <a:srgbClr val="7FD9A6"/>
+                  <a:srgbClr val="6BA0F8"/>
                 </a:solidFill>
                 <a:latin typeface="Courier New" pitchFamily="34" charset="0"/>
                 <a:ea typeface="Courier New" pitchFamily="34" charset="-122"/>
@@ -8253,7 +8380,7 @@
             <a:r>
               <a:rPr lang="en-US" sz="1200" dirty="0">
                 <a:solidFill>
-                  <a:srgbClr val="7FD9A6"/>
+                  <a:srgbClr val="6BA0F8"/>
                 </a:solidFill>
                 <a:latin typeface="Courier New" pitchFamily="34" charset="0"/>
                 <a:ea typeface="Courier New" pitchFamily="34" charset="-122"/>
@@ -8273,7 +8400,7 @@
             <a:r>
               <a:rPr lang="en-US" sz="1200" dirty="0">
                 <a:solidFill>
-                  <a:srgbClr val="F0B36B"/>
+                  <a:srgbClr val="C9C4D6"/>
                 </a:solidFill>
                 <a:latin typeface="Courier New" pitchFamily="34" charset="0"/>
                 <a:ea typeface="Courier New" pitchFamily="34" charset="-122"/>
@@ -8293,7 +8420,7 @@
             <a:r>
               <a:rPr lang="en-US" sz="1200" dirty="0">
                 <a:solidFill>
-                  <a:srgbClr val="C9A6FF"/>
+                  <a:srgbClr val="A98BFF"/>
                 </a:solidFill>
                 <a:latin typeface="Courier New" pitchFamily="34" charset="0"/>
                 <a:ea typeface="Courier New" pitchFamily="34" charset="-122"/>
@@ -8322,9 +8449,14 @@
             </a:avLst>
           </a:prstGeom>
           <a:solidFill>
-            <a:srgbClr val="102A20"/>
+            <a:srgbClr val="06180F"/>
           </a:solidFill>
-          <a:ln/>
+          <a:ln w="12700">
+            <a:solidFill>
+              <a:srgbClr val="3FCF8E"/>
+            </a:solidFill>
+            <a:prstDash val="solid"/>
+          </a:ln>
         </p:spPr>
       </p:sp>
       <p:sp>
@@ -8354,7 +8486,7 @@
             <a:r>
               <a:rPr lang="en-US" sz="1450" b="1" dirty="0">
                 <a:solidFill>
-                  <a:srgbClr val="5FD6A0"/>
+                  <a:srgbClr val="3FCF8E"/>
                 </a:solidFill>
                 <a:latin typeface="Montserrat" pitchFamily="34" charset="0"/>
                 <a:ea typeface="Montserrat" pitchFamily="34" charset="-122"/>
@@ -8396,7 +8528,7 @@
             <a:r>
               <a:rPr lang="en-US" sz="1200" dirty="0">
                 <a:solidFill>
-                  <a:srgbClr val="FFFFFF"/>
+                  <a:srgbClr val="C9C4D6"/>
                 </a:solidFill>
                 <a:latin typeface="Montserrat" pitchFamily="34" charset="0"/>
                 <a:ea typeface="Montserrat" pitchFamily="34" charset="-122"/>
@@ -8425,9 +8557,14 @@
             </a:avLst>
           </a:prstGeom>
           <a:solidFill>
-            <a:srgbClr val="2E1418"/>
+            <a:srgbClr val="1A0808"/>
           </a:solidFill>
-          <a:ln/>
+          <a:ln w="12700">
+            <a:solidFill>
+              <a:srgbClr val="FF6B6B"/>
+            </a:solidFill>
+            <a:prstDash val="solid"/>
+          </a:ln>
         </p:spPr>
       </p:sp>
       <p:sp>
@@ -8457,7 +8594,7 @@
             <a:r>
               <a:rPr lang="en-US" sz="1450" b="1" dirty="0">
                 <a:solidFill>
-                  <a:srgbClr val="FF7B7B"/>
+                  <a:srgbClr val="FF6B6B"/>
                 </a:solidFill>
                 <a:latin typeface="Montserrat" pitchFamily="34" charset="0"/>
                 <a:ea typeface="Montserrat" pitchFamily="34" charset="-122"/>
@@ -8499,7 +8636,7 @@
             <a:r>
               <a:rPr lang="en-US" sz="1200" dirty="0">
                 <a:solidFill>
-                  <a:srgbClr val="FFFFFF"/>
+                  <a:srgbClr val="C9C4D6"/>
                 </a:solidFill>
                 <a:latin typeface="Montserrat" pitchFamily="34" charset="0"/>
                 <a:ea typeface="Montserrat" pitchFamily="34" charset="-122"/>
@@ -8605,7 +8742,7 @@
             <a:lvl1pPr>
               <a:defRPr sz="850">
                 <a:solidFill>
-                  <a:srgbClr val="8A82A0"/>
+                  <a:srgbClr val="9A94AA"/>
                 </a:solidFill>
                 <a:latin typeface="Courier New"/>
                 <a:ea typeface="Courier New"/>
@@ -8675,7 +8812,7 @@
             <a:r>
               <a:rPr lang="en-US" sz="2600" b="1" dirty="0">
                 <a:solidFill>
-                  <a:srgbClr val="C9A6FF"/>
+                  <a:srgbClr val="A98BFF"/>
                 </a:solidFill>
                 <a:latin typeface="Courier New" pitchFamily="34" charset="0"/>
                 <a:ea typeface="Courier New" pitchFamily="34" charset="-122"/>
@@ -8743,9 +8880,14 @@
             </a:avLst>
           </a:prstGeom>
           <a:solidFill>
-            <a:srgbClr val="C9A6FF"/>
+            <a:srgbClr val="1A0B3D"/>
           </a:solidFill>
-          <a:ln/>
+          <a:ln w="12700">
+            <a:solidFill>
+              <a:srgbClr val="5A05F4"/>
+            </a:solidFill>
+            <a:prstDash val="solid"/>
+          </a:ln>
         </p:spPr>
       </p:sp>
       <p:sp>
@@ -8775,7 +8917,7 @@
             <a:r>
               <a:rPr lang="en-US" sz="900" b="1" spc="100" kern="0" dirty="0">
                 <a:solidFill>
-                  <a:srgbClr val="1C1140"/>
+                  <a:srgbClr val="A98BFF"/>
                 </a:solidFill>
                 <a:latin typeface="Courier New" pitchFamily="34" charset="0"/>
                 <a:ea typeface="Courier New" pitchFamily="34" charset="-122"/>
@@ -8828,11 +8970,11 @@
             </a:avLst>
           </a:prstGeom>
           <a:solidFill>
-            <a:srgbClr val="12101A"/>
+            <a:srgbClr val="07060C"/>
           </a:solidFill>
           <a:ln w="12700">
             <a:solidFill>
-              <a:srgbClr val="2E2A3A"/>
+              <a:srgbClr val="5E4F85"/>
             </a:solidFill>
             <a:prstDash val="solid"/>
           </a:ln>
@@ -8868,7 +9010,7 @@
             <a:r>
               <a:rPr lang="en-US" sz="1300" dirty="0">
                 <a:solidFill>
-                  <a:srgbClr val="8A82A0"/>
+                  <a:srgbClr val="9A94AA"/>
                 </a:solidFill>
                 <a:latin typeface="Courier New" pitchFamily="34" charset="0"/>
                 <a:ea typeface="Courier New" pitchFamily="34" charset="-122"/>
@@ -8888,7 +9030,7 @@
             <a:r>
               <a:rPr lang="en-US" sz="1300" dirty="0">
                 <a:solidFill>
-                  <a:srgbClr val="7FD9A6"/>
+                  <a:srgbClr val="6BA0F8"/>
                 </a:solidFill>
                 <a:latin typeface="Courier New" pitchFamily="34" charset="0"/>
                 <a:ea typeface="Courier New" pitchFamily="34" charset="-122"/>
@@ -8905,7 +9047,7 @@
             <a:r>
               <a:rPr lang="en-US" sz="1300" dirty="0">
                 <a:solidFill>
-                  <a:srgbClr val="8A82A0"/>
+                  <a:srgbClr val="9A94AA"/>
                 </a:solidFill>
                 <a:latin typeface="Courier New" pitchFamily="34" charset="0"/>
                 <a:ea typeface="Courier New" pitchFamily="34" charset="-122"/>
@@ -8934,9 +9076,14 @@
             </a:avLst>
           </a:prstGeom>
           <a:solidFill>
-            <a:srgbClr val="2E1418"/>
+            <a:srgbClr val="1A0808"/>
           </a:solidFill>
-          <a:ln/>
+          <a:ln w="12700">
+            <a:solidFill>
+              <a:srgbClr val="FF6B6B"/>
+            </a:solidFill>
+            <a:prstDash val="solid"/>
+          </a:ln>
         </p:spPr>
       </p:sp>
       <p:sp>
@@ -8966,7 +9113,7 @@
             <a:r>
               <a:rPr lang="en-US" sz="950" b="1" spc="150" kern="0" dirty="0">
                 <a:solidFill>
-                  <a:srgbClr val="FF7B7B"/>
+                  <a:srgbClr val="FF6B6B"/>
                 </a:solidFill>
                 <a:latin typeface="Courier New" pitchFamily="34" charset="0"/>
                 <a:ea typeface="Courier New" pitchFamily="34" charset="-122"/>
@@ -9037,9 +9184,14 @@
             </a:avLst>
           </a:prstGeom>
           <a:solidFill>
-            <a:srgbClr val="102A20"/>
+            <a:srgbClr val="06180F"/>
           </a:solidFill>
-          <a:ln/>
+          <a:ln w="12700">
+            <a:solidFill>
+              <a:srgbClr val="3FCF8E"/>
+            </a:solidFill>
+            <a:prstDash val="solid"/>
+          </a:ln>
         </p:spPr>
       </p:sp>
       <p:sp>
@@ -9153,7 +9305,7 @@
             <a:lvl1pPr>
               <a:defRPr sz="850">
                 <a:solidFill>
-                  <a:srgbClr val="8A82A0"/>
+                  <a:srgbClr val="9A94AA"/>
                 </a:solidFill>
                 <a:latin typeface="Courier New"/>
                 <a:ea typeface="Courier New"/>
@@ -9223,7 +9375,7 @@
             <a:r>
               <a:rPr lang="en-US" sz="2600" b="1" dirty="0">
                 <a:solidFill>
-                  <a:srgbClr val="C9A6FF"/>
+                  <a:srgbClr val="A98BFF"/>
                 </a:solidFill>
                 <a:latin typeface="Courier New" pitchFamily="34" charset="0"/>
                 <a:ea typeface="Courier New" pitchFamily="34" charset="-122"/>
@@ -9291,9 +9443,14 @@
             </a:avLst>
           </a:prstGeom>
           <a:solidFill>
-            <a:srgbClr val="C9A6FF"/>
+            <a:srgbClr val="1A0B3D"/>
           </a:solidFill>
-          <a:ln/>
+          <a:ln w="12700">
+            <a:solidFill>
+              <a:srgbClr val="5A05F4"/>
+            </a:solidFill>
+            <a:prstDash val="solid"/>
+          </a:ln>
         </p:spPr>
       </p:sp>
       <p:sp>
@@ -9323,7 +9480,7 @@
             <a:r>
               <a:rPr lang="en-US" sz="900" b="1" spc="100" kern="0" dirty="0">
                 <a:solidFill>
-                  <a:srgbClr val="1C1140"/>
+                  <a:srgbClr val="A98BFF"/>
                 </a:solidFill>
                 <a:latin typeface="Courier New" pitchFamily="34" charset="0"/>
                 <a:ea typeface="Courier New" pitchFamily="34" charset="-122"/>
@@ -9352,9 +9509,14 @@
             </a:avLst>
           </a:prstGeom>
           <a:solidFill>
-            <a:srgbClr val="2A2010"/>
+            <a:srgbClr val="000000"/>
           </a:solidFill>
-          <a:ln/>
+          <a:ln w="12700">
+            <a:solidFill>
+              <a:srgbClr val="5E4F85"/>
+            </a:solidFill>
+            <a:prstDash val="solid"/>
+          </a:ln>
         </p:spPr>
       </p:sp>
       <p:sp>
@@ -9384,7 +9546,7 @@
             <a:r>
               <a:rPr lang="en-US" sz="900" b="1" spc="100" kern="0" dirty="0">
                 <a:solidFill>
-                  <a:srgbClr val="E8A857"/>
+                  <a:srgbClr val="C9C4D6"/>
                 </a:solidFill>
                 <a:latin typeface="Courier New" pitchFamily="34" charset="0"/>
                 <a:ea typeface="Courier New" pitchFamily="34" charset="-122"/>
@@ -9437,11 +9599,11 @@
             </a:avLst>
           </a:prstGeom>
           <a:solidFill>
-            <a:srgbClr val="12101A"/>
+            <a:srgbClr val="07060C"/>
           </a:solidFill>
           <a:ln w="12700">
             <a:solidFill>
-              <a:srgbClr val="2E2A3A"/>
+              <a:srgbClr val="5E4F85"/>
             </a:solidFill>
             <a:prstDash val="solid"/>
           </a:ln>
@@ -9477,7 +9639,7 @@
             <a:r>
               <a:rPr lang="en-US" sz="1200" dirty="0">
                 <a:solidFill>
-                  <a:srgbClr val="8A82A0"/>
+                  <a:srgbClr val="9A94AA"/>
                 </a:solidFill>
                 <a:latin typeface="Courier New" pitchFamily="34" charset="0"/>
                 <a:ea typeface="Courier New" pitchFamily="34" charset="-122"/>
@@ -9497,7 +9659,7 @@
             <a:r>
               <a:rPr lang="en-US" sz="1200" dirty="0">
                 <a:solidFill>
-                  <a:srgbClr val="C9A6FF"/>
+                  <a:srgbClr val="A98BFF"/>
                 </a:solidFill>
                 <a:latin typeface="Courier New" pitchFamily="34" charset="0"/>
                 <a:ea typeface="Courier New" pitchFamily="34" charset="-122"/>
@@ -9517,7 +9679,7 @@
             <a:r>
               <a:rPr lang="en-US" sz="1200" dirty="0">
                 <a:solidFill>
-                  <a:srgbClr val="C9A6FF"/>
+                  <a:srgbClr val="A98BFF"/>
                 </a:solidFill>
                 <a:latin typeface="Courier New" pitchFamily="34" charset="0"/>
                 <a:ea typeface="Courier New" pitchFamily="34" charset="-122"/>
@@ -9537,7 +9699,7 @@
             <a:r>
               <a:rPr lang="en-US" sz="1200" dirty="0">
                 <a:solidFill>
-                  <a:srgbClr val="F0B36B"/>
+                  <a:srgbClr val="C9C4D6"/>
                 </a:solidFill>
                 <a:latin typeface="Courier New" pitchFamily="34" charset="0"/>
                 <a:ea typeface="Courier New" pitchFamily="34" charset="-122"/>
@@ -9554,7 +9716,7 @@
             <a:r>
               <a:rPr lang="en-US" sz="1200" dirty="0">
                 <a:solidFill>
-                  <a:srgbClr val="8A82A0"/>
+                  <a:srgbClr val="9A94AA"/>
                 </a:solidFill>
                 <a:latin typeface="Courier New" pitchFamily="34" charset="0"/>
                 <a:ea typeface="Courier New" pitchFamily="34" charset="-122"/>
@@ -9583,9 +9745,14 @@
             </a:avLst>
           </a:prstGeom>
           <a:solidFill>
-            <a:srgbClr val="102A20"/>
+            <a:srgbClr val="06180F"/>
           </a:solidFill>
-          <a:ln/>
+          <a:ln w="12700">
+            <a:solidFill>
+              <a:srgbClr val="3FCF8E"/>
+            </a:solidFill>
+            <a:prstDash val="solid"/>
+          </a:ln>
         </p:spPr>
       </p:sp>
       <p:sp>
@@ -9615,7 +9782,7 @@
             <a:r>
               <a:rPr lang="en-US" sz="1450" b="1" dirty="0">
                 <a:solidFill>
-                  <a:srgbClr val="5FD6A0"/>
+                  <a:srgbClr val="3FCF8E"/>
                 </a:solidFill>
                 <a:latin typeface="Montserrat" pitchFamily="34" charset="0"/>
                 <a:ea typeface="Montserrat" pitchFamily="34" charset="-122"/>
@@ -9657,7 +9824,7 @@
             <a:r>
               <a:rPr lang="en-US" sz="1200" dirty="0">
                 <a:solidFill>
-                  <a:srgbClr val="FFFFFF"/>
+                  <a:srgbClr val="C9C4D6"/>
                 </a:solidFill>
                 <a:latin typeface="Montserrat" pitchFamily="34" charset="0"/>
                 <a:ea typeface="Montserrat" pitchFamily="34" charset="-122"/>
@@ -9686,9 +9853,14 @@
             </a:avLst>
           </a:prstGeom>
           <a:solidFill>
-            <a:srgbClr val="1C1140"/>
+            <a:srgbClr val="1A0B3D"/>
           </a:solidFill>
-          <a:ln/>
+          <a:ln w="12700">
+            <a:solidFill>
+              <a:srgbClr val="5A05F4"/>
+            </a:solidFill>
+            <a:prstDash val="solid"/>
+          </a:ln>
         </p:spPr>
       </p:sp>
       <p:sp>
@@ -9718,7 +9890,7 @@
             <a:r>
               <a:rPr lang="en-US" sz="1450" b="1" dirty="0">
                 <a:solidFill>
-                  <a:srgbClr val="C9A6FF"/>
+                  <a:srgbClr val="A98BFF"/>
                 </a:solidFill>
                 <a:latin typeface="Montserrat" pitchFamily="34" charset="0"/>
                 <a:ea typeface="Montserrat" pitchFamily="34" charset="-122"/>
@@ -9760,7 +9932,7 @@
             <a:r>
               <a:rPr lang="en-US" sz="1200" dirty="0">
                 <a:solidFill>
-                  <a:srgbClr val="FFFFFF"/>
+                  <a:srgbClr val="C9C4D6"/>
                 </a:solidFill>
                 <a:latin typeface="Montserrat" pitchFamily="34" charset="0"/>
                 <a:ea typeface="Montserrat" pitchFamily="34" charset="-122"/>
@@ -9789,9 +9961,14 @@
             </a:avLst>
           </a:prstGeom>
           <a:solidFill>
-            <a:srgbClr val="2A2010"/>
+            <a:srgbClr val="0B1A38"/>
           </a:solidFill>
-          <a:ln/>
+          <a:ln w="12700">
+            <a:solidFill>
+              <a:srgbClr val="6BA0F8"/>
+            </a:solidFill>
+            <a:prstDash val="solid"/>
+          </a:ln>
         </p:spPr>
       </p:sp>
       <p:sp>
@@ -9866,7 +10043,7 @@
             <a:lvl1pPr>
               <a:defRPr sz="850">
                 <a:solidFill>
-                  <a:srgbClr val="8A82A0"/>
+                  <a:srgbClr val="9A94AA"/>
                 </a:solidFill>
                 <a:latin typeface="Courier New"/>
                 <a:ea typeface="Courier New"/>
@@ -9936,7 +10113,7 @@
             <a:r>
               <a:rPr lang="en-US" sz="2600" b="1" dirty="0">
                 <a:solidFill>
-                  <a:srgbClr val="C9A6FF"/>
+                  <a:srgbClr val="A98BFF"/>
                 </a:solidFill>
                 <a:latin typeface="Courier New" pitchFamily="34" charset="0"/>
                 <a:ea typeface="Courier New" pitchFamily="34" charset="-122"/>
@@ -10004,9 +10181,14 @@
             </a:avLst>
           </a:prstGeom>
           <a:solidFill>
-            <a:srgbClr val="C9A6FF"/>
+            <a:srgbClr val="1A0B3D"/>
           </a:solidFill>
-          <a:ln/>
+          <a:ln w="12700">
+            <a:solidFill>
+              <a:srgbClr val="5A05F4"/>
+            </a:solidFill>
+            <a:prstDash val="solid"/>
+          </a:ln>
         </p:spPr>
       </p:sp>
       <p:sp>
@@ -10036,7 +10218,7 @@
             <a:r>
               <a:rPr lang="en-US" sz="900" b="1" spc="100" kern="0" dirty="0">
                 <a:solidFill>
-                  <a:srgbClr val="1C1140"/>
+                  <a:srgbClr val="A98BFF"/>
                 </a:solidFill>
                 <a:latin typeface="Courier New" pitchFamily="34" charset="0"/>
                 <a:ea typeface="Courier New" pitchFamily="34" charset="-122"/>
@@ -10065,9 +10247,14 @@
             </a:avLst>
           </a:prstGeom>
           <a:solidFill>
-            <a:srgbClr val="2A2010"/>
+            <a:srgbClr val="000000"/>
           </a:solidFill>
-          <a:ln/>
+          <a:ln w="12700">
+            <a:solidFill>
+              <a:srgbClr val="5E4F85"/>
+            </a:solidFill>
+            <a:prstDash val="solid"/>
+          </a:ln>
         </p:spPr>
       </p:sp>
       <p:sp>
@@ -10097,7 +10284,7 @@
             <a:r>
               <a:rPr lang="en-US" sz="900" b="1" spc="100" kern="0" dirty="0">
                 <a:solidFill>
-                  <a:srgbClr val="E8A857"/>
+                  <a:srgbClr val="C9C4D6"/>
                 </a:solidFill>
                 <a:latin typeface="Courier New" pitchFamily="34" charset="0"/>
                 <a:ea typeface="Courier New" pitchFamily="34" charset="-122"/>
@@ -10148,11 +10335,11 @@
             <a:avLst/>
           </a:prstGeom>
           <a:solidFill>
-            <a:srgbClr val="102A20"/>
+            <a:srgbClr val="06180F"/>
           </a:solidFill>
           <a:ln w="19050">
             <a:solidFill>
-              <a:srgbClr val="5FD6A0"/>
+              <a:srgbClr val="3FCF8E"/>
             </a:solidFill>
             <a:prstDash val="solid"/>
           </a:ln>
@@ -10185,7 +10372,7 @@
             <a:r>
               <a:rPr lang="en-US" sz="1050" b="1" dirty="0">
                 <a:solidFill>
-                  <a:srgbClr val="5FD6A0"/>
+                  <a:srgbClr val="3FCF8E"/>
                 </a:solidFill>
                 <a:latin typeface="Courier New" pitchFamily="34" charset="0"/>
                 <a:ea typeface="Courier New" pitchFamily="34" charset="-122"/>
@@ -10224,7 +10411,7 @@
             <a:r>
               <a:rPr lang="en-US" sz="1050" dirty="0">
                 <a:solidFill>
-                  <a:srgbClr val="AFA9BE"/>
+                  <a:srgbClr val="C9C4D6"/>
                 </a:solidFill>
                 <a:latin typeface="Montserrat" pitchFamily="34" charset="0"/>
                 <a:ea typeface="Montserrat" pitchFamily="34" charset="-122"/>
@@ -10253,7 +10440,7 @@
           <a:noFill/>
           <a:ln w="15875">
             <a:solidFill>
-              <a:srgbClr val="C9A6FF"/>
+              <a:srgbClr val="A98BFF"/>
             </a:solidFill>
             <a:prstDash val="solid"/>
           </a:ln>
@@ -10274,7 +10461,7 @@
             <a:avLst/>
           </a:prstGeom>
           <a:solidFill>
-            <a:srgbClr val="C9A6FF"/>
+            <a:srgbClr val="A98BFF"/>
           </a:solidFill>
           <a:ln/>
         </p:spPr>
@@ -10306,7 +10493,7 @@
             <a:r>
               <a:rPr lang="en-US" sz="950" dirty="0">
                 <a:solidFill>
-                  <a:srgbClr val="C9A6FF"/>
+                  <a:srgbClr val="A98BFF"/>
                 </a:solidFill>
                 <a:latin typeface="Courier New" pitchFamily="34" charset="0"/>
                 <a:ea typeface="Courier New" pitchFamily="34" charset="-122"/>
@@ -10333,11 +10520,11 @@
             <a:avLst/>
           </a:prstGeom>
           <a:solidFill>
-            <a:srgbClr val="2E1418"/>
+            <a:srgbClr val="1A0808"/>
           </a:solidFill>
           <a:ln w="19050">
             <a:solidFill>
-              <a:srgbClr val="FF7B7B"/>
+              <a:srgbClr val="FF6B6B"/>
             </a:solidFill>
             <a:prstDash val="solid"/>
           </a:ln>
@@ -10370,7 +10557,7 @@
             <a:r>
               <a:rPr lang="en-US" sz="1050" b="1" dirty="0">
                 <a:solidFill>
-                  <a:srgbClr val="FF7B7B"/>
+                  <a:srgbClr val="FF6B6B"/>
                 </a:solidFill>
                 <a:latin typeface="Courier New" pitchFamily="34" charset="0"/>
                 <a:ea typeface="Courier New" pitchFamily="34" charset="-122"/>
@@ -10409,7 +10596,7 @@
             <a:r>
               <a:rPr lang="en-US" sz="1050" dirty="0">
                 <a:solidFill>
-                  <a:srgbClr val="AFA9BE"/>
+                  <a:srgbClr val="C9C4D6"/>
                 </a:solidFill>
                 <a:latin typeface="Montserrat" pitchFamily="34" charset="0"/>
                 <a:ea typeface="Montserrat" pitchFamily="34" charset="-122"/>
@@ -10438,7 +10625,7 @@
           <a:noFill/>
           <a:ln w="15875">
             <a:solidFill>
-              <a:srgbClr val="C9A6FF"/>
+              <a:srgbClr val="A98BFF"/>
             </a:solidFill>
             <a:prstDash val="solid"/>
           </a:ln>
@@ -10459,7 +10646,7 @@
             <a:avLst/>
           </a:prstGeom>
           <a:solidFill>
-            <a:srgbClr val="C9A6FF"/>
+            <a:srgbClr val="A98BFF"/>
           </a:solidFill>
           <a:ln/>
         </p:spPr>
@@ -10491,7 +10678,7 @@
             <a:r>
               <a:rPr lang="en-US" sz="950" dirty="0">
                 <a:solidFill>
-                  <a:srgbClr val="C9A6FF"/>
+                  <a:srgbClr val="A98BFF"/>
                 </a:solidFill>
                 <a:latin typeface="Courier New" pitchFamily="34" charset="0"/>
                 <a:ea typeface="Courier New" pitchFamily="34" charset="-122"/>
@@ -10518,11 +10705,11 @@
             <a:avLst/>
           </a:prstGeom>
           <a:solidFill>
-            <a:srgbClr val="2A2010"/>
+            <a:srgbClr val="0B1A38"/>
           </a:solidFill>
           <a:ln w="19050">
             <a:solidFill>
-              <a:srgbClr val="E8A857"/>
+              <a:srgbClr val="6BA0F8"/>
             </a:solidFill>
             <a:prstDash val="solid"/>
           </a:ln>
@@ -10555,7 +10742,7 @@
             <a:r>
               <a:rPr lang="en-US" sz="1050" b="1" dirty="0">
                 <a:solidFill>
-                  <a:srgbClr val="E8A857"/>
+                  <a:srgbClr val="6BA0F8"/>
                 </a:solidFill>
                 <a:latin typeface="Courier New" pitchFamily="34" charset="0"/>
                 <a:ea typeface="Courier New" pitchFamily="34" charset="-122"/>
@@ -10594,7 +10781,7 @@
             <a:r>
               <a:rPr lang="en-US" sz="1050" dirty="0">
                 <a:solidFill>
-                  <a:srgbClr val="AFA9BE"/>
+                  <a:srgbClr val="C9C4D6"/>
                 </a:solidFill>
                 <a:latin typeface="Montserrat" pitchFamily="34" charset="0"/>
                 <a:ea typeface="Montserrat" pitchFamily="34" charset="-122"/>
@@ -10623,9 +10810,14 @@
             </a:avLst>
           </a:prstGeom>
           <a:solidFill>
-            <a:srgbClr val="2E1418"/>
+            <a:srgbClr val="1A0808"/>
           </a:solidFill>
-          <a:ln/>
+          <a:ln w="12700">
+            <a:solidFill>
+              <a:srgbClr val="FF6B6B"/>
+            </a:solidFill>
+            <a:prstDash val="solid"/>
+          </a:ln>
         </p:spPr>
       </p:sp>
       <p:sp>
@@ -10655,7 +10847,7 @@
             <a:r>
               <a:rPr lang="en-US" sz="950" b="1" spc="150" kern="0" dirty="0">
                 <a:solidFill>
-                  <a:srgbClr val="FF7B7B"/>
+                  <a:srgbClr val="FF6B6B"/>
                 </a:solidFill>
                 <a:latin typeface="Courier New" pitchFamily="34" charset="0"/>
                 <a:ea typeface="Courier New" pitchFamily="34" charset="-122"/>
@@ -10803,7 +10995,7 @@
             <a:lvl1pPr>
               <a:defRPr sz="850">
                 <a:solidFill>
-                  <a:srgbClr val="8A82A0"/>
+                  <a:srgbClr val="9A94AA"/>
                 </a:solidFill>
                 <a:latin typeface="Courier New"/>
                 <a:ea typeface="Courier New"/>
@@ -10873,7 +11065,7 @@
             <a:r>
               <a:rPr lang="en-US" sz="2600" b="1" dirty="0">
                 <a:solidFill>
-                  <a:srgbClr val="C9A6FF"/>
+                  <a:srgbClr val="A98BFF"/>
                 </a:solidFill>
                 <a:latin typeface="Courier New" pitchFamily="34" charset="0"/>
                 <a:ea typeface="Courier New" pitchFamily="34" charset="-122"/>
@@ -10941,9 +11133,14 @@
             </a:avLst>
           </a:prstGeom>
           <a:solidFill>
-            <a:srgbClr val="C9A6FF"/>
+            <a:srgbClr val="1A0B3D"/>
           </a:solidFill>
-          <a:ln/>
+          <a:ln w="12700">
+            <a:solidFill>
+              <a:srgbClr val="5A05F4"/>
+            </a:solidFill>
+            <a:prstDash val="solid"/>
+          </a:ln>
         </p:spPr>
       </p:sp>
       <p:sp>
@@ -10973,7 +11170,7 @@
             <a:r>
               <a:rPr lang="en-US" sz="900" b="1" spc="100" kern="0" dirty="0">
                 <a:solidFill>
-                  <a:srgbClr val="1C1140"/>
+                  <a:srgbClr val="A98BFF"/>
                 </a:solidFill>
                 <a:latin typeface="Courier New" pitchFamily="34" charset="0"/>
                 <a:ea typeface="Courier New" pitchFamily="34" charset="-122"/>
@@ -11026,9 +11223,14 @@
             </a:avLst>
           </a:prstGeom>
           <a:solidFill>
-            <a:srgbClr val="1C1140"/>
+            <a:srgbClr val="1A0B3D"/>
           </a:solidFill>
-          <a:ln/>
+          <a:ln w="12700">
+            <a:solidFill>
+              <a:srgbClr val="5A05F4"/>
+            </a:solidFill>
+            <a:prstDash val="solid"/>
+          </a:ln>
         </p:spPr>
       </p:sp>
       <p:sp>
@@ -11058,7 +11260,7 @@
             <a:r>
               <a:rPr lang="en-US" sz="1350" b="1" dirty="0">
                 <a:solidFill>
-                  <a:srgbClr val="C9A6FF"/>
+                  <a:srgbClr val="A98BFF"/>
                 </a:solidFill>
                 <a:latin typeface="Montserrat" pitchFamily="34" charset="0"/>
                 <a:ea typeface="Montserrat" pitchFamily="34" charset="-122"/>
@@ -11097,7 +11299,7 @@
             <a:r>
               <a:rPr lang="en-US" sz="1150" dirty="0">
                 <a:solidFill>
-                  <a:srgbClr val="FFFFFF"/>
+                  <a:srgbClr val="C9C4D6"/>
                 </a:solidFill>
                 <a:latin typeface="Montserrat" pitchFamily="34" charset="0"/>
                 <a:ea typeface="Montserrat" pitchFamily="34" charset="-122"/>
@@ -11126,11 +11328,11 @@
             </a:avLst>
           </a:prstGeom>
           <a:solidFill>
-            <a:srgbClr val="17141F"/>
+            <a:srgbClr val="000000"/>
           </a:solidFill>
           <a:ln w="12700">
             <a:solidFill>
-              <a:srgbClr val="2E2A3A"/>
+              <a:srgbClr val="5E4F85"/>
             </a:solidFill>
             <a:prstDash val="solid"/>
           </a:ln>
@@ -11202,7 +11404,7 @@
             <a:r>
               <a:rPr lang="en-US" sz="1150" dirty="0">
                 <a:solidFill>
-                  <a:srgbClr val="AFA9BE"/>
+                  <a:srgbClr val="C9C4D6"/>
                 </a:solidFill>
                 <a:latin typeface="Montserrat" pitchFamily="34" charset="0"/>
                 <a:ea typeface="Montserrat" pitchFamily="34" charset="-122"/>
@@ -11231,11 +11433,11 @@
             </a:avLst>
           </a:prstGeom>
           <a:solidFill>
-            <a:srgbClr val="17141F"/>
+            <a:srgbClr val="000000"/>
           </a:solidFill>
           <a:ln w="12700">
             <a:solidFill>
-              <a:srgbClr val="2E2A3A"/>
+              <a:srgbClr val="5E4F85"/>
             </a:solidFill>
             <a:prstDash val="solid"/>
           </a:ln>
@@ -11307,7 +11509,7 @@
             <a:r>
               <a:rPr lang="en-US" sz="1150" dirty="0">
                 <a:solidFill>
-                  <a:srgbClr val="AFA9BE"/>
+                  <a:srgbClr val="C9C4D6"/>
                 </a:solidFill>
                 <a:latin typeface="Montserrat" pitchFamily="34" charset="0"/>
                 <a:ea typeface="Montserrat" pitchFamily="34" charset="-122"/>
@@ -11336,9 +11538,14 @@
             </a:avLst>
           </a:prstGeom>
           <a:solidFill>
-            <a:srgbClr val="102A20"/>
+            <a:srgbClr val="06180F"/>
           </a:solidFill>
-          <a:ln/>
+          <a:ln w="12700">
+            <a:solidFill>
+              <a:srgbClr val="3FCF8E"/>
+            </a:solidFill>
+            <a:prstDash val="solid"/>
+          </a:ln>
         </p:spPr>
       </p:sp>
       <p:sp>
@@ -11400,11 +11607,11 @@
             </a:avLst>
           </a:prstGeom>
           <a:solidFill>
-            <a:srgbClr val="17141F"/>
+            <a:srgbClr val="000000"/>
           </a:solidFill>
           <a:ln w="12700">
             <a:solidFill>
-              <a:srgbClr val="2E2A3A"/>
+              <a:srgbClr val="5E4F85"/>
             </a:solidFill>
             <a:prstDash val="solid"/>
           </a:ln>
@@ -11482,7 +11689,7 @@
             <a:lvl1pPr>
               <a:defRPr sz="850">
                 <a:solidFill>
-                  <a:srgbClr val="8A82A0"/>
+                  <a:srgbClr val="9A94AA"/>
                 </a:solidFill>
                 <a:latin typeface="Courier New"/>
                 <a:ea typeface="Courier New"/>
@@ -11552,7 +11759,7 @@
             <a:r>
               <a:rPr lang="en-US" sz="2600" b="1" dirty="0">
                 <a:solidFill>
-                  <a:srgbClr val="C9A6FF"/>
+                  <a:srgbClr val="A98BFF"/>
                 </a:solidFill>
                 <a:latin typeface="Courier New" pitchFamily="34" charset="0"/>
                 <a:ea typeface="Courier New" pitchFamily="34" charset="-122"/>
@@ -11633,7 +11840,7 @@
             <a:r>
               <a:rPr lang="en-US" sz="1300" dirty="0">
                 <a:solidFill>
-                  <a:srgbClr val="AFA9BE"/>
+                  <a:srgbClr val="C9C4D6"/>
                 </a:solidFill>
                 <a:latin typeface="Montserrat" pitchFamily="34" charset="0"/>
                 <a:ea typeface="Montserrat" pitchFamily="34" charset="-122"/>
@@ -11662,9 +11869,14 @@
             </a:avLst>
           </a:prstGeom>
           <a:solidFill>
-            <a:srgbClr val="C9A6FF"/>
+            <a:srgbClr val="1A0B3D"/>
           </a:solidFill>
-          <a:ln/>
+          <a:ln w="12700">
+            <a:solidFill>
+              <a:srgbClr val="5A05F4"/>
+            </a:solidFill>
+            <a:prstDash val="solid"/>
+          </a:ln>
         </p:spPr>
       </p:sp>
       <p:sp>
@@ -11694,7 +11906,7 @@
             <a:r>
               <a:rPr lang="en-US" sz="900" b="1" spc="100" kern="0" dirty="0">
                 <a:solidFill>
-                  <a:srgbClr val="1C1140"/>
+                  <a:srgbClr val="A98BFF"/>
                 </a:solidFill>
                 <a:latin typeface="Courier New" pitchFamily="34" charset="0"/>
                 <a:ea typeface="Courier New" pitchFamily="34" charset="-122"/>
@@ -11747,9 +11959,14 @@
             </a:avLst>
           </a:prstGeom>
           <a:solidFill>
-            <a:srgbClr val="2A2010"/>
+            <a:srgbClr val="0B1A38"/>
           </a:solidFill>
-          <a:ln/>
+          <a:ln w="12700">
+            <a:solidFill>
+              <a:srgbClr val="6BA0F8"/>
+            </a:solidFill>
+            <a:prstDash val="solid"/>
+          </a:ln>
         </p:spPr>
       </p:sp>
       <p:sp>
@@ -11767,7 +11984,7 @@
             <a:avLst/>
           </a:prstGeom>
           <a:solidFill>
-            <a:srgbClr val="E8A857"/>
+            <a:srgbClr val="5A05F4"/>
           </a:solidFill>
           <a:ln/>
         </p:spPr>
@@ -11799,7 +12016,7 @@
             <a:r>
               <a:rPr lang="en-US" sz="1200" b="1" dirty="0">
                 <a:solidFill>
-                  <a:srgbClr val="2A2010"/>
+                  <a:srgbClr val="FFFFFF"/>
                 </a:solidFill>
                 <a:latin typeface="Courier New" pitchFamily="34" charset="0"/>
                 <a:ea typeface="Courier New" pitchFamily="34" charset="-122"/>
@@ -11838,7 +12055,7 @@
             <a:r>
               <a:rPr lang="en-US" sz="1450" b="1" dirty="0">
                 <a:solidFill>
-                  <a:srgbClr val="E8A857"/>
+                  <a:srgbClr val="6BA0F8"/>
                 </a:solidFill>
                 <a:latin typeface="Montserrat" pitchFamily="34" charset="0"/>
                 <a:ea typeface="Montserrat" pitchFamily="34" charset="-122"/>
@@ -11880,7 +12097,7 @@
             <a:r>
               <a:rPr lang="en-US" sz="1200" dirty="0">
                 <a:solidFill>
-                  <a:srgbClr val="FFFFFF"/>
+                  <a:srgbClr val="C9C4D6"/>
                 </a:solidFill>
                 <a:latin typeface="Montserrat" pitchFamily="34" charset="0"/>
                 <a:ea typeface="Montserrat" pitchFamily="34" charset="-122"/>
@@ -11909,9 +12126,14 @@
             </a:avLst>
           </a:prstGeom>
           <a:solidFill>
-            <a:srgbClr val="2A2010"/>
+            <a:srgbClr val="0B1A38"/>
           </a:solidFill>
-          <a:ln/>
+          <a:ln w="12700">
+            <a:solidFill>
+              <a:srgbClr val="6BA0F8"/>
+            </a:solidFill>
+            <a:prstDash val="solid"/>
+          </a:ln>
         </p:spPr>
       </p:sp>
       <p:sp>
@@ -11929,7 +12151,7 @@
             <a:avLst/>
           </a:prstGeom>
           <a:solidFill>
-            <a:srgbClr val="E8A857"/>
+            <a:srgbClr val="5A05F4"/>
           </a:solidFill>
           <a:ln/>
         </p:spPr>
@@ -11961,7 +12183,7 @@
             <a:r>
               <a:rPr lang="en-US" sz="1200" b="1" dirty="0">
                 <a:solidFill>
-                  <a:srgbClr val="2A2010"/>
+                  <a:srgbClr val="FFFFFF"/>
                 </a:solidFill>
                 <a:latin typeface="Courier New" pitchFamily="34" charset="0"/>
                 <a:ea typeface="Courier New" pitchFamily="34" charset="-122"/>
@@ -12000,7 +12222,7 @@
             <a:r>
               <a:rPr lang="en-US" sz="1450" b="1" dirty="0">
                 <a:solidFill>
-                  <a:srgbClr val="E8A857"/>
+                  <a:srgbClr val="6BA0F8"/>
                 </a:solidFill>
                 <a:latin typeface="Montserrat" pitchFamily="34" charset="0"/>
                 <a:ea typeface="Montserrat" pitchFamily="34" charset="-122"/>
@@ -12042,7 +12264,7 @@
             <a:r>
               <a:rPr lang="en-US" sz="1200" dirty="0">
                 <a:solidFill>
-                  <a:srgbClr val="FFFFFF"/>
+                  <a:srgbClr val="C9C4D6"/>
                 </a:solidFill>
                 <a:latin typeface="Montserrat" pitchFamily="34" charset="0"/>
                 <a:ea typeface="Montserrat" pitchFamily="34" charset="-122"/>
@@ -12071,9 +12293,14 @@
             </a:avLst>
           </a:prstGeom>
           <a:solidFill>
-            <a:srgbClr val="2E1418"/>
+            <a:srgbClr val="1A0808"/>
           </a:solidFill>
-          <a:ln/>
+          <a:ln w="12700">
+            <a:solidFill>
+              <a:srgbClr val="FF6B6B"/>
+            </a:solidFill>
+            <a:prstDash val="solid"/>
+          </a:ln>
         </p:spPr>
       </p:sp>
       <p:sp>
@@ -12135,9 +12362,14 @@
             </a:avLst>
           </a:prstGeom>
           <a:solidFill>
-            <a:srgbClr val="102A20"/>
+            <a:srgbClr val="06180F"/>
           </a:solidFill>
-          <a:ln/>
+          <a:ln w="12700">
+            <a:solidFill>
+              <a:srgbClr val="3FCF8E"/>
+            </a:solidFill>
+            <a:prstDash val="solid"/>
+          </a:ln>
         </p:spPr>
       </p:sp>
       <p:sp>
@@ -12167,7 +12399,7 @@
             <a:r>
               <a:rPr lang="en-US" sz="950" b="1" spc="150" kern="0" dirty="0">
                 <a:solidFill>
-                  <a:srgbClr val="5FD6A0"/>
+                  <a:srgbClr val="3FCF8E"/>
                 </a:solidFill>
                 <a:latin typeface="Courier New" pitchFamily="34" charset="0"/>
                 <a:ea typeface="Courier New" pitchFamily="34" charset="-122"/>
@@ -12251,7 +12483,7 @@
             <a:lvl1pPr>
               <a:defRPr sz="850">
                 <a:solidFill>
-                  <a:srgbClr val="8A82A0"/>
+                  <a:srgbClr val="9A94AA"/>
                 </a:solidFill>
                 <a:latin typeface="Courier New"/>
                 <a:ea typeface="Courier New"/>
@@ -12350,7 +12582,7 @@
             </a:avLst>
           </a:prstGeom>
           <a:solidFill>
-            <a:srgbClr val="5FD6A0"/>
+            <a:srgbClr val="5A05F4"/>
           </a:solidFill>
           <a:ln/>
         </p:spPr>
@@ -12382,7 +12614,7 @@
             <a:r>
               <a:rPr lang="en-US" sz="900" b="1" spc="100" kern="0" dirty="0">
                 <a:solidFill>
-                  <a:srgbClr val="102A20"/>
+                  <a:srgbClr val="FFFFFF"/>
                 </a:solidFill>
                 <a:latin typeface="Courier New" pitchFamily="34" charset="0"/>
                 <a:ea typeface="Courier New" pitchFamily="34" charset="-122"/>
@@ -12435,9 +12667,14 @@
             </a:avLst>
           </a:prstGeom>
           <a:solidFill>
-            <a:srgbClr val="102A20"/>
+            <a:srgbClr val="06180F"/>
           </a:solidFill>
-          <a:ln/>
+          <a:ln w="12700">
+            <a:solidFill>
+              <a:srgbClr val="3FCF8E"/>
+            </a:solidFill>
+            <a:prstDash val="solid"/>
+          </a:ln>
         </p:spPr>
       </p:sp>
       <p:sp>
@@ -12455,7 +12692,7 @@
             <a:avLst/>
           </a:prstGeom>
           <a:solidFill>
-            <a:srgbClr val="5FD6A0"/>
+            <a:srgbClr val="5A05F4"/>
           </a:solidFill>
           <a:ln/>
         </p:spPr>
@@ -12487,7 +12724,7 @@
             <a:r>
               <a:rPr lang="en-US" sz="1200" b="1" dirty="0">
                 <a:solidFill>
-                  <a:srgbClr val="102A20"/>
+                  <a:srgbClr val="FFFFFF"/>
                 </a:solidFill>
                 <a:latin typeface="Courier New" pitchFamily="34" charset="0"/>
                 <a:ea typeface="Courier New" pitchFamily="34" charset="-122"/>
@@ -12526,7 +12763,7 @@
             <a:r>
               <a:rPr lang="en-US" sz="1450" b="1" dirty="0">
                 <a:solidFill>
-                  <a:srgbClr val="5FD6A0"/>
+                  <a:srgbClr val="3FCF8E"/>
                 </a:solidFill>
                 <a:latin typeface="Montserrat" pitchFamily="34" charset="0"/>
                 <a:ea typeface="Montserrat" pitchFamily="34" charset="-122"/>
@@ -12568,7 +12805,7 @@
             <a:r>
               <a:rPr lang="en-US" sz="1200" dirty="0">
                 <a:solidFill>
-                  <a:srgbClr val="FFFFFF"/>
+                  <a:srgbClr val="C9C4D6"/>
                 </a:solidFill>
                 <a:latin typeface="Montserrat" pitchFamily="34" charset="0"/>
                 <a:ea typeface="Montserrat" pitchFamily="34" charset="-122"/>
@@ -12597,9 +12834,14 @@
             </a:avLst>
           </a:prstGeom>
           <a:solidFill>
-            <a:srgbClr val="102A20"/>
+            <a:srgbClr val="06180F"/>
           </a:solidFill>
-          <a:ln/>
+          <a:ln w="12700">
+            <a:solidFill>
+              <a:srgbClr val="3FCF8E"/>
+            </a:solidFill>
+            <a:prstDash val="solid"/>
+          </a:ln>
         </p:spPr>
       </p:sp>
       <p:sp>
@@ -12617,7 +12859,7 @@
             <a:avLst/>
           </a:prstGeom>
           <a:solidFill>
-            <a:srgbClr val="5FD6A0"/>
+            <a:srgbClr val="5A05F4"/>
           </a:solidFill>
           <a:ln/>
         </p:spPr>
@@ -12649,7 +12891,7 @@
             <a:r>
               <a:rPr lang="en-US" sz="1200" b="1" dirty="0">
                 <a:solidFill>
-                  <a:srgbClr val="102A20"/>
+                  <a:srgbClr val="FFFFFF"/>
                 </a:solidFill>
                 <a:latin typeface="Courier New" pitchFamily="34" charset="0"/>
                 <a:ea typeface="Courier New" pitchFamily="34" charset="-122"/>
@@ -12688,7 +12930,7 @@
             <a:r>
               <a:rPr lang="en-US" sz="1450" b="1" dirty="0">
                 <a:solidFill>
-                  <a:srgbClr val="5FD6A0"/>
+                  <a:srgbClr val="3FCF8E"/>
                 </a:solidFill>
                 <a:latin typeface="Montserrat" pitchFamily="34" charset="0"/>
                 <a:ea typeface="Montserrat" pitchFamily="34" charset="-122"/>
@@ -12730,7 +12972,7 @@
             <a:r>
               <a:rPr lang="en-US" sz="1200" dirty="0">
                 <a:solidFill>
-                  <a:srgbClr val="FFFFFF"/>
+                  <a:srgbClr val="C9C4D6"/>
                 </a:solidFill>
                 <a:latin typeface="Montserrat" pitchFamily="34" charset="0"/>
                 <a:ea typeface="Montserrat" pitchFamily="34" charset="-122"/>
@@ -12759,9 +13001,14 @@
             </a:avLst>
           </a:prstGeom>
           <a:solidFill>
-            <a:srgbClr val="2A2010"/>
+            <a:srgbClr val="0B1A38"/>
           </a:solidFill>
-          <a:ln/>
+          <a:ln w="12700">
+            <a:solidFill>
+              <a:srgbClr val="6BA0F8"/>
+            </a:solidFill>
+            <a:prstDash val="solid"/>
+          </a:ln>
         </p:spPr>
       </p:sp>
       <p:sp>
@@ -12779,7 +13026,7 @@
             <a:avLst/>
           </a:prstGeom>
           <a:solidFill>
-            <a:srgbClr val="E8A857"/>
+            <a:srgbClr val="5A05F4"/>
           </a:solidFill>
           <a:ln/>
         </p:spPr>
@@ -12811,7 +13058,7 @@
             <a:r>
               <a:rPr lang="en-US" sz="1200" b="1" dirty="0">
                 <a:solidFill>
-                  <a:srgbClr val="2A2010"/>
+                  <a:srgbClr val="FFFFFF"/>
                 </a:solidFill>
                 <a:latin typeface="Courier New" pitchFamily="34" charset="0"/>
                 <a:ea typeface="Courier New" pitchFamily="34" charset="-122"/>
@@ -12850,7 +13097,7 @@
             <a:r>
               <a:rPr lang="en-US" sz="1450" b="1" dirty="0">
                 <a:solidFill>
-                  <a:srgbClr val="E8A857"/>
+                  <a:srgbClr val="6BA0F8"/>
                 </a:solidFill>
                 <a:latin typeface="Montserrat" pitchFamily="34" charset="0"/>
                 <a:ea typeface="Montserrat" pitchFamily="34" charset="-122"/>
@@ -12892,7 +13139,7 @@
             <a:r>
               <a:rPr lang="en-US" sz="1200" dirty="0">
                 <a:solidFill>
-                  <a:srgbClr val="FFFFFF"/>
+                  <a:srgbClr val="C9C4D6"/>
                 </a:solidFill>
                 <a:latin typeface="Montserrat" pitchFamily="34" charset="0"/>
                 <a:ea typeface="Montserrat" pitchFamily="34" charset="-122"/>
@@ -12921,9 +13168,14 @@
             </a:avLst>
           </a:prstGeom>
           <a:solidFill>
-            <a:srgbClr val="2E1418"/>
+            <a:srgbClr val="1A0808"/>
           </a:solidFill>
-          <a:ln/>
+          <a:ln w="12700">
+            <a:solidFill>
+              <a:srgbClr val="FF6B6B"/>
+            </a:solidFill>
+            <a:prstDash val="solid"/>
+          </a:ln>
         </p:spPr>
       </p:sp>
       <p:sp>
@@ -12941,7 +13193,7 @@
             <a:avLst/>
           </a:prstGeom>
           <a:solidFill>
-            <a:srgbClr val="FF7B7B"/>
+            <a:srgbClr val="5A05F4"/>
           </a:solidFill>
           <a:ln/>
         </p:spPr>
@@ -12973,7 +13225,7 @@
             <a:r>
               <a:rPr lang="en-US" sz="1200" b="1" dirty="0">
                 <a:solidFill>
-                  <a:srgbClr val="2E1418"/>
+                  <a:srgbClr val="FFFFFF"/>
                 </a:solidFill>
                 <a:latin typeface="Courier New" pitchFamily="34" charset="0"/>
                 <a:ea typeface="Courier New" pitchFamily="34" charset="-122"/>
@@ -13012,7 +13264,7 @@
             <a:r>
               <a:rPr lang="en-US" sz="1450" b="1" dirty="0">
                 <a:solidFill>
-                  <a:srgbClr val="FF7B7B"/>
+                  <a:srgbClr val="FF6B6B"/>
                 </a:solidFill>
                 <a:latin typeface="Montserrat" pitchFamily="34" charset="0"/>
                 <a:ea typeface="Montserrat" pitchFamily="34" charset="-122"/>
@@ -13054,7 +13306,7 @@
             <a:r>
               <a:rPr lang="en-US" sz="1200" dirty="0">
                 <a:solidFill>
-                  <a:srgbClr val="FFFFFF"/>
+                  <a:srgbClr val="C9C4D6"/>
                 </a:solidFill>
                 <a:latin typeface="Montserrat" pitchFamily="34" charset="0"/>
                 <a:ea typeface="Montserrat" pitchFamily="34" charset="-122"/>
@@ -13083,9 +13335,14 @@
             </a:avLst>
           </a:prstGeom>
           <a:solidFill>
-            <a:srgbClr val="2A2010"/>
+            <a:srgbClr val="0B1A38"/>
           </a:solidFill>
-          <a:ln/>
+          <a:ln w="12700">
+            <a:solidFill>
+              <a:srgbClr val="6BA0F8"/>
+            </a:solidFill>
+            <a:prstDash val="solid"/>
+          </a:ln>
         </p:spPr>
       </p:sp>
       <p:sp>
@@ -13103,7 +13360,7 @@
             <a:avLst/>
           </a:prstGeom>
           <a:solidFill>
-            <a:srgbClr val="E8A857"/>
+            <a:srgbClr val="5A05F4"/>
           </a:solidFill>
           <a:ln/>
         </p:spPr>
@@ -13135,7 +13392,7 @@
             <a:r>
               <a:rPr lang="en-US" sz="1200" b="1" dirty="0">
                 <a:solidFill>
-                  <a:srgbClr val="2A2010"/>
+                  <a:srgbClr val="FFFFFF"/>
                 </a:solidFill>
                 <a:latin typeface="Courier New" pitchFamily="34" charset="0"/>
                 <a:ea typeface="Courier New" pitchFamily="34" charset="-122"/>
@@ -13174,7 +13431,7 @@
             <a:r>
               <a:rPr lang="en-US" sz="1450" b="1" dirty="0">
                 <a:solidFill>
-                  <a:srgbClr val="E8A857"/>
+                  <a:srgbClr val="6BA0F8"/>
                 </a:solidFill>
                 <a:latin typeface="Montserrat" pitchFamily="34" charset="0"/>
                 <a:ea typeface="Montserrat" pitchFamily="34" charset="-122"/>
@@ -13216,7 +13473,7 @@
             <a:r>
               <a:rPr lang="en-US" sz="1200" dirty="0">
                 <a:solidFill>
-                  <a:srgbClr val="FFFFFF"/>
+                  <a:srgbClr val="C9C4D6"/>
                 </a:solidFill>
                 <a:latin typeface="Montserrat" pitchFamily="34" charset="0"/>
                 <a:ea typeface="Montserrat" pitchFamily="34" charset="-122"/>
@@ -13361,7 +13618,7 @@
             <a:lvl1pPr>
               <a:defRPr sz="850">
                 <a:solidFill>
-                  <a:srgbClr val="8A82A0"/>
+                  <a:srgbClr val="9A94AA"/>
                 </a:solidFill>
                 <a:latin typeface="Courier New"/>
                 <a:ea typeface="Courier New"/>
@@ -13473,7 +13730,7 @@
             <a:r>
               <a:rPr lang="en-US" sz="1300" dirty="0">
                 <a:solidFill>
-                  <a:srgbClr val="AFA9BE"/>
+                  <a:srgbClr val="C9C4D6"/>
                 </a:solidFill>
                 <a:latin typeface="Montserrat" pitchFamily="34" charset="0"/>
                 <a:ea typeface="Montserrat" pitchFamily="34" charset="-122"/>
@@ -13502,9 +13759,14 @@
             </a:avLst>
           </a:prstGeom>
           <a:solidFill>
-            <a:srgbClr val="C9A6FF"/>
+            <a:srgbClr val="1A0B3D"/>
           </a:solidFill>
-          <a:ln/>
+          <a:ln w="12700">
+            <a:solidFill>
+              <a:srgbClr val="5A05F4"/>
+            </a:solidFill>
+            <a:prstDash val="solid"/>
+          </a:ln>
         </p:spPr>
       </p:sp>
       <p:sp>
@@ -13534,7 +13796,7 @@
             <a:r>
               <a:rPr lang="en-US" sz="900" b="1" spc="100" kern="0" dirty="0">
                 <a:solidFill>
-                  <a:srgbClr val="1C1140"/>
+                  <a:srgbClr val="A98BFF"/>
                 </a:solidFill>
                 <a:latin typeface="Courier New" pitchFamily="34" charset="0"/>
                 <a:ea typeface="Courier New" pitchFamily="34" charset="-122"/>
@@ -13587,11 +13849,11 @@
             </a:avLst>
           </a:prstGeom>
           <a:solidFill>
-            <a:srgbClr val="17141F"/>
+            <a:srgbClr val="000000"/>
           </a:solidFill>
           <a:ln w="12700">
             <a:solidFill>
-              <a:srgbClr val="2E2A3A"/>
+              <a:srgbClr val="5E4F85"/>
             </a:solidFill>
             <a:prstDash val="solid"/>
           </a:ln>
@@ -13725,7 +13987,7 @@
             <a:r>
               <a:rPr lang="en-US" sz="1200" dirty="0">
                 <a:solidFill>
-                  <a:srgbClr val="AFA9BE"/>
+                  <a:srgbClr val="C9C4D6"/>
                 </a:solidFill>
                 <a:latin typeface="Montserrat" pitchFamily="34" charset="0"/>
                 <a:ea typeface="Montserrat" pitchFamily="34" charset="-122"/>
@@ -13754,11 +14016,11 @@
             </a:avLst>
           </a:prstGeom>
           <a:solidFill>
-            <a:srgbClr val="17141F"/>
+            <a:srgbClr val="000000"/>
           </a:solidFill>
           <a:ln w="12700">
             <a:solidFill>
-              <a:srgbClr val="2E2A3A"/>
+              <a:srgbClr val="5E4F85"/>
             </a:solidFill>
             <a:prstDash val="solid"/>
           </a:ln>
@@ -13892,7 +14154,7 @@
             <a:r>
               <a:rPr lang="en-US" sz="1200" dirty="0">
                 <a:solidFill>
-                  <a:srgbClr val="AFA9BE"/>
+                  <a:srgbClr val="C9C4D6"/>
                 </a:solidFill>
                 <a:latin typeface="Montserrat" pitchFamily="34" charset="0"/>
                 <a:ea typeface="Montserrat" pitchFamily="34" charset="-122"/>
@@ -13921,11 +14183,11 @@
             </a:avLst>
           </a:prstGeom>
           <a:solidFill>
-            <a:srgbClr val="17141F"/>
+            <a:srgbClr val="000000"/>
           </a:solidFill>
           <a:ln w="12700">
             <a:solidFill>
-              <a:srgbClr val="2E2A3A"/>
+              <a:srgbClr val="5E4F85"/>
             </a:solidFill>
             <a:prstDash val="solid"/>
           </a:ln>
@@ -14059,7 +14321,7 @@
             <a:r>
               <a:rPr lang="en-US" sz="1200" dirty="0">
                 <a:solidFill>
-                  <a:srgbClr val="AFA9BE"/>
+                  <a:srgbClr val="C9C4D6"/>
                 </a:solidFill>
                 <a:latin typeface="Montserrat" pitchFamily="34" charset="0"/>
                 <a:ea typeface="Montserrat" pitchFamily="34" charset="-122"/>
@@ -14088,11 +14350,11 @@
             </a:avLst>
           </a:prstGeom>
           <a:solidFill>
-            <a:srgbClr val="17141F"/>
+            <a:srgbClr val="000000"/>
           </a:solidFill>
           <a:ln w="12700">
             <a:solidFill>
-              <a:srgbClr val="2E2A3A"/>
+              <a:srgbClr val="5E4F85"/>
             </a:solidFill>
             <a:prstDash val="solid"/>
           </a:ln>
@@ -14226,7 +14488,7 @@
             <a:r>
               <a:rPr lang="en-US" sz="1200" dirty="0">
                 <a:solidFill>
-                  <a:srgbClr val="AFA9BE"/>
+                  <a:srgbClr val="C9C4D6"/>
                 </a:solidFill>
                 <a:latin typeface="Montserrat" pitchFamily="34" charset="0"/>
                 <a:ea typeface="Montserrat" pitchFamily="34" charset="-122"/>
@@ -14255,9 +14517,14 @@
             </a:avLst>
           </a:prstGeom>
           <a:solidFill>
-            <a:srgbClr val="2A2010"/>
+            <a:srgbClr val="0B1A38"/>
           </a:solidFill>
-          <a:ln/>
+          <a:ln w="12700">
+            <a:solidFill>
+              <a:srgbClr val="6BA0F8"/>
+            </a:solidFill>
+            <a:prstDash val="solid"/>
+          </a:ln>
         </p:spPr>
       </p:sp>
       <p:sp>
@@ -14275,7 +14542,7 @@
             <a:avLst/>
           </a:prstGeom>
           <a:solidFill>
-            <a:srgbClr val="E8A857"/>
+            <a:srgbClr val="5A05F4"/>
           </a:solidFill>
           <a:ln/>
         </p:spPr>
@@ -14307,7 +14574,7 @@
             <a:r>
               <a:rPr lang="en-US" sz="1200" b="1" dirty="0">
                 <a:solidFill>
-                  <a:srgbClr val="2A2010"/>
+                  <a:srgbClr val="FFFFFF"/>
                 </a:solidFill>
                 <a:latin typeface="Courier New" pitchFamily="34" charset="0"/>
                 <a:ea typeface="Courier New" pitchFamily="34" charset="-122"/>
@@ -14346,7 +14613,7 @@
             <a:r>
               <a:rPr lang="en-US" sz="1450" b="1" dirty="0">
                 <a:solidFill>
-                  <a:srgbClr val="E8A857"/>
+                  <a:srgbClr val="6BA0F8"/>
                 </a:solidFill>
                 <a:latin typeface="Montserrat" pitchFamily="34" charset="0"/>
                 <a:ea typeface="Montserrat" pitchFamily="34" charset="-122"/>
@@ -14388,7 +14655,7 @@
             <a:r>
               <a:rPr lang="en-US" sz="1200" dirty="0">
                 <a:solidFill>
-                  <a:srgbClr val="FFFFFF"/>
+                  <a:srgbClr val="C9C4D6"/>
                 </a:solidFill>
                 <a:latin typeface="Montserrat" pitchFamily="34" charset="0"/>
                 <a:ea typeface="Montserrat" pitchFamily="34" charset="-122"/>
@@ -14430,7 +14697,7 @@
             <a:lvl1pPr>
               <a:defRPr sz="850">
                 <a:solidFill>
-                  <a:srgbClr val="8A82A0"/>
+                  <a:srgbClr val="9A94AA"/>
                 </a:solidFill>
                 <a:latin typeface="Courier New"/>
                 <a:ea typeface="Courier New"/>
@@ -14529,7 +14796,7 @@
             </a:avLst>
           </a:prstGeom>
           <a:solidFill>
-            <a:srgbClr val="5FD6A0"/>
+            <a:srgbClr val="5A05F4"/>
           </a:solidFill>
           <a:ln/>
         </p:spPr>
@@ -14561,7 +14828,7 @@
             <a:r>
               <a:rPr lang="en-US" sz="900" b="1" spc="100" kern="0" dirty="0">
                 <a:solidFill>
-                  <a:srgbClr val="102A20"/>
+                  <a:srgbClr val="FFFFFF"/>
                 </a:solidFill>
                 <a:latin typeface="Courier New" pitchFamily="34" charset="0"/>
                 <a:ea typeface="Courier New" pitchFamily="34" charset="-122"/>
@@ -14612,7 +14879,7 @@
             <a:avLst/>
           </a:prstGeom>
           <a:solidFill>
-            <a:srgbClr val="C9A6FF"/>
+            <a:srgbClr val="A98BFF"/>
           </a:solidFill>
           <a:ln/>
         </p:spPr>
@@ -14644,7 +14911,7 @@
             <a:r>
               <a:rPr lang="en-US" sz="1300" b="1" dirty="0">
                 <a:solidFill>
-                  <a:srgbClr val="1C1140"/>
+                  <a:srgbClr val="1A0B3D"/>
                 </a:solidFill>
                 <a:latin typeface="Courier New" pitchFamily="34" charset="0"/>
                 <a:ea typeface="Courier New" pitchFamily="34" charset="-122"/>
@@ -14697,7 +14964,7 @@
             <a:r>
               <a:rPr lang="en-US" sz="1200" dirty="0">
                 <a:solidFill>
-                  <a:srgbClr val="AFA9BE"/>
+                  <a:srgbClr val="C9C4D6"/>
                 </a:solidFill>
                 <a:latin typeface="Montserrat" pitchFamily="34" charset="0"/>
                 <a:ea typeface="Montserrat" pitchFamily="34" charset="-122"/>
@@ -14724,7 +14991,7 @@
             <a:avLst/>
           </a:prstGeom>
           <a:solidFill>
-            <a:srgbClr val="C9A6FF"/>
+            <a:srgbClr val="A98BFF"/>
           </a:solidFill>
           <a:ln/>
         </p:spPr>
@@ -14756,7 +15023,7 @@
             <a:r>
               <a:rPr lang="en-US" sz="1300" b="1" dirty="0">
                 <a:solidFill>
-                  <a:srgbClr val="1C1140"/>
+                  <a:srgbClr val="1A0B3D"/>
                 </a:solidFill>
                 <a:latin typeface="Courier New" pitchFamily="34" charset="0"/>
                 <a:ea typeface="Courier New" pitchFamily="34" charset="-122"/>
@@ -14809,7 +15076,7 @@
             <a:r>
               <a:rPr lang="en-US" sz="1200" dirty="0">
                 <a:solidFill>
-                  <a:srgbClr val="AFA9BE"/>
+                  <a:srgbClr val="C9C4D6"/>
                 </a:solidFill>
                 <a:latin typeface="Montserrat" pitchFamily="34" charset="0"/>
                 <a:ea typeface="Montserrat" pitchFamily="34" charset="-122"/>
@@ -14836,7 +15103,7 @@
             <a:avLst/>
           </a:prstGeom>
           <a:solidFill>
-            <a:srgbClr val="C9A6FF"/>
+            <a:srgbClr val="A98BFF"/>
           </a:solidFill>
           <a:ln/>
         </p:spPr>
@@ -14868,7 +15135,7 @@
             <a:r>
               <a:rPr lang="en-US" sz="1300" b="1" dirty="0">
                 <a:solidFill>
-                  <a:srgbClr val="1C1140"/>
+                  <a:srgbClr val="1A0B3D"/>
                 </a:solidFill>
                 <a:latin typeface="Courier New" pitchFamily="34" charset="0"/>
                 <a:ea typeface="Courier New" pitchFamily="34" charset="-122"/>
@@ -14921,7 +15188,7 @@
             <a:r>
               <a:rPr lang="en-US" sz="1200" dirty="0">
                 <a:solidFill>
-                  <a:srgbClr val="AFA9BE"/>
+                  <a:srgbClr val="C9C4D6"/>
                 </a:solidFill>
                 <a:latin typeface="Montserrat" pitchFamily="34" charset="0"/>
                 <a:ea typeface="Montserrat" pitchFamily="34" charset="-122"/>
@@ -14948,7 +15215,7 @@
             <a:avLst/>
           </a:prstGeom>
           <a:solidFill>
-            <a:srgbClr val="E8A857"/>
+            <a:srgbClr val="6BA0F8"/>
           </a:solidFill>
           <a:ln/>
         </p:spPr>
@@ -14980,7 +15247,7 @@
             <a:r>
               <a:rPr lang="en-US" sz="1300" b="1" dirty="0">
                 <a:solidFill>
-                  <a:srgbClr val="2A2010"/>
+                  <a:srgbClr val="0B1A38"/>
                 </a:solidFill>
                 <a:latin typeface="Courier New" pitchFamily="34" charset="0"/>
                 <a:ea typeface="Courier New" pitchFamily="34" charset="-122"/>
@@ -15019,7 +15286,7 @@
             <a:r>
               <a:rPr lang="en-US" sz="1400" b="1" dirty="0">
                 <a:solidFill>
-                  <a:srgbClr val="E8A857"/>
+                  <a:srgbClr val="6BA0F8"/>
                 </a:solidFill>
                 <a:latin typeface="Montserrat" pitchFamily="34" charset="0"/>
                 <a:ea typeface="Montserrat" pitchFamily="34" charset="-122"/>
@@ -15033,7 +15300,7 @@
             <a:r>
               <a:rPr lang="en-US" sz="1200" dirty="0">
                 <a:solidFill>
-                  <a:srgbClr val="AFA9BE"/>
+                  <a:srgbClr val="C9C4D6"/>
                 </a:solidFill>
                 <a:latin typeface="Montserrat" pitchFamily="34" charset="0"/>
                 <a:ea typeface="Montserrat" pitchFamily="34" charset="-122"/>
@@ -15075,7 +15342,7 @@
             <a:lvl1pPr>
               <a:defRPr sz="850">
                 <a:solidFill>
-                  <a:srgbClr val="8A82A0"/>
+                  <a:srgbClr val="9A94AA"/>
                 </a:solidFill>
                 <a:latin typeface="Courier New"/>
                 <a:ea typeface="Courier New"/>
@@ -15174,9 +15441,14 @@
             </a:avLst>
           </a:prstGeom>
           <a:solidFill>
-            <a:srgbClr val="E8A857"/>
+            <a:srgbClr val="0B1A38"/>
           </a:solidFill>
-          <a:ln/>
+          <a:ln w="12700">
+            <a:solidFill>
+              <a:srgbClr val="6BA0F8"/>
+            </a:solidFill>
+            <a:prstDash val="solid"/>
+          </a:ln>
         </p:spPr>
       </p:sp>
       <p:sp>
@@ -15206,7 +15478,7 @@
             <a:r>
               <a:rPr lang="en-US" sz="900" b="1" spc="100" kern="0" dirty="0">
                 <a:solidFill>
-                  <a:srgbClr val="2A2010"/>
+                  <a:srgbClr val="6BA0F8"/>
                 </a:solidFill>
                 <a:latin typeface="Courier New" pitchFamily="34" charset="0"/>
                 <a:ea typeface="Courier New" pitchFamily="34" charset="-122"/>
@@ -15259,9 +15531,14 @@
             </a:avLst>
           </a:prstGeom>
           <a:solidFill>
-            <a:srgbClr val="102A20"/>
+            <a:srgbClr val="06180F"/>
           </a:solidFill>
-          <a:ln/>
+          <a:ln w="12700">
+            <a:solidFill>
+              <a:srgbClr val="3FCF8E"/>
+            </a:solidFill>
+            <a:prstDash val="solid"/>
+          </a:ln>
         </p:spPr>
       </p:sp>
       <p:sp>
@@ -15291,7 +15568,7 @@
             <a:r>
               <a:rPr lang="en-US" sz="1450" b="1" dirty="0">
                 <a:solidFill>
-                  <a:srgbClr val="5FD6A0"/>
+                  <a:srgbClr val="3FCF8E"/>
                 </a:solidFill>
                 <a:latin typeface="Montserrat" pitchFamily="34" charset="0"/>
                 <a:ea typeface="Montserrat" pitchFamily="34" charset="-122"/>
@@ -15333,7 +15610,7 @@
             <a:r>
               <a:rPr lang="en-US" sz="1200" dirty="0">
                 <a:solidFill>
-                  <a:srgbClr val="FFFFFF"/>
+                  <a:srgbClr val="C9C4D6"/>
                 </a:solidFill>
                 <a:latin typeface="Montserrat" pitchFamily="34" charset="0"/>
                 <a:ea typeface="Montserrat" pitchFamily="34" charset="-122"/>
@@ -15362,9 +15639,14 @@
             </a:avLst>
           </a:prstGeom>
           <a:solidFill>
-            <a:srgbClr val="1C1140"/>
+            <a:srgbClr val="1A0B3D"/>
           </a:solidFill>
-          <a:ln/>
+          <a:ln w="12700">
+            <a:solidFill>
+              <a:srgbClr val="5A05F4"/>
+            </a:solidFill>
+            <a:prstDash val="solid"/>
+          </a:ln>
         </p:spPr>
       </p:sp>
       <p:sp>
@@ -15394,7 +15676,7 @@
             <a:r>
               <a:rPr lang="en-US" sz="1450" b="1" dirty="0">
                 <a:solidFill>
-                  <a:srgbClr val="C9A6FF"/>
+                  <a:srgbClr val="A98BFF"/>
                 </a:solidFill>
                 <a:latin typeface="Montserrat" pitchFamily="34" charset="0"/>
                 <a:ea typeface="Montserrat" pitchFamily="34" charset="-122"/>
@@ -15436,7 +15718,7 @@
             <a:r>
               <a:rPr lang="en-US" sz="1200" dirty="0">
                 <a:solidFill>
-                  <a:srgbClr val="FFFFFF"/>
+                  <a:srgbClr val="C9C4D6"/>
                 </a:solidFill>
                 <a:latin typeface="Montserrat" pitchFamily="34" charset="0"/>
                 <a:ea typeface="Montserrat" pitchFamily="34" charset="-122"/>
@@ -15465,11 +15747,11 @@
             </a:avLst>
           </a:prstGeom>
           <a:solidFill>
-            <a:srgbClr val="17141F"/>
+            <a:srgbClr val="000000"/>
           </a:solidFill>
           <a:ln w="12700">
             <a:solidFill>
-              <a:srgbClr val="2E2A3A"/>
+              <a:srgbClr val="5E4F85"/>
             </a:solidFill>
             <a:prstDash val="solid"/>
           </a:ln>
@@ -15544,7 +15826,7 @@
             <a:r>
               <a:rPr lang="en-US" sz="1200" dirty="0">
                 <a:solidFill>
-                  <a:srgbClr val="AFA9BE"/>
+                  <a:srgbClr val="C9C4D6"/>
                 </a:solidFill>
                 <a:latin typeface="Montserrat" pitchFamily="34" charset="0"/>
                 <a:ea typeface="Montserrat" pitchFamily="34" charset="-122"/>
@@ -15573,9 +15855,14 @@
             </a:avLst>
           </a:prstGeom>
           <a:solidFill>
-            <a:srgbClr val="2A2010"/>
+            <a:srgbClr val="0B1A38"/>
           </a:solidFill>
-          <a:ln/>
+          <a:ln w="12700">
+            <a:solidFill>
+              <a:srgbClr val="6BA0F8"/>
+            </a:solidFill>
+            <a:prstDash val="solid"/>
+          </a:ln>
         </p:spPr>
       </p:sp>
       <p:sp>
@@ -15605,7 +15892,7 @@
             <a:r>
               <a:rPr lang="en-US" sz="950" b="1" spc="150" kern="0" dirty="0">
                 <a:solidFill>
-                  <a:srgbClr val="E8A857"/>
+                  <a:srgbClr val="6BA0F8"/>
                 </a:solidFill>
                 <a:latin typeface="Courier New" pitchFamily="34" charset="0"/>
                 <a:ea typeface="Courier New" pitchFamily="34" charset="-122"/>
@@ -15689,7 +15976,7 @@
             <a:lvl1pPr>
               <a:defRPr sz="850">
                 <a:solidFill>
-                  <a:srgbClr val="8A82A0"/>
+                  <a:srgbClr val="9A94AA"/>
                 </a:solidFill>
                 <a:latin typeface="Courier New"/>
                 <a:ea typeface="Courier New"/>
@@ -15788,9 +16075,14 @@
             </a:avLst>
           </a:prstGeom>
           <a:solidFill>
-            <a:srgbClr val="E8A857"/>
+            <a:srgbClr val="0B1A38"/>
           </a:solidFill>
-          <a:ln/>
+          <a:ln w="12700">
+            <a:solidFill>
+              <a:srgbClr val="6BA0F8"/>
+            </a:solidFill>
+            <a:prstDash val="solid"/>
+          </a:ln>
         </p:spPr>
       </p:sp>
       <p:sp>
@@ -15820,7 +16112,7 @@
             <a:r>
               <a:rPr lang="en-US" sz="900" b="1" spc="100" kern="0" dirty="0">
                 <a:solidFill>
-                  <a:srgbClr val="2A2010"/>
+                  <a:srgbClr val="6BA0F8"/>
                 </a:solidFill>
                 <a:latin typeface="Courier New" pitchFamily="34" charset="0"/>
                 <a:ea typeface="Courier New" pitchFamily="34" charset="-122"/>
@@ -15873,11 +16165,11 @@
             </a:avLst>
           </a:prstGeom>
           <a:solidFill>
-            <a:srgbClr val="17141F"/>
+            <a:srgbClr val="000000"/>
           </a:solidFill>
           <a:ln w="12700">
             <a:solidFill>
-              <a:srgbClr val="2E2A3A"/>
+              <a:srgbClr val="5E4F85"/>
             </a:solidFill>
             <a:prstDash val="solid"/>
           </a:ln>
@@ -15900,11 +16192,11 @@
             </a:avLst>
           </a:prstGeom>
           <a:solidFill>
-            <a:srgbClr val="1C1140"/>
+            <a:srgbClr val="1A0B3D"/>
           </a:solidFill>
           <a:ln w="12700">
             <a:solidFill>
-              <a:srgbClr val="C9A6FF"/>
+              <a:srgbClr val="A98BFF"/>
             </a:solidFill>
             <a:prstDash val="solid"/>
           </a:ln>
@@ -15925,7 +16217,7 @@
             <a:avLst/>
           </a:prstGeom>
           <a:solidFill>
-            <a:srgbClr val="C9A6FF"/>
+            <a:srgbClr val="A98BFF"/>
           </a:solidFill>
           <a:ln/>
         </p:spPr>
@@ -15945,7 +16237,7 @@
             <a:avLst/>
           </a:prstGeom>
           <a:solidFill>
-            <a:srgbClr val="C9A6FF"/>
+            <a:srgbClr val="A98BFF"/>
           </a:solidFill>
           <a:ln/>
         </p:spPr>
@@ -16006,11 +16298,11 @@
             </a:avLst>
           </a:prstGeom>
           <a:solidFill>
-            <a:srgbClr val="1C1140"/>
+            <a:srgbClr val="1A0B3D"/>
           </a:solidFill>
           <a:ln w="12700">
             <a:solidFill>
-              <a:srgbClr val="C9A6FF"/>
+              <a:srgbClr val="A98BFF"/>
             </a:solidFill>
             <a:prstDash val="solid"/>
           </a:ln>
@@ -16031,7 +16323,7 @@
             <a:avLst/>
           </a:prstGeom>
           <a:solidFill>
-            <a:srgbClr val="C9A6FF"/>
+            <a:srgbClr val="A98BFF"/>
           </a:solidFill>
           <a:ln/>
         </p:spPr>
@@ -16051,7 +16343,7 @@
             <a:avLst/>
           </a:prstGeom>
           <a:solidFill>
-            <a:srgbClr val="C9A6FF"/>
+            <a:srgbClr val="A98BFF"/>
           </a:solidFill>
           <a:ln/>
         </p:spPr>
@@ -16112,11 +16404,11 @@
             </a:avLst>
           </a:prstGeom>
           <a:solidFill>
-            <a:srgbClr val="1C1140"/>
+            <a:srgbClr val="1A0B3D"/>
           </a:solidFill>
           <a:ln w="12700">
             <a:solidFill>
-              <a:srgbClr val="C9A6FF"/>
+              <a:srgbClr val="A98BFF"/>
             </a:solidFill>
             <a:prstDash val="solid"/>
           </a:ln>
@@ -16137,7 +16429,7 @@
             <a:avLst/>
           </a:prstGeom>
           <a:solidFill>
-            <a:srgbClr val="C9A6FF"/>
+            <a:srgbClr val="A98BFF"/>
           </a:solidFill>
           <a:ln/>
         </p:spPr>
@@ -16157,7 +16449,7 @@
             <a:avLst/>
           </a:prstGeom>
           <a:solidFill>
-            <a:srgbClr val="C9A6FF"/>
+            <a:srgbClr val="A98BFF"/>
           </a:solidFill>
           <a:ln/>
         </p:spPr>
@@ -16218,11 +16510,11 @@
             </a:avLst>
           </a:prstGeom>
           <a:solidFill>
-            <a:srgbClr val="1C1140"/>
+            <a:srgbClr val="1A0B3D"/>
           </a:solidFill>
           <a:ln w="12700">
             <a:solidFill>
-              <a:srgbClr val="C9A6FF"/>
+              <a:srgbClr val="A98BFF"/>
             </a:solidFill>
             <a:prstDash val="solid"/>
           </a:ln>
@@ -16243,7 +16535,7 @@
             <a:avLst/>
           </a:prstGeom>
           <a:solidFill>
-            <a:srgbClr val="C9A6FF"/>
+            <a:srgbClr val="A98BFF"/>
           </a:solidFill>
           <a:ln/>
         </p:spPr>
@@ -16263,7 +16555,7 @@
             <a:avLst/>
           </a:prstGeom>
           <a:solidFill>
-            <a:srgbClr val="C9A6FF"/>
+            <a:srgbClr val="A98BFF"/>
           </a:solidFill>
           <a:ln/>
         </p:spPr>
@@ -16334,7 +16626,7 @@
             <a:r>
               <a:rPr lang="en-US" sz="1200" i="1" dirty="0">
                 <a:solidFill>
-                  <a:srgbClr val="8A82A0"/>
+                  <a:srgbClr val="9A94AA"/>
                 </a:solidFill>
                 <a:latin typeface="Montserrat" pitchFamily="34" charset="0"/>
                 <a:ea typeface="Montserrat" pitchFamily="34" charset="-122"/>
@@ -16376,7 +16668,7 @@
             <a:lvl1pPr>
               <a:defRPr sz="850">
                 <a:solidFill>
-                  <a:srgbClr val="8A82A0"/>
+                  <a:srgbClr val="9A94AA"/>
                 </a:solidFill>
                 <a:latin typeface="Courier New"/>
                 <a:ea typeface="Courier New"/>
@@ -16475,9 +16767,14 @@
             </a:avLst>
           </a:prstGeom>
           <a:solidFill>
-            <a:srgbClr val="E8A857"/>
+            <a:srgbClr val="0B1A38"/>
           </a:solidFill>
-          <a:ln/>
+          <a:ln w="12700">
+            <a:solidFill>
+              <a:srgbClr val="6BA0F8"/>
+            </a:solidFill>
+            <a:prstDash val="solid"/>
+          </a:ln>
         </p:spPr>
       </p:sp>
       <p:sp>
@@ -16507,7 +16804,7 @@
             <a:r>
               <a:rPr lang="en-US" sz="900" b="1" spc="100" kern="0" dirty="0">
                 <a:solidFill>
-                  <a:srgbClr val="2A2010"/>
+                  <a:srgbClr val="6BA0F8"/>
                 </a:solidFill>
                 <a:latin typeface="Courier New" pitchFamily="34" charset="0"/>
                 <a:ea typeface="Courier New" pitchFamily="34" charset="-122"/>
@@ -16560,11 +16857,11 @@
             </a:avLst>
           </a:prstGeom>
           <a:solidFill>
-            <a:srgbClr val="17141F"/>
+            <a:srgbClr val="000000"/>
           </a:solidFill>
           <a:ln w="12700">
             <a:solidFill>
-              <a:srgbClr val="2E2A3A"/>
+              <a:srgbClr val="5E4F85"/>
             </a:solidFill>
             <a:prstDash val="solid"/>
           </a:ln>
@@ -16585,7 +16882,7 @@
             <a:avLst/>
           </a:prstGeom>
           <a:solidFill>
-            <a:srgbClr val="2E1418"/>
+            <a:srgbClr val="1A0808"/>
           </a:solidFill>
           <a:ln/>
         </p:spPr>
@@ -16605,7 +16902,7 @@
             <a:avLst/>
           </a:prstGeom>
           <a:solidFill>
-            <a:srgbClr val="FF7B7B"/>
+            <a:srgbClr val="FF6B6B"/>
           </a:solidFill>
           <a:ln/>
         </p:spPr>
@@ -16625,7 +16922,7 @@
             <a:avLst/>
           </a:prstGeom>
           <a:solidFill>
-            <a:srgbClr val="FF7B7B"/>
+            <a:srgbClr val="FF6B6B"/>
           </a:solidFill>
           <a:ln/>
         </p:spPr>
@@ -16671,7 +16968,7 @@
             <a:r>
               <a:rPr lang="en-US" sz="1150" dirty="0">
                 <a:solidFill>
-                  <a:srgbClr val="AFA9BE"/>
+                  <a:srgbClr val="C9C4D6"/>
                 </a:solidFill>
                 <a:latin typeface="Montserrat" pitchFamily="34" charset="0"/>
                 <a:ea typeface="Montserrat" pitchFamily="34" charset="-122"/>
@@ -16700,11 +16997,11 @@
             </a:avLst>
           </a:prstGeom>
           <a:solidFill>
-            <a:srgbClr val="17141F"/>
+            <a:srgbClr val="000000"/>
           </a:solidFill>
           <a:ln w="12700">
             <a:solidFill>
-              <a:srgbClr val="2E2A3A"/>
+              <a:srgbClr val="5E4F85"/>
             </a:solidFill>
             <a:prstDash val="solid"/>
           </a:ln>
@@ -16725,7 +17022,7 @@
             <a:avLst/>
           </a:prstGeom>
           <a:solidFill>
-            <a:srgbClr val="2E1418"/>
+            <a:srgbClr val="1A0808"/>
           </a:solidFill>
           <a:ln/>
         </p:spPr>
@@ -16745,7 +17042,7 @@
             <a:avLst/>
           </a:prstGeom>
           <a:solidFill>
-            <a:srgbClr val="FF7B7B"/>
+            <a:srgbClr val="FF6B6B"/>
           </a:solidFill>
           <a:ln/>
         </p:spPr>
@@ -16765,7 +17062,7 @@
             <a:avLst/>
           </a:prstGeom>
           <a:solidFill>
-            <a:srgbClr val="FF7B7B"/>
+            <a:srgbClr val="FF6B6B"/>
           </a:solidFill>
           <a:ln/>
         </p:spPr>
@@ -16811,7 +17108,7 @@
             <a:r>
               <a:rPr lang="en-US" sz="1150" dirty="0">
                 <a:solidFill>
-                  <a:srgbClr val="AFA9BE"/>
+                  <a:srgbClr val="C9C4D6"/>
                 </a:solidFill>
                 <a:latin typeface="Montserrat" pitchFamily="34" charset="0"/>
                 <a:ea typeface="Montserrat" pitchFamily="34" charset="-122"/>
@@ -16840,11 +17137,11 @@
             </a:avLst>
           </a:prstGeom>
           <a:solidFill>
-            <a:srgbClr val="17141F"/>
+            <a:srgbClr val="000000"/>
           </a:solidFill>
           <a:ln w="12700">
             <a:solidFill>
-              <a:srgbClr val="2E2A3A"/>
+              <a:srgbClr val="5E4F85"/>
             </a:solidFill>
             <a:prstDash val="solid"/>
           </a:ln>
@@ -16865,7 +17162,7 @@
             <a:avLst/>
           </a:prstGeom>
           <a:solidFill>
-            <a:srgbClr val="2E1418"/>
+            <a:srgbClr val="1A0808"/>
           </a:solidFill>
           <a:ln/>
         </p:spPr>
@@ -16885,7 +17182,7 @@
             <a:avLst/>
           </a:prstGeom>
           <a:solidFill>
-            <a:srgbClr val="FF7B7B"/>
+            <a:srgbClr val="FF6B6B"/>
           </a:solidFill>
           <a:ln/>
         </p:spPr>
@@ -16905,7 +17202,7 @@
             <a:avLst/>
           </a:prstGeom>
           <a:solidFill>
-            <a:srgbClr val="FF7B7B"/>
+            <a:srgbClr val="FF6B6B"/>
           </a:solidFill>
           <a:ln/>
         </p:spPr>
@@ -16951,7 +17248,7 @@
             <a:r>
               <a:rPr lang="en-US" sz="1150" dirty="0">
                 <a:solidFill>
-                  <a:srgbClr val="AFA9BE"/>
+                  <a:srgbClr val="C9C4D6"/>
                 </a:solidFill>
                 <a:latin typeface="Montserrat" pitchFamily="34" charset="0"/>
                 <a:ea typeface="Montserrat" pitchFamily="34" charset="-122"/>
@@ -16980,11 +17277,11 @@
             </a:avLst>
           </a:prstGeom>
           <a:solidFill>
-            <a:srgbClr val="17141F"/>
+            <a:srgbClr val="000000"/>
           </a:solidFill>
           <a:ln w="12700">
             <a:solidFill>
-              <a:srgbClr val="2E2A3A"/>
+              <a:srgbClr val="5E4F85"/>
             </a:solidFill>
             <a:prstDash val="solid"/>
           </a:ln>
@@ -17005,7 +17302,7 @@
             <a:avLst/>
           </a:prstGeom>
           <a:solidFill>
-            <a:srgbClr val="2E1418"/>
+            <a:srgbClr val="1A0808"/>
           </a:solidFill>
           <a:ln/>
         </p:spPr>
@@ -17025,7 +17322,7 @@
             <a:avLst/>
           </a:prstGeom>
           <a:solidFill>
-            <a:srgbClr val="FF7B7B"/>
+            <a:srgbClr val="FF6B6B"/>
           </a:solidFill>
           <a:ln/>
         </p:spPr>
@@ -17045,7 +17342,7 @@
             <a:avLst/>
           </a:prstGeom>
           <a:solidFill>
-            <a:srgbClr val="FF7B7B"/>
+            <a:srgbClr val="FF6B6B"/>
           </a:solidFill>
           <a:ln/>
         </p:spPr>
@@ -17091,7 +17388,7 @@
             <a:r>
               <a:rPr lang="en-US" sz="1150" dirty="0">
                 <a:solidFill>
-                  <a:srgbClr val="AFA9BE"/>
+                  <a:srgbClr val="C9C4D6"/>
                 </a:solidFill>
                 <a:latin typeface="Montserrat" pitchFamily="34" charset="0"/>
                 <a:ea typeface="Montserrat" pitchFamily="34" charset="-122"/>
@@ -17120,11 +17417,11 @@
             </a:avLst>
           </a:prstGeom>
           <a:solidFill>
-            <a:srgbClr val="17141F"/>
+            <a:srgbClr val="000000"/>
           </a:solidFill>
           <a:ln w="12700">
             <a:solidFill>
-              <a:srgbClr val="2E2A3A"/>
+              <a:srgbClr val="5E4F85"/>
             </a:solidFill>
             <a:prstDash val="solid"/>
           </a:ln>
@@ -17145,7 +17442,7 @@
             <a:avLst/>
           </a:prstGeom>
           <a:solidFill>
-            <a:srgbClr val="2E1418"/>
+            <a:srgbClr val="1A0808"/>
           </a:solidFill>
           <a:ln/>
         </p:spPr>
@@ -17165,7 +17462,7 @@
             <a:avLst/>
           </a:prstGeom>
           <a:solidFill>
-            <a:srgbClr val="FF7B7B"/>
+            <a:srgbClr val="FF6B6B"/>
           </a:solidFill>
           <a:ln/>
         </p:spPr>
@@ -17185,7 +17482,7 @@
             <a:avLst/>
           </a:prstGeom>
           <a:solidFill>
-            <a:srgbClr val="FF7B7B"/>
+            <a:srgbClr val="FF6B6B"/>
           </a:solidFill>
           <a:ln/>
         </p:spPr>
@@ -17231,7 +17528,7 @@
             <a:r>
               <a:rPr lang="en-US" sz="1150" dirty="0">
                 <a:solidFill>
-                  <a:srgbClr val="AFA9BE"/>
+                  <a:srgbClr val="C9C4D6"/>
                 </a:solidFill>
                 <a:latin typeface="Montserrat" pitchFamily="34" charset="0"/>
                 <a:ea typeface="Montserrat" pitchFamily="34" charset="-122"/>
@@ -17273,7 +17570,7 @@
             <a:lvl1pPr>
               <a:defRPr sz="850">
                 <a:solidFill>
-                  <a:srgbClr val="8A82A0"/>
+                  <a:srgbClr val="9A94AA"/>
                 </a:solidFill>
                 <a:latin typeface="Courier New"/>
                 <a:ea typeface="Courier New"/>
@@ -17372,7 +17669,7 @@
             </a:avLst>
           </a:prstGeom>
           <a:solidFill>
-            <a:srgbClr val="5FD6A0"/>
+            <a:srgbClr val="5A05F4"/>
           </a:solidFill>
           <a:ln/>
         </p:spPr>
@@ -17404,7 +17701,7 @@
             <a:r>
               <a:rPr lang="en-US" sz="900" b="1" spc="100" kern="0" dirty="0">
                 <a:solidFill>
-                  <a:srgbClr val="102A20"/>
+                  <a:srgbClr val="FFFFFF"/>
                 </a:solidFill>
                 <a:latin typeface="Courier New" pitchFamily="34" charset="0"/>
                 <a:ea typeface="Courier New" pitchFamily="34" charset="-122"/>
@@ -17457,11 +17754,11 @@
             </a:avLst>
           </a:prstGeom>
           <a:solidFill>
-            <a:srgbClr val="17141F"/>
+            <a:srgbClr val="000000"/>
           </a:solidFill>
           <a:ln w="12700">
             <a:solidFill>
-              <a:srgbClr val="2E2A3A"/>
+              <a:srgbClr val="5E4F85"/>
             </a:solidFill>
             <a:prstDash val="solid"/>
           </a:ln>
@@ -17536,7 +17833,7 @@
             <a:r>
               <a:rPr lang="en-US" sz="1200" dirty="0">
                 <a:solidFill>
-                  <a:srgbClr val="AFA9BE"/>
+                  <a:srgbClr val="C9C4D6"/>
                 </a:solidFill>
                 <a:latin typeface="Montserrat" pitchFamily="34" charset="0"/>
                 <a:ea typeface="Montserrat" pitchFamily="34" charset="-122"/>
@@ -17565,7 +17862,7 @@
             <a:r>
               <a:rPr lang="en-US" sz="1200" dirty="0">
                 <a:solidFill>
-                  <a:srgbClr val="AFA9BE"/>
+                  <a:srgbClr val="C9C4D6"/>
                 </a:solidFill>
                 <a:latin typeface="Montserrat" pitchFamily="34" charset="0"/>
                 <a:ea typeface="Montserrat" pitchFamily="34" charset="-122"/>
@@ -17594,7 +17891,7 @@
             <a:r>
               <a:rPr lang="en-US" sz="1200" dirty="0">
                 <a:solidFill>
-                  <a:srgbClr val="AFA9BE"/>
+                  <a:srgbClr val="C9C4D6"/>
                 </a:solidFill>
                 <a:latin typeface="Montserrat" pitchFamily="34" charset="0"/>
                 <a:ea typeface="Montserrat" pitchFamily="34" charset="-122"/>
@@ -17623,9 +17920,14 @@
             </a:avLst>
           </a:prstGeom>
           <a:solidFill>
-            <a:srgbClr val="2A2010"/>
+            <a:srgbClr val="0B1A38"/>
           </a:solidFill>
-          <a:ln/>
+          <a:ln w="12700">
+            <a:solidFill>
+              <a:srgbClr val="6BA0F8"/>
+            </a:solidFill>
+            <a:prstDash val="solid"/>
+          </a:ln>
         </p:spPr>
       </p:sp>
       <p:sp>
@@ -17655,7 +17957,7 @@
             <a:r>
               <a:rPr lang="en-US" sz="1450" b="1" dirty="0">
                 <a:solidFill>
-                  <a:srgbClr val="E8A857"/>
+                  <a:srgbClr val="6BA0F8"/>
                 </a:solidFill>
                 <a:latin typeface="Montserrat" pitchFamily="34" charset="0"/>
                 <a:ea typeface="Montserrat" pitchFamily="34" charset="-122"/>
@@ -17697,7 +17999,7 @@
             <a:r>
               <a:rPr lang="en-US" sz="1200" dirty="0">
                 <a:solidFill>
-                  <a:srgbClr val="FFFFFF"/>
+                  <a:srgbClr val="C9C4D6"/>
                 </a:solidFill>
                 <a:latin typeface="Montserrat" pitchFamily="34" charset="0"/>
                 <a:ea typeface="Montserrat" pitchFamily="34" charset="-122"/>
@@ -17726,11 +18028,11 @@
             </a:avLst>
           </a:prstGeom>
           <a:solidFill>
-            <a:srgbClr val="17141F"/>
+            <a:srgbClr val="000000"/>
           </a:solidFill>
           <a:ln w="19050">
             <a:solidFill>
-              <a:srgbClr val="C9A6FF"/>
+              <a:srgbClr val="A98BFF"/>
             </a:solidFill>
             <a:prstDash val="solid"/>
           </a:ln>
@@ -17763,7 +18065,7 @@
             <a:r>
               <a:rPr lang="en-US" sz="1500" b="1" dirty="0">
                 <a:solidFill>
-                  <a:srgbClr val="C9A6FF"/>
+                  <a:srgbClr val="A98BFF"/>
                 </a:solidFill>
                 <a:latin typeface="Montserrat" pitchFamily="34" charset="0"/>
                 <a:ea typeface="Montserrat" pitchFamily="34" charset="-122"/>
@@ -17844,7 +18146,7 @@
             <a:lvl1pPr>
               <a:defRPr sz="850">
                 <a:solidFill>
-                  <a:srgbClr val="8A82A0"/>
+                  <a:srgbClr val="9A94AA"/>
                 </a:solidFill>
                 <a:latin typeface="Courier New"/>
                 <a:ea typeface="Courier New"/>
@@ -17953,7 +18255,7 @@
             <a:r>
               <a:rPr lang="en-US" sz="1100" b="1" spc="300" kern="0" dirty="0">
                 <a:solidFill>
-                  <a:srgbClr val="C9B8FB"/>
+                  <a:srgbClr val="C4B3F5"/>
                 </a:solidFill>
                 <a:latin typeface="Courier New" pitchFamily="34" charset="0"/>
                 <a:ea typeface="Courier New" pitchFamily="34" charset="-122"/>
@@ -18292,11 +18594,11 @@
             </a:avLst>
           </a:prstGeom>
           <a:solidFill>
-            <a:srgbClr val="17141F"/>
+            <a:srgbClr val="000000"/>
           </a:solidFill>
           <a:ln w="12700">
             <a:solidFill>
-              <a:srgbClr val="2E2A3A"/>
+              <a:srgbClr val="5E4F85"/>
             </a:solidFill>
             <a:prstDash val="solid"/>
           </a:ln>
@@ -18329,7 +18631,7 @@
             <a:r>
               <a:rPr lang="en-US" sz="1500" b="1" dirty="0">
                 <a:solidFill>
-                  <a:srgbClr val="C9A6FF"/>
+                  <a:srgbClr val="A98BFF"/>
                 </a:solidFill>
                 <a:latin typeface="Montserrat" pitchFamily="34" charset="0"/>
                 <a:ea typeface="Montserrat" pitchFamily="34" charset="-122"/>
@@ -18464,9 +18766,14 @@
             </a:avLst>
           </a:prstGeom>
           <a:solidFill>
-            <a:srgbClr val="C9A6FF"/>
+            <a:srgbClr val="1A0B3D"/>
           </a:solidFill>
-          <a:ln/>
+          <a:ln w="12700">
+            <a:solidFill>
+              <a:srgbClr val="5A05F4"/>
+            </a:solidFill>
+            <a:prstDash val="solid"/>
+          </a:ln>
         </p:spPr>
       </p:sp>
       <p:sp>
@@ -18496,7 +18803,7 @@
             <a:r>
               <a:rPr lang="en-US" sz="900" b="1" spc="100" kern="0" dirty="0">
                 <a:solidFill>
-                  <a:srgbClr val="1C1140"/>
+                  <a:srgbClr val="A98BFF"/>
                 </a:solidFill>
                 <a:latin typeface="Courier New" pitchFamily="34" charset="0"/>
                 <a:ea typeface="Courier New" pitchFamily="34" charset="-122"/>
@@ -18549,11 +18856,11 @@
             </a:avLst>
           </a:prstGeom>
           <a:solidFill>
-            <a:srgbClr val="17141F"/>
+            <a:srgbClr val="000000"/>
           </a:solidFill>
           <a:ln w="12700">
             <a:solidFill>
-              <a:srgbClr val="2E2A3A"/>
+              <a:srgbClr val="5E4F85"/>
             </a:solidFill>
             <a:prstDash val="solid"/>
           </a:ln>
@@ -18674,11 +18981,11 @@
             </a:avLst>
           </a:prstGeom>
           <a:solidFill>
-            <a:srgbClr val="17141F"/>
+            <a:srgbClr val="000000"/>
           </a:solidFill>
           <a:ln w="12700">
             <a:solidFill>
-              <a:srgbClr val="2E2A3A"/>
+              <a:srgbClr val="5E4F85"/>
             </a:solidFill>
             <a:prstDash val="solid"/>
           </a:ln>
@@ -18799,11 +19106,11 @@
             </a:avLst>
           </a:prstGeom>
           <a:solidFill>
-            <a:srgbClr val="17141F"/>
+            <a:srgbClr val="000000"/>
           </a:solidFill>
           <a:ln w="12700">
             <a:solidFill>
-              <a:srgbClr val="2E2A3A"/>
+              <a:srgbClr val="5E4F85"/>
             </a:solidFill>
             <a:prstDash val="solid"/>
           </a:ln>
@@ -18924,11 +19231,11 @@
             </a:avLst>
           </a:prstGeom>
           <a:solidFill>
-            <a:srgbClr val="17141F"/>
+            <a:srgbClr val="000000"/>
           </a:solidFill>
           <a:ln w="12700">
             <a:solidFill>
-              <a:srgbClr val="2E2A3A"/>
+              <a:srgbClr val="5E4F85"/>
             </a:solidFill>
             <a:prstDash val="solid"/>
           </a:ln>
@@ -19049,11 +19356,11 @@
             </a:avLst>
           </a:prstGeom>
           <a:solidFill>
-            <a:srgbClr val="17141F"/>
+            <a:srgbClr val="000000"/>
           </a:solidFill>
           <a:ln w="12700">
             <a:solidFill>
-              <a:srgbClr val="2E2A3A"/>
+              <a:srgbClr val="5E4F85"/>
             </a:solidFill>
             <a:prstDash val="solid"/>
           </a:ln>
@@ -19174,11 +19481,11 @@
             </a:avLst>
           </a:prstGeom>
           <a:solidFill>
-            <a:srgbClr val="17141F"/>
+            <a:srgbClr val="000000"/>
           </a:solidFill>
           <a:ln w="12700">
             <a:solidFill>
-              <a:srgbClr val="2E2A3A"/>
+              <a:srgbClr val="5E4F85"/>
             </a:solidFill>
             <a:prstDash val="solid"/>
           </a:ln>
@@ -19299,11 +19606,11 @@
             </a:avLst>
           </a:prstGeom>
           <a:solidFill>
-            <a:srgbClr val="17141F"/>
+            <a:srgbClr val="000000"/>
           </a:solidFill>
           <a:ln w="12700">
             <a:solidFill>
-              <a:srgbClr val="2E2A3A"/>
+              <a:srgbClr val="5E4F85"/>
             </a:solidFill>
             <a:prstDash val="solid"/>
           </a:ln>
@@ -19424,9 +19731,14 @@
             </a:avLst>
           </a:prstGeom>
           <a:solidFill>
-            <a:srgbClr val="2A2010"/>
+            <a:srgbClr val="0B1A38"/>
           </a:solidFill>
-          <a:ln/>
+          <a:ln w="12700">
+            <a:solidFill>
+              <a:srgbClr val="6BA0F8"/>
+            </a:solidFill>
+            <a:prstDash val="solid"/>
+          </a:ln>
         </p:spPr>
       </p:sp>
       <p:sp>
@@ -19444,7 +19756,7 @@
             <a:avLst/>
           </a:prstGeom>
           <a:solidFill>
-            <a:srgbClr val="E8A857"/>
+            <a:srgbClr val="5A05F4"/>
           </a:solidFill>
           <a:ln/>
         </p:spPr>
@@ -19476,7 +19788,7 @@
             <a:r>
               <a:rPr lang="en-US" sz="1200" b="1" dirty="0">
                 <a:solidFill>
-                  <a:srgbClr val="2A2010"/>
+                  <a:srgbClr val="FFFFFF"/>
                 </a:solidFill>
                 <a:latin typeface="Courier New" pitchFamily="34" charset="0"/>
                 <a:ea typeface="Courier New" pitchFamily="34" charset="-122"/>
@@ -19515,7 +19827,7 @@
             <a:r>
               <a:rPr lang="en-US" sz="1450" b="1" dirty="0">
                 <a:solidFill>
-                  <a:srgbClr val="E8A857"/>
+                  <a:srgbClr val="6BA0F8"/>
                 </a:solidFill>
                 <a:latin typeface="Montserrat" pitchFamily="34" charset="0"/>
                 <a:ea typeface="Montserrat" pitchFamily="34" charset="-122"/>
@@ -19544,11 +19856,11 @@
             </a:avLst>
           </a:prstGeom>
           <a:solidFill>
-            <a:srgbClr val="17141F"/>
+            <a:srgbClr val="000000"/>
           </a:solidFill>
           <a:ln w="12700">
             <a:solidFill>
-              <a:srgbClr val="2E2A3A"/>
+              <a:srgbClr val="5E4F85"/>
             </a:solidFill>
             <a:prstDash val="solid"/>
           </a:ln>
@@ -19669,11 +19981,11 @@
             </a:avLst>
           </a:prstGeom>
           <a:solidFill>
-            <a:srgbClr val="17141F"/>
+            <a:srgbClr val="000000"/>
           </a:solidFill>
           <a:ln w="12700">
             <a:solidFill>
-              <a:srgbClr val="2E2A3A"/>
+              <a:srgbClr val="5E4F85"/>
             </a:solidFill>
             <a:prstDash val="solid"/>
           </a:ln>
@@ -19794,11 +20106,11 @@
             </a:avLst>
           </a:prstGeom>
           <a:solidFill>
-            <a:srgbClr val="17141F"/>
+            <a:srgbClr val="000000"/>
           </a:solidFill>
           <a:ln w="12700">
             <a:solidFill>
-              <a:srgbClr val="2E2A3A"/>
+              <a:srgbClr val="5E4F85"/>
             </a:solidFill>
             <a:prstDash val="solid"/>
           </a:ln>
@@ -19919,11 +20231,11 @@
             </a:avLst>
           </a:prstGeom>
           <a:solidFill>
-            <a:srgbClr val="17141F"/>
+            <a:srgbClr val="000000"/>
           </a:solidFill>
           <a:ln w="12700">
             <a:solidFill>
-              <a:srgbClr val="2E2A3A"/>
+              <a:srgbClr val="5E4F85"/>
             </a:solidFill>
             <a:prstDash val="solid"/>
           </a:ln>
@@ -20001,7 +20313,7 @@
             <a:lvl1pPr>
               <a:defRPr sz="850">
                 <a:solidFill>
-                  <a:srgbClr val="8A82A0"/>
+                  <a:srgbClr val="9A94AA"/>
                 </a:solidFill>
                 <a:latin typeface="Courier New"/>
                 <a:ea typeface="Courier New"/>
@@ -20113,7 +20425,7 @@
             <a:r>
               <a:rPr lang="en-US" sz="1300" dirty="0">
                 <a:solidFill>
-                  <a:srgbClr val="AFA9BE"/>
+                  <a:srgbClr val="C9C4D6"/>
                 </a:solidFill>
                 <a:latin typeface="Montserrat" pitchFamily="34" charset="0"/>
                 <a:ea typeface="Montserrat" pitchFamily="34" charset="-122"/>
@@ -20142,9 +20454,14 @@
             </a:avLst>
           </a:prstGeom>
           <a:solidFill>
-            <a:srgbClr val="C9A6FF"/>
+            <a:srgbClr val="1A0B3D"/>
           </a:solidFill>
-          <a:ln/>
+          <a:ln w="12700">
+            <a:solidFill>
+              <a:srgbClr val="5A05F4"/>
+            </a:solidFill>
+            <a:prstDash val="solid"/>
+          </a:ln>
         </p:spPr>
       </p:sp>
       <p:sp>
@@ -20174,7 +20491,7 @@
             <a:r>
               <a:rPr lang="en-US" sz="900" b="1" spc="100" kern="0" dirty="0">
                 <a:solidFill>
-                  <a:srgbClr val="1C1140"/>
+                  <a:srgbClr val="A98BFF"/>
                 </a:solidFill>
                 <a:latin typeface="Courier New" pitchFamily="34" charset="0"/>
                 <a:ea typeface="Courier New" pitchFamily="34" charset="-122"/>
@@ -20227,11 +20544,11 @@
             </a:avLst>
           </a:prstGeom>
           <a:solidFill>
-            <a:srgbClr val="17141F"/>
+            <a:srgbClr val="000000"/>
           </a:solidFill>
           <a:ln w="12700">
             <a:solidFill>
-              <a:srgbClr val="2E2A3A"/>
+              <a:srgbClr val="5E4F85"/>
             </a:solidFill>
             <a:prstDash val="solid"/>
           </a:ln>
@@ -20264,7 +20581,7 @@
             <a:r>
               <a:rPr lang="en-US" sz="1250" b="1" dirty="0">
                 <a:solidFill>
-                  <a:srgbClr val="C9A6FF"/>
+                  <a:srgbClr val="A98BFF"/>
                 </a:solidFill>
                 <a:latin typeface="Courier New" pitchFamily="34" charset="0"/>
                 <a:ea typeface="Courier New" pitchFamily="34" charset="-122"/>
@@ -20306,7 +20623,7 @@
             <a:r>
               <a:rPr lang="en-US" sz="1150" dirty="0">
                 <a:solidFill>
-                  <a:srgbClr val="AFA9BE"/>
+                  <a:srgbClr val="C9C4D6"/>
                 </a:solidFill>
                 <a:latin typeface="Montserrat" pitchFamily="34" charset="0"/>
                 <a:ea typeface="Montserrat" pitchFamily="34" charset="-122"/>
@@ -20335,11 +20652,11 @@
             </a:avLst>
           </a:prstGeom>
           <a:solidFill>
-            <a:srgbClr val="17141F"/>
+            <a:srgbClr val="000000"/>
           </a:solidFill>
           <a:ln w="12700">
             <a:solidFill>
-              <a:srgbClr val="2E2A3A"/>
+              <a:srgbClr val="5E4F85"/>
             </a:solidFill>
             <a:prstDash val="solid"/>
           </a:ln>
@@ -20372,7 +20689,7 @@
             <a:r>
               <a:rPr lang="en-US" sz="1250" b="1" dirty="0">
                 <a:solidFill>
-                  <a:srgbClr val="C9A6FF"/>
+                  <a:srgbClr val="A98BFF"/>
                 </a:solidFill>
                 <a:latin typeface="Courier New" pitchFamily="34" charset="0"/>
                 <a:ea typeface="Courier New" pitchFamily="34" charset="-122"/>
@@ -20414,7 +20731,7 @@
             <a:r>
               <a:rPr lang="en-US" sz="1150" dirty="0">
                 <a:solidFill>
-                  <a:srgbClr val="AFA9BE"/>
+                  <a:srgbClr val="C9C4D6"/>
                 </a:solidFill>
                 <a:latin typeface="Montserrat" pitchFamily="34" charset="0"/>
                 <a:ea typeface="Montserrat" pitchFamily="34" charset="-122"/>
@@ -20443,11 +20760,11 @@
             </a:avLst>
           </a:prstGeom>
           <a:solidFill>
-            <a:srgbClr val="17141F"/>
+            <a:srgbClr val="000000"/>
           </a:solidFill>
           <a:ln w="12700">
             <a:solidFill>
-              <a:srgbClr val="2E2A3A"/>
+              <a:srgbClr val="5E4F85"/>
             </a:solidFill>
             <a:prstDash val="solid"/>
           </a:ln>
@@ -20480,7 +20797,7 @@
             <a:r>
               <a:rPr lang="en-US" sz="1250" b="1" dirty="0">
                 <a:solidFill>
-                  <a:srgbClr val="C9A6FF"/>
+                  <a:srgbClr val="A98BFF"/>
                 </a:solidFill>
                 <a:latin typeface="Courier New" pitchFamily="34" charset="0"/>
                 <a:ea typeface="Courier New" pitchFamily="34" charset="-122"/>
@@ -20522,7 +20839,7 @@
             <a:r>
               <a:rPr lang="en-US" sz="1150" dirty="0">
                 <a:solidFill>
-                  <a:srgbClr val="AFA9BE"/>
+                  <a:srgbClr val="C9C4D6"/>
                 </a:solidFill>
                 <a:latin typeface="Montserrat" pitchFamily="34" charset="0"/>
                 <a:ea typeface="Montserrat" pitchFamily="34" charset="-122"/>
@@ -20551,11 +20868,11 @@
             </a:avLst>
           </a:prstGeom>
           <a:solidFill>
-            <a:srgbClr val="17141F"/>
+            <a:srgbClr val="000000"/>
           </a:solidFill>
           <a:ln w="12700">
             <a:solidFill>
-              <a:srgbClr val="2E2A3A"/>
+              <a:srgbClr val="5E4F85"/>
             </a:solidFill>
             <a:prstDash val="solid"/>
           </a:ln>
@@ -20588,7 +20905,7 @@
             <a:r>
               <a:rPr lang="en-US" sz="1250" b="1" dirty="0">
                 <a:solidFill>
-                  <a:srgbClr val="C9A6FF"/>
+                  <a:srgbClr val="A98BFF"/>
                 </a:solidFill>
                 <a:latin typeface="Courier New" pitchFamily="34" charset="0"/>
                 <a:ea typeface="Courier New" pitchFamily="34" charset="-122"/>
@@ -20630,7 +20947,7 @@
             <a:r>
               <a:rPr lang="en-US" sz="1150" dirty="0">
                 <a:solidFill>
-                  <a:srgbClr val="AFA9BE"/>
+                  <a:srgbClr val="C9C4D6"/>
                 </a:solidFill>
                 <a:latin typeface="Montserrat" pitchFamily="34" charset="0"/>
                 <a:ea typeface="Montserrat" pitchFamily="34" charset="-122"/>
@@ -20659,11 +20976,11 @@
             </a:avLst>
           </a:prstGeom>
           <a:solidFill>
-            <a:srgbClr val="17141F"/>
+            <a:srgbClr val="000000"/>
           </a:solidFill>
           <a:ln w="12700">
             <a:solidFill>
-              <a:srgbClr val="2E2A3A"/>
+              <a:srgbClr val="5E4F85"/>
             </a:solidFill>
             <a:prstDash val="solid"/>
           </a:ln>
@@ -20696,7 +21013,7 @@
             <a:r>
               <a:rPr lang="en-US" sz="1250" b="1" dirty="0">
                 <a:solidFill>
-                  <a:srgbClr val="C9A6FF"/>
+                  <a:srgbClr val="A98BFF"/>
                 </a:solidFill>
                 <a:latin typeface="Courier New" pitchFamily="34" charset="0"/>
                 <a:ea typeface="Courier New" pitchFamily="34" charset="-122"/>
@@ -20738,7 +21055,7 @@
             <a:r>
               <a:rPr lang="en-US" sz="1150" dirty="0">
                 <a:solidFill>
-                  <a:srgbClr val="AFA9BE"/>
+                  <a:srgbClr val="C9C4D6"/>
                 </a:solidFill>
                 <a:latin typeface="Montserrat" pitchFamily="34" charset="0"/>
                 <a:ea typeface="Montserrat" pitchFamily="34" charset="-122"/>
@@ -20767,11 +21084,11 @@
             </a:avLst>
           </a:prstGeom>
           <a:solidFill>
-            <a:srgbClr val="17141F"/>
+            <a:srgbClr val="000000"/>
           </a:solidFill>
           <a:ln w="12700">
             <a:solidFill>
-              <a:srgbClr val="2E2A3A"/>
+              <a:srgbClr val="5E4F85"/>
             </a:solidFill>
             <a:prstDash val="solid"/>
           </a:ln>
@@ -20804,7 +21121,7 @@
             <a:r>
               <a:rPr lang="en-US" sz="1250" b="1" dirty="0">
                 <a:solidFill>
-                  <a:srgbClr val="C9A6FF"/>
+                  <a:srgbClr val="A98BFF"/>
                 </a:solidFill>
                 <a:latin typeface="Courier New" pitchFamily="34" charset="0"/>
                 <a:ea typeface="Courier New" pitchFamily="34" charset="-122"/>
@@ -20846,7 +21163,7 @@
             <a:r>
               <a:rPr lang="en-US" sz="1150" dirty="0">
                 <a:solidFill>
-                  <a:srgbClr val="AFA9BE"/>
+                  <a:srgbClr val="C9C4D6"/>
                 </a:solidFill>
                 <a:latin typeface="Montserrat" pitchFamily="34" charset="0"/>
                 <a:ea typeface="Montserrat" pitchFamily="34" charset="-122"/>
@@ -20875,11 +21192,11 @@
             </a:avLst>
           </a:prstGeom>
           <a:solidFill>
-            <a:srgbClr val="17141F"/>
+            <a:srgbClr val="000000"/>
           </a:solidFill>
           <a:ln w="12700">
             <a:solidFill>
-              <a:srgbClr val="2E2A3A"/>
+              <a:srgbClr val="5E4F85"/>
             </a:solidFill>
             <a:prstDash val="solid"/>
           </a:ln>
@@ -20957,7 +21274,7 @@
             <a:lvl1pPr>
               <a:defRPr sz="850">
                 <a:solidFill>
-                  <a:srgbClr val="8A82A0"/>
+                  <a:srgbClr val="9A94AA"/>
                 </a:solidFill>
                 <a:latin typeface="Courier New"/>
                 <a:ea typeface="Courier New"/>
@@ -21027,7 +21344,7 @@
             <a:r>
               <a:rPr lang="en-US" sz="2600" b="1" dirty="0">
                 <a:solidFill>
-                  <a:srgbClr val="C9A6FF"/>
+                  <a:srgbClr val="A98BFF"/>
                 </a:solidFill>
                 <a:latin typeface="Courier New" pitchFamily="34" charset="0"/>
                 <a:ea typeface="Courier New" pitchFamily="34" charset="-122"/>
@@ -21095,9 +21412,14 @@
             </a:avLst>
           </a:prstGeom>
           <a:solidFill>
-            <a:srgbClr val="C9A6FF"/>
+            <a:srgbClr val="1A0B3D"/>
           </a:solidFill>
-          <a:ln/>
+          <a:ln w="12700">
+            <a:solidFill>
+              <a:srgbClr val="5A05F4"/>
+            </a:solidFill>
+            <a:prstDash val="solid"/>
+          </a:ln>
         </p:spPr>
       </p:sp>
       <p:sp>
@@ -21127,7 +21449,7 @@
             <a:r>
               <a:rPr lang="en-US" sz="900" b="1" spc="100" kern="0" dirty="0">
                 <a:solidFill>
-                  <a:srgbClr val="1C1140"/>
+                  <a:srgbClr val="A98BFF"/>
                 </a:solidFill>
                 <a:latin typeface="Courier New" pitchFamily="34" charset="0"/>
                 <a:ea typeface="Courier New" pitchFamily="34" charset="-122"/>
@@ -21180,11 +21502,11 @@
             </a:avLst>
           </a:prstGeom>
           <a:solidFill>
-            <a:srgbClr val="17141F"/>
+            <a:srgbClr val="000000"/>
           </a:solidFill>
           <a:ln w="12700">
             <a:solidFill>
-              <a:srgbClr val="2E2A3A"/>
+              <a:srgbClr val="5E4F85"/>
             </a:solidFill>
             <a:prstDash val="solid"/>
           </a:ln>
@@ -21246,7 +21568,7 @@
           <a:noFill/>
           <a:ln w="15875">
             <a:solidFill>
-              <a:srgbClr val="9B7BE8"/>
+              <a:srgbClr val="8F72E6"/>
             </a:solidFill>
             <a:prstDash val="solid"/>
           </a:ln>
@@ -21267,7 +21589,7 @@
             <a:avLst/>
           </a:prstGeom>
           <a:solidFill>
-            <a:srgbClr val="9B7BE8"/>
+            <a:srgbClr val="8F72E6"/>
           </a:solidFill>
           <a:ln/>
         </p:spPr>
@@ -21289,9 +21611,14 @@
             </a:avLst>
           </a:prstGeom>
           <a:solidFill>
-            <a:srgbClr val="2A2010"/>
+            <a:srgbClr val="0B1A38"/>
           </a:solidFill>
-          <a:ln/>
+          <a:ln w="12700">
+            <a:solidFill>
+              <a:srgbClr val="6BA0F8"/>
+            </a:solidFill>
+            <a:prstDash val="solid"/>
+          </a:ln>
         </p:spPr>
       </p:sp>
       <p:sp>
@@ -21321,7 +21648,7 @@
             <a:r>
               <a:rPr lang="en-US" sz="1100" b="1" dirty="0">
                 <a:solidFill>
-                  <a:srgbClr val="E8A857"/>
+                  <a:srgbClr val="6BA0F8"/>
                 </a:solidFill>
                 <a:latin typeface="Courier New" pitchFamily="34" charset="0"/>
                 <a:ea typeface="Courier New" pitchFamily="34" charset="-122"/>
@@ -21350,7 +21677,7 @@
           <a:noFill/>
           <a:ln w="15875">
             <a:solidFill>
-              <a:srgbClr val="9B7BE8"/>
+              <a:srgbClr val="8F72E6"/>
             </a:solidFill>
             <a:prstDash val="solid"/>
           </a:ln>
@@ -21371,7 +21698,7 @@
             <a:avLst/>
           </a:prstGeom>
           <a:solidFill>
-            <a:srgbClr val="9B7BE8"/>
+            <a:srgbClr val="8F72E6"/>
           </a:solidFill>
           <a:ln/>
         </p:spPr>
@@ -21393,9 +21720,14 @@
             </a:avLst>
           </a:prstGeom>
           <a:solidFill>
-            <a:srgbClr val="2E1418"/>
+            <a:srgbClr val="1A0808"/>
           </a:solidFill>
-          <a:ln/>
+          <a:ln w="12700">
+            <a:solidFill>
+              <a:srgbClr val="FF6B6B"/>
+            </a:solidFill>
+            <a:prstDash val="solid"/>
+          </a:ln>
         </p:spPr>
       </p:sp>
       <p:sp>
@@ -21425,7 +21757,7 @@
             <a:r>
               <a:rPr lang="en-US" sz="1100" b="1" dirty="0">
                 <a:solidFill>
-                  <a:srgbClr val="FF7B7B"/>
+                  <a:srgbClr val="FF6B6B"/>
                 </a:solidFill>
                 <a:latin typeface="Courier New" pitchFamily="34" charset="0"/>
                 <a:ea typeface="Courier New" pitchFamily="34" charset="-122"/>
@@ -21454,7 +21786,7 @@
           <a:noFill/>
           <a:ln w="15875">
             <a:solidFill>
-              <a:srgbClr val="9B7BE8"/>
+              <a:srgbClr val="8F72E6"/>
             </a:solidFill>
             <a:prstDash val="solid"/>
           </a:ln>
@@ -21475,7 +21807,7 @@
             <a:avLst/>
           </a:prstGeom>
           <a:solidFill>
-            <a:srgbClr val="9B7BE8"/>
+            <a:srgbClr val="8F72E6"/>
           </a:solidFill>
           <a:ln/>
         </p:spPr>
@@ -21497,11 +21829,11 @@
             </a:avLst>
           </a:prstGeom>
           <a:solidFill>
-            <a:srgbClr val="17141F"/>
+            <a:srgbClr val="000000"/>
           </a:solidFill>
           <a:ln w="12700">
             <a:solidFill>
-              <a:srgbClr val="2E2A3A"/>
+              <a:srgbClr val="5E4F85"/>
             </a:solidFill>
             <a:prstDash val="solid"/>
           </a:ln>
@@ -21573,7 +21905,7 @@
             <a:r>
               <a:rPr lang="en-US" sz="1200" i="1" dirty="0">
                 <a:solidFill>
-                  <a:srgbClr val="AFA9BE"/>
+                  <a:srgbClr val="C9C4D6"/>
                 </a:solidFill>
                 <a:latin typeface="Montserrat" pitchFamily="34" charset="0"/>
                 <a:ea typeface="Montserrat" pitchFamily="34" charset="-122"/>
@@ -21602,9 +21934,14 @@
             </a:avLst>
           </a:prstGeom>
           <a:solidFill>
-            <a:srgbClr val="102A20"/>
+            <a:srgbClr val="06180F"/>
           </a:solidFill>
-          <a:ln/>
+          <a:ln w="12700">
+            <a:solidFill>
+              <a:srgbClr val="3FCF8E"/>
+            </a:solidFill>
+            <a:prstDash val="solid"/>
+          </a:ln>
         </p:spPr>
       </p:sp>
       <p:sp>
@@ -21634,7 +21971,7 @@
             <a:r>
               <a:rPr lang="en-US" sz="1450" b="1" dirty="0">
                 <a:solidFill>
-                  <a:srgbClr val="5FD6A0"/>
+                  <a:srgbClr val="3FCF8E"/>
                 </a:solidFill>
                 <a:latin typeface="Montserrat" pitchFamily="34" charset="0"/>
                 <a:ea typeface="Montserrat" pitchFamily="34" charset="-122"/>
@@ -21676,7 +22013,7 @@
             <a:r>
               <a:rPr lang="en-US" sz="1200" dirty="0">
                 <a:solidFill>
-                  <a:srgbClr val="FFFFFF"/>
+                  <a:srgbClr val="C9C4D6"/>
                 </a:solidFill>
                 <a:latin typeface="Montserrat" pitchFamily="34" charset="0"/>
                 <a:ea typeface="Montserrat" pitchFamily="34" charset="-122"/>
@@ -21705,9 +22042,14 @@
             </a:avLst>
           </a:prstGeom>
           <a:solidFill>
-            <a:srgbClr val="2E1418"/>
+            <a:srgbClr val="1A0808"/>
           </a:solidFill>
-          <a:ln/>
+          <a:ln w="12700">
+            <a:solidFill>
+              <a:srgbClr val="FF6B6B"/>
+            </a:solidFill>
+            <a:prstDash val="solid"/>
+          </a:ln>
         </p:spPr>
       </p:sp>
       <p:sp>
@@ -21737,7 +22079,7 @@
             <a:r>
               <a:rPr lang="en-US" sz="1450" b="1" dirty="0">
                 <a:solidFill>
-                  <a:srgbClr val="FF7B7B"/>
+                  <a:srgbClr val="FF6B6B"/>
                 </a:solidFill>
                 <a:latin typeface="Montserrat" pitchFamily="34" charset="0"/>
                 <a:ea typeface="Montserrat" pitchFamily="34" charset="-122"/>
@@ -21779,7 +22121,7 @@
             <a:r>
               <a:rPr lang="en-US" sz="1200" dirty="0">
                 <a:solidFill>
-                  <a:srgbClr val="FFFFFF"/>
+                  <a:srgbClr val="C9C4D6"/>
                 </a:solidFill>
                 <a:latin typeface="Montserrat" pitchFamily="34" charset="0"/>
                 <a:ea typeface="Montserrat" pitchFamily="34" charset="-122"/>
@@ -21924,7 +22266,7 @@
             <a:lvl1pPr>
               <a:defRPr sz="850">
                 <a:solidFill>
-                  <a:srgbClr val="8A82A0"/>
+                  <a:srgbClr val="9A94AA"/>
                 </a:solidFill>
                 <a:latin typeface="Courier New"/>
                 <a:ea typeface="Courier New"/>
@@ -21994,7 +22336,7 @@
             <a:r>
               <a:rPr lang="en-US" sz="2600" b="1" dirty="0">
                 <a:solidFill>
-                  <a:srgbClr val="C9A6FF"/>
+                  <a:srgbClr val="A98BFF"/>
                 </a:solidFill>
                 <a:latin typeface="Courier New" pitchFamily="34" charset="0"/>
                 <a:ea typeface="Courier New" pitchFamily="34" charset="-122"/>
@@ -22062,9 +22404,14 @@
             </a:avLst>
           </a:prstGeom>
           <a:solidFill>
-            <a:srgbClr val="C9A6FF"/>
+            <a:srgbClr val="1A0B3D"/>
           </a:solidFill>
-          <a:ln/>
+          <a:ln w="12700">
+            <a:solidFill>
+              <a:srgbClr val="5A05F4"/>
+            </a:solidFill>
+            <a:prstDash val="solid"/>
+          </a:ln>
         </p:spPr>
       </p:sp>
       <p:sp>
@@ -22094,7 +22441,7 @@
             <a:r>
               <a:rPr lang="en-US" sz="900" b="1" spc="100" kern="0" dirty="0">
                 <a:solidFill>
-                  <a:srgbClr val="1C1140"/>
+                  <a:srgbClr val="A98BFF"/>
                 </a:solidFill>
                 <a:latin typeface="Courier New" pitchFamily="34" charset="0"/>
                 <a:ea typeface="Courier New" pitchFamily="34" charset="-122"/>
@@ -22176,7 +22523,7 @@
                   <a:tcPr marL="73152" marR="73152" marT="73152" marB="73152" anchor="ctr">
                     <a:lnL w="6350" cap="flat" cmpd="sng" algn="ctr">
                       <a:solidFill>
-                        <a:srgbClr val="2E2A3A"/>
+                        <a:srgbClr val="5E4F85"/>
                       </a:solidFill>
                       <a:prstDash val="solid"/>
                       <a:round/>
@@ -22185,7 +22532,7 @@
                     </a:lnL>
                     <a:lnR w="6350" cap="flat" cmpd="sng" algn="ctr">
                       <a:solidFill>
-                        <a:srgbClr val="2E2A3A"/>
+                        <a:srgbClr val="5E4F85"/>
                       </a:solidFill>
                       <a:prstDash val="solid"/>
                       <a:round/>
@@ -22194,7 +22541,7 @@
                     </a:lnR>
                     <a:lnT w="6350" cap="flat" cmpd="sng" algn="ctr">
                       <a:solidFill>
-                        <a:srgbClr val="2E2A3A"/>
+                        <a:srgbClr val="5E4F85"/>
                       </a:solidFill>
                       <a:prstDash val="solid"/>
                       <a:round/>
@@ -22203,7 +22550,7 @@
                     </a:lnT>
                     <a:lnB w="6350" cap="flat" cmpd="sng" algn="ctr">
                       <a:solidFill>
-                        <a:srgbClr val="2E2A3A"/>
+                        <a:srgbClr val="5E4F85"/>
                       </a:solidFill>
                       <a:prstDash val="solid"/>
                       <a:round/>
@@ -22211,7 +22558,7 @@
                       <a:tailEnd type="none" w="med" len="med"/>
                     </a:lnB>
                     <a:solidFill>
-                      <a:srgbClr val="1F1B2A"/>
+                      <a:srgbClr val="1A0B3D"/>
                     </a:solidFill>
                   </a:tcPr>
                 </a:tc>
@@ -22226,7 +22573,7 @@
                       <a:r>
                         <a:rPr lang="en-US" sz="900" b="1" spc="100" kern="0" dirty="0">
                           <a:solidFill>
-                            <a:srgbClr val="AFA9BE"/>
+                            <a:srgbClr val="C9C4D6"/>
                           </a:solidFill>
                           <a:latin typeface="Courier New" pitchFamily="34" charset="0"/>
                           <a:ea typeface="Courier New" pitchFamily="34" charset="-122"/>
@@ -22244,7 +22591,7 @@
                   <a:tcPr marL="73152" marR="73152" marT="73152" marB="73152" anchor="ctr">
                     <a:lnL w="6350" cap="flat" cmpd="sng" algn="ctr">
                       <a:solidFill>
-                        <a:srgbClr val="2E2A3A"/>
+                        <a:srgbClr val="5E4F85"/>
                       </a:solidFill>
                       <a:prstDash val="solid"/>
                       <a:round/>
@@ -22253,7 +22600,7 @@
                     </a:lnL>
                     <a:lnR w="6350" cap="flat" cmpd="sng" algn="ctr">
                       <a:solidFill>
-                        <a:srgbClr val="2E2A3A"/>
+                        <a:srgbClr val="5E4F85"/>
                       </a:solidFill>
                       <a:prstDash val="solid"/>
                       <a:round/>
@@ -22262,7 +22609,7 @@
                     </a:lnR>
                     <a:lnT w="6350" cap="flat" cmpd="sng" algn="ctr">
                       <a:solidFill>
-                        <a:srgbClr val="2E2A3A"/>
+                        <a:srgbClr val="5E4F85"/>
                       </a:solidFill>
                       <a:prstDash val="solid"/>
                       <a:round/>
@@ -22271,7 +22618,7 @@
                     </a:lnT>
                     <a:lnB w="6350" cap="flat" cmpd="sng" algn="ctr">
                       <a:solidFill>
-                        <a:srgbClr val="2E2A3A"/>
+                        <a:srgbClr val="5E4F85"/>
                       </a:solidFill>
                       <a:prstDash val="solid"/>
                       <a:round/>
@@ -22279,7 +22626,7 @@
                       <a:tailEnd type="none" w="med" len="med"/>
                     </a:lnB>
                     <a:solidFill>
-                      <a:srgbClr val="1F1B2A"/>
+                      <a:srgbClr val="1A0B3D"/>
                     </a:solidFill>
                   </a:tcPr>
                 </a:tc>
@@ -22294,7 +22641,7 @@
                       <a:r>
                         <a:rPr lang="en-US" sz="900" b="1" spc="100" kern="0" dirty="0">
                           <a:solidFill>
-                            <a:srgbClr val="AFA9BE"/>
+                            <a:srgbClr val="C9C4D6"/>
                           </a:solidFill>
                           <a:latin typeface="Courier New" pitchFamily="34" charset="0"/>
                           <a:ea typeface="Courier New" pitchFamily="34" charset="-122"/>
@@ -22312,7 +22659,7 @@
                   <a:tcPr marL="73152" marR="73152" marT="73152" marB="73152" anchor="ctr">
                     <a:lnL w="6350" cap="flat" cmpd="sng" algn="ctr">
                       <a:solidFill>
-                        <a:srgbClr val="2E2A3A"/>
+                        <a:srgbClr val="5E4F85"/>
                       </a:solidFill>
                       <a:prstDash val="solid"/>
                       <a:round/>
@@ -22321,7 +22668,7 @@
                     </a:lnL>
                     <a:lnR w="6350" cap="flat" cmpd="sng" algn="ctr">
                       <a:solidFill>
-                        <a:srgbClr val="2E2A3A"/>
+                        <a:srgbClr val="5E4F85"/>
                       </a:solidFill>
                       <a:prstDash val="solid"/>
                       <a:round/>
@@ -22330,7 +22677,7 @@
                     </a:lnR>
                     <a:lnT w="6350" cap="flat" cmpd="sng" algn="ctr">
                       <a:solidFill>
-                        <a:srgbClr val="2E2A3A"/>
+                        <a:srgbClr val="5E4F85"/>
                       </a:solidFill>
                       <a:prstDash val="solid"/>
                       <a:round/>
@@ -22339,7 +22686,7 @@
                     </a:lnT>
                     <a:lnB w="6350" cap="flat" cmpd="sng" algn="ctr">
                       <a:solidFill>
-                        <a:srgbClr val="2E2A3A"/>
+                        <a:srgbClr val="5E4F85"/>
                       </a:solidFill>
                       <a:prstDash val="solid"/>
                       <a:round/>
@@ -22347,7 +22694,7 @@
                       <a:tailEnd type="none" w="med" len="med"/>
                     </a:lnB>
                     <a:solidFill>
-                      <a:srgbClr val="1F1B2A"/>
+                      <a:srgbClr val="1A0B3D"/>
                     </a:solidFill>
                   </a:tcPr>
                 </a:tc>
@@ -22382,7 +22729,7 @@
                   <a:tcPr marL="73152" marR="73152" marT="73152" marB="73152" anchor="ctr">
                     <a:lnL w="6350" cap="flat" cmpd="sng" algn="ctr">
                       <a:solidFill>
-                        <a:srgbClr val="2E2A3A"/>
+                        <a:srgbClr val="5E4F85"/>
                       </a:solidFill>
                       <a:prstDash val="solid"/>
                       <a:round/>
@@ -22391,7 +22738,7 @@
                     </a:lnL>
                     <a:lnR w="6350" cap="flat" cmpd="sng" algn="ctr">
                       <a:solidFill>
-                        <a:srgbClr val="2E2A3A"/>
+                        <a:srgbClr val="5E4F85"/>
                       </a:solidFill>
                       <a:prstDash val="solid"/>
                       <a:round/>
@@ -22400,7 +22747,7 @@
                     </a:lnR>
                     <a:lnT w="6350" cap="flat" cmpd="sng" algn="ctr">
                       <a:solidFill>
-                        <a:srgbClr val="2E2A3A"/>
+                        <a:srgbClr val="5E4F85"/>
                       </a:solidFill>
                       <a:prstDash val="solid"/>
                       <a:round/>
@@ -22409,7 +22756,7 @@
                     </a:lnT>
                     <a:lnB w="6350" cap="flat" cmpd="sng" algn="ctr">
                       <a:solidFill>
-                        <a:srgbClr val="2E2A3A"/>
+                        <a:srgbClr val="5E4F85"/>
                       </a:solidFill>
                       <a:prstDash val="solid"/>
                       <a:round/>
@@ -22417,7 +22764,7 @@
                       <a:tailEnd type="none" w="med" len="med"/>
                     </a:lnB>
                     <a:solidFill>
-                      <a:srgbClr val="17141F"/>
+                      <a:srgbClr val="000000"/>
                     </a:solidFill>
                   </a:tcPr>
                 </a:tc>
@@ -22450,7 +22797,7 @@
                   <a:tcPr marL="73152" marR="73152" marT="73152" marB="73152" anchor="ctr">
                     <a:lnL w="6350" cap="flat" cmpd="sng" algn="ctr">
                       <a:solidFill>
-                        <a:srgbClr val="2E2A3A"/>
+                        <a:srgbClr val="5E4F85"/>
                       </a:solidFill>
                       <a:prstDash val="solid"/>
                       <a:round/>
@@ -22459,7 +22806,7 @@
                     </a:lnL>
                     <a:lnR w="6350" cap="flat" cmpd="sng" algn="ctr">
                       <a:solidFill>
-                        <a:srgbClr val="2E2A3A"/>
+                        <a:srgbClr val="5E4F85"/>
                       </a:solidFill>
                       <a:prstDash val="solid"/>
                       <a:round/>
@@ -22468,7 +22815,7 @@
                     </a:lnR>
                     <a:lnT w="6350" cap="flat" cmpd="sng" algn="ctr">
                       <a:solidFill>
-                        <a:srgbClr val="2E2A3A"/>
+                        <a:srgbClr val="5E4F85"/>
                       </a:solidFill>
                       <a:prstDash val="solid"/>
                       <a:round/>
@@ -22477,7 +22824,7 @@
                     </a:lnT>
                     <a:lnB w="6350" cap="flat" cmpd="sng" algn="ctr">
                       <a:solidFill>
-                        <a:srgbClr val="2E2A3A"/>
+                        <a:srgbClr val="5E4F85"/>
                       </a:solidFill>
                       <a:prstDash val="solid"/>
                       <a:round/>
@@ -22485,7 +22832,7 @@
                       <a:tailEnd type="none" w="med" len="med"/>
                     </a:lnB>
                     <a:solidFill>
-                      <a:srgbClr val="17141F"/>
+                      <a:srgbClr val="000000"/>
                     </a:solidFill>
                   </a:tcPr>
                 </a:tc>
@@ -22518,7 +22865,7 @@
                   <a:tcPr marL="73152" marR="73152" marT="73152" marB="73152" anchor="ctr">
                     <a:lnL w="6350" cap="flat" cmpd="sng" algn="ctr">
                       <a:solidFill>
-                        <a:srgbClr val="2E2A3A"/>
+                        <a:srgbClr val="5E4F85"/>
                       </a:solidFill>
                       <a:prstDash val="solid"/>
                       <a:round/>
@@ -22527,7 +22874,7 @@
                     </a:lnL>
                     <a:lnR w="6350" cap="flat" cmpd="sng" algn="ctr">
                       <a:solidFill>
-                        <a:srgbClr val="2E2A3A"/>
+                        <a:srgbClr val="5E4F85"/>
                       </a:solidFill>
                       <a:prstDash val="solid"/>
                       <a:round/>
@@ -22536,7 +22883,7 @@
                     </a:lnR>
                     <a:lnT w="6350" cap="flat" cmpd="sng" algn="ctr">
                       <a:solidFill>
-                        <a:srgbClr val="2E2A3A"/>
+                        <a:srgbClr val="5E4F85"/>
                       </a:solidFill>
                       <a:prstDash val="solid"/>
                       <a:round/>
@@ -22545,7 +22892,7 @@
                     </a:lnT>
                     <a:lnB w="6350" cap="flat" cmpd="sng" algn="ctr">
                       <a:solidFill>
-                        <a:srgbClr val="2E2A3A"/>
+                        <a:srgbClr val="5E4F85"/>
                       </a:solidFill>
                       <a:prstDash val="solid"/>
                       <a:round/>
@@ -22553,7 +22900,7 @@
                       <a:tailEnd type="none" w="med" len="med"/>
                     </a:lnB>
                     <a:solidFill>
-                      <a:srgbClr val="17141F"/>
+                      <a:srgbClr val="000000"/>
                     </a:solidFill>
                   </a:tcPr>
                 </a:tc>
@@ -22588,7 +22935,7 @@
                   <a:tcPr marL="73152" marR="73152" marT="73152" marB="73152" anchor="ctr">
                     <a:lnL w="6350" cap="flat" cmpd="sng" algn="ctr">
                       <a:solidFill>
-                        <a:srgbClr val="2E2A3A"/>
+                        <a:srgbClr val="5E4F85"/>
                       </a:solidFill>
                       <a:prstDash val="solid"/>
                       <a:round/>
@@ -22597,7 +22944,7 @@
                     </a:lnL>
                     <a:lnR w="6350" cap="flat" cmpd="sng" algn="ctr">
                       <a:solidFill>
-                        <a:srgbClr val="2E2A3A"/>
+                        <a:srgbClr val="5E4F85"/>
                       </a:solidFill>
                       <a:prstDash val="solid"/>
                       <a:round/>
@@ -22606,7 +22953,7 @@
                     </a:lnR>
                     <a:lnT w="6350" cap="flat" cmpd="sng" algn="ctr">
                       <a:solidFill>
-                        <a:srgbClr val="2E2A3A"/>
+                        <a:srgbClr val="5E4F85"/>
                       </a:solidFill>
                       <a:prstDash val="solid"/>
                       <a:round/>
@@ -22615,7 +22962,7 @@
                     </a:lnT>
                     <a:lnB w="6350" cap="flat" cmpd="sng" algn="ctr">
                       <a:solidFill>
-                        <a:srgbClr val="2E2A3A"/>
+                        <a:srgbClr val="5E4F85"/>
                       </a:solidFill>
                       <a:prstDash val="solid"/>
                       <a:round/>
@@ -22623,7 +22970,7 @@
                       <a:tailEnd type="none" w="med" len="med"/>
                     </a:lnB>
                     <a:solidFill>
-                      <a:srgbClr val="17141F"/>
+                      <a:srgbClr val="000000"/>
                     </a:solidFill>
                   </a:tcPr>
                 </a:tc>
@@ -22656,7 +23003,7 @@
                   <a:tcPr marL="73152" marR="73152" marT="73152" marB="73152" anchor="ctr">
                     <a:lnL w="6350" cap="flat" cmpd="sng" algn="ctr">
                       <a:solidFill>
-                        <a:srgbClr val="2E2A3A"/>
+                        <a:srgbClr val="5E4F85"/>
                       </a:solidFill>
                       <a:prstDash val="solid"/>
                       <a:round/>
@@ -22665,7 +23012,7 @@
                     </a:lnL>
                     <a:lnR w="6350" cap="flat" cmpd="sng" algn="ctr">
                       <a:solidFill>
-                        <a:srgbClr val="2E2A3A"/>
+                        <a:srgbClr val="5E4F85"/>
                       </a:solidFill>
                       <a:prstDash val="solid"/>
                       <a:round/>
@@ -22674,7 +23021,7 @@
                     </a:lnR>
                     <a:lnT w="6350" cap="flat" cmpd="sng" algn="ctr">
                       <a:solidFill>
-                        <a:srgbClr val="2E2A3A"/>
+                        <a:srgbClr val="5E4F85"/>
                       </a:solidFill>
                       <a:prstDash val="solid"/>
                       <a:round/>
@@ -22683,7 +23030,7 @@
                     </a:lnT>
                     <a:lnB w="6350" cap="flat" cmpd="sng" algn="ctr">
                       <a:solidFill>
-                        <a:srgbClr val="2E2A3A"/>
+                        <a:srgbClr val="5E4F85"/>
                       </a:solidFill>
                       <a:prstDash val="solid"/>
                       <a:round/>
@@ -22691,7 +23038,7 @@
                       <a:tailEnd type="none" w="med" len="med"/>
                     </a:lnB>
                     <a:solidFill>
-                      <a:srgbClr val="17141F"/>
+                      <a:srgbClr val="000000"/>
                     </a:solidFill>
                   </a:tcPr>
                 </a:tc>
@@ -22724,7 +23071,7 @@
                   <a:tcPr marL="73152" marR="73152" marT="73152" marB="73152" anchor="ctr">
                     <a:lnL w="6350" cap="flat" cmpd="sng" algn="ctr">
                       <a:solidFill>
-                        <a:srgbClr val="2E2A3A"/>
+                        <a:srgbClr val="5E4F85"/>
                       </a:solidFill>
                       <a:prstDash val="solid"/>
                       <a:round/>
@@ -22733,7 +23080,7 @@
                     </a:lnL>
                     <a:lnR w="6350" cap="flat" cmpd="sng" algn="ctr">
                       <a:solidFill>
-                        <a:srgbClr val="2E2A3A"/>
+                        <a:srgbClr val="5E4F85"/>
                       </a:solidFill>
                       <a:prstDash val="solid"/>
                       <a:round/>
@@ -22742,7 +23089,7 @@
                     </a:lnR>
                     <a:lnT w="6350" cap="flat" cmpd="sng" algn="ctr">
                       <a:solidFill>
-                        <a:srgbClr val="2E2A3A"/>
+                        <a:srgbClr val="5E4F85"/>
                       </a:solidFill>
                       <a:prstDash val="solid"/>
                       <a:round/>
@@ -22751,7 +23098,7 @@
                     </a:lnT>
                     <a:lnB w="6350" cap="flat" cmpd="sng" algn="ctr">
                       <a:solidFill>
-                        <a:srgbClr val="2E2A3A"/>
+                        <a:srgbClr val="5E4F85"/>
                       </a:solidFill>
                       <a:prstDash val="solid"/>
                       <a:round/>
@@ -22759,7 +23106,7 @@
                       <a:tailEnd type="none" w="med" len="med"/>
                     </a:lnB>
                     <a:solidFill>
-                      <a:srgbClr val="17141F"/>
+                      <a:srgbClr val="000000"/>
                     </a:solidFill>
                   </a:tcPr>
                 </a:tc>
@@ -22794,7 +23141,7 @@
                   <a:tcPr marL="73152" marR="73152" marT="73152" marB="73152" anchor="ctr">
                     <a:lnL w="6350" cap="flat" cmpd="sng" algn="ctr">
                       <a:solidFill>
-                        <a:srgbClr val="2E2A3A"/>
+                        <a:srgbClr val="5E4F85"/>
                       </a:solidFill>
                       <a:prstDash val="solid"/>
                       <a:round/>
@@ -22803,7 +23150,7 @@
                     </a:lnL>
                     <a:lnR w="6350" cap="flat" cmpd="sng" algn="ctr">
                       <a:solidFill>
-                        <a:srgbClr val="2E2A3A"/>
+                        <a:srgbClr val="5E4F85"/>
                       </a:solidFill>
                       <a:prstDash val="solid"/>
                       <a:round/>
@@ -22812,7 +23159,7 @@
                     </a:lnR>
                     <a:lnT w="6350" cap="flat" cmpd="sng" algn="ctr">
                       <a:solidFill>
-                        <a:srgbClr val="2E2A3A"/>
+                        <a:srgbClr val="5E4F85"/>
                       </a:solidFill>
                       <a:prstDash val="solid"/>
                       <a:round/>
@@ -22821,7 +23168,7 @@
                     </a:lnT>
                     <a:lnB w="6350" cap="flat" cmpd="sng" algn="ctr">
                       <a:solidFill>
-                        <a:srgbClr val="2E2A3A"/>
+                        <a:srgbClr val="5E4F85"/>
                       </a:solidFill>
                       <a:prstDash val="solid"/>
                       <a:round/>
@@ -22829,7 +23176,7 @@
                       <a:tailEnd type="none" w="med" len="med"/>
                     </a:lnB>
                     <a:solidFill>
-                      <a:srgbClr val="17141F"/>
+                      <a:srgbClr val="000000"/>
                     </a:solidFill>
                   </a:tcPr>
                 </a:tc>
@@ -22862,7 +23209,7 @@
                   <a:tcPr marL="73152" marR="73152" marT="73152" marB="73152" anchor="ctr">
                     <a:lnL w="6350" cap="flat" cmpd="sng" algn="ctr">
                       <a:solidFill>
-                        <a:srgbClr val="2E2A3A"/>
+                        <a:srgbClr val="5E4F85"/>
                       </a:solidFill>
                       <a:prstDash val="solid"/>
                       <a:round/>
@@ -22871,7 +23218,7 @@
                     </a:lnL>
                     <a:lnR w="6350" cap="flat" cmpd="sng" algn="ctr">
                       <a:solidFill>
-                        <a:srgbClr val="2E2A3A"/>
+                        <a:srgbClr val="5E4F85"/>
                       </a:solidFill>
                       <a:prstDash val="solid"/>
                       <a:round/>
@@ -22880,7 +23227,7 @@
                     </a:lnR>
                     <a:lnT w="6350" cap="flat" cmpd="sng" algn="ctr">
                       <a:solidFill>
-                        <a:srgbClr val="2E2A3A"/>
+                        <a:srgbClr val="5E4F85"/>
                       </a:solidFill>
                       <a:prstDash val="solid"/>
                       <a:round/>
@@ -22889,7 +23236,7 @@
                     </a:lnT>
                     <a:lnB w="6350" cap="flat" cmpd="sng" algn="ctr">
                       <a:solidFill>
-                        <a:srgbClr val="2E2A3A"/>
+                        <a:srgbClr val="5E4F85"/>
                       </a:solidFill>
                       <a:prstDash val="solid"/>
                       <a:round/>
@@ -22897,7 +23244,7 @@
                       <a:tailEnd type="none" w="med" len="med"/>
                     </a:lnB>
                     <a:solidFill>
-                      <a:srgbClr val="17141F"/>
+                      <a:srgbClr val="000000"/>
                     </a:solidFill>
                   </a:tcPr>
                 </a:tc>
@@ -22930,7 +23277,7 @@
                   <a:tcPr marL="73152" marR="73152" marT="73152" marB="73152" anchor="ctr">
                     <a:lnL w="6350" cap="flat" cmpd="sng" algn="ctr">
                       <a:solidFill>
-                        <a:srgbClr val="2E2A3A"/>
+                        <a:srgbClr val="5E4F85"/>
                       </a:solidFill>
                       <a:prstDash val="solid"/>
                       <a:round/>
@@ -22939,7 +23286,7 @@
                     </a:lnL>
                     <a:lnR w="6350" cap="flat" cmpd="sng" algn="ctr">
                       <a:solidFill>
-                        <a:srgbClr val="2E2A3A"/>
+                        <a:srgbClr val="5E4F85"/>
                       </a:solidFill>
                       <a:prstDash val="solid"/>
                       <a:round/>
@@ -22948,7 +23295,7 @@
                     </a:lnR>
                     <a:lnT w="6350" cap="flat" cmpd="sng" algn="ctr">
                       <a:solidFill>
-                        <a:srgbClr val="2E2A3A"/>
+                        <a:srgbClr val="5E4F85"/>
                       </a:solidFill>
                       <a:prstDash val="solid"/>
                       <a:round/>
@@ -22957,7 +23304,7 @@
                     </a:lnT>
                     <a:lnB w="6350" cap="flat" cmpd="sng" algn="ctr">
                       <a:solidFill>
-                        <a:srgbClr val="2E2A3A"/>
+                        <a:srgbClr val="5E4F85"/>
                       </a:solidFill>
                       <a:prstDash val="solid"/>
                       <a:round/>
@@ -22965,7 +23312,7 @@
                       <a:tailEnd type="none" w="med" len="med"/>
                     </a:lnB>
                     <a:solidFill>
-                      <a:srgbClr val="17141F"/>
+                      <a:srgbClr val="000000"/>
                     </a:solidFill>
                   </a:tcPr>
                 </a:tc>
@@ -22982,7 +23329,7 @@
                       <a:r>
                         <a:rPr lang="en-US" sz="1150" b="1" dirty="0">
                           <a:solidFill>
-                            <a:srgbClr val="FF7B7B"/>
+                            <a:srgbClr val="FF6B6B"/>
                           </a:solidFill>
                           <a:latin typeface="Montserrat" pitchFamily="34" charset="0"/>
                           <a:ea typeface="Montserrat" pitchFamily="34" charset="-122"/>
@@ -23000,7 +23347,7 @@
                   <a:tcPr marL="73152" marR="73152" marT="73152" marB="73152" anchor="ctr">
                     <a:lnL w="6350" cap="flat" cmpd="sng" algn="ctr">
                       <a:solidFill>
-                        <a:srgbClr val="2E2A3A"/>
+                        <a:srgbClr val="5E4F85"/>
                       </a:solidFill>
                       <a:prstDash val="solid"/>
                       <a:round/>
@@ -23009,7 +23356,7 @@
                     </a:lnL>
                     <a:lnR w="6350" cap="flat" cmpd="sng" algn="ctr">
                       <a:solidFill>
-                        <a:srgbClr val="2E2A3A"/>
+                        <a:srgbClr val="5E4F85"/>
                       </a:solidFill>
                       <a:prstDash val="solid"/>
                       <a:round/>
@@ -23018,7 +23365,7 @@
                     </a:lnR>
                     <a:lnT w="6350" cap="flat" cmpd="sng" algn="ctr">
                       <a:solidFill>
-                        <a:srgbClr val="2E2A3A"/>
+                        <a:srgbClr val="5E4F85"/>
                       </a:solidFill>
                       <a:prstDash val="solid"/>
                       <a:round/>
@@ -23027,7 +23374,7 @@
                     </a:lnT>
                     <a:lnB w="6350" cap="flat" cmpd="sng" algn="ctr">
                       <a:solidFill>
-                        <a:srgbClr val="2E2A3A"/>
+                        <a:srgbClr val="5E4F85"/>
                       </a:solidFill>
                       <a:prstDash val="solid"/>
                       <a:round/>
@@ -23035,7 +23382,7 @@
                       <a:tailEnd type="none" w="med" len="med"/>
                     </a:lnB>
                     <a:solidFill>
-                      <a:srgbClr val="2E1418"/>
+                      <a:srgbClr val="1A0808"/>
                     </a:solidFill>
                   </a:tcPr>
                 </a:tc>
@@ -23068,7 +23415,7 @@
                   <a:tcPr marL="73152" marR="73152" marT="73152" marB="73152" anchor="ctr">
                     <a:lnL w="6350" cap="flat" cmpd="sng" algn="ctr">
                       <a:solidFill>
-                        <a:srgbClr val="2E2A3A"/>
+                        <a:srgbClr val="5E4F85"/>
                       </a:solidFill>
                       <a:prstDash val="solid"/>
                       <a:round/>
@@ -23077,7 +23424,7 @@
                     </a:lnL>
                     <a:lnR w="6350" cap="flat" cmpd="sng" algn="ctr">
                       <a:solidFill>
-                        <a:srgbClr val="2E2A3A"/>
+                        <a:srgbClr val="5E4F85"/>
                       </a:solidFill>
                       <a:prstDash val="solid"/>
                       <a:round/>
@@ -23086,7 +23433,7 @@
                     </a:lnR>
                     <a:lnT w="6350" cap="flat" cmpd="sng" algn="ctr">
                       <a:solidFill>
-                        <a:srgbClr val="2E2A3A"/>
+                        <a:srgbClr val="5E4F85"/>
                       </a:solidFill>
                       <a:prstDash val="solid"/>
                       <a:round/>
@@ -23095,7 +23442,7 @@
                     </a:lnT>
                     <a:lnB w="6350" cap="flat" cmpd="sng" algn="ctr">
                       <a:solidFill>
-                        <a:srgbClr val="2E2A3A"/>
+                        <a:srgbClr val="5E4F85"/>
                       </a:solidFill>
                       <a:prstDash val="solid"/>
                       <a:round/>
@@ -23103,7 +23450,7 @@
                       <a:tailEnd type="none" w="med" len="med"/>
                     </a:lnB>
                     <a:solidFill>
-                      <a:srgbClr val="2E1418"/>
+                      <a:srgbClr val="1A0808"/>
                     </a:solidFill>
                   </a:tcPr>
                 </a:tc>
@@ -23136,7 +23483,7 @@
                   <a:tcPr marL="73152" marR="73152" marT="73152" marB="73152" anchor="ctr">
                     <a:lnL w="6350" cap="flat" cmpd="sng" algn="ctr">
                       <a:solidFill>
-                        <a:srgbClr val="2E2A3A"/>
+                        <a:srgbClr val="5E4F85"/>
                       </a:solidFill>
                       <a:prstDash val="solid"/>
                       <a:round/>
@@ -23145,7 +23492,7 @@
                     </a:lnL>
                     <a:lnR w="6350" cap="flat" cmpd="sng" algn="ctr">
                       <a:solidFill>
-                        <a:srgbClr val="2E2A3A"/>
+                        <a:srgbClr val="5E4F85"/>
                       </a:solidFill>
                       <a:prstDash val="solid"/>
                       <a:round/>
@@ -23154,7 +23501,7 @@
                     </a:lnR>
                     <a:lnT w="6350" cap="flat" cmpd="sng" algn="ctr">
                       <a:solidFill>
-                        <a:srgbClr val="2E2A3A"/>
+                        <a:srgbClr val="5E4F85"/>
                       </a:solidFill>
                       <a:prstDash val="solid"/>
                       <a:round/>
@@ -23163,7 +23510,7 @@
                     </a:lnT>
                     <a:lnB w="6350" cap="flat" cmpd="sng" algn="ctr">
                       <a:solidFill>
-                        <a:srgbClr val="2E2A3A"/>
+                        <a:srgbClr val="5E4F85"/>
                       </a:solidFill>
                       <a:prstDash val="solid"/>
                       <a:round/>
@@ -23171,7 +23518,7 @@
                       <a:tailEnd type="none" w="med" len="med"/>
                     </a:lnB>
                     <a:solidFill>
-                      <a:srgbClr val="2E1418"/>
+                      <a:srgbClr val="1A0808"/>
                     </a:solidFill>
                   </a:tcPr>
                 </a:tc>
@@ -23274,7 +23621,7 @@
             <a:lvl1pPr>
               <a:defRPr sz="850">
                 <a:solidFill>
-                  <a:srgbClr val="8A82A0"/>
+                  <a:srgbClr val="9A94AA"/>
                 </a:solidFill>
                 <a:latin typeface="Courier New"/>
                 <a:ea typeface="Courier New"/>
@@ -23344,7 +23691,7 @@
             <a:r>
               <a:rPr lang="en-US" sz="2600" b="1" dirty="0">
                 <a:solidFill>
-                  <a:srgbClr val="C9A6FF"/>
+                  <a:srgbClr val="A98BFF"/>
                 </a:solidFill>
                 <a:latin typeface="Courier New" pitchFamily="34" charset="0"/>
                 <a:ea typeface="Courier New" pitchFamily="34" charset="-122"/>
@@ -23412,9 +23759,14 @@
             </a:avLst>
           </a:prstGeom>
           <a:solidFill>
-            <a:srgbClr val="C9A6FF"/>
+            <a:srgbClr val="1A0B3D"/>
           </a:solidFill>
-          <a:ln/>
+          <a:ln w="12700">
+            <a:solidFill>
+              <a:srgbClr val="5A05F4"/>
+            </a:solidFill>
+            <a:prstDash val="solid"/>
+          </a:ln>
         </p:spPr>
       </p:sp>
       <p:sp>
@@ -23444,7 +23796,7 @@
             <a:r>
               <a:rPr lang="en-US" sz="900" b="1" spc="100" kern="0" dirty="0">
                 <a:solidFill>
-                  <a:srgbClr val="1C1140"/>
+                  <a:srgbClr val="A98BFF"/>
                 </a:solidFill>
                 <a:latin typeface="Courier New" pitchFamily="34" charset="0"/>
                 <a:ea typeface="Courier New" pitchFamily="34" charset="-122"/>
@@ -23497,9 +23849,14 @@
             </a:avLst>
           </a:prstGeom>
           <a:solidFill>
-            <a:srgbClr val="2A2010"/>
+            <a:srgbClr val="0B1A38"/>
           </a:solidFill>
-          <a:ln/>
+          <a:ln w="12700">
+            <a:solidFill>
+              <a:srgbClr val="6BA0F8"/>
+            </a:solidFill>
+            <a:prstDash val="solid"/>
+          </a:ln>
         </p:spPr>
       </p:sp>
       <p:sp>
@@ -23529,7 +23886,7 @@
             <a:r>
               <a:rPr lang="en-US" sz="1350" b="1" dirty="0">
                 <a:solidFill>
-                  <a:srgbClr val="E8A857"/>
+                  <a:srgbClr val="6BA0F8"/>
                 </a:solidFill>
                 <a:latin typeface="Montserrat" pitchFamily="34" charset="0"/>
                 <a:ea typeface="Montserrat" pitchFamily="34" charset="-122"/>
@@ -23568,7 +23925,7 @@
             <a:r>
               <a:rPr lang="en-US" sz="1150" dirty="0">
                 <a:solidFill>
-                  <a:srgbClr val="FFFFFF"/>
+                  <a:srgbClr val="C9C4D6"/>
                 </a:solidFill>
                 <a:latin typeface="Montserrat" pitchFamily="34" charset="0"/>
                 <a:ea typeface="Montserrat" pitchFamily="34" charset="-122"/>
@@ -23597,11 +23954,11 @@
             </a:avLst>
           </a:prstGeom>
           <a:solidFill>
-            <a:srgbClr val="17141F"/>
+            <a:srgbClr val="000000"/>
           </a:solidFill>
           <a:ln w="12700">
             <a:solidFill>
-              <a:srgbClr val="2E2A3A"/>
+              <a:srgbClr val="5E4F85"/>
             </a:solidFill>
             <a:prstDash val="solid"/>
           </a:ln>
@@ -23673,7 +24030,7 @@
             <a:r>
               <a:rPr lang="en-US" sz="1150" dirty="0">
                 <a:solidFill>
-                  <a:srgbClr val="AFA9BE"/>
+                  <a:srgbClr val="C9C4D6"/>
                 </a:solidFill>
                 <a:latin typeface="Montserrat" pitchFamily="34" charset="0"/>
                 <a:ea typeface="Montserrat" pitchFamily="34" charset="-122"/>
@@ -23702,9 +24059,14 @@
             </a:avLst>
           </a:prstGeom>
           <a:solidFill>
-            <a:srgbClr val="102A20"/>
+            <a:srgbClr val="06180F"/>
           </a:solidFill>
-          <a:ln/>
+          <a:ln w="12700">
+            <a:solidFill>
+              <a:srgbClr val="3FCF8E"/>
+            </a:solidFill>
+            <a:prstDash val="solid"/>
+          </a:ln>
         </p:spPr>
       </p:sp>
       <p:sp>
@@ -23734,7 +24096,7 @@
             <a:r>
               <a:rPr lang="en-US" sz="1350" b="1" dirty="0">
                 <a:solidFill>
-                  <a:srgbClr val="5FD6A0"/>
+                  <a:srgbClr val="3FCF8E"/>
                 </a:solidFill>
                 <a:latin typeface="Montserrat" pitchFamily="34" charset="0"/>
                 <a:ea typeface="Montserrat" pitchFamily="34" charset="-122"/>
@@ -23773,7 +24135,7 @@
             <a:r>
               <a:rPr lang="en-US" sz="1150" dirty="0">
                 <a:solidFill>
-                  <a:srgbClr val="FFFFFF"/>
+                  <a:srgbClr val="C9C4D6"/>
                 </a:solidFill>
                 <a:latin typeface="Montserrat" pitchFamily="34" charset="0"/>
                 <a:ea typeface="Montserrat" pitchFamily="34" charset="-122"/>
@@ -23841,7 +24203,7 @@
           <a:noFill/>
           <a:ln w="12700">
             <a:solidFill>
-              <a:srgbClr val="2E2A3A"/>
+              <a:srgbClr val="5E4F85"/>
             </a:solidFill>
             <a:prstDash val="solid"/>
           </a:ln>
@@ -23862,7 +24224,7 @@
             <a:avLst/>
           </a:prstGeom>
           <a:solidFill>
-            <a:srgbClr val="E8A857"/>
+            <a:srgbClr val="6BA0F8"/>
           </a:solidFill>
           <a:ln/>
         </p:spPr>
@@ -23882,7 +24244,7 @@
             <a:avLst/>
           </a:prstGeom>
           <a:solidFill>
-            <a:srgbClr val="E8A857"/>
+            <a:srgbClr val="6BA0F8"/>
           </a:solidFill>
           <a:ln/>
         </p:spPr>
@@ -23902,7 +24264,7 @@
             <a:avLst/>
           </a:prstGeom>
           <a:solidFill>
-            <a:srgbClr val="E8A857"/>
+            <a:srgbClr val="6BA0F8"/>
           </a:solidFill>
           <a:ln/>
         </p:spPr>
@@ -23922,7 +24284,7 @@
             <a:avLst/>
           </a:prstGeom>
           <a:solidFill>
-            <a:srgbClr val="E8A857"/>
+            <a:srgbClr val="6BA0F8"/>
           </a:solidFill>
           <a:ln/>
         </p:spPr>
@@ -23942,7 +24304,7 @@
             <a:avLst/>
           </a:prstGeom>
           <a:solidFill>
-            <a:srgbClr val="E8A857"/>
+            <a:srgbClr val="6BA0F8"/>
           </a:solidFill>
           <a:ln/>
         </p:spPr>
@@ -24003,7 +24365,7 @@
           <a:noFill/>
           <a:ln w="12700">
             <a:solidFill>
-              <a:srgbClr val="2E2A3A"/>
+              <a:srgbClr val="5E4F85"/>
             </a:solidFill>
             <a:prstDash val="solid"/>
           </a:ln>
@@ -24024,7 +24386,7 @@
             <a:avLst/>
           </a:prstGeom>
           <a:solidFill>
-            <a:srgbClr val="C9A6FF"/>
+            <a:srgbClr val="A98BFF"/>
           </a:solidFill>
           <a:ln/>
         </p:spPr>
@@ -24044,7 +24406,7 @@
             <a:avLst/>
           </a:prstGeom>
           <a:solidFill>
-            <a:srgbClr val="C9A6FF"/>
+            <a:srgbClr val="A98BFF"/>
           </a:solidFill>
           <a:ln/>
         </p:spPr>
@@ -24064,7 +24426,7 @@
             <a:avLst/>
           </a:prstGeom>
           <a:solidFill>
-            <a:srgbClr val="C9A6FF"/>
+            <a:srgbClr val="A98BFF"/>
           </a:solidFill>
           <a:ln/>
         </p:spPr>
@@ -24084,7 +24446,7 @@
             <a:avLst/>
           </a:prstGeom>
           <a:solidFill>
-            <a:srgbClr val="C9A6FF"/>
+            <a:srgbClr val="A98BFF"/>
           </a:solidFill>
           <a:ln/>
         </p:spPr>
@@ -24145,7 +24507,7 @@
           <a:noFill/>
           <a:ln w="12700">
             <a:solidFill>
-              <a:srgbClr val="2E2A3A"/>
+              <a:srgbClr val="5E4F85"/>
             </a:solidFill>
             <a:prstDash val="solid"/>
           </a:ln>
@@ -24166,7 +24528,7 @@
             <a:avLst/>
           </a:prstGeom>
           <a:solidFill>
-            <a:srgbClr val="5FD6A0"/>
+            <a:srgbClr val="3FCF8E"/>
           </a:solidFill>
           <a:ln/>
         </p:spPr>
@@ -24186,7 +24548,7 @@
             <a:avLst/>
           </a:prstGeom>
           <a:solidFill>
-            <a:srgbClr val="5FD6A0"/>
+            <a:srgbClr val="3FCF8E"/>
           </a:solidFill>
           <a:ln/>
         </p:spPr>
@@ -24206,7 +24568,7 @@
             <a:avLst/>
           </a:prstGeom>
           <a:solidFill>
-            <a:srgbClr val="5FD6A0"/>
+            <a:srgbClr val="3FCF8E"/>
           </a:solidFill>
           <a:ln/>
         </p:spPr>
@@ -24226,7 +24588,7 @@
             <a:avLst/>
           </a:prstGeom>
           <a:solidFill>
-            <a:srgbClr val="5FD6A0"/>
+            <a:srgbClr val="3FCF8E"/>
           </a:solidFill>
           <a:ln/>
         </p:spPr>
@@ -24246,7 +24608,7 @@
             <a:avLst/>
           </a:prstGeom>
           <a:solidFill>
-            <a:srgbClr val="5FD6A0"/>
+            <a:srgbClr val="3FCF8E"/>
           </a:solidFill>
           <a:ln/>
         </p:spPr>
@@ -24268,9 +24630,14 @@
             </a:avLst>
           </a:prstGeom>
           <a:solidFill>
-            <a:srgbClr val="2E1418"/>
+            <a:srgbClr val="1A0808"/>
           </a:solidFill>
-          <a:ln/>
+          <a:ln w="12700">
+            <a:solidFill>
+              <a:srgbClr val="FF6B6B"/>
+            </a:solidFill>
+            <a:prstDash val="solid"/>
+          </a:ln>
         </p:spPr>
       </p:sp>
       <p:sp>
@@ -24300,7 +24667,7 @@
             <a:r>
               <a:rPr lang="en-US" sz="950" b="1" spc="150" kern="0" dirty="0">
                 <a:solidFill>
-                  <a:srgbClr val="FF7B7B"/>
+                  <a:srgbClr val="FF6B6B"/>
                 </a:solidFill>
                 <a:latin typeface="Courier New" pitchFamily="34" charset="0"/>
                 <a:ea typeface="Courier New" pitchFamily="34" charset="-122"/>
@@ -24384,7 +24751,7 @@
             <a:lvl1pPr>
               <a:defRPr sz="850">
                 <a:solidFill>
-                  <a:srgbClr val="8A82A0"/>
+                  <a:srgbClr val="9A94AA"/>
                 </a:solidFill>
                 <a:latin typeface="Courier New"/>
                 <a:ea typeface="Courier New"/>
@@ -24454,7 +24821,7 @@
             <a:r>
               <a:rPr lang="en-US" sz="2600" b="1" dirty="0">
                 <a:solidFill>
-                  <a:srgbClr val="C9A6FF"/>
+                  <a:srgbClr val="A98BFF"/>
                 </a:solidFill>
                 <a:latin typeface="Courier New" pitchFamily="34" charset="0"/>
                 <a:ea typeface="Courier New" pitchFamily="34" charset="-122"/>
@@ -24522,9 +24889,14 @@
             </a:avLst>
           </a:prstGeom>
           <a:solidFill>
-            <a:srgbClr val="C9A6FF"/>
+            <a:srgbClr val="1A0B3D"/>
           </a:solidFill>
-          <a:ln/>
+          <a:ln w="12700">
+            <a:solidFill>
+              <a:srgbClr val="5A05F4"/>
+            </a:solidFill>
+            <a:prstDash val="solid"/>
+          </a:ln>
         </p:spPr>
       </p:sp>
       <p:sp>
@@ -24554,7 +24926,7 @@
             <a:r>
               <a:rPr lang="en-US" sz="900" b="1" spc="100" kern="0" dirty="0">
                 <a:solidFill>
-                  <a:srgbClr val="1C1140"/>
+                  <a:srgbClr val="A98BFF"/>
                 </a:solidFill>
                 <a:latin typeface="Courier New" pitchFamily="34" charset="0"/>
                 <a:ea typeface="Courier New" pitchFamily="34" charset="-122"/>
@@ -24607,11 +24979,11 @@
             </a:avLst>
           </a:prstGeom>
           <a:solidFill>
-            <a:srgbClr val="12101A"/>
+            <a:srgbClr val="07060C"/>
           </a:solidFill>
           <a:ln w="12700">
             <a:solidFill>
-              <a:srgbClr val="2E2A3A"/>
+              <a:srgbClr val="5E4F85"/>
             </a:solidFill>
             <a:prstDash val="solid"/>
           </a:ln>
@@ -24647,7 +25019,7 @@
             <a:r>
               <a:rPr lang="en-US" sz="1150" dirty="0">
                 <a:solidFill>
-                  <a:srgbClr val="8A82A0"/>
+                  <a:srgbClr val="9A94AA"/>
                 </a:solidFill>
                 <a:latin typeface="Courier New" pitchFamily="34" charset="0"/>
                 <a:ea typeface="Courier New" pitchFamily="34" charset="-122"/>
@@ -24667,7 +25039,7 @@
             <a:r>
               <a:rPr lang="en-US" sz="1150" dirty="0">
                 <a:solidFill>
-                  <a:srgbClr val="C9A6FF"/>
+                  <a:srgbClr val="A98BFF"/>
                 </a:solidFill>
                 <a:latin typeface="Courier New" pitchFamily="34" charset="0"/>
                 <a:ea typeface="Courier New" pitchFamily="34" charset="-122"/>
@@ -24687,7 +25059,7 @@
             <a:r>
               <a:rPr lang="en-US" sz="1150" dirty="0">
                 <a:solidFill>
-                  <a:srgbClr val="C9A6FF"/>
+                  <a:srgbClr val="A98BFF"/>
                 </a:solidFill>
                 <a:latin typeface="Courier New" pitchFamily="34" charset="0"/>
                 <a:ea typeface="Courier New" pitchFamily="34" charset="-122"/>
@@ -24747,7 +25119,7 @@
             <a:r>
               <a:rPr lang="en-US" sz="1150" dirty="0">
                 <a:solidFill>
-                  <a:srgbClr val="F0B36B"/>
+                  <a:srgbClr val="C9C4D6"/>
                 </a:solidFill>
                 <a:latin typeface="Courier New" pitchFamily="34" charset="0"/>
                 <a:ea typeface="Courier New" pitchFamily="34" charset="-122"/>
@@ -24767,7 +25139,7 @@
             <a:r>
               <a:rPr lang="en-US" sz="1150" dirty="0">
                 <a:solidFill>
-                  <a:srgbClr val="7FD9A6"/>
+                  <a:srgbClr val="6BA0F8"/>
                 </a:solidFill>
                 <a:latin typeface="Courier New" pitchFamily="34" charset="0"/>
                 <a:ea typeface="Courier New" pitchFamily="34" charset="-122"/>
@@ -24787,7 +25159,7 @@
             <a:r>
               <a:rPr lang="en-US" sz="1150" dirty="0">
                 <a:solidFill>
-                  <a:srgbClr val="F0B36B"/>
+                  <a:srgbClr val="C9C4D6"/>
                 </a:solidFill>
                 <a:latin typeface="Courier New" pitchFamily="34" charset="0"/>
                 <a:ea typeface="Courier New" pitchFamily="34" charset="-122"/>
@@ -24836,9 +25208,14 @@
             </a:avLst>
           </a:prstGeom>
           <a:solidFill>
-            <a:srgbClr val="102A20"/>
+            <a:srgbClr val="06180F"/>
           </a:solidFill>
-          <a:ln/>
+          <a:ln w="12700">
+            <a:solidFill>
+              <a:srgbClr val="3FCF8E"/>
+            </a:solidFill>
+            <a:prstDash val="solid"/>
+          </a:ln>
         </p:spPr>
       </p:sp>
       <p:sp>
@@ -24856,7 +25233,7 @@
             <a:avLst/>
           </a:prstGeom>
           <a:solidFill>
-            <a:srgbClr val="5FD6A0"/>
+            <a:srgbClr val="5A05F4"/>
           </a:solidFill>
           <a:ln/>
         </p:spPr>
@@ -24888,7 +25265,7 @@
             <a:r>
               <a:rPr lang="en-US" sz="1200" b="1" dirty="0">
                 <a:solidFill>
-                  <a:srgbClr val="102A20"/>
+                  <a:srgbClr val="FFFFFF"/>
                 </a:solidFill>
                 <a:latin typeface="Courier New" pitchFamily="34" charset="0"/>
                 <a:ea typeface="Courier New" pitchFamily="34" charset="-122"/>
@@ -24927,7 +25304,7 @@
             <a:r>
               <a:rPr lang="en-US" sz="1450" b="1" dirty="0">
                 <a:solidFill>
-                  <a:srgbClr val="5FD6A0"/>
+                  <a:srgbClr val="3FCF8E"/>
                 </a:solidFill>
                 <a:latin typeface="Montserrat" pitchFamily="34" charset="0"/>
                 <a:ea typeface="Montserrat" pitchFamily="34" charset="-122"/>
@@ -24969,7 +25346,7 @@
             <a:r>
               <a:rPr lang="en-US" sz="1200" dirty="0">
                 <a:solidFill>
-                  <a:srgbClr val="FFFFFF"/>
+                  <a:srgbClr val="C9C4D6"/>
                 </a:solidFill>
                 <a:latin typeface="Montserrat" pitchFamily="34" charset="0"/>
                 <a:ea typeface="Montserrat" pitchFamily="34" charset="-122"/>
@@ -24998,9 +25375,14 @@
             </a:avLst>
           </a:prstGeom>
           <a:solidFill>
-            <a:srgbClr val="102A20"/>
+            <a:srgbClr val="06180F"/>
           </a:solidFill>
-          <a:ln/>
+          <a:ln w="12700">
+            <a:solidFill>
+              <a:srgbClr val="3FCF8E"/>
+            </a:solidFill>
+            <a:prstDash val="solid"/>
+          </a:ln>
         </p:spPr>
       </p:sp>
       <p:sp>
@@ -25018,7 +25400,7 @@
             <a:avLst/>
           </a:prstGeom>
           <a:solidFill>
-            <a:srgbClr val="5FD6A0"/>
+            <a:srgbClr val="5A05F4"/>
           </a:solidFill>
           <a:ln/>
         </p:spPr>
@@ -25050,7 +25432,7 @@
             <a:r>
               <a:rPr lang="en-US" sz="1200" b="1" dirty="0">
                 <a:solidFill>
-                  <a:srgbClr val="102A20"/>
+                  <a:srgbClr val="FFFFFF"/>
                 </a:solidFill>
                 <a:latin typeface="Courier New" pitchFamily="34" charset="0"/>
                 <a:ea typeface="Courier New" pitchFamily="34" charset="-122"/>
@@ -25089,7 +25471,7 @@
             <a:r>
               <a:rPr lang="en-US" sz="1450" b="1" dirty="0">
                 <a:solidFill>
-                  <a:srgbClr val="5FD6A0"/>
+                  <a:srgbClr val="3FCF8E"/>
                 </a:solidFill>
                 <a:latin typeface="Montserrat" pitchFamily="34" charset="0"/>
                 <a:ea typeface="Montserrat" pitchFamily="34" charset="-122"/>
@@ -25131,7 +25513,7 @@
             <a:r>
               <a:rPr lang="en-US" sz="1200" dirty="0">
                 <a:solidFill>
-                  <a:srgbClr val="FFFFFF"/>
+                  <a:srgbClr val="C9C4D6"/>
                 </a:solidFill>
                 <a:latin typeface="Montserrat" pitchFamily="34" charset="0"/>
                 <a:ea typeface="Montserrat" pitchFamily="34" charset="-122"/>
@@ -25160,9 +25542,14 @@
             </a:avLst>
           </a:prstGeom>
           <a:solidFill>
-            <a:srgbClr val="102A20"/>
+            <a:srgbClr val="06180F"/>
           </a:solidFill>
-          <a:ln/>
+          <a:ln w="12700">
+            <a:solidFill>
+              <a:srgbClr val="3FCF8E"/>
+            </a:solidFill>
+            <a:prstDash val="solid"/>
+          </a:ln>
         </p:spPr>
       </p:sp>
       <p:sp>
@@ -25180,7 +25567,7 @@
             <a:avLst/>
           </a:prstGeom>
           <a:solidFill>
-            <a:srgbClr val="5FD6A0"/>
+            <a:srgbClr val="5A05F4"/>
           </a:solidFill>
           <a:ln/>
         </p:spPr>
@@ -25212,7 +25599,7 @@
             <a:r>
               <a:rPr lang="en-US" sz="1200" b="1" dirty="0">
                 <a:solidFill>
-                  <a:srgbClr val="102A20"/>
+                  <a:srgbClr val="FFFFFF"/>
                 </a:solidFill>
                 <a:latin typeface="Courier New" pitchFamily="34" charset="0"/>
                 <a:ea typeface="Courier New" pitchFamily="34" charset="-122"/>
@@ -25251,7 +25638,7 @@
             <a:r>
               <a:rPr lang="en-US" sz="1450" b="1" dirty="0">
                 <a:solidFill>
-                  <a:srgbClr val="5FD6A0"/>
+                  <a:srgbClr val="3FCF8E"/>
                 </a:solidFill>
                 <a:latin typeface="Montserrat" pitchFamily="34" charset="0"/>
                 <a:ea typeface="Montserrat" pitchFamily="34" charset="-122"/>
@@ -25293,7 +25680,7 @@
             <a:r>
               <a:rPr lang="en-US" sz="1200" dirty="0">
                 <a:solidFill>
-                  <a:srgbClr val="FFFFFF"/>
+                  <a:srgbClr val="C9C4D6"/>
                 </a:solidFill>
                 <a:latin typeface="Montserrat" pitchFamily="34" charset="0"/>
                 <a:ea typeface="Montserrat" pitchFamily="34" charset="-122"/>
@@ -25335,7 +25722,7 @@
             <a:lvl1pPr>
               <a:defRPr sz="850">
                 <a:solidFill>
-                  <a:srgbClr val="8A82A0"/>
+                  <a:srgbClr val="9A94AA"/>
                 </a:solidFill>
                 <a:latin typeface="Courier New"/>
                 <a:ea typeface="Courier New"/>
@@ -25405,7 +25792,7 @@
             <a:r>
               <a:rPr lang="en-US" sz="2600" b="1" dirty="0">
                 <a:solidFill>
-                  <a:srgbClr val="C9A6FF"/>
+                  <a:srgbClr val="A98BFF"/>
                 </a:solidFill>
                 <a:latin typeface="Courier New" pitchFamily="34" charset="0"/>
                 <a:ea typeface="Courier New" pitchFamily="34" charset="-122"/>
@@ -25473,9 +25860,14 @@
             </a:avLst>
           </a:prstGeom>
           <a:solidFill>
-            <a:srgbClr val="C9A6FF"/>
+            <a:srgbClr val="1A0B3D"/>
           </a:solidFill>
-          <a:ln/>
+          <a:ln w="12700">
+            <a:solidFill>
+              <a:srgbClr val="5A05F4"/>
+            </a:solidFill>
+            <a:prstDash val="solid"/>
+          </a:ln>
         </p:spPr>
       </p:sp>
       <p:sp>
@@ -25505,7 +25897,7 @@
             <a:r>
               <a:rPr lang="en-US" sz="900" b="1" spc="100" kern="0" dirty="0">
                 <a:solidFill>
-                  <a:srgbClr val="1C1140"/>
+                  <a:srgbClr val="A98BFF"/>
                 </a:solidFill>
                 <a:latin typeface="Courier New" pitchFamily="34" charset="0"/>
                 <a:ea typeface="Courier New" pitchFamily="34" charset="-122"/>
@@ -25558,11 +25950,11 @@
             </a:avLst>
           </a:prstGeom>
           <a:solidFill>
-            <a:srgbClr val="12101A"/>
+            <a:srgbClr val="07060C"/>
           </a:solidFill>
           <a:ln w="12700">
             <a:solidFill>
-              <a:srgbClr val="2E2A3A"/>
+              <a:srgbClr val="5E4F85"/>
             </a:solidFill>
             <a:prstDash val="solid"/>
           </a:ln>
@@ -25598,7 +25990,7 @@
             <a:r>
               <a:rPr lang="en-US" sz="1150" dirty="0">
                 <a:solidFill>
-                  <a:srgbClr val="8A82A0"/>
+                  <a:srgbClr val="9A94AA"/>
                 </a:solidFill>
                 <a:latin typeface="Courier New" pitchFamily="34" charset="0"/>
                 <a:ea typeface="Courier New" pitchFamily="34" charset="-122"/>
@@ -25618,7 +26010,7 @@
             <a:r>
               <a:rPr lang="en-US" sz="1150" dirty="0">
                 <a:solidFill>
-                  <a:srgbClr val="C9A6FF"/>
+                  <a:srgbClr val="A98BFF"/>
                 </a:solidFill>
                 <a:latin typeface="Courier New" pitchFamily="34" charset="0"/>
                 <a:ea typeface="Courier New" pitchFamily="34" charset="-122"/>
@@ -25638,7 +26030,7 @@
             <a:r>
               <a:rPr lang="en-US" sz="1150" dirty="0">
                 <a:solidFill>
-                  <a:srgbClr val="C9A6FF"/>
+                  <a:srgbClr val="A98BFF"/>
                 </a:solidFill>
                 <a:latin typeface="Courier New" pitchFamily="34" charset="0"/>
                 <a:ea typeface="Courier New" pitchFamily="34" charset="-122"/>
@@ -25678,7 +26070,7 @@
             <a:r>
               <a:rPr lang="en-US" sz="1150" dirty="0">
                 <a:solidFill>
-                  <a:srgbClr val="F0B36B"/>
+                  <a:srgbClr val="C9C4D6"/>
                 </a:solidFill>
                 <a:latin typeface="Courier New" pitchFamily="34" charset="0"/>
                 <a:ea typeface="Courier New" pitchFamily="34" charset="-122"/>
@@ -25718,7 +26110,7 @@
             <a:r>
               <a:rPr lang="en-US" sz="1150" dirty="0">
                 <a:solidFill>
-                  <a:srgbClr val="7FD9A6"/>
+                  <a:srgbClr val="6BA0F8"/>
                 </a:solidFill>
                 <a:latin typeface="Courier New" pitchFamily="34" charset="0"/>
                 <a:ea typeface="Courier New" pitchFamily="34" charset="-122"/>
@@ -25767,11 +26159,11 @@
             </a:avLst>
           </a:prstGeom>
           <a:solidFill>
-            <a:srgbClr val="17141F"/>
+            <a:srgbClr val="000000"/>
           </a:solidFill>
           <a:ln w="12700">
             <a:solidFill>
-              <a:srgbClr val="2E2A3A"/>
+              <a:srgbClr val="5E4F85"/>
             </a:solidFill>
             <a:prstDash val="solid"/>
           </a:ln>
@@ -25905,7 +26297,7 @@
             <a:r>
               <a:rPr lang="en-US" sz="1200" dirty="0">
                 <a:solidFill>
-                  <a:srgbClr val="AFA9BE"/>
+                  <a:srgbClr val="C9C4D6"/>
                 </a:solidFill>
                 <a:latin typeface="Montserrat" pitchFamily="34" charset="0"/>
                 <a:ea typeface="Montserrat" pitchFamily="34" charset="-122"/>
@@ -25934,11 +26326,11 @@
             </a:avLst>
           </a:prstGeom>
           <a:solidFill>
-            <a:srgbClr val="17141F"/>
+            <a:srgbClr val="000000"/>
           </a:solidFill>
           <a:ln w="12700">
             <a:solidFill>
-              <a:srgbClr val="2E2A3A"/>
+              <a:srgbClr val="5E4F85"/>
             </a:solidFill>
             <a:prstDash val="solid"/>
           </a:ln>
@@ -26072,7 +26464,7 @@
             <a:r>
               <a:rPr lang="en-US" sz="1200" dirty="0">
                 <a:solidFill>
-                  <a:srgbClr val="AFA9BE"/>
+                  <a:srgbClr val="C9C4D6"/>
                 </a:solidFill>
                 <a:latin typeface="Montserrat" pitchFamily="34" charset="0"/>
                 <a:ea typeface="Montserrat" pitchFamily="34" charset="-122"/>
@@ -26101,9 +26493,14 @@
             </a:avLst>
           </a:prstGeom>
           <a:solidFill>
-            <a:srgbClr val="2A2010"/>
+            <a:srgbClr val="0B1A38"/>
           </a:solidFill>
-          <a:ln/>
+          <a:ln w="12700">
+            <a:solidFill>
+              <a:srgbClr val="6BA0F8"/>
+            </a:solidFill>
+            <a:prstDash val="solid"/>
+          </a:ln>
         </p:spPr>
       </p:sp>
       <p:sp>
@@ -26121,7 +26518,7 @@
             <a:avLst/>
           </a:prstGeom>
           <a:solidFill>
-            <a:srgbClr val="E8A857"/>
+            <a:srgbClr val="5A05F4"/>
           </a:solidFill>
           <a:ln/>
         </p:spPr>
@@ -26153,7 +26550,7 @@
             <a:r>
               <a:rPr lang="en-US" sz="1200" b="1" dirty="0">
                 <a:solidFill>
-                  <a:srgbClr val="2A2010"/>
+                  <a:srgbClr val="FFFFFF"/>
                 </a:solidFill>
                 <a:latin typeface="Courier New" pitchFamily="34" charset="0"/>
                 <a:ea typeface="Courier New" pitchFamily="34" charset="-122"/>
@@ -26192,7 +26589,7 @@
             <a:r>
               <a:rPr lang="en-US" sz="1450" b="1" dirty="0">
                 <a:solidFill>
-                  <a:srgbClr val="E8A857"/>
+                  <a:srgbClr val="6BA0F8"/>
                 </a:solidFill>
                 <a:latin typeface="Montserrat" pitchFamily="34" charset="0"/>
                 <a:ea typeface="Montserrat" pitchFamily="34" charset="-122"/>
@@ -26234,7 +26631,7 @@
             <a:r>
               <a:rPr lang="en-US" sz="1200" dirty="0">
                 <a:solidFill>
-                  <a:srgbClr val="FFFFFF"/>
+                  <a:srgbClr val="C9C4D6"/>
                 </a:solidFill>
                 <a:latin typeface="Montserrat" pitchFamily="34" charset="0"/>
                 <a:ea typeface="Montserrat" pitchFamily="34" charset="-122"/>
@@ -26276,7 +26673,7 @@
             <a:lvl1pPr>
               <a:defRPr sz="850">
                 <a:solidFill>
-                  <a:srgbClr val="8A82A0"/>
+                  <a:srgbClr val="9A94AA"/>
                 </a:solidFill>
                 <a:latin typeface="Courier New"/>
                 <a:ea typeface="Courier New"/>

--- a/docs/decks/L07.pptx
+++ b/docs/decks/L07.pptx
@@ -14035,11 +14035,11 @@
         <p:spPr>
           <a:xfrm>
             <a:off x="566928" y="1783080"/>
-            <a:ext cx="3520440" cy="1463040"/>
+            <a:ext cx="3520440" cy="1874520"/>
           </a:xfrm>
           <a:prstGeom prst="roundRect">
             <a:avLst>
-              <a:gd name="adj" fmla="val 7500"/>
+              <a:gd name="adj" fmla="val 5854"/>
             </a:avLst>
           </a:prstGeom>
           <a:solidFill>
@@ -14155,7 +14155,7 @@
         <p:spPr>
           <a:xfrm>
             <a:off x="768096" y="2468880"/>
-            <a:ext cx="3118104" cy="621792"/>
+            <a:ext cx="3118104" cy="1033272"/>
           </a:xfrm>
           <a:prstGeom prst="rect">
             <a:avLst/>
@@ -14197,11 +14197,11 @@
         <p:spPr>
           <a:xfrm>
             <a:off x="4270248" y="1783080"/>
-            <a:ext cx="3520440" cy="1463040"/>
+            <a:ext cx="3520440" cy="1874520"/>
           </a:xfrm>
           <a:prstGeom prst="roundRect">
             <a:avLst>
-              <a:gd name="adj" fmla="val 7500"/>
+              <a:gd name="adj" fmla="val 5854"/>
             </a:avLst>
           </a:prstGeom>
           <a:solidFill>
@@ -14317,7 +14317,7 @@
         <p:spPr>
           <a:xfrm>
             <a:off x="4471416" y="2468880"/>
-            <a:ext cx="3118104" cy="621792"/>
+            <a:ext cx="3118104" cy="1033272"/>
           </a:xfrm>
           <a:prstGeom prst="rect">
             <a:avLst/>
@@ -14359,11 +14359,11 @@
         <p:spPr>
           <a:xfrm>
             <a:off x="7973568" y="1783080"/>
-            <a:ext cx="3520440" cy="1463040"/>
+            <a:ext cx="3520440" cy="1874520"/>
           </a:xfrm>
           <a:prstGeom prst="roundRect">
             <a:avLst>
-              <a:gd name="adj" fmla="val 7500"/>
+              <a:gd name="adj" fmla="val 5854"/>
             </a:avLst>
           </a:prstGeom>
           <a:solidFill>
@@ -14479,7 +14479,7 @@
         <p:spPr>
           <a:xfrm>
             <a:off x="8174736" y="2468880"/>
-            <a:ext cx="3118104" cy="621792"/>
+            <a:ext cx="3118104" cy="1033272"/>
           </a:xfrm>
           <a:prstGeom prst="rect">
             <a:avLst/>
@@ -14520,12 +14520,12 @@
         </p:nvSpPr>
         <p:spPr>
           <a:xfrm>
-            <a:off x="566928" y="3520440"/>
-            <a:ext cx="3520440" cy="1463040"/>
+            <a:off x="566928" y="3886200"/>
+            <a:ext cx="3520440" cy="1874520"/>
           </a:xfrm>
           <a:prstGeom prst="roundRect">
             <a:avLst>
-              <a:gd name="adj" fmla="val 7500"/>
+              <a:gd name="adj" fmla="val 5854"/>
             </a:avLst>
           </a:prstGeom>
           <a:solidFill>
@@ -14542,7 +14542,7 @@
         </p:nvSpPr>
         <p:spPr>
           <a:xfrm>
-            <a:off x="768096" y="3703320"/>
+            <a:off x="768096" y="4069080"/>
             <a:ext cx="384048" cy="384048"/>
           </a:xfrm>
           <a:prstGeom prst="ellipse">
@@ -14562,7 +14562,7 @@
         </p:nvSpPr>
         <p:spPr>
           <a:xfrm>
-            <a:off x="768096" y="3703320"/>
+            <a:off x="768096" y="4069080"/>
             <a:ext cx="384048" cy="384048"/>
           </a:xfrm>
           <a:prstGeom prst="rect">
@@ -14601,7 +14601,7 @@
         </p:nvSpPr>
         <p:spPr>
           <a:xfrm>
-            <a:off x="1280160" y="3675888"/>
+            <a:off x="1280160" y="4041648"/>
             <a:ext cx="2606040" cy="438912"/>
           </a:xfrm>
           <a:prstGeom prst="rect">
@@ -14640,8 +14640,8 @@
         </p:nvSpPr>
         <p:spPr>
           <a:xfrm>
-            <a:off x="768096" y="4206240"/>
-            <a:ext cx="3118104" cy="621792"/>
+            <a:off x="768096" y="4572000"/>
+            <a:ext cx="3118104" cy="1033272"/>
           </a:xfrm>
           <a:prstGeom prst="rect">
             <a:avLst/>
@@ -14682,12 +14682,12 @@
         </p:nvSpPr>
         <p:spPr>
           <a:xfrm>
-            <a:off x="4270248" y="3520440"/>
-            <a:ext cx="3520440" cy="1463040"/>
+            <a:off x="4270248" y="3886200"/>
+            <a:ext cx="3520440" cy="1874520"/>
           </a:xfrm>
           <a:prstGeom prst="roundRect">
             <a:avLst>
-              <a:gd name="adj" fmla="val 7500"/>
+              <a:gd name="adj" fmla="val 5854"/>
             </a:avLst>
           </a:prstGeom>
           <a:solidFill>
@@ -14704,7 +14704,7 @@
         </p:nvSpPr>
         <p:spPr>
           <a:xfrm>
-            <a:off x="4471416" y="3703320"/>
+            <a:off x="4471416" y="4069080"/>
             <a:ext cx="384048" cy="384048"/>
           </a:xfrm>
           <a:prstGeom prst="ellipse">
@@ -14724,7 +14724,7 @@
         </p:nvSpPr>
         <p:spPr>
           <a:xfrm>
-            <a:off x="4471416" y="3703320"/>
+            <a:off x="4471416" y="4069080"/>
             <a:ext cx="384048" cy="384048"/>
           </a:xfrm>
           <a:prstGeom prst="rect">
@@ -14763,7 +14763,7 @@
         </p:nvSpPr>
         <p:spPr>
           <a:xfrm>
-            <a:off x="4983480" y="3675888"/>
+            <a:off x="4983480" y="4041648"/>
             <a:ext cx="2606040" cy="438912"/>
           </a:xfrm>
           <a:prstGeom prst="rect">
@@ -14802,8 +14802,8 @@
         </p:nvSpPr>
         <p:spPr>
           <a:xfrm>
-            <a:off x="4471416" y="4206240"/>
-            <a:ext cx="3118104" cy="621792"/>
+            <a:off x="4471416" y="4572000"/>
+            <a:ext cx="3118104" cy="1033272"/>
           </a:xfrm>
           <a:prstGeom prst="rect">
             <a:avLst/>
@@ -16398,7 +16398,7 @@
         </p:nvSpPr>
         <p:spPr>
           <a:xfrm>
-            <a:off x="566928" y="1920240"/>
+            <a:off x="566928" y="1965960"/>
             <a:ext cx="457200" cy="457200"/>
           </a:xfrm>
           <a:prstGeom prst="ellipse">
@@ -16418,7 +16418,7 @@
         </p:nvSpPr>
         <p:spPr>
           <a:xfrm>
-            <a:off x="566928" y="1920240"/>
+            <a:off x="566928" y="1965960"/>
             <a:ext cx="457200" cy="457200"/>
           </a:xfrm>
           <a:prstGeom prst="rect">
@@ -16457,7 +16457,7 @@
         </p:nvSpPr>
         <p:spPr>
           <a:xfrm>
-            <a:off x="1188720" y="1920240"/>
+            <a:off x="1188720" y="1965960"/>
             <a:ext cx="10424160" cy="457200"/>
           </a:xfrm>
           <a:prstGeom prst="rect">
@@ -16510,7 +16510,7 @@
         </p:nvSpPr>
         <p:spPr>
           <a:xfrm>
-            <a:off x="566928" y="2834640"/>
+            <a:off x="566928" y="3108960"/>
             <a:ext cx="457200" cy="457200"/>
           </a:xfrm>
           <a:prstGeom prst="ellipse">
@@ -16530,7 +16530,7 @@
         </p:nvSpPr>
         <p:spPr>
           <a:xfrm>
-            <a:off x="566928" y="2834640"/>
+            <a:off x="566928" y="3108960"/>
             <a:ext cx="457200" cy="457200"/>
           </a:xfrm>
           <a:prstGeom prst="rect">
@@ -16569,7 +16569,7 @@
         </p:nvSpPr>
         <p:spPr>
           <a:xfrm>
-            <a:off x="1188720" y="2834640"/>
+            <a:off x="1188720" y="3108960"/>
             <a:ext cx="10424160" cy="457200"/>
           </a:xfrm>
           <a:prstGeom prst="rect">
@@ -16622,7 +16622,7 @@
         </p:nvSpPr>
         <p:spPr>
           <a:xfrm>
-            <a:off x="566928" y="3749040"/>
+            <a:off x="566928" y="4251960"/>
             <a:ext cx="457200" cy="457200"/>
           </a:xfrm>
           <a:prstGeom prst="ellipse">
@@ -16642,7 +16642,7 @@
         </p:nvSpPr>
         <p:spPr>
           <a:xfrm>
-            <a:off x="566928" y="3749040"/>
+            <a:off x="566928" y="4251960"/>
             <a:ext cx="457200" cy="457200"/>
           </a:xfrm>
           <a:prstGeom prst="rect">
@@ -16681,7 +16681,7 @@
         </p:nvSpPr>
         <p:spPr>
           <a:xfrm>
-            <a:off x="1188720" y="3749040"/>
+            <a:off x="1188720" y="4251960"/>
             <a:ext cx="10424160" cy="457200"/>
           </a:xfrm>
           <a:prstGeom prst="rect">
@@ -16734,7 +16734,7 @@
         </p:nvSpPr>
         <p:spPr>
           <a:xfrm>
-            <a:off x="566928" y="4663440"/>
+            <a:off x="566928" y="5394960"/>
             <a:ext cx="457200" cy="457200"/>
           </a:xfrm>
           <a:prstGeom prst="ellipse">
@@ -16754,7 +16754,7 @@
         </p:nvSpPr>
         <p:spPr>
           <a:xfrm>
-            <a:off x="566928" y="4663440"/>
+            <a:off x="566928" y="5394960"/>
             <a:ext cx="457200" cy="457200"/>
           </a:xfrm>
           <a:prstGeom prst="rect">
@@ -16793,7 +16793,7 @@
         </p:nvSpPr>
         <p:spPr>
           <a:xfrm>
-            <a:off x="1188720" y="4663440"/>
+            <a:off x="1188720" y="5394960"/>
             <a:ext cx="10424160" cy="457200"/>
           </a:xfrm>
           <a:prstGeom prst="rect">
@@ -17213,11 +17213,11 @@
         <p:spPr>
           <a:xfrm>
             <a:off x="566928" y="1737360"/>
-            <a:ext cx="3566160" cy="1828800"/>
+            <a:ext cx="3566160" cy="2148840"/>
           </a:xfrm>
           <a:prstGeom prst="roundRect">
             <a:avLst>
-              <a:gd name="adj" fmla="val 6000"/>
+              <a:gd name="adj" fmla="val 5106"/>
             </a:avLst>
           </a:prstGeom>
           <a:solidFill>
@@ -17274,7 +17274,7 @@
         <p:spPr>
           <a:xfrm>
             <a:off x="768096" y="2423160"/>
-            <a:ext cx="3163824" cy="987552"/>
+            <a:ext cx="3163824" cy="1307592"/>
           </a:xfrm>
           <a:prstGeom prst="rect">
             <a:avLst/>
@@ -17316,11 +17316,11 @@
         <p:spPr>
           <a:xfrm>
             <a:off x="4315968" y="1737360"/>
-            <a:ext cx="3566160" cy="1828800"/>
+            <a:ext cx="3566160" cy="2148840"/>
           </a:xfrm>
           <a:prstGeom prst="roundRect">
             <a:avLst>
-              <a:gd name="adj" fmla="val 6000"/>
+              <a:gd name="adj" fmla="val 5106"/>
             </a:avLst>
           </a:prstGeom>
           <a:solidFill>
@@ -17377,7 +17377,7 @@
         <p:spPr>
           <a:xfrm>
             <a:off x="4517136" y="2423160"/>
-            <a:ext cx="3163824" cy="987552"/>
+            <a:ext cx="3163824" cy="1307592"/>
           </a:xfrm>
           <a:prstGeom prst="rect">
             <a:avLst/>
@@ -17419,11 +17419,11 @@
         <p:spPr>
           <a:xfrm>
             <a:off x="8065008" y="1737360"/>
-            <a:ext cx="3566160" cy="1828800"/>
+            <a:ext cx="3566160" cy="2148840"/>
           </a:xfrm>
           <a:prstGeom prst="roundRect">
             <a:avLst>
-              <a:gd name="adj" fmla="val 6000"/>
+              <a:gd name="adj" fmla="val 5106"/>
             </a:avLst>
           </a:prstGeom>
           <a:solidFill>
@@ -17480,7 +17480,7 @@
         <p:spPr>
           <a:xfrm>
             <a:off x="8266176" y="2423160"/>
-            <a:ext cx="3163824" cy="987552"/>
+            <a:ext cx="3163824" cy="1307592"/>
           </a:xfrm>
           <a:prstGeom prst="rect">
             <a:avLst/>
@@ -17521,12 +17521,12 @@
         </p:nvSpPr>
         <p:spPr>
           <a:xfrm>
-            <a:off x="566928" y="3977640"/>
-            <a:ext cx="11064240" cy="1234440"/>
+            <a:off x="566928" y="4297680"/>
+            <a:ext cx="11064240" cy="1600200"/>
           </a:xfrm>
           <a:prstGeom prst="roundRect">
             <a:avLst>
-              <a:gd name="adj" fmla="val 8889"/>
+              <a:gd name="adj" fmla="val 6857"/>
             </a:avLst>
           </a:prstGeom>
           <a:solidFill>
@@ -17548,7 +17548,7 @@
         </p:nvSpPr>
         <p:spPr>
           <a:xfrm>
-            <a:off x="786384" y="4105656"/>
+            <a:off x="786384" y="4425696"/>
             <a:ext cx="10625328" cy="219456"/>
           </a:xfrm>
           <a:prstGeom prst="rect">
@@ -17587,8 +17587,8 @@
         </p:nvSpPr>
         <p:spPr>
           <a:xfrm>
-            <a:off x="786384" y="4361688"/>
-            <a:ext cx="10625328" cy="722376"/>
+            <a:off x="786384" y="4681728"/>
+            <a:ext cx="10625328" cy="1088136"/>
           </a:xfrm>
           <a:prstGeom prst="rect">
             <a:avLst/>
@@ -17854,11 +17854,11 @@
         <p:spPr>
           <a:xfrm>
             <a:off x="566928" y="1783080"/>
-            <a:ext cx="11064240" cy="1874520"/>
+            <a:ext cx="11064240" cy="3657600"/>
           </a:xfrm>
           <a:prstGeom prst="roundRect">
             <a:avLst>
-              <a:gd name="adj" fmla="val 5854"/>
+              <a:gd name="adj" fmla="val 3000"/>
             </a:avLst>
           </a:prstGeom>
           <a:solidFill>
@@ -17880,7 +17880,7 @@
         </p:nvSpPr>
         <p:spPr>
           <a:xfrm>
-            <a:off x="978408" y="2157984"/>
+            <a:off x="978408" y="2706624"/>
             <a:ext cx="256032" cy="256032"/>
           </a:xfrm>
           <a:prstGeom prst="roundRect">
@@ -17907,7 +17907,7 @@
         </p:nvSpPr>
         <p:spPr>
           <a:xfrm rot="2700000">
-            <a:off x="1041227" y="2297430"/>
+            <a:off x="1041227" y="2846070"/>
             <a:ext cx="58156" cy="27432"/>
           </a:xfrm>
           <a:prstGeom prst="rect">
@@ -17927,7 +17927,7 @@
         </p:nvSpPr>
         <p:spPr>
           <a:xfrm rot="-3000000">
-            <a:off x="1069025" y="2271370"/>
+            <a:off x="1069025" y="2820010"/>
             <a:ext cx="121432" cy="27432"/>
           </a:xfrm>
           <a:prstGeom prst="rect">
@@ -17947,8 +17947,8 @@
         </p:nvSpPr>
         <p:spPr>
           <a:xfrm>
-            <a:off x="1362456" y="2103120"/>
-            <a:ext cx="4617720" cy="384048"/>
+            <a:off x="1362456" y="2505456"/>
+            <a:ext cx="4617720" cy="658368"/>
           </a:xfrm>
           <a:prstGeom prst="rect">
             <a:avLst/>
@@ -17964,7 +17964,7 @@
               <a:buNone/>
             </a:pPr>
             <a:r>
-              <a:rPr lang="en-US" sz="1250" dirty="0">
+              <a:rPr lang="en-US" sz="1400" dirty="0">
                 <a:solidFill>
                   <a:srgbClr val="000000"/>
                 </a:solidFill>
@@ -17974,7 +17974,7 @@
               </a:rPr>
               <a:t>__fail_503 дає ввічливу заглушку, не 500</a:t>
             </a:r>
-            <a:endParaRPr lang="en-US" sz="1250" dirty="0"/>
+            <a:endParaRPr lang="en-US" sz="1400" dirty="0"/>
           </a:p>
         </p:txBody>
       </p:sp>
@@ -17986,7 +17986,7 @@
         </p:nvSpPr>
         <p:spPr>
           <a:xfrm>
-            <a:off x="978408" y="2724912"/>
+            <a:off x="978408" y="4169664"/>
             <a:ext cx="256032" cy="256032"/>
           </a:xfrm>
           <a:prstGeom prst="roundRect">
@@ -18013,7 +18013,7 @@
         </p:nvSpPr>
         <p:spPr>
           <a:xfrm rot="2700000">
-            <a:off x="1041227" y="2864358"/>
+            <a:off x="1041227" y="4309110"/>
             <a:ext cx="58156" cy="27432"/>
           </a:xfrm>
           <a:prstGeom prst="rect">
@@ -18033,7 +18033,7 @@
         </p:nvSpPr>
         <p:spPr>
           <a:xfrm rot="-3000000">
-            <a:off x="1069025" y="2838298"/>
+            <a:off x="1069025" y="4283050"/>
             <a:ext cx="121432" cy="27432"/>
           </a:xfrm>
           <a:prstGeom prst="rect">
@@ -18053,8 +18053,8 @@
         </p:nvSpPr>
         <p:spPr>
           <a:xfrm>
-            <a:off x="1362456" y="2670048"/>
-            <a:ext cx="4617720" cy="384048"/>
+            <a:off x="1362456" y="3968496"/>
+            <a:ext cx="4617720" cy="658368"/>
           </a:xfrm>
           <a:prstGeom prst="rect">
             <a:avLst/>
@@ -18070,7 +18070,7 @@
               <a:buNone/>
             </a:pPr>
             <a:r>
-              <a:rPr lang="en-US" sz="1250" dirty="0">
+              <a:rPr lang="en-US" sz="1400" dirty="0">
                 <a:solidFill>
                   <a:srgbClr val="000000"/>
                 </a:solidFill>
@@ -18080,7 +18080,7 @@
               </a:rPr>
               <a:t>збій швидкий — мілісекунди, а не секунди</a:t>
             </a:r>
-            <a:endParaRPr lang="en-US" sz="1250" dirty="0"/>
+            <a:endParaRPr lang="en-US" sz="1400" dirty="0"/>
           </a:p>
         </p:txBody>
       </p:sp>
@@ -18092,7 +18092,7 @@
         </p:nvSpPr>
         <p:spPr>
           <a:xfrm>
-            <a:off x="6144768" y="2157984"/>
+            <a:off x="6144768" y="2706624"/>
             <a:ext cx="256032" cy="256032"/>
           </a:xfrm>
           <a:prstGeom prst="roundRect">
@@ -18119,7 +18119,7 @@
         </p:nvSpPr>
         <p:spPr>
           <a:xfrm rot="2700000">
-            <a:off x="6207587" y="2297430"/>
+            <a:off x="6207587" y="2846070"/>
             <a:ext cx="58156" cy="27432"/>
           </a:xfrm>
           <a:prstGeom prst="rect">
@@ -18139,7 +18139,7 @@
         </p:nvSpPr>
         <p:spPr>
           <a:xfrm rot="-3000000">
-            <a:off x="6235385" y="2271370"/>
+            <a:off x="6235385" y="2820010"/>
             <a:ext cx="121432" cy="27432"/>
           </a:xfrm>
           <a:prstGeom prst="rect">
@@ -18159,8 +18159,8 @@
         </p:nvSpPr>
         <p:spPr>
           <a:xfrm>
-            <a:off x="6528816" y="2103120"/>
-            <a:ext cx="4617720" cy="384048"/>
+            <a:off x="6528816" y="2505456"/>
+            <a:ext cx="4617720" cy="658368"/>
           </a:xfrm>
           <a:prstGeom prst="rect">
             <a:avLst/>
@@ -18176,7 +18176,7 @@
               <a:buNone/>
             </a:pPr>
             <a:r>
-              <a:rPr lang="en-US" sz="1250" dirty="0">
+              <a:rPr lang="en-US" sz="1400" dirty="0">
                 <a:solidFill>
                   <a:srgbClr val="000000"/>
                 </a:solidFill>
@@ -18186,7 +18186,7 @@
               </a:rPr>
               <a:t>у лозі чесний 503 і лічильник переходів</a:t>
             </a:r>
-            <a:endParaRPr lang="en-US" sz="1250" dirty="0"/>
+            <a:endParaRPr lang="en-US" sz="1400" dirty="0"/>
           </a:p>
         </p:txBody>
       </p:sp>
@@ -18198,7 +18198,7 @@
         </p:nvSpPr>
         <p:spPr>
           <a:xfrm>
-            <a:off x="6144768" y="2724912"/>
+            <a:off x="6144768" y="4169664"/>
             <a:ext cx="256032" cy="256032"/>
           </a:xfrm>
           <a:prstGeom prst="roundRect">
@@ -18225,7 +18225,7 @@
         </p:nvSpPr>
         <p:spPr>
           <a:xfrm rot="2700000">
-            <a:off x="6207587" y="2864358"/>
+            <a:off x="6207587" y="4309110"/>
             <a:ext cx="58156" cy="27432"/>
           </a:xfrm>
           <a:prstGeom prst="rect">
@@ -18245,7 +18245,7 @@
         </p:nvSpPr>
         <p:spPr>
           <a:xfrm rot="-3000000">
-            <a:off x="6235385" y="2838298"/>
+            <a:off x="6235385" y="4283050"/>
             <a:ext cx="121432" cy="27432"/>
           </a:xfrm>
           <a:prstGeom prst="rect">
@@ -18265,8 +18265,8 @@
         </p:nvSpPr>
         <p:spPr>
           <a:xfrm>
-            <a:off x="6528816" y="2670048"/>
-            <a:ext cx="4617720" cy="384048"/>
+            <a:off x="6528816" y="3968496"/>
+            <a:ext cx="4617720" cy="658368"/>
           </a:xfrm>
           <a:prstGeom prst="rect">
             <a:avLst/>
@@ -18282,7 +18282,7 @@
               <a:buNone/>
             </a:pPr>
             <a:r>
-              <a:rPr lang="en-US" sz="1250" dirty="0">
+              <a:rPr lang="en-US" sz="1400" dirty="0">
                 <a:solidFill>
                   <a:srgbClr val="000000"/>
                 </a:solidFill>
@@ -18292,7 +18292,7 @@
               </a:rPr>
               <a:t>поясню retry, fallback і breaker одним реченням</a:t>
             </a:r>
-            <a:endParaRPr lang="en-US" sz="1250" dirty="0"/>
+            <a:endParaRPr lang="en-US" sz="1400" dirty="0"/>
           </a:p>
         </p:txBody>
       </p:sp>
@@ -18304,7 +18304,7 @@
         </p:nvSpPr>
         <p:spPr>
           <a:xfrm>
-            <a:off x="566928" y="3886200"/>
+            <a:off x="566928" y="5669280"/>
             <a:ext cx="10972800" cy="320040"/>
           </a:xfrm>
           <a:prstGeom prst="rect">
@@ -22281,11 +22281,11 @@
         <p:spPr>
           <a:xfrm>
             <a:off x="566928" y="1783080"/>
-            <a:ext cx="3553968" cy="1188720"/>
+            <a:ext cx="3553968" cy="1481328"/>
           </a:xfrm>
           <a:prstGeom prst="roundRect">
             <a:avLst>
-              <a:gd name="adj" fmla="val 7692"/>
+              <a:gd name="adj" fmla="val 6173"/>
             </a:avLst>
           </a:prstGeom>
           <a:solidFill>
@@ -22347,7 +22347,7 @@
         <p:spPr>
           <a:xfrm>
             <a:off x="749808" y="2203704"/>
-            <a:ext cx="3188208" cy="658368"/>
+            <a:ext cx="3188208" cy="950976"/>
           </a:xfrm>
           <a:prstGeom prst="rect">
             <a:avLst/>
@@ -22389,11 +22389,11 @@
         <p:spPr>
           <a:xfrm>
             <a:off x="4322064" y="1783080"/>
-            <a:ext cx="3553968" cy="1188720"/>
+            <a:ext cx="3553968" cy="1481328"/>
           </a:xfrm>
           <a:prstGeom prst="roundRect">
             <a:avLst>
-              <a:gd name="adj" fmla="val 7692"/>
+              <a:gd name="adj" fmla="val 6173"/>
             </a:avLst>
           </a:prstGeom>
           <a:solidFill>
@@ -22455,7 +22455,7 @@
         <p:spPr>
           <a:xfrm>
             <a:off x="4504944" y="2203704"/>
-            <a:ext cx="3188208" cy="658368"/>
+            <a:ext cx="3188208" cy="950976"/>
           </a:xfrm>
           <a:prstGeom prst="rect">
             <a:avLst/>
@@ -22497,11 +22497,11 @@
         <p:spPr>
           <a:xfrm>
             <a:off x="8077200" y="1783080"/>
-            <a:ext cx="3553968" cy="1188720"/>
+            <a:ext cx="3553968" cy="1481328"/>
           </a:xfrm>
           <a:prstGeom prst="roundRect">
             <a:avLst>
-              <a:gd name="adj" fmla="val 7692"/>
+              <a:gd name="adj" fmla="val 6173"/>
             </a:avLst>
           </a:prstGeom>
           <a:solidFill>
@@ -22563,7 +22563,7 @@
         <p:spPr>
           <a:xfrm>
             <a:off x="8260080" y="2203704"/>
-            <a:ext cx="3188208" cy="658368"/>
+            <a:ext cx="3188208" cy="950976"/>
           </a:xfrm>
           <a:prstGeom prst="rect">
             <a:avLst/>
@@ -22604,12 +22604,12 @@
         </p:nvSpPr>
         <p:spPr>
           <a:xfrm>
-            <a:off x="566928" y="3172968"/>
-            <a:ext cx="3553968" cy="1188720"/>
+            <a:off x="566928" y="3465576"/>
+            <a:ext cx="3553968" cy="1481328"/>
           </a:xfrm>
           <a:prstGeom prst="roundRect">
             <a:avLst>
-              <a:gd name="adj" fmla="val 7692"/>
+              <a:gd name="adj" fmla="val 6173"/>
             </a:avLst>
           </a:prstGeom>
           <a:solidFill>
@@ -22631,7 +22631,7 @@
         </p:nvSpPr>
         <p:spPr>
           <a:xfrm>
-            <a:off x="749808" y="3282696"/>
+            <a:off x="749808" y="3575304"/>
             <a:ext cx="3188208" cy="310896"/>
           </a:xfrm>
           <a:prstGeom prst="rect">
@@ -22670,8 +22670,8 @@
         </p:nvSpPr>
         <p:spPr>
           <a:xfrm>
-            <a:off x="749808" y="3593592"/>
-            <a:ext cx="3188208" cy="658368"/>
+            <a:off x="749808" y="3886200"/>
+            <a:ext cx="3188208" cy="950976"/>
           </a:xfrm>
           <a:prstGeom prst="rect">
             <a:avLst/>
@@ -22712,12 +22712,12 @@
         </p:nvSpPr>
         <p:spPr>
           <a:xfrm>
-            <a:off x="4322064" y="3172968"/>
-            <a:ext cx="3553968" cy="1188720"/>
+            <a:off x="4322064" y="3465576"/>
+            <a:ext cx="3553968" cy="1481328"/>
           </a:xfrm>
           <a:prstGeom prst="roundRect">
             <a:avLst>
-              <a:gd name="adj" fmla="val 7692"/>
+              <a:gd name="adj" fmla="val 6173"/>
             </a:avLst>
           </a:prstGeom>
           <a:solidFill>
@@ -22739,7 +22739,7 @@
         </p:nvSpPr>
         <p:spPr>
           <a:xfrm>
-            <a:off x="4504944" y="3282696"/>
+            <a:off x="4504944" y="3575304"/>
             <a:ext cx="3188208" cy="310896"/>
           </a:xfrm>
           <a:prstGeom prst="rect">
@@ -22778,8 +22778,8 @@
         </p:nvSpPr>
         <p:spPr>
           <a:xfrm>
-            <a:off x="4504944" y="3593592"/>
-            <a:ext cx="3188208" cy="658368"/>
+            <a:off x="4504944" y="3886200"/>
+            <a:ext cx="3188208" cy="950976"/>
           </a:xfrm>
           <a:prstGeom prst="rect">
             <a:avLst/>
@@ -22820,12 +22820,12 @@
         </p:nvSpPr>
         <p:spPr>
           <a:xfrm>
-            <a:off x="8077200" y="3172968"/>
-            <a:ext cx="3553968" cy="1188720"/>
+            <a:off x="8077200" y="3465576"/>
+            <a:ext cx="3553968" cy="1481328"/>
           </a:xfrm>
           <a:prstGeom prst="roundRect">
             <a:avLst>
-              <a:gd name="adj" fmla="val 7692"/>
+              <a:gd name="adj" fmla="val 6173"/>
             </a:avLst>
           </a:prstGeom>
           <a:solidFill>
@@ -22847,7 +22847,7 @@
         </p:nvSpPr>
         <p:spPr>
           <a:xfrm>
-            <a:off x="8260080" y="3282696"/>
+            <a:off x="8260080" y="3575304"/>
             <a:ext cx="3188208" cy="310896"/>
           </a:xfrm>
           <a:prstGeom prst="rect">
@@ -22886,8 +22886,8 @@
         </p:nvSpPr>
         <p:spPr>
           <a:xfrm>
-            <a:off x="8260080" y="3593592"/>
-            <a:ext cx="3188208" cy="658368"/>
+            <a:off x="8260080" y="3886200"/>
+            <a:ext cx="3188208" cy="950976"/>
           </a:xfrm>
           <a:prstGeom prst="rect">
             <a:avLst/>
@@ -22928,7 +22928,7 @@
         </p:nvSpPr>
         <p:spPr>
           <a:xfrm>
-            <a:off x="566928" y="4526280"/>
+            <a:off x="566928" y="5138928"/>
             <a:ext cx="11064240" cy="777240"/>
           </a:xfrm>
           <a:prstGeom prst="roundRect">
@@ -22955,7 +22955,7 @@
         </p:nvSpPr>
         <p:spPr>
           <a:xfrm>
-            <a:off x="786384" y="4672584"/>
+            <a:off x="786384" y="5285232"/>
             <a:ext cx="10625328" cy="484632"/>
           </a:xfrm>
           <a:prstGeom prst="rect">

--- a/docs/decks/L07.pptx
+++ b/docs/decks/L07.pptx
@@ -33,9 +33,10 @@
     <p:sldId id="281" r:id="rId27"/>
     <p:sldId id="282" r:id="rId28"/>
     <p:sldId id="283" r:id="rId29"/>
+    <p:sldId id="284" r:id="rId30"/>
   </p:sldIdLst>
   <p:notesMasterIdLst>
-    <p:notesMasterId r:id="rId30"/>
+    <p:notesMasterId r:id="rId31"/>
   </p:notesMasterIdLst>
   <p:sldSz cx="12192000" cy="6858000"/>
   <p:notesSz cx="6858000" cy="12192000"/>
@@ -2313,6 +2314,94 @@
             <a:fld id="{F7021451-1387-4CA6-816F-3879F97B5CBC}" type="slidenum">
               <a:rPr lang="en-US"/>
               <a:t>28</a:t>
+            </a:fld>
+            <a:endParaRPr lang="en-US"/>
+          </a:p>
+        </p:txBody>
+      </p:sp>
+    </p:spTree>
+    <p:extLst>
+      <p:ext uri="{BB962C8B-B14F-4D97-AF65-F5344CB8AC3E}">
+        <p14:creationId xmlns:p14="http://schemas.microsoft.com/office/powerpoint/2010/main" val="1024086991"/>
+      </p:ext>
+    </p:extLst>
+  </p:cSld>
+  <p:clrMapOvr>
+    <a:masterClrMapping/>
+  </p:clrMapOvr>
+</p:notes>
+</file>
+
+<file path=ppt/notesSlides/notesSlide29.xml><?xml version="1.0" encoding="utf-8"?>
+<p:notes xmlns:a="http://schemas.openxmlformats.org/drawingml/2006/main" xmlns:r="http://schemas.openxmlformats.org/officeDocument/2006/relationships" xmlns:p="http://schemas.openxmlformats.org/presentationml/2006/main">
+  <p:cSld>
+    <p:spTree>
+      <p:nvGrpSpPr>
+        <p:cNvPr id="1" name=""/>
+        <p:cNvGrpSpPr/>
+        <p:nvPr/>
+      </p:nvGrpSpPr>
+      <p:grpSpPr>
+        <a:xfrm>
+          <a:off x="0" y="0"/>
+          <a:ext cx="0" cy="0"/>
+          <a:chOff x="0" y="0"/>
+          <a:chExt cx="0" cy="0"/>
+        </a:xfrm>
+      </p:grpSpPr>
+      <p:sp>
+        <p:nvSpPr>
+          <p:cNvPr id="2" name="Slide Image Placeholder 1"/>
+          <p:cNvSpPr>
+            <a:spLocks noGrp="1" noRot="1" noChangeAspect="1"/>
+          </p:cNvSpPr>
+          <p:nvPr>
+            <p:ph type="sldImg"/>
+          </p:nvPr>
+        </p:nvSpPr>
+        <p:spPr/>
+      </p:sp>
+      <p:sp>
+        <p:nvSpPr>
+          <p:cNvPr id="3" name="Notes Placeholder 2"/>
+          <p:cNvSpPr>
+            <a:spLocks noGrp="1"/>
+          </p:cNvSpPr>
+          <p:nvPr>
+            <p:ph type="body" idx="1"/>
+          </p:nvPr>
+        </p:nvSpPr>
+        <p:spPr/>
+        <p:txBody>
+          <a:bodyPr/>
+          <a:lstStyle/>
+          <a:p>
+            <a:r>
+              <a:rPr lang="en-US" dirty="0"/>
+              <a:t/>
+            </a:r>
+            <a:endParaRPr lang="en-US" dirty="0"/>
+          </a:p>
+        </p:txBody>
+      </p:sp>
+      <p:sp>
+        <p:nvSpPr>
+          <p:cNvPr id="4" name="Slide Number Placeholder 3"/>
+          <p:cNvSpPr>
+            <a:spLocks noGrp="1"/>
+          </p:cNvSpPr>
+          <p:nvPr>
+            <p:ph type="sldNum" sz="quarter" idx="10"/>
+          </p:nvPr>
+        </p:nvSpPr>
+        <p:spPr/>
+        <p:txBody>
+          <a:bodyPr/>
+          <a:lstStyle/>
+          <a:p>
+            <a:fld id="{F7021451-1387-4CA6-816F-3879F97B5CBC}" type="slidenum">
+              <a:rPr lang="en-US"/>
+              <a:t>29</a:t>
             </a:fld>
             <a:endParaRPr lang="en-US"/>
           </a:p>
@@ -20449,6 +20538,109 @@
 </p:sld>
 </file>
 
+<file path=ppt/slides/slide29.xml><?xml version="1.0" encoding="utf-8"?>
+<p:sld xmlns:a="http://schemas.openxmlformats.org/drawingml/2006/main" xmlns:r="http://schemas.openxmlformats.org/officeDocument/2006/relationships" xmlns:p="http://schemas.openxmlformats.org/presentationml/2006/main">
+  <p:cSld name="Slide 29">
+    <p:spTree>
+      <p:nvGrpSpPr>
+        <p:cNvPr id="1" name=""/>
+        <p:cNvGrpSpPr/>
+        <p:nvPr/>
+      </p:nvGrpSpPr>
+      <p:grpSpPr>
+        <a:xfrm>
+          <a:off x="0" y="0"/>
+          <a:ext cx="0" cy="0"/>
+          <a:chOff x="0" y="0"/>
+          <a:chExt cx="0" cy="0"/>
+        </a:xfrm>
+      </p:grpSpPr>
+      <p:sp>
+        <p:nvSpPr>
+          <p:cNvPr id="2" name="Text 0"/>
+          <p:cNvSpPr/>
+          <p:nvPr/>
+        </p:nvSpPr>
+        <p:spPr>
+          <a:xfrm>
+            <a:off x="566928" y="384048"/>
+            <a:ext cx="5486400" cy="274320"/>
+          </a:xfrm>
+          <a:prstGeom prst="rect">
+            <a:avLst/>
+          </a:prstGeom>
+          <a:noFill/>
+          <a:ln/>
+        </p:spPr>
+        <p:txBody>
+          <a:bodyPr wrap="square" lIns="0" tIns="0" rIns="0" bIns="0" rtlCol="0" anchor="ctr"/>
+          <a:lstStyle/>
+          <a:p>
+            <a:pPr indent="0" marL="0">
+              <a:buNone/>
+            </a:pPr>
+            <a:r>
+              <a:rPr lang="en-US" sz="1200" b="1" spc="400" kern="0" dirty="0">
+                <a:solidFill>
+                  <a:srgbClr val="FFFFFF"/>
+                </a:solidFill>
+                <a:latin typeface="Montserrat" pitchFamily="34" charset="0"/>
+                <a:ea typeface="Montserrat" pitchFamily="34" charset="-122"/>
+                <a:cs typeface="Montserrat" pitchFamily="34" charset="-120"/>
+              </a:rPr>
+              <a:t>NEOVERSITY</a:t>
+            </a:r>
+            <a:endParaRPr lang="en-US" sz="1200" dirty="0"/>
+          </a:p>
+        </p:txBody>
+      </p:sp>
+      <p:sp>
+        <p:nvSpPr>
+          <p:cNvPr id="3" name="Text 1"/>
+          <p:cNvSpPr/>
+          <p:nvPr/>
+        </p:nvSpPr>
+        <p:spPr>
+          <a:xfrm>
+            <a:off x="566928" y="2834640"/>
+            <a:ext cx="11064240" cy="1463040"/>
+          </a:xfrm>
+          <a:prstGeom prst="rect">
+            <a:avLst/>
+          </a:prstGeom>
+          <a:noFill/>
+          <a:ln/>
+        </p:spPr>
+        <p:txBody>
+          <a:bodyPr wrap="square" lIns="0" tIns="0" rIns="0" bIns="0" rtlCol="0" anchor="ctr"/>
+          <a:lstStyle/>
+          <a:p>
+            <a:pPr indent="0" marL="0">
+              <a:buNone/>
+            </a:pPr>
+            <a:r>
+              <a:rPr lang="en-US" sz="7300" dirty="0">
+                <a:solidFill>
+                  <a:srgbClr val="FFFFFF"/>
+                </a:solidFill>
+                <a:latin typeface="Unbounded" pitchFamily="34" charset="0"/>
+                <a:ea typeface="Unbounded" pitchFamily="34" charset="-122"/>
+                <a:cs typeface="Unbounded" pitchFamily="34" charset="-120"/>
+              </a:rPr>
+              <a:t>ДЯКУЮ</a:t>
+            </a:r>
+            <a:endParaRPr lang="en-US" sz="7300" dirty="0"/>
+          </a:p>
+        </p:txBody>
+      </p:sp>
+    </p:spTree>
+  </p:cSld>
+  <p:clrMapOvr>
+    <a:masterClrMapping/>
+  </p:clrMapOvr>
+</p:sld>
+</file>
+
 <file path=ppt/slides/slide3.xml><?xml version="1.0" encoding="utf-8"?>
 <p:sld xmlns:a="http://schemas.openxmlformats.org/drawingml/2006/main" xmlns:r="http://schemas.openxmlformats.org/officeDocument/2006/relationships" xmlns:p="http://schemas.openxmlformats.org/presentationml/2006/main">
   <p:cSld name="Slide 3">

--- a/docs/decks/L07.pptx
+++ b/docs/decks/L07.pptx
@@ -5460,7 +5460,7 @@
                       <a:tailEnd type="none" w="med" len="med"/>
                     </a:lnB>
                     <a:solidFill>
-                      <a:srgbClr val="000000"/>
+                      <a:srgbClr val="5A05F4"/>
                     </a:solidFill>
                   </a:tcPr>
                 </a:tc>
@@ -5528,7 +5528,7 @@
                       <a:tailEnd type="none" w="med" len="med"/>
                     </a:lnB>
                     <a:solidFill>
-                      <a:srgbClr val="000000"/>
+                      <a:srgbClr val="5A05F4"/>
                     </a:solidFill>
                   </a:tcPr>
                 </a:tc>
@@ -5596,7 +5596,7 @@
                       <a:tailEnd type="none" w="med" len="med"/>
                     </a:lnB>
                     <a:solidFill>
-                      <a:srgbClr val="000000"/>
+                      <a:srgbClr val="5A05F4"/>
                     </a:solidFill>
                   </a:tcPr>
                 </a:tc>
@@ -5613,7 +5613,7 @@
                       <a:r>
                         <a:rPr lang="en-US" sz="1150" b="1" dirty="0">
                           <a:solidFill>
-                            <a:srgbClr val="3FCF8E"/>
+                            <a:srgbClr val="106B41"/>
                           </a:solidFill>
                           <a:latin typeface="Montserrat" pitchFamily="34" charset="0"/>
                           <a:ea typeface="Montserrat" pitchFamily="34" charset="-122"/>
@@ -5666,7 +5666,7 @@
                       <a:tailEnd type="none" w="med" len="med"/>
                     </a:lnB>
                     <a:solidFill>
-                      <a:srgbClr val="000000"/>
+                      <a:srgbClr val="F5F3FA"/>
                     </a:solidFill>
                   </a:tcPr>
                 </a:tc>
@@ -5681,7 +5681,7 @@
                       <a:r>
                         <a:rPr lang="en-US" sz="1150" dirty="0">
                           <a:solidFill>
-                            <a:srgbClr val="3FCF8E"/>
+                            <a:srgbClr val="106B41"/>
                           </a:solidFill>
                           <a:latin typeface="Montserrat" pitchFamily="34" charset="0"/>
                           <a:ea typeface="Montserrat" pitchFamily="34" charset="-122"/>
@@ -5734,7 +5734,7 @@
                       <a:tailEnd type="none" w="med" len="med"/>
                     </a:lnB>
                     <a:solidFill>
-                      <a:srgbClr val="000000"/>
+                      <a:srgbClr val="F5F3FA"/>
                     </a:solidFill>
                   </a:tcPr>
                 </a:tc>
@@ -5749,7 +5749,7 @@
                       <a:r>
                         <a:rPr lang="en-US" sz="1150" dirty="0">
                           <a:solidFill>
-                            <a:srgbClr val="3FCF8E"/>
+                            <a:srgbClr val="106B41"/>
                           </a:solidFill>
                           <a:latin typeface="Montserrat" pitchFamily="34" charset="0"/>
                           <a:ea typeface="Montserrat" pitchFamily="34" charset="-122"/>
@@ -5802,7 +5802,7 @@
                       <a:tailEnd type="none" w="med" len="med"/>
                     </a:lnB>
                     <a:solidFill>
-                      <a:srgbClr val="000000"/>
+                      <a:srgbClr val="F5F3FA"/>
                     </a:solidFill>
                   </a:tcPr>
                 </a:tc>
@@ -5819,7 +5819,7 @@
                       <a:r>
                         <a:rPr lang="en-US" sz="1150" b="1" dirty="0">
                           <a:solidFill>
-                            <a:srgbClr val="3FCF8E"/>
+                            <a:srgbClr val="106B41"/>
                           </a:solidFill>
                           <a:latin typeface="Montserrat" pitchFamily="34" charset="0"/>
                           <a:ea typeface="Montserrat" pitchFamily="34" charset="-122"/>
@@ -5872,7 +5872,7 @@
                       <a:tailEnd type="none" w="med" len="med"/>
                     </a:lnB>
                     <a:solidFill>
-                      <a:srgbClr val="000000"/>
+                      <a:srgbClr val="F5F3FA"/>
                     </a:solidFill>
                   </a:tcPr>
                 </a:tc>
@@ -5887,7 +5887,7 @@
                       <a:r>
                         <a:rPr lang="en-US" sz="1150" dirty="0">
                           <a:solidFill>
-                            <a:srgbClr val="3FCF8E"/>
+                            <a:srgbClr val="106B41"/>
                           </a:solidFill>
                           <a:latin typeface="Montserrat" pitchFamily="34" charset="0"/>
                           <a:ea typeface="Montserrat" pitchFamily="34" charset="-122"/>
@@ -5940,7 +5940,7 @@
                       <a:tailEnd type="none" w="med" len="med"/>
                     </a:lnB>
                     <a:solidFill>
-                      <a:srgbClr val="000000"/>
+                      <a:srgbClr val="F5F3FA"/>
                     </a:solidFill>
                   </a:tcPr>
                 </a:tc>
@@ -5955,7 +5955,7 @@
                       <a:r>
                         <a:rPr lang="en-US" sz="1150" dirty="0">
                           <a:solidFill>
-                            <a:srgbClr val="3FCF8E"/>
+                            <a:srgbClr val="106B41"/>
                           </a:solidFill>
                           <a:latin typeface="Montserrat" pitchFamily="34" charset="0"/>
                           <a:ea typeface="Montserrat" pitchFamily="34" charset="-122"/>
@@ -6008,7 +6008,7 @@
                       <a:tailEnd type="none" w="med" len="med"/>
                     </a:lnB>
                     <a:solidFill>
-                      <a:srgbClr val="000000"/>
+                      <a:srgbClr val="F5F3FA"/>
                     </a:solidFill>
                   </a:tcPr>
                 </a:tc>
@@ -6025,7 +6025,7 @@
                       <a:r>
                         <a:rPr lang="en-US" sz="1150" b="1" dirty="0">
                           <a:solidFill>
-                            <a:srgbClr val="6BA0F8"/>
+                            <a:srgbClr val="1A4FBF"/>
                           </a:solidFill>
                           <a:latin typeface="Montserrat" pitchFamily="34" charset="0"/>
                           <a:ea typeface="Montserrat" pitchFamily="34" charset="-122"/>
@@ -6078,7 +6078,7 @@
                       <a:tailEnd type="none" w="med" len="med"/>
                     </a:lnB>
                     <a:solidFill>
-                      <a:srgbClr val="000000"/>
+                      <a:srgbClr val="F5F3FA"/>
                     </a:solidFill>
                   </a:tcPr>
                 </a:tc>
@@ -6093,7 +6093,7 @@
                       <a:r>
                         <a:rPr lang="en-US" sz="1150" dirty="0">
                           <a:solidFill>
-                            <a:srgbClr val="6BA0F8"/>
+                            <a:srgbClr val="1A4FBF"/>
                           </a:solidFill>
                           <a:latin typeface="Montserrat" pitchFamily="34" charset="0"/>
                           <a:ea typeface="Montserrat" pitchFamily="34" charset="-122"/>
@@ -6146,7 +6146,7 @@
                       <a:tailEnd type="none" w="med" len="med"/>
                     </a:lnB>
                     <a:solidFill>
-                      <a:srgbClr val="000000"/>
+                      <a:srgbClr val="F5F3FA"/>
                     </a:solidFill>
                   </a:tcPr>
                 </a:tc>
@@ -6161,7 +6161,7 @@
                       <a:r>
                         <a:rPr lang="en-US" sz="1150" dirty="0">
                           <a:solidFill>
-                            <a:srgbClr val="6BA0F8"/>
+                            <a:srgbClr val="1A4FBF"/>
                           </a:solidFill>
                           <a:latin typeface="Montserrat" pitchFamily="34" charset="0"/>
                           <a:ea typeface="Montserrat" pitchFamily="34" charset="-122"/>
@@ -6214,7 +6214,7 @@
                       <a:tailEnd type="none" w="med" len="med"/>
                     </a:lnB>
                     <a:solidFill>
-                      <a:srgbClr val="000000"/>
+                      <a:srgbClr val="F5F3FA"/>
                     </a:solidFill>
                   </a:tcPr>
                 </a:tc>
@@ -6231,7 +6231,7 @@
                       <a:r>
                         <a:rPr lang="en-US" sz="1150" b="1" dirty="0">
                           <a:solidFill>
-                            <a:srgbClr val="FF6B6B"/>
+                            <a:srgbClr val="B3261E"/>
                           </a:solidFill>
                           <a:latin typeface="Montserrat" pitchFamily="34" charset="0"/>
                           <a:ea typeface="Montserrat" pitchFamily="34" charset="-122"/>
@@ -6284,7 +6284,7 @@
                       <a:tailEnd type="none" w="med" len="med"/>
                     </a:lnB>
                     <a:solidFill>
-                      <a:srgbClr val="000000"/>
+                      <a:srgbClr val="F5F3FA"/>
                     </a:solidFill>
                   </a:tcPr>
                 </a:tc>
@@ -6299,7 +6299,7 @@
                       <a:r>
                         <a:rPr lang="en-US" sz="1150" dirty="0">
                           <a:solidFill>
-                            <a:srgbClr val="FF6B6B"/>
+                            <a:srgbClr val="B3261E"/>
                           </a:solidFill>
                           <a:latin typeface="Montserrat" pitchFamily="34" charset="0"/>
                           <a:ea typeface="Montserrat" pitchFamily="34" charset="-122"/>
@@ -6352,7 +6352,7 @@
                       <a:tailEnd type="none" w="med" len="med"/>
                     </a:lnB>
                     <a:solidFill>
-                      <a:srgbClr val="000000"/>
+                      <a:srgbClr val="F5F3FA"/>
                     </a:solidFill>
                   </a:tcPr>
                 </a:tc>
@@ -6367,7 +6367,7 @@
                       <a:r>
                         <a:rPr lang="en-US" sz="1150" dirty="0">
                           <a:solidFill>
-                            <a:srgbClr val="FF6B6B"/>
+                            <a:srgbClr val="B3261E"/>
                           </a:solidFill>
                           <a:latin typeface="Montserrat" pitchFamily="34" charset="0"/>
                           <a:ea typeface="Montserrat" pitchFamily="34" charset="-122"/>
@@ -6420,7 +6420,7 @@
                       <a:tailEnd type="none" w="med" len="med"/>
                     </a:lnB>
                     <a:solidFill>
-                      <a:srgbClr val="000000"/>
+                      <a:srgbClr val="F5F3FA"/>
                     </a:solidFill>
                   </a:tcPr>
                 </a:tc>
@@ -8122,7 +8122,7 @@
                       <a:tailEnd type="none" w="med" len="med"/>
                     </a:lnB>
                     <a:solidFill>
-                      <a:srgbClr val="000000"/>
+                      <a:srgbClr val="5A05F4"/>
                     </a:solidFill>
                   </a:tcPr>
                 </a:tc>
@@ -8190,7 +8190,7 @@
                       <a:tailEnd type="none" w="med" len="med"/>
                     </a:lnB>
                     <a:solidFill>
-                      <a:srgbClr val="000000"/>
+                      <a:srgbClr val="5A05F4"/>
                     </a:solidFill>
                   </a:tcPr>
                 </a:tc>
@@ -8258,7 +8258,7 @@
                       <a:tailEnd type="none" w="med" len="med"/>
                     </a:lnB>
                     <a:solidFill>
-                      <a:srgbClr val="000000"/>
+                      <a:srgbClr val="5A05F4"/>
                     </a:solidFill>
                   </a:tcPr>
                 </a:tc>
@@ -8481,7 +8481,7 @@
                       <a:r>
                         <a:rPr lang="en-US" sz="1150" b="1" dirty="0">
                           <a:solidFill>
-                            <a:srgbClr val="A98BFF"/>
+                            <a:srgbClr val="5A05F4"/>
                           </a:solidFill>
                           <a:latin typeface="Montserrat" pitchFamily="34" charset="0"/>
                           <a:ea typeface="Montserrat" pitchFamily="34" charset="-122"/>
@@ -8534,7 +8534,7 @@
                       <a:tailEnd type="none" w="med" len="med"/>
                     </a:lnB>
                     <a:solidFill>
-                      <a:srgbClr val="000000"/>
+                      <a:srgbClr val="F5F3FA"/>
                     </a:solidFill>
                   </a:tcPr>
                 </a:tc>
@@ -8549,7 +8549,7 @@
                       <a:r>
                         <a:rPr lang="en-US" sz="1150" dirty="0">
                           <a:solidFill>
-                            <a:srgbClr val="A98BFF"/>
+                            <a:srgbClr val="5A05F4"/>
                           </a:solidFill>
                           <a:latin typeface="Montserrat" pitchFamily="34" charset="0"/>
                           <a:ea typeface="Montserrat" pitchFamily="34" charset="-122"/>
@@ -8602,7 +8602,7 @@
                       <a:tailEnd type="none" w="med" len="med"/>
                     </a:lnB>
                     <a:solidFill>
-                      <a:srgbClr val="000000"/>
+                      <a:srgbClr val="F5F3FA"/>
                     </a:solidFill>
                   </a:tcPr>
                 </a:tc>
@@ -8617,7 +8617,7 @@
                       <a:r>
                         <a:rPr lang="en-US" sz="1150" dirty="0">
                           <a:solidFill>
-                            <a:srgbClr val="A98BFF"/>
+                            <a:srgbClr val="5A05F4"/>
                           </a:solidFill>
                           <a:latin typeface="Montserrat" pitchFamily="34" charset="0"/>
                           <a:ea typeface="Montserrat" pitchFamily="34" charset="-122"/>
@@ -8670,7 +8670,7 @@
                       <a:tailEnd type="none" w="med" len="med"/>
                     </a:lnB>
                     <a:solidFill>
-                      <a:srgbClr val="000000"/>
+                      <a:srgbClr val="F5F3FA"/>
                     </a:solidFill>
                   </a:tcPr>
                 </a:tc>
@@ -9099,7 +9099,7 @@
                       <a:r>
                         <a:rPr lang="en-US" sz="1150" b="1" dirty="0">
                           <a:solidFill>
-                            <a:srgbClr val="A98BFF"/>
+                            <a:srgbClr val="5A05F4"/>
                           </a:solidFill>
                           <a:latin typeface="Montserrat" pitchFamily="34" charset="0"/>
                           <a:ea typeface="Montserrat" pitchFamily="34" charset="-122"/>
@@ -9152,7 +9152,7 @@
                       <a:tailEnd type="none" w="med" len="med"/>
                     </a:lnB>
                     <a:solidFill>
-                      <a:srgbClr val="000000"/>
+                      <a:srgbClr val="F5F3FA"/>
                     </a:solidFill>
                   </a:tcPr>
                 </a:tc>
@@ -9167,7 +9167,7 @@
                       <a:r>
                         <a:rPr lang="en-US" sz="1150" dirty="0">
                           <a:solidFill>
-                            <a:srgbClr val="A98BFF"/>
+                            <a:srgbClr val="5A05F4"/>
                           </a:solidFill>
                           <a:latin typeface="Montserrat" pitchFamily="34" charset="0"/>
                           <a:ea typeface="Montserrat" pitchFamily="34" charset="-122"/>
@@ -9220,7 +9220,7 @@
                       <a:tailEnd type="none" w="med" len="med"/>
                     </a:lnB>
                     <a:solidFill>
-                      <a:srgbClr val="000000"/>
+                      <a:srgbClr val="F5F3FA"/>
                     </a:solidFill>
                   </a:tcPr>
                 </a:tc>
@@ -9235,7 +9235,7 @@
                       <a:r>
                         <a:rPr lang="en-US" sz="1150" dirty="0">
                           <a:solidFill>
-                            <a:srgbClr val="A98BFF"/>
+                            <a:srgbClr val="5A05F4"/>
                           </a:solidFill>
                           <a:latin typeface="Montserrat" pitchFamily="34" charset="0"/>
                           <a:ea typeface="Montserrat" pitchFamily="34" charset="-122"/>
@@ -9288,7 +9288,7 @@
                       <a:tailEnd type="none" w="med" len="med"/>
                     </a:lnB>
                     <a:solidFill>
-                      <a:srgbClr val="000000"/>
+                      <a:srgbClr val="F5F3FA"/>
                     </a:solidFill>
                   </a:tcPr>
                 </a:tc>
@@ -24651,7 +24651,7 @@
                       <a:tailEnd type="none" w="med" len="med"/>
                     </a:lnB>
                     <a:solidFill>
-                      <a:srgbClr val="000000"/>
+                      <a:srgbClr val="5A05F4"/>
                     </a:solidFill>
                   </a:tcPr>
                 </a:tc>
@@ -24719,7 +24719,7 @@
                       <a:tailEnd type="none" w="med" len="med"/>
                     </a:lnB>
                     <a:solidFill>
-                      <a:srgbClr val="000000"/>
+                      <a:srgbClr val="5A05F4"/>
                     </a:solidFill>
                   </a:tcPr>
                 </a:tc>
@@ -24787,7 +24787,7 @@
                       <a:tailEnd type="none" w="med" len="med"/>
                     </a:lnB>
                     <a:solidFill>
-                      <a:srgbClr val="000000"/>
+                      <a:srgbClr val="5A05F4"/>
                     </a:solidFill>
                   </a:tcPr>
                 </a:tc>
@@ -25422,7 +25422,7 @@
                       <a:r>
                         <a:rPr lang="en-US" sz="1150" b="1" dirty="0">
                           <a:solidFill>
-                            <a:srgbClr val="FF6B6B"/>
+                            <a:srgbClr val="B3261E"/>
                           </a:solidFill>
                           <a:latin typeface="Montserrat" pitchFamily="34" charset="0"/>
                           <a:ea typeface="Montserrat" pitchFamily="34" charset="-122"/>
@@ -25475,7 +25475,7 @@
                       <a:tailEnd type="none" w="med" len="med"/>
                     </a:lnB>
                     <a:solidFill>
-                      <a:srgbClr val="000000"/>
+                      <a:srgbClr val="F5F3FA"/>
                     </a:solidFill>
                   </a:tcPr>
                 </a:tc>
@@ -25490,7 +25490,7 @@
                       <a:r>
                         <a:rPr lang="en-US" sz="1150" dirty="0">
                           <a:solidFill>
-                            <a:srgbClr val="FF6B6B"/>
+                            <a:srgbClr val="B3261E"/>
                           </a:solidFill>
                           <a:latin typeface="Montserrat" pitchFamily="34" charset="0"/>
                           <a:ea typeface="Montserrat" pitchFamily="34" charset="-122"/>
@@ -25543,7 +25543,7 @@
                       <a:tailEnd type="none" w="med" len="med"/>
                     </a:lnB>
                     <a:solidFill>
-                      <a:srgbClr val="000000"/>
+                      <a:srgbClr val="F5F3FA"/>
                     </a:solidFill>
                   </a:tcPr>
                 </a:tc>
@@ -25558,7 +25558,7 @@
                       <a:r>
                         <a:rPr lang="en-US" sz="1150" dirty="0">
                           <a:solidFill>
-                            <a:srgbClr val="FF6B6B"/>
+                            <a:srgbClr val="B3261E"/>
                           </a:solidFill>
                           <a:latin typeface="Montserrat" pitchFamily="34" charset="0"/>
                           <a:ea typeface="Montserrat" pitchFamily="34" charset="-122"/>
@@ -25611,7 +25611,7 @@
                       <a:tailEnd type="none" w="med" len="med"/>
                     </a:lnB>
                     <a:solidFill>
-                      <a:srgbClr val="000000"/>
+                      <a:srgbClr val="F5F3FA"/>
                     </a:solidFill>
                   </a:tcPr>
                 </a:tc>

--- a/docs/decks/L07.pptx
+++ b/docs/decks/L07.pptx
@@ -5401,7 +5401,7 @@
                     <a:bodyPr/>
                     <a:lstStyle/>
                     <a:p>
-                      <a:pPr indent="0" marL="0">
+                      <a:pPr algn="ctr" indent="0" marL="0">
                         <a:buNone/>
                       </a:pPr>
                       <a:r>
@@ -5469,7 +5469,7 @@
                     <a:bodyPr/>
                     <a:lstStyle/>
                     <a:p>
-                      <a:pPr indent="0" marL="0">
+                      <a:pPr algn="ctr" indent="0" marL="0">
                         <a:buNone/>
                       </a:pPr>
                       <a:r>
@@ -5537,7 +5537,7 @@
                     <a:bodyPr/>
                     <a:lstStyle/>
                     <a:p>
-                      <a:pPr indent="0" marL="0">
+                      <a:pPr algn="ctr" indent="0" marL="0">
                         <a:buNone/>
                       </a:pPr>
                       <a:r>
@@ -8063,7 +8063,7 @@
                     <a:bodyPr/>
                     <a:lstStyle/>
                     <a:p>
-                      <a:pPr indent="0" marL="0">
+                      <a:pPr algn="ctr" indent="0" marL="0">
                         <a:buNone/>
                       </a:pPr>
                       <a:r>
@@ -8131,7 +8131,7 @@
                     <a:bodyPr/>
                     <a:lstStyle/>
                     <a:p>
-                      <a:pPr indent="0" marL="0">
+                      <a:pPr algn="ctr" indent="0" marL="0">
                         <a:buNone/>
                       </a:pPr>
                       <a:r>
@@ -8199,7 +8199,7 @@
                     <a:bodyPr/>
                     <a:lstStyle/>
                     <a:p>
-                      <a:pPr indent="0" marL="0">
+                      <a:pPr algn="ctr" indent="0" marL="0">
                         <a:buNone/>
                       </a:pPr>
                       <a:r>
@@ -24603,7 +24603,7 @@
                     <a:bodyPr/>
                     <a:lstStyle/>
                     <a:p>
-                      <a:pPr indent="0" marL="0">
+                      <a:pPr algn="ctr" indent="0" marL="0">
                         <a:buNone/>
                       </a:pPr>
                       <a:endParaRPr lang="en-US" sz="900" dirty="0">
@@ -24660,7 +24660,7 @@
                     <a:bodyPr/>
                     <a:lstStyle/>
                     <a:p>
-                      <a:pPr indent="0" marL="0">
+                      <a:pPr algn="ctr" indent="0" marL="0">
                         <a:buNone/>
                       </a:pPr>
                       <a:r>
@@ -24728,7 +24728,7 @@
                     <a:bodyPr/>
                     <a:lstStyle/>
                     <a:p>
-                      <a:pPr indent="0" marL="0">
+                      <a:pPr algn="ctr" indent="0" marL="0">
                         <a:buNone/>
                       </a:pPr>
                       <a:r>

--- a/docs/decks/L07.pptx
+++ b/docs/decks/L07.pptx
@@ -4,6 +4,9 @@
   <p:sldMasterIdLst>
     <p:sldMasterId id="2147483648" r:id="rId1"/>
   </p:sldMasterIdLst>
+  <p:notesMasterIdLst>
+    <p:notesMasterId r:id="rId31"/>
+  </p:notesMasterIdLst>
   <p:sldIdLst>
     <p:sldId id="256" r:id="rId2"/>
     <p:sldId id="257" r:id="rId3"/>
@@ -35,9 +38,6 @@
     <p:sldId id="283" r:id="rId29"/>
     <p:sldId id="284" r:id="rId30"/>
   </p:sldIdLst>
-  <p:notesMasterIdLst>
-    <p:notesMasterId r:id="rId31"/>
-  </p:notesMasterIdLst>
   <p:sldSz cx="12192000" cy="6858000"/>
   <p:notesSz cx="6858000" cy="12192000"/>
   <p:defaultTextStyle>
@@ -132,6 +132,11 @@
       </a:defRPr>
     </a:lvl9pPr>
   </p:defaultTextStyle>
+  <p:extLst>
+    <p:ext uri="{EFAFB233-063F-42B5-8137-9DF3F51BA10A}">
+      <p15:sldGuideLst xmlns:p15="http://schemas.microsoft.com/office/powerpoint/2012/main"/>
+    </p:ext>
+  </p:extLst>
 </p:presentation>
 </file>
 
@@ -157,234 +162,10 @@
           <a:chExt cx="0" cy="0"/>
         </a:xfrm>
       </p:grpSpPr>
-      <p:sp>
-        <p:nvSpPr>
-          <p:cNvPr id="2" name="Header Placeholder 1"/>
-          <p:cNvSpPr>
-            <a:spLocks noGrp="1"/>
-          </p:cNvSpPr>
-          <p:nvPr>
-            <p:ph type="hdr" sz="quarter"/>
-          </p:nvPr>
-        </p:nvSpPr>
-        <p:spPr>
-          <a:xfrm>
-            <a:off x="0" y="0"/>
-            <a:ext cx="2971800" cy="458788"/>
-          </a:xfrm>
-          <a:prstGeom prst="rect">
-            <a:avLst/>
-          </a:prstGeom>
-        </p:spPr>
-        <p:txBody>
-          <a:bodyPr vert="horz" lIns="91440" tIns="45720" rIns="91440" bIns="45720" rtlCol="0"/>
-          <a:lstStyle>
-            <a:lvl1pPr algn="l">
-              <a:defRPr sz="1200"/>
-            </a:lvl1pPr>
-          </a:lstStyle>
-          <a:p>
-            <a:endParaRPr lang="en-US"/>
-          </a:p>
-        </p:txBody>
-      </p:sp>
-      <p:sp>
-        <p:nvSpPr>
-          <p:cNvPr id="3" name="Date Placeholder 2"/>
-          <p:cNvSpPr>
-            <a:spLocks noGrp="1"/>
-          </p:cNvSpPr>
-          <p:nvPr>
-            <p:ph type="dt" idx="1"/>
-          </p:nvPr>
-        </p:nvSpPr>
-        <p:spPr>
-          <a:xfrm>
-            <a:off x="3884613" y="0"/>
-            <a:ext cx="2971800" cy="458788"/>
-          </a:xfrm>
-          <a:prstGeom prst="rect">
-            <a:avLst/>
-          </a:prstGeom>
-        </p:spPr>
-        <p:txBody>
-          <a:bodyPr vert="horz" lIns="91440" tIns="45720" rIns="91440" bIns="45720" rtlCol="0"/>
-          <a:lstStyle>
-            <a:lvl1pPr algn="r">
-              <a:defRPr sz="1200"/>
-            </a:lvl1pPr>
-          </a:lstStyle>
-          <a:p>
-            <a:fld id="{5282F153-3F37-0F45-9E97-73ACFA13230C}" type="datetimeFigureOut">
-              <a:rPr lang="en-US"/>
-              <a:t>7/23/19</a:t>
-            </a:fld>
-            <a:endParaRPr lang="en-US"/>
-          </a:p>
-        </p:txBody>
-      </p:sp>
-      <p:sp>
-        <p:nvSpPr>
-          <p:cNvPr id="4" name="Slide Image Placeholder 3"/>
-          <p:cNvSpPr>
-            <a:spLocks noGrp="1" noRot="1" noChangeAspect="1"/>
-          </p:cNvSpPr>
-          <p:nvPr>
-            <p:ph type="sldImg" idx="2"/>
-          </p:nvPr>
-        </p:nvSpPr>
-        <p:spPr>
-          <a:xfrm>
-            <a:off x="685800" y="1143000"/>
-            <a:ext cx="5486400" cy="3086100"/>
-          </a:xfrm>
-          <a:prstGeom prst="rect">
-            <a:avLst/>
-          </a:prstGeom>
-          <a:noFill/>
-          <a:ln w="12700">
-            <a:solidFill>
-              <a:prstClr val="black"/>
-            </a:solidFill>
-          </a:ln>
-        </p:spPr>
-        <p:txBody>
-          <a:bodyPr vert="horz" lIns="91440" tIns="45720" rIns="91440" bIns="45720" rtlCol="0" anchor="ctr"/>
-          <a:lstStyle/>
-          <a:p>
-            <a:endParaRPr lang="en-US"/>
-          </a:p>
-        </p:txBody>
-      </p:sp>
-      <p:sp>
-        <p:nvSpPr>
-          <p:cNvPr id="5" name="Notes Placeholder 4"/>
-          <p:cNvSpPr>
-            <a:spLocks noGrp="1"/>
-          </p:cNvSpPr>
-          <p:nvPr>
-            <p:ph type="body" sz="quarter" idx="3"/>
-          </p:nvPr>
-        </p:nvSpPr>
-        <p:spPr>
-          <a:xfrm>
-            <a:off x="685800" y="4400550"/>
-            <a:ext cx="5486400" cy="3600450"/>
-          </a:xfrm>
-          <a:prstGeom prst="rect">
-            <a:avLst/>
-          </a:prstGeom>
-        </p:spPr>
-        <p:txBody>
-          <a:bodyPr vert="horz" lIns="91440" tIns="45720" rIns="91440" bIns="45720" rtlCol="0"/>
-          <a:lstStyle/>
-          <a:p>
-            <a:pPr lvl="0"/>
-            <a:r>
-              <a:rPr lang="en-US"/>
-              <a:t>Click to edit Master text styles</a:t>
-            </a:r>
-          </a:p>
-          <a:p>
-            <a:pPr lvl="1"/>
-            <a:r>
-              <a:rPr lang="en-US"/>
-              <a:t>Second level</a:t>
-            </a:r>
-          </a:p>
-          <a:p>
-            <a:pPr lvl="2"/>
-            <a:r>
-              <a:rPr lang="en-US"/>
-              <a:t>Third level</a:t>
-            </a:r>
-          </a:p>
-          <a:p>
-            <a:pPr lvl="3"/>
-            <a:r>
-              <a:rPr lang="en-US"/>
-              <a:t>Fourth level</a:t>
-            </a:r>
-          </a:p>
-          <a:p>
-            <a:pPr lvl="4"/>
-            <a:r>
-              <a:rPr lang="en-US"/>
-              <a:t>Fifth level</a:t>
-            </a:r>
-          </a:p>
-        </p:txBody>
-      </p:sp>
-      <p:sp>
-        <p:nvSpPr>
-          <p:cNvPr id="6" name="Footer Placeholder 5"/>
-          <p:cNvSpPr>
-            <a:spLocks noGrp="1"/>
-          </p:cNvSpPr>
-          <p:nvPr>
-            <p:ph type="ftr" sz="quarter" idx="4"/>
-          </p:nvPr>
-        </p:nvSpPr>
-        <p:spPr>
-          <a:xfrm>
-            <a:off x="0" y="8685213"/>
-            <a:ext cx="2971800" cy="458787"/>
-          </a:xfrm>
-          <a:prstGeom prst="rect">
-            <a:avLst/>
-          </a:prstGeom>
-        </p:spPr>
-        <p:txBody>
-          <a:bodyPr vert="horz" lIns="91440" tIns="45720" rIns="91440" bIns="45720" rtlCol="0" anchor="b"/>
-          <a:lstStyle>
-            <a:lvl1pPr algn="l">
-              <a:defRPr sz="1200"/>
-            </a:lvl1pPr>
-          </a:lstStyle>
-          <a:p>
-            <a:endParaRPr lang="en-US"/>
-          </a:p>
-        </p:txBody>
-      </p:sp>
-      <p:sp>
-        <p:nvSpPr>
-          <p:cNvPr id="7" name="Slide Number Placeholder 6"/>
-          <p:cNvSpPr>
-            <a:spLocks noGrp="1"/>
-          </p:cNvSpPr>
-          <p:nvPr>
-            <p:ph type="sldNum" sz="quarter" idx="5"/>
-          </p:nvPr>
-        </p:nvSpPr>
-        <p:spPr>
-          <a:xfrm>
-            <a:off x="3884613" y="8685213"/>
-            <a:ext cx="2971800" cy="458787"/>
-          </a:xfrm>
-          <a:prstGeom prst="rect">
-            <a:avLst/>
-          </a:prstGeom>
-        </p:spPr>
-        <p:txBody>
-          <a:bodyPr vert="horz" lIns="91440" tIns="45720" rIns="91440" bIns="45720" rtlCol="0" anchor="b"/>
-          <a:lstStyle>
-            <a:lvl1pPr algn="r">
-              <a:defRPr sz="1200"/>
-            </a:lvl1pPr>
-          </a:lstStyle>
-          <a:p>
-            <a:fld id="{CE5E9CC1-C706-0F49-92D6-E571CC5EEA8F}" type="slidenum">
-              <a:rPr lang="en-US"/>
-              <a:t>‹#›</a:t>
-            </a:fld>
-            <a:endParaRPr lang="en-US"/>
-          </a:p>
-        </p:txBody>
-      </p:sp>
     </p:spTree>
     <p:extLst>
       <p:ext uri="{BB962C8B-B14F-4D97-AF65-F5344CB8AC3E}">
-        <p14:creationId xmlns:p14="http://schemas.microsoft.com/office/powerpoint/2010/main" val="1024086991"/>
+        <p14:creationId xmlns:p14="http://schemas.microsoft.com/office/powerpoint/2010/main" val="3546558148"/>
       </p:ext>
     </p:extLst>
   </p:cSld>
@@ -528,10 +309,6 @@
           <a:bodyPr/>
           <a:lstStyle/>
           <a:p>
-            <a:r>
-              <a:rPr lang="en-US" dirty="0"/>
-              <a:t/>
-            </a:r>
             <a:endParaRPr lang="en-US" dirty="0"/>
           </a:p>
         </p:txBody>
@@ -616,10 +393,6 @@
           <a:bodyPr/>
           <a:lstStyle/>
           <a:p>
-            <a:r>
-              <a:rPr lang="en-US" dirty="0"/>
-              <a:t/>
-            </a:r>
             <a:endParaRPr lang="en-US" dirty="0"/>
           </a:p>
         </p:txBody>
@@ -704,10 +477,6 @@
           <a:bodyPr/>
           <a:lstStyle/>
           <a:p>
-            <a:r>
-              <a:rPr lang="en-US" dirty="0"/>
-              <a:t/>
-            </a:r>
             <a:endParaRPr lang="en-US" dirty="0"/>
           </a:p>
         </p:txBody>
@@ -792,10 +561,6 @@
           <a:bodyPr/>
           <a:lstStyle/>
           <a:p>
-            <a:r>
-              <a:rPr lang="en-US" dirty="0"/>
-              <a:t/>
-            </a:r>
             <a:endParaRPr lang="en-US" dirty="0"/>
           </a:p>
         </p:txBody>
@@ -880,10 +645,6 @@
           <a:bodyPr/>
           <a:lstStyle/>
           <a:p>
-            <a:r>
-              <a:rPr lang="en-US" dirty="0"/>
-              <a:t/>
-            </a:r>
             <a:endParaRPr lang="en-US" dirty="0"/>
           </a:p>
         </p:txBody>
@@ -968,10 +729,6 @@
           <a:bodyPr/>
           <a:lstStyle/>
           <a:p>
-            <a:r>
-              <a:rPr lang="en-US" dirty="0"/>
-              <a:t/>
-            </a:r>
             <a:endParaRPr lang="en-US" dirty="0"/>
           </a:p>
         </p:txBody>
@@ -1056,10 +813,6 @@
           <a:bodyPr/>
           <a:lstStyle/>
           <a:p>
-            <a:r>
-              <a:rPr lang="en-US" dirty="0"/>
-              <a:t/>
-            </a:r>
             <a:endParaRPr lang="en-US" dirty="0"/>
           </a:p>
         </p:txBody>
@@ -1144,10 +897,6 @@
           <a:bodyPr/>
           <a:lstStyle/>
           <a:p>
-            <a:r>
-              <a:rPr lang="en-US" dirty="0"/>
-              <a:t/>
-            </a:r>
             <a:endParaRPr lang="en-US" dirty="0"/>
           </a:p>
         </p:txBody>
@@ -1232,10 +981,6 @@
           <a:bodyPr/>
           <a:lstStyle/>
           <a:p>
-            <a:r>
-              <a:rPr lang="en-US" dirty="0"/>
-              <a:t/>
-            </a:r>
             <a:endParaRPr lang="en-US" dirty="0"/>
           </a:p>
         </p:txBody>
@@ -1320,10 +1065,6 @@
           <a:bodyPr/>
           <a:lstStyle/>
           <a:p>
-            <a:r>
-              <a:rPr lang="en-US" dirty="0"/>
-              <a:t/>
-            </a:r>
             <a:endParaRPr lang="en-US" dirty="0"/>
           </a:p>
         </p:txBody>
@@ -1408,10 +1149,6 @@
           <a:bodyPr/>
           <a:lstStyle/>
           <a:p>
-            <a:r>
-              <a:rPr lang="en-US" dirty="0"/>
-              <a:t/>
-            </a:r>
             <a:endParaRPr lang="en-US" dirty="0"/>
           </a:p>
         </p:txBody>
@@ -1496,10 +1233,6 @@
           <a:bodyPr/>
           <a:lstStyle/>
           <a:p>
-            <a:r>
-              <a:rPr lang="en-US" dirty="0"/>
-              <a:t/>
-            </a:r>
             <a:endParaRPr lang="en-US" dirty="0"/>
           </a:p>
         </p:txBody>
@@ -1584,10 +1317,6 @@
           <a:bodyPr/>
           <a:lstStyle/>
           <a:p>
-            <a:r>
-              <a:rPr lang="en-US" dirty="0"/>
-              <a:t/>
-            </a:r>
             <a:endParaRPr lang="en-US" dirty="0"/>
           </a:p>
         </p:txBody>
@@ -1672,10 +1401,6 @@
           <a:bodyPr/>
           <a:lstStyle/>
           <a:p>
-            <a:r>
-              <a:rPr lang="en-US" dirty="0"/>
-              <a:t/>
-            </a:r>
             <a:endParaRPr lang="en-US" dirty="0"/>
           </a:p>
         </p:txBody>
@@ -1760,10 +1485,6 @@
           <a:bodyPr/>
           <a:lstStyle/>
           <a:p>
-            <a:r>
-              <a:rPr lang="en-US" dirty="0"/>
-              <a:t/>
-            </a:r>
             <a:endParaRPr lang="en-US" dirty="0"/>
           </a:p>
         </p:txBody>
@@ -1848,10 +1569,6 @@
           <a:bodyPr/>
           <a:lstStyle/>
           <a:p>
-            <a:r>
-              <a:rPr lang="en-US" dirty="0"/>
-              <a:t/>
-            </a:r>
             <a:endParaRPr lang="en-US" dirty="0"/>
           </a:p>
         </p:txBody>
@@ -1936,10 +1653,6 @@
           <a:bodyPr/>
           <a:lstStyle/>
           <a:p>
-            <a:r>
-              <a:rPr lang="en-US" dirty="0"/>
-              <a:t/>
-            </a:r>
             <a:endParaRPr lang="en-US" dirty="0"/>
           </a:p>
         </p:txBody>
@@ -2024,10 +1737,6 @@
           <a:bodyPr/>
           <a:lstStyle/>
           <a:p>
-            <a:r>
-              <a:rPr lang="en-US" dirty="0"/>
-              <a:t/>
-            </a:r>
             <a:endParaRPr lang="en-US" dirty="0"/>
           </a:p>
         </p:txBody>
@@ -2112,10 +1821,6 @@
           <a:bodyPr/>
           <a:lstStyle/>
           <a:p>
-            <a:r>
-              <a:rPr lang="en-US" dirty="0"/>
-              <a:t/>
-            </a:r>
             <a:endParaRPr lang="en-US" dirty="0"/>
           </a:p>
         </p:txBody>
@@ -2200,10 +1905,6 @@
           <a:bodyPr/>
           <a:lstStyle/>
           <a:p>
-            <a:r>
-              <a:rPr lang="en-US" dirty="0"/>
-              <a:t/>
-            </a:r>
             <a:endParaRPr lang="en-US" dirty="0"/>
           </a:p>
         </p:txBody>
@@ -2288,10 +1989,6 @@
           <a:bodyPr/>
           <a:lstStyle/>
           <a:p>
-            <a:r>
-              <a:rPr lang="en-US" dirty="0"/>
-              <a:t/>
-            </a:r>
             <a:endParaRPr lang="en-US" dirty="0"/>
           </a:p>
         </p:txBody>
@@ -2376,10 +2073,6 @@
           <a:bodyPr/>
           <a:lstStyle/>
           <a:p>
-            <a:r>
-              <a:rPr lang="en-US" dirty="0"/>
-              <a:t/>
-            </a:r>
             <a:endParaRPr lang="en-US" dirty="0"/>
           </a:p>
         </p:txBody>
@@ -2464,10 +2157,6 @@
           <a:bodyPr/>
           <a:lstStyle/>
           <a:p>
-            <a:r>
-              <a:rPr lang="en-US" dirty="0"/>
-              <a:t/>
-            </a:r>
             <a:endParaRPr lang="en-US" dirty="0"/>
           </a:p>
         </p:txBody>
@@ -2552,10 +2241,6 @@
           <a:bodyPr/>
           <a:lstStyle/>
           <a:p>
-            <a:r>
-              <a:rPr lang="en-US" dirty="0"/>
-              <a:t/>
-            </a:r>
             <a:endParaRPr lang="en-US" dirty="0"/>
           </a:p>
         </p:txBody>
@@ -2640,10 +2325,6 @@
           <a:bodyPr/>
           <a:lstStyle/>
           <a:p>
-            <a:r>
-              <a:rPr lang="en-US" dirty="0"/>
-              <a:t/>
-            </a:r>
             <a:endParaRPr lang="en-US" dirty="0"/>
           </a:p>
         </p:txBody>
@@ -2728,10 +2409,6 @@
           <a:bodyPr/>
           <a:lstStyle/>
           <a:p>
-            <a:r>
-              <a:rPr lang="en-US" dirty="0"/>
-              <a:t/>
-            </a:r>
             <a:endParaRPr lang="en-US" dirty="0"/>
           </a:p>
         </p:txBody>
@@ -2816,10 +2493,6 @@
           <a:bodyPr/>
           <a:lstStyle/>
           <a:p>
-            <a:r>
-              <a:rPr lang="en-US" dirty="0"/>
-              <a:t/>
-            </a:r>
             <a:endParaRPr lang="en-US" dirty="0"/>
           </a:p>
         </p:txBody>
@@ -2904,10 +2577,6 @@
           <a:bodyPr/>
           <a:lstStyle/>
           <a:p>
-            <a:r>
-              <a:rPr lang="en-US" dirty="0"/>
-              <a:t/>
-            </a:r>
             <a:endParaRPr lang="en-US" dirty="0"/>
           </a:p>
         </p:txBody>
@@ -2992,10 +2661,6 @@
           <a:bodyPr/>
           <a:lstStyle/>
           <a:p>
-            <a:r>
-              <a:rPr lang="en-US" dirty="0"/>
-              <a:t/>
-            </a:r>
             <a:endParaRPr lang="en-US" dirty="0"/>
           </a:p>
         </p:txBody>
@@ -3078,7 +2743,7 @@
           </a:prstGeom>
           <a:extLst>
             <a:ext uri="{C572A759-6A51-4108-AA02-DFA0A04FC94B}">
-              <ma14:wrappingTextBoxFlag xmlns:ma14="http://schemas.microsoft.com/office/mac/drawingml/2011/main" val="0"/>
+              <ma14:wrappingTextBoxFlag xmlns="" xmlns:ma14="http://schemas.microsoft.com/office/mac/drawingml/2011/main" val="0"/>
             </a:ext>
           </a:extLst>
         </p:spPr>
@@ -3099,8 +2764,8 @@
           <a:p>
             <a:pPr algn="l"/>
             <a:fld id="{F7021451-1387-4CA6-816F-3879F97B5CBC}" type="slidenum">
-              <a:rPr b="0" lang="en-US"/>
-              <a:t>1000</a:t>
+              <a:rPr lang="en-US" b="0"/>
+              <a:t>‹#›</a:t>
             </a:fld>
             <a:endParaRPr lang="en-US"/>
           </a:p>
@@ -3122,6 +2787,7 @@
         <a:solidFill>
           <a:srgbClr val="000000"/>
         </a:solidFill>
+        <a:effectLst/>
       </p:bgPr>
     </p:bg>
     <p:spTree>
@@ -3140,14 +2806,14 @@
       </p:grpSpPr>
       <p:pic>
         <p:nvPicPr>
-          <p:cNvPr id="2" name="Image 0" descr="preencoded.png">    </p:cNvPr>
+          <p:cNvPr id="2" name="Image 0" descr="preencoded.png"/>
           <p:cNvPicPr>
             <a:picLocks noChangeAspect="1"/>
           </p:cNvPicPr>
           <p:nvPr/>
         </p:nvPicPr>
         <p:blipFill>
-          <a:blip r:embed="rId1"/>
+          <a:blip r:embed="rId2"/>
           <a:stretch>
             <a:fillRect/>
           </a:stretch>
@@ -3178,6 +2844,7 @@
         <a:solidFill>
           <a:srgbClr val="000000"/>
         </a:solidFill>
+        <a:effectLst/>
       </p:bgPr>
     </p:bg>
     <p:spTree>
@@ -3196,14 +2863,14 @@
       </p:grpSpPr>
       <p:pic>
         <p:nvPicPr>
-          <p:cNvPr id="2" name="Image 0" descr="preencoded.png">    </p:cNvPr>
+          <p:cNvPr id="2" name="Image 0" descr="preencoded.png"/>
           <p:cNvPicPr>
             <a:picLocks noChangeAspect="1"/>
           </p:cNvPicPr>
           <p:nvPr/>
         </p:nvPicPr>
         <p:blipFill>
-          <a:blip r:embed="rId1"/>
+          <a:blip r:embed="rId2"/>
           <a:stretch>
             <a:fillRect/>
           </a:stretch>
@@ -3234,6 +2901,7 @@
         <a:solidFill>
           <a:srgbClr val="000000"/>
         </a:solidFill>
+        <a:effectLst/>
       </p:bgPr>
     </p:bg>
     <p:spTree>
@@ -3252,14 +2920,14 @@
       </p:grpSpPr>
       <p:pic>
         <p:nvPicPr>
-          <p:cNvPr id="2" name="Image 0" descr="preencoded.png">    </p:cNvPr>
+          <p:cNvPr id="2" name="Image 0" descr="preencoded.png"/>
           <p:cNvPicPr>
             <a:picLocks noChangeAspect="1"/>
           </p:cNvPicPr>
           <p:nvPr/>
         </p:nvPicPr>
         <p:blipFill>
-          <a:blip r:embed="rId1"/>
+          <a:blip r:embed="rId2"/>
           <a:stretch>
             <a:fillRect/>
           </a:stretch>
@@ -3285,6 +2953,11 @@
 <file path=ppt/slideMasters/slideMaster1.xml><?xml version="1.0" encoding="utf-8"?>
 <p:sldMaster xmlns:a="http://schemas.openxmlformats.org/drawingml/2006/main" xmlns:r="http://schemas.openxmlformats.org/officeDocument/2006/relationships" xmlns:p="http://schemas.openxmlformats.org/presentationml/2006/main">
   <p:cSld>
+    <p:bg>
+      <p:bgRef idx="1001">
+        <a:schemeClr val="bg1"/>
+      </p:bgRef>
+    </p:bg>
     <p:spTree>
       <p:nvGrpSpPr>
         <p:cNvPr id="1" name=""/>
@@ -3319,7 +2992,7 @@
           </a:prstGeom>
           <a:extLst>
             <a:ext uri="{C572A759-6A51-4108-AA02-DFA0A04FC94B}">
-              <ma14:wrappingTextBoxFlag xmlns:ma14="http://schemas.microsoft.com/office/mac/drawingml/2011/main" val="0"/>
+              <ma14:wrappingTextBoxFlag xmlns="" xmlns:ma14="http://schemas.microsoft.com/office/mac/drawingml/2011/main" val="0"/>
             </a:ext>
           </a:extLst>
         </p:spPr>
@@ -3340,8 +3013,8 @@
           <a:p>
             <a:pPr algn="l"/>
             <a:fld id="{F7021451-1387-4CA6-816F-3879F97B5CBC}" type="slidenum">
-              <a:rPr b="0" lang="en-US"/>
-              <a:t>null</a:t>
+              <a:rPr lang="en-US" b="0"/>
+              <a:t>‹#›</a:t>
             </a:fld>
             <a:endParaRPr lang="en-US"/>
           </a:p>
@@ -3648,11 +3321,11 @@
           <a:bodyPr wrap="square" lIns="0" tIns="0" rIns="0" bIns="0" rtlCol="0" anchor="ctr"/>
           <a:lstStyle/>
           <a:p>
-            <a:pPr indent="0" marL="0">
-              <a:buNone/>
-            </a:pPr>
-            <a:r>
-              <a:rPr lang="en-US" sz="1200" b="1" spc="400" kern="0" dirty="0">
+            <a:pPr marL="0" indent="0">
+              <a:buNone/>
+            </a:pPr>
+            <a:r>
+              <a:rPr lang="en-US" sz="1200" b="1" kern="0" spc="400" dirty="0">
                 <a:solidFill>
                   <a:srgbClr val="FFFFFF"/>
                 </a:solidFill>
@@ -3687,11 +3360,11 @@
           <a:bodyPr wrap="square" lIns="0" tIns="0" rIns="0" bIns="0" rtlCol="0" anchor="ctr"/>
           <a:lstStyle/>
           <a:p>
-            <a:pPr indent="0" marL="0">
-              <a:buNone/>
-            </a:pPr>
-            <a:r>
-              <a:rPr lang="en-US" sz="1200" b="1" spc="300" kern="0" dirty="0">
+            <a:pPr marL="0" indent="0">
+              <a:buNone/>
+            </a:pPr>
+            <a:r>
+              <a:rPr lang="en-US" sz="1200" b="1" kern="0" spc="300" dirty="0">
                 <a:solidFill>
                   <a:srgbClr val="C4B3F5"/>
                 </a:solidFill>
@@ -3726,7 +3399,7 @@
           <a:bodyPr wrap="square" lIns="0" tIns="0" rIns="0" bIns="0" rtlCol="0" anchor="t"/>
           <a:lstStyle/>
           <a:p>
-            <a:pPr indent="0" marL="0">
+            <a:pPr marL="0" indent="0">
               <a:lnSpc>
                 <a:spcPct val="102000"/>
               </a:lnSpc>
@@ -3746,7 +3419,7 @@
             <a:endParaRPr lang="en-US" sz="3600" dirty="0"/>
           </a:p>
           <a:p>
-            <a:pPr indent="0" marL="0">
+            <a:pPr marL="0" indent="0">
               <a:lnSpc>
                 <a:spcPct val="102000"/>
               </a:lnSpc>
@@ -3788,7 +3461,7 @@
           <a:bodyPr wrap="square" lIns="0" tIns="0" rIns="0" bIns="0" rtlCol="0" anchor="ctr"/>
           <a:lstStyle/>
           <a:p>
-            <a:pPr indent="0" marL="0">
+            <a:pPr marL="0" indent="0">
               <a:lnSpc>
                 <a:spcPct val="120000"/>
               </a:lnSpc>
@@ -3856,7 +3529,7 @@
           <a:bodyPr wrap="square" lIns="0" tIns="0" rIns="0" bIns="0" rtlCol="0" anchor="ctr"/>
           <a:lstStyle/>
           <a:p>
-            <a:pPr algn="ctr" indent="0" marL="0">
+            <a:pPr marL="0" indent="0" algn="ctr">
               <a:buNone/>
             </a:pPr>
             <a:r>
@@ -3921,7 +3594,7 @@
           <a:bodyPr wrap="square" lIns="0" tIns="0" rIns="0" bIns="0" rtlCol="0" anchor="ctr"/>
           <a:lstStyle/>
           <a:p>
-            <a:pPr algn="ctr" indent="0" marL="0">
+            <a:pPr marL="0" indent="0" algn="ctr">
               <a:buNone/>
             </a:pPr>
             <a:r>
@@ -3986,7 +3659,7 @@
           <a:bodyPr wrap="square" lIns="0" tIns="0" rIns="0" bIns="0" rtlCol="0" anchor="ctr"/>
           <a:lstStyle/>
           <a:p>
-            <a:pPr algn="ctr" indent="0" marL="0">
+            <a:pPr marL="0" indent="0" algn="ctr">
               <a:buNone/>
             </a:pPr>
             <a:r>
@@ -4047,7 +3720,7 @@
           <a:bodyPr wrap="square" lIns="0" tIns="0" rIns="0" bIns="0" rtlCol="0" anchor="ctr"/>
           <a:lstStyle/>
           <a:p>
-            <a:pPr algn="ctr" indent="0" marL="0">
+            <a:pPr marL="0" indent="0" algn="ctr">
               <a:buNone/>
             </a:pPr>
             <a:r>
@@ -4112,7 +3785,7 @@
           <a:bodyPr wrap="square" lIns="0" tIns="0" rIns="0" bIns="0" rtlCol="0" anchor="ctr"/>
           <a:lstStyle/>
           <a:p>
-            <a:pPr algn="ctr" indent="0" marL="0">
+            <a:pPr marL="0" indent="0" algn="ctr">
               <a:buNone/>
             </a:pPr>
             <a:r>
@@ -4177,7 +3850,7 @@
           <a:bodyPr wrap="square" lIns="0" tIns="0" rIns="0" bIns="0" rtlCol="0" anchor="ctr"/>
           <a:lstStyle/>
           <a:p>
-            <a:pPr algn="ctr" indent="0" marL="0">
+            <a:pPr marL="0" indent="0" algn="ctr">
               <a:buNone/>
             </a:pPr>
             <a:r>
@@ -4263,7 +3936,7 @@
           <a:bodyPr wrap="square" lIns="0" tIns="0" rIns="0" bIns="0" rtlCol="0" anchor="ctr"/>
           <a:lstStyle/>
           <a:p>
-            <a:pPr algn="l" indent="0" marL="0">
+            <a:pPr marL="0" indent="0" algn="l">
               <a:buNone/>
             </a:pPr>
             <a:r>
@@ -4302,7 +3975,7 @@
           <a:bodyPr wrap="square" lIns="0" tIns="0" rIns="0" bIns="0" rtlCol="0" anchor="ctr"/>
           <a:lstStyle/>
           <a:p>
-            <a:pPr indent="0" marL="0">
+            <a:pPr marL="0" indent="0">
               <a:buNone/>
             </a:pPr>
             <a:r>
@@ -4368,11 +4041,11 @@
           <a:bodyPr wrap="square" lIns="0" tIns="0" rIns="0" bIns="0" rtlCol="0" anchor="ctr"/>
           <a:lstStyle/>
           <a:p>
-            <a:pPr algn="ctr" indent="0" marL="0">
-              <a:buNone/>
-            </a:pPr>
-            <a:r>
-              <a:rPr lang="en-US" sz="900" b="1" spc="100" kern="0" dirty="0">
+            <a:pPr marL="0" indent="0" algn="ctr">
+              <a:buNone/>
+            </a:pPr>
+            <a:r>
+              <a:rPr lang="en-US" sz="900" b="1" kern="0" spc="100" dirty="0">
                 <a:solidFill>
                   <a:srgbClr val="5A05F4"/>
                 </a:solidFill>
@@ -4388,14 +4061,14 @@
       </p:sp>
       <p:pic>
         <p:nvPicPr>
-          <p:cNvPr id="7" name="Image 0" descr="preencoded.png">    </p:cNvPr>
+          <p:cNvPr id="7" name="Image 0" descr="preencoded.png"/>
           <p:cNvPicPr>
             <a:picLocks noChangeAspect="1"/>
           </p:cNvPicPr>
           <p:nvPr/>
         </p:nvPicPr>
         <p:blipFill>
-          <a:blip r:embed="rId1"/>
+          <a:blip r:embed="rId3"/>
           <a:stretch>
             <a:fillRect/>
           </a:stretch>
@@ -4458,7 +4131,7 @@
           <a:bodyPr wrap="square" lIns="0" tIns="0" rIns="0" bIns="0" rtlCol="0" anchor="t"/>
           <a:lstStyle/>
           <a:p>
-            <a:pPr indent="0" marL="0">
+            <a:pPr marL="0" indent="0">
               <a:lnSpc>
                 <a:spcPct val="130000"/>
               </a:lnSpc>
@@ -4478,7 +4151,7 @@
             <a:endParaRPr lang="en-US" sz="1150" dirty="0"/>
           </a:p>
           <a:p>
-            <a:pPr indent="0" marL="0">
+            <a:pPr marL="0" indent="0">
               <a:lnSpc>
                 <a:spcPct val="130000"/>
               </a:lnSpc>
@@ -4498,7 +4171,7 @@
             <a:endParaRPr lang="en-US" sz="1150" dirty="0"/>
           </a:p>
           <a:p>
-            <a:pPr indent="0" marL="0">
+            <a:pPr marL="0" indent="0">
               <a:lnSpc>
                 <a:spcPct val="130000"/>
               </a:lnSpc>
@@ -4518,7 +4191,7 @@
             <a:endParaRPr lang="en-US" sz="1150" dirty="0"/>
           </a:p>
           <a:p>
-            <a:pPr indent="0" marL="0">
+            <a:pPr marL="0" indent="0">
               <a:lnSpc>
                 <a:spcPct val="130000"/>
               </a:lnSpc>
@@ -4538,7 +4211,7 @@
             <a:endParaRPr lang="en-US" sz="1150" dirty="0"/>
           </a:p>
           <a:p>
-            <a:pPr indent="0" marL="0">
+            <a:pPr marL="0" indent="0">
               <a:lnSpc>
                 <a:spcPct val="130000"/>
               </a:lnSpc>
@@ -4558,7 +4231,7 @@
             <a:endParaRPr lang="en-US" sz="1150" dirty="0"/>
           </a:p>
           <a:p>
-            <a:pPr indent="0" marL="0">
+            <a:pPr marL="0" indent="0">
               <a:lnSpc>
                 <a:spcPct val="130000"/>
               </a:lnSpc>
@@ -4578,7 +4251,7 @@
             <a:endParaRPr lang="en-US" sz="1150" dirty="0"/>
           </a:p>
           <a:p>
-            <a:pPr indent="0" marL="0">
+            <a:pPr marL="0" indent="0">
               <a:lnSpc>
                 <a:spcPct val="130000"/>
               </a:lnSpc>
@@ -4598,7 +4271,7 @@
             <a:endParaRPr lang="en-US" sz="1150" dirty="0"/>
           </a:p>
           <a:p>
-            <a:pPr indent="0" marL="0">
+            <a:pPr marL="0" indent="0">
               <a:lnSpc>
                 <a:spcPct val="130000"/>
               </a:lnSpc>
@@ -4682,7 +4355,7 @@
           <a:bodyPr wrap="square" lIns="0" tIns="0" rIns="0" bIns="0" rtlCol="0" anchor="ctr"/>
           <a:lstStyle/>
           <a:p>
-            <a:pPr algn="ctr" indent="0" marL="0">
+            <a:pPr marL="0" indent="0" algn="ctr">
               <a:buNone/>
             </a:pPr>
             <a:r>
@@ -4721,7 +4394,7 @@
           <a:bodyPr wrap="square" lIns="0" tIns="0" rIns="0" bIns="0" rtlCol="0" anchor="ctr"/>
           <a:lstStyle/>
           <a:p>
-            <a:pPr indent="0" marL="0">
+            <a:pPr marL="0" indent="0">
               <a:buNone/>
             </a:pPr>
             <a:r>
@@ -4760,7 +4433,7 @@
           <a:bodyPr wrap="square" lIns="0" tIns="0" rIns="0" bIns="0" rtlCol="0" anchor="t"/>
           <a:lstStyle/>
           <a:p>
-            <a:pPr indent="0" marL="0">
+            <a:pPr marL="0" indent="0">
               <a:lnSpc>
                 <a:spcPct val="108000"/>
               </a:lnSpc>
@@ -4844,7 +4517,7 @@
           <a:bodyPr wrap="square" lIns="0" tIns="0" rIns="0" bIns="0" rtlCol="0" anchor="ctr"/>
           <a:lstStyle/>
           <a:p>
-            <a:pPr algn="ctr" indent="0" marL="0">
+            <a:pPr marL="0" indent="0" algn="ctr">
               <a:buNone/>
             </a:pPr>
             <a:r>
@@ -4883,7 +4556,7 @@
           <a:bodyPr wrap="square" lIns="0" tIns="0" rIns="0" bIns="0" rtlCol="0" anchor="ctr"/>
           <a:lstStyle/>
           <a:p>
-            <a:pPr indent="0" marL="0">
+            <a:pPr marL="0" indent="0">
               <a:buNone/>
             </a:pPr>
             <a:r>
@@ -4922,7 +4595,7 @@
           <a:bodyPr wrap="square" lIns="0" tIns="0" rIns="0" bIns="0" rtlCol="0" anchor="t"/>
           <a:lstStyle/>
           <a:p>
-            <a:pPr indent="0" marL="0">
+            <a:pPr marL="0" indent="0">
               <a:lnSpc>
                 <a:spcPct val="108000"/>
               </a:lnSpc>
@@ -5006,7 +4679,7 @@
           <a:bodyPr wrap="square" lIns="0" tIns="0" rIns="0" bIns="0" rtlCol="0" anchor="ctr"/>
           <a:lstStyle/>
           <a:p>
-            <a:pPr algn="ctr" indent="0" marL="0">
+            <a:pPr marL="0" indent="0" algn="ctr">
               <a:buNone/>
             </a:pPr>
             <a:r>
@@ -5045,7 +4718,7 @@
           <a:bodyPr wrap="square" lIns="0" tIns="0" rIns="0" bIns="0" rtlCol="0" anchor="ctr"/>
           <a:lstStyle/>
           <a:p>
-            <a:pPr indent="0" marL="0">
+            <a:pPr marL="0" indent="0">
               <a:buNone/>
             </a:pPr>
             <a:r>
@@ -5084,7 +4757,7 @@
           <a:bodyPr wrap="square" lIns="0" tIns="0" rIns="0" bIns="0" rtlCol="0" anchor="t"/>
           <a:lstStyle/>
           <a:p>
-            <a:pPr indent="0" marL="0">
+            <a:pPr marL="0" indent="0">
               <a:lnSpc>
                 <a:spcPct val="108000"/>
               </a:lnSpc>
@@ -5125,7 +4798,7 @@
           </a:prstGeom>
           <a:extLst>
             <a:ext uri="{C572A759-6A51-4108-AA02-DFA0A04FC94B}">
-              <ma14:wrappingTextBoxFlag xmlns:ma14="http://schemas.microsoft.com/office/mac/drawingml/2011/main" val="0"/>
+              <ma14:wrappingTextBoxFlag xmlns="" xmlns:ma14="http://schemas.microsoft.com/office/mac/drawingml/2011/main" val="0"/>
             </a:ext>
           </a:extLst>
         </p:spPr>
@@ -5146,7 +4819,7 @@
           <a:p>
             <a:pPr algn="l"/>
             <a:fld id="{F7021451-1387-4CA6-816F-3879F97B5CBC}" type="slidenum">
-              <a:rPr b="0" lang="en-US"/>
+              <a:rPr lang="en-US" b="0"/>
               <a:t>10</a:t>
             </a:fld>
             <a:endParaRPr lang="en-US"/>
@@ -5221,7 +4894,7 @@
           <a:bodyPr wrap="square" lIns="0" tIns="0" rIns="0" bIns="0" rtlCol="0" anchor="ctr"/>
           <a:lstStyle/>
           <a:p>
-            <a:pPr algn="l" indent="0" marL="0">
+            <a:pPr marL="0" indent="0" algn="l">
               <a:buNone/>
             </a:pPr>
             <a:r>
@@ -5260,7 +4933,7 @@
           <a:bodyPr wrap="square" lIns="0" tIns="0" rIns="0" bIns="0" rtlCol="0" anchor="ctr"/>
           <a:lstStyle/>
           <a:p>
-            <a:pPr indent="0" marL="0">
+            <a:pPr marL="0" indent="0">
               <a:buNone/>
             </a:pPr>
             <a:r>
@@ -5326,11 +4999,11 @@
           <a:bodyPr wrap="square" lIns="0" tIns="0" rIns="0" bIns="0" rtlCol="0" anchor="ctr"/>
           <a:lstStyle/>
           <a:p>
-            <a:pPr algn="ctr" indent="0" marL="0">
-              <a:buNone/>
-            </a:pPr>
-            <a:r>
-              <a:rPr lang="en-US" sz="900" b="1" spc="100" kern="0" dirty="0">
+            <a:pPr marL="0" indent="0" algn="ctr">
+              <a:buNone/>
+            </a:pPr>
+            <a:r>
+              <a:rPr lang="en-US" sz="900" b="1" kern="0" spc="100" dirty="0">
                 <a:solidFill>
                   <a:srgbClr val="5A05F4"/>
                 </a:solidFill>
@@ -5346,14 +5019,14 @@
       </p:sp>
       <p:pic>
         <p:nvPicPr>
-          <p:cNvPr id="7" name="Image 0" descr="preencoded.png">    </p:cNvPr>
+          <p:cNvPr id="7" name="Image 0" descr="preencoded.png"/>
           <p:cNvPicPr>
             <a:picLocks noChangeAspect="1"/>
           </p:cNvPicPr>
           <p:nvPr/>
         </p:nvPicPr>
         <p:blipFill>
-          <a:blip r:embed="rId1"/>
+          <a:blip r:embed="rId3"/>
           <a:stretch>
             <a:fillRect/>
           </a:stretch>
@@ -5384,16 +5057,34 @@
         </p:nvGraphicFramePr>
         <p:xfrm>
           <a:off x="566928" y="1737360"/>
-          <a:ext cx="11064240" cy="914400"/>
+          <a:ext cx="11064240" cy="2834640"/>
         </p:xfrm>
         <a:graphic>
           <a:graphicData uri="http://schemas.openxmlformats.org/drawingml/2006/table">
             <a:tbl>
               <a:tblPr/>
               <a:tblGrid>
-                <a:gridCol w="3840480"/>
-                <a:gridCol w="2743200"/>
-                <a:gridCol w="4480560"/>
+                <a:gridCol w="3840480">
+                  <a:extLst>
+                    <a:ext uri="{9D8B030D-6E8A-4147-A177-3AD203B41FA5}">
+                      <a16:colId xmlns:a16="http://schemas.microsoft.com/office/drawing/2014/main" val="20000"/>
+                    </a:ext>
+                  </a:extLst>
+                </a:gridCol>
+                <a:gridCol w="2743200">
+                  <a:extLst>
+                    <a:ext uri="{9D8B030D-6E8A-4147-A177-3AD203B41FA5}">
+                      <a16:colId xmlns:a16="http://schemas.microsoft.com/office/drawing/2014/main" val="20001"/>
+                    </a:ext>
+                  </a:extLst>
+                </a:gridCol>
+                <a:gridCol w="4480560">
+                  <a:extLst>
+                    <a:ext uri="{9D8B030D-6E8A-4147-A177-3AD203B41FA5}">
+                      <a16:colId xmlns:a16="http://schemas.microsoft.com/office/drawing/2014/main" val="20002"/>
+                    </a:ext>
+                  </a:extLst>
+                </a:gridCol>
               </a:tblGrid>
               <a:tr h="566928">
                 <a:tc>
@@ -5401,11 +5092,11 @@
                     <a:bodyPr/>
                     <a:lstStyle/>
                     <a:p>
-                      <a:pPr algn="ctr" indent="0" marL="0">
+                      <a:pPr marL="0" indent="0" algn="ctr">
                         <a:buNone/>
                       </a:pPr>
                       <a:r>
-                        <a:rPr lang="en-US" sz="900" b="1" spc="100" kern="0" dirty="0">
+                        <a:rPr lang="en-US" sz="900" b="1" kern="0" spc="100" dirty="0">
                           <a:solidFill>
                             <a:srgbClr val="FFFFFF"/>
                           </a:solidFill>
@@ -5469,11 +5160,11 @@
                     <a:bodyPr/>
                     <a:lstStyle/>
                     <a:p>
-                      <a:pPr algn="ctr" indent="0" marL="0">
+                      <a:pPr marL="0" indent="0" algn="ctr">
                         <a:buNone/>
                       </a:pPr>
                       <a:r>
-                        <a:rPr lang="en-US" sz="900" b="1" spc="100" kern="0" dirty="0">
+                        <a:rPr lang="en-US" sz="900" b="1" kern="0" spc="100" dirty="0">
                           <a:solidFill>
                             <a:srgbClr val="FFFFFF"/>
                           </a:solidFill>
@@ -5537,11 +5228,11 @@
                     <a:bodyPr/>
                     <a:lstStyle/>
                     <a:p>
-                      <a:pPr algn="ctr" indent="0" marL="0">
+                      <a:pPr marL="0" indent="0" algn="ctr">
                         <a:buNone/>
                       </a:pPr>
                       <a:r>
-                        <a:rPr lang="en-US" sz="900" b="1" spc="100" kern="0" dirty="0">
+                        <a:rPr lang="en-US" sz="900" b="1" kern="0" spc="100" dirty="0">
                           <a:solidFill>
                             <a:srgbClr val="FFFFFF"/>
                           </a:solidFill>
@@ -5600,6 +5291,11 @@
                     </a:solidFill>
                   </a:tcPr>
                 </a:tc>
+                <a:extLst>
+                  <a:ext uri="{0D108BD9-81ED-4DB2-BD59-A6C34878D82A}">
+                    <a16:rowId xmlns:a16="http://schemas.microsoft.com/office/drawing/2014/main" val="10000"/>
+                  </a:ext>
+                </a:extLst>
               </a:tr>
               <a:tr h="566928">
                 <a:tc>
@@ -5607,7 +5303,7 @@
                     <a:bodyPr/>
                     <a:lstStyle/>
                     <a:p>
-                      <a:pPr indent="0" marL="0">
+                      <a:pPr marL="0" indent="0">
                         <a:buNone/>
                       </a:pPr>
                       <a:r>
@@ -5675,7 +5371,7 @@
                     <a:bodyPr/>
                     <a:lstStyle/>
                     <a:p>
-                      <a:pPr indent="0" marL="0">
+                      <a:pPr marL="0" indent="0">
                         <a:buNone/>
                       </a:pPr>
                       <a:r>
@@ -5743,7 +5439,7 @@
                     <a:bodyPr/>
                     <a:lstStyle/>
                     <a:p>
-                      <a:pPr indent="0" marL="0">
+                      <a:pPr marL="0" indent="0">
                         <a:buNone/>
                       </a:pPr>
                       <a:r>
@@ -5806,6 +5502,11 @@
                     </a:solidFill>
                   </a:tcPr>
                 </a:tc>
+                <a:extLst>
+                  <a:ext uri="{0D108BD9-81ED-4DB2-BD59-A6C34878D82A}">
+                    <a16:rowId xmlns:a16="http://schemas.microsoft.com/office/drawing/2014/main" val="10001"/>
+                  </a:ext>
+                </a:extLst>
               </a:tr>
               <a:tr h="566928">
                 <a:tc>
@@ -5813,7 +5514,7 @@
                     <a:bodyPr/>
                     <a:lstStyle/>
                     <a:p>
-                      <a:pPr indent="0" marL="0">
+                      <a:pPr marL="0" indent="0">
                         <a:buNone/>
                       </a:pPr>
                       <a:r>
@@ -5881,7 +5582,7 @@
                     <a:bodyPr/>
                     <a:lstStyle/>
                     <a:p>
-                      <a:pPr indent="0" marL="0">
+                      <a:pPr marL="0" indent="0">
                         <a:buNone/>
                       </a:pPr>
                       <a:r>
@@ -5949,7 +5650,7 @@
                     <a:bodyPr/>
                     <a:lstStyle/>
                     <a:p>
-                      <a:pPr indent="0" marL="0">
+                      <a:pPr marL="0" indent="0">
                         <a:buNone/>
                       </a:pPr>
                       <a:r>
@@ -6012,6 +5713,11 @@
                     </a:solidFill>
                   </a:tcPr>
                 </a:tc>
+                <a:extLst>
+                  <a:ext uri="{0D108BD9-81ED-4DB2-BD59-A6C34878D82A}">
+                    <a16:rowId xmlns:a16="http://schemas.microsoft.com/office/drawing/2014/main" val="10002"/>
+                  </a:ext>
+                </a:extLst>
               </a:tr>
               <a:tr h="566928">
                 <a:tc>
@@ -6019,7 +5725,7 @@
                     <a:bodyPr/>
                     <a:lstStyle/>
                     <a:p>
-                      <a:pPr indent="0" marL="0">
+                      <a:pPr marL="0" indent="0">
                         <a:buNone/>
                       </a:pPr>
                       <a:r>
@@ -6087,7 +5793,7 @@
                     <a:bodyPr/>
                     <a:lstStyle/>
                     <a:p>
-                      <a:pPr indent="0" marL="0">
+                      <a:pPr marL="0" indent="0">
                         <a:buNone/>
                       </a:pPr>
                       <a:r>
@@ -6155,7 +5861,7 @@
                     <a:bodyPr/>
                     <a:lstStyle/>
                     <a:p>
-                      <a:pPr indent="0" marL="0">
+                      <a:pPr marL="0" indent="0">
                         <a:buNone/>
                       </a:pPr>
                       <a:r>
@@ -6218,6 +5924,11 @@
                     </a:solidFill>
                   </a:tcPr>
                 </a:tc>
+                <a:extLst>
+                  <a:ext uri="{0D108BD9-81ED-4DB2-BD59-A6C34878D82A}">
+                    <a16:rowId xmlns:a16="http://schemas.microsoft.com/office/drawing/2014/main" val="10003"/>
+                  </a:ext>
+                </a:extLst>
               </a:tr>
               <a:tr h="566928">
                 <a:tc>
@@ -6225,7 +5936,7 @@
                     <a:bodyPr/>
                     <a:lstStyle/>
                     <a:p>
-                      <a:pPr indent="0" marL="0">
+                      <a:pPr marL="0" indent="0">
                         <a:buNone/>
                       </a:pPr>
                       <a:r>
@@ -6293,7 +6004,7 @@
                     <a:bodyPr/>
                     <a:lstStyle/>
                     <a:p>
-                      <a:pPr indent="0" marL="0">
+                      <a:pPr marL="0" indent="0">
                         <a:buNone/>
                       </a:pPr>
                       <a:r>
@@ -6361,7 +6072,7 @@
                     <a:bodyPr/>
                     <a:lstStyle/>
                     <a:p>
-                      <a:pPr indent="0" marL="0">
+                      <a:pPr marL="0" indent="0">
                         <a:buNone/>
                       </a:pPr>
                       <a:r>
@@ -6424,6 +6135,11 @@
                     </a:solidFill>
                   </a:tcPr>
                 </a:tc>
+                <a:extLst>
+                  <a:ext uri="{0D108BD9-81ED-4DB2-BD59-A6C34878D82A}">
+                    <a16:rowId xmlns:a16="http://schemas.microsoft.com/office/drawing/2014/main" val="10004"/>
+                  </a:ext>
+                </a:extLst>
               </a:tr>
             </a:tbl>
           </a:graphicData>
@@ -6477,11 +6193,11 @@
           <a:bodyPr wrap="square" lIns="0" tIns="0" rIns="0" bIns="0" rtlCol="0" anchor="ctr"/>
           <a:lstStyle/>
           <a:p>
-            <a:pPr indent="0" marL="0">
-              <a:buNone/>
-            </a:pPr>
-            <a:r>
-              <a:rPr lang="en-US" sz="950" b="1" spc="150" kern="0" dirty="0">
+            <a:pPr marL="0" indent="0">
+              <a:buNone/>
+            </a:pPr>
+            <a:r>
+              <a:rPr lang="en-US" sz="950" b="1" kern="0" spc="150" dirty="0">
                 <a:solidFill>
                   <a:srgbClr val="106B41"/>
                 </a:solidFill>
@@ -6516,7 +6232,7 @@
           <a:bodyPr wrap="square" lIns="0" tIns="0" rIns="0" bIns="0" rtlCol="0" anchor="ctr"/>
           <a:lstStyle/>
           <a:p>
-            <a:pPr indent="0" marL="0">
+            <a:pPr marL="0" indent="0">
               <a:lnSpc>
                 <a:spcPct val="112000"/>
               </a:lnSpc>
@@ -6557,7 +6273,7 @@
           </a:prstGeom>
           <a:extLst>
             <a:ext uri="{C572A759-6A51-4108-AA02-DFA0A04FC94B}">
-              <ma14:wrappingTextBoxFlag xmlns:ma14="http://schemas.microsoft.com/office/mac/drawingml/2011/main" val="0"/>
+              <ma14:wrappingTextBoxFlag xmlns="" xmlns:ma14="http://schemas.microsoft.com/office/mac/drawingml/2011/main" val="0"/>
             </a:ext>
           </a:extLst>
         </p:spPr>
@@ -6578,7 +6294,7 @@
           <a:p>
             <a:pPr algn="l"/>
             <a:fld id="{F7021451-1387-4CA6-816F-3879F97B5CBC}" type="slidenum">
-              <a:rPr b="0" lang="en-US"/>
+              <a:rPr lang="en-US" b="0"/>
               <a:t>11</a:t>
             </a:fld>
             <a:endParaRPr lang="en-US"/>
@@ -6653,7 +6369,7 @@
           <a:bodyPr wrap="square" lIns="0" tIns="0" rIns="0" bIns="0" rtlCol="0" anchor="ctr"/>
           <a:lstStyle/>
           <a:p>
-            <a:pPr algn="l" indent="0" marL="0">
+            <a:pPr marL="0" indent="0" algn="l">
               <a:buNone/>
             </a:pPr>
             <a:r>
@@ -6692,7 +6408,7 @@
           <a:bodyPr wrap="square" lIns="0" tIns="0" rIns="0" bIns="0" rtlCol="0" anchor="ctr"/>
           <a:lstStyle/>
           <a:p>
-            <a:pPr indent="0" marL="0">
+            <a:pPr marL="0" indent="0">
               <a:buNone/>
             </a:pPr>
             <a:r>
@@ -6758,11 +6474,11 @@
           <a:bodyPr wrap="square" lIns="0" tIns="0" rIns="0" bIns="0" rtlCol="0" anchor="ctr"/>
           <a:lstStyle/>
           <a:p>
-            <a:pPr algn="ctr" indent="0" marL="0">
-              <a:buNone/>
-            </a:pPr>
-            <a:r>
-              <a:rPr lang="en-US" sz="900" b="1" spc="100" kern="0" dirty="0">
+            <a:pPr marL="0" indent="0" algn="ctr">
+              <a:buNone/>
+            </a:pPr>
+            <a:r>
+              <a:rPr lang="en-US" sz="900" b="1" kern="0" spc="100" dirty="0">
                 <a:solidFill>
                   <a:srgbClr val="5A05F4"/>
                 </a:solidFill>
@@ -6778,14 +6494,14 @@
       </p:sp>
       <p:pic>
         <p:nvPicPr>
-          <p:cNvPr id="7" name="Image 0" descr="preencoded.png">    </p:cNvPr>
+          <p:cNvPr id="7" name="Image 0" descr="preencoded.png"/>
           <p:cNvPicPr>
             <a:picLocks noChangeAspect="1"/>
           </p:cNvPicPr>
           <p:nvPr/>
         </p:nvPicPr>
         <p:blipFill>
-          <a:blip r:embed="rId1"/>
+          <a:blip r:embed="rId3"/>
           <a:stretch>
             <a:fillRect/>
           </a:stretch>
@@ -6843,7 +6559,7 @@
           <a:bodyPr wrap="square" lIns="0" tIns="0" rIns="0" bIns="0" rtlCol="0" anchor="ctr"/>
           <a:lstStyle/>
           <a:p>
-            <a:pPr algn="ctr" indent="0" marL="0">
+            <a:pPr marL="0" indent="0" algn="ctr">
               <a:buNone/>
             </a:pPr>
             <a:r>
@@ -6947,7 +6663,7 @@
           <a:bodyPr wrap="square" lIns="0" tIns="0" rIns="0" bIns="0" rtlCol="0" anchor="ctr"/>
           <a:lstStyle/>
           <a:p>
-            <a:pPr algn="ctr" indent="0" marL="0">
+            <a:pPr marL="0" indent="0" algn="ctr">
               <a:buNone/>
             </a:pPr>
             <a:r>
@@ -7051,7 +6767,7 @@
           <a:bodyPr wrap="square" lIns="0" tIns="0" rIns="0" bIns="0" rtlCol="0" anchor="ctr"/>
           <a:lstStyle/>
           <a:p>
-            <a:pPr algn="ctr" indent="0" marL="0">
+            <a:pPr marL="0" indent="0" algn="ctr">
               <a:buNone/>
             </a:pPr>
             <a:r>
@@ -7155,7 +6871,7 @@
           <a:bodyPr wrap="square" lIns="0" tIns="0" rIns="0" bIns="0" rtlCol="0" anchor="ctr"/>
           <a:lstStyle/>
           <a:p>
-            <a:pPr algn="ctr" indent="0" marL="0">
+            <a:pPr marL="0" indent="0" algn="ctr">
               <a:buNone/>
             </a:pPr>
             <a:r>
@@ -7236,7 +6952,7 @@
           <a:bodyPr wrap="square" lIns="0" tIns="0" rIns="0" bIns="0" rtlCol="0" anchor="ctr"/>
           <a:lstStyle/>
           <a:p>
-            <a:pPr algn="ctr" indent="0" marL="0">
+            <a:pPr marL="0" indent="0" algn="ctr">
               <a:buNone/>
             </a:pPr>
             <a:r>
@@ -7275,7 +6991,7 @@
           <a:bodyPr wrap="square" lIns="0" tIns="0" rIns="0" bIns="0" rtlCol="0" anchor="ctr"/>
           <a:lstStyle/>
           <a:p>
-            <a:pPr indent="0" marL="0">
+            <a:pPr marL="0" indent="0">
               <a:buNone/>
             </a:pPr>
             <a:r>
@@ -7314,7 +7030,7 @@
           <a:bodyPr wrap="square" lIns="0" tIns="0" rIns="0" bIns="0" rtlCol="0" anchor="t"/>
           <a:lstStyle/>
           <a:p>
-            <a:pPr indent="0" marL="0">
+            <a:pPr marL="0" indent="0">
               <a:lnSpc>
                 <a:spcPct val="108000"/>
               </a:lnSpc>
@@ -7398,7 +7114,7 @@
           <a:bodyPr wrap="square" lIns="0" tIns="0" rIns="0" bIns="0" rtlCol="0" anchor="ctr"/>
           <a:lstStyle/>
           <a:p>
-            <a:pPr algn="ctr" indent="0" marL="0">
+            <a:pPr marL="0" indent="0" algn="ctr">
               <a:buNone/>
             </a:pPr>
             <a:r>
@@ -7437,7 +7153,7 @@
           <a:bodyPr wrap="square" lIns="0" tIns="0" rIns="0" bIns="0" rtlCol="0" anchor="ctr"/>
           <a:lstStyle/>
           <a:p>
-            <a:pPr indent="0" marL="0">
+            <a:pPr marL="0" indent="0">
               <a:buNone/>
             </a:pPr>
             <a:r>
@@ -7476,7 +7192,7 @@
           <a:bodyPr wrap="square" lIns="0" tIns="0" rIns="0" bIns="0" rtlCol="0" anchor="t"/>
           <a:lstStyle/>
           <a:p>
-            <a:pPr indent="0" marL="0">
+            <a:pPr marL="0" indent="0">
               <a:lnSpc>
                 <a:spcPct val="108000"/>
               </a:lnSpc>
@@ -7560,7 +7276,7 @@
           <a:bodyPr wrap="square" lIns="0" tIns="0" rIns="0" bIns="0" rtlCol="0" anchor="ctr"/>
           <a:lstStyle/>
           <a:p>
-            <a:pPr algn="ctr" indent="0" marL="0">
+            <a:pPr marL="0" indent="0" algn="ctr">
               <a:buNone/>
             </a:pPr>
             <a:r>
@@ -7599,7 +7315,7 @@
           <a:bodyPr wrap="square" lIns="0" tIns="0" rIns="0" bIns="0" rtlCol="0" anchor="ctr"/>
           <a:lstStyle/>
           <a:p>
-            <a:pPr indent="0" marL="0">
+            <a:pPr marL="0" indent="0">
               <a:buNone/>
             </a:pPr>
             <a:r>
@@ -7638,7 +7354,7 @@
           <a:bodyPr wrap="square" lIns="0" tIns="0" rIns="0" bIns="0" rtlCol="0" anchor="t"/>
           <a:lstStyle/>
           <a:p>
-            <a:pPr indent="0" marL="0">
+            <a:pPr marL="0" indent="0">
               <a:lnSpc>
                 <a:spcPct val="108000"/>
               </a:lnSpc>
@@ -7707,11 +7423,11 @@
           <a:bodyPr wrap="square" lIns="0" tIns="0" rIns="0" bIns="0" rtlCol="0" anchor="ctr"/>
           <a:lstStyle/>
           <a:p>
-            <a:pPr indent="0" marL="0">
-              <a:buNone/>
-            </a:pPr>
-            <a:r>
-              <a:rPr lang="en-US" sz="950" b="1" spc="150" kern="0" dirty="0">
+            <a:pPr marL="0" indent="0">
+              <a:buNone/>
+            </a:pPr>
+            <a:r>
+              <a:rPr lang="en-US" sz="950" b="1" kern="0" spc="150" dirty="0">
                 <a:solidFill>
                   <a:srgbClr val="B3261E"/>
                 </a:solidFill>
@@ -7746,7 +7462,7 @@
           <a:bodyPr wrap="square" lIns="0" tIns="0" rIns="0" bIns="0" rtlCol="0" anchor="ctr"/>
           <a:lstStyle/>
           <a:p>
-            <a:pPr indent="0" marL="0">
+            <a:pPr marL="0" indent="0">
               <a:lnSpc>
                 <a:spcPct val="112000"/>
               </a:lnSpc>
@@ -7769,7 +7485,7 @@
       </p:sp>
       <p:sp>
         <p:nvSpPr>
-          <p:cNvPr id="25" name="Slide Number Placeholder 0"/>
+          <p:cNvPr id="40" name="Slide Number Placeholder 0"/>
           <p:cNvSpPr>
             <a:spLocks noGrp="1"/>
           </p:cNvSpPr>
@@ -7787,7 +7503,7 @@
           </a:prstGeom>
           <a:extLst>
             <a:ext uri="{C572A759-6A51-4108-AA02-DFA0A04FC94B}">
-              <ma14:wrappingTextBoxFlag xmlns:ma14="http://schemas.microsoft.com/office/mac/drawingml/2011/main" val="0"/>
+              <ma14:wrappingTextBoxFlag xmlns="" xmlns:ma14="http://schemas.microsoft.com/office/mac/drawingml/2011/main" val="0"/>
             </a:ext>
           </a:extLst>
         </p:spPr>
@@ -7808,7 +7524,7 @@
           <a:p>
             <a:pPr algn="l"/>
             <a:fld id="{F7021451-1387-4CA6-816F-3879F97B5CBC}" type="slidenum">
-              <a:rPr b="0" lang="en-US"/>
+              <a:rPr lang="en-US" b="0"/>
               <a:t>12</a:t>
             </a:fld>
             <a:endParaRPr lang="en-US"/>
@@ -7883,7 +7599,7 @@
           <a:bodyPr wrap="square" lIns="0" tIns="0" rIns="0" bIns="0" rtlCol="0" anchor="ctr"/>
           <a:lstStyle/>
           <a:p>
-            <a:pPr algn="l" indent="0" marL="0">
+            <a:pPr marL="0" indent="0" algn="l">
               <a:buNone/>
             </a:pPr>
             <a:r>
@@ -7922,7 +7638,7 @@
           <a:bodyPr wrap="square" lIns="0" tIns="0" rIns="0" bIns="0" rtlCol="0" anchor="ctr"/>
           <a:lstStyle/>
           <a:p>
-            <a:pPr indent="0" marL="0">
+            <a:pPr marL="0" indent="0">
               <a:buNone/>
             </a:pPr>
             <a:r>
@@ -7988,11 +7704,11 @@
           <a:bodyPr wrap="square" lIns="0" tIns="0" rIns="0" bIns="0" rtlCol="0" anchor="ctr"/>
           <a:lstStyle/>
           <a:p>
-            <a:pPr algn="ctr" indent="0" marL="0">
-              <a:buNone/>
-            </a:pPr>
-            <a:r>
-              <a:rPr lang="en-US" sz="900" b="1" spc="100" kern="0" dirty="0">
+            <a:pPr marL="0" indent="0" algn="ctr">
+              <a:buNone/>
+            </a:pPr>
+            <a:r>
+              <a:rPr lang="en-US" sz="900" b="1" kern="0" spc="100" dirty="0">
                 <a:solidFill>
                   <a:srgbClr val="5A05F4"/>
                 </a:solidFill>
@@ -8008,14 +7724,14 @@
       </p:sp>
       <p:pic>
         <p:nvPicPr>
-          <p:cNvPr id="7" name="Image 0" descr="preencoded.png">    </p:cNvPr>
+          <p:cNvPr id="7" name="Image 0" descr="preencoded.png"/>
           <p:cNvPicPr>
             <a:picLocks noChangeAspect="1"/>
           </p:cNvPicPr>
           <p:nvPr/>
         </p:nvPicPr>
         <p:blipFill>
-          <a:blip r:embed="rId1"/>
+          <a:blip r:embed="rId3"/>
           <a:stretch>
             <a:fillRect/>
           </a:stretch>
@@ -8046,16 +7762,34 @@
         </p:nvGraphicFramePr>
         <p:xfrm>
           <a:off x="566928" y="1737360"/>
-          <a:ext cx="11064240" cy="914400"/>
+          <a:ext cx="11064240" cy="3182112"/>
         </p:xfrm>
         <a:graphic>
           <a:graphicData uri="http://schemas.openxmlformats.org/drawingml/2006/table">
             <a:tbl>
               <a:tblPr/>
               <a:tblGrid>
-                <a:gridCol w="914400"/>
-                <a:gridCol w="5760720"/>
-                <a:gridCol w="4389120"/>
+                <a:gridCol w="914400">
+                  <a:extLst>
+                    <a:ext uri="{9D8B030D-6E8A-4147-A177-3AD203B41FA5}">
+                      <a16:colId xmlns:a16="http://schemas.microsoft.com/office/drawing/2014/main" val="20000"/>
+                    </a:ext>
+                  </a:extLst>
+                </a:gridCol>
+                <a:gridCol w="5760720">
+                  <a:extLst>
+                    <a:ext uri="{9D8B030D-6E8A-4147-A177-3AD203B41FA5}">
+                      <a16:colId xmlns:a16="http://schemas.microsoft.com/office/drawing/2014/main" val="20001"/>
+                    </a:ext>
+                  </a:extLst>
+                </a:gridCol>
+                <a:gridCol w="4389120">
+                  <a:extLst>
+                    <a:ext uri="{9D8B030D-6E8A-4147-A177-3AD203B41FA5}">
+                      <a16:colId xmlns:a16="http://schemas.microsoft.com/office/drawing/2014/main" val="20002"/>
+                    </a:ext>
+                  </a:extLst>
+                </a:gridCol>
               </a:tblGrid>
               <a:tr h="530352">
                 <a:tc>
@@ -8063,11 +7797,11 @@
                     <a:bodyPr/>
                     <a:lstStyle/>
                     <a:p>
-                      <a:pPr algn="ctr" indent="0" marL="0">
+                      <a:pPr marL="0" indent="0" algn="ctr">
                         <a:buNone/>
                       </a:pPr>
                       <a:r>
-                        <a:rPr lang="en-US" sz="900" b="1" spc="100" kern="0" dirty="0">
+                        <a:rPr lang="en-US" sz="900" b="1" kern="0" spc="100" dirty="0">
                           <a:solidFill>
                             <a:srgbClr val="FFFFFF"/>
                           </a:solidFill>
@@ -8131,11 +7865,11 @@
                     <a:bodyPr/>
                     <a:lstStyle/>
                     <a:p>
-                      <a:pPr algn="ctr" indent="0" marL="0">
+                      <a:pPr marL="0" indent="0" algn="ctr">
                         <a:buNone/>
                       </a:pPr>
                       <a:r>
-                        <a:rPr lang="en-US" sz="900" b="1" spc="100" kern="0" dirty="0">
+                        <a:rPr lang="en-US" sz="900" b="1" kern="0" spc="100" dirty="0">
                           <a:solidFill>
                             <a:srgbClr val="FFFFFF"/>
                           </a:solidFill>
@@ -8199,11 +7933,11 @@
                     <a:bodyPr/>
                     <a:lstStyle/>
                     <a:p>
-                      <a:pPr algn="ctr" indent="0" marL="0">
+                      <a:pPr marL="0" indent="0" algn="ctr">
                         <a:buNone/>
                       </a:pPr>
                       <a:r>
-                        <a:rPr lang="en-US" sz="900" b="1" spc="100" kern="0" dirty="0">
+                        <a:rPr lang="en-US" sz="900" b="1" kern="0" spc="100" dirty="0">
                           <a:solidFill>
                             <a:srgbClr val="FFFFFF"/>
                           </a:solidFill>
@@ -8262,6 +7996,11 @@
                     </a:solidFill>
                   </a:tcPr>
                 </a:tc>
+                <a:extLst>
+                  <a:ext uri="{0D108BD9-81ED-4DB2-BD59-A6C34878D82A}">
+                    <a16:rowId xmlns:a16="http://schemas.microsoft.com/office/drawing/2014/main" val="10000"/>
+                  </a:ext>
+                </a:extLst>
               </a:tr>
               <a:tr h="530352">
                 <a:tc>
@@ -8269,7 +8008,7 @@
                     <a:bodyPr/>
                     <a:lstStyle/>
                     <a:p>
-                      <a:pPr indent="0" marL="0">
+                      <a:pPr marL="0" indent="0">
                         <a:buNone/>
                       </a:pPr>
                       <a:r>
@@ -8337,7 +8076,7 @@
                     <a:bodyPr/>
                     <a:lstStyle/>
                     <a:p>
-                      <a:pPr indent="0" marL="0">
+                      <a:pPr marL="0" indent="0">
                         <a:buNone/>
                       </a:pPr>
                       <a:r>
@@ -8405,7 +8144,7 @@
                     <a:bodyPr/>
                     <a:lstStyle/>
                     <a:p>
-                      <a:pPr indent="0" marL="0">
+                      <a:pPr marL="0" indent="0">
                         <a:buNone/>
                       </a:pPr>
                       <a:r>
@@ -8468,6 +8207,11 @@
                     </a:solidFill>
                   </a:tcPr>
                 </a:tc>
+                <a:extLst>
+                  <a:ext uri="{0D108BD9-81ED-4DB2-BD59-A6C34878D82A}">
+                    <a16:rowId xmlns:a16="http://schemas.microsoft.com/office/drawing/2014/main" val="10001"/>
+                  </a:ext>
+                </a:extLst>
               </a:tr>
               <a:tr h="530352">
                 <a:tc>
@@ -8475,7 +8219,7 @@
                     <a:bodyPr/>
                     <a:lstStyle/>
                     <a:p>
-                      <a:pPr indent="0" marL="0">
+                      <a:pPr marL="0" indent="0">
                         <a:buNone/>
                       </a:pPr>
                       <a:r>
@@ -8543,7 +8287,7 @@
                     <a:bodyPr/>
                     <a:lstStyle/>
                     <a:p>
-                      <a:pPr indent="0" marL="0">
+                      <a:pPr marL="0" indent="0">
                         <a:buNone/>
                       </a:pPr>
                       <a:r>
@@ -8611,7 +8355,7 @@
                     <a:bodyPr/>
                     <a:lstStyle/>
                     <a:p>
-                      <a:pPr indent="0" marL="0">
+                      <a:pPr marL="0" indent="0">
                         <a:buNone/>
                       </a:pPr>
                       <a:r>
@@ -8674,6 +8418,11 @@
                     </a:solidFill>
                   </a:tcPr>
                 </a:tc>
+                <a:extLst>
+                  <a:ext uri="{0D108BD9-81ED-4DB2-BD59-A6C34878D82A}">
+                    <a16:rowId xmlns:a16="http://schemas.microsoft.com/office/drawing/2014/main" val="10002"/>
+                  </a:ext>
+                </a:extLst>
               </a:tr>
               <a:tr h="530352">
                 <a:tc>
@@ -8681,7 +8430,7 @@
                     <a:bodyPr/>
                     <a:lstStyle/>
                     <a:p>
-                      <a:pPr indent="0" marL="0">
+                      <a:pPr marL="0" indent="0">
                         <a:buNone/>
                       </a:pPr>
                       <a:r>
@@ -8749,7 +8498,7 @@
                     <a:bodyPr/>
                     <a:lstStyle/>
                     <a:p>
-                      <a:pPr indent="0" marL="0">
+                      <a:pPr marL="0" indent="0">
                         <a:buNone/>
                       </a:pPr>
                       <a:r>
@@ -8817,7 +8566,7 @@
                     <a:bodyPr/>
                     <a:lstStyle/>
                     <a:p>
-                      <a:pPr indent="0" marL="0">
+                      <a:pPr marL="0" indent="0">
                         <a:buNone/>
                       </a:pPr>
                       <a:r>
@@ -8880,6 +8629,11 @@
                     </a:solidFill>
                   </a:tcPr>
                 </a:tc>
+                <a:extLst>
+                  <a:ext uri="{0D108BD9-81ED-4DB2-BD59-A6C34878D82A}">
+                    <a16:rowId xmlns:a16="http://schemas.microsoft.com/office/drawing/2014/main" val="10003"/>
+                  </a:ext>
+                </a:extLst>
               </a:tr>
               <a:tr h="530352">
                 <a:tc>
@@ -8887,7 +8641,7 @@
                     <a:bodyPr/>
                     <a:lstStyle/>
                     <a:p>
-                      <a:pPr indent="0" marL="0">
+                      <a:pPr marL="0" indent="0">
                         <a:buNone/>
                       </a:pPr>
                       <a:r>
@@ -8955,7 +8709,7 @@
                     <a:bodyPr/>
                     <a:lstStyle/>
                     <a:p>
-                      <a:pPr indent="0" marL="0">
+                      <a:pPr marL="0" indent="0">
                         <a:buNone/>
                       </a:pPr>
                       <a:r>
@@ -9023,7 +8777,7 @@
                     <a:bodyPr/>
                     <a:lstStyle/>
                     <a:p>
-                      <a:pPr indent="0" marL="0">
+                      <a:pPr marL="0" indent="0">
                         <a:buNone/>
                       </a:pPr>
                       <a:r>
@@ -9086,6 +8840,11 @@
                     </a:solidFill>
                   </a:tcPr>
                 </a:tc>
+                <a:extLst>
+                  <a:ext uri="{0D108BD9-81ED-4DB2-BD59-A6C34878D82A}">
+                    <a16:rowId xmlns:a16="http://schemas.microsoft.com/office/drawing/2014/main" val="10004"/>
+                  </a:ext>
+                </a:extLst>
               </a:tr>
               <a:tr h="530352">
                 <a:tc>
@@ -9093,7 +8852,7 @@
                     <a:bodyPr/>
                     <a:lstStyle/>
                     <a:p>
-                      <a:pPr indent="0" marL="0">
+                      <a:pPr marL="0" indent="0">
                         <a:buNone/>
                       </a:pPr>
                       <a:r>
@@ -9161,7 +8920,7 @@
                     <a:bodyPr/>
                     <a:lstStyle/>
                     <a:p>
-                      <a:pPr indent="0" marL="0">
+                      <a:pPr marL="0" indent="0">
                         <a:buNone/>
                       </a:pPr>
                       <a:r>
@@ -9229,7 +8988,7 @@
                     <a:bodyPr/>
                     <a:lstStyle/>
                     <a:p>
-                      <a:pPr indent="0" marL="0">
+                      <a:pPr marL="0" indent="0">
                         <a:buNone/>
                       </a:pPr>
                       <a:r>
@@ -9292,6 +9051,11 @@
                     </a:solidFill>
                   </a:tcPr>
                 </a:tc>
+                <a:extLst>
+                  <a:ext uri="{0D108BD9-81ED-4DB2-BD59-A6C34878D82A}">
+                    <a16:rowId xmlns:a16="http://schemas.microsoft.com/office/drawing/2014/main" val="10005"/>
+                  </a:ext>
+                </a:extLst>
               </a:tr>
             </a:tbl>
           </a:graphicData>
@@ -9345,7 +9109,7 @@
           <a:bodyPr wrap="square" lIns="0" tIns="0" rIns="0" bIns="0" rtlCol="0" anchor="ctr"/>
           <a:lstStyle/>
           <a:p>
-            <a:pPr indent="0" marL="0">
+            <a:pPr marL="0" indent="0">
               <a:lnSpc>
                 <a:spcPct val="112000"/>
               </a:lnSpc>
@@ -9386,7 +9150,7 @@
           </a:prstGeom>
           <a:extLst>
             <a:ext uri="{C572A759-6A51-4108-AA02-DFA0A04FC94B}">
-              <ma14:wrappingTextBoxFlag xmlns:ma14="http://schemas.microsoft.com/office/mac/drawingml/2011/main" val="0"/>
+              <ma14:wrappingTextBoxFlag xmlns="" xmlns:ma14="http://schemas.microsoft.com/office/mac/drawingml/2011/main" val="0"/>
             </a:ext>
           </a:extLst>
         </p:spPr>
@@ -9407,7 +9171,7 @@
           <a:p>
             <a:pPr algn="l"/>
             <a:fld id="{F7021451-1387-4CA6-816F-3879F97B5CBC}" type="slidenum">
-              <a:rPr b="0" lang="en-US"/>
+              <a:rPr lang="en-US" b="0"/>
               <a:t>13</a:t>
             </a:fld>
             <a:endParaRPr lang="en-US"/>
@@ -9482,7 +9246,7 @@
           <a:bodyPr wrap="square" lIns="0" tIns="0" rIns="0" bIns="0" rtlCol="0" anchor="ctr"/>
           <a:lstStyle/>
           <a:p>
-            <a:pPr algn="l" indent="0" marL="0">
+            <a:pPr marL="0" indent="0" algn="l">
               <a:buNone/>
             </a:pPr>
             <a:r>
@@ -9521,7 +9285,7 @@
           <a:bodyPr wrap="square" lIns="0" tIns="0" rIns="0" bIns="0" rtlCol="0" anchor="ctr"/>
           <a:lstStyle/>
           <a:p>
-            <a:pPr indent="0" marL="0">
+            <a:pPr marL="0" indent="0">
               <a:buNone/>
             </a:pPr>
             <a:r>
@@ -9587,11 +9351,11 @@
           <a:bodyPr wrap="square" lIns="0" tIns="0" rIns="0" bIns="0" rtlCol="0" anchor="ctr"/>
           <a:lstStyle/>
           <a:p>
-            <a:pPr algn="ctr" indent="0" marL="0">
-              <a:buNone/>
-            </a:pPr>
-            <a:r>
-              <a:rPr lang="en-US" sz="900" b="1" spc="100" kern="0" dirty="0">
+            <a:pPr marL="0" indent="0" algn="ctr">
+              <a:buNone/>
+            </a:pPr>
+            <a:r>
+              <a:rPr lang="en-US" sz="900" b="1" kern="0" spc="100" dirty="0">
                 <a:solidFill>
                   <a:srgbClr val="5A05F4"/>
                 </a:solidFill>
@@ -9607,14 +9371,14 @@
       </p:sp>
       <p:pic>
         <p:nvPicPr>
-          <p:cNvPr id="7" name="Image 0" descr="preencoded.png">    </p:cNvPr>
+          <p:cNvPr id="7" name="Image 0" descr="preencoded.png"/>
           <p:cNvPicPr>
             <a:picLocks noChangeAspect="1"/>
           </p:cNvPicPr>
           <p:nvPr/>
         </p:nvPicPr>
         <p:blipFill>
-          <a:blip r:embed="rId1"/>
+          <a:blip r:embed="rId3"/>
           <a:stretch>
             <a:fillRect/>
           </a:stretch>
@@ -9637,7 +9401,7 @@
         </p:nvSpPr>
         <p:spPr>
           <a:xfrm>
-            <a:off x="566928" y="1737360"/>
+            <a:off x="566928" y="1554480"/>
             <a:ext cx="11064240" cy="1874520"/>
           </a:xfrm>
           <a:prstGeom prst="roundRect">
@@ -9664,7 +9428,7 @@
         </p:nvSpPr>
         <p:spPr>
           <a:xfrm>
-            <a:off x="786384" y="1883664"/>
+            <a:off x="786384" y="1700784"/>
             <a:ext cx="10625328" cy="1581912"/>
           </a:xfrm>
           <a:prstGeom prst="rect">
@@ -9677,7 +9441,7 @@
           <a:bodyPr wrap="square" lIns="0" tIns="0" rIns="0" bIns="0" rtlCol="0" anchor="t"/>
           <a:lstStyle/>
           <a:p>
-            <a:pPr indent="0" marL="0">
+            <a:pPr marL="0" indent="0">
               <a:lnSpc>
                 <a:spcPct val="130000"/>
               </a:lnSpc>
@@ -9697,7 +9461,7 @@
             <a:endParaRPr lang="en-US" sz="1200" dirty="0"/>
           </a:p>
           <a:p>
-            <a:pPr indent="0" marL="0">
+            <a:pPr marL="0" indent="0">
               <a:lnSpc>
                 <a:spcPct val="130000"/>
               </a:lnSpc>
@@ -9717,7 +9481,7 @@
             <a:endParaRPr lang="en-US" sz="1200" dirty="0"/>
           </a:p>
           <a:p>
-            <a:pPr indent="0" marL="0">
+            <a:pPr marL="0" indent="0">
               <a:lnSpc>
                 <a:spcPct val="130000"/>
               </a:lnSpc>
@@ -9737,7 +9501,7 @@
             <a:endParaRPr lang="en-US" sz="1200" dirty="0"/>
           </a:p>
           <a:p>
-            <a:pPr indent="0" marL="0">
+            <a:pPr marL="0" indent="0">
               <a:lnSpc>
                 <a:spcPct val="130000"/>
               </a:lnSpc>
@@ -9757,7 +9521,7 @@
             <a:endParaRPr lang="en-US" sz="1200" dirty="0"/>
           </a:p>
           <a:p>
-            <a:pPr indent="0" marL="0">
+            <a:pPr marL="0" indent="0">
               <a:lnSpc>
                 <a:spcPct val="130000"/>
               </a:lnSpc>
@@ -9786,8 +9550,8 @@
         </p:nvSpPr>
         <p:spPr>
           <a:xfrm>
-            <a:off x="566928" y="3611880"/>
-            <a:ext cx="5349240" cy="1463040"/>
+            <a:off x="566928" y="3511296"/>
+            <a:ext cx="5513832" cy="1463040"/>
           </a:xfrm>
           <a:prstGeom prst="roundRect">
             <a:avLst>
@@ -9808,7 +9572,7 @@
         </p:nvSpPr>
         <p:spPr>
           <a:xfrm>
-            <a:off x="768096" y="3767328"/>
+            <a:off x="768096" y="3584448"/>
             <a:ext cx="4946904" cy="438912"/>
           </a:xfrm>
           <a:prstGeom prst="rect">
@@ -9821,7 +9585,7 @@
           <a:bodyPr wrap="square" lIns="0" tIns="0" rIns="0" bIns="0" rtlCol="0" anchor="ctr"/>
           <a:lstStyle/>
           <a:p>
-            <a:pPr indent="0" marL="0">
+            <a:pPr marL="0" indent="0">
               <a:buNone/>
             </a:pPr>
             <a:r>
@@ -9847,7 +9611,7 @@
         </p:nvSpPr>
         <p:spPr>
           <a:xfrm>
-            <a:off x="768096" y="4297680"/>
+            <a:off x="768096" y="4114800"/>
             <a:ext cx="4946904" cy="621792"/>
           </a:xfrm>
           <a:prstGeom prst="rect">
@@ -9860,7 +9624,7 @@
           <a:bodyPr wrap="square" lIns="0" tIns="0" rIns="0" bIns="0" rtlCol="0" anchor="t"/>
           <a:lstStyle/>
           <a:p>
-            <a:pPr indent="0" marL="0">
+            <a:pPr marL="0" indent="0">
               <a:lnSpc>
                 <a:spcPct val="108000"/>
               </a:lnSpc>
@@ -9889,8 +9653,8 @@
         </p:nvSpPr>
         <p:spPr>
           <a:xfrm>
-            <a:off x="6281928" y="3611880"/>
-            <a:ext cx="5349240" cy="1463040"/>
+            <a:off x="6111242" y="3511296"/>
+            <a:ext cx="5519926" cy="1463040"/>
           </a:xfrm>
           <a:prstGeom prst="roundRect">
             <a:avLst>
@@ -9911,7 +9675,7 @@
         </p:nvSpPr>
         <p:spPr>
           <a:xfrm>
-            <a:off x="6483096" y="3767328"/>
+            <a:off x="6483096" y="3584448"/>
             <a:ext cx="4946904" cy="438912"/>
           </a:xfrm>
           <a:prstGeom prst="rect">
@@ -9924,7 +9688,7 @@
           <a:bodyPr wrap="square" lIns="0" tIns="0" rIns="0" bIns="0" rtlCol="0" anchor="ctr"/>
           <a:lstStyle/>
           <a:p>
-            <a:pPr indent="0" marL="0">
+            <a:pPr marL="0" indent="0">
               <a:buNone/>
             </a:pPr>
             <a:r>
@@ -9950,7 +9714,7 @@
         </p:nvSpPr>
         <p:spPr>
           <a:xfrm>
-            <a:off x="6483096" y="4297680"/>
+            <a:off x="6483096" y="4114800"/>
             <a:ext cx="4946904" cy="621792"/>
           </a:xfrm>
           <a:prstGeom prst="rect">
@@ -9963,7 +9727,7 @@
           <a:bodyPr wrap="square" lIns="0" tIns="0" rIns="0" bIns="0" rtlCol="0" anchor="t"/>
           <a:lstStyle/>
           <a:p>
-            <a:pPr indent="0" marL="0">
+            <a:pPr marL="0" indent="0">
               <a:lnSpc>
                 <a:spcPct val="108000"/>
               </a:lnSpc>
@@ -9992,7 +9756,7 @@
         </p:nvSpPr>
         <p:spPr>
           <a:xfrm>
-            <a:off x="566928" y="5257800"/>
+            <a:off x="566928" y="5074920"/>
             <a:ext cx="11064240" cy="594360"/>
           </a:xfrm>
           <a:prstGeom prst="roundRect">
@@ -10014,7 +9778,7 @@
         </p:nvSpPr>
         <p:spPr>
           <a:xfrm>
-            <a:off x="786384" y="5404104"/>
+            <a:off x="786384" y="5221224"/>
             <a:ext cx="10625328" cy="301752"/>
           </a:xfrm>
           <a:prstGeom prst="rect">
@@ -10027,7 +9791,7 @@
           <a:bodyPr wrap="square" lIns="0" tIns="0" rIns="0" bIns="0" rtlCol="0" anchor="ctr"/>
           <a:lstStyle/>
           <a:p>
-            <a:pPr indent="0" marL="0">
+            <a:pPr marL="0" indent="0">
               <a:lnSpc>
                 <a:spcPct val="112000"/>
               </a:lnSpc>
@@ -10068,7 +9832,7 @@
           </a:prstGeom>
           <a:extLst>
             <a:ext uri="{C572A759-6A51-4108-AA02-DFA0A04FC94B}">
-              <ma14:wrappingTextBoxFlag xmlns:ma14="http://schemas.microsoft.com/office/mac/drawingml/2011/main" val="0"/>
+              <ma14:wrappingTextBoxFlag xmlns="" xmlns:ma14="http://schemas.microsoft.com/office/mac/drawingml/2011/main" val="0"/>
             </a:ext>
           </a:extLst>
         </p:spPr>
@@ -10089,7 +9853,7 @@
           <a:p>
             <a:pPr algn="l"/>
             <a:fld id="{F7021451-1387-4CA6-816F-3879F97B5CBC}" type="slidenum">
-              <a:rPr b="0" lang="en-US"/>
+              <a:rPr lang="en-US" b="0"/>
               <a:t>14</a:t>
             </a:fld>
             <a:endParaRPr lang="en-US"/>
@@ -10164,7 +9928,7 @@
           <a:bodyPr wrap="square" lIns="0" tIns="0" rIns="0" bIns="0" rtlCol="0" anchor="ctr"/>
           <a:lstStyle/>
           <a:p>
-            <a:pPr algn="l" indent="0" marL="0">
+            <a:pPr marL="0" indent="0" algn="l">
               <a:buNone/>
             </a:pPr>
             <a:r>
@@ -10203,7 +9967,7 @@
           <a:bodyPr wrap="square" lIns="0" tIns="0" rIns="0" bIns="0" rtlCol="0" anchor="ctr"/>
           <a:lstStyle/>
           <a:p>
-            <a:pPr indent="0" marL="0">
+            <a:pPr marL="0" indent="0">
               <a:buNone/>
             </a:pPr>
             <a:r>
@@ -10269,11 +10033,11 @@
           <a:bodyPr wrap="square" lIns="0" tIns="0" rIns="0" bIns="0" rtlCol="0" anchor="ctr"/>
           <a:lstStyle/>
           <a:p>
-            <a:pPr algn="ctr" indent="0" marL="0">
-              <a:buNone/>
-            </a:pPr>
-            <a:r>
-              <a:rPr lang="en-US" sz="900" b="1" spc="100" kern="0" dirty="0">
+            <a:pPr marL="0" indent="0" algn="ctr">
+              <a:buNone/>
+            </a:pPr>
+            <a:r>
+              <a:rPr lang="en-US" sz="900" b="1" kern="0" spc="100" dirty="0">
                 <a:solidFill>
                   <a:srgbClr val="5A05F4"/>
                 </a:solidFill>
@@ -10289,14 +10053,14 @@
       </p:sp>
       <p:pic>
         <p:nvPicPr>
-          <p:cNvPr id="7" name="Image 0" descr="preencoded.png">    </p:cNvPr>
+          <p:cNvPr id="7" name="Image 0" descr="preencoded.png"/>
           <p:cNvPicPr>
             <a:picLocks noChangeAspect="1"/>
           </p:cNvPicPr>
           <p:nvPr/>
         </p:nvPicPr>
         <p:blipFill>
-          <a:blip r:embed="rId1"/>
+          <a:blip r:embed="rId3"/>
           <a:stretch>
             <a:fillRect/>
           </a:stretch>
@@ -10359,7 +10123,7 @@
           <a:bodyPr wrap="square" lIns="0" tIns="0" rIns="0" bIns="0" rtlCol="0" anchor="t"/>
           <a:lstStyle/>
           <a:p>
-            <a:pPr indent="0" marL="0">
+            <a:pPr marL="0" indent="0">
               <a:lnSpc>
                 <a:spcPct val="130000"/>
               </a:lnSpc>
@@ -10379,7 +10143,7 @@
             <a:endParaRPr lang="en-US" sz="1300" dirty="0"/>
           </a:p>
           <a:p>
-            <a:pPr indent="0" marL="0">
+            <a:pPr marL="0" indent="0">
               <a:lnSpc>
                 <a:spcPct val="130000"/>
               </a:lnSpc>
@@ -10396,12 +10160,6 @@
               </a:rPr>
               <a:t>num_retries: 0</a:t>
             </a:r>
-            <a:pPr indent="0" marL="0">
-              <a:lnSpc>
-                <a:spcPct val="130000"/>
-              </a:lnSpc>
-              <a:buNone/>
-            </a:pPr>
             <a:r>
               <a:rPr lang="en-US" sz="1300" dirty="0">
                 <a:solidFill>
@@ -10465,11 +10223,11 @@
           <a:bodyPr wrap="square" lIns="0" tIns="0" rIns="0" bIns="0" rtlCol="0" anchor="ctr"/>
           <a:lstStyle/>
           <a:p>
-            <a:pPr indent="0" marL="0">
-              <a:buNone/>
-            </a:pPr>
-            <a:r>
-              <a:rPr lang="en-US" sz="950" b="1" spc="150" kern="0" dirty="0">
+            <a:pPr marL="0" indent="0">
+              <a:buNone/>
+            </a:pPr>
+            <a:r>
+              <a:rPr lang="en-US" sz="950" b="1" kern="0" spc="150" dirty="0">
                 <a:solidFill>
                   <a:srgbClr val="B3261E"/>
                 </a:solidFill>
@@ -10504,7 +10262,7 @@
           <a:bodyPr wrap="square" lIns="0" tIns="0" rIns="0" bIns="0" rtlCol="0" anchor="ctr"/>
           <a:lstStyle/>
           <a:p>
-            <a:pPr indent="0" marL="0">
+            <a:pPr marL="0" indent="0">
               <a:lnSpc>
                 <a:spcPct val="112000"/>
               </a:lnSpc>
@@ -10573,7 +10331,7 @@
           <a:bodyPr wrap="square" lIns="0" tIns="0" rIns="0" bIns="0" rtlCol="0" anchor="ctr"/>
           <a:lstStyle/>
           <a:p>
-            <a:pPr indent="0" marL="0">
+            <a:pPr marL="0" indent="0">
               <a:lnSpc>
                 <a:spcPct val="112000"/>
               </a:lnSpc>
@@ -10615,7 +10373,7 @@
           <a:bodyPr wrap="square" lIns="0" tIns="0" rIns="0" bIns="0" rtlCol="0" anchor="ctr"/>
           <a:lstStyle/>
           <a:p>
-            <a:pPr indent="0" marL="0">
+            <a:pPr marL="0" indent="0">
               <a:buNone/>
             </a:pPr>
             <a:r>
@@ -10653,7 +10411,7 @@
           </a:prstGeom>
           <a:extLst>
             <a:ext uri="{C572A759-6A51-4108-AA02-DFA0A04FC94B}">
-              <ma14:wrappingTextBoxFlag xmlns:ma14="http://schemas.microsoft.com/office/mac/drawingml/2011/main" val="0"/>
+              <ma14:wrappingTextBoxFlag xmlns="" xmlns:ma14="http://schemas.microsoft.com/office/mac/drawingml/2011/main" val="0"/>
             </a:ext>
           </a:extLst>
         </p:spPr>
@@ -10674,7 +10432,7 @@
           <a:p>
             <a:pPr algn="l"/>
             <a:fld id="{F7021451-1387-4CA6-816F-3879F97B5CBC}" type="slidenum">
-              <a:rPr b="0" lang="en-US"/>
+              <a:rPr lang="en-US" b="0"/>
               <a:t>15</a:t>
             </a:fld>
             <a:endParaRPr lang="en-US"/>
@@ -10749,7 +10507,7 @@
           <a:bodyPr wrap="square" lIns="0" tIns="0" rIns="0" bIns="0" rtlCol="0" anchor="ctr"/>
           <a:lstStyle/>
           <a:p>
-            <a:pPr algn="l" indent="0" marL="0">
+            <a:pPr marL="0" indent="0" algn="l">
               <a:buNone/>
             </a:pPr>
             <a:r>
@@ -10788,7 +10546,7 @@
           <a:bodyPr wrap="square" lIns="0" tIns="0" rIns="0" bIns="0" rtlCol="0" anchor="ctr"/>
           <a:lstStyle/>
           <a:p>
-            <a:pPr indent="0" marL="0">
+            <a:pPr marL="0" indent="0">
               <a:buNone/>
             </a:pPr>
             <a:r>
@@ -10854,11 +10612,11 @@
           <a:bodyPr wrap="square" lIns="0" tIns="0" rIns="0" bIns="0" rtlCol="0" anchor="ctr"/>
           <a:lstStyle/>
           <a:p>
-            <a:pPr algn="ctr" indent="0" marL="0">
-              <a:buNone/>
-            </a:pPr>
-            <a:r>
-              <a:rPr lang="en-US" sz="900" b="1" spc="100" kern="0" dirty="0">
+            <a:pPr marL="0" indent="0" algn="ctr">
+              <a:buNone/>
+            </a:pPr>
+            <a:r>
+              <a:rPr lang="en-US" sz="900" b="1" kern="0" spc="100" dirty="0">
                 <a:solidFill>
                   <a:srgbClr val="5A05F4"/>
                 </a:solidFill>
@@ -10920,11 +10678,11 @@
           <a:bodyPr wrap="square" lIns="0" tIns="0" rIns="0" bIns="0" rtlCol="0" anchor="ctr"/>
           <a:lstStyle/>
           <a:p>
-            <a:pPr algn="ctr" indent="0" marL="0">
-              <a:buNone/>
-            </a:pPr>
-            <a:r>
-              <a:rPr lang="en-US" sz="900" b="1" spc="100" kern="0" dirty="0">
+            <a:pPr marL="0" indent="0" algn="ctr">
+              <a:buNone/>
+            </a:pPr>
+            <a:r>
+              <a:rPr lang="en-US" sz="900" b="1" kern="0" spc="100" dirty="0">
                 <a:solidFill>
                   <a:srgbClr val="434343"/>
                 </a:solidFill>
@@ -10940,14 +10698,14 @@
       </p:sp>
       <p:pic>
         <p:nvPicPr>
-          <p:cNvPr id="9" name="Image 0" descr="preencoded.png">    </p:cNvPr>
+          <p:cNvPr id="9" name="Image 0" descr="preencoded.png"/>
           <p:cNvPicPr>
             <a:picLocks noChangeAspect="1"/>
           </p:cNvPicPr>
           <p:nvPr/>
         </p:nvPicPr>
         <p:blipFill>
-          <a:blip r:embed="rId1"/>
+          <a:blip r:embed="rId3"/>
           <a:stretch>
             <a:fillRect/>
           </a:stretch>
@@ -11010,7 +10768,7 @@
           <a:bodyPr wrap="square" lIns="0" tIns="0" rIns="0" bIns="0" rtlCol="0" anchor="t"/>
           <a:lstStyle/>
           <a:p>
-            <a:pPr indent="0" marL="0">
+            <a:pPr marL="0" indent="0">
               <a:lnSpc>
                 <a:spcPct val="130000"/>
               </a:lnSpc>
@@ -11030,7 +10788,7 @@
             <a:endParaRPr lang="en-US" sz="1200" dirty="0"/>
           </a:p>
           <a:p>
-            <a:pPr indent="0" marL="0">
+            <a:pPr marL="0" indent="0">
               <a:lnSpc>
                 <a:spcPct val="130000"/>
               </a:lnSpc>
@@ -11050,7 +10808,7 @@
             <a:endParaRPr lang="en-US" sz="1200" dirty="0"/>
           </a:p>
           <a:p>
-            <a:pPr indent="0" marL="0">
+            <a:pPr marL="0" indent="0">
               <a:lnSpc>
                 <a:spcPct val="130000"/>
               </a:lnSpc>
@@ -11070,7 +10828,7 @@
             <a:endParaRPr lang="en-US" sz="1200" dirty="0"/>
           </a:p>
           <a:p>
-            <a:pPr indent="0" marL="0">
+            <a:pPr marL="0" indent="0">
               <a:lnSpc>
                 <a:spcPct val="130000"/>
               </a:lnSpc>
@@ -11087,12 +10845,6 @@
               </a:rPr>
               <a:t>    continue;            </a:t>
             </a:r>
-            <a:pPr indent="0" marL="0">
-              <a:lnSpc>
-                <a:spcPct val="130000"/>
-              </a:lnSpc>
-              <a:buNone/>
-            </a:pPr>
             <a:r>
               <a:rPr lang="en-US" sz="1200" dirty="0">
                 <a:solidFill>
@@ -11116,8 +10868,8 @@
         </p:nvSpPr>
         <p:spPr>
           <a:xfrm>
-            <a:off x="566928" y="3566160"/>
-            <a:ext cx="5349240" cy="1508760"/>
+            <a:off x="585216" y="3675888"/>
+            <a:ext cx="5510784" cy="1508760"/>
           </a:xfrm>
           <a:prstGeom prst="roundRect">
             <a:avLst>
@@ -11138,8 +10890,8 @@
         </p:nvSpPr>
         <p:spPr>
           <a:xfrm>
-            <a:off x="768096" y="3721608"/>
-            <a:ext cx="4946904" cy="438912"/>
+            <a:off x="786384" y="3831336"/>
+            <a:ext cx="5096298" cy="438912"/>
           </a:xfrm>
           <a:prstGeom prst="rect">
             <a:avLst/>
@@ -11151,7 +10903,7 @@
           <a:bodyPr wrap="square" lIns="0" tIns="0" rIns="0" bIns="0" rtlCol="0" anchor="ctr"/>
           <a:lstStyle/>
           <a:p>
-            <a:pPr indent="0" marL="0">
+            <a:pPr marL="0" indent="0">
               <a:buNone/>
             </a:pPr>
             <a:r>
@@ -11177,8 +10929,8 @@
         </p:nvSpPr>
         <p:spPr>
           <a:xfrm>
-            <a:off x="768096" y="4251960"/>
-            <a:ext cx="4946904" cy="667512"/>
+            <a:off x="786384" y="4361688"/>
+            <a:ext cx="5096298" cy="667512"/>
           </a:xfrm>
           <a:prstGeom prst="rect">
             <a:avLst/>
@@ -11190,7 +10942,7 @@
           <a:bodyPr wrap="square" lIns="0" tIns="0" rIns="0" bIns="0" rtlCol="0" anchor="t"/>
           <a:lstStyle/>
           <a:p>
-            <a:pPr indent="0" marL="0">
+            <a:pPr marL="0" indent="0">
               <a:lnSpc>
                 <a:spcPct val="108000"/>
               </a:lnSpc>
@@ -11219,8 +10971,8 @@
         </p:nvSpPr>
         <p:spPr>
           <a:xfrm>
-            <a:off x="6281928" y="3566160"/>
-            <a:ext cx="5349240" cy="1508760"/>
+            <a:off x="6135624" y="3675888"/>
+            <a:ext cx="5510784" cy="1508760"/>
           </a:xfrm>
           <a:prstGeom prst="roundRect">
             <a:avLst>
@@ -11241,8 +10993,8 @@
         </p:nvSpPr>
         <p:spPr>
           <a:xfrm>
-            <a:off x="6483096" y="3721608"/>
-            <a:ext cx="4946904" cy="438912"/>
+            <a:off x="6348942" y="3831336"/>
+            <a:ext cx="5096298" cy="438912"/>
           </a:xfrm>
           <a:prstGeom prst="rect">
             <a:avLst/>
@@ -11254,7 +11006,7 @@
           <a:bodyPr wrap="square" lIns="0" tIns="0" rIns="0" bIns="0" rtlCol="0" anchor="ctr"/>
           <a:lstStyle/>
           <a:p>
-            <a:pPr indent="0" marL="0">
+            <a:pPr marL="0" indent="0">
               <a:buNone/>
             </a:pPr>
             <a:r>
@@ -11280,8 +11032,8 @@
         </p:nvSpPr>
         <p:spPr>
           <a:xfrm>
-            <a:off x="6483096" y="4251960"/>
-            <a:ext cx="4946904" cy="667512"/>
+            <a:off x="6348942" y="4361688"/>
+            <a:ext cx="5096298" cy="667512"/>
           </a:xfrm>
           <a:prstGeom prst="rect">
             <a:avLst/>
@@ -11293,7 +11045,7 @@
           <a:bodyPr wrap="square" lIns="0" tIns="0" rIns="0" bIns="0" rtlCol="0" anchor="t"/>
           <a:lstStyle/>
           <a:p>
-            <a:pPr indent="0" marL="0">
+            <a:pPr marL="0" indent="0">
               <a:lnSpc>
                 <a:spcPct val="108000"/>
               </a:lnSpc>
@@ -11362,7 +11114,7 @@
           <a:bodyPr wrap="square" lIns="0" tIns="0" rIns="0" bIns="0" rtlCol="0" anchor="ctr"/>
           <a:lstStyle/>
           <a:p>
-            <a:pPr indent="0" marL="0">
+            <a:pPr marL="0" indent="0">
               <a:lnSpc>
                 <a:spcPct val="112000"/>
               </a:lnSpc>
@@ -11403,7 +11155,7 @@
           </a:prstGeom>
           <a:extLst>
             <a:ext uri="{C572A759-6A51-4108-AA02-DFA0A04FC94B}">
-              <ma14:wrappingTextBoxFlag xmlns:ma14="http://schemas.microsoft.com/office/mac/drawingml/2011/main" val="0"/>
+              <ma14:wrappingTextBoxFlag xmlns="" xmlns:ma14="http://schemas.microsoft.com/office/mac/drawingml/2011/main" val="0"/>
             </a:ext>
           </a:extLst>
         </p:spPr>
@@ -11424,7 +11176,7 @@
           <a:p>
             <a:pPr algn="l"/>
             <a:fld id="{F7021451-1387-4CA6-816F-3879F97B5CBC}" type="slidenum">
-              <a:rPr b="0" lang="en-US"/>
+              <a:rPr lang="en-US" b="0"/>
               <a:t>16</a:t>
             </a:fld>
             <a:endParaRPr lang="en-US"/>
@@ -11499,7 +11251,7 @@
           <a:bodyPr wrap="square" lIns="0" tIns="0" rIns="0" bIns="0" rtlCol="0" anchor="ctr"/>
           <a:lstStyle/>
           <a:p>
-            <a:pPr algn="l" indent="0" marL="0">
+            <a:pPr marL="0" indent="0" algn="l">
               <a:buNone/>
             </a:pPr>
             <a:r>
@@ -11538,7 +11290,7 @@
           <a:bodyPr wrap="square" lIns="0" tIns="0" rIns="0" bIns="0" rtlCol="0" anchor="ctr"/>
           <a:lstStyle/>
           <a:p>
-            <a:pPr indent="0" marL="0">
+            <a:pPr marL="0" indent="0">
               <a:buNone/>
             </a:pPr>
             <a:r>
@@ -11604,11 +11356,11 @@
           <a:bodyPr wrap="square" lIns="0" tIns="0" rIns="0" bIns="0" rtlCol="0" anchor="ctr"/>
           <a:lstStyle/>
           <a:p>
-            <a:pPr algn="ctr" indent="0" marL="0">
-              <a:buNone/>
-            </a:pPr>
-            <a:r>
-              <a:rPr lang="en-US" sz="900" b="1" spc="100" kern="0" dirty="0">
+            <a:pPr marL="0" indent="0" algn="ctr">
+              <a:buNone/>
+            </a:pPr>
+            <a:r>
+              <a:rPr lang="en-US" sz="900" b="1" kern="0" spc="100" dirty="0">
                 <a:solidFill>
                   <a:srgbClr val="5A05F4"/>
                 </a:solidFill>
@@ -11670,11 +11422,11 @@
           <a:bodyPr wrap="square" lIns="0" tIns="0" rIns="0" bIns="0" rtlCol="0" anchor="ctr"/>
           <a:lstStyle/>
           <a:p>
-            <a:pPr algn="ctr" indent="0" marL="0">
-              <a:buNone/>
-            </a:pPr>
-            <a:r>
-              <a:rPr lang="en-US" sz="900" b="1" spc="100" kern="0" dirty="0">
+            <a:pPr marL="0" indent="0" algn="ctr">
+              <a:buNone/>
+            </a:pPr>
+            <a:r>
+              <a:rPr lang="en-US" sz="900" b="1" kern="0" spc="100" dirty="0">
                 <a:solidFill>
                   <a:srgbClr val="434343"/>
                 </a:solidFill>
@@ -11690,14 +11442,14 @@
       </p:sp>
       <p:pic>
         <p:nvPicPr>
-          <p:cNvPr id="9" name="Image 0" descr="preencoded.png">    </p:cNvPr>
+          <p:cNvPr id="9" name="Image 0" descr="preencoded.png"/>
           <p:cNvPicPr>
             <a:picLocks noChangeAspect="1"/>
           </p:cNvPicPr>
           <p:nvPr/>
         </p:nvPicPr>
         <p:blipFill>
-          <a:blip r:embed="rId1"/>
+          <a:blip r:embed="rId3"/>
           <a:stretch>
             <a:fillRect/>
           </a:stretch>
@@ -11753,7 +11505,7 @@
           <a:bodyPr wrap="square" lIns="0" tIns="0" rIns="0" bIns="0" rtlCol="0" anchor="ctr"/>
           <a:lstStyle/>
           <a:p>
-            <a:pPr algn="ctr" indent="0" marL="0">
+            <a:pPr marL="0" indent="0" algn="ctr">
               <a:buNone/>
             </a:pPr>
             <a:r>
@@ -11792,7 +11544,7 @@
           <a:bodyPr wrap="square" lIns="0" tIns="0" rIns="0" bIns="0" rtlCol="0" anchor="ctr"/>
           <a:lstStyle/>
           <a:p>
-            <a:pPr algn="ctr" indent="0" marL="0">
+            <a:pPr marL="0" indent="0" algn="ctr">
               <a:buNone/>
             </a:pPr>
             <a:r>
@@ -11874,7 +11626,7 @@
           <a:bodyPr wrap="square" lIns="0" tIns="0" rIns="0" bIns="0" rtlCol="0" anchor="ctr"/>
           <a:lstStyle/>
           <a:p>
-            <a:pPr algn="ctr" indent="0" marL="0">
+            <a:pPr marL="0" indent="0" algn="ctr">
               <a:buNone/>
             </a:pPr>
             <a:r>
@@ -11933,7 +11685,7 @@
           <a:bodyPr wrap="square" lIns="0" tIns="0" rIns="0" bIns="0" rtlCol="0" anchor="ctr"/>
           <a:lstStyle/>
           <a:p>
-            <a:pPr algn="ctr" indent="0" marL="0">
+            <a:pPr marL="0" indent="0" algn="ctr">
               <a:buNone/>
             </a:pPr>
             <a:r>
@@ -11972,7 +11724,7 @@
           <a:bodyPr wrap="square" lIns="0" tIns="0" rIns="0" bIns="0" rtlCol="0" anchor="ctr"/>
           <a:lstStyle/>
           <a:p>
-            <a:pPr algn="ctr" indent="0" marL="0">
+            <a:pPr marL="0" indent="0" algn="ctr">
               <a:buNone/>
             </a:pPr>
             <a:r>
@@ -12054,7 +11806,7 @@
           <a:bodyPr wrap="square" lIns="0" tIns="0" rIns="0" bIns="0" rtlCol="0" anchor="ctr"/>
           <a:lstStyle/>
           <a:p>
-            <a:pPr algn="ctr" indent="0" marL="0">
+            <a:pPr marL="0" indent="0" algn="ctr">
               <a:buNone/>
             </a:pPr>
             <a:r>
@@ -12113,7 +11865,7 @@
           <a:bodyPr wrap="square" lIns="0" tIns="0" rIns="0" bIns="0" rtlCol="0" anchor="ctr"/>
           <a:lstStyle/>
           <a:p>
-            <a:pPr algn="ctr" indent="0" marL="0">
+            <a:pPr marL="0" indent="0" algn="ctr">
               <a:buNone/>
             </a:pPr>
             <a:r>
@@ -12152,7 +11904,7 @@
           <a:bodyPr wrap="square" lIns="0" tIns="0" rIns="0" bIns="0" rtlCol="0" anchor="ctr"/>
           <a:lstStyle/>
           <a:p>
-            <a:pPr algn="ctr" indent="0" marL="0">
+            <a:pPr marL="0" indent="0" algn="ctr">
               <a:buNone/>
             </a:pPr>
             <a:r>
@@ -12218,11 +11970,11 @@
           <a:bodyPr wrap="square" lIns="0" tIns="0" rIns="0" bIns="0" rtlCol="0" anchor="ctr"/>
           <a:lstStyle/>
           <a:p>
-            <a:pPr indent="0" marL="0">
-              <a:buNone/>
-            </a:pPr>
-            <a:r>
-              <a:rPr lang="en-US" sz="950" b="1" spc="150" kern="0" dirty="0">
+            <a:pPr marL="0" indent="0">
+              <a:buNone/>
+            </a:pPr>
+            <a:r>
+              <a:rPr lang="en-US" sz="950" b="1" kern="0" spc="150" dirty="0">
                 <a:solidFill>
                   <a:srgbClr val="B3261E"/>
                 </a:solidFill>
@@ -12257,7 +12009,7 @@
           <a:bodyPr wrap="square" lIns="0" tIns="0" rIns="0" bIns="0" rtlCol="0" anchor="ctr"/>
           <a:lstStyle/>
           <a:p>
-            <a:pPr indent="0" marL="0">
+            <a:pPr marL="0" indent="0">
               <a:lnSpc>
                 <a:spcPct val="112000"/>
               </a:lnSpc>
@@ -12321,7 +12073,7 @@
           <a:bodyPr wrap="square" lIns="0" tIns="0" rIns="0" bIns="0" rtlCol="0" anchor="ctr"/>
           <a:lstStyle/>
           <a:p>
-            <a:pPr indent="0" marL="0">
+            <a:pPr marL="0" indent="0">
               <a:lnSpc>
                 <a:spcPct val="112000"/>
               </a:lnSpc>
@@ -12344,7 +12096,7 @@
       </p:sp>
       <p:sp>
         <p:nvSpPr>
-          <p:cNvPr id="25" name="Slide Number Placeholder 0"/>
+          <p:cNvPr id="30" name="Slide Number Placeholder 0"/>
           <p:cNvSpPr>
             <a:spLocks noGrp="1"/>
           </p:cNvSpPr>
@@ -12362,7 +12114,7 @@
           </a:prstGeom>
           <a:extLst>
             <a:ext uri="{C572A759-6A51-4108-AA02-DFA0A04FC94B}">
-              <ma14:wrappingTextBoxFlag xmlns:ma14="http://schemas.microsoft.com/office/mac/drawingml/2011/main" val="0"/>
+              <ma14:wrappingTextBoxFlag xmlns="" xmlns:ma14="http://schemas.microsoft.com/office/mac/drawingml/2011/main" val="0"/>
             </a:ext>
           </a:extLst>
         </p:spPr>
@@ -12383,7 +12135,7 @@
           <a:p>
             <a:pPr algn="l"/>
             <a:fld id="{F7021451-1387-4CA6-816F-3879F97B5CBC}" type="slidenum">
-              <a:rPr b="0" lang="en-US"/>
+              <a:rPr lang="en-US" b="0"/>
               <a:t>17</a:t>
             </a:fld>
             <a:endParaRPr lang="en-US"/>
@@ -12458,7 +12210,7 @@
           <a:bodyPr wrap="square" lIns="0" tIns="0" rIns="0" bIns="0" rtlCol="0" anchor="ctr"/>
           <a:lstStyle/>
           <a:p>
-            <a:pPr algn="l" indent="0" marL="0">
+            <a:pPr marL="0" indent="0" algn="l">
               <a:buNone/>
             </a:pPr>
             <a:r>
@@ -12497,7 +12249,7 @@
           <a:bodyPr wrap="square" lIns="0" tIns="0" rIns="0" bIns="0" rtlCol="0" anchor="ctr"/>
           <a:lstStyle/>
           <a:p>
-            <a:pPr indent="0" marL="0">
+            <a:pPr marL="0" indent="0">
               <a:buNone/>
             </a:pPr>
             <a:r>
@@ -12563,11 +12315,11 @@
           <a:bodyPr wrap="square" lIns="0" tIns="0" rIns="0" bIns="0" rtlCol="0" anchor="ctr"/>
           <a:lstStyle/>
           <a:p>
-            <a:pPr algn="ctr" indent="0" marL="0">
-              <a:buNone/>
-            </a:pPr>
-            <a:r>
-              <a:rPr lang="en-US" sz="900" b="1" spc="100" kern="0" dirty="0">
+            <a:pPr marL="0" indent="0" algn="ctr">
+              <a:buNone/>
+            </a:pPr>
+            <a:r>
+              <a:rPr lang="en-US" sz="900" b="1" kern="0" spc="100" dirty="0">
                 <a:solidFill>
                   <a:srgbClr val="5A05F4"/>
                 </a:solidFill>
@@ -12583,14 +12335,14 @@
       </p:sp>
       <p:pic>
         <p:nvPicPr>
-          <p:cNvPr id="7" name="Image 0" descr="preencoded.png">    </p:cNvPr>
+          <p:cNvPr id="7" name="Image 0" descr="preencoded.png"/>
           <p:cNvPicPr>
             <a:picLocks noChangeAspect="1"/>
           </p:cNvPicPr>
           <p:nvPr/>
         </p:nvPicPr>
         <p:blipFill>
-          <a:blip r:embed="rId1"/>
+          <a:blip r:embed="rId3"/>
           <a:stretch>
             <a:fillRect/>
           </a:stretch>
@@ -12648,7 +12400,7 @@
           <a:bodyPr wrap="square" lIns="0" tIns="0" rIns="0" bIns="0" rtlCol="0" anchor="ctr"/>
           <a:lstStyle/>
           <a:p>
-            <a:pPr indent="0" marL="0">
+            <a:pPr marL="0" indent="0">
               <a:buNone/>
             </a:pPr>
             <a:r>
@@ -12687,7 +12439,7 @@
           <a:bodyPr wrap="square" lIns="0" tIns="0" rIns="0" bIns="0" rtlCol="0" anchor="ctr"/>
           <a:lstStyle/>
           <a:p>
-            <a:pPr indent="0" marL="0">
+            <a:pPr marL="0" indent="0">
               <a:buNone/>
             </a:pPr>
             <a:r>
@@ -12748,7 +12500,7 @@
           <a:bodyPr wrap="square" lIns="0" tIns="0" rIns="0" bIns="0" rtlCol="0" anchor="ctr"/>
           <a:lstStyle/>
           <a:p>
-            <a:pPr indent="0" marL="0">
+            <a:pPr marL="0" indent="0">
               <a:buNone/>
             </a:pPr>
             <a:r>
@@ -12787,7 +12539,7 @@
           <a:bodyPr wrap="square" lIns="0" tIns="0" rIns="0" bIns="0" rtlCol="0" anchor="ctr"/>
           <a:lstStyle/>
           <a:p>
-            <a:pPr indent="0" marL="0">
+            <a:pPr marL="0" indent="0">
               <a:buNone/>
             </a:pPr>
             <a:r>
@@ -12848,7 +12600,7 @@
           <a:bodyPr wrap="square" lIns="0" tIns="0" rIns="0" bIns="0" rtlCol="0" anchor="ctr"/>
           <a:lstStyle/>
           <a:p>
-            <a:pPr indent="0" marL="0">
+            <a:pPr marL="0" indent="0">
               <a:buNone/>
             </a:pPr>
             <a:r>
@@ -12887,7 +12639,7 @@
           <a:bodyPr wrap="square" lIns="0" tIns="0" rIns="0" bIns="0" rtlCol="0" anchor="ctr"/>
           <a:lstStyle/>
           <a:p>
-            <a:pPr indent="0" marL="0">
+            <a:pPr marL="0" indent="0">
               <a:buNone/>
             </a:pPr>
             <a:r>
@@ -12953,7 +12705,7 @@
           <a:bodyPr wrap="square" lIns="0" tIns="0" rIns="0" bIns="0" rtlCol="0" anchor="ctr"/>
           <a:lstStyle/>
           <a:p>
-            <a:pPr indent="0" marL="0">
+            <a:pPr marL="0" indent="0">
               <a:lnSpc>
                 <a:spcPct val="112000"/>
               </a:lnSpc>
@@ -13022,7 +12774,7 @@
           <a:bodyPr wrap="square" lIns="0" tIns="0" rIns="0" bIns="0" rtlCol="0" anchor="ctr"/>
           <a:lstStyle/>
           <a:p>
-            <a:pPr indent="0" marL="0">
+            <a:pPr marL="0" indent="0">
               <a:lnSpc>
                 <a:spcPct val="112000"/>
               </a:lnSpc>
@@ -13063,7 +12815,7 @@
           </a:prstGeom>
           <a:extLst>
             <a:ext uri="{C572A759-6A51-4108-AA02-DFA0A04FC94B}">
-              <ma14:wrappingTextBoxFlag xmlns:ma14="http://schemas.microsoft.com/office/mac/drawingml/2011/main" val="0"/>
+              <ma14:wrappingTextBoxFlag xmlns="" xmlns:ma14="http://schemas.microsoft.com/office/mac/drawingml/2011/main" val="0"/>
             </a:ext>
           </a:extLst>
         </p:spPr>
@@ -13084,7 +12836,7 @@
           <a:p>
             <a:pPr algn="l"/>
             <a:fld id="{F7021451-1387-4CA6-816F-3879F97B5CBC}" type="slidenum">
-              <a:rPr b="0" lang="en-US"/>
+              <a:rPr lang="en-US" b="0"/>
               <a:t>18</a:t>
             </a:fld>
             <a:endParaRPr lang="en-US"/>
@@ -13159,7 +12911,7 @@
           <a:bodyPr wrap="square" lIns="0" tIns="0" rIns="0" bIns="0" rtlCol="0" anchor="ctr"/>
           <a:lstStyle/>
           <a:p>
-            <a:pPr algn="l" indent="0" marL="0">
+            <a:pPr marL="0" indent="0" algn="l">
               <a:buNone/>
             </a:pPr>
             <a:r>
@@ -13198,7 +12950,7 @@
           <a:bodyPr wrap="square" lIns="0" tIns="0" rIns="0" bIns="0" rtlCol="0" anchor="ctr"/>
           <a:lstStyle/>
           <a:p>
-            <a:pPr indent="0" marL="0">
+            <a:pPr marL="0" indent="0">
               <a:buNone/>
             </a:pPr>
             <a:r>
@@ -13237,7 +12989,7 @@
           <a:bodyPr wrap="square" lIns="0" tIns="0" rIns="0" bIns="0" rtlCol="0" anchor="t"/>
           <a:lstStyle/>
           <a:p>
-            <a:pPr indent="0" marL="0">
+            <a:pPr marL="0" indent="0">
               <a:lnSpc>
                 <a:spcPct val="100000"/>
               </a:lnSpc>
@@ -13306,11 +13058,11 @@
           <a:bodyPr wrap="square" lIns="0" tIns="0" rIns="0" bIns="0" rtlCol="0" anchor="ctr"/>
           <a:lstStyle/>
           <a:p>
-            <a:pPr algn="ctr" indent="0" marL="0">
-              <a:buNone/>
-            </a:pPr>
-            <a:r>
-              <a:rPr lang="en-US" sz="900" b="1" spc="100" kern="0" dirty="0">
+            <a:pPr marL="0" indent="0" algn="ctr">
+              <a:buNone/>
+            </a:pPr>
+            <a:r>
+              <a:rPr lang="en-US" sz="900" b="1" kern="0" spc="100" dirty="0">
                 <a:solidFill>
                   <a:srgbClr val="5A05F4"/>
                 </a:solidFill>
@@ -13326,14 +13078,14 @@
       </p:sp>
       <p:pic>
         <p:nvPicPr>
-          <p:cNvPr id="8" name="Image 0" descr="preencoded.png">    </p:cNvPr>
+          <p:cNvPr id="8" name="Image 0" descr="preencoded.png"/>
           <p:cNvPicPr>
             <a:picLocks noChangeAspect="1"/>
           </p:cNvPicPr>
           <p:nvPr/>
         </p:nvPicPr>
         <p:blipFill>
-          <a:blip r:embed="rId1"/>
+          <a:blip r:embed="rId3"/>
           <a:stretch>
             <a:fillRect/>
           </a:stretch>
@@ -13411,7 +13163,7 @@
           <a:bodyPr wrap="square" lIns="0" tIns="0" rIns="0" bIns="0" rtlCol="0" anchor="ctr"/>
           <a:lstStyle/>
           <a:p>
-            <a:pPr algn="ctr" indent="0" marL="0">
+            <a:pPr marL="0" indent="0" algn="ctr">
               <a:buNone/>
             </a:pPr>
             <a:r>
@@ -13450,7 +13202,7 @@
           <a:bodyPr wrap="square" lIns="0" tIns="0" rIns="0" bIns="0" rtlCol="0" anchor="ctr"/>
           <a:lstStyle/>
           <a:p>
-            <a:pPr indent="0" marL="0">
+            <a:pPr marL="0" indent="0">
               <a:buNone/>
             </a:pPr>
             <a:r>
@@ -13489,7 +13241,7 @@
           <a:bodyPr wrap="square" lIns="0" tIns="0" rIns="0" bIns="0" rtlCol="0" anchor="t"/>
           <a:lstStyle/>
           <a:p>
-            <a:pPr indent="0" marL="0">
+            <a:pPr marL="0" indent="0">
               <a:lnSpc>
                 <a:spcPct val="108000"/>
               </a:lnSpc>
@@ -13573,7 +13325,7 @@
           <a:bodyPr wrap="square" lIns="0" tIns="0" rIns="0" bIns="0" rtlCol="0" anchor="ctr"/>
           <a:lstStyle/>
           <a:p>
-            <a:pPr algn="ctr" indent="0" marL="0">
+            <a:pPr marL="0" indent="0" algn="ctr">
               <a:buNone/>
             </a:pPr>
             <a:r>
@@ -13612,7 +13364,7 @@
           <a:bodyPr wrap="square" lIns="0" tIns="0" rIns="0" bIns="0" rtlCol="0" anchor="ctr"/>
           <a:lstStyle/>
           <a:p>
-            <a:pPr indent="0" marL="0">
+            <a:pPr marL="0" indent="0">
               <a:buNone/>
             </a:pPr>
             <a:r>
@@ -13651,7 +13403,7 @@
           <a:bodyPr wrap="square" lIns="0" tIns="0" rIns="0" bIns="0" rtlCol="0" anchor="t"/>
           <a:lstStyle/>
           <a:p>
-            <a:pPr indent="0" marL="0">
+            <a:pPr marL="0" indent="0">
               <a:lnSpc>
                 <a:spcPct val="108000"/>
               </a:lnSpc>
@@ -13720,7 +13472,7 @@
           <a:bodyPr wrap="square" lIns="0" tIns="0" rIns="0" bIns="0" rtlCol="0" anchor="ctr"/>
           <a:lstStyle/>
           <a:p>
-            <a:pPr indent="0" marL="0">
+            <a:pPr marL="0" indent="0">
               <a:lnSpc>
                 <a:spcPct val="112000"/>
               </a:lnSpc>
@@ -13789,11 +13541,11 @@
           <a:bodyPr wrap="square" lIns="0" tIns="0" rIns="0" bIns="0" rtlCol="0" anchor="ctr"/>
           <a:lstStyle/>
           <a:p>
-            <a:pPr indent="0" marL="0">
-              <a:buNone/>
-            </a:pPr>
-            <a:r>
-              <a:rPr lang="en-US" sz="950" b="1" spc="150" kern="0" dirty="0">
+            <a:pPr marL="0" indent="0">
+              <a:buNone/>
+            </a:pPr>
+            <a:r>
+              <a:rPr lang="en-US" sz="950" b="1" kern="0" spc="150" dirty="0">
                 <a:solidFill>
                   <a:srgbClr val="106B41"/>
                 </a:solidFill>
@@ -13828,7 +13580,7 @@
           <a:bodyPr wrap="square" lIns="0" tIns="0" rIns="0" bIns="0" rtlCol="0" anchor="ctr"/>
           <a:lstStyle/>
           <a:p>
-            <a:pPr indent="0" marL="0">
+            <a:pPr marL="0" indent="0">
               <a:lnSpc>
                 <a:spcPct val="112000"/>
               </a:lnSpc>
@@ -13869,7 +13621,7 @@
           </a:prstGeom>
           <a:extLst>
             <a:ext uri="{C572A759-6A51-4108-AA02-DFA0A04FC94B}">
-              <ma14:wrappingTextBoxFlag xmlns:ma14="http://schemas.microsoft.com/office/mac/drawingml/2011/main" val="0"/>
+              <ma14:wrappingTextBoxFlag xmlns="" xmlns:ma14="http://schemas.microsoft.com/office/mac/drawingml/2011/main" val="0"/>
             </a:ext>
           </a:extLst>
         </p:spPr>
@@ -13890,7 +13642,7 @@
           <a:p>
             <a:pPr algn="l"/>
             <a:fld id="{F7021451-1387-4CA6-816F-3879F97B5CBC}" type="slidenum">
-              <a:rPr b="0" lang="en-US"/>
+              <a:rPr lang="en-US" b="0"/>
               <a:t>19</a:t>
             </a:fld>
             <a:endParaRPr lang="en-US"/>
@@ -13965,7 +13717,7 @@
           <a:bodyPr wrap="square" lIns="0" tIns="0" rIns="0" bIns="0" rtlCol="0" anchor="ctr"/>
           <a:lstStyle/>
           <a:p>
-            <a:pPr indent="0" marL="0">
+            <a:pPr marL="0" indent="0">
               <a:buNone/>
             </a:pPr>
             <a:r>
@@ -14004,7 +13756,7 @@
           <a:bodyPr wrap="square" lIns="0" tIns="0" rIns="0" bIns="0" rtlCol="0" anchor="t"/>
           <a:lstStyle/>
           <a:p>
-            <a:pPr indent="0" marL="0">
+            <a:pPr marL="0" indent="0">
               <a:lnSpc>
                 <a:spcPct val="100000"/>
               </a:lnSpc>
@@ -14073,11 +13825,11 @@
           <a:bodyPr wrap="square" lIns="0" tIns="0" rIns="0" bIns="0" rtlCol="0" anchor="ctr"/>
           <a:lstStyle/>
           <a:p>
-            <a:pPr algn="ctr" indent="0" marL="0">
-              <a:buNone/>
-            </a:pPr>
-            <a:r>
-              <a:rPr lang="en-US" sz="900" b="1" spc="100" kern="0" dirty="0">
+            <a:pPr marL="0" indent="0" algn="ctr">
+              <a:buNone/>
+            </a:pPr>
+            <a:r>
+              <a:rPr lang="en-US" sz="900" b="1" kern="0" spc="100" dirty="0">
                 <a:solidFill>
                   <a:srgbClr val="5A05F4"/>
                 </a:solidFill>
@@ -14093,14 +13845,14 @@
       </p:sp>
       <p:pic>
         <p:nvPicPr>
-          <p:cNvPr id="7" name="Image 0" descr="preencoded.png">    </p:cNvPr>
+          <p:cNvPr id="7" name="Image 0" descr="preencoded.png"/>
           <p:cNvPicPr>
             <a:picLocks noChangeAspect="1"/>
           </p:cNvPicPr>
           <p:nvPr/>
         </p:nvPicPr>
         <p:blipFill>
-          <a:blip r:embed="rId1"/>
+          <a:blip r:embed="rId3"/>
           <a:stretch>
             <a:fillRect/>
           </a:stretch>
@@ -14178,7 +13930,7 @@
           <a:bodyPr wrap="square" lIns="0" tIns="0" rIns="0" bIns="0" rtlCol="0" anchor="ctr"/>
           <a:lstStyle/>
           <a:p>
-            <a:pPr algn="ctr" indent="0" marL="0">
+            <a:pPr marL="0" indent="0" algn="ctr">
               <a:buNone/>
             </a:pPr>
             <a:r>
@@ -14217,7 +13969,7 @@
           <a:bodyPr wrap="square" lIns="0" tIns="0" rIns="0" bIns="0" rtlCol="0" anchor="ctr"/>
           <a:lstStyle/>
           <a:p>
-            <a:pPr indent="0" marL="0">
+            <a:pPr marL="0" indent="0">
               <a:buNone/>
             </a:pPr>
             <a:r>
@@ -14256,7 +14008,7 @@
           <a:bodyPr wrap="square" lIns="0" tIns="0" rIns="0" bIns="0" rtlCol="0" anchor="t"/>
           <a:lstStyle/>
           <a:p>
-            <a:pPr indent="0" marL="0">
+            <a:pPr marL="0" indent="0">
               <a:lnSpc>
                 <a:spcPct val="108000"/>
               </a:lnSpc>
@@ -14340,7 +14092,7 @@
           <a:bodyPr wrap="square" lIns="0" tIns="0" rIns="0" bIns="0" rtlCol="0" anchor="ctr"/>
           <a:lstStyle/>
           <a:p>
-            <a:pPr algn="ctr" indent="0" marL="0">
+            <a:pPr marL="0" indent="0" algn="ctr">
               <a:buNone/>
             </a:pPr>
             <a:r>
@@ -14379,7 +14131,7 @@
           <a:bodyPr wrap="square" lIns="0" tIns="0" rIns="0" bIns="0" rtlCol="0" anchor="ctr"/>
           <a:lstStyle/>
           <a:p>
-            <a:pPr indent="0" marL="0">
+            <a:pPr marL="0" indent="0">
               <a:buNone/>
             </a:pPr>
             <a:r>
@@ -14418,7 +14170,7 @@
           <a:bodyPr wrap="square" lIns="0" tIns="0" rIns="0" bIns="0" rtlCol="0" anchor="t"/>
           <a:lstStyle/>
           <a:p>
-            <a:pPr indent="0" marL="0">
+            <a:pPr marL="0" indent="0">
               <a:lnSpc>
                 <a:spcPct val="108000"/>
               </a:lnSpc>
@@ -14502,7 +14254,7 @@
           <a:bodyPr wrap="square" lIns="0" tIns="0" rIns="0" bIns="0" rtlCol="0" anchor="ctr"/>
           <a:lstStyle/>
           <a:p>
-            <a:pPr algn="ctr" indent="0" marL="0">
+            <a:pPr marL="0" indent="0" algn="ctr">
               <a:buNone/>
             </a:pPr>
             <a:r>
@@ -14541,7 +14293,7 @@
           <a:bodyPr wrap="square" lIns="0" tIns="0" rIns="0" bIns="0" rtlCol="0" anchor="ctr"/>
           <a:lstStyle/>
           <a:p>
-            <a:pPr indent="0" marL="0">
+            <a:pPr marL="0" indent="0">
               <a:buNone/>
             </a:pPr>
             <a:r>
@@ -14580,7 +14332,7 @@
           <a:bodyPr wrap="square" lIns="0" tIns="0" rIns="0" bIns="0" rtlCol="0" anchor="t"/>
           <a:lstStyle/>
           <a:p>
-            <a:pPr indent="0" marL="0">
+            <a:pPr marL="0" indent="0">
               <a:lnSpc>
                 <a:spcPct val="108000"/>
               </a:lnSpc>
@@ -14664,7 +14416,7 @@
           <a:bodyPr wrap="square" lIns="0" tIns="0" rIns="0" bIns="0" rtlCol="0" anchor="ctr"/>
           <a:lstStyle/>
           <a:p>
-            <a:pPr algn="ctr" indent="0" marL="0">
+            <a:pPr marL="0" indent="0" algn="ctr">
               <a:buNone/>
             </a:pPr>
             <a:r>
@@ -14703,7 +14455,7 @@
           <a:bodyPr wrap="square" lIns="0" tIns="0" rIns="0" bIns="0" rtlCol="0" anchor="ctr"/>
           <a:lstStyle/>
           <a:p>
-            <a:pPr indent="0" marL="0">
+            <a:pPr marL="0" indent="0">
               <a:buNone/>
             </a:pPr>
             <a:r>
@@ -14742,7 +14494,7 @@
           <a:bodyPr wrap="square" lIns="0" tIns="0" rIns="0" bIns="0" rtlCol="0" anchor="t"/>
           <a:lstStyle/>
           <a:p>
-            <a:pPr indent="0" marL="0">
+            <a:pPr marL="0" indent="0">
               <a:lnSpc>
                 <a:spcPct val="108000"/>
               </a:lnSpc>
@@ -14826,7 +14578,7 @@
           <a:bodyPr wrap="square" lIns="0" tIns="0" rIns="0" bIns="0" rtlCol="0" anchor="ctr"/>
           <a:lstStyle/>
           <a:p>
-            <a:pPr algn="ctr" indent="0" marL="0">
+            <a:pPr marL="0" indent="0" algn="ctr">
               <a:buNone/>
             </a:pPr>
             <a:r>
@@ -14865,7 +14617,7 @@
           <a:bodyPr wrap="square" lIns="0" tIns="0" rIns="0" bIns="0" rtlCol="0" anchor="ctr"/>
           <a:lstStyle/>
           <a:p>
-            <a:pPr indent="0" marL="0">
+            <a:pPr marL="0" indent="0">
               <a:buNone/>
             </a:pPr>
             <a:r>
@@ -14904,7 +14656,7 @@
           <a:bodyPr wrap="square" lIns="0" tIns="0" rIns="0" bIns="0" rtlCol="0" anchor="t"/>
           <a:lstStyle/>
           <a:p>
-            <a:pPr indent="0" marL="0">
+            <a:pPr marL="0" indent="0">
               <a:lnSpc>
                 <a:spcPct val="108000"/>
               </a:lnSpc>
@@ -14927,7 +14679,7 @@
       </p:sp>
       <p:sp>
         <p:nvSpPr>
-          <p:cNvPr id="25" name="Slide Number Placeholder 0"/>
+          <p:cNvPr id="33" name="Slide Number Placeholder 0"/>
           <p:cNvSpPr>
             <a:spLocks noGrp="1"/>
           </p:cNvSpPr>
@@ -14945,7 +14697,7 @@
           </a:prstGeom>
           <a:extLst>
             <a:ext uri="{C572A759-6A51-4108-AA02-DFA0A04FC94B}">
-              <ma14:wrappingTextBoxFlag xmlns:ma14="http://schemas.microsoft.com/office/mac/drawingml/2011/main" val="0"/>
+              <ma14:wrappingTextBoxFlag xmlns="" xmlns:ma14="http://schemas.microsoft.com/office/mac/drawingml/2011/main" val="0"/>
             </a:ext>
           </a:extLst>
         </p:spPr>
@@ -14966,7 +14718,7 @@
           <a:p>
             <a:pPr algn="l"/>
             <a:fld id="{F7021451-1387-4CA6-816F-3879F97B5CBC}" type="slidenum">
-              <a:rPr b="0" lang="en-US"/>
+              <a:rPr lang="en-US" b="0"/>
               <a:t>2</a:t>
             </a:fld>
             <a:endParaRPr lang="en-US"/>
@@ -15019,11 +14771,11 @@
           <a:bodyPr wrap="square" lIns="0" tIns="0" rIns="0" bIns="0" rtlCol="0" anchor="ctr"/>
           <a:lstStyle/>
           <a:p>
-            <a:pPr indent="0" marL="0">
-              <a:buNone/>
-            </a:pPr>
-            <a:r>
-              <a:rPr lang="en-US" sz="1200" b="1" spc="400" kern="0" dirty="0">
+            <a:pPr marL="0" indent="0">
+              <a:buNone/>
+            </a:pPr>
+            <a:r>
+              <a:rPr lang="en-US" sz="1200" b="1" kern="0" spc="400" dirty="0">
                 <a:solidFill>
                   <a:srgbClr val="FFFFFF"/>
                 </a:solidFill>
@@ -15058,7 +14810,7 @@
           <a:bodyPr wrap="square" lIns="0" tIns="0" rIns="0" bIns="0" rtlCol="0" anchor="ctr"/>
           <a:lstStyle/>
           <a:p>
-            <a:pPr indent="0" marL="0">
+            <a:pPr marL="0" indent="0">
               <a:buNone/>
             </a:pPr>
             <a:r>
@@ -15097,7 +14849,7 @@
           <a:bodyPr wrap="square" lIns="0" tIns="0" rIns="0" bIns="0" rtlCol="0" anchor="t"/>
           <a:lstStyle/>
           <a:p>
-            <a:pPr indent="0" marL="0">
+            <a:pPr marL="0" indent="0">
               <a:buNone/>
             </a:pPr>
             <a:r>
@@ -15158,7 +14910,7 @@
           <a:bodyPr wrap="square" lIns="0" tIns="0" rIns="0" bIns="0" rtlCol="0" anchor="ctr"/>
           <a:lstStyle/>
           <a:p>
-            <a:pPr algn="ctr" indent="0" marL="0">
+            <a:pPr marL="0" indent="0" algn="ctr">
               <a:buNone/>
             </a:pPr>
             <a:r>
@@ -15244,7 +14996,7 @@
           <a:bodyPr wrap="square" lIns="0" tIns="0" rIns="0" bIns="0" rtlCol="0" anchor="ctr"/>
           <a:lstStyle/>
           <a:p>
-            <a:pPr indent="0" marL="0">
+            <a:pPr marL="0" indent="0">
               <a:buNone/>
             </a:pPr>
             <a:r>
@@ -15305,11 +15057,11 @@
           <a:bodyPr wrap="square" lIns="0" tIns="0" rIns="0" bIns="0" rtlCol="0" anchor="ctr"/>
           <a:lstStyle/>
           <a:p>
-            <a:pPr algn="ctr" indent="0" marL="0">
-              <a:buNone/>
-            </a:pPr>
-            <a:r>
-              <a:rPr lang="en-US" sz="900" b="1" spc="100" kern="0" dirty="0">
+            <a:pPr marL="0" indent="0" algn="ctr">
+              <a:buNone/>
+            </a:pPr>
+            <a:r>
+              <a:rPr lang="en-US" sz="900" b="1" kern="0" spc="100" dirty="0">
                 <a:solidFill>
                   <a:srgbClr val="FFFFFF"/>
                 </a:solidFill>
@@ -15325,14 +15077,14 @@
       </p:sp>
       <p:pic>
         <p:nvPicPr>
-          <p:cNvPr id="6" name="Image 0" descr="preencoded.png">    </p:cNvPr>
+          <p:cNvPr id="6" name="Image 0" descr="preencoded.png"/>
           <p:cNvPicPr>
             <a:picLocks noChangeAspect="1"/>
           </p:cNvPicPr>
           <p:nvPr/>
         </p:nvPicPr>
         <p:blipFill>
-          <a:blip r:embed="rId1"/>
+          <a:blip r:embed="rId3"/>
           <a:stretch>
             <a:fillRect/>
           </a:stretch>
@@ -15410,7 +15162,7 @@
           <a:bodyPr wrap="square" lIns="0" tIns="0" rIns="0" bIns="0" rtlCol="0" anchor="ctr"/>
           <a:lstStyle/>
           <a:p>
-            <a:pPr algn="ctr" indent="0" marL="0">
+            <a:pPr marL="0" indent="0" algn="ctr">
               <a:buNone/>
             </a:pPr>
             <a:r>
@@ -15449,7 +15201,7 @@
           <a:bodyPr wrap="square" lIns="0" tIns="0" rIns="0" bIns="0" rtlCol="0" anchor="ctr"/>
           <a:lstStyle/>
           <a:p>
-            <a:pPr indent="0" marL="0">
+            <a:pPr marL="0" indent="0">
               <a:buNone/>
             </a:pPr>
             <a:r>
@@ -15488,7 +15240,7 @@
           <a:bodyPr wrap="square" lIns="0" tIns="0" rIns="0" bIns="0" rtlCol="0" anchor="t"/>
           <a:lstStyle/>
           <a:p>
-            <a:pPr indent="0" marL="0">
+            <a:pPr marL="0" indent="0">
               <a:lnSpc>
                 <a:spcPct val="108000"/>
               </a:lnSpc>
@@ -15572,7 +15324,7 @@
           <a:bodyPr wrap="square" lIns="0" tIns="0" rIns="0" bIns="0" rtlCol="0" anchor="ctr"/>
           <a:lstStyle/>
           <a:p>
-            <a:pPr algn="ctr" indent="0" marL="0">
+            <a:pPr marL="0" indent="0" algn="ctr">
               <a:buNone/>
             </a:pPr>
             <a:r>
@@ -15611,7 +15363,7 @@
           <a:bodyPr wrap="square" lIns="0" tIns="0" rIns="0" bIns="0" rtlCol="0" anchor="ctr"/>
           <a:lstStyle/>
           <a:p>
-            <a:pPr indent="0" marL="0">
+            <a:pPr marL="0" indent="0">
               <a:buNone/>
             </a:pPr>
             <a:r>
@@ -15650,7 +15402,7 @@
           <a:bodyPr wrap="square" lIns="0" tIns="0" rIns="0" bIns="0" rtlCol="0" anchor="t"/>
           <a:lstStyle/>
           <a:p>
-            <a:pPr indent="0" marL="0">
+            <a:pPr marL="0" indent="0">
               <a:lnSpc>
                 <a:spcPct val="108000"/>
               </a:lnSpc>
@@ -15734,7 +15486,7 @@
           <a:bodyPr wrap="square" lIns="0" tIns="0" rIns="0" bIns="0" rtlCol="0" anchor="ctr"/>
           <a:lstStyle/>
           <a:p>
-            <a:pPr algn="ctr" indent="0" marL="0">
+            <a:pPr marL="0" indent="0" algn="ctr">
               <a:buNone/>
             </a:pPr>
             <a:r>
@@ -15773,7 +15525,7 @@
           <a:bodyPr wrap="square" lIns="0" tIns="0" rIns="0" bIns="0" rtlCol="0" anchor="ctr"/>
           <a:lstStyle/>
           <a:p>
-            <a:pPr indent="0" marL="0">
+            <a:pPr marL="0" indent="0">
               <a:buNone/>
             </a:pPr>
             <a:r>
@@ -15812,7 +15564,7 @@
           <a:bodyPr wrap="square" lIns="0" tIns="0" rIns="0" bIns="0" rtlCol="0" anchor="t"/>
           <a:lstStyle/>
           <a:p>
-            <a:pPr indent="0" marL="0">
+            <a:pPr marL="0" indent="0">
               <a:lnSpc>
                 <a:spcPct val="108000"/>
               </a:lnSpc>
@@ -15896,7 +15648,7 @@
           <a:bodyPr wrap="square" lIns="0" tIns="0" rIns="0" bIns="0" rtlCol="0" anchor="ctr"/>
           <a:lstStyle/>
           <a:p>
-            <a:pPr algn="ctr" indent="0" marL="0">
+            <a:pPr marL="0" indent="0" algn="ctr">
               <a:buNone/>
             </a:pPr>
             <a:r>
@@ -15935,7 +15687,7 @@
           <a:bodyPr wrap="square" lIns="0" tIns="0" rIns="0" bIns="0" rtlCol="0" anchor="ctr"/>
           <a:lstStyle/>
           <a:p>
-            <a:pPr indent="0" marL="0">
+            <a:pPr marL="0" indent="0">
               <a:buNone/>
             </a:pPr>
             <a:r>
@@ -15974,7 +15726,7 @@
           <a:bodyPr wrap="square" lIns="0" tIns="0" rIns="0" bIns="0" rtlCol="0" anchor="t"/>
           <a:lstStyle/>
           <a:p>
-            <a:pPr indent="0" marL="0">
+            <a:pPr marL="0" indent="0">
               <a:lnSpc>
                 <a:spcPct val="108000"/>
               </a:lnSpc>
@@ -16058,7 +15810,7 @@
           <a:bodyPr wrap="square" lIns="0" tIns="0" rIns="0" bIns="0" rtlCol="0" anchor="ctr"/>
           <a:lstStyle/>
           <a:p>
-            <a:pPr algn="ctr" indent="0" marL="0">
+            <a:pPr marL="0" indent="0" algn="ctr">
               <a:buNone/>
             </a:pPr>
             <a:r>
@@ -16097,7 +15849,7 @@
           <a:bodyPr wrap="square" lIns="0" tIns="0" rIns="0" bIns="0" rtlCol="0" anchor="ctr"/>
           <a:lstStyle/>
           <a:p>
-            <a:pPr indent="0" marL="0">
+            <a:pPr marL="0" indent="0">
               <a:buNone/>
             </a:pPr>
             <a:r>
@@ -16136,7 +15888,7 @@
           <a:bodyPr wrap="square" lIns="0" tIns="0" rIns="0" bIns="0" rtlCol="0" anchor="t"/>
           <a:lstStyle/>
           <a:p>
-            <a:pPr indent="0" marL="0">
+            <a:pPr marL="0" indent="0">
               <a:lnSpc>
                 <a:spcPct val="108000"/>
               </a:lnSpc>
@@ -16200,11 +15952,11 @@
           <a:bodyPr wrap="square" lIns="0" tIns="0" rIns="0" bIns="0" rtlCol="0" anchor="ctr"/>
           <a:lstStyle/>
           <a:p>
-            <a:pPr indent="0" marL="0">
-              <a:buNone/>
-            </a:pPr>
-            <a:r>
-              <a:rPr lang="en-US" sz="950" b="1" spc="150" kern="0" dirty="0">
+            <a:pPr marL="0" indent="0">
+              <a:buNone/>
+            </a:pPr>
+            <a:r>
+              <a:rPr lang="en-US" sz="950" b="1" kern="0" spc="150" dirty="0">
                 <a:solidFill>
                   <a:srgbClr val="FFFFFF"/>
                 </a:solidFill>
@@ -16239,7 +15991,7 @@
           <a:bodyPr wrap="square" lIns="0" tIns="0" rIns="0" bIns="0" rtlCol="0" anchor="ctr"/>
           <a:lstStyle/>
           <a:p>
-            <a:pPr indent="0" marL="0">
+            <a:pPr marL="0" indent="0">
               <a:lnSpc>
                 <a:spcPct val="112000"/>
               </a:lnSpc>
@@ -16262,7 +16014,7 @@
       </p:sp>
       <p:sp>
         <p:nvSpPr>
-          <p:cNvPr id="25" name="Slide Number Placeholder 0"/>
+          <p:cNvPr id="35" name="Slide Number Placeholder 0"/>
           <p:cNvSpPr>
             <a:spLocks noGrp="1"/>
           </p:cNvSpPr>
@@ -16280,7 +16032,7 @@
           </a:prstGeom>
           <a:extLst>
             <a:ext uri="{C572A759-6A51-4108-AA02-DFA0A04FC94B}">
-              <ma14:wrappingTextBoxFlag xmlns:ma14="http://schemas.microsoft.com/office/mac/drawingml/2011/main" val="0"/>
+              <ma14:wrappingTextBoxFlag xmlns="" xmlns:ma14="http://schemas.microsoft.com/office/mac/drawingml/2011/main" val="0"/>
             </a:ext>
           </a:extLst>
         </p:spPr>
@@ -16301,7 +16053,7 @@
           <a:p>
             <a:pPr algn="l"/>
             <a:fld id="{F7021451-1387-4CA6-816F-3879F97B5CBC}" type="slidenum">
-              <a:rPr b="0" lang="en-US"/>
+              <a:rPr lang="en-US" b="0"/>
               <a:t>21</a:t>
             </a:fld>
             <a:endParaRPr lang="en-US"/>
@@ -16376,7 +16128,7 @@
           <a:bodyPr wrap="square" lIns="0" tIns="0" rIns="0" bIns="0" rtlCol="0" anchor="ctr"/>
           <a:lstStyle/>
           <a:p>
-            <a:pPr indent="0" marL="0">
+            <a:pPr marL="0" indent="0">
               <a:buNone/>
             </a:pPr>
             <a:r>
@@ -16437,11 +16189,11 @@
           <a:bodyPr wrap="square" lIns="0" tIns="0" rIns="0" bIns="0" rtlCol="0" anchor="ctr"/>
           <a:lstStyle/>
           <a:p>
-            <a:pPr algn="ctr" indent="0" marL="0">
-              <a:buNone/>
-            </a:pPr>
-            <a:r>
-              <a:rPr lang="en-US" sz="900" b="1" spc="100" kern="0" dirty="0">
+            <a:pPr marL="0" indent="0" algn="ctr">
+              <a:buNone/>
+            </a:pPr>
+            <a:r>
+              <a:rPr lang="en-US" sz="900" b="1" kern="0" spc="100" dirty="0">
                 <a:solidFill>
                   <a:srgbClr val="FFFFFF"/>
                 </a:solidFill>
@@ -16457,14 +16209,14 @@
       </p:sp>
       <p:pic>
         <p:nvPicPr>
-          <p:cNvPr id="6" name="Image 0" descr="preencoded.png">    </p:cNvPr>
+          <p:cNvPr id="6" name="Image 0" descr="preencoded.png"/>
           <p:cNvPicPr>
             <a:picLocks noChangeAspect="1"/>
           </p:cNvPicPr>
           <p:nvPr/>
         </p:nvPicPr>
         <p:blipFill>
-          <a:blip r:embed="rId1"/>
+          <a:blip r:embed="rId3"/>
           <a:stretch>
             <a:fillRect/>
           </a:stretch>
@@ -16520,7 +16272,7 @@
           <a:bodyPr wrap="square" lIns="0" tIns="0" rIns="0" bIns="0" rtlCol="0" anchor="ctr"/>
           <a:lstStyle/>
           <a:p>
-            <a:pPr algn="ctr" indent="0" marL="0">
+            <a:pPr marL="0" indent="0" algn="ctr">
               <a:buNone/>
             </a:pPr>
             <a:r>
@@ -16559,7 +16311,7 @@
           <a:bodyPr wrap="square" lIns="0" tIns="0" rIns="0" bIns="0" rtlCol="0" anchor="ctr"/>
           <a:lstStyle/>
           <a:p>
-            <a:pPr indent="0" marL="0">
+            <a:pPr marL="0" indent="0">
               <a:buNone/>
             </a:pPr>
             <a:r>
@@ -16573,9 +16325,6 @@
               </a:rPr>
               <a:t>Побудувати ланцюг  </a:t>
             </a:r>
-            <a:pPr indent="0" marL="0">
-              <a:buNone/>
-            </a:pPr>
             <a:r>
               <a:rPr lang="en-US" sz="1200" dirty="0">
                 <a:solidFill>
@@ -16632,7 +16381,7 @@
           <a:bodyPr wrap="square" lIns="0" tIns="0" rIns="0" bIns="0" rtlCol="0" anchor="ctr"/>
           <a:lstStyle/>
           <a:p>
-            <a:pPr algn="ctr" indent="0" marL="0">
+            <a:pPr marL="0" indent="0" algn="ctr">
               <a:buNone/>
             </a:pPr>
             <a:r>
@@ -16671,7 +16420,7 @@
           <a:bodyPr wrap="square" lIns="0" tIns="0" rIns="0" bIns="0" rtlCol="0" anchor="ctr"/>
           <a:lstStyle/>
           <a:p>
-            <a:pPr indent="0" marL="0">
+            <a:pPr marL="0" indent="0">
               <a:buNone/>
             </a:pPr>
             <a:r>
@@ -16685,9 +16434,6 @@
               </a:rPr>
               <a:t>Довести інцидент до дна  </a:t>
             </a:r>
-            <a:pPr indent="0" marL="0">
-              <a:buNone/>
-            </a:pPr>
             <a:r>
               <a:rPr lang="en-US" sz="1200" dirty="0">
                 <a:solidFill>
@@ -16744,7 +16490,7 @@
           <a:bodyPr wrap="square" lIns="0" tIns="0" rIns="0" bIns="0" rtlCol="0" anchor="ctr"/>
           <a:lstStyle/>
           <a:p>
-            <a:pPr algn="ctr" indent="0" marL="0">
+            <a:pPr marL="0" indent="0" algn="ctr">
               <a:buNone/>
             </a:pPr>
             <a:r>
@@ -16783,7 +16529,7 @@
           <a:bodyPr wrap="square" lIns="0" tIns="0" rIns="0" bIns="0" rtlCol="0" anchor="ctr"/>
           <a:lstStyle/>
           <a:p>
-            <a:pPr indent="0" marL="0">
+            <a:pPr marL="0" indent="0">
               <a:buNone/>
             </a:pPr>
             <a:r>
@@ -16797,9 +16543,6 @@
               </a:rPr>
               <a:t>Перевірити слід  </a:t>
             </a:r>
-            <a:pPr indent="0" marL="0">
-              <a:buNone/>
-            </a:pPr>
             <a:r>
               <a:rPr lang="en-US" sz="1200" dirty="0">
                 <a:solidFill>
@@ -16856,7 +16599,7 @@
           <a:bodyPr wrap="square" lIns="0" tIns="0" rIns="0" bIns="0" rtlCol="0" anchor="ctr"/>
           <a:lstStyle/>
           <a:p>
-            <a:pPr algn="ctr" indent="0" marL="0">
+            <a:pPr marL="0" indent="0" algn="ctr">
               <a:buNone/>
             </a:pPr>
             <a:r>
@@ -16895,7 +16638,7 @@
           <a:bodyPr wrap="square" lIns="0" tIns="0" rIns="0" bIns="0" rtlCol="0" anchor="ctr"/>
           <a:lstStyle/>
           <a:p>
-            <a:pPr indent="0" marL="0">
+            <a:pPr marL="0" indent="0">
               <a:buNone/>
             </a:pPr>
             <a:r>
@@ -16909,9 +16652,6 @@
               </a:rPr>
               <a:t>Circuit breaker · опційно  </a:t>
             </a:r>
-            <a:pPr indent="0" marL="0">
-              <a:buNone/>
-            </a:pPr>
             <a:r>
               <a:rPr lang="en-US" sz="1200" dirty="0">
                 <a:solidFill>
@@ -16947,7 +16687,7 @@
           </a:prstGeom>
           <a:extLst>
             <a:ext uri="{C572A759-6A51-4108-AA02-DFA0A04FC94B}">
-              <ma14:wrappingTextBoxFlag xmlns:ma14="http://schemas.microsoft.com/office/mac/drawingml/2011/main" val="0"/>
+              <ma14:wrappingTextBoxFlag xmlns="" xmlns:ma14="http://schemas.microsoft.com/office/mac/drawingml/2011/main" val="0"/>
             </a:ext>
           </a:extLst>
         </p:spPr>
@@ -16968,7 +16708,7 @@
           <a:p>
             <a:pPr algn="l"/>
             <a:fld id="{F7021451-1387-4CA6-816F-3879F97B5CBC}" type="slidenum">
-              <a:rPr b="0" lang="en-US"/>
+              <a:rPr lang="en-US" b="0"/>
               <a:t>22</a:t>
             </a:fld>
             <a:endParaRPr lang="en-US"/>
@@ -17021,11 +16761,11 @@
           <a:bodyPr wrap="square" lIns="0" tIns="0" rIns="0" bIns="0" rtlCol="0" anchor="ctr"/>
           <a:lstStyle/>
           <a:p>
-            <a:pPr indent="0" marL="0">
-              <a:buNone/>
-            </a:pPr>
-            <a:r>
-              <a:rPr lang="en-US" sz="1200" b="1" spc="400" kern="0" dirty="0">
+            <a:pPr marL="0" indent="0">
+              <a:buNone/>
+            </a:pPr>
+            <a:r>
+              <a:rPr lang="en-US" sz="1200" b="1" kern="0" spc="400" dirty="0">
                 <a:solidFill>
                   <a:srgbClr val="FFFFFF"/>
                 </a:solidFill>
@@ -17060,7 +16800,7 @@
           <a:bodyPr wrap="square" lIns="0" tIns="0" rIns="0" bIns="0" rtlCol="0" anchor="ctr"/>
           <a:lstStyle/>
           <a:p>
-            <a:pPr indent="0" marL="0">
+            <a:pPr marL="0" indent="0">
               <a:buNone/>
             </a:pPr>
             <a:r>
@@ -17099,7 +16839,7 @@
           <a:bodyPr wrap="square" lIns="0" tIns="0" rIns="0" bIns="0" rtlCol="0" anchor="t"/>
           <a:lstStyle/>
           <a:p>
-            <a:pPr indent="0" marL="0">
+            <a:pPr marL="0" indent="0">
               <a:buNone/>
             </a:pPr>
             <a:r>
@@ -17185,7 +16925,7 @@
           <a:bodyPr wrap="square" lIns="0" tIns="0" rIns="0" bIns="0" rtlCol="0" anchor="ctr"/>
           <a:lstStyle/>
           <a:p>
-            <a:pPr indent="0" marL="0">
+            <a:pPr marL="0" indent="0">
               <a:buNone/>
             </a:pPr>
             <a:r>
@@ -17251,11 +16991,11 @@
           <a:bodyPr wrap="square" lIns="0" tIns="0" rIns="0" bIns="0" rtlCol="0" anchor="ctr"/>
           <a:lstStyle/>
           <a:p>
-            <a:pPr algn="ctr" indent="0" marL="0">
-              <a:buNone/>
-            </a:pPr>
-            <a:r>
-              <a:rPr lang="en-US" sz="900" b="1" spc="100" kern="0" dirty="0">
+            <a:pPr marL="0" indent="0" algn="ctr">
+              <a:buNone/>
+            </a:pPr>
+            <a:r>
+              <a:rPr lang="en-US" sz="900" b="1" kern="0" spc="100" dirty="0">
                 <a:solidFill>
                   <a:srgbClr val="1A4FBF"/>
                 </a:solidFill>
@@ -17271,14 +17011,14 @@
       </p:sp>
       <p:pic>
         <p:nvPicPr>
-          <p:cNvPr id="6" name="Image 0" descr="preencoded.png">    </p:cNvPr>
+          <p:cNvPr id="6" name="Image 0" descr="preencoded.png"/>
           <p:cNvPicPr>
             <a:picLocks noChangeAspect="1"/>
           </p:cNvPicPr>
           <p:nvPr/>
         </p:nvPicPr>
         <p:blipFill>
-          <a:blip r:embed="rId1"/>
+          <a:blip r:embed="rId3"/>
           <a:stretch>
             <a:fillRect/>
           </a:stretch>
@@ -17336,7 +17076,7 @@
           <a:bodyPr wrap="square" lIns="0" tIns="0" rIns="0" bIns="0" rtlCol="0" anchor="ctr"/>
           <a:lstStyle/>
           <a:p>
-            <a:pPr indent="0" marL="0">
+            <a:pPr marL="0" indent="0">
               <a:buNone/>
             </a:pPr>
             <a:r>
@@ -17375,7 +17115,7 @@
           <a:bodyPr wrap="square" lIns="0" tIns="0" rIns="0" bIns="0" rtlCol="0" anchor="t"/>
           <a:lstStyle/>
           <a:p>
-            <a:pPr indent="0" marL="0">
+            <a:pPr marL="0" indent="0">
               <a:lnSpc>
                 <a:spcPct val="108000"/>
               </a:lnSpc>
@@ -17439,7 +17179,7 @@
           <a:bodyPr wrap="square" lIns="0" tIns="0" rIns="0" bIns="0" rtlCol="0" anchor="ctr"/>
           <a:lstStyle/>
           <a:p>
-            <a:pPr indent="0" marL="0">
+            <a:pPr marL="0" indent="0">
               <a:buNone/>
             </a:pPr>
             <a:r>
@@ -17478,7 +17218,7 @@
           <a:bodyPr wrap="square" lIns="0" tIns="0" rIns="0" bIns="0" rtlCol="0" anchor="t"/>
           <a:lstStyle/>
           <a:p>
-            <a:pPr indent="0" marL="0">
+            <a:pPr marL="0" indent="0">
               <a:lnSpc>
                 <a:spcPct val="108000"/>
               </a:lnSpc>
@@ -17542,7 +17282,7 @@
           <a:bodyPr wrap="square" lIns="0" tIns="0" rIns="0" bIns="0" rtlCol="0" anchor="ctr"/>
           <a:lstStyle/>
           <a:p>
-            <a:pPr indent="0" marL="0">
+            <a:pPr marL="0" indent="0">
               <a:buNone/>
             </a:pPr>
             <a:r>
@@ -17581,7 +17321,7 @@
           <a:bodyPr wrap="square" lIns="0" tIns="0" rIns="0" bIns="0" rtlCol="0" anchor="t"/>
           <a:lstStyle/>
           <a:p>
-            <a:pPr indent="0" marL="0">
+            <a:pPr marL="0" indent="0">
               <a:lnSpc>
                 <a:spcPct val="108000"/>
               </a:lnSpc>
@@ -17650,11 +17390,11 @@
           <a:bodyPr wrap="square" lIns="0" tIns="0" rIns="0" bIns="0" rtlCol="0" anchor="ctr"/>
           <a:lstStyle/>
           <a:p>
-            <a:pPr indent="0" marL="0">
-              <a:buNone/>
-            </a:pPr>
-            <a:r>
-              <a:rPr lang="en-US" sz="950" b="1" spc="150" kern="0" dirty="0">
+            <a:pPr marL="0" indent="0">
+              <a:buNone/>
+            </a:pPr>
+            <a:r>
+              <a:rPr lang="en-US" sz="950" b="1" kern="0" spc="150" dirty="0">
                 <a:solidFill>
                   <a:srgbClr val="1A4FBF"/>
                 </a:solidFill>
@@ -17689,7 +17429,7 @@
           <a:bodyPr wrap="square" lIns="0" tIns="0" rIns="0" bIns="0" rtlCol="0" anchor="ctr"/>
           <a:lstStyle/>
           <a:p>
-            <a:pPr indent="0" marL="0">
+            <a:pPr marL="0" indent="0">
               <a:lnSpc>
                 <a:spcPct val="112000"/>
               </a:lnSpc>
@@ -17730,7 +17470,7 @@
           </a:prstGeom>
           <a:extLst>
             <a:ext uri="{C572A759-6A51-4108-AA02-DFA0A04FC94B}">
-              <ma14:wrappingTextBoxFlag xmlns:ma14="http://schemas.microsoft.com/office/mac/drawingml/2011/main" val="0"/>
+              <ma14:wrappingTextBoxFlag xmlns="" xmlns:ma14="http://schemas.microsoft.com/office/mac/drawingml/2011/main" val="0"/>
             </a:ext>
           </a:extLst>
         </p:spPr>
@@ -17751,7 +17491,7 @@
           <a:p>
             <a:pPr algn="l"/>
             <a:fld id="{F7021451-1387-4CA6-816F-3879F97B5CBC}" type="slidenum">
-              <a:rPr b="0" lang="en-US"/>
+              <a:rPr lang="en-US" b="0"/>
               <a:t>24</a:t>
             </a:fld>
             <a:endParaRPr lang="en-US"/>
@@ -17826,7 +17566,7 @@
           <a:bodyPr wrap="square" lIns="0" tIns="0" rIns="0" bIns="0" rtlCol="0" anchor="ctr"/>
           <a:lstStyle/>
           <a:p>
-            <a:pPr indent="0" marL="0">
+            <a:pPr marL="0" indent="0">
               <a:buNone/>
             </a:pPr>
             <a:r>
@@ -17892,11 +17632,11 @@
           <a:bodyPr wrap="square" lIns="0" tIns="0" rIns="0" bIns="0" rtlCol="0" anchor="ctr"/>
           <a:lstStyle/>
           <a:p>
-            <a:pPr algn="ctr" indent="0" marL="0">
-              <a:buNone/>
-            </a:pPr>
-            <a:r>
-              <a:rPr lang="en-US" sz="900" b="1" spc="100" kern="0" dirty="0">
+            <a:pPr marL="0" indent="0" algn="ctr">
+              <a:buNone/>
+            </a:pPr>
+            <a:r>
+              <a:rPr lang="en-US" sz="900" b="1" kern="0" spc="100" dirty="0">
                 <a:solidFill>
                   <a:srgbClr val="1A4FBF"/>
                 </a:solidFill>
@@ -17912,14 +17652,14 @@
       </p:sp>
       <p:pic>
         <p:nvPicPr>
-          <p:cNvPr id="6" name="Image 0" descr="preencoded.png">    </p:cNvPr>
+          <p:cNvPr id="6" name="Image 0" descr="preencoded.png"/>
           <p:cNvPicPr>
             <a:picLocks noChangeAspect="1"/>
           </p:cNvPicPr>
           <p:nvPr/>
         </p:nvPicPr>
         <p:blipFill>
-          <a:blip r:embed="rId1"/>
+          <a:blip r:embed="rId3"/>
           <a:stretch>
             <a:fillRect/>
           </a:stretch>
@@ -18049,7 +17789,7 @@
           <a:bodyPr wrap="square" lIns="0" tIns="0" rIns="0" bIns="0" rtlCol="0" anchor="ctr"/>
           <a:lstStyle/>
           <a:p>
-            <a:pPr indent="0" marL="0">
+            <a:pPr marL="0" indent="0">
               <a:buNone/>
             </a:pPr>
             <a:r>
@@ -18155,7 +17895,7 @@
           <a:bodyPr wrap="square" lIns="0" tIns="0" rIns="0" bIns="0" rtlCol="0" anchor="ctr"/>
           <a:lstStyle/>
           <a:p>
-            <a:pPr indent="0" marL="0">
+            <a:pPr marL="0" indent="0">
               <a:buNone/>
             </a:pPr>
             <a:r>
@@ -18261,7 +18001,7 @@
           <a:bodyPr wrap="square" lIns="0" tIns="0" rIns="0" bIns="0" rtlCol="0" anchor="ctr"/>
           <a:lstStyle/>
           <a:p>
-            <a:pPr indent="0" marL="0">
+            <a:pPr marL="0" indent="0">
               <a:buNone/>
             </a:pPr>
             <a:r>
@@ -18367,7 +18107,7 @@
           <a:bodyPr wrap="square" lIns="0" tIns="0" rIns="0" bIns="0" rtlCol="0" anchor="ctr"/>
           <a:lstStyle/>
           <a:p>
-            <a:pPr indent="0" marL="0">
+            <a:pPr marL="0" indent="0">
               <a:buNone/>
             </a:pPr>
             <a:r>
@@ -18406,7 +18146,7 @@
           <a:bodyPr wrap="square" lIns="0" tIns="0" rIns="0" bIns="0" rtlCol="0" anchor="ctr"/>
           <a:lstStyle/>
           <a:p>
-            <a:pPr indent="0" marL="0">
+            <a:pPr marL="0" indent="0">
               <a:buNone/>
             </a:pPr>
             <a:r>
@@ -18444,7 +18184,7 @@
           </a:prstGeom>
           <a:extLst>
             <a:ext uri="{C572A759-6A51-4108-AA02-DFA0A04FC94B}">
-              <ma14:wrappingTextBoxFlag xmlns:ma14="http://schemas.microsoft.com/office/mac/drawingml/2011/main" val="0"/>
+              <ma14:wrappingTextBoxFlag xmlns="" xmlns:ma14="http://schemas.microsoft.com/office/mac/drawingml/2011/main" val="0"/>
             </a:ext>
           </a:extLst>
         </p:spPr>
@@ -18465,7 +18205,7 @@
           <a:p>
             <a:pPr algn="l"/>
             <a:fld id="{F7021451-1387-4CA6-816F-3879F97B5CBC}" type="slidenum">
-              <a:rPr b="0" lang="en-US"/>
+              <a:rPr lang="en-US" b="0"/>
               <a:t>25</a:t>
             </a:fld>
             <a:endParaRPr lang="en-US"/>
@@ -18540,7 +18280,7 @@
           <a:bodyPr wrap="square" lIns="0" tIns="0" rIns="0" bIns="0" rtlCol="0" anchor="ctr"/>
           <a:lstStyle/>
           <a:p>
-            <a:pPr indent="0" marL="0">
+            <a:pPr marL="0" indent="0">
               <a:buNone/>
             </a:pPr>
             <a:r>
@@ -18606,11 +18346,11 @@
           <a:bodyPr wrap="square" lIns="0" tIns="0" rIns="0" bIns="0" rtlCol="0" anchor="ctr"/>
           <a:lstStyle/>
           <a:p>
-            <a:pPr algn="ctr" indent="0" marL="0">
-              <a:buNone/>
-            </a:pPr>
-            <a:r>
-              <a:rPr lang="en-US" sz="900" b="1" spc="100" kern="0" dirty="0">
+            <a:pPr marL="0" indent="0" algn="ctr">
+              <a:buNone/>
+            </a:pPr>
+            <a:r>
+              <a:rPr lang="en-US" sz="900" b="1" kern="0" spc="100" dirty="0">
                 <a:solidFill>
                   <a:srgbClr val="1A4FBF"/>
                 </a:solidFill>
@@ -18626,14 +18366,14 @@
       </p:sp>
       <p:pic>
         <p:nvPicPr>
-          <p:cNvPr id="6" name="Image 0" descr="preencoded.png">    </p:cNvPr>
+          <p:cNvPr id="6" name="Image 0" descr="preencoded.png"/>
           <p:cNvPicPr>
             <a:picLocks noChangeAspect="1"/>
           </p:cNvPicPr>
           <p:nvPr/>
         </p:nvPicPr>
         <p:blipFill>
-          <a:blip r:embed="rId1"/>
+          <a:blip r:embed="rId3"/>
           <a:stretch>
             <a:fillRect/>
           </a:stretch>
@@ -18761,7 +18501,7 @@
           <a:bodyPr wrap="square" lIns="0" tIns="0" rIns="0" bIns="0" rtlCol="0" anchor="ctr"/>
           <a:lstStyle/>
           <a:p>
-            <a:pPr indent="0" marL="0">
+            <a:pPr marL="0" indent="0">
               <a:buNone/>
             </a:pPr>
             <a:r>
@@ -18775,9 +18515,6 @@
               </a:rPr>
               <a:t>Retry без паузи і без стелі   </a:t>
             </a:r>
-            <a:pPr indent="0" marL="0">
-              <a:buNone/>
-            </a:pPr>
             <a:r>
               <a:rPr lang="en-US" sz="1150" dirty="0">
                 <a:solidFill>
@@ -18906,7 +18643,7 @@
           <a:bodyPr wrap="square" lIns="0" tIns="0" rIns="0" bIns="0" rtlCol="0" anchor="ctr"/>
           <a:lstStyle/>
           <a:p>
-            <a:pPr indent="0" marL="0">
+            <a:pPr marL="0" indent="0">
               <a:buNone/>
             </a:pPr>
             <a:r>
@@ -18920,9 +18657,6 @@
               </a:rPr>
               <a:t>Заглушка зі статусом 200   </a:t>
             </a:r>
-            <a:pPr indent="0" marL="0">
-              <a:buNone/>
-            </a:pPr>
             <a:r>
               <a:rPr lang="en-US" sz="1150" dirty="0">
                 <a:solidFill>
@@ -19051,7 +18785,7 @@
           <a:bodyPr wrap="square" lIns="0" tIns="0" rIns="0" bIns="0" rtlCol="0" anchor="ctr"/>
           <a:lstStyle/>
           <a:p>
-            <a:pPr indent="0" marL="0">
+            <a:pPr marL="0" indent="0">
               <a:buNone/>
             </a:pPr>
             <a:r>
@@ -19065,9 +18799,6 @@
               </a:rPr>
               <a:t>Ретраї в кількох шарах одразу   </a:t>
             </a:r>
-            <a:pPr indent="0" marL="0">
-              <a:buNone/>
-            </a:pPr>
             <a:r>
               <a:rPr lang="en-US" sz="1150" dirty="0">
                 <a:solidFill>
@@ -19196,7 +18927,7 @@
           <a:bodyPr wrap="square" lIns="0" tIns="0" rIns="0" bIns="0" rtlCol="0" anchor="ctr"/>
           <a:lstStyle/>
           <a:p>
-            <a:pPr indent="0" marL="0">
+            <a:pPr marL="0" indent="0">
               <a:buNone/>
             </a:pPr>
             <a:r>
@@ -19210,9 +18941,6 @@
               </a:rPr>
               <a:t>Breaker без half-open   </a:t>
             </a:r>
-            <a:pPr indent="0" marL="0">
-              <a:buNone/>
-            </a:pPr>
             <a:r>
               <a:rPr lang="en-US" sz="1150" dirty="0">
                 <a:solidFill>
@@ -19341,7 +19069,7 @@
           <a:bodyPr wrap="square" lIns="0" tIns="0" rIns="0" bIns="0" rtlCol="0" anchor="ctr"/>
           <a:lstStyle/>
           <a:p>
-            <a:pPr indent="0" marL="0">
+            <a:pPr marL="0" indent="0">
               <a:buNone/>
             </a:pPr>
             <a:r>
@@ -19355,9 +19083,6 @@
               </a:rPr>
               <a:t>Fallback без лічильника   </a:t>
             </a:r>
-            <a:pPr indent="0" marL="0">
-              <a:buNone/>
-            </a:pPr>
             <a:r>
               <a:rPr lang="en-US" sz="1150" dirty="0">
                 <a:solidFill>
@@ -19375,7 +19100,7 @@
       </p:sp>
       <p:sp>
         <p:nvSpPr>
-          <p:cNvPr id="25" name="Slide Number Placeholder 0"/>
+          <p:cNvPr id="32" name="Slide Number Placeholder 0"/>
           <p:cNvSpPr>
             <a:spLocks noGrp="1"/>
           </p:cNvSpPr>
@@ -19393,7 +19118,7 @@
           </a:prstGeom>
           <a:extLst>
             <a:ext uri="{C572A759-6A51-4108-AA02-DFA0A04FC94B}">
-              <ma14:wrappingTextBoxFlag xmlns:ma14="http://schemas.microsoft.com/office/mac/drawingml/2011/main" val="0"/>
+              <ma14:wrappingTextBoxFlag xmlns="" xmlns:ma14="http://schemas.microsoft.com/office/mac/drawingml/2011/main" val="0"/>
             </a:ext>
           </a:extLst>
         </p:spPr>
@@ -19414,7 +19139,7 @@
           <a:p>
             <a:pPr algn="l"/>
             <a:fld id="{F7021451-1387-4CA6-816F-3879F97B5CBC}" type="slidenum">
-              <a:rPr b="0" lang="en-US"/>
+              <a:rPr lang="en-US" b="0"/>
               <a:t>26</a:t>
             </a:fld>
             <a:endParaRPr lang="en-US"/>
@@ -19489,7 +19214,7 @@
           <a:bodyPr wrap="square" lIns="0" tIns="0" rIns="0" bIns="0" rtlCol="0" anchor="ctr"/>
           <a:lstStyle/>
           <a:p>
-            <a:pPr indent="0" marL="0">
+            <a:pPr marL="0" indent="0">
               <a:buNone/>
             </a:pPr>
             <a:r>
@@ -19550,11 +19275,11 @@
           <a:bodyPr wrap="square" lIns="0" tIns="0" rIns="0" bIns="0" rtlCol="0" anchor="ctr"/>
           <a:lstStyle/>
           <a:p>
-            <a:pPr algn="ctr" indent="0" marL="0">
-              <a:buNone/>
-            </a:pPr>
-            <a:r>
-              <a:rPr lang="en-US" sz="900" b="1" spc="100" kern="0" dirty="0">
+            <a:pPr marL="0" indent="0" algn="ctr">
+              <a:buNone/>
+            </a:pPr>
+            <a:r>
+              <a:rPr lang="en-US" sz="900" b="1" kern="0" spc="100" dirty="0">
                 <a:solidFill>
                   <a:srgbClr val="FFFFFF"/>
                 </a:solidFill>
@@ -19570,14 +19295,14 @@
       </p:sp>
       <p:pic>
         <p:nvPicPr>
-          <p:cNvPr id="6" name="Image 0" descr="preencoded.png">    </p:cNvPr>
+          <p:cNvPr id="6" name="Image 0" descr="preencoded.png"/>
           <p:cNvPicPr>
             <a:picLocks noChangeAspect="1"/>
           </p:cNvPicPr>
           <p:nvPr/>
         </p:nvPicPr>
         <p:blipFill>
-          <a:blip r:embed="rId1"/>
+          <a:blip r:embed="rId3"/>
           <a:stretch>
             <a:fillRect/>
           </a:stretch>
@@ -19635,7 +19360,7 @@
           <a:bodyPr wrap="square" lIns="0" tIns="0" rIns="0" bIns="0" rtlCol="0" anchor="ctr"/>
           <a:lstStyle/>
           <a:p>
-            <a:pPr indent="0" marL="0">
+            <a:pPr marL="0" indent="0">
               <a:buNone/>
             </a:pPr>
             <a:r>
@@ -19674,7 +19399,7 @@
           <a:bodyPr wrap="square" lIns="0" tIns="0" rIns="0" bIns="0" rtlCol="0" anchor="t"/>
           <a:lstStyle/>
           <a:p>
-            <a:pPr indent="0" marL="0">
+            <a:pPr marL="0" indent="0">
               <a:lnSpc>
                 <a:spcPct val="108000"/>
               </a:lnSpc>
@@ -19694,7 +19419,7 @@
             <a:endParaRPr lang="en-US" sz="1200" dirty="0"/>
           </a:p>
           <a:p>
-            <a:pPr indent="0" marL="0">
+            <a:pPr marL="0" indent="0">
               <a:lnSpc>
                 <a:spcPct val="108000"/>
               </a:lnSpc>
@@ -19703,7 +19428,7 @@
             <a:endParaRPr lang="en-US" sz="1200" dirty="0"/>
           </a:p>
           <a:p>
-            <a:pPr indent="0" marL="0">
+            <a:pPr marL="0" indent="0">
               <a:lnSpc>
                 <a:spcPct val="108000"/>
               </a:lnSpc>
@@ -19723,7 +19448,7 @@
             <a:endParaRPr lang="en-US" sz="1200" dirty="0"/>
           </a:p>
           <a:p>
-            <a:pPr indent="0" marL="0">
+            <a:pPr marL="0" indent="0">
               <a:lnSpc>
                 <a:spcPct val="108000"/>
               </a:lnSpc>
@@ -19732,7 +19457,7 @@
             <a:endParaRPr lang="en-US" sz="1200" dirty="0"/>
           </a:p>
           <a:p>
-            <a:pPr indent="0" marL="0">
+            <a:pPr marL="0" indent="0">
               <a:lnSpc>
                 <a:spcPct val="108000"/>
               </a:lnSpc>
@@ -19796,7 +19521,7 @@
           <a:bodyPr wrap="square" lIns="0" tIns="0" rIns="0" bIns="0" rtlCol="0" anchor="ctr"/>
           <a:lstStyle/>
           <a:p>
-            <a:pPr indent="0" marL="0">
+            <a:pPr marL="0" indent="0">
               <a:buNone/>
             </a:pPr>
             <a:r>
@@ -19835,7 +19560,7 @@
           <a:bodyPr wrap="square" lIns="0" tIns="0" rIns="0" bIns="0" rtlCol="0" anchor="t"/>
           <a:lstStyle/>
           <a:p>
-            <a:pPr indent="0" marL="0">
+            <a:pPr marL="0" indent="0">
               <a:lnSpc>
                 <a:spcPct val="108000"/>
               </a:lnSpc>
@@ -19904,7 +19629,7 @@
           <a:bodyPr wrap="square" lIns="0" tIns="0" rIns="0" bIns="0" rtlCol="0" anchor="ctr"/>
           <a:lstStyle/>
           <a:p>
-            <a:pPr indent="0" marL="0">
+            <a:pPr marL="0" indent="0">
               <a:buNone/>
             </a:pPr>
             <a:r>
@@ -19943,7 +19668,7 @@
           <a:bodyPr wrap="square" lIns="0" tIns="0" rIns="0" bIns="0" rtlCol="0" anchor="t"/>
           <a:lstStyle/>
           <a:p>
-            <a:pPr indent="0" marL="0">
+            <a:pPr marL="0" indent="0">
               <a:buNone/>
             </a:pPr>
             <a:r>
@@ -19981,7 +19706,7 @@
           </a:prstGeom>
           <a:extLst>
             <a:ext uri="{C572A759-6A51-4108-AA02-DFA0A04FC94B}">
-              <ma14:wrappingTextBoxFlag xmlns:ma14="http://schemas.microsoft.com/office/mac/drawingml/2011/main" val="0"/>
+              <ma14:wrappingTextBoxFlag xmlns="" xmlns:ma14="http://schemas.microsoft.com/office/mac/drawingml/2011/main" val="0"/>
             </a:ext>
           </a:extLst>
         </p:spPr>
@@ -20002,7 +19727,7 @@
           <a:p>
             <a:pPr algn="l"/>
             <a:fld id="{F7021451-1387-4CA6-816F-3879F97B5CBC}" type="slidenum">
-              <a:rPr b="0" lang="en-US"/>
+              <a:rPr lang="en-US" b="0"/>
               <a:t>27</a:t>
             </a:fld>
             <a:endParaRPr lang="en-US"/>
@@ -20055,11 +19780,11 @@
           <a:bodyPr wrap="square" lIns="0" tIns="0" rIns="0" bIns="0" rtlCol="0" anchor="ctr"/>
           <a:lstStyle/>
           <a:p>
-            <a:pPr indent="0" marL="0">
-              <a:buNone/>
-            </a:pPr>
-            <a:r>
-              <a:rPr lang="en-US" sz="1200" b="1" spc="400" kern="0" dirty="0">
+            <a:pPr marL="0" indent="0">
+              <a:buNone/>
+            </a:pPr>
+            <a:r>
+              <a:rPr lang="en-US" sz="1200" b="1" kern="0" spc="400" dirty="0">
                 <a:solidFill>
                   <a:srgbClr val="FFFFFF"/>
                 </a:solidFill>
@@ -20094,11 +19819,11 @@
           <a:bodyPr wrap="square" lIns="0" tIns="0" rIns="0" bIns="0" rtlCol="0" anchor="ctr"/>
           <a:lstStyle/>
           <a:p>
-            <a:pPr indent="0" marL="0">
-              <a:buNone/>
-            </a:pPr>
-            <a:r>
-              <a:rPr lang="en-US" sz="1100" b="1" spc="300" kern="0" dirty="0">
+            <a:pPr marL="0" indent="0">
+              <a:buNone/>
+            </a:pPr>
+            <a:r>
+              <a:rPr lang="en-US" sz="1100" b="1" kern="0" spc="300" dirty="0">
                 <a:solidFill>
                   <a:srgbClr val="C4B3F5"/>
                 </a:solidFill>
@@ -20153,7 +19878,7 @@
           <a:bodyPr wrap="square" lIns="0" tIns="0" rIns="0" bIns="0" rtlCol="0" anchor="t"/>
           <a:lstStyle/>
           <a:p>
-            <a:pPr indent="0" marL="0">
+            <a:pPr marL="0" indent="0">
               <a:lnSpc>
                 <a:spcPct val="110000"/>
               </a:lnSpc>
@@ -20215,7 +19940,7 @@
           <a:bodyPr wrap="square" lIns="0" tIns="0" rIns="0" bIns="0" rtlCol="0" anchor="t"/>
           <a:lstStyle/>
           <a:p>
-            <a:pPr indent="0" marL="0">
+            <a:pPr marL="0" indent="0">
               <a:lnSpc>
                 <a:spcPct val="110000"/>
               </a:lnSpc>
@@ -20277,7 +20002,7 @@
           <a:bodyPr wrap="square" lIns="0" tIns="0" rIns="0" bIns="0" rtlCol="0" anchor="t"/>
           <a:lstStyle/>
           <a:p>
-            <a:pPr indent="0" marL="0">
+            <a:pPr marL="0" indent="0">
               <a:lnSpc>
                 <a:spcPct val="110000"/>
               </a:lnSpc>
@@ -20339,7 +20064,7 @@
           <a:bodyPr wrap="square" lIns="0" tIns="0" rIns="0" bIns="0" rtlCol="0" anchor="t"/>
           <a:lstStyle/>
           <a:p>
-            <a:pPr indent="0" marL="0">
+            <a:pPr marL="0" indent="0">
               <a:lnSpc>
                 <a:spcPct val="110000"/>
               </a:lnSpc>
@@ -20401,7 +20126,7 @@
           <a:bodyPr wrap="square" lIns="0" tIns="0" rIns="0" bIns="0" rtlCol="0" anchor="t"/>
           <a:lstStyle/>
           <a:p>
-            <a:pPr indent="0" marL="0">
+            <a:pPr marL="0" indent="0">
               <a:lnSpc>
                 <a:spcPct val="110000"/>
               </a:lnSpc>
@@ -20470,7 +20195,7 @@
           <a:bodyPr wrap="square" lIns="0" tIns="0" rIns="0" bIns="0" rtlCol="0" anchor="ctr"/>
           <a:lstStyle/>
           <a:p>
-            <a:pPr indent="0" marL="0">
+            <a:pPr marL="0" indent="0">
               <a:buNone/>
             </a:pPr>
             <a:r>
@@ -20509,7 +20234,7 @@
           <a:bodyPr wrap="square" lIns="0" tIns="0" rIns="0" bIns="0" rtlCol="0" anchor="t"/>
           <a:lstStyle/>
           <a:p>
-            <a:pPr indent="0" marL="0">
+            <a:pPr marL="0" indent="0">
               <a:lnSpc>
                 <a:spcPct val="115000"/>
               </a:lnSpc>
@@ -20576,11 +20301,11 @@
           <a:bodyPr wrap="square" lIns="0" tIns="0" rIns="0" bIns="0" rtlCol="0" anchor="ctr"/>
           <a:lstStyle/>
           <a:p>
-            <a:pPr indent="0" marL="0">
-              <a:buNone/>
-            </a:pPr>
-            <a:r>
-              <a:rPr lang="en-US" sz="1200" b="1" spc="400" kern="0" dirty="0">
+            <a:pPr marL="0" indent="0">
+              <a:buNone/>
+            </a:pPr>
+            <a:r>
+              <a:rPr lang="en-US" sz="1200" b="1" kern="0" spc="400" dirty="0">
                 <a:solidFill>
                   <a:srgbClr val="FFFFFF"/>
                 </a:solidFill>
@@ -20615,7 +20340,7 @@
           <a:bodyPr wrap="square" lIns="0" tIns="0" rIns="0" bIns="0" rtlCol="0" anchor="ctr"/>
           <a:lstStyle/>
           <a:p>
-            <a:pPr indent="0" marL="0">
+            <a:pPr marL="0" indent="0">
               <a:buNone/>
             </a:pPr>
             <a:r>
@@ -20701,7 +20426,7 @@
           <a:bodyPr wrap="square" lIns="0" tIns="0" rIns="0" bIns="0" rtlCol="0" anchor="ctr"/>
           <a:lstStyle/>
           <a:p>
-            <a:pPr indent="0" marL="0">
+            <a:pPr marL="0" indent="0">
               <a:buNone/>
             </a:pPr>
             <a:r>
@@ -20767,11 +20492,11 @@
           <a:bodyPr wrap="square" lIns="0" tIns="0" rIns="0" bIns="0" rtlCol="0" anchor="ctr"/>
           <a:lstStyle/>
           <a:p>
-            <a:pPr algn="ctr" indent="0" marL="0">
-              <a:buNone/>
-            </a:pPr>
-            <a:r>
-              <a:rPr lang="en-US" sz="900" b="1" spc="100" kern="0" dirty="0">
+            <a:pPr marL="0" indent="0" algn="ctr">
+              <a:buNone/>
+            </a:pPr>
+            <a:r>
+              <a:rPr lang="en-US" sz="900" b="1" kern="0" spc="100" dirty="0">
                 <a:solidFill>
                   <a:srgbClr val="5A05F4"/>
                 </a:solidFill>
@@ -20787,14 +20512,14 @@
       </p:sp>
       <p:pic>
         <p:nvPicPr>
-          <p:cNvPr id="6" name="Image 0" descr="preencoded.png">    </p:cNvPr>
+          <p:cNvPr id="6" name="Image 0" descr="preencoded.png"/>
           <p:cNvPicPr>
             <a:picLocks noChangeAspect="1"/>
           </p:cNvPicPr>
           <p:nvPr/>
         </p:nvPicPr>
         <p:blipFill>
-          <a:blip r:embed="rId1"/>
+          <a:blip r:embed="rId3"/>
           <a:stretch>
             <a:fillRect/>
           </a:stretch>
@@ -20872,7 +20597,7 @@
           <a:bodyPr wrap="square" lIns="0" tIns="0" rIns="0" bIns="0" rtlCol="0" anchor="ctr"/>
           <a:lstStyle/>
           <a:p>
-            <a:pPr algn="ctr" indent="0" marL="0">
+            <a:pPr marL="0" indent="0" algn="ctr">
               <a:buNone/>
             </a:pPr>
             <a:r>
@@ -20911,7 +20636,7 @@
           <a:bodyPr wrap="square" lIns="0" tIns="0" rIns="0" bIns="0" rtlCol="0" anchor="ctr"/>
           <a:lstStyle/>
           <a:p>
-            <a:pPr indent="0" marL="0">
+            <a:pPr marL="0" indent="0">
               <a:buNone/>
             </a:pPr>
             <a:r>
@@ -20992,7 +20717,7 @@
           <a:bodyPr wrap="square" lIns="0" tIns="0" rIns="0" bIns="0" rtlCol="0" anchor="ctr"/>
           <a:lstStyle/>
           <a:p>
-            <a:pPr algn="ctr" indent="0" marL="0">
+            <a:pPr marL="0" indent="0" algn="ctr">
               <a:buNone/>
             </a:pPr>
             <a:r>
@@ -21031,7 +20756,7 @@
           <a:bodyPr wrap="square" lIns="0" tIns="0" rIns="0" bIns="0" rtlCol="0" anchor="ctr"/>
           <a:lstStyle/>
           <a:p>
-            <a:pPr indent="0" marL="0">
+            <a:pPr marL="0" indent="0">
               <a:buNone/>
             </a:pPr>
             <a:r>
@@ -21112,7 +20837,7 @@
           <a:bodyPr wrap="square" lIns="0" tIns="0" rIns="0" bIns="0" rtlCol="0" anchor="ctr"/>
           <a:lstStyle/>
           <a:p>
-            <a:pPr algn="ctr" indent="0" marL="0">
+            <a:pPr marL="0" indent="0" algn="ctr">
               <a:buNone/>
             </a:pPr>
             <a:r>
@@ -21151,7 +20876,7 @@
           <a:bodyPr wrap="square" lIns="0" tIns="0" rIns="0" bIns="0" rtlCol="0" anchor="ctr"/>
           <a:lstStyle/>
           <a:p>
-            <a:pPr indent="0" marL="0">
+            <a:pPr marL="0" indent="0">
               <a:buNone/>
             </a:pPr>
             <a:r>
@@ -21232,7 +20957,7 @@
           <a:bodyPr wrap="square" lIns="0" tIns="0" rIns="0" bIns="0" rtlCol="0" anchor="ctr"/>
           <a:lstStyle/>
           <a:p>
-            <a:pPr algn="ctr" indent="0" marL="0">
+            <a:pPr marL="0" indent="0" algn="ctr">
               <a:buNone/>
             </a:pPr>
             <a:r>
@@ -21271,7 +20996,7 @@
           <a:bodyPr wrap="square" lIns="0" tIns="0" rIns="0" bIns="0" rtlCol="0" anchor="ctr"/>
           <a:lstStyle/>
           <a:p>
-            <a:pPr indent="0" marL="0">
+            <a:pPr marL="0" indent="0">
               <a:buNone/>
             </a:pPr>
             <a:r>
@@ -21352,7 +21077,7 @@
           <a:bodyPr wrap="square" lIns="0" tIns="0" rIns="0" bIns="0" rtlCol="0" anchor="ctr"/>
           <a:lstStyle/>
           <a:p>
-            <a:pPr algn="ctr" indent="0" marL="0">
+            <a:pPr marL="0" indent="0" algn="ctr">
               <a:buNone/>
             </a:pPr>
             <a:r>
@@ -21391,7 +21116,7 @@
           <a:bodyPr wrap="square" lIns="0" tIns="0" rIns="0" bIns="0" rtlCol="0" anchor="ctr"/>
           <a:lstStyle/>
           <a:p>
-            <a:pPr indent="0" marL="0">
+            <a:pPr marL="0" indent="0">
               <a:buNone/>
             </a:pPr>
             <a:r>
@@ -21472,7 +21197,7 @@
           <a:bodyPr wrap="square" lIns="0" tIns="0" rIns="0" bIns="0" rtlCol="0" anchor="ctr"/>
           <a:lstStyle/>
           <a:p>
-            <a:pPr algn="ctr" indent="0" marL="0">
+            <a:pPr marL="0" indent="0" algn="ctr">
               <a:buNone/>
             </a:pPr>
             <a:r>
@@ -21511,7 +21236,7 @@
           <a:bodyPr wrap="square" lIns="0" tIns="0" rIns="0" bIns="0" rtlCol="0" anchor="ctr"/>
           <a:lstStyle/>
           <a:p>
-            <a:pPr indent="0" marL="0">
+            <a:pPr marL="0" indent="0">
               <a:buNone/>
             </a:pPr>
             <a:r>
@@ -21592,7 +21317,7 @@
           <a:bodyPr wrap="square" lIns="0" tIns="0" rIns="0" bIns="0" rtlCol="0" anchor="ctr"/>
           <a:lstStyle/>
           <a:p>
-            <a:pPr algn="ctr" indent="0" marL="0">
+            <a:pPr marL="0" indent="0" algn="ctr">
               <a:buNone/>
             </a:pPr>
             <a:r>
@@ -21631,7 +21356,7 @@
           <a:bodyPr wrap="square" lIns="0" tIns="0" rIns="0" bIns="0" rtlCol="0" anchor="ctr"/>
           <a:lstStyle/>
           <a:p>
-            <a:pPr indent="0" marL="0">
+            <a:pPr marL="0" indent="0">
               <a:buNone/>
             </a:pPr>
             <a:r>
@@ -21712,7 +21437,7 @@
           <a:bodyPr wrap="square" lIns="0" tIns="0" rIns="0" bIns="0" rtlCol="0" anchor="ctr"/>
           <a:lstStyle/>
           <a:p>
-            <a:pPr algn="ctr" indent="0" marL="0">
+            <a:pPr marL="0" indent="0" algn="ctr">
               <a:buNone/>
             </a:pPr>
             <a:r>
@@ -21751,7 +21476,7 @@
           <a:bodyPr wrap="square" lIns="0" tIns="0" rIns="0" bIns="0" rtlCol="0" anchor="ctr"/>
           <a:lstStyle/>
           <a:p>
-            <a:pPr indent="0" marL="0">
+            <a:pPr marL="0" indent="0">
               <a:buNone/>
             </a:pPr>
             <a:r>
@@ -21832,7 +21557,7 @@
           <a:bodyPr wrap="square" lIns="0" tIns="0" rIns="0" bIns="0" rtlCol="0" anchor="ctr"/>
           <a:lstStyle/>
           <a:p>
-            <a:pPr algn="ctr" indent="0" marL="0">
+            <a:pPr marL="0" indent="0" algn="ctr">
               <a:buNone/>
             </a:pPr>
             <a:r>
@@ -21871,7 +21596,7 @@
           <a:bodyPr wrap="square" lIns="0" tIns="0" rIns="0" bIns="0" rtlCol="0" anchor="ctr"/>
           <a:lstStyle/>
           <a:p>
-            <a:pPr indent="0" marL="0">
+            <a:pPr marL="0" indent="0">
               <a:buNone/>
             </a:pPr>
             <a:r>
@@ -21952,7 +21677,7 @@
           <a:bodyPr wrap="square" lIns="0" tIns="0" rIns="0" bIns="0" rtlCol="0" anchor="ctr"/>
           <a:lstStyle/>
           <a:p>
-            <a:pPr algn="ctr" indent="0" marL="0">
+            <a:pPr marL="0" indent="0" algn="ctr">
               <a:buNone/>
             </a:pPr>
             <a:r>
@@ -21991,7 +21716,7 @@
           <a:bodyPr wrap="square" lIns="0" tIns="0" rIns="0" bIns="0" rtlCol="0" anchor="ctr"/>
           <a:lstStyle/>
           <a:p>
-            <a:pPr indent="0" marL="0">
+            <a:pPr marL="0" indent="0">
               <a:buNone/>
             </a:pPr>
             <a:r>
@@ -22072,7 +21797,7 @@
           <a:bodyPr wrap="square" lIns="0" tIns="0" rIns="0" bIns="0" rtlCol="0" anchor="ctr"/>
           <a:lstStyle/>
           <a:p>
-            <a:pPr algn="ctr" indent="0" marL="0">
+            <a:pPr marL="0" indent="0" algn="ctr">
               <a:buNone/>
             </a:pPr>
             <a:r>
@@ -22111,7 +21836,7 @@
           <a:bodyPr wrap="square" lIns="0" tIns="0" rIns="0" bIns="0" rtlCol="0" anchor="ctr"/>
           <a:lstStyle/>
           <a:p>
-            <a:pPr indent="0" marL="0">
+            <a:pPr marL="0" indent="0">
               <a:buNone/>
             </a:pPr>
             <a:r>
@@ -22138,7 +21863,7 @@
         <p:spPr>
           <a:xfrm>
             <a:off x="566928" y="5779008"/>
-            <a:ext cx="11064240" cy="402336"/>
+            <a:ext cx="10927080" cy="402336"/>
           </a:xfrm>
           <a:prstGeom prst="roundRect">
             <a:avLst>
@@ -22177,7 +21902,7 @@
           <a:bodyPr wrap="square" lIns="0" tIns="0" rIns="0" bIns="0" rtlCol="0" anchor="ctr"/>
           <a:lstStyle/>
           <a:p>
-            <a:pPr indent="0" marL="0">
+            <a:pPr marL="0" indent="0">
               <a:lnSpc>
                 <a:spcPct val="112000"/>
               </a:lnSpc>
@@ -22200,7 +21925,7 @@
       </p:sp>
       <p:sp>
         <p:nvSpPr>
-          <p:cNvPr id="25" name="Slide Number Placeholder 0"/>
+          <p:cNvPr id="53" name="Slide Number Placeholder 0"/>
           <p:cNvSpPr>
             <a:spLocks noGrp="1"/>
           </p:cNvSpPr>
@@ -22218,7 +21943,7 @@
           </a:prstGeom>
           <a:extLst>
             <a:ext uri="{C572A759-6A51-4108-AA02-DFA0A04FC94B}">
-              <ma14:wrappingTextBoxFlag xmlns:ma14="http://schemas.microsoft.com/office/mac/drawingml/2011/main" val="0"/>
+              <ma14:wrappingTextBoxFlag xmlns="" xmlns:ma14="http://schemas.microsoft.com/office/mac/drawingml/2011/main" val="0"/>
             </a:ext>
           </a:extLst>
         </p:spPr>
@@ -22239,7 +21964,7 @@
           <a:p>
             <a:pPr algn="l"/>
             <a:fld id="{F7021451-1387-4CA6-816F-3879F97B5CBC}" type="slidenum">
-              <a:rPr b="0" lang="en-US"/>
+              <a:rPr lang="en-US" b="0"/>
               <a:t>3</a:t>
             </a:fld>
             <a:endParaRPr lang="en-US"/>
@@ -22314,7 +22039,7 @@
           <a:bodyPr wrap="square" lIns="0" tIns="0" rIns="0" bIns="0" rtlCol="0" anchor="ctr"/>
           <a:lstStyle/>
           <a:p>
-            <a:pPr indent="0" marL="0">
+            <a:pPr marL="0" indent="0">
               <a:buNone/>
             </a:pPr>
             <a:r>
@@ -22353,7 +22078,7 @@
           <a:bodyPr wrap="square" lIns="0" tIns="0" rIns="0" bIns="0" rtlCol="0" anchor="t"/>
           <a:lstStyle/>
           <a:p>
-            <a:pPr indent="0" marL="0">
+            <a:pPr marL="0" indent="0">
               <a:lnSpc>
                 <a:spcPct val="100000"/>
               </a:lnSpc>
@@ -22422,11 +22147,11 @@
           <a:bodyPr wrap="square" lIns="0" tIns="0" rIns="0" bIns="0" rtlCol="0" anchor="ctr"/>
           <a:lstStyle/>
           <a:p>
-            <a:pPr algn="ctr" indent="0" marL="0">
-              <a:buNone/>
-            </a:pPr>
-            <a:r>
-              <a:rPr lang="en-US" sz="900" b="1" spc="100" kern="0" dirty="0">
+            <a:pPr marL="0" indent="0" algn="ctr">
+              <a:buNone/>
+            </a:pPr>
+            <a:r>
+              <a:rPr lang="en-US" sz="900" b="1" kern="0" spc="100" dirty="0">
                 <a:solidFill>
                   <a:srgbClr val="5A05F4"/>
                 </a:solidFill>
@@ -22442,14 +22167,14 @@
       </p:sp>
       <p:pic>
         <p:nvPicPr>
-          <p:cNvPr id="7" name="Image 0" descr="preencoded.png">    </p:cNvPr>
+          <p:cNvPr id="7" name="Image 0" descr="preencoded.png"/>
           <p:cNvPicPr>
             <a:picLocks noChangeAspect="1"/>
           </p:cNvPicPr>
           <p:nvPr/>
         </p:nvPicPr>
         <p:blipFill>
-          <a:blip r:embed="rId1"/>
+          <a:blip r:embed="rId3"/>
           <a:stretch>
             <a:fillRect/>
           </a:stretch>
@@ -22512,7 +22237,7 @@
           <a:bodyPr wrap="square" lIns="0" tIns="0" rIns="0" bIns="0" rtlCol="0" anchor="ctr"/>
           <a:lstStyle/>
           <a:p>
-            <a:pPr indent="0" marL="0">
+            <a:pPr marL="0" indent="0">
               <a:buNone/>
             </a:pPr>
             <a:r>
@@ -22551,7 +22276,7 @@
           <a:bodyPr wrap="square" lIns="0" tIns="0" rIns="0" bIns="0" rtlCol="0" anchor="t"/>
           <a:lstStyle/>
           <a:p>
-            <a:pPr indent="0" marL="0">
+            <a:pPr marL="0" indent="0">
               <a:lnSpc>
                 <a:spcPct val="105000"/>
               </a:lnSpc>
@@ -22620,7 +22345,7 @@
           <a:bodyPr wrap="square" lIns="0" tIns="0" rIns="0" bIns="0" rtlCol="0" anchor="ctr"/>
           <a:lstStyle/>
           <a:p>
-            <a:pPr indent="0" marL="0">
+            <a:pPr marL="0" indent="0">
               <a:buNone/>
             </a:pPr>
             <a:r>
@@ -22659,7 +22384,7 @@
           <a:bodyPr wrap="square" lIns="0" tIns="0" rIns="0" bIns="0" rtlCol="0" anchor="t"/>
           <a:lstStyle/>
           <a:p>
-            <a:pPr indent="0" marL="0">
+            <a:pPr marL="0" indent="0">
               <a:lnSpc>
                 <a:spcPct val="105000"/>
               </a:lnSpc>
@@ -22728,7 +22453,7 @@
           <a:bodyPr wrap="square" lIns="0" tIns="0" rIns="0" bIns="0" rtlCol="0" anchor="ctr"/>
           <a:lstStyle/>
           <a:p>
-            <a:pPr indent="0" marL="0">
+            <a:pPr marL="0" indent="0">
               <a:buNone/>
             </a:pPr>
             <a:r>
@@ -22767,7 +22492,7 @@
           <a:bodyPr wrap="square" lIns="0" tIns="0" rIns="0" bIns="0" rtlCol="0" anchor="t"/>
           <a:lstStyle/>
           <a:p>
-            <a:pPr indent="0" marL="0">
+            <a:pPr marL="0" indent="0">
               <a:lnSpc>
                 <a:spcPct val="105000"/>
               </a:lnSpc>
@@ -22836,7 +22561,7 @@
           <a:bodyPr wrap="square" lIns="0" tIns="0" rIns="0" bIns="0" rtlCol="0" anchor="ctr"/>
           <a:lstStyle/>
           <a:p>
-            <a:pPr indent="0" marL="0">
+            <a:pPr marL="0" indent="0">
               <a:buNone/>
             </a:pPr>
             <a:r>
@@ -22875,7 +22600,7 @@
           <a:bodyPr wrap="square" lIns="0" tIns="0" rIns="0" bIns="0" rtlCol="0" anchor="t"/>
           <a:lstStyle/>
           <a:p>
-            <a:pPr indent="0" marL="0">
+            <a:pPr marL="0" indent="0">
               <a:lnSpc>
                 <a:spcPct val="105000"/>
               </a:lnSpc>
@@ -22944,7 +22669,7 @@
           <a:bodyPr wrap="square" lIns="0" tIns="0" rIns="0" bIns="0" rtlCol="0" anchor="ctr"/>
           <a:lstStyle/>
           <a:p>
-            <a:pPr indent="0" marL="0">
+            <a:pPr marL="0" indent="0">
               <a:buNone/>
             </a:pPr>
             <a:r>
@@ -22983,7 +22708,7 @@
           <a:bodyPr wrap="square" lIns="0" tIns="0" rIns="0" bIns="0" rtlCol="0" anchor="t"/>
           <a:lstStyle/>
           <a:p>
-            <a:pPr indent="0" marL="0">
+            <a:pPr marL="0" indent="0">
               <a:lnSpc>
                 <a:spcPct val="105000"/>
               </a:lnSpc>
@@ -23052,7 +22777,7 @@
           <a:bodyPr wrap="square" lIns="0" tIns="0" rIns="0" bIns="0" rtlCol="0" anchor="ctr"/>
           <a:lstStyle/>
           <a:p>
-            <a:pPr indent="0" marL="0">
+            <a:pPr marL="0" indent="0">
               <a:buNone/>
             </a:pPr>
             <a:r>
@@ -23091,7 +22816,7 @@
           <a:bodyPr wrap="square" lIns="0" tIns="0" rIns="0" bIns="0" rtlCol="0" anchor="t"/>
           <a:lstStyle/>
           <a:p>
-            <a:pPr indent="0" marL="0">
+            <a:pPr marL="0" indent="0">
               <a:lnSpc>
                 <a:spcPct val="105000"/>
               </a:lnSpc>
@@ -23160,7 +22885,7 @@
           <a:bodyPr wrap="square" lIns="0" tIns="0" rIns="0" bIns="0" rtlCol="0" anchor="ctr"/>
           <a:lstStyle/>
           <a:p>
-            <a:pPr indent="0" marL="0">
+            <a:pPr marL="0" indent="0">
               <a:lnSpc>
                 <a:spcPct val="112000"/>
               </a:lnSpc>
@@ -23183,7 +22908,7 @@
       </p:sp>
       <p:sp>
         <p:nvSpPr>
-          <p:cNvPr id="25" name="Slide Number Placeholder 0"/>
+          <p:cNvPr id="28" name="Slide Number Placeholder 0"/>
           <p:cNvSpPr>
             <a:spLocks noGrp="1"/>
           </p:cNvSpPr>
@@ -23201,7 +22926,7 @@
           </a:prstGeom>
           <a:extLst>
             <a:ext uri="{C572A759-6A51-4108-AA02-DFA0A04FC94B}">
-              <ma14:wrappingTextBoxFlag xmlns:ma14="http://schemas.microsoft.com/office/mac/drawingml/2011/main" val="0"/>
+              <ma14:wrappingTextBoxFlag xmlns="" xmlns:ma14="http://schemas.microsoft.com/office/mac/drawingml/2011/main" val="0"/>
             </a:ext>
           </a:extLst>
         </p:spPr>
@@ -23222,7 +22947,7 @@
           <a:p>
             <a:pPr algn="l"/>
             <a:fld id="{F7021451-1387-4CA6-816F-3879F97B5CBC}" type="slidenum">
-              <a:rPr b="0" lang="en-US"/>
+              <a:rPr lang="en-US" b="0"/>
               <a:t>4</a:t>
             </a:fld>
             <a:endParaRPr lang="en-US"/>
@@ -23275,11 +23000,11 @@
           <a:bodyPr wrap="square" lIns="0" tIns="0" rIns="0" bIns="0" rtlCol="0" anchor="ctr"/>
           <a:lstStyle/>
           <a:p>
-            <a:pPr indent="0" marL="0">
-              <a:buNone/>
-            </a:pPr>
-            <a:r>
-              <a:rPr lang="en-US" sz="1200" b="1" spc="400" kern="0" dirty="0">
+            <a:pPr marL="0" indent="0">
+              <a:buNone/>
+            </a:pPr>
+            <a:r>
+              <a:rPr lang="en-US" sz="1200" b="1" kern="0" spc="400" dirty="0">
                 <a:solidFill>
                   <a:srgbClr val="FFFFFF"/>
                 </a:solidFill>
@@ -23314,7 +23039,7 @@
           <a:bodyPr wrap="square" lIns="0" tIns="0" rIns="0" bIns="0" rtlCol="0" anchor="ctr"/>
           <a:lstStyle/>
           <a:p>
-            <a:pPr indent="0" marL="0">
+            <a:pPr marL="0" indent="0">
               <a:buNone/>
             </a:pPr>
             <a:r>
@@ -23353,7 +23078,7 @@
           <a:bodyPr wrap="square" lIns="0" tIns="0" rIns="0" bIns="0" rtlCol="0" anchor="t"/>
           <a:lstStyle/>
           <a:p>
-            <a:pPr indent="0" marL="0">
+            <a:pPr marL="0" indent="0">
               <a:buNone/>
             </a:pPr>
             <a:r>
@@ -23439,7 +23164,7 @@
           <a:bodyPr wrap="square" lIns="0" tIns="0" rIns="0" bIns="0" rtlCol="0" anchor="ctr"/>
           <a:lstStyle/>
           <a:p>
-            <a:pPr algn="l" indent="0" marL="0">
+            <a:pPr marL="0" indent="0" algn="l">
               <a:buNone/>
             </a:pPr>
             <a:r>
@@ -23478,7 +23203,7 @@
           <a:bodyPr wrap="square" lIns="0" tIns="0" rIns="0" bIns="0" rtlCol="0" anchor="ctr"/>
           <a:lstStyle/>
           <a:p>
-            <a:pPr indent="0" marL="0">
+            <a:pPr marL="0" indent="0">
               <a:buNone/>
             </a:pPr>
             <a:r>
@@ -23544,11 +23269,11 @@
           <a:bodyPr wrap="square" lIns="0" tIns="0" rIns="0" bIns="0" rtlCol="0" anchor="ctr"/>
           <a:lstStyle/>
           <a:p>
-            <a:pPr algn="ctr" indent="0" marL="0">
-              <a:buNone/>
-            </a:pPr>
-            <a:r>
-              <a:rPr lang="en-US" sz="900" b="1" spc="100" kern="0" dirty="0">
+            <a:pPr marL="0" indent="0" algn="ctr">
+              <a:buNone/>
+            </a:pPr>
+            <a:r>
+              <a:rPr lang="en-US" sz="900" b="1" kern="0" spc="100" dirty="0">
                 <a:solidFill>
                   <a:srgbClr val="5A05F4"/>
                 </a:solidFill>
@@ -23564,14 +23289,14 @@
       </p:sp>
       <p:pic>
         <p:nvPicPr>
-          <p:cNvPr id="7" name="Image 0" descr="preencoded.png">    </p:cNvPr>
+          <p:cNvPr id="7" name="Image 0" descr="preencoded.png"/>
           <p:cNvPicPr>
             <a:picLocks noChangeAspect="1"/>
           </p:cNvPicPr>
           <p:nvPr/>
         </p:nvPicPr>
         <p:blipFill>
-          <a:blip r:embed="rId1"/>
+          <a:blip r:embed="rId3"/>
           <a:stretch>
             <a:fillRect/>
           </a:stretch>
@@ -23629,7 +23354,7 @@
           <a:bodyPr wrap="square" lIns="0" tIns="0" rIns="0" bIns="0" rtlCol="0" anchor="ctr"/>
           <a:lstStyle/>
           <a:p>
-            <a:pPr algn="ctr" indent="0" marL="0">
+            <a:pPr marL="0" indent="0" algn="ctr">
               <a:buNone/>
             </a:pPr>
             <a:r>
@@ -23733,7 +23458,7 @@
           <a:bodyPr wrap="square" lIns="0" tIns="0" rIns="0" bIns="0" rtlCol="0" anchor="ctr"/>
           <a:lstStyle/>
           <a:p>
-            <a:pPr algn="ctr" indent="0" marL="0">
+            <a:pPr marL="0" indent="0" algn="ctr">
               <a:buNone/>
             </a:pPr>
             <a:r>
@@ -23837,7 +23562,7 @@
           <a:bodyPr wrap="square" lIns="0" tIns="0" rIns="0" bIns="0" rtlCol="0" anchor="ctr"/>
           <a:lstStyle/>
           <a:p>
-            <a:pPr algn="ctr" indent="0" marL="0">
+            <a:pPr marL="0" indent="0" algn="ctr">
               <a:buNone/>
             </a:pPr>
             <a:r>
@@ -23941,7 +23666,7 @@
           <a:bodyPr wrap="square" lIns="0" tIns="0" rIns="0" bIns="0" rtlCol="0" anchor="ctr"/>
           <a:lstStyle/>
           <a:p>
-            <a:pPr algn="ctr" indent="0" marL="0">
+            <a:pPr marL="0" indent="0" algn="ctr">
               <a:buNone/>
             </a:pPr>
             <a:r>
@@ -23980,7 +23705,7 @@
           <a:bodyPr wrap="square" lIns="0" tIns="0" rIns="0" bIns="0" rtlCol="0" anchor="ctr"/>
           <a:lstStyle/>
           <a:p>
-            <a:pPr indent="0" marL="0">
+            <a:pPr marL="0" indent="0">
               <a:buNone/>
             </a:pPr>
             <a:r>
@@ -24041,7 +23766,7 @@
           <a:bodyPr wrap="square" lIns="0" tIns="0" rIns="0" bIns="0" rtlCol="0" anchor="ctr"/>
           <a:lstStyle/>
           <a:p>
-            <a:pPr indent="0" marL="0">
+            <a:pPr marL="0" indent="0">
               <a:buNone/>
             </a:pPr>
             <a:r>
@@ -24080,7 +23805,7 @@
           <a:bodyPr wrap="square" lIns="0" tIns="0" rIns="0" bIns="0" rtlCol="0" anchor="t"/>
           <a:lstStyle/>
           <a:p>
-            <a:pPr indent="0" marL="0">
+            <a:pPr marL="0" indent="0">
               <a:lnSpc>
                 <a:spcPct val="108000"/>
               </a:lnSpc>
@@ -24144,7 +23869,7 @@
           <a:bodyPr wrap="square" lIns="0" tIns="0" rIns="0" bIns="0" rtlCol="0" anchor="ctr"/>
           <a:lstStyle/>
           <a:p>
-            <a:pPr indent="0" marL="0">
+            <a:pPr marL="0" indent="0">
               <a:buNone/>
             </a:pPr>
             <a:r>
@@ -24183,7 +23908,7 @@
           <a:bodyPr wrap="square" lIns="0" tIns="0" rIns="0" bIns="0" rtlCol="0" anchor="t"/>
           <a:lstStyle/>
           <a:p>
-            <a:pPr indent="0" marL="0">
+            <a:pPr marL="0" indent="0">
               <a:lnSpc>
                 <a:spcPct val="108000"/>
               </a:lnSpc>
@@ -24247,11 +23972,11 @@
           <a:bodyPr wrap="square" lIns="0" tIns="0" rIns="0" bIns="0" rtlCol="0" anchor="ctr"/>
           <a:lstStyle/>
           <a:p>
-            <a:pPr indent="0" marL="0">
-              <a:buNone/>
-            </a:pPr>
-            <a:r>
-              <a:rPr lang="en-US" sz="950" b="1" spc="150" kern="0" dirty="0">
+            <a:pPr marL="0" indent="0">
+              <a:buNone/>
+            </a:pPr>
+            <a:r>
+              <a:rPr lang="en-US" sz="950" b="1" kern="0" spc="150" dirty="0">
                 <a:solidFill>
                   <a:srgbClr val="FFFFFF"/>
                 </a:solidFill>
@@ -24286,7 +24011,7 @@
           <a:bodyPr wrap="square" lIns="0" tIns="0" rIns="0" bIns="0" rtlCol="0" anchor="ctr"/>
           <a:lstStyle/>
           <a:p>
-            <a:pPr indent="0" marL="0">
+            <a:pPr marL="0" indent="0">
               <a:lnSpc>
                 <a:spcPct val="112000"/>
               </a:lnSpc>
@@ -24309,7 +24034,7 @@
       </p:sp>
       <p:sp>
         <p:nvSpPr>
-          <p:cNvPr id="25" name="Slide Number Placeholder 0"/>
+          <p:cNvPr id="32" name="Slide Number Placeholder 0"/>
           <p:cNvSpPr>
             <a:spLocks noGrp="1"/>
           </p:cNvSpPr>
@@ -24327,7 +24052,7 @@
           </a:prstGeom>
           <a:extLst>
             <a:ext uri="{C572A759-6A51-4108-AA02-DFA0A04FC94B}">
-              <ma14:wrappingTextBoxFlag xmlns:ma14="http://schemas.microsoft.com/office/mac/drawingml/2011/main" val="0"/>
+              <ma14:wrappingTextBoxFlag xmlns="" xmlns:ma14="http://schemas.microsoft.com/office/mac/drawingml/2011/main" val="0"/>
             </a:ext>
           </a:extLst>
         </p:spPr>
@@ -24348,7 +24073,7 @@
           <a:p>
             <a:pPr algn="l"/>
             <a:fld id="{F7021451-1387-4CA6-816F-3879F97B5CBC}" type="slidenum">
-              <a:rPr b="0" lang="en-US"/>
+              <a:rPr lang="en-US" b="0"/>
               <a:t>6</a:t>
             </a:fld>
             <a:endParaRPr lang="en-US"/>
@@ -24423,7 +24148,7 @@
           <a:bodyPr wrap="square" lIns="0" tIns="0" rIns="0" bIns="0" rtlCol="0" anchor="ctr"/>
           <a:lstStyle/>
           <a:p>
-            <a:pPr algn="l" indent="0" marL="0">
+            <a:pPr marL="0" indent="0" algn="l">
               <a:buNone/>
             </a:pPr>
             <a:r>
@@ -24462,7 +24187,7 @@
           <a:bodyPr wrap="square" lIns="0" tIns="0" rIns="0" bIns="0" rtlCol="0" anchor="ctr"/>
           <a:lstStyle/>
           <a:p>
-            <a:pPr indent="0" marL="0">
+            <a:pPr marL="0" indent="0">
               <a:buNone/>
             </a:pPr>
             <a:r>
@@ -24528,11 +24253,11 @@
           <a:bodyPr wrap="square" lIns="0" tIns="0" rIns="0" bIns="0" rtlCol="0" anchor="ctr"/>
           <a:lstStyle/>
           <a:p>
-            <a:pPr algn="ctr" indent="0" marL="0">
-              <a:buNone/>
-            </a:pPr>
-            <a:r>
-              <a:rPr lang="en-US" sz="900" b="1" spc="100" kern="0" dirty="0">
+            <a:pPr marL="0" indent="0" algn="ctr">
+              <a:buNone/>
+            </a:pPr>
+            <a:r>
+              <a:rPr lang="en-US" sz="900" b="1" kern="0" spc="100" dirty="0">
                 <a:solidFill>
                   <a:srgbClr val="5A05F4"/>
                 </a:solidFill>
@@ -24548,14 +24273,14 @@
       </p:sp>
       <p:pic>
         <p:nvPicPr>
-          <p:cNvPr id="7" name="Image 0" descr="preencoded.png">    </p:cNvPr>
+          <p:cNvPr id="7" name="Image 0" descr="preencoded.png"/>
           <p:cNvPicPr>
             <a:picLocks noChangeAspect="1"/>
           </p:cNvPicPr>
           <p:nvPr/>
         </p:nvPicPr>
         <p:blipFill>
-          <a:blip r:embed="rId1"/>
+          <a:blip r:embed="rId3"/>
           <a:stretch>
             <a:fillRect/>
           </a:stretch>
@@ -24586,16 +24311,34 @@
         </p:nvGraphicFramePr>
         <p:xfrm>
           <a:off x="566928" y="1737360"/>
-          <a:ext cx="11064240" cy="914400"/>
+          <a:ext cx="11064240" cy="2560320"/>
         </p:xfrm>
         <a:graphic>
           <a:graphicData uri="http://schemas.openxmlformats.org/drawingml/2006/table">
             <a:tbl>
               <a:tblPr/>
               <a:tblGrid>
-                <a:gridCol w="2834640"/>
-                <a:gridCol w="4114800"/>
-                <a:gridCol w="4114800"/>
+                <a:gridCol w="2834640">
+                  <a:extLst>
+                    <a:ext uri="{9D8B030D-6E8A-4147-A177-3AD203B41FA5}">
+                      <a16:colId xmlns:a16="http://schemas.microsoft.com/office/drawing/2014/main" val="20000"/>
+                    </a:ext>
+                  </a:extLst>
+                </a:gridCol>
+                <a:gridCol w="4114800">
+                  <a:extLst>
+                    <a:ext uri="{9D8B030D-6E8A-4147-A177-3AD203B41FA5}">
+                      <a16:colId xmlns:a16="http://schemas.microsoft.com/office/drawing/2014/main" val="20001"/>
+                    </a:ext>
+                  </a:extLst>
+                </a:gridCol>
+                <a:gridCol w="4114800">
+                  <a:extLst>
+                    <a:ext uri="{9D8B030D-6E8A-4147-A177-3AD203B41FA5}">
+                      <a16:colId xmlns:a16="http://schemas.microsoft.com/office/drawing/2014/main" val="20002"/>
+                    </a:ext>
+                  </a:extLst>
+                </a:gridCol>
               </a:tblGrid>
               <a:tr h="512064">
                 <a:tc>
@@ -24603,7 +24346,7 @@
                     <a:bodyPr/>
                     <a:lstStyle/>
                     <a:p>
-                      <a:pPr algn="ctr" indent="0" marL="0">
+                      <a:pPr marL="0" indent="0" algn="ctr">
                         <a:buNone/>
                       </a:pPr>
                       <a:endParaRPr lang="en-US" sz="900" dirty="0">
@@ -24660,11 +24403,11 @@
                     <a:bodyPr/>
                     <a:lstStyle/>
                     <a:p>
-                      <a:pPr algn="ctr" indent="0" marL="0">
+                      <a:pPr marL="0" indent="0" algn="ctr">
                         <a:buNone/>
                       </a:pPr>
                       <a:r>
-                        <a:rPr lang="en-US" sz="900" b="1" spc="100" kern="0" dirty="0">
+                        <a:rPr lang="en-US" sz="900" b="1" kern="0" spc="100" dirty="0">
                           <a:solidFill>
                             <a:srgbClr val="FFFFFF"/>
                           </a:solidFill>
@@ -24728,11 +24471,11 @@
                     <a:bodyPr/>
                     <a:lstStyle/>
                     <a:p>
-                      <a:pPr algn="ctr" indent="0" marL="0">
+                      <a:pPr marL="0" indent="0" algn="ctr">
                         <a:buNone/>
                       </a:pPr>
                       <a:r>
-                        <a:rPr lang="en-US" sz="900" b="1" spc="100" kern="0" dirty="0">
+                        <a:rPr lang="en-US" sz="900" b="1" kern="0" spc="100" dirty="0">
                           <a:solidFill>
                             <a:srgbClr val="FFFFFF"/>
                           </a:solidFill>
@@ -24791,6 +24534,11 @@
                     </a:solidFill>
                   </a:tcPr>
                 </a:tc>
+                <a:extLst>
+                  <a:ext uri="{0D108BD9-81ED-4DB2-BD59-A6C34878D82A}">
+                    <a16:rowId xmlns:a16="http://schemas.microsoft.com/office/drawing/2014/main" val="10000"/>
+                  </a:ext>
+                </a:extLst>
               </a:tr>
               <a:tr h="512064">
                 <a:tc>
@@ -24798,7 +24546,7 @@
                     <a:bodyPr/>
                     <a:lstStyle/>
                     <a:p>
-                      <a:pPr indent="0" marL="0">
+                      <a:pPr marL="0" indent="0">
                         <a:buNone/>
                       </a:pPr>
                       <a:r>
@@ -24866,7 +24614,7 @@
                     <a:bodyPr/>
                     <a:lstStyle/>
                     <a:p>
-                      <a:pPr indent="0" marL="0">
+                      <a:pPr marL="0" indent="0">
                         <a:buNone/>
                       </a:pPr>
                       <a:r>
@@ -24934,7 +24682,7 @@
                     <a:bodyPr/>
                     <a:lstStyle/>
                     <a:p>
-                      <a:pPr indent="0" marL="0">
+                      <a:pPr marL="0" indent="0">
                         <a:buNone/>
                       </a:pPr>
                       <a:r>
@@ -24997,6 +24745,11 @@
                     </a:solidFill>
                   </a:tcPr>
                 </a:tc>
+                <a:extLst>
+                  <a:ext uri="{0D108BD9-81ED-4DB2-BD59-A6C34878D82A}">
+                    <a16:rowId xmlns:a16="http://schemas.microsoft.com/office/drawing/2014/main" val="10001"/>
+                  </a:ext>
+                </a:extLst>
               </a:tr>
               <a:tr h="512064">
                 <a:tc>
@@ -25004,7 +24757,7 @@
                     <a:bodyPr/>
                     <a:lstStyle/>
                     <a:p>
-                      <a:pPr indent="0" marL="0">
+                      <a:pPr marL="0" indent="0">
                         <a:buNone/>
                       </a:pPr>
                       <a:r>
@@ -25072,7 +24825,7 @@
                     <a:bodyPr/>
                     <a:lstStyle/>
                     <a:p>
-                      <a:pPr indent="0" marL="0">
+                      <a:pPr marL="0" indent="0">
                         <a:buNone/>
                       </a:pPr>
                       <a:r>
@@ -25140,7 +24893,7 @@
                     <a:bodyPr/>
                     <a:lstStyle/>
                     <a:p>
-                      <a:pPr indent="0" marL="0">
+                      <a:pPr marL="0" indent="0">
                         <a:buNone/>
                       </a:pPr>
                       <a:r>
@@ -25203,6 +24956,11 @@
                     </a:solidFill>
                   </a:tcPr>
                 </a:tc>
+                <a:extLst>
+                  <a:ext uri="{0D108BD9-81ED-4DB2-BD59-A6C34878D82A}">
+                    <a16:rowId xmlns:a16="http://schemas.microsoft.com/office/drawing/2014/main" val="10002"/>
+                  </a:ext>
+                </a:extLst>
               </a:tr>
               <a:tr h="512064">
                 <a:tc>
@@ -25210,7 +24968,7 @@
                     <a:bodyPr/>
                     <a:lstStyle/>
                     <a:p>
-                      <a:pPr indent="0" marL="0">
+                      <a:pPr marL="0" indent="0">
                         <a:buNone/>
                       </a:pPr>
                       <a:r>
@@ -25278,7 +25036,7 @@
                     <a:bodyPr/>
                     <a:lstStyle/>
                     <a:p>
-                      <a:pPr indent="0" marL="0">
+                      <a:pPr marL="0" indent="0">
                         <a:buNone/>
                       </a:pPr>
                       <a:r>
@@ -25346,7 +25104,7 @@
                     <a:bodyPr/>
                     <a:lstStyle/>
                     <a:p>
-                      <a:pPr indent="0" marL="0">
+                      <a:pPr marL="0" indent="0">
                         <a:buNone/>
                       </a:pPr>
                       <a:r>
@@ -25409,6 +25167,11 @@
                     </a:solidFill>
                   </a:tcPr>
                 </a:tc>
+                <a:extLst>
+                  <a:ext uri="{0D108BD9-81ED-4DB2-BD59-A6C34878D82A}">
+                    <a16:rowId xmlns:a16="http://schemas.microsoft.com/office/drawing/2014/main" val="10003"/>
+                  </a:ext>
+                </a:extLst>
               </a:tr>
               <a:tr h="512064">
                 <a:tc>
@@ -25416,7 +25179,7 @@
                     <a:bodyPr/>
                     <a:lstStyle/>
                     <a:p>
-                      <a:pPr indent="0" marL="0">
+                      <a:pPr marL="0" indent="0">
                         <a:buNone/>
                       </a:pPr>
                       <a:r>
@@ -25484,7 +25247,7 @@
                     <a:bodyPr/>
                     <a:lstStyle/>
                     <a:p>
-                      <a:pPr indent="0" marL="0">
+                      <a:pPr marL="0" indent="0">
                         <a:buNone/>
                       </a:pPr>
                       <a:r>
@@ -25552,7 +25315,7 @@
                     <a:bodyPr/>
                     <a:lstStyle/>
                     <a:p>
-                      <a:pPr indent="0" marL="0">
+                      <a:pPr marL="0" indent="0">
                         <a:buNone/>
                       </a:pPr>
                       <a:r>
@@ -25615,6 +25378,11 @@
                     </a:solidFill>
                   </a:tcPr>
                 </a:tc>
+                <a:extLst>
+                  <a:ext uri="{0D108BD9-81ED-4DB2-BD59-A6C34878D82A}">
+                    <a16:rowId xmlns:a16="http://schemas.microsoft.com/office/drawing/2014/main" val="10004"/>
+                  </a:ext>
+                </a:extLst>
               </a:tr>
             </a:tbl>
           </a:graphicData>
@@ -25663,7 +25431,7 @@
           <a:bodyPr wrap="square" lIns="0" tIns="0" rIns="0" bIns="0" rtlCol="0" anchor="ctr"/>
           <a:lstStyle/>
           <a:p>
-            <a:pPr indent="0" marL="0">
+            <a:pPr marL="0" indent="0">
               <a:lnSpc>
                 <a:spcPct val="112000"/>
               </a:lnSpc>
@@ -25704,7 +25472,7 @@
           </a:prstGeom>
           <a:extLst>
             <a:ext uri="{C572A759-6A51-4108-AA02-DFA0A04FC94B}">
-              <ma14:wrappingTextBoxFlag xmlns:ma14="http://schemas.microsoft.com/office/mac/drawingml/2011/main" val="0"/>
+              <ma14:wrappingTextBoxFlag xmlns="" xmlns:ma14="http://schemas.microsoft.com/office/mac/drawingml/2011/main" val="0"/>
             </a:ext>
           </a:extLst>
         </p:spPr>
@@ -25725,7 +25493,7 @@
           <a:p>
             <a:pPr algn="l"/>
             <a:fld id="{F7021451-1387-4CA6-816F-3879F97B5CBC}" type="slidenum">
-              <a:rPr b="0" lang="en-US"/>
+              <a:rPr lang="en-US" b="0"/>
               <a:t>7</a:t>
             </a:fld>
             <a:endParaRPr lang="en-US"/>
@@ -25800,7 +25568,7 @@
           <a:bodyPr wrap="square" lIns="0" tIns="0" rIns="0" bIns="0" rtlCol="0" anchor="ctr"/>
           <a:lstStyle/>
           <a:p>
-            <a:pPr algn="l" indent="0" marL="0">
+            <a:pPr marL="0" indent="0" algn="l">
               <a:buNone/>
             </a:pPr>
             <a:r>
@@ -25839,7 +25607,7 @@
           <a:bodyPr wrap="square" lIns="0" tIns="0" rIns="0" bIns="0" rtlCol="0" anchor="ctr"/>
           <a:lstStyle/>
           <a:p>
-            <a:pPr indent="0" marL="0">
+            <a:pPr marL="0" indent="0">
               <a:buNone/>
             </a:pPr>
             <a:r>
@@ -25905,11 +25673,11 @@
           <a:bodyPr wrap="square" lIns="0" tIns="0" rIns="0" bIns="0" rtlCol="0" anchor="ctr"/>
           <a:lstStyle/>
           <a:p>
-            <a:pPr algn="ctr" indent="0" marL="0">
-              <a:buNone/>
-            </a:pPr>
-            <a:r>
-              <a:rPr lang="en-US" sz="900" b="1" spc="100" kern="0" dirty="0">
+            <a:pPr marL="0" indent="0" algn="ctr">
+              <a:buNone/>
+            </a:pPr>
+            <a:r>
+              <a:rPr lang="en-US" sz="900" b="1" kern="0" spc="100" dirty="0">
                 <a:solidFill>
                   <a:srgbClr val="5A05F4"/>
                 </a:solidFill>
@@ -25925,14 +25693,14 @@
       </p:sp>
       <p:pic>
         <p:nvPicPr>
-          <p:cNvPr id="7" name="Image 0" descr="preencoded.png">    </p:cNvPr>
+          <p:cNvPr id="7" name="Image 0" descr="preencoded.png"/>
           <p:cNvPicPr>
             <a:picLocks noChangeAspect="1"/>
           </p:cNvPicPr>
           <p:nvPr/>
         </p:nvPicPr>
         <p:blipFill>
-          <a:blip r:embed="rId1"/>
+          <a:blip r:embed="rId3"/>
           <a:stretch>
             <a:fillRect/>
           </a:stretch>
@@ -25990,7 +25758,7 @@
           <a:bodyPr wrap="square" lIns="0" tIns="0" rIns="0" bIns="0" rtlCol="0" anchor="ctr"/>
           <a:lstStyle/>
           <a:p>
-            <a:pPr indent="0" marL="0">
+            <a:pPr marL="0" indent="0">
               <a:buNone/>
             </a:pPr>
             <a:r>
@@ -26029,7 +25797,7 @@
           <a:bodyPr wrap="square" lIns="0" tIns="0" rIns="0" bIns="0" rtlCol="0" anchor="ctr"/>
           <a:lstStyle/>
           <a:p>
-            <a:pPr indent="0" marL="0">
+            <a:pPr marL="0" indent="0">
               <a:buNone/>
             </a:pPr>
             <a:r>
@@ -26090,7 +25858,7 @@
           <a:bodyPr wrap="square" lIns="0" tIns="0" rIns="0" bIns="0" rtlCol="0" anchor="ctr"/>
           <a:lstStyle/>
           <a:p>
-            <a:pPr indent="0" marL="0">
+            <a:pPr marL="0" indent="0">
               <a:buNone/>
             </a:pPr>
             <a:r>
@@ -26129,7 +25897,7 @@
           <a:bodyPr wrap="square" lIns="0" tIns="0" rIns="0" bIns="0" rtlCol="0" anchor="ctr"/>
           <a:lstStyle/>
           <a:p>
-            <a:pPr indent="0" marL="0">
+            <a:pPr marL="0" indent="0">
               <a:buNone/>
             </a:pPr>
             <a:r>
@@ -26190,7 +25958,7 @@
           <a:bodyPr wrap="square" lIns="0" tIns="0" rIns="0" bIns="0" rtlCol="0" anchor="ctr"/>
           <a:lstStyle/>
           <a:p>
-            <a:pPr indent="0" marL="0">
+            <a:pPr marL="0" indent="0">
               <a:buNone/>
             </a:pPr>
             <a:r>
@@ -26229,7 +25997,7 @@
           <a:bodyPr wrap="square" lIns="0" tIns="0" rIns="0" bIns="0" rtlCol="0" anchor="ctr"/>
           <a:lstStyle/>
           <a:p>
-            <a:pPr indent="0" marL="0">
+            <a:pPr marL="0" indent="0">
               <a:buNone/>
             </a:pPr>
             <a:r>
@@ -26268,7 +26036,7 @@
           <a:bodyPr wrap="square" lIns="0" tIns="0" rIns="0" bIns="0" rtlCol="0" anchor="ctr"/>
           <a:lstStyle/>
           <a:p>
-            <a:pPr algn="r" indent="0" marL="0">
+            <a:pPr marL="0" indent="0" algn="r">
               <a:buNone/>
             </a:pPr>
             <a:r>
@@ -26430,7 +26198,7 @@
           <a:bodyPr wrap="square" lIns="0" tIns="0" rIns="0" bIns="0" rtlCol="0" anchor="ctr"/>
           <a:lstStyle/>
           <a:p>
-            <a:pPr algn="r" indent="0" marL="0">
+            <a:pPr marL="0" indent="0" algn="r">
               <a:buNone/>
             </a:pPr>
             <a:r>
@@ -26572,7 +26340,7 @@
           <a:bodyPr wrap="square" lIns="0" tIns="0" rIns="0" bIns="0" rtlCol="0" anchor="ctr"/>
           <a:lstStyle/>
           <a:p>
-            <a:pPr algn="r" indent="0" marL="0">
+            <a:pPr marL="0" indent="0" algn="r">
               <a:buNone/>
             </a:pPr>
             <a:r>
@@ -26761,11 +26529,11 @@
           <a:bodyPr wrap="square" lIns="0" tIns="0" rIns="0" bIns="0" rtlCol="0" anchor="ctr"/>
           <a:lstStyle/>
           <a:p>
-            <a:pPr indent="0" marL="0">
-              <a:buNone/>
-            </a:pPr>
-            <a:r>
-              <a:rPr lang="en-US" sz="950" b="1" spc="150" kern="0" dirty="0">
+            <a:pPr marL="0" indent="0">
+              <a:buNone/>
+            </a:pPr>
+            <a:r>
+              <a:rPr lang="en-US" sz="950" b="1" kern="0" spc="150" dirty="0">
                 <a:solidFill>
                   <a:srgbClr val="B3261E"/>
                 </a:solidFill>
@@ -26800,7 +26568,7 @@
           <a:bodyPr wrap="square" lIns="0" tIns="0" rIns="0" bIns="0" rtlCol="0" anchor="ctr"/>
           <a:lstStyle/>
           <a:p>
-            <a:pPr indent="0" marL="0">
+            <a:pPr marL="0" indent="0">
               <a:lnSpc>
                 <a:spcPct val="112000"/>
               </a:lnSpc>
@@ -26823,7 +26591,7 @@
       </p:sp>
       <p:sp>
         <p:nvSpPr>
-          <p:cNvPr id="25" name="Slide Number Placeholder 0"/>
+          <p:cNvPr id="40" name="Slide Number Placeholder 0"/>
           <p:cNvSpPr>
             <a:spLocks noGrp="1"/>
           </p:cNvSpPr>
@@ -26841,7 +26609,7 @@
           </a:prstGeom>
           <a:extLst>
             <a:ext uri="{C572A759-6A51-4108-AA02-DFA0A04FC94B}">
-              <ma14:wrappingTextBoxFlag xmlns:ma14="http://schemas.microsoft.com/office/mac/drawingml/2011/main" val="0"/>
+              <ma14:wrappingTextBoxFlag xmlns="" xmlns:ma14="http://schemas.microsoft.com/office/mac/drawingml/2011/main" val="0"/>
             </a:ext>
           </a:extLst>
         </p:spPr>
@@ -26862,7 +26630,7 @@
           <a:p>
             <a:pPr algn="l"/>
             <a:fld id="{F7021451-1387-4CA6-816F-3879F97B5CBC}" type="slidenum">
-              <a:rPr b="0" lang="en-US"/>
+              <a:rPr lang="en-US" b="0"/>
               <a:t>8</a:t>
             </a:fld>
             <a:endParaRPr lang="en-US"/>
@@ -26937,7 +26705,7 @@
           <a:bodyPr wrap="square" lIns="0" tIns="0" rIns="0" bIns="0" rtlCol="0" anchor="ctr"/>
           <a:lstStyle/>
           <a:p>
-            <a:pPr algn="l" indent="0" marL="0">
+            <a:pPr marL="0" indent="0" algn="l">
               <a:buNone/>
             </a:pPr>
             <a:r>
@@ -26976,7 +26744,7 @@
           <a:bodyPr wrap="square" lIns="0" tIns="0" rIns="0" bIns="0" rtlCol="0" anchor="ctr"/>
           <a:lstStyle/>
           <a:p>
-            <a:pPr indent="0" marL="0">
+            <a:pPr marL="0" indent="0">
               <a:buNone/>
             </a:pPr>
             <a:r>
@@ -27042,11 +26810,11 @@
           <a:bodyPr wrap="square" lIns="0" tIns="0" rIns="0" bIns="0" rtlCol="0" anchor="ctr"/>
           <a:lstStyle/>
           <a:p>
-            <a:pPr algn="ctr" indent="0" marL="0">
-              <a:buNone/>
-            </a:pPr>
-            <a:r>
-              <a:rPr lang="en-US" sz="900" b="1" spc="100" kern="0" dirty="0">
+            <a:pPr marL="0" indent="0" algn="ctr">
+              <a:buNone/>
+            </a:pPr>
+            <a:r>
+              <a:rPr lang="en-US" sz="900" b="1" kern="0" spc="100" dirty="0">
                 <a:solidFill>
                   <a:srgbClr val="5A05F4"/>
                 </a:solidFill>
@@ -27062,14 +26830,14 @@
       </p:sp>
       <p:pic>
         <p:nvPicPr>
-          <p:cNvPr id="7" name="Image 0" descr="preencoded.png">    </p:cNvPr>
+          <p:cNvPr id="7" name="Image 0" descr="preencoded.png"/>
           <p:cNvPicPr>
             <a:picLocks noChangeAspect="1"/>
           </p:cNvPicPr>
           <p:nvPr/>
         </p:nvPicPr>
         <p:blipFill>
-          <a:blip r:embed="rId1"/>
+          <a:blip r:embed="rId3"/>
           <a:stretch>
             <a:fillRect/>
           </a:stretch>
@@ -27132,7 +26900,7 @@
           <a:bodyPr wrap="square" lIns="0" tIns="0" rIns="0" bIns="0" rtlCol="0" anchor="t"/>
           <a:lstStyle/>
           <a:p>
-            <a:pPr indent="0" marL="0">
+            <a:pPr marL="0" indent="0">
               <a:lnSpc>
                 <a:spcPct val="130000"/>
               </a:lnSpc>
@@ -27152,7 +26920,7 @@
             <a:endParaRPr lang="en-US" sz="1150" dirty="0"/>
           </a:p>
           <a:p>
-            <a:pPr indent="0" marL="0">
+            <a:pPr marL="0" indent="0">
               <a:lnSpc>
                 <a:spcPct val="130000"/>
               </a:lnSpc>
@@ -27172,7 +26940,7 @@
             <a:endParaRPr lang="en-US" sz="1150" dirty="0"/>
           </a:p>
           <a:p>
-            <a:pPr indent="0" marL="0">
+            <a:pPr marL="0" indent="0">
               <a:lnSpc>
                 <a:spcPct val="130000"/>
               </a:lnSpc>
@@ -27192,7 +26960,7 @@
             <a:endParaRPr lang="en-US" sz="1150" dirty="0"/>
           </a:p>
           <a:p>
-            <a:pPr indent="0" marL="0">
+            <a:pPr marL="0" indent="0">
               <a:lnSpc>
                 <a:spcPct val="130000"/>
               </a:lnSpc>
@@ -27212,7 +26980,7 @@
             <a:endParaRPr lang="en-US" sz="1150" dirty="0"/>
           </a:p>
           <a:p>
-            <a:pPr indent="0" marL="0">
+            <a:pPr marL="0" indent="0">
               <a:lnSpc>
                 <a:spcPct val="130000"/>
               </a:lnSpc>
@@ -27232,7 +27000,7 @@
             <a:endParaRPr lang="en-US" sz="1150" dirty="0"/>
           </a:p>
           <a:p>
-            <a:pPr indent="0" marL="0">
+            <a:pPr marL="0" indent="0">
               <a:lnSpc>
                 <a:spcPct val="130000"/>
               </a:lnSpc>
@@ -27252,7 +27020,7 @@
             <a:endParaRPr lang="en-US" sz="1150" dirty="0"/>
           </a:p>
           <a:p>
-            <a:pPr indent="0" marL="0">
+            <a:pPr marL="0" indent="0">
               <a:lnSpc>
                 <a:spcPct val="130000"/>
               </a:lnSpc>
@@ -27272,7 +27040,7 @@
             <a:endParaRPr lang="en-US" sz="1150" dirty="0"/>
           </a:p>
           <a:p>
-            <a:pPr indent="0" marL="0">
+            <a:pPr marL="0" indent="0">
               <a:lnSpc>
                 <a:spcPct val="130000"/>
               </a:lnSpc>
@@ -27292,7 +27060,7 @@
             <a:endParaRPr lang="en-US" sz="1150" dirty="0"/>
           </a:p>
           <a:p>
-            <a:pPr indent="0" marL="0">
+            <a:pPr marL="0" indent="0">
               <a:lnSpc>
                 <a:spcPct val="130000"/>
               </a:lnSpc>
@@ -27376,7 +27144,7 @@
           <a:bodyPr wrap="square" lIns="0" tIns="0" rIns="0" bIns="0" rtlCol="0" anchor="ctr"/>
           <a:lstStyle/>
           <a:p>
-            <a:pPr algn="ctr" indent="0" marL="0">
+            <a:pPr marL="0" indent="0" algn="ctr">
               <a:buNone/>
             </a:pPr>
             <a:r>
@@ -27415,7 +27183,7 @@
           <a:bodyPr wrap="square" lIns="0" tIns="0" rIns="0" bIns="0" rtlCol="0" anchor="ctr"/>
           <a:lstStyle/>
           <a:p>
-            <a:pPr indent="0" marL="0">
+            <a:pPr marL="0" indent="0">
               <a:buNone/>
             </a:pPr>
             <a:r>
@@ -27454,7 +27222,7 @@
           <a:bodyPr wrap="square" lIns="0" tIns="0" rIns="0" bIns="0" rtlCol="0" anchor="t"/>
           <a:lstStyle/>
           <a:p>
-            <a:pPr indent="0" marL="0">
+            <a:pPr marL="0" indent="0">
               <a:lnSpc>
                 <a:spcPct val="108000"/>
               </a:lnSpc>
@@ -27538,7 +27306,7 @@
           <a:bodyPr wrap="square" lIns="0" tIns="0" rIns="0" bIns="0" rtlCol="0" anchor="ctr"/>
           <a:lstStyle/>
           <a:p>
-            <a:pPr algn="ctr" indent="0" marL="0">
+            <a:pPr marL="0" indent="0" algn="ctr">
               <a:buNone/>
             </a:pPr>
             <a:r>
@@ -27577,7 +27345,7 @@
           <a:bodyPr wrap="square" lIns="0" tIns="0" rIns="0" bIns="0" rtlCol="0" anchor="ctr"/>
           <a:lstStyle/>
           <a:p>
-            <a:pPr indent="0" marL="0">
+            <a:pPr marL="0" indent="0">
               <a:buNone/>
             </a:pPr>
             <a:r>
@@ -27616,7 +27384,7 @@
           <a:bodyPr wrap="square" lIns="0" tIns="0" rIns="0" bIns="0" rtlCol="0" anchor="t"/>
           <a:lstStyle/>
           <a:p>
-            <a:pPr indent="0" marL="0">
+            <a:pPr marL="0" indent="0">
               <a:lnSpc>
                 <a:spcPct val="108000"/>
               </a:lnSpc>
@@ -27700,7 +27468,7 @@
           <a:bodyPr wrap="square" lIns="0" tIns="0" rIns="0" bIns="0" rtlCol="0" anchor="ctr"/>
           <a:lstStyle/>
           <a:p>
-            <a:pPr algn="ctr" indent="0" marL="0">
+            <a:pPr marL="0" indent="0" algn="ctr">
               <a:buNone/>
             </a:pPr>
             <a:r>
@@ -27739,7 +27507,7 @@
           <a:bodyPr wrap="square" lIns="0" tIns="0" rIns="0" bIns="0" rtlCol="0" anchor="ctr"/>
           <a:lstStyle/>
           <a:p>
-            <a:pPr indent="0" marL="0">
+            <a:pPr marL="0" indent="0">
               <a:buNone/>
             </a:pPr>
             <a:r>
@@ -27778,7 +27546,7 @@
           <a:bodyPr wrap="square" lIns="0" tIns="0" rIns="0" bIns="0" rtlCol="0" anchor="t"/>
           <a:lstStyle/>
           <a:p>
-            <a:pPr indent="0" marL="0">
+            <a:pPr marL="0" indent="0">
               <a:lnSpc>
                 <a:spcPct val="108000"/>
               </a:lnSpc>
@@ -27819,7 +27587,7 @@
           </a:prstGeom>
           <a:extLst>
             <a:ext uri="{C572A759-6A51-4108-AA02-DFA0A04FC94B}">
-              <ma14:wrappingTextBoxFlag xmlns:ma14="http://schemas.microsoft.com/office/mac/drawingml/2011/main" val="0"/>
+              <ma14:wrappingTextBoxFlag xmlns="" xmlns:ma14="http://schemas.microsoft.com/office/mac/drawingml/2011/main" val="0"/>
             </a:ext>
           </a:extLst>
         </p:spPr>
@@ -27840,7 +27608,7 @@
           <a:p>
             <a:pPr algn="l"/>
             <a:fld id="{F7021451-1387-4CA6-816F-3879F97B5CBC}" type="slidenum">
-              <a:rPr b="0" lang="en-US"/>
+              <a:rPr lang="en-US" b="0"/>
               <a:t>9</a:t>
             </a:fld>
             <a:endParaRPr lang="en-US"/>
@@ -28148,4 +27916,299 @@
     </a:ext>
   </a:extLst>
 </a:theme>
+</file>
+
+<file path=ppt/theme/theme2.xml><?xml version="1.0" encoding="utf-8"?>
+<a:theme xmlns:a="http://schemas.openxmlformats.org/drawingml/2006/main" name="Office Theme">
+  <a:themeElements>
+    <a:clrScheme name="Office">
+      <a:dk1>
+        <a:sysClr val="windowText" lastClr="000000"/>
+      </a:dk1>
+      <a:lt1>
+        <a:sysClr val="window" lastClr="FFFFFF"/>
+      </a:lt1>
+      <a:dk2>
+        <a:srgbClr val="44546A"/>
+      </a:dk2>
+      <a:lt2>
+        <a:srgbClr val="E7E6E6"/>
+      </a:lt2>
+      <a:accent1>
+        <a:srgbClr val="4472C4"/>
+      </a:accent1>
+      <a:accent2>
+        <a:srgbClr val="ED7D31"/>
+      </a:accent2>
+      <a:accent3>
+        <a:srgbClr val="A5A5A5"/>
+      </a:accent3>
+      <a:accent4>
+        <a:srgbClr val="FFC000"/>
+      </a:accent4>
+      <a:accent5>
+        <a:srgbClr val="5B9BD5"/>
+      </a:accent5>
+      <a:accent6>
+        <a:srgbClr val="70AD47"/>
+      </a:accent6>
+      <a:hlink>
+        <a:srgbClr val="0563C1"/>
+      </a:hlink>
+      <a:folHlink>
+        <a:srgbClr val="954F72"/>
+      </a:folHlink>
+    </a:clrScheme>
+    <a:fontScheme name="Office">
+      <a:majorFont>
+        <a:latin typeface="Calibri Light" panose="020F0302020204030204"/>
+        <a:ea typeface=""/>
+        <a:cs typeface=""/>
+        <a:font script="Jpan" typeface="游ゴシック Light"/>
+        <a:font script="Hang" typeface="맑은 고딕"/>
+        <a:font script="Hans" typeface="等线 Light"/>
+        <a:font script="Hant" typeface="新細明體"/>
+        <a:font script="Arab" typeface="Times New Roman"/>
+        <a:font script="Hebr" typeface="Times New Roman"/>
+        <a:font script="Thai" typeface="Angsana New"/>
+        <a:font script="Ethi" typeface="Nyala"/>
+        <a:font script="Beng" typeface="Vrinda"/>
+        <a:font script="Gujr" typeface="Shruti"/>
+        <a:font script="Khmr" typeface="MoolBoran"/>
+        <a:font script="Knda" typeface="Tunga"/>
+        <a:font script="Guru" typeface="Raavi"/>
+        <a:font script="Cans" typeface="Euphemia"/>
+        <a:font script="Cher" typeface="Plantagenet Cherokee"/>
+        <a:font script="Yiii" typeface="Microsoft Yi Baiti"/>
+        <a:font script="Tibt" typeface="Microsoft Himalaya"/>
+        <a:font script="Thaa" typeface="MV Boli"/>
+        <a:font script="Deva" typeface="Mangal"/>
+        <a:font script="Telu" typeface="Gautami"/>
+        <a:font script="Taml" typeface="Latha"/>
+        <a:font script="Syrc" typeface="Estrangelo Edessa"/>
+        <a:font script="Orya" typeface="Kalinga"/>
+        <a:font script="Mlym" typeface="Kartika"/>
+        <a:font script="Laoo" typeface="DokChampa"/>
+        <a:font script="Sinh" typeface="Iskoola Pota"/>
+        <a:font script="Mong" typeface="Mongolian Baiti"/>
+        <a:font script="Viet" typeface="Times New Roman"/>
+        <a:font script="Uigh" typeface="Microsoft Uighur"/>
+        <a:font script="Geor" typeface="Sylfaen"/>
+        <a:font script="Armn" typeface="Arial"/>
+        <a:font script="Bugi" typeface="Leelawadee UI"/>
+        <a:font script="Bopo" typeface="Microsoft JhengHei"/>
+        <a:font script="Java" typeface="Javanese Text"/>
+        <a:font script="Lisu" typeface="Segoe UI"/>
+        <a:font script="Mymr" typeface="Myanmar Text"/>
+        <a:font script="Nkoo" typeface="Ebrima"/>
+        <a:font script="Olck" typeface="Nirmala UI"/>
+        <a:font script="Osma" typeface="Ebrima"/>
+        <a:font script="Phag" typeface="Phagspa"/>
+        <a:font script="Syrn" typeface="Estrangelo Edessa"/>
+        <a:font script="Syrj" typeface="Estrangelo Edessa"/>
+        <a:font script="Syre" typeface="Estrangelo Edessa"/>
+        <a:font script="Sora" typeface="Nirmala UI"/>
+        <a:font script="Tale" typeface="Microsoft Tai Le"/>
+        <a:font script="Talu" typeface="Microsoft New Tai Lue"/>
+        <a:font script="Tfng" typeface="Ebrima"/>
+      </a:majorFont>
+      <a:minorFont>
+        <a:latin typeface="Calibri" panose="020F0502020204030204"/>
+        <a:ea typeface=""/>
+        <a:cs typeface=""/>
+        <a:font script="Jpan" typeface="游ゴシック"/>
+        <a:font script="Hang" typeface="맑은 고딕"/>
+        <a:font script="Hans" typeface="等线"/>
+        <a:font script="Hant" typeface="新細明體"/>
+        <a:font script="Arab" typeface="Arial"/>
+        <a:font script="Hebr" typeface="Arial"/>
+        <a:font script="Thai" typeface="Cordia New"/>
+        <a:font script="Ethi" typeface="Nyala"/>
+        <a:font script="Beng" typeface="Vrinda"/>
+        <a:font script="Gujr" typeface="Shruti"/>
+        <a:font script="Khmr" typeface="DaunPenh"/>
+        <a:font script="Knda" typeface="Tunga"/>
+        <a:font script="Guru" typeface="Raavi"/>
+        <a:font script="Cans" typeface="Euphemia"/>
+        <a:font script="Cher" typeface="Plantagenet Cherokee"/>
+        <a:font script="Yiii" typeface="Microsoft Yi Baiti"/>
+        <a:font script="Tibt" typeface="Microsoft Himalaya"/>
+        <a:font script="Thaa" typeface="MV Boli"/>
+        <a:font script="Deva" typeface="Mangal"/>
+        <a:font script="Telu" typeface="Gautami"/>
+        <a:font script="Taml" typeface="Latha"/>
+        <a:font script="Syrc" typeface="Estrangelo Edessa"/>
+        <a:font script="Orya" typeface="Kalinga"/>
+        <a:font script="Mlym" typeface="Kartika"/>
+        <a:font script="Laoo" typeface="DokChampa"/>
+        <a:font script="Sinh" typeface="Iskoola Pota"/>
+        <a:font script="Mong" typeface="Mongolian Baiti"/>
+        <a:font script="Viet" typeface="Arial"/>
+        <a:font script="Uigh" typeface="Microsoft Uighur"/>
+        <a:font script="Geor" typeface="Sylfaen"/>
+        <a:font script="Armn" typeface="Arial"/>
+        <a:font script="Bugi" typeface="Leelawadee UI"/>
+        <a:font script="Bopo" typeface="Microsoft JhengHei"/>
+        <a:font script="Java" typeface="Javanese Text"/>
+        <a:font script="Lisu" typeface="Segoe UI"/>
+        <a:font script="Mymr" typeface="Myanmar Text"/>
+        <a:font script="Nkoo" typeface="Ebrima"/>
+        <a:font script="Olck" typeface="Nirmala UI"/>
+        <a:font script="Osma" typeface="Ebrima"/>
+        <a:font script="Phag" typeface="Phagspa"/>
+        <a:font script="Syrn" typeface="Estrangelo Edessa"/>
+        <a:font script="Syrj" typeface="Estrangelo Edessa"/>
+        <a:font script="Syre" typeface="Estrangelo Edessa"/>
+        <a:font script="Sora" typeface="Nirmala UI"/>
+        <a:font script="Tale" typeface="Microsoft Tai Le"/>
+        <a:font script="Talu" typeface="Microsoft New Tai Lue"/>
+        <a:font script="Tfng" typeface="Ebrima"/>
+      </a:minorFont>
+    </a:fontScheme>
+    <a:fmtScheme name="Office">
+      <a:fillStyleLst>
+        <a:solidFill>
+          <a:schemeClr val="phClr"/>
+        </a:solidFill>
+        <a:gradFill rotWithShape="1">
+          <a:gsLst>
+            <a:gs pos="0">
+              <a:schemeClr val="phClr">
+                <a:lumMod val="110000"/>
+                <a:satMod val="105000"/>
+                <a:tint val="67000"/>
+              </a:schemeClr>
+            </a:gs>
+            <a:gs pos="50000">
+              <a:schemeClr val="phClr">
+                <a:lumMod val="105000"/>
+                <a:satMod val="103000"/>
+                <a:tint val="73000"/>
+              </a:schemeClr>
+            </a:gs>
+            <a:gs pos="100000">
+              <a:schemeClr val="phClr">
+                <a:lumMod val="105000"/>
+                <a:satMod val="109000"/>
+                <a:tint val="81000"/>
+              </a:schemeClr>
+            </a:gs>
+          </a:gsLst>
+          <a:lin ang="5400000" scaled="0"/>
+        </a:gradFill>
+        <a:gradFill rotWithShape="1">
+          <a:gsLst>
+            <a:gs pos="0">
+              <a:schemeClr val="phClr">
+                <a:satMod val="103000"/>
+                <a:lumMod val="102000"/>
+                <a:tint val="94000"/>
+              </a:schemeClr>
+            </a:gs>
+            <a:gs pos="50000">
+              <a:schemeClr val="phClr">
+                <a:satMod val="110000"/>
+                <a:lumMod val="100000"/>
+                <a:shade val="100000"/>
+              </a:schemeClr>
+            </a:gs>
+            <a:gs pos="100000">
+              <a:schemeClr val="phClr">
+                <a:lumMod val="99000"/>
+                <a:satMod val="120000"/>
+                <a:shade val="78000"/>
+              </a:schemeClr>
+            </a:gs>
+          </a:gsLst>
+          <a:lin ang="5400000" scaled="0"/>
+        </a:gradFill>
+      </a:fillStyleLst>
+      <a:lnStyleLst>
+        <a:ln w="6350" cap="flat" cmpd="sng" algn="ctr">
+          <a:solidFill>
+            <a:schemeClr val="phClr"/>
+          </a:solidFill>
+          <a:prstDash val="solid"/>
+          <a:miter lim="800000"/>
+        </a:ln>
+        <a:ln w="12700" cap="flat" cmpd="sng" algn="ctr">
+          <a:solidFill>
+            <a:schemeClr val="phClr"/>
+          </a:solidFill>
+          <a:prstDash val="solid"/>
+          <a:miter lim="800000"/>
+        </a:ln>
+        <a:ln w="19050" cap="flat" cmpd="sng" algn="ctr">
+          <a:solidFill>
+            <a:schemeClr val="phClr"/>
+          </a:solidFill>
+          <a:prstDash val="solid"/>
+          <a:miter lim="800000"/>
+        </a:ln>
+      </a:lnStyleLst>
+      <a:effectStyleLst>
+        <a:effectStyle>
+          <a:effectLst/>
+        </a:effectStyle>
+        <a:effectStyle>
+          <a:effectLst/>
+        </a:effectStyle>
+        <a:effectStyle>
+          <a:effectLst>
+            <a:outerShdw blurRad="57150" dist="19050" dir="5400000" algn="ctr" rotWithShape="0">
+              <a:srgbClr val="000000">
+                <a:alpha val="63000"/>
+              </a:srgbClr>
+            </a:outerShdw>
+          </a:effectLst>
+        </a:effectStyle>
+      </a:effectStyleLst>
+      <a:bgFillStyleLst>
+        <a:solidFill>
+          <a:schemeClr val="phClr"/>
+        </a:solidFill>
+        <a:solidFill>
+          <a:schemeClr val="phClr">
+            <a:tint val="95000"/>
+            <a:satMod val="170000"/>
+          </a:schemeClr>
+        </a:solidFill>
+        <a:gradFill rotWithShape="1">
+          <a:gsLst>
+            <a:gs pos="0">
+              <a:schemeClr val="phClr">
+                <a:tint val="93000"/>
+                <a:satMod val="150000"/>
+                <a:shade val="98000"/>
+                <a:lumMod val="102000"/>
+              </a:schemeClr>
+            </a:gs>
+            <a:gs pos="50000">
+              <a:schemeClr val="phClr">
+                <a:tint val="98000"/>
+                <a:satMod val="130000"/>
+                <a:shade val="90000"/>
+                <a:lumMod val="103000"/>
+              </a:schemeClr>
+            </a:gs>
+            <a:gs pos="100000">
+              <a:schemeClr val="phClr">
+                <a:shade val="63000"/>
+                <a:satMod val="120000"/>
+              </a:schemeClr>
+            </a:gs>
+          </a:gsLst>
+          <a:lin ang="5400000" scaled="0"/>
+        </a:gradFill>
+      </a:bgFillStyleLst>
+    </a:fmtScheme>
+  </a:themeElements>
+  <a:objectDefaults/>
+  <a:extraClrSchemeLst/>
+  <a:extLst>
+    <a:ext uri="{05A4C25C-085E-4340-85A3-A5531E510DB2}">
+      <thm15:themeFamily xmlns:thm15="http://schemas.microsoft.com/office/thememl/2012/main" name="Office Theme" id="{62F939B6-93AF-4DB8-9C6B-D6C7DFDC589F}" vid="{4A3C46E8-61CC-4603-A589-7422A47A8E4A}"/>
+    </a:ext>
+  </a:extLst>
+</a:theme>
 </file>
--- a/docs/decks/L07.pptx
+++ b/docs/decks/L07.pptx
@@ -4186,7 +4186,7 @@
                 <a:ea typeface="Courier New" pitchFamily="34" charset="-122"/>
                 <a:cs typeface="Courier New" pitchFamily="34" charset="-120"/>
               </a:rPr>
-              <a:t>                                   : new[] { model, "azure-gpt-4o" };</a:t>
+              <a:t>                                   : new[] { model, "azure-gpt-5" };</a:t>
             </a:r>
             <a:endParaRPr lang="en-US" sz="1150" dirty="0"/>
           </a:p>

--- a/docs/decks/L07.pptx
+++ b/docs/decks/L07.pptx
@@ -4,9 +4,6 @@
   <p:sldMasterIdLst>
     <p:sldMasterId id="2147483648" r:id="rId1"/>
   </p:sldMasterIdLst>
-  <p:notesMasterIdLst>
-    <p:notesMasterId r:id="rId31"/>
-  </p:notesMasterIdLst>
   <p:sldIdLst>
     <p:sldId id="256" r:id="rId2"/>
     <p:sldId id="257" r:id="rId3"/>
@@ -38,6 +35,9 @@
     <p:sldId id="283" r:id="rId29"/>
     <p:sldId id="284" r:id="rId30"/>
   </p:sldIdLst>
+  <p:notesMasterIdLst>
+    <p:notesMasterId r:id="rId31"/>
+  </p:notesMasterIdLst>
   <p:sldSz cx="12192000" cy="6858000"/>
   <p:notesSz cx="6858000" cy="12192000"/>
   <p:defaultTextStyle>
@@ -132,11 +132,6 @@
       </a:defRPr>
     </a:lvl9pPr>
   </p:defaultTextStyle>
-  <p:extLst>
-    <p:ext uri="{EFAFB233-063F-42B5-8137-9DF3F51BA10A}">
-      <p15:sldGuideLst xmlns:p15="http://schemas.microsoft.com/office/powerpoint/2012/main"/>
-    </p:ext>
-  </p:extLst>
 </p:presentation>
 </file>
 
@@ -162,10 +157,234 @@
           <a:chExt cx="0" cy="0"/>
         </a:xfrm>
       </p:grpSpPr>
+      <p:sp>
+        <p:nvSpPr>
+          <p:cNvPr id="2" name="Header Placeholder 1"/>
+          <p:cNvSpPr>
+            <a:spLocks noGrp="1"/>
+          </p:cNvSpPr>
+          <p:nvPr>
+            <p:ph type="hdr" sz="quarter"/>
+          </p:nvPr>
+        </p:nvSpPr>
+        <p:spPr>
+          <a:xfrm>
+            <a:off x="0" y="0"/>
+            <a:ext cx="2971800" cy="458788"/>
+          </a:xfrm>
+          <a:prstGeom prst="rect">
+            <a:avLst/>
+          </a:prstGeom>
+        </p:spPr>
+        <p:txBody>
+          <a:bodyPr vert="horz" lIns="91440" tIns="45720" rIns="91440" bIns="45720" rtlCol="0"/>
+          <a:lstStyle>
+            <a:lvl1pPr algn="l">
+              <a:defRPr sz="1200"/>
+            </a:lvl1pPr>
+          </a:lstStyle>
+          <a:p>
+            <a:endParaRPr lang="en-US"/>
+          </a:p>
+        </p:txBody>
+      </p:sp>
+      <p:sp>
+        <p:nvSpPr>
+          <p:cNvPr id="3" name="Date Placeholder 2"/>
+          <p:cNvSpPr>
+            <a:spLocks noGrp="1"/>
+          </p:cNvSpPr>
+          <p:nvPr>
+            <p:ph type="dt" idx="1"/>
+          </p:nvPr>
+        </p:nvSpPr>
+        <p:spPr>
+          <a:xfrm>
+            <a:off x="3884613" y="0"/>
+            <a:ext cx="2971800" cy="458788"/>
+          </a:xfrm>
+          <a:prstGeom prst="rect">
+            <a:avLst/>
+          </a:prstGeom>
+        </p:spPr>
+        <p:txBody>
+          <a:bodyPr vert="horz" lIns="91440" tIns="45720" rIns="91440" bIns="45720" rtlCol="0"/>
+          <a:lstStyle>
+            <a:lvl1pPr algn="r">
+              <a:defRPr sz="1200"/>
+            </a:lvl1pPr>
+          </a:lstStyle>
+          <a:p>
+            <a:fld id="{5282F153-3F37-0F45-9E97-73ACFA13230C}" type="datetimeFigureOut">
+              <a:rPr lang="en-US"/>
+              <a:t>7/23/19</a:t>
+            </a:fld>
+            <a:endParaRPr lang="en-US"/>
+          </a:p>
+        </p:txBody>
+      </p:sp>
+      <p:sp>
+        <p:nvSpPr>
+          <p:cNvPr id="4" name="Slide Image Placeholder 3"/>
+          <p:cNvSpPr>
+            <a:spLocks noGrp="1" noRot="1" noChangeAspect="1"/>
+          </p:cNvSpPr>
+          <p:nvPr>
+            <p:ph type="sldImg" idx="2"/>
+          </p:nvPr>
+        </p:nvSpPr>
+        <p:spPr>
+          <a:xfrm>
+            <a:off x="685800" y="1143000"/>
+            <a:ext cx="5486400" cy="3086100"/>
+          </a:xfrm>
+          <a:prstGeom prst="rect">
+            <a:avLst/>
+          </a:prstGeom>
+          <a:noFill/>
+          <a:ln w="12700">
+            <a:solidFill>
+              <a:prstClr val="black"/>
+            </a:solidFill>
+          </a:ln>
+        </p:spPr>
+        <p:txBody>
+          <a:bodyPr vert="horz" lIns="91440" tIns="45720" rIns="91440" bIns="45720" rtlCol="0" anchor="ctr"/>
+          <a:lstStyle/>
+          <a:p>
+            <a:endParaRPr lang="en-US"/>
+          </a:p>
+        </p:txBody>
+      </p:sp>
+      <p:sp>
+        <p:nvSpPr>
+          <p:cNvPr id="5" name="Notes Placeholder 4"/>
+          <p:cNvSpPr>
+            <a:spLocks noGrp="1"/>
+          </p:cNvSpPr>
+          <p:nvPr>
+            <p:ph type="body" sz="quarter" idx="3"/>
+          </p:nvPr>
+        </p:nvSpPr>
+        <p:spPr>
+          <a:xfrm>
+            <a:off x="685800" y="4400550"/>
+            <a:ext cx="5486400" cy="3600450"/>
+          </a:xfrm>
+          <a:prstGeom prst="rect">
+            <a:avLst/>
+          </a:prstGeom>
+        </p:spPr>
+        <p:txBody>
+          <a:bodyPr vert="horz" lIns="91440" tIns="45720" rIns="91440" bIns="45720" rtlCol="0"/>
+          <a:lstStyle/>
+          <a:p>
+            <a:pPr lvl="0"/>
+            <a:r>
+              <a:rPr lang="en-US"/>
+              <a:t>Click to edit Master text styles</a:t>
+            </a:r>
+          </a:p>
+          <a:p>
+            <a:pPr lvl="1"/>
+            <a:r>
+              <a:rPr lang="en-US"/>
+              <a:t>Second level</a:t>
+            </a:r>
+          </a:p>
+          <a:p>
+            <a:pPr lvl="2"/>
+            <a:r>
+              <a:rPr lang="en-US"/>
+              <a:t>Third level</a:t>
+            </a:r>
+          </a:p>
+          <a:p>
+            <a:pPr lvl="3"/>
+            <a:r>
+              <a:rPr lang="en-US"/>
+              <a:t>Fourth level</a:t>
+            </a:r>
+          </a:p>
+          <a:p>
+            <a:pPr lvl="4"/>
+            <a:r>
+              <a:rPr lang="en-US"/>
+              <a:t>Fifth level</a:t>
+            </a:r>
+          </a:p>
+        </p:txBody>
+      </p:sp>
+      <p:sp>
+        <p:nvSpPr>
+          <p:cNvPr id="6" name="Footer Placeholder 5"/>
+          <p:cNvSpPr>
+            <a:spLocks noGrp="1"/>
+          </p:cNvSpPr>
+          <p:nvPr>
+            <p:ph type="ftr" sz="quarter" idx="4"/>
+          </p:nvPr>
+        </p:nvSpPr>
+        <p:spPr>
+          <a:xfrm>
+            <a:off x="0" y="8685213"/>
+            <a:ext cx="2971800" cy="458787"/>
+          </a:xfrm>
+          <a:prstGeom prst="rect">
+            <a:avLst/>
+          </a:prstGeom>
+        </p:spPr>
+        <p:txBody>
+          <a:bodyPr vert="horz" lIns="91440" tIns="45720" rIns="91440" bIns="45720" rtlCol="0" anchor="b"/>
+          <a:lstStyle>
+            <a:lvl1pPr algn="l">
+              <a:defRPr sz="1200"/>
+            </a:lvl1pPr>
+          </a:lstStyle>
+          <a:p>
+            <a:endParaRPr lang="en-US"/>
+          </a:p>
+        </p:txBody>
+      </p:sp>
+      <p:sp>
+        <p:nvSpPr>
+          <p:cNvPr id="7" name="Slide Number Placeholder 6"/>
+          <p:cNvSpPr>
+            <a:spLocks noGrp="1"/>
+          </p:cNvSpPr>
+          <p:nvPr>
+            <p:ph type="sldNum" sz="quarter" idx="5"/>
+          </p:nvPr>
+        </p:nvSpPr>
+        <p:spPr>
+          <a:xfrm>
+            <a:off x="3884613" y="8685213"/>
+            <a:ext cx="2971800" cy="458787"/>
+          </a:xfrm>
+          <a:prstGeom prst="rect">
+            <a:avLst/>
+          </a:prstGeom>
+        </p:spPr>
+        <p:txBody>
+          <a:bodyPr vert="horz" lIns="91440" tIns="45720" rIns="91440" bIns="45720" rtlCol="0" anchor="b"/>
+          <a:lstStyle>
+            <a:lvl1pPr algn="r">
+              <a:defRPr sz="1200"/>
+            </a:lvl1pPr>
+          </a:lstStyle>
+          <a:p>
+            <a:fld id="{CE5E9CC1-C706-0F49-92D6-E571CC5EEA8F}" type="slidenum">
+              <a:rPr lang="en-US"/>
+              <a:t>‹#›</a:t>
+            </a:fld>
+            <a:endParaRPr lang="en-US"/>
+          </a:p>
+        </p:txBody>
+      </p:sp>
     </p:spTree>
     <p:extLst>
       <p:ext uri="{BB962C8B-B14F-4D97-AF65-F5344CB8AC3E}">
-        <p14:creationId xmlns:p14="http://schemas.microsoft.com/office/powerpoint/2010/main" val="3546558148"/>
+        <p14:creationId xmlns:p14="http://schemas.microsoft.com/office/powerpoint/2010/main" val="1024086991"/>
       </p:ext>
     </p:extLst>
   </p:cSld>
@@ -309,6 +528,10 @@
           <a:bodyPr/>
           <a:lstStyle/>
           <a:p>
+            <a:r>
+              <a:rPr lang="en-US" dirty="0"/>
+              <a:t/>
+            </a:r>
             <a:endParaRPr lang="en-US" dirty="0"/>
           </a:p>
         </p:txBody>
@@ -393,6 +616,10 @@
           <a:bodyPr/>
           <a:lstStyle/>
           <a:p>
+            <a:r>
+              <a:rPr lang="en-US" dirty="0"/>
+              <a:t/>
+            </a:r>
             <a:endParaRPr lang="en-US" dirty="0"/>
           </a:p>
         </p:txBody>
@@ -477,6 +704,10 @@
           <a:bodyPr/>
           <a:lstStyle/>
           <a:p>
+            <a:r>
+              <a:rPr lang="en-US" dirty="0"/>
+              <a:t/>
+            </a:r>
             <a:endParaRPr lang="en-US" dirty="0"/>
           </a:p>
         </p:txBody>
@@ -561,6 +792,10 @@
           <a:bodyPr/>
           <a:lstStyle/>
           <a:p>
+            <a:r>
+              <a:rPr lang="en-US" dirty="0"/>
+              <a:t/>
+            </a:r>
             <a:endParaRPr lang="en-US" dirty="0"/>
           </a:p>
         </p:txBody>
@@ -645,6 +880,10 @@
           <a:bodyPr/>
           <a:lstStyle/>
           <a:p>
+            <a:r>
+              <a:rPr lang="en-US" dirty="0"/>
+              <a:t/>
+            </a:r>
             <a:endParaRPr lang="en-US" dirty="0"/>
           </a:p>
         </p:txBody>
@@ -729,6 +968,10 @@
           <a:bodyPr/>
           <a:lstStyle/>
           <a:p>
+            <a:r>
+              <a:rPr lang="en-US" dirty="0"/>
+              <a:t/>
+            </a:r>
             <a:endParaRPr lang="en-US" dirty="0"/>
           </a:p>
         </p:txBody>
@@ -813,6 +1056,10 @@
           <a:bodyPr/>
           <a:lstStyle/>
           <a:p>
+            <a:r>
+              <a:rPr lang="en-US" dirty="0"/>
+              <a:t/>
+            </a:r>
             <a:endParaRPr lang="en-US" dirty="0"/>
           </a:p>
         </p:txBody>
@@ -897,6 +1144,10 @@
           <a:bodyPr/>
           <a:lstStyle/>
           <a:p>
+            <a:r>
+              <a:rPr lang="en-US" dirty="0"/>
+              <a:t/>
+            </a:r>
             <a:endParaRPr lang="en-US" dirty="0"/>
           </a:p>
         </p:txBody>
@@ -981,6 +1232,10 @@
           <a:bodyPr/>
           <a:lstStyle/>
           <a:p>
+            <a:r>
+              <a:rPr lang="en-US" dirty="0"/>
+              <a:t/>
+            </a:r>
             <a:endParaRPr lang="en-US" dirty="0"/>
           </a:p>
         </p:txBody>
@@ -1065,6 +1320,10 @@
           <a:bodyPr/>
           <a:lstStyle/>
           <a:p>
+            <a:r>
+              <a:rPr lang="en-US" dirty="0"/>
+              <a:t/>
+            </a:r>
             <a:endParaRPr lang="en-US" dirty="0"/>
           </a:p>
         </p:txBody>
@@ -1149,6 +1408,10 @@
           <a:bodyPr/>
           <a:lstStyle/>
           <a:p>
+            <a:r>
+              <a:rPr lang="en-US" dirty="0"/>
+              <a:t/>
+            </a:r>
             <a:endParaRPr lang="en-US" dirty="0"/>
           </a:p>
         </p:txBody>
@@ -1233,6 +1496,10 @@
           <a:bodyPr/>
           <a:lstStyle/>
           <a:p>
+            <a:r>
+              <a:rPr lang="en-US" dirty="0"/>
+              <a:t/>
+            </a:r>
             <a:endParaRPr lang="en-US" dirty="0"/>
           </a:p>
         </p:txBody>
@@ -1317,6 +1584,10 @@
           <a:bodyPr/>
           <a:lstStyle/>
           <a:p>
+            <a:r>
+              <a:rPr lang="en-US" dirty="0"/>
+              <a:t/>
+            </a:r>
             <a:endParaRPr lang="en-US" dirty="0"/>
           </a:p>
         </p:txBody>
@@ -1401,6 +1672,10 @@
           <a:bodyPr/>
           <a:lstStyle/>
           <a:p>
+            <a:r>
+              <a:rPr lang="en-US" dirty="0"/>
+              <a:t/>
+            </a:r>
             <a:endParaRPr lang="en-US" dirty="0"/>
           </a:p>
         </p:txBody>
@@ -1485,6 +1760,10 @@
           <a:bodyPr/>
           <a:lstStyle/>
           <a:p>
+            <a:r>
+              <a:rPr lang="en-US" dirty="0"/>
+              <a:t/>
+            </a:r>
             <a:endParaRPr lang="en-US" dirty="0"/>
           </a:p>
         </p:txBody>
@@ -1569,6 +1848,10 @@
           <a:bodyPr/>
           <a:lstStyle/>
           <a:p>
+            <a:r>
+              <a:rPr lang="en-US" dirty="0"/>
+              <a:t/>
+            </a:r>
             <a:endParaRPr lang="en-US" dirty="0"/>
           </a:p>
         </p:txBody>
@@ -1653,6 +1936,10 @@
           <a:bodyPr/>
           <a:lstStyle/>
           <a:p>
+            <a:r>
+              <a:rPr lang="en-US" dirty="0"/>
+              <a:t/>
+            </a:r>
             <a:endParaRPr lang="en-US" dirty="0"/>
           </a:p>
         </p:txBody>
@@ -1737,6 +2024,10 @@
           <a:bodyPr/>
           <a:lstStyle/>
           <a:p>
+            <a:r>
+              <a:rPr lang="en-US" dirty="0"/>
+              <a:t/>
+            </a:r>
             <a:endParaRPr lang="en-US" dirty="0"/>
           </a:p>
         </p:txBody>
@@ -1821,6 +2112,10 @@
           <a:bodyPr/>
           <a:lstStyle/>
           <a:p>
+            <a:r>
+              <a:rPr lang="en-US" dirty="0"/>
+              <a:t/>
+            </a:r>
             <a:endParaRPr lang="en-US" dirty="0"/>
           </a:p>
         </p:txBody>
@@ -1905,6 +2200,10 @@
           <a:bodyPr/>
           <a:lstStyle/>
           <a:p>
+            <a:r>
+              <a:rPr lang="en-US" dirty="0"/>
+              <a:t/>
+            </a:r>
             <a:endParaRPr lang="en-US" dirty="0"/>
           </a:p>
         </p:txBody>
@@ -1989,6 +2288,10 @@
           <a:bodyPr/>
           <a:lstStyle/>
           <a:p>
+            <a:r>
+              <a:rPr lang="en-US" dirty="0"/>
+              <a:t/>
+            </a:r>
             <a:endParaRPr lang="en-US" dirty="0"/>
           </a:p>
         </p:txBody>
@@ -2073,6 +2376,10 @@
           <a:bodyPr/>
           <a:lstStyle/>
           <a:p>
+            <a:r>
+              <a:rPr lang="en-US" dirty="0"/>
+              <a:t/>
+            </a:r>
             <a:endParaRPr lang="en-US" dirty="0"/>
           </a:p>
         </p:txBody>
@@ -2157,6 +2464,10 @@
           <a:bodyPr/>
           <a:lstStyle/>
           <a:p>
+            <a:r>
+              <a:rPr lang="en-US" dirty="0"/>
+              <a:t/>
+            </a:r>
             <a:endParaRPr lang="en-US" dirty="0"/>
           </a:p>
         </p:txBody>
@@ -2241,6 +2552,10 @@
           <a:bodyPr/>
           <a:lstStyle/>
           <a:p>
+            <a:r>
+              <a:rPr lang="en-US" dirty="0"/>
+              <a:t/>
+            </a:r>
             <a:endParaRPr lang="en-US" dirty="0"/>
           </a:p>
         </p:txBody>
@@ -2325,6 +2640,10 @@
           <a:bodyPr/>
           <a:lstStyle/>
           <a:p>
+            <a:r>
+              <a:rPr lang="en-US" dirty="0"/>
+              <a:t/>
+            </a:r>
             <a:endParaRPr lang="en-US" dirty="0"/>
           </a:p>
         </p:txBody>
@@ -2409,6 +2728,10 @@
           <a:bodyPr/>
           <a:lstStyle/>
           <a:p>
+            <a:r>
+              <a:rPr lang="en-US" dirty="0"/>
+              <a:t/>
+            </a:r>
             <a:endParaRPr lang="en-US" dirty="0"/>
           </a:p>
         </p:txBody>
@@ -2493,6 +2816,10 @@
           <a:bodyPr/>
           <a:lstStyle/>
           <a:p>
+            <a:r>
+              <a:rPr lang="en-US" dirty="0"/>
+              <a:t/>
+            </a:r>
             <a:endParaRPr lang="en-US" dirty="0"/>
           </a:p>
         </p:txBody>
@@ -2577,6 +2904,10 @@
           <a:bodyPr/>
           <a:lstStyle/>
           <a:p>
+            <a:r>
+              <a:rPr lang="en-US" dirty="0"/>
+              <a:t/>
+            </a:r>
             <a:endParaRPr lang="en-US" dirty="0"/>
           </a:p>
         </p:txBody>
@@ -2661,6 +2992,10 @@
           <a:bodyPr/>
           <a:lstStyle/>
           <a:p>
+            <a:r>
+              <a:rPr lang="en-US" dirty="0"/>
+              <a:t/>
+            </a:r>
             <a:endParaRPr lang="en-US" dirty="0"/>
           </a:p>
         </p:txBody>
@@ -2743,7 +3078,7 @@
           </a:prstGeom>
           <a:extLst>
             <a:ext uri="{C572A759-6A51-4108-AA02-DFA0A04FC94B}">
-              <ma14:wrappingTextBoxFlag xmlns="" xmlns:ma14="http://schemas.microsoft.com/office/mac/drawingml/2011/main" val="0"/>
+              <ma14:wrappingTextBoxFlag xmlns:ma14="http://schemas.microsoft.com/office/mac/drawingml/2011/main" val="0"/>
             </a:ext>
           </a:extLst>
         </p:spPr>
@@ -2764,8 +3099,8 @@
           <a:p>
             <a:pPr algn="l"/>
             <a:fld id="{F7021451-1387-4CA6-816F-3879F97B5CBC}" type="slidenum">
-              <a:rPr lang="en-US" b="0"/>
-              <a:t>‹#›</a:t>
+              <a:rPr b="0" lang="en-US"/>
+              <a:t>1000</a:t>
             </a:fld>
             <a:endParaRPr lang="en-US"/>
           </a:p>
@@ -2787,7 +3122,6 @@
         <a:solidFill>
           <a:srgbClr val="000000"/>
         </a:solidFill>
-        <a:effectLst/>
       </p:bgPr>
     </p:bg>
     <p:spTree>
@@ -2806,14 +3140,14 @@
       </p:grpSpPr>
       <p:pic>
         <p:nvPicPr>
-          <p:cNvPr id="2" name="Image 0" descr="preencoded.png"/>
+          <p:cNvPr id="2" name="Image 0" descr="preencoded.png">    </p:cNvPr>
           <p:cNvPicPr>
             <a:picLocks noChangeAspect="1"/>
           </p:cNvPicPr>
           <p:nvPr/>
         </p:nvPicPr>
         <p:blipFill>
-          <a:blip r:embed="rId2"/>
+          <a:blip r:embed="rId1"/>
           <a:stretch>
             <a:fillRect/>
           </a:stretch>
@@ -2844,7 +3178,6 @@
         <a:solidFill>
           <a:srgbClr val="000000"/>
         </a:solidFill>
-        <a:effectLst/>
       </p:bgPr>
     </p:bg>
     <p:spTree>
@@ -2863,14 +3196,14 @@
       </p:grpSpPr>
       <p:pic>
         <p:nvPicPr>
-          <p:cNvPr id="2" name="Image 0" descr="preencoded.png"/>
+          <p:cNvPr id="2" name="Image 0" descr="preencoded.png">    </p:cNvPr>
           <p:cNvPicPr>
             <a:picLocks noChangeAspect="1"/>
           </p:cNvPicPr>
           <p:nvPr/>
         </p:nvPicPr>
         <p:blipFill>
-          <a:blip r:embed="rId2"/>
+          <a:blip r:embed="rId1"/>
           <a:stretch>
             <a:fillRect/>
           </a:stretch>
@@ -2901,7 +3234,6 @@
         <a:solidFill>
           <a:srgbClr val="000000"/>
         </a:solidFill>
-        <a:effectLst/>
       </p:bgPr>
     </p:bg>
     <p:spTree>
@@ -2920,14 +3252,14 @@
       </p:grpSpPr>
       <p:pic>
         <p:nvPicPr>
-          <p:cNvPr id="2" name="Image 0" descr="preencoded.png"/>
+          <p:cNvPr id="2" name="Image 0" descr="preencoded.png">    </p:cNvPr>
           <p:cNvPicPr>
             <a:picLocks noChangeAspect="1"/>
           </p:cNvPicPr>
           <p:nvPr/>
         </p:nvPicPr>
         <p:blipFill>
-          <a:blip r:embed="rId2"/>
+          <a:blip r:embed="rId1"/>
           <a:stretch>
             <a:fillRect/>
           </a:stretch>
@@ -2953,11 +3285,6 @@
 <file path=ppt/slideMasters/slideMaster1.xml><?xml version="1.0" encoding="utf-8"?>
 <p:sldMaster xmlns:a="http://schemas.openxmlformats.org/drawingml/2006/main" xmlns:r="http://schemas.openxmlformats.org/officeDocument/2006/relationships" xmlns:p="http://schemas.openxmlformats.org/presentationml/2006/main">
   <p:cSld>
-    <p:bg>
-      <p:bgRef idx="1001">
-        <a:schemeClr val="bg1"/>
-      </p:bgRef>
-    </p:bg>
     <p:spTree>
       <p:nvGrpSpPr>
         <p:cNvPr id="1" name=""/>
@@ -2992,7 +3319,7 @@
           </a:prstGeom>
           <a:extLst>
             <a:ext uri="{C572A759-6A51-4108-AA02-DFA0A04FC94B}">
-              <ma14:wrappingTextBoxFlag xmlns="" xmlns:ma14="http://schemas.microsoft.com/office/mac/drawingml/2011/main" val="0"/>
+              <ma14:wrappingTextBoxFlag xmlns:ma14="http://schemas.microsoft.com/office/mac/drawingml/2011/main" val="0"/>
             </a:ext>
           </a:extLst>
         </p:spPr>
@@ -3013,8 +3340,8 @@
           <a:p>
             <a:pPr algn="l"/>
             <a:fld id="{F7021451-1387-4CA6-816F-3879F97B5CBC}" type="slidenum">
-              <a:rPr lang="en-US" b="0"/>
-              <a:t>‹#›</a:t>
+              <a:rPr b="0" lang="en-US"/>
+              <a:t>null</a:t>
             </a:fld>
             <a:endParaRPr lang="en-US"/>
           </a:p>
@@ -3321,11 +3648,11 @@
           <a:bodyPr wrap="square" lIns="0" tIns="0" rIns="0" bIns="0" rtlCol="0" anchor="ctr"/>
           <a:lstStyle/>
           <a:p>
-            <a:pPr marL="0" indent="0">
-              <a:buNone/>
-            </a:pPr>
-            <a:r>
-              <a:rPr lang="en-US" sz="1200" b="1" kern="0" spc="400" dirty="0">
+            <a:pPr indent="0" marL="0">
+              <a:buNone/>
+            </a:pPr>
+            <a:r>
+              <a:rPr lang="en-US" sz="1200" b="1" spc="400" kern="0" dirty="0">
                 <a:solidFill>
                   <a:srgbClr val="FFFFFF"/>
                 </a:solidFill>
@@ -3360,11 +3687,11 @@
           <a:bodyPr wrap="square" lIns="0" tIns="0" rIns="0" bIns="0" rtlCol="0" anchor="ctr"/>
           <a:lstStyle/>
           <a:p>
-            <a:pPr marL="0" indent="0">
-              <a:buNone/>
-            </a:pPr>
-            <a:r>
-              <a:rPr lang="en-US" sz="1200" b="1" kern="0" spc="300" dirty="0">
+            <a:pPr indent="0" marL="0">
+              <a:buNone/>
+            </a:pPr>
+            <a:r>
+              <a:rPr lang="en-US" sz="1200" b="1" spc="300" kern="0" dirty="0">
                 <a:solidFill>
                   <a:srgbClr val="C4B3F5"/>
                 </a:solidFill>
@@ -3399,7 +3726,7 @@
           <a:bodyPr wrap="square" lIns="0" tIns="0" rIns="0" bIns="0" rtlCol="0" anchor="t"/>
           <a:lstStyle/>
           <a:p>
-            <a:pPr marL="0" indent="0">
+            <a:pPr indent="0" marL="0">
               <a:lnSpc>
                 <a:spcPct val="102000"/>
               </a:lnSpc>
@@ -3419,7 +3746,7 @@
             <a:endParaRPr lang="en-US" sz="3600" dirty="0"/>
           </a:p>
           <a:p>
-            <a:pPr marL="0" indent="0">
+            <a:pPr indent="0" marL="0">
               <a:lnSpc>
                 <a:spcPct val="102000"/>
               </a:lnSpc>
@@ -3461,7 +3788,7 @@
           <a:bodyPr wrap="square" lIns="0" tIns="0" rIns="0" bIns="0" rtlCol="0" anchor="ctr"/>
           <a:lstStyle/>
           <a:p>
-            <a:pPr marL="0" indent="0">
+            <a:pPr indent="0" marL="0">
               <a:lnSpc>
                 <a:spcPct val="120000"/>
               </a:lnSpc>
@@ -3529,7 +3856,7 @@
           <a:bodyPr wrap="square" lIns="0" tIns="0" rIns="0" bIns="0" rtlCol="0" anchor="ctr"/>
           <a:lstStyle/>
           <a:p>
-            <a:pPr marL="0" indent="0" algn="ctr">
+            <a:pPr algn="ctr" indent="0" marL="0">
               <a:buNone/>
             </a:pPr>
             <a:r>
@@ -3594,7 +3921,7 @@
           <a:bodyPr wrap="square" lIns="0" tIns="0" rIns="0" bIns="0" rtlCol="0" anchor="ctr"/>
           <a:lstStyle/>
           <a:p>
-            <a:pPr marL="0" indent="0" algn="ctr">
+            <a:pPr algn="ctr" indent="0" marL="0">
               <a:buNone/>
             </a:pPr>
             <a:r>
@@ -3659,7 +3986,7 @@
           <a:bodyPr wrap="square" lIns="0" tIns="0" rIns="0" bIns="0" rtlCol="0" anchor="ctr"/>
           <a:lstStyle/>
           <a:p>
-            <a:pPr marL="0" indent="0" algn="ctr">
+            <a:pPr algn="ctr" indent="0" marL="0">
               <a:buNone/>
             </a:pPr>
             <a:r>
@@ -3720,7 +4047,7 @@
           <a:bodyPr wrap="square" lIns="0" tIns="0" rIns="0" bIns="0" rtlCol="0" anchor="ctr"/>
           <a:lstStyle/>
           <a:p>
-            <a:pPr marL="0" indent="0" algn="ctr">
+            <a:pPr algn="ctr" indent="0" marL="0">
               <a:buNone/>
             </a:pPr>
             <a:r>
@@ -3785,7 +4112,7 @@
           <a:bodyPr wrap="square" lIns="0" tIns="0" rIns="0" bIns="0" rtlCol="0" anchor="ctr"/>
           <a:lstStyle/>
           <a:p>
-            <a:pPr marL="0" indent="0" algn="ctr">
+            <a:pPr algn="ctr" indent="0" marL="0">
               <a:buNone/>
             </a:pPr>
             <a:r>
@@ -3850,7 +4177,7 @@
           <a:bodyPr wrap="square" lIns="0" tIns="0" rIns="0" bIns="0" rtlCol="0" anchor="ctr"/>
           <a:lstStyle/>
           <a:p>
-            <a:pPr marL="0" indent="0" algn="ctr">
+            <a:pPr algn="ctr" indent="0" marL="0">
               <a:buNone/>
             </a:pPr>
             <a:r>
@@ -3936,7 +4263,7 @@
           <a:bodyPr wrap="square" lIns="0" tIns="0" rIns="0" bIns="0" rtlCol="0" anchor="ctr"/>
           <a:lstStyle/>
           <a:p>
-            <a:pPr marL="0" indent="0" algn="l">
+            <a:pPr algn="l" indent="0" marL="0">
               <a:buNone/>
             </a:pPr>
             <a:r>
@@ -3975,7 +4302,7 @@
           <a:bodyPr wrap="square" lIns="0" tIns="0" rIns="0" bIns="0" rtlCol="0" anchor="ctr"/>
           <a:lstStyle/>
           <a:p>
-            <a:pPr marL="0" indent="0">
+            <a:pPr indent="0" marL="0">
               <a:buNone/>
             </a:pPr>
             <a:r>
@@ -4041,11 +4368,11 @@
           <a:bodyPr wrap="square" lIns="0" tIns="0" rIns="0" bIns="0" rtlCol="0" anchor="ctr"/>
           <a:lstStyle/>
           <a:p>
-            <a:pPr marL="0" indent="0" algn="ctr">
-              <a:buNone/>
-            </a:pPr>
-            <a:r>
-              <a:rPr lang="en-US" sz="900" b="1" kern="0" spc="100" dirty="0">
+            <a:pPr algn="ctr" indent="0" marL="0">
+              <a:buNone/>
+            </a:pPr>
+            <a:r>
+              <a:rPr lang="en-US" sz="900" b="1" spc="100" kern="0" dirty="0">
                 <a:solidFill>
                   <a:srgbClr val="5A05F4"/>
                 </a:solidFill>
@@ -4061,14 +4388,14 @@
       </p:sp>
       <p:pic>
         <p:nvPicPr>
-          <p:cNvPr id="7" name="Image 0" descr="preencoded.png"/>
+          <p:cNvPr id="7" name="Image 0" descr="preencoded.png">    </p:cNvPr>
           <p:cNvPicPr>
             <a:picLocks noChangeAspect="1"/>
           </p:cNvPicPr>
           <p:nvPr/>
         </p:nvPicPr>
         <p:blipFill>
-          <a:blip r:embed="rId3"/>
+          <a:blip r:embed="rId1"/>
           <a:stretch>
             <a:fillRect/>
           </a:stretch>
@@ -4131,7 +4458,7 @@
           <a:bodyPr wrap="square" lIns="0" tIns="0" rIns="0" bIns="0" rtlCol="0" anchor="t"/>
           <a:lstStyle/>
           <a:p>
-            <a:pPr marL="0" indent="0">
+            <a:pPr indent="0" marL="0">
               <a:lnSpc>
                 <a:spcPct val="130000"/>
               </a:lnSpc>
@@ -4151,7 +4478,7 @@
             <a:endParaRPr lang="en-US" sz="1150" dirty="0"/>
           </a:p>
           <a:p>
-            <a:pPr marL="0" indent="0">
+            <a:pPr indent="0" marL="0">
               <a:lnSpc>
                 <a:spcPct val="130000"/>
               </a:lnSpc>
@@ -4171,7 +4498,7 @@
             <a:endParaRPr lang="en-US" sz="1150" dirty="0"/>
           </a:p>
           <a:p>
-            <a:pPr marL="0" indent="0">
+            <a:pPr indent="0" marL="0">
               <a:lnSpc>
                 <a:spcPct val="130000"/>
               </a:lnSpc>
@@ -4191,7 +4518,7 @@
             <a:endParaRPr lang="en-US" sz="1150" dirty="0"/>
           </a:p>
           <a:p>
-            <a:pPr marL="0" indent="0">
+            <a:pPr indent="0" marL="0">
               <a:lnSpc>
                 <a:spcPct val="130000"/>
               </a:lnSpc>
@@ -4211,7 +4538,7 @@
             <a:endParaRPr lang="en-US" sz="1150" dirty="0"/>
           </a:p>
           <a:p>
-            <a:pPr marL="0" indent="0">
+            <a:pPr indent="0" marL="0">
               <a:lnSpc>
                 <a:spcPct val="130000"/>
               </a:lnSpc>
@@ -4231,7 +4558,7 @@
             <a:endParaRPr lang="en-US" sz="1150" dirty="0"/>
           </a:p>
           <a:p>
-            <a:pPr marL="0" indent="0">
+            <a:pPr indent="0" marL="0">
               <a:lnSpc>
                 <a:spcPct val="130000"/>
               </a:lnSpc>
@@ -4251,7 +4578,7 @@
             <a:endParaRPr lang="en-US" sz="1150" dirty="0"/>
           </a:p>
           <a:p>
-            <a:pPr marL="0" indent="0">
+            <a:pPr indent="0" marL="0">
               <a:lnSpc>
                 <a:spcPct val="130000"/>
               </a:lnSpc>
@@ -4271,7 +4598,7 @@
             <a:endParaRPr lang="en-US" sz="1150" dirty="0"/>
           </a:p>
           <a:p>
-            <a:pPr marL="0" indent="0">
+            <a:pPr indent="0" marL="0">
               <a:lnSpc>
                 <a:spcPct val="130000"/>
               </a:lnSpc>
@@ -4355,7 +4682,7 @@
           <a:bodyPr wrap="square" lIns="0" tIns="0" rIns="0" bIns="0" rtlCol="0" anchor="ctr"/>
           <a:lstStyle/>
           <a:p>
-            <a:pPr marL="0" indent="0" algn="ctr">
+            <a:pPr algn="ctr" indent="0" marL="0">
               <a:buNone/>
             </a:pPr>
             <a:r>
@@ -4394,7 +4721,7 @@
           <a:bodyPr wrap="square" lIns="0" tIns="0" rIns="0" bIns="0" rtlCol="0" anchor="ctr"/>
           <a:lstStyle/>
           <a:p>
-            <a:pPr marL="0" indent="0">
+            <a:pPr indent="0" marL="0">
               <a:buNone/>
             </a:pPr>
             <a:r>
@@ -4433,7 +4760,7 @@
           <a:bodyPr wrap="square" lIns="0" tIns="0" rIns="0" bIns="0" rtlCol="0" anchor="t"/>
           <a:lstStyle/>
           <a:p>
-            <a:pPr marL="0" indent="0">
+            <a:pPr indent="0" marL="0">
               <a:lnSpc>
                 <a:spcPct val="108000"/>
               </a:lnSpc>
@@ -4517,7 +4844,7 @@
           <a:bodyPr wrap="square" lIns="0" tIns="0" rIns="0" bIns="0" rtlCol="0" anchor="ctr"/>
           <a:lstStyle/>
           <a:p>
-            <a:pPr marL="0" indent="0" algn="ctr">
+            <a:pPr algn="ctr" indent="0" marL="0">
               <a:buNone/>
             </a:pPr>
             <a:r>
@@ -4556,7 +4883,7 @@
           <a:bodyPr wrap="square" lIns="0" tIns="0" rIns="0" bIns="0" rtlCol="0" anchor="ctr"/>
           <a:lstStyle/>
           <a:p>
-            <a:pPr marL="0" indent="0">
+            <a:pPr indent="0" marL="0">
               <a:buNone/>
             </a:pPr>
             <a:r>
@@ -4595,7 +4922,7 @@
           <a:bodyPr wrap="square" lIns="0" tIns="0" rIns="0" bIns="0" rtlCol="0" anchor="t"/>
           <a:lstStyle/>
           <a:p>
-            <a:pPr marL="0" indent="0">
+            <a:pPr indent="0" marL="0">
               <a:lnSpc>
                 <a:spcPct val="108000"/>
               </a:lnSpc>
@@ -4679,7 +5006,7 @@
           <a:bodyPr wrap="square" lIns="0" tIns="0" rIns="0" bIns="0" rtlCol="0" anchor="ctr"/>
           <a:lstStyle/>
           <a:p>
-            <a:pPr marL="0" indent="0" algn="ctr">
+            <a:pPr algn="ctr" indent="0" marL="0">
               <a:buNone/>
             </a:pPr>
             <a:r>
@@ -4718,7 +5045,7 @@
           <a:bodyPr wrap="square" lIns="0" tIns="0" rIns="0" bIns="0" rtlCol="0" anchor="ctr"/>
           <a:lstStyle/>
           <a:p>
-            <a:pPr marL="0" indent="0">
+            <a:pPr indent="0" marL="0">
               <a:buNone/>
             </a:pPr>
             <a:r>
@@ -4757,7 +5084,7 @@
           <a:bodyPr wrap="square" lIns="0" tIns="0" rIns="0" bIns="0" rtlCol="0" anchor="t"/>
           <a:lstStyle/>
           <a:p>
-            <a:pPr marL="0" indent="0">
+            <a:pPr indent="0" marL="0">
               <a:lnSpc>
                 <a:spcPct val="108000"/>
               </a:lnSpc>
@@ -4798,7 +5125,7 @@
           </a:prstGeom>
           <a:extLst>
             <a:ext uri="{C572A759-6A51-4108-AA02-DFA0A04FC94B}">
-              <ma14:wrappingTextBoxFlag xmlns="" xmlns:ma14="http://schemas.microsoft.com/office/mac/drawingml/2011/main" val="0"/>
+              <ma14:wrappingTextBoxFlag xmlns:ma14="http://schemas.microsoft.com/office/mac/drawingml/2011/main" val="0"/>
             </a:ext>
           </a:extLst>
         </p:spPr>
@@ -4819,7 +5146,7 @@
           <a:p>
             <a:pPr algn="l"/>
             <a:fld id="{F7021451-1387-4CA6-816F-3879F97B5CBC}" type="slidenum">
-              <a:rPr lang="en-US" b="0"/>
+              <a:rPr b="0" lang="en-US"/>
               <a:t>10</a:t>
             </a:fld>
             <a:endParaRPr lang="en-US"/>
@@ -4894,7 +5221,7 @@
           <a:bodyPr wrap="square" lIns="0" tIns="0" rIns="0" bIns="0" rtlCol="0" anchor="ctr"/>
           <a:lstStyle/>
           <a:p>
-            <a:pPr marL="0" indent="0" algn="l">
+            <a:pPr algn="l" indent="0" marL="0">
               <a:buNone/>
             </a:pPr>
             <a:r>
@@ -4933,7 +5260,7 @@
           <a:bodyPr wrap="square" lIns="0" tIns="0" rIns="0" bIns="0" rtlCol="0" anchor="ctr"/>
           <a:lstStyle/>
           <a:p>
-            <a:pPr marL="0" indent="0">
+            <a:pPr indent="0" marL="0">
               <a:buNone/>
             </a:pPr>
             <a:r>
@@ -4999,11 +5326,11 @@
           <a:bodyPr wrap="square" lIns="0" tIns="0" rIns="0" bIns="0" rtlCol="0" anchor="ctr"/>
           <a:lstStyle/>
           <a:p>
-            <a:pPr marL="0" indent="0" algn="ctr">
-              <a:buNone/>
-            </a:pPr>
-            <a:r>
-              <a:rPr lang="en-US" sz="900" b="1" kern="0" spc="100" dirty="0">
+            <a:pPr algn="ctr" indent="0" marL="0">
+              <a:buNone/>
+            </a:pPr>
+            <a:r>
+              <a:rPr lang="en-US" sz="900" b="1" spc="100" kern="0" dirty="0">
                 <a:solidFill>
                   <a:srgbClr val="5A05F4"/>
                 </a:solidFill>
@@ -5019,14 +5346,14 @@
       </p:sp>
       <p:pic>
         <p:nvPicPr>
-          <p:cNvPr id="7" name="Image 0" descr="preencoded.png"/>
+          <p:cNvPr id="7" name="Image 0" descr="preencoded.png">    </p:cNvPr>
           <p:cNvPicPr>
             <a:picLocks noChangeAspect="1"/>
           </p:cNvPicPr>
           <p:nvPr/>
         </p:nvPicPr>
         <p:blipFill>
-          <a:blip r:embed="rId3"/>
+          <a:blip r:embed="rId1"/>
           <a:stretch>
             <a:fillRect/>
           </a:stretch>
@@ -5057,34 +5384,16 @@
         </p:nvGraphicFramePr>
         <p:xfrm>
           <a:off x="566928" y="1737360"/>
-          <a:ext cx="11064240" cy="2834640"/>
+          <a:ext cx="11064240" cy="914400"/>
         </p:xfrm>
         <a:graphic>
           <a:graphicData uri="http://schemas.openxmlformats.org/drawingml/2006/table">
             <a:tbl>
               <a:tblPr/>
               <a:tblGrid>
-                <a:gridCol w="3840480">
-                  <a:extLst>
-                    <a:ext uri="{9D8B030D-6E8A-4147-A177-3AD203B41FA5}">
-                      <a16:colId xmlns:a16="http://schemas.microsoft.com/office/drawing/2014/main" val="20000"/>
-                    </a:ext>
-                  </a:extLst>
-                </a:gridCol>
-                <a:gridCol w="2743200">
-                  <a:extLst>
-                    <a:ext uri="{9D8B030D-6E8A-4147-A177-3AD203B41FA5}">
-                      <a16:colId xmlns:a16="http://schemas.microsoft.com/office/drawing/2014/main" val="20001"/>
-                    </a:ext>
-                  </a:extLst>
-                </a:gridCol>
-                <a:gridCol w="4480560">
-                  <a:extLst>
-                    <a:ext uri="{9D8B030D-6E8A-4147-A177-3AD203B41FA5}">
-                      <a16:colId xmlns:a16="http://schemas.microsoft.com/office/drawing/2014/main" val="20002"/>
-                    </a:ext>
-                  </a:extLst>
-                </a:gridCol>
+                <a:gridCol w="3840480"/>
+                <a:gridCol w="2743200"/>
+                <a:gridCol w="4480560"/>
               </a:tblGrid>
               <a:tr h="566928">
                 <a:tc>
@@ -5092,11 +5401,11 @@
                     <a:bodyPr/>
                     <a:lstStyle/>
                     <a:p>
-                      <a:pPr marL="0" indent="0" algn="ctr">
+                      <a:pPr algn="ctr" indent="0" marL="0">
                         <a:buNone/>
                       </a:pPr>
                       <a:r>
-                        <a:rPr lang="en-US" sz="900" b="1" kern="0" spc="100" dirty="0">
+                        <a:rPr lang="en-US" sz="900" b="1" spc="100" kern="0" dirty="0">
                           <a:solidFill>
                             <a:srgbClr val="FFFFFF"/>
                           </a:solidFill>
@@ -5160,11 +5469,11 @@
                     <a:bodyPr/>
                     <a:lstStyle/>
                     <a:p>
-                      <a:pPr marL="0" indent="0" algn="ctr">
+                      <a:pPr algn="ctr" indent="0" marL="0">
                         <a:buNone/>
                       </a:pPr>
                       <a:r>
-                        <a:rPr lang="en-US" sz="900" b="1" kern="0" spc="100" dirty="0">
+                        <a:rPr lang="en-US" sz="900" b="1" spc="100" kern="0" dirty="0">
                           <a:solidFill>
                             <a:srgbClr val="FFFFFF"/>
                           </a:solidFill>
@@ -5228,11 +5537,11 @@
                     <a:bodyPr/>
                     <a:lstStyle/>
                     <a:p>
-                      <a:pPr marL="0" indent="0" algn="ctr">
+                      <a:pPr algn="ctr" indent="0" marL="0">
                         <a:buNone/>
                       </a:pPr>
                       <a:r>
-                        <a:rPr lang="en-US" sz="900" b="1" kern="0" spc="100" dirty="0">
+                        <a:rPr lang="en-US" sz="900" b="1" spc="100" kern="0" dirty="0">
                           <a:solidFill>
                             <a:srgbClr val="FFFFFF"/>
                           </a:solidFill>
@@ -5291,11 +5600,6 @@
                     </a:solidFill>
                   </a:tcPr>
                 </a:tc>
-                <a:extLst>
-                  <a:ext uri="{0D108BD9-81ED-4DB2-BD59-A6C34878D82A}">
-                    <a16:rowId xmlns:a16="http://schemas.microsoft.com/office/drawing/2014/main" val="10000"/>
-                  </a:ext>
-                </a:extLst>
               </a:tr>
               <a:tr h="566928">
                 <a:tc>
@@ -5303,7 +5607,7 @@
                     <a:bodyPr/>
                     <a:lstStyle/>
                     <a:p>
-                      <a:pPr marL="0" indent="0">
+                      <a:pPr indent="0" marL="0">
                         <a:buNone/>
                       </a:pPr>
                       <a:r>
@@ -5371,7 +5675,7 @@
                     <a:bodyPr/>
                     <a:lstStyle/>
                     <a:p>
-                      <a:pPr marL="0" indent="0">
+                      <a:pPr indent="0" marL="0">
                         <a:buNone/>
                       </a:pPr>
                       <a:r>
@@ -5439,7 +5743,7 @@
                     <a:bodyPr/>
                     <a:lstStyle/>
                     <a:p>
-                      <a:pPr marL="0" indent="0">
+                      <a:pPr indent="0" marL="0">
                         <a:buNone/>
                       </a:pPr>
                       <a:r>
@@ -5502,11 +5806,6 @@
                     </a:solidFill>
                   </a:tcPr>
                 </a:tc>
-                <a:extLst>
-                  <a:ext uri="{0D108BD9-81ED-4DB2-BD59-A6C34878D82A}">
-                    <a16:rowId xmlns:a16="http://schemas.microsoft.com/office/drawing/2014/main" val="10001"/>
-                  </a:ext>
-                </a:extLst>
               </a:tr>
               <a:tr h="566928">
                 <a:tc>
@@ -5514,7 +5813,7 @@
                     <a:bodyPr/>
                     <a:lstStyle/>
                     <a:p>
-                      <a:pPr marL="0" indent="0">
+                      <a:pPr indent="0" marL="0">
                         <a:buNone/>
                       </a:pPr>
                       <a:r>
@@ -5582,7 +5881,7 @@
                     <a:bodyPr/>
                     <a:lstStyle/>
                     <a:p>
-                      <a:pPr marL="0" indent="0">
+                      <a:pPr indent="0" marL="0">
                         <a:buNone/>
                       </a:pPr>
                       <a:r>
@@ -5650,7 +5949,7 @@
                     <a:bodyPr/>
                     <a:lstStyle/>
                     <a:p>
-                      <a:pPr marL="0" indent="0">
+                      <a:pPr indent="0" marL="0">
                         <a:buNone/>
                       </a:pPr>
                       <a:r>
@@ -5713,11 +6012,6 @@
                     </a:solidFill>
                   </a:tcPr>
                 </a:tc>
-                <a:extLst>
-                  <a:ext uri="{0D108BD9-81ED-4DB2-BD59-A6C34878D82A}">
-                    <a16:rowId xmlns:a16="http://schemas.microsoft.com/office/drawing/2014/main" val="10002"/>
-                  </a:ext>
-                </a:extLst>
               </a:tr>
               <a:tr h="566928">
                 <a:tc>
@@ -5725,7 +6019,7 @@
                     <a:bodyPr/>
                     <a:lstStyle/>
                     <a:p>
-                      <a:pPr marL="0" indent="0">
+                      <a:pPr indent="0" marL="0">
                         <a:buNone/>
                       </a:pPr>
                       <a:r>
@@ -5793,7 +6087,7 @@
                     <a:bodyPr/>
                     <a:lstStyle/>
                     <a:p>
-                      <a:pPr marL="0" indent="0">
+                      <a:pPr indent="0" marL="0">
                         <a:buNone/>
                       </a:pPr>
                       <a:r>
@@ -5861,7 +6155,7 @@
                     <a:bodyPr/>
                     <a:lstStyle/>
                     <a:p>
-                      <a:pPr marL="0" indent="0">
+                      <a:pPr indent="0" marL="0">
                         <a:buNone/>
                       </a:pPr>
                       <a:r>
@@ -5924,11 +6218,6 @@
                     </a:solidFill>
                   </a:tcPr>
                 </a:tc>
-                <a:extLst>
-                  <a:ext uri="{0D108BD9-81ED-4DB2-BD59-A6C34878D82A}">
-                    <a16:rowId xmlns:a16="http://schemas.microsoft.com/office/drawing/2014/main" val="10003"/>
-                  </a:ext>
-                </a:extLst>
               </a:tr>
               <a:tr h="566928">
                 <a:tc>
@@ -5936,7 +6225,7 @@
                     <a:bodyPr/>
                     <a:lstStyle/>
                     <a:p>
-                      <a:pPr marL="0" indent="0">
+                      <a:pPr indent="0" marL="0">
                         <a:buNone/>
                       </a:pPr>
                       <a:r>
@@ -6004,7 +6293,7 @@
                     <a:bodyPr/>
                     <a:lstStyle/>
                     <a:p>
-                      <a:pPr marL="0" indent="0">
+                      <a:pPr indent="0" marL="0">
                         <a:buNone/>
                       </a:pPr>
                       <a:r>
@@ -6072,7 +6361,7 @@
                     <a:bodyPr/>
                     <a:lstStyle/>
                     <a:p>
-                      <a:pPr marL="0" indent="0">
+                      <a:pPr indent="0" marL="0">
                         <a:buNone/>
                       </a:pPr>
                       <a:r>
@@ -6135,11 +6424,6 @@
                     </a:solidFill>
                   </a:tcPr>
                 </a:tc>
-                <a:extLst>
-                  <a:ext uri="{0D108BD9-81ED-4DB2-BD59-A6C34878D82A}">
-                    <a16:rowId xmlns:a16="http://schemas.microsoft.com/office/drawing/2014/main" val="10004"/>
-                  </a:ext>
-                </a:extLst>
               </a:tr>
             </a:tbl>
           </a:graphicData>
@@ -6174,14 +6458,34 @@
       </p:sp>
       <p:sp>
         <p:nvSpPr>
-          <p:cNvPr id="10" name="Text 6"/>
-          <p:cNvSpPr/>
-          <p:nvPr/>
-        </p:nvSpPr>
-        <p:spPr>
-          <a:xfrm>
-            <a:off x="786384" y="4882896"/>
-            <a:ext cx="10625328" cy="219456"/>
+          <p:cNvPr id="10" name="Shape 6"/>
+          <p:cNvSpPr/>
+          <p:nvPr/>
+        </p:nvSpPr>
+        <p:spPr>
+          <a:xfrm>
+            <a:off x="749808" y="5262372"/>
+            <a:ext cx="310896" cy="310896"/>
+          </a:xfrm>
+          <a:prstGeom prst="ellipse">
+            <a:avLst/>
+          </a:prstGeom>
+          <a:solidFill>
+            <a:srgbClr val="106B41"/>
+          </a:solidFill>
+          <a:ln/>
+        </p:spPr>
+      </p:sp>
+      <p:sp>
+        <p:nvSpPr>
+          <p:cNvPr id="11" name="Text 7"/>
+          <p:cNvSpPr/>
+          <p:nvPr/>
+        </p:nvSpPr>
+        <p:spPr>
+          <a:xfrm>
+            <a:off x="749808" y="5262372"/>
+            <a:ext cx="310896" cy="310896"/>
           </a:xfrm>
           <a:prstGeom prst="rect">
             <a:avLst/>
@@ -6193,11 +6497,50 @@
           <a:bodyPr wrap="square" lIns="0" tIns="0" rIns="0" bIns="0" rtlCol="0" anchor="ctr"/>
           <a:lstStyle/>
           <a:p>
-            <a:pPr marL="0" indent="0">
-              <a:buNone/>
-            </a:pPr>
-            <a:r>
-              <a:rPr lang="en-US" sz="950" b="1" kern="0" spc="150" dirty="0">
+            <a:pPr algn="ctr" indent="0" marL="0">
+              <a:buNone/>
+            </a:pPr>
+            <a:r>
+              <a:rPr lang="en-US" sz="1200" b="1" dirty="0">
+                <a:solidFill>
+                  <a:srgbClr val="FFFFFF"/>
+                </a:solidFill>
+                <a:latin typeface="Arial" pitchFamily="34" charset="0"/>
+                <a:ea typeface="Arial" pitchFamily="34" charset="-122"/>
+                <a:cs typeface="Arial" pitchFamily="34" charset="-120"/>
+              </a:rPr>
+              <a:t>◆</a:t>
+            </a:r>
+            <a:endParaRPr lang="en-US" sz="1200" dirty="0"/>
+          </a:p>
+        </p:txBody>
+      </p:sp>
+      <p:sp>
+        <p:nvSpPr>
+          <p:cNvPr id="12" name="Text 8"/>
+          <p:cNvSpPr/>
+          <p:nvPr/>
+        </p:nvSpPr>
+        <p:spPr>
+          <a:xfrm>
+            <a:off x="1243584" y="4882896"/>
+            <a:ext cx="10168128" cy="219456"/>
+          </a:xfrm>
+          <a:prstGeom prst="rect">
+            <a:avLst/>
+          </a:prstGeom>
+          <a:noFill/>
+          <a:ln/>
+        </p:spPr>
+        <p:txBody>
+          <a:bodyPr wrap="square" lIns="0" tIns="0" rIns="0" bIns="0" rtlCol="0" anchor="ctr"/>
+          <a:lstStyle/>
+          <a:p>
+            <a:pPr indent="0" marL="0">
+              <a:buNone/>
+            </a:pPr>
+            <a:r>
+              <a:rPr lang="en-US" sz="950" b="1" spc="150" kern="0" dirty="0">
                 <a:solidFill>
                   <a:srgbClr val="106B41"/>
                 </a:solidFill>
@@ -6213,14 +6556,14 @@
       </p:sp>
       <p:sp>
         <p:nvSpPr>
-          <p:cNvPr id="11" name="Text 7"/>
-          <p:cNvSpPr/>
-          <p:nvPr/>
-        </p:nvSpPr>
-        <p:spPr>
-          <a:xfrm>
-            <a:off x="786384" y="5138928"/>
-            <a:ext cx="10625328" cy="813816"/>
+          <p:cNvPr id="13" name="Text 9"/>
+          <p:cNvSpPr/>
+          <p:nvPr/>
+        </p:nvSpPr>
+        <p:spPr>
+          <a:xfrm>
+            <a:off x="1243584" y="5138928"/>
+            <a:ext cx="10168128" cy="813816"/>
           </a:xfrm>
           <a:prstGeom prst="rect">
             <a:avLst/>
@@ -6232,7 +6575,7 @@
           <a:bodyPr wrap="square" lIns="0" tIns="0" rIns="0" bIns="0" rtlCol="0" anchor="ctr"/>
           <a:lstStyle/>
           <a:p>
-            <a:pPr marL="0" indent="0">
+            <a:pPr indent="0" marL="0">
               <a:lnSpc>
                 <a:spcPct val="112000"/>
               </a:lnSpc>
@@ -6273,7 +6616,7 @@
           </a:prstGeom>
           <a:extLst>
             <a:ext uri="{C572A759-6A51-4108-AA02-DFA0A04FC94B}">
-              <ma14:wrappingTextBoxFlag xmlns="" xmlns:ma14="http://schemas.microsoft.com/office/mac/drawingml/2011/main" val="0"/>
+              <ma14:wrappingTextBoxFlag xmlns:ma14="http://schemas.microsoft.com/office/mac/drawingml/2011/main" val="0"/>
             </a:ext>
           </a:extLst>
         </p:spPr>
@@ -6294,7 +6637,7 @@
           <a:p>
             <a:pPr algn="l"/>
             <a:fld id="{F7021451-1387-4CA6-816F-3879F97B5CBC}" type="slidenum">
-              <a:rPr lang="en-US" b="0"/>
+              <a:rPr b="0" lang="en-US"/>
               <a:t>11</a:t>
             </a:fld>
             <a:endParaRPr lang="en-US"/>
@@ -6369,7 +6712,7 @@
           <a:bodyPr wrap="square" lIns="0" tIns="0" rIns="0" bIns="0" rtlCol="0" anchor="ctr"/>
           <a:lstStyle/>
           <a:p>
-            <a:pPr marL="0" indent="0" algn="l">
+            <a:pPr algn="l" indent="0" marL="0">
               <a:buNone/>
             </a:pPr>
             <a:r>
@@ -6408,7 +6751,7 @@
           <a:bodyPr wrap="square" lIns="0" tIns="0" rIns="0" bIns="0" rtlCol="0" anchor="ctr"/>
           <a:lstStyle/>
           <a:p>
-            <a:pPr marL="0" indent="0">
+            <a:pPr indent="0" marL="0">
               <a:buNone/>
             </a:pPr>
             <a:r>
@@ -6474,11 +6817,11 @@
           <a:bodyPr wrap="square" lIns="0" tIns="0" rIns="0" bIns="0" rtlCol="0" anchor="ctr"/>
           <a:lstStyle/>
           <a:p>
-            <a:pPr marL="0" indent="0" algn="ctr">
-              <a:buNone/>
-            </a:pPr>
-            <a:r>
-              <a:rPr lang="en-US" sz="900" b="1" kern="0" spc="100" dirty="0">
+            <a:pPr algn="ctr" indent="0" marL="0">
+              <a:buNone/>
+            </a:pPr>
+            <a:r>
+              <a:rPr lang="en-US" sz="900" b="1" spc="100" kern="0" dirty="0">
                 <a:solidFill>
                   <a:srgbClr val="5A05F4"/>
                 </a:solidFill>
@@ -6494,14 +6837,14 @@
       </p:sp>
       <p:pic>
         <p:nvPicPr>
-          <p:cNvPr id="7" name="Image 0" descr="preencoded.png"/>
+          <p:cNvPr id="7" name="Image 0" descr="preencoded.png">    </p:cNvPr>
           <p:cNvPicPr>
             <a:picLocks noChangeAspect="1"/>
           </p:cNvPicPr>
           <p:nvPr/>
         </p:nvPicPr>
         <p:blipFill>
-          <a:blip r:embed="rId3"/>
+          <a:blip r:embed="rId1"/>
           <a:stretch>
             <a:fillRect/>
           </a:stretch>
@@ -6559,7 +6902,7 @@
           <a:bodyPr wrap="square" lIns="0" tIns="0" rIns="0" bIns="0" rtlCol="0" anchor="ctr"/>
           <a:lstStyle/>
           <a:p>
-            <a:pPr marL="0" indent="0" algn="ctr">
+            <a:pPr algn="ctr" indent="0" marL="0">
               <a:buNone/>
             </a:pPr>
             <a:r>
@@ -6663,7 +7006,7 @@
           <a:bodyPr wrap="square" lIns="0" tIns="0" rIns="0" bIns="0" rtlCol="0" anchor="ctr"/>
           <a:lstStyle/>
           <a:p>
-            <a:pPr marL="0" indent="0" algn="ctr">
+            <a:pPr algn="ctr" indent="0" marL="0">
               <a:buNone/>
             </a:pPr>
             <a:r>
@@ -6767,7 +7110,7 @@
           <a:bodyPr wrap="square" lIns="0" tIns="0" rIns="0" bIns="0" rtlCol="0" anchor="ctr"/>
           <a:lstStyle/>
           <a:p>
-            <a:pPr marL="0" indent="0" algn="ctr">
+            <a:pPr algn="ctr" indent="0" marL="0">
               <a:buNone/>
             </a:pPr>
             <a:r>
@@ -6871,7 +7214,7 @@
           <a:bodyPr wrap="square" lIns="0" tIns="0" rIns="0" bIns="0" rtlCol="0" anchor="ctr"/>
           <a:lstStyle/>
           <a:p>
-            <a:pPr marL="0" indent="0" algn="ctr">
+            <a:pPr algn="ctr" indent="0" marL="0">
               <a:buNone/>
             </a:pPr>
             <a:r>
@@ -6952,7 +7295,7 @@
           <a:bodyPr wrap="square" lIns="0" tIns="0" rIns="0" bIns="0" rtlCol="0" anchor="ctr"/>
           <a:lstStyle/>
           <a:p>
-            <a:pPr marL="0" indent="0" algn="ctr">
+            <a:pPr algn="ctr" indent="0" marL="0">
               <a:buNone/>
             </a:pPr>
             <a:r>
@@ -6991,7 +7334,7 @@
           <a:bodyPr wrap="square" lIns="0" tIns="0" rIns="0" bIns="0" rtlCol="0" anchor="ctr"/>
           <a:lstStyle/>
           <a:p>
-            <a:pPr marL="0" indent="0">
+            <a:pPr indent="0" marL="0">
               <a:buNone/>
             </a:pPr>
             <a:r>
@@ -7030,7 +7373,7 @@
           <a:bodyPr wrap="square" lIns="0" tIns="0" rIns="0" bIns="0" rtlCol="0" anchor="t"/>
           <a:lstStyle/>
           <a:p>
-            <a:pPr marL="0" indent="0">
+            <a:pPr indent="0" marL="0">
               <a:lnSpc>
                 <a:spcPct val="108000"/>
               </a:lnSpc>
@@ -7114,7 +7457,7 @@
           <a:bodyPr wrap="square" lIns="0" tIns="0" rIns="0" bIns="0" rtlCol="0" anchor="ctr"/>
           <a:lstStyle/>
           <a:p>
-            <a:pPr marL="0" indent="0" algn="ctr">
+            <a:pPr algn="ctr" indent="0" marL="0">
               <a:buNone/>
             </a:pPr>
             <a:r>
@@ -7153,7 +7496,7 @@
           <a:bodyPr wrap="square" lIns="0" tIns="0" rIns="0" bIns="0" rtlCol="0" anchor="ctr"/>
           <a:lstStyle/>
           <a:p>
-            <a:pPr marL="0" indent="0">
+            <a:pPr indent="0" marL="0">
               <a:buNone/>
             </a:pPr>
             <a:r>
@@ -7192,7 +7535,7 @@
           <a:bodyPr wrap="square" lIns="0" tIns="0" rIns="0" bIns="0" rtlCol="0" anchor="t"/>
           <a:lstStyle/>
           <a:p>
-            <a:pPr marL="0" indent="0">
+            <a:pPr indent="0" marL="0">
               <a:lnSpc>
                 <a:spcPct val="108000"/>
               </a:lnSpc>
@@ -7276,7 +7619,7 @@
           <a:bodyPr wrap="square" lIns="0" tIns="0" rIns="0" bIns="0" rtlCol="0" anchor="ctr"/>
           <a:lstStyle/>
           <a:p>
-            <a:pPr marL="0" indent="0" algn="ctr">
+            <a:pPr algn="ctr" indent="0" marL="0">
               <a:buNone/>
             </a:pPr>
             <a:r>
@@ -7315,7 +7658,7 @@
           <a:bodyPr wrap="square" lIns="0" tIns="0" rIns="0" bIns="0" rtlCol="0" anchor="ctr"/>
           <a:lstStyle/>
           <a:p>
-            <a:pPr marL="0" indent="0">
+            <a:pPr indent="0" marL="0">
               <a:buNone/>
             </a:pPr>
             <a:r>
@@ -7354,7 +7697,7 @@
           <a:bodyPr wrap="square" lIns="0" tIns="0" rIns="0" bIns="0" rtlCol="0" anchor="t"/>
           <a:lstStyle/>
           <a:p>
-            <a:pPr marL="0" indent="0">
+            <a:pPr indent="0" marL="0">
               <a:lnSpc>
                 <a:spcPct val="108000"/>
               </a:lnSpc>
@@ -7404,14 +7747,34 @@
       </p:sp>
       <p:sp>
         <p:nvSpPr>
-          <p:cNvPr id="38" name="Text 35"/>
-          <p:cNvSpPr/>
-          <p:nvPr/>
-        </p:nvSpPr>
-        <p:spPr>
-          <a:xfrm>
-            <a:off x="786384" y="4928616"/>
-            <a:ext cx="10625328" cy="219456"/>
+          <p:cNvPr id="38" name="Shape 35"/>
+          <p:cNvSpPr/>
+          <p:nvPr/>
+        </p:nvSpPr>
+        <p:spPr>
+          <a:xfrm>
+            <a:off x="749808" y="5170932"/>
+            <a:ext cx="310896" cy="310896"/>
+          </a:xfrm>
+          <a:prstGeom prst="ellipse">
+            <a:avLst/>
+          </a:prstGeom>
+          <a:solidFill>
+            <a:srgbClr val="B3261E"/>
+          </a:solidFill>
+          <a:ln/>
+        </p:spPr>
+      </p:sp>
+      <p:sp>
+        <p:nvSpPr>
+          <p:cNvPr id="39" name="Text 36"/>
+          <p:cNvSpPr/>
+          <p:nvPr/>
+        </p:nvSpPr>
+        <p:spPr>
+          <a:xfrm>
+            <a:off x="749808" y="5170932"/>
+            <a:ext cx="310896" cy="310896"/>
           </a:xfrm>
           <a:prstGeom prst="rect">
             <a:avLst/>
@@ -7423,11 +7786,50 @@
           <a:bodyPr wrap="square" lIns="0" tIns="0" rIns="0" bIns="0" rtlCol="0" anchor="ctr"/>
           <a:lstStyle/>
           <a:p>
-            <a:pPr marL="0" indent="0">
-              <a:buNone/>
-            </a:pPr>
-            <a:r>
-              <a:rPr lang="en-US" sz="950" b="1" kern="0" spc="150" dirty="0">
+            <a:pPr algn="ctr" indent="0" marL="0">
+              <a:buNone/>
+            </a:pPr>
+            <a:r>
+              <a:rPr lang="en-US" sz="1200" b="1" dirty="0">
+                <a:solidFill>
+                  <a:srgbClr val="FFFFFF"/>
+                </a:solidFill>
+                <a:latin typeface="Arial" pitchFamily="34" charset="0"/>
+                <a:ea typeface="Arial" pitchFamily="34" charset="-122"/>
+                <a:cs typeface="Arial" pitchFamily="34" charset="-120"/>
+              </a:rPr>
+              <a:t>✕</a:t>
+            </a:r>
+            <a:endParaRPr lang="en-US" sz="1200" dirty="0"/>
+          </a:p>
+        </p:txBody>
+      </p:sp>
+      <p:sp>
+        <p:nvSpPr>
+          <p:cNvPr id="40" name="Text 37"/>
+          <p:cNvSpPr/>
+          <p:nvPr/>
+        </p:nvSpPr>
+        <p:spPr>
+          <a:xfrm>
+            <a:off x="1243584" y="4928616"/>
+            <a:ext cx="10168128" cy="219456"/>
+          </a:xfrm>
+          <a:prstGeom prst="rect">
+            <a:avLst/>
+          </a:prstGeom>
+          <a:noFill/>
+          <a:ln/>
+        </p:spPr>
+        <p:txBody>
+          <a:bodyPr wrap="square" lIns="0" tIns="0" rIns="0" bIns="0" rtlCol="0" anchor="ctr"/>
+          <a:lstStyle/>
+          <a:p>
+            <a:pPr indent="0" marL="0">
+              <a:buNone/>
+            </a:pPr>
+            <a:r>
+              <a:rPr lang="en-US" sz="950" b="1" spc="150" kern="0" dirty="0">
                 <a:solidFill>
                   <a:srgbClr val="B3261E"/>
                 </a:solidFill>
@@ -7443,14 +7845,14 @@
       </p:sp>
       <p:sp>
         <p:nvSpPr>
-          <p:cNvPr id="39" name="Text 36"/>
-          <p:cNvSpPr/>
-          <p:nvPr/>
-        </p:nvSpPr>
-        <p:spPr>
-          <a:xfrm>
-            <a:off x="786384" y="5184648"/>
-            <a:ext cx="10625328" cy="539496"/>
+          <p:cNvPr id="41" name="Text 38"/>
+          <p:cNvSpPr/>
+          <p:nvPr/>
+        </p:nvSpPr>
+        <p:spPr>
+          <a:xfrm>
+            <a:off x="1243584" y="5184648"/>
+            <a:ext cx="10168128" cy="539496"/>
           </a:xfrm>
           <a:prstGeom prst="rect">
             <a:avLst/>
@@ -7462,7 +7864,7 @@
           <a:bodyPr wrap="square" lIns="0" tIns="0" rIns="0" bIns="0" rtlCol="0" anchor="ctr"/>
           <a:lstStyle/>
           <a:p>
-            <a:pPr marL="0" indent="0">
+            <a:pPr indent="0" marL="0">
               <a:lnSpc>
                 <a:spcPct val="112000"/>
               </a:lnSpc>
@@ -7485,7 +7887,7 @@
       </p:sp>
       <p:sp>
         <p:nvSpPr>
-          <p:cNvPr id="40" name="Slide Number Placeholder 0"/>
+          <p:cNvPr id="25" name="Slide Number Placeholder 0"/>
           <p:cNvSpPr>
             <a:spLocks noGrp="1"/>
           </p:cNvSpPr>
@@ -7503,7 +7905,7 @@
           </a:prstGeom>
           <a:extLst>
             <a:ext uri="{C572A759-6A51-4108-AA02-DFA0A04FC94B}">
-              <ma14:wrappingTextBoxFlag xmlns="" xmlns:ma14="http://schemas.microsoft.com/office/mac/drawingml/2011/main" val="0"/>
+              <ma14:wrappingTextBoxFlag xmlns:ma14="http://schemas.microsoft.com/office/mac/drawingml/2011/main" val="0"/>
             </a:ext>
           </a:extLst>
         </p:spPr>
@@ -7524,7 +7926,7 @@
           <a:p>
             <a:pPr algn="l"/>
             <a:fld id="{F7021451-1387-4CA6-816F-3879F97B5CBC}" type="slidenum">
-              <a:rPr lang="en-US" b="0"/>
+              <a:rPr b="0" lang="en-US"/>
               <a:t>12</a:t>
             </a:fld>
             <a:endParaRPr lang="en-US"/>
@@ -7599,7 +8001,7 @@
           <a:bodyPr wrap="square" lIns="0" tIns="0" rIns="0" bIns="0" rtlCol="0" anchor="ctr"/>
           <a:lstStyle/>
           <a:p>
-            <a:pPr marL="0" indent="0" algn="l">
+            <a:pPr algn="l" indent="0" marL="0">
               <a:buNone/>
             </a:pPr>
             <a:r>
@@ -7638,7 +8040,7 @@
           <a:bodyPr wrap="square" lIns="0" tIns="0" rIns="0" bIns="0" rtlCol="0" anchor="ctr"/>
           <a:lstStyle/>
           <a:p>
-            <a:pPr marL="0" indent="0">
+            <a:pPr indent="0" marL="0">
               <a:buNone/>
             </a:pPr>
             <a:r>
@@ -7704,11 +8106,11 @@
           <a:bodyPr wrap="square" lIns="0" tIns="0" rIns="0" bIns="0" rtlCol="0" anchor="ctr"/>
           <a:lstStyle/>
           <a:p>
-            <a:pPr marL="0" indent="0" algn="ctr">
-              <a:buNone/>
-            </a:pPr>
-            <a:r>
-              <a:rPr lang="en-US" sz="900" b="1" kern="0" spc="100" dirty="0">
+            <a:pPr algn="ctr" indent="0" marL="0">
+              <a:buNone/>
+            </a:pPr>
+            <a:r>
+              <a:rPr lang="en-US" sz="900" b="1" spc="100" kern="0" dirty="0">
                 <a:solidFill>
                   <a:srgbClr val="5A05F4"/>
                 </a:solidFill>
@@ -7724,14 +8126,14 @@
       </p:sp>
       <p:pic>
         <p:nvPicPr>
-          <p:cNvPr id="7" name="Image 0" descr="preencoded.png"/>
+          <p:cNvPr id="7" name="Image 0" descr="preencoded.png">    </p:cNvPr>
           <p:cNvPicPr>
             <a:picLocks noChangeAspect="1"/>
           </p:cNvPicPr>
           <p:nvPr/>
         </p:nvPicPr>
         <p:blipFill>
-          <a:blip r:embed="rId3"/>
+          <a:blip r:embed="rId1"/>
           <a:stretch>
             <a:fillRect/>
           </a:stretch>
@@ -7762,34 +8164,16 @@
         </p:nvGraphicFramePr>
         <p:xfrm>
           <a:off x="566928" y="1737360"/>
-          <a:ext cx="11064240" cy="3182112"/>
+          <a:ext cx="11064240" cy="914400"/>
         </p:xfrm>
         <a:graphic>
           <a:graphicData uri="http://schemas.openxmlformats.org/drawingml/2006/table">
             <a:tbl>
               <a:tblPr/>
               <a:tblGrid>
-                <a:gridCol w="914400">
-                  <a:extLst>
-                    <a:ext uri="{9D8B030D-6E8A-4147-A177-3AD203B41FA5}">
-                      <a16:colId xmlns:a16="http://schemas.microsoft.com/office/drawing/2014/main" val="20000"/>
-                    </a:ext>
-                  </a:extLst>
-                </a:gridCol>
-                <a:gridCol w="5760720">
-                  <a:extLst>
-                    <a:ext uri="{9D8B030D-6E8A-4147-A177-3AD203B41FA5}">
-                      <a16:colId xmlns:a16="http://schemas.microsoft.com/office/drawing/2014/main" val="20001"/>
-                    </a:ext>
-                  </a:extLst>
-                </a:gridCol>
-                <a:gridCol w="4389120">
-                  <a:extLst>
-                    <a:ext uri="{9D8B030D-6E8A-4147-A177-3AD203B41FA5}">
-                      <a16:colId xmlns:a16="http://schemas.microsoft.com/office/drawing/2014/main" val="20002"/>
-                    </a:ext>
-                  </a:extLst>
-                </a:gridCol>
+                <a:gridCol w="914400"/>
+                <a:gridCol w="5760720"/>
+                <a:gridCol w="4389120"/>
               </a:tblGrid>
               <a:tr h="530352">
                 <a:tc>
@@ -7797,11 +8181,11 @@
                     <a:bodyPr/>
                     <a:lstStyle/>
                     <a:p>
-                      <a:pPr marL="0" indent="0" algn="ctr">
+                      <a:pPr algn="ctr" indent="0" marL="0">
                         <a:buNone/>
                       </a:pPr>
                       <a:r>
-                        <a:rPr lang="en-US" sz="900" b="1" kern="0" spc="100" dirty="0">
+                        <a:rPr lang="en-US" sz="900" b="1" spc="100" kern="0" dirty="0">
                           <a:solidFill>
                             <a:srgbClr val="FFFFFF"/>
                           </a:solidFill>
@@ -7865,11 +8249,11 @@
                     <a:bodyPr/>
                     <a:lstStyle/>
                     <a:p>
-                      <a:pPr marL="0" indent="0" algn="ctr">
+                      <a:pPr algn="ctr" indent="0" marL="0">
                         <a:buNone/>
                       </a:pPr>
                       <a:r>
-                        <a:rPr lang="en-US" sz="900" b="1" kern="0" spc="100" dirty="0">
+                        <a:rPr lang="en-US" sz="900" b="1" spc="100" kern="0" dirty="0">
                           <a:solidFill>
                             <a:srgbClr val="FFFFFF"/>
                           </a:solidFill>
@@ -7933,11 +8317,11 @@
                     <a:bodyPr/>
                     <a:lstStyle/>
                     <a:p>
-                      <a:pPr marL="0" indent="0" algn="ctr">
+                      <a:pPr algn="ctr" indent="0" marL="0">
                         <a:buNone/>
                       </a:pPr>
                       <a:r>
-                        <a:rPr lang="en-US" sz="900" b="1" kern="0" spc="100" dirty="0">
+                        <a:rPr lang="en-US" sz="900" b="1" spc="100" kern="0" dirty="0">
                           <a:solidFill>
                             <a:srgbClr val="FFFFFF"/>
                           </a:solidFill>
@@ -7996,11 +8380,6 @@
                     </a:solidFill>
                   </a:tcPr>
                 </a:tc>
-                <a:extLst>
-                  <a:ext uri="{0D108BD9-81ED-4DB2-BD59-A6C34878D82A}">
-                    <a16:rowId xmlns:a16="http://schemas.microsoft.com/office/drawing/2014/main" val="10000"/>
-                  </a:ext>
-                </a:extLst>
               </a:tr>
               <a:tr h="530352">
                 <a:tc>
@@ -8008,7 +8387,7 @@
                     <a:bodyPr/>
                     <a:lstStyle/>
                     <a:p>
-                      <a:pPr marL="0" indent="0">
+                      <a:pPr indent="0" marL="0">
                         <a:buNone/>
                       </a:pPr>
                       <a:r>
@@ -8076,7 +8455,7 @@
                     <a:bodyPr/>
                     <a:lstStyle/>
                     <a:p>
-                      <a:pPr marL="0" indent="0">
+                      <a:pPr indent="0" marL="0">
                         <a:buNone/>
                       </a:pPr>
                       <a:r>
@@ -8144,7 +8523,7 @@
                     <a:bodyPr/>
                     <a:lstStyle/>
                     <a:p>
-                      <a:pPr marL="0" indent="0">
+                      <a:pPr indent="0" marL="0">
                         <a:buNone/>
                       </a:pPr>
                       <a:r>
@@ -8207,11 +8586,6 @@
                     </a:solidFill>
                   </a:tcPr>
                 </a:tc>
-                <a:extLst>
-                  <a:ext uri="{0D108BD9-81ED-4DB2-BD59-A6C34878D82A}">
-                    <a16:rowId xmlns:a16="http://schemas.microsoft.com/office/drawing/2014/main" val="10001"/>
-                  </a:ext>
-                </a:extLst>
               </a:tr>
               <a:tr h="530352">
                 <a:tc>
@@ -8219,7 +8593,7 @@
                     <a:bodyPr/>
                     <a:lstStyle/>
                     <a:p>
-                      <a:pPr marL="0" indent="0">
+                      <a:pPr indent="0" marL="0">
                         <a:buNone/>
                       </a:pPr>
                       <a:r>
@@ -8287,7 +8661,7 @@
                     <a:bodyPr/>
                     <a:lstStyle/>
                     <a:p>
-                      <a:pPr marL="0" indent="0">
+                      <a:pPr indent="0" marL="0">
                         <a:buNone/>
                       </a:pPr>
                       <a:r>
@@ -8355,7 +8729,7 @@
                     <a:bodyPr/>
                     <a:lstStyle/>
                     <a:p>
-                      <a:pPr marL="0" indent="0">
+                      <a:pPr indent="0" marL="0">
                         <a:buNone/>
                       </a:pPr>
                       <a:r>
@@ -8418,11 +8792,6 @@
                     </a:solidFill>
                   </a:tcPr>
                 </a:tc>
-                <a:extLst>
-                  <a:ext uri="{0D108BD9-81ED-4DB2-BD59-A6C34878D82A}">
-                    <a16:rowId xmlns:a16="http://schemas.microsoft.com/office/drawing/2014/main" val="10002"/>
-                  </a:ext>
-                </a:extLst>
               </a:tr>
               <a:tr h="530352">
                 <a:tc>
@@ -8430,7 +8799,7 @@
                     <a:bodyPr/>
                     <a:lstStyle/>
                     <a:p>
-                      <a:pPr marL="0" indent="0">
+                      <a:pPr indent="0" marL="0">
                         <a:buNone/>
                       </a:pPr>
                       <a:r>
@@ -8498,7 +8867,7 @@
                     <a:bodyPr/>
                     <a:lstStyle/>
                     <a:p>
-                      <a:pPr marL="0" indent="0">
+                      <a:pPr indent="0" marL="0">
                         <a:buNone/>
                       </a:pPr>
                       <a:r>
@@ -8566,7 +8935,7 @@
                     <a:bodyPr/>
                     <a:lstStyle/>
                     <a:p>
-                      <a:pPr marL="0" indent="0">
+                      <a:pPr indent="0" marL="0">
                         <a:buNone/>
                       </a:pPr>
                       <a:r>
@@ -8629,11 +8998,6 @@
                     </a:solidFill>
                   </a:tcPr>
                 </a:tc>
-                <a:extLst>
-                  <a:ext uri="{0D108BD9-81ED-4DB2-BD59-A6C34878D82A}">
-                    <a16:rowId xmlns:a16="http://schemas.microsoft.com/office/drawing/2014/main" val="10003"/>
-                  </a:ext>
-                </a:extLst>
               </a:tr>
               <a:tr h="530352">
                 <a:tc>
@@ -8641,7 +9005,7 @@
                     <a:bodyPr/>
                     <a:lstStyle/>
                     <a:p>
-                      <a:pPr marL="0" indent="0">
+                      <a:pPr indent="0" marL="0">
                         <a:buNone/>
                       </a:pPr>
                       <a:r>
@@ -8709,7 +9073,7 @@
                     <a:bodyPr/>
                     <a:lstStyle/>
                     <a:p>
-                      <a:pPr marL="0" indent="0">
+                      <a:pPr indent="0" marL="0">
                         <a:buNone/>
                       </a:pPr>
                       <a:r>
@@ -8777,7 +9141,7 @@
                     <a:bodyPr/>
                     <a:lstStyle/>
                     <a:p>
-                      <a:pPr marL="0" indent="0">
+                      <a:pPr indent="0" marL="0">
                         <a:buNone/>
                       </a:pPr>
                       <a:r>
@@ -8840,11 +9204,6 @@
                     </a:solidFill>
                   </a:tcPr>
                 </a:tc>
-                <a:extLst>
-                  <a:ext uri="{0D108BD9-81ED-4DB2-BD59-A6C34878D82A}">
-                    <a16:rowId xmlns:a16="http://schemas.microsoft.com/office/drawing/2014/main" val="10004"/>
-                  </a:ext>
-                </a:extLst>
               </a:tr>
               <a:tr h="530352">
                 <a:tc>
@@ -8852,7 +9211,7 @@
                     <a:bodyPr/>
                     <a:lstStyle/>
                     <a:p>
-                      <a:pPr marL="0" indent="0">
+                      <a:pPr indent="0" marL="0">
                         <a:buNone/>
                       </a:pPr>
                       <a:r>
@@ -8920,7 +9279,7 @@
                     <a:bodyPr/>
                     <a:lstStyle/>
                     <a:p>
-                      <a:pPr marL="0" indent="0">
+                      <a:pPr indent="0" marL="0">
                         <a:buNone/>
                       </a:pPr>
                       <a:r>
@@ -8988,7 +9347,7 @@
                     <a:bodyPr/>
                     <a:lstStyle/>
                     <a:p>
-                      <a:pPr marL="0" indent="0">
+                      <a:pPr indent="0" marL="0">
                         <a:buNone/>
                       </a:pPr>
                       <a:r>
@@ -9051,11 +9410,6 @@
                     </a:solidFill>
                   </a:tcPr>
                 </a:tc>
-                <a:extLst>
-                  <a:ext uri="{0D108BD9-81ED-4DB2-BD59-A6C34878D82A}">
-                    <a16:rowId xmlns:a16="http://schemas.microsoft.com/office/drawing/2014/main" val="10005"/>
-                  </a:ext>
-                </a:extLst>
               </a:tr>
             </a:tbl>
           </a:graphicData>
@@ -9109,7 +9463,7 @@
           <a:bodyPr wrap="square" lIns="0" tIns="0" rIns="0" bIns="0" rtlCol="0" anchor="ctr"/>
           <a:lstStyle/>
           <a:p>
-            <a:pPr marL="0" indent="0">
+            <a:pPr indent="0" marL="0">
               <a:lnSpc>
                 <a:spcPct val="112000"/>
               </a:lnSpc>
@@ -9150,7 +9504,7 @@
           </a:prstGeom>
           <a:extLst>
             <a:ext uri="{C572A759-6A51-4108-AA02-DFA0A04FC94B}">
-              <ma14:wrappingTextBoxFlag xmlns="" xmlns:ma14="http://schemas.microsoft.com/office/mac/drawingml/2011/main" val="0"/>
+              <ma14:wrappingTextBoxFlag xmlns:ma14="http://schemas.microsoft.com/office/mac/drawingml/2011/main" val="0"/>
             </a:ext>
           </a:extLst>
         </p:spPr>
@@ -9171,7 +9525,7 @@
           <a:p>
             <a:pPr algn="l"/>
             <a:fld id="{F7021451-1387-4CA6-816F-3879F97B5CBC}" type="slidenum">
-              <a:rPr lang="en-US" b="0"/>
+              <a:rPr b="0" lang="en-US"/>
               <a:t>13</a:t>
             </a:fld>
             <a:endParaRPr lang="en-US"/>
@@ -9246,7 +9600,7 @@
           <a:bodyPr wrap="square" lIns="0" tIns="0" rIns="0" bIns="0" rtlCol="0" anchor="ctr"/>
           <a:lstStyle/>
           <a:p>
-            <a:pPr marL="0" indent="0" algn="l">
+            <a:pPr algn="l" indent="0" marL="0">
               <a:buNone/>
             </a:pPr>
             <a:r>
@@ -9285,7 +9639,7 @@
           <a:bodyPr wrap="square" lIns="0" tIns="0" rIns="0" bIns="0" rtlCol="0" anchor="ctr"/>
           <a:lstStyle/>
           <a:p>
-            <a:pPr marL="0" indent="0">
+            <a:pPr indent="0" marL="0">
               <a:buNone/>
             </a:pPr>
             <a:r>
@@ -9351,11 +9705,11 @@
           <a:bodyPr wrap="square" lIns="0" tIns="0" rIns="0" bIns="0" rtlCol="0" anchor="ctr"/>
           <a:lstStyle/>
           <a:p>
-            <a:pPr marL="0" indent="0" algn="ctr">
-              <a:buNone/>
-            </a:pPr>
-            <a:r>
-              <a:rPr lang="en-US" sz="900" b="1" kern="0" spc="100" dirty="0">
+            <a:pPr algn="ctr" indent="0" marL="0">
+              <a:buNone/>
+            </a:pPr>
+            <a:r>
+              <a:rPr lang="en-US" sz="900" b="1" spc="100" kern="0" dirty="0">
                 <a:solidFill>
                   <a:srgbClr val="5A05F4"/>
                 </a:solidFill>
@@ -9371,14 +9725,14 @@
       </p:sp>
       <p:pic>
         <p:nvPicPr>
-          <p:cNvPr id="7" name="Image 0" descr="preencoded.png"/>
+          <p:cNvPr id="7" name="Image 0" descr="preencoded.png">    </p:cNvPr>
           <p:cNvPicPr>
             <a:picLocks noChangeAspect="1"/>
           </p:cNvPicPr>
           <p:nvPr/>
         </p:nvPicPr>
         <p:blipFill>
-          <a:blip r:embed="rId3"/>
+          <a:blip r:embed="rId1"/>
           <a:stretch>
             <a:fillRect/>
           </a:stretch>
@@ -9401,7 +9755,7 @@
         </p:nvSpPr>
         <p:spPr>
           <a:xfrm>
-            <a:off x="566928" y="1554480"/>
+            <a:off x="566928" y="1737360"/>
             <a:ext cx="11064240" cy="1874520"/>
           </a:xfrm>
           <a:prstGeom prst="roundRect">
@@ -9428,7 +9782,7 @@
         </p:nvSpPr>
         <p:spPr>
           <a:xfrm>
-            <a:off x="786384" y="1700784"/>
+            <a:off x="786384" y="1883664"/>
             <a:ext cx="10625328" cy="1581912"/>
           </a:xfrm>
           <a:prstGeom prst="rect">
@@ -9441,7 +9795,7 @@
           <a:bodyPr wrap="square" lIns="0" tIns="0" rIns="0" bIns="0" rtlCol="0" anchor="t"/>
           <a:lstStyle/>
           <a:p>
-            <a:pPr marL="0" indent="0">
+            <a:pPr indent="0" marL="0">
               <a:lnSpc>
                 <a:spcPct val="130000"/>
               </a:lnSpc>
@@ -9461,7 +9815,7 @@
             <a:endParaRPr lang="en-US" sz="1200" dirty="0"/>
           </a:p>
           <a:p>
-            <a:pPr marL="0" indent="0">
+            <a:pPr indent="0" marL="0">
               <a:lnSpc>
                 <a:spcPct val="130000"/>
               </a:lnSpc>
@@ -9481,7 +9835,7 @@
             <a:endParaRPr lang="en-US" sz="1200" dirty="0"/>
           </a:p>
           <a:p>
-            <a:pPr marL="0" indent="0">
+            <a:pPr indent="0" marL="0">
               <a:lnSpc>
                 <a:spcPct val="130000"/>
               </a:lnSpc>
@@ -9501,7 +9855,7 @@
             <a:endParaRPr lang="en-US" sz="1200" dirty="0"/>
           </a:p>
           <a:p>
-            <a:pPr marL="0" indent="0">
+            <a:pPr indent="0" marL="0">
               <a:lnSpc>
                 <a:spcPct val="130000"/>
               </a:lnSpc>
@@ -9521,7 +9875,7 @@
             <a:endParaRPr lang="en-US" sz="1200" dirty="0"/>
           </a:p>
           <a:p>
-            <a:pPr marL="0" indent="0">
+            <a:pPr indent="0" marL="0">
               <a:lnSpc>
                 <a:spcPct val="130000"/>
               </a:lnSpc>
@@ -9550,8 +9904,8 @@
         </p:nvSpPr>
         <p:spPr>
           <a:xfrm>
-            <a:off x="566928" y="3511296"/>
-            <a:ext cx="5513832" cy="1463040"/>
+            <a:off x="566928" y="3611880"/>
+            <a:ext cx="5349240" cy="1463040"/>
           </a:xfrm>
           <a:prstGeom prst="roundRect">
             <a:avLst>
@@ -9572,7 +9926,7 @@
         </p:nvSpPr>
         <p:spPr>
           <a:xfrm>
-            <a:off x="768096" y="3584448"/>
+            <a:off x="768096" y="3767328"/>
             <a:ext cx="4946904" cy="438912"/>
           </a:xfrm>
           <a:prstGeom prst="rect">
@@ -9585,7 +9939,7 @@
           <a:bodyPr wrap="square" lIns="0" tIns="0" rIns="0" bIns="0" rtlCol="0" anchor="ctr"/>
           <a:lstStyle/>
           <a:p>
-            <a:pPr marL="0" indent="0">
+            <a:pPr indent="0" marL="0">
               <a:buNone/>
             </a:pPr>
             <a:r>
@@ -9611,7 +9965,7 @@
         </p:nvSpPr>
         <p:spPr>
           <a:xfrm>
-            <a:off x="768096" y="4114800"/>
+            <a:off x="768096" y="4297680"/>
             <a:ext cx="4946904" cy="621792"/>
           </a:xfrm>
           <a:prstGeom prst="rect">
@@ -9624,7 +9978,7 @@
           <a:bodyPr wrap="square" lIns="0" tIns="0" rIns="0" bIns="0" rtlCol="0" anchor="t"/>
           <a:lstStyle/>
           <a:p>
-            <a:pPr marL="0" indent="0">
+            <a:pPr indent="0" marL="0">
               <a:lnSpc>
                 <a:spcPct val="108000"/>
               </a:lnSpc>
@@ -9653,8 +10007,8 @@
         </p:nvSpPr>
         <p:spPr>
           <a:xfrm>
-            <a:off x="6111242" y="3511296"/>
-            <a:ext cx="5519926" cy="1463040"/>
+            <a:off x="6281928" y="3611880"/>
+            <a:ext cx="5349240" cy="1463040"/>
           </a:xfrm>
           <a:prstGeom prst="roundRect">
             <a:avLst>
@@ -9675,7 +10029,7 @@
         </p:nvSpPr>
         <p:spPr>
           <a:xfrm>
-            <a:off x="6483096" y="3584448"/>
+            <a:off x="6483096" y="3767328"/>
             <a:ext cx="4946904" cy="438912"/>
           </a:xfrm>
           <a:prstGeom prst="rect">
@@ -9688,7 +10042,7 @@
           <a:bodyPr wrap="square" lIns="0" tIns="0" rIns="0" bIns="0" rtlCol="0" anchor="ctr"/>
           <a:lstStyle/>
           <a:p>
-            <a:pPr marL="0" indent="0">
+            <a:pPr indent="0" marL="0">
               <a:buNone/>
             </a:pPr>
             <a:r>
@@ -9714,7 +10068,7 @@
         </p:nvSpPr>
         <p:spPr>
           <a:xfrm>
-            <a:off x="6483096" y="4114800"/>
+            <a:off x="6483096" y="4297680"/>
             <a:ext cx="4946904" cy="621792"/>
           </a:xfrm>
           <a:prstGeom prst="rect">
@@ -9727,7 +10081,7 @@
           <a:bodyPr wrap="square" lIns="0" tIns="0" rIns="0" bIns="0" rtlCol="0" anchor="t"/>
           <a:lstStyle/>
           <a:p>
-            <a:pPr marL="0" indent="0">
+            <a:pPr indent="0" marL="0">
               <a:lnSpc>
                 <a:spcPct val="108000"/>
               </a:lnSpc>
@@ -9756,7 +10110,7 @@
         </p:nvSpPr>
         <p:spPr>
           <a:xfrm>
-            <a:off x="566928" y="5074920"/>
+            <a:off x="566928" y="5257800"/>
             <a:ext cx="11064240" cy="594360"/>
           </a:xfrm>
           <a:prstGeom prst="roundRect">
@@ -9778,7 +10132,7 @@
         </p:nvSpPr>
         <p:spPr>
           <a:xfrm>
-            <a:off x="786384" y="5221224"/>
+            <a:off x="786384" y="5404104"/>
             <a:ext cx="10625328" cy="301752"/>
           </a:xfrm>
           <a:prstGeom prst="rect">
@@ -9791,7 +10145,7 @@
           <a:bodyPr wrap="square" lIns="0" tIns="0" rIns="0" bIns="0" rtlCol="0" anchor="ctr"/>
           <a:lstStyle/>
           <a:p>
-            <a:pPr marL="0" indent="0">
+            <a:pPr indent="0" marL="0">
               <a:lnSpc>
                 <a:spcPct val="112000"/>
               </a:lnSpc>
@@ -9832,7 +10186,7 @@
           </a:prstGeom>
           <a:extLst>
             <a:ext uri="{C572A759-6A51-4108-AA02-DFA0A04FC94B}">
-              <ma14:wrappingTextBoxFlag xmlns="" xmlns:ma14="http://schemas.microsoft.com/office/mac/drawingml/2011/main" val="0"/>
+              <ma14:wrappingTextBoxFlag xmlns:ma14="http://schemas.microsoft.com/office/mac/drawingml/2011/main" val="0"/>
             </a:ext>
           </a:extLst>
         </p:spPr>
@@ -9853,7 +10207,7 @@
           <a:p>
             <a:pPr algn="l"/>
             <a:fld id="{F7021451-1387-4CA6-816F-3879F97B5CBC}" type="slidenum">
-              <a:rPr lang="en-US" b="0"/>
+              <a:rPr b="0" lang="en-US"/>
               <a:t>14</a:t>
             </a:fld>
             <a:endParaRPr lang="en-US"/>
@@ -9928,7 +10282,7 @@
           <a:bodyPr wrap="square" lIns="0" tIns="0" rIns="0" bIns="0" rtlCol="0" anchor="ctr"/>
           <a:lstStyle/>
           <a:p>
-            <a:pPr marL="0" indent="0" algn="l">
+            <a:pPr algn="l" indent="0" marL="0">
               <a:buNone/>
             </a:pPr>
             <a:r>
@@ -9967,7 +10321,7 @@
           <a:bodyPr wrap="square" lIns="0" tIns="0" rIns="0" bIns="0" rtlCol="0" anchor="ctr"/>
           <a:lstStyle/>
           <a:p>
-            <a:pPr marL="0" indent="0">
+            <a:pPr indent="0" marL="0">
               <a:buNone/>
             </a:pPr>
             <a:r>
@@ -10033,11 +10387,11 @@
           <a:bodyPr wrap="square" lIns="0" tIns="0" rIns="0" bIns="0" rtlCol="0" anchor="ctr"/>
           <a:lstStyle/>
           <a:p>
-            <a:pPr marL="0" indent="0" algn="ctr">
-              <a:buNone/>
-            </a:pPr>
-            <a:r>
-              <a:rPr lang="en-US" sz="900" b="1" kern="0" spc="100" dirty="0">
+            <a:pPr algn="ctr" indent="0" marL="0">
+              <a:buNone/>
+            </a:pPr>
+            <a:r>
+              <a:rPr lang="en-US" sz="900" b="1" spc="100" kern="0" dirty="0">
                 <a:solidFill>
                   <a:srgbClr val="5A05F4"/>
                 </a:solidFill>
@@ -10053,14 +10407,14 @@
       </p:sp>
       <p:pic>
         <p:nvPicPr>
-          <p:cNvPr id="7" name="Image 0" descr="preencoded.png"/>
+          <p:cNvPr id="7" name="Image 0" descr="preencoded.png">    </p:cNvPr>
           <p:cNvPicPr>
             <a:picLocks noChangeAspect="1"/>
           </p:cNvPicPr>
           <p:nvPr/>
         </p:nvPicPr>
         <p:blipFill>
-          <a:blip r:embed="rId3"/>
+          <a:blip r:embed="rId1"/>
           <a:stretch>
             <a:fillRect/>
           </a:stretch>
@@ -10123,7 +10477,7 @@
           <a:bodyPr wrap="square" lIns="0" tIns="0" rIns="0" bIns="0" rtlCol="0" anchor="t"/>
           <a:lstStyle/>
           <a:p>
-            <a:pPr marL="0" indent="0">
+            <a:pPr indent="0" marL="0">
               <a:lnSpc>
                 <a:spcPct val="130000"/>
               </a:lnSpc>
@@ -10143,7 +10497,7 @@
             <a:endParaRPr lang="en-US" sz="1300" dirty="0"/>
           </a:p>
           <a:p>
-            <a:pPr marL="0" indent="0">
+            <a:pPr indent="0" marL="0">
               <a:lnSpc>
                 <a:spcPct val="130000"/>
               </a:lnSpc>
@@ -10160,6 +10514,12 @@
               </a:rPr>
               <a:t>num_retries: 0</a:t>
             </a:r>
+            <a:pPr indent="0" marL="0">
+              <a:lnSpc>
+                <a:spcPct val="130000"/>
+              </a:lnSpc>
+              <a:buNone/>
+            </a:pPr>
             <a:r>
               <a:rPr lang="en-US" sz="1300" dirty="0">
                 <a:solidFill>
@@ -10223,11 +10583,11 @@
           <a:bodyPr wrap="square" lIns="0" tIns="0" rIns="0" bIns="0" rtlCol="0" anchor="ctr"/>
           <a:lstStyle/>
           <a:p>
-            <a:pPr marL="0" indent="0">
-              <a:buNone/>
-            </a:pPr>
-            <a:r>
-              <a:rPr lang="en-US" sz="950" b="1" kern="0" spc="150" dirty="0">
+            <a:pPr indent="0" marL="0">
+              <a:buNone/>
+            </a:pPr>
+            <a:r>
+              <a:rPr lang="en-US" sz="950" b="1" spc="150" kern="0" dirty="0">
                 <a:solidFill>
                   <a:srgbClr val="B3261E"/>
                 </a:solidFill>
@@ -10262,7 +10622,7 @@
           <a:bodyPr wrap="square" lIns="0" tIns="0" rIns="0" bIns="0" rtlCol="0" anchor="ctr"/>
           <a:lstStyle/>
           <a:p>
-            <a:pPr marL="0" indent="0">
+            <a:pPr indent="0" marL="0">
               <a:lnSpc>
                 <a:spcPct val="112000"/>
               </a:lnSpc>
@@ -10331,7 +10691,7 @@
           <a:bodyPr wrap="square" lIns="0" tIns="0" rIns="0" bIns="0" rtlCol="0" anchor="ctr"/>
           <a:lstStyle/>
           <a:p>
-            <a:pPr marL="0" indent="0">
+            <a:pPr indent="0" marL="0">
               <a:lnSpc>
                 <a:spcPct val="112000"/>
               </a:lnSpc>
@@ -10373,7 +10733,7 @@
           <a:bodyPr wrap="square" lIns="0" tIns="0" rIns="0" bIns="0" rtlCol="0" anchor="ctr"/>
           <a:lstStyle/>
           <a:p>
-            <a:pPr marL="0" indent="0">
+            <a:pPr indent="0" marL="0">
               <a:buNone/>
             </a:pPr>
             <a:r>
@@ -10411,7 +10771,7 @@
           </a:prstGeom>
           <a:extLst>
             <a:ext uri="{C572A759-6A51-4108-AA02-DFA0A04FC94B}">
-              <ma14:wrappingTextBoxFlag xmlns="" xmlns:ma14="http://schemas.microsoft.com/office/mac/drawingml/2011/main" val="0"/>
+              <ma14:wrappingTextBoxFlag xmlns:ma14="http://schemas.microsoft.com/office/mac/drawingml/2011/main" val="0"/>
             </a:ext>
           </a:extLst>
         </p:spPr>
@@ -10432,7 +10792,7 @@
           <a:p>
             <a:pPr algn="l"/>
             <a:fld id="{F7021451-1387-4CA6-816F-3879F97B5CBC}" type="slidenum">
-              <a:rPr lang="en-US" b="0"/>
+              <a:rPr b="0" lang="en-US"/>
               <a:t>15</a:t>
             </a:fld>
             <a:endParaRPr lang="en-US"/>
@@ -10507,7 +10867,7 @@
           <a:bodyPr wrap="square" lIns="0" tIns="0" rIns="0" bIns="0" rtlCol="0" anchor="ctr"/>
           <a:lstStyle/>
           <a:p>
-            <a:pPr marL="0" indent="0" algn="l">
+            <a:pPr algn="l" indent="0" marL="0">
               <a:buNone/>
             </a:pPr>
             <a:r>
@@ -10546,7 +10906,7 @@
           <a:bodyPr wrap="square" lIns="0" tIns="0" rIns="0" bIns="0" rtlCol="0" anchor="ctr"/>
           <a:lstStyle/>
           <a:p>
-            <a:pPr marL="0" indent="0">
+            <a:pPr indent="0" marL="0">
               <a:buNone/>
             </a:pPr>
             <a:r>
@@ -10612,11 +10972,11 @@
           <a:bodyPr wrap="square" lIns="0" tIns="0" rIns="0" bIns="0" rtlCol="0" anchor="ctr"/>
           <a:lstStyle/>
           <a:p>
-            <a:pPr marL="0" indent="0" algn="ctr">
-              <a:buNone/>
-            </a:pPr>
-            <a:r>
-              <a:rPr lang="en-US" sz="900" b="1" kern="0" spc="100" dirty="0">
+            <a:pPr algn="ctr" indent="0" marL="0">
+              <a:buNone/>
+            </a:pPr>
+            <a:r>
+              <a:rPr lang="en-US" sz="900" b="1" spc="100" kern="0" dirty="0">
                 <a:solidFill>
                   <a:srgbClr val="5A05F4"/>
                 </a:solidFill>
@@ -10678,11 +11038,11 @@
           <a:bodyPr wrap="square" lIns="0" tIns="0" rIns="0" bIns="0" rtlCol="0" anchor="ctr"/>
           <a:lstStyle/>
           <a:p>
-            <a:pPr marL="0" indent="0" algn="ctr">
-              <a:buNone/>
-            </a:pPr>
-            <a:r>
-              <a:rPr lang="en-US" sz="900" b="1" kern="0" spc="100" dirty="0">
+            <a:pPr algn="ctr" indent="0" marL="0">
+              <a:buNone/>
+            </a:pPr>
+            <a:r>
+              <a:rPr lang="en-US" sz="900" b="1" spc="100" kern="0" dirty="0">
                 <a:solidFill>
                   <a:srgbClr val="434343"/>
                 </a:solidFill>
@@ -10698,14 +11058,14 @@
       </p:sp>
       <p:pic>
         <p:nvPicPr>
-          <p:cNvPr id="9" name="Image 0" descr="preencoded.png"/>
+          <p:cNvPr id="9" name="Image 0" descr="preencoded.png">    </p:cNvPr>
           <p:cNvPicPr>
             <a:picLocks noChangeAspect="1"/>
           </p:cNvPicPr>
           <p:nvPr/>
         </p:nvPicPr>
         <p:blipFill>
-          <a:blip r:embed="rId3"/>
+          <a:blip r:embed="rId1"/>
           <a:stretch>
             <a:fillRect/>
           </a:stretch>
@@ -10768,7 +11128,7 @@
           <a:bodyPr wrap="square" lIns="0" tIns="0" rIns="0" bIns="0" rtlCol="0" anchor="t"/>
           <a:lstStyle/>
           <a:p>
-            <a:pPr marL="0" indent="0">
+            <a:pPr indent="0" marL="0">
               <a:lnSpc>
                 <a:spcPct val="130000"/>
               </a:lnSpc>
@@ -10788,7 +11148,7 @@
             <a:endParaRPr lang="en-US" sz="1200" dirty="0"/>
           </a:p>
           <a:p>
-            <a:pPr marL="0" indent="0">
+            <a:pPr indent="0" marL="0">
               <a:lnSpc>
                 <a:spcPct val="130000"/>
               </a:lnSpc>
@@ -10808,7 +11168,7 @@
             <a:endParaRPr lang="en-US" sz="1200" dirty="0"/>
           </a:p>
           <a:p>
-            <a:pPr marL="0" indent="0">
+            <a:pPr indent="0" marL="0">
               <a:lnSpc>
                 <a:spcPct val="130000"/>
               </a:lnSpc>
@@ -10828,7 +11188,7 @@
             <a:endParaRPr lang="en-US" sz="1200" dirty="0"/>
           </a:p>
           <a:p>
-            <a:pPr marL="0" indent="0">
+            <a:pPr indent="0" marL="0">
               <a:lnSpc>
                 <a:spcPct val="130000"/>
               </a:lnSpc>
@@ -10845,6 +11205,12 @@
               </a:rPr>
               <a:t>    continue;            </a:t>
             </a:r>
+            <a:pPr indent="0" marL="0">
+              <a:lnSpc>
+                <a:spcPct val="130000"/>
+              </a:lnSpc>
+              <a:buNone/>
+            </a:pPr>
             <a:r>
               <a:rPr lang="en-US" sz="1200" dirty="0">
                 <a:solidFill>
@@ -10868,8 +11234,8 @@
         </p:nvSpPr>
         <p:spPr>
           <a:xfrm>
-            <a:off x="585216" y="3675888"/>
-            <a:ext cx="5510784" cy="1508760"/>
+            <a:off x="566928" y="3566160"/>
+            <a:ext cx="5349240" cy="1508760"/>
           </a:xfrm>
           <a:prstGeom prst="roundRect">
             <a:avLst>
@@ -10890,8 +11256,8 @@
         </p:nvSpPr>
         <p:spPr>
           <a:xfrm>
-            <a:off x="786384" y="3831336"/>
-            <a:ext cx="5096298" cy="438912"/>
+            <a:off x="768096" y="3721608"/>
+            <a:ext cx="4946904" cy="438912"/>
           </a:xfrm>
           <a:prstGeom prst="rect">
             <a:avLst/>
@@ -10903,7 +11269,7 @@
           <a:bodyPr wrap="square" lIns="0" tIns="0" rIns="0" bIns="0" rtlCol="0" anchor="ctr"/>
           <a:lstStyle/>
           <a:p>
-            <a:pPr marL="0" indent="0">
+            <a:pPr indent="0" marL="0">
               <a:buNone/>
             </a:pPr>
             <a:r>
@@ -10929,8 +11295,8 @@
         </p:nvSpPr>
         <p:spPr>
           <a:xfrm>
-            <a:off x="786384" y="4361688"/>
-            <a:ext cx="5096298" cy="667512"/>
+            <a:off x="768096" y="4251960"/>
+            <a:ext cx="4946904" cy="667512"/>
           </a:xfrm>
           <a:prstGeom prst="rect">
             <a:avLst/>
@@ -10942,7 +11308,7 @@
           <a:bodyPr wrap="square" lIns="0" tIns="0" rIns="0" bIns="0" rtlCol="0" anchor="t"/>
           <a:lstStyle/>
           <a:p>
-            <a:pPr marL="0" indent="0">
+            <a:pPr indent="0" marL="0">
               <a:lnSpc>
                 <a:spcPct val="108000"/>
               </a:lnSpc>
@@ -10971,8 +11337,8 @@
         </p:nvSpPr>
         <p:spPr>
           <a:xfrm>
-            <a:off x="6135624" y="3675888"/>
-            <a:ext cx="5510784" cy="1508760"/>
+            <a:off x="6281928" y="3566160"/>
+            <a:ext cx="5349240" cy="1508760"/>
           </a:xfrm>
           <a:prstGeom prst="roundRect">
             <a:avLst>
@@ -10993,8 +11359,8 @@
         </p:nvSpPr>
         <p:spPr>
           <a:xfrm>
-            <a:off x="6348942" y="3831336"/>
-            <a:ext cx="5096298" cy="438912"/>
+            <a:off x="6483096" y="3721608"/>
+            <a:ext cx="4946904" cy="438912"/>
           </a:xfrm>
           <a:prstGeom prst="rect">
             <a:avLst/>
@@ -11006,7 +11372,7 @@
           <a:bodyPr wrap="square" lIns="0" tIns="0" rIns="0" bIns="0" rtlCol="0" anchor="ctr"/>
           <a:lstStyle/>
           <a:p>
-            <a:pPr marL="0" indent="0">
+            <a:pPr indent="0" marL="0">
               <a:buNone/>
             </a:pPr>
             <a:r>
@@ -11032,8 +11398,8 @@
         </p:nvSpPr>
         <p:spPr>
           <a:xfrm>
-            <a:off x="6348942" y="4361688"/>
-            <a:ext cx="5096298" cy="667512"/>
+            <a:off x="6483096" y="4251960"/>
+            <a:ext cx="4946904" cy="667512"/>
           </a:xfrm>
           <a:prstGeom prst="rect">
             <a:avLst/>
@@ -11045,7 +11411,7 @@
           <a:bodyPr wrap="square" lIns="0" tIns="0" rIns="0" bIns="0" rtlCol="0" anchor="t"/>
           <a:lstStyle/>
           <a:p>
-            <a:pPr marL="0" indent="0">
+            <a:pPr indent="0" marL="0">
               <a:lnSpc>
                 <a:spcPct val="108000"/>
               </a:lnSpc>
@@ -11114,7 +11480,7 @@
           <a:bodyPr wrap="square" lIns="0" tIns="0" rIns="0" bIns="0" rtlCol="0" anchor="ctr"/>
           <a:lstStyle/>
           <a:p>
-            <a:pPr marL="0" indent="0">
+            <a:pPr indent="0" marL="0">
               <a:lnSpc>
                 <a:spcPct val="112000"/>
               </a:lnSpc>
@@ -11155,7 +11521,7 @@
           </a:prstGeom>
           <a:extLst>
             <a:ext uri="{C572A759-6A51-4108-AA02-DFA0A04FC94B}">
-              <ma14:wrappingTextBoxFlag xmlns="" xmlns:ma14="http://schemas.microsoft.com/office/mac/drawingml/2011/main" val="0"/>
+              <ma14:wrappingTextBoxFlag xmlns:ma14="http://schemas.microsoft.com/office/mac/drawingml/2011/main" val="0"/>
             </a:ext>
           </a:extLst>
         </p:spPr>
@@ -11176,7 +11542,7 @@
           <a:p>
             <a:pPr algn="l"/>
             <a:fld id="{F7021451-1387-4CA6-816F-3879F97B5CBC}" type="slidenum">
-              <a:rPr lang="en-US" b="0"/>
+              <a:rPr b="0" lang="en-US"/>
               <a:t>16</a:t>
             </a:fld>
             <a:endParaRPr lang="en-US"/>
@@ -11251,7 +11617,7 @@
           <a:bodyPr wrap="square" lIns="0" tIns="0" rIns="0" bIns="0" rtlCol="0" anchor="ctr"/>
           <a:lstStyle/>
           <a:p>
-            <a:pPr marL="0" indent="0" algn="l">
+            <a:pPr algn="l" indent="0" marL="0">
               <a:buNone/>
             </a:pPr>
             <a:r>
@@ -11290,7 +11656,7 @@
           <a:bodyPr wrap="square" lIns="0" tIns="0" rIns="0" bIns="0" rtlCol="0" anchor="ctr"/>
           <a:lstStyle/>
           <a:p>
-            <a:pPr marL="0" indent="0">
+            <a:pPr indent="0" marL="0">
               <a:buNone/>
             </a:pPr>
             <a:r>
@@ -11356,11 +11722,11 @@
           <a:bodyPr wrap="square" lIns="0" tIns="0" rIns="0" bIns="0" rtlCol="0" anchor="ctr"/>
           <a:lstStyle/>
           <a:p>
-            <a:pPr marL="0" indent="0" algn="ctr">
-              <a:buNone/>
-            </a:pPr>
-            <a:r>
-              <a:rPr lang="en-US" sz="900" b="1" kern="0" spc="100" dirty="0">
+            <a:pPr algn="ctr" indent="0" marL="0">
+              <a:buNone/>
+            </a:pPr>
+            <a:r>
+              <a:rPr lang="en-US" sz="900" b="1" spc="100" kern="0" dirty="0">
                 <a:solidFill>
                   <a:srgbClr val="5A05F4"/>
                 </a:solidFill>
@@ -11422,11 +11788,11 @@
           <a:bodyPr wrap="square" lIns="0" tIns="0" rIns="0" bIns="0" rtlCol="0" anchor="ctr"/>
           <a:lstStyle/>
           <a:p>
-            <a:pPr marL="0" indent="0" algn="ctr">
-              <a:buNone/>
-            </a:pPr>
-            <a:r>
-              <a:rPr lang="en-US" sz="900" b="1" kern="0" spc="100" dirty="0">
+            <a:pPr algn="ctr" indent="0" marL="0">
+              <a:buNone/>
+            </a:pPr>
+            <a:r>
+              <a:rPr lang="en-US" sz="900" b="1" spc="100" kern="0" dirty="0">
                 <a:solidFill>
                   <a:srgbClr val="434343"/>
                 </a:solidFill>
@@ -11442,14 +11808,14 @@
       </p:sp>
       <p:pic>
         <p:nvPicPr>
-          <p:cNvPr id="9" name="Image 0" descr="preencoded.png"/>
+          <p:cNvPr id="9" name="Image 0" descr="preencoded.png">    </p:cNvPr>
           <p:cNvPicPr>
             <a:picLocks noChangeAspect="1"/>
           </p:cNvPicPr>
           <p:nvPr/>
         </p:nvPicPr>
         <p:blipFill>
-          <a:blip r:embed="rId3"/>
+          <a:blip r:embed="rId1"/>
           <a:stretch>
             <a:fillRect/>
           </a:stretch>
@@ -11505,7 +11871,7 @@
           <a:bodyPr wrap="square" lIns="0" tIns="0" rIns="0" bIns="0" rtlCol="0" anchor="ctr"/>
           <a:lstStyle/>
           <a:p>
-            <a:pPr marL="0" indent="0" algn="ctr">
+            <a:pPr algn="ctr" indent="0" marL="0">
               <a:buNone/>
             </a:pPr>
             <a:r>
@@ -11544,7 +11910,7 @@
           <a:bodyPr wrap="square" lIns="0" tIns="0" rIns="0" bIns="0" rtlCol="0" anchor="ctr"/>
           <a:lstStyle/>
           <a:p>
-            <a:pPr marL="0" indent="0" algn="ctr">
+            <a:pPr algn="ctr" indent="0" marL="0">
               <a:buNone/>
             </a:pPr>
             <a:r>
@@ -11626,7 +11992,7 @@
           <a:bodyPr wrap="square" lIns="0" tIns="0" rIns="0" bIns="0" rtlCol="0" anchor="ctr"/>
           <a:lstStyle/>
           <a:p>
-            <a:pPr marL="0" indent="0" algn="ctr">
+            <a:pPr algn="ctr" indent="0" marL="0">
               <a:buNone/>
             </a:pPr>
             <a:r>
@@ -11685,7 +12051,7 @@
           <a:bodyPr wrap="square" lIns="0" tIns="0" rIns="0" bIns="0" rtlCol="0" anchor="ctr"/>
           <a:lstStyle/>
           <a:p>
-            <a:pPr marL="0" indent="0" algn="ctr">
+            <a:pPr algn="ctr" indent="0" marL="0">
               <a:buNone/>
             </a:pPr>
             <a:r>
@@ -11724,7 +12090,7 @@
           <a:bodyPr wrap="square" lIns="0" tIns="0" rIns="0" bIns="0" rtlCol="0" anchor="ctr"/>
           <a:lstStyle/>
           <a:p>
-            <a:pPr marL="0" indent="0" algn="ctr">
+            <a:pPr algn="ctr" indent="0" marL="0">
               <a:buNone/>
             </a:pPr>
             <a:r>
@@ -11806,7 +12172,7 @@
           <a:bodyPr wrap="square" lIns="0" tIns="0" rIns="0" bIns="0" rtlCol="0" anchor="ctr"/>
           <a:lstStyle/>
           <a:p>
-            <a:pPr marL="0" indent="0" algn="ctr">
+            <a:pPr algn="ctr" indent="0" marL="0">
               <a:buNone/>
             </a:pPr>
             <a:r>
@@ -11865,7 +12231,7 @@
           <a:bodyPr wrap="square" lIns="0" tIns="0" rIns="0" bIns="0" rtlCol="0" anchor="ctr"/>
           <a:lstStyle/>
           <a:p>
-            <a:pPr marL="0" indent="0" algn="ctr">
+            <a:pPr algn="ctr" indent="0" marL="0">
               <a:buNone/>
             </a:pPr>
             <a:r>
@@ -11904,7 +12270,7 @@
           <a:bodyPr wrap="square" lIns="0" tIns="0" rIns="0" bIns="0" rtlCol="0" anchor="ctr"/>
           <a:lstStyle/>
           <a:p>
-            <a:pPr marL="0" indent="0" algn="ctr">
+            <a:pPr algn="ctr" indent="0" marL="0">
               <a:buNone/>
             </a:pPr>
             <a:r>
@@ -11970,11 +12336,11 @@
           <a:bodyPr wrap="square" lIns="0" tIns="0" rIns="0" bIns="0" rtlCol="0" anchor="ctr"/>
           <a:lstStyle/>
           <a:p>
-            <a:pPr marL="0" indent="0">
-              <a:buNone/>
-            </a:pPr>
-            <a:r>
-              <a:rPr lang="en-US" sz="950" b="1" kern="0" spc="150" dirty="0">
+            <a:pPr indent="0" marL="0">
+              <a:buNone/>
+            </a:pPr>
+            <a:r>
+              <a:rPr lang="en-US" sz="950" b="1" spc="150" kern="0" dirty="0">
                 <a:solidFill>
                   <a:srgbClr val="B3261E"/>
                 </a:solidFill>
@@ -12009,7 +12375,7 @@
           <a:bodyPr wrap="square" lIns="0" tIns="0" rIns="0" bIns="0" rtlCol="0" anchor="ctr"/>
           <a:lstStyle/>
           <a:p>
-            <a:pPr marL="0" indent="0">
+            <a:pPr indent="0" marL="0">
               <a:lnSpc>
                 <a:spcPct val="112000"/>
               </a:lnSpc>
@@ -12073,7 +12439,7 @@
           <a:bodyPr wrap="square" lIns="0" tIns="0" rIns="0" bIns="0" rtlCol="0" anchor="ctr"/>
           <a:lstStyle/>
           <a:p>
-            <a:pPr marL="0" indent="0">
+            <a:pPr indent="0" marL="0">
               <a:lnSpc>
                 <a:spcPct val="112000"/>
               </a:lnSpc>
@@ -12096,7 +12462,7 @@
       </p:sp>
       <p:sp>
         <p:nvSpPr>
-          <p:cNvPr id="30" name="Slide Number Placeholder 0"/>
+          <p:cNvPr id="25" name="Slide Number Placeholder 0"/>
           <p:cNvSpPr>
             <a:spLocks noGrp="1"/>
           </p:cNvSpPr>
@@ -12114,7 +12480,7 @@
           </a:prstGeom>
           <a:extLst>
             <a:ext uri="{C572A759-6A51-4108-AA02-DFA0A04FC94B}">
-              <ma14:wrappingTextBoxFlag xmlns="" xmlns:ma14="http://schemas.microsoft.com/office/mac/drawingml/2011/main" val="0"/>
+              <ma14:wrappingTextBoxFlag xmlns:ma14="http://schemas.microsoft.com/office/mac/drawingml/2011/main" val="0"/>
             </a:ext>
           </a:extLst>
         </p:spPr>
@@ -12135,7 +12501,7 @@
           <a:p>
             <a:pPr algn="l"/>
             <a:fld id="{F7021451-1387-4CA6-816F-3879F97B5CBC}" type="slidenum">
-              <a:rPr lang="en-US" b="0"/>
+              <a:rPr b="0" lang="en-US"/>
               <a:t>17</a:t>
             </a:fld>
             <a:endParaRPr lang="en-US"/>
@@ -12210,7 +12576,7 @@
           <a:bodyPr wrap="square" lIns="0" tIns="0" rIns="0" bIns="0" rtlCol="0" anchor="ctr"/>
           <a:lstStyle/>
           <a:p>
-            <a:pPr marL="0" indent="0" algn="l">
+            <a:pPr algn="l" indent="0" marL="0">
               <a:buNone/>
             </a:pPr>
             <a:r>
@@ -12249,7 +12615,7 @@
           <a:bodyPr wrap="square" lIns="0" tIns="0" rIns="0" bIns="0" rtlCol="0" anchor="ctr"/>
           <a:lstStyle/>
           <a:p>
-            <a:pPr marL="0" indent="0">
+            <a:pPr indent="0" marL="0">
               <a:buNone/>
             </a:pPr>
             <a:r>
@@ -12315,11 +12681,11 @@
           <a:bodyPr wrap="square" lIns="0" tIns="0" rIns="0" bIns="0" rtlCol="0" anchor="ctr"/>
           <a:lstStyle/>
           <a:p>
-            <a:pPr marL="0" indent="0" algn="ctr">
-              <a:buNone/>
-            </a:pPr>
-            <a:r>
-              <a:rPr lang="en-US" sz="900" b="1" kern="0" spc="100" dirty="0">
+            <a:pPr algn="ctr" indent="0" marL="0">
+              <a:buNone/>
+            </a:pPr>
+            <a:r>
+              <a:rPr lang="en-US" sz="900" b="1" spc="100" kern="0" dirty="0">
                 <a:solidFill>
                   <a:srgbClr val="5A05F4"/>
                 </a:solidFill>
@@ -12335,14 +12701,14 @@
       </p:sp>
       <p:pic>
         <p:nvPicPr>
-          <p:cNvPr id="7" name="Image 0" descr="preencoded.png"/>
+          <p:cNvPr id="7" name="Image 0" descr="preencoded.png">    </p:cNvPr>
           <p:cNvPicPr>
             <a:picLocks noChangeAspect="1"/>
           </p:cNvPicPr>
           <p:nvPr/>
         </p:nvPicPr>
         <p:blipFill>
-          <a:blip r:embed="rId3"/>
+          <a:blip r:embed="rId1"/>
           <a:stretch>
             <a:fillRect/>
           </a:stretch>
@@ -12400,7 +12766,7 @@
           <a:bodyPr wrap="square" lIns="0" tIns="0" rIns="0" bIns="0" rtlCol="0" anchor="ctr"/>
           <a:lstStyle/>
           <a:p>
-            <a:pPr marL="0" indent="0">
+            <a:pPr indent="0" marL="0">
               <a:buNone/>
             </a:pPr>
             <a:r>
@@ -12439,7 +12805,7 @@
           <a:bodyPr wrap="square" lIns="0" tIns="0" rIns="0" bIns="0" rtlCol="0" anchor="ctr"/>
           <a:lstStyle/>
           <a:p>
-            <a:pPr marL="0" indent="0">
+            <a:pPr indent="0" marL="0">
               <a:buNone/>
             </a:pPr>
             <a:r>
@@ -12500,7 +12866,7 @@
           <a:bodyPr wrap="square" lIns="0" tIns="0" rIns="0" bIns="0" rtlCol="0" anchor="ctr"/>
           <a:lstStyle/>
           <a:p>
-            <a:pPr marL="0" indent="0">
+            <a:pPr indent="0" marL="0">
               <a:buNone/>
             </a:pPr>
             <a:r>
@@ -12539,7 +12905,7 @@
           <a:bodyPr wrap="square" lIns="0" tIns="0" rIns="0" bIns="0" rtlCol="0" anchor="ctr"/>
           <a:lstStyle/>
           <a:p>
-            <a:pPr marL="0" indent="0">
+            <a:pPr indent="0" marL="0">
               <a:buNone/>
             </a:pPr>
             <a:r>
@@ -12600,7 +12966,7 @@
           <a:bodyPr wrap="square" lIns="0" tIns="0" rIns="0" bIns="0" rtlCol="0" anchor="ctr"/>
           <a:lstStyle/>
           <a:p>
-            <a:pPr marL="0" indent="0">
+            <a:pPr indent="0" marL="0">
               <a:buNone/>
             </a:pPr>
             <a:r>
@@ -12639,7 +13005,7 @@
           <a:bodyPr wrap="square" lIns="0" tIns="0" rIns="0" bIns="0" rtlCol="0" anchor="ctr"/>
           <a:lstStyle/>
           <a:p>
-            <a:pPr marL="0" indent="0">
+            <a:pPr indent="0" marL="0">
               <a:buNone/>
             </a:pPr>
             <a:r>
@@ -12705,7 +13071,7 @@
           <a:bodyPr wrap="square" lIns="0" tIns="0" rIns="0" bIns="0" rtlCol="0" anchor="ctr"/>
           <a:lstStyle/>
           <a:p>
-            <a:pPr marL="0" indent="0">
+            <a:pPr indent="0" marL="0">
               <a:lnSpc>
                 <a:spcPct val="112000"/>
               </a:lnSpc>
@@ -12774,7 +13140,7 @@
           <a:bodyPr wrap="square" lIns="0" tIns="0" rIns="0" bIns="0" rtlCol="0" anchor="ctr"/>
           <a:lstStyle/>
           <a:p>
-            <a:pPr marL="0" indent="0">
+            <a:pPr indent="0" marL="0">
               <a:lnSpc>
                 <a:spcPct val="112000"/>
               </a:lnSpc>
@@ -12815,7 +13181,7 @@
           </a:prstGeom>
           <a:extLst>
             <a:ext uri="{C572A759-6A51-4108-AA02-DFA0A04FC94B}">
-              <ma14:wrappingTextBoxFlag xmlns="" xmlns:ma14="http://schemas.microsoft.com/office/mac/drawingml/2011/main" val="0"/>
+              <ma14:wrappingTextBoxFlag xmlns:ma14="http://schemas.microsoft.com/office/mac/drawingml/2011/main" val="0"/>
             </a:ext>
           </a:extLst>
         </p:spPr>
@@ -12836,7 +13202,7 @@
           <a:p>
             <a:pPr algn="l"/>
             <a:fld id="{F7021451-1387-4CA6-816F-3879F97B5CBC}" type="slidenum">
-              <a:rPr lang="en-US" b="0"/>
+              <a:rPr b="0" lang="en-US"/>
               <a:t>18</a:t>
             </a:fld>
             <a:endParaRPr lang="en-US"/>
@@ -12911,7 +13277,7 @@
           <a:bodyPr wrap="square" lIns="0" tIns="0" rIns="0" bIns="0" rtlCol="0" anchor="ctr"/>
           <a:lstStyle/>
           <a:p>
-            <a:pPr marL="0" indent="0" algn="l">
+            <a:pPr algn="l" indent="0" marL="0">
               <a:buNone/>
             </a:pPr>
             <a:r>
@@ -12950,7 +13316,7 @@
           <a:bodyPr wrap="square" lIns="0" tIns="0" rIns="0" bIns="0" rtlCol="0" anchor="ctr"/>
           <a:lstStyle/>
           <a:p>
-            <a:pPr marL="0" indent="0">
+            <a:pPr indent="0" marL="0">
               <a:buNone/>
             </a:pPr>
             <a:r>
@@ -12989,7 +13355,7 @@
           <a:bodyPr wrap="square" lIns="0" tIns="0" rIns="0" bIns="0" rtlCol="0" anchor="t"/>
           <a:lstStyle/>
           <a:p>
-            <a:pPr marL="0" indent="0">
+            <a:pPr indent="0" marL="0">
               <a:lnSpc>
                 <a:spcPct val="100000"/>
               </a:lnSpc>
@@ -13058,11 +13424,11 @@
           <a:bodyPr wrap="square" lIns="0" tIns="0" rIns="0" bIns="0" rtlCol="0" anchor="ctr"/>
           <a:lstStyle/>
           <a:p>
-            <a:pPr marL="0" indent="0" algn="ctr">
-              <a:buNone/>
-            </a:pPr>
-            <a:r>
-              <a:rPr lang="en-US" sz="900" b="1" kern="0" spc="100" dirty="0">
+            <a:pPr algn="ctr" indent="0" marL="0">
+              <a:buNone/>
+            </a:pPr>
+            <a:r>
+              <a:rPr lang="en-US" sz="900" b="1" spc="100" kern="0" dirty="0">
                 <a:solidFill>
                   <a:srgbClr val="5A05F4"/>
                 </a:solidFill>
@@ -13078,14 +13444,14 @@
       </p:sp>
       <p:pic>
         <p:nvPicPr>
-          <p:cNvPr id="8" name="Image 0" descr="preencoded.png"/>
+          <p:cNvPr id="8" name="Image 0" descr="preencoded.png">    </p:cNvPr>
           <p:cNvPicPr>
             <a:picLocks noChangeAspect="1"/>
           </p:cNvPicPr>
           <p:nvPr/>
         </p:nvPicPr>
         <p:blipFill>
-          <a:blip r:embed="rId3"/>
+          <a:blip r:embed="rId1"/>
           <a:stretch>
             <a:fillRect/>
           </a:stretch>
@@ -13163,7 +13529,7 @@
           <a:bodyPr wrap="square" lIns="0" tIns="0" rIns="0" bIns="0" rtlCol="0" anchor="ctr"/>
           <a:lstStyle/>
           <a:p>
-            <a:pPr marL="0" indent="0" algn="ctr">
+            <a:pPr algn="ctr" indent="0" marL="0">
               <a:buNone/>
             </a:pPr>
             <a:r>
@@ -13202,7 +13568,7 @@
           <a:bodyPr wrap="square" lIns="0" tIns="0" rIns="0" bIns="0" rtlCol="0" anchor="ctr"/>
           <a:lstStyle/>
           <a:p>
-            <a:pPr marL="0" indent="0">
+            <a:pPr indent="0" marL="0">
               <a:buNone/>
             </a:pPr>
             <a:r>
@@ -13241,7 +13607,7 @@
           <a:bodyPr wrap="square" lIns="0" tIns="0" rIns="0" bIns="0" rtlCol="0" anchor="t"/>
           <a:lstStyle/>
           <a:p>
-            <a:pPr marL="0" indent="0">
+            <a:pPr indent="0" marL="0">
               <a:lnSpc>
                 <a:spcPct val="108000"/>
               </a:lnSpc>
@@ -13325,7 +13691,7 @@
           <a:bodyPr wrap="square" lIns="0" tIns="0" rIns="0" bIns="0" rtlCol="0" anchor="ctr"/>
           <a:lstStyle/>
           <a:p>
-            <a:pPr marL="0" indent="0" algn="ctr">
+            <a:pPr algn="ctr" indent="0" marL="0">
               <a:buNone/>
             </a:pPr>
             <a:r>
@@ -13364,7 +13730,7 @@
           <a:bodyPr wrap="square" lIns="0" tIns="0" rIns="0" bIns="0" rtlCol="0" anchor="ctr"/>
           <a:lstStyle/>
           <a:p>
-            <a:pPr marL="0" indent="0">
+            <a:pPr indent="0" marL="0">
               <a:buNone/>
             </a:pPr>
             <a:r>
@@ -13403,7 +13769,7 @@
           <a:bodyPr wrap="square" lIns="0" tIns="0" rIns="0" bIns="0" rtlCol="0" anchor="t"/>
           <a:lstStyle/>
           <a:p>
-            <a:pPr marL="0" indent="0">
+            <a:pPr indent="0" marL="0">
               <a:lnSpc>
                 <a:spcPct val="108000"/>
               </a:lnSpc>
@@ -13472,7 +13838,7 @@
           <a:bodyPr wrap="square" lIns="0" tIns="0" rIns="0" bIns="0" rtlCol="0" anchor="ctr"/>
           <a:lstStyle/>
           <a:p>
-            <a:pPr marL="0" indent="0">
+            <a:pPr indent="0" marL="0">
               <a:lnSpc>
                 <a:spcPct val="112000"/>
               </a:lnSpc>
@@ -13541,11 +13907,11 @@
           <a:bodyPr wrap="square" lIns="0" tIns="0" rIns="0" bIns="0" rtlCol="0" anchor="ctr"/>
           <a:lstStyle/>
           <a:p>
-            <a:pPr marL="0" indent="0">
-              <a:buNone/>
-            </a:pPr>
-            <a:r>
-              <a:rPr lang="en-US" sz="950" b="1" kern="0" spc="150" dirty="0">
+            <a:pPr indent="0" marL="0">
+              <a:buNone/>
+            </a:pPr>
+            <a:r>
+              <a:rPr lang="en-US" sz="950" b="1" spc="150" kern="0" dirty="0">
                 <a:solidFill>
                   <a:srgbClr val="106B41"/>
                 </a:solidFill>
@@ -13580,7 +13946,7 @@
           <a:bodyPr wrap="square" lIns="0" tIns="0" rIns="0" bIns="0" rtlCol="0" anchor="ctr"/>
           <a:lstStyle/>
           <a:p>
-            <a:pPr marL="0" indent="0">
+            <a:pPr indent="0" marL="0">
               <a:lnSpc>
                 <a:spcPct val="112000"/>
               </a:lnSpc>
@@ -13621,7 +13987,7 @@
           </a:prstGeom>
           <a:extLst>
             <a:ext uri="{C572A759-6A51-4108-AA02-DFA0A04FC94B}">
-              <ma14:wrappingTextBoxFlag xmlns="" xmlns:ma14="http://schemas.microsoft.com/office/mac/drawingml/2011/main" val="0"/>
+              <ma14:wrappingTextBoxFlag xmlns:ma14="http://schemas.microsoft.com/office/mac/drawingml/2011/main" val="0"/>
             </a:ext>
           </a:extLst>
         </p:spPr>
@@ -13642,7 +14008,7 @@
           <a:p>
             <a:pPr algn="l"/>
             <a:fld id="{F7021451-1387-4CA6-816F-3879F97B5CBC}" type="slidenum">
-              <a:rPr lang="en-US" b="0"/>
+              <a:rPr b="0" lang="en-US"/>
               <a:t>19</a:t>
             </a:fld>
             <a:endParaRPr lang="en-US"/>
@@ -13717,7 +14083,7 @@
           <a:bodyPr wrap="square" lIns="0" tIns="0" rIns="0" bIns="0" rtlCol="0" anchor="ctr"/>
           <a:lstStyle/>
           <a:p>
-            <a:pPr marL="0" indent="0">
+            <a:pPr indent="0" marL="0">
               <a:buNone/>
             </a:pPr>
             <a:r>
@@ -13756,7 +14122,7 @@
           <a:bodyPr wrap="square" lIns="0" tIns="0" rIns="0" bIns="0" rtlCol="0" anchor="t"/>
           <a:lstStyle/>
           <a:p>
-            <a:pPr marL="0" indent="0">
+            <a:pPr indent="0" marL="0">
               <a:lnSpc>
                 <a:spcPct val="100000"/>
               </a:lnSpc>
@@ -13825,11 +14191,11 @@
           <a:bodyPr wrap="square" lIns="0" tIns="0" rIns="0" bIns="0" rtlCol="0" anchor="ctr"/>
           <a:lstStyle/>
           <a:p>
-            <a:pPr marL="0" indent="0" algn="ctr">
-              <a:buNone/>
-            </a:pPr>
-            <a:r>
-              <a:rPr lang="en-US" sz="900" b="1" kern="0" spc="100" dirty="0">
+            <a:pPr algn="ctr" indent="0" marL="0">
+              <a:buNone/>
+            </a:pPr>
+            <a:r>
+              <a:rPr lang="en-US" sz="900" b="1" spc="100" kern="0" dirty="0">
                 <a:solidFill>
                   <a:srgbClr val="5A05F4"/>
                 </a:solidFill>
@@ -13845,14 +14211,14 @@
       </p:sp>
       <p:pic>
         <p:nvPicPr>
-          <p:cNvPr id="7" name="Image 0" descr="preencoded.png"/>
+          <p:cNvPr id="7" name="Image 0" descr="preencoded.png">    </p:cNvPr>
           <p:cNvPicPr>
             <a:picLocks noChangeAspect="1"/>
           </p:cNvPicPr>
           <p:nvPr/>
         </p:nvPicPr>
         <p:blipFill>
-          <a:blip r:embed="rId3"/>
+          <a:blip r:embed="rId1"/>
           <a:stretch>
             <a:fillRect/>
           </a:stretch>
@@ -13930,7 +14296,7 @@
           <a:bodyPr wrap="square" lIns="0" tIns="0" rIns="0" bIns="0" rtlCol="0" anchor="ctr"/>
           <a:lstStyle/>
           <a:p>
-            <a:pPr marL="0" indent="0" algn="ctr">
+            <a:pPr algn="ctr" indent="0" marL="0">
               <a:buNone/>
             </a:pPr>
             <a:r>
@@ -13969,7 +14335,7 @@
           <a:bodyPr wrap="square" lIns="0" tIns="0" rIns="0" bIns="0" rtlCol="0" anchor="ctr"/>
           <a:lstStyle/>
           <a:p>
-            <a:pPr marL="0" indent="0">
+            <a:pPr indent="0" marL="0">
               <a:buNone/>
             </a:pPr>
             <a:r>
@@ -14008,7 +14374,7 @@
           <a:bodyPr wrap="square" lIns="0" tIns="0" rIns="0" bIns="0" rtlCol="0" anchor="t"/>
           <a:lstStyle/>
           <a:p>
-            <a:pPr marL="0" indent="0">
+            <a:pPr indent="0" marL="0">
               <a:lnSpc>
                 <a:spcPct val="108000"/>
               </a:lnSpc>
@@ -14092,7 +14458,7 @@
           <a:bodyPr wrap="square" lIns="0" tIns="0" rIns="0" bIns="0" rtlCol="0" anchor="ctr"/>
           <a:lstStyle/>
           <a:p>
-            <a:pPr marL="0" indent="0" algn="ctr">
+            <a:pPr algn="ctr" indent="0" marL="0">
               <a:buNone/>
             </a:pPr>
             <a:r>
@@ -14131,7 +14497,7 @@
           <a:bodyPr wrap="square" lIns="0" tIns="0" rIns="0" bIns="0" rtlCol="0" anchor="ctr"/>
           <a:lstStyle/>
           <a:p>
-            <a:pPr marL="0" indent="0">
+            <a:pPr indent="0" marL="0">
               <a:buNone/>
             </a:pPr>
             <a:r>
@@ -14170,7 +14536,7 @@
           <a:bodyPr wrap="square" lIns="0" tIns="0" rIns="0" bIns="0" rtlCol="0" anchor="t"/>
           <a:lstStyle/>
           <a:p>
-            <a:pPr marL="0" indent="0">
+            <a:pPr indent="0" marL="0">
               <a:lnSpc>
                 <a:spcPct val="108000"/>
               </a:lnSpc>
@@ -14254,7 +14620,7 @@
           <a:bodyPr wrap="square" lIns="0" tIns="0" rIns="0" bIns="0" rtlCol="0" anchor="ctr"/>
           <a:lstStyle/>
           <a:p>
-            <a:pPr marL="0" indent="0" algn="ctr">
+            <a:pPr algn="ctr" indent="0" marL="0">
               <a:buNone/>
             </a:pPr>
             <a:r>
@@ -14293,7 +14659,7 @@
           <a:bodyPr wrap="square" lIns="0" tIns="0" rIns="0" bIns="0" rtlCol="0" anchor="ctr"/>
           <a:lstStyle/>
           <a:p>
-            <a:pPr marL="0" indent="0">
+            <a:pPr indent="0" marL="0">
               <a:buNone/>
             </a:pPr>
             <a:r>
@@ -14332,7 +14698,7 @@
           <a:bodyPr wrap="square" lIns="0" tIns="0" rIns="0" bIns="0" rtlCol="0" anchor="t"/>
           <a:lstStyle/>
           <a:p>
-            <a:pPr marL="0" indent="0">
+            <a:pPr indent="0" marL="0">
               <a:lnSpc>
                 <a:spcPct val="108000"/>
               </a:lnSpc>
@@ -14347,7 +14713,7 @@
                 <a:ea typeface="Montserrat" pitchFamily="34" charset="-122"/>
                 <a:cs typeface="Montserrat" pitchFamily="34" charset="-120"/>
               </a:rPr>
-              <a:t>замість 500-ки, з чесним 503 у лозі</a:t>
+              <a:t>замість помилки 500, з чесним 503 у лозі</a:t>
             </a:r>
             <a:endParaRPr lang="en-US" sz="1200" dirty="0"/>
           </a:p>
@@ -14416,7 +14782,7 @@
           <a:bodyPr wrap="square" lIns="0" tIns="0" rIns="0" bIns="0" rtlCol="0" anchor="ctr"/>
           <a:lstStyle/>
           <a:p>
-            <a:pPr marL="0" indent="0" algn="ctr">
+            <a:pPr algn="ctr" indent="0" marL="0">
               <a:buNone/>
             </a:pPr>
             <a:r>
@@ -14455,7 +14821,7 @@
           <a:bodyPr wrap="square" lIns="0" tIns="0" rIns="0" bIns="0" rtlCol="0" anchor="ctr"/>
           <a:lstStyle/>
           <a:p>
-            <a:pPr marL="0" indent="0">
+            <a:pPr indent="0" marL="0">
               <a:buNone/>
             </a:pPr>
             <a:r>
@@ -14494,7 +14860,7 @@
           <a:bodyPr wrap="square" lIns="0" tIns="0" rIns="0" bIns="0" rtlCol="0" anchor="t"/>
           <a:lstStyle/>
           <a:p>
-            <a:pPr marL="0" indent="0">
+            <a:pPr indent="0" marL="0">
               <a:lnSpc>
                 <a:spcPct val="108000"/>
               </a:lnSpc>
@@ -14578,7 +14944,7 @@
           <a:bodyPr wrap="square" lIns="0" tIns="0" rIns="0" bIns="0" rtlCol="0" anchor="ctr"/>
           <a:lstStyle/>
           <a:p>
-            <a:pPr marL="0" indent="0" algn="ctr">
+            <a:pPr algn="ctr" indent="0" marL="0">
               <a:buNone/>
             </a:pPr>
             <a:r>
@@ -14617,7 +14983,7 @@
           <a:bodyPr wrap="square" lIns="0" tIns="0" rIns="0" bIns="0" rtlCol="0" anchor="ctr"/>
           <a:lstStyle/>
           <a:p>
-            <a:pPr marL="0" indent="0">
+            <a:pPr indent="0" marL="0">
               <a:buNone/>
             </a:pPr>
             <a:r>
@@ -14656,7 +15022,7 @@
           <a:bodyPr wrap="square" lIns="0" tIns="0" rIns="0" bIns="0" rtlCol="0" anchor="t"/>
           <a:lstStyle/>
           <a:p>
-            <a:pPr marL="0" indent="0">
+            <a:pPr indent="0" marL="0">
               <a:lnSpc>
                 <a:spcPct val="108000"/>
               </a:lnSpc>
@@ -14679,7 +15045,7 @@
       </p:sp>
       <p:sp>
         <p:nvSpPr>
-          <p:cNvPr id="33" name="Slide Number Placeholder 0"/>
+          <p:cNvPr id="25" name="Slide Number Placeholder 0"/>
           <p:cNvSpPr>
             <a:spLocks noGrp="1"/>
           </p:cNvSpPr>
@@ -14697,7 +15063,7 @@
           </a:prstGeom>
           <a:extLst>
             <a:ext uri="{C572A759-6A51-4108-AA02-DFA0A04FC94B}">
-              <ma14:wrappingTextBoxFlag xmlns="" xmlns:ma14="http://schemas.microsoft.com/office/mac/drawingml/2011/main" val="0"/>
+              <ma14:wrappingTextBoxFlag xmlns:ma14="http://schemas.microsoft.com/office/mac/drawingml/2011/main" val="0"/>
             </a:ext>
           </a:extLst>
         </p:spPr>
@@ -14718,7 +15084,7 @@
           <a:p>
             <a:pPr algn="l"/>
             <a:fld id="{F7021451-1387-4CA6-816F-3879F97B5CBC}" type="slidenum">
-              <a:rPr lang="en-US" b="0"/>
+              <a:rPr b="0" lang="en-US"/>
               <a:t>2</a:t>
             </a:fld>
             <a:endParaRPr lang="en-US"/>
@@ -14771,11 +15137,11 @@
           <a:bodyPr wrap="square" lIns="0" tIns="0" rIns="0" bIns="0" rtlCol="0" anchor="ctr"/>
           <a:lstStyle/>
           <a:p>
-            <a:pPr marL="0" indent="0">
-              <a:buNone/>
-            </a:pPr>
-            <a:r>
-              <a:rPr lang="en-US" sz="1200" b="1" kern="0" spc="400" dirty="0">
+            <a:pPr indent="0" marL="0">
+              <a:buNone/>
+            </a:pPr>
+            <a:r>
+              <a:rPr lang="en-US" sz="1200" b="1" spc="400" kern="0" dirty="0">
                 <a:solidFill>
                   <a:srgbClr val="FFFFFF"/>
                 </a:solidFill>
@@ -14810,7 +15176,7 @@
           <a:bodyPr wrap="square" lIns="0" tIns="0" rIns="0" bIns="0" rtlCol="0" anchor="ctr"/>
           <a:lstStyle/>
           <a:p>
-            <a:pPr marL="0" indent="0">
+            <a:pPr indent="0" marL="0">
               <a:buNone/>
             </a:pPr>
             <a:r>
@@ -14849,7 +15215,7 @@
           <a:bodyPr wrap="square" lIns="0" tIns="0" rIns="0" bIns="0" rtlCol="0" anchor="t"/>
           <a:lstStyle/>
           <a:p>
-            <a:pPr marL="0" indent="0">
+            <a:pPr indent="0" marL="0">
               <a:buNone/>
             </a:pPr>
             <a:r>
@@ -14910,7 +15276,7 @@
           <a:bodyPr wrap="square" lIns="0" tIns="0" rIns="0" bIns="0" rtlCol="0" anchor="ctr"/>
           <a:lstStyle/>
           <a:p>
-            <a:pPr marL="0" indent="0" algn="ctr">
+            <a:pPr algn="ctr" indent="0" marL="0">
               <a:buNone/>
             </a:pPr>
             <a:r>
@@ -14996,7 +15362,7 @@
           <a:bodyPr wrap="square" lIns="0" tIns="0" rIns="0" bIns="0" rtlCol="0" anchor="ctr"/>
           <a:lstStyle/>
           <a:p>
-            <a:pPr marL="0" indent="0">
+            <a:pPr indent="0" marL="0">
               <a:buNone/>
             </a:pPr>
             <a:r>
@@ -15057,11 +15423,11 @@
           <a:bodyPr wrap="square" lIns="0" tIns="0" rIns="0" bIns="0" rtlCol="0" anchor="ctr"/>
           <a:lstStyle/>
           <a:p>
-            <a:pPr marL="0" indent="0" algn="ctr">
-              <a:buNone/>
-            </a:pPr>
-            <a:r>
-              <a:rPr lang="en-US" sz="900" b="1" kern="0" spc="100" dirty="0">
+            <a:pPr algn="ctr" indent="0" marL="0">
+              <a:buNone/>
+            </a:pPr>
+            <a:r>
+              <a:rPr lang="en-US" sz="900" b="1" spc="100" kern="0" dirty="0">
                 <a:solidFill>
                   <a:srgbClr val="FFFFFF"/>
                 </a:solidFill>
@@ -15077,14 +15443,14 @@
       </p:sp>
       <p:pic>
         <p:nvPicPr>
-          <p:cNvPr id="6" name="Image 0" descr="preencoded.png"/>
+          <p:cNvPr id="6" name="Image 0" descr="preencoded.png">    </p:cNvPr>
           <p:cNvPicPr>
             <a:picLocks noChangeAspect="1"/>
           </p:cNvPicPr>
           <p:nvPr/>
         </p:nvPicPr>
         <p:blipFill>
-          <a:blip r:embed="rId3"/>
+          <a:blip r:embed="rId1"/>
           <a:stretch>
             <a:fillRect/>
           </a:stretch>
@@ -15162,7 +15528,7 @@
           <a:bodyPr wrap="square" lIns="0" tIns="0" rIns="0" bIns="0" rtlCol="0" anchor="ctr"/>
           <a:lstStyle/>
           <a:p>
-            <a:pPr marL="0" indent="0" algn="ctr">
+            <a:pPr algn="ctr" indent="0" marL="0">
               <a:buNone/>
             </a:pPr>
             <a:r>
@@ -15201,7 +15567,7 @@
           <a:bodyPr wrap="square" lIns="0" tIns="0" rIns="0" bIns="0" rtlCol="0" anchor="ctr"/>
           <a:lstStyle/>
           <a:p>
-            <a:pPr marL="0" indent="0">
+            <a:pPr indent="0" marL="0">
               <a:buNone/>
             </a:pPr>
             <a:r>
@@ -15240,7 +15606,7 @@
           <a:bodyPr wrap="square" lIns="0" tIns="0" rIns="0" bIns="0" rtlCol="0" anchor="t"/>
           <a:lstStyle/>
           <a:p>
-            <a:pPr marL="0" indent="0">
+            <a:pPr indent="0" marL="0">
               <a:lnSpc>
                 <a:spcPct val="108000"/>
               </a:lnSpc>
@@ -15255,7 +15621,7 @@
                 <a:ea typeface="Montserrat" pitchFamily="34" charset="-122"/>
                 <a:cs typeface="Montserrat" pitchFamily="34" charset="-120"/>
               </a:rPr>
-              <a:t>ввічлива відмова замість 500-ки</a:t>
+              <a:t>ввічлива відмова замість помилки 500</a:t>
             </a:r>
             <a:endParaRPr lang="en-US" sz="1200" dirty="0"/>
           </a:p>
@@ -15324,7 +15690,7 @@
           <a:bodyPr wrap="square" lIns="0" tIns="0" rIns="0" bIns="0" rtlCol="0" anchor="ctr"/>
           <a:lstStyle/>
           <a:p>
-            <a:pPr marL="0" indent="0" algn="ctr">
+            <a:pPr algn="ctr" indent="0" marL="0">
               <a:buNone/>
             </a:pPr>
             <a:r>
@@ -15363,7 +15729,7 @@
           <a:bodyPr wrap="square" lIns="0" tIns="0" rIns="0" bIns="0" rtlCol="0" anchor="ctr"/>
           <a:lstStyle/>
           <a:p>
-            <a:pPr marL="0" indent="0">
+            <a:pPr indent="0" marL="0">
               <a:buNone/>
             </a:pPr>
             <a:r>
@@ -15402,7 +15768,7 @@
           <a:bodyPr wrap="square" lIns="0" tIns="0" rIns="0" bIns="0" rtlCol="0" anchor="t"/>
           <a:lstStyle/>
           <a:p>
-            <a:pPr marL="0" indent="0">
+            <a:pPr indent="0" marL="0">
               <a:lnSpc>
                 <a:spcPct val="108000"/>
               </a:lnSpc>
@@ -15486,7 +15852,7 @@
           <a:bodyPr wrap="square" lIns="0" tIns="0" rIns="0" bIns="0" rtlCol="0" anchor="ctr"/>
           <a:lstStyle/>
           <a:p>
-            <a:pPr marL="0" indent="0" algn="ctr">
+            <a:pPr algn="ctr" indent="0" marL="0">
               <a:buNone/>
             </a:pPr>
             <a:r>
@@ -15525,7 +15891,7 @@
           <a:bodyPr wrap="square" lIns="0" tIns="0" rIns="0" bIns="0" rtlCol="0" anchor="ctr"/>
           <a:lstStyle/>
           <a:p>
-            <a:pPr marL="0" indent="0">
+            <a:pPr indent="0" marL="0">
               <a:buNone/>
             </a:pPr>
             <a:r>
@@ -15564,7 +15930,7 @@
           <a:bodyPr wrap="square" lIns="0" tIns="0" rIns="0" bIns="0" rtlCol="0" anchor="t"/>
           <a:lstStyle/>
           <a:p>
-            <a:pPr marL="0" indent="0">
+            <a:pPr indent="0" marL="0">
               <a:lnSpc>
                 <a:spcPct val="108000"/>
               </a:lnSpc>
@@ -15648,7 +16014,7 @@
           <a:bodyPr wrap="square" lIns="0" tIns="0" rIns="0" bIns="0" rtlCol="0" anchor="ctr"/>
           <a:lstStyle/>
           <a:p>
-            <a:pPr marL="0" indent="0" algn="ctr">
+            <a:pPr algn="ctr" indent="0" marL="0">
               <a:buNone/>
             </a:pPr>
             <a:r>
@@ -15687,7 +16053,7 @@
           <a:bodyPr wrap="square" lIns="0" tIns="0" rIns="0" bIns="0" rtlCol="0" anchor="ctr"/>
           <a:lstStyle/>
           <a:p>
-            <a:pPr marL="0" indent="0">
+            <a:pPr indent="0" marL="0">
               <a:buNone/>
             </a:pPr>
             <a:r>
@@ -15726,7 +16092,7 @@
           <a:bodyPr wrap="square" lIns="0" tIns="0" rIns="0" bIns="0" rtlCol="0" anchor="t"/>
           <a:lstStyle/>
           <a:p>
-            <a:pPr marL="0" indent="0">
+            <a:pPr indent="0" marL="0">
               <a:lnSpc>
                 <a:spcPct val="108000"/>
               </a:lnSpc>
@@ -15810,7 +16176,7 @@
           <a:bodyPr wrap="square" lIns="0" tIns="0" rIns="0" bIns="0" rtlCol="0" anchor="ctr"/>
           <a:lstStyle/>
           <a:p>
-            <a:pPr marL="0" indent="0" algn="ctr">
+            <a:pPr algn="ctr" indent="0" marL="0">
               <a:buNone/>
             </a:pPr>
             <a:r>
@@ -15849,7 +16215,7 @@
           <a:bodyPr wrap="square" lIns="0" tIns="0" rIns="0" bIns="0" rtlCol="0" anchor="ctr"/>
           <a:lstStyle/>
           <a:p>
-            <a:pPr marL="0" indent="0">
+            <a:pPr indent="0" marL="0">
               <a:buNone/>
             </a:pPr>
             <a:r>
@@ -15888,7 +16254,7 @@
           <a:bodyPr wrap="square" lIns="0" tIns="0" rIns="0" bIns="0" rtlCol="0" anchor="t"/>
           <a:lstStyle/>
           <a:p>
-            <a:pPr marL="0" indent="0">
+            <a:pPr indent="0" marL="0">
               <a:lnSpc>
                 <a:spcPct val="108000"/>
               </a:lnSpc>
@@ -15933,14 +16299,34 @@
       </p:sp>
       <p:sp>
         <p:nvSpPr>
-          <p:cNvPr id="33" name="Text 30"/>
-          <p:cNvSpPr/>
-          <p:nvPr/>
-        </p:nvSpPr>
-        <p:spPr>
-          <a:xfrm>
-            <a:off x="786384" y="5157216"/>
-            <a:ext cx="10625328" cy="219456"/>
+          <p:cNvPr id="33" name="Shape 30"/>
+          <p:cNvSpPr/>
+          <p:nvPr/>
+        </p:nvSpPr>
+        <p:spPr>
+          <a:xfrm>
+            <a:off x="749808" y="5399532"/>
+            <a:ext cx="310896" cy="310896"/>
+          </a:xfrm>
+          <a:prstGeom prst="ellipse">
+            <a:avLst/>
+          </a:prstGeom>
+          <a:solidFill>
+            <a:srgbClr val="FFFFFF"/>
+          </a:solidFill>
+          <a:ln/>
+        </p:spPr>
+      </p:sp>
+      <p:sp>
+        <p:nvSpPr>
+          <p:cNvPr id="34" name="Text 31"/>
+          <p:cNvSpPr/>
+          <p:nvPr/>
+        </p:nvSpPr>
+        <p:spPr>
+          <a:xfrm>
+            <a:off x="749808" y="5399532"/>
+            <a:ext cx="310896" cy="310896"/>
           </a:xfrm>
           <a:prstGeom prst="rect">
             <a:avLst/>
@@ -15952,11 +16338,50 @@
           <a:bodyPr wrap="square" lIns="0" tIns="0" rIns="0" bIns="0" rtlCol="0" anchor="ctr"/>
           <a:lstStyle/>
           <a:p>
-            <a:pPr marL="0" indent="0">
-              <a:buNone/>
-            </a:pPr>
-            <a:r>
-              <a:rPr lang="en-US" sz="950" b="1" kern="0" spc="150" dirty="0">
+            <a:pPr algn="ctr" indent="0" marL="0">
+              <a:buNone/>
+            </a:pPr>
+            <a:r>
+              <a:rPr lang="en-US" sz="1200" b="1" dirty="0">
+                <a:solidFill>
+                  <a:srgbClr val="5A05F4"/>
+                </a:solidFill>
+                <a:latin typeface="Arial" pitchFamily="34" charset="0"/>
+                <a:ea typeface="Arial" pitchFamily="34" charset="-122"/>
+                <a:cs typeface="Arial" pitchFamily="34" charset="-120"/>
+              </a:rPr>
+              <a:t>?</a:t>
+            </a:r>
+            <a:endParaRPr lang="en-US" sz="1200" dirty="0"/>
+          </a:p>
+        </p:txBody>
+      </p:sp>
+      <p:sp>
+        <p:nvSpPr>
+          <p:cNvPr id="35" name="Text 32"/>
+          <p:cNvSpPr/>
+          <p:nvPr/>
+        </p:nvSpPr>
+        <p:spPr>
+          <a:xfrm>
+            <a:off x="1243584" y="5157216"/>
+            <a:ext cx="10168128" cy="219456"/>
+          </a:xfrm>
+          <a:prstGeom prst="rect">
+            <a:avLst/>
+          </a:prstGeom>
+          <a:noFill/>
+          <a:ln/>
+        </p:spPr>
+        <p:txBody>
+          <a:bodyPr wrap="square" lIns="0" tIns="0" rIns="0" bIns="0" rtlCol="0" anchor="ctr"/>
+          <a:lstStyle/>
+          <a:p>
+            <a:pPr indent="0" marL="0">
+              <a:buNone/>
+            </a:pPr>
+            <a:r>
+              <a:rPr lang="en-US" sz="950" b="1" spc="150" kern="0" dirty="0">
                 <a:solidFill>
                   <a:srgbClr val="FFFFFF"/>
                 </a:solidFill>
@@ -15972,14 +16397,14 @@
       </p:sp>
       <p:sp>
         <p:nvSpPr>
-          <p:cNvPr id="34" name="Text 31"/>
-          <p:cNvSpPr/>
-          <p:nvPr/>
-        </p:nvSpPr>
-        <p:spPr>
-          <a:xfrm>
-            <a:off x="786384" y="5413248"/>
-            <a:ext cx="10625328" cy="539496"/>
+          <p:cNvPr id="36" name="Text 33"/>
+          <p:cNvSpPr/>
+          <p:nvPr/>
+        </p:nvSpPr>
+        <p:spPr>
+          <a:xfrm>
+            <a:off x="1243584" y="5413248"/>
+            <a:ext cx="10168128" cy="539496"/>
           </a:xfrm>
           <a:prstGeom prst="rect">
             <a:avLst/>
@@ -15991,7 +16416,7 @@
           <a:bodyPr wrap="square" lIns="0" tIns="0" rIns="0" bIns="0" rtlCol="0" anchor="ctr"/>
           <a:lstStyle/>
           <a:p>
-            <a:pPr marL="0" indent="0">
+            <a:pPr indent="0" marL="0">
               <a:lnSpc>
                 <a:spcPct val="112000"/>
               </a:lnSpc>
@@ -16014,7 +16439,7 @@
       </p:sp>
       <p:sp>
         <p:nvSpPr>
-          <p:cNvPr id="35" name="Slide Number Placeholder 0"/>
+          <p:cNvPr id="25" name="Slide Number Placeholder 0"/>
           <p:cNvSpPr>
             <a:spLocks noGrp="1"/>
           </p:cNvSpPr>
@@ -16032,7 +16457,7 @@
           </a:prstGeom>
           <a:extLst>
             <a:ext uri="{C572A759-6A51-4108-AA02-DFA0A04FC94B}">
-              <ma14:wrappingTextBoxFlag xmlns="" xmlns:ma14="http://schemas.microsoft.com/office/mac/drawingml/2011/main" val="0"/>
+              <ma14:wrappingTextBoxFlag xmlns:ma14="http://schemas.microsoft.com/office/mac/drawingml/2011/main" val="0"/>
             </a:ext>
           </a:extLst>
         </p:spPr>
@@ -16053,7 +16478,7 @@
           <a:p>
             <a:pPr algn="l"/>
             <a:fld id="{F7021451-1387-4CA6-816F-3879F97B5CBC}" type="slidenum">
-              <a:rPr lang="en-US" b="0"/>
+              <a:rPr b="0" lang="en-US"/>
               <a:t>21</a:t>
             </a:fld>
             <a:endParaRPr lang="en-US"/>
@@ -16128,7 +16553,7 @@
           <a:bodyPr wrap="square" lIns="0" tIns="0" rIns="0" bIns="0" rtlCol="0" anchor="ctr"/>
           <a:lstStyle/>
           <a:p>
-            <a:pPr marL="0" indent="0">
+            <a:pPr indent="0" marL="0">
               <a:buNone/>
             </a:pPr>
             <a:r>
@@ -16189,11 +16614,11 @@
           <a:bodyPr wrap="square" lIns="0" tIns="0" rIns="0" bIns="0" rtlCol="0" anchor="ctr"/>
           <a:lstStyle/>
           <a:p>
-            <a:pPr marL="0" indent="0" algn="ctr">
-              <a:buNone/>
-            </a:pPr>
-            <a:r>
-              <a:rPr lang="en-US" sz="900" b="1" kern="0" spc="100" dirty="0">
+            <a:pPr algn="ctr" indent="0" marL="0">
+              <a:buNone/>
+            </a:pPr>
+            <a:r>
+              <a:rPr lang="en-US" sz="900" b="1" spc="100" kern="0" dirty="0">
                 <a:solidFill>
                   <a:srgbClr val="FFFFFF"/>
                 </a:solidFill>
@@ -16209,14 +16634,14 @@
       </p:sp>
       <p:pic>
         <p:nvPicPr>
-          <p:cNvPr id="6" name="Image 0" descr="preencoded.png"/>
+          <p:cNvPr id="6" name="Image 0" descr="preencoded.png">    </p:cNvPr>
           <p:cNvPicPr>
             <a:picLocks noChangeAspect="1"/>
           </p:cNvPicPr>
           <p:nvPr/>
         </p:nvPicPr>
         <p:blipFill>
-          <a:blip r:embed="rId3"/>
+          <a:blip r:embed="rId1"/>
           <a:stretch>
             <a:fillRect/>
           </a:stretch>
@@ -16272,7 +16697,7 @@
           <a:bodyPr wrap="square" lIns="0" tIns="0" rIns="0" bIns="0" rtlCol="0" anchor="ctr"/>
           <a:lstStyle/>
           <a:p>
-            <a:pPr marL="0" indent="0" algn="ctr">
+            <a:pPr algn="ctr" indent="0" marL="0">
               <a:buNone/>
             </a:pPr>
             <a:r>
@@ -16311,7 +16736,7 @@
           <a:bodyPr wrap="square" lIns="0" tIns="0" rIns="0" bIns="0" rtlCol="0" anchor="ctr"/>
           <a:lstStyle/>
           <a:p>
-            <a:pPr marL="0" indent="0">
+            <a:pPr indent="0" marL="0">
               <a:buNone/>
             </a:pPr>
             <a:r>
@@ -16325,6 +16750,9 @@
               </a:rPr>
               <a:t>Побудувати ланцюг  </a:t>
             </a:r>
+            <a:pPr indent="0" marL="0">
+              <a:buNone/>
+            </a:pPr>
             <a:r>
               <a:rPr lang="en-US" sz="1200" dirty="0">
                 <a:solidFill>
@@ -16381,7 +16809,7 @@
           <a:bodyPr wrap="square" lIns="0" tIns="0" rIns="0" bIns="0" rtlCol="0" anchor="ctr"/>
           <a:lstStyle/>
           <a:p>
-            <a:pPr marL="0" indent="0" algn="ctr">
+            <a:pPr algn="ctr" indent="0" marL="0">
               <a:buNone/>
             </a:pPr>
             <a:r>
@@ -16420,7 +16848,7 @@
           <a:bodyPr wrap="square" lIns="0" tIns="0" rIns="0" bIns="0" rtlCol="0" anchor="ctr"/>
           <a:lstStyle/>
           <a:p>
-            <a:pPr marL="0" indent="0">
+            <a:pPr indent="0" marL="0">
               <a:buNone/>
             </a:pPr>
             <a:r>
@@ -16434,6 +16862,9 @@
               </a:rPr>
               <a:t>Довести інцидент до дна  </a:t>
             </a:r>
+            <a:pPr indent="0" marL="0">
+              <a:buNone/>
+            </a:pPr>
             <a:r>
               <a:rPr lang="en-US" sz="1200" dirty="0">
                 <a:solidFill>
@@ -16490,7 +16921,7 @@
           <a:bodyPr wrap="square" lIns="0" tIns="0" rIns="0" bIns="0" rtlCol="0" anchor="ctr"/>
           <a:lstStyle/>
           <a:p>
-            <a:pPr marL="0" indent="0" algn="ctr">
+            <a:pPr algn="ctr" indent="0" marL="0">
               <a:buNone/>
             </a:pPr>
             <a:r>
@@ -16529,7 +16960,7 @@
           <a:bodyPr wrap="square" lIns="0" tIns="0" rIns="0" bIns="0" rtlCol="0" anchor="ctr"/>
           <a:lstStyle/>
           <a:p>
-            <a:pPr marL="0" indent="0">
+            <a:pPr indent="0" marL="0">
               <a:buNone/>
             </a:pPr>
             <a:r>
@@ -16543,6 +16974,9 @@
               </a:rPr>
               <a:t>Перевірити слід  </a:t>
             </a:r>
+            <a:pPr indent="0" marL="0">
+              <a:buNone/>
+            </a:pPr>
             <a:r>
               <a:rPr lang="en-US" sz="1200" dirty="0">
                 <a:solidFill>
@@ -16599,7 +17033,7 @@
           <a:bodyPr wrap="square" lIns="0" tIns="0" rIns="0" bIns="0" rtlCol="0" anchor="ctr"/>
           <a:lstStyle/>
           <a:p>
-            <a:pPr marL="0" indent="0" algn="ctr">
+            <a:pPr algn="ctr" indent="0" marL="0">
               <a:buNone/>
             </a:pPr>
             <a:r>
@@ -16638,7 +17072,7 @@
           <a:bodyPr wrap="square" lIns="0" tIns="0" rIns="0" bIns="0" rtlCol="0" anchor="ctr"/>
           <a:lstStyle/>
           <a:p>
-            <a:pPr marL="0" indent="0">
+            <a:pPr indent="0" marL="0">
               <a:buNone/>
             </a:pPr>
             <a:r>
@@ -16652,6 +17086,9 @@
               </a:rPr>
               <a:t>Circuit breaker · опційно  </a:t>
             </a:r>
+            <a:pPr indent="0" marL="0">
+              <a:buNone/>
+            </a:pPr>
             <a:r>
               <a:rPr lang="en-US" sz="1200" dirty="0">
                 <a:solidFill>
@@ -16687,7 +17124,7 @@
           </a:prstGeom>
           <a:extLst>
             <a:ext uri="{C572A759-6A51-4108-AA02-DFA0A04FC94B}">
-              <ma14:wrappingTextBoxFlag xmlns="" xmlns:ma14="http://schemas.microsoft.com/office/mac/drawingml/2011/main" val="0"/>
+              <ma14:wrappingTextBoxFlag xmlns:ma14="http://schemas.microsoft.com/office/mac/drawingml/2011/main" val="0"/>
             </a:ext>
           </a:extLst>
         </p:spPr>
@@ -16708,7 +17145,7 @@
           <a:p>
             <a:pPr algn="l"/>
             <a:fld id="{F7021451-1387-4CA6-816F-3879F97B5CBC}" type="slidenum">
-              <a:rPr lang="en-US" b="0"/>
+              <a:rPr b="0" lang="en-US"/>
               <a:t>22</a:t>
             </a:fld>
             <a:endParaRPr lang="en-US"/>
@@ -16761,11 +17198,11 @@
           <a:bodyPr wrap="square" lIns="0" tIns="0" rIns="0" bIns="0" rtlCol="0" anchor="ctr"/>
           <a:lstStyle/>
           <a:p>
-            <a:pPr marL="0" indent="0">
-              <a:buNone/>
-            </a:pPr>
-            <a:r>
-              <a:rPr lang="en-US" sz="1200" b="1" kern="0" spc="400" dirty="0">
+            <a:pPr indent="0" marL="0">
+              <a:buNone/>
+            </a:pPr>
+            <a:r>
+              <a:rPr lang="en-US" sz="1200" b="1" spc="400" kern="0" dirty="0">
                 <a:solidFill>
                   <a:srgbClr val="FFFFFF"/>
                 </a:solidFill>
@@ -16800,7 +17237,7 @@
           <a:bodyPr wrap="square" lIns="0" tIns="0" rIns="0" bIns="0" rtlCol="0" anchor="ctr"/>
           <a:lstStyle/>
           <a:p>
-            <a:pPr marL="0" indent="0">
+            <a:pPr indent="0" marL="0">
               <a:buNone/>
             </a:pPr>
             <a:r>
@@ -16839,7 +17276,7 @@
           <a:bodyPr wrap="square" lIns="0" tIns="0" rIns="0" bIns="0" rtlCol="0" anchor="t"/>
           <a:lstStyle/>
           <a:p>
-            <a:pPr marL="0" indent="0">
+            <a:pPr indent="0" marL="0">
               <a:buNone/>
             </a:pPr>
             <a:r>
@@ -16925,7 +17362,7 @@
           <a:bodyPr wrap="square" lIns="0" tIns="0" rIns="0" bIns="0" rtlCol="0" anchor="ctr"/>
           <a:lstStyle/>
           <a:p>
-            <a:pPr marL="0" indent="0">
+            <a:pPr indent="0" marL="0">
               <a:buNone/>
             </a:pPr>
             <a:r>
@@ -16991,11 +17428,11 @@
           <a:bodyPr wrap="square" lIns="0" tIns="0" rIns="0" bIns="0" rtlCol="0" anchor="ctr"/>
           <a:lstStyle/>
           <a:p>
-            <a:pPr marL="0" indent="0" algn="ctr">
-              <a:buNone/>
-            </a:pPr>
-            <a:r>
-              <a:rPr lang="en-US" sz="900" b="1" kern="0" spc="100" dirty="0">
+            <a:pPr algn="ctr" indent="0" marL="0">
+              <a:buNone/>
+            </a:pPr>
+            <a:r>
+              <a:rPr lang="en-US" sz="900" b="1" spc="100" kern="0" dirty="0">
                 <a:solidFill>
                   <a:srgbClr val="1A4FBF"/>
                 </a:solidFill>
@@ -17011,14 +17448,14 @@
       </p:sp>
       <p:pic>
         <p:nvPicPr>
-          <p:cNvPr id="6" name="Image 0" descr="preencoded.png"/>
+          <p:cNvPr id="6" name="Image 0" descr="preencoded.png">    </p:cNvPr>
           <p:cNvPicPr>
             <a:picLocks noChangeAspect="1"/>
           </p:cNvPicPr>
           <p:nvPr/>
         </p:nvPicPr>
         <p:blipFill>
-          <a:blip r:embed="rId3"/>
+          <a:blip r:embed="rId1"/>
           <a:stretch>
             <a:fillRect/>
           </a:stretch>
@@ -17076,7 +17513,7 @@
           <a:bodyPr wrap="square" lIns="0" tIns="0" rIns="0" bIns="0" rtlCol="0" anchor="ctr"/>
           <a:lstStyle/>
           <a:p>
-            <a:pPr marL="0" indent="0">
+            <a:pPr indent="0" marL="0">
               <a:buNone/>
             </a:pPr>
             <a:r>
@@ -17115,7 +17552,7 @@
           <a:bodyPr wrap="square" lIns="0" tIns="0" rIns="0" bIns="0" rtlCol="0" anchor="t"/>
           <a:lstStyle/>
           <a:p>
-            <a:pPr marL="0" indent="0">
+            <a:pPr indent="0" marL="0">
               <a:lnSpc>
                 <a:spcPct val="108000"/>
               </a:lnSpc>
@@ -17179,7 +17616,7 @@
           <a:bodyPr wrap="square" lIns="0" tIns="0" rIns="0" bIns="0" rtlCol="0" anchor="ctr"/>
           <a:lstStyle/>
           <a:p>
-            <a:pPr marL="0" indent="0">
+            <a:pPr indent="0" marL="0">
               <a:buNone/>
             </a:pPr>
             <a:r>
@@ -17218,7 +17655,7 @@
           <a:bodyPr wrap="square" lIns="0" tIns="0" rIns="0" bIns="0" rtlCol="0" anchor="t"/>
           <a:lstStyle/>
           <a:p>
-            <a:pPr marL="0" indent="0">
+            <a:pPr indent="0" marL="0">
               <a:lnSpc>
                 <a:spcPct val="108000"/>
               </a:lnSpc>
@@ -17233,7 +17670,7 @@
                 <a:ea typeface="Montserrat" pitchFamily="34" charset="-122"/>
                 <a:cs typeface="Montserrat" pitchFamily="34" charset="-120"/>
               </a:rPr>
-              <a:t>заглушка замість 500-ки — чат живий</a:t>
+              <a:t>заглушка замість помилки 500 — чат живий</a:t>
             </a:r>
             <a:endParaRPr lang="en-US" sz="1200" dirty="0"/>
           </a:p>
@@ -17282,7 +17719,7 @@
           <a:bodyPr wrap="square" lIns="0" tIns="0" rIns="0" bIns="0" rtlCol="0" anchor="ctr"/>
           <a:lstStyle/>
           <a:p>
-            <a:pPr marL="0" indent="0">
+            <a:pPr indent="0" marL="0">
               <a:buNone/>
             </a:pPr>
             <a:r>
@@ -17321,7 +17758,7 @@
           <a:bodyPr wrap="square" lIns="0" tIns="0" rIns="0" bIns="0" rtlCol="0" anchor="t"/>
           <a:lstStyle/>
           <a:p>
-            <a:pPr marL="0" indent="0">
+            <a:pPr indent="0" marL="0">
               <a:lnSpc>
                 <a:spcPct val="108000"/>
               </a:lnSpc>
@@ -17390,11 +17827,11 @@
           <a:bodyPr wrap="square" lIns="0" tIns="0" rIns="0" bIns="0" rtlCol="0" anchor="ctr"/>
           <a:lstStyle/>
           <a:p>
-            <a:pPr marL="0" indent="0">
-              <a:buNone/>
-            </a:pPr>
-            <a:r>
-              <a:rPr lang="en-US" sz="950" b="1" kern="0" spc="150" dirty="0">
+            <a:pPr indent="0" marL="0">
+              <a:buNone/>
+            </a:pPr>
+            <a:r>
+              <a:rPr lang="en-US" sz="950" b="1" spc="150" kern="0" dirty="0">
                 <a:solidFill>
                   <a:srgbClr val="1A4FBF"/>
                 </a:solidFill>
@@ -17429,7 +17866,7 @@
           <a:bodyPr wrap="square" lIns="0" tIns="0" rIns="0" bIns="0" rtlCol="0" anchor="ctr"/>
           <a:lstStyle/>
           <a:p>
-            <a:pPr marL="0" indent="0">
+            <a:pPr indent="0" marL="0">
               <a:lnSpc>
                 <a:spcPct val="112000"/>
               </a:lnSpc>
@@ -17470,7 +17907,7 @@
           </a:prstGeom>
           <a:extLst>
             <a:ext uri="{C572A759-6A51-4108-AA02-DFA0A04FC94B}">
-              <ma14:wrappingTextBoxFlag xmlns="" xmlns:ma14="http://schemas.microsoft.com/office/mac/drawingml/2011/main" val="0"/>
+              <ma14:wrappingTextBoxFlag xmlns:ma14="http://schemas.microsoft.com/office/mac/drawingml/2011/main" val="0"/>
             </a:ext>
           </a:extLst>
         </p:spPr>
@@ -17491,7 +17928,7 @@
           <a:p>
             <a:pPr algn="l"/>
             <a:fld id="{F7021451-1387-4CA6-816F-3879F97B5CBC}" type="slidenum">
-              <a:rPr lang="en-US" b="0"/>
+              <a:rPr b="0" lang="en-US"/>
               <a:t>24</a:t>
             </a:fld>
             <a:endParaRPr lang="en-US"/>
@@ -17566,7 +18003,7 @@
           <a:bodyPr wrap="square" lIns="0" tIns="0" rIns="0" bIns="0" rtlCol="0" anchor="ctr"/>
           <a:lstStyle/>
           <a:p>
-            <a:pPr marL="0" indent="0">
+            <a:pPr indent="0" marL="0">
               <a:buNone/>
             </a:pPr>
             <a:r>
@@ -17632,11 +18069,11 @@
           <a:bodyPr wrap="square" lIns="0" tIns="0" rIns="0" bIns="0" rtlCol="0" anchor="ctr"/>
           <a:lstStyle/>
           <a:p>
-            <a:pPr marL="0" indent="0" algn="ctr">
-              <a:buNone/>
-            </a:pPr>
-            <a:r>
-              <a:rPr lang="en-US" sz="900" b="1" kern="0" spc="100" dirty="0">
+            <a:pPr algn="ctr" indent="0" marL="0">
+              <a:buNone/>
+            </a:pPr>
+            <a:r>
+              <a:rPr lang="en-US" sz="900" b="1" spc="100" kern="0" dirty="0">
                 <a:solidFill>
                   <a:srgbClr val="1A4FBF"/>
                 </a:solidFill>
@@ -17652,14 +18089,14 @@
       </p:sp>
       <p:pic>
         <p:nvPicPr>
-          <p:cNvPr id="6" name="Image 0" descr="preencoded.png"/>
+          <p:cNvPr id="6" name="Image 0" descr="preencoded.png">    </p:cNvPr>
           <p:cNvPicPr>
             <a:picLocks noChangeAspect="1"/>
           </p:cNvPicPr>
           <p:nvPr/>
         </p:nvPicPr>
         <p:blipFill>
-          <a:blip r:embed="rId3"/>
+          <a:blip r:embed="rId1"/>
           <a:stretch>
             <a:fillRect/>
           </a:stretch>
@@ -17789,7 +18226,7 @@
           <a:bodyPr wrap="square" lIns="0" tIns="0" rIns="0" bIns="0" rtlCol="0" anchor="ctr"/>
           <a:lstStyle/>
           <a:p>
-            <a:pPr marL="0" indent="0">
+            <a:pPr indent="0" marL="0">
               <a:buNone/>
             </a:pPr>
             <a:r>
@@ -17895,7 +18332,7 @@
           <a:bodyPr wrap="square" lIns="0" tIns="0" rIns="0" bIns="0" rtlCol="0" anchor="ctr"/>
           <a:lstStyle/>
           <a:p>
-            <a:pPr marL="0" indent="0">
+            <a:pPr indent="0" marL="0">
               <a:buNone/>
             </a:pPr>
             <a:r>
@@ -18001,7 +18438,7 @@
           <a:bodyPr wrap="square" lIns="0" tIns="0" rIns="0" bIns="0" rtlCol="0" anchor="ctr"/>
           <a:lstStyle/>
           <a:p>
-            <a:pPr marL="0" indent="0">
+            <a:pPr indent="0" marL="0">
               <a:buNone/>
             </a:pPr>
             <a:r>
@@ -18107,7 +18544,7 @@
           <a:bodyPr wrap="square" lIns="0" tIns="0" rIns="0" bIns="0" rtlCol="0" anchor="ctr"/>
           <a:lstStyle/>
           <a:p>
-            <a:pPr marL="0" indent="0">
+            <a:pPr indent="0" marL="0">
               <a:buNone/>
             </a:pPr>
             <a:r>
@@ -18146,7 +18583,7 @@
           <a:bodyPr wrap="square" lIns="0" tIns="0" rIns="0" bIns="0" rtlCol="0" anchor="ctr"/>
           <a:lstStyle/>
           <a:p>
-            <a:pPr marL="0" indent="0">
+            <a:pPr indent="0" marL="0">
               <a:buNone/>
             </a:pPr>
             <a:r>
@@ -18184,7 +18621,7 @@
           </a:prstGeom>
           <a:extLst>
             <a:ext uri="{C572A759-6A51-4108-AA02-DFA0A04FC94B}">
-              <ma14:wrappingTextBoxFlag xmlns="" xmlns:ma14="http://schemas.microsoft.com/office/mac/drawingml/2011/main" val="0"/>
+              <ma14:wrappingTextBoxFlag xmlns:ma14="http://schemas.microsoft.com/office/mac/drawingml/2011/main" val="0"/>
             </a:ext>
           </a:extLst>
         </p:spPr>
@@ -18205,7 +18642,7 @@
           <a:p>
             <a:pPr algn="l"/>
             <a:fld id="{F7021451-1387-4CA6-816F-3879F97B5CBC}" type="slidenum">
-              <a:rPr lang="en-US" b="0"/>
+              <a:rPr b="0" lang="en-US"/>
               <a:t>25</a:t>
             </a:fld>
             <a:endParaRPr lang="en-US"/>
@@ -18280,7 +18717,7 @@
           <a:bodyPr wrap="square" lIns="0" tIns="0" rIns="0" bIns="0" rtlCol="0" anchor="ctr"/>
           <a:lstStyle/>
           <a:p>
-            <a:pPr marL="0" indent="0">
+            <a:pPr indent="0" marL="0">
               <a:buNone/>
             </a:pPr>
             <a:r>
@@ -18346,11 +18783,11 @@
           <a:bodyPr wrap="square" lIns="0" tIns="0" rIns="0" bIns="0" rtlCol="0" anchor="ctr"/>
           <a:lstStyle/>
           <a:p>
-            <a:pPr marL="0" indent="0" algn="ctr">
-              <a:buNone/>
-            </a:pPr>
-            <a:r>
-              <a:rPr lang="en-US" sz="900" b="1" kern="0" spc="100" dirty="0">
+            <a:pPr algn="ctr" indent="0" marL="0">
+              <a:buNone/>
+            </a:pPr>
+            <a:r>
+              <a:rPr lang="en-US" sz="900" b="1" spc="100" kern="0" dirty="0">
                 <a:solidFill>
                   <a:srgbClr val="1A4FBF"/>
                 </a:solidFill>
@@ -18366,14 +18803,14 @@
       </p:sp>
       <p:pic>
         <p:nvPicPr>
-          <p:cNvPr id="6" name="Image 0" descr="preencoded.png"/>
+          <p:cNvPr id="6" name="Image 0" descr="preencoded.png">    </p:cNvPr>
           <p:cNvPicPr>
             <a:picLocks noChangeAspect="1"/>
           </p:cNvPicPr>
           <p:nvPr/>
         </p:nvPicPr>
         <p:blipFill>
-          <a:blip r:embed="rId3"/>
+          <a:blip r:embed="rId1"/>
           <a:stretch>
             <a:fillRect/>
           </a:stretch>
@@ -18501,7 +18938,7 @@
           <a:bodyPr wrap="square" lIns="0" tIns="0" rIns="0" bIns="0" rtlCol="0" anchor="ctr"/>
           <a:lstStyle/>
           <a:p>
-            <a:pPr marL="0" indent="0">
+            <a:pPr indent="0" marL="0">
               <a:buNone/>
             </a:pPr>
             <a:r>
@@ -18515,6 +18952,9 @@
               </a:rPr>
               <a:t>Retry без паузи і без стелі   </a:t>
             </a:r>
+            <a:pPr indent="0" marL="0">
+              <a:buNone/>
+            </a:pPr>
             <a:r>
               <a:rPr lang="en-US" sz="1150" dirty="0">
                 <a:solidFill>
@@ -18643,7 +19083,7 @@
           <a:bodyPr wrap="square" lIns="0" tIns="0" rIns="0" bIns="0" rtlCol="0" anchor="ctr"/>
           <a:lstStyle/>
           <a:p>
-            <a:pPr marL="0" indent="0">
+            <a:pPr indent="0" marL="0">
               <a:buNone/>
             </a:pPr>
             <a:r>
@@ -18657,6 +19097,9 @@
               </a:rPr>
               <a:t>Заглушка зі статусом 200   </a:t>
             </a:r>
+            <a:pPr indent="0" marL="0">
+              <a:buNone/>
+            </a:pPr>
             <a:r>
               <a:rPr lang="en-US" sz="1150" dirty="0">
                 <a:solidFill>
@@ -18785,7 +19228,7 @@
           <a:bodyPr wrap="square" lIns="0" tIns="0" rIns="0" bIns="0" rtlCol="0" anchor="ctr"/>
           <a:lstStyle/>
           <a:p>
-            <a:pPr marL="0" indent="0">
+            <a:pPr indent="0" marL="0">
               <a:buNone/>
             </a:pPr>
             <a:r>
@@ -18799,6 +19242,9 @@
               </a:rPr>
               <a:t>Ретраї в кількох шарах одразу   </a:t>
             </a:r>
+            <a:pPr indent="0" marL="0">
+              <a:buNone/>
+            </a:pPr>
             <a:r>
               <a:rPr lang="en-US" sz="1150" dirty="0">
                 <a:solidFill>
@@ -18927,7 +19373,7 @@
           <a:bodyPr wrap="square" lIns="0" tIns="0" rIns="0" bIns="0" rtlCol="0" anchor="ctr"/>
           <a:lstStyle/>
           <a:p>
-            <a:pPr marL="0" indent="0">
+            <a:pPr indent="0" marL="0">
               <a:buNone/>
             </a:pPr>
             <a:r>
@@ -18941,6 +19387,9 @@
               </a:rPr>
               <a:t>Breaker без half-open   </a:t>
             </a:r>
+            <a:pPr indent="0" marL="0">
+              <a:buNone/>
+            </a:pPr>
             <a:r>
               <a:rPr lang="en-US" sz="1150" dirty="0">
                 <a:solidFill>
@@ -19069,7 +19518,7 @@
           <a:bodyPr wrap="square" lIns="0" tIns="0" rIns="0" bIns="0" rtlCol="0" anchor="ctr"/>
           <a:lstStyle/>
           <a:p>
-            <a:pPr marL="0" indent="0">
+            <a:pPr indent="0" marL="0">
               <a:buNone/>
             </a:pPr>
             <a:r>
@@ -19083,6 +19532,9 @@
               </a:rPr>
               <a:t>Fallback без лічильника   </a:t>
             </a:r>
+            <a:pPr indent="0" marL="0">
+              <a:buNone/>
+            </a:pPr>
             <a:r>
               <a:rPr lang="en-US" sz="1150" dirty="0">
                 <a:solidFill>
@@ -19100,7 +19552,7 @@
       </p:sp>
       <p:sp>
         <p:nvSpPr>
-          <p:cNvPr id="32" name="Slide Number Placeholder 0"/>
+          <p:cNvPr id="25" name="Slide Number Placeholder 0"/>
           <p:cNvSpPr>
             <a:spLocks noGrp="1"/>
           </p:cNvSpPr>
@@ -19118,7 +19570,7 @@
           </a:prstGeom>
           <a:extLst>
             <a:ext uri="{C572A759-6A51-4108-AA02-DFA0A04FC94B}">
-              <ma14:wrappingTextBoxFlag xmlns="" xmlns:ma14="http://schemas.microsoft.com/office/mac/drawingml/2011/main" val="0"/>
+              <ma14:wrappingTextBoxFlag xmlns:ma14="http://schemas.microsoft.com/office/mac/drawingml/2011/main" val="0"/>
             </a:ext>
           </a:extLst>
         </p:spPr>
@@ -19139,7 +19591,7 @@
           <a:p>
             <a:pPr algn="l"/>
             <a:fld id="{F7021451-1387-4CA6-816F-3879F97B5CBC}" type="slidenum">
-              <a:rPr lang="en-US" b="0"/>
+              <a:rPr b="0" lang="en-US"/>
               <a:t>26</a:t>
             </a:fld>
             <a:endParaRPr lang="en-US"/>
@@ -19214,7 +19666,7 @@
           <a:bodyPr wrap="square" lIns="0" tIns="0" rIns="0" bIns="0" rtlCol="0" anchor="ctr"/>
           <a:lstStyle/>
           <a:p>
-            <a:pPr marL="0" indent="0">
+            <a:pPr indent="0" marL="0">
               <a:buNone/>
             </a:pPr>
             <a:r>
@@ -19275,11 +19727,11 @@
           <a:bodyPr wrap="square" lIns="0" tIns="0" rIns="0" bIns="0" rtlCol="0" anchor="ctr"/>
           <a:lstStyle/>
           <a:p>
-            <a:pPr marL="0" indent="0" algn="ctr">
-              <a:buNone/>
-            </a:pPr>
-            <a:r>
-              <a:rPr lang="en-US" sz="900" b="1" kern="0" spc="100" dirty="0">
+            <a:pPr algn="ctr" indent="0" marL="0">
+              <a:buNone/>
+            </a:pPr>
+            <a:r>
+              <a:rPr lang="en-US" sz="900" b="1" spc="100" kern="0" dirty="0">
                 <a:solidFill>
                   <a:srgbClr val="FFFFFF"/>
                 </a:solidFill>
@@ -19295,14 +19747,14 @@
       </p:sp>
       <p:pic>
         <p:nvPicPr>
-          <p:cNvPr id="6" name="Image 0" descr="preencoded.png"/>
+          <p:cNvPr id="6" name="Image 0" descr="preencoded.png">    </p:cNvPr>
           <p:cNvPicPr>
             <a:picLocks noChangeAspect="1"/>
           </p:cNvPicPr>
           <p:nvPr/>
         </p:nvPicPr>
         <p:blipFill>
-          <a:blip r:embed="rId3"/>
+          <a:blip r:embed="rId1"/>
           <a:stretch>
             <a:fillRect/>
           </a:stretch>
@@ -19360,7 +19812,7 @@
           <a:bodyPr wrap="square" lIns="0" tIns="0" rIns="0" bIns="0" rtlCol="0" anchor="ctr"/>
           <a:lstStyle/>
           <a:p>
-            <a:pPr marL="0" indent="0">
+            <a:pPr indent="0" marL="0">
               <a:buNone/>
             </a:pPr>
             <a:r>
@@ -19399,7 +19851,7 @@
           <a:bodyPr wrap="square" lIns="0" tIns="0" rIns="0" bIns="0" rtlCol="0" anchor="t"/>
           <a:lstStyle/>
           <a:p>
-            <a:pPr marL="0" indent="0">
+            <a:pPr indent="0" marL="0">
               <a:lnSpc>
                 <a:spcPct val="108000"/>
               </a:lnSpc>
@@ -19419,7 +19871,7 @@
             <a:endParaRPr lang="en-US" sz="1200" dirty="0"/>
           </a:p>
           <a:p>
-            <a:pPr marL="0" indent="0">
+            <a:pPr indent="0" marL="0">
               <a:lnSpc>
                 <a:spcPct val="108000"/>
               </a:lnSpc>
@@ -19428,7 +19880,7 @@
             <a:endParaRPr lang="en-US" sz="1200" dirty="0"/>
           </a:p>
           <a:p>
-            <a:pPr marL="0" indent="0">
+            <a:pPr indent="0" marL="0">
               <a:lnSpc>
                 <a:spcPct val="108000"/>
               </a:lnSpc>
@@ -19448,7 +19900,7 @@
             <a:endParaRPr lang="en-US" sz="1200" dirty="0"/>
           </a:p>
           <a:p>
-            <a:pPr marL="0" indent="0">
+            <a:pPr indent="0" marL="0">
               <a:lnSpc>
                 <a:spcPct val="108000"/>
               </a:lnSpc>
@@ -19457,7 +19909,7 @@
             <a:endParaRPr lang="en-US" sz="1200" dirty="0"/>
           </a:p>
           <a:p>
-            <a:pPr marL="0" indent="0">
+            <a:pPr indent="0" marL="0">
               <a:lnSpc>
                 <a:spcPct val="108000"/>
               </a:lnSpc>
@@ -19521,7 +19973,7 @@
           <a:bodyPr wrap="square" lIns="0" tIns="0" rIns="0" bIns="0" rtlCol="0" anchor="ctr"/>
           <a:lstStyle/>
           <a:p>
-            <a:pPr marL="0" indent="0">
+            <a:pPr indent="0" marL="0">
               <a:buNone/>
             </a:pPr>
             <a:r>
@@ -19560,7 +20012,7 @@
           <a:bodyPr wrap="square" lIns="0" tIns="0" rIns="0" bIns="0" rtlCol="0" anchor="t"/>
           <a:lstStyle/>
           <a:p>
-            <a:pPr marL="0" indent="0">
+            <a:pPr indent="0" marL="0">
               <a:lnSpc>
                 <a:spcPct val="108000"/>
               </a:lnSpc>
@@ -19629,7 +20081,7 @@
           <a:bodyPr wrap="square" lIns="0" tIns="0" rIns="0" bIns="0" rtlCol="0" anchor="ctr"/>
           <a:lstStyle/>
           <a:p>
-            <a:pPr marL="0" indent="0">
+            <a:pPr indent="0" marL="0">
               <a:buNone/>
             </a:pPr>
             <a:r>
@@ -19668,7 +20120,7 @@
           <a:bodyPr wrap="square" lIns="0" tIns="0" rIns="0" bIns="0" rtlCol="0" anchor="t"/>
           <a:lstStyle/>
           <a:p>
-            <a:pPr marL="0" indent="0">
+            <a:pPr indent="0" marL="0">
               <a:buNone/>
             </a:pPr>
             <a:r>
@@ -19706,7 +20158,7 @@
           </a:prstGeom>
           <a:extLst>
             <a:ext uri="{C572A759-6A51-4108-AA02-DFA0A04FC94B}">
-              <ma14:wrappingTextBoxFlag xmlns="" xmlns:ma14="http://schemas.microsoft.com/office/mac/drawingml/2011/main" val="0"/>
+              <ma14:wrappingTextBoxFlag xmlns:ma14="http://schemas.microsoft.com/office/mac/drawingml/2011/main" val="0"/>
             </a:ext>
           </a:extLst>
         </p:spPr>
@@ -19727,7 +20179,7 @@
           <a:p>
             <a:pPr algn="l"/>
             <a:fld id="{F7021451-1387-4CA6-816F-3879F97B5CBC}" type="slidenum">
-              <a:rPr lang="en-US" b="0"/>
+              <a:rPr b="0" lang="en-US"/>
               <a:t>27</a:t>
             </a:fld>
             <a:endParaRPr lang="en-US"/>
@@ -19780,11 +20232,11 @@
           <a:bodyPr wrap="square" lIns="0" tIns="0" rIns="0" bIns="0" rtlCol="0" anchor="ctr"/>
           <a:lstStyle/>
           <a:p>
-            <a:pPr marL="0" indent="0">
-              <a:buNone/>
-            </a:pPr>
-            <a:r>
-              <a:rPr lang="en-US" sz="1200" b="1" kern="0" spc="400" dirty="0">
+            <a:pPr indent="0" marL="0">
+              <a:buNone/>
+            </a:pPr>
+            <a:r>
+              <a:rPr lang="en-US" sz="1200" b="1" spc="400" kern="0" dirty="0">
                 <a:solidFill>
                   <a:srgbClr val="FFFFFF"/>
                 </a:solidFill>
@@ -19819,11 +20271,11 @@
           <a:bodyPr wrap="square" lIns="0" tIns="0" rIns="0" bIns="0" rtlCol="0" anchor="ctr"/>
           <a:lstStyle/>
           <a:p>
-            <a:pPr marL="0" indent="0">
-              <a:buNone/>
-            </a:pPr>
-            <a:r>
-              <a:rPr lang="en-US" sz="1100" b="1" kern="0" spc="300" dirty="0">
+            <a:pPr indent="0" marL="0">
+              <a:buNone/>
+            </a:pPr>
+            <a:r>
+              <a:rPr lang="en-US" sz="1100" b="1" spc="300" kern="0" dirty="0">
                 <a:solidFill>
                   <a:srgbClr val="C4B3F5"/>
                 </a:solidFill>
@@ -19878,7 +20330,7 @@
           <a:bodyPr wrap="square" lIns="0" tIns="0" rIns="0" bIns="0" rtlCol="0" anchor="t"/>
           <a:lstStyle/>
           <a:p>
-            <a:pPr marL="0" indent="0">
+            <a:pPr indent="0" marL="0">
               <a:lnSpc>
                 <a:spcPct val="110000"/>
               </a:lnSpc>
@@ -19940,7 +20392,7 @@
           <a:bodyPr wrap="square" lIns="0" tIns="0" rIns="0" bIns="0" rtlCol="0" anchor="t"/>
           <a:lstStyle/>
           <a:p>
-            <a:pPr marL="0" indent="0">
+            <a:pPr indent="0" marL="0">
               <a:lnSpc>
                 <a:spcPct val="110000"/>
               </a:lnSpc>
@@ -20002,7 +20454,7 @@
           <a:bodyPr wrap="square" lIns="0" tIns="0" rIns="0" bIns="0" rtlCol="0" anchor="t"/>
           <a:lstStyle/>
           <a:p>
-            <a:pPr marL="0" indent="0">
+            <a:pPr indent="0" marL="0">
               <a:lnSpc>
                 <a:spcPct val="110000"/>
               </a:lnSpc>
@@ -20064,7 +20516,7 @@
           <a:bodyPr wrap="square" lIns="0" tIns="0" rIns="0" bIns="0" rtlCol="0" anchor="t"/>
           <a:lstStyle/>
           <a:p>
-            <a:pPr marL="0" indent="0">
+            <a:pPr indent="0" marL="0">
               <a:lnSpc>
                 <a:spcPct val="110000"/>
               </a:lnSpc>
@@ -20126,7 +20578,7 @@
           <a:bodyPr wrap="square" lIns="0" tIns="0" rIns="0" bIns="0" rtlCol="0" anchor="t"/>
           <a:lstStyle/>
           <a:p>
-            <a:pPr marL="0" indent="0">
+            <a:pPr indent="0" marL="0">
               <a:lnSpc>
                 <a:spcPct val="110000"/>
               </a:lnSpc>
@@ -20195,7 +20647,7 @@
           <a:bodyPr wrap="square" lIns="0" tIns="0" rIns="0" bIns="0" rtlCol="0" anchor="ctr"/>
           <a:lstStyle/>
           <a:p>
-            <a:pPr marL="0" indent="0">
+            <a:pPr indent="0" marL="0">
               <a:buNone/>
             </a:pPr>
             <a:r>
@@ -20234,7 +20686,7 @@
           <a:bodyPr wrap="square" lIns="0" tIns="0" rIns="0" bIns="0" rtlCol="0" anchor="t"/>
           <a:lstStyle/>
           <a:p>
-            <a:pPr marL="0" indent="0">
+            <a:pPr indent="0" marL="0">
               <a:lnSpc>
                 <a:spcPct val="115000"/>
               </a:lnSpc>
@@ -20301,11 +20753,11 @@
           <a:bodyPr wrap="square" lIns="0" tIns="0" rIns="0" bIns="0" rtlCol="0" anchor="ctr"/>
           <a:lstStyle/>
           <a:p>
-            <a:pPr marL="0" indent="0">
-              <a:buNone/>
-            </a:pPr>
-            <a:r>
-              <a:rPr lang="en-US" sz="1200" b="1" kern="0" spc="400" dirty="0">
+            <a:pPr indent="0" marL="0">
+              <a:buNone/>
+            </a:pPr>
+            <a:r>
+              <a:rPr lang="en-US" sz="1200" b="1" spc="400" kern="0" dirty="0">
                 <a:solidFill>
                   <a:srgbClr val="FFFFFF"/>
                 </a:solidFill>
@@ -20340,7 +20792,7 @@
           <a:bodyPr wrap="square" lIns="0" tIns="0" rIns="0" bIns="0" rtlCol="0" anchor="ctr"/>
           <a:lstStyle/>
           <a:p>
-            <a:pPr marL="0" indent="0">
+            <a:pPr indent="0" marL="0">
               <a:buNone/>
             </a:pPr>
             <a:r>
@@ -20426,7 +20878,7 @@
           <a:bodyPr wrap="square" lIns="0" tIns="0" rIns="0" bIns="0" rtlCol="0" anchor="ctr"/>
           <a:lstStyle/>
           <a:p>
-            <a:pPr marL="0" indent="0">
+            <a:pPr indent="0" marL="0">
               <a:buNone/>
             </a:pPr>
             <a:r>
@@ -20492,11 +20944,11 @@
           <a:bodyPr wrap="square" lIns="0" tIns="0" rIns="0" bIns="0" rtlCol="0" anchor="ctr"/>
           <a:lstStyle/>
           <a:p>
-            <a:pPr marL="0" indent="0" algn="ctr">
-              <a:buNone/>
-            </a:pPr>
-            <a:r>
-              <a:rPr lang="en-US" sz="900" b="1" kern="0" spc="100" dirty="0">
+            <a:pPr algn="ctr" indent="0" marL="0">
+              <a:buNone/>
+            </a:pPr>
+            <a:r>
+              <a:rPr lang="en-US" sz="900" b="1" spc="100" kern="0" dirty="0">
                 <a:solidFill>
                   <a:srgbClr val="5A05F4"/>
                 </a:solidFill>
@@ -20512,14 +20964,14 @@
       </p:sp>
       <p:pic>
         <p:nvPicPr>
-          <p:cNvPr id="6" name="Image 0" descr="preencoded.png"/>
+          <p:cNvPr id="6" name="Image 0" descr="preencoded.png">    </p:cNvPr>
           <p:cNvPicPr>
             <a:picLocks noChangeAspect="1"/>
           </p:cNvPicPr>
           <p:nvPr/>
         </p:nvPicPr>
         <p:blipFill>
-          <a:blip r:embed="rId3"/>
+          <a:blip r:embed="rId1"/>
           <a:stretch>
             <a:fillRect/>
           </a:stretch>
@@ -20597,7 +21049,7 @@
           <a:bodyPr wrap="square" lIns="0" tIns="0" rIns="0" bIns="0" rtlCol="0" anchor="ctr"/>
           <a:lstStyle/>
           <a:p>
-            <a:pPr marL="0" indent="0" algn="ctr">
+            <a:pPr algn="ctr" indent="0" marL="0">
               <a:buNone/>
             </a:pPr>
             <a:r>
@@ -20636,7 +21088,7 @@
           <a:bodyPr wrap="square" lIns="0" tIns="0" rIns="0" bIns="0" rtlCol="0" anchor="ctr"/>
           <a:lstStyle/>
           <a:p>
-            <a:pPr marL="0" indent="0">
+            <a:pPr indent="0" marL="0">
               <a:buNone/>
             </a:pPr>
             <a:r>
@@ -20717,7 +21169,7 @@
           <a:bodyPr wrap="square" lIns="0" tIns="0" rIns="0" bIns="0" rtlCol="0" anchor="ctr"/>
           <a:lstStyle/>
           <a:p>
-            <a:pPr marL="0" indent="0" algn="ctr">
+            <a:pPr algn="ctr" indent="0" marL="0">
               <a:buNone/>
             </a:pPr>
             <a:r>
@@ -20756,7 +21208,7 @@
           <a:bodyPr wrap="square" lIns="0" tIns="0" rIns="0" bIns="0" rtlCol="0" anchor="ctr"/>
           <a:lstStyle/>
           <a:p>
-            <a:pPr marL="0" indent="0">
+            <a:pPr indent="0" marL="0">
               <a:buNone/>
             </a:pPr>
             <a:r>
@@ -20837,7 +21289,7 @@
           <a:bodyPr wrap="square" lIns="0" tIns="0" rIns="0" bIns="0" rtlCol="0" anchor="ctr"/>
           <a:lstStyle/>
           <a:p>
-            <a:pPr marL="0" indent="0" algn="ctr">
+            <a:pPr algn="ctr" indent="0" marL="0">
               <a:buNone/>
             </a:pPr>
             <a:r>
@@ -20876,7 +21328,7 @@
           <a:bodyPr wrap="square" lIns="0" tIns="0" rIns="0" bIns="0" rtlCol="0" anchor="ctr"/>
           <a:lstStyle/>
           <a:p>
-            <a:pPr marL="0" indent="0">
+            <a:pPr indent="0" marL="0">
               <a:buNone/>
             </a:pPr>
             <a:r>
@@ -20957,7 +21409,7 @@
           <a:bodyPr wrap="square" lIns="0" tIns="0" rIns="0" bIns="0" rtlCol="0" anchor="ctr"/>
           <a:lstStyle/>
           <a:p>
-            <a:pPr marL="0" indent="0" algn="ctr">
+            <a:pPr algn="ctr" indent="0" marL="0">
               <a:buNone/>
             </a:pPr>
             <a:r>
@@ -20996,7 +21448,7 @@
           <a:bodyPr wrap="square" lIns="0" tIns="0" rIns="0" bIns="0" rtlCol="0" anchor="ctr"/>
           <a:lstStyle/>
           <a:p>
-            <a:pPr marL="0" indent="0">
+            <a:pPr indent="0" marL="0">
               <a:buNone/>
             </a:pPr>
             <a:r>
@@ -21077,7 +21529,7 @@
           <a:bodyPr wrap="square" lIns="0" tIns="0" rIns="0" bIns="0" rtlCol="0" anchor="ctr"/>
           <a:lstStyle/>
           <a:p>
-            <a:pPr marL="0" indent="0" algn="ctr">
+            <a:pPr algn="ctr" indent="0" marL="0">
               <a:buNone/>
             </a:pPr>
             <a:r>
@@ -21116,7 +21568,7 @@
           <a:bodyPr wrap="square" lIns="0" tIns="0" rIns="0" bIns="0" rtlCol="0" anchor="ctr"/>
           <a:lstStyle/>
           <a:p>
-            <a:pPr marL="0" indent="0">
+            <a:pPr indent="0" marL="0">
               <a:buNone/>
             </a:pPr>
             <a:r>
@@ -21197,7 +21649,7 @@
           <a:bodyPr wrap="square" lIns="0" tIns="0" rIns="0" bIns="0" rtlCol="0" anchor="ctr"/>
           <a:lstStyle/>
           <a:p>
-            <a:pPr marL="0" indent="0" algn="ctr">
+            <a:pPr algn="ctr" indent="0" marL="0">
               <a:buNone/>
             </a:pPr>
             <a:r>
@@ -21236,7 +21688,7 @@
           <a:bodyPr wrap="square" lIns="0" tIns="0" rIns="0" bIns="0" rtlCol="0" anchor="ctr"/>
           <a:lstStyle/>
           <a:p>
-            <a:pPr marL="0" indent="0">
+            <a:pPr indent="0" marL="0">
               <a:buNone/>
             </a:pPr>
             <a:r>
@@ -21317,7 +21769,7 @@
           <a:bodyPr wrap="square" lIns="0" tIns="0" rIns="0" bIns="0" rtlCol="0" anchor="ctr"/>
           <a:lstStyle/>
           <a:p>
-            <a:pPr marL="0" indent="0" algn="ctr">
+            <a:pPr algn="ctr" indent="0" marL="0">
               <a:buNone/>
             </a:pPr>
             <a:r>
@@ -21356,7 +21808,7 @@
           <a:bodyPr wrap="square" lIns="0" tIns="0" rIns="0" bIns="0" rtlCol="0" anchor="ctr"/>
           <a:lstStyle/>
           <a:p>
-            <a:pPr marL="0" indent="0">
+            <a:pPr indent="0" marL="0">
               <a:buNone/>
             </a:pPr>
             <a:r>
@@ -21437,7 +21889,7 @@
           <a:bodyPr wrap="square" lIns="0" tIns="0" rIns="0" bIns="0" rtlCol="0" anchor="ctr"/>
           <a:lstStyle/>
           <a:p>
-            <a:pPr marL="0" indent="0" algn="ctr">
+            <a:pPr algn="ctr" indent="0" marL="0">
               <a:buNone/>
             </a:pPr>
             <a:r>
@@ -21476,7 +21928,7 @@
           <a:bodyPr wrap="square" lIns="0" tIns="0" rIns="0" bIns="0" rtlCol="0" anchor="ctr"/>
           <a:lstStyle/>
           <a:p>
-            <a:pPr marL="0" indent="0">
+            <a:pPr indent="0" marL="0">
               <a:buNone/>
             </a:pPr>
             <a:r>
@@ -21557,7 +22009,7 @@
           <a:bodyPr wrap="square" lIns="0" tIns="0" rIns="0" bIns="0" rtlCol="0" anchor="ctr"/>
           <a:lstStyle/>
           <a:p>
-            <a:pPr marL="0" indent="0" algn="ctr">
+            <a:pPr algn="ctr" indent="0" marL="0">
               <a:buNone/>
             </a:pPr>
             <a:r>
@@ -21596,7 +22048,7 @@
           <a:bodyPr wrap="square" lIns="0" tIns="0" rIns="0" bIns="0" rtlCol="0" anchor="ctr"/>
           <a:lstStyle/>
           <a:p>
-            <a:pPr marL="0" indent="0">
+            <a:pPr indent="0" marL="0">
               <a:buNone/>
             </a:pPr>
             <a:r>
@@ -21677,7 +22129,7 @@
           <a:bodyPr wrap="square" lIns="0" tIns="0" rIns="0" bIns="0" rtlCol="0" anchor="ctr"/>
           <a:lstStyle/>
           <a:p>
-            <a:pPr marL="0" indent="0" algn="ctr">
+            <a:pPr algn="ctr" indent="0" marL="0">
               <a:buNone/>
             </a:pPr>
             <a:r>
@@ -21716,7 +22168,7 @@
           <a:bodyPr wrap="square" lIns="0" tIns="0" rIns="0" bIns="0" rtlCol="0" anchor="ctr"/>
           <a:lstStyle/>
           <a:p>
-            <a:pPr marL="0" indent="0">
+            <a:pPr indent="0" marL="0">
               <a:buNone/>
             </a:pPr>
             <a:r>
@@ -21797,7 +22249,7 @@
           <a:bodyPr wrap="square" lIns="0" tIns="0" rIns="0" bIns="0" rtlCol="0" anchor="ctr"/>
           <a:lstStyle/>
           <a:p>
-            <a:pPr marL="0" indent="0" algn="ctr">
+            <a:pPr algn="ctr" indent="0" marL="0">
               <a:buNone/>
             </a:pPr>
             <a:r>
@@ -21836,7 +22288,7 @@
           <a:bodyPr wrap="square" lIns="0" tIns="0" rIns="0" bIns="0" rtlCol="0" anchor="ctr"/>
           <a:lstStyle/>
           <a:p>
-            <a:pPr marL="0" indent="0">
+            <a:pPr indent="0" marL="0">
               <a:buNone/>
             </a:pPr>
             <a:r>
@@ -21863,7 +22315,7 @@
         <p:spPr>
           <a:xfrm>
             <a:off x="566928" y="5779008"/>
-            <a:ext cx="10927080" cy="402336"/>
+            <a:ext cx="11064240" cy="402336"/>
           </a:xfrm>
           <a:prstGeom prst="roundRect">
             <a:avLst>
@@ -21902,7 +22354,7 @@
           <a:bodyPr wrap="square" lIns="0" tIns="0" rIns="0" bIns="0" rtlCol="0" anchor="ctr"/>
           <a:lstStyle/>
           <a:p>
-            <a:pPr marL="0" indent="0">
+            <a:pPr indent="0" marL="0">
               <a:lnSpc>
                 <a:spcPct val="112000"/>
               </a:lnSpc>
@@ -21925,7 +22377,7 @@
       </p:sp>
       <p:sp>
         <p:nvSpPr>
-          <p:cNvPr id="53" name="Slide Number Placeholder 0"/>
+          <p:cNvPr id="25" name="Slide Number Placeholder 0"/>
           <p:cNvSpPr>
             <a:spLocks noGrp="1"/>
           </p:cNvSpPr>
@@ -21943,7 +22395,7 @@
           </a:prstGeom>
           <a:extLst>
             <a:ext uri="{C572A759-6A51-4108-AA02-DFA0A04FC94B}">
-              <ma14:wrappingTextBoxFlag xmlns="" xmlns:ma14="http://schemas.microsoft.com/office/mac/drawingml/2011/main" val="0"/>
+              <ma14:wrappingTextBoxFlag xmlns:ma14="http://schemas.microsoft.com/office/mac/drawingml/2011/main" val="0"/>
             </a:ext>
           </a:extLst>
         </p:spPr>
@@ -21964,7 +22416,7 @@
           <a:p>
             <a:pPr algn="l"/>
             <a:fld id="{F7021451-1387-4CA6-816F-3879F97B5CBC}" type="slidenum">
-              <a:rPr lang="en-US" b="0"/>
+              <a:rPr b="0" lang="en-US"/>
               <a:t>3</a:t>
             </a:fld>
             <a:endParaRPr lang="en-US"/>
@@ -22039,7 +22491,7 @@
           <a:bodyPr wrap="square" lIns="0" tIns="0" rIns="0" bIns="0" rtlCol="0" anchor="ctr"/>
           <a:lstStyle/>
           <a:p>
-            <a:pPr marL="0" indent="0">
+            <a:pPr indent="0" marL="0">
               <a:buNone/>
             </a:pPr>
             <a:r>
@@ -22078,7 +22530,7 @@
           <a:bodyPr wrap="square" lIns="0" tIns="0" rIns="0" bIns="0" rtlCol="0" anchor="t"/>
           <a:lstStyle/>
           <a:p>
-            <a:pPr marL="0" indent="0">
+            <a:pPr indent="0" marL="0">
               <a:lnSpc>
                 <a:spcPct val="100000"/>
               </a:lnSpc>
@@ -22147,11 +22599,11 @@
           <a:bodyPr wrap="square" lIns="0" tIns="0" rIns="0" bIns="0" rtlCol="0" anchor="ctr"/>
           <a:lstStyle/>
           <a:p>
-            <a:pPr marL="0" indent="0" algn="ctr">
-              <a:buNone/>
-            </a:pPr>
-            <a:r>
-              <a:rPr lang="en-US" sz="900" b="1" kern="0" spc="100" dirty="0">
+            <a:pPr algn="ctr" indent="0" marL="0">
+              <a:buNone/>
+            </a:pPr>
+            <a:r>
+              <a:rPr lang="en-US" sz="900" b="1" spc="100" kern="0" dirty="0">
                 <a:solidFill>
                   <a:srgbClr val="5A05F4"/>
                 </a:solidFill>
@@ -22167,14 +22619,14 @@
       </p:sp>
       <p:pic>
         <p:nvPicPr>
-          <p:cNvPr id="7" name="Image 0" descr="preencoded.png"/>
+          <p:cNvPr id="7" name="Image 0" descr="preencoded.png">    </p:cNvPr>
           <p:cNvPicPr>
             <a:picLocks noChangeAspect="1"/>
           </p:cNvPicPr>
           <p:nvPr/>
         </p:nvPicPr>
         <p:blipFill>
-          <a:blip r:embed="rId3"/>
+          <a:blip r:embed="rId1"/>
           <a:stretch>
             <a:fillRect/>
           </a:stretch>
@@ -22237,7 +22689,7 @@
           <a:bodyPr wrap="square" lIns="0" tIns="0" rIns="0" bIns="0" rtlCol="0" anchor="ctr"/>
           <a:lstStyle/>
           <a:p>
-            <a:pPr marL="0" indent="0">
+            <a:pPr indent="0" marL="0">
               <a:buNone/>
             </a:pPr>
             <a:r>
@@ -22276,7 +22728,7 @@
           <a:bodyPr wrap="square" lIns="0" tIns="0" rIns="0" bIns="0" rtlCol="0" anchor="t"/>
           <a:lstStyle/>
           <a:p>
-            <a:pPr marL="0" indent="0">
+            <a:pPr indent="0" marL="0">
               <a:lnSpc>
                 <a:spcPct val="105000"/>
               </a:lnSpc>
@@ -22345,7 +22797,7 @@
           <a:bodyPr wrap="square" lIns="0" tIns="0" rIns="0" bIns="0" rtlCol="0" anchor="ctr"/>
           <a:lstStyle/>
           <a:p>
-            <a:pPr marL="0" indent="0">
+            <a:pPr indent="0" marL="0">
               <a:buNone/>
             </a:pPr>
             <a:r>
@@ -22384,7 +22836,7 @@
           <a:bodyPr wrap="square" lIns="0" tIns="0" rIns="0" bIns="0" rtlCol="0" anchor="t"/>
           <a:lstStyle/>
           <a:p>
-            <a:pPr marL="0" indent="0">
+            <a:pPr indent="0" marL="0">
               <a:lnSpc>
                 <a:spcPct val="105000"/>
               </a:lnSpc>
@@ -22453,7 +22905,7 @@
           <a:bodyPr wrap="square" lIns="0" tIns="0" rIns="0" bIns="0" rtlCol="0" anchor="ctr"/>
           <a:lstStyle/>
           <a:p>
-            <a:pPr marL="0" indent="0">
+            <a:pPr indent="0" marL="0">
               <a:buNone/>
             </a:pPr>
             <a:r>
@@ -22492,7 +22944,7 @@
           <a:bodyPr wrap="square" lIns="0" tIns="0" rIns="0" bIns="0" rtlCol="0" anchor="t"/>
           <a:lstStyle/>
           <a:p>
-            <a:pPr marL="0" indent="0">
+            <a:pPr indent="0" marL="0">
               <a:lnSpc>
                 <a:spcPct val="105000"/>
               </a:lnSpc>
@@ -22561,7 +23013,7 @@
           <a:bodyPr wrap="square" lIns="0" tIns="0" rIns="0" bIns="0" rtlCol="0" anchor="ctr"/>
           <a:lstStyle/>
           <a:p>
-            <a:pPr marL="0" indent="0">
+            <a:pPr indent="0" marL="0">
               <a:buNone/>
             </a:pPr>
             <a:r>
@@ -22600,7 +23052,7 @@
           <a:bodyPr wrap="square" lIns="0" tIns="0" rIns="0" bIns="0" rtlCol="0" anchor="t"/>
           <a:lstStyle/>
           <a:p>
-            <a:pPr marL="0" indent="0">
+            <a:pPr indent="0" marL="0">
               <a:lnSpc>
                 <a:spcPct val="105000"/>
               </a:lnSpc>
@@ -22669,7 +23121,7 @@
           <a:bodyPr wrap="square" lIns="0" tIns="0" rIns="0" bIns="0" rtlCol="0" anchor="ctr"/>
           <a:lstStyle/>
           <a:p>
-            <a:pPr marL="0" indent="0">
+            <a:pPr indent="0" marL="0">
               <a:buNone/>
             </a:pPr>
             <a:r>
@@ -22708,7 +23160,7 @@
           <a:bodyPr wrap="square" lIns="0" tIns="0" rIns="0" bIns="0" rtlCol="0" anchor="t"/>
           <a:lstStyle/>
           <a:p>
-            <a:pPr marL="0" indent="0">
+            <a:pPr indent="0" marL="0">
               <a:lnSpc>
                 <a:spcPct val="105000"/>
               </a:lnSpc>
@@ -22777,7 +23229,7 @@
           <a:bodyPr wrap="square" lIns="0" tIns="0" rIns="0" bIns="0" rtlCol="0" anchor="ctr"/>
           <a:lstStyle/>
           <a:p>
-            <a:pPr marL="0" indent="0">
+            <a:pPr indent="0" marL="0">
               <a:buNone/>
             </a:pPr>
             <a:r>
@@ -22816,7 +23268,7 @@
           <a:bodyPr wrap="square" lIns="0" tIns="0" rIns="0" bIns="0" rtlCol="0" anchor="t"/>
           <a:lstStyle/>
           <a:p>
-            <a:pPr marL="0" indent="0">
+            <a:pPr indent="0" marL="0">
               <a:lnSpc>
                 <a:spcPct val="105000"/>
               </a:lnSpc>
@@ -22885,7 +23337,7 @@
           <a:bodyPr wrap="square" lIns="0" tIns="0" rIns="0" bIns="0" rtlCol="0" anchor="ctr"/>
           <a:lstStyle/>
           <a:p>
-            <a:pPr marL="0" indent="0">
+            <a:pPr indent="0" marL="0">
               <a:lnSpc>
                 <a:spcPct val="112000"/>
               </a:lnSpc>
@@ -22908,7 +23360,7 @@
       </p:sp>
       <p:sp>
         <p:nvSpPr>
-          <p:cNvPr id="28" name="Slide Number Placeholder 0"/>
+          <p:cNvPr id="25" name="Slide Number Placeholder 0"/>
           <p:cNvSpPr>
             <a:spLocks noGrp="1"/>
           </p:cNvSpPr>
@@ -22926,7 +23378,7 @@
           </a:prstGeom>
           <a:extLst>
             <a:ext uri="{C572A759-6A51-4108-AA02-DFA0A04FC94B}">
-              <ma14:wrappingTextBoxFlag xmlns="" xmlns:ma14="http://schemas.microsoft.com/office/mac/drawingml/2011/main" val="0"/>
+              <ma14:wrappingTextBoxFlag xmlns:ma14="http://schemas.microsoft.com/office/mac/drawingml/2011/main" val="0"/>
             </a:ext>
           </a:extLst>
         </p:spPr>
@@ -22947,7 +23399,7 @@
           <a:p>
             <a:pPr algn="l"/>
             <a:fld id="{F7021451-1387-4CA6-816F-3879F97B5CBC}" type="slidenum">
-              <a:rPr lang="en-US" b="0"/>
+              <a:rPr b="0" lang="en-US"/>
               <a:t>4</a:t>
             </a:fld>
             <a:endParaRPr lang="en-US"/>
@@ -23000,11 +23452,11 @@
           <a:bodyPr wrap="square" lIns="0" tIns="0" rIns="0" bIns="0" rtlCol="0" anchor="ctr"/>
           <a:lstStyle/>
           <a:p>
-            <a:pPr marL="0" indent="0">
-              <a:buNone/>
-            </a:pPr>
-            <a:r>
-              <a:rPr lang="en-US" sz="1200" b="1" kern="0" spc="400" dirty="0">
+            <a:pPr indent="0" marL="0">
+              <a:buNone/>
+            </a:pPr>
+            <a:r>
+              <a:rPr lang="en-US" sz="1200" b="1" spc="400" kern="0" dirty="0">
                 <a:solidFill>
                   <a:srgbClr val="FFFFFF"/>
                 </a:solidFill>
@@ -23039,7 +23491,7 @@
           <a:bodyPr wrap="square" lIns="0" tIns="0" rIns="0" bIns="0" rtlCol="0" anchor="ctr"/>
           <a:lstStyle/>
           <a:p>
-            <a:pPr marL="0" indent="0">
+            <a:pPr indent="0" marL="0">
               <a:buNone/>
             </a:pPr>
             <a:r>
@@ -23078,7 +23530,7 @@
           <a:bodyPr wrap="square" lIns="0" tIns="0" rIns="0" bIns="0" rtlCol="0" anchor="t"/>
           <a:lstStyle/>
           <a:p>
-            <a:pPr marL="0" indent="0">
+            <a:pPr indent="0" marL="0">
               <a:buNone/>
             </a:pPr>
             <a:r>
@@ -23164,7 +23616,7 @@
           <a:bodyPr wrap="square" lIns="0" tIns="0" rIns="0" bIns="0" rtlCol="0" anchor="ctr"/>
           <a:lstStyle/>
           <a:p>
-            <a:pPr marL="0" indent="0" algn="l">
+            <a:pPr algn="l" indent="0" marL="0">
               <a:buNone/>
             </a:pPr>
             <a:r>
@@ -23203,7 +23655,7 @@
           <a:bodyPr wrap="square" lIns="0" tIns="0" rIns="0" bIns="0" rtlCol="0" anchor="ctr"/>
           <a:lstStyle/>
           <a:p>
-            <a:pPr marL="0" indent="0">
+            <a:pPr indent="0" marL="0">
               <a:buNone/>
             </a:pPr>
             <a:r>
@@ -23269,11 +23721,11 @@
           <a:bodyPr wrap="square" lIns="0" tIns="0" rIns="0" bIns="0" rtlCol="0" anchor="ctr"/>
           <a:lstStyle/>
           <a:p>
-            <a:pPr marL="0" indent="0" algn="ctr">
-              <a:buNone/>
-            </a:pPr>
-            <a:r>
-              <a:rPr lang="en-US" sz="900" b="1" kern="0" spc="100" dirty="0">
+            <a:pPr algn="ctr" indent="0" marL="0">
+              <a:buNone/>
+            </a:pPr>
+            <a:r>
+              <a:rPr lang="en-US" sz="900" b="1" spc="100" kern="0" dirty="0">
                 <a:solidFill>
                   <a:srgbClr val="5A05F4"/>
                 </a:solidFill>
@@ -23289,14 +23741,14 @@
       </p:sp>
       <p:pic>
         <p:nvPicPr>
-          <p:cNvPr id="7" name="Image 0" descr="preencoded.png"/>
+          <p:cNvPr id="7" name="Image 0" descr="preencoded.png">    </p:cNvPr>
           <p:cNvPicPr>
             <a:picLocks noChangeAspect="1"/>
           </p:cNvPicPr>
           <p:nvPr/>
         </p:nvPicPr>
         <p:blipFill>
-          <a:blip r:embed="rId3"/>
+          <a:blip r:embed="rId1"/>
           <a:stretch>
             <a:fillRect/>
           </a:stretch>
@@ -23354,7 +23806,7 @@
           <a:bodyPr wrap="square" lIns="0" tIns="0" rIns="0" bIns="0" rtlCol="0" anchor="ctr"/>
           <a:lstStyle/>
           <a:p>
-            <a:pPr marL="0" indent="0" algn="ctr">
+            <a:pPr algn="ctr" indent="0" marL="0">
               <a:buNone/>
             </a:pPr>
             <a:r>
@@ -23458,7 +23910,7 @@
           <a:bodyPr wrap="square" lIns="0" tIns="0" rIns="0" bIns="0" rtlCol="0" anchor="ctr"/>
           <a:lstStyle/>
           <a:p>
-            <a:pPr marL="0" indent="0" algn="ctr">
+            <a:pPr algn="ctr" indent="0" marL="0">
               <a:buNone/>
             </a:pPr>
             <a:r>
@@ -23562,7 +24014,7 @@
           <a:bodyPr wrap="square" lIns="0" tIns="0" rIns="0" bIns="0" rtlCol="0" anchor="ctr"/>
           <a:lstStyle/>
           <a:p>
-            <a:pPr marL="0" indent="0" algn="ctr">
+            <a:pPr algn="ctr" indent="0" marL="0">
               <a:buNone/>
             </a:pPr>
             <a:r>
@@ -23666,7 +24118,7 @@
           <a:bodyPr wrap="square" lIns="0" tIns="0" rIns="0" bIns="0" rtlCol="0" anchor="ctr"/>
           <a:lstStyle/>
           <a:p>
-            <a:pPr marL="0" indent="0" algn="ctr">
+            <a:pPr algn="ctr" indent="0" marL="0">
               <a:buNone/>
             </a:pPr>
             <a:r>
@@ -23705,7 +24157,7 @@
           <a:bodyPr wrap="square" lIns="0" tIns="0" rIns="0" bIns="0" rtlCol="0" anchor="ctr"/>
           <a:lstStyle/>
           <a:p>
-            <a:pPr marL="0" indent="0">
+            <a:pPr indent="0" marL="0">
               <a:buNone/>
             </a:pPr>
             <a:r>
@@ -23766,7 +24218,7 @@
           <a:bodyPr wrap="square" lIns="0" tIns="0" rIns="0" bIns="0" rtlCol="0" anchor="ctr"/>
           <a:lstStyle/>
           <a:p>
-            <a:pPr marL="0" indent="0">
+            <a:pPr indent="0" marL="0">
               <a:buNone/>
             </a:pPr>
             <a:r>
@@ -23805,7 +24257,7 @@
           <a:bodyPr wrap="square" lIns="0" tIns="0" rIns="0" bIns="0" rtlCol="0" anchor="t"/>
           <a:lstStyle/>
           <a:p>
-            <a:pPr marL="0" indent="0">
+            <a:pPr indent="0" marL="0">
               <a:lnSpc>
                 <a:spcPct val="108000"/>
               </a:lnSpc>
@@ -23869,7 +24321,7 @@
           <a:bodyPr wrap="square" lIns="0" tIns="0" rIns="0" bIns="0" rtlCol="0" anchor="ctr"/>
           <a:lstStyle/>
           <a:p>
-            <a:pPr marL="0" indent="0">
+            <a:pPr indent="0" marL="0">
               <a:buNone/>
             </a:pPr>
             <a:r>
@@ -23908,7 +24360,7 @@
           <a:bodyPr wrap="square" lIns="0" tIns="0" rIns="0" bIns="0" rtlCol="0" anchor="t"/>
           <a:lstStyle/>
           <a:p>
-            <a:pPr marL="0" indent="0">
+            <a:pPr indent="0" marL="0">
               <a:lnSpc>
                 <a:spcPct val="108000"/>
               </a:lnSpc>
@@ -23953,14 +24405,34 @@
       </p:sp>
       <p:sp>
         <p:nvSpPr>
-          <p:cNvPr id="30" name="Text 27"/>
-          <p:cNvSpPr/>
-          <p:nvPr/>
-        </p:nvSpPr>
-        <p:spPr>
-          <a:xfrm>
-            <a:off x="786384" y="5111496"/>
-            <a:ext cx="10625328" cy="219456"/>
+          <p:cNvPr id="30" name="Shape 27"/>
+          <p:cNvSpPr/>
+          <p:nvPr/>
+        </p:nvSpPr>
+        <p:spPr>
+          <a:xfrm>
+            <a:off x="749808" y="5262372"/>
+            <a:ext cx="310896" cy="310896"/>
+          </a:xfrm>
+          <a:prstGeom prst="ellipse">
+            <a:avLst/>
+          </a:prstGeom>
+          <a:solidFill>
+            <a:srgbClr val="FFFFFF"/>
+          </a:solidFill>
+          <a:ln/>
+        </p:spPr>
+      </p:sp>
+      <p:sp>
+        <p:nvSpPr>
+          <p:cNvPr id="31" name="Text 28"/>
+          <p:cNvSpPr/>
+          <p:nvPr/>
+        </p:nvSpPr>
+        <p:spPr>
+          <a:xfrm>
+            <a:off x="749808" y="5262372"/>
+            <a:ext cx="310896" cy="310896"/>
           </a:xfrm>
           <a:prstGeom prst="rect">
             <a:avLst/>
@@ -23972,11 +24444,50 @@
           <a:bodyPr wrap="square" lIns="0" tIns="0" rIns="0" bIns="0" rtlCol="0" anchor="ctr"/>
           <a:lstStyle/>
           <a:p>
-            <a:pPr marL="0" indent="0">
-              <a:buNone/>
-            </a:pPr>
-            <a:r>
-              <a:rPr lang="en-US" sz="950" b="1" kern="0" spc="150" dirty="0">
+            <a:pPr algn="ctr" indent="0" marL="0">
+              <a:buNone/>
+            </a:pPr>
+            <a:r>
+              <a:rPr lang="en-US" sz="1200" b="1" dirty="0">
+                <a:solidFill>
+                  <a:srgbClr val="5A05F4"/>
+                </a:solidFill>
+                <a:latin typeface="Arial" pitchFamily="34" charset="0"/>
+                <a:ea typeface="Arial" pitchFamily="34" charset="-122"/>
+                <a:cs typeface="Arial" pitchFamily="34" charset="-120"/>
+              </a:rPr>
+              <a:t>?</a:t>
+            </a:r>
+            <a:endParaRPr lang="en-US" sz="1200" dirty="0"/>
+          </a:p>
+        </p:txBody>
+      </p:sp>
+      <p:sp>
+        <p:nvSpPr>
+          <p:cNvPr id="32" name="Text 29"/>
+          <p:cNvSpPr/>
+          <p:nvPr/>
+        </p:nvSpPr>
+        <p:spPr>
+          <a:xfrm>
+            <a:off x="1243584" y="5111496"/>
+            <a:ext cx="10168128" cy="219456"/>
+          </a:xfrm>
+          <a:prstGeom prst="rect">
+            <a:avLst/>
+          </a:prstGeom>
+          <a:noFill/>
+          <a:ln/>
+        </p:spPr>
+        <p:txBody>
+          <a:bodyPr wrap="square" lIns="0" tIns="0" rIns="0" bIns="0" rtlCol="0" anchor="ctr"/>
+          <a:lstStyle/>
+          <a:p>
+            <a:pPr indent="0" marL="0">
+              <a:buNone/>
+            </a:pPr>
+            <a:r>
+              <a:rPr lang="en-US" sz="950" b="1" spc="150" kern="0" dirty="0">
                 <a:solidFill>
                   <a:srgbClr val="FFFFFF"/>
                 </a:solidFill>
@@ -23992,14 +24503,14 @@
       </p:sp>
       <p:sp>
         <p:nvSpPr>
-          <p:cNvPr id="31" name="Text 28"/>
-          <p:cNvSpPr/>
-          <p:nvPr/>
-        </p:nvSpPr>
-        <p:spPr>
-          <a:xfrm>
-            <a:off x="786384" y="5367528"/>
-            <a:ext cx="10625328" cy="356616"/>
+          <p:cNvPr id="33" name="Text 30"/>
+          <p:cNvSpPr/>
+          <p:nvPr/>
+        </p:nvSpPr>
+        <p:spPr>
+          <a:xfrm>
+            <a:off x="1243584" y="5367528"/>
+            <a:ext cx="10168128" cy="356616"/>
           </a:xfrm>
           <a:prstGeom prst="rect">
             <a:avLst/>
@@ -24011,7 +24522,7 @@
           <a:bodyPr wrap="square" lIns="0" tIns="0" rIns="0" bIns="0" rtlCol="0" anchor="ctr"/>
           <a:lstStyle/>
           <a:p>
-            <a:pPr marL="0" indent="0">
+            <a:pPr indent="0" marL="0">
               <a:lnSpc>
                 <a:spcPct val="112000"/>
               </a:lnSpc>
@@ -24034,7 +24545,7 @@
       </p:sp>
       <p:sp>
         <p:nvSpPr>
-          <p:cNvPr id="32" name="Slide Number Placeholder 0"/>
+          <p:cNvPr id="25" name="Slide Number Placeholder 0"/>
           <p:cNvSpPr>
             <a:spLocks noGrp="1"/>
           </p:cNvSpPr>
@@ -24052,7 +24563,7 @@
           </a:prstGeom>
           <a:extLst>
             <a:ext uri="{C572A759-6A51-4108-AA02-DFA0A04FC94B}">
-              <ma14:wrappingTextBoxFlag xmlns="" xmlns:ma14="http://schemas.microsoft.com/office/mac/drawingml/2011/main" val="0"/>
+              <ma14:wrappingTextBoxFlag xmlns:ma14="http://schemas.microsoft.com/office/mac/drawingml/2011/main" val="0"/>
             </a:ext>
           </a:extLst>
         </p:spPr>
@@ -24073,7 +24584,7 @@
           <a:p>
             <a:pPr algn="l"/>
             <a:fld id="{F7021451-1387-4CA6-816F-3879F97B5CBC}" type="slidenum">
-              <a:rPr lang="en-US" b="0"/>
+              <a:rPr b="0" lang="en-US"/>
               <a:t>6</a:t>
             </a:fld>
             <a:endParaRPr lang="en-US"/>
@@ -24148,7 +24659,7 @@
           <a:bodyPr wrap="square" lIns="0" tIns="0" rIns="0" bIns="0" rtlCol="0" anchor="ctr"/>
           <a:lstStyle/>
           <a:p>
-            <a:pPr marL="0" indent="0" algn="l">
+            <a:pPr algn="l" indent="0" marL="0">
               <a:buNone/>
             </a:pPr>
             <a:r>
@@ -24187,7 +24698,7 @@
           <a:bodyPr wrap="square" lIns="0" tIns="0" rIns="0" bIns="0" rtlCol="0" anchor="ctr"/>
           <a:lstStyle/>
           <a:p>
-            <a:pPr marL="0" indent="0">
+            <a:pPr indent="0" marL="0">
               <a:buNone/>
             </a:pPr>
             <a:r>
@@ -24253,11 +24764,11 @@
           <a:bodyPr wrap="square" lIns="0" tIns="0" rIns="0" bIns="0" rtlCol="0" anchor="ctr"/>
           <a:lstStyle/>
           <a:p>
-            <a:pPr marL="0" indent="0" algn="ctr">
-              <a:buNone/>
-            </a:pPr>
-            <a:r>
-              <a:rPr lang="en-US" sz="900" b="1" kern="0" spc="100" dirty="0">
+            <a:pPr algn="ctr" indent="0" marL="0">
+              <a:buNone/>
+            </a:pPr>
+            <a:r>
+              <a:rPr lang="en-US" sz="900" b="1" spc="100" kern="0" dirty="0">
                 <a:solidFill>
                   <a:srgbClr val="5A05F4"/>
                 </a:solidFill>
@@ -24273,14 +24784,14 @@
       </p:sp>
       <p:pic>
         <p:nvPicPr>
-          <p:cNvPr id="7" name="Image 0" descr="preencoded.png"/>
+          <p:cNvPr id="7" name="Image 0" descr="preencoded.png">    </p:cNvPr>
           <p:cNvPicPr>
             <a:picLocks noChangeAspect="1"/>
           </p:cNvPicPr>
           <p:nvPr/>
         </p:nvPicPr>
         <p:blipFill>
-          <a:blip r:embed="rId3"/>
+          <a:blip r:embed="rId1"/>
           <a:stretch>
             <a:fillRect/>
           </a:stretch>
@@ -24311,34 +24822,16 @@
         </p:nvGraphicFramePr>
         <p:xfrm>
           <a:off x="566928" y="1737360"/>
-          <a:ext cx="11064240" cy="2560320"/>
+          <a:ext cx="11064240" cy="914400"/>
         </p:xfrm>
         <a:graphic>
           <a:graphicData uri="http://schemas.openxmlformats.org/drawingml/2006/table">
             <a:tbl>
               <a:tblPr/>
               <a:tblGrid>
-                <a:gridCol w="2834640">
-                  <a:extLst>
-                    <a:ext uri="{9D8B030D-6E8A-4147-A177-3AD203B41FA5}">
-                      <a16:colId xmlns:a16="http://schemas.microsoft.com/office/drawing/2014/main" val="20000"/>
-                    </a:ext>
-                  </a:extLst>
-                </a:gridCol>
-                <a:gridCol w="4114800">
-                  <a:extLst>
-                    <a:ext uri="{9D8B030D-6E8A-4147-A177-3AD203B41FA5}">
-                      <a16:colId xmlns:a16="http://schemas.microsoft.com/office/drawing/2014/main" val="20001"/>
-                    </a:ext>
-                  </a:extLst>
-                </a:gridCol>
-                <a:gridCol w="4114800">
-                  <a:extLst>
-                    <a:ext uri="{9D8B030D-6E8A-4147-A177-3AD203B41FA5}">
-                      <a16:colId xmlns:a16="http://schemas.microsoft.com/office/drawing/2014/main" val="20002"/>
-                    </a:ext>
-                  </a:extLst>
-                </a:gridCol>
+                <a:gridCol w="2834640"/>
+                <a:gridCol w="4114800"/>
+                <a:gridCol w="4114800"/>
               </a:tblGrid>
               <a:tr h="512064">
                 <a:tc>
@@ -24346,7 +24839,7 @@
                     <a:bodyPr/>
                     <a:lstStyle/>
                     <a:p>
-                      <a:pPr marL="0" indent="0" algn="ctr">
+                      <a:pPr algn="ctr" indent="0" marL="0">
                         <a:buNone/>
                       </a:pPr>
                       <a:endParaRPr lang="en-US" sz="900" dirty="0">
@@ -24403,11 +24896,11 @@
                     <a:bodyPr/>
                     <a:lstStyle/>
                     <a:p>
-                      <a:pPr marL="0" indent="0" algn="ctr">
+                      <a:pPr algn="ctr" indent="0" marL="0">
                         <a:buNone/>
                       </a:pPr>
                       <a:r>
-                        <a:rPr lang="en-US" sz="900" b="1" kern="0" spc="100" dirty="0">
+                        <a:rPr lang="en-US" sz="900" b="1" spc="100" kern="0" dirty="0">
                           <a:solidFill>
                             <a:srgbClr val="FFFFFF"/>
                           </a:solidFill>
@@ -24471,11 +24964,11 @@
                     <a:bodyPr/>
                     <a:lstStyle/>
                     <a:p>
-                      <a:pPr marL="0" indent="0" algn="ctr">
+                      <a:pPr algn="ctr" indent="0" marL="0">
                         <a:buNone/>
                       </a:pPr>
                       <a:r>
-                        <a:rPr lang="en-US" sz="900" b="1" kern="0" spc="100" dirty="0">
+                        <a:rPr lang="en-US" sz="900" b="1" spc="100" kern="0" dirty="0">
                           <a:solidFill>
                             <a:srgbClr val="FFFFFF"/>
                           </a:solidFill>
@@ -24534,11 +25027,6 @@
                     </a:solidFill>
                   </a:tcPr>
                 </a:tc>
-                <a:extLst>
-                  <a:ext uri="{0D108BD9-81ED-4DB2-BD59-A6C34878D82A}">
-                    <a16:rowId xmlns:a16="http://schemas.microsoft.com/office/drawing/2014/main" val="10000"/>
-                  </a:ext>
-                </a:extLst>
               </a:tr>
               <a:tr h="512064">
                 <a:tc>
@@ -24546,7 +25034,7 @@
                     <a:bodyPr/>
                     <a:lstStyle/>
                     <a:p>
-                      <a:pPr marL="0" indent="0">
+                      <a:pPr indent="0" marL="0">
                         <a:buNone/>
                       </a:pPr>
                       <a:r>
@@ -24614,7 +25102,7 @@
                     <a:bodyPr/>
                     <a:lstStyle/>
                     <a:p>
-                      <a:pPr marL="0" indent="0">
+                      <a:pPr indent="0" marL="0">
                         <a:buNone/>
                       </a:pPr>
                       <a:r>
@@ -24682,7 +25170,7 @@
                     <a:bodyPr/>
                     <a:lstStyle/>
                     <a:p>
-                      <a:pPr marL="0" indent="0">
+                      <a:pPr indent="0" marL="0">
                         <a:buNone/>
                       </a:pPr>
                       <a:r>
@@ -24745,11 +25233,6 @@
                     </a:solidFill>
                   </a:tcPr>
                 </a:tc>
-                <a:extLst>
-                  <a:ext uri="{0D108BD9-81ED-4DB2-BD59-A6C34878D82A}">
-                    <a16:rowId xmlns:a16="http://schemas.microsoft.com/office/drawing/2014/main" val="10001"/>
-                  </a:ext>
-                </a:extLst>
               </a:tr>
               <a:tr h="512064">
                 <a:tc>
@@ -24757,7 +25240,7 @@
                     <a:bodyPr/>
                     <a:lstStyle/>
                     <a:p>
-                      <a:pPr marL="0" indent="0">
+                      <a:pPr indent="0" marL="0">
                         <a:buNone/>
                       </a:pPr>
                       <a:r>
@@ -24825,7 +25308,7 @@
                     <a:bodyPr/>
                     <a:lstStyle/>
                     <a:p>
-                      <a:pPr marL="0" indent="0">
+                      <a:pPr indent="0" marL="0">
                         <a:buNone/>
                       </a:pPr>
                       <a:r>
@@ -24837,7 +25320,7 @@
                           <a:ea typeface="Montserrat" pitchFamily="34" charset="-122"/>
                           <a:cs typeface="Montserrat" pitchFamily="34" charset="-120"/>
                         </a:rPr>
-                        <a:t>минущі збої: мережевий глюк, 429</a:t>
+                        <a:t>минущі збої: мережева помилка, 429</a:t>
                       </a:r>
                       <a:endParaRPr lang="en-US" sz="1150" dirty="0">
                         <a:latin typeface="Montserrat" charset="0"/>
@@ -24893,7 +25376,7 @@
                     <a:bodyPr/>
                     <a:lstStyle/>
                     <a:p>
-                      <a:pPr marL="0" indent="0">
+                      <a:pPr indent="0" marL="0">
                         <a:buNone/>
                       </a:pPr>
                       <a:r>
@@ -24905,7 +25388,7 @@
                           <a:ea typeface="Montserrat" pitchFamily="34" charset="-122"/>
                           <a:cs typeface="Montserrat" pitchFamily="34" charset="-120"/>
                         </a:rPr>
-                        <a:t>провайдер лежить або деградує</a:t>
+                        <a:t>провайдер недоступний або деградує</a:t>
                       </a:r>
                       <a:endParaRPr lang="en-US" sz="1150" dirty="0">
                         <a:latin typeface="Montserrat" charset="0"/>
@@ -24956,11 +25439,6 @@
                     </a:solidFill>
                   </a:tcPr>
                 </a:tc>
-                <a:extLst>
-                  <a:ext uri="{0D108BD9-81ED-4DB2-BD59-A6C34878D82A}">
-                    <a16:rowId xmlns:a16="http://schemas.microsoft.com/office/drawing/2014/main" val="10002"/>
-                  </a:ext>
-                </a:extLst>
               </a:tr>
               <a:tr h="512064">
                 <a:tc>
@@ -24968,7 +25446,7 @@
                     <a:bodyPr/>
                     <a:lstStyle/>
                     <a:p>
-                      <a:pPr marL="0" indent="0">
+                      <a:pPr indent="0" marL="0">
                         <a:buNone/>
                       </a:pPr>
                       <a:r>
@@ -25036,7 +25514,7 @@
                     <a:bodyPr/>
                     <a:lstStyle/>
                     <a:p>
-                      <a:pPr marL="0" indent="0">
+                      <a:pPr indent="0" marL="0">
                         <a:buNone/>
                       </a:pPr>
                       <a:r>
@@ -25104,7 +25582,7 @@
                     <a:bodyPr/>
                     <a:lstStyle/>
                     <a:p>
-                      <a:pPr marL="0" indent="0">
+                      <a:pPr indent="0" marL="0">
                         <a:buNone/>
                       </a:pPr>
                       <a:r>
@@ -25167,11 +25645,6 @@
                     </a:solidFill>
                   </a:tcPr>
                 </a:tc>
-                <a:extLst>
-                  <a:ext uri="{0D108BD9-81ED-4DB2-BD59-A6C34878D82A}">
-                    <a16:rowId xmlns:a16="http://schemas.microsoft.com/office/drawing/2014/main" val="10003"/>
-                  </a:ext>
-                </a:extLst>
               </a:tr>
               <a:tr h="512064">
                 <a:tc>
@@ -25179,7 +25652,7 @@
                     <a:bodyPr/>
                     <a:lstStyle/>
                     <a:p>
-                      <a:pPr marL="0" indent="0">
+                      <a:pPr indent="0" marL="0">
                         <a:buNone/>
                       </a:pPr>
                       <a:r>
@@ -25247,7 +25720,7 @@
                     <a:bodyPr/>
                     <a:lstStyle/>
                     <a:p>
-                      <a:pPr marL="0" indent="0">
+                      <a:pPr indent="0" marL="0">
                         <a:buNone/>
                       </a:pPr>
                       <a:r>
@@ -25315,7 +25788,7 @@
                     <a:bodyPr/>
                     <a:lstStyle/>
                     <a:p>
-                      <a:pPr marL="0" indent="0">
+                      <a:pPr indent="0" marL="0">
                         <a:buNone/>
                       </a:pPr>
                       <a:r>
@@ -25378,11 +25851,6 @@
                     </a:solidFill>
                   </a:tcPr>
                 </a:tc>
-                <a:extLst>
-                  <a:ext uri="{0D108BD9-81ED-4DB2-BD59-A6C34878D82A}">
-                    <a16:rowId xmlns:a16="http://schemas.microsoft.com/office/drawing/2014/main" val="10004"/>
-                  </a:ext>
-                </a:extLst>
               </a:tr>
             </a:tbl>
           </a:graphicData>
@@ -25431,7 +25899,7 @@
           <a:bodyPr wrap="square" lIns="0" tIns="0" rIns="0" bIns="0" rtlCol="0" anchor="ctr"/>
           <a:lstStyle/>
           <a:p>
-            <a:pPr marL="0" indent="0">
+            <a:pPr indent="0" marL="0">
               <a:lnSpc>
                 <a:spcPct val="112000"/>
               </a:lnSpc>
@@ -25472,7 +25940,7 @@
           </a:prstGeom>
           <a:extLst>
             <a:ext uri="{C572A759-6A51-4108-AA02-DFA0A04FC94B}">
-              <ma14:wrappingTextBoxFlag xmlns="" xmlns:ma14="http://schemas.microsoft.com/office/mac/drawingml/2011/main" val="0"/>
+              <ma14:wrappingTextBoxFlag xmlns:ma14="http://schemas.microsoft.com/office/mac/drawingml/2011/main" val="0"/>
             </a:ext>
           </a:extLst>
         </p:spPr>
@@ -25493,7 +25961,7 @@
           <a:p>
             <a:pPr algn="l"/>
             <a:fld id="{F7021451-1387-4CA6-816F-3879F97B5CBC}" type="slidenum">
-              <a:rPr lang="en-US" b="0"/>
+              <a:rPr b="0" lang="en-US"/>
               <a:t>7</a:t>
             </a:fld>
             <a:endParaRPr lang="en-US"/>
@@ -25568,7 +26036,7 @@
           <a:bodyPr wrap="square" lIns="0" tIns="0" rIns="0" bIns="0" rtlCol="0" anchor="ctr"/>
           <a:lstStyle/>
           <a:p>
-            <a:pPr marL="0" indent="0" algn="l">
+            <a:pPr algn="l" indent="0" marL="0">
               <a:buNone/>
             </a:pPr>
             <a:r>
@@ -25607,7 +26075,7 @@
           <a:bodyPr wrap="square" lIns="0" tIns="0" rIns="0" bIns="0" rtlCol="0" anchor="ctr"/>
           <a:lstStyle/>
           <a:p>
-            <a:pPr marL="0" indent="0">
+            <a:pPr indent="0" marL="0">
               <a:buNone/>
             </a:pPr>
             <a:r>
@@ -25673,11 +26141,11 @@
           <a:bodyPr wrap="square" lIns="0" tIns="0" rIns="0" bIns="0" rtlCol="0" anchor="ctr"/>
           <a:lstStyle/>
           <a:p>
-            <a:pPr marL="0" indent="0" algn="ctr">
-              <a:buNone/>
-            </a:pPr>
-            <a:r>
-              <a:rPr lang="en-US" sz="900" b="1" kern="0" spc="100" dirty="0">
+            <a:pPr algn="ctr" indent="0" marL="0">
+              <a:buNone/>
+            </a:pPr>
+            <a:r>
+              <a:rPr lang="en-US" sz="900" b="1" spc="100" kern="0" dirty="0">
                 <a:solidFill>
                   <a:srgbClr val="5A05F4"/>
                 </a:solidFill>
@@ -25693,14 +26161,14 @@
       </p:sp>
       <p:pic>
         <p:nvPicPr>
-          <p:cNvPr id="7" name="Image 0" descr="preencoded.png"/>
+          <p:cNvPr id="7" name="Image 0" descr="preencoded.png">    </p:cNvPr>
           <p:cNvPicPr>
             <a:picLocks noChangeAspect="1"/>
           </p:cNvPicPr>
           <p:nvPr/>
         </p:nvPicPr>
         <p:blipFill>
-          <a:blip r:embed="rId3"/>
+          <a:blip r:embed="rId1"/>
           <a:stretch>
             <a:fillRect/>
           </a:stretch>
@@ -25758,7 +26226,7 @@
           <a:bodyPr wrap="square" lIns="0" tIns="0" rIns="0" bIns="0" rtlCol="0" anchor="ctr"/>
           <a:lstStyle/>
           <a:p>
-            <a:pPr marL="0" indent="0">
+            <a:pPr indent="0" marL="0">
               <a:buNone/>
             </a:pPr>
             <a:r>
@@ -25797,7 +26265,7 @@
           <a:bodyPr wrap="square" lIns="0" tIns="0" rIns="0" bIns="0" rtlCol="0" anchor="ctr"/>
           <a:lstStyle/>
           <a:p>
-            <a:pPr marL="0" indent="0">
+            <a:pPr indent="0" marL="0">
               <a:buNone/>
             </a:pPr>
             <a:r>
@@ -25858,7 +26326,7 @@
           <a:bodyPr wrap="square" lIns="0" tIns="0" rIns="0" bIns="0" rtlCol="0" anchor="ctr"/>
           <a:lstStyle/>
           <a:p>
-            <a:pPr marL="0" indent="0">
+            <a:pPr indent="0" marL="0">
               <a:buNone/>
             </a:pPr>
             <a:r>
@@ -25897,7 +26365,7 @@
           <a:bodyPr wrap="square" lIns="0" tIns="0" rIns="0" bIns="0" rtlCol="0" anchor="ctr"/>
           <a:lstStyle/>
           <a:p>
-            <a:pPr marL="0" indent="0">
+            <a:pPr indent="0" marL="0">
               <a:buNone/>
             </a:pPr>
             <a:r>
@@ -25958,7 +26426,7 @@
           <a:bodyPr wrap="square" lIns="0" tIns="0" rIns="0" bIns="0" rtlCol="0" anchor="ctr"/>
           <a:lstStyle/>
           <a:p>
-            <a:pPr marL="0" indent="0">
+            <a:pPr indent="0" marL="0">
               <a:buNone/>
             </a:pPr>
             <a:r>
@@ -25997,7 +26465,7 @@
           <a:bodyPr wrap="square" lIns="0" tIns="0" rIns="0" bIns="0" rtlCol="0" anchor="ctr"/>
           <a:lstStyle/>
           <a:p>
-            <a:pPr marL="0" indent="0">
+            <a:pPr indent="0" marL="0">
               <a:buNone/>
             </a:pPr>
             <a:r>
@@ -26036,7 +26504,7 @@
           <a:bodyPr wrap="square" lIns="0" tIns="0" rIns="0" bIns="0" rtlCol="0" anchor="ctr"/>
           <a:lstStyle/>
           <a:p>
-            <a:pPr marL="0" indent="0" algn="r">
+            <a:pPr algn="r" indent="0" marL="0">
               <a:buNone/>
             </a:pPr>
             <a:r>
@@ -26198,7 +26666,7 @@
           <a:bodyPr wrap="square" lIns="0" tIns="0" rIns="0" bIns="0" rtlCol="0" anchor="ctr"/>
           <a:lstStyle/>
           <a:p>
-            <a:pPr marL="0" indent="0" algn="r">
+            <a:pPr algn="r" indent="0" marL="0">
               <a:buNone/>
             </a:pPr>
             <a:r>
@@ -26340,7 +26808,7 @@
           <a:bodyPr wrap="square" lIns="0" tIns="0" rIns="0" bIns="0" rtlCol="0" anchor="ctr"/>
           <a:lstStyle/>
           <a:p>
-            <a:pPr marL="0" indent="0" algn="r">
+            <a:pPr algn="r" indent="0" marL="0">
               <a:buNone/>
             </a:pPr>
             <a:r>
@@ -26510,14 +26978,34 @@
       </p:sp>
       <p:sp>
         <p:nvSpPr>
-          <p:cNvPr id="38" name="Text 35"/>
-          <p:cNvSpPr/>
-          <p:nvPr/>
-        </p:nvSpPr>
-        <p:spPr>
-          <a:xfrm>
-            <a:off x="786384" y="5157216"/>
-            <a:ext cx="10625328" cy="219456"/>
+          <p:cNvPr id="38" name="Shape 35"/>
+          <p:cNvSpPr/>
+          <p:nvPr/>
+        </p:nvSpPr>
+        <p:spPr>
+          <a:xfrm>
+            <a:off x="749808" y="5399532"/>
+            <a:ext cx="310896" cy="310896"/>
+          </a:xfrm>
+          <a:prstGeom prst="ellipse">
+            <a:avLst/>
+          </a:prstGeom>
+          <a:solidFill>
+            <a:srgbClr val="B3261E"/>
+          </a:solidFill>
+          <a:ln/>
+        </p:spPr>
+      </p:sp>
+      <p:sp>
+        <p:nvSpPr>
+          <p:cNvPr id="39" name="Text 36"/>
+          <p:cNvSpPr/>
+          <p:nvPr/>
+        </p:nvSpPr>
+        <p:spPr>
+          <a:xfrm>
+            <a:off x="749808" y="5399532"/>
+            <a:ext cx="310896" cy="310896"/>
           </a:xfrm>
           <a:prstGeom prst="rect">
             <a:avLst/>
@@ -26529,11 +27017,50 @@
           <a:bodyPr wrap="square" lIns="0" tIns="0" rIns="0" bIns="0" rtlCol="0" anchor="ctr"/>
           <a:lstStyle/>
           <a:p>
-            <a:pPr marL="0" indent="0">
-              <a:buNone/>
-            </a:pPr>
-            <a:r>
-              <a:rPr lang="en-US" sz="950" b="1" kern="0" spc="150" dirty="0">
+            <a:pPr algn="ctr" indent="0" marL="0">
+              <a:buNone/>
+            </a:pPr>
+            <a:r>
+              <a:rPr lang="en-US" sz="1200" b="1" dirty="0">
+                <a:solidFill>
+                  <a:srgbClr val="FFFFFF"/>
+                </a:solidFill>
+                <a:latin typeface="Arial" pitchFamily="34" charset="0"/>
+                <a:ea typeface="Arial" pitchFamily="34" charset="-122"/>
+                <a:cs typeface="Arial" pitchFamily="34" charset="-120"/>
+              </a:rPr>
+              <a:t>✕</a:t>
+            </a:r>
+            <a:endParaRPr lang="en-US" sz="1200" dirty="0"/>
+          </a:p>
+        </p:txBody>
+      </p:sp>
+      <p:sp>
+        <p:nvSpPr>
+          <p:cNvPr id="40" name="Text 37"/>
+          <p:cNvSpPr/>
+          <p:nvPr/>
+        </p:nvSpPr>
+        <p:spPr>
+          <a:xfrm>
+            <a:off x="1243584" y="5157216"/>
+            <a:ext cx="10168128" cy="219456"/>
+          </a:xfrm>
+          <a:prstGeom prst="rect">
+            <a:avLst/>
+          </a:prstGeom>
+          <a:noFill/>
+          <a:ln/>
+        </p:spPr>
+        <p:txBody>
+          <a:bodyPr wrap="square" lIns="0" tIns="0" rIns="0" bIns="0" rtlCol="0" anchor="ctr"/>
+          <a:lstStyle/>
+          <a:p>
+            <a:pPr indent="0" marL="0">
+              <a:buNone/>
+            </a:pPr>
+            <a:r>
+              <a:rPr lang="en-US" sz="950" b="1" spc="150" kern="0" dirty="0">
                 <a:solidFill>
                   <a:srgbClr val="B3261E"/>
                 </a:solidFill>
@@ -26549,14 +27076,14 @@
       </p:sp>
       <p:sp>
         <p:nvSpPr>
-          <p:cNvPr id="39" name="Text 36"/>
-          <p:cNvSpPr/>
-          <p:nvPr/>
-        </p:nvSpPr>
-        <p:spPr>
-          <a:xfrm>
-            <a:off x="786384" y="5413248"/>
-            <a:ext cx="10625328" cy="539496"/>
+          <p:cNvPr id="41" name="Text 38"/>
+          <p:cNvSpPr/>
+          <p:nvPr/>
+        </p:nvSpPr>
+        <p:spPr>
+          <a:xfrm>
+            <a:off x="1243584" y="5413248"/>
+            <a:ext cx="10168128" cy="539496"/>
           </a:xfrm>
           <a:prstGeom prst="rect">
             <a:avLst/>
@@ -26568,7 +27095,7 @@
           <a:bodyPr wrap="square" lIns="0" tIns="0" rIns="0" bIns="0" rtlCol="0" anchor="ctr"/>
           <a:lstStyle/>
           <a:p>
-            <a:pPr marL="0" indent="0">
+            <a:pPr indent="0" marL="0">
               <a:lnSpc>
                 <a:spcPct val="112000"/>
               </a:lnSpc>
@@ -26591,7 +27118,7 @@
       </p:sp>
       <p:sp>
         <p:nvSpPr>
-          <p:cNvPr id="40" name="Slide Number Placeholder 0"/>
+          <p:cNvPr id="25" name="Slide Number Placeholder 0"/>
           <p:cNvSpPr>
             <a:spLocks noGrp="1"/>
           </p:cNvSpPr>
@@ -26609,7 +27136,7 @@
           </a:prstGeom>
           <a:extLst>
             <a:ext uri="{C572A759-6A51-4108-AA02-DFA0A04FC94B}">
-              <ma14:wrappingTextBoxFlag xmlns="" xmlns:ma14="http://schemas.microsoft.com/office/mac/drawingml/2011/main" val="0"/>
+              <ma14:wrappingTextBoxFlag xmlns:ma14="http://schemas.microsoft.com/office/mac/drawingml/2011/main" val="0"/>
             </a:ext>
           </a:extLst>
         </p:spPr>
@@ -26630,7 +27157,7 @@
           <a:p>
             <a:pPr algn="l"/>
             <a:fld id="{F7021451-1387-4CA6-816F-3879F97B5CBC}" type="slidenum">
-              <a:rPr lang="en-US" b="0"/>
+              <a:rPr b="0" lang="en-US"/>
               <a:t>8</a:t>
             </a:fld>
             <a:endParaRPr lang="en-US"/>
@@ -26705,7 +27232,7 @@
           <a:bodyPr wrap="square" lIns="0" tIns="0" rIns="0" bIns="0" rtlCol="0" anchor="ctr"/>
           <a:lstStyle/>
           <a:p>
-            <a:pPr marL="0" indent="0" algn="l">
+            <a:pPr algn="l" indent="0" marL="0">
               <a:buNone/>
             </a:pPr>
             <a:r>
@@ -26744,7 +27271,7 @@
           <a:bodyPr wrap="square" lIns="0" tIns="0" rIns="0" bIns="0" rtlCol="0" anchor="ctr"/>
           <a:lstStyle/>
           <a:p>
-            <a:pPr marL="0" indent="0">
+            <a:pPr indent="0" marL="0">
               <a:buNone/>
             </a:pPr>
             <a:r>
@@ -26810,11 +27337,11 @@
           <a:bodyPr wrap="square" lIns="0" tIns="0" rIns="0" bIns="0" rtlCol="0" anchor="ctr"/>
           <a:lstStyle/>
           <a:p>
-            <a:pPr marL="0" indent="0" algn="ctr">
-              <a:buNone/>
-            </a:pPr>
-            <a:r>
-              <a:rPr lang="en-US" sz="900" b="1" kern="0" spc="100" dirty="0">
+            <a:pPr algn="ctr" indent="0" marL="0">
+              <a:buNone/>
+            </a:pPr>
+            <a:r>
+              <a:rPr lang="en-US" sz="900" b="1" spc="100" kern="0" dirty="0">
                 <a:solidFill>
                   <a:srgbClr val="5A05F4"/>
                 </a:solidFill>
@@ -26830,14 +27357,14 @@
       </p:sp>
       <p:pic>
         <p:nvPicPr>
-          <p:cNvPr id="7" name="Image 0" descr="preencoded.png"/>
+          <p:cNvPr id="7" name="Image 0" descr="preencoded.png">    </p:cNvPr>
           <p:cNvPicPr>
             <a:picLocks noChangeAspect="1"/>
           </p:cNvPicPr>
           <p:nvPr/>
         </p:nvPicPr>
         <p:blipFill>
-          <a:blip r:embed="rId3"/>
+          <a:blip r:embed="rId1"/>
           <a:stretch>
             <a:fillRect/>
           </a:stretch>
@@ -26900,7 +27427,7 @@
           <a:bodyPr wrap="square" lIns="0" tIns="0" rIns="0" bIns="0" rtlCol="0" anchor="t"/>
           <a:lstStyle/>
           <a:p>
-            <a:pPr marL="0" indent="0">
+            <a:pPr indent="0" marL="0">
               <a:lnSpc>
                 <a:spcPct val="130000"/>
               </a:lnSpc>
@@ -26920,7 +27447,7 @@
             <a:endParaRPr lang="en-US" sz="1150" dirty="0"/>
           </a:p>
           <a:p>
-            <a:pPr marL="0" indent="0">
+            <a:pPr indent="0" marL="0">
               <a:lnSpc>
                 <a:spcPct val="130000"/>
               </a:lnSpc>
@@ -26940,7 +27467,7 @@
             <a:endParaRPr lang="en-US" sz="1150" dirty="0"/>
           </a:p>
           <a:p>
-            <a:pPr marL="0" indent="0">
+            <a:pPr indent="0" marL="0">
               <a:lnSpc>
                 <a:spcPct val="130000"/>
               </a:lnSpc>
@@ -26960,7 +27487,7 @@
             <a:endParaRPr lang="en-US" sz="1150" dirty="0"/>
           </a:p>
           <a:p>
-            <a:pPr marL="0" indent="0">
+            <a:pPr indent="0" marL="0">
               <a:lnSpc>
                 <a:spcPct val="130000"/>
               </a:lnSpc>
@@ -26980,7 +27507,7 @@
             <a:endParaRPr lang="en-US" sz="1150" dirty="0"/>
           </a:p>
           <a:p>
-            <a:pPr marL="0" indent="0">
+            <a:pPr indent="0" marL="0">
               <a:lnSpc>
                 <a:spcPct val="130000"/>
               </a:lnSpc>
@@ -27000,7 +27527,7 @@
             <a:endParaRPr lang="en-US" sz="1150" dirty="0"/>
           </a:p>
           <a:p>
-            <a:pPr marL="0" indent="0">
+            <a:pPr indent="0" marL="0">
               <a:lnSpc>
                 <a:spcPct val="130000"/>
               </a:lnSpc>
@@ -27020,7 +27547,7 @@
             <a:endParaRPr lang="en-US" sz="1150" dirty="0"/>
           </a:p>
           <a:p>
-            <a:pPr marL="0" indent="0">
+            <a:pPr indent="0" marL="0">
               <a:lnSpc>
                 <a:spcPct val="130000"/>
               </a:lnSpc>
@@ -27040,7 +27567,7 @@
             <a:endParaRPr lang="en-US" sz="1150" dirty="0"/>
           </a:p>
           <a:p>
-            <a:pPr marL="0" indent="0">
+            <a:pPr indent="0" marL="0">
               <a:lnSpc>
                 <a:spcPct val="130000"/>
               </a:lnSpc>
@@ -27060,7 +27587,7 @@
             <a:endParaRPr lang="en-US" sz="1150" dirty="0"/>
           </a:p>
           <a:p>
-            <a:pPr marL="0" indent="0">
+            <a:pPr indent="0" marL="0">
               <a:lnSpc>
                 <a:spcPct val="130000"/>
               </a:lnSpc>
@@ -27144,7 +27671,7 @@
           <a:bodyPr wrap="square" lIns="0" tIns="0" rIns="0" bIns="0" rtlCol="0" anchor="ctr"/>
           <a:lstStyle/>
           <a:p>
-            <a:pPr marL="0" indent="0" algn="ctr">
+            <a:pPr algn="ctr" indent="0" marL="0">
               <a:buNone/>
             </a:pPr>
             <a:r>
@@ -27183,7 +27710,7 @@
           <a:bodyPr wrap="square" lIns="0" tIns="0" rIns="0" bIns="0" rtlCol="0" anchor="ctr"/>
           <a:lstStyle/>
           <a:p>
-            <a:pPr marL="0" indent="0">
+            <a:pPr indent="0" marL="0">
               <a:buNone/>
             </a:pPr>
             <a:r>
@@ -27222,7 +27749,7 @@
           <a:bodyPr wrap="square" lIns="0" tIns="0" rIns="0" bIns="0" rtlCol="0" anchor="t"/>
           <a:lstStyle/>
           <a:p>
-            <a:pPr marL="0" indent="0">
+            <a:pPr indent="0" marL="0">
               <a:lnSpc>
                 <a:spcPct val="108000"/>
               </a:lnSpc>
@@ -27306,7 +27833,7 @@
           <a:bodyPr wrap="square" lIns="0" tIns="0" rIns="0" bIns="0" rtlCol="0" anchor="ctr"/>
           <a:lstStyle/>
           <a:p>
-            <a:pPr marL="0" indent="0" algn="ctr">
+            <a:pPr algn="ctr" indent="0" marL="0">
               <a:buNone/>
             </a:pPr>
             <a:r>
@@ -27345,7 +27872,7 @@
           <a:bodyPr wrap="square" lIns="0" tIns="0" rIns="0" bIns="0" rtlCol="0" anchor="ctr"/>
           <a:lstStyle/>
           <a:p>
-            <a:pPr marL="0" indent="0">
+            <a:pPr indent="0" marL="0">
               <a:buNone/>
             </a:pPr>
             <a:r>
@@ -27384,7 +27911,7 @@
           <a:bodyPr wrap="square" lIns="0" tIns="0" rIns="0" bIns="0" rtlCol="0" anchor="t"/>
           <a:lstStyle/>
           <a:p>
-            <a:pPr marL="0" indent="0">
+            <a:pPr indent="0" marL="0">
               <a:lnSpc>
                 <a:spcPct val="108000"/>
               </a:lnSpc>
@@ -27468,7 +27995,7 @@
           <a:bodyPr wrap="square" lIns="0" tIns="0" rIns="0" bIns="0" rtlCol="0" anchor="ctr"/>
           <a:lstStyle/>
           <a:p>
-            <a:pPr marL="0" indent="0" algn="ctr">
+            <a:pPr algn="ctr" indent="0" marL="0">
               <a:buNone/>
             </a:pPr>
             <a:r>
@@ -27507,7 +28034,7 @@
           <a:bodyPr wrap="square" lIns="0" tIns="0" rIns="0" bIns="0" rtlCol="0" anchor="ctr"/>
           <a:lstStyle/>
           <a:p>
-            <a:pPr marL="0" indent="0">
+            <a:pPr indent="0" marL="0">
               <a:buNone/>
             </a:pPr>
             <a:r>
@@ -27546,7 +28073,7 @@
           <a:bodyPr wrap="square" lIns="0" tIns="0" rIns="0" bIns="0" rtlCol="0" anchor="t"/>
           <a:lstStyle/>
           <a:p>
-            <a:pPr marL="0" indent="0">
+            <a:pPr indent="0" marL="0">
               <a:lnSpc>
                 <a:spcPct val="108000"/>
               </a:lnSpc>
@@ -27587,7 +28114,7 @@
           </a:prstGeom>
           <a:extLst>
             <a:ext uri="{C572A759-6A51-4108-AA02-DFA0A04FC94B}">
-              <ma14:wrappingTextBoxFlag xmlns="" xmlns:ma14="http://schemas.microsoft.com/office/mac/drawingml/2011/main" val="0"/>
+              <ma14:wrappingTextBoxFlag xmlns:ma14="http://schemas.microsoft.com/office/mac/drawingml/2011/main" val="0"/>
             </a:ext>
           </a:extLst>
         </p:spPr>
@@ -27608,7 +28135,7 @@
           <a:p>
             <a:pPr algn="l"/>
             <a:fld id="{F7021451-1387-4CA6-816F-3879F97B5CBC}" type="slidenum">
-              <a:rPr lang="en-US" b="0"/>
+              <a:rPr b="0" lang="en-US"/>
               <a:t>9</a:t>
             </a:fld>
             <a:endParaRPr lang="en-US"/>
@@ -27916,299 +28443,4 @@
     </a:ext>
   </a:extLst>
 </a:theme>
-</file>
-
-<file path=ppt/theme/theme2.xml><?xml version="1.0" encoding="utf-8"?>
-<a:theme xmlns:a="http://schemas.openxmlformats.org/drawingml/2006/main" name="Office Theme">
-  <a:themeElements>
-    <a:clrScheme name="Office">
-      <a:dk1>
-        <a:sysClr val="windowText" lastClr="000000"/>
-      </a:dk1>
-      <a:lt1>
-        <a:sysClr val="window" lastClr="FFFFFF"/>
-      </a:lt1>
-      <a:dk2>
-        <a:srgbClr val="44546A"/>
-      </a:dk2>
-      <a:lt2>
-        <a:srgbClr val="E7E6E6"/>
-      </a:lt2>
-      <a:accent1>
-        <a:srgbClr val="4472C4"/>
-      </a:accent1>
-      <a:accent2>
-        <a:srgbClr val="ED7D31"/>
-      </a:accent2>
-      <a:accent3>
-        <a:srgbClr val="A5A5A5"/>
-      </a:accent3>
-      <a:accent4>
-        <a:srgbClr val="FFC000"/>
-      </a:accent4>
-      <a:accent5>
-        <a:srgbClr val="5B9BD5"/>
-      </a:accent5>
-      <a:accent6>
-        <a:srgbClr val="70AD47"/>
-      </a:accent6>
-      <a:hlink>
-        <a:srgbClr val="0563C1"/>
-      </a:hlink>
-      <a:folHlink>
-        <a:srgbClr val="954F72"/>
-      </a:folHlink>
-    </a:clrScheme>
-    <a:fontScheme name="Office">
-      <a:majorFont>
-        <a:latin typeface="Calibri Light" panose="020F0302020204030204"/>
-        <a:ea typeface=""/>
-        <a:cs typeface=""/>
-        <a:font script="Jpan" typeface="游ゴシック Light"/>
-        <a:font script="Hang" typeface="맑은 고딕"/>
-        <a:font script="Hans" typeface="等线 Light"/>
-        <a:font script="Hant" typeface="新細明體"/>
-        <a:font script="Arab" typeface="Times New Roman"/>
-        <a:font script="Hebr" typeface="Times New Roman"/>
-        <a:font script="Thai" typeface="Angsana New"/>
-        <a:font script="Ethi" typeface="Nyala"/>
-        <a:font script="Beng" typeface="Vrinda"/>
-        <a:font script="Gujr" typeface="Shruti"/>
-        <a:font script="Khmr" typeface="MoolBoran"/>
-        <a:font script="Knda" typeface="Tunga"/>
-        <a:font script="Guru" typeface="Raavi"/>
-        <a:font script="Cans" typeface="Euphemia"/>
-        <a:font script="Cher" typeface="Plantagenet Cherokee"/>
-        <a:font script="Yiii" typeface="Microsoft Yi Baiti"/>
-        <a:font script="Tibt" typeface="Microsoft Himalaya"/>
-        <a:font script="Thaa" typeface="MV Boli"/>
-        <a:font script="Deva" typeface="Mangal"/>
-        <a:font script="Telu" typeface="Gautami"/>
-        <a:font script="Taml" typeface="Latha"/>
-        <a:font script="Syrc" typeface="Estrangelo Edessa"/>
-        <a:font script="Orya" typeface="Kalinga"/>
-        <a:font script="Mlym" typeface="Kartika"/>
-        <a:font script="Laoo" typeface="DokChampa"/>
-        <a:font script="Sinh" typeface="Iskoola Pota"/>
-        <a:font script="Mong" typeface="Mongolian Baiti"/>
-        <a:font script="Viet" typeface="Times New Roman"/>
-        <a:font script="Uigh" typeface="Microsoft Uighur"/>
-        <a:font script="Geor" typeface="Sylfaen"/>
-        <a:font script="Armn" typeface="Arial"/>
-        <a:font script="Bugi" typeface="Leelawadee UI"/>
-        <a:font script="Bopo" typeface="Microsoft JhengHei"/>
-        <a:font script="Java" typeface="Javanese Text"/>
-        <a:font script="Lisu" typeface="Segoe UI"/>
-        <a:font script="Mymr" typeface="Myanmar Text"/>
-        <a:font script="Nkoo" typeface="Ebrima"/>
-        <a:font script="Olck" typeface="Nirmala UI"/>
-        <a:font script="Osma" typeface="Ebrima"/>
-        <a:font script="Phag" typeface="Phagspa"/>
-        <a:font script="Syrn" typeface="Estrangelo Edessa"/>
-        <a:font script="Syrj" typeface="Estrangelo Edessa"/>
-        <a:font script="Syre" typeface="Estrangelo Edessa"/>
-        <a:font script="Sora" typeface="Nirmala UI"/>
-        <a:font script="Tale" typeface="Microsoft Tai Le"/>
-        <a:font script="Talu" typeface="Microsoft New Tai Lue"/>
-        <a:font script="Tfng" typeface="Ebrima"/>
-      </a:majorFont>
-      <a:minorFont>
-        <a:latin typeface="Calibri" panose="020F0502020204030204"/>
-        <a:ea typeface=""/>
-        <a:cs typeface=""/>
-        <a:font script="Jpan" typeface="游ゴシック"/>
-        <a:font script="Hang" typeface="맑은 고딕"/>
-        <a:font script="Hans" typeface="等线"/>
-        <a:font script="Hant" typeface="新細明體"/>
-        <a:font script="Arab" typeface="Arial"/>
-        <a:font script="Hebr" typeface="Arial"/>
-        <a:font script="Thai" typeface="Cordia New"/>
-        <a:font script="Ethi" typeface="Nyala"/>
-        <a:font script="Beng" typeface="Vrinda"/>
-        <a:font script="Gujr" typeface="Shruti"/>
-        <a:font script="Khmr" typeface="DaunPenh"/>
-        <a:font script="Knda" typeface="Tunga"/>
-        <a:font script="Guru" typeface="Raavi"/>
-        <a:font script="Cans" typeface="Euphemia"/>
-        <a:font script="Cher" typeface="Plantagenet Cherokee"/>
-        <a:font script="Yiii" typeface="Microsoft Yi Baiti"/>
-        <a:font script="Tibt" typeface="Microsoft Himalaya"/>
-        <a:font script="Thaa" typeface="MV Boli"/>
-        <a:font script="Deva" typeface="Mangal"/>
-        <a:font script="Telu" typeface="Gautami"/>
-        <a:font script="Taml" typeface="Latha"/>
-        <a:font script="Syrc" typeface="Estrangelo Edessa"/>
-        <a:font script="Orya" typeface="Kalinga"/>
-        <a:font script="Mlym" typeface="Kartika"/>
-        <a:font script="Laoo" typeface="DokChampa"/>
-        <a:font script="Sinh" typeface="Iskoola Pota"/>
-        <a:font script="Mong" typeface="Mongolian Baiti"/>
-        <a:font script="Viet" typeface="Arial"/>
-        <a:font script="Uigh" typeface="Microsoft Uighur"/>
-        <a:font script="Geor" typeface="Sylfaen"/>
-        <a:font script="Armn" typeface="Arial"/>
-        <a:font script="Bugi" typeface="Leelawadee UI"/>
-        <a:font script="Bopo" typeface="Microsoft JhengHei"/>
-        <a:font script="Java" typeface="Javanese Text"/>
-        <a:font script="Lisu" typeface="Segoe UI"/>
-        <a:font script="Mymr" typeface="Myanmar Text"/>
-        <a:font script="Nkoo" typeface="Ebrima"/>
-        <a:font script="Olck" typeface="Nirmala UI"/>
-        <a:font script="Osma" typeface="Ebrima"/>
-        <a:font script="Phag" typeface="Phagspa"/>
-        <a:font script="Syrn" typeface="Estrangelo Edessa"/>
-        <a:font script="Syrj" typeface="Estrangelo Edessa"/>
-        <a:font script="Syre" typeface="Estrangelo Edessa"/>
-        <a:font script="Sora" typeface="Nirmala UI"/>
-        <a:font script="Tale" typeface="Microsoft Tai Le"/>
-        <a:font script="Talu" typeface="Microsoft New Tai Lue"/>
-        <a:font script="Tfng" typeface="Ebrima"/>
-      </a:minorFont>
-    </a:fontScheme>
-    <a:fmtScheme name="Office">
-      <a:fillStyleLst>
-        <a:solidFill>
-          <a:schemeClr val="phClr"/>
-        </a:solidFill>
-        <a:gradFill rotWithShape="1">
-          <a:gsLst>
-            <a:gs pos="0">
-              <a:schemeClr val="phClr">
-                <a:lumMod val="110000"/>
-                <a:satMod val="105000"/>
-                <a:tint val="67000"/>
-              </a:schemeClr>
-            </a:gs>
-            <a:gs pos="50000">
-              <a:schemeClr val="phClr">
-                <a:lumMod val="105000"/>
-                <a:satMod val="103000"/>
-                <a:tint val="73000"/>
-              </a:schemeClr>
-            </a:gs>
-            <a:gs pos="100000">
-              <a:schemeClr val="phClr">
-                <a:lumMod val="105000"/>
-                <a:satMod val="109000"/>
-                <a:tint val="81000"/>
-              </a:schemeClr>
-            </a:gs>
-          </a:gsLst>
-          <a:lin ang="5400000" scaled="0"/>
-        </a:gradFill>
-        <a:gradFill rotWithShape="1">
-          <a:gsLst>
-            <a:gs pos="0">
-              <a:schemeClr val="phClr">
-                <a:satMod val="103000"/>
-                <a:lumMod val="102000"/>
-                <a:tint val="94000"/>
-              </a:schemeClr>
-            </a:gs>
-            <a:gs pos="50000">
-              <a:schemeClr val="phClr">
-                <a:satMod val="110000"/>
-                <a:lumMod val="100000"/>
-                <a:shade val="100000"/>
-              </a:schemeClr>
-            </a:gs>
-            <a:gs pos="100000">
-              <a:schemeClr val="phClr">
-                <a:lumMod val="99000"/>
-                <a:satMod val="120000"/>
-                <a:shade val="78000"/>
-              </a:schemeClr>
-            </a:gs>
-          </a:gsLst>
-          <a:lin ang="5400000" scaled="0"/>
-        </a:gradFill>
-      </a:fillStyleLst>
-      <a:lnStyleLst>
-        <a:ln w="6350" cap="flat" cmpd="sng" algn="ctr">
-          <a:solidFill>
-            <a:schemeClr val="phClr"/>
-          </a:solidFill>
-          <a:prstDash val="solid"/>
-          <a:miter lim="800000"/>
-        </a:ln>
-        <a:ln w="12700" cap="flat" cmpd="sng" algn="ctr">
-          <a:solidFill>
-            <a:schemeClr val="phClr"/>
-          </a:solidFill>
-          <a:prstDash val="solid"/>
-          <a:miter lim="800000"/>
-        </a:ln>
-        <a:ln w="19050" cap="flat" cmpd="sng" algn="ctr">
-          <a:solidFill>
-            <a:schemeClr val="phClr"/>
-          </a:solidFill>
-          <a:prstDash val="solid"/>
-          <a:miter lim="800000"/>
-        </a:ln>
-      </a:lnStyleLst>
-      <a:effectStyleLst>
-        <a:effectStyle>
-          <a:effectLst/>
-        </a:effectStyle>
-        <a:effectStyle>
-          <a:effectLst/>
-        </a:effectStyle>
-        <a:effectStyle>
-          <a:effectLst>
-            <a:outerShdw blurRad="57150" dist="19050" dir="5400000" algn="ctr" rotWithShape="0">
-              <a:srgbClr val="000000">
-                <a:alpha val="63000"/>
-              </a:srgbClr>
-            </a:outerShdw>
-          </a:effectLst>
-        </a:effectStyle>
-      </a:effectStyleLst>
-      <a:bgFillStyleLst>
-        <a:solidFill>
-          <a:schemeClr val="phClr"/>
-        </a:solidFill>
-        <a:solidFill>
-          <a:schemeClr val="phClr">
-            <a:tint val="95000"/>
-            <a:satMod val="170000"/>
-          </a:schemeClr>
-        </a:solidFill>
-        <a:gradFill rotWithShape="1">
-          <a:gsLst>
-            <a:gs pos="0">
-              <a:schemeClr val="phClr">
-                <a:tint val="93000"/>
-                <a:satMod val="150000"/>
-                <a:shade val="98000"/>
-                <a:lumMod val="102000"/>
-              </a:schemeClr>
-            </a:gs>
-            <a:gs pos="50000">
-              <a:schemeClr val="phClr">
-                <a:tint val="98000"/>
-                <a:satMod val="130000"/>
-                <a:shade val="90000"/>
-                <a:lumMod val="103000"/>
-              </a:schemeClr>
-            </a:gs>
-            <a:gs pos="100000">
-              <a:schemeClr val="phClr">
-                <a:shade val="63000"/>
-                <a:satMod val="120000"/>
-              </a:schemeClr>
-            </a:gs>
-          </a:gsLst>
-          <a:lin ang="5400000" scaled="0"/>
-        </a:gradFill>
-      </a:bgFillStyleLst>
-    </a:fmtScheme>
-  </a:themeElements>
-  <a:objectDefaults/>
-  <a:extraClrSchemeLst/>
-  <a:extLst>
-    <a:ext uri="{05A4C25C-085E-4340-85A3-A5531E510DB2}">
-      <thm15:themeFamily xmlns:thm15="http://schemas.microsoft.com/office/thememl/2012/main" name="Office Theme" id="{62F939B6-93AF-4DB8-9C6B-D6C7DFDC589F}" vid="{4A3C46E8-61CC-4603-A589-7422A47A8E4A}"/>
-    </a:ext>
-  </a:extLst>
-</a:theme>
 </file>
--- a/docs/decks/L07.pptx
+++ b/docs/decks/L07.pptx
@@ -3699,7 +3699,7 @@
                 <a:ea typeface="Courier New" pitchFamily="34" charset="-122"/>
                 <a:cs typeface="Courier New" pitchFamily="34" charset="-120"/>
               </a:rPr>
-              <a:t>ТИЖДЕНЬ 4 · УРОК 7 З 12</a:t>
+              <a:t>ТИЖДЕНЬ 4 · ТЕМА 7 З 12</a:t>
             </a:r>
             <a:endParaRPr lang="en-US" sz="1200" dirty="0"/>
           </a:p>
@@ -6763,7 +6763,7 @@
                 <a:ea typeface="Unbounded" pitchFamily="34" charset="-122"/>
                 <a:cs typeface="Unbounded" pitchFamily="34" charset="-120"/>
               </a:rPr>
-              <a:t>Retry storm: ваша стійкість добиває провайдера</a:t>
+              <a:t>Retry storm: Ваша стійкість добиває провайдера</a:t>
             </a:r>
             <a:endParaRPr lang="en-US" sz="2400" dirty="0"/>
           </a:p>
@@ -7879,7 +7879,7 @@
                 <a:ea typeface="Montserrat" pitchFamily="34" charset="-122"/>
                 <a:cs typeface="Montserrat" pitchFamily="34" charset="-120"/>
               </a:rPr>
-              <a:t>Ретрай без паузи «бо швидко треба»: на 429 три негайні спроби потроюють трафік саме тоді, коли вас просили пригальмувати. 429 уже сказав, що робити: почекати.</a:t>
+              <a:t>Ретрай без паузи «бо швидко треба»: на 429 три негайні спроби потроюють трафік саме тоді, коли Вас просили пригальмувати. 429 уже сказав, що робити: почекати.</a:t>
             </a:r>
             <a:endParaRPr lang="en-US" sz="1300" dirty="0"/>
           </a:p>
@@ -8673,7 +8673,7 @@
                           <a:ea typeface="Montserrat" pitchFamily="34" charset="-122"/>
                           <a:cs typeface="Montserrat" pitchFamily="34" charset="-120"/>
                         </a:rPr>
-                        <a:t>відповідь іншої моделі (урок 3)</a:t>
+                        <a:t>відповідь іншої моделі (Тема 3)</a:t>
                       </a:r>
                       <a:endParaRPr lang="en-US" sz="1150" dirty="0">
                         <a:latin typeface="Montserrat" charset="0"/>
@@ -9085,7 +9085,7 @@
                           <a:ea typeface="Montserrat" pitchFamily="34" charset="-122"/>
                           <a:cs typeface="Montserrat" pitchFamily="34" charset="-120"/>
                         </a:rPr>
-                        <a:t>раніше згенеровану відповідь на схоже питання (урок 5)</a:t>
+                        <a:t>раніше згенеровану відповідь на схоже питання (Тема 5)</a:t>
                       </a:r>
                       <a:endParaRPr lang="en-US" sz="1150" dirty="0">
                         <a:latin typeface="Montserrat" charset="0"/>
@@ -10529,7 +10529,7 @@
                 <a:ea typeface="Courier New" pitchFamily="34" charset="-122"/>
                 <a:cs typeface="Courier New" pitchFamily="34" charset="-120"/>
               </a:rPr>
-              <a:t>   # тепер ви знаєте, навіщо</a:t>
+              <a:t>   # тепер Ви знаєте, навіщо</a:t>
             </a:r>
             <a:endParaRPr lang="en-US" sz="1300" dirty="0"/>
           </a:p>
@@ -10706,7 +10706,7 @@
                 <a:ea typeface="Montserrat" pitchFamily="34" charset="-122"/>
                 <a:cs typeface="Montserrat" pitchFamily="34" charset="-120"/>
               </a:rPr>
-              <a:t>Reliability-логіка живе в одному місці — у вашому сервісі: видима, залогована, керована.</a:t>
+              <a:t>Reliability-логіка живе в одному місці — у Вашому сервісі: видима, залогована, керована.</a:t>
             </a:r>
             <a:endParaRPr lang="en-US" sz="1300" dirty="0"/>
           </a:p>
@@ -11495,7 +11495,7 @@
                 <a:ea typeface="Montserrat" pitchFamily="34" charset="-122"/>
                 <a:cs typeface="Montserrat" pitchFamily="34" charset="-120"/>
               </a:rPr>
-              <a:t>Половина сенсу breaker'а спрямована назовні: ви перестаєте добивати провайдера, який і так лежить.</a:t>
+              <a:t>Половина сенсу breaker'а спрямована назовні: Ви перестаєте добивати провайдера, який і так лежить.</a:t>
             </a:r>
             <a:endParaRPr lang="en-US" sz="1300" dirty="0"/>
           </a:p>
@@ -13853,7 +13853,7 @@
                 <a:ea typeface="Montserrat" pitchFamily="34" charset="-122"/>
                 <a:cs typeface="Montserrat" pitchFamily="34" charset="-120"/>
               </a:rPr>
-              <a:t>429 приходить не тому, що «багато запитів», а тому, що ви вибрали токен-квоту.</a:t>
+              <a:t>429 приходить не тому, що «багато запитів», а тому, що Ви вибрали токен-квоту.</a:t>
             </a:r>
             <a:endParaRPr lang="en-US" sz="1300" dirty="0"/>
           </a:p>
@@ -14095,7 +14095,7 @@
                 <a:ea typeface="Unbounded" pitchFamily="34" charset="-122"/>
                 <a:cs typeface="Unbounded" pitchFamily="34" charset="-120"/>
               </a:rPr>
-              <a:t>Що ви зможете після уроку</a:t>
+              <a:t>Що Ви зможете після теми</a:t>
             </a:r>
             <a:endParaRPr lang="en-US" sz="2400" dirty="0"/>
           </a:p>
@@ -15374,7 +15374,7 @@
                 <a:ea typeface="Unbounded" pitchFamily="34" charset="-122"/>
                 <a:cs typeface="Unbounded" pitchFamily="34" charset="-120"/>
               </a:rPr>
-              <a:t>Зараз ви побачите — і навіщо</a:t>
+              <a:t>Зараз Ви побачите — і навіщо</a:t>
             </a:r>
             <a:endParaRPr lang="en-US" sz="2400" dirty="0"/>
           </a:p>
@@ -18964,7 +18964,7 @@
                 <a:ea typeface="Montserrat" pitchFamily="34" charset="-122"/>
                 <a:cs typeface="Montserrat" pitchFamily="34" charset="-120"/>
               </a:rPr>
-              <a:t>ваш код стає другою половиною інциденту</a:t>
+              <a:t>Ваш код стає другою половиною інциденту</a:t>
             </a:r>
             <a:endParaRPr lang="en-US" sz="1300" dirty="0"/>
           </a:p>
@@ -20093,7 +20093,7 @@
                 <a:ea typeface="Montserrat" pitchFamily="34" charset="-122"/>
                 <a:cs typeface="Montserrat" pitchFamily="34" charset="-120"/>
               </a:rPr>
-              <a:t>ДЗ тижня 4 — після наступного уроку</a:t>
+              <a:t>ДЗ тижня 4 — після наступної теми</a:t>
             </a:r>
             <a:endParaRPr lang="en-US" sz="1500" dirty="0"/>
           </a:p>
@@ -20132,7 +20132,7 @@
                 <a:ea typeface="Montserrat" pitchFamily="34" charset="-122"/>
                 <a:cs typeface="Montserrat" pitchFamily="34" charset="-120"/>
               </a:rPr>
-              <a:t>Тиждень об'єднує надійність і безпеку: сьогоднішній fallback із деградацією вже у вас в руках, після наступного уроку додасться черга підтверджень для незворотних дій — і тиждень здається одним PR.</a:t>
+              <a:t>Тиждень об'єднує надійність і безпеку: сьогоднішній fallback із деградацією вже у Вас в руках, після наступної теми додасться черга підтверджень для незворотних дій — і тиждень здається одним PR.</a:t>
             </a:r>
             <a:endParaRPr lang="en-US" sz="1250" dirty="0"/>
           </a:p>
@@ -20283,7 +20283,7 @@
                 <a:ea typeface="Courier New" pitchFamily="34" charset="-122"/>
                 <a:cs typeface="Courier New" pitchFamily="34" charset="-120"/>
               </a:rPr>
-              <a:t>ПІДСУМОК УРОКУ 7</a:t>
+              <a:t>ПІДСУМОК ТЕМИ 7</a:t>
             </a:r>
             <a:endParaRPr lang="en-US" sz="1100" dirty="0"/>
           </a:p>
@@ -20659,7 +20659,7 @@
                 <a:ea typeface="Montserrat" pitchFamily="34" charset="-122"/>
                 <a:cs typeface="Montserrat" pitchFamily="34" charset="-120"/>
               </a:rPr>
-              <a:t>Наступний крок → Урок 8 · Safety, guardrails і human-in-the-loop</a:t>
+              <a:t>Наступний крок → Тема 8 · Safety, guardrails і human-in-the-loop</a:t>
             </a:r>
             <a:endParaRPr lang="en-US" sz="1500" dirty="0"/>
           </a:p>
@@ -20701,7 +20701,7 @@
                 <a:ea typeface="Montserrat" pitchFamily="34" charset="-122"/>
                 <a:cs typeface="Montserrat" pitchFamily="34" charset="-120"/>
               </a:rPr>
-              <a:t>Система переживає збій провайдера. Наступного уроку — про збої іншого роду: коли шкоду завдає не інфраструктура, а зміст. Injection, витік даних і незворотні дії, які мусить підтвердити людина — та сама «дірка», яку ми лишили відкритою на уроці 6.</a:t>
+              <a:t>Система переживає збій провайдера. У наступній темі — про збої іншого роду: коли шкоду завдає не інфраструктура, а зміст. Injection, витік даних і незворотні дії, які мусить підтвердити людина — та сама «дірка», яку ми лишили відкритою на уроці 6.</a:t>
             </a:r>
             <a:endParaRPr lang="en-US" sz="1250" dirty="0"/>
           </a:p>
@@ -22545,7 +22545,7 @@
                 <a:ea typeface="Montserrat" pitchFamily="34" charset="-122"/>
                 <a:cs typeface="Montserrat" pitchFamily="34" charset="-120"/>
               </a:rPr>
-              <a:t>Шість слів сьогоднішнього уроку</a:t>
+              <a:t>Шість слів сьогоднішньої теми</a:t>
             </a:r>
             <a:endParaRPr lang="en-US" sz="1300" dirty="0"/>
           </a:p>
@@ -27110,7 +27110,7 @@
                 <a:ea typeface="Montserrat" pitchFamily="34" charset="-122"/>
                 <a:cs typeface="Montserrat" pitchFamily="34" charset="-120"/>
               </a:rPr>
-              <a:t>Retry без backoff і без бюджету: провайдер повернув 429 «пригальмуйте» — а ви у відповідь потроїли трафік. Ваш власний код став другою половиною інциденту.</a:t>
+              <a:t>Retry без backoff і без бюджету: провайдер повернув 429 «пригальмуйте» — а Ви у відповідь потроїли трафік. Ваш власний код став другою половиною інциденту.</a:t>
             </a:r>
             <a:endParaRPr lang="en-US" sz="1300" dirty="0"/>
           </a:p>

--- a/docs/decks/L07.pptx
+++ b/docs/decks/L07.pptx
@@ -20701,7 +20701,7 @@
                 <a:ea typeface="Montserrat" pitchFamily="34" charset="-122"/>
                 <a:cs typeface="Montserrat" pitchFamily="34" charset="-120"/>
               </a:rPr>
-              <a:t>Система переживає збій провайдера. У наступній темі — про збої іншого роду: коли шкоду завдає не інфраструктура, а зміст. Injection, витік даних і незворотні дії, які мусить підтвердити людина — та сама «дірка», яку ми лишили відкритою на уроці 6.</a:t>
+              <a:t>Система переживає збій провайдера. У наступній темі — про збої іншого роду: коли шкоду завдає не інфраструктура, а зміст. Injection, витік даних і незворотні дії, які мусить підтвердити людина — та сама «дірка», яку ми лишили відкритою у Темі 6.</a:t>
             </a:r>
             <a:endParaRPr lang="en-US" sz="1250" dirty="0"/>
           </a:p>

--- a/docs/decks/L07.pptx
+++ b/docs/decks/L07.pptx
@@ -13475,11 +13475,11 @@
         <p:spPr>
           <a:xfrm>
             <a:off x="566928" y="1965960"/>
-            <a:ext cx="5349240" cy="1783080"/>
+            <a:ext cx="5349240" cy="1463040"/>
           </a:xfrm>
           <a:prstGeom prst="roundRect">
             <a:avLst>
-              <a:gd name="adj" fmla="val 6154"/>
+              <a:gd name="adj" fmla="val 7500"/>
             </a:avLst>
           </a:prstGeom>
           <a:solidFill>
@@ -13595,7 +13595,7 @@
         <p:spPr>
           <a:xfrm>
             <a:off x="768096" y="2651760"/>
-            <a:ext cx="4946904" cy="941832"/>
+            <a:ext cx="4946904" cy="621792"/>
           </a:xfrm>
           <a:prstGeom prst="rect">
             <a:avLst/>
@@ -13637,11 +13637,11 @@
         <p:spPr>
           <a:xfrm>
             <a:off x="6281928" y="1965960"/>
-            <a:ext cx="5349240" cy="1783080"/>
+            <a:ext cx="5349240" cy="1463040"/>
           </a:xfrm>
           <a:prstGeom prst="roundRect">
             <a:avLst>
-              <a:gd name="adj" fmla="val 6154"/>
+              <a:gd name="adj" fmla="val 7500"/>
             </a:avLst>
           </a:prstGeom>
           <a:solidFill>
@@ -13757,7 +13757,7 @@
         <p:spPr>
           <a:xfrm>
             <a:off x="6483096" y="2651760"/>
-            <a:ext cx="4946904" cy="941832"/>
+            <a:ext cx="4946904" cy="621792"/>
           </a:xfrm>
           <a:prstGeom prst="rect">
             <a:avLst/>
@@ -13792,18 +13792,318 @@
       </p:sp>
       <p:sp>
         <p:nvSpPr>
-          <p:cNvPr id="19" name="Shape 16"/>
-          <p:cNvSpPr/>
-          <p:nvPr/>
-        </p:nvSpPr>
-        <p:spPr>
-          <a:xfrm>
-            <a:off x="566928" y="4023360"/>
-            <a:ext cx="11064240" cy="960120"/>
+          <p:cNvPr id="19" name="Text 16"/>
+          <p:cNvSpPr/>
+          <p:nvPr/>
+        </p:nvSpPr>
+        <p:spPr>
+          <a:xfrm>
+            <a:off x="566928" y="3611880"/>
+            <a:ext cx="2944368" cy="310896"/>
+          </a:xfrm>
+          <a:prstGeom prst="rect">
+            <a:avLst/>
+          </a:prstGeom>
+          <a:noFill/>
+          <a:ln/>
+        </p:spPr>
+        <p:txBody>
+          <a:bodyPr wrap="square" lIns="0" tIns="0" rIns="0" bIns="0" rtlCol="0" anchor="ctr"/>
+          <a:lstStyle/>
+          <a:p>
+            <a:pPr algn="l" indent="0" marL="0">
+              <a:buNone/>
+            </a:pPr>
+            <a:r>
+              <a:rPr lang="en-US" sz="1250" dirty="0">
+                <a:solidFill>
+                  <a:srgbClr val="000000"/>
+                </a:solidFill>
+                <a:latin typeface="Montserrat" pitchFamily="34" charset="0"/>
+                <a:ea typeface="Montserrat" pitchFamily="34" charset="-122"/>
+                <a:cs typeface="Montserrat" pitchFamily="34" charset="-120"/>
+              </a:rPr>
+              <a:t>швидкий режим</a:t>
+            </a:r>
+            <a:endParaRPr lang="en-US" sz="1250" dirty="0"/>
+          </a:p>
+        </p:txBody>
+      </p:sp>
+      <p:sp>
+        <p:nvSpPr>
+          <p:cNvPr id="20" name="Shape 17"/>
+          <p:cNvSpPr/>
+          <p:nvPr/>
+        </p:nvSpPr>
+        <p:spPr>
+          <a:xfrm>
+            <a:off x="3675888" y="3667841"/>
+            <a:ext cx="502920" cy="198973"/>
           </a:xfrm>
           <a:prstGeom prst="roundRect">
             <a:avLst>
-              <a:gd name="adj" fmla="val 11429"/>
+              <a:gd name="adj" fmla="val 22978"/>
+            </a:avLst>
+          </a:prstGeom>
+          <a:solidFill>
+            <a:srgbClr val="106B41"/>
+          </a:solidFill>
+          <a:ln/>
+        </p:spPr>
+      </p:sp>
+      <p:sp>
+        <p:nvSpPr>
+          <p:cNvPr id="21" name="Text 18"/>
+          <p:cNvSpPr/>
+          <p:nvPr/>
+        </p:nvSpPr>
+        <p:spPr>
+          <a:xfrm>
+            <a:off x="7927848" y="3611880"/>
+            <a:ext cx="3474720" cy="310896"/>
+          </a:xfrm>
+          <a:prstGeom prst="rect">
+            <a:avLst/>
+          </a:prstGeom>
+          <a:noFill/>
+          <a:ln/>
+        </p:spPr>
+        <p:txBody>
+          <a:bodyPr wrap="square" lIns="0" tIns="0" rIns="0" bIns="0" rtlCol="0" anchor="ctr"/>
+          <a:lstStyle/>
+          <a:p>
+            <a:pPr indent="0" marL="0">
+              <a:buNone/>
+            </a:pPr>
+            <a:r>
+              <a:rPr lang="en-US" sz="1150" b="1" dirty="0">
+                <a:solidFill>
+                  <a:srgbClr val="106B41"/>
+                </a:solidFill>
+                <a:latin typeface="Montserrat" pitchFamily="34" charset="0"/>
+                <a:ea typeface="Montserrat" pitchFamily="34" charset="-122"/>
+                <a:cs typeface="Montserrat" pitchFamily="34" charset="-120"/>
+              </a:rPr>
+              <a:t>таймаут розрахований під нього</a:t>
+            </a:r>
+            <a:endParaRPr lang="en-US" sz="1150" dirty="0"/>
+          </a:p>
+        </p:txBody>
+      </p:sp>
+      <p:sp>
+        <p:nvSpPr>
+          <p:cNvPr id="22" name="Text 19"/>
+          <p:cNvSpPr/>
+          <p:nvPr/>
+        </p:nvSpPr>
+        <p:spPr>
+          <a:xfrm>
+            <a:off x="566928" y="4014216"/>
+            <a:ext cx="2944368" cy="310896"/>
+          </a:xfrm>
+          <a:prstGeom prst="rect">
+            <a:avLst/>
+          </a:prstGeom>
+          <a:noFill/>
+          <a:ln/>
+        </p:spPr>
+        <p:txBody>
+          <a:bodyPr wrap="square" lIns="0" tIns="0" rIns="0" bIns="0" rtlCol="0" anchor="ctr"/>
+          <a:lstStyle/>
+          <a:p>
+            <a:pPr algn="l" indent="0" marL="0">
+              <a:buNone/>
+            </a:pPr>
+            <a:r>
+              <a:rPr lang="en-US" sz="1250" dirty="0">
+                <a:solidFill>
+                  <a:srgbClr val="000000"/>
+                </a:solidFill>
+                <a:latin typeface="Montserrat" pitchFamily="34" charset="0"/>
+                <a:ea typeface="Montserrat" pitchFamily="34" charset="-122"/>
+                <a:cs typeface="Montserrat" pitchFamily="34" charset="-120"/>
+              </a:rPr>
+              <a:t>режим мислення</a:t>
+            </a:r>
+            <a:endParaRPr lang="en-US" sz="1250" dirty="0"/>
+          </a:p>
+        </p:txBody>
+      </p:sp>
+      <p:sp>
+        <p:nvSpPr>
+          <p:cNvPr id="23" name="Shape 20"/>
+          <p:cNvSpPr/>
+          <p:nvPr/>
+        </p:nvSpPr>
+        <p:spPr>
+          <a:xfrm>
+            <a:off x="3675888" y="4070177"/>
+            <a:ext cx="4023360" cy="198973"/>
+          </a:xfrm>
+          <a:prstGeom prst="roundRect">
+            <a:avLst>
+              <a:gd name="adj" fmla="val 22978"/>
+            </a:avLst>
+          </a:prstGeom>
+          <a:solidFill>
+            <a:srgbClr val="B3261E"/>
+          </a:solidFill>
+          <a:ln/>
+        </p:spPr>
+      </p:sp>
+      <p:sp>
+        <p:nvSpPr>
+          <p:cNvPr id="24" name="Text 21"/>
+          <p:cNvSpPr/>
+          <p:nvPr/>
+        </p:nvSpPr>
+        <p:spPr>
+          <a:xfrm>
+            <a:off x="7927848" y="4014216"/>
+            <a:ext cx="3474720" cy="310896"/>
+          </a:xfrm>
+          <a:prstGeom prst="rect">
+            <a:avLst/>
+          </a:prstGeom>
+          <a:noFill/>
+          <a:ln/>
+        </p:spPr>
+        <p:txBody>
+          <a:bodyPr wrap="square" lIns="0" tIns="0" rIns="0" bIns="0" rtlCol="0" anchor="ctr"/>
+          <a:lstStyle/>
+          <a:p>
+            <a:pPr indent="0" marL="0">
+              <a:buNone/>
+            </a:pPr>
+            <a:r>
+              <a:rPr lang="en-US" sz="1150" b="1" dirty="0">
+                <a:solidFill>
+                  <a:srgbClr val="B3261E"/>
+                </a:solidFill>
+                <a:latin typeface="Montserrat" pitchFamily="34" charset="0"/>
+                <a:ea typeface="Montserrat" pitchFamily="34" charset="-122"/>
+                <a:cs typeface="Montserrat" pitchFamily="34" charset="-120"/>
+              </a:rPr>
+              <a:t>інший порядок часу — таймаут спрацює</a:t>
+            </a:r>
+            <a:endParaRPr lang="en-US" sz="1150" dirty="0"/>
+          </a:p>
+        </p:txBody>
+      </p:sp>
+      <p:sp>
+        <p:nvSpPr>
+          <p:cNvPr id="25" name="Text 22"/>
+          <p:cNvSpPr/>
+          <p:nvPr/>
+        </p:nvSpPr>
+        <p:spPr>
+          <a:xfrm>
+            <a:off x="566928" y="4416552"/>
+            <a:ext cx="2944368" cy="310896"/>
+          </a:xfrm>
+          <a:prstGeom prst="rect">
+            <a:avLst/>
+          </a:prstGeom>
+          <a:noFill/>
+          <a:ln/>
+        </p:spPr>
+        <p:txBody>
+          <a:bodyPr wrap="square" lIns="0" tIns="0" rIns="0" bIns="0" rtlCol="0" anchor="ctr"/>
+          <a:lstStyle/>
+          <a:p>
+            <a:pPr algn="l" indent="0" marL="0">
+              <a:buNone/>
+            </a:pPr>
+            <a:r>
+              <a:rPr lang="en-US" sz="1250" dirty="0">
+                <a:solidFill>
+                  <a:srgbClr val="000000"/>
+                </a:solidFill>
+                <a:latin typeface="Montserrat" pitchFamily="34" charset="0"/>
+                <a:ea typeface="Montserrat" pitchFamily="34" charset="-122"/>
+                <a:cs typeface="Montserrat" pitchFamily="34" charset="-120"/>
+              </a:rPr>
+              <a:t>квота на токени / хв</a:t>
+            </a:r>
+            <a:endParaRPr lang="en-US" sz="1250" dirty="0"/>
+          </a:p>
+        </p:txBody>
+      </p:sp>
+      <p:sp>
+        <p:nvSpPr>
+          <p:cNvPr id="26" name="Shape 23"/>
+          <p:cNvSpPr/>
+          <p:nvPr/>
+        </p:nvSpPr>
+        <p:spPr>
+          <a:xfrm>
+            <a:off x="3675888" y="4472513"/>
+            <a:ext cx="4023360" cy="198973"/>
+          </a:xfrm>
+          <a:prstGeom prst="roundRect">
+            <a:avLst>
+              <a:gd name="adj" fmla="val 22978"/>
+            </a:avLst>
+          </a:prstGeom>
+          <a:solidFill>
+            <a:srgbClr val="B3261E"/>
+          </a:solidFill>
+          <a:ln/>
+        </p:spPr>
+      </p:sp>
+      <p:sp>
+        <p:nvSpPr>
+          <p:cNvPr id="27" name="Text 24"/>
+          <p:cNvSpPr/>
+          <p:nvPr/>
+        </p:nvSpPr>
+        <p:spPr>
+          <a:xfrm>
+            <a:off x="7927848" y="4416552"/>
+            <a:ext cx="3474720" cy="310896"/>
+          </a:xfrm>
+          <a:prstGeom prst="rect">
+            <a:avLst/>
+          </a:prstGeom>
+          <a:noFill/>
+          <a:ln/>
+        </p:spPr>
+        <p:txBody>
+          <a:bodyPr wrap="square" lIns="0" tIns="0" rIns="0" bIns="0" rtlCol="0" anchor="ctr"/>
+          <a:lstStyle/>
+          <a:p>
+            <a:pPr indent="0" marL="0">
+              <a:buNone/>
+            </a:pPr>
+            <a:r>
+              <a:rPr lang="en-US" sz="1150" b="1" dirty="0">
+                <a:solidFill>
+                  <a:srgbClr val="B3261E"/>
+                </a:solidFill>
+                <a:latin typeface="Montserrat" pitchFamily="34" charset="0"/>
+                <a:ea typeface="Montserrat" pitchFamily="34" charset="-122"/>
+                <a:cs typeface="Montserrat" pitchFamily="34" charset="-120"/>
+              </a:rPr>
+              <a:t>вичерпується раніше за квоту на запити</a:t>
+            </a:r>
+            <a:endParaRPr lang="en-US" sz="1150" dirty="0"/>
+          </a:p>
+        </p:txBody>
+      </p:sp>
+      <p:sp>
+        <p:nvSpPr>
+          <p:cNvPr id="28" name="Shape 25"/>
+          <p:cNvSpPr/>
+          <p:nvPr/>
+        </p:nvSpPr>
+        <p:spPr>
+          <a:xfrm>
+            <a:off x="566928" y="4846320"/>
+            <a:ext cx="11064240" cy="548640"/>
+          </a:xfrm>
+          <a:prstGeom prst="roundRect">
+            <a:avLst>
+              <a:gd name="adj" fmla="val 20000"/>
             </a:avLst>
           </a:prstGeom>
           <a:solidFill>
@@ -13819,14 +14119,14 @@
       </p:sp>
       <p:sp>
         <p:nvSpPr>
-          <p:cNvPr id="20" name="Text 17"/>
-          <p:cNvSpPr/>
-          <p:nvPr/>
-        </p:nvSpPr>
-        <p:spPr>
-          <a:xfrm>
-            <a:off x="786384" y="4169664"/>
-            <a:ext cx="10625328" cy="667512"/>
+          <p:cNvPr id="29" name="Text 26"/>
+          <p:cNvSpPr/>
+          <p:nvPr/>
+        </p:nvSpPr>
+        <p:spPr>
+          <a:xfrm>
+            <a:off x="786384" y="4992624"/>
+            <a:ext cx="10625328" cy="256032"/>
           </a:xfrm>
           <a:prstGeom prst="rect">
             <a:avLst/>
@@ -13861,18 +14161,18 @@
       </p:sp>
       <p:sp>
         <p:nvSpPr>
-          <p:cNvPr id="21" name="Shape 18"/>
-          <p:cNvSpPr/>
-          <p:nvPr/>
-        </p:nvSpPr>
-        <p:spPr>
-          <a:xfrm>
-            <a:off x="566928" y="5166360"/>
-            <a:ext cx="11064240" cy="914400"/>
+          <p:cNvPr id="30" name="Shape 27"/>
+          <p:cNvSpPr/>
+          <p:nvPr/>
+        </p:nvSpPr>
+        <p:spPr>
+          <a:xfrm>
+            <a:off x="566928" y="5504688"/>
+            <a:ext cx="11064240" cy="566928"/>
           </a:xfrm>
           <a:prstGeom prst="roundRect">
             <a:avLst>
-              <a:gd name="adj" fmla="val 12000"/>
+              <a:gd name="adj" fmla="val 19355"/>
             </a:avLst>
           </a:prstGeom>
           <a:solidFill>
@@ -13888,53 +14188,14 @@
       </p:sp>
       <p:sp>
         <p:nvSpPr>
-          <p:cNvPr id="22" name="Text 19"/>
-          <p:cNvSpPr/>
-          <p:nvPr/>
-        </p:nvSpPr>
-        <p:spPr>
-          <a:xfrm>
-            <a:off x="786384" y="5294376"/>
-            <a:ext cx="10625328" cy="219456"/>
-          </a:xfrm>
-          <a:prstGeom prst="rect">
-            <a:avLst/>
-          </a:prstGeom>
-          <a:noFill/>
-          <a:ln/>
-        </p:spPr>
-        <p:txBody>
-          <a:bodyPr wrap="square" lIns="0" tIns="0" rIns="0" bIns="0" rtlCol="0" anchor="ctr"/>
-          <a:lstStyle/>
-          <a:p>
-            <a:pPr indent="0" marL="0">
-              <a:buNone/>
-            </a:pPr>
-            <a:r>
-              <a:rPr lang="en-US" sz="950" b="1" spc="150" kern="0" dirty="0">
-                <a:solidFill>
-                  <a:srgbClr val="106B41"/>
-                </a:solidFill>
-                <a:latin typeface="Courier New" pitchFamily="34" charset="0"/>
-                <a:ea typeface="Courier New" pitchFamily="34" charset="-122"/>
-                <a:cs typeface="Courier New" pitchFamily="34" charset="-120"/>
-              </a:rPr>
-              <a:t>ВИСНОВОК</a:t>
-            </a:r>
-            <a:endParaRPr lang="en-US" sz="950" dirty="0"/>
-          </a:p>
-        </p:txBody>
-      </p:sp>
-      <p:sp>
-        <p:nvSpPr>
-          <p:cNvPr id="23" name="Text 20"/>
-          <p:cNvSpPr/>
-          <p:nvPr/>
-        </p:nvSpPr>
-        <p:spPr>
-          <a:xfrm>
-            <a:off x="786384" y="5550408"/>
-            <a:ext cx="10625328" cy="402336"/>
+          <p:cNvPr id="31" name="Text 28"/>
+          <p:cNvSpPr/>
+          <p:nvPr/>
+        </p:nvSpPr>
+        <p:spPr>
+          <a:xfrm>
+            <a:off x="786384" y="5650992"/>
+            <a:ext cx="10625328" cy="274320"/>
           </a:xfrm>
           <a:prstGeom prst="rect">
             <a:avLst/>

--- a/docs/decks/L07.pptx
+++ b/docs/decks/L07.pptx
@@ -15734,29 +15734,7 @@
         </p:nvSpPr>
         <p:spPr>
           <a:xfrm>
-            <a:off x="566928" y="1691640"/>
-            <a:ext cx="3520440" cy="1417320"/>
-          </a:xfrm>
-          <a:prstGeom prst="roundRect">
-            <a:avLst>
-              <a:gd name="adj" fmla="val 7742"/>
-            </a:avLst>
-          </a:prstGeom>
-          <a:solidFill>
-            <a:srgbClr val="000000"/>
-          </a:solidFill>
-          <a:ln/>
-        </p:spPr>
-      </p:sp>
-      <p:sp>
-        <p:nvSpPr>
-          <p:cNvPr id="8" name="Shape 5"/>
-          <p:cNvSpPr/>
-          <p:nvPr/>
-        </p:nvSpPr>
-        <p:spPr>
-          <a:xfrm>
-            <a:off x="768096" y="1874520"/>
+            <a:off x="566928" y="1755648"/>
             <a:ext cx="384048" cy="384048"/>
           </a:xfrm>
           <a:prstGeom prst="ellipse">
@@ -15770,13 +15748,13 @@
       </p:sp>
       <p:sp>
         <p:nvSpPr>
-          <p:cNvPr id="9" name="Text 6"/>
-          <p:cNvSpPr/>
-          <p:nvPr/>
-        </p:nvSpPr>
-        <p:spPr>
-          <a:xfrm>
-            <a:off x="768096" y="1874520"/>
+          <p:cNvPr id="8" name="Text 5"/>
+          <p:cNvSpPr/>
+          <p:nvPr/>
+        </p:nvSpPr>
+        <p:spPr>
+          <a:xfrm>
+            <a:off x="566928" y="1755648"/>
             <a:ext cx="384048" cy="384048"/>
           </a:xfrm>
           <a:prstGeom prst="rect">
@@ -15809,14 +15787,14 @@
       </p:sp>
       <p:sp>
         <p:nvSpPr>
-          <p:cNvPr id="10" name="Text 7"/>
-          <p:cNvSpPr/>
-          <p:nvPr/>
-        </p:nvSpPr>
-        <p:spPr>
-          <a:xfrm>
-            <a:off x="1280160" y="1847088"/>
-            <a:ext cx="2606040" cy="438912"/>
+          <p:cNvPr id="9" name="Text 6"/>
+          <p:cNvSpPr/>
+          <p:nvPr/>
+        </p:nvSpPr>
+        <p:spPr>
+          <a:xfrm>
+            <a:off x="1115568" y="1691640"/>
+            <a:ext cx="6675120" cy="512064"/>
           </a:xfrm>
           <a:prstGeom prst="rect">
             <a:avLst/>
@@ -15832,51 +15810,23 @@
               <a:buNone/>
             </a:pPr>
             <a:r>
-              <a:rPr lang="en-US" sz="1450" b="1" dirty="0">
-                <a:solidFill>
-                  <a:srgbClr val="3FCF8E"/>
+              <a:rPr lang="en-US" sz="1300" b="1" dirty="0">
+                <a:solidFill>
+                  <a:srgbClr val="000000"/>
                 </a:solidFill>
                 <a:latin typeface="Montserrat" pitchFamily="34" charset="0"/>
                 <a:ea typeface="Montserrat" pitchFamily="34" charset="-122"/>
                 <a:cs typeface="Montserrat" pitchFamily="34" charset="-120"/>
               </a:rPr>
-              <a:t>__fail_503 → заглушка</a:t>
-            </a:r>
-            <a:endParaRPr lang="en-US" sz="1450" dirty="0"/>
-          </a:p>
-        </p:txBody>
-      </p:sp>
-      <p:sp>
-        <p:nvSpPr>
-          <p:cNvPr id="11" name="Text 8"/>
-          <p:cNvSpPr/>
-          <p:nvPr/>
-        </p:nvSpPr>
-        <p:spPr>
-          <a:xfrm>
-            <a:off x="768096" y="2377440"/>
-            <a:ext cx="3118104" cy="576072"/>
-          </a:xfrm>
-          <a:prstGeom prst="rect">
-            <a:avLst/>
-          </a:prstGeom>
-          <a:noFill/>
-          <a:ln/>
-        </p:spPr>
-        <p:txBody>
-          <a:bodyPr wrap="square" lIns="0" tIns="0" rIns="0" bIns="0" rtlCol="0" anchor="t"/>
-          <a:lstStyle/>
-          <a:p>
+              <a:t>__fail_503 → заглушка  </a:t>
+            </a:r>
             <a:pPr indent="0" marL="0">
-              <a:lnSpc>
-                <a:spcPct val="108000"/>
-              </a:lnSpc>
-              <a:buNone/>
-            </a:pPr>
-            <a:r>
-              <a:rPr lang="en-US" sz="1200" dirty="0">
-                <a:solidFill>
-                  <a:srgbClr val="E9E4F7"/>
+              <a:buNone/>
+            </a:pPr>
+            <a:r>
+              <a:rPr lang="en-US" sz="1100" dirty="0">
+                <a:solidFill>
+                  <a:srgbClr val="434343"/>
                 </a:solidFill>
                 <a:latin typeface="Montserrat" pitchFamily="34" charset="0"/>
                 <a:ea typeface="Montserrat" pitchFamily="34" charset="-122"/>
@@ -15884,41 +15834,19 @@
               </a:rPr>
               <a:t>ввічлива відмова замість помилки 500</a:t>
             </a:r>
-            <a:endParaRPr lang="en-US" sz="1200" dirty="0"/>
-          </a:p>
-        </p:txBody>
-      </p:sp>
-      <p:sp>
-        <p:nvSpPr>
-          <p:cNvPr id="12" name="Shape 9"/>
-          <p:cNvSpPr/>
-          <p:nvPr/>
-        </p:nvSpPr>
-        <p:spPr>
-          <a:xfrm>
-            <a:off x="4270248" y="1691640"/>
-            <a:ext cx="3520440" cy="1417320"/>
-          </a:xfrm>
-          <a:prstGeom prst="roundRect">
-            <a:avLst>
-              <a:gd name="adj" fmla="val 7742"/>
-            </a:avLst>
-          </a:prstGeom>
-          <a:solidFill>
-            <a:srgbClr val="000000"/>
-          </a:solidFill>
-          <a:ln/>
-        </p:spPr>
-      </p:sp>
-      <p:sp>
-        <p:nvSpPr>
-          <p:cNvPr id="13" name="Shape 10"/>
-          <p:cNvSpPr/>
-          <p:nvPr/>
-        </p:nvSpPr>
-        <p:spPr>
-          <a:xfrm>
-            <a:off x="4471416" y="1874520"/>
+            <a:endParaRPr lang="en-US" sz="1300" dirty="0"/>
+          </a:p>
+        </p:txBody>
+      </p:sp>
+      <p:sp>
+        <p:nvSpPr>
+          <p:cNvPr id="10" name="Shape 7"/>
+          <p:cNvSpPr/>
+          <p:nvPr/>
+        </p:nvSpPr>
+        <p:spPr>
+          <a:xfrm>
+            <a:off x="566928" y="2359152"/>
             <a:ext cx="384048" cy="384048"/>
           </a:xfrm>
           <a:prstGeom prst="ellipse">
@@ -15932,13 +15860,13 @@
       </p:sp>
       <p:sp>
         <p:nvSpPr>
-          <p:cNvPr id="14" name="Text 11"/>
-          <p:cNvSpPr/>
-          <p:nvPr/>
-        </p:nvSpPr>
-        <p:spPr>
-          <a:xfrm>
-            <a:off x="4471416" y="1874520"/>
+          <p:cNvPr id="11" name="Text 8"/>
+          <p:cNvSpPr/>
+          <p:nvPr/>
+        </p:nvSpPr>
+        <p:spPr>
+          <a:xfrm>
+            <a:off x="566928" y="2359152"/>
             <a:ext cx="384048" cy="384048"/>
           </a:xfrm>
           <a:prstGeom prst="rect">
@@ -15971,14 +15899,14 @@
       </p:sp>
       <p:sp>
         <p:nvSpPr>
-          <p:cNvPr id="15" name="Text 12"/>
-          <p:cNvSpPr/>
-          <p:nvPr/>
-        </p:nvSpPr>
-        <p:spPr>
-          <a:xfrm>
-            <a:off x="4983480" y="1847088"/>
-            <a:ext cx="2606040" cy="438912"/>
+          <p:cNvPr id="12" name="Text 9"/>
+          <p:cNvSpPr/>
+          <p:nvPr/>
+        </p:nvSpPr>
+        <p:spPr>
+          <a:xfrm>
+            <a:off x="1115568" y="2295144"/>
+            <a:ext cx="6675120" cy="512064"/>
           </a:xfrm>
           <a:prstGeom prst="rect">
             <a:avLst/>
@@ -15994,51 +15922,23 @@
               <a:buNone/>
             </a:pPr>
             <a:r>
-              <a:rPr lang="en-US" sz="1450" b="1" dirty="0">
-                <a:solidFill>
-                  <a:srgbClr val="3FCF8E"/>
+              <a:rPr lang="en-US" sz="1300" b="1" dirty="0">
+                <a:solidFill>
+                  <a:srgbClr val="000000"/>
                 </a:solidFill>
                 <a:latin typeface="Montserrat" pitchFamily="34" charset="0"/>
                 <a:ea typeface="Montserrat" pitchFamily="34" charset="-122"/>
                 <a:cs typeface="Montserrat" pitchFamily="34" charset="-120"/>
               </a:rPr>
-              <a:t>той самий маркер удруге</a:t>
-            </a:r>
-            <a:endParaRPr lang="en-US" sz="1450" dirty="0"/>
-          </a:p>
-        </p:txBody>
-      </p:sp>
-      <p:sp>
-        <p:nvSpPr>
-          <p:cNvPr id="16" name="Text 13"/>
-          <p:cNvSpPr/>
-          <p:nvPr/>
-        </p:nvSpPr>
-        <p:spPr>
-          <a:xfrm>
-            <a:off x="4471416" y="2377440"/>
-            <a:ext cx="3118104" cy="576072"/>
-          </a:xfrm>
-          <a:prstGeom prst="rect">
-            <a:avLst/>
-          </a:prstGeom>
-          <a:noFill/>
-          <a:ln/>
-        </p:spPr>
-        <p:txBody>
-          <a:bodyPr wrap="square" lIns="0" tIns="0" rIns="0" bIns="0" rtlCol="0" anchor="t"/>
-          <a:lstStyle/>
-          <a:p>
+              <a:t>той самий маркер удруге  </a:t>
+            </a:r>
             <a:pPr indent="0" marL="0">
-              <a:lnSpc>
-                <a:spcPct val="108000"/>
-              </a:lnSpc>
-              <a:buNone/>
-            </a:pPr>
-            <a:r>
-              <a:rPr lang="en-US" sz="1200" dirty="0">
-                <a:solidFill>
-                  <a:srgbClr val="E9E4F7"/>
+              <a:buNone/>
+            </a:pPr>
+            <a:r>
+              <a:rPr lang="en-US" sz="1100" dirty="0">
+                <a:solidFill>
+                  <a:srgbClr val="434343"/>
                 </a:solidFill>
                 <a:latin typeface="Montserrat" pitchFamily="34" charset="0"/>
                 <a:ea typeface="Montserrat" pitchFamily="34" charset="-122"/>
@@ -16046,45 +15946,510 @@
               </a:rPr>
               <a:t>збій коштує мілісекунди</a:t>
             </a:r>
+            <a:endParaRPr lang="en-US" sz="1300" dirty="0"/>
+          </a:p>
+        </p:txBody>
+      </p:sp>
+      <p:sp>
+        <p:nvSpPr>
+          <p:cNvPr id="13" name="Shape 10"/>
+          <p:cNvSpPr/>
+          <p:nvPr/>
+        </p:nvSpPr>
+        <p:spPr>
+          <a:xfrm>
+            <a:off x="566928" y="2962656"/>
+            <a:ext cx="384048" cy="384048"/>
+          </a:xfrm>
+          <a:prstGeom prst="ellipse">
+            <a:avLst/>
+          </a:prstGeom>
+          <a:solidFill>
+            <a:srgbClr val="1A4FBF"/>
+          </a:solidFill>
+          <a:ln/>
+        </p:spPr>
+      </p:sp>
+      <p:sp>
+        <p:nvSpPr>
+          <p:cNvPr id="14" name="Text 11"/>
+          <p:cNvSpPr/>
+          <p:nvPr/>
+        </p:nvSpPr>
+        <p:spPr>
+          <a:xfrm>
+            <a:off x="566928" y="2962656"/>
+            <a:ext cx="384048" cy="384048"/>
+          </a:xfrm>
+          <a:prstGeom prst="rect">
+            <a:avLst/>
+          </a:prstGeom>
+          <a:noFill/>
+          <a:ln/>
+        </p:spPr>
+        <p:txBody>
+          <a:bodyPr wrap="square" lIns="0" tIns="0" rIns="0" bIns="0" rtlCol="0" anchor="ctr"/>
+          <a:lstStyle/>
+          <a:p>
+            <a:pPr algn="ctr" indent="0" marL="0">
+              <a:buNone/>
+            </a:pPr>
+            <a:r>
+              <a:rPr lang="en-US" sz="1200" b="1" dirty="0">
+                <a:solidFill>
+                  <a:srgbClr val="FFFFFF"/>
+                </a:solidFill>
+                <a:latin typeface="Courier New" pitchFamily="34" charset="0"/>
+                <a:ea typeface="Courier New" pitchFamily="34" charset="-122"/>
+                <a:cs typeface="Courier New" pitchFamily="34" charset="-120"/>
+              </a:rPr>
+              <a:t>3</a:t>
+            </a:r>
             <a:endParaRPr lang="en-US" sz="1200" dirty="0"/>
           </a:p>
         </p:txBody>
       </p:sp>
       <p:sp>
         <p:nvSpPr>
-          <p:cNvPr id="17" name="Shape 14"/>
-          <p:cNvSpPr/>
-          <p:nvPr/>
-        </p:nvSpPr>
-        <p:spPr>
-          <a:xfrm>
-            <a:off x="7973568" y="1691640"/>
-            <a:ext cx="3520440" cy="1417320"/>
+          <p:cNvPr id="15" name="Text 12"/>
+          <p:cNvSpPr/>
+          <p:nvPr/>
+        </p:nvSpPr>
+        <p:spPr>
+          <a:xfrm>
+            <a:off x="1115568" y="2898648"/>
+            <a:ext cx="6675120" cy="512064"/>
+          </a:xfrm>
+          <a:prstGeom prst="rect">
+            <a:avLst/>
+          </a:prstGeom>
+          <a:noFill/>
+          <a:ln/>
+        </p:spPr>
+        <p:txBody>
+          <a:bodyPr wrap="square" lIns="0" tIns="0" rIns="0" bIns="0" rtlCol="0" anchor="ctr"/>
+          <a:lstStyle/>
+          <a:p>
+            <a:pPr indent="0" marL="0">
+              <a:buNone/>
+            </a:pPr>
+            <a:r>
+              <a:rPr lang="en-US" sz="1300" b="1" dirty="0">
+                <a:solidFill>
+                  <a:srgbClr val="000000"/>
+                </a:solidFill>
+                <a:latin typeface="Montserrat" pitchFamily="34" charset="0"/>
+                <a:ea typeface="Montserrat" pitchFamily="34" charset="-122"/>
+                <a:cs typeface="Montserrat" pitchFamily="34" charset="-120"/>
+              </a:rPr>
+              <a:t>перехід fallback — у діфі коду  </a:t>
+            </a:r>
+            <a:pPr indent="0" marL="0">
+              <a:buNone/>
+            </a:pPr>
+            <a:r>
+              <a:rPr lang="en-US" sz="1100" dirty="0">
+                <a:solidFill>
+                  <a:srgbClr val="434343"/>
+                </a:solidFill>
+                <a:latin typeface="Montserrat" pitchFamily="34" charset="0"/>
+                <a:ea typeface="Montserrat" pitchFamily="34" charset="-122"/>
+                <a:cs typeface="Montserrat" pitchFamily="34" charset="-120"/>
+              </a:rPr>
+              <a:t>лічильник на цьому тижні не віддається нічим</a:t>
+            </a:r>
+            <a:endParaRPr lang="en-US" sz="1300" dirty="0"/>
+          </a:p>
+        </p:txBody>
+      </p:sp>
+      <p:sp>
+        <p:nvSpPr>
+          <p:cNvPr id="16" name="Shape 13"/>
+          <p:cNvSpPr/>
+          <p:nvPr/>
+        </p:nvSpPr>
+        <p:spPr>
+          <a:xfrm>
+            <a:off x="566928" y="3566160"/>
+            <a:ext cx="384048" cy="384048"/>
+          </a:xfrm>
+          <a:prstGeom prst="ellipse">
+            <a:avLst/>
+          </a:prstGeom>
+          <a:solidFill>
+            <a:srgbClr val="B3261E"/>
+          </a:solidFill>
+          <a:ln/>
+        </p:spPr>
+      </p:sp>
+      <p:sp>
+        <p:nvSpPr>
+          <p:cNvPr id="17" name="Text 14"/>
+          <p:cNvSpPr/>
+          <p:nvPr/>
+        </p:nvSpPr>
+        <p:spPr>
+          <a:xfrm>
+            <a:off x="566928" y="3566160"/>
+            <a:ext cx="384048" cy="384048"/>
+          </a:xfrm>
+          <a:prstGeom prst="rect">
+            <a:avLst/>
+          </a:prstGeom>
+          <a:noFill/>
+          <a:ln/>
+        </p:spPr>
+        <p:txBody>
+          <a:bodyPr wrap="square" lIns="0" tIns="0" rIns="0" bIns="0" rtlCol="0" anchor="ctr"/>
+          <a:lstStyle/>
+          <a:p>
+            <a:pPr algn="ctr" indent="0" marL="0">
+              <a:buNone/>
+            </a:pPr>
+            <a:r>
+              <a:rPr lang="en-US" sz="1200" b="1" dirty="0">
+                <a:solidFill>
+                  <a:srgbClr val="FFFFFF"/>
+                </a:solidFill>
+                <a:latin typeface="Courier New" pitchFamily="34" charset="0"/>
+                <a:ea typeface="Courier New" pitchFamily="34" charset="-122"/>
+                <a:cs typeface="Courier New" pitchFamily="34" charset="-120"/>
+              </a:rPr>
+              <a:t>4</a:t>
+            </a:r>
+            <a:endParaRPr lang="en-US" sz="1200" dirty="0"/>
+          </a:p>
+        </p:txBody>
+      </p:sp>
+      <p:sp>
+        <p:nvSpPr>
+          <p:cNvPr id="18" name="Text 15"/>
+          <p:cNvSpPr/>
+          <p:nvPr/>
+        </p:nvSpPr>
+        <p:spPr>
+          <a:xfrm>
+            <a:off x="1115568" y="3502152"/>
+            <a:ext cx="6675120" cy="512064"/>
+          </a:xfrm>
+          <a:prstGeom prst="rect">
+            <a:avLst/>
+          </a:prstGeom>
+          <a:noFill/>
+          <a:ln/>
+        </p:spPr>
+        <p:txBody>
+          <a:bodyPr wrap="square" lIns="0" tIns="0" rIns="0" bIns="0" rtlCol="0" anchor="ctr"/>
+          <a:lstStyle/>
+          <a:p>
+            <a:pPr indent="0" marL="0">
+              <a:buNone/>
+            </a:pPr>
+            <a:r>
+              <a:rPr lang="en-US" sz="1300" b="1" dirty="0">
+                <a:solidFill>
+                  <a:srgbClr val="B3261E"/>
+                </a:solidFill>
+                <a:latin typeface="Montserrat" pitchFamily="34" charset="0"/>
+                <a:ea typeface="Montserrat" pitchFamily="34" charset="-122"/>
+                <a:cs typeface="Montserrat" pitchFamily="34" charset="-120"/>
+              </a:rPr>
+              <a:t>опц.: 3 × __fail_503 → open  </a:t>
+            </a:r>
+            <a:pPr indent="0" marL="0">
+              <a:buNone/>
+            </a:pPr>
+            <a:r>
+              <a:rPr lang="en-US" sz="1100" dirty="0">
+                <a:solidFill>
+                  <a:srgbClr val="434343"/>
+                </a:solidFill>
+                <a:latin typeface="Montserrat" pitchFamily="34" charset="0"/>
+                <a:ea typeface="Montserrat" pitchFamily="34" charset="-122"/>
+                <a:cs typeface="Montserrat" pitchFamily="34" charset="-120"/>
+              </a:rPr>
+              <a:t>здорове питання миттєво отримує заглушку</a:t>
+            </a:r>
+            <a:endParaRPr lang="en-US" sz="1300" dirty="0"/>
+          </a:p>
+        </p:txBody>
+      </p:sp>
+      <p:sp>
+        <p:nvSpPr>
+          <p:cNvPr id="19" name="Shape 16"/>
+          <p:cNvSpPr/>
+          <p:nvPr/>
+        </p:nvSpPr>
+        <p:spPr>
+          <a:xfrm>
+            <a:off x="566928" y="4169664"/>
+            <a:ext cx="384048" cy="384048"/>
+          </a:xfrm>
+          <a:prstGeom prst="ellipse">
+            <a:avLst/>
+          </a:prstGeom>
+          <a:solidFill>
+            <a:srgbClr val="1A4FBF"/>
+          </a:solidFill>
+          <a:ln/>
+        </p:spPr>
+      </p:sp>
+      <p:sp>
+        <p:nvSpPr>
+          <p:cNvPr id="20" name="Text 17"/>
+          <p:cNvSpPr/>
+          <p:nvPr/>
+        </p:nvSpPr>
+        <p:spPr>
+          <a:xfrm>
+            <a:off x="566928" y="4169664"/>
+            <a:ext cx="384048" cy="384048"/>
+          </a:xfrm>
+          <a:prstGeom prst="rect">
+            <a:avLst/>
+          </a:prstGeom>
+          <a:noFill/>
+          <a:ln/>
+        </p:spPr>
+        <p:txBody>
+          <a:bodyPr wrap="square" lIns="0" tIns="0" rIns="0" bIns="0" rtlCol="0" anchor="ctr"/>
+          <a:lstStyle/>
+          <a:p>
+            <a:pPr algn="ctr" indent="0" marL="0">
+              <a:buNone/>
+            </a:pPr>
+            <a:r>
+              <a:rPr lang="en-US" sz="1200" b="1" dirty="0">
+                <a:solidFill>
+                  <a:srgbClr val="FFFFFF"/>
+                </a:solidFill>
+                <a:latin typeface="Courier New" pitchFamily="34" charset="0"/>
+                <a:ea typeface="Courier New" pitchFamily="34" charset="-122"/>
+                <a:cs typeface="Courier New" pitchFamily="34" charset="-120"/>
+              </a:rPr>
+              <a:t>5</a:t>
+            </a:r>
+            <a:endParaRPr lang="en-US" sz="1200" dirty="0"/>
+          </a:p>
+        </p:txBody>
+      </p:sp>
+      <p:sp>
+        <p:nvSpPr>
+          <p:cNvPr id="21" name="Text 18"/>
+          <p:cNvSpPr/>
+          <p:nvPr/>
+        </p:nvSpPr>
+        <p:spPr>
+          <a:xfrm>
+            <a:off x="1115568" y="4105656"/>
+            <a:ext cx="6675120" cy="512064"/>
+          </a:xfrm>
+          <a:prstGeom prst="rect">
+            <a:avLst/>
+          </a:prstGeom>
+          <a:noFill/>
+          <a:ln/>
+        </p:spPr>
+        <p:txBody>
+          <a:bodyPr wrap="square" lIns="0" tIns="0" rIns="0" bIns="0" rtlCol="0" anchor="ctr"/>
+          <a:lstStyle/>
+          <a:p>
+            <a:pPr indent="0" marL="0">
+              <a:buNone/>
+            </a:pPr>
+            <a:r>
+              <a:rPr lang="en-US" sz="1300" b="1" dirty="0">
+                <a:solidFill>
+                  <a:srgbClr val="000000"/>
+                </a:solidFill>
+                <a:latin typeface="Montserrat" pitchFamily="34" charset="0"/>
+                <a:ea typeface="Montserrat" pitchFamily="34" charset="-122"/>
+                <a:cs typeface="Montserrat" pitchFamily="34" charset="-120"/>
+              </a:rPr>
+              <a:t>опц.: пауза ~5 с → probe  </a:t>
+            </a:r>
+            <a:pPr indent="0" marL="0">
+              <a:buNone/>
+            </a:pPr>
+            <a:r>
+              <a:rPr lang="en-US" sz="1100" dirty="0">
+                <a:solidFill>
+                  <a:srgbClr val="434343"/>
+                </a:solidFill>
+                <a:latin typeface="Montserrat" pitchFamily="34" charset="0"/>
+                <a:ea typeface="Montserrat" pitchFamily="34" charset="-122"/>
+                <a:cs typeface="Montserrat" pitchFamily="34" charset="-120"/>
+              </a:rPr>
+              <a:t>звичайне питання закриває circuit</a:t>
+            </a:r>
+            <a:endParaRPr lang="en-US" sz="1300" dirty="0"/>
+          </a:p>
+        </p:txBody>
+      </p:sp>
+      <p:sp>
+        <p:nvSpPr>
+          <p:cNvPr id="22" name="Shape 19"/>
+          <p:cNvSpPr/>
+          <p:nvPr/>
+        </p:nvSpPr>
+        <p:spPr>
+          <a:xfrm>
+            <a:off x="8156448" y="1691640"/>
+            <a:ext cx="3474720" cy="3063240"/>
           </a:xfrm>
           <a:prstGeom prst="roundRect">
             <a:avLst>
-              <a:gd name="adj" fmla="val 7742"/>
+              <a:gd name="adj" fmla="val 2388"/>
             </a:avLst>
           </a:prstGeom>
           <a:solidFill>
-            <a:srgbClr val="000000"/>
+            <a:srgbClr val="0A0810"/>
           </a:solidFill>
-          <a:ln/>
-        </p:spPr>
-      </p:sp>
-      <p:sp>
-        <p:nvSpPr>
-          <p:cNvPr id="18" name="Shape 15"/>
-          <p:cNvSpPr/>
-          <p:nvPr/>
-        </p:nvSpPr>
-        <p:spPr>
-          <a:xfrm>
-            <a:off x="8174736" y="1874520"/>
-            <a:ext cx="384048" cy="384048"/>
+          <a:ln w="12700">
+            <a:solidFill>
+              <a:srgbClr val="D9D9D9"/>
+            </a:solidFill>
+            <a:prstDash val="solid"/>
+          </a:ln>
+        </p:spPr>
+      </p:sp>
+      <p:sp>
+        <p:nvSpPr>
+          <p:cNvPr id="23" name="Shape 20"/>
+          <p:cNvSpPr/>
+          <p:nvPr/>
+        </p:nvSpPr>
+        <p:spPr>
+          <a:xfrm>
+            <a:off x="8284464" y="1810512"/>
+            <a:ext cx="73152" cy="73152"/>
           </a:xfrm>
           <a:prstGeom prst="ellipse">
             <a:avLst/>
+          </a:prstGeom>
+          <a:solidFill>
+            <a:srgbClr val="FF6B6B"/>
+          </a:solidFill>
+          <a:ln/>
+        </p:spPr>
+      </p:sp>
+      <p:sp>
+        <p:nvSpPr>
+          <p:cNvPr id="24" name="Shape 21"/>
+          <p:cNvSpPr/>
+          <p:nvPr/>
+        </p:nvSpPr>
+        <p:spPr>
+          <a:xfrm>
+            <a:off x="8430768" y="1810512"/>
+            <a:ext cx="73152" cy="73152"/>
+          </a:xfrm>
+          <a:prstGeom prst="ellipse">
+            <a:avLst/>
+          </a:prstGeom>
+          <a:solidFill>
+            <a:srgbClr val="6BA0F8"/>
+          </a:solidFill>
+          <a:ln/>
+        </p:spPr>
+      </p:sp>
+      <p:sp>
+        <p:nvSpPr>
+          <p:cNvPr id="25" name="Shape 22"/>
+          <p:cNvSpPr/>
+          <p:nvPr/>
+        </p:nvSpPr>
+        <p:spPr>
+          <a:xfrm>
+            <a:off x="8577072" y="1810512"/>
+            <a:ext cx="73152" cy="73152"/>
+          </a:xfrm>
+          <a:prstGeom prst="ellipse">
+            <a:avLst/>
+          </a:prstGeom>
+          <a:solidFill>
+            <a:srgbClr val="3FCF8E"/>
+          </a:solidFill>
+          <a:ln/>
+        </p:spPr>
+      </p:sp>
+      <p:sp>
+        <p:nvSpPr>
+          <p:cNvPr id="26" name="Text 23"/>
+          <p:cNvSpPr/>
+          <p:nvPr/>
+        </p:nvSpPr>
+        <p:spPr>
+          <a:xfrm>
+            <a:off x="8759952" y="1691640"/>
+            <a:ext cx="2761488" cy="310896"/>
+          </a:xfrm>
+          <a:prstGeom prst="rect">
+            <a:avLst/>
+          </a:prstGeom>
+          <a:noFill/>
+          <a:ln/>
+        </p:spPr>
+        <p:txBody>
+          <a:bodyPr wrap="square" lIns="0" tIns="0" rIns="0" bIns="0" rtlCol="0" anchor="ctr"/>
+          <a:lstStyle/>
+          <a:p>
+            <a:pPr indent="0" marL="0">
+              <a:buNone/>
+            </a:pPr>
+            <a:r>
+              <a:rPr lang="en-US" sz="800" dirty="0">
+                <a:solidFill>
+                  <a:srgbClr val="9A94AA"/>
+                </a:solidFill>
+                <a:latin typeface="Courier New" pitchFamily="34" charset="0"/>
+                <a:ea typeface="Courier New" pitchFamily="34" charset="-122"/>
+                <a:cs typeface="Courier New" pitchFamily="34" charset="-120"/>
+              </a:rPr>
+              <a:t>Чат · localhost:4200</a:t>
+            </a:r>
+            <a:endParaRPr lang="en-US" sz="800" dirty="0"/>
+          </a:p>
+        </p:txBody>
+      </p:sp>
+      <p:sp>
+        <p:nvSpPr>
+          <p:cNvPr id="27" name="Shape 24"/>
+          <p:cNvSpPr/>
+          <p:nvPr/>
+        </p:nvSpPr>
+        <p:spPr>
+          <a:xfrm>
+            <a:off x="8156448" y="2002536"/>
+            <a:ext cx="3474720" cy="0"/>
+          </a:xfrm>
+          <a:prstGeom prst="line">
+            <a:avLst/>
+          </a:prstGeom>
+          <a:noFill/>
+          <a:ln w="9525">
+            <a:solidFill>
+              <a:srgbClr val="2A2438"/>
+            </a:solidFill>
+            <a:prstDash val="solid"/>
+          </a:ln>
+        </p:spPr>
+      </p:sp>
+      <p:sp>
+        <p:nvSpPr>
+          <p:cNvPr id="28" name="Shape 25"/>
+          <p:cNvSpPr/>
+          <p:nvPr/>
+        </p:nvSpPr>
+        <p:spPr>
+          <a:xfrm>
+            <a:off x="8811158" y="2130552"/>
+            <a:ext cx="2710282" cy="306095"/>
+          </a:xfrm>
+          <a:prstGeom prst="roundRect">
+            <a:avLst>
+              <a:gd name="adj" fmla="val 29873"/>
+            </a:avLst>
           </a:prstGeom>
           <a:solidFill>
             <a:srgbClr val="5A05F4"/>
@@ -16094,14 +16459,14 @@
       </p:sp>
       <p:sp>
         <p:nvSpPr>
-          <p:cNvPr id="19" name="Text 16"/>
-          <p:cNvSpPr/>
-          <p:nvPr/>
-        </p:nvSpPr>
-        <p:spPr>
-          <a:xfrm>
-            <a:off x="8174736" y="1874520"/>
-            <a:ext cx="384048" cy="384048"/>
+          <p:cNvPr id="29" name="Text 26"/>
+          <p:cNvSpPr/>
+          <p:nvPr/>
+        </p:nvSpPr>
+        <p:spPr>
+          <a:xfrm>
+            <a:off x="8920886" y="2130552"/>
+            <a:ext cx="2490826" cy="306095"/>
           </a:xfrm>
           <a:prstGeom prst="rect">
             <a:avLst/>
@@ -16113,34 +16478,156 @@
           <a:bodyPr wrap="square" lIns="0" tIns="0" rIns="0" bIns="0" rtlCol="0" anchor="ctr"/>
           <a:lstStyle/>
           <a:p>
-            <a:pPr algn="ctr" indent="0" marL="0">
-              <a:buNone/>
-            </a:pPr>
-            <a:r>
-              <a:rPr lang="en-US" sz="1200" b="1" dirty="0">
+            <a:pPr indent="0" marL="0">
+              <a:buNone/>
+            </a:pPr>
+            <a:r>
+              <a:rPr lang="en-US" sz="950" dirty="0">
                 <a:solidFill>
                   <a:srgbClr val="FFFFFF"/>
+                </a:solidFill>
+                <a:latin typeface="Montserrat" pitchFamily="34" charset="0"/>
+                <a:ea typeface="Montserrat" pitchFamily="34" charset="-122"/>
+                <a:cs typeface="Montserrat" pitchFamily="34" charset="-120"/>
+              </a:rPr>
+              <a:t>__fail_503</a:t>
+            </a:r>
+            <a:endParaRPr lang="en-US" sz="950" dirty="0"/>
+          </a:p>
+        </p:txBody>
+      </p:sp>
+      <p:sp>
+        <p:nvSpPr>
+          <p:cNvPr id="30" name="Shape 27"/>
+          <p:cNvSpPr/>
+          <p:nvPr/>
+        </p:nvSpPr>
+        <p:spPr>
+          <a:xfrm>
+            <a:off x="8266176" y="2537231"/>
+            <a:ext cx="2710282" cy="662254"/>
+          </a:xfrm>
+          <a:prstGeom prst="roundRect">
+            <a:avLst>
+              <a:gd name="adj" fmla="val 13807"/>
+            </a:avLst>
+          </a:prstGeom>
+          <a:solidFill>
+            <a:srgbClr val="1E1A2B"/>
+          </a:solidFill>
+          <a:ln/>
+        </p:spPr>
+      </p:sp>
+      <p:sp>
+        <p:nvSpPr>
+          <p:cNvPr id="31" name="Text 28"/>
+          <p:cNvSpPr/>
+          <p:nvPr/>
+        </p:nvSpPr>
+        <p:spPr>
+          <a:xfrm>
+            <a:off x="8375904" y="2537231"/>
+            <a:ext cx="2490826" cy="662254"/>
+          </a:xfrm>
+          <a:prstGeom prst="rect">
+            <a:avLst/>
+          </a:prstGeom>
+          <a:noFill/>
+          <a:ln/>
+        </p:spPr>
+        <p:txBody>
+          <a:bodyPr wrap="square" lIns="0" tIns="0" rIns="0" bIns="0" rtlCol="0" anchor="ctr"/>
+          <a:lstStyle/>
+          <a:p>
+            <a:pPr indent="0" marL="0">
+              <a:buNone/>
+            </a:pPr>
+            <a:r>
+              <a:rPr lang="en-US" sz="950" dirty="0">
+                <a:solidFill>
+                  <a:srgbClr val="D8D4E4"/>
+                </a:solidFill>
+                <a:latin typeface="Montserrat" pitchFamily="34" charset="0"/>
+                <a:ea typeface="Montserrat" pitchFamily="34" charset="-122"/>
+                <a:cs typeface="Montserrat" pitchFamily="34" charset="-120"/>
+              </a:rPr>
+              <a:t>Вибачте, тимчасові проблеми на нашому боці. Спробуйте, будь ласка, трохи згодом.</a:t>
+            </a:r>
+            <a:endParaRPr lang="en-US" sz="950" dirty="0"/>
+          </a:p>
+        </p:txBody>
+      </p:sp>
+      <p:sp>
+        <p:nvSpPr>
+          <p:cNvPr id="32" name="Text 29"/>
+          <p:cNvSpPr/>
+          <p:nvPr/>
+        </p:nvSpPr>
+        <p:spPr>
+          <a:xfrm>
+            <a:off x="8302752" y="3245206"/>
+            <a:ext cx="2710282" cy="182880"/>
+          </a:xfrm>
+          <a:prstGeom prst="rect">
+            <a:avLst/>
+          </a:prstGeom>
+          <a:noFill/>
+          <a:ln/>
+        </p:spPr>
+        <p:txBody>
+          <a:bodyPr wrap="square" lIns="0" tIns="0" rIns="0" bIns="0" rtlCol="0" anchor="ctr"/>
+          <a:lstStyle/>
+          <a:p>
+            <a:pPr indent="0" marL="0">
+              <a:buNone/>
+            </a:pPr>
+            <a:r>
+              <a:rPr lang="en-US" sz="750" dirty="0">
+                <a:solidFill>
+                  <a:srgbClr val="FF6B6B"/>
                 </a:solidFill>
                 <a:latin typeface="Courier New" pitchFamily="34" charset="0"/>
                 <a:ea typeface="Courier New" pitchFamily="34" charset="-122"/>
                 <a:cs typeface="Courier New" pitchFamily="34" charset="-120"/>
               </a:rPr>
-              <a:t>3</a:t>
-            </a:r>
-            <a:endParaRPr lang="en-US" sz="1200" dirty="0"/>
-          </a:p>
-        </p:txBody>
-      </p:sp>
-      <p:sp>
-        <p:nvSpPr>
-          <p:cNvPr id="20" name="Text 17"/>
-          <p:cNvSpPr/>
-          <p:nvPr/>
-        </p:nvSpPr>
-        <p:spPr>
-          <a:xfrm>
-            <a:off x="8686800" y="1847088"/>
-            <a:ext cx="2606040" cy="438912"/>
+              <a:t>fallback → заглушка · 503 у лозі · 12 мс</a:t>
+            </a:r>
+            <a:endParaRPr lang="en-US" sz="750" dirty="0"/>
+          </a:p>
+        </p:txBody>
+      </p:sp>
+      <p:sp>
+        <p:nvSpPr>
+          <p:cNvPr id="33" name="Shape 30"/>
+          <p:cNvSpPr/>
+          <p:nvPr/>
+        </p:nvSpPr>
+        <p:spPr>
+          <a:xfrm>
+            <a:off x="8811158" y="3501238"/>
+            <a:ext cx="2710282" cy="306095"/>
+          </a:xfrm>
+          <a:prstGeom prst="roundRect">
+            <a:avLst>
+              <a:gd name="adj" fmla="val 29873"/>
+            </a:avLst>
+          </a:prstGeom>
+          <a:solidFill>
+            <a:srgbClr val="5A05F4"/>
+          </a:solidFill>
+          <a:ln/>
+        </p:spPr>
+      </p:sp>
+      <p:sp>
+        <p:nvSpPr>
+          <p:cNvPr id="34" name="Text 31"/>
+          <p:cNvSpPr/>
+          <p:nvPr/>
+        </p:nvSpPr>
+        <p:spPr>
+          <a:xfrm>
+            <a:off x="8920886" y="3501238"/>
+            <a:ext cx="2490826" cy="306095"/>
           </a:xfrm>
           <a:prstGeom prst="rect">
             <a:avLst/>
@@ -16156,114 +16643,91 @@
               <a:buNone/>
             </a:pPr>
             <a:r>
-              <a:rPr lang="en-US" sz="1450" b="1" dirty="0">
-                <a:solidFill>
-                  <a:srgbClr val="6BA0F8"/>
+              <a:rPr lang="en-US" sz="950" dirty="0">
+                <a:solidFill>
+                  <a:srgbClr val="FFFFFF"/>
                 </a:solidFill>
                 <a:latin typeface="Montserrat" pitchFamily="34" charset="0"/>
                 <a:ea typeface="Montserrat" pitchFamily="34" charset="-122"/>
                 <a:cs typeface="Montserrat" pitchFamily="34" charset="-120"/>
               </a:rPr>
-              <a:t>перехід fallback — у діфі коду</a:t>
-            </a:r>
-            <a:endParaRPr lang="en-US" sz="1450" dirty="0"/>
-          </a:p>
-        </p:txBody>
-      </p:sp>
-      <p:sp>
-        <p:nvSpPr>
-          <p:cNvPr id="21" name="Text 18"/>
-          <p:cNvSpPr/>
-          <p:nvPr/>
-        </p:nvSpPr>
-        <p:spPr>
-          <a:xfrm>
-            <a:off x="8174736" y="2377440"/>
-            <a:ext cx="3118104" cy="576072"/>
-          </a:xfrm>
-          <a:prstGeom prst="rect">
-            <a:avLst/>
-          </a:prstGeom>
-          <a:noFill/>
-          <a:ln/>
-        </p:spPr>
-        <p:txBody>
-          <a:bodyPr wrap="square" lIns="0" tIns="0" rIns="0" bIns="0" rtlCol="0" anchor="t"/>
+              <a:t>Як скинути пароль?</a:t>
+            </a:r>
+            <a:endParaRPr lang="en-US" sz="950" dirty="0"/>
+          </a:p>
+        </p:txBody>
+      </p:sp>
+      <p:sp>
+        <p:nvSpPr>
+          <p:cNvPr id="35" name="Shape 32"/>
+          <p:cNvSpPr/>
+          <p:nvPr/>
+        </p:nvSpPr>
+        <p:spPr>
+          <a:xfrm>
+            <a:off x="8266176" y="3907917"/>
+            <a:ext cx="2710282" cy="306095"/>
+          </a:xfrm>
+          <a:prstGeom prst="roundRect">
+            <a:avLst>
+              <a:gd name="adj" fmla="val 29873"/>
+            </a:avLst>
+          </a:prstGeom>
+          <a:solidFill>
+            <a:srgbClr val="1E1A2B"/>
+          </a:solidFill>
+          <a:ln/>
+        </p:spPr>
+      </p:sp>
+      <p:sp>
+        <p:nvSpPr>
+          <p:cNvPr id="36" name="Text 33"/>
+          <p:cNvSpPr/>
+          <p:nvPr/>
+        </p:nvSpPr>
+        <p:spPr>
+          <a:xfrm>
+            <a:off x="8375904" y="3907917"/>
+            <a:ext cx="2490826" cy="306095"/>
+          </a:xfrm>
+          <a:prstGeom prst="rect">
+            <a:avLst/>
+          </a:prstGeom>
+          <a:noFill/>
+          <a:ln/>
+        </p:spPr>
+        <p:txBody>
+          <a:bodyPr wrap="square" lIns="0" tIns="0" rIns="0" bIns="0" rtlCol="0" anchor="ctr"/>
           <a:lstStyle/>
           <a:p>
             <a:pPr indent="0" marL="0">
-              <a:lnSpc>
-                <a:spcPct val="108000"/>
-              </a:lnSpc>
-              <a:buNone/>
-            </a:pPr>
-            <a:r>
-              <a:rPr lang="en-US" sz="1200" dirty="0">
-                <a:solidFill>
-                  <a:srgbClr val="E9E4F7"/>
+              <a:buNone/>
+            </a:pPr>
+            <a:r>
+              <a:rPr lang="en-US" sz="950" dirty="0">
+                <a:solidFill>
+                  <a:srgbClr val="D8D4E4"/>
                 </a:solidFill>
                 <a:latin typeface="Montserrat" pitchFamily="34" charset="0"/>
                 <a:ea typeface="Montserrat" pitchFamily="34" charset="-122"/>
                 <a:cs typeface="Montserrat" pitchFamily="34" charset="-120"/>
               </a:rPr>
-              <a:t>лічильник на цьому тижні не віддається нічим</a:t>
-            </a:r>
-            <a:endParaRPr lang="en-US" sz="1200" dirty="0"/>
-          </a:p>
-        </p:txBody>
-      </p:sp>
-      <p:sp>
-        <p:nvSpPr>
-          <p:cNvPr id="22" name="Shape 19"/>
-          <p:cNvSpPr/>
-          <p:nvPr/>
-        </p:nvSpPr>
-        <p:spPr>
-          <a:xfrm>
-            <a:off x="566928" y="3291840"/>
-            <a:ext cx="3520440" cy="1417320"/>
-          </a:xfrm>
-          <a:prstGeom prst="roundRect">
-            <a:avLst>
-              <a:gd name="adj" fmla="val 7742"/>
-            </a:avLst>
-          </a:prstGeom>
-          <a:solidFill>
-            <a:srgbClr val="000000"/>
-          </a:solidFill>
-          <a:ln/>
-        </p:spPr>
-      </p:sp>
-      <p:sp>
-        <p:nvSpPr>
-          <p:cNvPr id="23" name="Shape 20"/>
-          <p:cNvSpPr/>
-          <p:nvPr/>
-        </p:nvSpPr>
-        <p:spPr>
-          <a:xfrm>
-            <a:off x="768096" y="3474720"/>
-            <a:ext cx="384048" cy="384048"/>
-          </a:xfrm>
-          <a:prstGeom prst="ellipse">
-            <a:avLst/>
-          </a:prstGeom>
-          <a:solidFill>
-            <a:srgbClr val="5A05F4"/>
-          </a:solidFill>
-          <a:ln/>
-        </p:spPr>
-      </p:sp>
-      <p:sp>
-        <p:nvSpPr>
-          <p:cNvPr id="24" name="Text 21"/>
-          <p:cNvSpPr/>
-          <p:nvPr/>
-        </p:nvSpPr>
-        <p:spPr>
-          <a:xfrm>
-            <a:off x="768096" y="3474720"/>
-            <a:ext cx="384048" cy="384048"/>
+              <a:t>Надішліть запит на email підтримки.</a:t>
+            </a:r>
+            <a:endParaRPr lang="en-US" sz="950" dirty="0"/>
+          </a:p>
+        </p:txBody>
+      </p:sp>
+      <p:sp>
+        <p:nvSpPr>
+          <p:cNvPr id="37" name="Text 34"/>
+          <p:cNvSpPr/>
+          <p:nvPr/>
+        </p:nvSpPr>
+        <p:spPr>
+          <a:xfrm>
+            <a:off x="8302752" y="4259732"/>
+            <a:ext cx="2710282" cy="182880"/>
           </a:xfrm>
           <a:prstGeom prst="rect">
             <a:avLst/>
@@ -16275,270 +16739,27 @@
           <a:bodyPr wrap="square" lIns="0" tIns="0" rIns="0" bIns="0" rtlCol="0" anchor="ctr"/>
           <a:lstStyle/>
           <a:p>
-            <a:pPr algn="ctr" indent="0" marL="0">
-              <a:buNone/>
-            </a:pPr>
-            <a:r>
-              <a:rPr lang="en-US" sz="1200" b="1" dirty="0">
-                <a:solidFill>
-                  <a:srgbClr val="FFFFFF"/>
+            <a:pPr indent="0" marL="0">
+              <a:buNone/>
+            </a:pPr>
+            <a:r>
+              <a:rPr lang="en-US" sz="750" dirty="0">
+                <a:solidFill>
+                  <a:srgbClr val="3FCF8E"/>
                 </a:solidFill>
                 <a:latin typeface="Courier New" pitchFamily="34" charset="0"/>
                 <a:ea typeface="Courier New" pitchFamily="34" charset="-122"/>
                 <a:cs typeface="Courier New" pitchFamily="34" charset="-120"/>
               </a:rPr>
-              <a:t>4</a:t>
-            </a:r>
-            <a:endParaRPr lang="en-US" sz="1200" dirty="0"/>
-          </a:p>
-        </p:txBody>
-      </p:sp>
-      <p:sp>
-        <p:nvSpPr>
-          <p:cNvPr id="25" name="Text 22"/>
-          <p:cNvSpPr/>
-          <p:nvPr/>
-        </p:nvSpPr>
-        <p:spPr>
-          <a:xfrm>
-            <a:off x="1280160" y="3447288"/>
-            <a:ext cx="2606040" cy="438912"/>
-          </a:xfrm>
-          <a:prstGeom prst="rect">
-            <a:avLst/>
-          </a:prstGeom>
-          <a:noFill/>
-          <a:ln/>
-        </p:spPr>
-        <p:txBody>
-          <a:bodyPr wrap="square" lIns="0" tIns="0" rIns="0" bIns="0" rtlCol="0" anchor="ctr"/>
-          <a:lstStyle/>
-          <a:p>
-            <a:pPr indent="0" marL="0">
-              <a:buNone/>
-            </a:pPr>
-            <a:r>
-              <a:rPr lang="en-US" sz="1450" b="1" dirty="0">
-                <a:solidFill>
-                  <a:srgbClr val="FF6B6B"/>
-                </a:solidFill>
-                <a:latin typeface="Montserrat" pitchFamily="34" charset="0"/>
-                <a:ea typeface="Montserrat" pitchFamily="34" charset="-122"/>
-                <a:cs typeface="Montserrat" pitchFamily="34" charset="-120"/>
-              </a:rPr>
-              <a:t>опц.: 3 × __fail_503 → open</a:t>
-            </a:r>
-            <a:endParaRPr lang="en-US" sz="1450" dirty="0"/>
-          </a:p>
-        </p:txBody>
-      </p:sp>
-      <p:sp>
-        <p:nvSpPr>
-          <p:cNvPr id="26" name="Text 23"/>
-          <p:cNvSpPr/>
-          <p:nvPr/>
-        </p:nvSpPr>
-        <p:spPr>
-          <a:xfrm>
-            <a:off x="768096" y="3977640"/>
-            <a:ext cx="3118104" cy="576072"/>
-          </a:xfrm>
-          <a:prstGeom prst="rect">
-            <a:avLst/>
-          </a:prstGeom>
-          <a:noFill/>
-          <a:ln/>
-        </p:spPr>
-        <p:txBody>
-          <a:bodyPr wrap="square" lIns="0" tIns="0" rIns="0" bIns="0" rtlCol="0" anchor="t"/>
-          <a:lstStyle/>
-          <a:p>
-            <a:pPr indent="0" marL="0">
-              <a:lnSpc>
-                <a:spcPct val="108000"/>
-              </a:lnSpc>
-              <a:buNone/>
-            </a:pPr>
-            <a:r>
-              <a:rPr lang="en-US" sz="1200" dirty="0">
-                <a:solidFill>
-                  <a:srgbClr val="E9E4F7"/>
-                </a:solidFill>
-                <a:latin typeface="Montserrat" pitchFamily="34" charset="0"/>
-                <a:ea typeface="Montserrat" pitchFamily="34" charset="-122"/>
-                <a:cs typeface="Montserrat" pitchFamily="34" charset="-120"/>
-              </a:rPr>
-              <a:t>здорове питання миттєво отримує заглушку</a:t>
-            </a:r>
-            <a:endParaRPr lang="en-US" sz="1200" dirty="0"/>
-          </a:p>
-        </p:txBody>
-      </p:sp>
-      <p:sp>
-        <p:nvSpPr>
-          <p:cNvPr id="27" name="Shape 24"/>
-          <p:cNvSpPr/>
-          <p:nvPr/>
-        </p:nvSpPr>
-        <p:spPr>
-          <a:xfrm>
-            <a:off x="4270248" y="3291840"/>
-            <a:ext cx="3520440" cy="1417320"/>
-          </a:xfrm>
-          <a:prstGeom prst="roundRect">
-            <a:avLst>
-              <a:gd name="adj" fmla="val 7742"/>
-            </a:avLst>
-          </a:prstGeom>
-          <a:solidFill>
-            <a:srgbClr val="000000"/>
-          </a:solidFill>
-          <a:ln/>
-        </p:spPr>
-      </p:sp>
-      <p:sp>
-        <p:nvSpPr>
-          <p:cNvPr id="28" name="Shape 25"/>
-          <p:cNvSpPr/>
-          <p:nvPr/>
-        </p:nvSpPr>
-        <p:spPr>
-          <a:xfrm>
-            <a:off x="4471416" y="3474720"/>
-            <a:ext cx="384048" cy="384048"/>
-          </a:xfrm>
-          <a:prstGeom prst="ellipse">
-            <a:avLst/>
-          </a:prstGeom>
-          <a:solidFill>
-            <a:srgbClr val="5A05F4"/>
-          </a:solidFill>
-          <a:ln/>
-        </p:spPr>
-      </p:sp>
-      <p:sp>
-        <p:nvSpPr>
-          <p:cNvPr id="29" name="Text 26"/>
-          <p:cNvSpPr/>
-          <p:nvPr/>
-        </p:nvSpPr>
-        <p:spPr>
-          <a:xfrm>
-            <a:off x="4471416" y="3474720"/>
-            <a:ext cx="384048" cy="384048"/>
-          </a:xfrm>
-          <a:prstGeom prst="rect">
-            <a:avLst/>
-          </a:prstGeom>
-          <a:noFill/>
-          <a:ln/>
-        </p:spPr>
-        <p:txBody>
-          <a:bodyPr wrap="square" lIns="0" tIns="0" rIns="0" bIns="0" rtlCol="0" anchor="ctr"/>
-          <a:lstStyle/>
-          <a:p>
-            <a:pPr algn="ctr" indent="0" marL="0">
-              <a:buNone/>
-            </a:pPr>
-            <a:r>
-              <a:rPr lang="en-US" sz="1200" b="1" dirty="0">
-                <a:solidFill>
-                  <a:srgbClr val="FFFFFF"/>
-                </a:solidFill>
-                <a:latin typeface="Courier New" pitchFamily="34" charset="0"/>
-                <a:ea typeface="Courier New" pitchFamily="34" charset="-122"/>
-                <a:cs typeface="Courier New" pitchFamily="34" charset="-120"/>
-              </a:rPr>
-              <a:t>5</a:t>
-            </a:r>
-            <a:endParaRPr lang="en-US" sz="1200" dirty="0"/>
-          </a:p>
-        </p:txBody>
-      </p:sp>
-      <p:sp>
-        <p:nvSpPr>
-          <p:cNvPr id="30" name="Text 27"/>
-          <p:cNvSpPr/>
-          <p:nvPr/>
-        </p:nvSpPr>
-        <p:spPr>
-          <a:xfrm>
-            <a:off x="4983480" y="3447288"/>
-            <a:ext cx="2606040" cy="438912"/>
-          </a:xfrm>
-          <a:prstGeom prst="rect">
-            <a:avLst/>
-          </a:prstGeom>
-          <a:noFill/>
-          <a:ln/>
-        </p:spPr>
-        <p:txBody>
-          <a:bodyPr wrap="square" lIns="0" tIns="0" rIns="0" bIns="0" rtlCol="0" anchor="ctr"/>
-          <a:lstStyle/>
-          <a:p>
-            <a:pPr indent="0" marL="0">
-              <a:buNone/>
-            </a:pPr>
-            <a:r>
-              <a:rPr lang="en-US" sz="1450" b="1" dirty="0">
-                <a:solidFill>
-                  <a:srgbClr val="6BA0F8"/>
-                </a:solidFill>
-                <a:latin typeface="Montserrat" pitchFamily="34" charset="0"/>
-                <a:ea typeface="Montserrat" pitchFamily="34" charset="-122"/>
-                <a:cs typeface="Montserrat" pitchFamily="34" charset="-120"/>
-              </a:rPr>
-              <a:t>опц.: пауза ~5 с → probe</a:t>
-            </a:r>
-            <a:endParaRPr lang="en-US" sz="1450" dirty="0"/>
-          </a:p>
-        </p:txBody>
-      </p:sp>
-      <p:sp>
-        <p:nvSpPr>
-          <p:cNvPr id="31" name="Text 28"/>
-          <p:cNvSpPr/>
-          <p:nvPr/>
-        </p:nvSpPr>
-        <p:spPr>
-          <a:xfrm>
-            <a:off x="4471416" y="3977640"/>
-            <a:ext cx="3118104" cy="576072"/>
-          </a:xfrm>
-          <a:prstGeom prst="rect">
-            <a:avLst/>
-          </a:prstGeom>
-          <a:noFill/>
-          <a:ln/>
-        </p:spPr>
-        <p:txBody>
-          <a:bodyPr wrap="square" lIns="0" tIns="0" rIns="0" bIns="0" rtlCol="0" anchor="t"/>
-          <a:lstStyle/>
-          <a:p>
-            <a:pPr indent="0" marL="0">
-              <a:lnSpc>
-                <a:spcPct val="108000"/>
-              </a:lnSpc>
-              <a:buNone/>
-            </a:pPr>
-            <a:r>
-              <a:rPr lang="en-US" sz="1200" dirty="0">
-                <a:solidFill>
-                  <a:srgbClr val="E9E4F7"/>
-                </a:solidFill>
-                <a:latin typeface="Montserrat" pitchFamily="34" charset="0"/>
-                <a:ea typeface="Montserrat" pitchFamily="34" charset="-122"/>
-                <a:cs typeface="Montserrat" pitchFamily="34" charset="-120"/>
-              </a:rPr>
-              <a:t>звичайне питання закриває circuit</a:t>
-            </a:r>
-            <a:endParaRPr lang="en-US" sz="1200" dirty="0"/>
-          </a:p>
-        </p:txBody>
-      </p:sp>
-      <p:sp>
-        <p:nvSpPr>
-          <p:cNvPr id="32" name="Shape 29"/>
+              <a:t>200 · чат живий ✓</a:t>
+            </a:r>
+            <a:endParaRPr lang="en-US" sz="750" dirty="0"/>
+          </a:p>
+        </p:txBody>
+      </p:sp>
+      <p:sp>
+        <p:nvSpPr>
+          <p:cNvPr id="38" name="Shape 35"/>
           <p:cNvSpPr/>
           <p:nvPr/>
         </p:nvSpPr>
@@ -16560,7 +16781,7 @@
       </p:sp>
       <p:sp>
         <p:nvSpPr>
-          <p:cNvPr id="33" name="Shape 30"/>
+          <p:cNvPr id="39" name="Shape 36"/>
           <p:cNvSpPr/>
           <p:nvPr/>
         </p:nvSpPr>
@@ -16580,7 +16801,7 @@
       </p:sp>
       <p:sp>
         <p:nvSpPr>
-          <p:cNvPr id="34" name="Text 31"/>
+          <p:cNvPr id="40" name="Text 37"/>
           <p:cNvSpPr/>
           <p:nvPr/>
         </p:nvSpPr>
@@ -16619,7 +16840,7 @@
       </p:sp>
       <p:sp>
         <p:nvSpPr>
-          <p:cNvPr id="35" name="Text 32"/>
+          <p:cNvPr id="41" name="Text 38"/>
           <p:cNvSpPr/>
           <p:nvPr/>
         </p:nvSpPr>
@@ -16658,7 +16879,7 @@
       </p:sp>
       <p:sp>
         <p:nvSpPr>
-          <p:cNvPr id="36" name="Text 33"/>
+          <p:cNvPr id="42" name="Text 39"/>
           <p:cNvSpPr/>
           <p:nvPr/>
         </p:nvSpPr>
@@ -17740,11 +17961,11 @@
         <p:spPr>
           <a:xfrm>
             <a:off x="566928" y="1737360"/>
-            <a:ext cx="3566160" cy="2148840"/>
+            <a:ext cx="7223760" cy="1005840"/>
           </a:xfrm>
           <a:prstGeom prst="roundRect">
             <a:avLst>
-              <a:gd name="adj" fmla="val 5106"/>
+              <a:gd name="adj" fmla="val 10909"/>
             </a:avLst>
           </a:prstGeom>
           <a:solidFill>
@@ -17762,7 +17983,7 @@
         <p:spPr>
           <a:xfrm>
             <a:off x="768096" y="1892808"/>
-            <a:ext cx="3163824" cy="438912"/>
+            <a:ext cx="6821424" cy="438912"/>
           </a:xfrm>
           <a:prstGeom prst="rect">
             <a:avLst/>
@@ -17801,7 +18022,7 @@
         <p:spPr>
           <a:xfrm>
             <a:off x="768096" y="2423160"/>
-            <a:ext cx="3163824" cy="1307592"/>
+            <a:ext cx="6821424" cy="164592"/>
           </a:xfrm>
           <a:prstGeom prst="rect">
             <a:avLst/>
@@ -17842,12 +18063,12 @@
         </p:nvSpPr>
         <p:spPr>
           <a:xfrm>
-            <a:off x="4315968" y="1737360"/>
-            <a:ext cx="3566160" cy="2148840"/>
+            <a:off x="566928" y="2880360"/>
+            <a:ext cx="7223760" cy="1005840"/>
           </a:xfrm>
           <a:prstGeom prst="roundRect">
             <a:avLst>
-              <a:gd name="adj" fmla="val 5106"/>
+              <a:gd name="adj" fmla="val 10909"/>
             </a:avLst>
           </a:prstGeom>
           <a:solidFill>
@@ -17864,8 +18085,8 @@
         </p:nvSpPr>
         <p:spPr>
           <a:xfrm>
-            <a:off x="4517136" y="1892808"/>
-            <a:ext cx="3163824" cy="438912"/>
+            <a:off x="768096" y="3035808"/>
+            <a:ext cx="6821424" cy="438912"/>
           </a:xfrm>
           <a:prstGeom prst="rect">
             <a:avLst/>
@@ -17903,8 +18124,8 @@
         </p:nvSpPr>
         <p:spPr>
           <a:xfrm>
-            <a:off x="4517136" y="2423160"/>
-            <a:ext cx="3163824" cy="1307592"/>
+            <a:off x="768096" y="3566160"/>
+            <a:ext cx="6821424" cy="164592"/>
           </a:xfrm>
           <a:prstGeom prst="rect">
             <a:avLst/>
@@ -17945,12 +18166,12 @@
         </p:nvSpPr>
         <p:spPr>
           <a:xfrm>
-            <a:off x="8065008" y="1737360"/>
-            <a:ext cx="3566160" cy="2148840"/>
+            <a:off x="566928" y="4023360"/>
+            <a:ext cx="7223760" cy="1005840"/>
           </a:xfrm>
           <a:prstGeom prst="roundRect">
             <a:avLst>
-              <a:gd name="adj" fmla="val 5106"/>
+              <a:gd name="adj" fmla="val 10909"/>
             </a:avLst>
           </a:prstGeom>
           <a:solidFill>
@@ -17967,8 +18188,8 @@
         </p:nvSpPr>
         <p:spPr>
           <a:xfrm>
-            <a:off x="8266176" y="1892808"/>
-            <a:ext cx="3163824" cy="438912"/>
+            <a:off x="768096" y="4178808"/>
+            <a:ext cx="6821424" cy="438912"/>
           </a:xfrm>
           <a:prstGeom prst="rect">
             <a:avLst/>
@@ -18006,8 +18227,8 @@
         </p:nvSpPr>
         <p:spPr>
           <a:xfrm>
-            <a:off x="8266176" y="2423160"/>
-            <a:ext cx="3163824" cy="1307592"/>
+            <a:off x="768096" y="4709160"/>
+            <a:ext cx="6821424" cy="164592"/>
           </a:xfrm>
           <a:prstGeom prst="rect">
             <a:avLst/>
@@ -18048,12 +18269,529 @@
         </p:nvSpPr>
         <p:spPr>
           <a:xfrm>
-            <a:off x="566928" y="4297680"/>
-            <a:ext cx="11064240" cy="1600200"/>
+            <a:off x="8156448" y="1737360"/>
+            <a:ext cx="3474720" cy="3291840"/>
           </a:xfrm>
           <a:prstGeom prst="roundRect">
             <a:avLst>
-              <a:gd name="adj" fmla="val 6857"/>
+              <a:gd name="adj" fmla="val 2222"/>
+            </a:avLst>
+          </a:prstGeom>
+          <a:solidFill>
+            <a:srgbClr val="0A0810"/>
+          </a:solidFill>
+          <a:ln w="12700">
+            <a:solidFill>
+              <a:srgbClr val="D9D9D9"/>
+            </a:solidFill>
+            <a:prstDash val="solid"/>
+          </a:ln>
+        </p:spPr>
+      </p:sp>
+      <p:sp>
+        <p:nvSpPr>
+          <p:cNvPr id="17" name="Shape 14"/>
+          <p:cNvSpPr/>
+          <p:nvPr/>
+        </p:nvSpPr>
+        <p:spPr>
+          <a:xfrm>
+            <a:off x="8284464" y="1856232"/>
+            <a:ext cx="73152" cy="73152"/>
+          </a:xfrm>
+          <a:prstGeom prst="ellipse">
+            <a:avLst/>
+          </a:prstGeom>
+          <a:solidFill>
+            <a:srgbClr val="FF6B6B"/>
+          </a:solidFill>
+          <a:ln/>
+        </p:spPr>
+      </p:sp>
+      <p:sp>
+        <p:nvSpPr>
+          <p:cNvPr id="18" name="Shape 15"/>
+          <p:cNvSpPr/>
+          <p:nvPr/>
+        </p:nvSpPr>
+        <p:spPr>
+          <a:xfrm>
+            <a:off x="8430768" y="1856232"/>
+            <a:ext cx="73152" cy="73152"/>
+          </a:xfrm>
+          <a:prstGeom prst="ellipse">
+            <a:avLst/>
+          </a:prstGeom>
+          <a:solidFill>
+            <a:srgbClr val="6BA0F8"/>
+          </a:solidFill>
+          <a:ln/>
+        </p:spPr>
+      </p:sp>
+      <p:sp>
+        <p:nvSpPr>
+          <p:cNvPr id="19" name="Shape 16"/>
+          <p:cNvSpPr/>
+          <p:nvPr/>
+        </p:nvSpPr>
+        <p:spPr>
+          <a:xfrm>
+            <a:off x="8577072" y="1856232"/>
+            <a:ext cx="73152" cy="73152"/>
+          </a:xfrm>
+          <a:prstGeom prst="ellipse">
+            <a:avLst/>
+          </a:prstGeom>
+          <a:solidFill>
+            <a:srgbClr val="3FCF8E"/>
+          </a:solidFill>
+          <a:ln/>
+        </p:spPr>
+      </p:sp>
+      <p:sp>
+        <p:nvSpPr>
+          <p:cNvPr id="20" name="Text 17"/>
+          <p:cNvSpPr/>
+          <p:nvPr/>
+        </p:nvSpPr>
+        <p:spPr>
+          <a:xfrm>
+            <a:off x="8759952" y="1737360"/>
+            <a:ext cx="2761488" cy="310896"/>
+          </a:xfrm>
+          <a:prstGeom prst="rect">
+            <a:avLst/>
+          </a:prstGeom>
+          <a:noFill/>
+          <a:ln/>
+        </p:spPr>
+        <p:txBody>
+          <a:bodyPr wrap="square" lIns="0" tIns="0" rIns="0" bIns="0" rtlCol="0" anchor="ctr"/>
+          <a:lstStyle/>
+          <a:p>
+            <a:pPr indent="0" marL="0">
+              <a:buNone/>
+            </a:pPr>
+            <a:r>
+              <a:rPr lang="en-US" sz="800" dirty="0">
+                <a:solidFill>
+                  <a:srgbClr val="9A94AA"/>
+                </a:solidFill>
+                <a:latin typeface="Courier New" pitchFamily="34" charset="0"/>
+                <a:ea typeface="Courier New" pitchFamily="34" charset="-122"/>
+                <a:cs typeface="Courier New" pitchFamily="34" charset="-120"/>
+              </a:rPr>
+              <a:t>лог · requests</a:t>
+            </a:r>
+            <a:endParaRPr lang="en-US" sz="800" dirty="0"/>
+          </a:p>
+        </p:txBody>
+      </p:sp>
+      <p:sp>
+        <p:nvSpPr>
+          <p:cNvPr id="21" name="Shape 18"/>
+          <p:cNvSpPr/>
+          <p:nvPr/>
+        </p:nvSpPr>
+        <p:spPr>
+          <a:xfrm>
+            <a:off x="8156448" y="2048256"/>
+            <a:ext cx="3474720" cy="0"/>
+          </a:xfrm>
+          <a:prstGeom prst="line">
+            <a:avLst/>
+          </a:prstGeom>
+          <a:noFill/>
+          <a:ln w="9525">
+            <a:solidFill>
+              <a:srgbClr val="2A2438"/>
+            </a:solidFill>
+            <a:prstDash val="solid"/>
+          </a:ln>
+        </p:spPr>
+      </p:sp>
+      <p:sp>
+        <p:nvSpPr>
+          <p:cNvPr id="22" name="Text 19"/>
+          <p:cNvSpPr/>
+          <p:nvPr/>
+        </p:nvSpPr>
+        <p:spPr>
+          <a:xfrm>
+            <a:off x="8321040" y="2157984"/>
+            <a:ext cx="3145536" cy="221513"/>
+          </a:xfrm>
+          <a:prstGeom prst="rect">
+            <a:avLst/>
+          </a:prstGeom>
+          <a:noFill/>
+          <a:ln/>
+        </p:spPr>
+        <p:txBody>
+          <a:bodyPr wrap="square" lIns="0" tIns="0" rIns="0" bIns="0" rtlCol="0" anchor="ctr"/>
+          <a:lstStyle/>
+          <a:p>
+            <a:pPr indent="0" marL="0">
+              <a:buNone/>
+            </a:pPr>
+            <a:r>
+              <a:rPr lang="en-US" sz="950" dirty="0">
+                <a:solidFill>
+                  <a:srgbClr val="D8D4E4"/>
+                </a:solidFill>
+                <a:latin typeface="Courier New" pitchFamily="34" charset="0"/>
+                <a:ea typeface="Courier New" pitchFamily="34" charset="-122"/>
+                <a:cs typeface="Courier New" pitchFamily="34" charset="-120"/>
+              </a:rPr>
+              <a:t>SELECT status, latency_ms</a:t>
+            </a:r>
+            <a:endParaRPr lang="en-US" sz="950" dirty="0"/>
+          </a:p>
+        </p:txBody>
+      </p:sp>
+      <p:sp>
+        <p:nvSpPr>
+          <p:cNvPr id="23" name="Text 20"/>
+          <p:cNvSpPr/>
+          <p:nvPr/>
+        </p:nvSpPr>
+        <p:spPr>
+          <a:xfrm>
+            <a:off x="8321040" y="2379497"/>
+            <a:ext cx="3145536" cy="221513"/>
+          </a:xfrm>
+          <a:prstGeom prst="rect">
+            <a:avLst/>
+          </a:prstGeom>
+          <a:noFill/>
+          <a:ln/>
+        </p:spPr>
+        <p:txBody>
+          <a:bodyPr wrap="square" lIns="0" tIns="0" rIns="0" bIns="0" rtlCol="0" anchor="ctr"/>
+          <a:lstStyle/>
+          <a:p>
+            <a:pPr indent="0" marL="0">
+              <a:buNone/>
+            </a:pPr>
+            <a:r>
+              <a:rPr lang="en-US" sz="950" dirty="0">
+                <a:solidFill>
+                  <a:srgbClr val="D8D4E4"/>
+                </a:solidFill>
+                <a:latin typeface="Courier New" pitchFamily="34" charset="0"/>
+                <a:ea typeface="Courier New" pitchFamily="34" charset="-122"/>
+                <a:cs typeface="Courier New" pitchFamily="34" charset="-120"/>
+              </a:rPr>
+              <a:t>  FROM requests LIMIT 4;</a:t>
+            </a:r>
+            <a:endParaRPr lang="en-US" sz="950" dirty="0"/>
+          </a:p>
+        </p:txBody>
+      </p:sp>
+      <p:sp>
+        <p:nvSpPr>
+          <p:cNvPr id="24" name="Text 21"/>
+          <p:cNvSpPr/>
+          <p:nvPr/>
+        </p:nvSpPr>
+        <p:spPr>
+          <a:xfrm>
+            <a:off x="8321040" y="2601011"/>
+            <a:ext cx="3145536" cy="221513"/>
+          </a:xfrm>
+          <a:prstGeom prst="rect">
+            <a:avLst/>
+          </a:prstGeom>
+          <a:noFill/>
+          <a:ln/>
+        </p:spPr>
+        <p:txBody>
+          <a:bodyPr wrap="square" lIns="0" tIns="0" rIns="0" bIns="0" rtlCol="0" anchor="ctr"/>
+          <a:lstStyle/>
+          <a:p>
+            <a:pPr indent="0" marL="0">
+              <a:buNone/>
+            </a:pPr>
+            <a:endParaRPr lang="en-US" sz="950" dirty="0"/>
+          </a:p>
+        </p:txBody>
+      </p:sp>
+      <p:sp>
+        <p:nvSpPr>
+          <p:cNvPr id="25" name="Text 22"/>
+          <p:cNvSpPr/>
+          <p:nvPr/>
+        </p:nvSpPr>
+        <p:spPr>
+          <a:xfrm>
+            <a:off x="8321040" y="2822524"/>
+            <a:ext cx="3145536" cy="221513"/>
+          </a:xfrm>
+          <a:prstGeom prst="rect">
+            <a:avLst/>
+          </a:prstGeom>
+          <a:noFill/>
+          <a:ln/>
+        </p:spPr>
+        <p:txBody>
+          <a:bodyPr wrap="square" lIns="0" tIns="0" rIns="0" bIns="0" rtlCol="0" anchor="ctr"/>
+          <a:lstStyle/>
+          <a:p>
+            <a:pPr indent="0" marL="0">
+              <a:buNone/>
+            </a:pPr>
+            <a:r>
+              <a:rPr lang="en-US" sz="950" dirty="0">
+                <a:solidFill>
+                  <a:srgbClr val="FF6B6B"/>
+                </a:solidFill>
+                <a:latin typeface="Courier New" pitchFamily="34" charset="0"/>
+                <a:ea typeface="Courier New" pitchFamily="34" charset="-122"/>
+                <a:cs typeface="Courier New" pitchFamily="34" charset="-120"/>
+              </a:rPr>
+              <a:t> 503 |   12 ms   ← __fail_503</a:t>
+            </a:r>
+            <a:endParaRPr lang="en-US" sz="950" dirty="0"/>
+          </a:p>
+        </p:txBody>
+      </p:sp>
+      <p:sp>
+        <p:nvSpPr>
+          <p:cNvPr id="26" name="Text 23"/>
+          <p:cNvSpPr/>
+          <p:nvPr/>
+        </p:nvSpPr>
+        <p:spPr>
+          <a:xfrm>
+            <a:off x="8321040" y="3044038"/>
+            <a:ext cx="3145536" cy="221513"/>
+          </a:xfrm>
+          <a:prstGeom prst="rect">
+            <a:avLst/>
+          </a:prstGeom>
+          <a:noFill/>
+          <a:ln/>
+        </p:spPr>
+        <p:txBody>
+          <a:bodyPr wrap="square" lIns="0" tIns="0" rIns="0" bIns="0" rtlCol="0" anchor="ctr"/>
+          <a:lstStyle/>
+          <a:p>
+            <a:pPr indent="0" marL="0">
+              <a:buNone/>
+            </a:pPr>
+            <a:r>
+              <a:rPr lang="en-US" sz="950" dirty="0">
+                <a:solidFill>
+                  <a:srgbClr val="FF6B6B"/>
+                </a:solidFill>
+                <a:latin typeface="Courier New" pitchFamily="34" charset="0"/>
+                <a:ea typeface="Courier New" pitchFamily="34" charset="-122"/>
+                <a:cs typeface="Courier New" pitchFamily="34" charset="-120"/>
+              </a:rPr>
+              <a:t> 503 |    9 ms   ← __fail_503</a:t>
+            </a:r>
+            <a:endParaRPr lang="en-US" sz="950" dirty="0"/>
+          </a:p>
+        </p:txBody>
+      </p:sp>
+      <p:sp>
+        <p:nvSpPr>
+          <p:cNvPr id="27" name="Text 24"/>
+          <p:cNvSpPr/>
+          <p:nvPr/>
+        </p:nvSpPr>
+        <p:spPr>
+          <a:xfrm>
+            <a:off x="8321040" y="3265551"/>
+            <a:ext cx="3145536" cy="221513"/>
+          </a:xfrm>
+          <a:prstGeom prst="rect">
+            <a:avLst/>
+          </a:prstGeom>
+          <a:noFill/>
+          <a:ln/>
+        </p:spPr>
+        <p:txBody>
+          <a:bodyPr wrap="square" lIns="0" tIns="0" rIns="0" bIns="0" rtlCol="0" anchor="ctr"/>
+          <a:lstStyle/>
+          <a:p>
+            <a:pPr indent="0" marL="0">
+              <a:buNone/>
+            </a:pPr>
+            <a:r>
+              <a:rPr lang="en-US" sz="950" dirty="0">
+                <a:solidFill>
+                  <a:srgbClr val="3FCF8E"/>
+                </a:solidFill>
+                <a:latin typeface="Courier New" pitchFamily="34" charset="0"/>
+                <a:ea typeface="Courier New" pitchFamily="34" charset="-122"/>
+                <a:cs typeface="Courier New" pitchFamily="34" charset="-120"/>
+              </a:rPr>
+              <a:t> 200 | 1180 ms</a:t>
+            </a:r>
+            <a:endParaRPr lang="en-US" sz="950" dirty="0"/>
+          </a:p>
+        </p:txBody>
+      </p:sp>
+      <p:sp>
+        <p:nvSpPr>
+          <p:cNvPr id="28" name="Text 25"/>
+          <p:cNvSpPr/>
+          <p:nvPr/>
+        </p:nvSpPr>
+        <p:spPr>
+          <a:xfrm>
+            <a:off x="8321040" y="3487064"/>
+            <a:ext cx="3145536" cy="221513"/>
+          </a:xfrm>
+          <a:prstGeom prst="rect">
+            <a:avLst/>
+          </a:prstGeom>
+          <a:noFill/>
+          <a:ln/>
+        </p:spPr>
+        <p:txBody>
+          <a:bodyPr wrap="square" lIns="0" tIns="0" rIns="0" bIns="0" rtlCol="0" anchor="ctr"/>
+          <a:lstStyle/>
+          <a:p>
+            <a:pPr indent="0" marL="0">
+              <a:buNone/>
+            </a:pPr>
+            <a:r>
+              <a:rPr lang="en-US" sz="950" dirty="0">
+                <a:solidFill>
+                  <a:srgbClr val="3FCF8E"/>
+                </a:solidFill>
+                <a:latin typeface="Courier New" pitchFamily="34" charset="0"/>
+                <a:ea typeface="Courier New" pitchFamily="34" charset="-122"/>
+                <a:cs typeface="Courier New" pitchFamily="34" charset="-120"/>
+              </a:rPr>
+              <a:t> 200 | 1204 ms</a:t>
+            </a:r>
+            <a:endParaRPr lang="en-US" sz="950" dirty="0"/>
+          </a:p>
+        </p:txBody>
+      </p:sp>
+      <p:sp>
+        <p:nvSpPr>
+          <p:cNvPr id="29" name="Text 26"/>
+          <p:cNvSpPr/>
+          <p:nvPr/>
+        </p:nvSpPr>
+        <p:spPr>
+          <a:xfrm>
+            <a:off x="8321040" y="3708578"/>
+            <a:ext cx="3145536" cy="221513"/>
+          </a:xfrm>
+          <a:prstGeom prst="rect">
+            <a:avLst/>
+          </a:prstGeom>
+          <a:noFill/>
+          <a:ln/>
+        </p:spPr>
+        <p:txBody>
+          <a:bodyPr wrap="square" lIns="0" tIns="0" rIns="0" bIns="0" rtlCol="0" anchor="ctr"/>
+          <a:lstStyle/>
+          <a:p>
+            <a:pPr indent="0" marL="0">
+              <a:buNone/>
+            </a:pPr>
+            <a:endParaRPr lang="en-US" sz="950" dirty="0"/>
+          </a:p>
+        </p:txBody>
+      </p:sp>
+      <p:sp>
+        <p:nvSpPr>
+          <p:cNvPr id="30" name="Text 27"/>
+          <p:cNvSpPr/>
+          <p:nvPr/>
+        </p:nvSpPr>
+        <p:spPr>
+          <a:xfrm>
+            <a:off x="8321040" y="3930091"/>
+            <a:ext cx="3145536" cy="221513"/>
+          </a:xfrm>
+          <a:prstGeom prst="rect">
+            <a:avLst/>
+          </a:prstGeom>
+          <a:noFill/>
+          <a:ln/>
+        </p:spPr>
+        <p:txBody>
+          <a:bodyPr wrap="square" lIns="0" tIns="0" rIns="0" bIns="0" rtlCol="0" anchor="ctr"/>
+          <a:lstStyle/>
+          <a:p>
+            <a:pPr indent="0" marL="0">
+              <a:buNone/>
+            </a:pPr>
+            <a:r>
+              <a:rPr lang="en-US" sz="950" dirty="0">
+                <a:solidFill>
+                  <a:srgbClr val="6BA0F8"/>
+                </a:solidFill>
+                <a:latin typeface="Courier New" pitchFamily="34" charset="0"/>
+                <a:ea typeface="Courier New" pitchFamily="34" charset="-122"/>
+                <a:cs typeface="Courier New" pitchFamily="34" charset="-120"/>
+              </a:rPr>
+              <a:t>fallback_events: 2</a:t>
+            </a:r>
+            <a:endParaRPr lang="en-US" sz="950" dirty="0"/>
+          </a:p>
+        </p:txBody>
+      </p:sp>
+      <p:sp>
+        <p:nvSpPr>
+          <p:cNvPr id="31" name="Text 28"/>
+          <p:cNvSpPr/>
+          <p:nvPr/>
+        </p:nvSpPr>
+        <p:spPr>
+          <a:xfrm>
+            <a:off x="8321040" y="4151605"/>
+            <a:ext cx="3145536" cy="221513"/>
+          </a:xfrm>
+          <a:prstGeom prst="rect">
+            <a:avLst/>
+          </a:prstGeom>
+          <a:noFill/>
+          <a:ln/>
+        </p:spPr>
+        <p:txBody>
+          <a:bodyPr wrap="square" lIns="0" tIns="0" rIns="0" bIns="0" rtlCol="0" anchor="ctr"/>
+          <a:lstStyle/>
+          <a:p>
+            <a:pPr indent="0" marL="0">
+              <a:buNone/>
+            </a:pPr>
+            <a:r>
+              <a:rPr lang="en-US" sz="950" dirty="0">
+                <a:solidFill>
+                  <a:srgbClr val="3FCF8E"/>
+                </a:solidFill>
+                <a:latin typeface="Courier New" pitchFamily="34" charset="0"/>
+                <a:ea typeface="Courier New" pitchFamily="34" charset="-122"/>
+                <a:cs typeface="Courier New" pitchFamily="34" charset="-120"/>
+              </a:rPr>
+              <a:t>500 користувачу: 0 ✓</a:t>
+            </a:r>
+            <a:endParaRPr lang="en-US" sz="950" dirty="0"/>
+          </a:p>
+        </p:txBody>
+      </p:sp>
+      <p:sp>
+        <p:nvSpPr>
+          <p:cNvPr id="32" name="Shape 29"/>
+          <p:cNvSpPr/>
+          <p:nvPr/>
+        </p:nvSpPr>
+        <p:spPr>
+          <a:xfrm>
+            <a:off x="566928" y="5212080"/>
+            <a:ext cx="11064240" cy="914400"/>
+          </a:xfrm>
+          <a:prstGeom prst="roundRect">
+            <a:avLst>
+              <a:gd name="adj" fmla="val 12000"/>
             </a:avLst>
           </a:prstGeom>
           <a:solidFill>
@@ -18069,13 +18807,13 @@
       </p:sp>
       <p:sp>
         <p:nvSpPr>
-          <p:cNvPr id="17" name="Text 14"/>
-          <p:cNvSpPr/>
-          <p:nvPr/>
-        </p:nvSpPr>
-        <p:spPr>
-          <a:xfrm>
-            <a:off x="786384" y="4425696"/>
+          <p:cNvPr id="33" name="Text 30"/>
+          <p:cNvSpPr/>
+          <p:nvPr/>
+        </p:nvSpPr>
+        <p:spPr>
+          <a:xfrm>
+            <a:off x="786384" y="5340096"/>
             <a:ext cx="10625328" cy="219456"/>
           </a:xfrm>
           <a:prstGeom prst="rect">
@@ -18108,14 +18846,14 @@
       </p:sp>
       <p:sp>
         <p:nvSpPr>
-          <p:cNvPr id="18" name="Text 15"/>
-          <p:cNvSpPr/>
-          <p:nvPr/>
-        </p:nvSpPr>
-        <p:spPr>
-          <a:xfrm>
-            <a:off x="786384" y="4681728"/>
-            <a:ext cx="10625328" cy="1088136"/>
+          <p:cNvPr id="34" name="Text 31"/>
+          <p:cNvSpPr/>
+          <p:nvPr/>
+        </p:nvSpPr>
+        <p:spPr>
+          <a:xfrm>
+            <a:off x="786384" y="5596128"/>
+            <a:ext cx="10625328" cy="402336"/>
           </a:xfrm>
           <a:prstGeom prst="rect">
             <a:avLst/>

--- a/docs/decks/L07.pptx
+++ b/docs/decks/L07.pptx
@@ -12184,7 +12184,7 @@
                 <a:ea typeface="Courier New" pitchFamily="34" charset="-122"/>
                 <a:cs typeface="Courier New" pitchFamily="34" charset="-120"/>
               </a:rPr>
-              <a:t>~30 с</a:t>
+              <a:t>~5 с · probe</a:t>
             </a:r>
             <a:endParaRPr lang="en-US" sz="950" dirty="0"/>
           </a:p>
@@ -12917,7 +12917,7 @@
                 <a:ea typeface="Montserrat" pitchFamily="34" charset="-122"/>
                 <a:cs typeface="Montserrat" pitchFamily="34" charset="-120"/>
               </a:rPr>
-              <a:t>503, 429, 0 лежать у лозі поруч зі звичайними 200</a:t>
+              <a:t>503 і 429 лежать у лозі поруч зі звичайними 200</a:t>
             </a:r>
             <a:endParaRPr lang="en-US" sz="1150" dirty="0"/>
           </a:p>
@@ -17770,7 +17770,7 @@
                 <a:ea typeface="Montserrat" pitchFamily="34" charset="-122"/>
                 <a:cs typeface="Montserrat" pitchFamily="34" charset="-120"/>
               </a:rPr>
-              <a:t>що це довело · перевір себе · антипатерни тижня</a:t>
+              <a:t>що це довело · перевірте себе · антипатерни тижня</a:t>
             </a:r>
             <a:endParaRPr lang="en-US" sz="1500" dirty="0"/>
           </a:p>
@@ -19014,7 +19014,7 @@
                 <a:ea typeface="Unbounded" pitchFamily="34" charset="-122"/>
                 <a:cs typeface="Unbounded" pitchFamily="34" charset="-120"/>
               </a:rPr>
-              <a:t>Перевір себе</a:t>
+              <a:t>Перевірте себе</a:t>
             </a:r>
             <a:endParaRPr lang="en-US" sz="2400" dirty="0"/>
           </a:p>
@@ -21026,7 +21026,7 @@
                 <a:ea typeface="Montserrat" pitchFamily="34" charset="-122"/>
                 <a:cs typeface="Montserrat" pitchFamily="34" charset="-120"/>
               </a:rPr>
-              <a:t>• circuit breaker: 3 збої → open на 30 с, обов'язково з half-open (пробний запит раз на ~5 с) — інакше сам собі влаштуєш outage</a:t>
+              <a:t>• circuit breaker: 3 збої → open на 30 с, обов'язково з half-open (пробний запит раз на ~5 с) — інакше самі собі влаштуєте outage</a:t>
             </a:r>
             <a:endParaRPr lang="en-US" sz="1200" dirty="0"/>
           </a:p>
@@ -21468,7 +21468,7 @@
                 <a:ea typeface="Montserrat" pitchFamily="34" charset="-122"/>
                 <a:cs typeface="Montserrat" pitchFamily="34" charset="-120"/>
               </a:rPr>
-              <a:t>retry і fallback вирішують різні задачі; порядок — спершу fallback</a:t>
+              <a:t>retry і fallback вирішують різні задачі; у проді — короткий retry, потім fallback; у нас — одразу fallback</a:t>
             </a:r>
             <a:endParaRPr lang="en-US" sz="1500" dirty="0"/>
           </a:p>
@@ -26913,7 +26913,7 @@
                 <a:ea typeface="Montserrat" pitchFamily="34" charset="-122"/>
                 <a:cs typeface="Montserrat" pitchFamily="34" charset="-120"/>
               </a:rPr>
-              <a:t>Retry в коді курсу свідомо не будуємо: на mock «ще раз туди само» і «в інше місце» дають той самий результат. Порядок правильний — спершу fallback, і бюджет часу на все разом.</a:t>
+              <a:t>Retry в коді курсу свідомо не будуємо: на mock «ще раз туди само» і «в інше місце» дають той самий результат. У проді — короткий retry, потім fallback; у нас — одразу fallback, і бюджет часу на все разом.</a:t>
             </a:r>
             <a:endParaRPr lang="en-US" sz="1300" dirty="0"/>
           </a:p>
